--- a/docs/presentation/보험발표-figma.pptx
+++ b/docs/presentation/보험발표-figma.pptx
@@ -3141,7 +3141,7 @@
             <a:r>
               <a:rPr sz="1600" b="0" spc="80">
                 <a:solidFill>
-                  <a:srgbClr val="C5B0F4"/>
+                  <a:srgbClr val="CDBFF7"/>
                 </a:solidFill>
                 <a:latin typeface="Menlo"/>
               </a:rPr>
@@ -3272,7 +3272,7 @@
             <a:r>
               <a:rPr sz="1500" b="0" spc="60">
                 <a:solidFill>
-                  <a:srgbClr val="555555"/>
+                  <a:srgbClr val="5B5BD6"/>
                 </a:solidFill>
                 <a:latin typeface="Menlo"/>
               </a:rPr>
@@ -3307,7 +3307,7 @@
             <a:r>
               <a:rPr sz="4000" b="1" spc="-80">
                 <a:solidFill>
-                  <a:srgbClr val="000000"/>
+                  <a:srgbClr val="1A1A1A"/>
                 </a:solidFill>
                 <a:latin typeface="Apple SD Gothic Neo"/>
               </a:rPr>
@@ -3340,9 +3340,9 @@
           <a:p>
             <a:pPr algn="ctr"/>
             <a:r>
-              <a:rPr sz="1500" b="0" spc="50">
-                <a:solidFill>
-                  <a:srgbClr val="555555"/>
+              <a:rPr sz="1400" b="0" spc="50">
+                <a:solidFill>
+                  <a:srgbClr val="6B7280"/>
                 </a:solidFill>
                 <a:latin typeface="Menlo"/>
               </a:rPr>
@@ -3375,9 +3375,9 @@
           <a:p>
             <a:pPr algn="ctr"/>
             <a:r>
-              <a:rPr sz="1500" b="0" spc="50">
-                <a:solidFill>
-                  <a:srgbClr val="555555"/>
+              <a:rPr sz="1400" b="0" spc="50">
+                <a:solidFill>
+                  <a:srgbClr val="6B7280"/>
                 </a:solidFill>
                 <a:latin typeface="Menlo"/>
               </a:rPr>
@@ -3447,11 +3447,11 @@
           </a:xfrm>
           <a:prstGeom prst="roundRect">
             <a:avLst>
-              <a:gd name="adj" fmla="val 12000"/>
+              <a:gd name="adj" fmla="val 10000"/>
             </a:avLst>
           </a:prstGeom>
           <a:solidFill>
-            <a:srgbClr val="C8E6CD"/>
+            <a:srgbClr val="ECEBFB"/>
           </a:solidFill>
           <a:ln>
             <a:noFill/>
@@ -3480,7 +3480,7 @@
             <a:r>
               <a:rPr sz="1600" b="1">
                 <a:solidFill>
-                  <a:srgbClr val="000000"/>
+                  <a:srgbClr val="5B5BD6"/>
                 </a:solidFill>
                 <a:latin typeface="Apple SD Gothic Neo"/>
               </a:rPr>
@@ -3492,7 +3492,7 @@
             <a:r>
               <a:rPr sz="1500" b="0">
                 <a:solidFill>
-                  <a:srgbClr val="000000"/>
+                  <a:srgbClr val="1A1A1A"/>
                 </a:solidFill>
                 <a:latin typeface="Apple SD Gothic Neo"/>
               </a:rPr>
@@ -3514,11 +3514,11 @@
           </a:xfrm>
           <a:prstGeom prst="roundRect">
             <a:avLst>
-              <a:gd name="adj" fmla="val 12000"/>
+              <a:gd name="adj" fmla="val 10000"/>
             </a:avLst>
           </a:prstGeom>
           <a:solidFill>
-            <a:srgbClr val="EFD4D4"/>
+            <a:srgbClr val="F7EDE6"/>
           </a:solidFill>
           <a:ln>
             <a:noFill/>
@@ -3547,7 +3547,7 @@
             <a:r>
               <a:rPr sz="1600" b="1">
                 <a:solidFill>
-                  <a:srgbClr val="000000"/>
+                  <a:srgbClr val="B5793A"/>
                 </a:solidFill>
                 <a:latin typeface="Apple SD Gothic Neo"/>
               </a:rPr>
@@ -3559,7 +3559,7 @@
             <a:r>
               <a:rPr sz="1500" b="0">
                 <a:solidFill>
-                  <a:srgbClr val="000000"/>
+                  <a:srgbClr val="1A1A1A"/>
                 </a:solidFill>
                 <a:latin typeface="Apple SD Gothic Neo"/>
               </a:rPr>
@@ -3620,7 +3620,7 @@
             <a:r>
               <a:rPr sz="1500" b="0" spc="60">
                 <a:solidFill>
-                  <a:srgbClr val="555555"/>
+                  <a:srgbClr val="5B5BD6"/>
                 </a:solidFill>
                 <a:latin typeface="Menlo"/>
               </a:rPr>
@@ -3655,7 +3655,7 @@
             <a:r>
               <a:rPr sz="4000" b="1" spc="-80">
                 <a:solidFill>
-                  <a:srgbClr val="000000"/>
+                  <a:srgbClr val="1A1A1A"/>
                 </a:solidFill>
                 <a:latin typeface="Apple SD Gothic Neo"/>
               </a:rPr>
@@ -3688,9 +3688,9 @@
           <a:p>
             <a:pPr algn="ctr"/>
             <a:r>
-              <a:rPr sz="1500" b="0" spc="50">
-                <a:solidFill>
-                  <a:srgbClr val="555555"/>
+              <a:rPr sz="1400" b="0" spc="50">
+                <a:solidFill>
+                  <a:srgbClr val="6B7280"/>
                 </a:solidFill>
                 <a:latin typeface="Menlo"/>
               </a:rPr>
@@ -3723,9 +3723,9 @@
           <a:p>
             <a:pPr algn="ctr"/>
             <a:r>
-              <a:rPr sz="1500" b="0" spc="50">
-                <a:solidFill>
-                  <a:srgbClr val="555555"/>
+              <a:rPr sz="1400" b="0" spc="50">
+                <a:solidFill>
+                  <a:srgbClr val="6B7280"/>
                 </a:solidFill>
                 <a:latin typeface="Menlo"/>
               </a:rPr>
@@ -3795,11 +3795,11 @@
           </a:xfrm>
           <a:prstGeom prst="roundRect">
             <a:avLst>
-              <a:gd name="adj" fmla="val 12000"/>
+              <a:gd name="adj" fmla="val 10000"/>
             </a:avLst>
           </a:prstGeom>
           <a:solidFill>
-            <a:srgbClr val="C8E6CD"/>
+            <a:srgbClr val="ECEBFB"/>
           </a:solidFill>
           <a:ln>
             <a:noFill/>
@@ -3828,7 +3828,7 @@
             <a:r>
               <a:rPr sz="1600" b="1">
                 <a:solidFill>
-                  <a:srgbClr val="000000"/>
+                  <a:srgbClr val="5B5BD6"/>
                 </a:solidFill>
                 <a:latin typeface="Apple SD Gothic Neo"/>
               </a:rPr>
@@ -3840,7 +3840,7 @@
             <a:r>
               <a:rPr sz="1500" b="0">
                 <a:solidFill>
-                  <a:srgbClr val="000000"/>
+                  <a:srgbClr val="1A1A1A"/>
                 </a:solidFill>
                 <a:latin typeface="Apple SD Gothic Neo"/>
               </a:rPr>
@@ -3862,11 +3862,11 @@
           </a:xfrm>
           <a:prstGeom prst="roundRect">
             <a:avLst>
-              <a:gd name="adj" fmla="val 12000"/>
+              <a:gd name="adj" fmla="val 10000"/>
             </a:avLst>
           </a:prstGeom>
           <a:solidFill>
-            <a:srgbClr val="EFD4D4"/>
+            <a:srgbClr val="F7EDE6"/>
           </a:solidFill>
           <a:ln>
             <a:noFill/>
@@ -3895,7 +3895,7 @@
             <a:r>
               <a:rPr sz="1600" b="1">
                 <a:solidFill>
-                  <a:srgbClr val="000000"/>
+                  <a:srgbClr val="B5793A"/>
                 </a:solidFill>
                 <a:latin typeface="Apple SD Gothic Neo"/>
               </a:rPr>
@@ -3907,7 +3907,7 @@
             <a:r>
               <a:rPr sz="1500" b="0">
                 <a:solidFill>
-                  <a:srgbClr val="000000"/>
+                  <a:srgbClr val="1A1A1A"/>
                 </a:solidFill>
                 <a:latin typeface="Apple SD Gothic Neo"/>
               </a:rPr>
@@ -3968,7 +3968,7 @@
             <a:r>
               <a:rPr sz="1500" b="0" spc="60">
                 <a:solidFill>
-                  <a:srgbClr val="555555"/>
+                  <a:srgbClr val="5B5BD6"/>
                 </a:solidFill>
                 <a:latin typeface="Menlo"/>
               </a:rPr>
@@ -4003,7 +4003,7 @@
             <a:r>
               <a:rPr sz="4000" b="1" spc="-80">
                 <a:solidFill>
-                  <a:srgbClr val="000000"/>
+                  <a:srgbClr val="1A1A1A"/>
                 </a:solidFill>
                 <a:latin typeface="Apple SD Gothic Neo"/>
               </a:rPr>
@@ -4036,9 +4036,9 @@
           <a:p>
             <a:pPr algn="ctr"/>
             <a:r>
-              <a:rPr sz="1500" b="0" spc="50">
-                <a:solidFill>
-                  <a:srgbClr val="555555"/>
+              <a:rPr sz="1400" b="0" spc="50">
+                <a:solidFill>
+                  <a:srgbClr val="6B7280"/>
                 </a:solidFill>
                 <a:latin typeface="Menlo"/>
               </a:rPr>
@@ -4071,9 +4071,9 @@
           <a:p>
             <a:pPr algn="ctr"/>
             <a:r>
-              <a:rPr sz="1500" b="0" spc="50">
-                <a:solidFill>
-                  <a:srgbClr val="555555"/>
+              <a:rPr sz="1400" b="0" spc="50">
+                <a:solidFill>
+                  <a:srgbClr val="6B7280"/>
                 </a:solidFill>
                 <a:latin typeface="Menlo"/>
               </a:rPr>
@@ -4143,11 +4143,11 @@
           </a:xfrm>
           <a:prstGeom prst="roundRect">
             <a:avLst>
-              <a:gd name="adj" fmla="val 12000"/>
+              <a:gd name="adj" fmla="val 10000"/>
             </a:avLst>
           </a:prstGeom>
           <a:solidFill>
-            <a:srgbClr val="C8E6CD"/>
+            <a:srgbClr val="ECEBFB"/>
           </a:solidFill>
           <a:ln>
             <a:noFill/>
@@ -4176,7 +4176,7 @@
             <a:r>
               <a:rPr sz="1600" b="1">
                 <a:solidFill>
-                  <a:srgbClr val="000000"/>
+                  <a:srgbClr val="5B5BD6"/>
                 </a:solidFill>
                 <a:latin typeface="Apple SD Gothic Neo"/>
               </a:rPr>
@@ -4188,7 +4188,7 @@
             <a:r>
               <a:rPr sz="1500" b="0">
                 <a:solidFill>
-                  <a:srgbClr val="000000"/>
+                  <a:srgbClr val="1A1A1A"/>
                 </a:solidFill>
                 <a:latin typeface="Apple SD Gothic Neo"/>
               </a:rPr>
@@ -4210,11 +4210,11 @@
           </a:xfrm>
           <a:prstGeom prst="roundRect">
             <a:avLst>
-              <a:gd name="adj" fmla="val 12000"/>
+              <a:gd name="adj" fmla="val 10000"/>
             </a:avLst>
           </a:prstGeom>
           <a:solidFill>
-            <a:srgbClr val="EFD4D4"/>
+            <a:srgbClr val="F7EDE6"/>
           </a:solidFill>
           <a:ln>
             <a:noFill/>
@@ -4243,7 +4243,7 @@
             <a:r>
               <a:rPr sz="1600" b="1">
                 <a:solidFill>
-                  <a:srgbClr val="000000"/>
+                  <a:srgbClr val="B5793A"/>
                 </a:solidFill>
                 <a:latin typeface="Apple SD Gothic Neo"/>
               </a:rPr>
@@ -4255,7 +4255,7 @@
             <a:r>
               <a:rPr sz="1500" b="0">
                 <a:solidFill>
-                  <a:srgbClr val="000000"/>
+                  <a:srgbClr val="1A1A1A"/>
                 </a:solidFill>
                 <a:latin typeface="Apple SD Gothic Neo"/>
               </a:rPr>
@@ -4316,7 +4316,7 @@
             <a:r>
               <a:rPr sz="1500" b="0" spc="60">
                 <a:solidFill>
-                  <a:srgbClr val="555555"/>
+                  <a:srgbClr val="5B5BD6"/>
                 </a:solidFill>
                 <a:latin typeface="Menlo"/>
               </a:rPr>
@@ -4351,7 +4351,7 @@
             <a:r>
               <a:rPr sz="4000" b="1" spc="-80">
                 <a:solidFill>
-                  <a:srgbClr val="000000"/>
+                  <a:srgbClr val="1A1A1A"/>
                 </a:solidFill>
                 <a:latin typeface="Apple SD Gothic Neo"/>
               </a:rPr>
@@ -4384,9 +4384,9 @@
           <a:p>
             <a:pPr algn="ctr"/>
             <a:r>
-              <a:rPr sz="1500" b="0" spc="50">
-                <a:solidFill>
-                  <a:srgbClr val="555555"/>
+              <a:rPr sz="1400" b="0" spc="50">
+                <a:solidFill>
+                  <a:srgbClr val="6B7280"/>
                 </a:solidFill>
                 <a:latin typeface="Menlo"/>
               </a:rPr>
@@ -4419,9 +4419,9 @@
           <a:p>
             <a:pPr algn="ctr"/>
             <a:r>
-              <a:rPr sz="1500" b="0" spc="50">
-                <a:solidFill>
-                  <a:srgbClr val="555555"/>
+              <a:rPr sz="1400" b="0" spc="50">
+                <a:solidFill>
+                  <a:srgbClr val="6B7280"/>
                 </a:solidFill>
                 <a:latin typeface="Menlo"/>
               </a:rPr>
@@ -4491,11 +4491,11 @@
           </a:xfrm>
           <a:prstGeom prst="roundRect">
             <a:avLst>
-              <a:gd name="adj" fmla="val 12000"/>
+              <a:gd name="adj" fmla="val 10000"/>
             </a:avLst>
           </a:prstGeom>
           <a:solidFill>
-            <a:srgbClr val="C8E6CD"/>
+            <a:srgbClr val="ECEBFB"/>
           </a:solidFill>
           <a:ln>
             <a:noFill/>
@@ -4524,7 +4524,7 @@
             <a:r>
               <a:rPr sz="1600" b="1">
                 <a:solidFill>
-                  <a:srgbClr val="000000"/>
+                  <a:srgbClr val="5B5BD6"/>
                 </a:solidFill>
                 <a:latin typeface="Apple SD Gothic Neo"/>
               </a:rPr>
@@ -4536,7 +4536,7 @@
             <a:r>
               <a:rPr sz="1500" b="0">
                 <a:solidFill>
-                  <a:srgbClr val="000000"/>
+                  <a:srgbClr val="1A1A1A"/>
                 </a:solidFill>
                 <a:latin typeface="Apple SD Gothic Neo"/>
               </a:rPr>
@@ -4558,11 +4558,11 @@
           </a:xfrm>
           <a:prstGeom prst="roundRect">
             <a:avLst>
-              <a:gd name="adj" fmla="val 12000"/>
+              <a:gd name="adj" fmla="val 10000"/>
             </a:avLst>
           </a:prstGeom>
           <a:solidFill>
-            <a:srgbClr val="EFD4D4"/>
+            <a:srgbClr val="F7EDE6"/>
           </a:solidFill>
           <a:ln>
             <a:noFill/>
@@ -4591,7 +4591,7 @@
             <a:r>
               <a:rPr sz="1600" b="1">
                 <a:solidFill>
-                  <a:srgbClr val="000000"/>
+                  <a:srgbClr val="B5793A"/>
                 </a:solidFill>
                 <a:latin typeface="Apple SD Gothic Neo"/>
               </a:rPr>
@@ -4603,7 +4603,7 @@
             <a:r>
               <a:rPr sz="1500" b="0">
                 <a:solidFill>
-                  <a:srgbClr val="000000"/>
+                  <a:srgbClr val="1A1A1A"/>
                 </a:solidFill>
                 <a:latin typeface="Apple SD Gothic Neo"/>
               </a:rPr>
@@ -4664,7 +4664,7 @@
             <a:r>
               <a:rPr sz="1500" b="0" spc="60">
                 <a:solidFill>
-                  <a:srgbClr val="555555"/>
+                  <a:srgbClr val="5B5BD6"/>
                 </a:solidFill>
                 <a:latin typeface="Menlo"/>
               </a:rPr>
@@ -4699,7 +4699,7 @@
             <a:r>
               <a:rPr sz="4000" b="1" spc="-80">
                 <a:solidFill>
-                  <a:srgbClr val="000000"/>
+                  <a:srgbClr val="1A1A1A"/>
                 </a:solidFill>
                 <a:latin typeface="Apple SD Gothic Neo"/>
               </a:rPr>
@@ -4721,11 +4721,11 @@
           </a:xfrm>
           <a:prstGeom prst="roundRect">
             <a:avLst>
-              <a:gd name="adj" fmla="val 6000"/>
+              <a:gd name="adj" fmla="val 4000"/>
             </a:avLst>
           </a:prstGeom>
           <a:solidFill>
-            <a:srgbClr val="F7F7F5"/>
+            <a:srgbClr val="F4F4F6"/>
           </a:solidFill>
           <a:ln>
             <a:noFill/>
@@ -4780,7 +4780,7 @@
             <a:r>
               <a:rPr sz="1800" b="0">
                 <a:solidFill>
-                  <a:srgbClr val="000000"/>
+                  <a:srgbClr val="1A1A1A"/>
                 </a:solidFill>
                 <a:latin typeface="Menlo"/>
               </a:rPr>
@@ -4792,7 +4792,7 @@
             <a:r>
               <a:rPr sz="1800" b="0">
                 <a:solidFill>
-                  <a:srgbClr val="000000"/>
+                  <a:srgbClr val="1A1A1A"/>
                 </a:solidFill>
                 <a:latin typeface="Menlo"/>
               </a:rPr>
@@ -4804,7 +4804,7 @@
             <a:r>
               <a:rPr sz="1800" b="0">
                 <a:solidFill>
-                  <a:srgbClr val="000000"/>
+                  <a:srgbClr val="1A1A1A"/>
                 </a:solidFill>
                 <a:latin typeface="Menlo"/>
               </a:rPr>
@@ -4816,7 +4816,7 @@
             <a:r>
               <a:rPr sz="1800" b="0">
                 <a:solidFill>
-                  <a:srgbClr val="000000"/>
+                  <a:srgbClr val="1A1A1A"/>
                 </a:solidFill>
                 <a:latin typeface="Menlo"/>
               </a:rPr>
@@ -4851,7 +4851,7 @@
             <a:r>
               <a:rPr sz="2200" b="1" spc="-30">
                 <a:solidFill>
-                  <a:srgbClr val="000000"/>
+                  <a:srgbClr val="1A1A1A"/>
                 </a:solidFill>
                 <a:latin typeface="Apple SD Gothic Neo"/>
               </a:rPr>
@@ -4912,7 +4912,7 @@
             <a:r>
               <a:rPr sz="1500" b="0" spc="60">
                 <a:solidFill>
-                  <a:srgbClr val="555555"/>
+                  <a:srgbClr val="5B5BD6"/>
                 </a:solidFill>
                 <a:latin typeface="Menlo"/>
               </a:rPr>
@@ -4947,7 +4947,7 @@
             <a:r>
               <a:rPr sz="4000" b="1" spc="-80">
                 <a:solidFill>
-                  <a:srgbClr val="000000"/>
+                  <a:srgbClr val="1A1A1A"/>
                 </a:solidFill>
                 <a:latin typeface="Apple SD Gothic Neo"/>
               </a:rPr>
@@ -4980,9 +4980,9 @@
           <a:p>
             <a:pPr algn="ctr"/>
             <a:r>
-              <a:rPr sz="1500" b="0" spc="50">
-                <a:solidFill>
-                  <a:srgbClr val="555555"/>
+              <a:rPr sz="1400" b="0" spc="50">
+                <a:solidFill>
+                  <a:srgbClr val="6B7280"/>
                 </a:solidFill>
                 <a:latin typeface="Menlo"/>
               </a:rPr>
@@ -5015,9 +5015,9 @@
           <a:p>
             <a:pPr algn="ctr"/>
             <a:r>
-              <a:rPr sz="1500" b="0" spc="50">
-                <a:solidFill>
-                  <a:srgbClr val="555555"/>
+              <a:rPr sz="1400" b="0" spc="50">
+                <a:solidFill>
+                  <a:srgbClr val="6B7280"/>
                 </a:solidFill>
                 <a:latin typeface="Menlo"/>
               </a:rPr>
@@ -5087,11 +5087,11 @@
           </a:xfrm>
           <a:prstGeom prst="roundRect">
             <a:avLst>
-              <a:gd name="adj" fmla="val 12000"/>
+              <a:gd name="adj" fmla="val 10000"/>
             </a:avLst>
           </a:prstGeom>
           <a:solidFill>
-            <a:srgbClr val="C8E6CD"/>
+            <a:srgbClr val="ECEBFB"/>
           </a:solidFill>
           <a:ln>
             <a:noFill/>
@@ -5120,7 +5120,7 @@
             <a:r>
               <a:rPr sz="1600" b="1">
                 <a:solidFill>
-                  <a:srgbClr val="000000"/>
+                  <a:srgbClr val="5B5BD6"/>
                 </a:solidFill>
                 <a:latin typeface="Apple SD Gothic Neo"/>
               </a:rPr>
@@ -5132,7 +5132,7 @@
             <a:r>
               <a:rPr sz="1500" b="0">
                 <a:solidFill>
-                  <a:srgbClr val="000000"/>
+                  <a:srgbClr val="1A1A1A"/>
                 </a:solidFill>
                 <a:latin typeface="Apple SD Gothic Neo"/>
               </a:rPr>
@@ -5154,11 +5154,11 @@
           </a:xfrm>
           <a:prstGeom prst="roundRect">
             <a:avLst>
-              <a:gd name="adj" fmla="val 12000"/>
+              <a:gd name="adj" fmla="val 10000"/>
             </a:avLst>
           </a:prstGeom>
           <a:solidFill>
-            <a:srgbClr val="EFD4D4"/>
+            <a:srgbClr val="F7EDE6"/>
           </a:solidFill>
           <a:ln>
             <a:noFill/>
@@ -5187,7 +5187,7 @@
             <a:r>
               <a:rPr sz="1600" b="1">
                 <a:solidFill>
-                  <a:srgbClr val="000000"/>
+                  <a:srgbClr val="B5793A"/>
                 </a:solidFill>
                 <a:latin typeface="Apple SD Gothic Neo"/>
               </a:rPr>
@@ -5199,7 +5199,7 @@
             <a:r>
               <a:rPr sz="1500" b="0">
                 <a:solidFill>
-                  <a:srgbClr val="000000"/>
+                  <a:srgbClr val="1A1A1A"/>
                 </a:solidFill>
                 <a:latin typeface="Apple SD Gothic Neo"/>
               </a:rPr>
@@ -5260,7 +5260,7 @@
             <a:r>
               <a:rPr sz="1500" b="0" spc="60">
                 <a:solidFill>
-                  <a:srgbClr val="555555"/>
+                  <a:srgbClr val="5B5BD6"/>
                 </a:solidFill>
                 <a:latin typeface="Menlo"/>
               </a:rPr>
@@ -5295,7 +5295,7 @@
             <a:r>
               <a:rPr sz="4000" b="1" spc="-80">
                 <a:solidFill>
-                  <a:srgbClr val="000000"/>
+                  <a:srgbClr val="1A1A1A"/>
                 </a:solidFill>
                 <a:latin typeface="Apple SD Gothic Neo"/>
               </a:rPr>
@@ -5328,9 +5328,9 @@
           <a:p>
             <a:pPr algn="ctr"/>
             <a:r>
-              <a:rPr sz="1500" b="0" spc="50">
-                <a:solidFill>
-                  <a:srgbClr val="555555"/>
+              <a:rPr sz="1400" b="0" spc="50">
+                <a:solidFill>
+                  <a:srgbClr val="6B7280"/>
                 </a:solidFill>
                 <a:latin typeface="Menlo"/>
               </a:rPr>
@@ -5363,9 +5363,9 @@
           <a:p>
             <a:pPr algn="ctr"/>
             <a:r>
-              <a:rPr sz="1500" b="0" spc="50">
-                <a:solidFill>
-                  <a:srgbClr val="555555"/>
+              <a:rPr sz="1400" b="0" spc="50">
+                <a:solidFill>
+                  <a:srgbClr val="6B7280"/>
                 </a:solidFill>
                 <a:latin typeface="Menlo"/>
               </a:rPr>
@@ -5435,11 +5435,11 @@
           </a:xfrm>
           <a:prstGeom prst="roundRect">
             <a:avLst>
-              <a:gd name="adj" fmla="val 12000"/>
+              <a:gd name="adj" fmla="val 10000"/>
             </a:avLst>
           </a:prstGeom>
           <a:solidFill>
-            <a:srgbClr val="C8E6CD"/>
+            <a:srgbClr val="ECEBFB"/>
           </a:solidFill>
           <a:ln>
             <a:noFill/>
@@ -5468,7 +5468,7 @@
             <a:r>
               <a:rPr sz="1600" b="1">
                 <a:solidFill>
-                  <a:srgbClr val="000000"/>
+                  <a:srgbClr val="5B5BD6"/>
                 </a:solidFill>
                 <a:latin typeface="Apple SD Gothic Neo"/>
               </a:rPr>
@@ -5480,7 +5480,7 @@
             <a:r>
               <a:rPr sz="1500" b="0">
                 <a:solidFill>
-                  <a:srgbClr val="000000"/>
+                  <a:srgbClr val="1A1A1A"/>
                 </a:solidFill>
                 <a:latin typeface="Apple SD Gothic Neo"/>
               </a:rPr>
@@ -5502,11 +5502,11 @@
           </a:xfrm>
           <a:prstGeom prst="roundRect">
             <a:avLst>
-              <a:gd name="adj" fmla="val 12000"/>
+              <a:gd name="adj" fmla="val 10000"/>
             </a:avLst>
           </a:prstGeom>
           <a:solidFill>
-            <a:srgbClr val="EFD4D4"/>
+            <a:srgbClr val="F7EDE6"/>
           </a:solidFill>
           <a:ln>
             <a:noFill/>
@@ -5535,7 +5535,7 @@
             <a:r>
               <a:rPr sz="1600" b="1">
                 <a:solidFill>
-                  <a:srgbClr val="000000"/>
+                  <a:srgbClr val="B5793A"/>
                 </a:solidFill>
                 <a:latin typeface="Apple SD Gothic Neo"/>
               </a:rPr>
@@ -5547,7 +5547,7 @@
             <a:r>
               <a:rPr sz="1500" b="0">
                 <a:solidFill>
-                  <a:srgbClr val="000000"/>
+                  <a:srgbClr val="1A1A1A"/>
                 </a:solidFill>
                 <a:latin typeface="Apple SD Gothic Neo"/>
               </a:rPr>
@@ -5608,7 +5608,7 @@
             <a:r>
               <a:rPr sz="1500" b="0" spc="60">
                 <a:solidFill>
-                  <a:srgbClr val="555555"/>
+                  <a:srgbClr val="5B5BD6"/>
                 </a:solidFill>
                 <a:latin typeface="Menlo"/>
               </a:rPr>
@@ -5643,7 +5643,7 @@
             <a:r>
               <a:rPr sz="4000" b="1" spc="-80">
                 <a:solidFill>
-                  <a:srgbClr val="000000"/>
+                  <a:srgbClr val="1A1A1A"/>
                 </a:solidFill>
                 <a:latin typeface="Apple SD Gothic Neo"/>
               </a:rPr>
@@ -5702,7 +5702,7 @@
             <a:r>
               <a:rPr sz="2200" b="1" spc="-30">
                 <a:solidFill>
-                  <a:srgbClr val="000000"/>
+                  <a:srgbClr val="1A1A1A"/>
                 </a:solidFill>
                 <a:latin typeface="Apple SD Gothic Neo"/>
               </a:rPr>
@@ -5763,7 +5763,7 @@
             <a:r>
               <a:rPr sz="1500" b="0" spc="60">
                 <a:solidFill>
-                  <a:srgbClr val="555555"/>
+                  <a:srgbClr val="5B5BD6"/>
                 </a:solidFill>
                 <a:latin typeface="Menlo"/>
               </a:rPr>
@@ -5798,7 +5798,7 @@
             <a:r>
               <a:rPr sz="4000" b="1" spc="-80">
                 <a:solidFill>
-                  <a:srgbClr val="000000"/>
+                  <a:srgbClr val="1A1A1A"/>
                 </a:solidFill>
                 <a:latin typeface="Apple SD Gothic Neo"/>
               </a:rPr>
@@ -5820,11 +5820,11 @@
           </a:xfrm>
           <a:prstGeom prst="roundRect">
             <a:avLst>
-              <a:gd name="adj" fmla="val 14000"/>
+              <a:gd name="adj" fmla="val 12000"/>
             </a:avLst>
           </a:prstGeom>
           <a:solidFill>
-            <a:srgbClr val="C8E6CD"/>
+            <a:srgbClr val="ECEBFB"/>
           </a:solidFill>
           <a:ln>
             <a:noFill/>
@@ -5879,7 +5879,7 @@
             <a:r>
               <a:rPr sz="2200" b="1">
                 <a:solidFill>
-                  <a:srgbClr val="000000"/>
+                  <a:srgbClr val="5B5BD6"/>
                 </a:solidFill>
                 <a:latin typeface="Apple SD Gothic Neo"/>
               </a:rPr>
@@ -5891,7 +5891,7 @@
             <a:r>
               <a:rPr sz="1800" b="0">
                 <a:solidFill>
-                  <a:srgbClr val="000000"/>
+                  <a:srgbClr val="1A1A1A"/>
                 </a:solidFill>
                 <a:latin typeface="Apple SD Gothic Neo"/>
               </a:rPr>
@@ -5913,14 +5913,16 @@
           </a:xfrm>
           <a:prstGeom prst="roundRect">
             <a:avLst>
-              <a:gd name="adj" fmla="val 14000"/>
+              <a:gd name="adj" fmla="val 12000"/>
             </a:avLst>
           </a:prstGeom>
           <a:solidFill>
-            <a:srgbClr val="C5B0F4"/>
+            <a:srgbClr val="F4F4F6"/>
           </a:solidFill>
-          <a:ln>
-            <a:noFill/>
+          <a:ln w="12700">
+            <a:solidFill>
+              <a:srgbClr val="E6E6E6"/>
+            </a:solidFill>
           </a:ln>
           <a:effectLst/>
         </p:spPr>
@@ -5972,7 +5974,7 @@
             <a:r>
               <a:rPr sz="2200" b="1">
                 <a:solidFill>
-                  <a:srgbClr val="000000"/>
+                  <a:srgbClr val="1A1A1A"/>
                 </a:solidFill>
                 <a:latin typeface="Apple SD Gothic Neo"/>
               </a:rPr>
@@ -5984,7 +5986,7 @@
             <a:r>
               <a:rPr sz="1800" b="0">
                 <a:solidFill>
-                  <a:srgbClr val="000000"/>
+                  <a:srgbClr val="1A1A1A"/>
                 </a:solidFill>
                 <a:latin typeface="Apple SD Gothic Neo"/>
               </a:rPr>
@@ -6006,14 +6008,16 @@
           </a:xfrm>
           <a:prstGeom prst="roundRect">
             <a:avLst>
-              <a:gd name="adj" fmla="val 18000"/>
+              <a:gd name="adj" fmla="val 16000"/>
             </a:avLst>
           </a:prstGeom>
           <a:solidFill>
-            <a:srgbClr val="F4ECD6"/>
+            <a:srgbClr val="F4F4F6"/>
           </a:solidFill>
-          <a:ln>
-            <a:noFill/>
+          <a:ln w="15240">
+            <a:solidFill>
+              <a:srgbClr val="E6E6E6"/>
+            </a:solidFill>
           </a:ln>
           <a:effectLst/>
         </p:spPr>
@@ -6039,7 +6043,7 @@
             <a:r>
               <a:rPr sz="2000" b="1">
                 <a:solidFill>
-                  <a:srgbClr val="000000"/>
+                  <a:srgbClr val="1A1A1A"/>
                 </a:solidFill>
                 <a:latin typeface="Apple SD Gothic Neo"/>
               </a:rPr>
@@ -6074,7 +6078,7 @@
             <a:r>
               <a:rPr sz="2600" b="1">
                 <a:solidFill>
-                  <a:srgbClr val="000000"/>
+                  <a:srgbClr val="5B5BD6"/>
                 </a:solidFill>
                 <a:latin typeface="Apple SD Gothic Neo"/>
               </a:rPr>
@@ -6096,14 +6100,16 @@
           </a:xfrm>
           <a:prstGeom prst="roundRect">
             <a:avLst>
-              <a:gd name="adj" fmla="val 18000"/>
+              <a:gd name="adj" fmla="val 16000"/>
             </a:avLst>
           </a:prstGeom>
           <a:solidFill>
-            <a:srgbClr val="F4ECD6"/>
+            <a:srgbClr val="F4F4F6"/>
           </a:solidFill>
-          <a:ln>
-            <a:noFill/>
+          <a:ln w="15240">
+            <a:solidFill>
+              <a:srgbClr val="E6E6E6"/>
+            </a:solidFill>
           </a:ln>
           <a:effectLst/>
         </p:spPr>
@@ -6129,7 +6135,7 @@
             <a:r>
               <a:rPr sz="2000" b="1">
                 <a:solidFill>
-                  <a:srgbClr val="000000"/>
+                  <a:srgbClr val="1A1A1A"/>
                 </a:solidFill>
                 <a:latin typeface="Apple SD Gothic Neo"/>
               </a:rPr>
@@ -6164,7 +6170,7 @@
             <a:r>
               <a:rPr sz="2600" b="1">
                 <a:solidFill>
-                  <a:srgbClr val="000000"/>
+                  <a:srgbClr val="5B5BD6"/>
                 </a:solidFill>
                 <a:latin typeface="Apple SD Gothic Neo"/>
               </a:rPr>
@@ -6186,14 +6192,16 @@
           </a:xfrm>
           <a:prstGeom prst="roundRect">
             <a:avLst>
-              <a:gd name="adj" fmla="val 18000"/>
+              <a:gd name="adj" fmla="val 16000"/>
             </a:avLst>
           </a:prstGeom>
           <a:solidFill>
-            <a:srgbClr val="F4ECD6"/>
+            <a:srgbClr val="F4F4F6"/>
           </a:solidFill>
-          <a:ln>
-            <a:noFill/>
+          <a:ln w="15240">
+            <a:solidFill>
+              <a:srgbClr val="E6E6E6"/>
+            </a:solidFill>
           </a:ln>
           <a:effectLst/>
         </p:spPr>
@@ -6219,7 +6227,7 @@
             <a:r>
               <a:rPr sz="2000" b="1">
                 <a:solidFill>
-                  <a:srgbClr val="000000"/>
+                  <a:srgbClr val="1A1A1A"/>
                 </a:solidFill>
                 <a:latin typeface="Apple SD Gothic Neo"/>
               </a:rPr>
@@ -6254,7 +6262,7 @@
             <a:r>
               <a:rPr sz="2600" b="1">
                 <a:solidFill>
-                  <a:srgbClr val="000000"/>
+                  <a:srgbClr val="5B5BD6"/>
                 </a:solidFill>
                 <a:latin typeface="Apple SD Gothic Neo"/>
               </a:rPr>
@@ -6276,14 +6284,16 @@
           </a:xfrm>
           <a:prstGeom prst="roundRect">
             <a:avLst>
-              <a:gd name="adj" fmla="val 18000"/>
+              <a:gd name="adj" fmla="val 16000"/>
             </a:avLst>
           </a:prstGeom>
           <a:solidFill>
-            <a:srgbClr val="F3C9B6"/>
+            <a:srgbClr val="ECEBFB"/>
           </a:solidFill>
-          <a:ln>
-            <a:noFill/>
+          <a:ln w="15240">
+            <a:solidFill>
+              <a:srgbClr val="E6E6E6"/>
+            </a:solidFill>
           </a:ln>
           <a:effectLst/>
         </p:spPr>
@@ -6309,7 +6319,7 @@
             <a:r>
               <a:rPr sz="2000" b="1">
                 <a:solidFill>
-                  <a:srgbClr val="000000"/>
+                  <a:srgbClr val="1A1A1A"/>
                 </a:solidFill>
                 <a:latin typeface="Apple SD Gothic Neo"/>
               </a:rPr>
@@ -6344,7 +6354,7 @@
             <a:r>
               <a:rPr sz="2600" b="1">
                 <a:solidFill>
-                  <a:srgbClr val="000000"/>
+                  <a:srgbClr val="5B5BD6"/>
                 </a:solidFill>
                 <a:latin typeface="Apple SD Gothic Neo"/>
               </a:rPr>
@@ -6366,14 +6376,16 @@
           </a:xfrm>
           <a:prstGeom prst="roundRect">
             <a:avLst>
-              <a:gd name="adj" fmla="val 18000"/>
+              <a:gd name="adj" fmla="val 16000"/>
             </a:avLst>
           </a:prstGeom>
           <a:solidFill>
-            <a:srgbClr val="F4ECD6"/>
+            <a:srgbClr val="F4F4F6"/>
           </a:solidFill>
-          <a:ln>
-            <a:noFill/>
+          <a:ln w="15240">
+            <a:solidFill>
+              <a:srgbClr val="E6E6E6"/>
+            </a:solidFill>
           </a:ln>
           <a:effectLst/>
         </p:spPr>
@@ -6399,7 +6411,7 @@
             <a:r>
               <a:rPr sz="2000" b="1">
                 <a:solidFill>
-                  <a:srgbClr val="000000"/>
+                  <a:srgbClr val="1A1A1A"/>
                 </a:solidFill>
                 <a:latin typeface="Apple SD Gothic Neo"/>
               </a:rPr>
@@ -6434,7 +6446,7 @@
             <a:r>
               <a:rPr sz="2200" b="1" spc="-30">
                 <a:solidFill>
-                  <a:srgbClr val="000000"/>
+                  <a:srgbClr val="1A1A1A"/>
                 </a:solidFill>
                 <a:latin typeface="Apple SD Gothic Neo"/>
               </a:rPr>
@@ -6495,7 +6507,7 @@
             <a:r>
               <a:rPr sz="1500" b="0" spc="60">
                 <a:solidFill>
-                  <a:srgbClr val="555555"/>
+                  <a:srgbClr val="5B5BD6"/>
                 </a:solidFill>
                 <a:latin typeface="Menlo"/>
               </a:rPr>
@@ -6530,7 +6542,7 @@
             <a:r>
               <a:rPr sz="4000" b="1" spc="-80">
                 <a:solidFill>
-                  <a:srgbClr val="000000"/>
+                  <a:srgbClr val="1A1A1A"/>
                 </a:solidFill>
                 <a:latin typeface="Apple SD Gothic Neo"/>
               </a:rPr>
@@ -6552,11 +6564,57 @@
           </a:xfrm>
           <a:prstGeom prst="roundRect">
             <a:avLst>
-              <a:gd name="adj" fmla="val 12000"/>
+              <a:gd name="adj" fmla="val 10000"/>
             </a:avLst>
           </a:prstGeom>
           <a:solidFill>
-            <a:srgbClr val="DCEEB1"/>
+            <a:srgbClr val="F4F4F6"/>
+          </a:solidFill>
+          <a:ln w="12700">
+            <a:solidFill>
+              <a:srgbClr val="E6E6E6"/>
+            </a:solidFill>
+          </a:ln>
+          <a:effectLst/>
+        </p:spPr>
+        <p:style>
+          <a:lnRef idx="1">
+            <a:schemeClr val="accent1"/>
+          </a:lnRef>
+          <a:fillRef idx="3">
+            <a:schemeClr val="accent1"/>
+          </a:fillRef>
+          <a:effectRef idx="2">
+            <a:schemeClr val="accent1"/>
+          </a:effectRef>
+          <a:fontRef idx="minor">
+            <a:schemeClr val="lt1"/>
+          </a:fontRef>
+        </p:style>
+        <p:txBody>
+          <a:bodyPr rtlCol="0" anchor="ctr"/>
+          <a:lstStyle/>
+          <a:p>
+            <a:pPr algn="ctr"/>
+          </a:p>
+        </p:txBody>
+      </p:sp>
+      <p:sp>
+        <p:nvSpPr>
+          <p:cNvPr id="5" name="Rectangle 4"/>
+          <p:cNvSpPr/>
+          <p:nvPr/>
+        </p:nvSpPr>
+        <p:spPr>
+          <a:xfrm>
+            <a:off x="777240" y="2148840"/>
+            <a:ext cx="91440" cy="1097280"/>
+          </a:xfrm>
+          <a:prstGeom prst="rect">
+            <a:avLst/>
+          </a:prstGeom>
+          <a:solidFill>
+            <a:srgbClr val="5B5BD6"/>
           </a:solidFill>
           <a:ln>
             <a:noFill/>
@@ -6587,13 +6645,13 @@
       </p:sp>
       <p:sp>
         <p:nvSpPr>
-          <p:cNvPr id="5" name="TextBox 4"/>
+          <p:cNvPr id="6" name="TextBox 5"/>
           <p:cNvSpPr txBox="1"/>
           <p:nvPr/>
         </p:nvSpPr>
         <p:spPr>
           <a:xfrm>
-            <a:off x="1143000" y="2148840"/>
+            <a:off x="1188720" y="2148840"/>
             <a:ext cx="4572000" cy="1188720"/>
           </a:xfrm>
           <a:prstGeom prst="rect">
@@ -6611,7 +6669,7 @@
             <a:r>
               <a:rPr sz="2200" b="1" spc="-30">
                 <a:solidFill>
-                  <a:srgbClr val="000000"/>
+                  <a:srgbClr val="1A1A1A"/>
                 </a:solidFill>
                 <a:latin typeface="Apple SD Gothic Neo"/>
               </a:rPr>
@@ -6623,7 +6681,7 @@
             <a:r>
               <a:rPr sz="1800" b="0" spc="-30">
                 <a:solidFill>
-                  <a:srgbClr val="000000"/>
+                  <a:srgbClr val="6B7280"/>
                 </a:solidFill>
                 <a:latin typeface="Apple SD Gothic Neo"/>
               </a:rPr>
@@ -6634,7 +6692,7 @@
       </p:sp>
       <p:sp>
         <p:nvSpPr>
-          <p:cNvPr id="6" name="Rounded Rectangle 5"/>
+          <p:cNvPr id="7" name="Rounded Rectangle 6"/>
           <p:cNvSpPr/>
           <p:nvPr/>
         </p:nvSpPr>
@@ -6645,11 +6703,57 @@
           </a:xfrm>
           <a:prstGeom prst="roundRect">
             <a:avLst>
-              <a:gd name="adj" fmla="val 12000"/>
+              <a:gd name="adj" fmla="val 10000"/>
             </a:avLst>
           </a:prstGeom>
           <a:solidFill>
-            <a:srgbClr val="F4ECD6"/>
+            <a:srgbClr val="F4F4F6"/>
+          </a:solidFill>
+          <a:ln w="12700">
+            <a:solidFill>
+              <a:srgbClr val="E6E6E6"/>
+            </a:solidFill>
+          </a:ln>
+          <a:effectLst/>
+        </p:spPr>
+        <p:style>
+          <a:lnRef idx="1">
+            <a:schemeClr val="accent1"/>
+          </a:lnRef>
+          <a:fillRef idx="3">
+            <a:schemeClr val="accent1"/>
+          </a:fillRef>
+          <a:effectRef idx="2">
+            <a:schemeClr val="accent1"/>
+          </a:effectRef>
+          <a:fontRef idx="minor">
+            <a:schemeClr val="lt1"/>
+          </a:fontRef>
+        </p:style>
+        <p:txBody>
+          <a:bodyPr rtlCol="0" anchor="ctr"/>
+          <a:lstStyle/>
+          <a:p>
+            <a:pPr algn="ctr"/>
+          </a:p>
+        </p:txBody>
+      </p:sp>
+      <p:sp>
+        <p:nvSpPr>
+          <p:cNvPr id="8" name="Rectangle 7"/>
+          <p:cNvSpPr/>
+          <p:nvPr/>
+        </p:nvSpPr>
+        <p:spPr>
+          <a:xfrm>
+            <a:off x="6172200" y="2148840"/>
+            <a:ext cx="91440" cy="1097280"/>
+          </a:xfrm>
+          <a:prstGeom prst="rect">
+            <a:avLst/>
+          </a:prstGeom>
+          <a:solidFill>
+            <a:srgbClr val="5B5BD6"/>
           </a:solidFill>
           <a:ln>
             <a:noFill/>
@@ -6680,13 +6784,13 @@
       </p:sp>
       <p:sp>
         <p:nvSpPr>
-          <p:cNvPr id="7" name="TextBox 6"/>
+          <p:cNvPr id="9" name="TextBox 8"/>
           <p:cNvSpPr txBox="1"/>
           <p:nvPr/>
         </p:nvSpPr>
         <p:spPr>
           <a:xfrm>
-            <a:off x="6537960" y="2148840"/>
+            <a:off x="6583680" y="2148840"/>
             <a:ext cx="4572000" cy="1188720"/>
           </a:xfrm>
           <a:prstGeom prst="rect">
@@ -6704,7 +6808,7 @@
             <a:r>
               <a:rPr sz="2200" b="1" spc="-30">
                 <a:solidFill>
-                  <a:srgbClr val="000000"/>
+                  <a:srgbClr val="1A1A1A"/>
                 </a:solidFill>
                 <a:latin typeface="Apple SD Gothic Neo"/>
               </a:rPr>
@@ -6716,7 +6820,7 @@
             <a:r>
               <a:rPr sz="1800" b="0" spc="-30">
                 <a:solidFill>
-                  <a:srgbClr val="000000"/>
+                  <a:srgbClr val="6B7280"/>
                 </a:solidFill>
                 <a:latin typeface="Apple SD Gothic Neo"/>
               </a:rPr>
@@ -6727,7 +6831,7 @@
       </p:sp>
       <p:sp>
         <p:nvSpPr>
-          <p:cNvPr id="8" name="Rounded Rectangle 7"/>
+          <p:cNvPr id="10" name="Rounded Rectangle 9"/>
           <p:cNvSpPr/>
           <p:nvPr/>
         </p:nvSpPr>
@@ -6738,11 +6842,57 @@
           </a:xfrm>
           <a:prstGeom prst="roundRect">
             <a:avLst>
-              <a:gd name="adj" fmla="val 12000"/>
+              <a:gd name="adj" fmla="val 10000"/>
             </a:avLst>
           </a:prstGeom>
           <a:solidFill>
-            <a:srgbClr val="C8E6CD"/>
+            <a:srgbClr val="F4F4F6"/>
+          </a:solidFill>
+          <a:ln w="12700">
+            <a:solidFill>
+              <a:srgbClr val="E6E6E6"/>
+            </a:solidFill>
+          </a:ln>
+          <a:effectLst/>
+        </p:spPr>
+        <p:style>
+          <a:lnRef idx="1">
+            <a:schemeClr val="accent1"/>
+          </a:lnRef>
+          <a:fillRef idx="3">
+            <a:schemeClr val="accent1"/>
+          </a:fillRef>
+          <a:effectRef idx="2">
+            <a:schemeClr val="accent1"/>
+          </a:effectRef>
+          <a:fontRef idx="minor">
+            <a:schemeClr val="lt1"/>
+          </a:fontRef>
+        </p:style>
+        <p:txBody>
+          <a:bodyPr rtlCol="0" anchor="ctr"/>
+          <a:lstStyle/>
+          <a:p>
+            <a:pPr algn="ctr"/>
+          </a:p>
+        </p:txBody>
+      </p:sp>
+      <p:sp>
+        <p:nvSpPr>
+          <p:cNvPr id="11" name="Rectangle 10"/>
+          <p:cNvSpPr/>
+          <p:nvPr/>
+        </p:nvSpPr>
+        <p:spPr>
+          <a:xfrm>
+            <a:off x="777240" y="3886200"/>
+            <a:ext cx="91440" cy="1097280"/>
+          </a:xfrm>
+          <a:prstGeom prst="rect">
+            <a:avLst/>
+          </a:prstGeom>
+          <a:solidFill>
+            <a:srgbClr val="5B5BD6"/>
           </a:solidFill>
           <a:ln>
             <a:noFill/>
@@ -6773,13 +6923,13 @@
       </p:sp>
       <p:sp>
         <p:nvSpPr>
-          <p:cNvPr id="9" name="TextBox 8"/>
+          <p:cNvPr id="12" name="TextBox 11"/>
           <p:cNvSpPr txBox="1"/>
           <p:nvPr/>
         </p:nvSpPr>
         <p:spPr>
           <a:xfrm>
-            <a:off x="1143000" y="3886200"/>
+            <a:off x="1188720" y="3886200"/>
             <a:ext cx="4572000" cy="1188720"/>
           </a:xfrm>
           <a:prstGeom prst="rect">
@@ -6797,7 +6947,7 @@
             <a:r>
               <a:rPr sz="2200" b="1" spc="-30">
                 <a:solidFill>
-                  <a:srgbClr val="000000"/>
+                  <a:srgbClr val="1A1A1A"/>
                 </a:solidFill>
                 <a:latin typeface="Apple SD Gothic Neo"/>
               </a:rPr>
@@ -6809,7 +6959,7 @@
             <a:r>
               <a:rPr sz="1800" b="0" spc="-30">
                 <a:solidFill>
-                  <a:srgbClr val="000000"/>
+                  <a:srgbClr val="6B7280"/>
                 </a:solidFill>
                 <a:latin typeface="Apple SD Gothic Neo"/>
               </a:rPr>
@@ -6820,7 +6970,7 @@
       </p:sp>
       <p:sp>
         <p:nvSpPr>
-          <p:cNvPr id="10" name="Rounded Rectangle 9"/>
+          <p:cNvPr id="13" name="Rounded Rectangle 12"/>
           <p:cNvSpPr/>
           <p:nvPr/>
         </p:nvSpPr>
@@ -6831,11 +6981,57 @@
           </a:xfrm>
           <a:prstGeom prst="roundRect">
             <a:avLst>
-              <a:gd name="adj" fmla="val 12000"/>
+              <a:gd name="adj" fmla="val 10000"/>
             </a:avLst>
           </a:prstGeom>
           <a:solidFill>
-            <a:srgbClr val="EFD4D4"/>
+            <a:srgbClr val="F4F4F6"/>
+          </a:solidFill>
+          <a:ln w="12700">
+            <a:solidFill>
+              <a:srgbClr val="E6E6E6"/>
+            </a:solidFill>
+          </a:ln>
+          <a:effectLst/>
+        </p:spPr>
+        <p:style>
+          <a:lnRef idx="1">
+            <a:schemeClr val="accent1"/>
+          </a:lnRef>
+          <a:fillRef idx="3">
+            <a:schemeClr val="accent1"/>
+          </a:fillRef>
+          <a:effectRef idx="2">
+            <a:schemeClr val="accent1"/>
+          </a:effectRef>
+          <a:fontRef idx="minor">
+            <a:schemeClr val="lt1"/>
+          </a:fontRef>
+        </p:style>
+        <p:txBody>
+          <a:bodyPr rtlCol="0" anchor="ctr"/>
+          <a:lstStyle/>
+          <a:p>
+            <a:pPr algn="ctr"/>
+          </a:p>
+        </p:txBody>
+      </p:sp>
+      <p:sp>
+        <p:nvSpPr>
+          <p:cNvPr id="14" name="Rectangle 13"/>
+          <p:cNvSpPr/>
+          <p:nvPr/>
+        </p:nvSpPr>
+        <p:spPr>
+          <a:xfrm>
+            <a:off x="6172200" y="3886200"/>
+            <a:ext cx="91440" cy="1097280"/>
+          </a:xfrm>
+          <a:prstGeom prst="rect">
+            <a:avLst/>
+          </a:prstGeom>
+          <a:solidFill>
+            <a:srgbClr val="5B5BD6"/>
           </a:solidFill>
           <a:ln>
             <a:noFill/>
@@ -6866,13 +7062,13 @@
       </p:sp>
       <p:sp>
         <p:nvSpPr>
-          <p:cNvPr id="11" name="TextBox 10"/>
+          <p:cNvPr id="15" name="TextBox 14"/>
           <p:cNvSpPr txBox="1"/>
           <p:nvPr/>
         </p:nvSpPr>
         <p:spPr>
           <a:xfrm>
-            <a:off x="6537960" y="3886200"/>
+            <a:off x="6583680" y="3886200"/>
             <a:ext cx="4572000" cy="1188720"/>
           </a:xfrm>
           <a:prstGeom prst="rect">
@@ -6890,7 +7086,7 @@
             <a:r>
               <a:rPr sz="2200" b="1" spc="-30">
                 <a:solidFill>
-                  <a:srgbClr val="000000"/>
+                  <a:srgbClr val="1A1A1A"/>
                 </a:solidFill>
                 <a:latin typeface="Apple SD Gothic Neo"/>
               </a:rPr>
@@ -6902,7 +7098,7 @@
             <a:r>
               <a:rPr sz="1800" b="0" spc="-30">
                 <a:solidFill>
-                  <a:srgbClr val="000000"/>
+                  <a:srgbClr val="6B7280"/>
                 </a:solidFill>
                 <a:latin typeface="Apple SD Gothic Neo"/>
               </a:rPr>
@@ -6913,7 +7109,7 @@
       </p:sp>
       <p:sp>
         <p:nvSpPr>
-          <p:cNvPr id="12" name="TextBox 11"/>
+          <p:cNvPr id="16" name="TextBox 15"/>
           <p:cNvSpPr txBox="1"/>
           <p:nvPr/>
         </p:nvSpPr>
@@ -6937,7 +7133,7 @@
             <a:r>
               <a:rPr sz="2200" b="1" spc="-30">
                 <a:solidFill>
-                  <a:srgbClr val="000000"/>
+                  <a:srgbClr val="1A1A1A"/>
                 </a:solidFill>
                 <a:latin typeface="Apple SD Gothic Neo"/>
               </a:rPr>
@@ -6998,7 +7194,7 @@
             <a:r>
               <a:rPr sz="1500" b="0" spc="60">
                 <a:solidFill>
-                  <a:srgbClr val="555555"/>
+                  <a:srgbClr val="5B5BD6"/>
                 </a:solidFill>
                 <a:latin typeface="Menlo"/>
               </a:rPr>
@@ -7033,7 +7229,7 @@
             <a:r>
               <a:rPr sz="4000" b="1" spc="-80">
                 <a:solidFill>
-                  <a:srgbClr val="000000"/>
+                  <a:srgbClr val="1A1A1A"/>
                 </a:solidFill>
                 <a:latin typeface="Apple SD Gothic Neo"/>
               </a:rPr>
@@ -7057,7 +7253,7 @@
             <a:avLst/>
           </a:prstGeom>
           <a:solidFill>
-            <a:srgbClr val="C5B0F4"/>
+            <a:srgbClr val="ECEBFB"/>
           </a:solidFill>
           <a:ln>
             <a:noFill/>
@@ -7086,7 +7282,7 @@
             <a:r>
               <a:rPr sz="3000" b="1">
                 <a:solidFill>
-                  <a:srgbClr val="000000"/>
+                  <a:srgbClr val="1A1A1A"/>
                 </a:solidFill>
                 <a:latin typeface="Apple SD Gothic Neo"/>
               </a:rPr>
@@ -7121,7 +7317,7 @@
             <a:r>
               <a:rPr sz="2100" b="1" spc="-30">
                 <a:solidFill>
-                  <a:srgbClr val="000000"/>
+                  <a:srgbClr val="1A1A1A"/>
                 </a:solidFill>
                 <a:latin typeface="Apple SD Gothic Neo"/>
               </a:rPr>
@@ -7145,7 +7341,7 @@
             <a:avLst/>
           </a:prstGeom>
           <a:solidFill>
-            <a:srgbClr val="C8E6CD"/>
+            <a:srgbClr val="5B5BD6"/>
           </a:solidFill>
           <a:ln>
             <a:noFill/>
@@ -7174,7 +7370,7 @@
             <a:r>
               <a:rPr sz="3000" b="1">
                 <a:solidFill>
-                  <a:srgbClr val="000000"/>
+                  <a:srgbClr val="FFFFFF"/>
                 </a:solidFill>
                 <a:latin typeface="Apple SD Gothic Neo"/>
               </a:rPr>
@@ -7209,7 +7405,7 @@
             <a:r>
               <a:rPr sz="2100" b="1" spc="-30">
                 <a:solidFill>
-                  <a:srgbClr val="000000"/>
+                  <a:srgbClr val="1A1A1A"/>
                 </a:solidFill>
                 <a:latin typeface="Apple SD Gothic Neo"/>
               </a:rPr>
@@ -7233,7 +7429,7 @@
             <a:avLst/>
           </a:prstGeom>
           <a:solidFill>
-            <a:srgbClr val="F3C9B6"/>
+            <a:srgbClr val="1F1D3D"/>
           </a:solidFill>
           <a:ln>
             <a:noFill/>
@@ -7262,7 +7458,7 @@
             <a:r>
               <a:rPr sz="3000" b="1">
                 <a:solidFill>
-                  <a:srgbClr val="000000"/>
+                  <a:srgbClr val="FFFFFF"/>
                 </a:solidFill>
                 <a:latin typeface="Apple SD Gothic Neo"/>
               </a:rPr>
@@ -7297,7 +7493,7 @@
             <a:r>
               <a:rPr sz="2100" b="1" spc="-30">
                 <a:solidFill>
-                  <a:srgbClr val="000000"/>
+                  <a:srgbClr val="1A1A1A"/>
                 </a:solidFill>
                 <a:latin typeface="Apple SD Gothic Neo"/>
               </a:rPr>
@@ -7358,7 +7554,7 @@
             <a:r>
               <a:rPr sz="1600" b="0" spc="80">
                 <a:solidFill>
-                  <a:srgbClr val="C5B0F4"/>
+                  <a:srgbClr val="CDBFF7"/>
                 </a:solidFill>
                 <a:latin typeface="Menlo"/>
               </a:rPr>
@@ -7466,7 +7662,7 @@
             <a:r>
               <a:rPr sz="1500" b="0" spc="60">
                 <a:solidFill>
-                  <a:srgbClr val="555555"/>
+                  <a:srgbClr val="5B5BD6"/>
                 </a:solidFill>
                 <a:latin typeface="Menlo"/>
               </a:rPr>
@@ -7501,7 +7697,7 @@
             <a:r>
               <a:rPr sz="4000" b="1" spc="-80">
                 <a:solidFill>
-                  <a:srgbClr val="000000"/>
+                  <a:srgbClr val="1A1A1A"/>
                 </a:solidFill>
                 <a:latin typeface="Apple SD Gothic Neo"/>
               </a:rPr>
@@ -7523,11 +7719,11 @@
           </a:xfrm>
           <a:prstGeom prst="roundRect">
             <a:avLst>
-              <a:gd name="adj" fmla="val 16000"/>
+              <a:gd name="adj" fmla="val 12000"/>
             </a:avLst>
           </a:prstGeom>
           <a:solidFill>
-            <a:srgbClr val="DCEEB1"/>
+            <a:srgbClr val="ECEBFB"/>
           </a:solidFill>
           <a:ln>
             <a:noFill/>
@@ -7582,7 +7778,7 @@
             <a:r>
               <a:rPr sz="3600" b="1" spc="-60">
                 <a:solidFill>
-                  <a:srgbClr val="000000"/>
+                  <a:srgbClr val="1A1A1A"/>
                 </a:solidFill>
                 <a:latin typeface="Apple SD Gothic Neo"/>
               </a:rPr>
@@ -7617,7 +7813,7 @@
             <a:r>
               <a:rPr sz="2100" b="0" spc="-30">
                 <a:solidFill>
-                  <a:srgbClr val="000000"/>
+                  <a:srgbClr val="6B7280"/>
                 </a:solidFill>
                 <a:latin typeface="Apple SD Gothic Neo"/>
               </a:rPr>
@@ -7639,11 +7835,11 @@
           </a:xfrm>
           <a:prstGeom prst="roundRect">
             <a:avLst>
-              <a:gd name="adj" fmla="val 16000"/>
+              <a:gd name="adj" fmla="val 12000"/>
             </a:avLst>
           </a:prstGeom>
           <a:solidFill>
-            <a:srgbClr val="F3C9B6"/>
+            <a:srgbClr val="F7EDE6"/>
           </a:solidFill>
           <a:ln>
             <a:noFill/>
@@ -7698,7 +7894,7 @@
             <a:r>
               <a:rPr sz="3600" b="1" spc="-60">
                 <a:solidFill>
-                  <a:srgbClr val="000000"/>
+                  <a:srgbClr val="1A1A1A"/>
                 </a:solidFill>
                 <a:latin typeface="Apple SD Gothic Neo"/>
               </a:rPr>
@@ -7733,7 +7929,7 @@
             <a:r>
               <a:rPr sz="2100" b="0" spc="-30">
                 <a:solidFill>
-                  <a:srgbClr val="000000"/>
+                  <a:srgbClr val="6B7280"/>
                 </a:solidFill>
                 <a:latin typeface="Apple SD Gothic Neo"/>
               </a:rPr>
@@ -7794,7 +7990,7 @@
             <a:r>
               <a:rPr sz="1500" b="0" spc="60">
                 <a:solidFill>
-                  <a:srgbClr val="555555"/>
+                  <a:srgbClr val="5B5BD6"/>
                 </a:solidFill>
                 <a:latin typeface="Menlo"/>
               </a:rPr>
@@ -7829,7 +8025,7 @@
             <a:r>
               <a:rPr sz="4000" b="1" spc="-80">
                 <a:solidFill>
-                  <a:srgbClr val="000000"/>
+                  <a:srgbClr val="1A1A1A"/>
                 </a:solidFill>
                 <a:latin typeface="Apple SD Gothic Neo"/>
               </a:rPr>
@@ -7851,11 +8047,11 @@
           </a:xfrm>
           <a:prstGeom prst="roundRect">
             <a:avLst>
-              <a:gd name="adj" fmla="val 18000"/>
+              <a:gd name="adj" fmla="val 16000"/>
             </a:avLst>
           </a:prstGeom>
           <a:solidFill>
-            <a:srgbClr val="C5B0F4"/>
+            <a:srgbClr val="5B5BD6"/>
           </a:solidFill>
           <a:ln>
             <a:noFill/>
@@ -7884,7 +8080,7 @@
             <a:r>
               <a:rPr sz="2300" b="1">
                 <a:solidFill>
-                  <a:srgbClr val="000000"/>
+                  <a:srgbClr val="FFFFFF"/>
                 </a:solidFill>
                 <a:latin typeface="Apple SD Gothic Neo"/>
               </a:rPr>
@@ -7919,7 +8115,7 @@
             <a:r>
               <a:rPr sz="2800" b="1">
                 <a:solidFill>
-                  <a:srgbClr val="000000"/>
+                  <a:srgbClr val="5B5BD6"/>
                 </a:solidFill>
                 <a:latin typeface="Apple SD Gothic Neo"/>
               </a:rPr>
@@ -7954,7 +8150,7 @@
             <a:r>
               <a:rPr sz="2800" b="1">
                 <a:solidFill>
-                  <a:srgbClr val="000000"/>
+                  <a:srgbClr val="5B5BD6"/>
                 </a:solidFill>
                 <a:latin typeface="Apple SD Gothic Neo"/>
               </a:rPr>
@@ -7976,11 +8172,11 @@
           </a:xfrm>
           <a:prstGeom prst="roundRect">
             <a:avLst>
-              <a:gd name="adj" fmla="val 18000"/>
+              <a:gd name="adj" fmla="val 16000"/>
             </a:avLst>
           </a:prstGeom>
           <a:solidFill>
-            <a:srgbClr val="C8E6CD"/>
+            <a:srgbClr val="ECEBFB"/>
           </a:solidFill>
           <a:ln>
             <a:noFill/>
@@ -8009,7 +8205,7 @@
             <a:r>
               <a:rPr sz="2200" b="1">
                 <a:solidFill>
-                  <a:srgbClr val="000000"/>
+                  <a:srgbClr val="1A1A1A"/>
                 </a:solidFill>
                 <a:latin typeface="Apple SD Gothic Neo"/>
               </a:rPr>
@@ -8031,11 +8227,11 @@
           </a:xfrm>
           <a:prstGeom prst="roundRect">
             <a:avLst>
-              <a:gd name="adj" fmla="val 18000"/>
+              <a:gd name="adj" fmla="val 16000"/>
             </a:avLst>
           </a:prstGeom>
           <a:solidFill>
-            <a:srgbClr val="EFD4D4"/>
+            <a:srgbClr val="F7EDE6"/>
           </a:solidFill>
           <a:ln>
             <a:noFill/>
@@ -8064,7 +8260,7 @@
             <a:r>
               <a:rPr sz="2200" b="1">
                 <a:solidFill>
-                  <a:srgbClr val="000000"/>
+                  <a:srgbClr val="1A1A1A"/>
                 </a:solidFill>
                 <a:latin typeface="Apple SD Gothic Neo"/>
               </a:rPr>
@@ -8125,7 +8321,7 @@
             <a:r>
               <a:rPr sz="1500" b="0" spc="60">
                 <a:solidFill>
-                  <a:srgbClr val="555555"/>
+                  <a:srgbClr val="5B5BD6"/>
                 </a:solidFill>
                 <a:latin typeface="Menlo"/>
               </a:rPr>
@@ -8160,7 +8356,7 @@
             <a:r>
               <a:rPr sz="4000" b="1" spc="-80">
                 <a:solidFill>
-                  <a:srgbClr val="000000"/>
+                  <a:srgbClr val="1A1A1A"/>
                 </a:solidFill>
                 <a:latin typeface="Apple SD Gothic Neo"/>
               </a:rPr>
@@ -8182,14 +8378,16 @@
           </a:xfrm>
           <a:prstGeom prst="roundRect">
             <a:avLst>
-              <a:gd name="adj" fmla="val 18000"/>
+              <a:gd name="adj" fmla="val 16000"/>
             </a:avLst>
           </a:prstGeom>
           <a:solidFill>
-            <a:srgbClr val="F4ECD6"/>
+            <a:srgbClr val="F4F4F6"/>
           </a:solidFill>
-          <a:ln>
-            <a:noFill/>
+          <a:ln w="15240">
+            <a:solidFill>
+              <a:srgbClr val="E6E6E6"/>
+            </a:solidFill>
           </a:ln>
           <a:effectLst/>
         </p:spPr>
@@ -8215,7 +8413,7 @@
             <a:r>
               <a:rPr sz="2200" b="1">
                 <a:solidFill>
-                  <a:srgbClr val="000000"/>
+                  <a:srgbClr val="1A1A1A"/>
                 </a:solidFill>
                 <a:latin typeface="Apple SD Gothic Neo"/>
               </a:rPr>
@@ -8250,7 +8448,7 @@
             <a:r>
               <a:rPr sz="3000" b="1">
                 <a:solidFill>
-                  <a:srgbClr val="000000"/>
+                  <a:srgbClr val="5B5BD6"/>
                 </a:solidFill>
                 <a:latin typeface="Apple SD Gothic Neo"/>
               </a:rPr>
@@ -8272,14 +8470,16 @@
           </a:xfrm>
           <a:prstGeom prst="roundRect">
             <a:avLst>
-              <a:gd name="adj" fmla="val 18000"/>
+              <a:gd name="adj" fmla="val 16000"/>
             </a:avLst>
           </a:prstGeom>
           <a:solidFill>
-            <a:srgbClr val="F3C9B6"/>
+            <a:srgbClr val="F4F4F6"/>
           </a:solidFill>
-          <a:ln>
-            <a:noFill/>
+          <a:ln w="15240">
+            <a:solidFill>
+              <a:srgbClr val="E6E6E6"/>
+            </a:solidFill>
           </a:ln>
           <a:effectLst/>
         </p:spPr>
@@ -8305,7 +8505,7 @@
             <a:r>
               <a:rPr sz="2200" b="1">
                 <a:solidFill>
-                  <a:srgbClr val="000000"/>
+                  <a:srgbClr val="1A1A1A"/>
                 </a:solidFill>
                 <a:latin typeface="Apple SD Gothic Neo"/>
               </a:rPr>
@@ -8340,7 +8540,7 @@
             <a:r>
               <a:rPr sz="3000" b="1">
                 <a:solidFill>
-                  <a:srgbClr val="000000"/>
+                  <a:srgbClr val="5B5BD6"/>
                 </a:solidFill>
                 <a:latin typeface="Apple SD Gothic Neo"/>
               </a:rPr>
@@ -8362,14 +8562,16 @@
           </a:xfrm>
           <a:prstGeom prst="roundRect">
             <a:avLst>
-              <a:gd name="adj" fmla="val 18000"/>
+              <a:gd name="adj" fmla="val 16000"/>
             </a:avLst>
           </a:prstGeom>
           <a:solidFill>
-            <a:srgbClr val="F3C9B6"/>
+            <a:srgbClr val="F4F4F6"/>
           </a:solidFill>
-          <a:ln>
-            <a:noFill/>
+          <a:ln w="15240">
+            <a:solidFill>
+              <a:srgbClr val="E6E6E6"/>
+            </a:solidFill>
           </a:ln>
           <a:effectLst/>
         </p:spPr>
@@ -8395,7 +8597,7 @@
             <a:r>
               <a:rPr sz="2200" b="1">
                 <a:solidFill>
-                  <a:srgbClr val="000000"/>
+                  <a:srgbClr val="1A1A1A"/>
                 </a:solidFill>
                 <a:latin typeface="Apple SD Gothic Neo"/>
               </a:rPr>
@@ -8430,7 +8632,7 @@
             <a:r>
               <a:rPr sz="3000" b="1">
                 <a:solidFill>
-                  <a:srgbClr val="000000"/>
+                  <a:srgbClr val="5B5BD6"/>
                 </a:solidFill>
                 <a:latin typeface="Apple SD Gothic Neo"/>
               </a:rPr>
@@ -8452,14 +8654,16 @@
           </a:xfrm>
           <a:prstGeom prst="roundRect">
             <a:avLst>
-              <a:gd name="adj" fmla="val 18000"/>
+              <a:gd name="adj" fmla="val 16000"/>
             </a:avLst>
           </a:prstGeom>
           <a:solidFill>
-            <a:srgbClr val="C8E6CD"/>
+            <a:srgbClr val="ECEBFB"/>
           </a:solidFill>
-          <a:ln>
-            <a:noFill/>
+          <a:ln w="15240">
+            <a:solidFill>
+              <a:srgbClr val="E6E6E6"/>
+            </a:solidFill>
           </a:ln>
           <a:effectLst/>
         </p:spPr>
@@ -8485,7 +8689,7 @@
             <a:r>
               <a:rPr sz="2200" b="1">
                 <a:solidFill>
-                  <a:srgbClr val="000000"/>
+                  <a:srgbClr val="1A1A1A"/>
                 </a:solidFill>
                 <a:latin typeface="Apple SD Gothic Neo"/>
               </a:rPr>
@@ -8546,7 +8750,7 @@
             <a:r>
               <a:rPr sz="1500" b="0" spc="60">
                 <a:solidFill>
-                  <a:srgbClr val="555555"/>
+                  <a:srgbClr val="5B5BD6"/>
                 </a:solidFill>
                 <a:latin typeface="Menlo"/>
               </a:rPr>
@@ -8581,7 +8785,7 @@
             <a:r>
               <a:rPr sz="4000" b="1" spc="-80">
                 <a:solidFill>
-                  <a:srgbClr val="000000"/>
+                  <a:srgbClr val="1A1A1A"/>
                 </a:solidFill>
                 <a:latin typeface="Apple SD Gothic Neo"/>
               </a:rPr>
@@ -8605,7 +8809,7 @@
             <a:avLst/>
           </a:prstGeom>
           <a:solidFill>
-            <a:srgbClr val="C5B0F4"/>
+            <a:srgbClr val="ECEBFB"/>
           </a:solidFill>
           <a:ln>
             <a:noFill/>
@@ -8634,7 +8838,7 @@
             <a:r>
               <a:rPr sz="2000" b="1">
                 <a:solidFill>
-                  <a:srgbClr val="000000"/>
+                  <a:srgbClr val="1A1A1A"/>
                 </a:solidFill>
                 <a:latin typeface="Apple SD Gothic Neo"/>
               </a:rPr>
@@ -8656,11 +8860,11 @@
           </a:xfrm>
           <a:prstGeom prst="roundRect">
             <a:avLst>
-              <a:gd name="adj" fmla="val 18000"/>
+              <a:gd name="adj" fmla="val 16000"/>
             </a:avLst>
           </a:prstGeom>
           <a:solidFill>
-            <a:srgbClr val="C5B0F4"/>
+            <a:srgbClr val="ECEBFB"/>
           </a:solidFill>
           <a:ln>
             <a:noFill/>
@@ -8689,7 +8893,7 @@
             <a:r>
               <a:rPr sz="2200" b="1">
                 <a:solidFill>
-                  <a:srgbClr val="000000"/>
+                  <a:srgbClr val="1A1A1A"/>
                 </a:solidFill>
                 <a:latin typeface="Apple SD Gothic Neo"/>
               </a:rPr>
@@ -8724,7 +8928,7 @@
             <a:r>
               <a:rPr sz="3000" b="1">
                 <a:solidFill>
-                  <a:srgbClr val="000000"/>
+                  <a:srgbClr val="5B5BD6"/>
                 </a:solidFill>
                 <a:latin typeface="Apple SD Gothic Neo"/>
               </a:rPr>
@@ -8748,7 +8952,7 @@
             <a:avLst/>
           </a:prstGeom>
           <a:solidFill>
-            <a:srgbClr val="C5B0F4"/>
+            <a:srgbClr val="ECEBFB"/>
           </a:solidFill>
           <a:ln>
             <a:noFill/>
@@ -8777,7 +8981,7 @@
             <a:r>
               <a:rPr sz="2000" b="1">
                 <a:solidFill>
-                  <a:srgbClr val="000000"/>
+                  <a:srgbClr val="1A1A1A"/>
                 </a:solidFill>
                 <a:latin typeface="Apple SD Gothic Neo"/>
               </a:rPr>
@@ -8799,11 +9003,11 @@
           </a:xfrm>
           <a:prstGeom prst="roundRect">
             <a:avLst>
-              <a:gd name="adj" fmla="val 18000"/>
+              <a:gd name="adj" fmla="val 16000"/>
             </a:avLst>
           </a:prstGeom>
           <a:solidFill>
-            <a:srgbClr val="C5B0F4"/>
+            <a:srgbClr val="ECEBFB"/>
           </a:solidFill>
           <a:ln>
             <a:noFill/>
@@ -8832,7 +9036,7 @@
             <a:r>
               <a:rPr sz="2200" b="1">
                 <a:solidFill>
-                  <a:srgbClr val="000000"/>
+                  <a:srgbClr val="1A1A1A"/>
                 </a:solidFill>
                 <a:latin typeface="Apple SD Gothic Neo"/>
               </a:rPr>
@@ -8867,7 +9071,7 @@
             <a:r>
               <a:rPr sz="3000" b="1">
                 <a:solidFill>
-                  <a:srgbClr val="000000"/>
+                  <a:srgbClr val="5B5BD6"/>
                 </a:solidFill>
                 <a:latin typeface="Apple SD Gothic Neo"/>
               </a:rPr>
@@ -8891,7 +9095,7 @@
             <a:avLst/>
           </a:prstGeom>
           <a:solidFill>
-            <a:srgbClr val="C8E6CD"/>
+            <a:srgbClr val="5B5BD6"/>
           </a:solidFill>
           <a:ln>
             <a:noFill/>
@@ -8920,7 +9124,7 @@
             <a:r>
               <a:rPr sz="2000" b="1">
                 <a:solidFill>
-                  <a:srgbClr val="000000"/>
+                  <a:srgbClr val="FFFFFF"/>
                 </a:solidFill>
                 <a:latin typeface="Apple SD Gothic Neo"/>
               </a:rPr>
@@ -8942,11 +9146,11 @@
           </a:xfrm>
           <a:prstGeom prst="roundRect">
             <a:avLst>
-              <a:gd name="adj" fmla="val 18000"/>
+              <a:gd name="adj" fmla="val 16000"/>
             </a:avLst>
           </a:prstGeom>
           <a:solidFill>
-            <a:srgbClr val="C8E6CD"/>
+            <a:srgbClr val="5B5BD6"/>
           </a:solidFill>
           <a:ln>
             <a:noFill/>
@@ -8975,7 +9179,7 @@
             <a:r>
               <a:rPr sz="2200" b="1">
                 <a:solidFill>
-                  <a:srgbClr val="000000"/>
+                  <a:srgbClr val="FFFFFF"/>
                 </a:solidFill>
                 <a:latin typeface="Apple SD Gothic Neo"/>
               </a:rPr>
@@ -9010,7 +9214,7 @@
             <a:r>
               <a:rPr sz="3000" b="1">
                 <a:solidFill>
-                  <a:srgbClr val="000000"/>
+                  <a:srgbClr val="5B5BD6"/>
                 </a:solidFill>
                 <a:latin typeface="Apple SD Gothic Neo"/>
               </a:rPr>
@@ -9034,7 +9238,7 @@
             <a:avLst/>
           </a:prstGeom>
           <a:solidFill>
-            <a:srgbClr val="F3C9B6"/>
+            <a:srgbClr val="1F1D3D"/>
           </a:solidFill>
           <a:ln>
             <a:noFill/>
@@ -9063,7 +9267,7 @@
             <a:r>
               <a:rPr sz="2000" b="1">
                 <a:solidFill>
-                  <a:srgbClr val="000000"/>
+                  <a:srgbClr val="FFFFFF"/>
                 </a:solidFill>
                 <a:latin typeface="Apple SD Gothic Neo"/>
               </a:rPr>
@@ -9085,11 +9289,11 @@
           </a:xfrm>
           <a:prstGeom prst="roundRect">
             <a:avLst>
-              <a:gd name="adj" fmla="val 18000"/>
+              <a:gd name="adj" fmla="val 16000"/>
             </a:avLst>
           </a:prstGeom>
           <a:solidFill>
-            <a:srgbClr val="F3C9B6"/>
+            <a:srgbClr val="1F1D3D"/>
           </a:solidFill>
           <a:ln>
             <a:noFill/>
@@ -9118,7 +9322,7 @@
             <a:r>
               <a:rPr sz="2200" b="1">
                 <a:solidFill>
-                  <a:srgbClr val="000000"/>
+                  <a:srgbClr val="FFFFFF"/>
                 </a:solidFill>
                 <a:latin typeface="Apple SD Gothic Neo"/>
               </a:rPr>
@@ -9153,7 +9357,7 @@
             <a:r>
               <a:rPr sz="2000" b="0" spc="-30">
                 <a:solidFill>
-                  <a:srgbClr val="000000"/>
+                  <a:srgbClr val="6B7280"/>
                 </a:solidFill>
                 <a:latin typeface="Apple SD Gothic Neo"/>
               </a:rPr>
@@ -9214,7 +9418,7 @@
             <a:r>
               <a:rPr sz="1500" b="0" spc="60">
                 <a:solidFill>
-                  <a:srgbClr val="555555"/>
+                  <a:srgbClr val="5B5BD6"/>
                 </a:solidFill>
                 <a:latin typeface="Menlo"/>
               </a:rPr>
@@ -9249,7 +9453,7 @@
             <a:r>
               <a:rPr sz="4000" b="1" spc="-80">
                 <a:solidFill>
-                  <a:srgbClr val="000000"/>
+                  <a:srgbClr val="1A1A1A"/>
                 </a:solidFill>
                 <a:latin typeface="Apple SD Gothic Neo"/>
               </a:rPr>
@@ -9273,7 +9477,7 @@
             <a:avLst/>
           </a:prstGeom>
           <a:solidFill>
-            <a:srgbClr val="C5B0F4"/>
+            <a:srgbClr val="ECEBFB"/>
           </a:solidFill>
           <a:ln>
             <a:noFill/>
@@ -9302,7 +9506,7 @@
             <a:r>
               <a:rPr sz="2000" b="1">
                 <a:solidFill>
-                  <a:srgbClr val="000000"/>
+                  <a:srgbClr val="1A1A1A"/>
                 </a:solidFill>
                 <a:latin typeface="Apple SD Gothic Neo"/>
               </a:rPr>
@@ -9324,11 +9528,11 @@
           </a:xfrm>
           <a:prstGeom prst="roundRect">
             <a:avLst>
-              <a:gd name="adj" fmla="val 18000"/>
+              <a:gd name="adj" fmla="val 16000"/>
             </a:avLst>
           </a:prstGeom>
           <a:solidFill>
-            <a:srgbClr val="C5B0F4"/>
+            <a:srgbClr val="ECEBFB"/>
           </a:solidFill>
           <a:ln>
             <a:noFill/>
@@ -9357,7 +9561,7 @@
             <a:r>
               <a:rPr sz="2200" b="1">
                 <a:solidFill>
-                  <a:srgbClr val="000000"/>
+                  <a:srgbClr val="1A1A1A"/>
                 </a:solidFill>
                 <a:latin typeface="Apple SD Gothic Neo"/>
               </a:rPr>
@@ -9392,7 +9596,7 @@
             <a:r>
               <a:rPr sz="3000" b="1">
                 <a:solidFill>
-                  <a:srgbClr val="000000"/>
+                  <a:srgbClr val="5B5BD6"/>
                 </a:solidFill>
                 <a:latin typeface="Apple SD Gothic Neo"/>
               </a:rPr>
@@ -9416,7 +9620,7 @@
             <a:avLst/>
           </a:prstGeom>
           <a:solidFill>
-            <a:srgbClr val="F3C9B6"/>
+            <a:srgbClr val="1F1D3D"/>
           </a:solidFill>
           <a:ln>
             <a:noFill/>
@@ -9445,7 +9649,7 @@
             <a:r>
               <a:rPr sz="2000" b="1">
                 <a:solidFill>
-                  <a:srgbClr val="000000"/>
+                  <a:srgbClr val="FFFFFF"/>
                 </a:solidFill>
                 <a:latin typeface="Apple SD Gothic Neo"/>
               </a:rPr>
@@ -9467,11 +9671,11 @@
           </a:xfrm>
           <a:prstGeom prst="roundRect">
             <a:avLst>
-              <a:gd name="adj" fmla="val 18000"/>
+              <a:gd name="adj" fmla="val 16000"/>
             </a:avLst>
           </a:prstGeom>
           <a:solidFill>
-            <a:srgbClr val="F3C9B6"/>
+            <a:srgbClr val="1F1D3D"/>
           </a:solidFill>
           <a:ln>
             <a:noFill/>
@@ -9500,7 +9704,7 @@
             <a:r>
               <a:rPr sz="2200" b="1">
                 <a:solidFill>
-                  <a:srgbClr val="000000"/>
+                  <a:srgbClr val="FFFFFF"/>
                 </a:solidFill>
                 <a:latin typeface="Apple SD Gothic Neo"/>
               </a:rPr>
@@ -9535,7 +9739,7 @@
             <a:r>
               <a:rPr sz="3000" b="1">
                 <a:solidFill>
-                  <a:srgbClr val="000000"/>
+                  <a:srgbClr val="5B5BD6"/>
                 </a:solidFill>
                 <a:latin typeface="Apple SD Gothic Neo"/>
               </a:rPr>
@@ -9559,7 +9763,7 @@
             <a:avLst/>
           </a:prstGeom>
           <a:solidFill>
-            <a:srgbClr val="F3C9B6"/>
+            <a:srgbClr val="1F1D3D"/>
           </a:solidFill>
           <a:ln>
             <a:noFill/>
@@ -9588,7 +9792,7 @@
             <a:r>
               <a:rPr sz="2000" b="1">
                 <a:solidFill>
-                  <a:srgbClr val="000000"/>
+                  <a:srgbClr val="FFFFFF"/>
                 </a:solidFill>
                 <a:latin typeface="Apple SD Gothic Neo"/>
               </a:rPr>
@@ -9610,11 +9814,11 @@
           </a:xfrm>
           <a:prstGeom prst="roundRect">
             <a:avLst>
-              <a:gd name="adj" fmla="val 18000"/>
+              <a:gd name="adj" fmla="val 16000"/>
             </a:avLst>
           </a:prstGeom>
           <a:solidFill>
-            <a:srgbClr val="F3C9B6"/>
+            <a:srgbClr val="1F1D3D"/>
           </a:solidFill>
           <a:ln>
             <a:noFill/>
@@ -9643,7 +9847,7 @@
             <a:r>
               <a:rPr sz="2200" b="1">
                 <a:solidFill>
-                  <a:srgbClr val="000000"/>
+                  <a:srgbClr val="FFFFFF"/>
                 </a:solidFill>
                 <a:latin typeface="Apple SD Gothic Neo"/>
               </a:rPr>
@@ -9678,7 +9882,7 @@
             <a:r>
               <a:rPr sz="2000" b="0" spc="-30">
                 <a:solidFill>
-                  <a:srgbClr val="000000"/>
+                  <a:srgbClr val="6B7280"/>
                 </a:solidFill>
                 <a:latin typeface="Apple SD Gothic Neo"/>
               </a:rPr>
@@ -9739,7 +9943,7 @@
             <a:r>
               <a:rPr sz="1500" b="0" spc="60">
                 <a:solidFill>
-                  <a:srgbClr val="555555"/>
+                  <a:srgbClr val="5B5BD6"/>
                 </a:solidFill>
                 <a:latin typeface="Menlo"/>
               </a:rPr>
@@ -9774,7 +9978,7 @@
             <a:r>
               <a:rPr sz="4000" b="1" spc="-80">
                 <a:solidFill>
-                  <a:srgbClr val="000000"/>
+                  <a:srgbClr val="1A1A1A"/>
                 </a:solidFill>
                 <a:latin typeface="Apple SD Gothic Neo"/>
               </a:rPr>
@@ -9798,7 +10002,7 @@
             <a:avLst/>
           </a:prstGeom>
           <a:solidFill>
-            <a:srgbClr val="C5B0F4"/>
+            <a:srgbClr val="ECEBFB"/>
           </a:solidFill>
           <a:ln>
             <a:noFill/>
@@ -9827,7 +10031,7 @@
             <a:r>
               <a:rPr sz="2000" b="1">
                 <a:solidFill>
-                  <a:srgbClr val="000000"/>
+                  <a:srgbClr val="1A1A1A"/>
                 </a:solidFill>
                 <a:latin typeface="Apple SD Gothic Neo"/>
               </a:rPr>
@@ -9849,11 +10053,11 @@
           </a:xfrm>
           <a:prstGeom prst="roundRect">
             <a:avLst>
-              <a:gd name="adj" fmla="val 18000"/>
+              <a:gd name="adj" fmla="val 16000"/>
             </a:avLst>
           </a:prstGeom>
           <a:solidFill>
-            <a:srgbClr val="C5B0F4"/>
+            <a:srgbClr val="ECEBFB"/>
           </a:solidFill>
           <a:ln>
             <a:noFill/>
@@ -9882,7 +10086,7 @@
             <a:r>
               <a:rPr sz="2200" b="1">
                 <a:solidFill>
-                  <a:srgbClr val="000000"/>
+                  <a:srgbClr val="1A1A1A"/>
                 </a:solidFill>
                 <a:latin typeface="Apple SD Gothic Neo"/>
               </a:rPr>
@@ -9917,7 +10121,7 @@
             <a:r>
               <a:rPr sz="3000" b="1">
                 <a:solidFill>
-                  <a:srgbClr val="000000"/>
+                  <a:srgbClr val="5B5BD6"/>
                 </a:solidFill>
                 <a:latin typeface="Apple SD Gothic Neo"/>
               </a:rPr>
@@ -9941,7 +10145,7 @@
             <a:avLst/>
           </a:prstGeom>
           <a:solidFill>
-            <a:srgbClr val="C8E6CD"/>
+            <a:srgbClr val="5B5BD6"/>
           </a:solidFill>
           <a:ln>
             <a:noFill/>
@@ -9970,7 +10174,7 @@
             <a:r>
               <a:rPr sz="2000" b="1">
                 <a:solidFill>
-                  <a:srgbClr val="000000"/>
+                  <a:srgbClr val="FFFFFF"/>
                 </a:solidFill>
                 <a:latin typeface="Apple SD Gothic Neo"/>
               </a:rPr>
@@ -9992,11 +10196,11 @@
           </a:xfrm>
           <a:prstGeom prst="roundRect">
             <a:avLst>
-              <a:gd name="adj" fmla="val 18000"/>
+              <a:gd name="adj" fmla="val 16000"/>
             </a:avLst>
           </a:prstGeom>
           <a:solidFill>
-            <a:srgbClr val="C8E6CD"/>
+            <a:srgbClr val="5B5BD6"/>
           </a:solidFill>
           <a:ln>
             <a:noFill/>
@@ -10025,7 +10229,7 @@
             <a:r>
               <a:rPr sz="2200" b="1">
                 <a:solidFill>
-                  <a:srgbClr val="000000"/>
+                  <a:srgbClr val="FFFFFF"/>
                 </a:solidFill>
                 <a:latin typeface="Apple SD Gothic Neo"/>
               </a:rPr>
@@ -10060,7 +10264,7 @@
             <a:r>
               <a:rPr sz="3000" b="1">
                 <a:solidFill>
-                  <a:srgbClr val="000000"/>
+                  <a:srgbClr val="5B5BD6"/>
                 </a:solidFill>
                 <a:latin typeface="Apple SD Gothic Neo"/>
               </a:rPr>
@@ -10084,7 +10288,7 @@
             <a:avLst/>
           </a:prstGeom>
           <a:solidFill>
-            <a:srgbClr val="F3C9B6"/>
+            <a:srgbClr val="1F1D3D"/>
           </a:solidFill>
           <a:ln>
             <a:noFill/>
@@ -10113,7 +10317,7 @@
             <a:r>
               <a:rPr sz="2000" b="1">
                 <a:solidFill>
-                  <a:srgbClr val="000000"/>
+                  <a:srgbClr val="FFFFFF"/>
                 </a:solidFill>
                 <a:latin typeface="Apple SD Gothic Neo"/>
               </a:rPr>
@@ -10135,11 +10339,11 @@
           </a:xfrm>
           <a:prstGeom prst="roundRect">
             <a:avLst>
-              <a:gd name="adj" fmla="val 18000"/>
+              <a:gd name="adj" fmla="val 16000"/>
             </a:avLst>
           </a:prstGeom>
           <a:solidFill>
-            <a:srgbClr val="F3C9B6"/>
+            <a:srgbClr val="1F1D3D"/>
           </a:solidFill>
           <a:ln>
             <a:noFill/>
@@ -10168,7 +10372,7 @@
             <a:r>
               <a:rPr sz="2200" b="1">
                 <a:solidFill>
-                  <a:srgbClr val="000000"/>
+                  <a:srgbClr val="FFFFFF"/>
                 </a:solidFill>
                 <a:latin typeface="Apple SD Gothic Neo"/>
               </a:rPr>
@@ -10203,7 +10407,7 @@
             <a:r>
               <a:rPr sz="2000" b="0" spc="-30">
                 <a:solidFill>
-                  <a:srgbClr val="000000"/>
+                  <a:srgbClr val="6B7280"/>
                 </a:solidFill>
                 <a:latin typeface="Apple SD Gothic Neo"/>
               </a:rPr>
@@ -10264,7 +10468,7 @@
             <a:r>
               <a:rPr sz="1500" b="0" spc="60">
                 <a:solidFill>
-                  <a:srgbClr val="555555"/>
+                  <a:srgbClr val="5B5BD6"/>
                 </a:solidFill>
                 <a:latin typeface="Menlo"/>
               </a:rPr>
@@ -10299,7 +10503,7 @@
             <a:r>
               <a:rPr sz="4000" b="1" spc="-80">
                 <a:solidFill>
-                  <a:srgbClr val="000000"/>
+                  <a:srgbClr val="1A1A1A"/>
                 </a:solidFill>
                 <a:latin typeface="Apple SD Gothic Neo"/>
               </a:rPr>
@@ -10321,14 +10525,16 @@
           </a:xfrm>
           <a:prstGeom prst="roundRect">
             <a:avLst>
-              <a:gd name="adj" fmla="val 18000"/>
+              <a:gd name="adj" fmla="val 16000"/>
             </a:avLst>
           </a:prstGeom>
           <a:solidFill>
-            <a:srgbClr val="C5B0F4"/>
+            <a:srgbClr val="F4F4F6"/>
           </a:solidFill>
-          <a:ln>
-            <a:noFill/>
+          <a:ln w="15240">
+            <a:solidFill>
+              <a:srgbClr val="E6E6E6"/>
+            </a:solidFill>
           </a:ln>
           <a:effectLst/>
         </p:spPr>
@@ -10354,7 +10560,7 @@
             <a:r>
               <a:rPr sz="2300" b="1">
                 <a:solidFill>
-                  <a:srgbClr val="000000"/>
+                  <a:srgbClr val="1A1A1A"/>
                 </a:solidFill>
                 <a:latin typeface="Apple SD Gothic Neo"/>
               </a:rPr>
@@ -10376,14 +10582,16 @@
           </a:xfrm>
           <a:prstGeom prst="roundRect">
             <a:avLst>
-              <a:gd name="adj" fmla="val 18000"/>
+              <a:gd name="adj" fmla="val 16000"/>
             </a:avLst>
           </a:prstGeom>
           <a:solidFill>
-            <a:srgbClr val="DCEEB1"/>
+            <a:srgbClr val="F4F4F6"/>
           </a:solidFill>
-          <a:ln>
-            <a:noFill/>
+          <a:ln w="15240">
+            <a:solidFill>
+              <a:srgbClr val="E6E6E6"/>
+            </a:solidFill>
           </a:ln>
           <a:effectLst/>
         </p:spPr>
@@ -10409,7 +10617,7 @@
             <a:r>
               <a:rPr sz="2300" b="1">
                 <a:solidFill>
-                  <a:srgbClr val="000000"/>
+                  <a:srgbClr val="1A1A1A"/>
                 </a:solidFill>
                 <a:latin typeface="Apple SD Gothic Neo"/>
               </a:rPr>
@@ -10431,14 +10639,16 @@
           </a:xfrm>
           <a:prstGeom prst="roundRect">
             <a:avLst>
-              <a:gd name="adj" fmla="val 18000"/>
+              <a:gd name="adj" fmla="val 16000"/>
             </a:avLst>
           </a:prstGeom>
           <a:solidFill>
-            <a:srgbClr val="F4ECD6"/>
+            <a:srgbClr val="F4F4F6"/>
           </a:solidFill>
-          <a:ln>
-            <a:noFill/>
+          <a:ln w="15240">
+            <a:solidFill>
+              <a:srgbClr val="E6E6E6"/>
+            </a:solidFill>
           </a:ln>
           <a:effectLst/>
         </p:spPr>
@@ -10464,7 +10674,7 @@
             <a:r>
               <a:rPr sz="2300" b="1">
                 <a:solidFill>
-                  <a:srgbClr val="000000"/>
+                  <a:srgbClr val="1A1A1A"/>
                 </a:solidFill>
                 <a:latin typeface="Apple SD Gothic Neo"/>
               </a:rPr>
@@ -10486,14 +10696,16 @@
           </a:xfrm>
           <a:prstGeom prst="roundRect">
             <a:avLst>
-              <a:gd name="adj" fmla="val 18000"/>
+              <a:gd name="adj" fmla="val 16000"/>
             </a:avLst>
           </a:prstGeom>
           <a:solidFill>
-            <a:srgbClr val="F3C9B6"/>
+            <a:srgbClr val="F4F4F6"/>
           </a:solidFill>
-          <a:ln>
-            <a:noFill/>
+          <a:ln w="15240">
+            <a:solidFill>
+              <a:srgbClr val="E6E6E6"/>
+            </a:solidFill>
           </a:ln>
           <a:effectLst/>
         </p:spPr>
@@ -10519,7 +10731,7 @@
             <a:r>
               <a:rPr sz="2300" b="1">
                 <a:solidFill>
-                  <a:srgbClr val="000000"/>
+                  <a:srgbClr val="1A1A1A"/>
                 </a:solidFill>
                 <a:latin typeface="Apple SD Gothic Neo"/>
               </a:rPr>
@@ -10541,14 +10753,16 @@
           </a:xfrm>
           <a:prstGeom prst="roundRect">
             <a:avLst>
-              <a:gd name="adj" fmla="val 18000"/>
+              <a:gd name="adj" fmla="val 16000"/>
             </a:avLst>
           </a:prstGeom>
           <a:solidFill>
-            <a:srgbClr val="C8E6CD"/>
+            <a:srgbClr val="F4F4F6"/>
           </a:solidFill>
-          <a:ln>
-            <a:noFill/>
+          <a:ln w="15240">
+            <a:solidFill>
+              <a:srgbClr val="E6E6E6"/>
+            </a:solidFill>
           </a:ln>
           <a:effectLst/>
         </p:spPr>
@@ -10574,7 +10788,7 @@
             <a:r>
               <a:rPr sz="2300" b="1">
                 <a:solidFill>
-                  <a:srgbClr val="000000"/>
+                  <a:srgbClr val="1A1A1A"/>
                 </a:solidFill>
                 <a:latin typeface="Apple SD Gothic Neo"/>
               </a:rPr>
@@ -10596,14 +10810,16 @@
           </a:xfrm>
           <a:prstGeom prst="roundRect">
             <a:avLst>
-              <a:gd name="adj" fmla="val 18000"/>
+              <a:gd name="adj" fmla="val 16000"/>
             </a:avLst>
           </a:prstGeom>
           <a:solidFill>
-            <a:srgbClr val="EFD4D4"/>
+            <a:srgbClr val="F4F4F6"/>
           </a:solidFill>
-          <a:ln>
-            <a:noFill/>
+          <a:ln w="15240">
+            <a:solidFill>
+              <a:srgbClr val="E6E6E6"/>
+            </a:solidFill>
           </a:ln>
           <a:effectLst/>
         </p:spPr>
@@ -10629,7 +10845,7 @@
             <a:r>
               <a:rPr sz="2300" b="1">
                 <a:solidFill>
-                  <a:srgbClr val="000000"/>
+                  <a:srgbClr val="1A1A1A"/>
                 </a:solidFill>
                 <a:latin typeface="Apple SD Gothic Neo"/>
               </a:rPr>

--- a/docs/presentation/보험발표-figma.pptx
+++ b/docs/presentation/보험발표-figma.pptx
@@ -3123,8 +3123,8 @@
         </p:nvSpPr>
         <p:spPr>
           <a:xfrm>
-            <a:off x="914400" y="2011680"/>
-            <a:ext cx="10332720" cy="457200"/>
+            <a:off x="868680" y="2148840"/>
+            <a:ext cx="10607040" cy="2011680"/>
           </a:xfrm>
           <a:prstGeom prst="rect">
             <a:avLst/>
@@ -3139,13 +3139,25 @@
           <a:p>
             <a:pPr algn="l"/>
             <a:r>
-              <a:rPr sz="1600" b="0" spc="80">
-                <a:solidFill>
-                  <a:srgbClr val="CDBFF7"/>
-                </a:solidFill>
-                <a:latin typeface="Menlo"/>
-              </a:rPr>
-              <a:t>FINAL PRESENTATION</a:t>
+              <a:rPr sz="5600" b="1" spc="-120">
+                <a:solidFill>
+                  <a:srgbClr val="FFFFFF"/>
+                </a:solidFill>
+                <a:latin typeface="Apple SD Gothic Neo"/>
+              </a:rPr>
+              <a:t>설계대로 구현하고,</a:t>
+            </a:r>
+          </a:p>
+          <a:p>
+            <a:pPr algn="l"/>
+            <a:r>
+              <a:rPr sz="5600" b="1" spc="-120">
+                <a:solidFill>
+                  <a:srgbClr val="FFFFFF"/>
+                </a:solidFill>
+                <a:latin typeface="Apple SD Gothic Neo"/>
+              </a:rPr>
+              <a:t>AI를 통제하다</a:t>
             </a:r>
           </a:p>
         </p:txBody>
@@ -3158,8 +3170,8 @@
         </p:nvSpPr>
         <p:spPr>
           <a:xfrm>
-            <a:off x="868680" y="2514600"/>
-            <a:ext cx="10607040" cy="1554480"/>
+            <a:off x="914400" y="4434840"/>
+            <a:ext cx="10332720" cy="822960"/>
           </a:xfrm>
           <a:prstGeom prst="rect">
             <a:avLst/>
@@ -3174,42 +3186,7 @@
           <a:p>
             <a:pPr algn="l"/>
             <a:r>
-              <a:rPr sz="5000" b="1" spc="-100">
-                <a:solidFill>
-                  <a:srgbClr val="FFFFFF"/>
-                </a:solidFill>
-                <a:latin typeface="Apple SD Gothic Neo"/>
-              </a:rPr>
-              <a:t>설계대로 구현하고, AI를 통제하다</a:t>
-            </a:r>
-          </a:p>
-        </p:txBody>
-      </p:sp>
-      <p:sp>
-        <p:nvSpPr>
-          <p:cNvPr id="4" name="TextBox 3"/>
-          <p:cNvSpPr txBox="1"/>
-          <p:nvPr/>
-        </p:nvSpPr>
-        <p:spPr>
-          <a:xfrm>
-            <a:off x="914400" y="4160520"/>
-            <a:ext cx="10332720" cy="731520"/>
-          </a:xfrm>
-          <a:prstGeom prst="rect">
-            <a:avLst/>
-          </a:prstGeom>
-          <a:noFill/>
-        </p:spPr>
-        <p:txBody>
-          <a:bodyPr wrap="square" anchor="t">
-            <a:spAutoFit/>
-          </a:bodyPr>
-          <a:lstStyle/>
-          <a:p>
-            <a:pPr algn="l"/>
-            <a:r>
-              <a:rPr sz="2400" b="0" spc="-30">
+              <a:rPr sz="3000" b="0" spc="-30">
                 <a:solidFill>
                   <a:srgbClr val="CDBFF7"/>
                 </a:solidFill>
@@ -3254,8 +3231,8 @@
         </p:nvSpPr>
         <p:spPr>
           <a:xfrm>
-            <a:off x="777240" y="548640"/>
-            <a:ext cx="10607040" cy="457200"/>
+            <a:off x="749808" y="566928"/>
+            <a:ext cx="10881360" cy="1371600"/>
           </a:xfrm>
           <a:prstGeom prst="rect">
             <a:avLst/>
@@ -3270,27 +3247,71 @@
           <a:p>
             <a:pPr algn="l"/>
             <a:r>
-              <a:rPr sz="1500" b="0" spc="60">
-                <a:solidFill>
-                  <a:srgbClr val="5B5BD6"/>
-                </a:solidFill>
-                <a:latin typeface="Menlo"/>
-              </a:rPr>
-              <a:t>DESIGN = CODE</a:t>
-            </a:r>
-          </a:p>
-        </p:txBody>
-      </p:sp>
-      <p:sp>
-        <p:nvSpPr>
-          <p:cNvPr id="3" name="TextBox 2"/>
+              <a:rPr sz="5200" b="1" spc="-100">
+                <a:solidFill>
+                  <a:srgbClr val="1A1A1A"/>
+                </a:solidFill>
+                <a:latin typeface="Apple SD Gothic Neo"/>
+              </a:rPr>
+              <a:t>사용자</a:t>
+            </a:r>
+          </a:p>
+        </p:txBody>
+      </p:sp>
+      <p:sp>
+        <p:nvSpPr>
+          <p:cNvPr id="3" name="Rectangle 2"/>
+          <p:cNvSpPr/>
+          <p:nvPr/>
+        </p:nvSpPr>
+        <p:spPr>
+          <a:xfrm>
+            <a:off x="822960" y="1627632"/>
+            <a:ext cx="868680" cy="82296"/>
+          </a:xfrm>
+          <a:prstGeom prst="rect">
+            <a:avLst/>
+          </a:prstGeom>
+          <a:solidFill>
+            <a:srgbClr val="5B5BD6"/>
+          </a:solidFill>
+          <a:ln>
+            <a:noFill/>
+          </a:ln>
+          <a:effectLst/>
+        </p:spPr>
+        <p:style>
+          <a:lnRef idx="1">
+            <a:schemeClr val="accent1"/>
+          </a:lnRef>
+          <a:fillRef idx="3">
+            <a:schemeClr val="accent1"/>
+          </a:fillRef>
+          <a:effectRef idx="2">
+            <a:schemeClr val="accent1"/>
+          </a:effectRef>
+          <a:fontRef idx="minor">
+            <a:schemeClr val="lt1"/>
+          </a:fontRef>
+        </p:style>
+        <p:txBody>
+          <a:bodyPr rtlCol="0" anchor="ctr"/>
+          <a:lstStyle/>
+          <a:p>
+            <a:pPr algn="ctr"/>
+          </a:p>
+        </p:txBody>
+      </p:sp>
+      <p:sp>
+        <p:nvSpPr>
+          <p:cNvPr id="4" name="TextBox 3"/>
           <p:cNvSpPr txBox="1"/>
           <p:nvPr/>
         </p:nvSpPr>
         <p:spPr>
           <a:xfrm>
-            <a:off x="749808" y="960120"/>
-            <a:ext cx="10698480" cy="1188720"/>
+            <a:off x="777240" y="1874519"/>
+            <a:ext cx="5394960" cy="502920"/>
           </a:xfrm>
           <a:prstGeom prst="rect">
             <a:avLst/>
@@ -3303,29 +3324,29 @@
           </a:bodyPr>
           <a:lstStyle/>
           <a:p>
-            <a:pPr algn="l"/>
-            <a:r>
-              <a:rPr sz="4000" b="1" spc="-80">
-                <a:solidFill>
-                  <a:srgbClr val="1A1A1A"/>
-                </a:solidFill>
-                <a:latin typeface="Apple SD Gothic Neo"/>
-              </a:rPr>
-              <a:t>사용자</a:t>
-            </a:r>
-          </a:p>
-        </p:txBody>
-      </p:sp>
-      <p:sp>
-        <p:nvSpPr>
-          <p:cNvPr id="4" name="TextBox 3"/>
+            <a:pPr algn="ctr"/>
+            <a:r>
+              <a:rPr sz="2400" b="1" spc="-30">
+                <a:solidFill>
+                  <a:srgbClr val="5B5BD6"/>
+                </a:solidFill>
+                <a:latin typeface="Apple SD Gothic Neo"/>
+              </a:rPr>
+              <a:t>내가 그린 설계</a:t>
+            </a:r>
+          </a:p>
+        </p:txBody>
+      </p:sp>
+      <p:sp>
+        <p:nvSpPr>
+          <p:cNvPr id="5" name="TextBox 4"/>
           <p:cNvSpPr txBox="1"/>
           <p:nvPr/>
         </p:nvSpPr>
         <p:spPr>
           <a:xfrm>
-            <a:off x="777240" y="1828800"/>
-            <a:ext cx="5394960" cy="411480"/>
+            <a:off x="6035040" y="1874519"/>
+            <a:ext cx="5394960" cy="502920"/>
           </a:xfrm>
           <a:prstGeom prst="rect">
             <a:avLst/>
@@ -3340,55 +3361,20 @@
           <a:p>
             <a:pPr algn="ctr"/>
             <a:r>
-              <a:rPr sz="1400" b="0" spc="50">
-                <a:solidFill>
-                  <a:srgbClr val="6B7280"/>
-                </a:solidFill>
-                <a:latin typeface="Menlo"/>
-              </a:rPr>
-              <a:t>설계</a:t>
-            </a:r>
-          </a:p>
-        </p:txBody>
-      </p:sp>
-      <p:sp>
-        <p:nvSpPr>
-          <p:cNvPr id="5" name="TextBox 4"/>
-          <p:cNvSpPr txBox="1"/>
-          <p:nvPr/>
-        </p:nvSpPr>
-        <p:spPr>
-          <a:xfrm>
-            <a:off x="6035040" y="1828800"/>
-            <a:ext cx="5394960" cy="411480"/>
-          </a:xfrm>
-          <a:prstGeom prst="rect">
-            <a:avLst/>
-          </a:prstGeom>
-          <a:noFill/>
-        </p:spPr>
-        <p:txBody>
-          <a:bodyPr wrap="square" anchor="t">
-            <a:spAutoFit/>
-          </a:bodyPr>
-          <a:lstStyle/>
-          <a:p>
-            <a:pPr algn="ctr"/>
-            <a:r>
-              <a:rPr sz="1400" b="0" spc="50">
-                <a:solidFill>
-                  <a:srgbClr val="6B7280"/>
-                </a:solidFill>
-                <a:latin typeface="Menlo"/>
-              </a:rPr>
-              <a:t>코드 역설계</a:t>
+              <a:rPr sz="2400" b="1" spc="-30">
+                <a:solidFill>
+                  <a:srgbClr val="B5793A"/>
+                </a:solidFill>
+                <a:latin typeface="Apple SD Gothic Neo"/>
+              </a:rPr>
+              <a:t>실제 코드</a:t>
             </a:r>
           </a:p>
         </p:txBody>
       </p:sp>
       <p:pic>
         <p:nvPicPr>
-          <p:cNvPr id="6" name="Picture 5" descr="user-design.png"/>
+          <p:cNvPr id="6" name="Picture 5" descr="user.png"/>
           <p:cNvPicPr>
             <a:picLocks noChangeAspect="1"/>
           </p:cNvPicPr>
@@ -3402,8 +3388,8 @@
         </p:blipFill>
         <p:spPr>
           <a:xfrm>
-            <a:off x="2204640" y="2240280"/>
-            <a:ext cx="2540160" cy="2743200"/>
+            <a:off x="777240" y="2437384"/>
+            <a:ext cx="5394960" cy="2577592"/>
           </a:xfrm>
           <a:prstGeom prst="rect">
             <a:avLst/>
@@ -3426,8 +3412,8 @@
         </p:blipFill>
         <p:spPr>
           <a:xfrm>
-            <a:off x="7453799" y="2240280"/>
-            <a:ext cx="2557440" cy="2743200"/>
+            <a:off x="7475112" y="2377440"/>
+            <a:ext cx="2514816" cy="2697480"/>
           </a:xfrm>
           <a:prstGeom prst="rect">
             <a:avLst/>
@@ -3443,7 +3429,7 @@
         <p:spPr>
           <a:xfrm>
             <a:off x="777240" y="5166360"/>
-            <a:ext cx="5394960" cy="1188720"/>
+            <a:ext cx="5394960" cy="1325880"/>
           </a:xfrm>
           <a:prstGeom prst="roundRect">
             <a:avLst>
@@ -3478,7 +3464,7 @@
           <a:p>
             <a:pPr algn="l"/>
             <a:r>
-              <a:rPr sz="1600" b="1">
+              <a:rPr sz="2000" b="1">
                 <a:solidFill>
                   <a:srgbClr val="5B5BD6"/>
                 </a:solidFill>
@@ -3490,13 +3476,13 @@
           <a:p>
             <a:pPr algn="l"/>
             <a:r>
-              <a:rPr sz="1500" b="0">
+              <a:rPr sz="1800" b="1">
                 <a:solidFill>
                   <a:srgbClr val="1A1A1A"/>
                 </a:solidFill>
                 <a:latin typeface="Apple SD Gothic Neo"/>
               </a:rPr>
-              <a:t>상속(User→Policyholder·Employee)과 모든 필드가 동일.</a:t>
+              <a:t>고객과 직원이 '사용자'를 물려받는 뼈대가 똑같다.</a:t>
             </a:r>
           </a:p>
         </p:txBody>
@@ -3510,7 +3496,7 @@
         <p:spPr>
           <a:xfrm>
             <a:off x="6035040" y="5166360"/>
-            <a:ext cx="5394960" cy="1188720"/>
+            <a:ext cx="5394960" cy="1325880"/>
           </a:xfrm>
           <a:prstGeom prst="roundRect">
             <a:avLst>
@@ -3545,7 +3531,7 @@
           <a:p>
             <a:pPr algn="l"/>
             <a:r>
-              <a:rPr sz="1600" b="1">
+              <a:rPr sz="2000" b="1">
                 <a:solidFill>
                   <a:srgbClr val="B5793A"/>
                 </a:solidFill>
@@ -3557,13 +3543,13 @@
           <a:p>
             <a:pPr algn="l"/>
             <a:r>
-              <a:rPr sz="1500" b="0">
+              <a:rPr sz="1800" b="1">
                 <a:solidFill>
                   <a:srgbClr val="1A1A1A"/>
                 </a:solidFill>
                 <a:latin typeface="Apple SD Gothic Neo"/>
               </a:rPr>
-              <a:t>userId(String) → id(Long), birthDate Date → LocalDate.</a:t>
+              <a:t>글자로 된 번호를 숫자로, 날짜 표기만 손봤다.</a:t>
             </a:r>
           </a:p>
         </p:txBody>
@@ -3602,8 +3588,8 @@
         </p:nvSpPr>
         <p:spPr>
           <a:xfrm>
-            <a:off x="777240" y="548640"/>
-            <a:ext cx="10607040" cy="457200"/>
+            <a:off x="749808" y="566928"/>
+            <a:ext cx="10881360" cy="1371600"/>
           </a:xfrm>
           <a:prstGeom prst="rect">
             <a:avLst/>
@@ -3618,27 +3604,71 @@
           <a:p>
             <a:pPr algn="l"/>
             <a:r>
-              <a:rPr sz="1500" b="0" spc="60">
-                <a:solidFill>
-                  <a:srgbClr val="5B5BD6"/>
-                </a:solidFill>
-                <a:latin typeface="Menlo"/>
-              </a:rPr>
-              <a:t>DESIGN = CODE</a:t>
-            </a:r>
-          </a:p>
-        </p:txBody>
-      </p:sp>
-      <p:sp>
-        <p:nvSpPr>
-          <p:cNvPr id="3" name="TextBox 2"/>
+              <a:rPr sz="5200" b="1" spc="-100">
+                <a:solidFill>
+                  <a:srgbClr val="1A1A1A"/>
+                </a:solidFill>
+                <a:latin typeface="Apple SD Gothic Neo"/>
+              </a:rPr>
+              <a:t>상품</a:t>
+            </a:r>
+          </a:p>
+        </p:txBody>
+      </p:sp>
+      <p:sp>
+        <p:nvSpPr>
+          <p:cNvPr id="3" name="Rectangle 2"/>
+          <p:cNvSpPr/>
+          <p:nvPr/>
+        </p:nvSpPr>
+        <p:spPr>
+          <a:xfrm>
+            <a:off x="822960" y="1627632"/>
+            <a:ext cx="868680" cy="82296"/>
+          </a:xfrm>
+          <a:prstGeom prst="rect">
+            <a:avLst/>
+          </a:prstGeom>
+          <a:solidFill>
+            <a:srgbClr val="5B5BD6"/>
+          </a:solidFill>
+          <a:ln>
+            <a:noFill/>
+          </a:ln>
+          <a:effectLst/>
+        </p:spPr>
+        <p:style>
+          <a:lnRef idx="1">
+            <a:schemeClr val="accent1"/>
+          </a:lnRef>
+          <a:fillRef idx="3">
+            <a:schemeClr val="accent1"/>
+          </a:fillRef>
+          <a:effectRef idx="2">
+            <a:schemeClr val="accent1"/>
+          </a:effectRef>
+          <a:fontRef idx="minor">
+            <a:schemeClr val="lt1"/>
+          </a:fontRef>
+        </p:style>
+        <p:txBody>
+          <a:bodyPr rtlCol="0" anchor="ctr"/>
+          <a:lstStyle/>
+          <a:p>
+            <a:pPr algn="ctr"/>
+          </a:p>
+        </p:txBody>
+      </p:sp>
+      <p:sp>
+        <p:nvSpPr>
+          <p:cNvPr id="4" name="TextBox 3"/>
           <p:cNvSpPr txBox="1"/>
           <p:nvPr/>
         </p:nvSpPr>
         <p:spPr>
           <a:xfrm>
-            <a:off x="749808" y="960120"/>
-            <a:ext cx="10698480" cy="1188720"/>
+            <a:off x="777240" y="1874519"/>
+            <a:ext cx="5394960" cy="502920"/>
           </a:xfrm>
           <a:prstGeom prst="rect">
             <a:avLst/>
@@ -3651,29 +3681,29 @@
           </a:bodyPr>
           <a:lstStyle/>
           <a:p>
-            <a:pPr algn="l"/>
-            <a:r>
-              <a:rPr sz="4000" b="1" spc="-80">
-                <a:solidFill>
-                  <a:srgbClr val="1A1A1A"/>
-                </a:solidFill>
-                <a:latin typeface="Apple SD Gothic Neo"/>
-              </a:rPr>
-              <a:t>상품</a:t>
-            </a:r>
-          </a:p>
-        </p:txBody>
-      </p:sp>
-      <p:sp>
-        <p:nvSpPr>
-          <p:cNvPr id="4" name="TextBox 3"/>
+            <a:pPr algn="ctr"/>
+            <a:r>
+              <a:rPr sz="2400" b="1" spc="-30">
+                <a:solidFill>
+                  <a:srgbClr val="5B5BD6"/>
+                </a:solidFill>
+                <a:latin typeface="Apple SD Gothic Neo"/>
+              </a:rPr>
+              <a:t>내가 그린 설계</a:t>
+            </a:r>
+          </a:p>
+        </p:txBody>
+      </p:sp>
+      <p:sp>
+        <p:nvSpPr>
+          <p:cNvPr id="5" name="TextBox 4"/>
           <p:cNvSpPr txBox="1"/>
           <p:nvPr/>
         </p:nvSpPr>
         <p:spPr>
           <a:xfrm>
-            <a:off x="777240" y="1828800"/>
-            <a:ext cx="5394960" cy="411480"/>
+            <a:off x="6035040" y="1874519"/>
+            <a:ext cx="5394960" cy="502920"/>
           </a:xfrm>
           <a:prstGeom prst="rect">
             <a:avLst/>
@@ -3688,55 +3718,20 @@
           <a:p>
             <a:pPr algn="ctr"/>
             <a:r>
-              <a:rPr sz="1400" b="0" spc="50">
-                <a:solidFill>
-                  <a:srgbClr val="6B7280"/>
-                </a:solidFill>
-                <a:latin typeface="Menlo"/>
-              </a:rPr>
-              <a:t>설계</a:t>
-            </a:r>
-          </a:p>
-        </p:txBody>
-      </p:sp>
-      <p:sp>
-        <p:nvSpPr>
-          <p:cNvPr id="5" name="TextBox 4"/>
-          <p:cNvSpPr txBox="1"/>
-          <p:nvPr/>
-        </p:nvSpPr>
-        <p:spPr>
-          <a:xfrm>
-            <a:off x="6035040" y="1828800"/>
-            <a:ext cx="5394960" cy="411480"/>
-          </a:xfrm>
-          <a:prstGeom prst="rect">
-            <a:avLst/>
-          </a:prstGeom>
-          <a:noFill/>
-        </p:spPr>
-        <p:txBody>
-          <a:bodyPr wrap="square" anchor="t">
-            <a:spAutoFit/>
-          </a:bodyPr>
-          <a:lstStyle/>
-          <a:p>
-            <a:pPr algn="ctr"/>
-            <a:r>
-              <a:rPr sz="1400" b="0" spc="50">
-                <a:solidFill>
-                  <a:srgbClr val="6B7280"/>
-                </a:solidFill>
-                <a:latin typeface="Menlo"/>
-              </a:rPr>
-              <a:t>코드 역설계</a:t>
+              <a:rPr sz="2400" b="1" spc="-30">
+                <a:solidFill>
+                  <a:srgbClr val="B5793A"/>
+                </a:solidFill>
+                <a:latin typeface="Apple SD Gothic Neo"/>
+              </a:rPr>
+              <a:t>실제 코드</a:t>
             </a:r>
           </a:p>
         </p:txBody>
       </p:sp>
       <p:pic>
         <p:nvPicPr>
-          <p:cNvPr id="6" name="Picture 5" descr="product-design.png"/>
+          <p:cNvPr id="6" name="Picture 5" descr="product.png"/>
           <p:cNvPicPr>
             <a:picLocks noChangeAspect="1"/>
           </p:cNvPicPr>
@@ -3750,8 +3745,8 @@
         </p:blipFill>
         <p:spPr>
           <a:xfrm>
-            <a:off x="1069050" y="2240280"/>
-            <a:ext cx="4811339" cy="2743200"/>
+            <a:off x="777240" y="2385236"/>
+            <a:ext cx="5394960" cy="2681887"/>
           </a:xfrm>
           <a:prstGeom prst="rect">
             <a:avLst/>
@@ -3774,8 +3769,8 @@
         </p:blipFill>
         <p:spPr>
           <a:xfrm>
-            <a:off x="6326850" y="2240280"/>
-            <a:ext cx="4811339" cy="2743200"/>
+            <a:off x="6366944" y="2377440"/>
+            <a:ext cx="4731150" cy="2697480"/>
           </a:xfrm>
           <a:prstGeom prst="rect">
             <a:avLst/>
@@ -3791,7 +3786,7 @@
         <p:spPr>
           <a:xfrm>
             <a:off x="777240" y="5166360"/>
-            <a:ext cx="5394960" cy="1188720"/>
+            <a:ext cx="5394960" cy="1325880"/>
           </a:xfrm>
           <a:prstGeom prst="roundRect">
             <a:avLst>
@@ -3826,7 +3821,7 @@
           <a:p>
             <a:pPr algn="l"/>
             <a:r>
-              <a:rPr sz="1600" b="1">
+              <a:rPr sz="2000" b="1">
                 <a:solidFill>
                   <a:srgbClr val="5B5BD6"/>
                 </a:solidFill>
@@ -3838,13 +3833,13 @@
           <a:p>
             <a:pPr algn="l"/>
             <a:r>
-              <a:rPr sz="1500" b="0">
+              <a:rPr sz="1800" b="1">
                 <a:solidFill>
                   <a:srgbClr val="1A1A1A"/>
                 </a:solidFill>
                 <a:latin typeface="Apple SD Gothic Neo"/>
               </a:rPr>
-              <a:t>상품 상속과 CoverageItem 합성 관계가 동일.</a:t>
+              <a:t>상품을 의료·자동차가 물려받고 보장 항목을 품는 구조가 똑같다.</a:t>
             </a:r>
           </a:p>
         </p:txBody>
@@ -3858,7 +3853,7 @@
         <p:spPr>
           <a:xfrm>
             <a:off x="6035040" y="5166360"/>
-            <a:ext cx="5394960" cy="1188720"/>
+            <a:ext cx="5394960" cy="1325880"/>
           </a:xfrm>
           <a:prstGeom prst="roundRect">
             <a:avLst>
@@ -3893,7 +3888,7 @@
           <a:p>
             <a:pPr algn="l"/>
             <a:r>
-              <a:rPr sz="1600" b="1">
+              <a:rPr sz="2000" b="1">
                 <a:solidFill>
                   <a:srgbClr val="B5793A"/>
                 </a:solidFill>
@@ -3905,13 +3900,13 @@
           <a:p>
             <a:pPr algn="l"/>
             <a:r>
-              <a:rPr sz="1500" b="0">
+              <a:rPr sz="1800" b="1">
                 <a:solidFill>
                   <a:srgbClr val="1A1A1A"/>
                 </a:solidFill>
                 <a:latin typeface="Apple SD Gothic Neo"/>
               </a:rPr>
-              <a:t>productId·itemId(String) → id(Long).</a:t>
+              <a:t>번호 표기만 손봤다.</a:t>
             </a:r>
           </a:p>
         </p:txBody>
@@ -3950,8 +3945,8 @@
         </p:nvSpPr>
         <p:spPr>
           <a:xfrm>
-            <a:off x="777240" y="548640"/>
-            <a:ext cx="10607040" cy="457200"/>
+            <a:off x="749808" y="566928"/>
+            <a:ext cx="10881360" cy="1371600"/>
           </a:xfrm>
           <a:prstGeom prst="rect">
             <a:avLst/>
@@ -3966,27 +3961,71 @@
           <a:p>
             <a:pPr algn="l"/>
             <a:r>
-              <a:rPr sz="1500" b="0" spc="60">
-                <a:solidFill>
-                  <a:srgbClr val="5B5BD6"/>
-                </a:solidFill>
-                <a:latin typeface="Menlo"/>
-              </a:rPr>
-              <a:t>DESIGN = CODE</a:t>
-            </a:r>
-          </a:p>
-        </p:txBody>
-      </p:sp>
-      <p:sp>
-        <p:nvSpPr>
-          <p:cNvPr id="3" name="TextBox 2"/>
+              <a:rPr sz="5200" b="1" spc="-100">
+                <a:solidFill>
+                  <a:srgbClr val="1A1A1A"/>
+                </a:solidFill>
+                <a:latin typeface="Apple SD Gothic Neo"/>
+              </a:rPr>
+              <a:t>계약</a:t>
+            </a:r>
+          </a:p>
+        </p:txBody>
+      </p:sp>
+      <p:sp>
+        <p:nvSpPr>
+          <p:cNvPr id="3" name="Rectangle 2"/>
+          <p:cNvSpPr/>
+          <p:nvPr/>
+        </p:nvSpPr>
+        <p:spPr>
+          <a:xfrm>
+            <a:off x="822960" y="1627632"/>
+            <a:ext cx="868680" cy="82296"/>
+          </a:xfrm>
+          <a:prstGeom prst="rect">
+            <a:avLst/>
+          </a:prstGeom>
+          <a:solidFill>
+            <a:srgbClr val="5B5BD6"/>
+          </a:solidFill>
+          <a:ln>
+            <a:noFill/>
+          </a:ln>
+          <a:effectLst/>
+        </p:spPr>
+        <p:style>
+          <a:lnRef idx="1">
+            <a:schemeClr val="accent1"/>
+          </a:lnRef>
+          <a:fillRef idx="3">
+            <a:schemeClr val="accent1"/>
+          </a:fillRef>
+          <a:effectRef idx="2">
+            <a:schemeClr val="accent1"/>
+          </a:effectRef>
+          <a:fontRef idx="minor">
+            <a:schemeClr val="lt1"/>
+          </a:fontRef>
+        </p:style>
+        <p:txBody>
+          <a:bodyPr rtlCol="0" anchor="ctr"/>
+          <a:lstStyle/>
+          <a:p>
+            <a:pPr algn="ctr"/>
+          </a:p>
+        </p:txBody>
+      </p:sp>
+      <p:sp>
+        <p:nvSpPr>
+          <p:cNvPr id="4" name="TextBox 3"/>
           <p:cNvSpPr txBox="1"/>
           <p:nvPr/>
         </p:nvSpPr>
         <p:spPr>
           <a:xfrm>
-            <a:off x="749808" y="960120"/>
-            <a:ext cx="10698480" cy="1188720"/>
+            <a:off x="777240" y="1874519"/>
+            <a:ext cx="5394960" cy="502920"/>
           </a:xfrm>
           <a:prstGeom prst="rect">
             <a:avLst/>
@@ -3999,29 +4038,29 @@
           </a:bodyPr>
           <a:lstStyle/>
           <a:p>
-            <a:pPr algn="l"/>
-            <a:r>
-              <a:rPr sz="4000" b="1" spc="-80">
-                <a:solidFill>
-                  <a:srgbClr val="1A1A1A"/>
-                </a:solidFill>
-                <a:latin typeface="Apple SD Gothic Neo"/>
-              </a:rPr>
-              <a:t>계약</a:t>
-            </a:r>
-          </a:p>
-        </p:txBody>
-      </p:sp>
-      <p:sp>
-        <p:nvSpPr>
-          <p:cNvPr id="4" name="TextBox 3"/>
+            <a:pPr algn="ctr"/>
+            <a:r>
+              <a:rPr sz="2400" b="1" spc="-30">
+                <a:solidFill>
+                  <a:srgbClr val="5B5BD6"/>
+                </a:solidFill>
+                <a:latin typeface="Apple SD Gothic Neo"/>
+              </a:rPr>
+              <a:t>내가 그린 설계</a:t>
+            </a:r>
+          </a:p>
+        </p:txBody>
+      </p:sp>
+      <p:sp>
+        <p:nvSpPr>
+          <p:cNvPr id="5" name="TextBox 4"/>
           <p:cNvSpPr txBox="1"/>
           <p:nvPr/>
         </p:nvSpPr>
         <p:spPr>
           <a:xfrm>
-            <a:off x="777240" y="1828800"/>
-            <a:ext cx="5394960" cy="411480"/>
+            <a:off x="6035040" y="1874519"/>
+            <a:ext cx="5394960" cy="502920"/>
           </a:xfrm>
           <a:prstGeom prst="rect">
             <a:avLst/>
@@ -4036,55 +4075,20 @@
           <a:p>
             <a:pPr algn="ctr"/>
             <a:r>
-              <a:rPr sz="1400" b="0" spc="50">
-                <a:solidFill>
-                  <a:srgbClr val="6B7280"/>
-                </a:solidFill>
-                <a:latin typeface="Menlo"/>
-              </a:rPr>
-              <a:t>설계</a:t>
-            </a:r>
-          </a:p>
-        </p:txBody>
-      </p:sp>
-      <p:sp>
-        <p:nvSpPr>
-          <p:cNvPr id="5" name="TextBox 4"/>
-          <p:cNvSpPr txBox="1"/>
-          <p:nvPr/>
-        </p:nvSpPr>
-        <p:spPr>
-          <a:xfrm>
-            <a:off x="6035040" y="1828800"/>
-            <a:ext cx="5394960" cy="411480"/>
-          </a:xfrm>
-          <a:prstGeom prst="rect">
-            <a:avLst/>
-          </a:prstGeom>
-          <a:noFill/>
-        </p:spPr>
-        <p:txBody>
-          <a:bodyPr wrap="square" anchor="t">
-            <a:spAutoFit/>
-          </a:bodyPr>
-          <a:lstStyle/>
-          <a:p>
-            <a:pPr algn="ctr"/>
-            <a:r>
-              <a:rPr sz="1400" b="0" spc="50">
-                <a:solidFill>
-                  <a:srgbClr val="6B7280"/>
-                </a:solidFill>
-                <a:latin typeface="Menlo"/>
-              </a:rPr>
-              <a:t>코드 역설계</a:t>
+              <a:rPr sz="2400" b="1" spc="-30">
+                <a:solidFill>
+                  <a:srgbClr val="B5793A"/>
+                </a:solidFill>
+                <a:latin typeface="Apple SD Gothic Neo"/>
+              </a:rPr>
+              <a:t>실제 코드</a:t>
             </a:r>
           </a:p>
         </p:txBody>
       </p:sp>
       <p:pic>
         <p:nvPicPr>
-          <p:cNvPr id="6" name="Picture 5" descr="contract-design.png"/>
+          <p:cNvPr id="6" name="Picture 5" descr="contract.png"/>
           <p:cNvPicPr>
             <a:picLocks noChangeAspect="1"/>
           </p:cNvPicPr>
@@ -4098,8 +4102,8 @@
         </p:blipFill>
         <p:spPr>
           <a:xfrm>
-            <a:off x="2286755" y="2240280"/>
-            <a:ext cx="2375928" cy="2743200"/>
+            <a:off x="2436404" y="2377440"/>
+            <a:ext cx="2076631" cy="2697480"/>
           </a:xfrm>
           <a:prstGeom prst="rect">
             <a:avLst/>
@@ -4122,8 +4126,8 @@
         </p:blipFill>
         <p:spPr>
           <a:xfrm>
-            <a:off x="6835986" y="2240280"/>
-            <a:ext cx="3793066" cy="2743200"/>
+            <a:off x="6867595" y="2377440"/>
+            <a:ext cx="3729848" cy="2697480"/>
           </a:xfrm>
           <a:prstGeom prst="rect">
             <a:avLst/>
@@ -4139,7 +4143,7 @@
         <p:spPr>
           <a:xfrm>
             <a:off x="777240" y="5166360"/>
-            <a:ext cx="5394960" cy="1188720"/>
+            <a:ext cx="5394960" cy="1325880"/>
           </a:xfrm>
           <a:prstGeom prst="roundRect">
             <a:avLst>
@@ -4174,7 +4178,7 @@
           <a:p>
             <a:pPr algn="l"/>
             <a:r>
-              <a:rPr sz="1600" b="1">
+              <a:rPr sz="2000" b="1">
                 <a:solidFill>
                   <a:srgbClr val="5B5BD6"/>
                 </a:solidFill>
@@ -4186,13 +4190,13 @@
           <a:p>
             <a:pPr algn="l"/>
             <a:r>
-              <a:rPr sz="1500" b="0">
+              <a:rPr sz="1800" b="1">
                 <a:solidFill>
                   <a:srgbClr val="1A1A1A"/>
                 </a:solidFill>
                 <a:latin typeface="Apple SD Gothic Neo"/>
               </a:rPr>
-              <a:t>계약–납부–고지 합성 구조가 동일.</a:t>
+              <a:t>계약이 납부·고지서를 품는 구조가 똑같다.</a:t>
             </a:r>
           </a:p>
         </p:txBody>
@@ -4206,7 +4210,7 @@
         <p:spPr>
           <a:xfrm>
             <a:off x="6035040" y="5166360"/>
-            <a:ext cx="5394960" cy="1188720"/>
+            <a:ext cx="5394960" cy="1325880"/>
           </a:xfrm>
           <a:prstGeom prst="roundRect">
             <a:avLst>
@@ -4241,7 +4245,7 @@
           <a:p>
             <a:pPr algn="l"/>
             <a:r>
-              <a:rPr sz="1600" b="1">
+              <a:rPr sz="2000" b="1">
                 <a:solidFill>
                   <a:srgbClr val="B5793A"/>
                 </a:solidFill>
@@ -4253,13 +4257,13 @@
           <a:p>
             <a:pPr algn="l"/>
             <a:r>
-              <a:rPr sz="1500" b="0">
+              <a:rPr sz="1800" b="1">
                 <a:solidFill>
                   <a:srgbClr val="1A1A1A"/>
                 </a:solidFill>
                 <a:latin typeface="Apple SD Gothic Neo"/>
               </a:rPr>
-              <a:t>자동이체 정보 AutoDebit 추가, 날짜 타입 변경.</a:t>
+              <a:t>자동이체 정보를 더했다.</a:t>
             </a:r>
           </a:p>
         </p:txBody>
@@ -4298,8 +4302,8 @@
         </p:nvSpPr>
         <p:spPr>
           <a:xfrm>
-            <a:off x="777240" y="548640"/>
-            <a:ext cx="10607040" cy="457200"/>
+            <a:off x="749808" y="566928"/>
+            <a:ext cx="10881360" cy="1371600"/>
           </a:xfrm>
           <a:prstGeom prst="rect">
             <a:avLst/>
@@ -4314,27 +4318,71 @@
           <a:p>
             <a:pPr algn="l"/>
             <a:r>
-              <a:rPr sz="1500" b="0" spc="60">
-                <a:solidFill>
-                  <a:srgbClr val="5B5BD6"/>
-                </a:solidFill>
-                <a:latin typeface="Menlo"/>
-              </a:rPr>
-              <a:t>DESIGN = CODE</a:t>
-            </a:r>
-          </a:p>
-        </p:txBody>
-      </p:sp>
-      <p:sp>
-        <p:nvSpPr>
-          <p:cNvPr id="3" name="TextBox 2"/>
+              <a:rPr sz="5200" b="1" spc="-100">
+                <a:solidFill>
+                  <a:srgbClr val="1A1A1A"/>
+                </a:solidFill>
+                <a:latin typeface="Apple SD Gothic Neo"/>
+              </a:rPr>
+              <a:t>청구</a:t>
+            </a:r>
+          </a:p>
+        </p:txBody>
+      </p:sp>
+      <p:sp>
+        <p:nvSpPr>
+          <p:cNvPr id="3" name="Rectangle 2"/>
+          <p:cNvSpPr/>
+          <p:nvPr/>
+        </p:nvSpPr>
+        <p:spPr>
+          <a:xfrm>
+            <a:off x="822960" y="1627632"/>
+            <a:ext cx="868680" cy="82296"/>
+          </a:xfrm>
+          <a:prstGeom prst="rect">
+            <a:avLst/>
+          </a:prstGeom>
+          <a:solidFill>
+            <a:srgbClr val="5B5BD6"/>
+          </a:solidFill>
+          <a:ln>
+            <a:noFill/>
+          </a:ln>
+          <a:effectLst/>
+        </p:spPr>
+        <p:style>
+          <a:lnRef idx="1">
+            <a:schemeClr val="accent1"/>
+          </a:lnRef>
+          <a:fillRef idx="3">
+            <a:schemeClr val="accent1"/>
+          </a:fillRef>
+          <a:effectRef idx="2">
+            <a:schemeClr val="accent1"/>
+          </a:effectRef>
+          <a:fontRef idx="minor">
+            <a:schemeClr val="lt1"/>
+          </a:fontRef>
+        </p:style>
+        <p:txBody>
+          <a:bodyPr rtlCol="0" anchor="ctr"/>
+          <a:lstStyle/>
+          <a:p>
+            <a:pPr algn="ctr"/>
+          </a:p>
+        </p:txBody>
+      </p:sp>
+      <p:sp>
+        <p:nvSpPr>
+          <p:cNvPr id="4" name="TextBox 3"/>
           <p:cNvSpPr txBox="1"/>
           <p:nvPr/>
         </p:nvSpPr>
         <p:spPr>
           <a:xfrm>
-            <a:off x="749808" y="960120"/>
-            <a:ext cx="10698480" cy="1188720"/>
+            <a:off x="777240" y="1874519"/>
+            <a:ext cx="5394960" cy="502920"/>
           </a:xfrm>
           <a:prstGeom prst="rect">
             <a:avLst/>
@@ -4347,29 +4395,29 @@
           </a:bodyPr>
           <a:lstStyle/>
           <a:p>
-            <a:pPr algn="l"/>
-            <a:r>
-              <a:rPr sz="4000" b="1" spc="-80">
-                <a:solidFill>
-                  <a:srgbClr val="1A1A1A"/>
-                </a:solidFill>
-                <a:latin typeface="Apple SD Gothic Neo"/>
-              </a:rPr>
-              <a:t>청구</a:t>
-            </a:r>
-          </a:p>
-        </p:txBody>
-      </p:sp>
-      <p:sp>
-        <p:nvSpPr>
-          <p:cNvPr id="4" name="TextBox 3"/>
+            <a:pPr algn="ctr"/>
+            <a:r>
+              <a:rPr sz="2400" b="1" spc="-30">
+                <a:solidFill>
+                  <a:srgbClr val="5B5BD6"/>
+                </a:solidFill>
+                <a:latin typeface="Apple SD Gothic Neo"/>
+              </a:rPr>
+              <a:t>내가 그린 설계</a:t>
+            </a:r>
+          </a:p>
+        </p:txBody>
+      </p:sp>
+      <p:sp>
+        <p:nvSpPr>
+          <p:cNvPr id="5" name="TextBox 4"/>
           <p:cNvSpPr txBox="1"/>
           <p:nvPr/>
         </p:nvSpPr>
         <p:spPr>
           <a:xfrm>
-            <a:off x="777240" y="1828800"/>
-            <a:ext cx="5394960" cy="411480"/>
+            <a:off x="6035040" y="1874519"/>
+            <a:ext cx="5394960" cy="502920"/>
           </a:xfrm>
           <a:prstGeom prst="rect">
             <a:avLst/>
@@ -4384,55 +4432,20 @@
           <a:p>
             <a:pPr algn="ctr"/>
             <a:r>
-              <a:rPr sz="1400" b="0" spc="50">
-                <a:solidFill>
-                  <a:srgbClr val="6B7280"/>
-                </a:solidFill>
-                <a:latin typeface="Menlo"/>
-              </a:rPr>
-              <a:t>설계</a:t>
-            </a:r>
-          </a:p>
-        </p:txBody>
-      </p:sp>
-      <p:sp>
-        <p:nvSpPr>
-          <p:cNvPr id="5" name="TextBox 4"/>
-          <p:cNvSpPr txBox="1"/>
-          <p:nvPr/>
-        </p:nvSpPr>
-        <p:spPr>
-          <a:xfrm>
-            <a:off x="6035040" y="1828800"/>
-            <a:ext cx="5394960" cy="411480"/>
-          </a:xfrm>
-          <a:prstGeom prst="rect">
-            <a:avLst/>
-          </a:prstGeom>
-          <a:noFill/>
-        </p:spPr>
-        <p:txBody>
-          <a:bodyPr wrap="square" anchor="t">
-            <a:spAutoFit/>
-          </a:bodyPr>
-          <a:lstStyle/>
-          <a:p>
-            <a:pPr algn="ctr"/>
-            <a:r>
-              <a:rPr sz="1400" b="0" spc="50">
-                <a:solidFill>
-                  <a:srgbClr val="6B7280"/>
-                </a:solidFill>
-                <a:latin typeface="Menlo"/>
-              </a:rPr>
-              <a:t>코드 역설계</a:t>
+              <a:rPr sz="2400" b="1" spc="-30">
+                <a:solidFill>
+                  <a:srgbClr val="B5793A"/>
+                </a:solidFill>
+                <a:latin typeface="Apple SD Gothic Neo"/>
+              </a:rPr>
+              <a:t>실제 코드</a:t>
             </a:r>
           </a:p>
         </p:txBody>
       </p:sp>
       <p:pic>
         <p:nvPicPr>
-          <p:cNvPr id="6" name="Picture 5" descr="claim-design.png"/>
+          <p:cNvPr id="6" name="Picture 5" descr="claim.png"/>
           <p:cNvPicPr>
             <a:picLocks noChangeAspect="1"/>
           </p:cNvPicPr>
@@ -4446,8 +4459,8 @@
         </p:blipFill>
         <p:spPr>
           <a:xfrm>
-            <a:off x="1867340" y="2240280"/>
-            <a:ext cx="3214758" cy="2743200"/>
+            <a:off x="1270681" y="2377440"/>
+            <a:ext cx="4408077" cy="2697480"/>
           </a:xfrm>
           <a:prstGeom prst="rect">
             <a:avLst/>
@@ -4470,8 +4483,8 @@
         </p:blipFill>
         <p:spPr>
           <a:xfrm>
-            <a:off x="7563762" y="2240280"/>
-            <a:ext cx="2337515" cy="2743200"/>
+            <a:off x="7583241" y="2377440"/>
+            <a:ext cx="2298556" cy="2697480"/>
           </a:xfrm>
           <a:prstGeom prst="rect">
             <a:avLst/>
@@ -4487,7 +4500,7 @@
         <p:spPr>
           <a:xfrm>
             <a:off x="777240" y="5166360"/>
-            <a:ext cx="5394960" cy="1188720"/>
+            <a:ext cx="5394960" cy="1325880"/>
           </a:xfrm>
           <a:prstGeom prst="roundRect">
             <a:avLst>
@@ -4522,7 +4535,7 @@
           <a:p>
             <a:pPr algn="l"/>
             <a:r>
-              <a:rPr sz="1600" b="1">
+              <a:rPr sz="2000" b="1">
                 <a:solidFill>
                   <a:srgbClr val="5B5BD6"/>
                 </a:solidFill>
@@ -4534,13 +4547,13 @@
           <a:p>
             <a:pPr algn="l"/>
             <a:r>
-              <a:rPr sz="1500" b="0">
+              <a:rPr sz="1800" b="1">
                 <a:solidFill>
                   <a:srgbClr val="1A1A1A"/>
                 </a:solidFill>
                 <a:latin typeface="Apple SD Gothic Neo"/>
               </a:rPr>
-              <a:t>Claim 상속(의료/자동차)과 필드가 동일.</a:t>
+              <a:t>청구를 의료·자동차가 물려받는 뼈대가 똑같다.</a:t>
             </a:r>
           </a:p>
         </p:txBody>
@@ -4554,7 +4567,7 @@
         <p:spPr>
           <a:xfrm>
             <a:off x="6035040" y="5166360"/>
-            <a:ext cx="5394960" cy="1188720"/>
+            <a:ext cx="5394960" cy="1325880"/>
           </a:xfrm>
           <a:prstGeom prst="roundRect">
             <a:avLst>
@@ -4589,7 +4602,7 @@
           <a:p>
             <a:pPr algn="l"/>
             <a:r>
-              <a:rPr sz="1600" b="1">
+              <a:rPr sz="2000" b="1">
                 <a:solidFill>
                   <a:srgbClr val="B5793A"/>
                 </a:solidFill>
@@ -4601,13 +4614,13 @@
           <a:p>
             <a:pPr algn="l"/>
             <a:r>
-              <a:rPr sz="1500" b="0">
+              <a:rPr sz="1800" b="1">
                 <a:solidFill>
                   <a:srgbClr val="1A1A1A"/>
                 </a:solidFill>
                 <a:latin typeface="Apple SD Gothic Neo"/>
               </a:rPr>
-              <a:t>첨부파일 ClaimAttachment 추가, ClaimStatus 4값 → 6값.</a:t>
+              <a:t>첨부파일을 더하고, 상태를 4개→6개로 늘려 송금 결과까지 추적.</a:t>
             </a:r>
           </a:p>
         </p:txBody>
@@ -4646,8 +4659,8 @@
         </p:nvSpPr>
         <p:spPr>
           <a:xfrm>
-            <a:off x="777240" y="548640"/>
-            <a:ext cx="10607040" cy="457200"/>
+            <a:off x="749808" y="566928"/>
+            <a:ext cx="10881360" cy="1371600"/>
           </a:xfrm>
           <a:prstGeom prst="rect">
             <a:avLst/>
@@ -4662,49 +4675,58 @@
           <a:p>
             <a:pPr algn="l"/>
             <a:r>
-              <a:rPr sz="1500" b="0" spc="60">
-                <a:solidFill>
-                  <a:srgbClr val="5B5BD6"/>
-                </a:solidFill>
-                <a:latin typeface="Menlo"/>
-              </a:rPr>
-              <a:t>DESIGN = CODE</a:t>
-            </a:r>
-          </a:p>
-        </p:txBody>
-      </p:sp>
-      <p:sp>
-        <p:nvSpPr>
-          <p:cNvPr id="3" name="TextBox 2"/>
-          <p:cNvSpPr txBox="1"/>
-          <p:nvPr/>
-        </p:nvSpPr>
-        <p:spPr>
-          <a:xfrm>
-            <a:off x="749808" y="960120"/>
-            <a:ext cx="10698480" cy="1188720"/>
+              <a:rPr sz="5200" b="1" spc="-100">
+                <a:solidFill>
+                  <a:srgbClr val="1A1A1A"/>
+                </a:solidFill>
+                <a:latin typeface="Apple SD Gothic Neo"/>
+              </a:rPr>
+              <a:t>청구 상태값</a:t>
+            </a:r>
+          </a:p>
+        </p:txBody>
+      </p:sp>
+      <p:sp>
+        <p:nvSpPr>
+          <p:cNvPr id="3" name="Rectangle 2"/>
+          <p:cNvSpPr/>
+          <p:nvPr/>
+        </p:nvSpPr>
+        <p:spPr>
+          <a:xfrm>
+            <a:off x="822960" y="1627632"/>
+            <a:ext cx="868680" cy="82296"/>
           </a:xfrm>
           <a:prstGeom prst="rect">
             <a:avLst/>
           </a:prstGeom>
-          <a:noFill/>
-        </p:spPr>
-        <p:txBody>
-          <a:bodyPr wrap="square" anchor="t">
-            <a:spAutoFit/>
-          </a:bodyPr>
-          <a:lstStyle/>
-          <a:p>
-            <a:pPr algn="l"/>
-            <a:r>
-              <a:rPr sz="4000" b="1" spc="-80">
-                <a:solidFill>
-                  <a:srgbClr val="1A1A1A"/>
-                </a:solidFill>
-                <a:latin typeface="Apple SD Gothic Neo"/>
-              </a:rPr>
-              <a:t>청구 상태값</a:t>
-            </a:r>
+          <a:solidFill>
+            <a:srgbClr val="5B5BD6"/>
+          </a:solidFill>
+          <a:ln>
+            <a:noFill/>
+          </a:ln>
+          <a:effectLst/>
+        </p:spPr>
+        <p:style>
+          <a:lnRef idx="1">
+            <a:schemeClr val="accent1"/>
+          </a:lnRef>
+          <a:fillRef idx="3">
+            <a:schemeClr val="accent1"/>
+          </a:fillRef>
+          <a:effectRef idx="2">
+            <a:schemeClr val="accent1"/>
+          </a:effectRef>
+          <a:fontRef idx="minor">
+            <a:schemeClr val="lt1"/>
+          </a:fontRef>
+        </p:style>
+        <p:txBody>
+          <a:bodyPr rtlCol="0" anchor="ctr"/>
+          <a:lstStyle/>
+          <a:p>
+            <a:pPr algn="ctr"/>
           </a:p>
         </p:txBody>
       </p:sp>
@@ -4716,8 +4738,8 @@
         </p:nvSpPr>
         <p:spPr>
           <a:xfrm>
-            <a:off x="868680" y="2286000"/>
-            <a:ext cx="10424160" cy="1828800"/>
+            <a:off x="868680" y="2377440"/>
+            <a:ext cx="10424160" cy="1920240"/>
           </a:xfrm>
           <a:prstGeom prst="roundRect">
             <a:avLst>
@@ -4762,8 +4784,8 @@
         </p:nvSpPr>
         <p:spPr>
           <a:xfrm>
-            <a:off x="1188720" y="2468880"/>
-            <a:ext cx="9875520" cy="1554480"/>
+            <a:off x="1188720" y="2560320"/>
+            <a:ext cx="9875520" cy="1645920"/>
           </a:xfrm>
           <a:prstGeom prst="rect">
             <a:avLst/>
@@ -4778,7 +4800,7 @@
           <a:p>
             <a:pPr algn="l"/>
             <a:r>
-              <a:rPr sz="1800" b="0">
+              <a:rPr sz="1900" b="0">
                 <a:solidFill>
                   <a:srgbClr val="1A1A1A"/>
                 </a:solidFill>
@@ -4790,31 +4812,31 @@
           <a:p>
             <a:pPr algn="l"/>
             <a:r>
-              <a:rPr sz="1800" b="0">
+              <a:rPr sz="1900" b="0">
                 <a:solidFill>
                   <a:srgbClr val="1A1A1A"/>
                 </a:solidFill>
                 <a:latin typeface="Menlo"/>
               </a:rPr>
-              <a:t>    PENDING, IN_REVIEW, APPROVED, REJECTED,   // 설계 4값</a:t>
+              <a:t>    PENDING, IN_REVIEW, APPROVED, REJECTED,   // 설계 4개</a:t>
             </a:r>
           </a:p>
           <a:p>
             <a:pPr algn="l"/>
             <a:r>
-              <a:rPr sz="1800" b="0">
+              <a:rPr sz="1900" b="0">
                 <a:solidFill>
                   <a:srgbClr val="1A1A1A"/>
                 </a:solidFill>
                 <a:latin typeface="Menlo"/>
               </a:rPr>
-              <a:t>    COMPLETED, FAILED                         // 구현 추가: 송금 성공·실패</a:t>
+              <a:t>    COMPLETED, FAILED                         // 구현에서 추가: 송금 성공·실패</a:t>
             </a:r>
           </a:p>
           <a:p>
             <a:pPr algn="l"/>
             <a:r>
-              <a:rPr sz="1800" b="0">
+              <a:rPr sz="1900" b="0">
                 <a:solidFill>
                   <a:srgbClr val="1A1A1A"/>
                 </a:solidFill>
@@ -4833,8 +4855,8 @@
         </p:nvSpPr>
         <p:spPr>
           <a:xfrm>
-            <a:off x="777240" y="4389120"/>
-            <a:ext cx="10607040" cy="731520"/>
+            <a:off x="777240" y="4617720"/>
+            <a:ext cx="10607040" cy="914400"/>
           </a:xfrm>
           <a:prstGeom prst="rect">
             <a:avLst/>
@@ -4847,15 +4869,15 @@
           </a:bodyPr>
           <a:lstStyle/>
           <a:p>
-            <a:pPr algn="l"/>
-            <a:r>
-              <a:rPr sz="2200" b="1" spc="-30">
+            <a:pPr algn="ctr"/>
+            <a:r>
+              <a:rPr sz="2800" b="1" spc="-40">
                 <a:solidFill>
                   <a:srgbClr val="1A1A1A"/>
                 </a:solidFill>
                 <a:latin typeface="Apple SD Gothic Neo"/>
               </a:rPr>
-              <a:t>송금 결과까지 추적하려고 두 값을 더했다.</a:t>
+              <a:t>돈을 실제로 보냈는지까지 따라가려고 상태 두 개를 더했다.</a:t>
             </a:r>
           </a:p>
         </p:txBody>
@@ -4894,8 +4916,8 @@
         </p:nvSpPr>
         <p:spPr>
           <a:xfrm>
-            <a:off x="777240" y="548640"/>
-            <a:ext cx="10607040" cy="457200"/>
+            <a:off x="749808" y="566928"/>
+            <a:ext cx="10881360" cy="1371600"/>
           </a:xfrm>
           <a:prstGeom prst="rect">
             <a:avLst/>
@@ -4910,27 +4932,71 @@
           <a:p>
             <a:pPr algn="l"/>
             <a:r>
-              <a:rPr sz="1500" b="0" spc="60">
-                <a:solidFill>
-                  <a:srgbClr val="5B5BD6"/>
-                </a:solidFill>
-                <a:latin typeface="Menlo"/>
-              </a:rPr>
-              <a:t>DESIGN = CODE</a:t>
-            </a:r>
-          </a:p>
-        </p:txBody>
-      </p:sp>
-      <p:sp>
-        <p:nvSpPr>
-          <p:cNvPr id="3" name="TextBox 2"/>
+              <a:rPr sz="5200" b="1" spc="-100">
+                <a:solidFill>
+                  <a:srgbClr val="1A1A1A"/>
+                </a:solidFill>
+                <a:latin typeface="Apple SD Gothic Neo"/>
+              </a:rPr>
+              <a:t>심사</a:t>
+            </a:r>
+          </a:p>
+        </p:txBody>
+      </p:sp>
+      <p:sp>
+        <p:nvSpPr>
+          <p:cNvPr id="3" name="Rectangle 2"/>
+          <p:cNvSpPr/>
+          <p:nvPr/>
+        </p:nvSpPr>
+        <p:spPr>
+          <a:xfrm>
+            <a:off x="822960" y="1627632"/>
+            <a:ext cx="868680" cy="82296"/>
+          </a:xfrm>
+          <a:prstGeom prst="rect">
+            <a:avLst/>
+          </a:prstGeom>
+          <a:solidFill>
+            <a:srgbClr val="5B5BD6"/>
+          </a:solidFill>
+          <a:ln>
+            <a:noFill/>
+          </a:ln>
+          <a:effectLst/>
+        </p:spPr>
+        <p:style>
+          <a:lnRef idx="1">
+            <a:schemeClr val="accent1"/>
+          </a:lnRef>
+          <a:fillRef idx="3">
+            <a:schemeClr val="accent1"/>
+          </a:fillRef>
+          <a:effectRef idx="2">
+            <a:schemeClr val="accent1"/>
+          </a:effectRef>
+          <a:fontRef idx="minor">
+            <a:schemeClr val="lt1"/>
+          </a:fontRef>
+        </p:style>
+        <p:txBody>
+          <a:bodyPr rtlCol="0" anchor="ctr"/>
+          <a:lstStyle/>
+          <a:p>
+            <a:pPr algn="ctr"/>
+          </a:p>
+        </p:txBody>
+      </p:sp>
+      <p:sp>
+        <p:nvSpPr>
+          <p:cNvPr id="4" name="TextBox 3"/>
           <p:cNvSpPr txBox="1"/>
           <p:nvPr/>
         </p:nvSpPr>
         <p:spPr>
           <a:xfrm>
-            <a:off x="749808" y="960120"/>
-            <a:ext cx="10698480" cy="1188720"/>
+            <a:off x="777240" y="1874519"/>
+            <a:ext cx="5394960" cy="502920"/>
           </a:xfrm>
           <a:prstGeom prst="rect">
             <a:avLst/>
@@ -4943,29 +5009,29 @@
           </a:bodyPr>
           <a:lstStyle/>
           <a:p>
-            <a:pPr algn="l"/>
-            <a:r>
-              <a:rPr sz="4000" b="1" spc="-80">
-                <a:solidFill>
-                  <a:srgbClr val="1A1A1A"/>
-                </a:solidFill>
-                <a:latin typeface="Apple SD Gothic Neo"/>
-              </a:rPr>
-              <a:t>심사</a:t>
-            </a:r>
-          </a:p>
-        </p:txBody>
-      </p:sp>
-      <p:sp>
-        <p:nvSpPr>
-          <p:cNvPr id="4" name="TextBox 3"/>
+            <a:pPr algn="ctr"/>
+            <a:r>
+              <a:rPr sz="2400" b="1" spc="-30">
+                <a:solidFill>
+                  <a:srgbClr val="5B5BD6"/>
+                </a:solidFill>
+                <a:latin typeface="Apple SD Gothic Neo"/>
+              </a:rPr>
+              <a:t>내가 그린 설계</a:t>
+            </a:r>
+          </a:p>
+        </p:txBody>
+      </p:sp>
+      <p:sp>
+        <p:nvSpPr>
+          <p:cNvPr id="5" name="TextBox 4"/>
           <p:cNvSpPr txBox="1"/>
           <p:nvPr/>
         </p:nvSpPr>
         <p:spPr>
           <a:xfrm>
-            <a:off x="777240" y="1828800"/>
-            <a:ext cx="5394960" cy="411480"/>
+            <a:off x="6035040" y="1874519"/>
+            <a:ext cx="5394960" cy="502920"/>
           </a:xfrm>
           <a:prstGeom prst="rect">
             <a:avLst/>
@@ -4980,55 +5046,20 @@
           <a:p>
             <a:pPr algn="ctr"/>
             <a:r>
-              <a:rPr sz="1400" b="0" spc="50">
-                <a:solidFill>
-                  <a:srgbClr val="6B7280"/>
-                </a:solidFill>
-                <a:latin typeface="Menlo"/>
-              </a:rPr>
-              <a:t>설계</a:t>
-            </a:r>
-          </a:p>
-        </p:txBody>
-      </p:sp>
-      <p:sp>
-        <p:nvSpPr>
-          <p:cNvPr id="5" name="TextBox 4"/>
-          <p:cNvSpPr txBox="1"/>
-          <p:nvPr/>
-        </p:nvSpPr>
-        <p:spPr>
-          <a:xfrm>
-            <a:off x="6035040" y="1828800"/>
-            <a:ext cx="5394960" cy="411480"/>
-          </a:xfrm>
-          <a:prstGeom prst="rect">
-            <a:avLst/>
-          </a:prstGeom>
-          <a:noFill/>
-        </p:spPr>
-        <p:txBody>
-          <a:bodyPr wrap="square" anchor="t">
-            <a:spAutoFit/>
-          </a:bodyPr>
-          <a:lstStyle/>
-          <a:p>
-            <a:pPr algn="ctr"/>
-            <a:r>
-              <a:rPr sz="1400" b="0" spc="50">
-                <a:solidFill>
-                  <a:srgbClr val="6B7280"/>
-                </a:solidFill>
-                <a:latin typeface="Menlo"/>
-              </a:rPr>
-              <a:t>코드 역설계</a:t>
+              <a:rPr sz="2400" b="1" spc="-30">
+                <a:solidFill>
+                  <a:srgbClr val="B5793A"/>
+                </a:solidFill>
+                <a:latin typeface="Apple SD Gothic Neo"/>
+              </a:rPr>
+              <a:t>실제 코드</a:t>
             </a:r>
           </a:p>
         </p:txBody>
       </p:sp>
       <p:pic>
         <p:nvPicPr>
-          <p:cNvPr id="6" name="Picture 5" descr="review-design.png"/>
+          <p:cNvPr id="6" name="Picture 5" descr="review.png"/>
           <p:cNvPicPr>
             <a:picLocks noChangeAspect="1"/>
           </p:cNvPicPr>
@@ -5042,8 +5073,8 @@
         </p:blipFill>
         <p:spPr>
           <a:xfrm>
-            <a:off x="2103120" y="2240280"/>
-            <a:ext cx="2743200" cy="2743200"/>
+            <a:off x="1713865" y="2377440"/>
+            <a:ext cx="3521710" cy="2697480"/>
           </a:xfrm>
           <a:prstGeom prst="rect">
             <a:avLst/>
@@ -5066,8 +5097,8 @@
         </p:blipFill>
         <p:spPr>
           <a:xfrm>
-            <a:off x="7436457" y="2240280"/>
-            <a:ext cx="2592125" cy="2743200"/>
+            <a:off x="7458058" y="2377440"/>
+            <a:ext cx="2548923" cy="2697480"/>
           </a:xfrm>
           <a:prstGeom prst="rect">
             <a:avLst/>
@@ -5083,7 +5114,7 @@
         <p:spPr>
           <a:xfrm>
             <a:off x="777240" y="5166360"/>
-            <a:ext cx="5394960" cy="1188720"/>
+            <a:ext cx="5394960" cy="1325880"/>
           </a:xfrm>
           <a:prstGeom prst="roundRect">
             <a:avLst>
@@ -5118,7 +5149,7 @@
           <a:p>
             <a:pPr algn="l"/>
             <a:r>
-              <a:rPr sz="1600" b="1">
+              <a:rPr sz="2000" b="1">
                 <a:solidFill>
                   <a:srgbClr val="5B5BD6"/>
                 </a:solidFill>
@@ -5130,13 +5161,13 @@
           <a:p>
             <a:pPr algn="l"/>
             <a:r>
-              <a:rPr sz="1500" b="0">
+              <a:rPr sz="1800" b="1">
                 <a:solidFill>
                   <a:srgbClr val="1A1A1A"/>
                 </a:solidFill>
                 <a:latin typeface="Apple SD Gothic Neo"/>
               </a:rPr>
-              <a:t>Review 상속(가입심사/지급심사) 구조가 동일.</a:t>
+              <a:t>심사를 가입 심사·지급 심사가 물려받는 구조가 똑같다.</a:t>
             </a:r>
           </a:p>
         </p:txBody>
@@ -5150,7 +5181,7 @@
         <p:spPr>
           <a:xfrm>
             <a:off x="6035040" y="5166360"/>
-            <a:ext cx="5394960" cy="1188720"/>
+            <a:ext cx="5394960" cy="1325880"/>
           </a:xfrm>
           <a:prstGeom prst="roundRect">
             <a:avLst>
@@ -5185,7 +5216,7 @@
           <a:p>
             <a:pPr algn="l"/>
             <a:r>
-              <a:rPr sz="1600" b="1">
+              <a:rPr sz="2000" b="1">
                 <a:solidFill>
                   <a:srgbClr val="B5793A"/>
                 </a:solidFill>
@@ -5197,13 +5228,13 @@
           <a:p>
             <a:pPr algn="l"/>
             <a:r>
-              <a:rPr sz="1500" b="0">
+              <a:rPr sz="1800" b="1">
                 <a:solidFill>
                   <a:srgbClr val="1A1A1A"/>
                 </a:solidFill>
                 <a:latin typeface="Apple SD Gothic Neo"/>
               </a:rPr>
-              <a:t>지급심사 대상이 의료청구 → Claim(의료+자동차)으로 확대.</a:t>
+              <a:t>지급 심사가 의료뿐 아니라 자동차 사고까지 맡도록 넓혔다.</a:t>
             </a:r>
           </a:p>
         </p:txBody>
@@ -5242,8 +5273,8 @@
         </p:nvSpPr>
         <p:spPr>
           <a:xfrm>
-            <a:off x="777240" y="548640"/>
-            <a:ext cx="10607040" cy="457200"/>
+            <a:off x="749808" y="566928"/>
+            <a:ext cx="10881360" cy="1371600"/>
           </a:xfrm>
           <a:prstGeom prst="rect">
             <a:avLst/>
@@ -5258,27 +5289,71 @@
           <a:p>
             <a:pPr algn="l"/>
             <a:r>
-              <a:rPr sz="1500" b="0" spc="60">
-                <a:solidFill>
-                  <a:srgbClr val="5B5BD6"/>
-                </a:solidFill>
-                <a:latin typeface="Menlo"/>
-              </a:rPr>
-              <a:t>DESIGN = CODE</a:t>
-            </a:r>
-          </a:p>
-        </p:txBody>
-      </p:sp>
-      <p:sp>
-        <p:nvSpPr>
-          <p:cNvPr id="3" name="TextBox 2"/>
+              <a:rPr sz="5200" b="1" spc="-100">
+                <a:solidFill>
+                  <a:srgbClr val="1A1A1A"/>
+                </a:solidFill>
+                <a:latin typeface="Apple SD Gothic Neo"/>
+              </a:rPr>
+              <a:t>사고이력</a:t>
+            </a:r>
+          </a:p>
+        </p:txBody>
+      </p:sp>
+      <p:sp>
+        <p:nvSpPr>
+          <p:cNvPr id="3" name="Rectangle 2"/>
+          <p:cNvSpPr/>
+          <p:nvPr/>
+        </p:nvSpPr>
+        <p:spPr>
+          <a:xfrm>
+            <a:off x="822960" y="1627632"/>
+            <a:ext cx="868680" cy="82296"/>
+          </a:xfrm>
+          <a:prstGeom prst="rect">
+            <a:avLst/>
+          </a:prstGeom>
+          <a:solidFill>
+            <a:srgbClr val="5B5BD6"/>
+          </a:solidFill>
+          <a:ln>
+            <a:noFill/>
+          </a:ln>
+          <a:effectLst/>
+        </p:spPr>
+        <p:style>
+          <a:lnRef idx="1">
+            <a:schemeClr val="accent1"/>
+          </a:lnRef>
+          <a:fillRef idx="3">
+            <a:schemeClr val="accent1"/>
+          </a:fillRef>
+          <a:effectRef idx="2">
+            <a:schemeClr val="accent1"/>
+          </a:effectRef>
+          <a:fontRef idx="minor">
+            <a:schemeClr val="lt1"/>
+          </a:fontRef>
+        </p:style>
+        <p:txBody>
+          <a:bodyPr rtlCol="0" anchor="ctr"/>
+          <a:lstStyle/>
+          <a:p>
+            <a:pPr algn="ctr"/>
+          </a:p>
+        </p:txBody>
+      </p:sp>
+      <p:sp>
+        <p:nvSpPr>
+          <p:cNvPr id="4" name="TextBox 3"/>
           <p:cNvSpPr txBox="1"/>
           <p:nvPr/>
         </p:nvSpPr>
         <p:spPr>
           <a:xfrm>
-            <a:off x="749808" y="960120"/>
-            <a:ext cx="10698480" cy="1188720"/>
+            <a:off x="777240" y="1874519"/>
+            <a:ext cx="5394960" cy="502920"/>
           </a:xfrm>
           <a:prstGeom prst="rect">
             <a:avLst/>
@@ -5291,29 +5366,29 @@
           </a:bodyPr>
           <a:lstStyle/>
           <a:p>
-            <a:pPr algn="l"/>
-            <a:r>
-              <a:rPr sz="4000" b="1" spc="-80">
-                <a:solidFill>
-                  <a:srgbClr val="1A1A1A"/>
-                </a:solidFill>
-                <a:latin typeface="Apple SD Gothic Neo"/>
-              </a:rPr>
-              <a:t>사고이력</a:t>
-            </a:r>
-          </a:p>
-        </p:txBody>
-      </p:sp>
-      <p:sp>
-        <p:nvSpPr>
-          <p:cNvPr id="4" name="TextBox 3"/>
+            <a:pPr algn="ctr"/>
+            <a:r>
+              <a:rPr sz="2400" b="1" spc="-30">
+                <a:solidFill>
+                  <a:srgbClr val="5B5BD6"/>
+                </a:solidFill>
+                <a:latin typeface="Apple SD Gothic Neo"/>
+              </a:rPr>
+              <a:t>내가 그린 설계</a:t>
+            </a:r>
+          </a:p>
+        </p:txBody>
+      </p:sp>
+      <p:sp>
+        <p:nvSpPr>
+          <p:cNvPr id="5" name="TextBox 4"/>
           <p:cNvSpPr txBox="1"/>
           <p:nvPr/>
         </p:nvSpPr>
         <p:spPr>
           <a:xfrm>
-            <a:off x="777240" y="1828800"/>
-            <a:ext cx="5394960" cy="411480"/>
+            <a:off x="6035040" y="1874519"/>
+            <a:ext cx="5394960" cy="502920"/>
           </a:xfrm>
           <a:prstGeom prst="rect">
             <a:avLst/>
@@ -5328,55 +5403,20 @@
           <a:p>
             <a:pPr algn="ctr"/>
             <a:r>
-              <a:rPr sz="1400" b="0" spc="50">
-                <a:solidFill>
-                  <a:srgbClr val="6B7280"/>
-                </a:solidFill>
-                <a:latin typeface="Menlo"/>
-              </a:rPr>
-              <a:t>설계</a:t>
-            </a:r>
-          </a:p>
-        </p:txBody>
-      </p:sp>
-      <p:sp>
-        <p:nvSpPr>
-          <p:cNvPr id="5" name="TextBox 4"/>
-          <p:cNvSpPr txBox="1"/>
-          <p:nvPr/>
-        </p:nvSpPr>
-        <p:spPr>
-          <a:xfrm>
-            <a:off x="6035040" y="1828800"/>
-            <a:ext cx="5394960" cy="411480"/>
-          </a:xfrm>
-          <a:prstGeom prst="rect">
-            <a:avLst/>
-          </a:prstGeom>
-          <a:noFill/>
-        </p:spPr>
-        <p:txBody>
-          <a:bodyPr wrap="square" anchor="t">
-            <a:spAutoFit/>
-          </a:bodyPr>
-          <a:lstStyle/>
-          <a:p>
-            <a:pPr algn="ctr"/>
-            <a:r>
-              <a:rPr sz="1400" b="0" spc="50">
-                <a:solidFill>
-                  <a:srgbClr val="6B7280"/>
-                </a:solidFill>
-                <a:latin typeface="Menlo"/>
-              </a:rPr>
-              <a:t>코드 역설계</a:t>
+              <a:rPr sz="2400" b="1" spc="-30">
+                <a:solidFill>
+                  <a:srgbClr val="B5793A"/>
+                </a:solidFill>
+                <a:latin typeface="Apple SD Gothic Neo"/>
+              </a:rPr>
+              <a:t>실제 코드</a:t>
             </a:r>
           </a:p>
         </p:txBody>
       </p:sp>
       <p:pic>
         <p:nvPicPr>
-          <p:cNvPr id="6" name="Picture 5" descr="accident-design.png"/>
+          <p:cNvPr id="6" name="Picture 5" descr="accident.png"/>
           <p:cNvPicPr>
             <a:picLocks noChangeAspect="1"/>
           </p:cNvPicPr>
@@ -5390,8 +5430,8 @@
         </p:blipFill>
         <p:spPr>
           <a:xfrm>
-            <a:off x="2726332" y="2240280"/>
-            <a:ext cx="1496775" cy="2743200"/>
+            <a:off x="2382882" y="2377440"/>
+            <a:ext cx="2183674" cy="2697480"/>
           </a:xfrm>
           <a:prstGeom prst="rect">
             <a:avLst/>
@@ -5414,8 +5454,8 @@
         </p:blipFill>
         <p:spPr>
           <a:xfrm>
-            <a:off x="7069199" y="2240280"/>
-            <a:ext cx="3326641" cy="2743200"/>
+            <a:off x="7096921" y="2377440"/>
+            <a:ext cx="3271197" cy="2697480"/>
           </a:xfrm>
           <a:prstGeom prst="rect">
             <a:avLst/>
@@ -5431,7 +5471,7 @@
         <p:spPr>
           <a:xfrm>
             <a:off x="777240" y="5166360"/>
-            <a:ext cx="5394960" cy="1188720"/>
+            <a:ext cx="5394960" cy="1325880"/>
           </a:xfrm>
           <a:prstGeom prst="roundRect">
             <a:avLst>
@@ -5466,7 +5506,7 @@
           <a:p>
             <a:pPr algn="l"/>
             <a:r>
-              <a:rPr sz="1600" b="1">
+              <a:rPr sz="2000" b="1">
                 <a:solidFill>
                   <a:srgbClr val="5B5BD6"/>
                 </a:solidFill>
@@ -5478,13 +5518,13 @@
           <a:p>
             <a:pPr algn="l"/>
             <a:r>
-              <a:rPr sz="1500" b="0">
+              <a:rPr sz="1800" b="1">
                 <a:solidFill>
                   <a:srgbClr val="1A1A1A"/>
                 </a:solidFill>
                 <a:latin typeface="Apple SD Gothic Neo"/>
               </a:rPr>
-              <a:t>사고 집계 정보(건수·지급액·면허상태)를 동일하게 보유.</a:t>
+              <a:t>사고 건수·지급액 같은 집계 정보를 똑같이 가진다.</a:t>
             </a:r>
           </a:p>
         </p:txBody>
@@ -5498,7 +5538,7 @@
         <p:spPr>
           <a:xfrm>
             <a:off x="6035040" y="5166360"/>
-            <a:ext cx="5394960" cy="1188720"/>
+            <a:ext cx="5394960" cy="1325880"/>
           </a:xfrm>
           <a:prstGeom prst="roundRect">
             <a:avLst>
@@ -5533,7 +5573,7 @@
           <a:p>
             <a:pPr algn="l"/>
             <a:r>
-              <a:rPr sz="1600" b="1">
+              <a:rPr sz="2000" b="1">
                 <a:solidFill>
                   <a:srgbClr val="B5793A"/>
                 </a:solidFill>
@@ -5545,13 +5585,13 @@
           <a:p>
             <a:pPr algn="l"/>
             <a:r>
-              <a:rPr sz="1500" b="0">
+              <a:rPr sz="1800" b="1">
                 <a:solidFill>
                   <a:srgbClr val="1A1A1A"/>
                 </a:solidFill>
                 <a:latin typeface="Apple SD Gothic Neo"/>
               </a:rPr>
-              <a:t>외부 연동이 더미라 AccidentRecord 제거, 값 객체로 단순화.</a:t>
+              <a:t>외부 연동이 아직 가짜라, 사고 한 건 클래스는 빼고 단순화했다.</a:t>
             </a:r>
           </a:p>
         </p:txBody>
@@ -5590,8 +5630,8 @@
         </p:nvSpPr>
         <p:spPr>
           <a:xfrm>
-            <a:off x="777240" y="548640"/>
-            <a:ext cx="10607040" cy="457200"/>
+            <a:off x="749808" y="566928"/>
+            <a:ext cx="10881360" cy="1371600"/>
           </a:xfrm>
           <a:prstGeom prst="rect">
             <a:avLst/>
@@ -5606,49 +5646,58 @@
           <a:p>
             <a:pPr algn="l"/>
             <a:r>
-              <a:rPr sz="1500" b="0" spc="60">
-                <a:solidFill>
-                  <a:srgbClr val="5B5BD6"/>
-                </a:solidFill>
-                <a:latin typeface="Menlo"/>
-              </a:rPr>
-              <a:t>USE CASES</a:t>
-            </a:r>
-          </a:p>
-        </p:txBody>
-      </p:sp>
-      <p:sp>
-        <p:nvSpPr>
-          <p:cNvPr id="3" name="TextBox 2"/>
-          <p:cNvSpPr txBox="1"/>
-          <p:nvPr/>
-        </p:nvSpPr>
-        <p:spPr>
-          <a:xfrm>
-            <a:off x="749808" y="960120"/>
-            <a:ext cx="10698480" cy="1188720"/>
+              <a:rPr sz="5200" b="1" spc="-100">
+                <a:solidFill>
+                  <a:srgbClr val="1A1A1A"/>
+                </a:solidFill>
+                <a:latin typeface="Apple SD Gothic Neo"/>
+              </a:rPr>
+              <a:t>실제 동작하는 경로</a:t>
+            </a:r>
+          </a:p>
+        </p:txBody>
+      </p:sp>
+      <p:sp>
+        <p:nvSpPr>
+          <p:cNvPr id="3" name="Rectangle 2"/>
+          <p:cNvSpPr/>
+          <p:nvPr/>
+        </p:nvSpPr>
+        <p:spPr>
+          <a:xfrm>
+            <a:off x="822960" y="1627632"/>
+            <a:ext cx="868680" cy="82296"/>
           </a:xfrm>
           <a:prstGeom prst="rect">
             <a:avLst/>
           </a:prstGeom>
-          <a:noFill/>
-        </p:spPr>
-        <p:txBody>
-          <a:bodyPr wrap="square" anchor="t">
-            <a:spAutoFit/>
-          </a:bodyPr>
-          <a:lstStyle/>
-          <a:p>
-            <a:pPr algn="l"/>
-            <a:r>
-              <a:rPr sz="4000" b="1" spc="-80">
-                <a:solidFill>
-                  <a:srgbClr val="1A1A1A"/>
-                </a:solidFill>
-                <a:latin typeface="Apple SD Gothic Neo"/>
-              </a:rPr>
-              <a:t>실제 동작 경로</a:t>
-            </a:r>
+          <a:solidFill>
+            <a:srgbClr val="5B5BD6"/>
+          </a:solidFill>
+          <a:ln>
+            <a:noFill/>
+          </a:ln>
+          <a:effectLst/>
+        </p:spPr>
+        <p:style>
+          <a:lnRef idx="1">
+            <a:schemeClr val="accent1"/>
+          </a:lnRef>
+          <a:fillRef idx="3">
+            <a:schemeClr val="accent1"/>
+          </a:fillRef>
+          <a:effectRef idx="2">
+            <a:schemeClr val="accent1"/>
+          </a:effectRef>
+          <a:fontRef idx="minor">
+            <a:schemeClr val="lt1"/>
+          </a:fontRef>
+        </p:style>
+        <p:txBody>
+          <a:bodyPr rtlCol="0" anchor="ctr"/>
+          <a:lstStyle/>
+          <a:p>
+            <a:pPr algn="ctr"/>
           </a:p>
         </p:txBody>
       </p:sp>
@@ -5668,8 +5717,8 @@
         </p:blipFill>
         <p:spPr>
           <a:xfrm>
-            <a:off x="4186800" y="1737360"/>
-            <a:ext cx="3787918" cy="3657600"/>
+            <a:off x="4234149" y="1874519"/>
+            <a:ext cx="3693220" cy="3566160"/>
           </a:xfrm>
           <a:prstGeom prst="rect">
             <a:avLst/>
@@ -5684,8 +5733,8 @@
         </p:nvSpPr>
         <p:spPr>
           <a:xfrm>
-            <a:off x="777240" y="5532120"/>
-            <a:ext cx="10607040" cy="731520"/>
+            <a:off x="777240" y="5577840"/>
+            <a:ext cx="10607040" cy="822960"/>
           </a:xfrm>
           <a:prstGeom prst="rect">
             <a:avLst/>
@@ -5700,7 +5749,7 @@
           <a:p>
             <a:pPr algn="ctr"/>
             <a:r>
-              <a:rPr sz="2200" b="1" spc="-30">
+              <a:rPr sz="2800" b="1" spc="-40">
                 <a:solidFill>
                   <a:srgbClr val="1A1A1A"/>
                 </a:solidFill>
@@ -5745,8 +5794,8 @@
         </p:nvSpPr>
         <p:spPr>
           <a:xfrm>
-            <a:off x="777240" y="548640"/>
-            <a:ext cx="10607040" cy="457200"/>
+            <a:off x="749808" y="566928"/>
+            <a:ext cx="10881360" cy="1371600"/>
           </a:xfrm>
           <a:prstGeom prst="rect">
             <a:avLst/>
@@ -5761,49 +5810,58 @@
           <a:p>
             <a:pPr algn="l"/>
             <a:r>
-              <a:rPr sz="1500" b="0" spc="60">
-                <a:solidFill>
-                  <a:srgbClr val="5B5BD6"/>
-                </a:solidFill>
-                <a:latin typeface="Menlo"/>
-              </a:rPr>
-              <a:t>HOW WE USED AI</a:t>
-            </a:r>
-          </a:p>
-        </p:txBody>
-      </p:sp>
-      <p:sp>
-        <p:nvSpPr>
-          <p:cNvPr id="3" name="TextBox 2"/>
-          <p:cNvSpPr txBox="1"/>
-          <p:nvPr/>
-        </p:nvSpPr>
-        <p:spPr>
-          <a:xfrm>
-            <a:off x="749808" y="960120"/>
-            <a:ext cx="10698480" cy="1188720"/>
+              <a:rPr sz="5200" b="1" spc="-100">
+                <a:solidFill>
+                  <a:srgbClr val="1A1A1A"/>
+                </a:solidFill>
+                <a:latin typeface="Apple SD Gothic Neo"/>
+              </a:rPr>
+              <a:t>AI를 어떻게 썼나</a:t>
+            </a:r>
+          </a:p>
+        </p:txBody>
+      </p:sp>
+      <p:sp>
+        <p:nvSpPr>
+          <p:cNvPr id="3" name="Rectangle 2"/>
+          <p:cNvSpPr/>
+          <p:nvPr/>
+        </p:nvSpPr>
+        <p:spPr>
+          <a:xfrm>
+            <a:off x="822960" y="1627632"/>
+            <a:ext cx="868680" cy="82296"/>
           </a:xfrm>
           <a:prstGeom prst="rect">
             <a:avLst/>
           </a:prstGeom>
-          <a:noFill/>
-        </p:spPr>
-        <p:txBody>
-          <a:bodyPr wrap="square" anchor="t">
-            <a:spAutoFit/>
-          </a:bodyPr>
-          <a:lstStyle/>
-          <a:p>
-            <a:pPr algn="l"/>
-            <a:r>
-              <a:rPr sz="4000" b="1" spc="-80">
-                <a:solidFill>
-                  <a:srgbClr val="1A1A1A"/>
-                </a:solidFill>
-                <a:latin typeface="Apple SD Gothic Neo"/>
-              </a:rPr>
-              <a:t>AI를 어떻게 썼나</a:t>
-            </a:r>
+          <a:solidFill>
+            <a:srgbClr val="5B5BD6"/>
+          </a:solidFill>
+          <a:ln>
+            <a:noFill/>
+          </a:ln>
+          <a:effectLst/>
+        </p:spPr>
+        <p:style>
+          <a:lnRef idx="1">
+            <a:schemeClr val="accent1"/>
+          </a:lnRef>
+          <a:fillRef idx="3">
+            <a:schemeClr val="accent1"/>
+          </a:fillRef>
+          <a:effectRef idx="2">
+            <a:schemeClr val="accent1"/>
+          </a:effectRef>
+          <a:fontRef idx="minor">
+            <a:schemeClr val="lt1"/>
+          </a:fontRef>
+        </p:style>
+        <p:txBody>
+          <a:bodyPr rtlCol="0" anchor="ctr"/>
+          <a:lstStyle/>
+          <a:p>
+            <a:pPr algn="ctr"/>
           </a:p>
         </p:txBody>
       </p:sp>
@@ -5815,8 +5873,8 @@
         </p:nvSpPr>
         <p:spPr>
           <a:xfrm>
-            <a:off x="777240" y="1828800"/>
-            <a:ext cx="5212080" cy="1463040"/>
+            <a:off x="777240" y="2011680"/>
+            <a:ext cx="5212080" cy="1554480"/>
           </a:xfrm>
           <a:prstGeom prst="roundRect">
             <a:avLst>
@@ -5861,8 +5919,8 @@
         </p:nvSpPr>
         <p:spPr>
           <a:xfrm>
-            <a:off x="1097280" y="2011680"/>
-            <a:ext cx="4663440" cy="1188720"/>
+            <a:off x="1097280" y="2194560"/>
+            <a:ext cx="4663440" cy="1280160"/>
           </a:xfrm>
           <a:prstGeom prst="rect">
             <a:avLst/>
@@ -5877,25 +5935,25 @@
           <a:p>
             <a:pPr algn="l"/>
             <a:r>
+              <a:rPr sz="2600" b="1">
+                <a:solidFill>
+                  <a:srgbClr val="5B5BD6"/>
+                </a:solidFill>
+                <a:latin typeface="Apple SD Gothic Neo"/>
+              </a:rPr>
+              <a:t>사람</a:t>
+            </a:r>
+          </a:p>
+          <a:p>
+            <a:pPr algn="l"/>
+            <a:r>
               <a:rPr sz="2200" b="1">
                 <a:solidFill>
-                  <a:srgbClr val="5B5BD6"/>
-                </a:solidFill>
-                <a:latin typeface="Apple SD Gothic Neo"/>
-              </a:rPr>
-              <a:t>사람</a:t>
-            </a:r>
-          </a:p>
-          <a:p>
-            <a:pPr algn="l"/>
-            <a:r>
-              <a:rPr sz="1800" b="0">
-                <a:solidFill>
                   <a:srgbClr val="1A1A1A"/>
                 </a:solidFill>
                 <a:latin typeface="Apple SD Gothic Neo"/>
               </a:rPr>
-              <a:t>설계·결정(ADR)·리뷰</a:t>
+              <a:t>설계 · 결정 · 검토</a:t>
             </a:r>
           </a:p>
         </p:txBody>
@@ -5908,8 +5966,8 @@
         </p:nvSpPr>
         <p:spPr>
           <a:xfrm>
-            <a:off x="6172200" y="1828800"/>
-            <a:ext cx="5212080" cy="1463040"/>
+            <a:off x="6172200" y="2011680"/>
+            <a:ext cx="5212080" cy="1554480"/>
           </a:xfrm>
           <a:prstGeom prst="roundRect">
             <a:avLst>
@@ -5956,8 +6014,8 @@
         </p:nvSpPr>
         <p:spPr>
           <a:xfrm>
-            <a:off x="6492240" y="2011680"/>
-            <a:ext cx="4663440" cy="1188720"/>
+            <a:off x="6492240" y="2194560"/>
+            <a:ext cx="4663440" cy="1280160"/>
           </a:xfrm>
           <a:prstGeom prst="rect">
             <a:avLst/>
@@ -5972,25 +6030,25 @@
           <a:p>
             <a:pPr algn="l"/>
             <a:r>
+              <a:rPr sz="2600" b="1">
+                <a:solidFill>
+                  <a:srgbClr val="1A1A1A"/>
+                </a:solidFill>
+                <a:latin typeface="Apple SD Gothic Neo"/>
+              </a:rPr>
+              <a:t>AI</a:t>
+            </a:r>
+          </a:p>
+          <a:p>
+            <a:pPr algn="l"/>
+            <a:r>
               <a:rPr sz="2200" b="1">
                 <a:solidFill>
                   <a:srgbClr val="1A1A1A"/>
                 </a:solidFill>
                 <a:latin typeface="Apple SD Gothic Neo"/>
               </a:rPr>
-              <a:t>AI</a:t>
-            </a:r>
-          </a:p>
-          <a:p>
-            <a:pPr algn="l"/>
-            <a:r>
-              <a:rPr sz="1800" b="0">
-                <a:solidFill>
-                  <a:srgbClr val="1A1A1A"/>
-                </a:solidFill>
-                <a:latin typeface="Apple SD Gothic Neo"/>
-              </a:rPr>
-              <a:t>구현·테스트·리팩토링</a:t>
+              <a:t>구현 · 테스트 · 정리</a:t>
             </a:r>
           </a:p>
         </p:txBody>
@@ -6003,8 +6061,8 @@
         </p:nvSpPr>
         <p:spPr>
           <a:xfrm>
-            <a:off x="380847" y="3749039"/>
-            <a:ext cx="1920240" cy="1005840"/>
+            <a:off x="412851" y="3977639"/>
+            <a:ext cx="1965960" cy="1097280"/>
           </a:xfrm>
           <a:prstGeom prst="roundRect">
             <a:avLst>
@@ -6036,12 +6094,12 @@
           </a:fontRef>
         </p:style>
         <p:txBody>
-          <a:bodyPr rtlCol="0" anchor="ctr" tIns="76200" bIns="76200" lIns="177800" rIns="177800" wrap="none"/>
-          <a:lstStyle/>
-          <a:p>
-            <a:pPr algn="ctr"/>
-            <a:r>
-              <a:rPr sz="2000" b="1">
+          <a:bodyPr rtlCol="0" anchor="ctr" tIns="76200" bIns="76200" lIns="177800" rIns="177800" wrap="square"/>
+          <a:lstStyle/>
+          <a:p>
+            <a:pPr algn="ctr"/>
+            <a:r>
+              <a:rPr sz="2100" b="1">
                 <a:solidFill>
                   <a:srgbClr val="1A1A1A"/>
                 </a:solidFill>
@@ -6060,7 +6118,7 @@
         </p:nvSpPr>
         <p:spPr>
           <a:xfrm>
-            <a:off x="2319375" y="3931920"/>
+            <a:off x="2378811" y="4206240"/>
             <a:ext cx="640080" cy="640080"/>
           </a:xfrm>
           <a:prstGeom prst="rect">
@@ -6095,8 +6153,8 @@
         </p:nvSpPr>
         <p:spPr>
           <a:xfrm>
-            <a:off x="2758287" y="3749039"/>
-            <a:ext cx="1920240" cy="1005840"/>
+            <a:off x="2762859" y="3977639"/>
+            <a:ext cx="1965960" cy="1097280"/>
           </a:xfrm>
           <a:prstGeom prst="roundRect">
             <a:avLst>
@@ -6128,18 +6186,18 @@
           </a:fontRef>
         </p:style>
         <p:txBody>
-          <a:bodyPr rtlCol="0" anchor="ctr" tIns="76200" bIns="76200" lIns="177800" rIns="177800" wrap="none"/>
-          <a:lstStyle/>
-          <a:p>
-            <a:pPr algn="ctr"/>
-            <a:r>
-              <a:rPr sz="2000" b="1">
+          <a:bodyPr rtlCol="0" anchor="ctr" tIns="76200" bIns="76200" lIns="177800" rIns="177800" wrap="square"/>
+          <a:lstStyle/>
+          <a:p>
+            <a:pPr algn="ctr"/>
+            <a:r>
+              <a:rPr sz="2100" b="1">
                 <a:solidFill>
                   <a:srgbClr val="1A1A1A"/>
                 </a:solidFill>
                 <a:latin typeface="Apple SD Gothic Neo"/>
               </a:rPr>
-              <a:t>취조</a:t>
+              <a:t>따져묻기</a:t>
             </a:r>
           </a:p>
         </p:txBody>
@@ -6152,7 +6210,7 @@
         </p:nvSpPr>
         <p:spPr>
           <a:xfrm>
-            <a:off x="4696815" y="3931920"/>
+            <a:off x="4728819" y="4206240"/>
             <a:ext cx="640080" cy="640080"/>
           </a:xfrm>
           <a:prstGeom prst="rect">
@@ -6187,8 +6245,8 @@
         </p:nvSpPr>
         <p:spPr>
           <a:xfrm>
-            <a:off x="5135727" y="3749039"/>
-            <a:ext cx="1920240" cy="1005840"/>
+            <a:off x="5112867" y="3977639"/>
+            <a:ext cx="1965960" cy="1097280"/>
           </a:xfrm>
           <a:prstGeom prst="roundRect">
             <a:avLst>
@@ -6220,12 +6278,12 @@
           </a:fontRef>
         </p:style>
         <p:txBody>
-          <a:bodyPr rtlCol="0" anchor="ctr" tIns="76200" bIns="76200" lIns="177800" rIns="177800" wrap="none"/>
-          <a:lstStyle/>
-          <a:p>
-            <a:pPr algn="ctr"/>
-            <a:r>
-              <a:rPr sz="2000" b="1">
+          <a:bodyPr rtlCol="0" anchor="ctr" tIns="76200" bIns="76200" lIns="177800" rIns="177800" wrap="square"/>
+          <a:lstStyle/>
+          <a:p>
+            <a:pPr algn="ctr"/>
+            <a:r>
+              <a:rPr sz="2100" b="1">
                 <a:solidFill>
                   <a:srgbClr val="1A1A1A"/>
                 </a:solidFill>
@@ -6244,7 +6302,7 @@
         </p:nvSpPr>
         <p:spPr>
           <a:xfrm>
-            <a:off x="7074255" y="3931920"/>
+            <a:off x="7078827" y="4206240"/>
             <a:ext cx="640080" cy="640080"/>
           </a:xfrm>
           <a:prstGeom prst="rect">
@@ -6279,8 +6337,8 @@
         </p:nvSpPr>
         <p:spPr>
           <a:xfrm>
-            <a:off x="7513167" y="3749039"/>
-            <a:ext cx="1920240" cy="1005840"/>
+            <a:off x="7462875" y="3977639"/>
+            <a:ext cx="1965960" cy="1097280"/>
           </a:xfrm>
           <a:prstGeom prst="roundRect">
             <a:avLst>
@@ -6312,18 +6370,18 @@
           </a:fontRef>
         </p:style>
         <p:txBody>
-          <a:bodyPr rtlCol="0" anchor="ctr" tIns="76200" bIns="76200" lIns="177800" rIns="177800" wrap="none"/>
-          <a:lstStyle/>
-          <a:p>
-            <a:pPr algn="ctr"/>
-            <a:r>
-              <a:rPr sz="2000" b="1">
+          <a:bodyPr rtlCol="0" anchor="ctr" tIns="76200" bIns="76200" lIns="177800" rIns="177800" wrap="square"/>
+          <a:lstStyle/>
+          <a:p>
+            <a:pPr algn="ctr"/>
+            <a:r>
+              <a:rPr sz="2100" b="1">
                 <a:solidFill>
                   <a:srgbClr val="1A1A1A"/>
                 </a:solidFill>
                 <a:latin typeface="Apple SD Gothic Neo"/>
               </a:rPr>
-              <a:t>TDD 구현</a:t>
+              <a:t>테스트 먼저 구현</a:t>
             </a:r>
           </a:p>
         </p:txBody>
@@ -6336,7 +6394,7 @@
         </p:nvSpPr>
         <p:spPr>
           <a:xfrm>
-            <a:off x="9451695" y="3931920"/>
+            <a:off x="9428835" y="4206240"/>
             <a:ext cx="640080" cy="640080"/>
           </a:xfrm>
           <a:prstGeom prst="rect">
@@ -6371,8 +6429,8 @@
         </p:nvSpPr>
         <p:spPr>
           <a:xfrm>
-            <a:off x="9890607" y="3749039"/>
-            <a:ext cx="1920240" cy="1005840"/>
+            <a:off x="9812883" y="3977639"/>
+            <a:ext cx="1965960" cy="1097280"/>
           </a:xfrm>
           <a:prstGeom prst="roundRect">
             <a:avLst>
@@ -6404,18 +6462,18 @@
           </a:fontRef>
         </p:style>
         <p:txBody>
-          <a:bodyPr rtlCol="0" anchor="ctr" tIns="76200" bIns="76200" lIns="177800" rIns="177800" wrap="none"/>
-          <a:lstStyle/>
-          <a:p>
-            <a:pPr algn="ctr"/>
-            <a:r>
-              <a:rPr sz="2000" b="1">
+          <a:bodyPr rtlCol="0" anchor="ctr" tIns="76200" bIns="76200" lIns="177800" rIns="177800" wrap="square"/>
+          <a:lstStyle/>
+          <a:p>
+            <a:pPr algn="ctr"/>
+            <a:r>
+              <a:rPr sz="2100" b="1">
                 <a:solidFill>
                   <a:srgbClr val="1A1A1A"/>
                 </a:solidFill>
                 <a:latin typeface="Apple SD Gothic Neo"/>
               </a:rPr>
-              <a:t>리뷰</a:t>
+              <a:t>검토</a:t>
             </a:r>
           </a:p>
         </p:txBody>
@@ -6428,8 +6486,8 @@
         </p:nvSpPr>
         <p:spPr>
           <a:xfrm>
-            <a:off x="777240" y="5120640"/>
-            <a:ext cx="10607040" cy="731520"/>
+            <a:off x="777240" y="5440680"/>
+            <a:ext cx="10607040" cy="822960"/>
           </a:xfrm>
           <a:prstGeom prst="rect">
             <a:avLst/>
@@ -6444,13 +6502,13 @@
           <a:p>
             <a:pPr algn="ctr"/>
             <a:r>
-              <a:rPr sz="2200" b="1" spc="-30">
+              <a:rPr sz="2800" b="1" spc="-40">
                 <a:solidFill>
                   <a:srgbClr val="1A1A1A"/>
                 </a:solidFill>
                 <a:latin typeface="Apple SD Gothic Neo"/>
               </a:rPr>
-              <a:t>설계·결정은 사람이, 구현은 AI가 했다.</a:t>
+              <a:t>설계와 결정은 사람이, 구현은 AI가 했다.</a:t>
             </a:r>
           </a:p>
         </p:txBody>
@@ -6489,8 +6547,8 @@
         </p:nvSpPr>
         <p:spPr>
           <a:xfrm>
-            <a:off x="777240" y="548640"/>
-            <a:ext cx="10607040" cy="457200"/>
+            <a:off x="749808" y="566928"/>
+            <a:ext cx="10881360" cy="1371600"/>
           </a:xfrm>
           <a:prstGeom prst="rect">
             <a:avLst/>
@@ -6505,49 +6563,58 @@
           <a:p>
             <a:pPr algn="l"/>
             <a:r>
-              <a:rPr sz="1500" b="0" spc="60">
-                <a:solidFill>
-                  <a:srgbClr val="5B5BD6"/>
-                </a:solidFill>
-                <a:latin typeface="Menlo"/>
-              </a:rPr>
-              <a:t>AI PITFALLS</a:t>
-            </a:r>
-          </a:p>
-        </p:txBody>
-      </p:sp>
-      <p:sp>
-        <p:nvSpPr>
-          <p:cNvPr id="3" name="TextBox 2"/>
-          <p:cNvSpPr txBox="1"/>
-          <p:nvPr/>
-        </p:nvSpPr>
-        <p:spPr>
-          <a:xfrm>
-            <a:off x="749808" y="960120"/>
-            <a:ext cx="10698480" cy="1188720"/>
+              <a:rPr sz="5200" b="1" spc="-100">
+                <a:solidFill>
+                  <a:srgbClr val="1A1A1A"/>
+                </a:solidFill>
+                <a:latin typeface="Apple SD Gothic Neo"/>
+              </a:rPr>
+              <a:t>AI가 삑사리 난 곳, 어떻게 잡았나</a:t>
+            </a:r>
+          </a:p>
+        </p:txBody>
+      </p:sp>
+      <p:sp>
+        <p:nvSpPr>
+          <p:cNvPr id="3" name="Rectangle 2"/>
+          <p:cNvSpPr/>
+          <p:nvPr/>
+        </p:nvSpPr>
+        <p:spPr>
+          <a:xfrm>
+            <a:off x="822960" y="1627632"/>
+            <a:ext cx="868680" cy="82296"/>
           </a:xfrm>
           <a:prstGeom prst="rect">
             <a:avLst/>
           </a:prstGeom>
-          <a:noFill/>
-        </p:spPr>
-        <p:txBody>
-          <a:bodyPr wrap="square" anchor="t">
-            <a:spAutoFit/>
-          </a:bodyPr>
-          <a:lstStyle/>
-          <a:p>
-            <a:pPr algn="l"/>
-            <a:r>
-              <a:rPr sz="4000" b="1" spc="-80">
-                <a:solidFill>
-                  <a:srgbClr val="1A1A1A"/>
-                </a:solidFill>
-                <a:latin typeface="Apple SD Gothic Neo"/>
-              </a:rPr>
-              <a:t>문제와 해결</a:t>
-            </a:r>
+          <a:solidFill>
+            <a:srgbClr val="5B5BD6"/>
+          </a:solidFill>
+          <a:ln>
+            <a:noFill/>
+          </a:ln>
+          <a:effectLst/>
+        </p:spPr>
+        <p:style>
+          <a:lnRef idx="1">
+            <a:schemeClr val="accent1"/>
+          </a:lnRef>
+          <a:fillRef idx="3">
+            <a:schemeClr val="accent1"/>
+          </a:fillRef>
+          <a:effectRef idx="2">
+            <a:schemeClr val="accent1"/>
+          </a:effectRef>
+          <a:fontRef idx="minor">
+            <a:schemeClr val="lt1"/>
+          </a:fontRef>
+        </p:style>
+        <p:txBody>
+          <a:bodyPr rtlCol="0" anchor="ctr"/>
+          <a:lstStyle/>
+          <a:p>
+            <a:pPr algn="ctr"/>
           </a:p>
         </p:txBody>
       </p:sp>
@@ -6559,7 +6626,7 @@
         </p:nvSpPr>
         <p:spPr>
           <a:xfrm>
-            <a:off x="777240" y="1920240"/>
+            <a:off x="777240" y="2057400"/>
             <a:ext cx="5212080" cy="1554480"/>
           </a:xfrm>
           <a:prstGeom prst="roundRect">
@@ -6607,8 +6674,8 @@
         </p:nvSpPr>
         <p:spPr>
           <a:xfrm>
-            <a:off x="777240" y="2148840"/>
-            <a:ext cx="91440" cy="1097280"/>
+            <a:off x="777240" y="2286000"/>
+            <a:ext cx="109728" cy="1097280"/>
           </a:xfrm>
           <a:prstGeom prst="rect">
             <a:avLst/>
@@ -6651,8 +6718,8 @@
         </p:nvSpPr>
         <p:spPr>
           <a:xfrm>
-            <a:off x="1188720" y="2148840"/>
-            <a:ext cx="4572000" cy="1188720"/>
+            <a:off x="1234440" y="2258568"/>
+            <a:ext cx="4572000" cy="1234440"/>
           </a:xfrm>
           <a:prstGeom prst="rect">
             <a:avLst/>
@@ -6667,25 +6734,25 @@
           <a:p>
             <a:pPr algn="l"/>
             <a:r>
-              <a:rPr sz="2200" b="1" spc="-30">
+              <a:rPr sz="2400" b="1" spc="-30">
                 <a:solidFill>
                   <a:srgbClr val="1A1A1A"/>
                 </a:solidFill>
                 <a:latin typeface="Apple SD Gothic Neo"/>
               </a:rPr>
-              <a:t>성급한 추상화</a:t>
+              <a:t>성급하게 쪼갬</a:t>
             </a:r>
           </a:p>
           <a:p>
             <a:pPr algn="l"/>
             <a:r>
-              <a:rPr sz="1800" b="0" spc="-30">
+              <a:rPr sz="1900" b="1" spc="-30">
                 <a:solidFill>
                   <a:srgbClr val="6B7280"/>
                 </a:solidFill>
                 <a:latin typeface="Apple SD Gothic Neo"/>
               </a:rPr>
-              <a:t>실익 없는 계층 분리 → 되돌림</a:t>
+              <a:t>쓸모없는 계층 분리 → 되돌림</a:t>
             </a:r>
           </a:p>
         </p:txBody>
@@ -6698,7 +6765,7 @@
         </p:nvSpPr>
         <p:spPr>
           <a:xfrm>
-            <a:off x="6172200" y="1920240"/>
+            <a:off x="6172200" y="2057400"/>
             <a:ext cx="5212080" cy="1554480"/>
           </a:xfrm>
           <a:prstGeom prst="roundRect">
@@ -6746,8 +6813,8 @@
         </p:nvSpPr>
         <p:spPr>
           <a:xfrm>
-            <a:off x="6172200" y="2148840"/>
-            <a:ext cx="91440" cy="1097280"/>
+            <a:off x="6172200" y="2286000"/>
+            <a:ext cx="109728" cy="1097280"/>
           </a:xfrm>
           <a:prstGeom prst="rect">
             <a:avLst/>
@@ -6790,8 +6857,8 @@
         </p:nvSpPr>
         <p:spPr>
           <a:xfrm>
-            <a:off x="6583680" y="2148840"/>
-            <a:ext cx="4572000" cy="1188720"/>
+            <a:off x="6629400" y="2258568"/>
+            <a:ext cx="4572000" cy="1234440"/>
           </a:xfrm>
           <a:prstGeom prst="rect">
             <a:avLst/>
@@ -6806,25 +6873,25 @@
           <a:p>
             <a:pPr algn="l"/>
             <a:r>
-              <a:rPr sz="2200" b="1" spc="-30">
+              <a:rPr sz="2400" b="1" spc="-30">
                 <a:solidFill>
                   <a:srgbClr val="1A1A1A"/>
                 </a:solidFill>
                 <a:latin typeface="Apple SD Gothic Neo"/>
               </a:rPr>
-              <a:t>명세와 불일치</a:t>
+              <a:t>시킨 것과 다름</a:t>
             </a:r>
           </a:p>
           <a:p>
             <a:pPr algn="l"/>
             <a:r>
-              <a:rPr sz="1800" b="0" spc="-30">
+              <a:rPr sz="1900" b="1" spc="-30">
                 <a:solidFill>
                   <a:srgbClr val="6B7280"/>
                 </a:solidFill>
                 <a:latin typeface="Apple SD Gothic Neo"/>
               </a:rPr>
-              <a:t>자동 배정 → 수동 배정 정정</a:t>
+              <a:t>자동 배정 → 수동 배정으로 정정</a:t>
             </a:r>
           </a:p>
         </p:txBody>
@@ -6837,7 +6904,7 @@
         </p:nvSpPr>
         <p:spPr>
           <a:xfrm>
-            <a:off x="777240" y="3657600"/>
+            <a:off x="777240" y="3794760"/>
             <a:ext cx="5212080" cy="1554480"/>
           </a:xfrm>
           <a:prstGeom prst="roundRect">
@@ -6885,8 +6952,8 @@
         </p:nvSpPr>
         <p:spPr>
           <a:xfrm>
-            <a:off x="777240" y="3886200"/>
-            <a:ext cx="91440" cy="1097280"/>
+            <a:off x="777240" y="4023360"/>
+            <a:ext cx="109728" cy="1097280"/>
           </a:xfrm>
           <a:prstGeom prst="rect">
             <a:avLst/>
@@ -6929,8 +6996,8 @@
         </p:nvSpPr>
         <p:spPr>
           <a:xfrm>
-            <a:off x="1188720" y="3886200"/>
-            <a:ext cx="4572000" cy="1188720"/>
+            <a:off x="1234440" y="3995928"/>
+            <a:ext cx="4572000" cy="1234440"/>
           </a:xfrm>
           <a:prstGeom prst="rect">
             <a:avLst/>
@@ -6945,25 +7012,25 @@
           <a:p>
             <a:pPr algn="l"/>
             <a:r>
-              <a:rPr sz="2200" b="1" spc="-30">
+              <a:rPr sz="2400" b="1" spc="-30">
                 <a:solidFill>
                   <a:srgbClr val="1A1A1A"/>
                 </a:solidFill>
                 <a:latin typeface="Apple SD Gothic Neo"/>
               </a:rPr>
-              <a:t>계층 패턴 일탈</a:t>
+              <a:t>정해둔 틀에서 이탈</a:t>
             </a:r>
           </a:p>
           <a:p>
             <a:pPr algn="l"/>
             <a:r>
-              <a:rPr sz="1800" b="0" spc="-30">
+              <a:rPr sz="1900" b="1" spc="-30">
                 <a:solidFill>
                   <a:srgbClr val="6B7280"/>
                 </a:solidFill>
                 <a:latin typeface="Apple SD Gothic Neo"/>
               </a:rPr>
-              <a:t>점검으로 식별·관리</a:t>
+              <a:t>점검으로 찾아내 관리</a:t>
             </a:r>
           </a:p>
         </p:txBody>
@@ -6976,7 +7043,7 @@
         </p:nvSpPr>
         <p:spPr>
           <a:xfrm>
-            <a:off x="6172200" y="3657600"/>
+            <a:off x="6172200" y="3794760"/>
             <a:ext cx="5212080" cy="1554480"/>
           </a:xfrm>
           <a:prstGeom prst="roundRect">
@@ -7024,8 +7091,8 @@
         </p:nvSpPr>
         <p:spPr>
           <a:xfrm>
-            <a:off x="6172200" y="3886200"/>
-            <a:ext cx="91440" cy="1097280"/>
+            <a:off x="6172200" y="4023360"/>
+            <a:ext cx="109728" cy="1097280"/>
           </a:xfrm>
           <a:prstGeom prst="rect">
             <a:avLst/>
@@ -7068,8 +7135,8 @@
         </p:nvSpPr>
         <p:spPr>
           <a:xfrm>
-            <a:off x="6583680" y="3886200"/>
-            <a:ext cx="4572000" cy="1188720"/>
+            <a:off x="6629400" y="3995928"/>
+            <a:ext cx="4572000" cy="1234440"/>
           </a:xfrm>
           <a:prstGeom prst="rect">
             <a:avLst/>
@@ -7084,25 +7151,25 @@
           <a:p>
             <a:pPr algn="l"/>
             <a:r>
-              <a:rPr sz="2200" b="1" spc="-30">
+              <a:rPr sz="2400" b="1" spc="-30">
                 <a:solidFill>
                   <a:srgbClr val="1A1A1A"/>
                 </a:solidFill>
                 <a:latin typeface="Apple SD Gothic Neo"/>
               </a:rPr>
-              <a:t>용어·도메인 오염</a:t>
+              <a:t>용어를 섞어 씀</a:t>
             </a:r>
           </a:p>
           <a:p>
             <a:pPr algn="l"/>
             <a:r>
-              <a:rPr sz="1800" b="0" spc="-30">
+              <a:rPr sz="1900" b="1" spc="-30">
                 <a:solidFill>
                   <a:srgbClr val="6B7280"/>
                 </a:solidFill>
                 <a:latin typeface="Apple SD Gothic Neo"/>
               </a:rPr>
-              <a:t>용어집·ADR로 사전 차단</a:t>
+              <a:t>용어집으로 미리 차단</a:t>
             </a:r>
           </a:p>
         </p:txBody>
@@ -7115,8 +7182,8 @@
         </p:nvSpPr>
         <p:spPr>
           <a:xfrm>
-            <a:off x="777240" y="5486400"/>
-            <a:ext cx="10607040" cy="731520"/>
+            <a:off x="777240" y="5623560"/>
+            <a:ext cx="10607040" cy="822960"/>
           </a:xfrm>
           <a:prstGeom prst="rect">
             <a:avLst/>
@@ -7131,7 +7198,7 @@
           <a:p>
             <a:pPr algn="ctr"/>
             <a:r>
-              <a:rPr sz="2200" b="1" spc="-30">
+              <a:rPr sz="2800" b="1" spc="-40">
                 <a:solidFill>
                   <a:srgbClr val="1A1A1A"/>
                 </a:solidFill>
@@ -7176,8 +7243,8 @@
         </p:nvSpPr>
         <p:spPr>
           <a:xfrm>
-            <a:off x="777240" y="548640"/>
-            <a:ext cx="10607040" cy="457200"/>
+            <a:off x="749808" y="566928"/>
+            <a:ext cx="10881360" cy="1371600"/>
           </a:xfrm>
           <a:prstGeom prst="rect">
             <a:avLst/>
@@ -7192,49 +7259,58 @@
           <a:p>
             <a:pPr algn="l"/>
             <a:r>
-              <a:rPr sz="1500" b="0" spc="60">
-                <a:solidFill>
-                  <a:srgbClr val="5B5BD6"/>
-                </a:solidFill>
-                <a:latin typeface="Menlo"/>
-              </a:rPr>
-              <a:t>ACTORS</a:t>
-            </a:r>
-          </a:p>
-        </p:txBody>
-      </p:sp>
-      <p:sp>
-        <p:nvSpPr>
-          <p:cNvPr id="3" name="TextBox 2"/>
-          <p:cNvSpPr txBox="1"/>
-          <p:nvPr/>
-        </p:nvSpPr>
-        <p:spPr>
-          <a:xfrm>
-            <a:off x="749808" y="960120"/>
-            <a:ext cx="10698480" cy="1188720"/>
+              <a:rPr sz="5200" b="1" spc="-100">
+                <a:solidFill>
+                  <a:srgbClr val="1A1A1A"/>
+                </a:solidFill>
+                <a:latin typeface="Apple SD Gothic Neo"/>
+              </a:rPr>
+              <a:t>누가 사용하나</a:t>
+            </a:r>
+          </a:p>
+        </p:txBody>
+      </p:sp>
+      <p:sp>
+        <p:nvSpPr>
+          <p:cNvPr id="3" name="Rectangle 2"/>
+          <p:cNvSpPr/>
+          <p:nvPr/>
+        </p:nvSpPr>
+        <p:spPr>
+          <a:xfrm>
+            <a:off x="822960" y="1627632"/>
+            <a:ext cx="868680" cy="82296"/>
           </a:xfrm>
           <a:prstGeom prst="rect">
             <a:avLst/>
           </a:prstGeom>
-          <a:noFill/>
-        </p:spPr>
-        <p:txBody>
-          <a:bodyPr wrap="square" anchor="t">
-            <a:spAutoFit/>
-          </a:bodyPr>
-          <a:lstStyle/>
-          <a:p>
-            <a:pPr algn="l"/>
-            <a:r>
-              <a:rPr sz="4000" b="1" spc="-80">
-                <a:solidFill>
-                  <a:srgbClr val="1A1A1A"/>
-                </a:solidFill>
-                <a:latin typeface="Apple SD Gothic Neo"/>
-              </a:rPr>
-              <a:t>누가 사용하나</a:t>
-            </a:r>
+          <a:solidFill>
+            <a:srgbClr val="5B5BD6"/>
+          </a:solidFill>
+          <a:ln>
+            <a:noFill/>
+          </a:ln>
+          <a:effectLst/>
+        </p:spPr>
+        <p:style>
+          <a:lnRef idx="1">
+            <a:schemeClr val="accent1"/>
+          </a:lnRef>
+          <a:fillRef idx="3">
+            <a:schemeClr val="accent1"/>
+          </a:fillRef>
+          <a:effectRef idx="2">
+            <a:schemeClr val="accent1"/>
+          </a:effectRef>
+          <a:fontRef idx="minor">
+            <a:schemeClr val="lt1"/>
+          </a:fontRef>
+        </p:style>
+        <p:txBody>
+          <a:bodyPr rtlCol="0" anchor="ctr"/>
+          <a:lstStyle/>
+          <a:p>
+            <a:pPr algn="ctr"/>
           </a:p>
         </p:txBody>
       </p:sp>
@@ -7246,7 +7322,7 @@
         </p:nvSpPr>
         <p:spPr>
           <a:xfrm>
-            <a:off x="1417320" y="2286000"/>
+            <a:off x="1417320" y="2331720"/>
             <a:ext cx="2286000" cy="2286000"/>
           </a:xfrm>
           <a:prstGeom prst="ellipse">
@@ -7280,7 +7356,7 @@
           <a:p>
             <a:pPr algn="ctr"/>
             <a:r>
-              <a:rPr sz="3000" b="1">
+              <a:rPr sz="3400" b="1">
                 <a:solidFill>
                   <a:srgbClr val="1A1A1A"/>
                 </a:solidFill>
@@ -7299,8 +7375,8 @@
         </p:nvSpPr>
         <p:spPr>
           <a:xfrm>
-            <a:off x="502920" y="4800600"/>
-            <a:ext cx="4114800" cy="640080"/>
+            <a:off x="502920" y="4846320"/>
+            <a:ext cx="4114800" cy="731520"/>
           </a:xfrm>
           <a:prstGeom prst="rect">
             <a:avLst/>
@@ -7315,7 +7391,7 @@
           <a:p>
             <a:pPr algn="ctr"/>
             <a:r>
-              <a:rPr sz="2100" b="1" spc="-30">
+              <a:rPr sz="2700" b="1" spc="-30">
                 <a:solidFill>
                   <a:srgbClr val="1A1A1A"/>
                 </a:solidFill>
@@ -7334,7 +7410,7 @@
         </p:nvSpPr>
         <p:spPr>
           <a:xfrm>
-            <a:off x="4956048" y="2286000"/>
+            <a:off x="4956048" y="2331720"/>
             <a:ext cx="2286000" cy="2286000"/>
           </a:xfrm>
           <a:prstGeom prst="ellipse">
@@ -7368,7 +7444,7 @@
           <a:p>
             <a:pPr algn="ctr"/>
             <a:r>
-              <a:rPr sz="3000" b="1">
+              <a:rPr sz="3400" b="1">
                 <a:solidFill>
                   <a:srgbClr val="FFFFFF"/>
                 </a:solidFill>
@@ -7387,8 +7463,8 @@
         </p:nvSpPr>
         <p:spPr>
           <a:xfrm>
-            <a:off x="4041648" y="4800600"/>
-            <a:ext cx="4114800" cy="640080"/>
+            <a:off x="4041648" y="4846320"/>
+            <a:ext cx="4114800" cy="731520"/>
           </a:xfrm>
           <a:prstGeom prst="rect">
             <a:avLst/>
@@ -7403,7 +7479,7 @@
           <a:p>
             <a:pPr algn="ctr"/>
             <a:r>
-              <a:rPr sz="2100" b="1" spc="-30">
+              <a:rPr sz="2700" b="1" spc="-30">
                 <a:solidFill>
                   <a:srgbClr val="1A1A1A"/>
                 </a:solidFill>
@@ -7422,7 +7498,7 @@
         </p:nvSpPr>
         <p:spPr>
           <a:xfrm>
-            <a:off x="8494776" y="2286000"/>
+            <a:off x="8494776" y="2331720"/>
             <a:ext cx="2286000" cy="2286000"/>
           </a:xfrm>
           <a:prstGeom prst="ellipse">
@@ -7456,7 +7532,7 @@
           <a:p>
             <a:pPr algn="ctr"/>
             <a:r>
-              <a:rPr sz="3000" b="1">
+              <a:rPr sz="3400" b="1">
                 <a:solidFill>
                   <a:srgbClr val="FFFFFF"/>
                 </a:solidFill>
@@ -7475,8 +7551,8 @@
         </p:nvSpPr>
         <p:spPr>
           <a:xfrm>
-            <a:off x="7580375" y="4800600"/>
-            <a:ext cx="4114800" cy="640080"/>
+            <a:off x="7580375" y="4846320"/>
+            <a:ext cx="4114800" cy="731520"/>
           </a:xfrm>
           <a:prstGeom prst="rect">
             <a:avLst/>
@@ -7491,7 +7567,7 @@
           <a:p>
             <a:pPr algn="ctr"/>
             <a:r>
-              <a:rPr sz="2100" b="1" spc="-30">
+              <a:rPr sz="2700" b="1" spc="-30">
                 <a:solidFill>
                   <a:srgbClr val="1A1A1A"/>
                 </a:solidFill>
@@ -7536,8 +7612,8 @@
         </p:nvSpPr>
         <p:spPr>
           <a:xfrm>
-            <a:off x="914400" y="2194560"/>
-            <a:ext cx="10332720" cy="457200"/>
+            <a:off x="868680" y="2514600"/>
+            <a:ext cx="10607040" cy="2011680"/>
           </a:xfrm>
           <a:prstGeom prst="rect">
             <a:avLst/>
@@ -7552,54 +7628,19 @@
           <a:p>
             <a:pPr algn="l"/>
             <a:r>
-              <a:rPr sz="1600" b="0" spc="80">
-                <a:solidFill>
-                  <a:srgbClr val="CDBFF7"/>
-                </a:solidFill>
-                <a:latin typeface="Menlo"/>
-              </a:rPr>
-              <a:t>CONCLUSION</a:t>
-            </a:r>
-          </a:p>
-        </p:txBody>
-      </p:sp>
-      <p:sp>
-        <p:nvSpPr>
-          <p:cNvPr id="3" name="TextBox 2"/>
-          <p:cNvSpPr txBox="1"/>
-          <p:nvPr/>
-        </p:nvSpPr>
-        <p:spPr>
-          <a:xfrm>
-            <a:off x="868680" y="2743200"/>
-            <a:ext cx="10607040" cy="1645920"/>
-          </a:xfrm>
-          <a:prstGeom prst="rect">
-            <a:avLst/>
-          </a:prstGeom>
-          <a:noFill/>
-        </p:spPr>
-        <p:txBody>
-          <a:bodyPr wrap="square" anchor="t">
-            <a:spAutoFit/>
-          </a:bodyPr>
-          <a:lstStyle/>
+              <a:rPr sz="4800" b="1" spc="-100">
+                <a:solidFill>
+                  <a:srgbClr val="FFFFFF"/>
+                </a:solidFill>
+                <a:latin typeface="Apple SD Gothic Neo"/>
+              </a:rPr>
+              <a:t>설계한 그대로 구현했고,</a:t>
+            </a:r>
+          </a:p>
           <a:p>
             <a:pPr algn="l"/>
             <a:r>
-              <a:rPr sz="4400" b="1" spc="-90">
-                <a:solidFill>
-                  <a:srgbClr val="FFFFFF"/>
-                </a:solidFill>
-                <a:latin typeface="Apple SD Gothic Neo"/>
-              </a:rPr>
-              <a:t>설계한 그대로 구현했고,</a:t>
-            </a:r>
-          </a:p>
-          <a:p>
-            <a:pPr algn="l"/>
-            <a:r>
-              <a:rPr sz="4400" b="1" spc="-90">
+              <a:rPr sz="4800" b="1" spc="-100">
                 <a:solidFill>
                   <a:srgbClr val="FFFFFF"/>
                 </a:solidFill>
@@ -7644,8 +7685,8 @@
         </p:nvSpPr>
         <p:spPr>
           <a:xfrm>
-            <a:off x="777240" y="548640"/>
-            <a:ext cx="10607040" cy="457200"/>
+            <a:off x="749808" y="566928"/>
+            <a:ext cx="10881360" cy="1371600"/>
           </a:xfrm>
           <a:prstGeom prst="rect">
             <a:avLst/>
@@ -7660,49 +7701,58 @@
           <a:p>
             <a:pPr algn="l"/>
             <a:r>
-              <a:rPr sz="1500" b="0" spc="60">
-                <a:solidFill>
-                  <a:srgbClr val="5B5BD6"/>
-                </a:solidFill>
-                <a:latin typeface="Menlo"/>
-              </a:rPr>
-              <a:t>PRODUCTS</a:t>
-            </a:r>
-          </a:p>
-        </p:txBody>
-      </p:sp>
-      <p:sp>
-        <p:nvSpPr>
-          <p:cNvPr id="3" name="TextBox 2"/>
-          <p:cNvSpPr txBox="1"/>
-          <p:nvPr/>
-        </p:nvSpPr>
-        <p:spPr>
-          <a:xfrm>
-            <a:off x="749808" y="960120"/>
-            <a:ext cx="10698480" cy="1188720"/>
+              <a:rPr sz="5200" b="1" spc="-100">
+                <a:solidFill>
+                  <a:srgbClr val="1A1A1A"/>
+                </a:solidFill>
+                <a:latin typeface="Apple SD Gothic Neo"/>
+              </a:rPr>
+              <a:t>두 가지 보험</a:t>
+            </a:r>
+          </a:p>
+        </p:txBody>
+      </p:sp>
+      <p:sp>
+        <p:nvSpPr>
+          <p:cNvPr id="3" name="Rectangle 2"/>
+          <p:cNvSpPr/>
+          <p:nvPr/>
+        </p:nvSpPr>
+        <p:spPr>
+          <a:xfrm>
+            <a:off x="822960" y="1627632"/>
+            <a:ext cx="868680" cy="82296"/>
           </a:xfrm>
           <a:prstGeom prst="rect">
             <a:avLst/>
           </a:prstGeom>
-          <a:noFill/>
-        </p:spPr>
-        <p:txBody>
-          <a:bodyPr wrap="square" anchor="t">
-            <a:spAutoFit/>
-          </a:bodyPr>
-          <a:lstStyle/>
-          <a:p>
-            <a:pPr algn="l"/>
-            <a:r>
-              <a:rPr sz="4000" b="1" spc="-80">
-                <a:solidFill>
-                  <a:srgbClr val="1A1A1A"/>
-                </a:solidFill>
-                <a:latin typeface="Apple SD Gothic Neo"/>
-              </a:rPr>
-              <a:t>두 가지 보험</a:t>
-            </a:r>
+          <a:solidFill>
+            <a:srgbClr val="5B5BD6"/>
+          </a:solidFill>
+          <a:ln>
+            <a:noFill/>
+          </a:ln>
+          <a:effectLst/>
+        </p:spPr>
+        <p:style>
+          <a:lnRef idx="1">
+            <a:schemeClr val="accent1"/>
+          </a:lnRef>
+          <a:fillRef idx="3">
+            <a:schemeClr val="accent1"/>
+          </a:fillRef>
+          <a:effectRef idx="2">
+            <a:schemeClr val="accent1"/>
+          </a:effectRef>
+          <a:fontRef idx="minor">
+            <a:schemeClr val="lt1"/>
+          </a:fontRef>
+        </p:style>
+        <p:txBody>
+          <a:bodyPr rtlCol="0" anchor="ctr"/>
+          <a:lstStyle/>
+          <a:p>
+            <a:pPr algn="ctr"/>
           </a:p>
         </p:txBody>
       </p:sp>
@@ -7714,8 +7764,8 @@
         </p:nvSpPr>
         <p:spPr>
           <a:xfrm>
-            <a:off x="1325880" y="2331720"/>
-            <a:ext cx="4480560" cy="2743200"/>
+            <a:off x="1325880" y="2377440"/>
+            <a:ext cx="4480560" cy="2834640"/>
           </a:xfrm>
           <a:prstGeom prst="roundRect">
             <a:avLst>
@@ -7760,7 +7810,7 @@
         </p:nvSpPr>
         <p:spPr>
           <a:xfrm>
-            <a:off x="1325880" y="3063240"/>
+            <a:off x="1325880" y="3108960"/>
             <a:ext cx="4480560" cy="914400"/>
           </a:xfrm>
           <a:prstGeom prst="rect">
@@ -7776,7 +7826,7 @@
           <a:p>
             <a:pPr algn="ctr"/>
             <a:r>
-              <a:rPr sz="3600" b="1" spc="-60">
+              <a:rPr sz="4200" b="1" spc="-60">
                 <a:solidFill>
                   <a:srgbClr val="1A1A1A"/>
                 </a:solidFill>
@@ -7795,8 +7845,8 @@
         </p:nvSpPr>
         <p:spPr>
           <a:xfrm>
-            <a:off x="1325880" y="4114800"/>
-            <a:ext cx="4480560" cy="640080"/>
+            <a:off x="1325880" y="4251960"/>
+            <a:ext cx="4480560" cy="731520"/>
           </a:xfrm>
           <a:prstGeom prst="rect">
             <a:avLst/>
@@ -7811,7 +7861,7 @@
           <a:p>
             <a:pPr algn="ctr"/>
             <a:r>
-              <a:rPr sz="2100" b="0" spc="-30">
+              <a:rPr sz="2600" b="0" spc="-30">
                 <a:solidFill>
                   <a:srgbClr val="6B7280"/>
                 </a:solidFill>
@@ -7830,8 +7880,8 @@
         </p:nvSpPr>
         <p:spPr>
           <a:xfrm>
-            <a:off x="6400800" y="2331720"/>
-            <a:ext cx="4480560" cy="2743200"/>
+            <a:off x="6400800" y="2377440"/>
+            <a:ext cx="4480560" cy="2834640"/>
           </a:xfrm>
           <a:prstGeom prst="roundRect">
             <a:avLst>
@@ -7876,7 +7926,7 @@
         </p:nvSpPr>
         <p:spPr>
           <a:xfrm>
-            <a:off x="6400800" y="3063240"/>
+            <a:off x="6400800" y="3108960"/>
             <a:ext cx="4480560" cy="914400"/>
           </a:xfrm>
           <a:prstGeom prst="rect">
@@ -7892,7 +7942,7 @@
           <a:p>
             <a:pPr algn="ctr"/>
             <a:r>
-              <a:rPr sz="3600" b="1" spc="-60">
+              <a:rPr sz="4200" b="1" spc="-60">
                 <a:solidFill>
                   <a:srgbClr val="1A1A1A"/>
                 </a:solidFill>
@@ -7911,8 +7961,8 @@
         </p:nvSpPr>
         <p:spPr>
           <a:xfrm>
-            <a:off x="6400800" y="4114800"/>
-            <a:ext cx="4480560" cy="640080"/>
+            <a:off x="6400800" y="4251960"/>
+            <a:ext cx="4480560" cy="731520"/>
           </a:xfrm>
           <a:prstGeom prst="rect">
             <a:avLst/>
@@ -7927,7 +7977,7 @@
           <a:p>
             <a:pPr algn="ctr"/>
             <a:r>
-              <a:rPr sz="2100" b="0" spc="-30">
+              <a:rPr sz="2600" b="0" spc="-30">
                 <a:solidFill>
                   <a:srgbClr val="6B7280"/>
                 </a:solidFill>
@@ -7972,8 +8022,8 @@
         </p:nvSpPr>
         <p:spPr>
           <a:xfrm>
-            <a:off x="777240" y="548640"/>
-            <a:ext cx="10607040" cy="457200"/>
+            <a:off x="749808" y="566928"/>
+            <a:ext cx="10881360" cy="1371600"/>
           </a:xfrm>
           <a:prstGeom prst="rect">
             <a:avLst/>
@@ -7988,67 +8038,30 @@
           <a:p>
             <a:pPr algn="l"/>
             <a:r>
-              <a:rPr sz="1500" b="0" spc="60">
-                <a:solidFill>
-                  <a:srgbClr val="5B5BD6"/>
-                </a:solidFill>
-                <a:latin typeface="Menlo"/>
-              </a:rPr>
-              <a:t>MEDICAL</a:t>
-            </a:r>
-          </a:p>
-        </p:txBody>
-      </p:sp>
-      <p:sp>
-        <p:nvSpPr>
-          <p:cNvPr id="3" name="TextBox 2"/>
-          <p:cNvSpPr txBox="1"/>
-          <p:nvPr/>
-        </p:nvSpPr>
-        <p:spPr>
-          <a:xfrm>
-            <a:off x="749808" y="960120"/>
-            <a:ext cx="10698480" cy="1188720"/>
+              <a:rPr sz="5200" b="1" spc="-100">
+                <a:solidFill>
+                  <a:srgbClr val="1A1A1A"/>
+                </a:solidFill>
+                <a:latin typeface="Apple SD Gothic Neo"/>
+              </a:rPr>
+              <a:t>병원비를 보험금으로 돌려준다</a:t>
+            </a:r>
+          </a:p>
+        </p:txBody>
+      </p:sp>
+      <p:sp>
+        <p:nvSpPr>
+          <p:cNvPr id="3" name="Rectangle 2"/>
+          <p:cNvSpPr/>
+          <p:nvPr/>
+        </p:nvSpPr>
+        <p:spPr>
+          <a:xfrm>
+            <a:off x="822960" y="1627632"/>
+            <a:ext cx="868680" cy="82296"/>
           </a:xfrm>
           <a:prstGeom prst="rect">
             <a:avLst/>
-          </a:prstGeom>
-          <a:noFill/>
-        </p:spPr>
-        <p:txBody>
-          <a:bodyPr wrap="square" anchor="t">
-            <a:spAutoFit/>
-          </a:bodyPr>
-          <a:lstStyle/>
-          <a:p>
-            <a:pPr algn="l"/>
-            <a:r>
-              <a:rPr sz="4000" b="1" spc="-80">
-                <a:solidFill>
-                  <a:srgbClr val="1A1A1A"/>
-                </a:solidFill>
-                <a:latin typeface="Apple SD Gothic Neo"/>
-              </a:rPr>
-              <a:t>병원비를 보험금으로 돌려준다</a:t>
-            </a:r>
-          </a:p>
-        </p:txBody>
-      </p:sp>
-      <p:sp>
-        <p:nvSpPr>
-          <p:cNvPr id="4" name="Rounded Rectangle 3"/>
-          <p:cNvSpPr/>
-          <p:nvPr/>
-        </p:nvSpPr>
-        <p:spPr>
-          <a:xfrm>
-            <a:off x="914400" y="3566160"/>
-            <a:ext cx="2743200" cy="1188720"/>
-          </a:xfrm>
-          <a:prstGeom prst="roundRect">
-            <a:avLst>
-              <a:gd name="adj" fmla="val 16000"/>
-            </a:avLst>
           </a:prstGeom>
           <a:solidFill>
             <a:srgbClr val="5B5BD6"/>
@@ -8073,12 +8086,58 @@
           </a:fontRef>
         </p:style>
         <p:txBody>
+          <a:bodyPr rtlCol="0" anchor="ctr"/>
+          <a:lstStyle/>
+          <a:p>
+            <a:pPr algn="ctr"/>
+          </a:p>
+        </p:txBody>
+      </p:sp>
+      <p:sp>
+        <p:nvSpPr>
+          <p:cNvPr id="4" name="Rounded Rectangle 3"/>
+          <p:cNvSpPr/>
+          <p:nvPr/>
+        </p:nvSpPr>
+        <p:spPr>
+          <a:xfrm>
+            <a:off x="822960" y="3611880"/>
+            <a:ext cx="2834640" cy="1280160"/>
+          </a:xfrm>
+          <a:prstGeom prst="roundRect">
+            <a:avLst>
+              <a:gd name="adj" fmla="val 16000"/>
+            </a:avLst>
+          </a:prstGeom>
+          <a:solidFill>
+            <a:srgbClr val="5B5BD6"/>
+          </a:solidFill>
+          <a:ln>
+            <a:noFill/>
+          </a:ln>
+          <a:effectLst/>
+        </p:spPr>
+        <p:style>
+          <a:lnRef idx="1">
+            <a:schemeClr val="accent1"/>
+          </a:lnRef>
+          <a:fillRef idx="3">
+            <a:schemeClr val="accent1"/>
+          </a:fillRef>
+          <a:effectRef idx="2">
+            <a:schemeClr val="accent1"/>
+          </a:effectRef>
+          <a:fontRef idx="minor">
+            <a:schemeClr val="lt1"/>
+          </a:fontRef>
+        </p:style>
+        <p:txBody>
           <a:bodyPr rtlCol="0" anchor="ctr" tIns="76200" bIns="76200" lIns="177800" rIns="177800" wrap="none"/>
           <a:lstStyle/>
           <a:p>
             <a:pPr algn="ctr"/>
             <a:r>
-              <a:rPr sz="2300" b="1">
+              <a:rPr sz="2800" b="1">
                 <a:solidFill>
                   <a:srgbClr val="FFFFFF"/>
                 </a:solidFill>
@@ -8097,7 +8156,7 @@
         </p:nvSpPr>
         <p:spPr>
           <a:xfrm>
-            <a:off x="3931920" y="2880360"/>
+            <a:off x="3886200" y="2880360"/>
             <a:ext cx="640080" cy="640080"/>
           </a:xfrm>
           <a:prstGeom prst="rect">
@@ -8113,7 +8172,7 @@
           <a:p>
             <a:pPr algn="ctr"/>
             <a:r>
-              <a:rPr sz="2800" b="1">
+              <a:rPr sz="3200" b="1">
                 <a:solidFill>
                   <a:srgbClr val="5B5BD6"/>
                 </a:solidFill>
@@ -8132,7 +8191,7 @@
         </p:nvSpPr>
         <p:spPr>
           <a:xfrm>
-            <a:off x="3931920" y="4617720"/>
+            <a:off x="3886200" y="4709160"/>
             <a:ext cx="640080" cy="640080"/>
           </a:xfrm>
           <a:prstGeom prst="rect">
@@ -8148,7 +8207,7 @@
           <a:p>
             <a:pPr algn="ctr"/>
             <a:r>
-              <a:rPr sz="2800" b="1">
+              <a:rPr sz="3200" b="1">
                 <a:solidFill>
                   <a:srgbClr val="5B5BD6"/>
                 </a:solidFill>
@@ -8167,8 +8226,8 @@
         </p:nvSpPr>
         <p:spPr>
           <a:xfrm>
-            <a:off x="4754880" y="2468880"/>
-            <a:ext cx="6583680" cy="1234440"/>
+            <a:off x="4663440" y="2514600"/>
+            <a:ext cx="6766560" cy="1371600"/>
           </a:xfrm>
           <a:prstGeom prst="roundRect">
             <a:avLst>
@@ -8201,15 +8260,15 @@
           <a:bodyPr rtlCol="0" anchor="ctr" tIns="76200" bIns="76200" lIns="177800" rIns="177800" wrap="none"/>
           <a:lstStyle/>
           <a:p>
-            <a:pPr algn="l"/>
-            <a:r>
-              <a:rPr sz="2200" b="1">
+            <a:pPr algn="ctr"/>
+            <a:r>
+              <a:rPr sz="2700" b="1">
                 <a:solidFill>
                   <a:srgbClr val="1A1A1A"/>
                 </a:solidFill>
                 <a:latin typeface="Apple SD Gothic Neo"/>
               </a:rPr>
-              <a:t>100만 원 미만  →  바로 입금</a:t>
+              <a:t>100만 원 미만 → 바로 입금</a:t>
             </a:r>
           </a:p>
         </p:txBody>
@@ -8222,8 +8281,8 @@
         </p:nvSpPr>
         <p:spPr>
           <a:xfrm>
-            <a:off x="4754880" y="4160520"/>
-            <a:ext cx="6583680" cy="1234440"/>
+            <a:off x="4663440" y="4297680"/>
+            <a:ext cx="6766560" cy="1371600"/>
           </a:xfrm>
           <a:prstGeom prst="roundRect">
             <a:avLst>
@@ -8256,15 +8315,15 @@
           <a:bodyPr rtlCol="0" anchor="ctr" tIns="76200" bIns="76200" lIns="177800" rIns="177800" wrap="none"/>
           <a:lstStyle/>
           <a:p>
-            <a:pPr algn="l"/>
-            <a:r>
-              <a:rPr sz="2200" b="1">
+            <a:pPr algn="ctr"/>
+            <a:r>
+              <a:rPr sz="2700" b="1">
                 <a:solidFill>
                   <a:srgbClr val="1A1A1A"/>
                 </a:solidFill>
                 <a:latin typeface="Apple SD Gothic Neo"/>
               </a:rPr>
-              <a:t>100만 원 이상  →  직원 확인 후 입금</a:t>
+              <a:t>100만 원 이상 → 직원 확인 후 입금</a:t>
             </a:r>
           </a:p>
         </p:txBody>
@@ -8303,8 +8362,8 @@
         </p:nvSpPr>
         <p:spPr>
           <a:xfrm>
-            <a:off x="777240" y="548640"/>
-            <a:ext cx="10607040" cy="457200"/>
+            <a:off x="749808" y="566928"/>
+            <a:ext cx="10881360" cy="1371600"/>
           </a:xfrm>
           <a:prstGeom prst="rect">
             <a:avLst/>
@@ -8319,49 +8378,58 @@
           <a:p>
             <a:pPr algn="l"/>
             <a:r>
-              <a:rPr sz="1500" b="0" spc="60">
-                <a:solidFill>
-                  <a:srgbClr val="5B5BD6"/>
-                </a:solidFill>
-                <a:latin typeface="Menlo"/>
-              </a:rPr>
-              <a:t>AUTO</a:t>
-            </a:r>
-          </a:p>
-        </p:txBody>
-      </p:sp>
-      <p:sp>
-        <p:nvSpPr>
-          <p:cNvPr id="3" name="TextBox 2"/>
-          <p:cNvSpPr txBox="1"/>
-          <p:nvPr/>
-        </p:nvSpPr>
-        <p:spPr>
-          <a:xfrm>
-            <a:off x="749808" y="960120"/>
-            <a:ext cx="10698480" cy="1188720"/>
+              <a:rPr sz="5200" b="1" spc="-100">
+                <a:solidFill>
+                  <a:srgbClr val="1A1A1A"/>
+                </a:solidFill>
+                <a:latin typeface="Apple SD Gothic Neo"/>
+              </a:rPr>
+              <a:t>사고 피해를 보상한다</a:t>
+            </a:r>
+          </a:p>
+        </p:txBody>
+      </p:sp>
+      <p:sp>
+        <p:nvSpPr>
+          <p:cNvPr id="3" name="Rectangle 2"/>
+          <p:cNvSpPr/>
+          <p:nvPr/>
+        </p:nvSpPr>
+        <p:spPr>
+          <a:xfrm>
+            <a:off x="822960" y="1627632"/>
+            <a:ext cx="868680" cy="82296"/>
           </a:xfrm>
           <a:prstGeom prst="rect">
             <a:avLst/>
           </a:prstGeom>
-          <a:noFill/>
-        </p:spPr>
-        <p:txBody>
-          <a:bodyPr wrap="square" anchor="t">
-            <a:spAutoFit/>
-          </a:bodyPr>
-          <a:lstStyle/>
-          <a:p>
-            <a:pPr algn="l"/>
-            <a:r>
-              <a:rPr sz="4000" b="1" spc="-80">
-                <a:solidFill>
-                  <a:srgbClr val="1A1A1A"/>
-                </a:solidFill>
-                <a:latin typeface="Apple SD Gothic Neo"/>
-              </a:rPr>
-              <a:t>사고 피해를 보상한다</a:t>
-            </a:r>
+          <a:solidFill>
+            <a:srgbClr val="5B5BD6"/>
+          </a:solidFill>
+          <a:ln>
+            <a:noFill/>
+          </a:ln>
+          <a:effectLst/>
+        </p:spPr>
+        <p:style>
+          <a:lnRef idx="1">
+            <a:schemeClr val="accent1"/>
+          </a:lnRef>
+          <a:fillRef idx="3">
+            <a:schemeClr val="accent1"/>
+          </a:fillRef>
+          <a:effectRef idx="2">
+            <a:schemeClr val="accent1"/>
+          </a:effectRef>
+          <a:fontRef idx="minor">
+            <a:schemeClr val="lt1"/>
+          </a:fontRef>
+        </p:style>
+        <p:txBody>
+          <a:bodyPr rtlCol="0" anchor="ctr"/>
+          <a:lstStyle/>
+          <a:p>
+            <a:pPr algn="ctr"/>
           </a:p>
         </p:txBody>
       </p:sp>
@@ -8373,8 +8441,8 @@
         </p:nvSpPr>
         <p:spPr>
           <a:xfrm>
-            <a:off x="609447" y="3383280"/>
-            <a:ext cx="2331720" cy="1280160"/>
+            <a:off x="586587" y="3383280"/>
+            <a:ext cx="2377440" cy="1371600"/>
           </a:xfrm>
           <a:prstGeom prst="roundRect">
             <a:avLst>
@@ -8411,7 +8479,7 @@
           <a:p>
             <a:pPr algn="ctr"/>
             <a:r>
-              <a:rPr sz="2200" b="1">
+              <a:rPr sz="2600" b="1">
                 <a:solidFill>
                   <a:srgbClr val="1A1A1A"/>
                 </a:solidFill>
@@ -8430,7 +8498,7 @@
         </p:nvSpPr>
         <p:spPr>
           <a:xfrm>
-            <a:off x="2977743" y="3611880"/>
+            <a:off x="2964027" y="3611880"/>
             <a:ext cx="640080" cy="640080"/>
           </a:xfrm>
           <a:prstGeom prst="rect">
@@ -8465,8 +8533,8 @@
         </p:nvSpPr>
         <p:spPr>
           <a:xfrm>
-            <a:off x="3489807" y="3383280"/>
-            <a:ext cx="2331720" cy="1280160"/>
+            <a:off x="3466947" y="3383280"/>
+            <a:ext cx="2377440" cy="1371600"/>
           </a:xfrm>
           <a:prstGeom prst="roundRect">
             <a:avLst>
@@ -8503,7 +8571,7 @@
           <a:p>
             <a:pPr algn="ctr"/>
             <a:r>
-              <a:rPr sz="2200" b="1">
+              <a:rPr sz="2600" b="1">
                 <a:solidFill>
                   <a:srgbClr val="1A1A1A"/>
                 </a:solidFill>
@@ -8522,7 +8590,7 @@
         </p:nvSpPr>
         <p:spPr>
           <a:xfrm>
-            <a:off x="5858103" y="3611880"/>
+            <a:off x="5844387" y="3611880"/>
             <a:ext cx="640080" cy="640080"/>
           </a:xfrm>
           <a:prstGeom prst="rect">
@@ -8557,8 +8625,8 @@
         </p:nvSpPr>
         <p:spPr>
           <a:xfrm>
-            <a:off x="6370167" y="3383280"/>
-            <a:ext cx="2331720" cy="1280160"/>
+            <a:off x="6347307" y="3383280"/>
+            <a:ext cx="2377440" cy="1371600"/>
           </a:xfrm>
           <a:prstGeom prst="roundRect">
             <a:avLst>
@@ -8595,13 +8663,13 @@
           <a:p>
             <a:pPr algn="ctr"/>
             <a:r>
-              <a:rPr sz="2200" b="1">
+              <a:rPr sz="2600" b="1">
                 <a:solidFill>
                   <a:srgbClr val="1A1A1A"/>
                 </a:solidFill>
                 <a:latin typeface="Apple SD Gothic Neo"/>
               </a:rPr>
-              <a:t>보상액 사정</a:t>
+              <a:t>보상액 결정</a:t>
             </a:r>
           </a:p>
         </p:txBody>
@@ -8614,7 +8682,7 @@
         </p:nvSpPr>
         <p:spPr>
           <a:xfrm>
-            <a:off x="8738463" y="3611880"/>
+            <a:off x="8724747" y="3611880"/>
             <a:ext cx="640080" cy="640080"/>
           </a:xfrm>
           <a:prstGeom prst="rect">
@@ -8649,8 +8717,8 @@
         </p:nvSpPr>
         <p:spPr>
           <a:xfrm>
-            <a:off x="9250527" y="3383280"/>
-            <a:ext cx="2331720" cy="1280160"/>
+            <a:off x="9227667" y="3383280"/>
+            <a:ext cx="2377440" cy="1371600"/>
           </a:xfrm>
           <a:prstGeom prst="roundRect">
             <a:avLst>
@@ -8687,7 +8755,7 @@
           <a:p>
             <a:pPr algn="ctr"/>
             <a:r>
-              <a:rPr sz="2200" b="1">
+              <a:rPr sz="2600" b="1">
                 <a:solidFill>
                   <a:srgbClr val="1A1A1A"/>
                 </a:solidFill>
@@ -8732,8 +8800,8 @@
         </p:nvSpPr>
         <p:spPr>
           <a:xfrm>
-            <a:off x="777240" y="548640"/>
-            <a:ext cx="10607040" cy="457200"/>
+            <a:off x="749808" y="566928"/>
+            <a:ext cx="10881360" cy="1371600"/>
           </a:xfrm>
           <a:prstGeom prst="rect">
             <a:avLst/>
@@ -8748,49 +8816,58 @@
           <a:p>
             <a:pPr algn="l"/>
             <a:r>
-              <a:rPr sz="1500" b="0" spc="60">
-                <a:solidFill>
-                  <a:srgbClr val="5B5BD6"/>
-                </a:solidFill>
-                <a:latin typeface="Menlo"/>
-              </a:rPr>
-              <a:t>JOURNEY 1</a:t>
-            </a:r>
-          </a:p>
-        </p:txBody>
-      </p:sp>
-      <p:sp>
-        <p:nvSpPr>
-          <p:cNvPr id="3" name="TextBox 2"/>
-          <p:cNvSpPr txBox="1"/>
-          <p:nvPr/>
-        </p:nvSpPr>
-        <p:spPr>
-          <a:xfrm>
-            <a:off x="749808" y="960120"/>
-            <a:ext cx="10698480" cy="1188720"/>
+              <a:rPr sz="5200" b="1" spc="-100">
+                <a:solidFill>
+                  <a:srgbClr val="1A1A1A"/>
+                </a:solidFill>
+                <a:latin typeface="Apple SD Gothic Neo"/>
+              </a:rPr>
+              <a:t>가입</a:t>
+            </a:r>
+          </a:p>
+        </p:txBody>
+      </p:sp>
+      <p:sp>
+        <p:nvSpPr>
+          <p:cNvPr id="3" name="Rectangle 2"/>
+          <p:cNvSpPr/>
+          <p:nvPr/>
+        </p:nvSpPr>
+        <p:spPr>
+          <a:xfrm>
+            <a:off x="822960" y="1627632"/>
+            <a:ext cx="868680" cy="82296"/>
           </a:xfrm>
           <a:prstGeom prst="rect">
             <a:avLst/>
           </a:prstGeom>
-          <a:noFill/>
-        </p:spPr>
-        <p:txBody>
-          <a:bodyPr wrap="square" anchor="t">
-            <a:spAutoFit/>
-          </a:bodyPr>
-          <a:lstStyle/>
-          <a:p>
-            <a:pPr algn="l"/>
-            <a:r>
-              <a:rPr sz="4000" b="1" spc="-80">
-                <a:solidFill>
-                  <a:srgbClr val="1A1A1A"/>
-                </a:solidFill>
-                <a:latin typeface="Apple SD Gothic Neo"/>
-              </a:rPr>
-              <a:t>가입</a:t>
-            </a:r>
+          <a:solidFill>
+            <a:srgbClr val="5B5BD6"/>
+          </a:solidFill>
+          <a:ln>
+            <a:noFill/>
+          </a:ln>
+          <a:effectLst/>
+        </p:spPr>
+        <p:style>
+          <a:lnRef idx="1">
+            <a:schemeClr val="accent1"/>
+          </a:lnRef>
+          <a:fillRef idx="3">
+            <a:schemeClr val="accent1"/>
+          </a:fillRef>
+          <a:effectRef idx="2">
+            <a:schemeClr val="accent1"/>
+          </a:effectRef>
+          <a:fontRef idx="minor">
+            <a:schemeClr val="lt1"/>
+          </a:fontRef>
+        </p:style>
+        <p:txBody>
+          <a:bodyPr rtlCol="0" anchor="ctr"/>
+          <a:lstStyle/>
+          <a:p>
+            <a:pPr algn="ctr"/>
           </a:p>
         </p:txBody>
       </p:sp>
@@ -8802,8 +8879,8 @@
         </p:nvSpPr>
         <p:spPr>
           <a:xfrm>
-            <a:off x="1089507" y="2331720"/>
-            <a:ext cx="1371600" cy="1371600"/>
+            <a:off x="998067" y="2286000"/>
+            <a:ext cx="1554480" cy="1554480"/>
           </a:xfrm>
           <a:prstGeom prst="ellipse">
             <a:avLst/>
@@ -8836,7 +8913,7 @@
           <a:p>
             <a:pPr algn="ctr"/>
             <a:r>
-              <a:rPr sz="2000" b="1">
+              <a:rPr sz="2400" b="1">
                 <a:solidFill>
                   <a:srgbClr val="1A1A1A"/>
                 </a:solidFill>
@@ -8855,8 +8932,8 @@
         </p:nvSpPr>
         <p:spPr>
           <a:xfrm>
-            <a:off x="655167" y="3931920"/>
-            <a:ext cx="2240280" cy="1097280"/>
+            <a:off x="655167" y="4114800"/>
+            <a:ext cx="2240280" cy="1188720"/>
           </a:xfrm>
           <a:prstGeom prst="roundRect">
             <a:avLst>
@@ -8891,7 +8968,7 @@
           <a:p>
             <a:pPr algn="ctr"/>
             <a:r>
-              <a:rPr sz="2200" b="1">
+              <a:rPr sz="2600" b="1">
                 <a:solidFill>
                   <a:srgbClr val="1A1A1A"/>
                 </a:solidFill>
@@ -8910,7 +8987,7 @@
         </p:nvSpPr>
         <p:spPr>
           <a:xfrm>
-            <a:off x="2968599" y="4160520"/>
+            <a:off x="2941167" y="4343400"/>
             <a:ext cx="640080" cy="640080"/>
           </a:xfrm>
           <a:prstGeom prst="rect">
@@ -8945,8 +9022,8 @@
         </p:nvSpPr>
         <p:spPr>
           <a:xfrm>
-            <a:off x="3969867" y="2331720"/>
-            <a:ext cx="1371600" cy="1371600"/>
+            <a:off x="3878427" y="2286000"/>
+            <a:ext cx="1554480" cy="1554480"/>
           </a:xfrm>
           <a:prstGeom prst="ellipse">
             <a:avLst/>
@@ -8979,7 +9056,7 @@
           <a:p>
             <a:pPr algn="ctr"/>
             <a:r>
-              <a:rPr sz="2000" b="1">
+              <a:rPr sz="2400" b="1">
                 <a:solidFill>
                   <a:srgbClr val="1A1A1A"/>
                 </a:solidFill>
@@ -8998,8 +9075,8 @@
         </p:nvSpPr>
         <p:spPr>
           <a:xfrm>
-            <a:off x="3535527" y="3931920"/>
-            <a:ext cx="2240280" cy="1097280"/>
+            <a:off x="3535527" y="4114800"/>
+            <a:ext cx="2240280" cy="1188720"/>
           </a:xfrm>
           <a:prstGeom prst="roundRect">
             <a:avLst>
@@ -9034,7 +9111,7 @@
           <a:p>
             <a:pPr algn="ctr"/>
             <a:r>
-              <a:rPr sz="2200" b="1">
+              <a:rPr sz="2600" b="1">
                 <a:solidFill>
                   <a:srgbClr val="1A1A1A"/>
                 </a:solidFill>
@@ -9053,7 +9130,7 @@
         </p:nvSpPr>
         <p:spPr>
           <a:xfrm>
-            <a:off x="5848959" y="4160520"/>
+            <a:off x="5821527" y="4343400"/>
             <a:ext cx="640080" cy="640080"/>
           </a:xfrm>
           <a:prstGeom prst="rect">
@@ -9088,8 +9165,8 @@
         </p:nvSpPr>
         <p:spPr>
           <a:xfrm>
-            <a:off x="6850227" y="2331720"/>
-            <a:ext cx="1371600" cy="1371600"/>
+            <a:off x="6758787" y="2286000"/>
+            <a:ext cx="1554480" cy="1554480"/>
           </a:xfrm>
           <a:prstGeom prst="ellipse">
             <a:avLst/>
@@ -9122,7 +9199,7 @@
           <a:p>
             <a:pPr algn="ctr"/>
             <a:r>
-              <a:rPr sz="2000" b="1">
+              <a:rPr sz="2400" b="1">
                 <a:solidFill>
                   <a:srgbClr val="FFFFFF"/>
                 </a:solidFill>
@@ -9141,8 +9218,8 @@
         </p:nvSpPr>
         <p:spPr>
           <a:xfrm>
-            <a:off x="6415887" y="3931920"/>
-            <a:ext cx="2240280" cy="1097280"/>
+            <a:off x="6415887" y="4114800"/>
+            <a:ext cx="2240280" cy="1188720"/>
           </a:xfrm>
           <a:prstGeom prst="roundRect">
             <a:avLst>
@@ -9177,7 +9254,7 @@
           <a:p>
             <a:pPr algn="ctr"/>
             <a:r>
-              <a:rPr sz="2200" b="1">
+              <a:rPr sz="2600" b="1">
                 <a:solidFill>
                   <a:srgbClr val="FFFFFF"/>
                 </a:solidFill>
@@ -9196,7 +9273,7 @@
         </p:nvSpPr>
         <p:spPr>
           <a:xfrm>
-            <a:off x="8729319" y="4160520"/>
+            <a:off x="8701887" y="4343400"/>
             <a:ext cx="640080" cy="640080"/>
           </a:xfrm>
           <a:prstGeom prst="rect">
@@ -9231,8 +9308,8 @@
         </p:nvSpPr>
         <p:spPr>
           <a:xfrm>
-            <a:off x="9730587" y="2331720"/>
-            <a:ext cx="1371600" cy="1371600"/>
+            <a:off x="9639147" y="2286000"/>
+            <a:ext cx="1554480" cy="1554480"/>
           </a:xfrm>
           <a:prstGeom prst="ellipse">
             <a:avLst/>
@@ -9265,7 +9342,7 @@
           <a:p>
             <a:pPr algn="ctr"/>
             <a:r>
-              <a:rPr sz="2000" b="1">
+              <a:rPr sz="2400" b="1">
                 <a:solidFill>
                   <a:srgbClr val="FFFFFF"/>
                 </a:solidFill>
@@ -9284,8 +9361,8 @@
         </p:nvSpPr>
         <p:spPr>
           <a:xfrm>
-            <a:off x="9296247" y="3931920"/>
-            <a:ext cx="2240280" cy="1097280"/>
+            <a:off x="9296247" y="4114800"/>
+            <a:ext cx="2240280" cy="1188720"/>
           </a:xfrm>
           <a:prstGeom prst="roundRect">
             <a:avLst>
@@ -9320,7 +9397,7 @@
           <a:p>
             <a:pPr algn="ctr"/>
             <a:r>
-              <a:rPr sz="2200" b="1">
+              <a:rPr sz="2600" b="1">
                 <a:solidFill>
                   <a:srgbClr val="FFFFFF"/>
                 </a:solidFill>
@@ -9339,8 +9416,8 @@
         </p:nvSpPr>
         <p:spPr>
           <a:xfrm>
-            <a:off x="777240" y="5440680"/>
-            <a:ext cx="10607040" cy="822960"/>
+            <a:off x="777240" y="5623560"/>
+            <a:ext cx="10607040" cy="914400"/>
           </a:xfrm>
           <a:prstGeom prst="rect">
             <a:avLst/>
@@ -9353,11 +9430,11 @@
           </a:bodyPr>
           <a:lstStyle/>
           <a:p>
-            <a:pPr algn="l"/>
-            <a:r>
-              <a:rPr sz="2000" b="0" spc="-30">
-                <a:solidFill>
-                  <a:srgbClr val="6B7280"/>
+            <a:pPr algn="ctr"/>
+            <a:r>
+              <a:rPr sz="2700" b="1" spc="-40">
+                <a:solidFill>
+                  <a:srgbClr val="1A1A1A"/>
                 </a:solidFill>
                 <a:latin typeface="Apple SD Gothic Neo"/>
               </a:rPr>
@@ -9400,8 +9477,8 @@
         </p:nvSpPr>
         <p:spPr>
           <a:xfrm>
-            <a:off x="777240" y="548640"/>
-            <a:ext cx="10607040" cy="457200"/>
+            <a:off x="749808" y="566928"/>
+            <a:ext cx="10881360" cy="1371600"/>
           </a:xfrm>
           <a:prstGeom prst="rect">
             <a:avLst/>
@@ -9416,49 +9493,58 @@
           <a:p>
             <a:pPr algn="l"/>
             <a:r>
-              <a:rPr sz="1500" b="0" spc="60">
-                <a:solidFill>
-                  <a:srgbClr val="5B5BD6"/>
-                </a:solidFill>
-                <a:latin typeface="Menlo"/>
-              </a:rPr>
-              <a:t>JOURNEY 2</a:t>
-            </a:r>
-          </a:p>
-        </p:txBody>
-      </p:sp>
-      <p:sp>
-        <p:nvSpPr>
-          <p:cNvPr id="3" name="TextBox 2"/>
-          <p:cNvSpPr txBox="1"/>
-          <p:nvPr/>
-        </p:nvSpPr>
-        <p:spPr>
-          <a:xfrm>
-            <a:off x="749808" y="960120"/>
-            <a:ext cx="10698480" cy="1188720"/>
+              <a:rPr sz="5200" b="1" spc="-100">
+                <a:solidFill>
+                  <a:srgbClr val="1A1A1A"/>
+                </a:solidFill>
+                <a:latin typeface="Apple SD Gothic Neo"/>
+              </a:rPr>
+              <a:t>납부와 미납</a:t>
+            </a:r>
+          </a:p>
+        </p:txBody>
+      </p:sp>
+      <p:sp>
+        <p:nvSpPr>
+          <p:cNvPr id="3" name="Rectangle 2"/>
+          <p:cNvSpPr/>
+          <p:nvPr/>
+        </p:nvSpPr>
+        <p:spPr>
+          <a:xfrm>
+            <a:off x="822960" y="1627632"/>
+            <a:ext cx="868680" cy="82296"/>
           </a:xfrm>
           <a:prstGeom prst="rect">
             <a:avLst/>
           </a:prstGeom>
-          <a:noFill/>
-        </p:spPr>
-        <p:txBody>
-          <a:bodyPr wrap="square" anchor="t">
-            <a:spAutoFit/>
-          </a:bodyPr>
-          <a:lstStyle/>
-          <a:p>
-            <a:pPr algn="l"/>
-            <a:r>
-              <a:rPr sz="4000" b="1" spc="-80">
-                <a:solidFill>
-                  <a:srgbClr val="1A1A1A"/>
-                </a:solidFill>
-                <a:latin typeface="Apple SD Gothic Neo"/>
-              </a:rPr>
-              <a:t>납부와 미납</a:t>
-            </a:r>
+          <a:solidFill>
+            <a:srgbClr val="5B5BD6"/>
+          </a:solidFill>
+          <a:ln>
+            <a:noFill/>
+          </a:ln>
+          <a:effectLst/>
+        </p:spPr>
+        <p:style>
+          <a:lnRef idx="1">
+            <a:schemeClr val="accent1"/>
+          </a:lnRef>
+          <a:fillRef idx="3">
+            <a:schemeClr val="accent1"/>
+          </a:fillRef>
+          <a:effectRef idx="2">
+            <a:schemeClr val="accent1"/>
+          </a:effectRef>
+          <a:fontRef idx="minor">
+            <a:schemeClr val="lt1"/>
+          </a:fontRef>
+        </p:style>
+        <p:txBody>
+          <a:bodyPr rtlCol="0" anchor="ctr"/>
+          <a:lstStyle/>
+          <a:p>
+            <a:pPr algn="ctr"/>
           </a:p>
         </p:txBody>
       </p:sp>
@@ -9470,8 +9556,8 @@
         </p:nvSpPr>
         <p:spPr>
           <a:xfrm>
-            <a:off x="2529687" y="2331720"/>
-            <a:ext cx="1371600" cy="1371600"/>
+            <a:off x="2438247" y="2286000"/>
+            <a:ext cx="1554480" cy="1554480"/>
           </a:xfrm>
           <a:prstGeom prst="ellipse">
             <a:avLst/>
@@ -9504,7 +9590,7 @@
           <a:p>
             <a:pPr algn="ctr"/>
             <a:r>
-              <a:rPr sz="2000" b="1">
+              <a:rPr sz="2400" b="1">
                 <a:solidFill>
                   <a:srgbClr val="1A1A1A"/>
                 </a:solidFill>
@@ -9523,8 +9609,8 @@
         </p:nvSpPr>
         <p:spPr>
           <a:xfrm>
-            <a:off x="2095347" y="3931920"/>
-            <a:ext cx="2240280" cy="1097280"/>
+            <a:off x="2095347" y="4114800"/>
+            <a:ext cx="2240280" cy="1188720"/>
           </a:xfrm>
           <a:prstGeom prst="roundRect">
             <a:avLst>
@@ -9559,7 +9645,7 @@
           <a:p>
             <a:pPr algn="ctr"/>
             <a:r>
-              <a:rPr sz="2200" b="1">
+              <a:rPr sz="2600" b="1">
                 <a:solidFill>
                   <a:srgbClr val="1A1A1A"/>
                 </a:solidFill>
@@ -9578,7 +9664,7 @@
         </p:nvSpPr>
         <p:spPr>
           <a:xfrm>
-            <a:off x="4408779" y="4160520"/>
+            <a:off x="4381347" y="4343400"/>
             <a:ext cx="640080" cy="640080"/>
           </a:xfrm>
           <a:prstGeom prst="rect">
@@ -9613,8 +9699,8 @@
         </p:nvSpPr>
         <p:spPr>
           <a:xfrm>
-            <a:off x="5410047" y="2331720"/>
-            <a:ext cx="1371600" cy="1371600"/>
+            <a:off x="5318607" y="2286000"/>
+            <a:ext cx="1554480" cy="1554480"/>
           </a:xfrm>
           <a:prstGeom prst="ellipse">
             <a:avLst/>
@@ -9647,7 +9733,7 @@
           <a:p>
             <a:pPr algn="ctr"/>
             <a:r>
-              <a:rPr sz="2000" b="1">
+              <a:rPr sz="2400" b="1">
                 <a:solidFill>
                   <a:srgbClr val="FFFFFF"/>
                 </a:solidFill>
@@ -9666,8 +9752,8 @@
         </p:nvSpPr>
         <p:spPr>
           <a:xfrm>
-            <a:off x="4975707" y="3931920"/>
-            <a:ext cx="2240280" cy="1097280"/>
+            <a:off x="4975707" y="4114800"/>
+            <a:ext cx="2240280" cy="1188720"/>
           </a:xfrm>
           <a:prstGeom prst="roundRect">
             <a:avLst>
@@ -9702,7 +9788,7 @@
           <a:p>
             <a:pPr algn="ctr"/>
             <a:r>
-              <a:rPr sz="2200" b="1">
+              <a:rPr sz="2600" b="1">
                 <a:solidFill>
                   <a:srgbClr val="FFFFFF"/>
                 </a:solidFill>
@@ -9721,7 +9807,7 @@
         </p:nvSpPr>
         <p:spPr>
           <a:xfrm>
-            <a:off x="7289139" y="4160520"/>
+            <a:off x="7261707" y="4343400"/>
             <a:ext cx="640080" cy="640080"/>
           </a:xfrm>
           <a:prstGeom prst="rect">
@@ -9756,8 +9842,8 @@
         </p:nvSpPr>
         <p:spPr>
           <a:xfrm>
-            <a:off x="8290407" y="2331720"/>
-            <a:ext cx="1371600" cy="1371600"/>
+            <a:off x="8198967" y="2286000"/>
+            <a:ext cx="1554480" cy="1554480"/>
           </a:xfrm>
           <a:prstGeom prst="ellipse">
             <a:avLst/>
@@ -9790,7 +9876,7 @@
           <a:p>
             <a:pPr algn="ctr"/>
             <a:r>
-              <a:rPr sz="2000" b="1">
+              <a:rPr sz="2400" b="1">
                 <a:solidFill>
                   <a:srgbClr val="FFFFFF"/>
                 </a:solidFill>
@@ -9809,8 +9895,8 @@
         </p:nvSpPr>
         <p:spPr>
           <a:xfrm>
-            <a:off x="7856067" y="3931920"/>
-            <a:ext cx="2240280" cy="1097280"/>
+            <a:off x="7856067" y="4114800"/>
+            <a:ext cx="2240280" cy="1188720"/>
           </a:xfrm>
           <a:prstGeom prst="roundRect">
             <a:avLst>
@@ -9845,7 +9931,7 @@
           <a:p>
             <a:pPr algn="ctr"/>
             <a:r>
-              <a:rPr sz="2200" b="1">
+              <a:rPr sz="2600" b="1">
                 <a:solidFill>
                   <a:srgbClr val="FFFFFF"/>
                 </a:solidFill>
@@ -9864,8 +9950,8 @@
         </p:nvSpPr>
         <p:spPr>
           <a:xfrm>
-            <a:off x="777240" y="5440680"/>
-            <a:ext cx="10607040" cy="822960"/>
+            <a:off x="777240" y="5623560"/>
+            <a:ext cx="10607040" cy="914400"/>
           </a:xfrm>
           <a:prstGeom prst="rect">
             <a:avLst/>
@@ -9878,11 +9964,11 @@
           </a:bodyPr>
           <a:lstStyle/>
           <a:p>
-            <a:pPr algn="l"/>
-            <a:r>
-              <a:rPr sz="2000" b="0" spc="-30">
-                <a:solidFill>
-                  <a:srgbClr val="6B7280"/>
+            <a:pPr algn="ctr"/>
+            <a:r>
+              <a:rPr sz="2700" b="1" spc="-40">
+                <a:solidFill>
+                  <a:srgbClr val="1A1A1A"/>
                 </a:solidFill>
                 <a:latin typeface="Apple SD Gothic Neo"/>
               </a:rPr>
@@ -9925,8 +10011,8 @@
         </p:nvSpPr>
         <p:spPr>
           <a:xfrm>
-            <a:off x="777240" y="548640"/>
-            <a:ext cx="10607040" cy="457200"/>
+            <a:off x="749808" y="566928"/>
+            <a:ext cx="10881360" cy="1371600"/>
           </a:xfrm>
           <a:prstGeom prst="rect">
             <a:avLst/>
@@ -9941,49 +10027,58 @@
           <a:p>
             <a:pPr algn="l"/>
             <a:r>
-              <a:rPr sz="1500" b="0" spc="60">
-                <a:solidFill>
-                  <a:srgbClr val="5B5BD6"/>
-                </a:solidFill>
-                <a:latin typeface="Menlo"/>
-              </a:rPr>
-              <a:t>JOURNEY 3</a:t>
-            </a:r>
-          </a:p>
-        </p:txBody>
-      </p:sp>
-      <p:sp>
-        <p:nvSpPr>
-          <p:cNvPr id="3" name="TextBox 2"/>
-          <p:cNvSpPr txBox="1"/>
-          <p:nvPr/>
-        </p:nvSpPr>
-        <p:spPr>
-          <a:xfrm>
-            <a:off x="749808" y="960120"/>
-            <a:ext cx="10698480" cy="1188720"/>
+              <a:rPr sz="5200" b="1" spc="-100">
+                <a:solidFill>
+                  <a:srgbClr val="1A1A1A"/>
+                </a:solidFill>
+                <a:latin typeface="Apple SD Gothic Neo"/>
+              </a:rPr>
+              <a:t>보상과 지급</a:t>
+            </a:r>
+          </a:p>
+        </p:txBody>
+      </p:sp>
+      <p:sp>
+        <p:nvSpPr>
+          <p:cNvPr id="3" name="Rectangle 2"/>
+          <p:cNvSpPr/>
+          <p:nvPr/>
+        </p:nvSpPr>
+        <p:spPr>
+          <a:xfrm>
+            <a:off x="822960" y="1627632"/>
+            <a:ext cx="868680" cy="82296"/>
           </a:xfrm>
           <a:prstGeom prst="rect">
             <a:avLst/>
           </a:prstGeom>
-          <a:noFill/>
-        </p:spPr>
-        <p:txBody>
-          <a:bodyPr wrap="square" anchor="t">
-            <a:spAutoFit/>
-          </a:bodyPr>
-          <a:lstStyle/>
-          <a:p>
-            <a:pPr algn="l"/>
-            <a:r>
-              <a:rPr sz="4000" b="1" spc="-80">
-                <a:solidFill>
-                  <a:srgbClr val="1A1A1A"/>
-                </a:solidFill>
-                <a:latin typeface="Apple SD Gothic Neo"/>
-              </a:rPr>
-              <a:t>보상과 지급</a:t>
-            </a:r>
+          <a:solidFill>
+            <a:srgbClr val="5B5BD6"/>
+          </a:solidFill>
+          <a:ln>
+            <a:noFill/>
+          </a:ln>
+          <a:effectLst/>
+        </p:spPr>
+        <p:style>
+          <a:lnRef idx="1">
+            <a:schemeClr val="accent1"/>
+          </a:lnRef>
+          <a:fillRef idx="3">
+            <a:schemeClr val="accent1"/>
+          </a:fillRef>
+          <a:effectRef idx="2">
+            <a:schemeClr val="accent1"/>
+          </a:effectRef>
+          <a:fontRef idx="minor">
+            <a:schemeClr val="lt1"/>
+          </a:fontRef>
+        </p:style>
+        <p:txBody>
+          <a:bodyPr rtlCol="0" anchor="ctr"/>
+          <a:lstStyle/>
+          <a:p>
+            <a:pPr algn="ctr"/>
           </a:p>
         </p:txBody>
       </p:sp>
@@ -9995,8 +10090,8 @@
         </p:nvSpPr>
         <p:spPr>
           <a:xfrm>
-            <a:off x="2529687" y="2331720"/>
-            <a:ext cx="1371600" cy="1371600"/>
+            <a:off x="2438247" y="2286000"/>
+            <a:ext cx="1554480" cy="1554480"/>
           </a:xfrm>
           <a:prstGeom prst="ellipse">
             <a:avLst/>
@@ -10029,7 +10124,7 @@
           <a:p>
             <a:pPr algn="ctr"/>
             <a:r>
-              <a:rPr sz="2000" b="1">
+              <a:rPr sz="2400" b="1">
                 <a:solidFill>
                   <a:srgbClr val="1A1A1A"/>
                 </a:solidFill>
@@ -10048,8 +10143,8 @@
         </p:nvSpPr>
         <p:spPr>
           <a:xfrm>
-            <a:off x="2095347" y="3931920"/>
-            <a:ext cx="2240280" cy="1097280"/>
+            <a:off x="2095347" y="4114800"/>
+            <a:ext cx="2240280" cy="1188720"/>
           </a:xfrm>
           <a:prstGeom prst="roundRect">
             <a:avLst>
@@ -10084,7 +10179,7 @@
           <a:p>
             <a:pPr algn="ctr"/>
             <a:r>
-              <a:rPr sz="2200" b="1">
+              <a:rPr sz="2600" b="1">
                 <a:solidFill>
                   <a:srgbClr val="1A1A1A"/>
                 </a:solidFill>
@@ -10103,7 +10198,7 @@
         </p:nvSpPr>
         <p:spPr>
           <a:xfrm>
-            <a:off x="4408779" y="4160520"/>
+            <a:off x="4381347" y="4343400"/>
             <a:ext cx="640080" cy="640080"/>
           </a:xfrm>
           <a:prstGeom prst="rect">
@@ -10138,8 +10233,8 @@
         </p:nvSpPr>
         <p:spPr>
           <a:xfrm>
-            <a:off x="5410047" y="2331720"/>
-            <a:ext cx="1371600" cy="1371600"/>
+            <a:off x="5318607" y="2286000"/>
+            <a:ext cx="1554480" cy="1554480"/>
           </a:xfrm>
           <a:prstGeom prst="ellipse">
             <a:avLst/>
@@ -10172,7 +10267,7 @@
           <a:p>
             <a:pPr algn="ctr"/>
             <a:r>
-              <a:rPr sz="2000" b="1">
+              <a:rPr sz="2400" b="1">
                 <a:solidFill>
                   <a:srgbClr val="FFFFFF"/>
                 </a:solidFill>
@@ -10191,8 +10286,8 @@
         </p:nvSpPr>
         <p:spPr>
           <a:xfrm>
-            <a:off x="4975707" y="3931920"/>
-            <a:ext cx="2240280" cy="1097280"/>
+            <a:off x="4975707" y="4114800"/>
+            <a:ext cx="2240280" cy="1188720"/>
           </a:xfrm>
           <a:prstGeom prst="roundRect">
             <a:avLst>
@@ -10227,7 +10322,7 @@
           <a:p>
             <a:pPr algn="ctr"/>
             <a:r>
-              <a:rPr sz="2200" b="1">
+              <a:rPr sz="2600" b="1">
                 <a:solidFill>
                   <a:srgbClr val="FFFFFF"/>
                 </a:solidFill>
@@ -10246,7 +10341,7 @@
         </p:nvSpPr>
         <p:spPr>
           <a:xfrm>
-            <a:off x="7289139" y="4160520"/>
+            <a:off x="7261707" y="4343400"/>
             <a:ext cx="640080" cy="640080"/>
           </a:xfrm>
           <a:prstGeom prst="rect">
@@ -10281,8 +10376,8 @@
         </p:nvSpPr>
         <p:spPr>
           <a:xfrm>
-            <a:off x="8290407" y="2331720"/>
-            <a:ext cx="1371600" cy="1371600"/>
+            <a:off x="8198967" y="2286000"/>
+            <a:ext cx="1554480" cy="1554480"/>
           </a:xfrm>
           <a:prstGeom prst="ellipse">
             <a:avLst/>
@@ -10315,7 +10410,7 @@
           <a:p>
             <a:pPr algn="ctr"/>
             <a:r>
-              <a:rPr sz="2000" b="1">
+              <a:rPr sz="2400" b="1">
                 <a:solidFill>
                   <a:srgbClr val="FFFFFF"/>
                 </a:solidFill>
@@ -10334,8 +10429,8 @@
         </p:nvSpPr>
         <p:spPr>
           <a:xfrm>
-            <a:off x="7856067" y="3931920"/>
-            <a:ext cx="2240280" cy="1097280"/>
+            <a:off x="7856067" y="4114800"/>
+            <a:ext cx="2240280" cy="1188720"/>
           </a:xfrm>
           <a:prstGeom prst="roundRect">
             <a:avLst>
@@ -10370,7 +10465,7 @@
           <a:p>
             <a:pPr algn="ctr"/>
             <a:r>
-              <a:rPr sz="2200" b="1">
+              <a:rPr sz="2600" b="1">
                 <a:solidFill>
                   <a:srgbClr val="FFFFFF"/>
                 </a:solidFill>
@@ -10389,8 +10484,8 @@
         </p:nvSpPr>
         <p:spPr>
           <a:xfrm>
-            <a:off x="777240" y="5440680"/>
-            <a:ext cx="10607040" cy="822960"/>
+            <a:off x="777240" y="5623560"/>
+            <a:ext cx="10607040" cy="914400"/>
           </a:xfrm>
           <a:prstGeom prst="rect">
             <a:avLst/>
@@ -10403,11 +10498,11 @@
           </a:bodyPr>
           <a:lstStyle/>
           <a:p>
-            <a:pPr algn="l"/>
-            <a:r>
-              <a:rPr sz="2000" b="0" spc="-30">
-                <a:solidFill>
-                  <a:srgbClr val="6B7280"/>
+            <a:pPr algn="ctr"/>
+            <a:r>
+              <a:rPr sz="2700" b="1" spc="-40">
+                <a:solidFill>
+                  <a:srgbClr val="1A1A1A"/>
                 </a:solidFill>
                 <a:latin typeface="Apple SD Gothic Neo"/>
               </a:rPr>
@@ -10450,8 +10545,8 @@
         </p:nvSpPr>
         <p:spPr>
           <a:xfrm>
-            <a:off x="777240" y="548640"/>
-            <a:ext cx="10607040" cy="457200"/>
+            <a:off x="749808" y="566928"/>
+            <a:ext cx="10881360" cy="1371600"/>
           </a:xfrm>
           <a:prstGeom prst="rect">
             <a:avLst/>
@@ -10466,49 +10561,58 @@
           <a:p>
             <a:pPr algn="l"/>
             <a:r>
-              <a:rPr sz="1500" b="0" spc="60">
-                <a:solidFill>
-                  <a:srgbClr val="5B5BD6"/>
-                </a:solidFill>
-                <a:latin typeface="Menlo"/>
-              </a:rPr>
-              <a:t>DOMAINS</a:t>
-            </a:r>
-          </a:p>
-        </p:txBody>
-      </p:sp>
-      <p:sp>
-        <p:nvSpPr>
-          <p:cNvPr id="3" name="TextBox 2"/>
-          <p:cNvSpPr txBox="1"/>
-          <p:nvPr/>
-        </p:nvSpPr>
-        <p:spPr>
-          <a:xfrm>
-            <a:off x="749808" y="960120"/>
-            <a:ext cx="10698480" cy="1188720"/>
+              <a:rPr sz="5200" b="1" spc="-100">
+                <a:solidFill>
+                  <a:srgbClr val="1A1A1A"/>
+                </a:solidFill>
+                <a:latin typeface="Apple SD Gothic Neo"/>
+              </a:rPr>
+              <a:t>도메인 여섯 개</a:t>
+            </a:r>
+          </a:p>
+        </p:txBody>
+      </p:sp>
+      <p:sp>
+        <p:nvSpPr>
+          <p:cNvPr id="3" name="Rectangle 2"/>
+          <p:cNvSpPr/>
+          <p:nvPr/>
+        </p:nvSpPr>
+        <p:spPr>
+          <a:xfrm>
+            <a:off x="822960" y="1627632"/>
+            <a:ext cx="868680" cy="82296"/>
           </a:xfrm>
           <a:prstGeom prst="rect">
             <a:avLst/>
           </a:prstGeom>
-          <a:noFill/>
-        </p:spPr>
-        <p:txBody>
-          <a:bodyPr wrap="square" anchor="t">
-            <a:spAutoFit/>
-          </a:bodyPr>
-          <a:lstStyle/>
-          <a:p>
-            <a:pPr algn="l"/>
-            <a:r>
-              <a:rPr sz="4000" b="1" spc="-80">
-                <a:solidFill>
-                  <a:srgbClr val="1A1A1A"/>
-                </a:solidFill>
-                <a:latin typeface="Apple SD Gothic Neo"/>
-              </a:rPr>
-              <a:t>도메인 여섯 개</a:t>
-            </a:r>
+          <a:solidFill>
+            <a:srgbClr val="5B5BD6"/>
+          </a:solidFill>
+          <a:ln>
+            <a:noFill/>
+          </a:ln>
+          <a:effectLst/>
+        </p:spPr>
+        <p:style>
+          <a:lnRef idx="1">
+            <a:schemeClr val="accent1"/>
+          </a:lnRef>
+          <a:fillRef idx="3">
+            <a:schemeClr val="accent1"/>
+          </a:fillRef>
+          <a:effectRef idx="2">
+            <a:schemeClr val="accent1"/>
+          </a:effectRef>
+          <a:fontRef idx="minor">
+            <a:schemeClr val="lt1"/>
+          </a:fontRef>
+        </p:style>
+        <p:txBody>
+          <a:bodyPr rtlCol="0" anchor="ctr"/>
+          <a:lstStyle/>
+          <a:p>
+            <a:pPr algn="ctr"/>
           </a:p>
         </p:txBody>
       </p:sp>
@@ -10520,8 +10624,8 @@
         </p:nvSpPr>
         <p:spPr>
           <a:xfrm>
-            <a:off x="188823" y="3017520"/>
-            <a:ext cx="1755648" cy="1188720"/>
+            <a:off x="152247" y="2971800"/>
+            <a:ext cx="1783080" cy="1325880"/>
           </a:xfrm>
           <a:prstGeom prst="roundRect">
             <a:avLst>
@@ -10558,7 +10662,7 @@
           <a:p>
             <a:pPr algn="ctr"/>
             <a:r>
-              <a:rPr sz="2300" b="1">
+              <a:rPr sz="2700" b="1">
                 <a:solidFill>
                   <a:srgbClr val="1A1A1A"/>
                 </a:solidFill>
@@ -10577,8 +10681,8 @@
         </p:nvSpPr>
         <p:spPr>
           <a:xfrm>
-            <a:off x="2200503" y="3017520"/>
-            <a:ext cx="1755648" cy="1188720"/>
+            <a:off x="2173071" y="2971800"/>
+            <a:ext cx="1783080" cy="1325880"/>
           </a:xfrm>
           <a:prstGeom prst="roundRect">
             <a:avLst>
@@ -10615,7 +10719,7 @@
           <a:p>
             <a:pPr algn="ctr"/>
             <a:r>
-              <a:rPr sz="2300" b="1">
+              <a:rPr sz="2700" b="1">
                 <a:solidFill>
                   <a:srgbClr val="1A1A1A"/>
                 </a:solidFill>
@@ -10634,8 +10738,8 @@
         </p:nvSpPr>
         <p:spPr>
           <a:xfrm>
-            <a:off x="4212183" y="3017520"/>
-            <a:ext cx="1755648" cy="1188720"/>
+            <a:off x="4193895" y="2971800"/>
+            <a:ext cx="1783080" cy="1325880"/>
           </a:xfrm>
           <a:prstGeom prst="roundRect">
             <a:avLst>
@@ -10672,7 +10776,7 @@
           <a:p>
             <a:pPr algn="ctr"/>
             <a:r>
-              <a:rPr sz="2300" b="1">
+              <a:rPr sz="2700" b="1">
                 <a:solidFill>
                   <a:srgbClr val="1A1A1A"/>
                 </a:solidFill>
@@ -10691,8 +10795,8 @@
         </p:nvSpPr>
         <p:spPr>
           <a:xfrm>
-            <a:off x="6223863" y="3017520"/>
-            <a:ext cx="1755648" cy="1188720"/>
+            <a:off x="6214719" y="2971800"/>
+            <a:ext cx="1783080" cy="1325880"/>
           </a:xfrm>
           <a:prstGeom prst="roundRect">
             <a:avLst>
@@ -10729,7 +10833,7 @@
           <a:p>
             <a:pPr algn="ctr"/>
             <a:r>
-              <a:rPr sz="2300" b="1">
+              <a:rPr sz="2700" b="1">
                 <a:solidFill>
                   <a:srgbClr val="1A1A1A"/>
                 </a:solidFill>
@@ -10748,8 +10852,8 @@
         </p:nvSpPr>
         <p:spPr>
           <a:xfrm>
-            <a:off x="8235543" y="3017520"/>
-            <a:ext cx="1755648" cy="1188720"/>
+            <a:off x="8235543" y="2971800"/>
+            <a:ext cx="1783080" cy="1325880"/>
           </a:xfrm>
           <a:prstGeom prst="roundRect">
             <a:avLst>
@@ -10786,7 +10890,7 @@
           <a:p>
             <a:pPr algn="ctr"/>
             <a:r>
-              <a:rPr sz="2300" b="1">
+              <a:rPr sz="2700" b="1">
                 <a:solidFill>
                   <a:srgbClr val="1A1A1A"/>
                 </a:solidFill>
@@ -10805,8 +10909,8 @@
         </p:nvSpPr>
         <p:spPr>
           <a:xfrm>
-            <a:off x="10247223" y="3017520"/>
-            <a:ext cx="1755648" cy="1188720"/>
+            <a:off x="10256367" y="2971800"/>
+            <a:ext cx="1783080" cy="1325880"/>
           </a:xfrm>
           <a:prstGeom prst="roundRect">
             <a:avLst>
@@ -10843,7 +10947,7 @@
           <a:p>
             <a:pPr algn="ctr"/>
             <a:r>
-              <a:rPr sz="2300" b="1">
+              <a:rPr sz="2700" b="1">
                 <a:solidFill>
                   <a:srgbClr val="1A1A1A"/>
                 </a:solidFill>

--- a/docs/presentation/보험발표-figma.pptx
+++ b/docs/presentation/보험발표-figma.pptx
@@ -3310,8 +3310,8 @@
         </p:nvSpPr>
         <p:spPr>
           <a:xfrm>
-            <a:off x="777240" y="1874519"/>
-            <a:ext cx="5394960" cy="502920"/>
+            <a:off x="457200" y="1783080"/>
+            <a:ext cx="5577840" cy="502920"/>
           </a:xfrm>
           <a:prstGeom prst="rect">
             <a:avLst/>
@@ -3345,8 +3345,8 @@
         </p:nvSpPr>
         <p:spPr>
           <a:xfrm>
-            <a:off x="6035040" y="1874519"/>
-            <a:ext cx="5394960" cy="502920"/>
+            <a:off x="6172200" y="1783080"/>
+            <a:ext cx="5577840" cy="502920"/>
           </a:xfrm>
           <a:prstGeom prst="rect">
             <a:avLst/>
@@ -3388,8 +3388,8 @@
         </p:blipFill>
         <p:spPr>
           <a:xfrm>
-            <a:off x="777240" y="2437384"/>
-            <a:ext cx="5394960" cy="2577592"/>
+            <a:off x="457200" y="2485136"/>
+            <a:ext cx="5577840" cy="2664967"/>
           </a:xfrm>
           <a:prstGeom prst="rect">
             <a:avLst/>
@@ -3412,8 +3412,8 @@
         </p:blipFill>
         <p:spPr>
           <a:xfrm>
-            <a:off x="7475112" y="2377440"/>
-            <a:ext cx="2514816" cy="2697480"/>
+            <a:off x="7533216" y="2286000"/>
+            <a:ext cx="2855808" cy="3063240"/>
           </a:xfrm>
           <a:prstGeom prst="rect">
             <a:avLst/>
@@ -3428,79 +3428,12 @@
         </p:nvSpPr>
         <p:spPr>
           <a:xfrm>
-            <a:off x="777240" y="5166360"/>
-            <a:ext cx="5394960" cy="1325880"/>
+            <a:off x="457200" y="5532120"/>
+            <a:ext cx="11292840" cy="1051560"/>
           </a:xfrm>
           <a:prstGeom prst="roundRect">
             <a:avLst>
-              <a:gd name="adj" fmla="val 10000"/>
-            </a:avLst>
-          </a:prstGeom>
-          <a:solidFill>
-            <a:srgbClr val="ECEBFB"/>
-          </a:solidFill>
-          <a:ln>
-            <a:noFill/>
-          </a:ln>
-          <a:effectLst/>
-        </p:spPr>
-        <p:style>
-          <a:lnRef idx="1">
-            <a:schemeClr val="accent1"/>
-          </a:lnRef>
-          <a:fillRef idx="3">
-            <a:schemeClr val="accent1"/>
-          </a:fillRef>
-          <a:effectRef idx="2">
-            <a:schemeClr val="accent1"/>
-          </a:effectRef>
-          <a:fontRef idx="minor">
-            <a:schemeClr val="lt1"/>
-          </a:fontRef>
-        </p:style>
-        <p:txBody>
-          <a:bodyPr rtlCol="0" anchor="ctr" tIns="76200" bIns="76200" lIns="177800" rIns="177800" wrap="square"/>
-          <a:lstStyle/>
-          <a:p>
-            <a:pPr algn="l"/>
-            <a:r>
-              <a:rPr sz="2000" b="1">
-                <a:solidFill>
-                  <a:srgbClr val="5B5BD6"/>
-                </a:solidFill>
-                <a:latin typeface="Apple SD Gothic Neo"/>
-              </a:rPr>
-              <a:t>같은 점</a:t>
-            </a:r>
-          </a:p>
-          <a:p>
-            <a:pPr algn="l"/>
-            <a:r>
-              <a:rPr sz="1800" b="1">
-                <a:solidFill>
-                  <a:srgbClr val="1A1A1A"/>
-                </a:solidFill>
-                <a:latin typeface="Apple SD Gothic Neo"/>
-              </a:rPr>
-              <a:t>고객과 직원이 '사용자'를 물려받는 뼈대가 똑같다.</a:t>
-            </a:r>
-          </a:p>
-        </p:txBody>
-      </p:sp>
-      <p:sp>
-        <p:nvSpPr>
-          <p:cNvPr id="9" name="Rounded Rectangle 8"/>
-          <p:cNvSpPr/>
-          <p:nvPr/>
-        </p:nvSpPr>
-        <p:spPr>
-          <a:xfrm>
-            <a:off x="6035040" y="5166360"/>
-            <a:ext cx="5394960" cy="1325880"/>
-          </a:xfrm>
-          <a:prstGeom prst="roundRect">
-            <a:avLst>
-              <a:gd name="adj" fmla="val 10000"/>
+              <a:gd name="adj" fmla="val 12000"/>
             </a:avLst>
           </a:prstGeom>
           <a:solidFill>
@@ -3531,25 +3464,22 @@
           <a:p>
             <a:pPr algn="l"/>
             <a:r>
-              <a:rPr sz="2000" b="1">
+              <a:rPr sz="1900" b="1">
                 <a:solidFill>
                   <a:srgbClr val="B5793A"/>
                 </a:solidFill>
                 <a:latin typeface="Apple SD Gothic Neo"/>
               </a:rPr>
-              <a:t>다른 점</a:t>
-            </a:r>
-          </a:p>
-          <a:p>
-            <a:pPr algn="l"/>
-            <a:r>
-              <a:rPr sz="1800" b="1">
+              <a:t>다른 점   </a:t>
+            </a:r>
+            <a:r>
+              <a:rPr sz="1900" b="1">
                 <a:solidFill>
                   <a:srgbClr val="1A1A1A"/>
                 </a:solidFill>
                 <a:latin typeface="Apple SD Gothic Neo"/>
               </a:rPr>
-              <a:t>글자로 된 번호를 숫자로, 날짜 표기만 손봤다.</a:t>
+              <a:t>글자로 된 번호를 숫자로 바꾸고, 날짜 표기만 손봤다.</a:t>
             </a:r>
           </a:p>
         </p:txBody>
@@ -3667,8 +3597,8 @@
         </p:nvSpPr>
         <p:spPr>
           <a:xfrm>
-            <a:off x="777240" y="1874519"/>
-            <a:ext cx="5394960" cy="502920"/>
+            <a:off x="457200" y="1783080"/>
+            <a:ext cx="5577840" cy="502920"/>
           </a:xfrm>
           <a:prstGeom prst="rect">
             <a:avLst/>
@@ -3702,8 +3632,8 @@
         </p:nvSpPr>
         <p:spPr>
           <a:xfrm>
-            <a:off x="6035040" y="1874519"/>
-            <a:ext cx="5394960" cy="502920"/>
+            <a:off x="6172200" y="1783080"/>
+            <a:ext cx="5577840" cy="502920"/>
           </a:xfrm>
           <a:prstGeom prst="rect">
             <a:avLst/>
@@ -3745,8 +3675,8 @@
         </p:blipFill>
         <p:spPr>
           <a:xfrm>
-            <a:off x="777240" y="2385236"/>
-            <a:ext cx="5394960" cy="2681887"/>
+            <a:off x="457200" y="2431220"/>
+            <a:ext cx="5577840" cy="2772799"/>
           </a:xfrm>
           <a:prstGeom prst="rect">
             <a:avLst/>
@@ -3769,8 +3699,8 @@
         </p:blipFill>
         <p:spPr>
           <a:xfrm>
-            <a:off x="6366944" y="2377440"/>
-            <a:ext cx="4731150" cy="2697480"/>
+            <a:off x="7011785" y="2286000"/>
+            <a:ext cx="3898669" cy="3063240"/>
           </a:xfrm>
           <a:prstGeom prst="rect">
             <a:avLst/>
@@ -3785,79 +3715,12 @@
         </p:nvSpPr>
         <p:spPr>
           <a:xfrm>
-            <a:off x="777240" y="5166360"/>
-            <a:ext cx="5394960" cy="1325880"/>
+            <a:off x="457200" y="5532120"/>
+            <a:ext cx="11292840" cy="1051560"/>
           </a:xfrm>
           <a:prstGeom prst="roundRect">
             <a:avLst>
-              <a:gd name="adj" fmla="val 10000"/>
-            </a:avLst>
-          </a:prstGeom>
-          <a:solidFill>
-            <a:srgbClr val="ECEBFB"/>
-          </a:solidFill>
-          <a:ln>
-            <a:noFill/>
-          </a:ln>
-          <a:effectLst/>
-        </p:spPr>
-        <p:style>
-          <a:lnRef idx="1">
-            <a:schemeClr val="accent1"/>
-          </a:lnRef>
-          <a:fillRef idx="3">
-            <a:schemeClr val="accent1"/>
-          </a:fillRef>
-          <a:effectRef idx="2">
-            <a:schemeClr val="accent1"/>
-          </a:effectRef>
-          <a:fontRef idx="minor">
-            <a:schemeClr val="lt1"/>
-          </a:fontRef>
-        </p:style>
-        <p:txBody>
-          <a:bodyPr rtlCol="0" anchor="ctr" tIns="76200" bIns="76200" lIns="177800" rIns="177800" wrap="square"/>
-          <a:lstStyle/>
-          <a:p>
-            <a:pPr algn="l"/>
-            <a:r>
-              <a:rPr sz="2000" b="1">
-                <a:solidFill>
-                  <a:srgbClr val="5B5BD6"/>
-                </a:solidFill>
-                <a:latin typeface="Apple SD Gothic Neo"/>
-              </a:rPr>
-              <a:t>같은 점</a:t>
-            </a:r>
-          </a:p>
-          <a:p>
-            <a:pPr algn="l"/>
-            <a:r>
-              <a:rPr sz="1800" b="1">
-                <a:solidFill>
-                  <a:srgbClr val="1A1A1A"/>
-                </a:solidFill>
-                <a:latin typeface="Apple SD Gothic Neo"/>
-              </a:rPr>
-              <a:t>상품을 의료·자동차가 물려받고 보장 항목을 품는 구조가 똑같다.</a:t>
-            </a:r>
-          </a:p>
-        </p:txBody>
-      </p:sp>
-      <p:sp>
-        <p:nvSpPr>
-          <p:cNvPr id="9" name="Rounded Rectangle 8"/>
-          <p:cNvSpPr/>
-          <p:nvPr/>
-        </p:nvSpPr>
-        <p:spPr>
-          <a:xfrm>
-            <a:off x="6035040" y="5166360"/>
-            <a:ext cx="5394960" cy="1325880"/>
-          </a:xfrm>
-          <a:prstGeom prst="roundRect">
-            <a:avLst>
-              <a:gd name="adj" fmla="val 10000"/>
+              <a:gd name="adj" fmla="val 12000"/>
             </a:avLst>
           </a:prstGeom>
           <a:solidFill>
@@ -3888,25 +3751,22 @@
           <a:p>
             <a:pPr algn="l"/>
             <a:r>
-              <a:rPr sz="2000" b="1">
+              <a:rPr sz="1900" b="1">
                 <a:solidFill>
                   <a:srgbClr val="B5793A"/>
                 </a:solidFill>
                 <a:latin typeface="Apple SD Gothic Neo"/>
               </a:rPr>
-              <a:t>다른 점</a:t>
-            </a:r>
-          </a:p>
-          <a:p>
-            <a:pPr algn="l"/>
-            <a:r>
-              <a:rPr sz="1800" b="1">
+              <a:t>다른 점   </a:t>
+            </a:r>
+            <a:r>
+              <a:rPr sz="1900" b="1">
                 <a:solidFill>
                   <a:srgbClr val="1A1A1A"/>
                 </a:solidFill>
                 <a:latin typeface="Apple SD Gothic Neo"/>
               </a:rPr>
-              <a:t>번호 표기만 손봤다.</a:t>
+              <a:t>연결 구조(계약·보장 항목·하위 상품)는 그대로 4개. 번호를 숫자로 바꾸고, 보험료 계산은 아직 뼈대만 있다.</a:t>
             </a:r>
           </a:p>
         </p:txBody>
@@ -4024,8 +3884,8 @@
         </p:nvSpPr>
         <p:spPr>
           <a:xfrm>
-            <a:off x="777240" y="1874519"/>
-            <a:ext cx="5394960" cy="502920"/>
+            <a:off x="457200" y="1783080"/>
+            <a:ext cx="5577840" cy="502920"/>
           </a:xfrm>
           <a:prstGeom prst="rect">
             <a:avLst/>
@@ -4059,8 +3919,8 @@
         </p:nvSpPr>
         <p:spPr>
           <a:xfrm>
-            <a:off x="6035040" y="1874519"/>
-            <a:ext cx="5394960" cy="502920"/>
+            <a:off x="6172200" y="1783080"/>
+            <a:ext cx="5577840" cy="502920"/>
           </a:xfrm>
           <a:prstGeom prst="rect">
             <a:avLst/>
@@ -4102,8 +3962,8 @@
         </p:blipFill>
         <p:spPr>
           <a:xfrm>
-            <a:off x="2436404" y="2377440"/>
-            <a:ext cx="2076631" cy="2697480"/>
+            <a:off x="2067015" y="2286000"/>
+            <a:ext cx="2358208" cy="3063240"/>
           </a:xfrm>
           <a:prstGeom prst="rect">
             <a:avLst/>
@@ -4126,8 +3986,8 @@
         </p:blipFill>
         <p:spPr>
           <a:xfrm>
-            <a:off x="6867595" y="2377440"/>
-            <a:ext cx="3729848" cy="2697480"/>
+            <a:off x="6843324" y="2286000"/>
+            <a:ext cx="4235591" cy="3063240"/>
           </a:xfrm>
           <a:prstGeom prst="rect">
             <a:avLst/>
@@ -4142,79 +4002,12 @@
         </p:nvSpPr>
         <p:spPr>
           <a:xfrm>
-            <a:off x="777240" y="5166360"/>
-            <a:ext cx="5394960" cy="1325880"/>
+            <a:off x="457200" y="5532120"/>
+            <a:ext cx="11292840" cy="1051560"/>
           </a:xfrm>
           <a:prstGeom prst="roundRect">
             <a:avLst>
-              <a:gd name="adj" fmla="val 10000"/>
-            </a:avLst>
-          </a:prstGeom>
-          <a:solidFill>
-            <a:srgbClr val="ECEBFB"/>
-          </a:solidFill>
-          <a:ln>
-            <a:noFill/>
-          </a:ln>
-          <a:effectLst/>
-        </p:spPr>
-        <p:style>
-          <a:lnRef idx="1">
-            <a:schemeClr val="accent1"/>
-          </a:lnRef>
-          <a:fillRef idx="3">
-            <a:schemeClr val="accent1"/>
-          </a:fillRef>
-          <a:effectRef idx="2">
-            <a:schemeClr val="accent1"/>
-          </a:effectRef>
-          <a:fontRef idx="minor">
-            <a:schemeClr val="lt1"/>
-          </a:fontRef>
-        </p:style>
-        <p:txBody>
-          <a:bodyPr rtlCol="0" anchor="ctr" tIns="76200" bIns="76200" lIns="177800" rIns="177800" wrap="square"/>
-          <a:lstStyle/>
-          <a:p>
-            <a:pPr algn="l"/>
-            <a:r>
-              <a:rPr sz="2000" b="1">
-                <a:solidFill>
-                  <a:srgbClr val="5B5BD6"/>
-                </a:solidFill>
-                <a:latin typeface="Apple SD Gothic Neo"/>
-              </a:rPr>
-              <a:t>같은 점</a:t>
-            </a:r>
-          </a:p>
-          <a:p>
-            <a:pPr algn="l"/>
-            <a:r>
-              <a:rPr sz="1800" b="1">
-                <a:solidFill>
-                  <a:srgbClr val="1A1A1A"/>
-                </a:solidFill>
-                <a:latin typeface="Apple SD Gothic Neo"/>
-              </a:rPr>
-              <a:t>계약이 납부·고지서를 품는 구조가 똑같다.</a:t>
-            </a:r>
-          </a:p>
-        </p:txBody>
-      </p:sp>
-      <p:sp>
-        <p:nvSpPr>
-          <p:cNvPr id="9" name="Rounded Rectangle 8"/>
-          <p:cNvSpPr/>
-          <p:nvPr/>
-        </p:nvSpPr>
-        <p:spPr>
-          <a:xfrm>
-            <a:off x="6035040" y="5166360"/>
-            <a:ext cx="5394960" cy="1325880"/>
-          </a:xfrm>
-          <a:prstGeom prst="roundRect">
-            <a:avLst>
-              <a:gd name="adj" fmla="val 10000"/>
+              <a:gd name="adj" fmla="val 12000"/>
             </a:avLst>
           </a:prstGeom>
           <a:solidFill>
@@ -4245,19 +4038,16 @@
           <a:p>
             <a:pPr algn="l"/>
             <a:r>
-              <a:rPr sz="2000" b="1">
+              <a:rPr sz="1900" b="1">
                 <a:solidFill>
                   <a:srgbClr val="B5793A"/>
                 </a:solidFill>
                 <a:latin typeface="Apple SD Gothic Neo"/>
               </a:rPr>
-              <a:t>다른 점</a:t>
-            </a:r>
-          </a:p>
-          <a:p>
-            <a:pPr algn="l"/>
-            <a:r>
-              <a:rPr sz="1800" b="1">
+              <a:t>다른 점   </a:t>
+            </a:r>
+            <a:r>
+              <a:rPr sz="1900" b="1">
                 <a:solidFill>
                   <a:srgbClr val="1A1A1A"/>
                 </a:solidFill>
@@ -4381,8 +4171,8 @@
         </p:nvSpPr>
         <p:spPr>
           <a:xfrm>
-            <a:off x="777240" y="1874519"/>
-            <a:ext cx="5394960" cy="502920"/>
+            <a:off x="457200" y="1783080"/>
+            <a:ext cx="5577840" cy="502920"/>
           </a:xfrm>
           <a:prstGeom prst="rect">
             <a:avLst/>
@@ -4416,8 +4206,8 @@
         </p:nvSpPr>
         <p:spPr>
           <a:xfrm>
-            <a:off x="6035040" y="1874519"/>
-            <a:ext cx="5394960" cy="502920"/>
+            <a:off x="6172200" y="1783080"/>
+            <a:ext cx="5577840" cy="502920"/>
           </a:xfrm>
           <a:prstGeom prst="rect">
             <a:avLst/>
@@ -4459,8 +4249,8 @@
         </p:blipFill>
         <p:spPr>
           <a:xfrm>
-            <a:off x="1270681" y="2377440"/>
-            <a:ext cx="4408077" cy="2697480"/>
+            <a:off x="743228" y="2286000"/>
+            <a:ext cx="5005782" cy="3063240"/>
           </a:xfrm>
           <a:prstGeom prst="rect">
             <a:avLst/>
@@ -4483,8 +4273,8 @@
         </p:blipFill>
         <p:spPr>
           <a:xfrm>
-            <a:off x="7583241" y="2377440"/>
-            <a:ext cx="2298556" cy="2697480"/>
+            <a:off x="7656007" y="2286000"/>
+            <a:ext cx="2610225" cy="3063240"/>
           </a:xfrm>
           <a:prstGeom prst="rect">
             <a:avLst/>
@@ -4499,79 +4289,12 @@
         </p:nvSpPr>
         <p:spPr>
           <a:xfrm>
-            <a:off x="777240" y="5166360"/>
-            <a:ext cx="5394960" cy="1325880"/>
+            <a:off x="457200" y="5532120"/>
+            <a:ext cx="11292840" cy="1051560"/>
           </a:xfrm>
           <a:prstGeom prst="roundRect">
             <a:avLst>
-              <a:gd name="adj" fmla="val 10000"/>
-            </a:avLst>
-          </a:prstGeom>
-          <a:solidFill>
-            <a:srgbClr val="ECEBFB"/>
-          </a:solidFill>
-          <a:ln>
-            <a:noFill/>
-          </a:ln>
-          <a:effectLst/>
-        </p:spPr>
-        <p:style>
-          <a:lnRef idx="1">
-            <a:schemeClr val="accent1"/>
-          </a:lnRef>
-          <a:fillRef idx="3">
-            <a:schemeClr val="accent1"/>
-          </a:fillRef>
-          <a:effectRef idx="2">
-            <a:schemeClr val="accent1"/>
-          </a:effectRef>
-          <a:fontRef idx="minor">
-            <a:schemeClr val="lt1"/>
-          </a:fontRef>
-        </p:style>
-        <p:txBody>
-          <a:bodyPr rtlCol="0" anchor="ctr" tIns="76200" bIns="76200" lIns="177800" rIns="177800" wrap="square"/>
-          <a:lstStyle/>
-          <a:p>
-            <a:pPr algn="l"/>
-            <a:r>
-              <a:rPr sz="2000" b="1">
-                <a:solidFill>
-                  <a:srgbClr val="5B5BD6"/>
-                </a:solidFill>
-                <a:latin typeface="Apple SD Gothic Neo"/>
-              </a:rPr>
-              <a:t>같은 점</a:t>
-            </a:r>
-          </a:p>
-          <a:p>
-            <a:pPr algn="l"/>
-            <a:r>
-              <a:rPr sz="1800" b="1">
-                <a:solidFill>
-                  <a:srgbClr val="1A1A1A"/>
-                </a:solidFill>
-                <a:latin typeface="Apple SD Gothic Neo"/>
-              </a:rPr>
-              <a:t>청구를 의료·자동차가 물려받는 뼈대가 똑같다.</a:t>
-            </a:r>
-          </a:p>
-        </p:txBody>
-      </p:sp>
-      <p:sp>
-        <p:nvSpPr>
-          <p:cNvPr id="9" name="Rounded Rectangle 8"/>
-          <p:cNvSpPr/>
-          <p:nvPr/>
-        </p:nvSpPr>
-        <p:spPr>
-          <a:xfrm>
-            <a:off x="6035040" y="5166360"/>
-            <a:ext cx="5394960" cy="1325880"/>
-          </a:xfrm>
-          <a:prstGeom prst="roundRect">
-            <a:avLst>
-              <a:gd name="adj" fmla="val 10000"/>
+              <a:gd name="adj" fmla="val 12000"/>
             </a:avLst>
           </a:prstGeom>
           <a:solidFill>
@@ -4602,25 +4325,22 @@
           <a:p>
             <a:pPr algn="l"/>
             <a:r>
-              <a:rPr sz="2000" b="1">
+              <a:rPr sz="1900" b="1">
                 <a:solidFill>
                   <a:srgbClr val="B5793A"/>
                 </a:solidFill>
                 <a:latin typeface="Apple SD Gothic Neo"/>
               </a:rPr>
-              <a:t>다른 점</a:t>
-            </a:r>
-          </a:p>
-          <a:p>
-            <a:pPr algn="l"/>
-            <a:r>
-              <a:rPr sz="1800" b="1">
+              <a:t>다른 점   </a:t>
+            </a:r>
+            <a:r>
+              <a:rPr sz="1900" b="1">
                 <a:solidFill>
                   <a:srgbClr val="1A1A1A"/>
                 </a:solidFill>
                 <a:latin typeface="Apple SD Gothic Neo"/>
               </a:rPr>
-              <a:t>첨부파일을 더하고, 상태를 4개→6개로 늘려 송금 결과까지 추적.</a:t>
+              <a:t>첨부파일을 더하고, 상태를 4개 → 6개로 늘려 송금 결과까지 추적한다.</a:t>
             </a:r>
           </a:p>
         </p:txBody>
@@ -4995,8 +4715,8 @@
         </p:nvSpPr>
         <p:spPr>
           <a:xfrm>
-            <a:off x="777240" y="1874519"/>
-            <a:ext cx="5394960" cy="502920"/>
+            <a:off x="457200" y="1783080"/>
+            <a:ext cx="5577840" cy="502920"/>
           </a:xfrm>
           <a:prstGeom prst="rect">
             <a:avLst/>
@@ -5030,8 +4750,8 @@
         </p:nvSpPr>
         <p:spPr>
           <a:xfrm>
-            <a:off x="6035040" y="1874519"/>
-            <a:ext cx="5394960" cy="502920"/>
+            <a:off x="6172200" y="1783080"/>
+            <a:ext cx="5577840" cy="502920"/>
           </a:xfrm>
           <a:prstGeom prst="rect">
             <a:avLst/>
@@ -5073,8 +4793,8 @@
         </p:blipFill>
         <p:spPr>
           <a:xfrm>
-            <a:off x="1713865" y="2377440"/>
-            <a:ext cx="3521710" cy="2697480"/>
+            <a:off x="1246505" y="2286000"/>
+            <a:ext cx="3999230" cy="3063240"/>
           </a:xfrm>
           <a:prstGeom prst="rect">
             <a:avLst/>
@@ -5097,8 +4817,8 @@
         </p:blipFill>
         <p:spPr>
           <a:xfrm>
-            <a:off x="7458058" y="2377440"/>
-            <a:ext cx="2548923" cy="2697480"/>
+            <a:off x="7513850" y="2286000"/>
+            <a:ext cx="2894539" cy="3063240"/>
           </a:xfrm>
           <a:prstGeom prst="rect">
             <a:avLst/>
@@ -5113,79 +4833,12 @@
         </p:nvSpPr>
         <p:spPr>
           <a:xfrm>
-            <a:off x="777240" y="5166360"/>
-            <a:ext cx="5394960" cy="1325880"/>
+            <a:off x="457200" y="5532120"/>
+            <a:ext cx="11292840" cy="1051560"/>
           </a:xfrm>
           <a:prstGeom prst="roundRect">
             <a:avLst>
-              <a:gd name="adj" fmla="val 10000"/>
-            </a:avLst>
-          </a:prstGeom>
-          <a:solidFill>
-            <a:srgbClr val="ECEBFB"/>
-          </a:solidFill>
-          <a:ln>
-            <a:noFill/>
-          </a:ln>
-          <a:effectLst/>
-        </p:spPr>
-        <p:style>
-          <a:lnRef idx="1">
-            <a:schemeClr val="accent1"/>
-          </a:lnRef>
-          <a:fillRef idx="3">
-            <a:schemeClr val="accent1"/>
-          </a:fillRef>
-          <a:effectRef idx="2">
-            <a:schemeClr val="accent1"/>
-          </a:effectRef>
-          <a:fontRef idx="minor">
-            <a:schemeClr val="lt1"/>
-          </a:fontRef>
-        </p:style>
-        <p:txBody>
-          <a:bodyPr rtlCol="0" anchor="ctr" tIns="76200" bIns="76200" lIns="177800" rIns="177800" wrap="square"/>
-          <a:lstStyle/>
-          <a:p>
-            <a:pPr algn="l"/>
-            <a:r>
-              <a:rPr sz="2000" b="1">
-                <a:solidFill>
-                  <a:srgbClr val="5B5BD6"/>
-                </a:solidFill>
-                <a:latin typeface="Apple SD Gothic Neo"/>
-              </a:rPr>
-              <a:t>같은 점</a:t>
-            </a:r>
-          </a:p>
-          <a:p>
-            <a:pPr algn="l"/>
-            <a:r>
-              <a:rPr sz="1800" b="1">
-                <a:solidFill>
-                  <a:srgbClr val="1A1A1A"/>
-                </a:solidFill>
-                <a:latin typeface="Apple SD Gothic Neo"/>
-              </a:rPr>
-              <a:t>심사를 가입 심사·지급 심사가 물려받는 구조가 똑같다.</a:t>
-            </a:r>
-          </a:p>
-        </p:txBody>
-      </p:sp>
-      <p:sp>
-        <p:nvSpPr>
-          <p:cNvPr id="9" name="Rounded Rectangle 8"/>
-          <p:cNvSpPr/>
-          <p:nvPr/>
-        </p:nvSpPr>
-        <p:spPr>
-          <a:xfrm>
-            <a:off x="6035040" y="5166360"/>
-            <a:ext cx="5394960" cy="1325880"/>
-          </a:xfrm>
-          <a:prstGeom prst="roundRect">
-            <a:avLst>
-              <a:gd name="adj" fmla="val 10000"/>
+              <a:gd name="adj" fmla="val 12000"/>
             </a:avLst>
           </a:prstGeom>
           <a:solidFill>
@@ -5216,19 +4869,16 @@
           <a:p>
             <a:pPr algn="l"/>
             <a:r>
-              <a:rPr sz="2000" b="1">
+              <a:rPr sz="1900" b="1">
                 <a:solidFill>
                   <a:srgbClr val="B5793A"/>
                 </a:solidFill>
                 <a:latin typeface="Apple SD Gothic Neo"/>
               </a:rPr>
-              <a:t>다른 점</a:t>
-            </a:r>
-          </a:p>
-          <a:p>
-            <a:pPr algn="l"/>
-            <a:r>
-              <a:rPr sz="1800" b="1">
+              <a:t>다른 점   </a:t>
+            </a:r>
+            <a:r>
+              <a:rPr sz="1900" b="1">
                 <a:solidFill>
                   <a:srgbClr val="1A1A1A"/>
                 </a:solidFill>
@@ -5352,8 +5002,8 @@
         </p:nvSpPr>
         <p:spPr>
           <a:xfrm>
-            <a:off x="777240" y="1874519"/>
-            <a:ext cx="5394960" cy="502920"/>
+            <a:off x="457200" y="1783080"/>
+            <a:ext cx="5577840" cy="502920"/>
           </a:xfrm>
           <a:prstGeom prst="rect">
             <a:avLst/>
@@ -5387,8 +5037,8 @@
         </p:nvSpPr>
         <p:spPr>
           <a:xfrm>
-            <a:off x="6035040" y="1874519"/>
-            <a:ext cx="5394960" cy="502920"/>
+            <a:off x="6172200" y="1783080"/>
+            <a:ext cx="5577840" cy="502920"/>
           </a:xfrm>
           <a:prstGeom prst="rect">
             <a:avLst/>
@@ -5430,8 +5080,8 @@
         </p:blipFill>
         <p:spPr>
           <a:xfrm>
-            <a:off x="2382882" y="2377440"/>
-            <a:ext cx="2183674" cy="2697480"/>
+            <a:off x="2006237" y="2286000"/>
+            <a:ext cx="2479765" cy="3063240"/>
           </a:xfrm>
           <a:prstGeom prst="rect">
             <a:avLst/>
@@ -5454,8 +5104,8 @@
         </p:blipFill>
         <p:spPr>
           <a:xfrm>
-            <a:off x="7096921" y="2377440"/>
-            <a:ext cx="3271197" cy="2697480"/>
+            <a:off x="7103745" y="2286000"/>
+            <a:ext cx="3714750" cy="3063240"/>
           </a:xfrm>
           <a:prstGeom prst="rect">
             <a:avLst/>
@@ -5470,79 +5120,12 @@
         </p:nvSpPr>
         <p:spPr>
           <a:xfrm>
-            <a:off x="777240" y="5166360"/>
-            <a:ext cx="5394960" cy="1325880"/>
+            <a:off x="457200" y="5532120"/>
+            <a:ext cx="11292840" cy="1051560"/>
           </a:xfrm>
           <a:prstGeom prst="roundRect">
             <a:avLst>
-              <a:gd name="adj" fmla="val 10000"/>
-            </a:avLst>
-          </a:prstGeom>
-          <a:solidFill>
-            <a:srgbClr val="ECEBFB"/>
-          </a:solidFill>
-          <a:ln>
-            <a:noFill/>
-          </a:ln>
-          <a:effectLst/>
-        </p:spPr>
-        <p:style>
-          <a:lnRef idx="1">
-            <a:schemeClr val="accent1"/>
-          </a:lnRef>
-          <a:fillRef idx="3">
-            <a:schemeClr val="accent1"/>
-          </a:fillRef>
-          <a:effectRef idx="2">
-            <a:schemeClr val="accent1"/>
-          </a:effectRef>
-          <a:fontRef idx="minor">
-            <a:schemeClr val="lt1"/>
-          </a:fontRef>
-        </p:style>
-        <p:txBody>
-          <a:bodyPr rtlCol="0" anchor="ctr" tIns="76200" bIns="76200" lIns="177800" rIns="177800" wrap="square"/>
-          <a:lstStyle/>
-          <a:p>
-            <a:pPr algn="l"/>
-            <a:r>
-              <a:rPr sz="2000" b="1">
-                <a:solidFill>
-                  <a:srgbClr val="5B5BD6"/>
-                </a:solidFill>
-                <a:latin typeface="Apple SD Gothic Neo"/>
-              </a:rPr>
-              <a:t>같은 점</a:t>
-            </a:r>
-          </a:p>
-          <a:p>
-            <a:pPr algn="l"/>
-            <a:r>
-              <a:rPr sz="1800" b="1">
-                <a:solidFill>
-                  <a:srgbClr val="1A1A1A"/>
-                </a:solidFill>
-                <a:latin typeface="Apple SD Gothic Neo"/>
-              </a:rPr>
-              <a:t>사고 건수·지급액 같은 집계 정보를 똑같이 가진다.</a:t>
-            </a:r>
-          </a:p>
-        </p:txBody>
-      </p:sp>
-      <p:sp>
-        <p:nvSpPr>
-          <p:cNvPr id="9" name="Rounded Rectangle 8"/>
-          <p:cNvSpPr/>
-          <p:nvPr/>
-        </p:nvSpPr>
-        <p:spPr>
-          <a:xfrm>
-            <a:off x="6035040" y="5166360"/>
-            <a:ext cx="5394960" cy="1325880"/>
-          </a:xfrm>
-          <a:prstGeom prst="roundRect">
-            <a:avLst>
-              <a:gd name="adj" fmla="val 10000"/>
+              <a:gd name="adj" fmla="val 12000"/>
             </a:avLst>
           </a:prstGeom>
           <a:solidFill>
@@ -5573,19 +5156,16 @@
           <a:p>
             <a:pPr algn="l"/>
             <a:r>
-              <a:rPr sz="2000" b="1">
+              <a:rPr sz="1900" b="1">
                 <a:solidFill>
                   <a:srgbClr val="B5793A"/>
                 </a:solidFill>
                 <a:latin typeface="Apple SD Gothic Neo"/>
               </a:rPr>
-              <a:t>다른 점</a:t>
-            </a:r>
-          </a:p>
-          <a:p>
-            <a:pPr algn="l"/>
-            <a:r>
-              <a:rPr sz="1800" b="1">
+              <a:t>다른 점   </a:t>
+            </a:r>
+            <a:r>
+              <a:rPr sz="1900" b="1">
                 <a:solidFill>
                   <a:srgbClr val="1A1A1A"/>
                 </a:solidFill>

--- a/docs/presentation/보험발표-figma.pptx
+++ b/docs/presentation/보험발표-figma.pptx
@@ -3675,8 +3675,8 @@
         </p:blipFill>
         <p:spPr>
           <a:xfrm>
-            <a:off x="457200" y="2431220"/>
-            <a:ext cx="5577840" cy="2772799"/>
+            <a:off x="457200" y="2415099"/>
+            <a:ext cx="5577840" cy="2805040"/>
           </a:xfrm>
           <a:prstGeom prst="rect">
             <a:avLst/>
@@ -3962,8 +3962,8 @@
         </p:blipFill>
         <p:spPr>
           <a:xfrm>
-            <a:off x="2067015" y="2286000"/>
-            <a:ext cx="2358208" cy="3063240"/>
+            <a:off x="2076299" y="2286000"/>
+            <a:ext cx="2339640" cy="3063240"/>
           </a:xfrm>
           <a:prstGeom prst="rect">
             <a:avLst/>
@@ -3986,8 +3986,8 @@
         </p:blipFill>
         <p:spPr>
           <a:xfrm>
-            <a:off x="6843324" y="2286000"/>
-            <a:ext cx="4235591" cy="3063240"/>
+            <a:off x="6172200" y="2579681"/>
+            <a:ext cx="5577840" cy="2475877"/>
           </a:xfrm>
           <a:prstGeom prst="rect">
             <a:avLst/>
@@ -4249,8 +4249,8 @@
         </p:blipFill>
         <p:spPr>
           <a:xfrm>
-            <a:off x="743228" y="2286000"/>
-            <a:ext cx="5005782" cy="3063240"/>
+            <a:off x="1015282" y="2286000"/>
+            <a:ext cx="4461675" cy="3063240"/>
           </a:xfrm>
           <a:prstGeom prst="rect">
             <a:avLst/>
@@ -4273,8 +4273,8 @@
         </p:blipFill>
         <p:spPr>
           <a:xfrm>
-            <a:off x="7656007" y="2286000"/>
-            <a:ext cx="2610225" cy="3063240"/>
+            <a:off x="7514384" y="2286000"/>
+            <a:ext cx="2893470" cy="3063240"/>
           </a:xfrm>
           <a:prstGeom prst="rect">
             <a:avLst/>
@@ -4793,8 +4793,8 @@
         </p:blipFill>
         <p:spPr>
           <a:xfrm>
-            <a:off x="1246505" y="2286000"/>
-            <a:ext cx="3999230" cy="3063240"/>
+            <a:off x="1110282" y="2286000"/>
+            <a:ext cx="4271674" cy="3063240"/>
           </a:xfrm>
           <a:prstGeom prst="rect">
             <a:avLst/>
@@ -4817,8 +4817,8 @@
         </p:blipFill>
         <p:spPr>
           <a:xfrm>
-            <a:off x="7513850" y="2286000"/>
-            <a:ext cx="2894539" cy="3063240"/>
+            <a:off x="6638508" y="2286000"/>
+            <a:ext cx="4645222" cy="3063240"/>
           </a:xfrm>
           <a:prstGeom prst="rect">
             <a:avLst/>
@@ -5080,8 +5080,8 @@
         </p:blipFill>
         <p:spPr>
           <a:xfrm>
-            <a:off x="2006237" y="2286000"/>
-            <a:ext cx="2479765" cy="3063240"/>
+            <a:off x="1987579" y="2286000"/>
+            <a:ext cx="2517080" cy="3063240"/>
           </a:xfrm>
           <a:prstGeom prst="rect">
             <a:avLst/>

--- a/docs/presentation/보험발표-figma.pptx
+++ b/docs/presentation/보험발표-figma.pptx
@@ -3388,8 +3388,8 @@
         </p:blipFill>
         <p:spPr>
           <a:xfrm>
-            <a:off x="457200" y="2485136"/>
-            <a:ext cx="5577840" cy="2664967"/>
+            <a:off x="457200" y="2626236"/>
+            <a:ext cx="5577840" cy="2382766"/>
           </a:xfrm>
           <a:prstGeom prst="rect">
             <a:avLst/>
@@ -3675,8 +3675,8 @@
         </p:blipFill>
         <p:spPr>
           <a:xfrm>
-            <a:off x="457200" y="2415099"/>
-            <a:ext cx="5577840" cy="2805040"/>
+            <a:off x="457200" y="2476564"/>
+            <a:ext cx="5577840" cy="2682110"/>
           </a:xfrm>
           <a:prstGeom prst="rect">
             <a:avLst/>
@@ -4249,8 +4249,8 @@
         </p:blipFill>
         <p:spPr>
           <a:xfrm>
-            <a:off x="1015282" y="2286000"/>
-            <a:ext cx="4461675" cy="3063240"/>
+            <a:off x="1039269" y="2286000"/>
+            <a:ext cx="4413700" cy="3063240"/>
           </a:xfrm>
           <a:prstGeom prst="rect">
             <a:avLst/>

--- a/docs/presentation/보험발표-figma.pptx
+++ b/docs/presentation/보험발표-figma.pptx
@@ -3374,7 +3374,7 @@
       </p:sp>
       <p:pic>
         <p:nvPicPr>
-          <p:cNvPr id="6" name="Picture 5" descr="user.png"/>
+          <p:cNvPr id="6" name="Picture 5" descr="user-design.png"/>
           <p:cNvPicPr>
             <a:picLocks noChangeAspect="1"/>
           </p:cNvPicPr>
@@ -3388,8 +3388,8 @@
         </p:blipFill>
         <p:spPr>
           <a:xfrm>
-            <a:off x="457200" y="2626236"/>
-            <a:ext cx="5577840" cy="2382766"/>
+            <a:off x="1815099" y="2286000"/>
+            <a:ext cx="2862041" cy="3063240"/>
           </a:xfrm>
           <a:prstGeom prst="rect">
             <a:avLst/>
@@ -3412,8 +3412,8 @@
         </p:blipFill>
         <p:spPr>
           <a:xfrm>
-            <a:off x="7533216" y="2286000"/>
-            <a:ext cx="2855808" cy="3063240"/>
+            <a:off x="7522554" y="2286000"/>
+            <a:ext cx="2877131" cy="3063240"/>
           </a:xfrm>
           <a:prstGeom prst="rect">
             <a:avLst/>
@@ -3661,7 +3661,7 @@
       </p:sp>
       <p:pic>
         <p:nvPicPr>
-          <p:cNvPr id="6" name="Picture 5" descr="product.png"/>
+          <p:cNvPr id="6" name="Picture 5" descr="product-design.png"/>
           <p:cNvPicPr>
             <a:picLocks noChangeAspect="1"/>
           </p:cNvPicPr>
@@ -3675,8 +3675,8 @@
         </p:blipFill>
         <p:spPr>
           <a:xfrm>
-            <a:off x="457200" y="2476564"/>
-            <a:ext cx="5577840" cy="2682110"/>
+            <a:off x="1274379" y="2286000"/>
+            <a:ext cx="3943481" cy="3063240"/>
           </a:xfrm>
           <a:prstGeom prst="rect">
             <a:avLst/>
@@ -3699,8 +3699,8 @@
         </p:blipFill>
         <p:spPr>
           <a:xfrm>
-            <a:off x="7011785" y="2286000"/>
-            <a:ext cx="3898669" cy="3063240"/>
+            <a:off x="6989379" y="2286000"/>
+            <a:ext cx="3943481" cy="3063240"/>
           </a:xfrm>
           <a:prstGeom prst="rect">
             <a:avLst/>
@@ -3948,7 +3948,7 @@
       </p:sp>
       <p:pic>
         <p:nvPicPr>
-          <p:cNvPr id="6" name="Picture 5" descr="contract.png"/>
+          <p:cNvPr id="6" name="Picture 5" descr="contract-design.png"/>
           <p:cNvPicPr>
             <a:picLocks noChangeAspect="1"/>
           </p:cNvPicPr>
@@ -3962,8 +3962,8 @@
         </p:blipFill>
         <p:spPr>
           <a:xfrm>
-            <a:off x="2076299" y="2286000"/>
-            <a:ext cx="2339640" cy="3063240"/>
+            <a:off x="790516" y="2286000"/>
+            <a:ext cx="4911206" cy="3063240"/>
           </a:xfrm>
           <a:prstGeom prst="rect">
             <a:avLst/>
@@ -3986,8 +3986,8 @@
         </p:blipFill>
         <p:spPr>
           <a:xfrm>
-            <a:off x="6172200" y="2579681"/>
-            <a:ext cx="5577840" cy="2475877"/>
+            <a:off x="6172200" y="2352014"/>
+            <a:ext cx="5577840" cy="2931211"/>
           </a:xfrm>
           <a:prstGeom prst="rect">
             <a:avLst/>
@@ -4235,7 +4235,7 @@
       </p:sp>
       <p:pic>
         <p:nvPicPr>
-          <p:cNvPr id="6" name="Picture 5" descr="claim.png"/>
+          <p:cNvPr id="6" name="Picture 5" descr="claim-design.png"/>
           <p:cNvPicPr>
             <a:picLocks noChangeAspect="1"/>
           </p:cNvPicPr>
@@ -4249,8 +4249,8 @@
         </p:blipFill>
         <p:spPr>
           <a:xfrm>
-            <a:off x="1039269" y="2286000"/>
-            <a:ext cx="4413700" cy="3063240"/>
+            <a:off x="1361049" y="2286000"/>
+            <a:ext cx="3770141" cy="3063240"/>
           </a:xfrm>
           <a:prstGeom prst="rect">
             <a:avLst/>
@@ -4273,8 +4273,8 @@
         </p:blipFill>
         <p:spPr>
           <a:xfrm>
-            <a:off x="7514384" y="2286000"/>
-            <a:ext cx="2893470" cy="3063240"/>
+            <a:off x="7487757" y="2286000"/>
+            <a:ext cx="2946724" cy="3063240"/>
           </a:xfrm>
           <a:prstGeom prst="rect">
             <a:avLst/>
@@ -4779,7 +4779,7 @@
       </p:sp>
       <p:pic>
         <p:nvPicPr>
-          <p:cNvPr id="6" name="Picture 5" descr="review.png"/>
+          <p:cNvPr id="6" name="Picture 5" descr="review-design.png"/>
           <p:cNvPicPr>
             <a:picLocks noChangeAspect="1"/>
           </p:cNvPicPr>
@@ -4793,8 +4793,8 @@
         </p:blipFill>
         <p:spPr>
           <a:xfrm>
-            <a:off x="1110282" y="2286000"/>
-            <a:ext cx="4271674" cy="3063240"/>
+            <a:off x="457200" y="2440946"/>
+            <a:ext cx="5577840" cy="2753347"/>
           </a:xfrm>
           <a:prstGeom prst="rect">
             <a:avLst/>
@@ -4817,8 +4817,8 @@
         </p:blipFill>
         <p:spPr>
           <a:xfrm>
-            <a:off x="6638508" y="2286000"/>
-            <a:ext cx="4645222" cy="3063240"/>
+            <a:off x="6172200" y="2590352"/>
+            <a:ext cx="5577840" cy="2454534"/>
           </a:xfrm>
           <a:prstGeom prst="rect">
             <a:avLst/>
@@ -5066,7 +5066,7 @@
       </p:sp>
       <p:pic>
         <p:nvPicPr>
-          <p:cNvPr id="6" name="Picture 5" descr="accident.png"/>
+          <p:cNvPr id="6" name="Picture 5" descr="accident-design.png"/>
           <p:cNvPicPr>
             <a:picLocks noChangeAspect="1"/>
           </p:cNvPicPr>
@@ -5080,8 +5080,8 @@
         </p:blipFill>
         <p:spPr>
           <a:xfrm>
-            <a:off x="1987579" y="2286000"/>
-            <a:ext cx="2517080" cy="3063240"/>
+            <a:off x="2434338" y="2286000"/>
+            <a:ext cx="1623562" cy="3063240"/>
           </a:xfrm>
           <a:prstGeom prst="rect">
             <a:avLst/>
@@ -5104,8 +5104,8 @@
         </p:blipFill>
         <p:spPr>
           <a:xfrm>
-            <a:off x="7103745" y="2286000"/>
-            <a:ext cx="3714750" cy="3063240"/>
+            <a:off x="7739751" y="2286000"/>
+            <a:ext cx="2442737" cy="3063240"/>
           </a:xfrm>
           <a:prstGeom prst="rect">
             <a:avLst/>

--- a/docs/presentation/보험발표-figma.pptx
+++ b/docs/presentation/보험발표-figma.pptx
@@ -3412,8 +3412,8 @@
         </p:blipFill>
         <p:spPr>
           <a:xfrm>
-            <a:off x="7522554" y="2286000"/>
-            <a:ext cx="2877131" cy="3063240"/>
+            <a:off x="7268436" y="2286000"/>
+            <a:ext cx="3385366" cy="3063240"/>
           </a:xfrm>
           <a:prstGeom prst="rect">
             <a:avLst/>
@@ -3699,8 +3699,8 @@
         </p:blipFill>
         <p:spPr>
           <a:xfrm>
-            <a:off x="6989379" y="2286000"/>
-            <a:ext cx="3943481" cy="3063240"/>
+            <a:off x="6691195" y="2286000"/>
+            <a:ext cx="4539849" cy="3063240"/>
           </a:xfrm>
           <a:prstGeom prst="rect">
             <a:avLst/>
@@ -3986,8 +3986,8 @@
         </p:blipFill>
         <p:spPr>
           <a:xfrm>
-            <a:off x="6172200" y="2352014"/>
-            <a:ext cx="5577840" cy="2931211"/>
+            <a:off x="6172200" y="2544108"/>
+            <a:ext cx="5577840" cy="2547023"/>
           </a:xfrm>
           <a:prstGeom prst="rect">
             <a:avLst/>
@@ -4273,8 +4273,8 @@
         </p:blipFill>
         <p:spPr>
           <a:xfrm>
-            <a:off x="7487757" y="2286000"/>
-            <a:ext cx="2946724" cy="3063240"/>
+            <a:off x="7297975" y="2286000"/>
+            <a:ext cx="3326288" cy="3063240"/>
           </a:xfrm>
           <a:prstGeom prst="rect">
             <a:avLst/>
@@ -4817,8 +4817,8 @@
         </p:blipFill>
         <p:spPr>
           <a:xfrm>
-            <a:off x="6172200" y="2590352"/>
-            <a:ext cx="5577840" cy="2454534"/>
+            <a:off x="6172200" y="2732644"/>
+            <a:ext cx="5577840" cy="2169950"/>
           </a:xfrm>
           <a:prstGeom prst="rect">
             <a:avLst/>
@@ -5104,8 +5104,8 @@
         </p:blipFill>
         <p:spPr>
           <a:xfrm>
-            <a:off x="7739751" y="2286000"/>
-            <a:ext cx="2442737" cy="3063240"/>
+            <a:off x="7578020" y="2286000"/>
+            <a:ext cx="2766198" cy="3063240"/>
           </a:xfrm>
           <a:prstGeom prst="rect">
             <a:avLst/>

--- a/docs/presentation/보험발표-figma.pptx
+++ b/docs/presentation/보험발표-figma.pptx
@@ -5232,7 +5232,7 @@
                 </a:solidFill>
                 <a:latin typeface="Apple SD Gothic Neo"/>
               </a:rPr>
-              <a:t>실제 동작하는 경로</a:t>
+              <a:t>유스케이스 중 내가 시연하는 부분</a:t>
             </a:r>
           </a:p>
         </p:txBody>
@@ -5297,8 +5297,8 @@
         </p:blipFill>
         <p:spPr>
           <a:xfrm>
-            <a:off x="4234149" y="1874519"/>
-            <a:ext cx="3693220" cy="3566160"/>
+            <a:off x="4288393" y="1874519"/>
+            <a:ext cx="3584733" cy="3566160"/>
           </a:xfrm>
           <a:prstGeom prst="rect">
             <a:avLst/>
@@ -5329,13 +5329,13 @@
           <a:p>
             <a:pPr algn="ctr"/>
             <a:r>
-              <a:rPr sz="2800" b="1" spc="-40">
+              <a:rPr sz="2600" b="1" spc="-40">
                 <a:solidFill>
                   <a:srgbClr val="1A1A1A"/>
                 </a:solidFill>
                 <a:latin typeface="Apple SD Gothic Neo"/>
               </a:rPr>
-              <a:t>노란 경로가 데모에서 실제로 동작한다.</a:t>
+              <a:t>두 시나리오를 직접 시연한다 — ① 가입~납입, ② 보상심사~지급.</a:t>
             </a:r>
           </a:p>
         </p:txBody>

--- a/docs/presentation/보험발표-figma.pptx
+++ b/docs/presentation/보험발표-figma.pptx
@@ -5232,7 +5232,7 @@
                 </a:solidFill>
                 <a:latin typeface="Apple SD Gothic Neo"/>
               </a:rPr>
-              <a:t>유스케이스 중 내가 시연하는 부분</a:t>
+              <a:t>전체 중 내가 시연하는 부분</a:t>
             </a:r>
           </a:p>
         </p:txBody>
@@ -5297,8 +5297,8 @@
         </p:blipFill>
         <p:spPr>
           <a:xfrm>
-            <a:off x="4288393" y="1874519"/>
-            <a:ext cx="3584733" cy="3566160"/>
+            <a:off x="4520867" y="1828800"/>
+            <a:ext cx="3119784" cy="3749039"/>
           </a:xfrm>
           <a:prstGeom prst="rect">
             <a:avLst/>
@@ -5307,14 +5307,126 @@
       </p:pic>
       <p:sp>
         <p:nvSpPr>
-          <p:cNvPr id="5" name="TextBox 4"/>
+          <p:cNvPr id="5" name="Rounded Rectangle 4"/>
+          <p:cNvSpPr/>
+          <p:nvPr/>
+        </p:nvSpPr>
+        <p:spPr>
+          <a:xfrm>
+            <a:off x="777240" y="2103120"/>
+            <a:ext cx="3108960" cy="731520"/>
+          </a:xfrm>
+          <a:prstGeom prst="roundRect">
+            <a:avLst>
+              <a:gd name="adj" fmla="val 16000"/>
+            </a:avLst>
+          </a:prstGeom>
+          <a:solidFill>
+            <a:srgbClr val="5B5BD6"/>
+          </a:solidFill>
+          <a:ln>
+            <a:noFill/>
+          </a:ln>
+          <a:effectLst/>
+        </p:spPr>
+        <p:style>
+          <a:lnRef idx="1">
+            <a:schemeClr val="accent1"/>
+          </a:lnRef>
+          <a:fillRef idx="3">
+            <a:schemeClr val="accent1"/>
+          </a:fillRef>
+          <a:effectRef idx="2">
+            <a:schemeClr val="accent1"/>
+          </a:effectRef>
+          <a:fontRef idx="minor">
+            <a:schemeClr val="lt1"/>
+          </a:fontRef>
+        </p:style>
+        <p:txBody>
+          <a:bodyPr rtlCol="0" anchor="ctr" tIns="76200" bIns="76200" lIns="177800" rIns="177800" wrap="none"/>
+          <a:lstStyle/>
+          <a:p>
+            <a:pPr algn="ctr"/>
+            <a:r>
+              <a:rPr sz="1800" b="1">
+                <a:solidFill>
+                  <a:srgbClr val="FFFFFF"/>
+                </a:solidFill>
+                <a:latin typeface="Apple SD Gothic Neo"/>
+              </a:rPr>
+              <a:t>파란 박스 = 직접 시연</a:t>
+            </a:r>
+          </a:p>
+        </p:txBody>
+      </p:sp>
+      <p:sp>
+        <p:nvSpPr>
+          <p:cNvPr id="6" name="Rounded Rectangle 5"/>
+          <p:cNvSpPr/>
+          <p:nvPr/>
+        </p:nvSpPr>
+        <p:spPr>
+          <a:xfrm>
+            <a:off x="777240" y="3017520"/>
+            <a:ext cx="3108960" cy="731520"/>
+          </a:xfrm>
+          <a:prstGeom prst="roundRect">
+            <a:avLst>
+              <a:gd name="adj" fmla="val 16000"/>
+            </a:avLst>
+          </a:prstGeom>
+          <a:solidFill>
+            <a:srgbClr val="F1F1F3"/>
+          </a:solidFill>
+          <a:ln w="15240">
+            <a:solidFill>
+              <a:srgbClr val="C9C9CF"/>
+            </a:solidFill>
+          </a:ln>
+          <a:effectLst/>
+        </p:spPr>
+        <p:style>
+          <a:lnRef idx="1">
+            <a:schemeClr val="accent1"/>
+          </a:lnRef>
+          <a:fillRef idx="3">
+            <a:schemeClr val="accent1"/>
+          </a:fillRef>
+          <a:effectRef idx="2">
+            <a:schemeClr val="accent1"/>
+          </a:effectRef>
+          <a:fontRef idx="minor">
+            <a:schemeClr val="lt1"/>
+          </a:fontRef>
+        </p:style>
+        <p:txBody>
+          <a:bodyPr rtlCol="0" anchor="ctr" tIns="76200" bIns="76200" lIns="177800" rIns="177800" wrap="none"/>
+          <a:lstStyle/>
+          <a:p>
+            <a:pPr algn="ctr"/>
+            <a:r>
+              <a:rPr sz="1700" b="1">
+                <a:solidFill>
+                  <a:srgbClr val="6B7280"/>
+                </a:solidFill>
+                <a:latin typeface="Apple SD Gothic Neo"/>
+              </a:rPr>
+              <a:t>회색 = 시연 외(코드엔 있음)</a:t>
+            </a:r>
+          </a:p>
+        </p:txBody>
+      </p:sp>
+      <p:sp>
+        <p:nvSpPr>
+          <p:cNvPr id="7" name="TextBox 6"/>
           <p:cNvSpPr txBox="1"/>
           <p:nvPr/>
         </p:nvSpPr>
         <p:spPr>
           <a:xfrm>
-            <a:off x="777240" y="5577840"/>
-            <a:ext cx="10607040" cy="822960"/>
+            <a:off x="777240" y="5806440"/>
+            <a:ext cx="10607040" cy="731520"/>
           </a:xfrm>
           <a:prstGeom prst="rect">
             <a:avLst/>
@@ -5335,7 +5447,7 @@
                 </a:solidFill>
                 <a:latin typeface="Apple SD Gothic Neo"/>
               </a:rPr>
-              <a:t>두 시나리오를 직접 시연한다 — ① 가입~납입, ② 보상심사~지급.</a:t>
+              <a:t>전체 흐름 중 파란 부분만 라이브로 시연한다.</a:t>
             </a:r>
           </a:p>
         </p:txBody>

--- a/docs/presentation/보험발표-figma.pptx
+++ b/docs/presentation/보험발표-figma.pptx
@@ -25,6 +25,9 @@
     <p:sldId id="273" r:id="rId24"/>
     <p:sldId id="274" r:id="rId25"/>
     <p:sldId id="275" r:id="rId26"/>
+    <p:sldId id="276" r:id="rId27"/>
+    <p:sldId id="277" r:id="rId28"/>
+    <p:sldId id="278" r:id="rId29"/>
   </p:sldIdLst>
   <p:sldSz cx="12191695" cy="6858000" type="screen4x3"/>
   <p:notesSz cx="6858000" cy="9144000"/>
@@ -5508,7 +5511,7 @@
                 </a:solidFill>
                 <a:latin typeface="Apple SD Gothic Neo"/>
               </a:rPr>
-              <a:t>AI를 어떻게 썼나</a:t>
+              <a:t>프로젝트 구조</a:t>
             </a:r>
           </a:p>
         </p:txBody>
@@ -5559,60 +5562,14 @@
       </p:sp>
       <p:sp>
         <p:nvSpPr>
-          <p:cNvPr id="4" name="Rounded Rectangle 3"/>
-          <p:cNvSpPr/>
-          <p:nvPr/>
-        </p:nvSpPr>
-        <p:spPr>
-          <a:xfrm>
-            <a:off x="777240" y="2011680"/>
-            <a:ext cx="5212080" cy="1554480"/>
-          </a:xfrm>
-          <a:prstGeom prst="roundRect">
-            <a:avLst>
-              <a:gd name="adj" fmla="val 12000"/>
-            </a:avLst>
-          </a:prstGeom>
-          <a:solidFill>
-            <a:srgbClr val="ECEBFB"/>
-          </a:solidFill>
-          <a:ln>
-            <a:noFill/>
-          </a:ln>
-          <a:effectLst/>
-        </p:spPr>
-        <p:style>
-          <a:lnRef idx="1">
-            <a:schemeClr val="accent1"/>
-          </a:lnRef>
-          <a:fillRef idx="3">
-            <a:schemeClr val="accent1"/>
-          </a:fillRef>
-          <a:effectRef idx="2">
-            <a:schemeClr val="accent1"/>
-          </a:effectRef>
-          <a:fontRef idx="minor">
-            <a:schemeClr val="lt1"/>
-          </a:fontRef>
-        </p:style>
-        <p:txBody>
-          <a:bodyPr rtlCol="0" anchor="ctr"/>
-          <a:lstStyle/>
-          <a:p>
-            <a:pPr algn="ctr"/>
-          </a:p>
-        </p:txBody>
-      </p:sp>
-      <p:sp>
-        <p:nvSpPr>
-          <p:cNvPr id="5" name="TextBox 4"/>
+          <p:cNvPr id="4" name="TextBox 3"/>
           <p:cNvSpPr txBox="1"/>
           <p:nvPr/>
         </p:nvSpPr>
         <p:spPr>
           <a:xfrm>
-            <a:off x="1097280" y="2194560"/>
-            <a:ext cx="4663440" cy="1280160"/>
+            <a:off x="777240" y="1783080"/>
+            <a:ext cx="5394960" cy="457200"/>
           </a:xfrm>
           <a:prstGeom prst="rect">
             <a:avLst/>
@@ -5620,141 +5577,34 @@
           <a:noFill/>
         </p:spPr>
         <p:txBody>
-          <a:bodyPr wrap="square" anchor="ctr">
+          <a:bodyPr wrap="square" anchor="t">
             <a:spAutoFit/>
           </a:bodyPr>
           <a:lstStyle/>
           <a:p>
             <a:pPr algn="l"/>
             <a:r>
-              <a:rPr sz="2600" b="1">
+              <a:rPr sz="2100" b="1" spc="-30">
                 <a:solidFill>
                   <a:srgbClr val="5B5BD6"/>
                 </a:solidFill>
                 <a:latin typeface="Apple SD Gothic Neo"/>
               </a:rPr>
-              <a:t>사람</a:t>
-            </a:r>
-          </a:p>
-          <a:p>
-            <a:pPr algn="l"/>
-            <a:r>
-              <a:rPr sz="2200" b="1">
-                <a:solidFill>
-                  <a:srgbClr val="1A1A1A"/>
-                </a:solidFill>
-                <a:latin typeface="Apple SD Gothic Neo"/>
-              </a:rPr>
-              <a:t>설계 · 결정 · 검토</a:t>
-            </a:r>
-          </a:p>
-        </p:txBody>
-      </p:sp>
-      <p:sp>
-        <p:nvSpPr>
-          <p:cNvPr id="6" name="Rounded Rectangle 5"/>
+              <a:t>백엔드 · Spring — 계층형</a:t>
+            </a:r>
+          </a:p>
+        </p:txBody>
+      </p:sp>
+      <p:sp>
+        <p:nvSpPr>
+          <p:cNvPr id="5" name="Rounded Rectangle 4"/>
           <p:cNvSpPr/>
           <p:nvPr/>
         </p:nvSpPr>
         <p:spPr>
           <a:xfrm>
-            <a:off x="6172200" y="2011680"/>
-            <a:ext cx="5212080" cy="1554480"/>
-          </a:xfrm>
-          <a:prstGeom prst="roundRect">
-            <a:avLst>
-              <a:gd name="adj" fmla="val 12000"/>
-            </a:avLst>
-          </a:prstGeom>
-          <a:solidFill>
-            <a:srgbClr val="F4F4F6"/>
-          </a:solidFill>
-          <a:ln w="12700">
-            <a:solidFill>
-              <a:srgbClr val="E6E6E6"/>
-            </a:solidFill>
-          </a:ln>
-          <a:effectLst/>
-        </p:spPr>
-        <p:style>
-          <a:lnRef idx="1">
-            <a:schemeClr val="accent1"/>
-          </a:lnRef>
-          <a:fillRef idx="3">
-            <a:schemeClr val="accent1"/>
-          </a:fillRef>
-          <a:effectRef idx="2">
-            <a:schemeClr val="accent1"/>
-          </a:effectRef>
-          <a:fontRef idx="minor">
-            <a:schemeClr val="lt1"/>
-          </a:fontRef>
-        </p:style>
-        <p:txBody>
-          <a:bodyPr rtlCol="0" anchor="ctr"/>
-          <a:lstStyle/>
-          <a:p>
-            <a:pPr algn="ctr"/>
-          </a:p>
-        </p:txBody>
-      </p:sp>
-      <p:sp>
-        <p:nvSpPr>
-          <p:cNvPr id="7" name="TextBox 6"/>
-          <p:cNvSpPr txBox="1"/>
-          <p:nvPr/>
-        </p:nvSpPr>
-        <p:spPr>
-          <a:xfrm>
-            <a:off x="6492240" y="2194560"/>
-            <a:ext cx="4663440" cy="1280160"/>
-          </a:xfrm>
-          <a:prstGeom prst="rect">
-            <a:avLst/>
-          </a:prstGeom>
-          <a:noFill/>
-        </p:spPr>
-        <p:txBody>
-          <a:bodyPr wrap="square" anchor="ctr">
-            <a:spAutoFit/>
-          </a:bodyPr>
-          <a:lstStyle/>
-          <a:p>
-            <a:pPr algn="l"/>
-            <a:r>
-              <a:rPr sz="2600" b="1">
-                <a:solidFill>
-                  <a:srgbClr val="1A1A1A"/>
-                </a:solidFill>
-                <a:latin typeface="Apple SD Gothic Neo"/>
-              </a:rPr>
-              <a:t>AI</a:t>
-            </a:r>
-          </a:p>
-          <a:p>
-            <a:pPr algn="l"/>
-            <a:r>
-              <a:rPr sz="2200" b="1">
-                <a:solidFill>
-                  <a:srgbClr val="1A1A1A"/>
-                </a:solidFill>
-                <a:latin typeface="Apple SD Gothic Neo"/>
-              </a:rPr>
-              <a:t>구현 · 테스트 · 정리</a:t>
-            </a:r>
-          </a:p>
-        </p:txBody>
-      </p:sp>
-      <p:sp>
-        <p:nvSpPr>
-          <p:cNvPr id="8" name="Rounded Rectangle 7"/>
-          <p:cNvSpPr/>
-          <p:nvPr/>
-        </p:nvSpPr>
-        <p:spPr>
-          <a:xfrm>
-            <a:off x="412851" y="3977639"/>
-            <a:ext cx="1965960" cy="1097280"/>
+            <a:off x="1280160" y="2286000"/>
+            <a:ext cx="4389120" cy="603504"/>
           </a:xfrm>
           <a:prstGeom prst="roundRect">
             <a:avLst>
@@ -5786,32 +5636,41 @@
           </a:fontRef>
         </p:style>
         <p:txBody>
-          <a:bodyPr rtlCol="0" anchor="ctr" tIns="76200" bIns="76200" lIns="177800" rIns="177800" wrap="square"/>
-          <a:lstStyle/>
-          <a:p>
-            <a:pPr algn="ctr"/>
-            <a:r>
-              <a:rPr sz="2100" b="1">
+          <a:bodyPr rtlCol="0" anchor="ctr" tIns="76200" bIns="76200" lIns="177800" rIns="177800" wrap="none"/>
+          <a:lstStyle/>
+          <a:p>
+            <a:pPr algn="l"/>
+            <a:r>
+              <a:rPr sz="1700" b="1">
                 <a:solidFill>
                   <a:srgbClr val="1A1A1A"/>
                 </a:solidFill>
-                <a:latin typeface="Apple SD Gothic Neo"/>
-              </a:rPr>
-              <a:t>설계</a:t>
-            </a:r>
-          </a:p>
-        </p:txBody>
-      </p:sp>
-      <p:sp>
-        <p:nvSpPr>
-          <p:cNvPr id="9" name="TextBox 8"/>
+                <a:latin typeface="Menlo"/>
+              </a:rPr>
+              <a:t>web   </a:t>
+            </a:r>
+            <a:r>
+              <a:rPr sz="1500" b="0">
+                <a:solidFill>
+                  <a:srgbClr val="6B7280"/>
+                </a:solidFill>
+                <a:latin typeface="Apple SD Gothic Neo"/>
+              </a:rPr>
+              <a:t>Controller · DTO — 요청/응답</a:t>
+            </a:r>
+          </a:p>
+        </p:txBody>
+      </p:sp>
+      <p:sp>
+        <p:nvSpPr>
+          <p:cNvPr id="6" name="TextBox 5"/>
           <p:cNvSpPr txBox="1"/>
           <p:nvPr/>
         </p:nvSpPr>
         <p:spPr>
           <a:xfrm>
-            <a:off x="2378811" y="4206240"/>
-            <a:ext cx="640080" cy="640080"/>
+            <a:off x="3063240" y="2834640"/>
+            <a:ext cx="822960" cy="320040"/>
           </a:xfrm>
           <a:prstGeom prst="rect">
             <a:avLst/>
@@ -5826,27 +5685,27 @@
           <a:p>
             <a:pPr algn="ctr"/>
             <a:r>
-              <a:rPr sz="2600" b="1">
-                <a:solidFill>
-                  <a:srgbClr val="5B5BD6"/>
-                </a:solidFill>
-                <a:latin typeface="Apple SD Gothic Neo"/>
-              </a:rPr>
-              <a:t>→</a:t>
-            </a:r>
-          </a:p>
-        </p:txBody>
-      </p:sp>
-      <p:sp>
-        <p:nvSpPr>
-          <p:cNvPr id="10" name="Rounded Rectangle 9"/>
+              <a:rPr sz="2000" b="1">
+                <a:solidFill>
+                  <a:srgbClr val="6B7280"/>
+                </a:solidFill>
+                <a:latin typeface="Apple SD Gothic Neo"/>
+              </a:rPr>
+              <a:t>↓</a:t>
+            </a:r>
+          </a:p>
+        </p:txBody>
+      </p:sp>
+      <p:sp>
+        <p:nvSpPr>
+          <p:cNvPr id="7" name="Rounded Rectangle 6"/>
           <p:cNvSpPr/>
           <p:nvPr/>
         </p:nvSpPr>
         <p:spPr>
           <a:xfrm>
-            <a:off x="2762859" y="3977639"/>
-            <a:ext cx="1965960" cy="1097280"/>
+            <a:off x="1280160" y="3090672"/>
+            <a:ext cx="4389120" cy="603504"/>
           </a:xfrm>
           <a:prstGeom prst="roundRect">
             <a:avLst>
@@ -5878,32 +5737,41 @@
           </a:fontRef>
         </p:style>
         <p:txBody>
-          <a:bodyPr rtlCol="0" anchor="ctr" tIns="76200" bIns="76200" lIns="177800" rIns="177800" wrap="square"/>
-          <a:lstStyle/>
-          <a:p>
-            <a:pPr algn="ctr"/>
-            <a:r>
-              <a:rPr sz="2100" b="1">
+          <a:bodyPr rtlCol="0" anchor="ctr" tIns="76200" bIns="76200" lIns="177800" rIns="177800" wrap="none"/>
+          <a:lstStyle/>
+          <a:p>
+            <a:pPr algn="l"/>
+            <a:r>
+              <a:rPr sz="1700" b="1">
                 <a:solidFill>
                   <a:srgbClr val="1A1A1A"/>
                 </a:solidFill>
-                <a:latin typeface="Apple SD Gothic Neo"/>
-              </a:rPr>
-              <a:t>따져묻기</a:t>
-            </a:r>
-          </a:p>
-        </p:txBody>
-      </p:sp>
-      <p:sp>
-        <p:nvSpPr>
-          <p:cNvPr id="11" name="TextBox 10"/>
+                <a:latin typeface="Menlo"/>
+              </a:rPr>
+              <a:t>service   </a:t>
+            </a:r>
+            <a:r>
+              <a:rPr sz="1500" b="0">
+                <a:solidFill>
+                  <a:srgbClr val="6B7280"/>
+                </a:solidFill>
+                <a:latin typeface="Apple SD Gothic Neo"/>
+              </a:rPr>
+              <a:t>업무 흐름 · 규칙 조합</a:t>
+            </a:r>
+          </a:p>
+        </p:txBody>
+      </p:sp>
+      <p:sp>
+        <p:nvSpPr>
+          <p:cNvPr id="8" name="TextBox 7"/>
           <p:cNvSpPr txBox="1"/>
           <p:nvPr/>
         </p:nvSpPr>
         <p:spPr>
           <a:xfrm>
-            <a:off x="4728819" y="4206240"/>
-            <a:ext cx="640080" cy="640080"/>
+            <a:off x="3063240" y="3639312"/>
+            <a:ext cx="822960" cy="320040"/>
           </a:xfrm>
           <a:prstGeom prst="rect">
             <a:avLst/>
@@ -5918,27 +5786,128 @@
           <a:p>
             <a:pPr algn="ctr"/>
             <a:r>
-              <a:rPr sz="2600" b="1">
+              <a:rPr sz="2000" b="1">
+                <a:solidFill>
+                  <a:srgbClr val="6B7280"/>
+                </a:solidFill>
+                <a:latin typeface="Apple SD Gothic Neo"/>
+              </a:rPr>
+              <a:t>↓</a:t>
+            </a:r>
+          </a:p>
+        </p:txBody>
+      </p:sp>
+      <p:sp>
+        <p:nvSpPr>
+          <p:cNvPr id="9" name="Rounded Rectangle 8"/>
+          <p:cNvSpPr/>
+          <p:nvPr/>
+        </p:nvSpPr>
+        <p:spPr>
+          <a:xfrm>
+            <a:off x="1280160" y="3895344"/>
+            <a:ext cx="4389120" cy="603504"/>
+          </a:xfrm>
+          <a:prstGeom prst="roundRect">
+            <a:avLst>
+              <a:gd name="adj" fmla="val 16000"/>
+            </a:avLst>
+          </a:prstGeom>
+          <a:solidFill>
+            <a:srgbClr val="ECEBFB"/>
+          </a:solidFill>
+          <a:ln w="15240">
+            <a:solidFill>
+              <a:srgbClr val="E6E6E6"/>
+            </a:solidFill>
+          </a:ln>
+          <a:effectLst/>
+        </p:spPr>
+        <p:style>
+          <a:lnRef idx="1">
+            <a:schemeClr val="accent1"/>
+          </a:lnRef>
+          <a:fillRef idx="3">
+            <a:schemeClr val="accent1"/>
+          </a:fillRef>
+          <a:effectRef idx="2">
+            <a:schemeClr val="accent1"/>
+          </a:effectRef>
+          <a:fontRef idx="minor">
+            <a:schemeClr val="lt1"/>
+          </a:fontRef>
+        </p:style>
+        <p:txBody>
+          <a:bodyPr rtlCol="0" anchor="ctr" tIns="76200" bIns="76200" lIns="177800" rIns="177800" wrap="none"/>
+          <a:lstStyle/>
+          <a:p>
+            <a:pPr algn="l"/>
+            <a:r>
+              <a:rPr sz="1700" b="1">
                 <a:solidFill>
                   <a:srgbClr val="5B5BD6"/>
                 </a:solidFill>
-                <a:latin typeface="Apple SD Gothic Neo"/>
-              </a:rPr>
-              <a:t>→</a:t>
-            </a:r>
-          </a:p>
-        </p:txBody>
-      </p:sp>
-      <p:sp>
-        <p:nvSpPr>
-          <p:cNvPr id="12" name="Rounded Rectangle 11"/>
+                <a:latin typeface="Menlo"/>
+              </a:rPr>
+              <a:t>domain   </a:t>
+            </a:r>
+            <a:r>
+              <a:rPr sz="1500" b="0">
+                <a:solidFill>
+                  <a:srgbClr val="6B7280"/>
+                </a:solidFill>
+                <a:latin typeface="Apple SD Gothic Neo"/>
+              </a:rPr>
+              <a:t>엔티티 · 도메인 규칙</a:t>
+            </a:r>
+          </a:p>
+        </p:txBody>
+      </p:sp>
+      <p:sp>
+        <p:nvSpPr>
+          <p:cNvPr id="10" name="TextBox 9"/>
+          <p:cNvSpPr txBox="1"/>
+          <p:nvPr/>
+        </p:nvSpPr>
+        <p:spPr>
+          <a:xfrm>
+            <a:off x="3063240" y="4443983"/>
+            <a:ext cx="822960" cy="320040"/>
+          </a:xfrm>
+          <a:prstGeom prst="rect">
+            <a:avLst/>
+          </a:prstGeom>
+          <a:noFill/>
+        </p:spPr>
+        <p:txBody>
+          <a:bodyPr wrap="square" anchor="ctr">
+            <a:spAutoFit/>
+          </a:bodyPr>
+          <a:lstStyle/>
+          <a:p>
+            <a:pPr algn="ctr"/>
+            <a:r>
+              <a:rPr sz="2000" b="1">
+                <a:solidFill>
+                  <a:srgbClr val="6B7280"/>
+                </a:solidFill>
+                <a:latin typeface="Apple SD Gothic Neo"/>
+              </a:rPr>
+              <a:t>↓</a:t>
+            </a:r>
+          </a:p>
+        </p:txBody>
+      </p:sp>
+      <p:sp>
+        <p:nvSpPr>
+          <p:cNvPr id="11" name="Rounded Rectangle 10"/>
           <p:cNvSpPr/>
           <p:nvPr/>
         </p:nvSpPr>
         <p:spPr>
           <a:xfrm>
-            <a:off x="5112867" y="3977639"/>
-            <a:ext cx="1965960" cy="1097280"/>
+            <a:off x="1280160" y="4700016"/>
+            <a:ext cx="4389120" cy="603504"/>
           </a:xfrm>
           <a:prstGeom prst="roundRect">
             <a:avLst>
@@ -5970,18 +5939,62 @@
           </a:fontRef>
         </p:style>
         <p:txBody>
-          <a:bodyPr rtlCol="0" anchor="ctr" tIns="76200" bIns="76200" lIns="177800" rIns="177800" wrap="square"/>
-          <a:lstStyle/>
-          <a:p>
-            <a:pPr algn="ctr"/>
-            <a:r>
-              <a:rPr sz="2100" b="1">
+          <a:bodyPr rtlCol="0" anchor="ctr" tIns="76200" bIns="76200" lIns="177800" rIns="177800" wrap="none"/>
+          <a:lstStyle/>
+          <a:p>
+            <a:pPr algn="l"/>
+            <a:r>
+              <a:rPr sz="1700" b="1">
                 <a:solidFill>
                   <a:srgbClr val="1A1A1A"/>
                 </a:solidFill>
-                <a:latin typeface="Apple SD Gothic Neo"/>
-              </a:rPr>
-              <a:t>계획</a:t>
+                <a:latin typeface="Menlo"/>
+              </a:rPr>
+              <a:t>repository   </a:t>
+            </a:r>
+            <a:r>
+              <a:rPr sz="1500" b="0">
+                <a:solidFill>
+                  <a:srgbClr val="6B7280"/>
+                </a:solidFill>
+                <a:latin typeface="Apple SD Gothic Neo"/>
+              </a:rPr>
+              <a:t>JPA 저장 · 조회</a:t>
+            </a:r>
+          </a:p>
+        </p:txBody>
+      </p:sp>
+      <p:sp>
+        <p:nvSpPr>
+          <p:cNvPr id="12" name="TextBox 11"/>
+          <p:cNvSpPr txBox="1"/>
+          <p:nvPr/>
+        </p:nvSpPr>
+        <p:spPr>
+          <a:xfrm>
+            <a:off x="1280160" y="5468112"/>
+            <a:ext cx="5029200" cy="548640"/>
+          </a:xfrm>
+          <a:prstGeom prst="rect">
+            <a:avLst/>
+          </a:prstGeom>
+          <a:noFill/>
+        </p:spPr>
+        <p:txBody>
+          <a:bodyPr wrap="none" anchor="t">
+            <a:spAutoFit/>
+          </a:bodyPr>
+          <a:lstStyle/>
+          <a:p>
+            <a:pPr algn="l"/>
+            <a:r>
+              <a:rPr sz="1100" b="0" spc="-30">
+                <a:solidFill>
+                  <a:srgbClr val="6B7280"/>
+                </a:solidFill>
+                <a:latin typeface="Menlo"/>
+              </a:rPr>
+              <a:t>domain = user·product·contract·claim·review·application</a:t>
             </a:r>
           </a:p>
         </p:txBody>
@@ -5994,8 +6007,8 @@
         </p:nvSpPr>
         <p:spPr>
           <a:xfrm>
-            <a:off x="7078827" y="4206240"/>
-            <a:ext cx="640080" cy="640080"/>
+            <a:off x="6446520" y="1783080"/>
+            <a:ext cx="5029200" cy="457200"/>
           </a:xfrm>
           <a:prstGeom prst="rect">
             <a:avLst/>
@@ -6003,20 +6016,20 @@
           <a:noFill/>
         </p:spPr>
         <p:txBody>
-          <a:bodyPr wrap="square" anchor="ctr">
+          <a:bodyPr wrap="square" anchor="t">
             <a:spAutoFit/>
           </a:bodyPr>
           <a:lstStyle/>
           <a:p>
-            <a:pPr algn="ctr"/>
-            <a:r>
-              <a:rPr sz="2600" b="1">
-                <a:solidFill>
-                  <a:srgbClr val="5B5BD6"/>
-                </a:solidFill>
-                <a:latin typeface="Apple SD Gothic Neo"/>
-              </a:rPr>
-              <a:t>→</a:t>
+            <a:pPr algn="l"/>
+            <a:r>
+              <a:rPr sz="2100" b="1" spc="-30">
+                <a:solidFill>
+                  <a:srgbClr val="B5793A"/>
+                </a:solidFill>
+                <a:latin typeface="Apple SD Gothic Neo"/>
+              </a:rPr>
+              <a:t>프론트 · React — 기능형</a:t>
             </a:r>
           </a:p>
         </p:txBody>
@@ -6029,8 +6042,8 @@
         </p:nvSpPr>
         <p:spPr>
           <a:xfrm>
-            <a:off x="7462875" y="3977639"/>
-            <a:ext cx="1965960" cy="1097280"/>
+            <a:off x="6446520" y="2331720"/>
+            <a:ext cx="5029200" cy="658368"/>
           </a:xfrm>
           <a:prstGeom prst="roundRect">
             <a:avLst>
@@ -6038,7 +6051,7 @@
             </a:avLst>
           </a:prstGeom>
           <a:solidFill>
-            <a:srgbClr val="ECEBFB"/>
+            <a:srgbClr val="F7EDE6"/>
           </a:solidFill>
           <a:ln w="15240">
             <a:solidFill>
@@ -6062,67 +6075,41 @@
           </a:fontRef>
         </p:style>
         <p:txBody>
-          <a:bodyPr rtlCol="0" anchor="ctr" tIns="76200" bIns="76200" lIns="177800" rIns="177800" wrap="square"/>
-          <a:lstStyle/>
-          <a:p>
-            <a:pPr algn="ctr"/>
-            <a:r>
-              <a:rPr sz="2100" b="1">
+          <a:bodyPr rtlCol="0" anchor="ctr" tIns="76200" bIns="76200" lIns="177800" rIns="177800" wrap="none"/>
+          <a:lstStyle/>
+          <a:p>
+            <a:pPr algn="l"/>
+            <a:r>
+              <a:rPr sz="1700" b="1">
                 <a:solidFill>
                   <a:srgbClr val="1A1A1A"/>
                 </a:solidFill>
-                <a:latin typeface="Apple SD Gothic Neo"/>
-              </a:rPr>
-              <a:t>테스트 먼저 구현</a:t>
-            </a:r>
-          </a:p>
-        </p:txBody>
-      </p:sp>
-      <p:sp>
-        <p:nvSpPr>
-          <p:cNvPr id="15" name="TextBox 14"/>
-          <p:cNvSpPr txBox="1"/>
-          <p:nvPr/>
-        </p:nvSpPr>
-        <p:spPr>
-          <a:xfrm>
-            <a:off x="9428835" y="4206240"/>
-            <a:ext cx="640080" cy="640080"/>
-          </a:xfrm>
-          <a:prstGeom prst="rect">
-            <a:avLst/>
-          </a:prstGeom>
-          <a:noFill/>
-        </p:spPr>
-        <p:txBody>
-          <a:bodyPr wrap="square" anchor="ctr">
-            <a:spAutoFit/>
-          </a:bodyPr>
-          <a:lstStyle/>
-          <a:p>
-            <a:pPr algn="ctr"/>
-            <a:r>
-              <a:rPr sz="2600" b="1">
-                <a:solidFill>
-                  <a:srgbClr val="5B5BD6"/>
-                </a:solidFill>
-                <a:latin typeface="Apple SD Gothic Neo"/>
-              </a:rPr>
-              <a:t>→</a:t>
-            </a:r>
-          </a:p>
-        </p:txBody>
-      </p:sp>
-      <p:sp>
-        <p:nvSpPr>
-          <p:cNvPr id="16" name="Rounded Rectangle 15"/>
+                <a:latin typeface="Menlo"/>
+              </a:rPr>
+              <a:t>app   </a:t>
+            </a:r>
+            <a:r>
+              <a:rPr sz="1500" b="0">
+                <a:solidFill>
+                  <a:srgbClr val="6B7280"/>
+                </a:solidFill>
+                <a:latin typeface="Apple SD Gothic Neo"/>
+              </a:rPr>
+              <a:t>라우팅 · 역할별 화면</a:t>
+            </a:r>
+          </a:p>
+        </p:txBody>
+      </p:sp>
+      <p:sp>
+        <p:nvSpPr>
+          <p:cNvPr id="15" name="Rounded Rectangle 14"/>
           <p:cNvSpPr/>
           <p:nvPr/>
         </p:nvSpPr>
         <p:spPr>
           <a:xfrm>
-            <a:off x="9812883" y="3977639"/>
-            <a:ext cx="1965960" cy="1097280"/>
+            <a:off x="6446520" y="3154680"/>
+            <a:ext cx="5029200" cy="1508760"/>
           </a:xfrm>
           <a:prstGeom prst="roundRect">
             <a:avLst>
@@ -6157,15 +6144,117 @@
           <a:bodyPr rtlCol="0" anchor="ctr" tIns="76200" bIns="76200" lIns="177800" rIns="177800" wrap="square"/>
           <a:lstStyle/>
           <a:p>
-            <a:pPr algn="ctr"/>
-            <a:r>
-              <a:rPr sz="2100" b="1">
+            <a:pPr algn="l"/>
+            <a:r>
+              <a:rPr sz="1500" b="1">
                 <a:solidFill>
                   <a:srgbClr val="1A1A1A"/>
                 </a:solidFill>
-                <a:latin typeface="Apple SD Gothic Neo"/>
-              </a:rPr>
-              <a:t>검토</a:t>
+                <a:latin typeface="Menlo"/>
+              </a:rPr>
+              <a:t>features/  — 기능 한 폴더 = 화면+hook+api</a:t>
+            </a:r>
+          </a:p>
+          <a:p>
+            <a:pPr algn="l"/>
+            <a:r>
+              <a:rPr sz="1500" b="0">
+                <a:solidFill>
+                  <a:srgbClr val="6B7280"/>
+                </a:solidFill>
+                <a:latin typeface="Apple SD Gothic Neo"/>
+              </a:rPr>
+              <a:t>auth · contracts · claims</a:t>
+            </a:r>
+          </a:p>
+          <a:p>
+            <a:pPr algn="l"/>
+            <a:r>
+              <a:rPr sz="1500" b="0">
+                <a:solidFill>
+                  <a:srgbClr val="6B7280"/>
+                </a:solidFill>
+                <a:latin typeface="Apple SD Gothic Neo"/>
+              </a:rPr>
+              <a:t>benefit-review · underwriting-review</a:t>
+            </a:r>
+          </a:p>
+          <a:p>
+            <a:pPr algn="l"/>
+            <a:r>
+              <a:rPr sz="1500" b="0">
+                <a:solidFill>
+                  <a:srgbClr val="6B7280"/>
+                </a:solidFill>
+                <a:latin typeface="Apple SD Gothic Neo"/>
+              </a:rPr>
+              <a:t>assignments · profile · customer-home</a:t>
+            </a:r>
+          </a:p>
+        </p:txBody>
+      </p:sp>
+      <p:sp>
+        <p:nvSpPr>
+          <p:cNvPr id="16" name="Rounded Rectangle 15"/>
+          <p:cNvSpPr/>
+          <p:nvPr/>
+        </p:nvSpPr>
+        <p:spPr>
+          <a:xfrm>
+            <a:off x="6446520" y="4846320"/>
+            <a:ext cx="5029200" cy="658368"/>
+          </a:xfrm>
+          <a:prstGeom prst="roundRect">
+            <a:avLst>
+              <a:gd name="adj" fmla="val 16000"/>
+            </a:avLst>
+          </a:prstGeom>
+          <a:solidFill>
+            <a:srgbClr val="F4F4F6"/>
+          </a:solidFill>
+          <a:ln w="15240">
+            <a:solidFill>
+              <a:srgbClr val="E6E6E6"/>
+            </a:solidFill>
+          </a:ln>
+          <a:effectLst/>
+        </p:spPr>
+        <p:style>
+          <a:lnRef idx="1">
+            <a:schemeClr val="accent1"/>
+          </a:lnRef>
+          <a:fillRef idx="3">
+            <a:schemeClr val="accent1"/>
+          </a:fillRef>
+          <a:effectRef idx="2">
+            <a:schemeClr val="accent1"/>
+          </a:effectRef>
+          <a:fontRef idx="minor">
+            <a:schemeClr val="lt1"/>
+          </a:fontRef>
+        </p:style>
+        <p:txBody>
+          <a:bodyPr rtlCol="0" anchor="ctr" tIns="76200" bIns="76200" lIns="177800" rIns="177800" wrap="none"/>
+          <a:lstStyle/>
+          <a:p>
+            <a:pPr algn="l"/>
+            <a:r>
+              <a:rPr sz="1500" b="1">
+                <a:solidFill>
+                  <a:srgbClr val="1A1A1A"/>
+                </a:solidFill>
+                <a:latin typeface="Menlo"/>
+              </a:rPr>
+              <a:t>lib/api · components   </a:t>
+            </a:r>
+            <a:r>
+              <a:rPr sz="1500" b="0">
+                <a:solidFill>
+                  <a:srgbClr val="6B7280"/>
+                </a:solidFill>
+                <a:latin typeface="Apple SD Gothic Neo"/>
+              </a:rPr>
+              <a:t>공통</a:t>
             </a:r>
           </a:p>
         </p:txBody>
@@ -6178,8 +6267,8 @@
         </p:nvSpPr>
         <p:spPr>
           <a:xfrm>
-            <a:off x="777240" y="5440680"/>
-            <a:ext cx="10607040" cy="822960"/>
+            <a:off x="777240" y="5989320"/>
+            <a:ext cx="10607040" cy="640080"/>
           </a:xfrm>
           <a:prstGeom prst="rect">
             <a:avLst/>
@@ -6194,13 +6283,13 @@
           <a:p>
             <a:pPr algn="ctr"/>
             <a:r>
-              <a:rPr sz="2800" b="1" spc="-40">
+              <a:rPr sz="2400" b="1" spc="-40">
                 <a:solidFill>
                   <a:srgbClr val="1A1A1A"/>
                 </a:solidFill>
                 <a:latin typeface="Apple SD Gothic Neo"/>
               </a:rPr>
-              <a:t>설계와 결정은 사람이, 구현은 AI가 했다.</a:t>
+              <a:t>백엔드는 계층(웹→서비스→도메인→저장소), 프론트는 기능 단위로 나눴다.</a:t>
             </a:r>
           </a:p>
         </p:txBody>
@@ -6261,7 +6350,7 @@
                 </a:solidFill>
                 <a:latin typeface="Apple SD Gothic Neo"/>
               </a:rPr>
-              <a:t>AI가 삑사리 난 곳, 어떻게 잡았나</a:t>
+              <a:t>클래스 다이어그램 → 코드</a:t>
             </a:r>
           </a:p>
         </p:txBody>
@@ -6312,14 +6401,285 @@
       </p:sp>
       <p:sp>
         <p:nvSpPr>
-          <p:cNvPr id="4" name="Rounded Rectangle 3"/>
+          <p:cNvPr id="4" name="TextBox 3"/>
+          <p:cNvSpPr txBox="1"/>
+          <p:nvPr/>
+        </p:nvSpPr>
+        <p:spPr>
+          <a:xfrm>
+            <a:off x="777240" y="1828800"/>
+            <a:ext cx="5394960" cy="457200"/>
+          </a:xfrm>
+          <a:prstGeom prst="rect">
+            <a:avLst/>
+          </a:prstGeom>
+          <a:noFill/>
+        </p:spPr>
+        <p:txBody>
+          <a:bodyPr wrap="square" anchor="t">
+            <a:spAutoFit/>
+          </a:bodyPr>
+          <a:lstStyle/>
+          <a:p>
+            <a:pPr algn="ctr"/>
+            <a:r>
+              <a:rPr sz="1800" b="1" spc="-30">
+                <a:solidFill>
+                  <a:srgbClr val="5B5BD6"/>
+                </a:solidFill>
+                <a:latin typeface="Apple SD Gothic Neo"/>
+              </a:rPr>
+              <a:t>설계 — 클래스 한 개</a:t>
+            </a:r>
+          </a:p>
+        </p:txBody>
+      </p:sp>
+      <p:sp>
+        <p:nvSpPr>
+          <p:cNvPr id="5" name="TextBox 4"/>
+          <p:cNvSpPr txBox="1"/>
+          <p:nvPr/>
+        </p:nvSpPr>
+        <p:spPr>
+          <a:xfrm>
+            <a:off x="6035040" y="1828800"/>
+            <a:ext cx="5394960" cy="457200"/>
+          </a:xfrm>
+          <a:prstGeom prst="rect">
+            <a:avLst/>
+          </a:prstGeom>
+          <a:noFill/>
+        </p:spPr>
+        <p:txBody>
+          <a:bodyPr wrap="square" anchor="t">
+            <a:spAutoFit/>
+          </a:bodyPr>
+          <a:lstStyle/>
+          <a:p>
+            <a:pPr algn="ctr"/>
+            <a:r>
+              <a:rPr sz="1800" b="1" spc="-30">
+                <a:solidFill>
+                  <a:srgbClr val="B5793A"/>
+                </a:solidFill>
+                <a:latin typeface="Apple SD Gothic Neo"/>
+              </a:rPr>
+              <a:t>코드 — JPA 엔티티 한 개</a:t>
+            </a:r>
+          </a:p>
+        </p:txBody>
+      </p:sp>
+      <p:pic>
+        <p:nvPicPr>
+          <p:cNvPr id="6" name="Picture 5" descr="contract-design.png"/>
+          <p:cNvPicPr>
+            <a:picLocks noChangeAspect="1"/>
+          </p:cNvPicPr>
+          <p:nvPr/>
+        </p:nvPicPr>
+        <p:blipFill>
+          <a:blip r:embed="rId2"/>
+          <a:stretch>
+            <a:fillRect/>
+          </a:stretch>
+        </p:blipFill>
+        <p:spPr>
+          <a:xfrm>
+            <a:off x="1348973" y="2331720"/>
+            <a:ext cx="4251492" cy="2651760"/>
+          </a:xfrm>
+          <a:prstGeom prst="rect">
+            <a:avLst/>
+          </a:prstGeom>
+        </p:spPr>
+      </p:pic>
+      <p:sp>
+        <p:nvSpPr>
+          <p:cNvPr id="7" name="Rounded Rectangle 6"/>
           <p:cNvSpPr/>
           <p:nvPr/>
         </p:nvSpPr>
         <p:spPr>
           <a:xfrm>
-            <a:off x="777240" y="2057400"/>
-            <a:ext cx="5212080" cy="1554480"/>
+            <a:off x="6035040" y="2331720"/>
+            <a:ext cx="5394960" cy="2651760"/>
+          </a:xfrm>
+          <a:prstGeom prst="roundRect">
+            <a:avLst>
+              <a:gd name="adj" fmla="val 5000"/>
+            </a:avLst>
+          </a:prstGeom>
+          <a:solidFill>
+            <a:srgbClr val="1F1D3D"/>
+          </a:solidFill>
+          <a:ln>
+            <a:noFill/>
+          </a:ln>
+          <a:effectLst/>
+        </p:spPr>
+        <p:style>
+          <a:lnRef idx="1">
+            <a:schemeClr val="accent1"/>
+          </a:lnRef>
+          <a:fillRef idx="3">
+            <a:schemeClr val="accent1"/>
+          </a:fillRef>
+          <a:effectRef idx="2">
+            <a:schemeClr val="accent1"/>
+          </a:effectRef>
+          <a:fontRef idx="minor">
+            <a:schemeClr val="lt1"/>
+          </a:fontRef>
+        </p:style>
+        <p:txBody>
+          <a:bodyPr rtlCol="0" anchor="ctr"/>
+          <a:lstStyle/>
+          <a:p>
+            <a:pPr algn="ctr"/>
+          </a:p>
+        </p:txBody>
+      </p:sp>
+      <p:sp>
+        <p:nvSpPr>
+          <p:cNvPr id="8" name="TextBox 7"/>
+          <p:cNvSpPr txBox="1"/>
+          <p:nvPr/>
+        </p:nvSpPr>
+        <p:spPr>
+          <a:xfrm>
+            <a:off x="6355080" y="2514600"/>
+            <a:ext cx="4846320" cy="2377440"/>
+          </a:xfrm>
+          <a:prstGeom prst="rect">
+            <a:avLst/>
+          </a:prstGeom>
+          <a:noFill/>
+        </p:spPr>
+        <p:txBody>
+          <a:bodyPr wrap="square" anchor="ctr">
+            <a:spAutoFit/>
+          </a:bodyPr>
+          <a:lstStyle/>
+          <a:p>
+            <a:pPr algn="l"/>
+            <a:r>
+              <a:rPr sz="1400" b="0">
+                <a:solidFill>
+                  <a:srgbClr val="CDBFF7"/>
+                </a:solidFill>
+                <a:latin typeface="Menlo"/>
+              </a:rPr>
+              <a:t>@Entity</a:t>
+            </a:r>
+          </a:p>
+          <a:p>
+            <a:pPr algn="l"/>
+            <a:r>
+              <a:rPr sz="1400" b="0">
+                <a:solidFill>
+                  <a:srgbClr val="CDBFF7"/>
+                </a:solidFill>
+                <a:latin typeface="Menlo"/>
+              </a:rPr>
+              <a:t>class InsuranceContract {</a:t>
+            </a:r>
+          </a:p>
+          <a:p>
+            <a:pPr algn="l"/>
+            <a:r>
+              <a:rPr sz="1400" b="0">
+                <a:solidFill>
+                  <a:srgbClr val="CDBFF7"/>
+                </a:solidFill>
+                <a:latin typeface="Menlo"/>
+              </a:rPr>
+              <a:t>  @Id Long id;</a:t>
+            </a:r>
+          </a:p>
+          <a:p>
+            <a:pPr algn="l"/>
+            <a:r>
+              <a:rPr sz="1400" b="0">
+                <a:solidFill>
+                  <a:srgbClr val="FFFFFF"/>
+                </a:solidFill>
+                <a:latin typeface="Menlo"/>
+              </a:rPr>
+              <a:t>  ContractStatus status;</a:t>
+            </a:r>
+          </a:p>
+          <a:p>
+            <a:pPr algn="l"/>
+            <a:r>
+              <a:rPr sz="1400" b="0">
+                <a:solidFill>
+                  <a:srgbClr val="CDBFF7"/>
+                </a:solidFill>
+                <a:latin typeface="Menlo"/>
+              </a:rPr>
+              <a:t>  @ManyToOne Policyholder policyholder;</a:t>
+            </a:r>
+          </a:p>
+          <a:p>
+            <a:pPr algn="l"/>
+            <a:r>
+              <a:rPr sz="1400" b="0">
+                <a:solidFill>
+                  <a:srgbClr val="CDBFF7"/>
+                </a:solidFill>
+                <a:latin typeface="Menlo"/>
+              </a:rPr>
+              <a:t>  @ManyToOne InsuranceProduct product;</a:t>
+            </a:r>
+          </a:p>
+          <a:p>
+            <a:pPr algn="l"/>
+            <a:r>
+              <a:rPr sz="1400" b="0">
+                <a:solidFill>
+                  <a:srgbClr val="CDBFF7"/>
+                </a:solidFill>
+                <a:latin typeface="Menlo"/>
+              </a:rPr>
+              <a:t>  @OneToMany List&lt;Payment&gt; payments;</a:t>
+            </a:r>
+          </a:p>
+          <a:p>
+            <a:pPr algn="l"/>
+            <a:r>
+              <a:rPr sz="1400" b="0">
+                <a:solidFill>
+                  <a:srgbClr val="CDBFF7"/>
+                </a:solidFill>
+                <a:latin typeface="Menlo"/>
+              </a:rPr>
+              <a:t>  @Embedded AutoDebit autoDebit;</a:t>
+            </a:r>
+          </a:p>
+          <a:p>
+            <a:pPr algn="l"/>
+            <a:r>
+              <a:rPr sz="1400" b="0">
+                <a:solidFill>
+                  <a:srgbClr val="FFFFFF"/>
+                </a:solidFill>
+                <a:latin typeface="Menlo"/>
+              </a:rPr>
+              <a:t>}</a:t>
+            </a:r>
+          </a:p>
+        </p:txBody>
+      </p:sp>
+      <p:sp>
+        <p:nvSpPr>
+          <p:cNvPr id="9" name="Rounded Rectangle 8"/>
+          <p:cNvSpPr/>
+          <p:nvPr/>
+        </p:nvSpPr>
+        <p:spPr>
+          <a:xfrm>
+            <a:off x="777240" y="5257800"/>
+            <a:ext cx="10607040" cy="1143000"/>
           </a:xfrm>
           <a:prstGeom prst="roundRect">
             <a:avLst>
@@ -6329,7 +6689,7 @@
           <a:solidFill>
             <a:srgbClr val="F4F4F6"/>
           </a:solidFill>
-          <a:ln w="12700">
+          <a:ln w="15240">
             <a:solidFill>
               <a:srgbClr val="E6E6E6"/>
             </a:solidFill>
@@ -6351,552 +6711,36 @@
           </a:fontRef>
         </p:style>
         <p:txBody>
-          <a:bodyPr rtlCol="0" anchor="ctr"/>
-          <a:lstStyle/>
-          <a:p>
-            <a:pPr algn="ctr"/>
-          </a:p>
-        </p:txBody>
-      </p:sp>
-      <p:sp>
-        <p:nvSpPr>
-          <p:cNvPr id="5" name="Rectangle 4"/>
-          <p:cNvSpPr/>
-          <p:nvPr/>
-        </p:nvSpPr>
-        <p:spPr>
-          <a:xfrm>
-            <a:off x="777240" y="2286000"/>
-            <a:ext cx="109728" cy="1097280"/>
-          </a:xfrm>
-          <a:prstGeom prst="rect">
-            <a:avLst/>
-          </a:prstGeom>
-          <a:solidFill>
-            <a:srgbClr val="5B5BD6"/>
-          </a:solidFill>
-          <a:ln>
-            <a:noFill/>
-          </a:ln>
-          <a:effectLst/>
-        </p:spPr>
-        <p:style>
-          <a:lnRef idx="1">
-            <a:schemeClr val="accent1"/>
-          </a:lnRef>
-          <a:fillRef idx="3">
-            <a:schemeClr val="accent1"/>
-          </a:fillRef>
-          <a:effectRef idx="2">
-            <a:schemeClr val="accent1"/>
-          </a:effectRef>
-          <a:fontRef idx="minor">
-            <a:schemeClr val="lt1"/>
-          </a:fontRef>
-        </p:style>
-        <p:txBody>
-          <a:bodyPr rtlCol="0" anchor="ctr"/>
-          <a:lstStyle/>
-          <a:p>
-            <a:pPr algn="ctr"/>
-          </a:p>
-        </p:txBody>
-      </p:sp>
-      <p:sp>
-        <p:nvSpPr>
-          <p:cNvPr id="6" name="TextBox 5"/>
-          <p:cNvSpPr txBox="1"/>
-          <p:nvPr/>
-        </p:nvSpPr>
-        <p:spPr>
-          <a:xfrm>
-            <a:off x="1234440" y="2258568"/>
-            <a:ext cx="4572000" cy="1234440"/>
-          </a:xfrm>
-          <a:prstGeom prst="rect">
-            <a:avLst/>
-          </a:prstGeom>
-          <a:noFill/>
-        </p:spPr>
-        <p:txBody>
-          <a:bodyPr wrap="square" anchor="ctr">
-            <a:spAutoFit/>
-          </a:bodyPr>
+          <a:bodyPr rtlCol="0" anchor="ctr" tIns="76200" bIns="76200" lIns="177800" rIns="177800" wrap="square"/>
           <a:lstStyle/>
           <a:p>
             <a:pPr algn="l"/>
             <a:r>
-              <a:rPr sz="2400" b="1" spc="-30">
+              <a:rPr sz="1800" b="1">
                 <a:solidFill>
                   <a:srgbClr val="1A1A1A"/>
                 </a:solidFill>
                 <a:latin typeface="Apple SD Gothic Neo"/>
               </a:rPr>
-              <a:t>성급하게 쪼갬</a:t>
-            </a:r>
-          </a:p>
-          <a:p>
-            <a:pPr algn="l"/>
-            <a:r>
-              <a:rPr sz="1900" b="1" spc="-30">
-                <a:solidFill>
-                  <a:srgbClr val="6B7280"/>
-                </a:solidFill>
-                <a:latin typeface="Apple SD Gothic Neo"/>
-              </a:rPr>
-              <a:t>쓸모없는 계층 분리 → 되돌림</a:t>
-            </a:r>
-          </a:p>
-        </p:txBody>
-      </p:sp>
-      <p:sp>
-        <p:nvSpPr>
-          <p:cNvPr id="7" name="Rounded Rectangle 6"/>
-          <p:cNvSpPr/>
-          <p:nvPr/>
-        </p:nvSpPr>
-        <p:spPr>
-          <a:xfrm>
-            <a:off x="6172200" y="2057400"/>
-            <a:ext cx="5212080" cy="1554480"/>
-          </a:xfrm>
-          <a:prstGeom prst="roundRect">
-            <a:avLst>
-              <a:gd name="adj" fmla="val 10000"/>
-            </a:avLst>
-          </a:prstGeom>
-          <a:solidFill>
-            <a:srgbClr val="F4F4F6"/>
-          </a:solidFill>
-          <a:ln w="12700">
-            <a:solidFill>
-              <a:srgbClr val="E6E6E6"/>
-            </a:solidFill>
-          </a:ln>
-          <a:effectLst/>
-        </p:spPr>
-        <p:style>
-          <a:lnRef idx="1">
-            <a:schemeClr val="accent1"/>
-          </a:lnRef>
-          <a:fillRef idx="3">
-            <a:schemeClr val="accent1"/>
-          </a:fillRef>
-          <a:effectRef idx="2">
-            <a:schemeClr val="accent1"/>
-          </a:effectRef>
-          <a:fontRef idx="minor">
-            <a:schemeClr val="lt1"/>
-          </a:fontRef>
-        </p:style>
-        <p:txBody>
-          <a:bodyPr rtlCol="0" anchor="ctr"/>
-          <a:lstStyle/>
-          <a:p>
-            <a:pPr algn="ctr"/>
-          </a:p>
-        </p:txBody>
-      </p:sp>
-      <p:sp>
-        <p:nvSpPr>
-          <p:cNvPr id="8" name="Rectangle 7"/>
-          <p:cNvSpPr/>
-          <p:nvPr/>
-        </p:nvSpPr>
-        <p:spPr>
-          <a:xfrm>
-            <a:off x="6172200" y="2286000"/>
-            <a:ext cx="109728" cy="1097280"/>
-          </a:xfrm>
-          <a:prstGeom prst="rect">
-            <a:avLst/>
-          </a:prstGeom>
-          <a:solidFill>
-            <a:srgbClr val="5B5BD6"/>
-          </a:solidFill>
-          <a:ln>
-            <a:noFill/>
-          </a:ln>
-          <a:effectLst/>
-        </p:spPr>
-        <p:style>
-          <a:lnRef idx="1">
-            <a:schemeClr val="accent1"/>
-          </a:lnRef>
-          <a:fillRef idx="3">
-            <a:schemeClr val="accent1"/>
-          </a:fillRef>
-          <a:effectRef idx="2">
-            <a:schemeClr val="accent1"/>
-          </a:effectRef>
-          <a:fontRef idx="minor">
-            <a:schemeClr val="lt1"/>
-          </a:fontRef>
-        </p:style>
-        <p:txBody>
-          <a:bodyPr rtlCol="0" anchor="ctr"/>
-          <a:lstStyle/>
-          <a:p>
-            <a:pPr algn="ctr"/>
-          </a:p>
-        </p:txBody>
-      </p:sp>
-      <p:sp>
-        <p:nvSpPr>
-          <p:cNvPr id="9" name="TextBox 8"/>
-          <p:cNvSpPr txBox="1"/>
-          <p:nvPr/>
-        </p:nvSpPr>
-        <p:spPr>
-          <a:xfrm>
-            <a:off x="6629400" y="2258568"/>
-            <a:ext cx="4572000" cy="1234440"/>
-          </a:xfrm>
-          <a:prstGeom prst="rect">
-            <a:avLst/>
-          </a:prstGeom>
-          <a:noFill/>
-        </p:spPr>
-        <p:txBody>
-          <a:bodyPr wrap="square" anchor="ctr">
-            <a:spAutoFit/>
-          </a:bodyPr>
-          <a:lstStyle/>
-          <a:p>
-            <a:pPr algn="l"/>
-            <a:r>
-              <a:rPr sz="2400" b="1" spc="-30">
+              <a:t>필드 = 컬럼,  관계선 = </a:t>
+            </a:r>
+            <a:r>
+              <a:rPr sz="1700" b="1">
+                <a:solidFill>
+                  <a:srgbClr val="5B5BD6"/>
+                </a:solidFill>
+                <a:latin typeface="Menlo"/>
+              </a:rPr>
+              <a:t>@ManyToOne · @OneToMany · @Embedded</a:t>
+            </a:r>
+            <a:r>
+              <a:rPr sz="1800" b="1">
                 <a:solidFill>
                   <a:srgbClr val="1A1A1A"/>
                 </a:solidFill>
                 <a:latin typeface="Apple SD Gothic Neo"/>
               </a:rPr>
-              <a:t>시킨 것과 다름</a:t>
-            </a:r>
-          </a:p>
-          <a:p>
-            <a:pPr algn="l"/>
-            <a:r>
-              <a:rPr sz="1900" b="1" spc="-30">
-                <a:solidFill>
-                  <a:srgbClr val="6B7280"/>
-                </a:solidFill>
-                <a:latin typeface="Apple SD Gothic Neo"/>
-              </a:rPr>
-              <a:t>자동 배정 → 수동 배정으로 정정</a:t>
-            </a:r>
-          </a:p>
-        </p:txBody>
-      </p:sp>
-      <p:sp>
-        <p:nvSpPr>
-          <p:cNvPr id="10" name="Rounded Rectangle 9"/>
-          <p:cNvSpPr/>
-          <p:nvPr/>
-        </p:nvSpPr>
-        <p:spPr>
-          <a:xfrm>
-            <a:off x="777240" y="3794760"/>
-            <a:ext cx="5212080" cy="1554480"/>
-          </a:xfrm>
-          <a:prstGeom prst="roundRect">
-            <a:avLst>
-              <a:gd name="adj" fmla="val 10000"/>
-            </a:avLst>
-          </a:prstGeom>
-          <a:solidFill>
-            <a:srgbClr val="F4F4F6"/>
-          </a:solidFill>
-          <a:ln w="12700">
-            <a:solidFill>
-              <a:srgbClr val="E6E6E6"/>
-            </a:solidFill>
-          </a:ln>
-          <a:effectLst/>
-        </p:spPr>
-        <p:style>
-          <a:lnRef idx="1">
-            <a:schemeClr val="accent1"/>
-          </a:lnRef>
-          <a:fillRef idx="3">
-            <a:schemeClr val="accent1"/>
-          </a:fillRef>
-          <a:effectRef idx="2">
-            <a:schemeClr val="accent1"/>
-          </a:effectRef>
-          <a:fontRef idx="minor">
-            <a:schemeClr val="lt1"/>
-          </a:fontRef>
-        </p:style>
-        <p:txBody>
-          <a:bodyPr rtlCol="0" anchor="ctr"/>
-          <a:lstStyle/>
-          <a:p>
-            <a:pPr algn="ctr"/>
-          </a:p>
-        </p:txBody>
-      </p:sp>
-      <p:sp>
-        <p:nvSpPr>
-          <p:cNvPr id="11" name="Rectangle 10"/>
-          <p:cNvSpPr/>
-          <p:nvPr/>
-        </p:nvSpPr>
-        <p:spPr>
-          <a:xfrm>
-            <a:off x="777240" y="4023360"/>
-            <a:ext cx="109728" cy="1097280"/>
-          </a:xfrm>
-          <a:prstGeom prst="rect">
-            <a:avLst/>
-          </a:prstGeom>
-          <a:solidFill>
-            <a:srgbClr val="5B5BD6"/>
-          </a:solidFill>
-          <a:ln>
-            <a:noFill/>
-          </a:ln>
-          <a:effectLst/>
-        </p:spPr>
-        <p:style>
-          <a:lnRef idx="1">
-            <a:schemeClr val="accent1"/>
-          </a:lnRef>
-          <a:fillRef idx="3">
-            <a:schemeClr val="accent1"/>
-          </a:fillRef>
-          <a:effectRef idx="2">
-            <a:schemeClr val="accent1"/>
-          </a:effectRef>
-          <a:fontRef idx="minor">
-            <a:schemeClr val="lt1"/>
-          </a:fontRef>
-        </p:style>
-        <p:txBody>
-          <a:bodyPr rtlCol="0" anchor="ctr"/>
-          <a:lstStyle/>
-          <a:p>
-            <a:pPr algn="ctr"/>
-          </a:p>
-        </p:txBody>
-      </p:sp>
-      <p:sp>
-        <p:nvSpPr>
-          <p:cNvPr id="12" name="TextBox 11"/>
-          <p:cNvSpPr txBox="1"/>
-          <p:nvPr/>
-        </p:nvSpPr>
-        <p:spPr>
-          <a:xfrm>
-            <a:off x="1234440" y="3995928"/>
-            <a:ext cx="4572000" cy="1234440"/>
-          </a:xfrm>
-          <a:prstGeom prst="rect">
-            <a:avLst/>
-          </a:prstGeom>
-          <a:noFill/>
-        </p:spPr>
-        <p:txBody>
-          <a:bodyPr wrap="square" anchor="ctr">
-            <a:spAutoFit/>
-          </a:bodyPr>
-          <a:lstStyle/>
-          <a:p>
-            <a:pPr algn="l"/>
-            <a:r>
-              <a:rPr sz="2400" b="1" spc="-30">
-                <a:solidFill>
-                  <a:srgbClr val="1A1A1A"/>
-                </a:solidFill>
-                <a:latin typeface="Apple SD Gothic Neo"/>
-              </a:rPr>
-              <a:t>정해둔 틀에서 이탈</a:t>
-            </a:r>
-          </a:p>
-          <a:p>
-            <a:pPr algn="l"/>
-            <a:r>
-              <a:rPr sz="1900" b="1" spc="-30">
-                <a:solidFill>
-                  <a:srgbClr val="6B7280"/>
-                </a:solidFill>
-                <a:latin typeface="Apple SD Gothic Neo"/>
-              </a:rPr>
-              <a:t>점검으로 찾아내 관리</a:t>
-            </a:r>
-          </a:p>
-        </p:txBody>
-      </p:sp>
-      <p:sp>
-        <p:nvSpPr>
-          <p:cNvPr id="13" name="Rounded Rectangle 12"/>
-          <p:cNvSpPr/>
-          <p:nvPr/>
-        </p:nvSpPr>
-        <p:spPr>
-          <a:xfrm>
-            <a:off x="6172200" y="3794760"/>
-            <a:ext cx="5212080" cy="1554480"/>
-          </a:xfrm>
-          <a:prstGeom prst="roundRect">
-            <a:avLst>
-              <a:gd name="adj" fmla="val 10000"/>
-            </a:avLst>
-          </a:prstGeom>
-          <a:solidFill>
-            <a:srgbClr val="F4F4F6"/>
-          </a:solidFill>
-          <a:ln w="12700">
-            <a:solidFill>
-              <a:srgbClr val="E6E6E6"/>
-            </a:solidFill>
-          </a:ln>
-          <a:effectLst/>
-        </p:spPr>
-        <p:style>
-          <a:lnRef idx="1">
-            <a:schemeClr val="accent1"/>
-          </a:lnRef>
-          <a:fillRef idx="3">
-            <a:schemeClr val="accent1"/>
-          </a:fillRef>
-          <a:effectRef idx="2">
-            <a:schemeClr val="accent1"/>
-          </a:effectRef>
-          <a:fontRef idx="minor">
-            <a:schemeClr val="lt1"/>
-          </a:fontRef>
-        </p:style>
-        <p:txBody>
-          <a:bodyPr rtlCol="0" anchor="ctr"/>
-          <a:lstStyle/>
-          <a:p>
-            <a:pPr algn="ctr"/>
-          </a:p>
-        </p:txBody>
-      </p:sp>
-      <p:sp>
-        <p:nvSpPr>
-          <p:cNvPr id="14" name="Rectangle 13"/>
-          <p:cNvSpPr/>
-          <p:nvPr/>
-        </p:nvSpPr>
-        <p:spPr>
-          <a:xfrm>
-            <a:off x="6172200" y="4023360"/>
-            <a:ext cx="109728" cy="1097280"/>
-          </a:xfrm>
-          <a:prstGeom prst="rect">
-            <a:avLst/>
-          </a:prstGeom>
-          <a:solidFill>
-            <a:srgbClr val="5B5BD6"/>
-          </a:solidFill>
-          <a:ln>
-            <a:noFill/>
-          </a:ln>
-          <a:effectLst/>
-        </p:spPr>
-        <p:style>
-          <a:lnRef idx="1">
-            <a:schemeClr val="accent1"/>
-          </a:lnRef>
-          <a:fillRef idx="3">
-            <a:schemeClr val="accent1"/>
-          </a:fillRef>
-          <a:effectRef idx="2">
-            <a:schemeClr val="accent1"/>
-          </a:effectRef>
-          <a:fontRef idx="minor">
-            <a:schemeClr val="lt1"/>
-          </a:fontRef>
-        </p:style>
-        <p:txBody>
-          <a:bodyPr rtlCol="0" anchor="ctr"/>
-          <a:lstStyle/>
-          <a:p>
-            <a:pPr algn="ctr"/>
-          </a:p>
-        </p:txBody>
-      </p:sp>
-      <p:sp>
-        <p:nvSpPr>
-          <p:cNvPr id="15" name="TextBox 14"/>
-          <p:cNvSpPr txBox="1"/>
-          <p:nvPr/>
-        </p:nvSpPr>
-        <p:spPr>
-          <a:xfrm>
-            <a:off x="6629400" y="3995928"/>
-            <a:ext cx="4572000" cy="1234440"/>
-          </a:xfrm>
-          <a:prstGeom prst="rect">
-            <a:avLst/>
-          </a:prstGeom>
-          <a:noFill/>
-        </p:spPr>
-        <p:txBody>
-          <a:bodyPr wrap="square" anchor="ctr">
-            <a:spAutoFit/>
-          </a:bodyPr>
-          <a:lstStyle/>
-          <a:p>
-            <a:pPr algn="l"/>
-            <a:r>
-              <a:rPr sz="2400" b="1" spc="-30">
-                <a:solidFill>
-                  <a:srgbClr val="1A1A1A"/>
-                </a:solidFill>
-                <a:latin typeface="Apple SD Gothic Neo"/>
-              </a:rPr>
-              <a:t>용어를 섞어 씀</a:t>
-            </a:r>
-          </a:p>
-          <a:p>
-            <a:pPr algn="l"/>
-            <a:r>
-              <a:rPr sz="1900" b="1" spc="-30">
-                <a:solidFill>
-                  <a:srgbClr val="6B7280"/>
-                </a:solidFill>
-                <a:latin typeface="Apple SD Gothic Neo"/>
-              </a:rPr>
-              <a:t>용어집으로 미리 차단</a:t>
-            </a:r>
-          </a:p>
-        </p:txBody>
-      </p:sp>
-      <p:sp>
-        <p:nvSpPr>
-          <p:cNvPr id="16" name="TextBox 15"/>
-          <p:cNvSpPr txBox="1"/>
-          <p:nvPr/>
-        </p:nvSpPr>
-        <p:spPr>
-          <a:xfrm>
-            <a:off x="777240" y="5623560"/>
-            <a:ext cx="10607040" cy="822960"/>
-          </a:xfrm>
-          <a:prstGeom prst="rect">
-            <a:avLst/>
-          </a:prstGeom>
-          <a:noFill/>
-        </p:spPr>
-        <p:txBody>
-          <a:bodyPr wrap="square" anchor="t">
-            <a:spAutoFit/>
-          </a:bodyPr>
-          <a:lstStyle/>
-          <a:p>
-            <a:pPr algn="ctr"/>
-            <a:r>
-              <a:rPr sz="2800" b="1" spc="-40">
-                <a:solidFill>
-                  <a:srgbClr val="1A1A1A"/>
-                </a:solidFill>
-                <a:latin typeface="Apple SD Gothic Neo"/>
-              </a:rPr>
-              <a:t>AI는 빠르지만, 방향은 사람이 잡았다.</a:t>
+              <a:t>.  domain 패키지의 6묶음이 다이어그램 6묶음과 1:1.</a:t>
             </a:r>
           </a:p>
         </p:txBody>
@@ -7279,6 +7123,2214 @@
 </file>
 
 <file path=ppt/slides/slide20.xml><?xml version="1.0" encoding="utf-8"?>
+<p:sld xmlns:a="http://schemas.openxmlformats.org/drawingml/2006/main" xmlns:p="http://schemas.openxmlformats.org/presentationml/2006/main" xmlns:r="http://schemas.openxmlformats.org/officeDocument/2006/relationships">
+  <p:cSld>
+    <p:bg>
+      <p:bgPr>
+        <a:solidFill>
+          <a:srgbClr val="FFFFFF"/>
+        </a:solidFill>
+        <a:effectLst/>
+      </p:bgPr>
+    </p:bg>
+    <p:spTree>
+      <p:nvGrpSpPr>
+        <p:cNvPr id="1" name=""/>
+        <p:cNvGrpSpPr/>
+        <p:nvPr/>
+      </p:nvGrpSpPr>
+      <p:grpSpPr/>
+      <p:sp>
+        <p:nvSpPr>
+          <p:cNvPr id="2" name="TextBox 1"/>
+          <p:cNvSpPr txBox="1"/>
+          <p:nvPr/>
+        </p:nvSpPr>
+        <p:spPr>
+          <a:xfrm>
+            <a:off x="749808" y="566928"/>
+            <a:ext cx="10881360" cy="1371600"/>
+          </a:xfrm>
+          <a:prstGeom prst="rect">
+            <a:avLst/>
+          </a:prstGeom>
+          <a:noFill/>
+        </p:spPr>
+        <p:txBody>
+          <a:bodyPr wrap="square" anchor="t">
+            <a:spAutoFit/>
+          </a:bodyPr>
+          <a:lstStyle/>
+          <a:p>
+            <a:pPr algn="l"/>
+            <a:r>
+              <a:rPr sz="5200" b="1" spc="-100">
+                <a:solidFill>
+                  <a:srgbClr val="1A1A1A"/>
+                </a:solidFill>
+                <a:latin typeface="Apple SD Gothic Neo"/>
+              </a:rPr>
+              <a:t>유스케이스 → 코드</a:t>
+            </a:r>
+          </a:p>
+        </p:txBody>
+      </p:sp>
+      <p:sp>
+        <p:nvSpPr>
+          <p:cNvPr id="3" name="Rectangle 2"/>
+          <p:cNvSpPr/>
+          <p:nvPr/>
+        </p:nvSpPr>
+        <p:spPr>
+          <a:xfrm>
+            <a:off x="822960" y="1627632"/>
+            <a:ext cx="868680" cy="82296"/>
+          </a:xfrm>
+          <a:prstGeom prst="rect">
+            <a:avLst/>
+          </a:prstGeom>
+          <a:solidFill>
+            <a:srgbClr val="5B5BD6"/>
+          </a:solidFill>
+          <a:ln>
+            <a:noFill/>
+          </a:ln>
+          <a:effectLst/>
+        </p:spPr>
+        <p:style>
+          <a:lnRef idx="1">
+            <a:schemeClr val="accent1"/>
+          </a:lnRef>
+          <a:fillRef idx="3">
+            <a:schemeClr val="accent1"/>
+          </a:fillRef>
+          <a:effectRef idx="2">
+            <a:schemeClr val="accent1"/>
+          </a:effectRef>
+          <a:fontRef idx="minor">
+            <a:schemeClr val="lt1"/>
+          </a:fontRef>
+        </p:style>
+        <p:txBody>
+          <a:bodyPr rtlCol="0" anchor="ctr"/>
+          <a:lstStyle/>
+          <a:p>
+            <a:pPr algn="ctr"/>
+          </a:p>
+        </p:txBody>
+      </p:sp>
+      <p:sp>
+        <p:nvSpPr>
+          <p:cNvPr id="4" name="TextBox 3"/>
+          <p:cNvSpPr txBox="1"/>
+          <p:nvPr/>
+        </p:nvSpPr>
+        <p:spPr>
+          <a:xfrm>
+            <a:off x="777240" y="1828800"/>
+            <a:ext cx="10607040" cy="548640"/>
+          </a:xfrm>
+          <a:prstGeom prst="rect">
+            <a:avLst/>
+          </a:prstGeom>
+          <a:noFill/>
+        </p:spPr>
+        <p:txBody>
+          <a:bodyPr wrap="square" anchor="t">
+            <a:spAutoFit/>
+          </a:bodyPr>
+          <a:lstStyle/>
+          <a:p>
+            <a:pPr algn="l"/>
+            <a:r>
+              <a:rPr sz="2000" b="1" spc="-30">
+                <a:solidFill>
+                  <a:srgbClr val="6B7280"/>
+                </a:solidFill>
+                <a:latin typeface="Apple SD Gothic Neo"/>
+              </a:rPr>
+              <a:t>예) 가입 신청 — 한 시나리오가 한 줄기 호출 흐름으로</a:t>
+            </a:r>
+          </a:p>
+        </p:txBody>
+      </p:sp>
+      <p:sp>
+        <p:nvSpPr>
+          <p:cNvPr id="5" name="Rounded Rectangle 4"/>
+          <p:cNvSpPr/>
+          <p:nvPr/>
+        </p:nvSpPr>
+        <p:spPr>
+          <a:xfrm>
+            <a:off x="495147" y="2743200"/>
+            <a:ext cx="1874519" cy="1554480"/>
+          </a:xfrm>
+          <a:prstGeom prst="roundRect">
+            <a:avLst>
+              <a:gd name="adj" fmla="val 16000"/>
+            </a:avLst>
+          </a:prstGeom>
+          <a:solidFill>
+            <a:srgbClr val="ECEBFB"/>
+          </a:solidFill>
+          <a:ln>
+            <a:noFill/>
+          </a:ln>
+          <a:effectLst/>
+        </p:spPr>
+        <p:style>
+          <a:lnRef idx="1">
+            <a:schemeClr val="accent1"/>
+          </a:lnRef>
+          <a:fillRef idx="3">
+            <a:schemeClr val="accent1"/>
+          </a:fillRef>
+          <a:effectRef idx="2">
+            <a:schemeClr val="accent1"/>
+          </a:effectRef>
+          <a:fontRef idx="minor">
+            <a:schemeClr val="lt1"/>
+          </a:fontRef>
+        </p:style>
+        <p:txBody>
+          <a:bodyPr rtlCol="0" anchor="ctr" tIns="76200" bIns="76200" lIns="177800" rIns="177800" wrap="square"/>
+          <a:lstStyle/>
+          <a:p>
+            <a:pPr algn="ctr"/>
+            <a:r>
+              <a:rPr sz="1400" b="1">
+                <a:solidFill>
+                  <a:srgbClr val="1A1A1A"/>
+                </a:solidFill>
+                <a:latin typeface="Menlo"/>
+              </a:rPr>
+              <a:t>고객</a:t>
+            </a:r>
+          </a:p>
+          <a:p>
+            <a:pPr algn="ctr"/>
+            <a:r>
+              <a:rPr sz="1500" b="1">
+                <a:solidFill>
+                  <a:srgbClr val="1A1A1A"/>
+                </a:solidFill>
+                <a:latin typeface="Apple SD Gothic Neo"/>
+              </a:rPr>
+              <a:t>가입 신청 화면</a:t>
+            </a:r>
+          </a:p>
+        </p:txBody>
+      </p:sp>
+      <p:sp>
+        <p:nvSpPr>
+          <p:cNvPr id="6" name="TextBox 5"/>
+          <p:cNvSpPr txBox="1"/>
+          <p:nvPr/>
+        </p:nvSpPr>
+        <p:spPr>
+          <a:xfrm>
+            <a:off x="2278227" y="3337560"/>
+            <a:ext cx="640080" cy="640080"/>
+          </a:xfrm>
+          <a:prstGeom prst="rect">
+            <a:avLst/>
+          </a:prstGeom>
+          <a:noFill/>
+        </p:spPr>
+        <p:txBody>
+          <a:bodyPr wrap="square" anchor="ctr">
+            <a:spAutoFit/>
+          </a:bodyPr>
+          <a:lstStyle/>
+          <a:p>
+            <a:pPr algn="ctr"/>
+            <a:r>
+              <a:rPr sz="2200" b="1">
+                <a:solidFill>
+                  <a:srgbClr val="5B5BD6"/>
+                </a:solidFill>
+                <a:latin typeface="Apple SD Gothic Neo"/>
+              </a:rPr>
+              <a:t>→</a:t>
+            </a:r>
+          </a:p>
+        </p:txBody>
+      </p:sp>
+      <p:sp>
+        <p:nvSpPr>
+          <p:cNvPr id="7" name="Rounded Rectangle 6"/>
+          <p:cNvSpPr/>
+          <p:nvPr/>
+        </p:nvSpPr>
+        <p:spPr>
+          <a:xfrm>
+            <a:off x="2826867" y="2743200"/>
+            <a:ext cx="1874519" cy="1554480"/>
+          </a:xfrm>
+          <a:prstGeom prst="roundRect">
+            <a:avLst>
+              <a:gd name="adj" fmla="val 16000"/>
+            </a:avLst>
+          </a:prstGeom>
+          <a:solidFill>
+            <a:srgbClr val="F4F4F6"/>
+          </a:solidFill>
+          <a:ln>
+            <a:noFill/>
+          </a:ln>
+          <a:effectLst/>
+        </p:spPr>
+        <p:style>
+          <a:lnRef idx="1">
+            <a:schemeClr val="accent1"/>
+          </a:lnRef>
+          <a:fillRef idx="3">
+            <a:schemeClr val="accent1"/>
+          </a:fillRef>
+          <a:effectRef idx="2">
+            <a:schemeClr val="accent1"/>
+          </a:effectRef>
+          <a:fontRef idx="minor">
+            <a:schemeClr val="lt1"/>
+          </a:fontRef>
+        </p:style>
+        <p:txBody>
+          <a:bodyPr rtlCol="0" anchor="ctr" tIns="76200" bIns="76200" lIns="177800" rIns="177800" wrap="square"/>
+          <a:lstStyle/>
+          <a:p>
+            <a:pPr algn="ctr"/>
+            <a:r>
+              <a:rPr sz="1400" b="1">
+                <a:solidFill>
+                  <a:srgbClr val="1A1A1A"/>
+                </a:solidFill>
+                <a:latin typeface="Menlo"/>
+              </a:rPr>
+              <a:t>web</a:t>
+            </a:r>
+          </a:p>
+          <a:p>
+            <a:pPr algn="ctr"/>
+            <a:r>
+              <a:rPr sz="1500" b="1">
+                <a:solidFill>
+                  <a:srgbClr val="1A1A1A"/>
+                </a:solidFill>
+                <a:latin typeface="Apple SD Gothic Neo"/>
+              </a:rPr>
+              <a:t>ApplicationController</a:t>
+            </a:r>
+          </a:p>
+          <a:p>
+            <a:pPr algn="ctr"/>
+            <a:r>
+              <a:rPr sz="1500" b="1">
+                <a:solidFill>
+                  <a:srgbClr val="1A1A1A"/>
+                </a:solidFill>
+                <a:latin typeface="Apple SD Gothic Neo"/>
+              </a:rPr>
+              <a:t>POST /applications</a:t>
+            </a:r>
+          </a:p>
+        </p:txBody>
+      </p:sp>
+      <p:sp>
+        <p:nvSpPr>
+          <p:cNvPr id="8" name="TextBox 7"/>
+          <p:cNvSpPr txBox="1"/>
+          <p:nvPr/>
+        </p:nvSpPr>
+        <p:spPr>
+          <a:xfrm>
+            <a:off x="4609947" y="3337560"/>
+            <a:ext cx="640080" cy="640080"/>
+          </a:xfrm>
+          <a:prstGeom prst="rect">
+            <a:avLst/>
+          </a:prstGeom>
+          <a:noFill/>
+        </p:spPr>
+        <p:txBody>
+          <a:bodyPr wrap="square" anchor="ctr">
+            <a:spAutoFit/>
+          </a:bodyPr>
+          <a:lstStyle/>
+          <a:p>
+            <a:pPr algn="ctr"/>
+            <a:r>
+              <a:rPr sz="2200" b="1">
+                <a:solidFill>
+                  <a:srgbClr val="5B5BD6"/>
+                </a:solidFill>
+                <a:latin typeface="Apple SD Gothic Neo"/>
+              </a:rPr>
+              <a:t>→</a:t>
+            </a:r>
+          </a:p>
+        </p:txBody>
+      </p:sp>
+      <p:sp>
+        <p:nvSpPr>
+          <p:cNvPr id="9" name="Rounded Rectangle 8"/>
+          <p:cNvSpPr/>
+          <p:nvPr/>
+        </p:nvSpPr>
+        <p:spPr>
+          <a:xfrm>
+            <a:off x="5158587" y="2743200"/>
+            <a:ext cx="1874519" cy="1554480"/>
+          </a:xfrm>
+          <a:prstGeom prst="roundRect">
+            <a:avLst>
+              <a:gd name="adj" fmla="val 16000"/>
+            </a:avLst>
+          </a:prstGeom>
+          <a:solidFill>
+            <a:srgbClr val="ECEBFB"/>
+          </a:solidFill>
+          <a:ln>
+            <a:noFill/>
+          </a:ln>
+          <a:effectLst/>
+        </p:spPr>
+        <p:style>
+          <a:lnRef idx="1">
+            <a:schemeClr val="accent1"/>
+          </a:lnRef>
+          <a:fillRef idx="3">
+            <a:schemeClr val="accent1"/>
+          </a:fillRef>
+          <a:effectRef idx="2">
+            <a:schemeClr val="accent1"/>
+          </a:effectRef>
+          <a:fontRef idx="minor">
+            <a:schemeClr val="lt1"/>
+          </a:fontRef>
+        </p:style>
+        <p:txBody>
+          <a:bodyPr rtlCol="0" anchor="ctr" tIns="76200" bIns="76200" lIns="177800" rIns="177800" wrap="square"/>
+          <a:lstStyle/>
+          <a:p>
+            <a:pPr algn="ctr"/>
+            <a:r>
+              <a:rPr sz="1400" b="1">
+                <a:solidFill>
+                  <a:srgbClr val="1A1A1A"/>
+                </a:solidFill>
+                <a:latin typeface="Menlo"/>
+              </a:rPr>
+              <a:t>service</a:t>
+            </a:r>
+          </a:p>
+          <a:p>
+            <a:pPr algn="ctr"/>
+            <a:r>
+              <a:rPr sz="1500" b="1">
+                <a:solidFill>
+                  <a:srgbClr val="1A1A1A"/>
+                </a:solidFill>
+                <a:latin typeface="Apple SD Gothic Neo"/>
+              </a:rPr>
+              <a:t>ApplicationService</a:t>
+            </a:r>
+          </a:p>
+          <a:p>
+            <a:pPr algn="ctr"/>
+            <a:r>
+              <a:rPr sz="1500" b="1">
+                <a:solidFill>
+                  <a:srgbClr val="1A1A1A"/>
+                </a:solidFill>
+                <a:latin typeface="Apple SD Gothic Neo"/>
+              </a:rPr>
+              <a:t>.apply()</a:t>
+            </a:r>
+          </a:p>
+        </p:txBody>
+      </p:sp>
+      <p:sp>
+        <p:nvSpPr>
+          <p:cNvPr id="10" name="TextBox 9"/>
+          <p:cNvSpPr txBox="1"/>
+          <p:nvPr/>
+        </p:nvSpPr>
+        <p:spPr>
+          <a:xfrm>
+            <a:off x="6941667" y="3337560"/>
+            <a:ext cx="640080" cy="640080"/>
+          </a:xfrm>
+          <a:prstGeom prst="rect">
+            <a:avLst/>
+          </a:prstGeom>
+          <a:noFill/>
+        </p:spPr>
+        <p:txBody>
+          <a:bodyPr wrap="square" anchor="ctr">
+            <a:spAutoFit/>
+          </a:bodyPr>
+          <a:lstStyle/>
+          <a:p>
+            <a:pPr algn="ctr"/>
+            <a:r>
+              <a:rPr sz="2200" b="1">
+                <a:solidFill>
+                  <a:srgbClr val="5B5BD6"/>
+                </a:solidFill>
+                <a:latin typeface="Apple SD Gothic Neo"/>
+              </a:rPr>
+              <a:t>→</a:t>
+            </a:r>
+          </a:p>
+        </p:txBody>
+      </p:sp>
+      <p:sp>
+        <p:nvSpPr>
+          <p:cNvPr id="11" name="Rounded Rectangle 10"/>
+          <p:cNvSpPr/>
+          <p:nvPr/>
+        </p:nvSpPr>
+        <p:spPr>
+          <a:xfrm>
+            <a:off x="7490307" y="2743200"/>
+            <a:ext cx="1874519" cy="1554480"/>
+          </a:xfrm>
+          <a:prstGeom prst="roundRect">
+            <a:avLst>
+              <a:gd name="adj" fmla="val 16000"/>
+            </a:avLst>
+          </a:prstGeom>
+          <a:solidFill>
+            <a:srgbClr val="5B5BD6"/>
+          </a:solidFill>
+          <a:ln>
+            <a:noFill/>
+          </a:ln>
+          <a:effectLst/>
+        </p:spPr>
+        <p:style>
+          <a:lnRef idx="1">
+            <a:schemeClr val="accent1"/>
+          </a:lnRef>
+          <a:fillRef idx="3">
+            <a:schemeClr val="accent1"/>
+          </a:fillRef>
+          <a:effectRef idx="2">
+            <a:schemeClr val="accent1"/>
+          </a:effectRef>
+          <a:fontRef idx="minor">
+            <a:schemeClr val="lt1"/>
+          </a:fontRef>
+        </p:style>
+        <p:txBody>
+          <a:bodyPr rtlCol="0" anchor="ctr" tIns="76200" bIns="76200" lIns="177800" rIns="177800" wrap="square"/>
+          <a:lstStyle/>
+          <a:p>
+            <a:pPr algn="ctr"/>
+            <a:r>
+              <a:rPr sz="1400" b="1">
+                <a:solidFill>
+                  <a:srgbClr val="FFFFFF"/>
+                </a:solidFill>
+                <a:latin typeface="Menlo"/>
+              </a:rPr>
+              <a:t>domain</a:t>
+            </a:r>
+          </a:p>
+          <a:p>
+            <a:pPr algn="ctr"/>
+            <a:r>
+              <a:rPr sz="1500" b="1">
+                <a:solidFill>
+                  <a:srgbClr val="FFFFFF"/>
+                </a:solidFill>
+                <a:latin typeface="Apple SD Gothic Neo"/>
+              </a:rPr>
+              <a:t>InsuranceApplication</a:t>
+            </a:r>
+          </a:p>
+          <a:p>
+            <a:pPr algn="ctr"/>
+            <a:r>
+              <a:rPr sz="1500" b="1">
+                <a:solidFill>
+                  <a:srgbClr val="FFFFFF"/>
+                </a:solidFill>
+                <a:latin typeface="Apple SD Gothic Neo"/>
+              </a:rPr>
+              <a:t>+ 도메인 규칙</a:t>
+            </a:r>
+          </a:p>
+        </p:txBody>
+      </p:sp>
+      <p:sp>
+        <p:nvSpPr>
+          <p:cNvPr id="12" name="TextBox 11"/>
+          <p:cNvSpPr txBox="1"/>
+          <p:nvPr/>
+        </p:nvSpPr>
+        <p:spPr>
+          <a:xfrm>
+            <a:off x="9273387" y="3337560"/>
+            <a:ext cx="640080" cy="640080"/>
+          </a:xfrm>
+          <a:prstGeom prst="rect">
+            <a:avLst/>
+          </a:prstGeom>
+          <a:noFill/>
+        </p:spPr>
+        <p:txBody>
+          <a:bodyPr wrap="square" anchor="ctr">
+            <a:spAutoFit/>
+          </a:bodyPr>
+          <a:lstStyle/>
+          <a:p>
+            <a:pPr algn="ctr"/>
+            <a:r>
+              <a:rPr sz="2200" b="1">
+                <a:solidFill>
+                  <a:srgbClr val="5B5BD6"/>
+                </a:solidFill>
+                <a:latin typeface="Apple SD Gothic Neo"/>
+              </a:rPr>
+              <a:t>→</a:t>
+            </a:r>
+          </a:p>
+        </p:txBody>
+      </p:sp>
+      <p:sp>
+        <p:nvSpPr>
+          <p:cNvPr id="13" name="Rounded Rectangle 12"/>
+          <p:cNvSpPr/>
+          <p:nvPr/>
+        </p:nvSpPr>
+        <p:spPr>
+          <a:xfrm>
+            <a:off x="9822027" y="2743200"/>
+            <a:ext cx="1874519" cy="1554480"/>
+          </a:xfrm>
+          <a:prstGeom prst="roundRect">
+            <a:avLst>
+              <a:gd name="adj" fmla="val 16000"/>
+            </a:avLst>
+          </a:prstGeom>
+          <a:solidFill>
+            <a:srgbClr val="1F1D3D"/>
+          </a:solidFill>
+          <a:ln>
+            <a:noFill/>
+          </a:ln>
+          <a:effectLst/>
+        </p:spPr>
+        <p:style>
+          <a:lnRef idx="1">
+            <a:schemeClr val="accent1"/>
+          </a:lnRef>
+          <a:fillRef idx="3">
+            <a:schemeClr val="accent1"/>
+          </a:fillRef>
+          <a:effectRef idx="2">
+            <a:schemeClr val="accent1"/>
+          </a:effectRef>
+          <a:fontRef idx="minor">
+            <a:schemeClr val="lt1"/>
+          </a:fontRef>
+        </p:style>
+        <p:txBody>
+          <a:bodyPr rtlCol="0" anchor="ctr" tIns="76200" bIns="76200" lIns="177800" rIns="177800" wrap="square"/>
+          <a:lstStyle/>
+          <a:p>
+            <a:pPr algn="ctr"/>
+            <a:r>
+              <a:rPr sz="1400" b="1">
+                <a:solidFill>
+                  <a:srgbClr val="FFFFFF"/>
+                </a:solidFill>
+                <a:latin typeface="Menlo"/>
+              </a:rPr>
+              <a:t>repository</a:t>
+            </a:r>
+          </a:p>
+          <a:p>
+            <a:pPr algn="ctr"/>
+            <a:r>
+              <a:rPr sz="1500" b="1">
+                <a:solidFill>
+                  <a:srgbClr val="FFFFFF"/>
+                </a:solidFill>
+                <a:latin typeface="Apple SD Gothic Neo"/>
+              </a:rPr>
+              <a:t>저장 · 조회</a:t>
+            </a:r>
+          </a:p>
+        </p:txBody>
+      </p:sp>
+      <p:sp>
+        <p:nvSpPr>
+          <p:cNvPr id="14" name="Rounded Rectangle 13"/>
+          <p:cNvSpPr/>
+          <p:nvPr/>
+        </p:nvSpPr>
+        <p:spPr>
+          <a:xfrm>
+            <a:off x="2895447" y="4709160"/>
+            <a:ext cx="6400800" cy="868680"/>
+          </a:xfrm>
+          <a:prstGeom prst="roundRect">
+            <a:avLst>
+              <a:gd name="adj" fmla="val 12000"/>
+            </a:avLst>
+          </a:prstGeom>
+          <a:solidFill>
+            <a:srgbClr val="F7EDE6"/>
+          </a:solidFill>
+          <a:ln>
+            <a:noFill/>
+          </a:ln>
+          <a:effectLst/>
+        </p:spPr>
+        <p:style>
+          <a:lnRef idx="1">
+            <a:schemeClr val="accent1"/>
+          </a:lnRef>
+          <a:fillRef idx="3">
+            <a:schemeClr val="accent1"/>
+          </a:fillRef>
+          <a:effectRef idx="2">
+            <a:schemeClr val="accent1"/>
+          </a:effectRef>
+          <a:fontRef idx="minor">
+            <a:schemeClr val="lt1"/>
+          </a:fontRef>
+        </p:style>
+        <p:txBody>
+          <a:bodyPr rtlCol="0" anchor="ctr" tIns="76200" bIns="76200" lIns="177800" rIns="177800" wrap="none"/>
+          <a:lstStyle/>
+          <a:p>
+            <a:pPr algn="ctr"/>
+            <a:r>
+              <a:rPr sz="1700" b="1">
+                <a:solidFill>
+                  <a:srgbClr val="1A1A1A"/>
+                </a:solidFill>
+                <a:latin typeface="Apple SD Gothic Neo"/>
+              </a:rPr>
+              <a:t>응답은 </a:t>
+            </a:r>
+            <a:r>
+              <a:rPr sz="1700" b="1">
+                <a:solidFill>
+                  <a:srgbClr val="B5793A"/>
+                </a:solidFill>
+                <a:latin typeface="Menlo"/>
+              </a:rPr>
+              <a:t>DTO</a:t>
+            </a:r>
+            <a:r>
+              <a:rPr sz="1700" b="1">
+                <a:solidFill>
+                  <a:srgbClr val="1A1A1A"/>
+                </a:solidFill>
+                <a:latin typeface="Apple SD Gothic Neo"/>
+              </a:rPr>
+              <a:t>로 변환해 화면으로 (from(entity))</a:t>
+            </a:r>
+          </a:p>
+        </p:txBody>
+      </p:sp>
+      <p:sp>
+        <p:nvSpPr>
+          <p:cNvPr id="15" name="TextBox 14"/>
+          <p:cNvSpPr txBox="1"/>
+          <p:nvPr/>
+        </p:nvSpPr>
+        <p:spPr>
+          <a:xfrm>
+            <a:off x="777240" y="5897880"/>
+            <a:ext cx="10607040" cy="640080"/>
+          </a:xfrm>
+          <a:prstGeom prst="rect">
+            <a:avLst/>
+          </a:prstGeom>
+          <a:noFill/>
+        </p:spPr>
+        <p:txBody>
+          <a:bodyPr wrap="square" anchor="t">
+            <a:spAutoFit/>
+          </a:bodyPr>
+          <a:lstStyle/>
+          <a:p>
+            <a:pPr algn="ctr"/>
+            <a:r>
+              <a:rPr sz="2400" b="1" spc="-40">
+                <a:solidFill>
+                  <a:srgbClr val="1A1A1A"/>
+                </a:solidFill>
+                <a:latin typeface="Apple SD Gothic Neo"/>
+              </a:rPr>
+              <a:t>모든 도메인이 같은 패턴: 화면 → 컨트롤러 → 서비스 → 도메인 → 저장소.</a:t>
+            </a:r>
+          </a:p>
+        </p:txBody>
+      </p:sp>
+    </p:spTree>
+  </p:cSld>
+  <p:clrMapOvr>
+    <a:masterClrMapping/>
+  </p:clrMapOvr>
+</p:sld>
+</file>
+
+<file path=ppt/slides/slide21.xml><?xml version="1.0" encoding="utf-8"?>
+<p:sld xmlns:a="http://schemas.openxmlformats.org/drawingml/2006/main" xmlns:p="http://schemas.openxmlformats.org/presentationml/2006/main" xmlns:r="http://schemas.openxmlformats.org/officeDocument/2006/relationships">
+  <p:cSld>
+    <p:bg>
+      <p:bgPr>
+        <a:solidFill>
+          <a:srgbClr val="FFFFFF"/>
+        </a:solidFill>
+        <a:effectLst/>
+      </p:bgPr>
+    </p:bg>
+    <p:spTree>
+      <p:nvGrpSpPr>
+        <p:cNvPr id="1" name=""/>
+        <p:cNvGrpSpPr/>
+        <p:nvPr/>
+      </p:nvGrpSpPr>
+      <p:grpSpPr/>
+      <p:sp>
+        <p:nvSpPr>
+          <p:cNvPr id="2" name="TextBox 1"/>
+          <p:cNvSpPr txBox="1"/>
+          <p:nvPr/>
+        </p:nvSpPr>
+        <p:spPr>
+          <a:xfrm>
+            <a:off x="749808" y="566928"/>
+            <a:ext cx="10881360" cy="1371600"/>
+          </a:xfrm>
+          <a:prstGeom prst="rect">
+            <a:avLst/>
+          </a:prstGeom>
+          <a:noFill/>
+        </p:spPr>
+        <p:txBody>
+          <a:bodyPr wrap="square" anchor="t">
+            <a:spAutoFit/>
+          </a:bodyPr>
+          <a:lstStyle/>
+          <a:p>
+            <a:pPr algn="l"/>
+            <a:r>
+              <a:rPr sz="5200" b="1" spc="-100">
+                <a:solidFill>
+                  <a:srgbClr val="1A1A1A"/>
+                </a:solidFill>
+                <a:latin typeface="Apple SD Gothic Neo"/>
+              </a:rPr>
+              <a:t>AI를 어떻게 썼나</a:t>
+            </a:r>
+          </a:p>
+        </p:txBody>
+      </p:sp>
+      <p:sp>
+        <p:nvSpPr>
+          <p:cNvPr id="3" name="Rectangle 2"/>
+          <p:cNvSpPr/>
+          <p:nvPr/>
+        </p:nvSpPr>
+        <p:spPr>
+          <a:xfrm>
+            <a:off x="822960" y="1627632"/>
+            <a:ext cx="868680" cy="82296"/>
+          </a:xfrm>
+          <a:prstGeom prst="rect">
+            <a:avLst/>
+          </a:prstGeom>
+          <a:solidFill>
+            <a:srgbClr val="5B5BD6"/>
+          </a:solidFill>
+          <a:ln>
+            <a:noFill/>
+          </a:ln>
+          <a:effectLst/>
+        </p:spPr>
+        <p:style>
+          <a:lnRef idx="1">
+            <a:schemeClr val="accent1"/>
+          </a:lnRef>
+          <a:fillRef idx="3">
+            <a:schemeClr val="accent1"/>
+          </a:fillRef>
+          <a:effectRef idx="2">
+            <a:schemeClr val="accent1"/>
+          </a:effectRef>
+          <a:fontRef idx="minor">
+            <a:schemeClr val="lt1"/>
+          </a:fontRef>
+        </p:style>
+        <p:txBody>
+          <a:bodyPr rtlCol="0" anchor="ctr"/>
+          <a:lstStyle/>
+          <a:p>
+            <a:pPr algn="ctr"/>
+          </a:p>
+        </p:txBody>
+      </p:sp>
+      <p:sp>
+        <p:nvSpPr>
+          <p:cNvPr id="4" name="Rounded Rectangle 3"/>
+          <p:cNvSpPr/>
+          <p:nvPr/>
+        </p:nvSpPr>
+        <p:spPr>
+          <a:xfrm>
+            <a:off x="777240" y="2011680"/>
+            <a:ext cx="5212080" cy="1554480"/>
+          </a:xfrm>
+          <a:prstGeom prst="roundRect">
+            <a:avLst>
+              <a:gd name="adj" fmla="val 12000"/>
+            </a:avLst>
+          </a:prstGeom>
+          <a:solidFill>
+            <a:srgbClr val="ECEBFB"/>
+          </a:solidFill>
+          <a:ln>
+            <a:noFill/>
+          </a:ln>
+          <a:effectLst/>
+        </p:spPr>
+        <p:style>
+          <a:lnRef idx="1">
+            <a:schemeClr val="accent1"/>
+          </a:lnRef>
+          <a:fillRef idx="3">
+            <a:schemeClr val="accent1"/>
+          </a:fillRef>
+          <a:effectRef idx="2">
+            <a:schemeClr val="accent1"/>
+          </a:effectRef>
+          <a:fontRef idx="minor">
+            <a:schemeClr val="lt1"/>
+          </a:fontRef>
+        </p:style>
+        <p:txBody>
+          <a:bodyPr rtlCol="0" anchor="ctr"/>
+          <a:lstStyle/>
+          <a:p>
+            <a:pPr algn="ctr"/>
+          </a:p>
+        </p:txBody>
+      </p:sp>
+      <p:sp>
+        <p:nvSpPr>
+          <p:cNvPr id="5" name="TextBox 4"/>
+          <p:cNvSpPr txBox="1"/>
+          <p:nvPr/>
+        </p:nvSpPr>
+        <p:spPr>
+          <a:xfrm>
+            <a:off x="1097280" y="2194560"/>
+            <a:ext cx="4663440" cy="1280160"/>
+          </a:xfrm>
+          <a:prstGeom prst="rect">
+            <a:avLst/>
+          </a:prstGeom>
+          <a:noFill/>
+        </p:spPr>
+        <p:txBody>
+          <a:bodyPr wrap="square" anchor="ctr">
+            <a:spAutoFit/>
+          </a:bodyPr>
+          <a:lstStyle/>
+          <a:p>
+            <a:pPr algn="l"/>
+            <a:r>
+              <a:rPr sz="2600" b="1">
+                <a:solidFill>
+                  <a:srgbClr val="5B5BD6"/>
+                </a:solidFill>
+                <a:latin typeface="Apple SD Gothic Neo"/>
+              </a:rPr>
+              <a:t>사람</a:t>
+            </a:r>
+          </a:p>
+          <a:p>
+            <a:pPr algn="l"/>
+            <a:r>
+              <a:rPr sz="2200" b="1">
+                <a:solidFill>
+                  <a:srgbClr val="1A1A1A"/>
+                </a:solidFill>
+                <a:latin typeface="Apple SD Gothic Neo"/>
+              </a:rPr>
+              <a:t>설계 · 결정 · 검토</a:t>
+            </a:r>
+          </a:p>
+        </p:txBody>
+      </p:sp>
+      <p:sp>
+        <p:nvSpPr>
+          <p:cNvPr id="6" name="Rounded Rectangle 5"/>
+          <p:cNvSpPr/>
+          <p:nvPr/>
+        </p:nvSpPr>
+        <p:spPr>
+          <a:xfrm>
+            <a:off x="6172200" y="2011680"/>
+            <a:ext cx="5212080" cy="1554480"/>
+          </a:xfrm>
+          <a:prstGeom prst="roundRect">
+            <a:avLst>
+              <a:gd name="adj" fmla="val 12000"/>
+            </a:avLst>
+          </a:prstGeom>
+          <a:solidFill>
+            <a:srgbClr val="F4F4F6"/>
+          </a:solidFill>
+          <a:ln w="12700">
+            <a:solidFill>
+              <a:srgbClr val="E6E6E6"/>
+            </a:solidFill>
+          </a:ln>
+          <a:effectLst/>
+        </p:spPr>
+        <p:style>
+          <a:lnRef idx="1">
+            <a:schemeClr val="accent1"/>
+          </a:lnRef>
+          <a:fillRef idx="3">
+            <a:schemeClr val="accent1"/>
+          </a:fillRef>
+          <a:effectRef idx="2">
+            <a:schemeClr val="accent1"/>
+          </a:effectRef>
+          <a:fontRef idx="minor">
+            <a:schemeClr val="lt1"/>
+          </a:fontRef>
+        </p:style>
+        <p:txBody>
+          <a:bodyPr rtlCol="0" anchor="ctr"/>
+          <a:lstStyle/>
+          <a:p>
+            <a:pPr algn="ctr"/>
+          </a:p>
+        </p:txBody>
+      </p:sp>
+      <p:sp>
+        <p:nvSpPr>
+          <p:cNvPr id="7" name="TextBox 6"/>
+          <p:cNvSpPr txBox="1"/>
+          <p:nvPr/>
+        </p:nvSpPr>
+        <p:spPr>
+          <a:xfrm>
+            <a:off x="6492240" y="2194560"/>
+            <a:ext cx="4663440" cy="1280160"/>
+          </a:xfrm>
+          <a:prstGeom prst="rect">
+            <a:avLst/>
+          </a:prstGeom>
+          <a:noFill/>
+        </p:spPr>
+        <p:txBody>
+          <a:bodyPr wrap="square" anchor="ctr">
+            <a:spAutoFit/>
+          </a:bodyPr>
+          <a:lstStyle/>
+          <a:p>
+            <a:pPr algn="l"/>
+            <a:r>
+              <a:rPr sz="2600" b="1">
+                <a:solidFill>
+                  <a:srgbClr val="1A1A1A"/>
+                </a:solidFill>
+                <a:latin typeface="Apple SD Gothic Neo"/>
+              </a:rPr>
+              <a:t>AI</a:t>
+            </a:r>
+          </a:p>
+          <a:p>
+            <a:pPr algn="l"/>
+            <a:r>
+              <a:rPr sz="2200" b="1">
+                <a:solidFill>
+                  <a:srgbClr val="1A1A1A"/>
+                </a:solidFill>
+                <a:latin typeface="Apple SD Gothic Neo"/>
+              </a:rPr>
+              <a:t>구현 · 테스트 · 정리</a:t>
+            </a:r>
+          </a:p>
+        </p:txBody>
+      </p:sp>
+      <p:sp>
+        <p:nvSpPr>
+          <p:cNvPr id="8" name="Rounded Rectangle 7"/>
+          <p:cNvSpPr/>
+          <p:nvPr/>
+        </p:nvSpPr>
+        <p:spPr>
+          <a:xfrm>
+            <a:off x="412851" y="3977639"/>
+            <a:ext cx="1965960" cy="1097280"/>
+          </a:xfrm>
+          <a:prstGeom prst="roundRect">
+            <a:avLst>
+              <a:gd name="adj" fmla="val 16000"/>
+            </a:avLst>
+          </a:prstGeom>
+          <a:solidFill>
+            <a:srgbClr val="F4F4F6"/>
+          </a:solidFill>
+          <a:ln w="15240">
+            <a:solidFill>
+              <a:srgbClr val="E6E6E6"/>
+            </a:solidFill>
+          </a:ln>
+          <a:effectLst/>
+        </p:spPr>
+        <p:style>
+          <a:lnRef idx="1">
+            <a:schemeClr val="accent1"/>
+          </a:lnRef>
+          <a:fillRef idx="3">
+            <a:schemeClr val="accent1"/>
+          </a:fillRef>
+          <a:effectRef idx="2">
+            <a:schemeClr val="accent1"/>
+          </a:effectRef>
+          <a:fontRef idx="minor">
+            <a:schemeClr val="lt1"/>
+          </a:fontRef>
+        </p:style>
+        <p:txBody>
+          <a:bodyPr rtlCol="0" anchor="ctr" tIns="76200" bIns="76200" lIns="177800" rIns="177800" wrap="square"/>
+          <a:lstStyle/>
+          <a:p>
+            <a:pPr algn="ctr"/>
+            <a:r>
+              <a:rPr sz="2100" b="1">
+                <a:solidFill>
+                  <a:srgbClr val="1A1A1A"/>
+                </a:solidFill>
+                <a:latin typeface="Apple SD Gothic Neo"/>
+              </a:rPr>
+              <a:t>설계</a:t>
+            </a:r>
+          </a:p>
+        </p:txBody>
+      </p:sp>
+      <p:sp>
+        <p:nvSpPr>
+          <p:cNvPr id="9" name="TextBox 8"/>
+          <p:cNvSpPr txBox="1"/>
+          <p:nvPr/>
+        </p:nvSpPr>
+        <p:spPr>
+          <a:xfrm>
+            <a:off x="2378811" y="4206240"/>
+            <a:ext cx="640080" cy="640080"/>
+          </a:xfrm>
+          <a:prstGeom prst="rect">
+            <a:avLst/>
+          </a:prstGeom>
+          <a:noFill/>
+        </p:spPr>
+        <p:txBody>
+          <a:bodyPr wrap="square" anchor="ctr">
+            <a:spAutoFit/>
+          </a:bodyPr>
+          <a:lstStyle/>
+          <a:p>
+            <a:pPr algn="ctr"/>
+            <a:r>
+              <a:rPr sz="2600" b="1">
+                <a:solidFill>
+                  <a:srgbClr val="5B5BD6"/>
+                </a:solidFill>
+                <a:latin typeface="Apple SD Gothic Neo"/>
+              </a:rPr>
+              <a:t>→</a:t>
+            </a:r>
+          </a:p>
+        </p:txBody>
+      </p:sp>
+      <p:sp>
+        <p:nvSpPr>
+          <p:cNvPr id="10" name="Rounded Rectangle 9"/>
+          <p:cNvSpPr/>
+          <p:nvPr/>
+        </p:nvSpPr>
+        <p:spPr>
+          <a:xfrm>
+            <a:off x="2762859" y="3977639"/>
+            <a:ext cx="1965960" cy="1097280"/>
+          </a:xfrm>
+          <a:prstGeom prst="roundRect">
+            <a:avLst>
+              <a:gd name="adj" fmla="val 16000"/>
+            </a:avLst>
+          </a:prstGeom>
+          <a:solidFill>
+            <a:srgbClr val="F4F4F6"/>
+          </a:solidFill>
+          <a:ln w="15240">
+            <a:solidFill>
+              <a:srgbClr val="E6E6E6"/>
+            </a:solidFill>
+          </a:ln>
+          <a:effectLst/>
+        </p:spPr>
+        <p:style>
+          <a:lnRef idx="1">
+            <a:schemeClr val="accent1"/>
+          </a:lnRef>
+          <a:fillRef idx="3">
+            <a:schemeClr val="accent1"/>
+          </a:fillRef>
+          <a:effectRef idx="2">
+            <a:schemeClr val="accent1"/>
+          </a:effectRef>
+          <a:fontRef idx="minor">
+            <a:schemeClr val="lt1"/>
+          </a:fontRef>
+        </p:style>
+        <p:txBody>
+          <a:bodyPr rtlCol="0" anchor="ctr" tIns="76200" bIns="76200" lIns="177800" rIns="177800" wrap="square"/>
+          <a:lstStyle/>
+          <a:p>
+            <a:pPr algn="ctr"/>
+            <a:r>
+              <a:rPr sz="2100" b="1">
+                <a:solidFill>
+                  <a:srgbClr val="1A1A1A"/>
+                </a:solidFill>
+                <a:latin typeface="Apple SD Gothic Neo"/>
+              </a:rPr>
+              <a:t>따져묻기</a:t>
+            </a:r>
+          </a:p>
+        </p:txBody>
+      </p:sp>
+      <p:sp>
+        <p:nvSpPr>
+          <p:cNvPr id="11" name="TextBox 10"/>
+          <p:cNvSpPr txBox="1"/>
+          <p:nvPr/>
+        </p:nvSpPr>
+        <p:spPr>
+          <a:xfrm>
+            <a:off x="4728819" y="4206240"/>
+            <a:ext cx="640080" cy="640080"/>
+          </a:xfrm>
+          <a:prstGeom prst="rect">
+            <a:avLst/>
+          </a:prstGeom>
+          <a:noFill/>
+        </p:spPr>
+        <p:txBody>
+          <a:bodyPr wrap="square" anchor="ctr">
+            <a:spAutoFit/>
+          </a:bodyPr>
+          <a:lstStyle/>
+          <a:p>
+            <a:pPr algn="ctr"/>
+            <a:r>
+              <a:rPr sz="2600" b="1">
+                <a:solidFill>
+                  <a:srgbClr val="5B5BD6"/>
+                </a:solidFill>
+                <a:latin typeface="Apple SD Gothic Neo"/>
+              </a:rPr>
+              <a:t>→</a:t>
+            </a:r>
+          </a:p>
+        </p:txBody>
+      </p:sp>
+      <p:sp>
+        <p:nvSpPr>
+          <p:cNvPr id="12" name="Rounded Rectangle 11"/>
+          <p:cNvSpPr/>
+          <p:nvPr/>
+        </p:nvSpPr>
+        <p:spPr>
+          <a:xfrm>
+            <a:off x="5112867" y="3977639"/>
+            <a:ext cx="1965960" cy="1097280"/>
+          </a:xfrm>
+          <a:prstGeom prst="roundRect">
+            <a:avLst>
+              <a:gd name="adj" fmla="val 16000"/>
+            </a:avLst>
+          </a:prstGeom>
+          <a:solidFill>
+            <a:srgbClr val="F4F4F6"/>
+          </a:solidFill>
+          <a:ln w="15240">
+            <a:solidFill>
+              <a:srgbClr val="E6E6E6"/>
+            </a:solidFill>
+          </a:ln>
+          <a:effectLst/>
+        </p:spPr>
+        <p:style>
+          <a:lnRef idx="1">
+            <a:schemeClr val="accent1"/>
+          </a:lnRef>
+          <a:fillRef idx="3">
+            <a:schemeClr val="accent1"/>
+          </a:fillRef>
+          <a:effectRef idx="2">
+            <a:schemeClr val="accent1"/>
+          </a:effectRef>
+          <a:fontRef idx="minor">
+            <a:schemeClr val="lt1"/>
+          </a:fontRef>
+        </p:style>
+        <p:txBody>
+          <a:bodyPr rtlCol="0" anchor="ctr" tIns="76200" bIns="76200" lIns="177800" rIns="177800" wrap="square"/>
+          <a:lstStyle/>
+          <a:p>
+            <a:pPr algn="ctr"/>
+            <a:r>
+              <a:rPr sz="2100" b="1">
+                <a:solidFill>
+                  <a:srgbClr val="1A1A1A"/>
+                </a:solidFill>
+                <a:latin typeface="Apple SD Gothic Neo"/>
+              </a:rPr>
+              <a:t>계획</a:t>
+            </a:r>
+          </a:p>
+        </p:txBody>
+      </p:sp>
+      <p:sp>
+        <p:nvSpPr>
+          <p:cNvPr id="13" name="TextBox 12"/>
+          <p:cNvSpPr txBox="1"/>
+          <p:nvPr/>
+        </p:nvSpPr>
+        <p:spPr>
+          <a:xfrm>
+            <a:off x="7078827" y="4206240"/>
+            <a:ext cx="640080" cy="640080"/>
+          </a:xfrm>
+          <a:prstGeom prst="rect">
+            <a:avLst/>
+          </a:prstGeom>
+          <a:noFill/>
+        </p:spPr>
+        <p:txBody>
+          <a:bodyPr wrap="square" anchor="ctr">
+            <a:spAutoFit/>
+          </a:bodyPr>
+          <a:lstStyle/>
+          <a:p>
+            <a:pPr algn="ctr"/>
+            <a:r>
+              <a:rPr sz="2600" b="1">
+                <a:solidFill>
+                  <a:srgbClr val="5B5BD6"/>
+                </a:solidFill>
+                <a:latin typeface="Apple SD Gothic Neo"/>
+              </a:rPr>
+              <a:t>→</a:t>
+            </a:r>
+          </a:p>
+        </p:txBody>
+      </p:sp>
+      <p:sp>
+        <p:nvSpPr>
+          <p:cNvPr id="14" name="Rounded Rectangle 13"/>
+          <p:cNvSpPr/>
+          <p:nvPr/>
+        </p:nvSpPr>
+        <p:spPr>
+          <a:xfrm>
+            <a:off x="7462875" y="3977639"/>
+            <a:ext cx="1965960" cy="1097280"/>
+          </a:xfrm>
+          <a:prstGeom prst="roundRect">
+            <a:avLst>
+              <a:gd name="adj" fmla="val 16000"/>
+            </a:avLst>
+          </a:prstGeom>
+          <a:solidFill>
+            <a:srgbClr val="ECEBFB"/>
+          </a:solidFill>
+          <a:ln w="15240">
+            <a:solidFill>
+              <a:srgbClr val="E6E6E6"/>
+            </a:solidFill>
+          </a:ln>
+          <a:effectLst/>
+        </p:spPr>
+        <p:style>
+          <a:lnRef idx="1">
+            <a:schemeClr val="accent1"/>
+          </a:lnRef>
+          <a:fillRef idx="3">
+            <a:schemeClr val="accent1"/>
+          </a:fillRef>
+          <a:effectRef idx="2">
+            <a:schemeClr val="accent1"/>
+          </a:effectRef>
+          <a:fontRef idx="minor">
+            <a:schemeClr val="lt1"/>
+          </a:fontRef>
+        </p:style>
+        <p:txBody>
+          <a:bodyPr rtlCol="0" anchor="ctr" tIns="76200" bIns="76200" lIns="177800" rIns="177800" wrap="square"/>
+          <a:lstStyle/>
+          <a:p>
+            <a:pPr algn="ctr"/>
+            <a:r>
+              <a:rPr sz="2100" b="1">
+                <a:solidFill>
+                  <a:srgbClr val="1A1A1A"/>
+                </a:solidFill>
+                <a:latin typeface="Apple SD Gothic Neo"/>
+              </a:rPr>
+              <a:t>테스트 먼저 구현</a:t>
+            </a:r>
+          </a:p>
+        </p:txBody>
+      </p:sp>
+      <p:sp>
+        <p:nvSpPr>
+          <p:cNvPr id="15" name="TextBox 14"/>
+          <p:cNvSpPr txBox="1"/>
+          <p:nvPr/>
+        </p:nvSpPr>
+        <p:spPr>
+          <a:xfrm>
+            <a:off x="9428835" y="4206240"/>
+            <a:ext cx="640080" cy="640080"/>
+          </a:xfrm>
+          <a:prstGeom prst="rect">
+            <a:avLst/>
+          </a:prstGeom>
+          <a:noFill/>
+        </p:spPr>
+        <p:txBody>
+          <a:bodyPr wrap="square" anchor="ctr">
+            <a:spAutoFit/>
+          </a:bodyPr>
+          <a:lstStyle/>
+          <a:p>
+            <a:pPr algn="ctr"/>
+            <a:r>
+              <a:rPr sz="2600" b="1">
+                <a:solidFill>
+                  <a:srgbClr val="5B5BD6"/>
+                </a:solidFill>
+                <a:latin typeface="Apple SD Gothic Neo"/>
+              </a:rPr>
+              <a:t>→</a:t>
+            </a:r>
+          </a:p>
+        </p:txBody>
+      </p:sp>
+      <p:sp>
+        <p:nvSpPr>
+          <p:cNvPr id="16" name="Rounded Rectangle 15"/>
+          <p:cNvSpPr/>
+          <p:nvPr/>
+        </p:nvSpPr>
+        <p:spPr>
+          <a:xfrm>
+            <a:off x="9812883" y="3977639"/>
+            <a:ext cx="1965960" cy="1097280"/>
+          </a:xfrm>
+          <a:prstGeom prst="roundRect">
+            <a:avLst>
+              <a:gd name="adj" fmla="val 16000"/>
+            </a:avLst>
+          </a:prstGeom>
+          <a:solidFill>
+            <a:srgbClr val="F4F4F6"/>
+          </a:solidFill>
+          <a:ln w="15240">
+            <a:solidFill>
+              <a:srgbClr val="E6E6E6"/>
+            </a:solidFill>
+          </a:ln>
+          <a:effectLst/>
+        </p:spPr>
+        <p:style>
+          <a:lnRef idx="1">
+            <a:schemeClr val="accent1"/>
+          </a:lnRef>
+          <a:fillRef idx="3">
+            <a:schemeClr val="accent1"/>
+          </a:fillRef>
+          <a:effectRef idx="2">
+            <a:schemeClr val="accent1"/>
+          </a:effectRef>
+          <a:fontRef idx="minor">
+            <a:schemeClr val="lt1"/>
+          </a:fontRef>
+        </p:style>
+        <p:txBody>
+          <a:bodyPr rtlCol="0" anchor="ctr" tIns="76200" bIns="76200" lIns="177800" rIns="177800" wrap="square"/>
+          <a:lstStyle/>
+          <a:p>
+            <a:pPr algn="ctr"/>
+            <a:r>
+              <a:rPr sz="2100" b="1">
+                <a:solidFill>
+                  <a:srgbClr val="1A1A1A"/>
+                </a:solidFill>
+                <a:latin typeface="Apple SD Gothic Neo"/>
+              </a:rPr>
+              <a:t>검토</a:t>
+            </a:r>
+          </a:p>
+        </p:txBody>
+      </p:sp>
+      <p:sp>
+        <p:nvSpPr>
+          <p:cNvPr id="17" name="TextBox 16"/>
+          <p:cNvSpPr txBox="1"/>
+          <p:nvPr/>
+        </p:nvSpPr>
+        <p:spPr>
+          <a:xfrm>
+            <a:off x="777240" y="5440680"/>
+            <a:ext cx="10607040" cy="822960"/>
+          </a:xfrm>
+          <a:prstGeom prst="rect">
+            <a:avLst/>
+          </a:prstGeom>
+          <a:noFill/>
+        </p:spPr>
+        <p:txBody>
+          <a:bodyPr wrap="square" anchor="t">
+            <a:spAutoFit/>
+          </a:bodyPr>
+          <a:lstStyle/>
+          <a:p>
+            <a:pPr algn="ctr"/>
+            <a:r>
+              <a:rPr sz="2800" b="1" spc="-40">
+                <a:solidFill>
+                  <a:srgbClr val="1A1A1A"/>
+                </a:solidFill>
+                <a:latin typeface="Apple SD Gothic Neo"/>
+              </a:rPr>
+              <a:t>설계와 결정은 사람이, 구현은 AI가 했다.</a:t>
+            </a:r>
+          </a:p>
+        </p:txBody>
+      </p:sp>
+    </p:spTree>
+  </p:cSld>
+  <p:clrMapOvr>
+    <a:masterClrMapping/>
+  </p:clrMapOvr>
+</p:sld>
+</file>
+
+<file path=ppt/slides/slide22.xml><?xml version="1.0" encoding="utf-8"?>
+<p:sld xmlns:a="http://schemas.openxmlformats.org/drawingml/2006/main" xmlns:p="http://schemas.openxmlformats.org/presentationml/2006/main" xmlns:r="http://schemas.openxmlformats.org/officeDocument/2006/relationships">
+  <p:cSld>
+    <p:bg>
+      <p:bgPr>
+        <a:solidFill>
+          <a:srgbClr val="FFFFFF"/>
+        </a:solidFill>
+        <a:effectLst/>
+      </p:bgPr>
+    </p:bg>
+    <p:spTree>
+      <p:nvGrpSpPr>
+        <p:cNvPr id="1" name=""/>
+        <p:cNvGrpSpPr/>
+        <p:nvPr/>
+      </p:nvGrpSpPr>
+      <p:grpSpPr/>
+      <p:sp>
+        <p:nvSpPr>
+          <p:cNvPr id="2" name="TextBox 1"/>
+          <p:cNvSpPr txBox="1"/>
+          <p:nvPr/>
+        </p:nvSpPr>
+        <p:spPr>
+          <a:xfrm>
+            <a:off x="749808" y="566928"/>
+            <a:ext cx="10881360" cy="1371600"/>
+          </a:xfrm>
+          <a:prstGeom prst="rect">
+            <a:avLst/>
+          </a:prstGeom>
+          <a:noFill/>
+        </p:spPr>
+        <p:txBody>
+          <a:bodyPr wrap="square" anchor="t">
+            <a:spAutoFit/>
+          </a:bodyPr>
+          <a:lstStyle/>
+          <a:p>
+            <a:pPr algn="l"/>
+            <a:r>
+              <a:rPr sz="5200" b="1" spc="-100">
+                <a:solidFill>
+                  <a:srgbClr val="1A1A1A"/>
+                </a:solidFill>
+                <a:latin typeface="Apple SD Gothic Neo"/>
+              </a:rPr>
+              <a:t>AI가 삑사리 난 곳, 어떻게 잡았나</a:t>
+            </a:r>
+          </a:p>
+        </p:txBody>
+      </p:sp>
+      <p:sp>
+        <p:nvSpPr>
+          <p:cNvPr id="3" name="Rectangle 2"/>
+          <p:cNvSpPr/>
+          <p:nvPr/>
+        </p:nvSpPr>
+        <p:spPr>
+          <a:xfrm>
+            <a:off x="822960" y="1627632"/>
+            <a:ext cx="868680" cy="82296"/>
+          </a:xfrm>
+          <a:prstGeom prst="rect">
+            <a:avLst/>
+          </a:prstGeom>
+          <a:solidFill>
+            <a:srgbClr val="5B5BD6"/>
+          </a:solidFill>
+          <a:ln>
+            <a:noFill/>
+          </a:ln>
+          <a:effectLst/>
+        </p:spPr>
+        <p:style>
+          <a:lnRef idx="1">
+            <a:schemeClr val="accent1"/>
+          </a:lnRef>
+          <a:fillRef idx="3">
+            <a:schemeClr val="accent1"/>
+          </a:fillRef>
+          <a:effectRef idx="2">
+            <a:schemeClr val="accent1"/>
+          </a:effectRef>
+          <a:fontRef idx="minor">
+            <a:schemeClr val="lt1"/>
+          </a:fontRef>
+        </p:style>
+        <p:txBody>
+          <a:bodyPr rtlCol="0" anchor="ctr"/>
+          <a:lstStyle/>
+          <a:p>
+            <a:pPr algn="ctr"/>
+          </a:p>
+        </p:txBody>
+      </p:sp>
+      <p:sp>
+        <p:nvSpPr>
+          <p:cNvPr id="4" name="Rounded Rectangle 3"/>
+          <p:cNvSpPr/>
+          <p:nvPr/>
+        </p:nvSpPr>
+        <p:spPr>
+          <a:xfrm>
+            <a:off x="777240" y="2057400"/>
+            <a:ext cx="5212080" cy="1554480"/>
+          </a:xfrm>
+          <a:prstGeom prst="roundRect">
+            <a:avLst>
+              <a:gd name="adj" fmla="val 10000"/>
+            </a:avLst>
+          </a:prstGeom>
+          <a:solidFill>
+            <a:srgbClr val="F4F4F6"/>
+          </a:solidFill>
+          <a:ln w="12700">
+            <a:solidFill>
+              <a:srgbClr val="E6E6E6"/>
+            </a:solidFill>
+          </a:ln>
+          <a:effectLst/>
+        </p:spPr>
+        <p:style>
+          <a:lnRef idx="1">
+            <a:schemeClr val="accent1"/>
+          </a:lnRef>
+          <a:fillRef idx="3">
+            <a:schemeClr val="accent1"/>
+          </a:fillRef>
+          <a:effectRef idx="2">
+            <a:schemeClr val="accent1"/>
+          </a:effectRef>
+          <a:fontRef idx="minor">
+            <a:schemeClr val="lt1"/>
+          </a:fontRef>
+        </p:style>
+        <p:txBody>
+          <a:bodyPr rtlCol="0" anchor="ctr"/>
+          <a:lstStyle/>
+          <a:p>
+            <a:pPr algn="ctr"/>
+          </a:p>
+        </p:txBody>
+      </p:sp>
+      <p:sp>
+        <p:nvSpPr>
+          <p:cNvPr id="5" name="Rectangle 4"/>
+          <p:cNvSpPr/>
+          <p:nvPr/>
+        </p:nvSpPr>
+        <p:spPr>
+          <a:xfrm>
+            <a:off x="777240" y="2286000"/>
+            <a:ext cx="109728" cy="1097280"/>
+          </a:xfrm>
+          <a:prstGeom prst="rect">
+            <a:avLst/>
+          </a:prstGeom>
+          <a:solidFill>
+            <a:srgbClr val="5B5BD6"/>
+          </a:solidFill>
+          <a:ln>
+            <a:noFill/>
+          </a:ln>
+          <a:effectLst/>
+        </p:spPr>
+        <p:style>
+          <a:lnRef idx="1">
+            <a:schemeClr val="accent1"/>
+          </a:lnRef>
+          <a:fillRef idx="3">
+            <a:schemeClr val="accent1"/>
+          </a:fillRef>
+          <a:effectRef idx="2">
+            <a:schemeClr val="accent1"/>
+          </a:effectRef>
+          <a:fontRef idx="minor">
+            <a:schemeClr val="lt1"/>
+          </a:fontRef>
+        </p:style>
+        <p:txBody>
+          <a:bodyPr rtlCol="0" anchor="ctr"/>
+          <a:lstStyle/>
+          <a:p>
+            <a:pPr algn="ctr"/>
+          </a:p>
+        </p:txBody>
+      </p:sp>
+      <p:sp>
+        <p:nvSpPr>
+          <p:cNvPr id="6" name="TextBox 5"/>
+          <p:cNvSpPr txBox="1"/>
+          <p:nvPr/>
+        </p:nvSpPr>
+        <p:spPr>
+          <a:xfrm>
+            <a:off x="1234440" y="2258568"/>
+            <a:ext cx="4572000" cy="1234440"/>
+          </a:xfrm>
+          <a:prstGeom prst="rect">
+            <a:avLst/>
+          </a:prstGeom>
+          <a:noFill/>
+        </p:spPr>
+        <p:txBody>
+          <a:bodyPr wrap="square" anchor="ctr">
+            <a:spAutoFit/>
+          </a:bodyPr>
+          <a:lstStyle/>
+          <a:p>
+            <a:pPr algn="l"/>
+            <a:r>
+              <a:rPr sz="2400" b="1" spc="-30">
+                <a:solidFill>
+                  <a:srgbClr val="1A1A1A"/>
+                </a:solidFill>
+                <a:latin typeface="Apple SD Gothic Neo"/>
+              </a:rPr>
+              <a:t>성급하게 쪼갬</a:t>
+            </a:r>
+          </a:p>
+          <a:p>
+            <a:pPr algn="l"/>
+            <a:r>
+              <a:rPr sz="1900" b="1" spc="-30">
+                <a:solidFill>
+                  <a:srgbClr val="6B7280"/>
+                </a:solidFill>
+                <a:latin typeface="Apple SD Gothic Neo"/>
+              </a:rPr>
+              <a:t>쓸모없는 계층 분리 → 되돌림</a:t>
+            </a:r>
+          </a:p>
+        </p:txBody>
+      </p:sp>
+      <p:sp>
+        <p:nvSpPr>
+          <p:cNvPr id="7" name="Rounded Rectangle 6"/>
+          <p:cNvSpPr/>
+          <p:nvPr/>
+        </p:nvSpPr>
+        <p:spPr>
+          <a:xfrm>
+            <a:off x="6172200" y="2057400"/>
+            <a:ext cx="5212080" cy="1554480"/>
+          </a:xfrm>
+          <a:prstGeom prst="roundRect">
+            <a:avLst>
+              <a:gd name="adj" fmla="val 10000"/>
+            </a:avLst>
+          </a:prstGeom>
+          <a:solidFill>
+            <a:srgbClr val="F4F4F6"/>
+          </a:solidFill>
+          <a:ln w="12700">
+            <a:solidFill>
+              <a:srgbClr val="E6E6E6"/>
+            </a:solidFill>
+          </a:ln>
+          <a:effectLst/>
+        </p:spPr>
+        <p:style>
+          <a:lnRef idx="1">
+            <a:schemeClr val="accent1"/>
+          </a:lnRef>
+          <a:fillRef idx="3">
+            <a:schemeClr val="accent1"/>
+          </a:fillRef>
+          <a:effectRef idx="2">
+            <a:schemeClr val="accent1"/>
+          </a:effectRef>
+          <a:fontRef idx="minor">
+            <a:schemeClr val="lt1"/>
+          </a:fontRef>
+        </p:style>
+        <p:txBody>
+          <a:bodyPr rtlCol="0" anchor="ctr"/>
+          <a:lstStyle/>
+          <a:p>
+            <a:pPr algn="ctr"/>
+          </a:p>
+        </p:txBody>
+      </p:sp>
+      <p:sp>
+        <p:nvSpPr>
+          <p:cNvPr id="8" name="Rectangle 7"/>
+          <p:cNvSpPr/>
+          <p:nvPr/>
+        </p:nvSpPr>
+        <p:spPr>
+          <a:xfrm>
+            <a:off x="6172200" y="2286000"/>
+            <a:ext cx="109728" cy="1097280"/>
+          </a:xfrm>
+          <a:prstGeom prst="rect">
+            <a:avLst/>
+          </a:prstGeom>
+          <a:solidFill>
+            <a:srgbClr val="5B5BD6"/>
+          </a:solidFill>
+          <a:ln>
+            <a:noFill/>
+          </a:ln>
+          <a:effectLst/>
+        </p:spPr>
+        <p:style>
+          <a:lnRef idx="1">
+            <a:schemeClr val="accent1"/>
+          </a:lnRef>
+          <a:fillRef idx="3">
+            <a:schemeClr val="accent1"/>
+          </a:fillRef>
+          <a:effectRef idx="2">
+            <a:schemeClr val="accent1"/>
+          </a:effectRef>
+          <a:fontRef idx="minor">
+            <a:schemeClr val="lt1"/>
+          </a:fontRef>
+        </p:style>
+        <p:txBody>
+          <a:bodyPr rtlCol="0" anchor="ctr"/>
+          <a:lstStyle/>
+          <a:p>
+            <a:pPr algn="ctr"/>
+          </a:p>
+        </p:txBody>
+      </p:sp>
+      <p:sp>
+        <p:nvSpPr>
+          <p:cNvPr id="9" name="TextBox 8"/>
+          <p:cNvSpPr txBox="1"/>
+          <p:nvPr/>
+        </p:nvSpPr>
+        <p:spPr>
+          <a:xfrm>
+            <a:off x="6629400" y="2258568"/>
+            <a:ext cx="4572000" cy="1234440"/>
+          </a:xfrm>
+          <a:prstGeom prst="rect">
+            <a:avLst/>
+          </a:prstGeom>
+          <a:noFill/>
+        </p:spPr>
+        <p:txBody>
+          <a:bodyPr wrap="square" anchor="ctr">
+            <a:spAutoFit/>
+          </a:bodyPr>
+          <a:lstStyle/>
+          <a:p>
+            <a:pPr algn="l"/>
+            <a:r>
+              <a:rPr sz="2400" b="1" spc="-30">
+                <a:solidFill>
+                  <a:srgbClr val="1A1A1A"/>
+                </a:solidFill>
+                <a:latin typeface="Apple SD Gothic Neo"/>
+              </a:rPr>
+              <a:t>시킨 것과 다름</a:t>
+            </a:r>
+          </a:p>
+          <a:p>
+            <a:pPr algn="l"/>
+            <a:r>
+              <a:rPr sz="1900" b="1" spc="-30">
+                <a:solidFill>
+                  <a:srgbClr val="6B7280"/>
+                </a:solidFill>
+                <a:latin typeface="Apple SD Gothic Neo"/>
+              </a:rPr>
+              <a:t>자동 배정 → 수동 배정으로 정정</a:t>
+            </a:r>
+          </a:p>
+        </p:txBody>
+      </p:sp>
+      <p:sp>
+        <p:nvSpPr>
+          <p:cNvPr id="10" name="Rounded Rectangle 9"/>
+          <p:cNvSpPr/>
+          <p:nvPr/>
+        </p:nvSpPr>
+        <p:spPr>
+          <a:xfrm>
+            <a:off x="777240" y="3794760"/>
+            <a:ext cx="5212080" cy="1554480"/>
+          </a:xfrm>
+          <a:prstGeom prst="roundRect">
+            <a:avLst>
+              <a:gd name="adj" fmla="val 10000"/>
+            </a:avLst>
+          </a:prstGeom>
+          <a:solidFill>
+            <a:srgbClr val="F4F4F6"/>
+          </a:solidFill>
+          <a:ln w="12700">
+            <a:solidFill>
+              <a:srgbClr val="E6E6E6"/>
+            </a:solidFill>
+          </a:ln>
+          <a:effectLst/>
+        </p:spPr>
+        <p:style>
+          <a:lnRef idx="1">
+            <a:schemeClr val="accent1"/>
+          </a:lnRef>
+          <a:fillRef idx="3">
+            <a:schemeClr val="accent1"/>
+          </a:fillRef>
+          <a:effectRef idx="2">
+            <a:schemeClr val="accent1"/>
+          </a:effectRef>
+          <a:fontRef idx="minor">
+            <a:schemeClr val="lt1"/>
+          </a:fontRef>
+        </p:style>
+        <p:txBody>
+          <a:bodyPr rtlCol="0" anchor="ctr"/>
+          <a:lstStyle/>
+          <a:p>
+            <a:pPr algn="ctr"/>
+          </a:p>
+        </p:txBody>
+      </p:sp>
+      <p:sp>
+        <p:nvSpPr>
+          <p:cNvPr id="11" name="Rectangle 10"/>
+          <p:cNvSpPr/>
+          <p:nvPr/>
+        </p:nvSpPr>
+        <p:spPr>
+          <a:xfrm>
+            <a:off x="777240" y="4023360"/>
+            <a:ext cx="109728" cy="1097280"/>
+          </a:xfrm>
+          <a:prstGeom prst="rect">
+            <a:avLst/>
+          </a:prstGeom>
+          <a:solidFill>
+            <a:srgbClr val="5B5BD6"/>
+          </a:solidFill>
+          <a:ln>
+            <a:noFill/>
+          </a:ln>
+          <a:effectLst/>
+        </p:spPr>
+        <p:style>
+          <a:lnRef idx="1">
+            <a:schemeClr val="accent1"/>
+          </a:lnRef>
+          <a:fillRef idx="3">
+            <a:schemeClr val="accent1"/>
+          </a:fillRef>
+          <a:effectRef idx="2">
+            <a:schemeClr val="accent1"/>
+          </a:effectRef>
+          <a:fontRef idx="minor">
+            <a:schemeClr val="lt1"/>
+          </a:fontRef>
+        </p:style>
+        <p:txBody>
+          <a:bodyPr rtlCol="0" anchor="ctr"/>
+          <a:lstStyle/>
+          <a:p>
+            <a:pPr algn="ctr"/>
+          </a:p>
+        </p:txBody>
+      </p:sp>
+      <p:sp>
+        <p:nvSpPr>
+          <p:cNvPr id="12" name="TextBox 11"/>
+          <p:cNvSpPr txBox="1"/>
+          <p:nvPr/>
+        </p:nvSpPr>
+        <p:spPr>
+          <a:xfrm>
+            <a:off x="1234440" y="3995928"/>
+            <a:ext cx="4572000" cy="1234440"/>
+          </a:xfrm>
+          <a:prstGeom prst="rect">
+            <a:avLst/>
+          </a:prstGeom>
+          <a:noFill/>
+        </p:spPr>
+        <p:txBody>
+          <a:bodyPr wrap="square" anchor="ctr">
+            <a:spAutoFit/>
+          </a:bodyPr>
+          <a:lstStyle/>
+          <a:p>
+            <a:pPr algn="l"/>
+            <a:r>
+              <a:rPr sz="2400" b="1" spc="-30">
+                <a:solidFill>
+                  <a:srgbClr val="1A1A1A"/>
+                </a:solidFill>
+                <a:latin typeface="Apple SD Gothic Neo"/>
+              </a:rPr>
+              <a:t>정해둔 틀에서 이탈</a:t>
+            </a:r>
+          </a:p>
+          <a:p>
+            <a:pPr algn="l"/>
+            <a:r>
+              <a:rPr sz="1900" b="1" spc="-30">
+                <a:solidFill>
+                  <a:srgbClr val="6B7280"/>
+                </a:solidFill>
+                <a:latin typeface="Apple SD Gothic Neo"/>
+              </a:rPr>
+              <a:t>점검으로 찾아내 관리</a:t>
+            </a:r>
+          </a:p>
+        </p:txBody>
+      </p:sp>
+      <p:sp>
+        <p:nvSpPr>
+          <p:cNvPr id="13" name="Rounded Rectangle 12"/>
+          <p:cNvSpPr/>
+          <p:nvPr/>
+        </p:nvSpPr>
+        <p:spPr>
+          <a:xfrm>
+            <a:off x="6172200" y="3794760"/>
+            <a:ext cx="5212080" cy="1554480"/>
+          </a:xfrm>
+          <a:prstGeom prst="roundRect">
+            <a:avLst>
+              <a:gd name="adj" fmla="val 10000"/>
+            </a:avLst>
+          </a:prstGeom>
+          <a:solidFill>
+            <a:srgbClr val="F4F4F6"/>
+          </a:solidFill>
+          <a:ln w="12700">
+            <a:solidFill>
+              <a:srgbClr val="E6E6E6"/>
+            </a:solidFill>
+          </a:ln>
+          <a:effectLst/>
+        </p:spPr>
+        <p:style>
+          <a:lnRef idx="1">
+            <a:schemeClr val="accent1"/>
+          </a:lnRef>
+          <a:fillRef idx="3">
+            <a:schemeClr val="accent1"/>
+          </a:fillRef>
+          <a:effectRef idx="2">
+            <a:schemeClr val="accent1"/>
+          </a:effectRef>
+          <a:fontRef idx="minor">
+            <a:schemeClr val="lt1"/>
+          </a:fontRef>
+        </p:style>
+        <p:txBody>
+          <a:bodyPr rtlCol="0" anchor="ctr"/>
+          <a:lstStyle/>
+          <a:p>
+            <a:pPr algn="ctr"/>
+          </a:p>
+        </p:txBody>
+      </p:sp>
+      <p:sp>
+        <p:nvSpPr>
+          <p:cNvPr id="14" name="Rectangle 13"/>
+          <p:cNvSpPr/>
+          <p:nvPr/>
+        </p:nvSpPr>
+        <p:spPr>
+          <a:xfrm>
+            <a:off x="6172200" y="4023360"/>
+            <a:ext cx="109728" cy="1097280"/>
+          </a:xfrm>
+          <a:prstGeom prst="rect">
+            <a:avLst/>
+          </a:prstGeom>
+          <a:solidFill>
+            <a:srgbClr val="5B5BD6"/>
+          </a:solidFill>
+          <a:ln>
+            <a:noFill/>
+          </a:ln>
+          <a:effectLst/>
+        </p:spPr>
+        <p:style>
+          <a:lnRef idx="1">
+            <a:schemeClr val="accent1"/>
+          </a:lnRef>
+          <a:fillRef idx="3">
+            <a:schemeClr val="accent1"/>
+          </a:fillRef>
+          <a:effectRef idx="2">
+            <a:schemeClr val="accent1"/>
+          </a:effectRef>
+          <a:fontRef idx="minor">
+            <a:schemeClr val="lt1"/>
+          </a:fontRef>
+        </p:style>
+        <p:txBody>
+          <a:bodyPr rtlCol="0" anchor="ctr"/>
+          <a:lstStyle/>
+          <a:p>
+            <a:pPr algn="ctr"/>
+          </a:p>
+        </p:txBody>
+      </p:sp>
+      <p:sp>
+        <p:nvSpPr>
+          <p:cNvPr id="15" name="TextBox 14"/>
+          <p:cNvSpPr txBox="1"/>
+          <p:nvPr/>
+        </p:nvSpPr>
+        <p:spPr>
+          <a:xfrm>
+            <a:off x="6629400" y="3995928"/>
+            <a:ext cx="4572000" cy="1234440"/>
+          </a:xfrm>
+          <a:prstGeom prst="rect">
+            <a:avLst/>
+          </a:prstGeom>
+          <a:noFill/>
+        </p:spPr>
+        <p:txBody>
+          <a:bodyPr wrap="square" anchor="ctr">
+            <a:spAutoFit/>
+          </a:bodyPr>
+          <a:lstStyle/>
+          <a:p>
+            <a:pPr algn="l"/>
+            <a:r>
+              <a:rPr sz="2400" b="1" spc="-30">
+                <a:solidFill>
+                  <a:srgbClr val="1A1A1A"/>
+                </a:solidFill>
+                <a:latin typeface="Apple SD Gothic Neo"/>
+              </a:rPr>
+              <a:t>용어를 섞어 씀</a:t>
+            </a:r>
+          </a:p>
+          <a:p>
+            <a:pPr algn="l"/>
+            <a:r>
+              <a:rPr sz="1900" b="1" spc="-30">
+                <a:solidFill>
+                  <a:srgbClr val="6B7280"/>
+                </a:solidFill>
+                <a:latin typeface="Apple SD Gothic Neo"/>
+              </a:rPr>
+              <a:t>용어집으로 미리 차단</a:t>
+            </a:r>
+          </a:p>
+        </p:txBody>
+      </p:sp>
+      <p:sp>
+        <p:nvSpPr>
+          <p:cNvPr id="16" name="TextBox 15"/>
+          <p:cNvSpPr txBox="1"/>
+          <p:nvPr/>
+        </p:nvSpPr>
+        <p:spPr>
+          <a:xfrm>
+            <a:off x="777240" y="5623560"/>
+            <a:ext cx="10607040" cy="822960"/>
+          </a:xfrm>
+          <a:prstGeom prst="rect">
+            <a:avLst/>
+          </a:prstGeom>
+          <a:noFill/>
+        </p:spPr>
+        <p:txBody>
+          <a:bodyPr wrap="square" anchor="t">
+            <a:spAutoFit/>
+          </a:bodyPr>
+          <a:lstStyle/>
+          <a:p>
+            <a:pPr algn="ctr"/>
+            <a:r>
+              <a:rPr sz="2800" b="1" spc="-40">
+                <a:solidFill>
+                  <a:srgbClr val="1A1A1A"/>
+                </a:solidFill>
+                <a:latin typeface="Apple SD Gothic Neo"/>
+              </a:rPr>
+              <a:t>AI는 빠르지만, 방향은 사람이 잡았다.</a:t>
+            </a:r>
+          </a:p>
+        </p:txBody>
+      </p:sp>
+    </p:spTree>
+  </p:cSld>
+  <p:clrMapOvr>
+    <a:masterClrMapping/>
+  </p:clrMapOvr>
+</p:sld>
+</file>
+
+<file path=ppt/slides/slide23.xml><?xml version="1.0" encoding="utf-8"?>
 <p:sld xmlns:a="http://schemas.openxmlformats.org/drawingml/2006/main" xmlns:p="http://schemas.openxmlformats.org/presentationml/2006/main" xmlns:r="http://schemas.openxmlformats.org/officeDocument/2006/relationships">
   <p:cSld>
     <p:bg>

--- a/docs/presentation/보험발표-figma.pptx
+++ b/docs/presentation/보험발표-figma.pptx
@@ -28,6 +28,11 @@
     <p:sldId id="276" r:id="rId27"/>
     <p:sldId id="277" r:id="rId28"/>
     <p:sldId id="278" r:id="rId29"/>
+    <p:sldId id="279" r:id="rId30"/>
+    <p:sldId id="280" r:id="rId31"/>
+    <p:sldId id="281" r:id="rId32"/>
+    <p:sldId id="282" r:id="rId33"/>
+    <p:sldId id="283" r:id="rId34"/>
   </p:sldIdLst>
   <p:sldSz cx="12191695" cy="6858000" type="screen4x3"/>
   <p:notesSz cx="6858000" cy="9144000"/>
@@ -5568,7 +5573,7 @@
         </p:nvSpPr>
         <p:spPr>
           <a:xfrm>
-            <a:off x="777240" y="1783080"/>
+            <a:off x="777240" y="1828800"/>
             <a:ext cx="5394960" cy="457200"/>
           </a:xfrm>
           <a:prstGeom prst="rect">
@@ -5584,7 +5589,7 @@
           <a:p>
             <a:pPr algn="l"/>
             <a:r>
-              <a:rPr sz="2100" b="1" spc="-30">
+              <a:rPr sz="2200" b="1" spc="-30">
                 <a:solidFill>
                   <a:srgbClr val="5B5BD6"/>
                 </a:solidFill>
@@ -5603,8 +5608,8 @@
         </p:nvSpPr>
         <p:spPr>
           <a:xfrm>
-            <a:off x="1280160" y="2286000"/>
-            <a:ext cx="4389120" cy="603504"/>
+            <a:off x="1691640" y="2377440"/>
+            <a:ext cx="3566160" cy="512064"/>
           </a:xfrm>
           <a:prstGeom prst="roundRect">
             <a:avLst>
@@ -5639,24 +5644,15 @@
           <a:bodyPr rtlCol="0" anchor="ctr" tIns="76200" bIns="76200" lIns="177800" rIns="177800" wrap="none"/>
           <a:lstStyle/>
           <a:p>
-            <a:pPr algn="l"/>
-            <a:r>
-              <a:rPr sz="1700" b="1">
+            <a:pPr algn="ctr"/>
+            <a:r>
+              <a:rPr sz="1800" b="1">
                 <a:solidFill>
                   <a:srgbClr val="1A1A1A"/>
                 </a:solidFill>
                 <a:latin typeface="Menlo"/>
               </a:rPr>
-              <a:t>web   </a:t>
-            </a:r>
-            <a:r>
-              <a:rPr sz="1500" b="0">
-                <a:solidFill>
-                  <a:srgbClr val="6B7280"/>
-                </a:solidFill>
-                <a:latin typeface="Apple SD Gothic Neo"/>
-              </a:rPr>
-              <a:t>Controller · DTO — 요청/응답</a:t>
+              <a:t>controller</a:t>
             </a:r>
           </a:p>
         </p:txBody>
@@ -5670,7 +5666,7 @@
         <p:spPr>
           <a:xfrm>
             <a:off x="3063240" y="2834640"/>
-            <a:ext cx="822960" cy="320040"/>
+            <a:ext cx="822960" cy="292608"/>
           </a:xfrm>
           <a:prstGeom prst="rect">
             <a:avLst/>
@@ -5685,7 +5681,7 @@
           <a:p>
             <a:pPr algn="ctr"/>
             <a:r>
-              <a:rPr sz="2000" b="1">
+              <a:rPr sz="1800" b="1">
                 <a:solidFill>
                   <a:srgbClr val="6B7280"/>
                 </a:solidFill>
@@ -5704,8 +5700,8 @@
         </p:nvSpPr>
         <p:spPr>
           <a:xfrm>
-            <a:off x="1280160" y="3090672"/>
-            <a:ext cx="4389120" cy="603504"/>
+            <a:off x="1691640" y="3017520"/>
+            <a:ext cx="3566160" cy="512064"/>
           </a:xfrm>
           <a:prstGeom prst="roundRect">
             <a:avLst>
@@ -5740,24 +5736,15 @@
           <a:bodyPr rtlCol="0" anchor="ctr" tIns="76200" bIns="76200" lIns="177800" rIns="177800" wrap="none"/>
           <a:lstStyle/>
           <a:p>
-            <a:pPr algn="l"/>
-            <a:r>
-              <a:rPr sz="1700" b="1">
+            <a:pPr algn="ctr"/>
+            <a:r>
+              <a:rPr sz="1800" b="1">
                 <a:solidFill>
                   <a:srgbClr val="1A1A1A"/>
                 </a:solidFill>
                 <a:latin typeface="Menlo"/>
               </a:rPr>
-              <a:t>service   </a:t>
-            </a:r>
-            <a:r>
-              <a:rPr sz="1500" b="0">
-                <a:solidFill>
-                  <a:srgbClr val="6B7280"/>
-                </a:solidFill>
-                <a:latin typeface="Apple SD Gothic Neo"/>
-              </a:rPr>
-              <a:t>업무 흐름 · 규칙 조합</a:t>
+              <a:t>service</a:t>
             </a:r>
           </a:p>
         </p:txBody>
@@ -5770,8 +5757,8 @@
         </p:nvSpPr>
         <p:spPr>
           <a:xfrm>
-            <a:off x="3063240" y="3639312"/>
-            <a:ext cx="822960" cy="320040"/>
+            <a:off x="3063240" y="3474720"/>
+            <a:ext cx="822960" cy="292608"/>
           </a:xfrm>
           <a:prstGeom prst="rect">
             <a:avLst/>
@@ -5786,7 +5773,7 @@
           <a:p>
             <a:pPr algn="ctr"/>
             <a:r>
-              <a:rPr sz="2000" b="1">
+              <a:rPr sz="1800" b="1">
                 <a:solidFill>
                   <a:srgbClr val="6B7280"/>
                 </a:solidFill>
@@ -5805,8 +5792,8 @@
         </p:nvSpPr>
         <p:spPr>
           <a:xfrm>
-            <a:off x="1280160" y="3895344"/>
-            <a:ext cx="4389120" cy="603504"/>
+            <a:off x="1691640" y="3657600"/>
+            <a:ext cx="3566160" cy="512064"/>
           </a:xfrm>
           <a:prstGeom prst="roundRect">
             <a:avLst>
@@ -5841,24 +5828,15 @@
           <a:bodyPr rtlCol="0" anchor="ctr" tIns="76200" bIns="76200" lIns="177800" rIns="177800" wrap="none"/>
           <a:lstStyle/>
           <a:p>
-            <a:pPr algn="l"/>
-            <a:r>
-              <a:rPr sz="1700" b="1">
-                <a:solidFill>
-                  <a:srgbClr val="5B5BD6"/>
+            <a:pPr algn="ctr"/>
+            <a:r>
+              <a:rPr sz="1800" b="1">
+                <a:solidFill>
+                  <a:srgbClr val="1A1A1A"/>
                 </a:solidFill>
                 <a:latin typeface="Menlo"/>
               </a:rPr>
-              <a:t>domain   </a:t>
-            </a:r>
-            <a:r>
-              <a:rPr sz="1500" b="0">
-                <a:solidFill>
-                  <a:srgbClr val="6B7280"/>
-                </a:solidFill>
-                <a:latin typeface="Apple SD Gothic Neo"/>
-              </a:rPr>
-              <a:t>엔티티 · 도메인 규칙</a:t>
+              <a:t>domain</a:t>
             </a:r>
           </a:p>
         </p:txBody>
@@ -5871,8 +5849,8 @@
         </p:nvSpPr>
         <p:spPr>
           <a:xfrm>
-            <a:off x="3063240" y="4443983"/>
-            <a:ext cx="822960" cy="320040"/>
+            <a:off x="3063240" y="4114800"/>
+            <a:ext cx="822960" cy="292608"/>
           </a:xfrm>
           <a:prstGeom prst="rect">
             <a:avLst/>
@@ -5887,7 +5865,7 @@
           <a:p>
             <a:pPr algn="ctr"/>
             <a:r>
-              <a:rPr sz="2000" b="1">
+              <a:rPr sz="1800" b="1">
                 <a:solidFill>
                   <a:srgbClr val="6B7280"/>
                 </a:solidFill>
@@ -5906,8 +5884,8 @@
         </p:nvSpPr>
         <p:spPr>
           <a:xfrm>
-            <a:off x="1280160" y="4700016"/>
-            <a:ext cx="4389120" cy="603504"/>
+            <a:off x="1691640" y="4297680"/>
+            <a:ext cx="3566160" cy="512064"/>
           </a:xfrm>
           <a:prstGeom prst="roundRect">
             <a:avLst>
@@ -5942,24 +5920,15 @@
           <a:bodyPr rtlCol="0" anchor="ctr" tIns="76200" bIns="76200" lIns="177800" rIns="177800" wrap="none"/>
           <a:lstStyle/>
           <a:p>
-            <a:pPr algn="l"/>
-            <a:r>
-              <a:rPr sz="1700" b="1">
+            <a:pPr algn="ctr"/>
+            <a:r>
+              <a:rPr sz="1800" b="1">
                 <a:solidFill>
                   <a:srgbClr val="1A1A1A"/>
                 </a:solidFill>
                 <a:latin typeface="Menlo"/>
               </a:rPr>
-              <a:t>repository   </a:t>
-            </a:r>
-            <a:r>
-              <a:rPr sz="1500" b="0">
-                <a:solidFill>
-                  <a:srgbClr val="6B7280"/>
-                </a:solidFill>
-                <a:latin typeface="Apple SD Gothic Neo"/>
-              </a:rPr>
-              <a:t>JPA 저장 · 조회</a:t>
+              <a:t>repository</a:t>
             </a:r>
           </a:p>
         </p:txBody>
@@ -5972,8 +5941,8 @@
         </p:nvSpPr>
         <p:spPr>
           <a:xfrm>
-            <a:off x="1280160" y="5468112"/>
-            <a:ext cx="5029200" cy="548640"/>
+            <a:off x="3063240" y="4754880"/>
+            <a:ext cx="822960" cy="292608"/>
           </a:xfrm>
           <a:prstGeom prst="rect">
             <a:avLst/>
@@ -5981,69 +5950,34 @@
           <a:noFill/>
         </p:spPr>
         <p:txBody>
-          <a:bodyPr wrap="none" anchor="t">
+          <a:bodyPr wrap="square" anchor="ctr">
             <a:spAutoFit/>
           </a:bodyPr>
           <a:lstStyle/>
           <a:p>
-            <a:pPr algn="l"/>
-            <a:r>
-              <a:rPr sz="1100" b="0" spc="-30">
+            <a:pPr algn="ctr"/>
+            <a:r>
+              <a:rPr sz="1800" b="1">
                 <a:solidFill>
                   <a:srgbClr val="6B7280"/>
                 </a:solidFill>
-                <a:latin typeface="Menlo"/>
-              </a:rPr>
-              <a:t>domain = user·product·contract·claim·review·application</a:t>
-            </a:r>
-          </a:p>
-        </p:txBody>
-      </p:sp>
-      <p:sp>
-        <p:nvSpPr>
-          <p:cNvPr id="13" name="TextBox 12"/>
-          <p:cNvSpPr txBox="1"/>
-          <p:nvPr/>
-        </p:nvSpPr>
-        <p:spPr>
-          <a:xfrm>
-            <a:off x="6446520" y="1783080"/>
-            <a:ext cx="5029200" cy="457200"/>
-          </a:xfrm>
-          <a:prstGeom prst="rect">
-            <a:avLst/>
-          </a:prstGeom>
-          <a:noFill/>
-        </p:spPr>
-        <p:txBody>
-          <a:bodyPr wrap="square" anchor="t">
-            <a:spAutoFit/>
-          </a:bodyPr>
-          <a:lstStyle/>
-          <a:p>
-            <a:pPr algn="l"/>
-            <a:r>
-              <a:rPr sz="2100" b="1" spc="-30">
-                <a:solidFill>
-                  <a:srgbClr val="B5793A"/>
-                </a:solidFill>
-                <a:latin typeface="Apple SD Gothic Neo"/>
-              </a:rPr>
-              <a:t>프론트 · React — 기능형</a:t>
-            </a:r>
-          </a:p>
-        </p:txBody>
-      </p:sp>
-      <p:sp>
-        <p:nvSpPr>
-          <p:cNvPr id="14" name="Rounded Rectangle 13"/>
+                <a:latin typeface="Apple SD Gothic Neo"/>
+              </a:rPr>
+              <a:t>↓</a:t>
+            </a:r>
+          </a:p>
+        </p:txBody>
+      </p:sp>
+      <p:sp>
+        <p:nvSpPr>
+          <p:cNvPr id="13" name="Rounded Rectangle 12"/>
           <p:cNvSpPr/>
           <p:nvPr/>
         </p:nvSpPr>
         <p:spPr>
           <a:xfrm>
-            <a:off x="6446520" y="2331720"/>
-            <a:ext cx="5029200" cy="658368"/>
+            <a:off x="1691640" y="4937760"/>
+            <a:ext cx="3566160" cy="512064"/>
           </a:xfrm>
           <a:prstGeom prst="roundRect">
             <a:avLst>
@@ -6051,7 +5985,7 @@
             </a:avLst>
           </a:prstGeom>
           <a:solidFill>
-            <a:srgbClr val="F7EDE6"/>
+            <a:srgbClr val="5B5BD6"/>
           </a:solidFill>
           <a:ln w="15240">
             <a:solidFill>
@@ -6078,38 +6012,99 @@
           <a:bodyPr rtlCol="0" anchor="ctr" tIns="76200" bIns="76200" lIns="177800" rIns="177800" wrap="none"/>
           <a:lstStyle/>
           <a:p>
+            <a:pPr algn="ctr"/>
+            <a:r>
+              <a:rPr sz="1800" b="1">
+                <a:solidFill>
+                  <a:srgbClr val="FFFFFF"/>
+                </a:solidFill>
+                <a:latin typeface="Menlo"/>
+              </a:rPr>
+              <a:t>DB</a:t>
+            </a:r>
+          </a:p>
+        </p:txBody>
+      </p:sp>
+      <p:sp>
+        <p:nvSpPr>
+          <p:cNvPr id="14" name="TextBox 13"/>
+          <p:cNvSpPr txBox="1"/>
+          <p:nvPr/>
+        </p:nvSpPr>
+        <p:spPr>
+          <a:xfrm>
+            <a:off x="777240" y="5577840"/>
+            <a:ext cx="5394960" cy="411480"/>
+          </a:xfrm>
+          <a:prstGeom prst="rect">
+            <a:avLst/>
+          </a:prstGeom>
+          <a:noFill/>
+        </p:spPr>
+        <p:txBody>
+          <a:bodyPr wrap="none" anchor="t">
+            <a:spAutoFit/>
+          </a:bodyPr>
+          <a:lstStyle/>
+          <a:p>
             <a:pPr algn="l"/>
             <a:r>
-              <a:rPr sz="1700" b="1">
-                <a:solidFill>
-                  <a:srgbClr val="1A1A1A"/>
+              <a:rPr sz="1400" b="0" spc="-20">
+                <a:solidFill>
+                  <a:srgbClr val="6B7280"/>
                 </a:solidFill>
                 <a:latin typeface="Menlo"/>
               </a:rPr>
-              <a:t>app   </a:t>
-            </a:r>
-            <a:r>
-              <a:rPr sz="1500" b="0">
-                <a:solidFill>
-                  <a:srgbClr val="6B7280"/>
-                </a:solidFill>
-                <a:latin typeface="Apple SD Gothic Neo"/>
-              </a:rPr>
-              <a:t>라우팅 · 역할별 화면</a:t>
-            </a:r>
-          </a:p>
-        </p:txBody>
-      </p:sp>
-      <p:sp>
-        <p:nvSpPr>
-          <p:cNvPr id="15" name="Rounded Rectangle 14"/>
+              <a:t>dto = 요청·응답 데이터 (controller ↔ 화면)</a:t>
+            </a:r>
+          </a:p>
+        </p:txBody>
+      </p:sp>
+      <p:sp>
+        <p:nvSpPr>
+          <p:cNvPr id="15" name="TextBox 14"/>
+          <p:cNvSpPr txBox="1"/>
+          <p:nvPr/>
+        </p:nvSpPr>
+        <p:spPr>
+          <a:xfrm>
+            <a:off x="6446520" y="1828800"/>
+            <a:ext cx="5029200" cy="457200"/>
+          </a:xfrm>
+          <a:prstGeom prst="rect">
+            <a:avLst/>
+          </a:prstGeom>
+          <a:noFill/>
+        </p:spPr>
+        <p:txBody>
+          <a:bodyPr wrap="square" anchor="t">
+            <a:spAutoFit/>
+          </a:bodyPr>
+          <a:lstStyle/>
+          <a:p>
+            <a:pPr algn="l"/>
+            <a:r>
+              <a:rPr sz="2200" b="1" spc="-30">
+                <a:solidFill>
+                  <a:srgbClr val="B5793A"/>
+                </a:solidFill>
+                <a:latin typeface="Apple SD Gothic Neo"/>
+              </a:rPr>
+              <a:t>프론트 · React — 기능형</a:t>
+            </a:r>
+          </a:p>
+        </p:txBody>
+      </p:sp>
+      <p:sp>
+        <p:nvSpPr>
+          <p:cNvPr id="16" name="Rounded Rectangle 15"/>
           <p:cNvSpPr/>
           <p:nvPr/>
         </p:nvSpPr>
         <p:spPr>
           <a:xfrm>
-            <a:off x="6446520" y="3154680"/>
-            <a:ext cx="5029200" cy="1508760"/>
+            <a:off x="6446520" y="2423160"/>
+            <a:ext cx="5029200" cy="2194560"/>
           </a:xfrm>
           <a:prstGeom prst="roundRect">
             <a:avLst>
@@ -6146,13 +6141,13 @@
           <a:p>
             <a:pPr algn="l"/>
             <a:r>
-              <a:rPr sz="1500" b="1">
+              <a:rPr sz="1900" b="1">
                 <a:solidFill>
                   <a:srgbClr val="1A1A1A"/>
                 </a:solidFill>
                 <a:latin typeface="Menlo"/>
               </a:rPr>
-              <a:t>features/  — 기능 한 폴더 = 화면+hook+api</a:t>
+              <a:t>features/</a:t>
             </a:r>
           </a:p>
           <a:p>
@@ -6164,15 +6159,39 @@
                 </a:solidFill>
                 <a:latin typeface="Apple SD Gothic Neo"/>
               </a:rPr>
+              <a:t>기능 한 폴더 = 화면 + hook + api</a:t>
+            </a:r>
+          </a:p>
+          <a:p>
+            <a:pPr algn="l"/>
+            <a:r>
+              <a:rPr sz="800" b="0">
+                <a:solidFill>
+                  <a:srgbClr val="6B7280"/>
+                </a:solidFill>
+                <a:latin typeface="Apple SD Gothic Neo"/>
+              </a:rPr>
+              <a:t/>
+            </a:r>
+          </a:p>
+          <a:p>
+            <a:pPr algn="l"/>
+            <a:r>
+              <a:rPr sz="1600" b="0">
+                <a:solidFill>
+                  <a:srgbClr val="1A1A1A"/>
+                </a:solidFill>
+                <a:latin typeface="Apple SD Gothic Neo"/>
+              </a:rPr>
               <a:t>auth · contracts · claims</a:t>
             </a:r>
           </a:p>
           <a:p>
             <a:pPr algn="l"/>
             <a:r>
-              <a:rPr sz="1500" b="0">
-                <a:solidFill>
-                  <a:srgbClr val="6B7280"/>
+              <a:rPr sz="1600" b="0">
+                <a:solidFill>
+                  <a:srgbClr val="1A1A1A"/>
                 </a:solidFill>
                 <a:latin typeface="Apple SD Gothic Neo"/>
               </a:rPr>
@@ -6182,79 +6201,13 @@
           <a:p>
             <a:pPr algn="l"/>
             <a:r>
-              <a:rPr sz="1500" b="0">
-                <a:solidFill>
-                  <a:srgbClr val="6B7280"/>
+              <a:rPr sz="1600" b="0">
+                <a:solidFill>
+                  <a:srgbClr val="1A1A1A"/>
                 </a:solidFill>
                 <a:latin typeface="Apple SD Gothic Neo"/>
               </a:rPr>
               <a:t>assignments · profile · customer-home</a:t>
-            </a:r>
-          </a:p>
-        </p:txBody>
-      </p:sp>
-      <p:sp>
-        <p:nvSpPr>
-          <p:cNvPr id="16" name="Rounded Rectangle 15"/>
-          <p:cNvSpPr/>
-          <p:nvPr/>
-        </p:nvSpPr>
-        <p:spPr>
-          <a:xfrm>
-            <a:off x="6446520" y="4846320"/>
-            <a:ext cx="5029200" cy="658368"/>
-          </a:xfrm>
-          <a:prstGeom prst="roundRect">
-            <a:avLst>
-              <a:gd name="adj" fmla="val 16000"/>
-            </a:avLst>
-          </a:prstGeom>
-          <a:solidFill>
-            <a:srgbClr val="F4F4F6"/>
-          </a:solidFill>
-          <a:ln w="15240">
-            <a:solidFill>
-              <a:srgbClr val="E6E6E6"/>
-            </a:solidFill>
-          </a:ln>
-          <a:effectLst/>
-        </p:spPr>
-        <p:style>
-          <a:lnRef idx="1">
-            <a:schemeClr val="accent1"/>
-          </a:lnRef>
-          <a:fillRef idx="3">
-            <a:schemeClr val="accent1"/>
-          </a:fillRef>
-          <a:effectRef idx="2">
-            <a:schemeClr val="accent1"/>
-          </a:effectRef>
-          <a:fontRef idx="minor">
-            <a:schemeClr val="lt1"/>
-          </a:fontRef>
-        </p:style>
-        <p:txBody>
-          <a:bodyPr rtlCol="0" anchor="ctr" tIns="76200" bIns="76200" lIns="177800" rIns="177800" wrap="none"/>
-          <a:lstStyle/>
-          <a:p>
-            <a:pPr algn="l"/>
-            <a:r>
-              <a:rPr sz="1500" b="1">
-                <a:solidFill>
-                  <a:srgbClr val="1A1A1A"/>
-                </a:solidFill>
-                <a:latin typeface="Menlo"/>
-              </a:rPr>
-              <a:t>lib/api · components   </a:t>
-            </a:r>
-            <a:r>
-              <a:rPr sz="1500" b="0">
-                <a:solidFill>
-                  <a:srgbClr val="6B7280"/>
-                </a:solidFill>
-                <a:latin typeface="Apple SD Gothic Neo"/>
-              </a:rPr>
-              <a:t>공통</a:t>
             </a:r>
           </a:p>
         </p:txBody>
@@ -6267,7 +6220,7 @@
         </p:nvSpPr>
         <p:spPr>
           <a:xfrm>
-            <a:off x="777240" y="5989320"/>
+            <a:off x="777240" y="6080760"/>
             <a:ext cx="10607040" cy="640080"/>
           </a:xfrm>
           <a:prstGeom prst="rect">
@@ -6283,13 +6236,13 @@
           <a:p>
             <a:pPr algn="ctr"/>
             <a:r>
-              <a:rPr sz="2400" b="1" spc="-40">
+              <a:rPr sz="2600" b="1" spc="-40">
                 <a:solidFill>
                   <a:srgbClr val="1A1A1A"/>
                 </a:solidFill>
                 <a:latin typeface="Apple SD Gothic Neo"/>
               </a:rPr>
-              <a:t>백엔드는 계층(웹→서비스→도메인→저장소), 프론트는 기능 단위로 나눴다.</a:t>
+              <a:t>백엔드는 계층으로, 프론트는 기능 단위로 나눴다.</a:t>
             </a:r>
           </a:p>
         </p:txBody>
@@ -6350,7 +6303,7 @@
                 </a:solidFill>
                 <a:latin typeface="Apple SD Gothic Neo"/>
               </a:rPr>
-              <a:t>클래스 다이어그램 → 코드</a:t>
+              <a:t>따라가 볼 한 번의 클릭</a:t>
             </a:r>
           </a:p>
         </p:txBody>
@@ -6407,8 +6360,8 @@
         </p:nvSpPr>
         <p:spPr>
           <a:xfrm>
-            <a:off x="777240" y="1828800"/>
-            <a:ext cx="5394960" cy="457200"/>
+            <a:off x="822960" y="1783080"/>
+            <a:ext cx="10607040" cy="548640"/>
           </a:xfrm>
           <a:prstGeom prst="rect">
             <a:avLst/>
@@ -6421,57 +6374,40 @@
           </a:bodyPr>
           <a:lstStyle/>
           <a:p>
-            <a:pPr algn="ctr"/>
-            <a:r>
-              <a:rPr sz="1800" b="1" spc="-30">
+            <a:pPr algn="l"/>
+            <a:r>
+              <a:rPr sz="2000" b="1" spc="-30">
+                <a:solidFill>
+                  <a:srgbClr val="1A1A1A"/>
+                </a:solidFill>
+                <a:latin typeface="Apple SD Gothic Neo"/>
+              </a:rPr>
+              <a:t>고객이 상품 목록에서 </a:t>
+            </a:r>
+            <a:r>
+              <a:rPr sz="2000" b="1" spc="-30">
                 <a:solidFill>
                   <a:srgbClr val="5B5BD6"/>
                 </a:solidFill>
                 <a:latin typeface="Apple SD Gothic Neo"/>
               </a:rPr>
-              <a:t>설계 — 클래스 한 개</a:t>
-            </a:r>
-          </a:p>
-        </p:txBody>
-      </p:sp>
-      <p:sp>
-        <p:nvSpPr>
-          <p:cNvPr id="5" name="TextBox 4"/>
-          <p:cNvSpPr txBox="1"/>
-          <p:nvPr/>
-        </p:nvSpPr>
-        <p:spPr>
-          <a:xfrm>
-            <a:off x="6035040" y="1828800"/>
-            <a:ext cx="5394960" cy="457200"/>
-          </a:xfrm>
-          <a:prstGeom prst="rect">
-            <a:avLst/>
-          </a:prstGeom>
-          <a:noFill/>
-        </p:spPr>
-        <p:txBody>
-          <a:bodyPr wrap="square" anchor="t">
-            <a:spAutoFit/>
-          </a:bodyPr>
-          <a:lstStyle/>
-          <a:p>
-            <a:pPr algn="ctr"/>
-            <a:r>
-              <a:rPr sz="1800" b="1" spc="-30">
-                <a:solidFill>
-                  <a:srgbClr val="B5793A"/>
-                </a:solidFill>
-                <a:latin typeface="Apple SD Gothic Neo"/>
-              </a:rPr>
-              <a:t>코드 — JPA 엔티티 한 개</a:t>
+              <a:t>'실손기본'</a:t>
+            </a:r>
+            <a:r>
+              <a:rPr sz="2000" b="1" spc="-30">
+                <a:solidFill>
+                  <a:srgbClr val="1A1A1A"/>
+                </a:solidFill>
+                <a:latin typeface="Apple SD Gothic Neo"/>
+              </a:rPr>
+              <a:t>을 클릭한다.</a:t>
             </a:r>
           </a:p>
         </p:txBody>
       </p:sp>
       <p:pic>
         <p:nvPicPr>
-          <p:cNvPr id="6" name="Picture 5" descr="contract-design.png"/>
+          <p:cNvPr id="5" name="Picture 4" descr="products-before.png"/>
           <p:cNvPicPr>
             <a:picLocks noChangeAspect="1"/>
           </p:cNvPicPr>
@@ -6485,8 +6421,8 @@
         </p:blipFill>
         <p:spPr>
           <a:xfrm>
-            <a:off x="1348973" y="2331720"/>
-            <a:ext cx="4251492" cy="2651760"/>
+            <a:off x="3520439" y="2286000"/>
+            <a:ext cx="5120640" cy="3200400"/>
           </a:xfrm>
           <a:prstGeom prst="rect">
             <a:avLst/>
@@ -6495,60 +6431,14 @@
       </p:pic>
       <p:sp>
         <p:nvSpPr>
-          <p:cNvPr id="7" name="Rounded Rectangle 6"/>
-          <p:cNvSpPr/>
-          <p:nvPr/>
-        </p:nvSpPr>
-        <p:spPr>
-          <a:xfrm>
-            <a:off x="6035040" y="2331720"/>
-            <a:ext cx="5394960" cy="2651760"/>
-          </a:xfrm>
-          <a:prstGeom prst="roundRect">
-            <a:avLst>
-              <a:gd name="adj" fmla="val 5000"/>
-            </a:avLst>
-          </a:prstGeom>
-          <a:solidFill>
-            <a:srgbClr val="1F1D3D"/>
-          </a:solidFill>
-          <a:ln>
-            <a:noFill/>
-          </a:ln>
-          <a:effectLst/>
-        </p:spPr>
-        <p:style>
-          <a:lnRef idx="1">
-            <a:schemeClr val="accent1"/>
-          </a:lnRef>
-          <a:fillRef idx="3">
-            <a:schemeClr val="accent1"/>
-          </a:fillRef>
-          <a:effectRef idx="2">
-            <a:schemeClr val="accent1"/>
-          </a:effectRef>
-          <a:fontRef idx="minor">
-            <a:schemeClr val="lt1"/>
-          </a:fontRef>
-        </p:style>
-        <p:txBody>
-          <a:bodyPr rtlCol="0" anchor="ctr"/>
-          <a:lstStyle/>
-          <a:p>
-            <a:pPr algn="ctr"/>
-          </a:p>
-        </p:txBody>
-      </p:sp>
-      <p:sp>
-        <p:nvSpPr>
-          <p:cNvPr id="8" name="TextBox 7"/>
+          <p:cNvPr id="6" name="TextBox 5"/>
           <p:cNvSpPr txBox="1"/>
           <p:nvPr/>
         </p:nvSpPr>
         <p:spPr>
           <a:xfrm>
-            <a:off x="6355080" y="2514600"/>
-            <a:ext cx="4846320" cy="2377440"/>
+            <a:off x="822960" y="5669280"/>
+            <a:ext cx="10607040" cy="731520"/>
           </a:xfrm>
           <a:prstGeom prst="rect">
             <a:avLst/>
@@ -6556,191 +6446,20 @@
           <a:noFill/>
         </p:spPr>
         <p:txBody>
-          <a:bodyPr wrap="square" anchor="ctr">
+          <a:bodyPr wrap="square" anchor="t">
             <a:spAutoFit/>
           </a:bodyPr>
           <a:lstStyle/>
           <a:p>
-            <a:pPr algn="l"/>
-            <a:r>
-              <a:rPr sz="1400" b="0">
-                <a:solidFill>
-                  <a:srgbClr val="CDBFF7"/>
-                </a:solidFill>
-                <a:latin typeface="Menlo"/>
-              </a:rPr>
-              <a:t>@Entity</a:t>
-            </a:r>
-          </a:p>
-          <a:p>
-            <a:pPr algn="l"/>
-            <a:r>
-              <a:rPr sz="1400" b="0">
-                <a:solidFill>
-                  <a:srgbClr val="CDBFF7"/>
-                </a:solidFill>
-                <a:latin typeface="Menlo"/>
-              </a:rPr>
-              <a:t>class InsuranceContract {</a:t>
-            </a:r>
-          </a:p>
-          <a:p>
-            <a:pPr algn="l"/>
-            <a:r>
-              <a:rPr sz="1400" b="0">
-                <a:solidFill>
-                  <a:srgbClr val="CDBFF7"/>
-                </a:solidFill>
-                <a:latin typeface="Menlo"/>
-              </a:rPr>
-              <a:t>  @Id Long id;</a:t>
-            </a:r>
-          </a:p>
-          <a:p>
-            <a:pPr algn="l"/>
-            <a:r>
-              <a:rPr sz="1400" b="0">
-                <a:solidFill>
-                  <a:srgbClr val="FFFFFF"/>
-                </a:solidFill>
-                <a:latin typeface="Menlo"/>
-              </a:rPr>
-              <a:t>  ContractStatus status;</a:t>
-            </a:r>
-          </a:p>
-          <a:p>
-            <a:pPr algn="l"/>
-            <a:r>
-              <a:rPr sz="1400" b="0">
-                <a:solidFill>
-                  <a:srgbClr val="CDBFF7"/>
-                </a:solidFill>
-                <a:latin typeface="Menlo"/>
-              </a:rPr>
-              <a:t>  @ManyToOne Policyholder policyholder;</a:t>
-            </a:r>
-          </a:p>
-          <a:p>
-            <a:pPr algn="l"/>
-            <a:r>
-              <a:rPr sz="1400" b="0">
-                <a:solidFill>
-                  <a:srgbClr val="CDBFF7"/>
-                </a:solidFill>
-                <a:latin typeface="Menlo"/>
-              </a:rPr>
-              <a:t>  @ManyToOne InsuranceProduct product;</a:t>
-            </a:r>
-          </a:p>
-          <a:p>
-            <a:pPr algn="l"/>
-            <a:r>
-              <a:rPr sz="1400" b="0">
-                <a:solidFill>
-                  <a:srgbClr val="CDBFF7"/>
-                </a:solidFill>
-                <a:latin typeface="Menlo"/>
-              </a:rPr>
-              <a:t>  @OneToMany List&lt;Payment&gt; payments;</a:t>
-            </a:r>
-          </a:p>
-          <a:p>
-            <a:pPr algn="l"/>
-            <a:r>
-              <a:rPr sz="1400" b="0">
-                <a:solidFill>
-                  <a:srgbClr val="CDBFF7"/>
-                </a:solidFill>
-                <a:latin typeface="Menlo"/>
-              </a:rPr>
-              <a:t>  @Embedded AutoDebit autoDebit;</a:t>
-            </a:r>
-          </a:p>
-          <a:p>
-            <a:pPr algn="l"/>
-            <a:r>
-              <a:rPr sz="1400" b="0">
-                <a:solidFill>
-                  <a:srgbClr val="FFFFFF"/>
-                </a:solidFill>
-                <a:latin typeface="Menlo"/>
-              </a:rPr>
-              <a:t>}</a:t>
-            </a:r>
-          </a:p>
-        </p:txBody>
-      </p:sp>
-      <p:sp>
-        <p:nvSpPr>
-          <p:cNvPr id="9" name="Rounded Rectangle 8"/>
-          <p:cNvSpPr/>
-          <p:nvPr/>
-        </p:nvSpPr>
-        <p:spPr>
-          <a:xfrm>
-            <a:off x="777240" y="5257800"/>
-            <a:ext cx="10607040" cy="1143000"/>
-          </a:xfrm>
-          <a:prstGeom prst="roundRect">
-            <a:avLst>
-              <a:gd name="adj" fmla="val 10000"/>
-            </a:avLst>
-          </a:prstGeom>
-          <a:solidFill>
-            <a:srgbClr val="F4F4F6"/>
-          </a:solidFill>
-          <a:ln w="15240">
-            <a:solidFill>
-              <a:srgbClr val="E6E6E6"/>
-            </a:solidFill>
-          </a:ln>
-          <a:effectLst/>
-        </p:spPr>
-        <p:style>
-          <a:lnRef idx="1">
-            <a:schemeClr val="accent1"/>
-          </a:lnRef>
-          <a:fillRef idx="3">
-            <a:schemeClr val="accent1"/>
-          </a:fillRef>
-          <a:effectRef idx="2">
-            <a:schemeClr val="accent1"/>
-          </a:effectRef>
-          <a:fontRef idx="minor">
-            <a:schemeClr val="lt1"/>
-          </a:fontRef>
-        </p:style>
-        <p:txBody>
-          <a:bodyPr rtlCol="0" anchor="ctr" tIns="76200" bIns="76200" lIns="177800" rIns="177800" wrap="square"/>
-          <a:lstStyle/>
-          <a:p>
-            <a:pPr algn="l"/>
-            <a:r>
-              <a:rPr sz="1800" b="1">
+            <a:pPr algn="ctr"/>
+            <a:r>
+              <a:rPr sz="2400" b="1" spc="-40">
                 <a:solidFill>
                   <a:srgbClr val="1A1A1A"/>
                 </a:solidFill>
                 <a:latin typeface="Apple SD Gothic Neo"/>
               </a:rPr>
-              <a:t>필드 = 컬럼,  관계선 = </a:t>
-            </a:r>
-            <a:r>
-              <a:rPr sz="1700" b="1">
-                <a:solidFill>
-                  <a:srgbClr val="5B5BD6"/>
-                </a:solidFill>
-                <a:latin typeface="Menlo"/>
-              </a:rPr>
-              <a:t>@ManyToOne · @OneToMany · @Embedded</a:t>
-            </a:r>
-            <a:r>
-              <a:rPr sz="1800" b="1">
-                <a:solidFill>
-                  <a:srgbClr val="1A1A1A"/>
-                </a:solidFill>
-                <a:latin typeface="Apple SD Gothic Neo"/>
-              </a:rPr>
-              <a:t>.  domain 패키지의 6묶음이 다이어그램 6묶음과 1:1.</a:t>
+              <a:t>이 클릭 하나가 코드로 어떻게 흘러 화면까지 오는지 따라가 본다.</a:t>
             </a:r>
           </a:p>
         </p:txBody>
@@ -7170,7 +6889,7 @@
                 </a:solidFill>
                 <a:latin typeface="Apple SD Gothic Neo"/>
               </a:rPr>
-              <a:t>유스케이스 → 코드</a:t>
+              <a:t>프론트 — 버튼 클릭</a:t>
             </a:r>
           </a:p>
         </p:txBody>
@@ -7227,8 +6946,8 @@
         </p:nvSpPr>
         <p:spPr>
           <a:xfrm>
-            <a:off x="777240" y="1828800"/>
-            <a:ext cx="10607040" cy="548640"/>
+            <a:off x="822960" y="1783080"/>
+            <a:ext cx="10607040" cy="457200"/>
           </a:xfrm>
           <a:prstGeom prst="rect">
             <a:avLst/>
@@ -7243,13 +6962,22 @@
           <a:p>
             <a:pPr algn="l"/>
             <a:r>
-              <a:rPr sz="2000" b="1" spc="-30">
+              <a:rPr sz="1800" b="1" spc="-20">
+                <a:solidFill>
+                  <a:srgbClr val="5B5BD6"/>
+                </a:solidFill>
+                <a:latin typeface="Apple SD Gothic Neo"/>
+              </a:rPr>
+              <a:t>①   </a:t>
+            </a:r>
+            <a:r>
+              <a:rPr sz="1600" b="0" spc="-20">
                 <a:solidFill>
                   <a:srgbClr val="6B7280"/>
                 </a:solidFill>
-                <a:latin typeface="Apple SD Gothic Neo"/>
-              </a:rPr>
-              <a:t>예) 가입 신청 — 한 시나리오가 한 줄기 호출 흐름으로</a:t>
+                <a:latin typeface="Menlo"/>
+              </a:rPr>
+              <a:t>features/contracts/ProductsView.tsx</a:t>
             </a:r>
           </a:p>
         </p:txBody>
@@ -7262,456 +6990,12 @@
         </p:nvSpPr>
         <p:spPr>
           <a:xfrm>
-            <a:off x="495147" y="2743200"/>
-            <a:ext cx="1874519" cy="1554480"/>
+            <a:off x="822960" y="2286000"/>
+            <a:ext cx="10561320" cy="3154680"/>
           </a:xfrm>
           <a:prstGeom prst="roundRect">
             <a:avLst>
-              <a:gd name="adj" fmla="val 16000"/>
-            </a:avLst>
-          </a:prstGeom>
-          <a:solidFill>
-            <a:srgbClr val="ECEBFB"/>
-          </a:solidFill>
-          <a:ln>
-            <a:noFill/>
-          </a:ln>
-          <a:effectLst/>
-        </p:spPr>
-        <p:style>
-          <a:lnRef idx="1">
-            <a:schemeClr val="accent1"/>
-          </a:lnRef>
-          <a:fillRef idx="3">
-            <a:schemeClr val="accent1"/>
-          </a:fillRef>
-          <a:effectRef idx="2">
-            <a:schemeClr val="accent1"/>
-          </a:effectRef>
-          <a:fontRef idx="minor">
-            <a:schemeClr val="lt1"/>
-          </a:fontRef>
-        </p:style>
-        <p:txBody>
-          <a:bodyPr rtlCol="0" anchor="ctr" tIns="76200" bIns="76200" lIns="177800" rIns="177800" wrap="square"/>
-          <a:lstStyle/>
-          <a:p>
-            <a:pPr algn="ctr"/>
-            <a:r>
-              <a:rPr sz="1400" b="1">
-                <a:solidFill>
-                  <a:srgbClr val="1A1A1A"/>
-                </a:solidFill>
-                <a:latin typeface="Menlo"/>
-              </a:rPr>
-              <a:t>고객</a:t>
-            </a:r>
-          </a:p>
-          <a:p>
-            <a:pPr algn="ctr"/>
-            <a:r>
-              <a:rPr sz="1500" b="1">
-                <a:solidFill>
-                  <a:srgbClr val="1A1A1A"/>
-                </a:solidFill>
-                <a:latin typeface="Apple SD Gothic Neo"/>
-              </a:rPr>
-              <a:t>가입 신청 화면</a:t>
-            </a:r>
-          </a:p>
-        </p:txBody>
-      </p:sp>
-      <p:sp>
-        <p:nvSpPr>
-          <p:cNvPr id="6" name="TextBox 5"/>
-          <p:cNvSpPr txBox="1"/>
-          <p:nvPr/>
-        </p:nvSpPr>
-        <p:spPr>
-          <a:xfrm>
-            <a:off x="2278227" y="3337560"/>
-            <a:ext cx="640080" cy="640080"/>
-          </a:xfrm>
-          <a:prstGeom prst="rect">
-            <a:avLst/>
-          </a:prstGeom>
-          <a:noFill/>
-        </p:spPr>
-        <p:txBody>
-          <a:bodyPr wrap="square" anchor="ctr">
-            <a:spAutoFit/>
-          </a:bodyPr>
-          <a:lstStyle/>
-          <a:p>
-            <a:pPr algn="ctr"/>
-            <a:r>
-              <a:rPr sz="2200" b="1">
-                <a:solidFill>
-                  <a:srgbClr val="5B5BD6"/>
-                </a:solidFill>
-                <a:latin typeface="Apple SD Gothic Neo"/>
-              </a:rPr>
-              <a:t>→</a:t>
-            </a:r>
-          </a:p>
-        </p:txBody>
-      </p:sp>
-      <p:sp>
-        <p:nvSpPr>
-          <p:cNvPr id="7" name="Rounded Rectangle 6"/>
-          <p:cNvSpPr/>
-          <p:nvPr/>
-        </p:nvSpPr>
-        <p:spPr>
-          <a:xfrm>
-            <a:off x="2826867" y="2743200"/>
-            <a:ext cx="1874519" cy="1554480"/>
-          </a:xfrm>
-          <a:prstGeom prst="roundRect">
-            <a:avLst>
-              <a:gd name="adj" fmla="val 16000"/>
-            </a:avLst>
-          </a:prstGeom>
-          <a:solidFill>
-            <a:srgbClr val="F4F4F6"/>
-          </a:solidFill>
-          <a:ln>
-            <a:noFill/>
-          </a:ln>
-          <a:effectLst/>
-        </p:spPr>
-        <p:style>
-          <a:lnRef idx="1">
-            <a:schemeClr val="accent1"/>
-          </a:lnRef>
-          <a:fillRef idx="3">
-            <a:schemeClr val="accent1"/>
-          </a:fillRef>
-          <a:effectRef idx="2">
-            <a:schemeClr val="accent1"/>
-          </a:effectRef>
-          <a:fontRef idx="minor">
-            <a:schemeClr val="lt1"/>
-          </a:fontRef>
-        </p:style>
-        <p:txBody>
-          <a:bodyPr rtlCol="0" anchor="ctr" tIns="76200" bIns="76200" lIns="177800" rIns="177800" wrap="square"/>
-          <a:lstStyle/>
-          <a:p>
-            <a:pPr algn="ctr"/>
-            <a:r>
-              <a:rPr sz="1400" b="1">
-                <a:solidFill>
-                  <a:srgbClr val="1A1A1A"/>
-                </a:solidFill>
-                <a:latin typeface="Menlo"/>
-              </a:rPr>
-              <a:t>web</a:t>
-            </a:r>
-          </a:p>
-          <a:p>
-            <a:pPr algn="ctr"/>
-            <a:r>
-              <a:rPr sz="1500" b="1">
-                <a:solidFill>
-                  <a:srgbClr val="1A1A1A"/>
-                </a:solidFill>
-                <a:latin typeface="Apple SD Gothic Neo"/>
-              </a:rPr>
-              <a:t>ApplicationController</a:t>
-            </a:r>
-          </a:p>
-          <a:p>
-            <a:pPr algn="ctr"/>
-            <a:r>
-              <a:rPr sz="1500" b="1">
-                <a:solidFill>
-                  <a:srgbClr val="1A1A1A"/>
-                </a:solidFill>
-                <a:latin typeface="Apple SD Gothic Neo"/>
-              </a:rPr>
-              <a:t>POST /applications</a:t>
-            </a:r>
-          </a:p>
-        </p:txBody>
-      </p:sp>
-      <p:sp>
-        <p:nvSpPr>
-          <p:cNvPr id="8" name="TextBox 7"/>
-          <p:cNvSpPr txBox="1"/>
-          <p:nvPr/>
-        </p:nvSpPr>
-        <p:spPr>
-          <a:xfrm>
-            <a:off x="4609947" y="3337560"/>
-            <a:ext cx="640080" cy="640080"/>
-          </a:xfrm>
-          <a:prstGeom prst="rect">
-            <a:avLst/>
-          </a:prstGeom>
-          <a:noFill/>
-        </p:spPr>
-        <p:txBody>
-          <a:bodyPr wrap="square" anchor="ctr">
-            <a:spAutoFit/>
-          </a:bodyPr>
-          <a:lstStyle/>
-          <a:p>
-            <a:pPr algn="ctr"/>
-            <a:r>
-              <a:rPr sz="2200" b="1">
-                <a:solidFill>
-                  <a:srgbClr val="5B5BD6"/>
-                </a:solidFill>
-                <a:latin typeface="Apple SD Gothic Neo"/>
-              </a:rPr>
-              <a:t>→</a:t>
-            </a:r>
-          </a:p>
-        </p:txBody>
-      </p:sp>
-      <p:sp>
-        <p:nvSpPr>
-          <p:cNvPr id="9" name="Rounded Rectangle 8"/>
-          <p:cNvSpPr/>
-          <p:nvPr/>
-        </p:nvSpPr>
-        <p:spPr>
-          <a:xfrm>
-            <a:off x="5158587" y="2743200"/>
-            <a:ext cx="1874519" cy="1554480"/>
-          </a:xfrm>
-          <a:prstGeom prst="roundRect">
-            <a:avLst>
-              <a:gd name="adj" fmla="val 16000"/>
-            </a:avLst>
-          </a:prstGeom>
-          <a:solidFill>
-            <a:srgbClr val="ECEBFB"/>
-          </a:solidFill>
-          <a:ln>
-            <a:noFill/>
-          </a:ln>
-          <a:effectLst/>
-        </p:spPr>
-        <p:style>
-          <a:lnRef idx="1">
-            <a:schemeClr val="accent1"/>
-          </a:lnRef>
-          <a:fillRef idx="3">
-            <a:schemeClr val="accent1"/>
-          </a:fillRef>
-          <a:effectRef idx="2">
-            <a:schemeClr val="accent1"/>
-          </a:effectRef>
-          <a:fontRef idx="minor">
-            <a:schemeClr val="lt1"/>
-          </a:fontRef>
-        </p:style>
-        <p:txBody>
-          <a:bodyPr rtlCol="0" anchor="ctr" tIns="76200" bIns="76200" lIns="177800" rIns="177800" wrap="square"/>
-          <a:lstStyle/>
-          <a:p>
-            <a:pPr algn="ctr"/>
-            <a:r>
-              <a:rPr sz="1400" b="1">
-                <a:solidFill>
-                  <a:srgbClr val="1A1A1A"/>
-                </a:solidFill>
-                <a:latin typeface="Menlo"/>
-              </a:rPr>
-              <a:t>service</a:t>
-            </a:r>
-          </a:p>
-          <a:p>
-            <a:pPr algn="ctr"/>
-            <a:r>
-              <a:rPr sz="1500" b="1">
-                <a:solidFill>
-                  <a:srgbClr val="1A1A1A"/>
-                </a:solidFill>
-                <a:latin typeface="Apple SD Gothic Neo"/>
-              </a:rPr>
-              <a:t>ApplicationService</a:t>
-            </a:r>
-          </a:p>
-          <a:p>
-            <a:pPr algn="ctr"/>
-            <a:r>
-              <a:rPr sz="1500" b="1">
-                <a:solidFill>
-                  <a:srgbClr val="1A1A1A"/>
-                </a:solidFill>
-                <a:latin typeface="Apple SD Gothic Neo"/>
-              </a:rPr>
-              <a:t>.apply()</a:t>
-            </a:r>
-          </a:p>
-        </p:txBody>
-      </p:sp>
-      <p:sp>
-        <p:nvSpPr>
-          <p:cNvPr id="10" name="TextBox 9"/>
-          <p:cNvSpPr txBox="1"/>
-          <p:nvPr/>
-        </p:nvSpPr>
-        <p:spPr>
-          <a:xfrm>
-            <a:off x="6941667" y="3337560"/>
-            <a:ext cx="640080" cy="640080"/>
-          </a:xfrm>
-          <a:prstGeom prst="rect">
-            <a:avLst/>
-          </a:prstGeom>
-          <a:noFill/>
-        </p:spPr>
-        <p:txBody>
-          <a:bodyPr wrap="square" anchor="ctr">
-            <a:spAutoFit/>
-          </a:bodyPr>
-          <a:lstStyle/>
-          <a:p>
-            <a:pPr algn="ctr"/>
-            <a:r>
-              <a:rPr sz="2200" b="1">
-                <a:solidFill>
-                  <a:srgbClr val="5B5BD6"/>
-                </a:solidFill>
-                <a:latin typeface="Apple SD Gothic Neo"/>
-              </a:rPr>
-              <a:t>→</a:t>
-            </a:r>
-          </a:p>
-        </p:txBody>
-      </p:sp>
-      <p:sp>
-        <p:nvSpPr>
-          <p:cNvPr id="11" name="Rounded Rectangle 10"/>
-          <p:cNvSpPr/>
-          <p:nvPr/>
-        </p:nvSpPr>
-        <p:spPr>
-          <a:xfrm>
-            <a:off x="7490307" y="2743200"/>
-            <a:ext cx="1874519" cy="1554480"/>
-          </a:xfrm>
-          <a:prstGeom prst="roundRect">
-            <a:avLst>
-              <a:gd name="adj" fmla="val 16000"/>
-            </a:avLst>
-          </a:prstGeom>
-          <a:solidFill>
-            <a:srgbClr val="5B5BD6"/>
-          </a:solidFill>
-          <a:ln>
-            <a:noFill/>
-          </a:ln>
-          <a:effectLst/>
-        </p:spPr>
-        <p:style>
-          <a:lnRef idx="1">
-            <a:schemeClr val="accent1"/>
-          </a:lnRef>
-          <a:fillRef idx="3">
-            <a:schemeClr val="accent1"/>
-          </a:fillRef>
-          <a:effectRef idx="2">
-            <a:schemeClr val="accent1"/>
-          </a:effectRef>
-          <a:fontRef idx="minor">
-            <a:schemeClr val="lt1"/>
-          </a:fontRef>
-        </p:style>
-        <p:txBody>
-          <a:bodyPr rtlCol="0" anchor="ctr" tIns="76200" bIns="76200" lIns="177800" rIns="177800" wrap="square"/>
-          <a:lstStyle/>
-          <a:p>
-            <a:pPr algn="ctr"/>
-            <a:r>
-              <a:rPr sz="1400" b="1">
-                <a:solidFill>
-                  <a:srgbClr val="FFFFFF"/>
-                </a:solidFill>
-                <a:latin typeface="Menlo"/>
-              </a:rPr>
-              <a:t>domain</a:t>
-            </a:r>
-          </a:p>
-          <a:p>
-            <a:pPr algn="ctr"/>
-            <a:r>
-              <a:rPr sz="1500" b="1">
-                <a:solidFill>
-                  <a:srgbClr val="FFFFFF"/>
-                </a:solidFill>
-                <a:latin typeface="Apple SD Gothic Neo"/>
-              </a:rPr>
-              <a:t>InsuranceApplication</a:t>
-            </a:r>
-          </a:p>
-          <a:p>
-            <a:pPr algn="ctr"/>
-            <a:r>
-              <a:rPr sz="1500" b="1">
-                <a:solidFill>
-                  <a:srgbClr val="FFFFFF"/>
-                </a:solidFill>
-                <a:latin typeface="Apple SD Gothic Neo"/>
-              </a:rPr>
-              <a:t>+ 도메인 규칙</a:t>
-            </a:r>
-          </a:p>
-        </p:txBody>
-      </p:sp>
-      <p:sp>
-        <p:nvSpPr>
-          <p:cNvPr id="12" name="TextBox 11"/>
-          <p:cNvSpPr txBox="1"/>
-          <p:nvPr/>
-        </p:nvSpPr>
-        <p:spPr>
-          <a:xfrm>
-            <a:off x="9273387" y="3337560"/>
-            <a:ext cx="640080" cy="640080"/>
-          </a:xfrm>
-          <a:prstGeom prst="rect">
-            <a:avLst/>
-          </a:prstGeom>
-          <a:noFill/>
-        </p:spPr>
-        <p:txBody>
-          <a:bodyPr wrap="square" anchor="ctr">
-            <a:spAutoFit/>
-          </a:bodyPr>
-          <a:lstStyle/>
-          <a:p>
-            <a:pPr algn="ctr"/>
-            <a:r>
-              <a:rPr sz="2200" b="1">
-                <a:solidFill>
-                  <a:srgbClr val="5B5BD6"/>
-                </a:solidFill>
-                <a:latin typeface="Apple SD Gothic Neo"/>
-              </a:rPr>
-              <a:t>→</a:t>
-            </a:r>
-          </a:p>
-        </p:txBody>
-      </p:sp>
-      <p:sp>
-        <p:nvSpPr>
-          <p:cNvPr id="13" name="Rounded Rectangle 12"/>
-          <p:cNvSpPr/>
-          <p:nvPr/>
-        </p:nvSpPr>
-        <p:spPr>
-          <a:xfrm>
-            <a:off x="9822027" y="2743200"/>
-            <a:ext cx="1874519" cy="1554480"/>
-          </a:xfrm>
-          <a:prstGeom prst="roundRect">
-            <a:avLst>
-              <a:gd name="adj" fmla="val 16000"/>
+              <a:gd name="adj" fmla="val 4000"/>
             </a:avLst>
           </a:prstGeom>
           <a:solidFill>
@@ -7737,117 +7021,154 @@
           </a:fontRef>
         </p:style>
         <p:txBody>
-          <a:bodyPr rtlCol="0" anchor="ctr" tIns="76200" bIns="76200" lIns="177800" rIns="177800" wrap="square"/>
-          <a:lstStyle/>
-          <a:p>
-            <a:pPr algn="ctr"/>
-            <a:r>
-              <a:rPr sz="1400" b="1">
+          <a:bodyPr rtlCol="0" anchor="ctr"/>
+          <a:lstStyle/>
+          <a:p>
+            <a:pPr algn="ctr"/>
+          </a:p>
+        </p:txBody>
+      </p:sp>
+      <p:sp>
+        <p:nvSpPr>
+          <p:cNvPr id="6" name="TextBox 5"/>
+          <p:cNvSpPr txBox="1"/>
+          <p:nvPr/>
+        </p:nvSpPr>
+        <p:spPr>
+          <a:xfrm>
+            <a:off x="1188720" y="2468880"/>
+            <a:ext cx="9966960" cy="2788920"/>
+          </a:xfrm>
+          <a:prstGeom prst="rect">
+            <a:avLst/>
+          </a:prstGeom>
+          <a:noFill/>
+        </p:spPr>
+        <p:txBody>
+          <a:bodyPr wrap="square" anchor="ctr">
+            <a:spAutoFit/>
+          </a:bodyPr>
+          <a:lstStyle/>
+          <a:p>
+            <a:pPr algn="l"/>
+            <a:r>
+              <a:rPr sz="1500" b="0">
+                <a:solidFill>
+                  <a:srgbClr val="7C83B0"/>
+                </a:solidFill>
+                <a:latin typeface="Menlo"/>
+              </a:rPr>
+              <a:t>// 상품 목록의 각 카드</a:t>
+            </a:r>
+          </a:p>
+          <a:p>
+            <a:pPr algn="l"/>
+            <a:r>
+              <a:rPr sz="1500" b="0">
                 <a:solidFill>
                   <a:srgbClr val="FFFFFF"/>
                 </a:solidFill>
                 <a:latin typeface="Menlo"/>
               </a:rPr>
-              <a:t>repository</a:t>
-            </a:r>
-          </a:p>
-          <a:p>
-            <a:pPr algn="ctr"/>
-            <a:r>
-              <a:rPr sz="1500" b="1">
+              <a:t>&lt;button onClick={() =&gt; selectProduct(product.id)}&gt;</a:t>
+            </a:r>
+          </a:p>
+          <a:p>
+            <a:pPr algn="l"/>
+            <a:r>
+              <a:rPr sz="1500" b="0">
                 <a:solidFill>
                   <a:srgbClr val="FFFFFF"/>
                 </a:solidFill>
-                <a:latin typeface="Apple SD Gothic Neo"/>
-              </a:rPr>
-              <a:t>저장 · 조회</a:t>
-            </a:r>
-          </a:p>
-        </p:txBody>
-      </p:sp>
-      <p:sp>
-        <p:nvSpPr>
-          <p:cNvPr id="14" name="Rounded Rectangle 13"/>
-          <p:cNvSpPr/>
-          <p:nvPr/>
-        </p:nvSpPr>
-        <p:spPr>
-          <a:xfrm>
-            <a:off x="2895447" y="4709160"/>
-            <a:ext cx="6400800" cy="868680"/>
-          </a:xfrm>
-          <a:prstGeom prst="roundRect">
-            <a:avLst>
-              <a:gd name="adj" fmla="val 12000"/>
-            </a:avLst>
-          </a:prstGeom>
-          <a:solidFill>
-            <a:srgbClr val="F7EDE6"/>
-          </a:solidFill>
-          <a:ln>
-            <a:noFill/>
-          </a:ln>
-          <a:effectLst/>
-        </p:spPr>
-        <p:style>
-          <a:lnRef idx="1">
-            <a:schemeClr val="accent1"/>
-          </a:lnRef>
-          <a:fillRef idx="3">
-            <a:schemeClr val="accent1"/>
-          </a:fillRef>
-          <a:effectRef idx="2">
-            <a:schemeClr val="accent1"/>
-          </a:effectRef>
-          <a:fontRef idx="minor">
-            <a:schemeClr val="lt1"/>
-          </a:fontRef>
-        </p:style>
-        <p:txBody>
-          <a:bodyPr rtlCol="0" anchor="ctr" tIns="76200" bIns="76200" lIns="177800" rIns="177800" wrap="none"/>
-          <a:lstStyle/>
-          <a:p>
-            <a:pPr algn="ctr"/>
-            <a:r>
-              <a:rPr sz="1700" b="1">
-                <a:solidFill>
-                  <a:srgbClr val="1A1A1A"/>
-                </a:solidFill>
-                <a:latin typeface="Apple SD Gothic Neo"/>
-              </a:rPr>
-              <a:t>응답은 </a:t>
-            </a:r>
-            <a:r>
-              <a:rPr sz="1700" b="1">
-                <a:solidFill>
-                  <a:srgbClr val="B5793A"/>
-                </a:solidFill>
                 <a:latin typeface="Menlo"/>
               </a:rPr>
-              <a:t>DTO</a:t>
-            </a:r>
-            <a:r>
-              <a:rPr sz="1700" b="1">
-                <a:solidFill>
-                  <a:srgbClr val="1A1A1A"/>
-                </a:solidFill>
-                <a:latin typeface="Apple SD Gothic Neo"/>
-              </a:rPr>
-              <a:t>로 변환해 화면으로 (from(entity))</a:t>
-            </a:r>
-          </a:p>
-        </p:txBody>
-      </p:sp>
-      <p:sp>
-        <p:nvSpPr>
-          <p:cNvPr id="15" name="TextBox 14"/>
+              <a:t>  {product.productName}</a:t>
+            </a:r>
+          </a:p>
+          <a:p>
+            <a:pPr algn="l"/>
+            <a:r>
+              <a:rPr sz="1500" b="0">
+                <a:solidFill>
+                  <a:srgbClr val="FFFFFF"/>
+                </a:solidFill>
+                <a:latin typeface="Menlo"/>
+              </a:rPr>
+              <a:t>&lt;/button&gt;</a:t>
+            </a:r>
+          </a:p>
+          <a:p>
+            <a:pPr algn="l"/>
+            <a:r>
+              <a:rPr sz="1500" b="0">
+                <a:solidFill>
+                  <a:srgbClr val="FFFFFF"/>
+                </a:solidFill>
+                <a:latin typeface="Menlo"/>
+              </a:rPr>
+              <a:t/>
+            </a:r>
+          </a:p>
+          <a:p>
+            <a:pPr algn="l"/>
+            <a:r>
+              <a:rPr sz="1500" b="0">
+                <a:solidFill>
+                  <a:srgbClr val="7C83B0"/>
+                </a:solidFill>
+                <a:latin typeface="Menlo"/>
+              </a:rPr>
+              <a:t>// 클릭하면 실행되는 함수</a:t>
+            </a:r>
+          </a:p>
+          <a:p>
+            <a:pPr algn="l"/>
+            <a:r>
+              <a:rPr sz="1500" b="0">
+                <a:solidFill>
+                  <a:srgbClr val="CDBFF7"/>
+                </a:solidFill>
+                <a:latin typeface="Menlo"/>
+              </a:rPr>
+              <a:t>async function selectProduct(id) {</a:t>
+            </a:r>
+          </a:p>
+          <a:p>
+            <a:pPr algn="l"/>
+            <a:r>
+              <a:rPr sz="1500" b="0">
+                <a:solidFill>
+                  <a:srgbClr val="FFFFFF"/>
+                </a:solidFill>
+                <a:latin typeface="Menlo"/>
+              </a:rPr>
+              <a:t>  setSelectedProduct(await contractsApi.getProduct(id))</a:t>
+            </a:r>
+          </a:p>
+          <a:p>
+            <a:pPr algn="l"/>
+            <a:r>
+              <a:rPr sz="1500" b="0">
+                <a:solidFill>
+                  <a:srgbClr val="FFFFFF"/>
+                </a:solidFill>
+                <a:latin typeface="Menlo"/>
+              </a:rPr>
+              <a:t>}</a:t>
+            </a:r>
+          </a:p>
+        </p:txBody>
+      </p:sp>
+      <p:sp>
+        <p:nvSpPr>
+          <p:cNvPr id="7" name="TextBox 6"/>
           <p:cNvSpPr txBox="1"/>
           <p:nvPr/>
         </p:nvSpPr>
         <p:spPr>
           <a:xfrm>
-            <a:off x="777240" y="5897880"/>
-            <a:ext cx="10607040" cy="640080"/>
+            <a:off x="822960" y="5623560"/>
+            <a:ext cx="10607040" cy="731520"/>
           </a:xfrm>
           <a:prstGeom prst="rect">
             <a:avLst/>
@@ -7868,7 +7189,7 @@
                 </a:solidFill>
                 <a:latin typeface="Apple SD Gothic Neo"/>
               </a:rPr>
-              <a:t>모든 도메인이 같은 패턴: 화면 → 컨트롤러 → 서비스 → 도메인 → 저장소.</a:t>
+              <a:t>카드를 누르면 그 상품 id로 selectProduct가 실행된다.</a:t>
             </a:r>
           </a:p>
         </p:txBody>
@@ -7929,7 +7250,7 @@
                 </a:solidFill>
                 <a:latin typeface="Apple SD Gothic Neo"/>
               </a:rPr>
-              <a:t>AI를 어떻게 썼나</a:t>
+              <a:t>프론트 — API 호출</a:t>
             </a:r>
           </a:p>
         </p:txBody>
@@ -7980,22 +7301,66 @@
       </p:sp>
       <p:sp>
         <p:nvSpPr>
-          <p:cNvPr id="4" name="Rounded Rectangle 3"/>
+          <p:cNvPr id="4" name="TextBox 3"/>
+          <p:cNvSpPr txBox="1"/>
+          <p:nvPr/>
+        </p:nvSpPr>
+        <p:spPr>
+          <a:xfrm>
+            <a:off x="822960" y="1783080"/>
+            <a:ext cx="10607040" cy="457200"/>
+          </a:xfrm>
+          <a:prstGeom prst="rect">
+            <a:avLst/>
+          </a:prstGeom>
+          <a:noFill/>
+        </p:spPr>
+        <p:txBody>
+          <a:bodyPr wrap="square" anchor="t">
+            <a:spAutoFit/>
+          </a:bodyPr>
+          <a:lstStyle/>
+          <a:p>
+            <a:pPr algn="l"/>
+            <a:r>
+              <a:rPr sz="1800" b="1" spc="-20">
+                <a:solidFill>
+                  <a:srgbClr val="5B5BD6"/>
+                </a:solidFill>
+                <a:latin typeface="Apple SD Gothic Neo"/>
+              </a:rPr>
+              <a:t>②   </a:t>
+            </a:r>
+            <a:r>
+              <a:rPr sz="1600" b="0" spc="-20">
+                <a:solidFill>
+                  <a:srgbClr val="6B7280"/>
+                </a:solidFill>
+                <a:latin typeface="Menlo"/>
+              </a:rPr>
+              <a:t>contracts/api.ts · lib/api/httpClient.ts</a:t>
+            </a:r>
+          </a:p>
+        </p:txBody>
+      </p:sp>
+      <p:sp>
+        <p:nvSpPr>
+          <p:cNvPr id="5" name="Rounded Rectangle 4"/>
           <p:cNvSpPr/>
           <p:nvPr/>
         </p:nvSpPr>
         <p:spPr>
           <a:xfrm>
-            <a:off x="777240" y="2011680"/>
-            <a:ext cx="5212080" cy="1554480"/>
+            <a:off x="822960" y="2286000"/>
+            <a:ext cx="10561320" cy="3154680"/>
           </a:xfrm>
           <a:prstGeom prst="roundRect">
             <a:avLst>
-              <a:gd name="adj" fmla="val 12000"/>
+              <a:gd name="adj" fmla="val 4000"/>
             </a:avLst>
           </a:prstGeom>
           <a:solidFill>
-            <a:srgbClr val="ECEBFB"/>
+            <a:srgbClr val="1F1D3D"/>
           </a:solidFill>
           <a:ln>
             <a:noFill/>
@@ -8026,14 +7391,14 @@
       </p:sp>
       <p:sp>
         <p:nvSpPr>
-          <p:cNvPr id="5" name="TextBox 4"/>
+          <p:cNvPr id="6" name="TextBox 5"/>
           <p:cNvSpPr txBox="1"/>
           <p:nvPr/>
         </p:nvSpPr>
         <p:spPr>
           <a:xfrm>
-            <a:off x="1097280" y="2194560"/>
-            <a:ext cx="4663440" cy="1280160"/>
+            <a:off x="1188720" y="2468880"/>
+            <a:ext cx="9966960" cy="2788920"/>
           </a:xfrm>
           <a:prstGeom prst="rect">
             <a:avLst/>
@@ -8048,74 +7413,98 @@
           <a:p>
             <a:pPr algn="l"/>
             <a:r>
-              <a:rPr sz="2600" b="1">
-                <a:solidFill>
-                  <a:srgbClr val="5B5BD6"/>
-                </a:solidFill>
-                <a:latin typeface="Apple SD Gothic Neo"/>
-              </a:rPr>
-              <a:t>사람</a:t>
+              <a:rPr sz="1500" b="0">
+                <a:solidFill>
+                  <a:srgbClr val="7C83B0"/>
+                </a:solidFill>
+                <a:latin typeface="Menlo"/>
+              </a:rPr>
+              <a:t>// api.ts</a:t>
             </a:r>
           </a:p>
           <a:p>
             <a:pPr algn="l"/>
             <a:r>
-              <a:rPr sz="2200" b="1">
-                <a:solidFill>
-                  <a:srgbClr val="1A1A1A"/>
-                </a:solidFill>
-                <a:latin typeface="Apple SD Gothic Neo"/>
-              </a:rPr>
-              <a:t>설계 · 결정 · 검토</a:t>
-            </a:r>
-          </a:p>
-        </p:txBody>
-      </p:sp>
-      <p:sp>
-        <p:nvSpPr>
-          <p:cNvPr id="6" name="Rounded Rectangle 5"/>
-          <p:cNvSpPr/>
-          <p:nvPr/>
-        </p:nvSpPr>
-        <p:spPr>
-          <a:xfrm>
-            <a:off x="6172200" y="2011680"/>
-            <a:ext cx="5212080" cy="1554480"/>
-          </a:xfrm>
-          <a:prstGeom prst="roundRect">
-            <a:avLst>
-              <a:gd name="adj" fmla="val 12000"/>
-            </a:avLst>
-          </a:prstGeom>
-          <a:solidFill>
-            <a:srgbClr val="F4F4F6"/>
-          </a:solidFill>
-          <a:ln w="12700">
-            <a:solidFill>
-              <a:srgbClr val="E6E6E6"/>
-            </a:solidFill>
-          </a:ln>
-          <a:effectLst/>
-        </p:spPr>
-        <p:style>
-          <a:lnRef idx="1">
-            <a:schemeClr val="accent1"/>
-          </a:lnRef>
-          <a:fillRef idx="3">
-            <a:schemeClr val="accent1"/>
-          </a:fillRef>
-          <a:effectRef idx="2">
-            <a:schemeClr val="accent1"/>
-          </a:effectRef>
-          <a:fontRef idx="minor">
-            <a:schemeClr val="lt1"/>
-          </a:fontRef>
-        </p:style>
-        <p:txBody>
-          <a:bodyPr rtlCol="0" anchor="ctr"/>
-          <a:lstStyle/>
-          <a:p>
-            <a:pPr algn="ctr"/>
+              <a:rPr sz="1500" b="0">
+                <a:solidFill>
+                  <a:srgbClr val="FFFFFF"/>
+                </a:solidFill>
+                <a:latin typeface="Menlo"/>
+              </a:rPr>
+              <a:t>getProduct(id) {</a:t>
+            </a:r>
+          </a:p>
+          <a:p>
+            <a:pPr algn="l"/>
+            <a:r>
+              <a:rPr sz="1500" b="0">
+                <a:solidFill>
+                  <a:srgbClr val="CDBFF7"/>
+                </a:solidFill>
+                <a:latin typeface="Menlo"/>
+              </a:rPr>
+              <a:t>  return request(`/products/${id}`)</a:t>
+            </a:r>
+          </a:p>
+          <a:p>
+            <a:pPr algn="l"/>
+            <a:r>
+              <a:rPr sz="1500" b="0">
+                <a:solidFill>
+                  <a:srgbClr val="FFFFFF"/>
+                </a:solidFill>
+                <a:latin typeface="Menlo"/>
+              </a:rPr>
+              <a:t>}</a:t>
+            </a:r>
+          </a:p>
+          <a:p>
+            <a:pPr algn="l"/>
+            <a:r>
+              <a:rPr sz="1500" b="0">
+                <a:solidFill>
+                  <a:srgbClr val="FFFFFF"/>
+                </a:solidFill>
+                <a:latin typeface="Menlo"/>
+              </a:rPr>
+              <a:t/>
+            </a:r>
+          </a:p>
+          <a:p>
+            <a:pPr algn="l"/>
+            <a:r>
+              <a:rPr sz="1500" b="0">
+                <a:solidFill>
+                  <a:srgbClr val="7C83B0"/>
+                </a:solidFill>
+                <a:latin typeface="Menlo"/>
+              </a:rPr>
+              <a:t>// httpClient.ts</a:t>
+            </a:r>
+          </a:p>
+          <a:p>
+            <a:pPr algn="l"/>
+            <a:r>
+              <a:rPr sz="1500" b="0">
+                <a:solidFill>
+                  <a:srgbClr val="FFFFFF"/>
+                </a:solidFill>
+                <a:latin typeface="Menlo"/>
+              </a:rPr>
+              <a:t>fetch(`${baseUrl}${path}`)  // baseUrl = http://localhost:8080</a:t>
+            </a:r>
+          </a:p>
+          <a:p>
+            <a:pPr algn="l"/>
+            <a:r>
+              <a:rPr sz="1500" b="0">
+                <a:solidFill>
+                  <a:srgbClr val="7C83B0"/>
+                </a:solidFill>
+                <a:latin typeface="Menlo"/>
+              </a:rPr>
+              <a:t>// → GET http://localhost:8080/products/2</a:t>
+            </a:r>
           </a:p>
         </p:txBody>
       </p:sp>
@@ -8127,480 +7516,8 @@
         </p:nvSpPr>
         <p:spPr>
           <a:xfrm>
-            <a:off x="6492240" y="2194560"/>
-            <a:ext cx="4663440" cy="1280160"/>
-          </a:xfrm>
-          <a:prstGeom prst="rect">
-            <a:avLst/>
-          </a:prstGeom>
-          <a:noFill/>
-        </p:spPr>
-        <p:txBody>
-          <a:bodyPr wrap="square" anchor="ctr">
-            <a:spAutoFit/>
-          </a:bodyPr>
-          <a:lstStyle/>
-          <a:p>
-            <a:pPr algn="l"/>
-            <a:r>
-              <a:rPr sz="2600" b="1">
-                <a:solidFill>
-                  <a:srgbClr val="1A1A1A"/>
-                </a:solidFill>
-                <a:latin typeface="Apple SD Gothic Neo"/>
-              </a:rPr>
-              <a:t>AI</a:t>
-            </a:r>
-          </a:p>
-          <a:p>
-            <a:pPr algn="l"/>
-            <a:r>
-              <a:rPr sz="2200" b="1">
-                <a:solidFill>
-                  <a:srgbClr val="1A1A1A"/>
-                </a:solidFill>
-                <a:latin typeface="Apple SD Gothic Neo"/>
-              </a:rPr>
-              <a:t>구현 · 테스트 · 정리</a:t>
-            </a:r>
-          </a:p>
-        </p:txBody>
-      </p:sp>
-      <p:sp>
-        <p:nvSpPr>
-          <p:cNvPr id="8" name="Rounded Rectangle 7"/>
-          <p:cNvSpPr/>
-          <p:nvPr/>
-        </p:nvSpPr>
-        <p:spPr>
-          <a:xfrm>
-            <a:off x="412851" y="3977639"/>
-            <a:ext cx="1965960" cy="1097280"/>
-          </a:xfrm>
-          <a:prstGeom prst="roundRect">
-            <a:avLst>
-              <a:gd name="adj" fmla="val 16000"/>
-            </a:avLst>
-          </a:prstGeom>
-          <a:solidFill>
-            <a:srgbClr val="F4F4F6"/>
-          </a:solidFill>
-          <a:ln w="15240">
-            <a:solidFill>
-              <a:srgbClr val="E6E6E6"/>
-            </a:solidFill>
-          </a:ln>
-          <a:effectLst/>
-        </p:spPr>
-        <p:style>
-          <a:lnRef idx="1">
-            <a:schemeClr val="accent1"/>
-          </a:lnRef>
-          <a:fillRef idx="3">
-            <a:schemeClr val="accent1"/>
-          </a:fillRef>
-          <a:effectRef idx="2">
-            <a:schemeClr val="accent1"/>
-          </a:effectRef>
-          <a:fontRef idx="minor">
-            <a:schemeClr val="lt1"/>
-          </a:fontRef>
-        </p:style>
-        <p:txBody>
-          <a:bodyPr rtlCol="0" anchor="ctr" tIns="76200" bIns="76200" lIns="177800" rIns="177800" wrap="square"/>
-          <a:lstStyle/>
-          <a:p>
-            <a:pPr algn="ctr"/>
-            <a:r>
-              <a:rPr sz="2100" b="1">
-                <a:solidFill>
-                  <a:srgbClr val="1A1A1A"/>
-                </a:solidFill>
-                <a:latin typeface="Apple SD Gothic Neo"/>
-              </a:rPr>
-              <a:t>설계</a:t>
-            </a:r>
-          </a:p>
-        </p:txBody>
-      </p:sp>
-      <p:sp>
-        <p:nvSpPr>
-          <p:cNvPr id="9" name="TextBox 8"/>
-          <p:cNvSpPr txBox="1"/>
-          <p:nvPr/>
-        </p:nvSpPr>
-        <p:spPr>
-          <a:xfrm>
-            <a:off x="2378811" y="4206240"/>
-            <a:ext cx="640080" cy="640080"/>
-          </a:xfrm>
-          <a:prstGeom prst="rect">
-            <a:avLst/>
-          </a:prstGeom>
-          <a:noFill/>
-        </p:spPr>
-        <p:txBody>
-          <a:bodyPr wrap="square" anchor="ctr">
-            <a:spAutoFit/>
-          </a:bodyPr>
-          <a:lstStyle/>
-          <a:p>
-            <a:pPr algn="ctr"/>
-            <a:r>
-              <a:rPr sz="2600" b="1">
-                <a:solidFill>
-                  <a:srgbClr val="5B5BD6"/>
-                </a:solidFill>
-                <a:latin typeface="Apple SD Gothic Neo"/>
-              </a:rPr>
-              <a:t>→</a:t>
-            </a:r>
-          </a:p>
-        </p:txBody>
-      </p:sp>
-      <p:sp>
-        <p:nvSpPr>
-          <p:cNvPr id="10" name="Rounded Rectangle 9"/>
-          <p:cNvSpPr/>
-          <p:nvPr/>
-        </p:nvSpPr>
-        <p:spPr>
-          <a:xfrm>
-            <a:off x="2762859" y="3977639"/>
-            <a:ext cx="1965960" cy="1097280"/>
-          </a:xfrm>
-          <a:prstGeom prst="roundRect">
-            <a:avLst>
-              <a:gd name="adj" fmla="val 16000"/>
-            </a:avLst>
-          </a:prstGeom>
-          <a:solidFill>
-            <a:srgbClr val="F4F4F6"/>
-          </a:solidFill>
-          <a:ln w="15240">
-            <a:solidFill>
-              <a:srgbClr val="E6E6E6"/>
-            </a:solidFill>
-          </a:ln>
-          <a:effectLst/>
-        </p:spPr>
-        <p:style>
-          <a:lnRef idx="1">
-            <a:schemeClr val="accent1"/>
-          </a:lnRef>
-          <a:fillRef idx="3">
-            <a:schemeClr val="accent1"/>
-          </a:fillRef>
-          <a:effectRef idx="2">
-            <a:schemeClr val="accent1"/>
-          </a:effectRef>
-          <a:fontRef idx="minor">
-            <a:schemeClr val="lt1"/>
-          </a:fontRef>
-        </p:style>
-        <p:txBody>
-          <a:bodyPr rtlCol="0" anchor="ctr" tIns="76200" bIns="76200" lIns="177800" rIns="177800" wrap="square"/>
-          <a:lstStyle/>
-          <a:p>
-            <a:pPr algn="ctr"/>
-            <a:r>
-              <a:rPr sz="2100" b="1">
-                <a:solidFill>
-                  <a:srgbClr val="1A1A1A"/>
-                </a:solidFill>
-                <a:latin typeface="Apple SD Gothic Neo"/>
-              </a:rPr>
-              <a:t>따져묻기</a:t>
-            </a:r>
-          </a:p>
-        </p:txBody>
-      </p:sp>
-      <p:sp>
-        <p:nvSpPr>
-          <p:cNvPr id="11" name="TextBox 10"/>
-          <p:cNvSpPr txBox="1"/>
-          <p:nvPr/>
-        </p:nvSpPr>
-        <p:spPr>
-          <a:xfrm>
-            <a:off x="4728819" y="4206240"/>
-            <a:ext cx="640080" cy="640080"/>
-          </a:xfrm>
-          <a:prstGeom prst="rect">
-            <a:avLst/>
-          </a:prstGeom>
-          <a:noFill/>
-        </p:spPr>
-        <p:txBody>
-          <a:bodyPr wrap="square" anchor="ctr">
-            <a:spAutoFit/>
-          </a:bodyPr>
-          <a:lstStyle/>
-          <a:p>
-            <a:pPr algn="ctr"/>
-            <a:r>
-              <a:rPr sz="2600" b="1">
-                <a:solidFill>
-                  <a:srgbClr val="5B5BD6"/>
-                </a:solidFill>
-                <a:latin typeface="Apple SD Gothic Neo"/>
-              </a:rPr>
-              <a:t>→</a:t>
-            </a:r>
-          </a:p>
-        </p:txBody>
-      </p:sp>
-      <p:sp>
-        <p:nvSpPr>
-          <p:cNvPr id="12" name="Rounded Rectangle 11"/>
-          <p:cNvSpPr/>
-          <p:nvPr/>
-        </p:nvSpPr>
-        <p:spPr>
-          <a:xfrm>
-            <a:off x="5112867" y="3977639"/>
-            <a:ext cx="1965960" cy="1097280"/>
-          </a:xfrm>
-          <a:prstGeom prst="roundRect">
-            <a:avLst>
-              <a:gd name="adj" fmla="val 16000"/>
-            </a:avLst>
-          </a:prstGeom>
-          <a:solidFill>
-            <a:srgbClr val="F4F4F6"/>
-          </a:solidFill>
-          <a:ln w="15240">
-            <a:solidFill>
-              <a:srgbClr val="E6E6E6"/>
-            </a:solidFill>
-          </a:ln>
-          <a:effectLst/>
-        </p:spPr>
-        <p:style>
-          <a:lnRef idx="1">
-            <a:schemeClr val="accent1"/>
-          </a:lnRef>
-          <a:fillRef idx="3">
-            <a:schemeClr val="accent1"/>
-          </a:fillRef>
-          <a:effectRef idx="2">
-            <a:schemeClr val="accent1"/>
-          </a:effectRef>
-          <a:fontRef idx="minor">
-            <a:schemeClr val="lt1"/>
-          </a:fontRef>
-        </p:style>
-        <p:txBody>
-          <a:bodyPr rtlCol="0" anchor="ctr" tIns="76200" bIns="76200" lIns="177800" rIns="177800" wrap="square"/>
-          <a:lstStyle/>
-          <a:p>
-            <a:pPr algn="ctr"/>
-            <a:r>
-              <a:rPr sz="2100" b="1">
-                <a:solidFill>
-                  <a:srgbClr val="1A1A1A"/>
-                </a:solidFill>
-                <a:latin typeface="Apple SD Gothic Neo"/>
-              </a:rPr>
-              <a:t>계획</a:t>
-            </a:r>
-          </a:p>
-        </p:txBody>
-      </p:sp>
-      <p:sp>
-        <p:nvSpPr>
-          <p:cNvPr id="13" name="TextBox 12"/>
-          <p:cNvSpPr txBox="1"/>
-          <p:nvPr/>
-        </p:nvSpPr>
-        <p:spPr>
-          <a:xfrm>
-            <a:off x="7078827" y="4206240"/>
-            <a:ext cx="640080" cy="640080"/>
-          </a:xfrm>
-          <a:prstGeom prst="rect">
-            <a:avLst/>
-          </a:prstGeom>
-          <a:noFill/>
-        </p:spPr>
-        <p:txBody>
-          <a:bodyPr wrap="square" anchor="ctr">
-            <a:spAutoFit/>
-          </a:bodyPr>
-          <a:lstStyle/>
-          <a:p>
-            <a:pPr algn="ctr"/>
-            <a:r>
-              <a:rPr sz="2600" b="1">
-                <a:solidFill>
-                  <a:srgbClr val="5B5BD6"/>
-                </a:solidFill>
-                <a:latin typeface="Apple SD Gothic Neo"/>
-              </a:rPr>
-              <a:t>→</a:t>
-            </a:r>
-          </a:p>
-        </p:txBody>
-      </p:sp>
-      <p:sp>
-        <p:nvSpPr>
-          <p:cNvPr id="14" name="Rounded Rectangle 13"/>
-          <p:cNvSpPr/>
-          <p:nvPr/>
-        </p:nvSpPr>
-        <p:spPr>
-          <a:xfrm>
-            <a:off x="7462875" y="3977639"/>
-            <a:ext cx="1965960" cy="1097280"/>
-          </a:xfrm>
-          <a:prstGeom prst="roundRect">
-            <a:avLst>
-              <a:gd name="adj" fmla="val 16000"/>
-            </a:avLst>
-          </a:prstGeom>
-          <a:solidFill>
-            <a:srgbClr val="ECEBFB"/>
-          </a:solidFill>
-          <a:ln w="15240">
-            <a:solidFill>
-              <a:srgbClr val="E6E6E6"/>
-            </a:solidFill>
-          </a:ln>
-          <a:effectLst/>
-        </p:spPr>
-        <p:style>
-          <a:lnRef idx="1">
-            <a:schemeClr val="accent1"/>
-          </a:lnRef>
-          <a:fillRef idx="3">
-            <a:schemeClr val="accent1"/>
-          </a:fillRef>
-          <a:effectRef idx="2">
-            <a:schemeClr val="accent1"/>
-          </a:effectRef>
-          <a:fontRef idx="minor">
-            <a:schemeClr val="lt1"/>
-          </a:fontRef>
-        </p:style>
-        <p:txBody>
-          <a:bodyPr rtlCol="0" anchor="ctr" tIns="76200" bIns="76200" lIns="177800" rIns="177800" wrap="square"/>
-          <a:lstStyle/>
-          <a:p>
-            <a:pPr algn="ctr"/>
-            <a:r>
-              <a:rPr sz="2100" b="1">
-                <a:solidFill>
-                  <a:srgbClr val="1A1A1A"/>
-                </a:solidFill>
-                <a:latin typeface="Apple SD Gothic Neo"/>
-              </a:rPr>
-              <a:t>테스트 먼저 구현</a:t>
-            </a:r>
-          </a:p>
-        </p:txBody>
-      </p:sp>
-      <p:sp>
-        <p:nvSpPr>
-          <p:cNvPr id="15" name="TextBox 14"/>
-          <p:cNvSpPr txBox="1"/>
-          <p:nvPr/>
-        </p:nvSpPr>
-        <p:spPr>
-          <a:xfrm>
-            <a:off x="9428835" y="4206240"/>
-            <a:ext cx="640080" cy="640080"/>
-          </a:xfrm>
-          <a:prstGeom prst="rect">
-            <a:avLst/>
-          </a:prstGeom>
-          <a:noFill/>
-        </p:spPr>
-        <p:txBody>
-          <a:bodyPr wrap="square" anchor="ctr">
-            <a:spAutoFit/>
-          </a:bodyPr>
-          <a:lstStyle/>
-          <a:p>
-            <a:pPr algn="ctr"/>
-            <a:r>
-              <a:rPr sz="2600" b="1">
-                <a:solidFill>
-                  <a:srgbClr val="5B5BD6"/>
-                </a:solidFill>
-                <a:latin typeface="Apple SD Gothic Neo"/>
-              </a:rPr>
-              <a:t>→</a:t>
-            </a:r>
-          </a:p>
-        </p:txBody>
-      </p:sp>
-      <p:sp>
-        <p:nvSpPr>
-          <p:cNvPr id="16" name="Rounded Rectangle 15"/>
-          <p:cNvSpPr/>
-          <p:nvPr/>
-        </p:nvSpPr>
-        <p:spPr>
-          <a:xfrm>
-            <a:off x="9812883" y="3977639"/>
-            <a:ext cx="1965960" cy="1097280"/>
-          </a:xfrm>
-          <a:prstGeom prst="roundRect">
-            <a:avLst>
-              <a:gd name="adj" fmla="val 16000"/>
-            </a:avLst>
-          </a:prstGeom>
-          <a:solidFill>
-            <a:srgbClr val="F4F4F6"/>
-          </a:solidFill>
-          <a:ln w="15240">
-            <a:solidFill>
-              <a:srgbClr val="E6E6E6"/>
-            </a:solidFill>
-          </a:ln>
-          <a:effectLst/>
-        </p:spPr>
-        <p:style>
-          <a:lnRef idx="1">
-            <a:schemeClr val="accent1"/>
-          </a:lnRef>
-          <a:fillRef idx="3">
-            <a:schemeClr val="accent1"/>
-          </a:fillRef>
-          <a:effectRef idx="2">
-            <a:schemeClr val="accent1"/>
-          </a:effectRef>
-          <a:fontRef idx="minor">
-            <a:schemeClr val="lt1"/>
-          </a:fontRef>
-        </p:style>
-        <p:txBody>
-          <a:bodyPr rtlCol="0" anchor="ctr" tIns="76200" bIns="76200" lIns="177800" rIns="177800" wrap="square"/>
-          <a:lstStyle/>
-          <a:p>
-            <a:pPr algn="ctr"/>
-            <a:r>
-              <a:rPr sz="2100" b="1">
-                <a:solidFill>
-                  <a:srgbClr val="1A1A1A"/>
-                </a:solidFill>
-                <a:latin typeface="Apple SD Gothic Neo"/>
-              </a:rPr>
-              <a:t>검토</a:t>
-            </a:r>
-          </a:p>
-        </p:txBody>
-      </p:sp>
-      <p:sp>
-        <p:nvSpPr>
-          <p:cNvPr id="17" name="TextBox 16"/>
-          <p:cNvSpPr txBox="1"/>
-          <p:nvPr/>
-        </p:nvSpPr>
-        <p:spPr>
-          <a:xfrm>
-            <a:off x="777240" y="5440680"/>
-            <a:ext cx="10607040" cy="822960"/>
+            <a:off x="822960" y="5623560"/>
+            <a:ext cx="10607040" cy="731520"/>
           </a:xfrm>
           <a:prstGeom prst="rect">
             <a:avLst/>
@@ -8615,13 +7532,13 @@
           <a:p>
             <a:pPr algn="ctr"/>
             <a:r>
-              <a:rPr sz="2800" b="1" spc="-40">
+              <a:rPr sz="2400" b="1" spc="-40">
                 <a:solidFill>
                   <a:srgbClr val="1A1A1A"/>
                 </a:solidFill>
                 <a:latin typeface="Apple SD Gothic Neo"/>
               </a:rPr>
-              <a:t>설계와 결정은 사람이, 구현은 AI가 했다.</a:t>
+              <a:t>프론트가 백엔드의 /products/2 로 GET 요청을 보낸다.</a:t>
             </a:r>
           </a:p>
         </p:txBody>
@@ -8682,7 +7599,7 @@
                 </a:solidFill>
                 <a:latin typeface="Apple SD Gothic Neo"/>
               </a:rPr>
-              <a:t>AI가 삑사리 난 곳, 어떻게 잡았나</a:t>
+              <a:t>백엔드 — 컨트롤러</a:t>
             </a:r>
           </a:p>
         </p:txBody>
@@ -8733,18 +7650,1522 @@
       </p:sp>
       <p:sp>
         <p:nvSpPr>
+          <p:cNvPr id="4" name="TextBox 3"/>
+          <p:cNvSpPr txBox="1"/>
+          <p:nvPr/>
+        </p:nvSpPr>
+        <p:spPr>
+          <a:xfrm>
+            <a:off x="822960" y="1783080"/>
+            <a:ext cx="10607040" cy="457200"/>
+          </a:xfrm>
+          <a:prstGeom prst="rect">
+            <a:avLst/>
+          </a:prstGeom>
+          <a:noFill/>
+        </p:spPr>
+        <p:txBody>
+          <a:bodyPr wrap="square" anchor="t">
+            <a:spAutoFit/>
+          </a:bodyPr>
+          <a:lstStyle/>
+          <a:p>
+            <a:pPr algn="l"/>
+            <a:r>
+              <a:rPr sz="1800" b="1" spc="-20">
+                <a:solidFill>
+                  <a:srgbClr val="5B5BD6"/>
+                </a:solidFill>
+                <a:latin typeface="Apple SD Gothic Neo"/>
+              </a:rPr>
+              <a:t>③   </a:t>
+            </a:r>
+            <a:r>
+              <a:rPr sz="1600" b="0" spc="-20">
+                <a:solidFill>
+                  <a:srgbClr val="6B7280"/>
+                </a:solidFill>
+                <a:latin typeface="Menlo"/>
+              </a:rPr>
+              <a:t>web/controller/ProductController.java</a:t>
+            </a:r>
+          </a:p>
+        </p:txBody>
+      </p:sp>
+      <p:sp>
+        <p:nvSpPr>
+          <p:cNvPr id="5" name="Rounded Rectangle 4"/>
+          <p:cNvSpPr/>
+          <p:nvPr/>
+        </p:nvSpPr>
+        <p:spPr>
+          <a:xfrm>
+            <a:off x="822960" y="2286000"/>
+            <a:ext cx="10561320" cy="3154680"/>
+          </a:xfrm>
+          <a:prstGeom prst="roundRect">
+            <a:avLst>
+              <a:gd name="adj" fmla="val 4000"/>
+            </a:avLst>
+          </a:prstGeom>
+          <a:solidFill>
+            <a:srgbClr val="1F1D3D"/>
+          </a:solidFill>
+          <a:ln>
+            <a:noFill/>
+          </a:ln>
+          <a:effectLst/>
+        </p:spPr>
+        <p:style>
+          <a:lnRef idx="1">
+            <a:schemeClr val="accent1"/>
+          </a:lnRef>
+          <a:fillRef idx="3">
+            <a:schemeClr val="accent1"/>
+          </a:fillRef>
+          <a:effectRef idx="2">
+            <a:schemeClr val="accent1"/>
+          </a:effectRef>
+          <a:fontRef idx="minor">
+            <a:schemeClr val="lt1"/>
+          </a:fontRef>
+        </p:style>
+        <p:txBody>
+          <a:bodyPr rtlCol="0" anchor="ctr"/>
+          <a:lstStyle/>
+          <a:p>
+            <a:pPr algn="ctr"/>
+          </a:p>
+        </p:txBody>
+      </p:sp>
+      <p:sp>
+        <p:nvSpPr>
+          <p:cNvPr id="6" name="TextBox 5"/>
+          <p:cNvSpPr txBox="1"/>
+          <p:nvPr/>
+        </p:nvSpPr>
+        <p:spPr>
+          <a:xfrm>
+            <a:off x="1188720" y="2468880"/>
+            <a:ext cx="9966960" cy="2788920"/>
+          </a:xfrm>
+          <a:prstGeom prst="rect">
+            <a:avLst/>
+          </a:prstGeom>
+          <a:noFill/>
+        </p:spPr>
+        <p:txBody>
+          <a:bodyPr wrap="square" anchor="ctr">
+            <a:spAutoFit/>
+          </a:bodyPr>
+          <a:lstStyle/>
+          <a:p>
+            <a:pPr algn="l"/>
+            <a:r>
+              <a:rPr sz="1500" b="0">
+                <a:solidFill>
+                  <a:srgbClr val="CDBFF7"/>
+                </a:solidFill>
+                <a:latin typeface="Menlo"/>
+              </a:rPr>
+              <a:t>@RestController</a:t>
+            </a:r>
+          </a:p>
+          <a:p>
+            <a:pPr algn="l"/>
+            <a:r>
+              <a:rPr sz="1500" b="0">
+                <a:solidFill>
+                  <a:srgbClr val="CDBFF7"/>
+                </a:solidFill>
+                <a:latin typeface="Menlo"/>
+              </a:rPr>
+              <a:t>class ProductController {</a:t>
+            </a:r>
+          </a:p>
+          <a:p>
+            <a:pPr algn="l"/>
+            <a:r>
+              <a:rPr sz="1500" b="0">
+                <a:solidFill>
+                  <a:srgbClr val="FFFFFF"/>
+                </a:solidFill>
+                <a:latin typeface="Menlo"/>
+              </a:rPr>
+              <a:t/>
+            </a:r>
+          </a:p>
+          <a:p>
+            <a:pPr algn="l"/>
+            <a:r>
+              <a:rPr sz="1500" b="0">
+                <a:solidFill>
+                  <a:srgbClr val="CDBFF7"/>
+                </a:solidFill>
+                <a:latin typeface="Menlo"/>
+              </a:rPr>
+              <a:t>  @GetMapping("/products/{id}")</a:t>
+            </a:r>
+          </a:p>
+          <a:p>
+            <a:pPr algn="l"/>
+            <a:r>
+              <a:rPr sz="1500" b="0">
+                <a:solidFill>
+                  <a:srgbClr val="CDBFF7"/>
+                </a:solidFill>
+                <a:latin typeface="Menlo"/>
+              </a:rPr>
+              <a:t>  ProductDetailResponse detail(@PathVariable Long id) {</a:t>
+            </a:r>
+          </a:p>
+          <a:p>
+            <a:pPr algn="l"/>
+            <a:r>
+              <a:rPr sz="1500" b="0">
+                <a:solidFill>
+                  <a:srgbClr val="CDBFF7"/>
+                </a:solidFill>
+                <a:latin typeface="Menlo"/>
+              </a:rPr>
+              <a:t>    return productService.detail(id);</a:t>
+            </a:r>
+          </a:p>
+          <a:p>
+            <a:pPr algn="l"/>
+            <a:r>
+              <a:rPr sz="1500" b="0">
+                <a:solidFill>
+                  <a:srgbClr val="FFFFFF"/>
+                </a:solidFill>
+                <a:latin typeface="Menlo"/>
+              </a:rPr>
+              <a:t>  }</a:t>
+            </a:r>
+          </a:p>
+          <a:p>
+            <a:pPr algn="l"/>
+            <a:r>
+              <a:rPr sz="1500" b="0">
+                <a:solidFill>
+                  <a:srgbClr val="FFFFFF"/>
+                </a:solidFill>
+                <a:latin typeface="Menlo"/>
+              </a:rPr>
+              <a:t>}</a:t>
+            </a:r>
+          </a:p>
+        </p:txBody>
+      </p:sp>
+      <p:sp>
+        <p:nvSpPr>
+          <p:cNvPr id="7" name="TextBox 6"/>
+          <p:cNvSpPr txBox="1"/>
+          <p:nvPr/>
+        </p:nvSpPr>
+        <p:spPr>
+          <a:xfrm>
+            <a:off x="822960" y="5623560"/>
+            <a:ext cx="10607040" cy="731520"/>
+          </a:xfrm>
+          <a:prstGeom prst="rect">
+            <a:avLst/>
+          </a:prstGeom>
+          <a:noFill/>
+        </p:spPr>
+        <p:txBody>
+          <a:bodyPr wrap="square" anchor="t">
+            <a:spAutoFit/>
+          </a:bodyPr>
+          <a:lstStyle/>
+          <a:p>
+            <a:pPr algn="ctr"/>
+            <a:r>
+              <a:rPr sz="2400" b="1" spc="-40">
+                <a:solidFill>
+                  <a:srgbClr val="1A1A1A"/>
+                </a:solidFill>
+                <a:latin typeface="Apple SD Gothic Neo"/>
+              </a:rPr>
+              <a:t>컨트롤러가 요청을 받아 서비스로 넘긴다.</a:t>
+            </a:r>
+          </a:p>
+        </p:txBody>
+      </p:sp>
+    </p:spTree>
+  </p:cSld>
+  <p:clrMapOvr>
+    <a:masterClrMapping/>
+  </p:clrMapOvr>
+</p:sld>
+</file>
+
+<file path=ppt/slides/slide23.xml><?xml version="1.0" encoding="utf-8"?>
+<p:sld xmlns:a="http://schemas.openxmlformats.org/drawingml/2006/main" xmlns:p="http://schemas.openxmlformats.org/presentationml/2006/main" xmlns:r="http://schemas.openxmlformats.org/officeDocument/2006/relationships">
+  <p:cSld>
+    <p:bg>
+      <p:bgPr>
+        <a:solidFill>
+          <a:srgbClr val="FFFFFF"/>
+        </a:solidFill>
+        <a:effectLst/>
+      </p:bgPr>
+    </p:bg>
+    <p:spTree>
+      <p:nvGrpSpPr>
+        <p:cNvPr id="1" name=""/>
+        <p:cNvGrpSpPr/>
+        <p:nvPr/>
+      </p:nvGrpSpPr>
+      <p:grpSpPr/>
+      <p:sp>
+        <p:nvSpPr>
+          <p:cNvPr id="2" name="TextBox 1"/>
+          <p:cNvSpPr txBox="1"/>
+          <p:nvPr/>
+        </p:nvSpPr>
+        <p:spPr>
+          <a:xfrm>
+            <a:off x="749808" y="566928"/>
+            <a:ext cx="10881360" cy="1371600"/>
+          </a:xfrm>
+          <a:prstGeom prst="rect">
+            <a:avLst/>
+          </a:prstGeom>
+          <a:noFill/>
+        </p:spPr>
+        <p:txBody>
+          <a:bodyPr wrap="square" anchor="t">
+            <a:spAutoFit/>
+          </a:bodyPr>
+          <a:lstStyle/>
+          <a:p>
+            <a:pPr algn="l"/>
+            <a:r>
+              <a:rPr sz="5200" b="1" spc="-100">
+                <a:solidFill>
+                  <a:srgbClr val="1A1A1A"/>
+                </a:solidFill>
+                <a:latin typeface="Apple SD Gothic Neo"/>
+              </a:rPr>
+              <a:t>백엔드 — 서비스 · 저장소</a:t>
+            </a:r>
+          </a:p>
+        </p:txBody>
+      </p:sp>
+      <p:sp>
+        <p:nvSpPr>
+          <p:cNvPr id="3" name="Rectangle 2"/>
+          <p:cNvSpPr/>
+          <p:nvPr/>
+        </p:nvSpPr>
+        <p:spPr>
+          <a:xfrm>
+            <a:off x="822960" y="1627632"/>
+            <a:ext cx="868680" cy="82296"/>
+          </a:xfrm>
+          <a:prstGeom prst="rect">
+            <a:avLst/>
+          </a:prstGeom>
+          <a:solidFill>
+            <a:srgbClr val="5B5BD6"/>
+          </a:solidFill>
+          <a:ln>
+            <a:noFill/>
+          </a:ln>
+          <a:effectLst/>
+        </p:spPr>
+        <p:style>
+          <a:lnRef idx="1">
+            <a:schemeClr val="accent1"/>
+          </a:lnRef>
+          <a:fillRef idx="3">
+            <a:schemeClr val="accent1"/>
+          </a:fillRef>
+          <a:effectRef idx="2">
+            <a:schemeClr val="accent1"/>
+          </a:effectRef>
+          <a:fontRef idx="minor">
+            <a:schemeClr val="lt1"/>
+          </a:fontRef>
+        </p:style>
+        <p:txBody>
+          <a:bodyPr rtlCol="0" anchor="ctr"/>
+          <a:lstStyle/>
+          <a:p>
+            <a:pPr algn="ctr"/>
+          </a:p>
+        </p:txBody>
+      </p:sp>
+      <p:sp>
+        <p:nvSpPr>
+          <p:cNvPr id="4" name="TextBox 3"/>
+          <p:cNvSpPr txBox="1"/>
+          <p:nvPr/>
+        </p:nvSpPr>
+        <p:spPr>
+          <a:xfrm>
+            <a:off x="822960" y="1783080"/>
+            <a:ext cx="10607040" cy="457200"/>
+          </a:xfrm>
+          <a:prstGeom prst="rect">
+            <a:avLst/>
+          </a:prstGeom>
+          <a:noFill/>
+        </p:spPr>
+        <p:txBody>
+          <a:bodyPr wrap="square" anchor="t">
+            <a:spAutoFit/>
+          </a:bodyPr>
+          <a:lstStyle/>
+          <a:p>
+            <a:pPr algn="l"/>
+            <a:r>
+              <a:rPr sz="1800" b="1" spc="-20">
+                <a:solidFill>
+                  <a:srgbClr val="5B5BD6"/>
+                </a:solidFill>
+                <a:latin typeface="Apple SD Gothic Neo"/>
+              </a:rPr>
+              <a:t>④   </a:t>
+            </a:r>
+            <a:r>
+              <a:rPr sz="1600" b="0" spc="-20">
+                <a:solidFill>
+                  <a:srgbClr val="6B7280"/>
+                </a:solidFill>
+                <a:latin typeface="Menlo"/>
+              </a:rPr>
+              <a:t>service/ProductService.java · repository/ProductRepository.java</a:t>
+            </a:r>
+          </a:p>
+        </p:txBody>
+      </p:sp>
+      <p:sp>
+        <p:nvSpPr>
+          <p:cNvPr id="5" name="Rounded Rectangle 4"/>
+          <p:cNvSpPr/>
+          <p:nvPr/>
+        </p:nvSpPr>
+        <p:spPr>
+          <a:xfrm>
+            <a:off x="822960" y="2286000"/>
+            <a:ext cx="10561320" cy="3154680"/>
+          </a:xfrm>
+          <a:prstGeom prst="roundRect">
+            <a:avLst>
+              <a:gd name="adj" fmla="val 4000"/>
+            </a:avLst>
+          </a:prstGeom>
+          <a:solidFill>
+            <a:srgbClr val="1F1D3D"/>
+          </a:solidFill>
+          <a:ln>
+            <a:noFill/>
+          </a:ln>
+          <a:effectLst/>
+        </p:spPr>
+        <p:style>
+          <a:lnRef idx="1">
+            <a:schemeClr val="accent1"/>
+          </a:lnRef>
+          <a:fillRef idx="3">
+            <a:schemeClr val="accent1"/>
+          </a:fillRef>
+          <a:effectRef idx="2">
+            <a:schemeClr val="accent1"/>
+          </a:effectRef>
+          <a:fontRef idx="minor">
+            <a:schemeClr val="lt1"/>
+          </a:fontRef>
+        </p:style>
+        <p:txBody>
+          <a:bodyPr rtlCol="0" anchor="ctr"/>
+          <a:lstStyle/>
+          <a:p>
+            <a:pPr algn="ctr"/>
+          </a:p>
+        </p:txBody>
+      </p:sp>
+      <p:sp>
+        <p:nvSpPr>
+          <p:cNvPr id="6" name="TextBox 5"/>
+          <p:cNvSpPr txBox="1"/>
+          <p:nvPr/>
+        </p:nvSpPr>
+        <p:spPr>
+          <a:xfrm>
+            <a:off x="1188720" y="2468880"/>
+            <a:ext cx="9966960" cy="2788920"/>
+          </a:xfrm>
+          <a:prstGeom prst="rect">
+            <a:avLst/>
+          </a:prstGeom>
+          <a:noFill/>
+        </p:spPr>
+        <p:txBody>
+          <a:bodyPr wrap="square" anchor="ctr">
+            <a:spAutoFit/>
+          </a:bodyPr>
+          <a:lstStyle/>
+          <a:p>
+            <a:pPr algn="l"/>
+            <a:r>
+              <a:rPr sz="1500" b="0">
+                <a:solidFill>
+                  <a:srgbClr val="CDBFF7"/>
+                </a:solidFill>
+                <a:latin typeface="Menlo"/>
+              </a:rPr>
+              <a:t>@Transactional(readOnly = true)</a:t>
+            </a:r>
+          </a:p>
+          <a:p>
+            <a:pPr algn="l"/>
+            <a:r>
+              <a:rPr sz="1500" b="0">
+                <a:solidFill>
+                  <a:srgbClr val="FFFFFF"/>
+                </a:solidFill>
+                <a:latin typeface="Menlo"/>
+              </a:rPr>
+              <a:t>ProductDetailResponse detail(Long id) {</a:t>
+            </a:r>
+          </a:p>
+          <a:p>
+            <a:pPr algn="l"/>
+            <a:r>
+              <a:rPr sz="1500" b="0">
+                <a:solidFill>
+                  <a:srgbClr val="CDBFF7"/>
+                </a:solidFill>
+                <a:latin typeface="Menlo"/>
+              </a:rPr>
+              <a:t>  return productRepository.findById(id)        // DB 조회</a:t>
+            </a:r>
+          </a:p>
+          <a:p>
+            <a:pPr algn="l"/>
+            <a:r>
+              <a:rPr sz="1500" b="0">
+                <a:solidFill>
+                  <a:srgbClr val="FFFFFF"/>
+                </a:solidFill>
+                <a:latin typeface="Menlo"/>
+              </a:rPr>
+              <a:t>      .map(ProductDetailResponse::from)</a:t>
+            </a:r>
+          </a:p>
+          <a:p>
+            <a:pPr algn="l"/>
+            <a:r>
+              <a:rPr sz="1500" b="0">
+                <a:solidFill>
+                  <a:srgbClr val="FFFFFF"/>
+                </a:solidFill>
+                <a:latin typeface="Menlo"/>
+              </a:rPr>
+              <a:t>      .orElseThrow(() -&gt; new IllegalArgumentException("상품을 찾을 수 없습니다."));</a:t>
+            </a:r>
+          </a:p>
+          <a:p>
+            <a:pPr algn="l"/>
+            <a:r>
+              <a:rPr sz="1500" b="0">
+                <a:solidFill>
+                  <a:srgbClr val="FFFFFF"/>
+                </a:solidFill>
+                <a:latin typeface="Menlo"/>
+              </a:rPr>
+              <a:t>}</a:t>
+            </a:r>
+          </a:p>
+          <a:p>
+            <a:pPr algn="l"/>
+            <a:r>
+              <a:rPr sz="1500" b="0">
+                <a:solidFill>
+                  <a:srgbClr val="FFFFFF"/>
+                </a:solidFill>
+                <a:latin typeface="Menlo"/>
+              </a:rPr>
+              <a:t/>
+            </a:r>
+          </a:p>
+          <a:p>
+            <a:pPr algn="l"/>
+            <a:r>
+              <a:rPr sz="1500" b="0">
+                <a:solidFill>
+                  <a:srgbClr val="7C83B0"/>
+                </a:solidFill>
+                <a:latin typeface="Menlo"/>
+              </a:rPr>
+              <a:t>// ProductRepository extends JpaRepository&lt;InsuranceProduct, Long&gt;</a:t>
+            </a:r>
+          </a:p>
+          <a:p>
+            <a:pPr algn="l"/>
+            <a:r>
+              <a:rPr sz="1500" b="0">
+                <a:solidFill>
+                  <a:srgbClr val="7C83B0"/>
+                </a:solidFill>
+                <a:latin typeface="Menlo"/>
+              </a:rPr>
+              <a:t>// findById → SELECT * FROM insurance_product WHERE id = 2</a:t>
+            </a:r>
+          </a:p>
+        </p:txBody>
+      </p:sp>
+      <p:sp>
+        <p:nvSpPr>
+          <p:cNvPr id="7" name="TextBox 6"/>
+          <p:cNvSpPr txBox="1"/>
+          <p:nvPr/>
+        </p:nvSpPr>
+        <p:spPr>
+          <a:xfrm>
+            <a:off x="822960" y="5623560"/>
+            <a:ext cx="10607040" cy="731520"/>
+          </a:xfrm>
+          <a:prstGeom prst="rect">
+            <a:avLst/>
+          </a:prstGeom>
+          <a:noFill/>
+        </p:spPr>
+        <p:txBody>
+          <a:bodyPr wrap="square" anchor="t">
+            <a:spAutoFit/>
+          </a:bodyPr>
+          <a:lstStyle/>
+          <a:p>
+            <a:pPr algn="ctr"/>
+            <a:r>
+              <a:rPr sz="2400" b="1" spc="-40">
+                <a:solidFill>
+                  <a:srgbClr val="1A1A1A"/>
+                </a:solidFill>
+                <a:latin typeface="Apple SD Gothic Neo"/>
+              </a:rPr>
+              <a:t>서비스가 저장소로 DB에서 상품을 꺼낸다.</a:t>
+            </a:r>
+          </a:p>
+        </p:txBody>
+      </p:sp>
+    </p:spTree>
+  </p:cSld>
+  <p:clrMapOvr>
+    <a:masterClrMapping/>
+  </p:clrMapOvr>
+</p:sld>
+</file>
+
+<file path=ppt/slides/slide24.xml><?xml version="1.0" encoding="utf-8"?>
+<p:sld xmlns:a="http://schemas.openxmlformats.org/drawingml/2006/main" xmlns:p="http://schemas.openxmlformats.org/presentationml/2006/main" xmlns:r="http://schemas.openxmlformats.org/officeDocument/2006/relationships">
+  <p:cSld>
+    <p:bg>
+      <p:bgPr>
+        <a:solidFill>
+          <a:srgbClr val="FFFFFF"/>
+        </a:solidFill>
+        <a:effectLst/>
+      </p:bgPr>
+    </p:bg>
+    <p:spTree>
+      <p:nvGrpSpPr>
+        <p:cNvPr id="1" name=""/>
+        <p:cNvGrpSpPr/>
+        <p:nvPr/>
+      </p:nvGrpSpPr>
+      <p:grpSpPr/>
+      <p:sp>
+        <p:nvSpPr>
+          <p:cNvPr id="2" name="TextBox 1"/>
+          <p:cNvSpPr txBox="1"/>
+          <p:nvPr/>
+        </p:nvSpPr>
+        <p:spPr>
+          <a:xfrm>
+            <a:off x="749808" y="566928"/>
+            <a:ext cx="10881360" cy="1371600"/>
+          </a:xfrm>
+          <a:prstGeom prst="rect">
+            <a:avLst/>
+          </a:prstGeom>
+          <a:noFill/>
+        </p:spPr>
+        <p:txBody>
+          <a:bodyPr wrap="square" anchor="t">
+            <a:spAutoFit/>
+          </a:bodyPr>
+          <a:lstStyle/>
+          <a:p>
+            <a:pPr algn="l"/>
+            <a:r>
+              <a:rPr sz="5200" b="1" spc="-100">
+                <a:solidFill>
+                  <a:srgbClr val="1A1A1A"/>
+                </a:solidFill>
+                <a:latin typeface="Apple SD Gothic Neo"/>
+              </a:rPr>
+              <a:t>백엔드 — 엔티티 → 응답 DTO</a:t>
+            </a:r>
+          </a:p>
+        </p:txBody>
+      </p:sp>
+      <p:sp>
+        <p:nvSpPr>
+          <p:cNvPr id="3" name="Rectangle 2"/>
+          <p:cNvSpPr/>
+          <p:nvPr/>
+        </p:nvSpPr>
+        <p:spPr>
+          <a:xfrm>
+            <a:off x="822960" y="1627632"/>
+            <a:ext cx="868680" cy="82296"/>
+          </a:xfrm>
+          <a:prstGeom prst="rect">
+            <a:avLst/>
+          </a:prstGeom>
+          <a:solidFill>
+            <a:srgbClr val="5B5BD6"/>
+          </a:solidFill>
+          <a:ln>
+            <a:noFill/>
+          </a:ln>
+          <a:effectLst/>
+        </p:spPr>
+        <p:style>
+          <a:lnRef idx="1">
+            <a:schemeClr val="accent1"/>
+          </a:lnRef>
+          <a:fillRef idx="3">
+            <a:schemeClr val="accent1"/>
+          </a:fillRef>
+          <a:effectRef idx="2">
+            <a:schemeClr val="accent1"/>
+          </a:effectRef>
+          <a:fontRef idx="minor">
+            <a:schemeClr val="lt1"/>
+          </a:fontRef>
+        </p:style>
+        <p:txBody>
+          <a:bodyPr rtlCol="0" anchor="ctr"/>
+          <a:lstStyle/>
+          <a:p>
+            <a:pPr algn="ctr"/>
+          </a:p>
+        </p:txBody>
+      </p:sp>
+      <p:sp>
+        <p:nvSpPr>
+          <p:cNvPr id="4" name="TextBox 3"/>
+          <p:cNvSpPr txBox="1"/>
+          <p:nvPr/>
+        </p:nvSpPr>
+        <p:spPr>
+          <a:xfrm>
+            <a:off x="822960" y="1783080"/>
+            <a:ext cx="10607040" cy="457200"/>
+          </a:xfrm>
+          <a:prstGeom prst="rect">
+            <a:avLst/>
+          </a:prstGeom>
+          <a:noFill/>
+        </p:spPr>
+        <p:txBody>
+          <a:bodyPr wrap="square" anchor="t">
+            <a:spAutoFit/>
+          </a:bodyPr>
+          <a:lstStyle/>
+          <a:p>
+            <a:pPr algn="l"/>
+            <a:r>
+              <a:rPr sz="1800" b="1" spc="-20">
+                <a:solidFill>
+                  <a:srgbClr val="5B5BD6"/>
+                </a:solidFill>
+                <a:latin typeface="Apple SD Gothic Neo"/>
+              </a:rPr>
+              <a:t>⑤   </a:t>
+            </a:r>
+            <a:r>
+              <a:rPr sz="1600" b="0" spc="-20">
+                <a:solidFill>
+                  <a:srgbClr val="6B7280"/>
+                </a:solidFill>
+                <a:latin typeface="Menlo"/>
+              </a:rPr>
+              <a:t>web/dto/ProductDetailResponse.java</a:t>
+            </a:r>
+          </a:p>
+        </p:txBody>
+      </p:sp>
+      <p:sp>
+        <p:nvSpPr>
+          <p:cNvPr id="5" name="Rounded Rectangle 4"/>
+          <p:cNvSpPr/>
+          <p:nvPr/>
+        </p:nvSpPr>
+        <p:spPr>
+          <a:xfrm>
+            <a:off x="822960" y="2286000"/>
+            <a:ext cx="10561320" cy="3154680"/>
+          </a:xfrm>
+          <a:prstGeom prst="roundRect">
+            <a:avLst>
+              <a:gd name="adj" fmla="val 4000"/>
+            </a:avLst>
+          </a:prstGeom>
+          <a:solidFill>
+            <a:srgbClr val="1F1D3D"/>
+          </a:solidFill>
+          <a:ln>
+            <a:noFill/>
+          </a:ln>
+          <a:effectLst/>
+        </p:spPr>
+        <p:style>
+          <a:lnRef idx="1">
+            <a:schemeClr val="accent1"/>
+          </a:lnRef>
+          <a:fillRef idx="3">
+            <a:schemeClr val="accent1"/>
+          </a:fillRef>
+          <a:effectRef idx="2">
+            <a:schemeClr val="accent1"/>
+          </a:effectRef>
+          <a:fontRef idx="minor">
+            <a:schemeClr val="lt1"/>
+          </a:fontRef>
+        </p:style>
+        <p:txBody>
+          <a:bodyPr rtlCol="0" anchor="ctr"/>
+          <a:lstStyle/>
+          <a:p>
+            <a:pPr algn="ctr"/>
+          </a:p>
+        </p:txBody>
+      </p:sp>
+      <p:sp>
+        <p:nvSpPr>
+          <p:cNvPr id="6" name="TextBox 5"/>
+          <p:cNvSpPr txBox="1"/>
+          <p:nvPr/>
+        </p:nvSpPr>
+        <p:spPr>
+          <a:xfrm>
+            <a:off x="1188720" y="2468880"/>
+            <a:ext cx="9966960" cy="2788920"/>
+          </a:xfrm>
+          <a:prstGeom prst="rect">
+            <a:avLst/>
+          </a:prstGeom>
+          <a:noFill/>
+        </p:spPr>
+        <p:txBody>
+          <a:bodyPr wrap="square" anchor="ctr">
+            <a:spAutoFit/>
+          </a:bodyPr>
+          <a:lstStyle/>
+          <a:p>
+            <a:pPr algn="l"/>
+            <a:r>
+              <a:rPr sz="1500" b="0">
+                <a:solidFill>
+                  <a:srgbClr val="7C83B0"/>
+                </a:solidFill>
+                <a:latin typeface="Menlo"/>
+              </a:rPr>
+              <a:t>// DB 엔티티를 화면용 데이터로 변환</a:t>
+            </a:r>
+          </a:p>
+          <a:p>
+            <a:pPr algn="l"/>
+            <a:r>
+              <a:rPr sz="1500" b="0">
+                <a:solidFill>
+                  <a:srgbClr val="CDBFF7"/>
+                </a:solidFill>
+                <a:latin typeface="Menlo"/>
+              </a:rPr>
+              <a:t>static ProductDetailResponse from(InsuranceProduct product) {</a:t>
+            </a:r>
+          </a:p>
+          <a:p>
+            <a:pPr algn="l"/>
+            <a:r>
+              <a:rPr sz="1500" b="0">
+                <a:solidFill>
+                  <a:srgbClr val="CDBFF7"/>
+                </a:solidFill>
+                <a:latin typeface="Menlo"/>
+              </a:rPr>
+              <a:t>  return new ProductDetailResponse(</a:t>
+            </a:r>
+          </a:p>
+          <a:p>
+            <a:pPr algn="l"/>
+            <a:r>
+              <a:rPr sz="1500" b="0">
+                <a:solidFill>
+                  <a:srgbClr val="FFFFFF"/>
+                </a:solidFill>
+                <a:latin typeface="Menlo"/>
+              </a:rPr>
+              <a:t>    product.getId(), product.getProductName(),</a:t>
+            </a:r>
+          </a:p>
+          <a:p>
+            <a:pPr algn="l"/>
+            <a:r>
+              <a:rPr sz="1500" b="0">
+                <a:solidFill>
+                  <a:srgbClr val="FFFFFF"/>
+                </a:solidFill>
+                <a:latin typeface="Menlo"/>
+              </a:rPr>
+              <a:t>    product.getBasePremium(),</a:t>
+            </a:r>
+          </a:p>
+          <a:p>
+            <a:pPr algn="l"/>
+            <a:r>
+              <a:rPr sz="1500" b="0">
+                <a:solidFill>
+                  <a:srgbClr val="FFFFFF"/>
+                </a:solidFill>
+                <a:latin typeface="Menlo"/>
+              </a:rPr>
+              <a:t>    product.getCoverageItems().stream()</a:t>
+            </a:r>
+          </a:p>
+          <a:p>
+            <a:pPr algn="l"/>
+            <a:r>
+              <a:rPr sz="1500" b="0">
+                <a:solidFill>
+                  <a:srgbClr val="FFFFFF"/>
+                </a:solidFill>
+                <a:latin typeface="Menlo"/>
+              </a:rPr>
+              <a:t>        .map(CoverageItemResponse::from).toList());</a:t>
+            </a:r>
+          </a:p>
+          <a:p>
+            <a:pPr algn="l"/>
+            <a:r>
+              <a:rPr sz="1500" b="0">
+                <a:solidFill>
+                  <a:srgbClr val="FFFFFF"/>
+                </a:solidFill>
+                <a:latin typeface="Menlo"/>
+              </a:rPr>
+              <a:t>}</a:t>
+            </a:r>
+          </a:p>
+        </p:txBody>
+      </p:sp>
+      <p:sp>
+        <p:nvSpPr>
+          <p:cNvPr id="7" name="TextBox 6"/>
+          <p:cNvSpPr txBox="1"/>
+          <p:nvPr/>
+        </p:nvSpPr>
+        <p:spPr>
+          <a:xfrm>
+            <a:off x="822960" y="5623560"/>
+            <a:ext cx="10607040" cy="731520"/>
+          </a:xfrm>
+          <a:prstGeom prst="rect">
+            <a:avLst/>
+          </a:prstGeom>
+          <a:noFill/>
+        </p:spPr>
+        <p:txBody>
+          <a:bodyPr wrap="square" anchor="t">
+            <a:spAutoFit/>
+          </a:bodyPr>
+          <a:lstStyle/>
+          <a:p>
+            <a:pPr algn="ctr"/>
+            <a:r>
+              <a:rPr sz="2400" b="1" spc="-40">
+                <a:solidFill>
+                  <a:srgbClr val="1A1A1A"/>
+                </a:solidFill>
+                <a:latin typeface="Apple SD Gothic Neo"/>
+              </a:rPr>
+              <a:t>DB 엔티티를 그대로 노출하지 않고 응답 DTO로 변환한다.</a:t>
+            </a:r>
+          </a:p>
+        </p:txBody>
+      </p:sp>
+    </p:spTree>
+  </p:cSld>
+  <p:clrMapOvr>
+    <a:masterClrMapping/>
+  </p:clrMapOvr>
+</p:sld>
+</file>
+
+<file path=ppt/slides/slide25.xml><?xml version="1.0" encoding="utf-8"?>
+<p:sld xmlns:a="http://schemas.openxmlformats.org/drawingml/2006/main" xmlns:p="http://schemas.openxmlformats.org/presentationml/2006/main" xmlns:r="http://schemas.openxmlformats.org/officeDocument/2006/relationships">
+  <p:cSld>
+    <p:bg>
+      <p:bgPr>
+        <a:solidFill>
+          <a:srgbClr val="FFFFFF"/>
+        </a:solidFill>
+        <a:effectLst/>
+      </p:bgPr>
+    </p:bg>
+    <p:spTree>
+      <p:nvGrpSpPr>
+        <p:cNvPr id="1" name=""/>
+        <p:cNvGrpSpPr/>
+        <p:nvPr/>
+      </p:nvGrpSpPr>
+      <p:grpSpPr/>
+      <p:sp>
+        <p:nvSpPr>
+          <p:cNvPr id="2" name="TextBox 1"/>
+          <p:cNvSpPr txBox="1"/>
+          <p:nvPr/>
+        </p:nvSpPr>
+        <p:spPr>
+          <a:xfrm>
+            <a:off x="749808" y="566928"/>
+            <a:ext cx="10881360" cy="1371600"/>
+          </a:xfrm>
+          <a:prstGeom prst="rect">
+            <a:avLst/>
+          </a:prstGeom>
+          <a:noFill/>
+        </p:spPr>
+        <p:txBody>
+          <a:bodyPr wrap="square" anchor="t">
+            <a:spAutoFit/>
+          </a:bodyPr>
+          <a:lstStyle/>
+          <a:p>
+            <a:pPr algn="l"/>
+            <a:r>
+              <a:rPr sz="5200" b="1" spc="-100">
+                <a:solidFill>
+                  <a:srgbClr val="1A1A1A"/>
+                </a:solidFill>
+                <a:latin typeface="Apple SD Gothic Neo"/>
+              </a:rPr>
+              <a:t>⑥  응답이 화면에 표시된다</a:t>
+            </a:r>
+          </a:p>
+        </p:txBody>
+      </p:sp>
+      <p:sp>
+        <p:nvSpPr>
+          <p:cNvPr id="3" name="Rectangle 2"/>
+          <p:cNvSpPr/>
+          <p:nvPr/>
+        </p:nvSpPr>
+        <p:spPr>
+          <a:xfrm>
+            <a:off x="822960" y="1627632"/>
+            <a:ext cx="868680" cy="82296"/>
+          </a:xfrm>
+          <a:prstGeom prst="rect">
+            <a:avLst/>
+          </a:prstGeom>
+          <a:solidFill>
+            <a:srgbClr val="5B5BD6"/>
+          </a:solidFill>
+          <a:ln>
+            <a:noFill/>
+          </a:ln>
+          <a:effectLst/>
+        </p:spPr>
+        <p:style>
+          <a:lnRef idx="1">
+            <a:schemeClr val="accent1"/>
+          </a:lnRef>
+          <a:fillRef idx="3">
+            <a:schemeClr val="accent1"/>
+          </a:fillRef>
+          <a:effectRef idx="2">
+            <a:schemeClr val="accent1"/>
+          </a:effectRef>
+          <a:fontRef idx="minor">
+            <a:schemeClr val="lt1"/>
+          </a:fontRef>
+        </p:style>
+        <p:txBody>
+          <a:bodyPr rtlCol="0" anchor="ctr"/>
+          <a:lstStyle/>
+          <a:p>
+            <a:pPr algn="ctr"/>
+          </a:p>
+        </p:txBody>
+      </p:sp>
+      <p:sp>
+        <p:nvSpPr>
           <p:cNvPr id="4" name="Rounded Rectangle 3"/>
           <p:cNvSpPr/>
           <p:nvPr/>
         </p:nvSpPr>
         <p:spPr>
           <a:xfrm>
-            <a:off x="777240" y="2057400"/>
-            <a:ext cx="5212080" cy="1554480"/>
+            <a:off x="777240" y="1737360"/>
+            <a:ext cx="5532120" cy="1828800"/>
           </a:xfrm>
           <a:prstGeom prst="roundRect">
             <a:avLst>
-              <a:gd name="adj" fmla="val 10000"/>
+              <a:gd name="adj" fmla="val 4000"/>
+            </a:avLst>
+          </a:prstGeom>
+          <a:solidFill>
+            <a:srgbClr val="1F1D3D"/>
+          </a:solidFill>
+          <a:ln>
+            <a:noFill/>
+          </a:ln>
+          <a:effectLst/>
+        </p:spPr>
+        <p:style>
+          <a:lnRef idx="1">
+            <a:schemeClr val="accent1"/>
+          </a:lnRef>
+          <a:fillRef idx="3">
+            <a:schemeClr val="accent1"/>
+          </a:fillRef>
+          <a:effectRef idx="2">
+            <a:schemeClr val="accent1"/>
+          </a:effectRef>
+          <a:fontRef idx="minor">
+            <a:schemeClr val="lt1"/>
+          </a:fontRef>
+        </p:style>
+        <p:txBody>
+          <a:bodyPr rtlCol="0" anchor="ctr"/>
+          <a:lstStyle/>
+          <a:p>
+            <a:pPr algn="ctr"/>
+          </a:p>
+        </p:txBody>
+      </p:sp>
+      <p:sp>
+        <p:nvSpPr>
+          <p:cNvPr id="5" name="TextBox 4"/>
+          <p:cNvSpPr txBox="1"/>
+          <p:nvPr/>
+        </p:nvSpPr>
+        <p:spPr>
+          <a:xfrm>
+            <a:off x="1051560" y="1874519"/>
+            <a:ext cx="5029200" cy="1645920"/>
+          </a:xfrm>
+          <a:prstGeom prst="rect">
+            <a:avLst/>
+          </a:prstGeom>
+          <a:noFill/>
+        </p:spPr>
+        <p:txBody>
+          <a:bodyPr wrap="square" anchor="ctr">
+            <a:spAutoFit/>
+          </a:bodyPr>
+          <a:lstStyle/>
+          <a:p>
+            <a:pPr algn="l"/>
+            <a:r>
+              <a:rPr sz="1300" b="0">
+                <a:solidFill>
+                  <a:srgbClr val="7C83B0"/>
+                </a:solidFill>
+                <a:latin typeface="Menlo"/>
+              </a:rPr>
+              <a:t>// 백엔드 응답 (JSON)</a:t>
+            </a:r>
+          </a:p>
+          <a:p>
+            <a:pPr algn="l"/>
+            <a:r>
+              <a:rPr sz="1300" b="0">
+                <a:solidFill>
+                  <a:srgbClr val="FFFFFF"/>
+                </a:solidFill>
+                <a:latin typeface="Menlo"/>
+              </a:rPr>
+              <a:t>{ "productName": "실손기본",</a:t>
+            </a:r>
+          </a:p>
+          <a:p>
+            <a:pPr algn="l"/>
+            <a:r>
+              <a:rPr sz="1300" b="0">
+                <a:solidFill>
+                  <a:srgbClr val="FFFFFF"/>
+                </a:solidFill>
+                <a:latin typeface="Menlo"/>
+              </a:rPr>
+              <a:t>  "monthlyPremium": 12000,</a:t>
+            </a:r>
+          </a:p>
+          <a:p>
+            <a:pPr algn="l"/>
+            <a:r>
+              <a:rPr sz="1300" b="0">
+                <a:solidFill>
+                  <a:srgbClr val="FFFFFF"/>
+                </a:solidFill>
+                <a:latin typeface="Menlo"/>
+              </a:rPr>
+              <a:t>  "coverageItems": [</a:t>
+            </a:r>
+          </a:p>
+          <a:p>
+            <a:pPr algn="l"/>
+            <a:r>
+              <a:rPr sz="1300" b="0">
+                <a:solidFill>
+                  <a:srgbClr val="CDBFF7"/>
+                </a:solidFill>
+                <a:latin typeface="Menlo"/>
+              </a:rPr>
+              <a:t>    {"itemName":"통원치료비" …},</a:t>
+            </a:r>
+          </a:p>
+          <a:p>
+            <a:pPr algn="l"/>
+            <a:r>
+              <a:rPr sz="1300" b="0">
+                <a:solidFill>
+                  <a:srgbClr val="CDBFF7"/>
+                </a:solidFill>
+                <a:latin typeface="Menlo"/>
+              </a:rPr>
+              <a:t>    {"itemName":"입원치료비" …} ]}</a:t>
+            </a:r>
+          </a:p>
+        </p:txBody>
+      </p:sp>
+      <p:pic>
+        <p:nvPicPr>
+          <p:cNvPr id="6" name="Picture 5" descr="products-after.png"/>
+          <p:cNvPicPr>
+            <a:picLocks noChangeAspect="1"/>
+          </p:cNvPicPr>
+          <p:nvPr/>
+        </p:nvPicPr>
+        <p:blipFill>
+          <a:blip r:embed="rId2"/>
+          <a:stretch>
+            <a:fillRect/>
+          </a:stretch>
+        </p:blipFill>
+        <p:spPr>
+          <a:xfrm>
+            <a:off x="6492240" y="1994535"/>
+            <a:ext cx="5029200" cy="3143250"/>
+          </a:xfrm>
+          <a:prstGeom prst="rect">
+            <a:avLst/>
+          </a:prstGeom>
+        </p:spPr>
+      </p:pic>
+      <p:sp>
+        <p:nvSpPr>
+          <p:cNvPr id="7" name="TextBox 6"/>
+          <p:cNvSpPr txBox="1"/>
+          <p:nvPr/>
+        </p:nvSpPr>
+        <p:spPr>
+          <a:xfrm>
+            <a:off x="777240" y="4617720"/>
+            <a:ext cx="5532120" cy="914400"/>
+          </a:xfrm>
+          <a:prstGeom prst="rect">
+            <a:avLst/>
+          </a:prstGeom>
+          <a:noFill/>
+        </p:spPr>
+        <p:txBody>
+          <a:bodyPr wrap="square" anchor="ctr">
+            <a:spAutoFit/>
+          </a:bodyPr>
+          <a:lstStyle/>
+          <a:p>
+            <a:pPr algn="l"/>
+            <a:r>
+              <a:rPr sz="1700" b="1">
+                <a:solidFill>
+                  <a:srgbClr val="1A1A1A"/>
+                </a:solidFill>
+                <a:latin typeface="Apple SD Gothic Neo"/>
+              </a:rPr>
+              <a:t>받은 데이터를 그대로 화면에</a:t>
+            </a:r>
+          </a:p>
+          <a:p>
+            <a:pPr algn="l"/>
+            <a:r>
+              <a:rPr sz="1700" b="1">
+                <a:solidFill>
+                  <a:srgbClr val="1A1A1A"/>
+                </a:solidFill>
+                <a:latin typeface="Apple SD Gothic Neo"/>
+              </a:rPr>
+              <a:t>상세·보장항목으로 렌더한다.</a:t>
+            </a:r>
+          </a:p>
+        </p:txBody>
+      </p:sp>
+      <p:sp>
+        <p:nvSpPr>
+          <p:cNvPr id="8" name="TextBox 7"/>
+          <p:cNvSpPr txBox="1"/>
+          <p:nvPr/>
+        </p:nvSpPr>
+        <p:spPr>
+          <a:xfrm>
+            <a:off x="822960" y="5806440"/>
+            <a:ext cx="10607040" cy="640080"/>
+          </a:xfrm>
+          <a:prstGeom prst="rect">
+            <a:avLst/>
+          </a:prstGeom>
+          <a:noFill/>
+        </p:spPr>
+        <p:txBody>
+          <a:bodyPr wrap="square" anchor="t">
+            <a:spAutoFit/>
+          </a:bodyPr>
+          <a:lstStyle/>
+          <a:p>
+            <a:pPr algn="ctr"/>
+            <a:r>
+              <a:rPr sz="2400" b="1" spc="-40">
+                <a:solidFill>
+                  <a:srgbClr val="1A1A1A"/>
+                </a:solidFill>
+                <a:latin typeface="Apple SD Gothic Neo"/>
+              </a:rPr>
+              <a:t>클릭 → 컨트롤러 → 서비스 → DB → DTO → 화면, 한 줄기로 흐른다.</a:t>
+            </a:r>
+          </a:p>
+        </p:txBody>
+      </p:sp>
+    </p:spTree>
+  </p:cSld>
+  <p:clrMapOvr>
+    <a:masterClrMapping/>
+  </p:clrMapOvr>
+</p:sld>
+</file>
+
+<file path=ppt/slides/slide26.xml><?xml version="1.0" encoding="utf-8"?>
+<p:sld xmlns:a="http://schemas.openxmlformats.org/drawingml/2006/main" xmlns:p="http://schemas.openxmlformats.org/presentationml/2006/main" xmlns:r="http://schemas.openxmlformats.org/officeDocument/2006/relationships">
+  <p:cSld>
+    <p:bg>
+      <p:bgPr>
+        <a:solidFill>
+          <a:srgbClr val="FFFFFF"/>
+        </a:solidFill>
+        <a:effectLst/>
+      </p:bgPr>
+    </p:bg>
+    <p:spTree>
+      <p:nvGrpSpPr>
+        <p:cNvPr id="1" name=""/>
+        <p:cNvGrpSpPr/>
+        <p:nvPr/>
+      </p:nvGrpSpPr>
+      <p:grpSpPr/>
+      <p:sp>
+        <p:nvSpPr>
+          <p:cNvPr id="2" name="TextBox 1"/>
+          <p:cNvSpPr txBox="1"/>
+          <p:nvPr/>
+        </p:nvSpPr>
+        <p:spPr>
+          <a:xfrm>
+            <a:off x="749808" y="566928"/>
+            <a:ext cx="10881360" cy="1371600"/>
+          </a:xfrm>
+          <a:prstGeom prst="rect">
+            <a:avLst/>
+          </a:prstGeom>
+          <a:noFill/>
+        </p:spPr>
+        <p:txBody>
+          <a:bodyPr wrap="square" anchor="t">
+            <a:spAutoFit/>
+          </a:bodyPr>
+          <a:lstStyle/>
+          <a:p>
+            <a:pPr algn="l"/>
+            <a:r>
+              <a:rPr sz="5200" b="1" spc="-100">
+                <a:solidFill>
+                  <a:srgbClr val="1A1A1A"/>
+                </a:solidFill>
+                <a:latin typeface="Apple SD Gothic Neo"/>
+              </a:rPr>
+              <a:t>AI를 어떻게 썼나</a:t>
+            </a:r>
+          </a:p>
+        </p:txBody>
+      </p:sp>
+      <p:sp>
+        <p:nvSpPr>
+          <p:cNvPr id="3" name="Rectangle 2"/>
+          <p:cNvSpPr/>
+          <p:nvPr/>
+        </p:nvSpPr>
+        <p:spPr>
+          <a:xfrm>
+            <a:off x="822960" y="1627632"/>
+            <a:ext cx="868680" cy="82296"/>
+          </a:xfrm>
+          <a:prstGeom prst="rect">
+            <a:avLst/>
+          </a:prstGeom>
+          <a:solidFill>
+            <a:srgbClr val="5B5BD6"/>
+          </a:solidFill>
+          <a:ln>
+            <a:noFill/>
+          </a:ln>
+          <a:effectLst/>
+        </p:spPr>
+        <p:style>
+          <a:lnRef idx="1">
+            <a:schemeClr val="accent1"/>
+          </a:lnRef>
+          <a:fillRef idx="3">
+            <a:schemeClr val="accent1"/>
+          </a:fillRef>
+          <a:effectRef idx="2">
+            <a:schemeClr val="accent1"/>
+          </a:effectRef>
+          <a:fontRef idx="minor">
+            <a:schemeClr val="lt1"/>
+          </a:fontRef>
+        </p:style>
+        <p:txBody>
+          <a:bodyPr rtlCol="0" anchor="ctr"/>
+          <a:lstStyle/>
+          <a:p>
+            <a:pPr algn="ctr"/>
+          </a:p>
+        </p:txBody>
+      </p:sp>
+      <p:sp>
+        <p:nvSpPr>
+          <p:cNvPr id="4" name="Rounded Rectangle 3"/>
+          <p:cNvSpPr/>
+          <p:nvPr/>
+        </p:nvSpPr>
+        <p:spPr>
+          <a:xfrm>
+            <a:off x="777240" y="2011680"/>
+            <a:ext cx="5212080" cy="1554480"/>
+          </a:xfrm>
+          <a:prstGeom prst="roundRect">
+            <a:avLst>
+              <a:gd name="adj" fmla="val 12000"/>
+            </a:avLst>
+          </a:prstGeom>
+          <a:solidFill>
+            <a:srgbClr val="ECEBFB"/>
+          </a:solidFill>
+          <a:ln>
+            <a:noFill/>
+          </a:ln>
+          <a:effectLst/>
+        </p:spPr>
+        <p:style>
+          <a:lnRef idx="1">
+            <a:schemeClr val="accent1"/>
+          </a:lnRef>
+          <a:fillRef idx="3">
+            <a:schemeClr val="accent1"/>
+          </a:fillRef>
+          <a:effectRef idx="2">
+            <a:schemeClr val="accent1"/>
+          </a:effectRef>
+          <a:fontRef idx="minor">
+            <a:schemeClr val="lt1"/>
+          </a:fontRef>
+        </p:style>
+        <p:txBody>
+          <a:bodyPr rtlCol="0" anchor="ctr"/>
+          <a:lstStyle/>
+          <a:p>
+            <a:pPr algn="ctr"/>
+          </a:p>
+        </p:txBody>
+      </p:sp>
+      <p:sp>
+        <p:nvSpPr>
+          <p:cNvPr id="5" name="TextBox 4"/>
+          <p:cNvSpPr txBox="1"/>
+          <p:nvPr/>
+        </p:nvSpPr>
+        <p:spPr>
+          <a:xfrm>
+            <a:off x="1097280" y="2194560"/>
+            <a:ext cx="4663440" cy="1280160"/>
+          </a:xfrm>
+          <a:prstGeom prst="rect">
+            <a:avLst/>
+          </a:prstGeom>
+          <a:noFill/>
+        </p:spPr>
+        <p:txBody>
+          <a:bodyPr wrap="square" anchor="ctr">
+            <a:spAutoFit/>
+          </a:bodyPr>
+          <a:lstStyle/>
+          <a:p>
+            <a:pPr algn="l"/>
+            <a:r>
+              <a:rPr sz="2600" b="1">
+                <a:solidFill>
+                  <a:srgbClr val="5B5BD6"/>
+                </a:solidFill>
+                <a:latin typeface="Apple SD Gothic Neo"/>
+              </a:rPr>
+              <a:t>사람</a:t>
+            </a:r>
+          </a:p>
+          <a:p>
+            <a:pPr algn="l"/>
+            <a:r>
+              <a:rPr sz="2200" b="1">
+                <a:solidFill>
+                  <a:srgbClr val="1A1A1A"/>
+                </a:solidFill>
+                <a:latin typeface="Apple SD Gothic Neo"/>
+              </a:rPr>
+              <a:t>설계 · 결정 · 검토</a:t>
+            </a:r>
+          </a:p>
+        </p:txBody>
+      </p:sp>
+      <p:sp>
+        <p:nvSpPr>
+          <p:cNvPr id="6" name="Rounded Rectangle 5"/>
+          <p:cNvSpPr/>
+          <p:nvPr/>
+        </p:nvSpPr>
+        <p:spPr>
+          <a:xfrm>
+            <a:off x="6172200" y="2011680"/>
+            <a:ext cx="5212080" cy="1554480"/>
+          </a:xfrm>
+          <a:prstGeom prst="roundRect">
+            <a:avLst>
+              <a:gd name="adj" fmla="val 12000"/>
             </a:avLst>
           </a:prstGeom>
           <a:solidFill>
@@ -8781,14 +9202,582 @@
       </p:sp>
       <p:sp>
         <p:nvSpPr>
-          <p:cNvPr id="5" name="Rectangle 4"/>
+          <p:cNvPr id="7" name="TextBox 6"/>
+          <p:cNvSpPr txBox="1"/>
+          <p:nvPr/>
+        </p:nvSpPr>
+        <p:spPr>
+          <a:xfrm>
+            <a:off x="6492240" y="2194560"/>
+            <a:ext cx="4663440" cy="1280160"/>
+          </a:xfrm>
+          <a:prstGeom prst="rect">
+            <a:avLst/>
+          </a:prstGeom>
+          <a:noFill/>
+        </p:spPr>
+        <p:txBody>
+          <a:bodyPr wrap="square" anchor="ctr">
+            <a:spAutoFit/>
+          </a:bodyPr>
+          <a:lstStyle/>
+          <a:p>
+            <a:pPr algn="l"/>
+            <a:r>
+              <a:rPr sz="2600" b="1">
+                <a:solidFill>
+                  <a:srgbClr val="1A1A1A"/>
+                </a:solidFill>
+                <a:latin typeface="Apple SD Gothic Neo"/>
+              </a:rPr>
+              <a:t>AI</a:t>
+            </a:r>
+          </a:p>
+          <a:p>
+            <a:pPr algn="l"/>
+            <a:r>
+              <a:rPr sz="2200" b="1">
+                <a:solidFill>
+                  <a:srgbClr val="1A1A1A"/>
+                </a:solidFill>
+                <a:latin typeface="Apple SD Gothic Neo"/>
+              </a:rPr>
+              <a:t>구현 · 테스트 · 정리</a:t>
+            </a:r>
+          </a:p>
+        </p:txBody>
+      </p:sp>
+      <p:sp>
+        <p:nvSpPr>
+          <p:cNvPr id="8" name="Rounded Rectangle 7"/>
           <p:cNvSpPr/>
           <p:nvPr/>
         </p:nvSpPr>
         <p:spPr>
           <a:xfrm>
-            <a:off x="777240" y="2286000"/>
-            <a:ext cx="109728" cy="1097280"/>
+            <a:off x="412851" y="3977639"/>
+            <a:ext cx="1965960" cy="1097280"/>
+          </a:xfrm>
+          <a:prstGeom prst="roundRect">
+            <a:avLst>
+              <a:gd name="adj" fmla="val 16000"/>
+            </a:avLst>
+          </a:prstGeom>
+          <a:solidFill>
+            <a:srgbClr val="F4F4F6"/>
+          </a:solidFill>
+          <a:ln w="15240">
+            <a:solidFill>
+              <a:srgbClr val="E6E6E6"/>
+            </a:solidFill>
+          </a:ln>
+          <a:effectLst/>
+        </p:spPr>
+        <p:style>
+          <a:lnRef idx="1">
+            <a:schemeClr val="accent1"/>
+          </a:lnRef>
+          <a:fillRef idx="3">
+            <a:schemeClr val="accent1"/>
+          </a:fillRef>
+          <a:effectRef idx="2">
+            <a:schemeClr val="accent1"/>
+          </a:effectRef>
+          <a:fontRef idx="minor">
+            <a:schemeClr val="lt1"/>
+          </a:fontRef>
+        </p:style>
+        <p:txBody>
+          <a:bodyPr rtlCol="0" anchor="ctr" tIns="76200" bIns="76200" lIns="177800" rIns="177800" wrap="square"/>
+          <a:lstStyle/>
+          <a:p>
+            <a:pPr algn="ctr"/>
+            <a:r>
+              <a:rPr sz="2100" b="1">
+                <a:solidFill>
+                  <a:srgbClr val="1A1A1A"/>
+                </a:solidFill>
+                <a:latin typeface="Apple SD Gothic Neo"/>
+              </a:rPr>
+              <a:t>설계</a:t>
+            </a:r>
+          </a:p>
+        </p:txBody>
+      </p:sp>
+      <p:sp>
+        <p:nvSpPr>
+          <p:cNvPr id="9" name="TextBox 8"/>
+          <p:cNvSpPr txBox="1"/>
+          <p:nvPr/>
+        </p:nvSpPr>
+        <p:spPr>
+          <a:xfrm>
+            <a:off x="2378811" y="4206240"/>
+            <a:ext cx="640080" cy="640080"/>
+          </a:xfrm>
+          <a:prstGeom prst="rect">
+            <a:avLst/>
+          </a:prstGeom>
+          <a:noFill/>
+        </p:spPr>
+        <p:txBody>
+          <a:bodyPr wrap="square" anchor="ctr">
+            <a:spAutoFit/>
+          </a:bodyPr>
+          <a:lstStyle/>
+          <a:p>
+            <a:pPr algn="ctr"/>
+            <a:r>
+              <a:rPr sz="2600" b="1">
+                <a:solidFill>
+                  <a:srgbClr val="5B5BD6"/>
+                </a:solidFill>
+                <a:latin typeface="Apple SD Gothic Neo"/>
+              </a:rPr>
+              <a:t>→</a:t>
+            </a:r>
+          </a:p>
+        </p:txBody>
+      </p:sp>
+      <p:sp>
+        <p:nvSpPr>
+          <p:cNvPr id="10" name="Rounded Rectangle 9"/>
+          <p:cNvSpPr/>
+          <p:nvPr/>
+        </p:nvSpPr>
+        <p:spPr>
+          <a:xfrm>
+            <a:off x="2762859" y="3977639"/>
+            <a:ext cx="1965960" cy="1097280"/>
+          </a:xfrm>
+          <a:prstGeom prst="roundRect">
+            <a:avLst>
+              <a:gd name="adj" fmla="val 16000"/>
+            </a:avLst>
+          </a:prstGeom>
+          <a:solidFill>
+            <a:srgbClr val="F4F4F6"/>
+          </a:solidFill>
+          <a:ln w="15240">
+            <a:solidFill>
+              <a:srgbClr val="E6E6E6"/>
+            </a:solidFill>
+          </a:ln>
+          <a:effectLst/>
+        </p:spPr>
+        <p:style>
+          <a:lnRef idx="1">
+            <a:schemeClr val="accent1"/>
+          </a:lnRef>
+          <a:fillRef idx="3">
+            <a:schemeClr val="accent1"/>
+          </a:fillRef>
+          <a:effectRef idx="2">
+            <a:schemeClr val="accent1"/>
+          </a:effectRef>
+          <a:fontRef idx="minor">
+            <a:schemeClr val="lt1"/>
+          </a:fontRef>
+        </p:style>
+        <p:txBody>
+          <a:bodyPr rtlCol="0" anchor="ctr" tIns="76200" bIns="76200" lIns="177800" rIns="177800" wrap="square"/>
+          <a:lstStyle/>
+          <a:p>
+            <a:pPr algn="ctr"/>
+            <a:r>
+              <a:rPr sz="2100" b="1">
+                <a:solidFill>
+                  <a:srgbClr val="1A1A1A"/>
+                </a:solidFill>
+                <a:latin typeface="Apple SD Gothic Neo"/>
+              </a:rPr>
+              <a:t>따져묻기</a:t>
+            </a:r>
+          </a:p>
+        </p:txBody>
+      </p:sp>
+      <p:sp>
+        <p:nvSpPr>
+          <p:cNvPr id="11" name="TextBox 10"/>
+          <p:cNvSpPr txBox="1"/>
+          <p:nvPr/>
+        </p:nvSpPr>
+        <p:spPr>
+          <a:xfrm>
+            <a:off x="4728819" y="4206240"/>
+            <a:ext cx="640080" cy="640080"/>
+          </a:xfrm>
+          <a:prstGeom prst="rect">
+            <a:avLst/>
+          </a:prstGeom>
+          <a:noFill/>
+        </p:spPr>
+        <p:txBody>
+          <a:bodyPr wrap="square" anchor="ctr">
+            <a:spAutoFit/>
+          </a:bodyPr>
+          <a:lstStyle/>
+          <a:p>
+            <a:pPr algn="ctr"/>
+            <a:r>
+              <a:rPr sz="2600" b="1">
+                <a:solidFill>
+                  <a:srgbClr val="5B5BD6"/>
+                </a:solidFill>
+                <a:latin typeface="Apple SD Gothic Neo"/>
+              </a:rPr>
+              <a:t>→</a:t>
+            </a:r>
+          </a:p>
+        </p:txBody>
+      </p:sp>
+      <p:sp>
+        <p:nvSpPr>
+          <p:cNvPr id="12" name="Rounded Rectangle 11"/>
+          <p:cNvSpPr/>
+          <p:nvPr/>
+        </p:nvSpPr>
+        <p:spPr>
+          <a:xfrm>
+            <a:off x="5112867" y="3977639"/>
+            <a:ext cx="1965960" cy="1097280"/>
+          </a:xfrm>
+          <a:prstGeom prst="roundRect">
+            <a:avLst>
+              <a:gd name="adj" fmla="val 16000"/>
+            </a:avLst>
+          </a:prstGeom>
+          <a:solidFill>
+            <a:srgbClr val="F4F4F6"/>
+          </a:solidFill>
+          <a:ln w="15240">
+            <a:solidFill>
+              <a:srgbClr val="E6E6E6"/>
+            </a:solidFill>
+          </a:ln>
+          <a:effectLst/>
+        </p:spPr>
+        <p:style>
+          <a:lnRef idx="1">
+            <a:schemeClr val="accent1"/>
+          </a:lnRef>
+          <a:fillRef idx="3">
+            <a:schemeClr val="accent1"/>
+          </a:fillRef>
+          <a:effectRef idx="2">
+            <a:schemeClr val="accent1"/>
+          </a:effectRef>
+          <a:fontRef idx="minor">
+            <a:schemeClr val="lt1"/>
+          </a:fontRef>
+        </p:style>
+        <p:txBody>
+          <a:bodyPr rtlCol="0" anchor="ctr" tIns="76200" bIns="76200" lIns="177800" rIns="177800" wrap="square"/>
+          <a:lstStyle/>
+          <a:p>
+            <a:pPr algn="ctr"/>
+            <a:r>
+              <a:rPr sz="2100" b="1">
+                <a:solidFill>
+                  <a:srgbClr val="1A1A1A"/>
+                </a:solidFill>
+                <a:latin typeface="Apple SD Gothic Neo"/>
+              </a:rPr>
+              <a:t>계획</a:t>
+            </a:r>
+          </a:p>
+        </p:txBody>
+      </p:sp>
+      <p:sp>
+        <p:nvSpPr>
+          <p:cNvPr id="13" name="TextBox 12"/>
+          <p:cNvSpPr txBox="1"/>
+          <p:nvPr/>
+        </p:nvSpPr>
+        <p:spPr>
+          <a:xfrm>
+            <a:off x="7078827" y="4206240"/>
+            <a:ext cx="640080" cy="640080"/>
+          </a:xfrm>
+          <a:prstGeom prst="rect">
+            <a:avLst/>
+          </a:prstGeom>
+          <a:noFill/>
+        </p:spPr>
+        <p:txBody>
+          <a:bodyPr wrap="square" anchor="ctr">
+            <a:spAutoFit/>
+          </a:bodyPr>
+          <a:lstStyle/>
+          <a:p>
+            <a:pPr algn="ctr"/>
+            <a:r>
+              <a:rPr sz="2600" b="1">
+                <a:solidFill>
+                  <a:srgbClr val="5B5BD6"/>
+                </a:solidFill>
+                <a:latin typeface="Apple SD Gothic Neo"/>
+              </a:rPr>
+              <a:t>→</a:t>
+            </a:r>
+          </a:p>
+        </p:txBody>
+      </p:sp>
+      <p:sp>
+        <p:nvSpPr>
+          <p:cNvPr id="14" name="Rounded Rectangle 13"/>
+          <p:cNvSpPr/>
+          <p:nvPr/>
+        </p:nvSpPr>
+        <p:spPr>
+          <a:xfrm>
+            <a:off x="7462875" y="3977639"/>
+            <a:ext cx="1965960" cy="1097280"/>
+          </a:xfrm>
+          <a:prstGeom prst="roundRect">
+            <a:avLst>
+              <a:gd name="adj" fmla="val 16000"/>
+            </a:avLst>
+          </a:prstGeom>
+          <a:solidFill>
+            <a:srgbClr val="ECEBFB"/>
+          </a:solidFill>
+          <a:ln w="15240">
+            <a:solidFill>
+              <a:srgbClr val="E6E6E6"/>
+            </a:solidFill>
+          </a:ln>
+          <a:effectLst/>
+        </p:spPr>
+        <p:style>
+          <a:lnRef idx="1">
+            <a:schemeClr val="accent1"/>
+          </a:lnRef>
+          <a:fillRef idx="3">
+            <a:schemeClr val="accent1"/>
+          </a:fillRef>
+          <a:effectRef idx="2">
+            <a:schemeClr val="accent1"/>
+          </a:effectRef>
+          <a:fontRef idx="minor">
+            <a:schemeClr val="lt1"/>
+          </a:fontRef>
+        </p:style>
+        <p:txBody>
+          <a:bodyPr rtlCol="0" anchor="ctr" tIns="76200" bIns="76200" lIns="177800" rIns="177800" wrap="square"/>
+          <a:lstStyle/>
+          <a:p>
+            <a:pPr algn="ctr"/>
+            <a:r>
+              <a:rPr sz="2100" b="1">
+                <a:solidFill>
+                  <a:srgbClr val="1A1A1A"/>
+                </a:solidFill>
+                <a:latin typeface="Apple SD Gothic Neo"/>
+              </a:rPr>
+              <a:t>테스트 먼저 구현</a:t>
+            </a:r>
+          </a:p>
+        </p:txBody>
+      </p:sp>
+      <p:sp>
+        <p:nvSpPr>
+          <p:cNvPr id="15" name="TextBox 14"/>
+          <p:cNvSpPr txBox="1"/>
+          <p:nvPr/>
+        </p:nvSpPr>
+        <p:spPr>
+          <a:xfrm>
+            <a:off x="9428835" y="4206240"/>
+            <a:ext cx="640080" cy="640080"/>
+          </a:xfrm>
+          <a:prstGeom prst="rect">
+            <a:avLst/>
+          </a:prstGeom>
+          <a:noFill/>
+        </p:spPr>
+        <p:txBody>
+          <a:bodyPr wrap="square" anchor="ctr">
+            <a:spAutoFit/>
+          </a:bodyPr>
+          <a:lstStyle/>
+          <a:p>
+            <a:pPr algn="ctr"/>
+            <a:r>
+              <a:rPr sz="2600" b="1">
+                <a:solidFill>
+                  <a:srgbClr val="5B5BD6"/>
+                </a:solidFill>
+                <a:latin typeface="Apple SD Gothic Neo"/>
+              </a:rPr>
+              <a:t>→</a:t>
+            </a:r>
+          </a:p>
+        </p:txBody>
+      </p:sp>
+      <p:sp>
+        <p:nvSpPr>
+          <p:cNvPr id="16" name="Rounded Rectangle 15"/>
+          <p:cNvSpPr/>
+          <p:nvPr/>
+        </p:nvSpPr>
+        <p:spPr>
+          <a:xfrm>
+            <a:off x="9812883" y="3977639"/>
+            <a:ext cx="1965960" cy="1097280"/>
+          </a:xfrm>
+          <a:prstGeom prst="roundRect">
+            <a:avLst>
+              <a:gd name="adj" fmla="val 16000"/>
+            </a:avLst>
+          </a:prstGeom>
+          <a:solidFill>
+            <a:srgbClr val="F4F4F6"/>
+          </a:solidFill>
+          <a:ln w="15240">
+            <a:solidFill>
+              <a:srgbClr val="E6E6E6"/>
+            </a:solidFill>
+          </a:ln>
+          <a:effectLst/>
+        </p:spPr>
+        <p:style>
+          <a:lnRef idx="1">
+            <a:schemeClr val="accent1"/>
+          </a:lnRef>
+          <a:fillRef idx="3">
+            <a:schemeClr val="accent1"/>
+          </a:fillRef>
+          <a:effectRef idx="2">
+            <a:schemeClr val="accent1"/>
+          </a:effectRef>
+          <a:fontRef idx="minor">
+            <a:schemeClr val="lt1"/>
+          </a:fontRef>
+        </p:style>
+        <p:txBody>
+          <a:bodyPr rtlCol="0" anchor="ctr" tIns="76200" bIns="76200" lIns="177800" rIns="177800" wrap="square"/>
+          <a:lstStyle/>
+          <a:p>
+            <a:pPr algn="ctr"/>
+            <a:r>
+              <a:rPr sz="2100" b="1">
+                <a:solidFill>
+                  <a:srgbClr val="1A1A1A"/>
+                </a:solidFill>
+                <a:latin typeface="Apple SD Gothic Neo"/>
+              </a:rPr>
+              <a:t>검토</a:t>
+            </a:r>
+          </a:p>
+        </p:txBody>
+      </p:sp>
+      <p:sp>
+        <p:nvSpPr>
+          <p:cNvPr id="17" name="TextBox 16"/>
+          <p:cNvSpPr txBox="1"/>
+          <p:nvPr/>
+        </p:nvSpPr>
+        <p:spPr>
+          <a:xfrm>
+            <a:off x="777240" y="5440680"/>
+            <a:ext cx="10607040" cy="822960"/>
+          </a:xfrm>
+          <a:prstGeom prst="rect">
+            <a:avLst/>
+          </a:prstGeom>
+          <a:noFill/>
+        </p:spPr>
+        <p:txBody>
+          <a:bodyPr wrap="square" anchor="t">
+            <a:spAutoFit/>
+          </a:bodyPr>
+          <a:lstStyle/>
+          <a:p>
+            <a:pPr algn="ctr"/>
+            <a:r>
+              <a:rPr sz="2800" b="1" spc="-40">
+                <a:solidFill>
+                  <a:srgbClr val="1A1A1A"/>
+                </a:solidFill>
+                <a:latin typeface="Apple SD Gothic Neo"/>
+              </a:rPr>
+              <a:t>설계와 결정은 사람이, 구현은 AI가 했다.</a:t>
+            </a:r>
+          </a:p>
+        </p:txBody>
+      </p:sp>
+    </p:spTree>
+  </p:cSld>
+  <p:clrMapOvr>
+    <a:masterClrMapping/>
+  </p:clrMapOvr>
+</p:sld>
+</file>
+
+<file path=ppt/slides/slide27.xml><?xml version="1.0" encoding="utf-8"?>
+<p:sld xmlns:a="http://schemas.openxmlformats.org/drawingml/2006/main" xmlns:p="http://schemas.openxmlformats.org/presentationml/2006/main" xmlns:r="http://schemas.openxmlformats.org/officeDocument/2006/relationships">
+  <p:cSld>
+    <p:bg>
+      <p:bgPr>
+        <a:solidFill>
+          <a:srgbClr val="FFFFFF"/>
+        </a:solidFill>
+        <a:effectLst/>
+      </p:bgPr>
+    </p:bg>
+    <p:spTree>
+      <p:nvGrpSpPr>
+        <p:cNvPr id="1" name=""/>
+        <p:cNvGrpSpPr/>
+        <p:nvPr/>
+      </p:nvGrpSpPr>
+      <p:grpSpPr/>
+      <p:sp>
+        <p:nvSpPr>
+          <p:cNvPr id="2" name="TextBox 1"/>
+          <p:cNvSpPr txBox="1"/>
+          <p:nvPr/>
+        </p:nvSpPr>
+        <p:spPr>
+          <a:xfrm>
+            <a:off x="749808" y="566928"/>
+            <a:ext cx="10881360" cy="1371600"/>
+          </a:xfrm>
+          <a:prstGeom prst="rect">
+            <a:avLst/>
+          </a:prstGeom>
+          <a:noFill/>
+        </p:spPr>
+        <p:txBody>
+          <a:bodyPr wrap="square" anchor="t">
+            <a:spAutoFit/>
+          </a:bodyPr>
+          <a:lstStyle/>
+          <a:p>
+            <a:pPr algn="l"/>
+            <a:r>
+              <a:rPr sz="5200" b="1" spc="-100">
+                <a:solidFill>
+                  <a:srgbClr val="1A1A1A"/>
+                </a:solidFill>
+                <a:latin typeface="Apple SD Gothic Neo"/>
+              </a:rPr>
+              <a:t>AI가 삑사리 난 곳, 어떻게 잡았나</a:t>
+            </a:r>
+          </a:p>
+        </p:txBody>
+      </p:sp>
+      <p:sp>
+        <p:nvSpPr>
+          <p:cNvPr id="3" name="Rectangle 2"/>
+          <p:cNvSpPr/>
+          <p:nvPr/>
+        </p:nvSpPr>
+        <p:spPr>
+          <a:xfrm>
+            <a:off x="822960" y="1627632"/>
+            <a:ext cx="868680" cy="82296"/>
           </a:xfrm>
           <a:prstGeom prst="rect">
             <a:avLst/>
@@ -8825,60 +9814,13 @@
       </p:sp>
       <p:sp>
         <p:nvSpPr>
-          <p:cNvPr id="6" name="TextBox 5"/>
-          <p:cNvSpPr txBox="1"/>
-          <p:nvPr/>
-        </p:nvSpPr>
-        <p:spPr>
-          <a:xfrm>
-            <a:off x="1234440" y="2258568"/>
-            <a:ext cx="4572000" cy="1234440"/>
-          </a:xfrm>
-          <a:prstGeom prst="rect">
-            <a:avLst/>
-          </a:prstGeom>
-          <a:noFill/>
-        </p:spPr>
-        <p:txBody>
-          <a:bodyPr wrap="square" anchor="ctr">
-            <a:spAutoFit/>
-          </a:bodyPr>
-          <a:lstStyle/>
-          <a:p>
-            <a:pPr algn="l"/>
-            <a:r>
-              <a:rPr sz="2400" b="1" spc="-30">
-                <a:solidFill>
-                  <a:srgbClr val="1A1A1A"/>
-                </a:solidFill>
-                <a:latin typeface="Apple SD Gothic Neo"/>
-              </a:rPr>
-              <a:t>성급하게 쪼갬</a:t>
-            </a:r>
-          </a:p>
-          <a:p>
-            <a:pPr algn="l"/>
-            <a:r>
-              <a:rPr sz="1900" b="1" spc="-30">
-                <a:solidFill>
-                  <a:srgbClr val="6B7280"/>
-                </a:solidFill>
-                <a:latin typeface="Apple SD Gothic Neo"/>
-              </a:rPr>
-              <a:t>쓸모없는 계층 분리 → 되돌림</a:t>
-            </a:r>
-          </a:p>
-        </p:txBody>
-      </p:sp>
-      <p:sp>
-        <p:nvSpPr>
-          <p:cNvPr id="7" name="Rounded Rectangle 6"/>
+          <p:cNvPr id="4" name="Rounded Rectangle 3"/>
           <p:cNvSpPr/>
           <p:nvPr/>
         </p:nvSpPr>
         <p:spPr>
           <a:xfrm>
-            <a:off x="6172200" y="2057400"/>
+            <a:off x="777240" y="2057400"/>
             <a:ext cx="5212080" cy="1554480"/>
           </a:xfrm>
           <a:prstGeom prst="roundRect">
@@ -8920,13 +9862,13 @@
       </p:sp>
       <p:sp>
         <p:nvSpPr>
-          <p:cNvPr id="8" name="Rectangle 7"/>
+          <p:cNvPr id="5" name="Rectangle 4"/>
           <p:cNvSpPr/>
           <p:nvPr/>
         </p:nvSpPr>
         <p:spPr>
           <a:xfrm>
-            <a:off x="6172200" y="2286000"/>
+            <a:off x="777240" y="2286000"/>
             <a:ext cx="109728" cy="1097280"/>
           </a:xfrm>
           <a:prstGeom prst="rect">
@@ -8964,13 +9906,13 @@
       </p:sp>
       <p:sp>
         <p:nvSpPr>
-          <p:cNvPr id="9" name="TextBox 8"/>
+          <p:cNvPr id="6" name="TextBox 5"/>
           <p:cNvSpPr txBox="1"/>
           <p:nvPr/>
         </p:nvSpPr>
         <p:spPr>
           <a:xfrm>
-            <a:off x="6629400" y="2258568"/>
+            <a:off x="1234440" y="2258568"/>
             <a:ext cx="4572000" cy="1234440"/>
           </a:xfrm>
           <a:prstGeom prst="rect">
@@ -8992,7 +9934,7 @@
                 </a:solidFill>
                 <a:latin typeface="Apple SD Gothic Neo"/>
               </a:rPr>
-              <a:t>시킨 것과 다름</a:t>
+              <a:t>성급하게 쪼갬</a:t>
             </a:r>
           </a:p>
           <a:p>
@@ -9004,20 +9946,20 @@
                 </a:solidFill>
                 <a:latin typeface="Apple SD Gothic Neo"/>
               </a:rPr>
-              <a:t>자동 배정 → 수동 배정으로 정정</a:t>
-            </a:r>
-          </a:p>
-        </p:txBody>
-      </p:sp>
-      <p:sp>
-        <p:nvSpPr>
-          <p:cNvPr id="10" name="Rounded Rectangle 9"/>
+              <a:t>쓸모없는 계층 분리 → 되돌림</a:t>
+            </a:r>
+          </a:p>
+        </p:txBody>
+      </p:sp>
+      <p:sp>
+        <p:nvSpPr>
+          <p:cNvPr id="7" name="Rounded Rectangle 6"/>
           <p:cNvSpPr/>
           <p:nvPr/>
         </p:nvSpPr>
         <p:spPr>
           <a:xfrm>
-            <a:off x="777240" y="3794760"/>
+            <a:off x="6172200" y="2057400"/>
             <a:ext cx="5212080" cy="1554480"/>
           </a:xfrm>
           <a:prstGeom prst="roundRect">
@@ -9059,13 +10001,13 @@
       </p:sp>
       <p:sp>
         <p:nvSpPr>
-          <p:cNvPr id="11" name="Rectangle 10"/>
+          <p:cNvPr id="8" name="Rectangle 7"/>
           <p:cNvSpPr/>
           <p:nvPr/>
         </p:nvSpPr>
         <p:spPr>
           <a:xfrm>
-            <a:off x="777240" y="4023360"/>
+            <a:off x="6172200" y="2286000"/>
             <a:ext cx="109728" cy="1097280"/>
           </a:xfrm>
           <a:prstGeom prst="rect">
@@ -9103,13 +10045,13 @@
       </p:sp>
       <p:sp>
         <p:nvSpPr>
-          <p:cNvPr id="12" name="TextBox 11"/>
+          <p:cNvPr id="9" name="TextBox 8"/>
           <p:cNvSpPr txBox="1"/>
           <p:nvPr/>
         </p:nvSpPr>
         <p:spPr>
           <a:xfrm>
-            <a:off x="1234440" y="3995928"/>
+            <a:off x="6629400" y="2258568"/>
             <a:ext cx="4572000" cy="1234440"/>
           </a:xfrm>
           <a:prstGeom prst="rect">
@@ -9131,7 +10073,7 @@
                 </a:solidFill>
                 <a:latin typeface="Apple SD Gothic Neo"/>
               </a:rPr>
-              <a:t>정해둔 틀에서 이탈</a:t>
+              <a:t>시킨 것과 다름</a:t>
             </a:r>
           </a:p>
           <a:p>
@@ -9143,20 +10085,20 @@
                 </a:solidFill>
                 <a:latin typeface="Apple SD Gothic Neo"/>
               </a:rPr>
-              <a:t>점검으로 찾아내 관리</a:t>
-            </a:r>
-          </a:p>
-        </p:txBody>
-      </p:sp>
-      <p:sp>
-        <p:nvSpPr>
-          <p:cNvPr id="13" name="Rounded Rectangle 12"/>
+              <a:t>자동 배정 → 수동 배정으로 정정</a:t>
+            </a:r>
+          </a:p>
+        </p:txBody>
+      </p:sp>
+      <p:sp>
+        <p:nvSpPr>
+          <p:cNvPr id="10" name="Rounded Rectangle 9"/>
           <p:cNvSpPr/>
           <p:nvPr/>
         </p:nvSpPr>
         <p:spPr>
           <a:xfrm>
-            <a:off x="6172200" y="3794760"/>
+            <a:off x="777240" y="3794760"/>
             <a:ext cx="5212080" cy="1554480"/>
           </a:xfrm>
           <a:prstGeom prst="roundRect">
@@ -9198,6 +10140,145 @@
       </p:sp>
       <p:sp>
         <p:nvSpPr>
+          <p:cNvPr id="11" name="Rectangle 10"/>
+          <p:cNvSpPr/>
+          <p:nvPr/>
+        </p:nvSpPr>
+        <p:spPr>
+          <a:xfrm>
+            <a:off x="777240" y="4023360"/>
+            <a:ext cx="109728" cy="1097280"/>
+          </a:xfrm>
+          <a:prstGeom prst="rect">
+            <a:avLst/>
+          </a:prstGeom>
+          <a:solidFill>
+            <a:srgbClr val="5B5BD6"/>
+          </a:solidFill>
+          <a:ln>
+            <a:noFill/>
+          </a:ln>
+          <a:effectLst/>
+        </p:spPr>
+        <p:style>
+          <a:lnRef idx="1">
+            <a:schemeClr val="accent1"/>
+          </a:lnRef>
+          <a:fillRef idx="3">
+            <a:schemeClr val="accent1"/>
+          </a:fillRef>
+          <a:effectRef idx="2">
+            <a:schemeClr val="accent1"/>
+          </a:effectRef>
+          <a:fontRef idx="minor">
+            <a:schemeClr val="lt1"/>
+          </a:fontRef>
+        </p:style>
+        <p:txBody>
+          <a:bodyPr rtlCol="0" anchor="ctr"/>
+          <a:lstStyle/>
+          <a:p>
+            <a:pPr algn="ctr"/>
+          </a:p>
+        </p:txBody>
+      </p:sp>
+      <p:sp>
+        <p:nvSpPr>
+          <p:cNvPr id="12" name="TextBox 11"/>
+          <p:cNvSpPr txBox="1"/>
+          <p:nvPr/>
+        </p:nvSpPr>
+        <p:spPr>
+          <a:xfrm>
+            <a:off x="1234440" y="3995928"/>
+            <a:ext cx="4572000" cy="1234440"/>
+          </a:xfrm>
+          <a:prstGeom prst="rect">
+            <a:avLst/>
+          </a:prstGeom>
+          <a:noFill/>
+        </p:spPr>
+        <p:txBody>
+          <a:bodyPr wrap="square" anchor="ctr">
+            <a:spAutoFit/>
+          </a:bodyPr>
+          <a:lstStyle/>
+          <a:p>
+            <a:pPr algn="l"/>
+            <a:r>
+              <a:rPr sz="2400" b="1" spc="-30">
+                <a:solidFill>
+                  <a:srgbClr val="1A1A1A"/>
+                </a:solidFill>
+                <a:latin typeface="Apple SD Gothic Neo"/>
+              </a:rPr>
+              <a:t>정해둔 틀에서 이탈</a:t>
+            </a:r>
+          </a:p>
+          <a:p>
+            <a:pPr algn="l"/>
+            <a:r>
+              <a:rPr sz="1900" b="1" spc="-30">
+                <a:solidFill>
+                  <a:srgbClr val="6B7280"/>
+                </a:solidFill>
+                <a:latin typeface="Apple SD Gothic Neo"/>
+              </a:rPr>
+              <a:t>점검으로 찾아내 관리</a:t>
+            </a:r>
+          </a:p>
+        </p:txBody>
+      </p:sp>
+      <p:sp>
+        <p:nvSpPr>
+          <p:cNvPr id="13" name="Rounded Rectangle 12"/>
+          <p:cNvSpPr/>
+          <p:nvPr/>
+        </p:nvSpPr>
+        <p:spPr>
+          <a:xfrm>
+            <a:off x="6172200" y="3794760"/>
+            <a:ext cx="5212080" cy="1554480"/>
+          </a:xfrm>
+          <a:prstGeom prst="roundRect">
+            <a:avLst>
+              <a:gd name="adj" fmla="val 10000"/>
+            </a:avLst>
+          </a:prstGeom>
+          <a:solidFill>
+            <a:srgbClr val="F4F4F6"/>
+          </a:solidFill>
+          <a:ln w="12700">
+            <a:solidFill>
+              <a:srgbClr val="E6E6E6"/>
+            </a:solidFill>
+          </a:ln>
+          <a:effectLst/>
+        </p:spPr>
+        <p:style>
+          <a:lnRef idx="1">
+            <a:schemeClr val="accent1"/>
+          </a:lnRef>
+          <a:fillRef idx="3">
+            <a:schemeClr val="accent1"/>
+          </a:fillRef>
+          <a:effectRef idx="2">
+            <a:schemeClr val="accent1"/>
+          </a:effectRef>
+          <a:fontRef idx="minor">
+            <a:schemeClr val="lt1"/>
+          </a:fontRef>
+        </p:style>
+        <p:txBody>
+          <a:bodyPr rtlCol="0" anchor="ctr"/>
+          <a:lstStyle/>
+          <a:p>
+            <a:pPr algn="ctr"/>
+          </a:p>
+        </p:txBody>
+      </p:sp>
+      <p:sp>
+        <p:nvSpPr>
           <p:cNvPr id="14" name="Rectangle 13"/>
           <p:cNvSpPr/>
           <p:nvPr/>
@@ -9330,7 +10411,7 @@
 </p:sld>
 </file>
 
-<file path=ppt/slides/slide23.xml><?xml version="1.0" encoding="utf-8"?>
+<file path=ppt/slides/slide28.xml><?xml version="1.0" encoding="utf-8"?>
 <p:sld xmlns:a="http://schemas.openxmlformats.org/drawingml/2006/main" xmlns:p="http://schemas.openxmlformats.org/presentationml/2006/main" xmlns:r="http://schemas.openxmlformats.org/officeDocument/2006/relationships">
   <p:cSld>
     <p:bg>

--- a/docs/presentation/보험발표-figma.pptx
+++ b/docs/presentation/보험발표-figma.pptx
@@ -5,36 +5,36 @@
     <p:sldMasterId id="2147483648" r:id="rId1"/>
   </p:sldMasterIdLst>
   <p:sldIdLst>
-    <p:sldId id="256" r:id="rId7"/>
-    <p:sldId id="257" r:id="rId8"/>
-    <p:sldId id="258" r:id="rId9"/>
-    <p:sldId id="259" r:id="rId10"/>
-    <p:sldId id="260" r:id="rId11"/>
-    <p:sldId id="261" r:id="rId12"/>
-    <p:sldId id="262" r:id="rId13"/>
-    <p:sldId id="263" r:id="rId14"/>
-    <p:sldId id="264" r:id="rId15"/>
-    <p:sldId id="265" r:id="rId16"/>
-    <p:sldId id="266" r:id="rId17"/>
-    <p:sldId id="267" r:id="rId18"/>
-    <p:sldId id="268" r:id="rId19"/>
-    <p:sldId id="269" r:id="rId20"/>
-    <p:sldId id="270" r:id="rId21"/>
-    <p:sldId id="271" r:id="rId22"/>
-    <p:sldId id="272" r:id="rId23"/>
-    <p:sldId id="273" r:id="rId24"/>
-    <p:sldId id="274" r:id="rId25"/>
-    <p:sldId id="275" r:id="rId26"/>
-    <p:sldId id="276" r:id="rId27"/>
-    <p:sldId id="277" r:id="rId28"/>
-    <p:sldId id="278" r:id="rId29"/>
-    <p:sldId id="279" r:id="rId30"/>
-    <p:sldId id="280" r:id="rId31"/>
-    <p:sldId id="281" r:id="rId32"/>
-    <p:sldId id="282" r:id="rId33"/>
-    <p:sldId id="283" r:id="rId34"/>
+    <p:sldId id="256" r:id="rId2"/>
+    <p:sldId id="257" r:id="rId3"/>
+    <p:sldId id="258" r:id="rId4"/>
+    <p:sldId id="259" r:id="rId5"/>
+    <p:sldId id="260" r:id="rId6"/>
+    <p:sldId id="261" r:id="rId7"/>
+    <p:sldId id="262" r:id="rId8"/>
+    <p:sldId id="263" r:id="rId9"/>
+    <p:sldId id="264" r:id="rId10"/>
+    <p:sldId id="265" r:id="rId11"/>
+    <p:sldId id="266" r:id="rId12"/>
+    <p:sldId id="267" r:id="rId13"/>
+    <p:sldId id="268" r:id="rId14"/>
+    <p:sldId id="269" r:id="rId15"/>
+    <p:sldId id="270" r:id="rId16"/>
+    <p:sldId id="271" r:id="rId17"/>
+    <p:sldId id="272" r:id="rId18"/>
+    <p:sldId id="273" r:id="rId19"/>
+    <p:sldId id="274" r:id="rId20"/>
+    <p:sldId id="275" r:id="rId21"/>
+    <p:sldId id="276" r:id="rId22"/>
+    <p:sldId id="277" r:id="rId23"/>
+    <p:sldId id="278" r:id="rId24"/>
+    <p:sldId id="279" r:id="rId25"/>
+    <p:sldId id="280" r:id="rId26"/>
+    <p:sldId id="281" r:id="rId27"/>
+    <p:sldId id="282" r:id="rId28"/>
+    <p:sldId id="283" r:id="rId29"/>
   </p:sldIdLst>
-  <p:sldSz cx="12191695" cy="6858000" type="screen4x3"/>
+  <p:sldSz cx="12192000" cy="6858000"/>
   <p:notesSz cx="6858000" cy="9144000"/>
   <p:defaultTextStyle>
     <a:defPPr>
@@ -131,6 +131,22 @@
       </a:defRPr>
     </a:lvl9pPr>
   </p:defaultTextStyle>
+  <p:extLst>
+    <p:ext uri="{EFAFB233-063F-42B5-8137-9DF3F51BA10A}">
+      <p15:sldGuideLst xmlns:p15="http://schemas.microsoft.com/office/powerpoint/2012/main">
+        <p15:guide id="1" orient="horz" pos="2160">
+          <p15:clr>
+            <a:srgbClr val="A4A3A4"/>
+          </p15:clr>
+        </p15:guide>
+        <p15:guide id="2" pos="2880">
+          <p15:clr>
+            <a:srgbClr val="A4A3A4"/>
+          </p15:clr>
+        </p15:guide>
+      </p15:sldGuideLst>
+    </p:ext>
+  </p:extLst>
 </p:presentation>
 </file>
 
@@ -172,10 +188,9 @@
           <a:lstStyle/>
           <a:p>
             <a:r>
-              <a:rPr lang="en-US" smtClean="0"/>
+              <a:rPr lang="en-US"/>
               <a:t>Click to edit Master title style</a:t>
             </a:r>
-            <a:endParaRPr lang="en-US"/>
           </a:p>
         </p:txBody>
       </p:sp>
@@ -291,10 +306,9 @@
           </a:lstStyle>
           <a:p>
             <a:r>
-              <a:rPr lang="en-US" smtClean="0"/>
+              <a:rPr lang="en-US"/>
               <a:t>Click to edit Master subtitle style</a:t>
             </a:r>
-            <a:endParaRPr lang="en-US"/>
           </a:p>
         </p:txBody>
       </p:sp>
@@ -315,7 +329,7 @@
           <a:p>
             <a:fld id="{5BCAD085-E8A6-8845-BD4E-CB4CCA059FC4}" type="datetimeFigureOut">
               <a:rPr lang="en-US" smtClean="0"/>
-              <a:t>1/27/13</a:t>
+              <a:t>6/9/26</a:t>
             </a:fld>
             <a:endParaRPr lang="en-US"/>
           </a:p>
@@ -409,10 +423,9 @@
           <a:lstStyle/>
           <a:p>
             <a:r>
-              <a:rPr lang="en-US" smtClean="0"/>
+              <a:rPr lang="en-US"/>
               <a:t>Click to edit Master title style</a:t>
             </a:r>
-            <a:endParaRPr lang="en-US"/>
           </a:p>
         </p:txBody>
       </p:sp>
@@ -433,38 +446,37 @@
           <a:p>
             <a:pPr lvl="0"/>
             <a:r>
-              <a:rPr lang="en-US" smtClean="0"/>
+              <a:rPr lang="en-US"/>
               <a:t>Click to edit Master text styles</a:t>
             </a:r>
           </a:p>
           <a:p>
             <a:pPr lvl="1"/>
             <a:r>
-              <a:rPr lang="en-US" smtClean="0"/>
+              <a:rPr lang="en-US"/>
               <a:t>Second level</a:t>
             </a:r>
           </a:p>
           <a:p>
             <a:pPr lvl="2"/>
             <a:r>
-              <a:rPr lang="en-US" smtClean="0"/>
+              <a:rPr lang="en-US"/>
               <a:t>Third level</a:t>
             </a:r>
           </a:p>
           <a:p>
             <a:pPr lvl="3"/>
             <a:r>
-              <a:rPr lang="en-US" smtClean="0"/>
+              <a:rPr lang="en-US"/>
               <a:t>Fourth level</a:t>
             </a:r>
           </a:p>
           <a:p>
             <a:pPr lvl="4"/>
             <a:r>
-              <a:rPr lang="en-US" smtClean="0"/>
+              <a:rPr lang="en-US"/>
               <a:t>Fifth level</a:t>
             </a:r>
-            <a:endParaRPr lang="en-US"/>
           </a:p>
         </p:txBody>
       </p:sp>
@@ -485,7 +497,7 @@
           <a:p>
             <a:fld id="{5BCAD085-E8A6-8845-BD4E-CB4CCA059FC4}" type="datetimeFigureOut">
               <a:rPr lang="en-US" smtClean="0"/>
-              <a:t>1/27/13</a:t>
+              <a:t>6/9/26</a:t>
             </a:fld>
             <a:endParaRPr lang="en-US"/>
           </a:p>
@@ -584,10 +596,9 @@
           <a:lstStyle/>
           <a:p>
             <a:r>
-              <a:rPr lang="en-US" smtClean="0"/>
+              <a:rPr lang="en-US"/>
               <a:t>Click to edit Master title style</a:t>
             </a:r>
-            <a:endParaRPr lang="en-US"/>
           </a:p>
         </p:txBody>
       </p:sp>
@@ -613,38 +624,37 @@
           <a:p>
             <a:pPr lvl="0"/>
             <a:r>
-              <a:rPr lang="en-US" smtClean="0"/>
+              <a:rPr lang="en-US"/>
               <a:t>Click to edit Master text styles</a:t>
             </a:r>
           </a:p>
           <a:p>
             <a:pPr lvl="1"/>
             <a:r>
-              <a:rPr lang="en-US" smtClean="0"/>
+              <a:rPr lang="en-US"/>
               <a:t>Second level</a:t>
             </a:r>
           </a:p>
           <a:p>
             <a:pPr lvl="2"/>
             <a:r>
-              <a:rPr lang="en-US" smtClean="0"/>
+              <a:rPr lang="en-US"/>
               <a:t>Third level</a:t>
             </a:r>
           </a:p>
           <a:p>
             <a:pPr lvl="3"/>
             <a:r>
-              <a:rPr lang="en-US" smtClean="0"/>
+              <a:rPr lang="en-US"/>
               <a:t>Fourth level</a:t>
             </a:r>
           </a:p>
           <a:p>
             <a:pPr lvl="4"/>
             <a:r>
-              <a:rPr lang="en-US" smtClean="0"/>
+              <a:rPr lang="en-US"/>
               <a:t>Fifth level</a:t>
             </a:r>
-            <a:endParaRPr lang="en-US"/>
           </a:p>
         </p:txBody>
       </p:sp>
@@ -665,7 +675,7 @@
           <a:p>
             <a:fld id="{5BCAD085-E8A6-8845-BD4E-CB4CCA059FC4}" type="datetimeFigureOut">
               <a:rPr lang="en-US" smtClean="0"/>
-              <a:t>1/27/13</a:t>
+              <a:t>6/9/26</a:t>
             </a:fld>
             <a:endParaRPr lang="en-US"/>
           </a:p>
@@ -759,10 +769,9 @@
           <a:lstStyle/>
           <a:p>
             <a:r>
-              <a:rPr lang="en-US" smtClean="0"/>
+              <a:rPr lang="en-US"/>
               <a:t>Click to edit Master title style</a:t>
             </a:r>
-            <a:endParaRPr lang="en-US"/>
           </a:p>
         </p:txBody>
       </p:sp>
@@ -783,38 +792,37 @@
           <a:p>
             <a:pPr lvl="0"/>
             <a:r>
-              <a:rPr lang="en-US" smtClean="0"/>
+              <a:rPr lang="en-US"/>
               <a:t>Click to edit Master text styles</a:t>
             </a:r>
           </a:p>
           <a:p>
             <a:pPr lvl="1"/>
             <a:r>
-              <a:rPr lang="en-US" smtClean="0"/>
+              <a:rPr lang="en-US"/>
               <a:t>Second level</a:t>
             </a:r>
           </a:p>
           <a:p>
             <a:pPr lvl="2"/>
             <a:r>
-              <a:rPr lang="en-US" smtClean="0"/>
+              <a:rPr lang="en-US"/>
               <a:t>Third level</a:t>
             </a:r>
           </a:p>
           <a:p>
             <a:pPr lvl="3"/>
             <a:r>
-              <a:rPr lang="en-US" smtClean="0"/>
+              <a:rPr lang="en-US"/>
               <a:t>Fourth level</a:t>
             </a:r>
           </a:p>
           <a:p>
             <a:pPr lvl="4"/>
             <a:r>
-              <a:rPr lang="en-US" smtClean="0"/>
+              <a:rPr lang="en-US"/>
               <a:t>Fifth level</a:t>
             </a:r>
-            <a:endParaRPr lang="en-US"/>
           </a:p>
         </p:txBody>
       </p:sp>
@@ -835,7 +843,7 @@
           <a:p>
             <a:fld id="{5BCAD085-E8A6-8845-BD4E-CB4CCA059FC4}" type="datetimeFigureOut">
               <a:rPr lang="en-US" smtClean="0"/>
-              <a:t>1/27/13</a:t>
+              <a:t>6/9/26</a:t>
             </a:fld>
             <a:endParaRPr lang="en-US"/>
           </a:p>
@@ -938,10 +946,9 @@
           </a:lstStyle>
           <a:p>
             <a:r>
-              <a:rPr lang="en-US" smtClean="0"/>
+              <a:rPr lang="en-US"/>
               <a:t>Click to edit Master title style</a:t>
             </a:r>
-            <a:endParaRPr lang="en-US"/>
           </a:p>
         </p:txBody>
       </p:sp>
@@ -1058,7 +1065,7 @@
           <a:p>
             <a:pPr lvl="0"/>
             <a:r>
-              <a:rPr lang="en-US" smtClean="0"/>
+              <a:rPr lang="en-US"/>
               <a:t>Click to edit Master text styles</a:t>
             </a:r>
           </a:p>
@@ -1081,7 +1088,7 @@
           <a:p>
             <a:fld id="{5BCAD085-E8A6-8845-BD4E-CB4CCA059FC4}" type="datetimeFigureOut">
               <a:rPr lang="en-US" smtClean="0"/>
-              <a:t>1/27/13</a:t>
+              <a:t>6/9/26</a:t>
             </a:fld>
             <a:endParaRPr lang="en-US"/>
           </a:p>
@@ -1175,10 +1182,9 @@
           <a:lstStyle/>
           <a:p>
             <a:r>
-              <a:rPr lang="en-US" smtClean="0"/>
+              <a:rPr lang="en-US"/>
               <a:t>Click to edit Master title style</a:t>
             </a:r>
-            <a:endParaRPr lang="en-US"/>
           </a:p>
         </p:txBody>
       </p:sp>
@@ -1232,38 +1238,37 @@
           <a:p>
             <a:pPr lvl="0"/>
             <a:r>
-              <a:rPr lang="en-US" smtClean="0"/>
+              <a:rPr lang="en-US"/>
               <a:t>Click to edit Master text styles</a:t>
             </a:r>
           </a:p>
           <a:p>
             <a:pPr lvl="1"/>
             <a:r>
-              <a:rPr lang="en-US" smtClean="0"/>
+              <a:rPr lang="en-US"/>
               <a:t>Second level</a:t>
             </a:r>
           </a:p>
           <a:p>
             <a:pPr lvl="2"/>
             <a:r>
-              <a:rPr lang="en-US" smtClean="0"/>
+              <a:rPr lang="en-US"/>
               <a:t>Third level</a:t>
             </a:r>
           </a:p>
           <a:p>
             <a:pPr lvl="3"/>
             <a:r>
-              <a:rPr lang="en-US" smtClean="0"/>
+              <a:rPr lang="en-US"/>
               <a:t>Fourth level</a:t>
             </a:r>
           </a:p>
           <a:p>
             <a:pPr lvl="4"/>
             <a:r>
-              <a:rPr lang="en-US" smtClean="0"/>
+              <a:rPr lang="en-US"/>
               <a:t>Fifth level</a:t>
             </a:r>
-            <a:endParaRPr lang="en-US"/>
           </a:p>
         </p:txBody>
       </p:sp>
@@ -1317,38 +1322,37 @@
           <a:p>
             <a:pPr lvl="0"/>
             <a:r>
-              <a:rPr lang="en-US" smtClean="0"/>
+              <a:rPr lang="en-US"/>
               <a:t>Click to edit Master text styles</a:t>
             </a:r>
           </a:p>
           <a:p>
             <a:pPr lvl="1"/>
             <a:r>
-              <a:rPr lang="en-US" smtClean="0"/>
+              <a:rPr lang="en-US"/>
               <a:t>Second level</a:t>
             </a:r>
           </a:p>
           <a:p>
             <a:pPr lvl="2"/>
             <a:r>
-              <a:rPr lang="en-US" smtClean="0"/>
+              <a:rPr lang="en-US"/>
               <a:t>Third level</a:t>
             </a:r>
           </a:p>
           <a:p>
             <a:pPr lvl="3"/>
             <a:r>
-              <a:rPr lang="en-US" smtClean="0"/>
+              <a:rPr lang="en-US"/>
               <a:t>Fourth level</a:t>
             </a:r>
           </a:p>
           <a:p>
             <a:pPr lvl="4"/>
             <a:r>
-              <a:rPr lang="en-US" smtClean="0"/>
+              <a:rPr lang="en-US"/>
               <a:t>Fifth level</a:t>
             </a:r>
-            <a:endParaRPr lang="en-US"/>
           </a:p>
         </p:txBody>
       </p:sp>
@@ -1369,7 +1373,7 @@
           <a:p>
             <a:fld id="{5BCAD085-E8A6-8845-BD4E-CB4CCA059FC4}" type="datetimeFigureOut">
               <a:rPr lang="en-US" smtClean="0"/>
-              <a:t>1/27/13</a:t>
+              <a:t>6/9/26</a:t>
             </a:fld>
             <a:endParaRPr lang="en-US"/>
           </a:p>
@@ -1467,10 +1471,9 @@
           </a:lstStyle>
           <a:p>
             <a:r>
-              <a:rPr lang="en-US" smtClean="0"/>
+              <a:rPr lang="en-US"/>
               <a:t>Click to edit Master title style</a:t>
             </a:r>
-            <a:endParaRPr lang="en-US"/>
           </a:p>
         </p:txBody>
       </p:sp>
@@ -1533,7 +1536,7 @@
           <a:p>
             <a:pPr lvl="0"/>
             <a:r>
-              <a:rPr lang="en-US" smtClean="0"/>
+              <a:rPr lang="en-US"/>
               <a:t>Click to edit Master text styles</a:t>
             </a:r>
           </a:p>
@@ -1589,38 +1592,37 @@
           <a:p>
             <a:pPr lvl="0"/>
             <a:r>
-              <a:rPr lang="en-US" smtClean="0"/>
+              <a:rPr lang="en-US"/>
               <a:t>Click to edit Master text styles</a:t>
             </a:r>
           </a:p>
           <a:p>
             <a:pPr lvl="1"/>
             <a:r>
-              <a:rPr lang="en-US" smtClean="0"/>
+              <a:rPr lang="en-US"/>
               <a:t>Second level</a:t>
             </a:r>
           </a:p>
           <a:p>
             <a:pPr lvl="2"/>
             <a:r>
-              <a:rPr lang="en-US" smtClean="0"/>
+              <a:rPr lang="en-US"/>
               <a:t>Third level</a:t>
             </a:r>
           </a:p>
           <a:p>
             <a:pPr lvl="3"/>
             <a:r>
-              <a:rPr lang="en-US" smtClean="0"/>
+              <a:rPr lang="en-US"/>
               <a:t>Fourth level</a:t>
             </a:r>
           </a:p>
           <a:p>
             <a:pPr lvl="4"/>
             <a:r>
-              <a:rPr lang="en-US" smtClean="0"/>
+              <a:rPr lang="en-US"/>
               <a:t>Fifth level</a:t>
             </a:r>
-            <a:endParaRPr lang="en-US"/>
           </a:p>
         </p:txBody>
       </p:sp>
@@ -1683,7 +1685,7 @@
           <a:p>
             <a:pPr lvl="0"/>
             <a:r>
-              <a:rPr lang="en-US" smtClean="0"/>
+              <a:rPr lang="en-US"/>
               <a:t>Click to edit Master text styles</a:t>
             </a:r>
           </a:p>
@@ -1739,38 +1741,37 @@
           <a:p>
             <a:pPr lvl="0"/>
             <a:r>
-              <a:rPr lang="en-US" smtClean="0"/>
+              <a:rPr lang="en-US"/>
               <a:t>Click to edit Master text styles</a:t>
             </a:r>
           </a:p>
           <a:p>
             <a:pPr lvl="1"/>
             <a:r>
-              <a:rPr lang="en-US" smtClean="0"/>
+              <a:rPr lang="en-US"/>
               <a:t>Second level</a:t>
             </a:r>
           </a:p>
           <a:p>
             <a:pPr lvl="2"/>
             <a:r>
-              <a:rPr lang="en-US" smtClean="0"/>
+              <a:rPr lang="en-US"/>
               <a:t>Third level</a:t>
             </a:r>
           </a:p>
           <a:p>
             <a:pPr lvl="3"/>
             <a:r>
-              <a:rPr lang="en-US" smtClean="0"/>
+              <a:rPr lang="en-US"/>
               <a:t>Fourth level</a:t>
             </a:r>
           </a:p>
           <a:p>
             <a:pPr lvl="4"/>
             <a:r>
-              <a:rPr lang="en-US" smtClean="0"/>
+              <a:rPr lang="en-US"/>
               <a:t>Fifth level</a:t>
             </a:r>
-            <a:endParaRPr lang="en-US"/>
           </a:p>
         </p:txBody>
       </p:sp>
@@ -1791,7 +1792,7 @@
           <a:p>
             <a:fld id="{5BCAD085-E8A6-8845-BD4E-CB4CCA059FC4}" type="datetimeFigureOut">
               <a:rPr lang="en-US" smtClean="0"/>
-              <a:t>1/27/13</a:t>
+              <a:t>6/9/26</a:t>
             </a:fld>
             <a:endParaRPr lang="en-US"/>
           </a:p>
@@ -1885,10 +1886,9 @@
           <a:lstStyle/>
           <a:p>
             <a:r>
-              <a:rPr lang="en-US" smtClean="0"/>
+              <a:rPr lang="en-US"/>
               <a:t>Click to edit Master title style</a:t>
             </a:r>
-            <a:endParaRPr lang="en-US"/>
           </a:p>
         </p:txBody>
       </p:sp>
@@ -1909,7 +1909,7 @@
           <a:p>
             <a:fld id="{5BCAD085-E8A6-8845-BD4E-CB4CCA059FC4}" type="datetimeFigureOut">
               <a:rPr lang="en-US" smtClean="0"/>
-              <a:t>1/27/13</a:t>
+              <a:t>6/9/26</a:t>
             </a:fld>
             <a:endParaRPr lang="en-US"/>
           </a:p>
@@ -2004,7 +2004,7 @@
           <a:p>
             <a:fld id="{5BCAD085-E8A6-8845-BD4E-CB4CCA059FC4}" type="datetimeFigureOut">
               <a:rPr lang="en-US" smtClean="0"/>
-              <a:t>1/27/13</a:t>
+              <a:t>6/9/26</a:t>
             </a:fld>
             <a:endParaRPr lang="en-US"/>
           </a:p>
@@ -2107,10 +2107,9 @@
           </a:lstStyle>
           <a:p>
             <a:r>
-              <a:rPr lang="en-US" smtClean="0"/>
+              <a:rPr lang="en-US"/>
               <a:t>Click to edit Master title style</a:t>
             </a:r>
-            <a:endParaRPr lang="en-US"/>
           </a:p>
         </p:txBody>
       </p:sp>
@@ -2164,38 +2163,37 @@
           <a:p>
             <a:pPr lvl="0"/>
             <a:r>
-              <a:rPr lang="en-US" smtClean="0"/>
+              <a:rPr lang="en-US"/>
               <a:t>Click to edit Master text styles</a:t>
             </a:r>
           </a:p>
           <a:p>
             <a:pPr lvl="1"/>
             <a:r>
-              <a:rPr lang="en-US" smtClean="0"/>
+              <a:rPr lang="en-US"/>
               <a:t>Second level</a:t>
             </a:r>
           </a:p>
           <a:p>
             <a:pPr lvl="2"/>
             <a:r>
-              <a:rPr lang="en-US" smtClean="0"/>
+              <a:rPr lang="en-US"/>
               <a:t>Third level</a:t>
             </a:r>
           </a:p>
           <a:p>
             <a:pPr lvl="3"/>
             <a:r>
-              <a:rPr lang="en-US" smtClean="0"/>
+              <a:rPr lang="en-US"/>
               <a:t>Fourth level</a:t>
             </a:r>
           </a:p>
           <a:p>
             <a:pPr lvl="4"/>
             <a:r>
-              <a:rPr lang="en-US" smtClean="0"/>
+              <a:rPr lang="en-US"/>
               <a:t>Fifth level</a:t>
             </a:r>
-            <a:endParaRPr lang="en-US"/>
           </a:p>
         </p:txBody>
       </p:sp>
@@ -2258,7 +2256,7 @@
           <a:p>
             <a:pPr lvl="0"/>
             <a:r>
-              <a:rPr lang="en-US" smtClean="0"/>
+              <a:rPr lang="en-US"/>
               <a:t>Click to edit Master text styles</a:t>
             </a:r>
           </a:p>
@@ -2281,7 +2279,7 @@
           <a:p>
             <a:fld id="{5BCAD085-E8A6-8845-BD4E-CB4CCA059FC4}" type="datetimeFigureOut">
               <a:rPr lang="en-US" smtClean="0"/>
-              <a:t>1/27/13</a:t>
+              <a:t>6/9/26</a:t>
             </a:fld>
             <a:endParaRPr lang="en-US"/>
           </a:p>
@@ -2384,10 +2382,9 @@
           </a:lstStyle>
           <a:p>
             <a:r>
-              <a:rPr lang="en-US" smtClean="0"/>
+              <a:rPr lang="en-US"/>
               <a:t>Click to edit Master title style</a:t>
             </a:r>
-            <a:endParaRPr lang="en-US"/>
           </a:p>
         </p:txBody>
       </p:sp>
@@ -2511,7 +2508,7 @@
           <a:p>
             <a:pPr lvl="0"/>
             <a:r>
-              <a:rPr lang="en-US" smtClean="0"/>
+              <a:rPr lang="en-US"/>
               <a:t>Click to edit Master text styles</a:t>
             </a:r>
           </a:p>
@@ -2534,7 +2531,7 @@
           <a:p>
             <a:fld id="{5BCAD085-E8A6-8845-BD4E-CB4CCA059FC4}" type="datetimeFigureOut">
               <a:rPr lang="en-US" smtClean="0"/>
-              <a:t>1/27/13</a:t>
+              <a:t>6/9/26</a:t>
             </a:fld>
             <a:endParaRPr lang="en-US"/>
           </a:p>
@@ -2643,10 +2640,9 @@
           <a:lstStyle/>
           <a:p>
             <a:r>
-              <a:rPr lang="en-US" smtClean="0"/>
+              <a:rPr lang="en-US"/>
               <a:t>Click to edit Master title style</a:t>
             </a:r>
-            <a:endParaRPr lang="en-US"/>
           </a:p>
         </p:txBody>
       </p:sp>
@@ -2677,38 +2673,37 @@
           <a:p>
             <a:pPr lvl="0"/>
             <a:r>
-              <a:rPr lang="en-US" smtClean="0"/>
+              <a:rPr lang="en-US"/>
               <a:t>Click to edit Master text styles</a:t>
             </a:r>
           </a:p>
           <a:p>
             <a:pPr lvl="1"/>
             <a:r>
-              <a:rPr lang="en-US" smtClean="0"/>
+              <a:rPr lang="en-US"/>
               <a:t>Second level</a:t>
             </a:r>
           </a:p>
           <a:p>
             <a:pPr lvl="2"/>
             <a:r>
-              <a:rPr lang="en-US" smtClean="0"/>
+              <a:rPr lang="en-US"/>
               <a:t>Third level</a:t>
             </a:r>
           </a:p>
           <a:p>
             <a:pPr lvl="3"/>
             <a:r>
-              <a:rPr lang="en-US" smtClean="0"/>
+              <a:rPr lang="en-US"/>
               <a:t>Fourth level</a:t>
             </a:r>
           </a:p>
           <a:p>
             <a:pPr lvl="4"/>
             <a:r>
-              <a:rPr lang="en-US" smtClean="0"/>
+              <a:rPr lang="en-US"/>
               <a:t>Fifth level</a:t>
             </a:r>
-            <a:endParaRPr lang="en-US"/>
           </a:p>
         </p:txBody>
       </p:sp>
@@ -2747,7 +2742,7 @@
           <a:p>
             <a:fld id="{5BCAD085-E8A6-8845-BD4E-CB4CCA059FC4}" type="datetimeFigureOut">
               <a:rPr lang="en-US" smtClean="0"/>
-              <a:t>1/27/13</a:t>
+              <a:t>6/9/26</a:t>
             </a:fld>
             <a:endParaRPr lang="en-US"/>
           </a:p>
@@ -3106,7 +3101,7 @@
 </file>
 
 <file path=ppt/slides/slide1.xml><?xml version="1.0" encoding="utf-8"?>
-<p:sld xmlns:a="http://schemas.openxmlformats.org/drawingml/2006/main" xmlns:p="http://schemas.openxmlformats.org/presentationml/2006/main" xmlns:r="http://schemas.openxmlformats.org/officeDocument/2006/relationships">
+<p:sld xmlns:a="http://schemas.openxmlformats.org/drawingml/2006/main" xmlns:r="http://schemas.openxmlformats.org/officeDocument/2006/relationships" xmlns:p="http://schemas.openxmlformats.org/presentationml/2006/main">
   <p:cSld>
     <p:bg>
       <p:bgPr>
@@ -3122,7 +3117,14 @@
         <p:cNvGrpSpPr/>
         <p:nvPr/>
       </p:nvGrpSpPr>
-      <p:grpSpPr/>
+      <p:grpSpPr>
+        <a:xfrm>
+          <a:off x="0" y="0"/>
+          <a:ext cx="0" cy="0"/>
+          <a:chOff x="0" y="0"/>
+          <a:chExt cx="0" cy="0"/>
+        </a:xfrm>
+      </p:grpSpPr>
       <p:sp>
         <p:nvSpPr>
           <p:cNvPr id="2" name="TextBox 1"/>
@@ -3214,7 +3216,7 @@
 </file>
 
 <file path=ppt/slides/slide10.xml><?xml version="1.0" encoding="utf-8"?>
-<p:sld xmlns:a="http://schemas.openxmlformats.org/drawingml/2006/main" xmlns:p="http://schemas.openxmlformats.org/presentationml/2006/main" xmlns:r="http://schemas.openxmlformats.org/officeDocument/2006/relationships">
+<p:sld xmlns:a="http://schemas.openxmlformats.org/drawingml/2006/main" xmlns:r="http://schemas.openxmlformats.org/officeDocument/2006/relationships" xmlns:p="http://schemas.openxmlformats.org/presentationml/2006/main">
   <p:cSld>
     <p:bg>
       <p:bgPr>
@@ -3230,7 +3232,14 @@
         <p:cNvGrpSpPr/>
         <p:nvPr/>
       </p:nvGrpSpPr>
-      <p:grpSpPr/>
+      <p:grpSpPr>
+        <a:xfrm>
+          <a:off x="0" y="0"/>
+          <a:ext cx="0" cy="0"/>
+          <a:chOff x="0" y="0"/>
+          <a:chExt cx="0" cy="0"/>
+        </a:xfrm>
+      </p:grpSpPr>
       <p:sp>
         <p:nvSpPr>
           <p:cNvPr id="2" name="TextBox 1"/>
@@ -3307,6 +3316,7 @@
           <a:lstStyle/>
           <a:p>
             <a:pPr algn="ctr"/>
+            <a:endParaRPr/>
           </a:p>
         </p:txBody>
       </p:sp>
@@ -3467,7 +3477,7 @@
           </a:fontRef>
         </p:style>
         <p:txBody>
-          <a:bodyPr rtlCol="0" anchor="ctr" tIns="76200" bIns="76200" lIns="177800" rIns="177800" wrap="square"/>
+          <a:bodyPr wrap="square" lIns="177800" tIns="76200" rIns="177800" bIns="76200" rtlCol="0" anchor="ctr"/>
           <a:lstStyle/>
           <a:p>
             <a:pPr algn="l"/>
@@ -3501,7 +3511,7 @@
 </file>
 
 <file path=ppt/slides/slide11.xml><?xml version="1.0" encoding="utf-8"?>
-<p:sld xmlns:a="http://schemas.openxmlformats.org/drawingml/2006/main" xmlns:p="http://schemas.openxmlformats.org/presentationml/2006/main" xmlns:r="http://schemas.openxmlformats.org/officeDocument/2006/relationships">
+<p:sld xmlns:a="http://schemas.openxmlformats.org/drawingml/2006/main" xmlns:r="http://schemas.openxmlformats.org/officeDocument/2006/relationships" xmlns:p="http://schemas.openxmlformats.org/presentationml/2006/main">
   <p:cSld>
     <p:bg>
       <p:bgPr>
@@ -3517,7 +3527,14 @@
         <p:cNvGrpSpPr/>
         <p:nvPr/>
       </p:nvGrpSpPr>
-      <p:grpSpPr/>
+      <p:grpSpPr>
+        <a:xfrm>
+          <a:off x="0" y="0"/>
+          <a:ext cx="0" cy="0"/>
+          <a:chOff x="0" y="0"/>
+          <a:chExt cx="0" cy="0"/>
+        </a:xfrm>
+      </p:grpSpPr>
       <p:sp>
         <p:nvSpPr>
           <p:cNvPr id="2" name="TextBox 1"/>
@@ -3594,6 +3611,7 @@
           <a:lstStyle/>
           <a:p>
             <a:pPr algn="ctr"/>
+            <a:endParaRPr/>
           </a:p>
         </p:txBody>
       </p:sp>
@@ -3754,7 +3772,7 @@
           </a:fontRef>
         </p:style>
         <p:txBody>
-          <a:bodyPr rtlCol="0" anchor="ctr" tIns="76200" bIns="76200" lIns="177800" rIns="177800" wrap="square"/>
+          <a:bodyPr wrap="square" lIns="177800" tIns="76200" rIns="177800" bIns="76200" rtlCol="0" anchor="ctr"/>
           <a:lstStyle/>
           <a:p>
             <a:pPr algn="l"/>
@@ -3788,7 +3806,7 @@
 </file>
 
 <file path=ppt/slides/slide12.xml><?xml version="1.0" encoding="utf-8"?>
-<p:sld xmlns:a="http://schemas.openxmlformats.org/drawingml/2006/main" xmlns:p="http://schemas.openxmlformats.org/presentationml/2006/main" xmlns:r="http://schemas.openxmlformats.org/officeDocument/2006/relationships">
+<p:sld xmlns:a="http://schemas.openxmlformats.org/drawingml/2006/main" xmlns:r="http://schemas.openxmlformats.org/officeDocument/2006/relationships" xmlns:p="http://schemas.openxmlformats.org/presentationml/2006/main">
   <p:cSld>
     <p:bg>
       <p:bgPr>
@@ -3804,7 +3822,14 @@
         <p:cNvGrpSpPr/>
         <p:nvPr/>
       </p:nvGrpSpPr>
-      <p:grpSpPr/>
+      <p:grpSpPr>
+        <a:xfrm>
+          <a:off x="0" y="0"/>
+          <a:ext cx="0" cy="0"/>
+          <a:chOff x="0" y="0"/>
+          <a:chExt cx="0" cy="0"/>
+        </a:xfrm>
+      </p:grpSpPr>
       <p:sp>
         <p:nvSpPr>
           <p:cNvPr id="2" name="TextBox 1"/>
@@ -3881,6 +3906,7 @@
           <a:lstStyle/>
           <a:p>
             <a:pPr algn="ctr"/>
+            <a:endParaRPr/>
           </a:p>
         </p:txBody>
       </p:sp>
@@ -4041,7 +4067,7 @@
           </a:fontRef>
         </p:style>
         <p:txBody>
-          <a:bodyPr rtlCol="0" anchor="ctr" tIns="76200" bIns="76200" lIns="177800" rIns="177800" wrap="square"/>
+          <a:bodyPr wrap="square" lIns="177800" tIns="76200" rIns="177800" bIns="76200" rtlCol="0" anchor="ctr"/>
           <a:lstStyle/>
           <a:p>
             <a:pPr algn="l"/>
@@ -4075,7 +4101,7 @@
 </file>
 
 <file path=ppt/slides/slide13.xml><?xml version="1.0" encoding="utf-8"?>
-<p:sld xmlns:a="http://schemas.openxmlformats.org/drawingml/2006/main" xmlns:p="http://schemas.openxmlformats.org/presentationml/2006/main" xmlns:r="http://schemas.openxmlformats.org/officeDocument/2006/relationships">
+<p:sld xmlns:a="http://schemas.openxmlformats.org/drawingml/2006/main" xmlns:r="http://schemas.openxmlformats.org/officeDocument/2006/relationships" xmlns:p="http://schemas.openxmlformats.org/presentationml/2006/main">
   <p:cSld>
     <p:bg>
       <p:bgPr>
@@ -4091,7 +4117,14 @@
         <p:cNvGrpSpPr/>
         <p:nvPr/>
       </p:nvGrpSpPr>
-      <p:grpSpPr/>
+      <p:grpSpPr>
+        <a:xfrm>
+          <a:off x="0" y="0"/>
+          <a:ext cx="0" cy="0"/>
+          <a:chOff x="0" y="0"/>
+          <a:chExt cx="0" cy="0"/>
+        </a:xfrm>
+      </p:grpSpPr>
       <p:sp>
         <p:nvSpPr>
           <p:cNvPr id="2" name="TextBox 1"/>
@@ -4168,6 +4201,7 @@
           <a:lstStyle/>
           <a:p>
             <a:pPr algn="ctr"/>
+            <a:endParaRPr/>
           </a:p>
         </p:txBody>
       </p:sp>
@@ -4328,7 +4362,7 @@
           </a:fontRef>
         </p:style>
         <p:txBody>
-          <a:bodyPr rtlCol="0" anchor="ctr" tIns="76200" bIns="76200" lIns="177800" rIns="177800" wrap="square"/>
+          <a:bodyPr wrap="square" lIns="177800" tIns="76200" rIns="177800" bIns="76200" rtlCol="0" anchor="ctr"/>
           <a:lstStyle/>
           <a:p>
             <a:pPr algn="l"/>
@@ -4362,7 +4396,7 @@
 </file>
 
 <file path=ppt/slides/slide14.xml><?xml version="1.0" encoding="utf-8"?>
-<p:sld xmlns:a="http://schemas.openxmlformats.org/drawingml/2006/main" xmlns:p="http://schemas.openxmlformats.org/presentationml/2006/main" xmlns:r="http://schemas.openxmlformats.org/officeDocument/2006/relationships">
+<p:sld xmlns:a="http://schemas.openxmlformats.org/drawingml/2006/main" xmlns:r="http://schemas.openxmlformats.org/officeDocument/2006/relationships" xmlns:p="http://schemas.openxmlformats.org/presentationml/2006/main">
   <p:cSld>
     <p:bg>
       <p:bgPr>
@@ -4378,7 +4412,14 @@
         <p:cNvGrpSpPr/>
         <p:nvPr/>
       </p:nvGrpSpPr>
-      <p:grpSpPr/>
+      <p:grpSpPr>
+        <a:xfrm>
+          <a:off x="0" y="0"/>
+          <a:ext cx="0" cy="0"/>
+          <a:chOff x="0" y="0"/>
+          <a:chExt cx="0" cy="0"/>
+        </a:xfrm>
+      </p:grpSpPr>
       <p:sp>
         <p:nvSpPr>
           <p:cNvPr id="2" name="TextBox 1"/>
@@ -4455,6 +4496,7 @@
           <a:lstStyle/>
           <a:p>
             <a:pPr algn="ctr"/>
+            <a:endParaRPr/>
           </a:p>
         </p:txBody>
       </p:sp>
@@ -4501,6 +4543,7 @@
           <a:lstStyle/>
           <a:p>
             <a:pPr algn="ctr"/>
+            <a:endParaRPr/>
           </a:p>
         </p:txBody>
       </p:sp>
@@ -4619,7 +4662,7 @@
 </file>
 
 <file path=ppt/slides/slide15.xml><?xml version="1.0" encoding="utf-8"?>
-<p:sld xmlns:a="http://schemas.openxmlformats.org/drawingml/2006/main" xmlns:p="http://schemas.openxmlformats.org/presentationml/2006/main" xmlns:r="http://schemas.openxmlformats.org/officeDocument/2006/relationships">
+<p:sld xmlns:a="http://schemas.openxmlformats.org/drawingml/2006/main" xmlns:r="http://schemas.openxmlformats.org/officeDocument/2006/relationships" xmlns:p="http://schemas.openxmlformats.org/presentationml/2006/main">
   <p:cSld>
     <p:bg>
       <p:bgPr>
@@ -4635,7 +4678,14 @@
         <p:cNvGrpSpPr/>
         <p:nvPr/>
       </p:nvGrpSpPr>
-      <p:grpSpPr/>
+      <p:grpSpPr>
+        <a:xfrm>
+          <a:off x="0" y="0"/>
+          <a:ext cx="0" cy="0"/>
+          <a:chOff x="0" y="0"/>
+          <a:chExt cx="0" cy="0"/>
+        </a:xfrm>
+      </p:grpSpPr>
       <p:sp>
         <p:nvSpPr>
           <p:cNvPr id="2" name="TextBox 1"/>
@@ -4712,6 +4762,7 @@
           <a:lstStyle/>
           <a:p>
             <a:pPr algn="ctr"/>
+            <a:endParaRPr/>
           </a:p>
         </p:txBody>
       </p:sp>
@@ -4872,7 +4923,7 @@
           </a:fontRef>
         </p:style>
         <p:txBody>
-          <a:bodyPr rtlCol="0" anchor="ctr" tIns="76200" bIns="76200" lIns="177800" rIns="177800" wrap="square"/>
+          <a:bodyPr wrap="square" lIns="177800" tIns="76200" rIns="177800" bIns="76200" rtlCol="0" anchor="ctr"/>
           <a:lstStyle/>
           <a:p>
             <a:pPr algn="l"/>
@@ -4906,7 +4957,7 @@
 </file>
 
 <file path=ppt/slides/slide16.xml><?xml version="1.0" encoding="utf-8"?>
-<p:sld xmlns:a="http://schemas.openxmlformats.org/drawingml/2006/main" xmlns:p="http://schemas.openxmlformats.org/presentationml/2006/main" xmlns:r="http://schemas.openxmlformats.org/officeDocument/2006/relationships">
+<p:sld xmlns:a="http://schemas.openxmlformats.org/drawingml/2006/main" xmlns:r="http://schemas.openxmlformats.org/officeDocument/2006/relationships" xmlns:p="http://schemas.openxmlformats.org/presentationml/2006/main">
   <p:cSld>
     <p:bg>
       <p:bgPr>
@@ -4922,7 +4973,14 @@
         <p:cNvGrpSpPr/>
         <p:nvPr/>
       </p:nvGrpSpPr>
-      <p:grpSpPr/>
+      <p:grpSpPr>
+        <a:xfrm>
+          <a:off x="0" y="0"/>
+          <a:ext cx="0" cy="0"/>
+          <a:chOff x="0" y="0"/>
+          <a:chExt cx="0" cy="0"/>
+        </a:xfrm>
+      </p:grpSpPr>
       <p:sp>
         <p:nvSpPr>
           <p:cNvPr id="2" name="TextBox 1"/>
@@ -4999,6 +5057,7 @@
           <a:lstStyle/>
           <a:p>
             <a:pPr algn="ctr"/>
+            <a:endParaRPr/>
           </a:p>
         </p:txBody>
       </p:sp>
@@ -5159,7 +5218,7 @@
           </a:fontRef>
         </p:style>
         <p:txBody>
-          <a:bodyPr rtlCol="0" anchor="ctr" tIns="76200" bIns="76200" lIns="177800" rIns="177800" wrap="square"/>
+          <a:bodyPr wrap="square" lIns="177800" tIns="76200" rIns="177800" bIns="76200" rtlCol="0" anchor="ctr"/>
           <a:lstStyle/>
           <a:p>
             <a:pPr algn="l"/>
@@ -5193,7 +5252,7 @@
 </file>
 
 <file path=ppt/slides/slide17.xml><?xml version="1.0" encoding="utf-8"?>
-<p:sld xmlns:a="http://schemas.openxmlformats.org/drawingml/2006/main" xmlns:p="http://schemas.openxmlformats.org/presentationml/2006/main" xmlns:r="http://schemas.openxmlformats.org/officeDocument/2006/relationships">
+<p:sld xmlns:a="http://schemas.openxmlformats.org/drawingml/2006/main" xmlns:r="http://schemas.openxmlformats.org/officeDocument/2006/relationships" xmlns:p="http://schemas.openxmlformats.org/presentationml/2006/main">
   <p:cSld>
     <p:bg>
       <p:bgPr>
@@ -5209,7 +5268,14 @@
         <p:cNvGrpSpPr/>
         <p:nvPr/>
       </p:nvGrpSpPr>
-      <p:grpSpPr/>
+      <p:grpSpPr>
+        <a:xfrm>
+          <a:off x="0" y="0"/>
+          <a:ext cx="0" cy="0"/>
+          <a:chOff x="0" y="0"/>
+          <a:chExt cx="0" cy="0"/>
+        </a:xfrm>
+      </p:grpSpPr>
       <p:sp>
         <p:nvSpPr>
           <p:cNvPr id="2" name="TextBox 1"/>
@@ -5219,7 +5285,7 @@
         <p:spPr>
           <a:xfrm>
             <a:off x="749808" y="566928"/>
-            <a:ext cx="10881360" cy="1371600"/>
+            <a:ext cx="10881360" cy="892552"/>
           </a:xfrm>
           <a:prstGeom prst="rect">
             <a:avLst/>
@@ -5234,14 +5300,74 @@
           <a:p>
             <a:pPr algn="l"/>
             <a:r>
-              <a:rPr sz="5200" b="1" spc="-100">
+              <a:rPr sz="5200" b="1" spc="-100" dirty="0" err="1">
                 <a:solidFill>
                   <a:srgbClr val="1A1A1A"/>
                 </a:solidFill>
                 <a:latin typeface="Apple SD Gothic Neo"/>
               </a:rPr>
-              <a:t>전체 중 내가 시연하는 부분</a:t>
-            </a:r>
+              <a:t>전체</a:t>
+            </a:r>
+            <a:r>
+              <a:rPr sz="5200" b="1" spc="-100" dirty="0">
+                <a:solidFill>
+                  <a:srgbClr val="1A1A1A"/>
+                </a:solidFill>
+                <a:latin typeface="Apple SD Gothic Neo"/>
+              </a:rPr>
+              <a:t> </a:t>
+            </a:r>
+            <a:r>
+              <a:rPr sz="5200" b="1" spc="-100" dirty="0" err="1">
+                <a:solidFill>
+                  <a:srgbClr val="1A1A1A"/>
+                </a:solidFill>
+                <a:latin typeface="Apple SD Gothic Neo"/>
+              </a:rPr>
+              <a:t>중</a:t>
+            </a:r>
+            <a:r>
+              <a:rPr lang="ko-KR" altLang="en-US" sz="5200" b="1" spc="-100" dirty="0">
+                <a:solidFill>
+                  <a:srgbClr val="1A1A1A"/>
+                </a:solidFill>
+                <a:latin typeface="Apple SD Gothic Neo"/>
+              </a:rPr>
+              <a:t> </a:t>
+            </a:r>
+            <a:r>
+              <a:rPr sz="5200" b="1" spc="-100" dirty="0" err="1">
+                <a:solidFill>
+                  <a:srgbClr val="1A1A1A"/>
+                </a:solidFill>
+                <a:latin typeface="Apple SD Gothic Neo"/>
+              </a:rPr>
+              <a:t>시연하는</a:t>
+            </a:r>
+            <a:r>
+              <a:rPr sz="5200" b="1" spc="-100" dirty="0">
+                <a:solidFill>
+                  <a:srgbClr val="1A1A1A"/>
+                </a:solidFill>
+                <a:latin typeface="Apple SD Gothic Neo"/>
+              </a:rPr>
+              <a:t> </a:t>
+            </a:r>
+            <a:r>
+              <a:rPr sz="5200" b="1" spc="-100" dirty="0" err="1">
+                <a:solidFill>
+                  <a:srgbClr val="1A1A1A"/>
+                </a:solidFill>
+                <a:latin typeface="Apple SD Gothic Neo"/>
+              </a:rPr>
+              <a:t>부분</a:t>
+            </a:r>
+            <a:endParaRPr sz="5200" b="1" spc="-100" dirty="0">
+              <a:solidFill>
+                <a:srgbClr val="1A1A1A"/>
+              </a:solidFill>
+              <a:latin typeface="Apple SD Gothic Neo"/>
+            </a:endParaRPr>
           </a:p>
         </p:txBody>
       </p:sp>
@@ -5286,6 +5412,7 @@
           <a:lstStyle/>
           <a:p>
             <a:pPr algn="ctr"/>
+            <a:endParaRPr/>
           </a:p>
         </p:txBody>
       </p:sp>
@@ -5352,7 +5479,7 @@
           </a:fontRef>
         </p:style>
         <p:txBody>
-          <a:bodyPr rtlCol="0" anchor="ctr" tIns="76200" bIns="76200" lIns="177800" rIns="177800" wrap="none"/>
+          <a:bodyPr wrap="none" lIns="177800" tIns="76200" rIns="177800" bIns="76200" rtlCol="0" anchor="ctr"/>
           <a:lstStyle/>
           <a:p>
             <a:pPr algn="ctr"/>
@@ -5409,7 +5536,7 @@
           </a:fontRef>
         </p:style>
         <p:txBody>
-          <a:bodyPr rtlCol="0" anchor="ctr" tIns="76200" bIns="76200" lIns="177800" rIns="177800" wrap="none"/>
+          <a:bodyPr wrap="none" lIns="177800" tIns="76200" rIns="177800" bIns="76200" rtlCol="0" anchor="ctr"/>
           <a:lstStyle/>
           <a:p>
             <a:pPr algn="ctr"/>
@@ -5469,7 +5596,7 @@
 </file>
 
 <file path=ppt/slides/slide18.xml><?xml version="1.0" encoding="utf-8"?>
-<p:sld xmlns:a="http://schemas.openxmlformats.org/drawingml/2006/main" xmlns:p="http://schemas.openxmlformats.org/presentationml/2006/main" xmlns:r="http://schemas.openxmlformats.org/officeDocument/2006/relationships">
+<p:sld xmlns:a="http://schemas.openxmlformats.org/drawingml/2006/main" xmlns:r="http://schemas.openxmlformats.org/officeDocument/2006/relationships" xmlns:p="http://schemas.openxmlformats.org/presentationml/2006/main">
   <p:cSld>
     <p:bg>
       <p:bgPr>
@@ -5485,7 +5612,14 @@
         <p:cNvGrpSpPr/>
         <p:nvPr/>
       </p:nvGrpSpPr>
-      <p:grpSpPr/>
+      <p:grpSpPr>
+        <a:xfrm>
+          <a:off x="0" y="0"/>
+          <a:ext cx="0" cy="0"/>
+          <a:chOff x="0" y="0"/>
+          <a:chExt cx="0" cy="0"/>
+        </a:xfrm>
+      </p:grpSpPr>
       <p:sp>
         <p:nvSpPr>
           <p:cNvPr id="2" name="TextBox 1"/>
@@ -5574,7 +5708,7 @@
         <p:spPr>
           <a:xfrm>
             <a:off x="777240" y="1828800"/>
-            <a:ext cx="5394960" cy="457200"/>
+            <a:ext cx="3108960" cy="457200"/>
           </a:xfrm>
           <a:prstGeom prst="rect">
             <a:avLst/>
@@ -5589,13 +5723,25 @@
           <a:p>
             <a:pPr algn="l"/>
             <a:r>
-              <a:rPr sz="2200" b="1" spc="-30">
+              <a:rPr sz="2000" b="1" spc="-30">
                 <a:solidFill>
                   <a:srgbClr val="5B5BD6"/>
                 </a:solidFill>
                 <a:latin typeface="Apple SD Gothic Neo"/>
               </a:rPr>
-              <a:t>백엔드 · Spring — 계층형</a:t>
+              <a:t>백엔드 · Spring</a:t>
+            </a:r>
+          </a:p>
+          <a:p>
+            <a:pPr algn="l"/>
+            <a:r>
+              <a:rPr sz="1500" b="0" spc="-30">
+                <a:solidFill>
+                  <a:srgbClr val="6B7280"/>
+                </a:solidFill>
+                <a:latin typeface="Apple SD Gothic Neo"/>
+              </a:rPr>
+              <a:t>계층형</a:t>
             </a:r>
           </a:p>
         </p:txBody>
@@ -5608,8 +5754,8 @@
         </p:nvSpPr>
         <p:spPr>
           <a:xfrm>
-            <a:off x="1691640" y="2377440"/>
-            <a:ext cx="3566160" cy="512064"/>
+            <a:off x="777240" y="2697480"/>
+            <a:ext cx="3154680" cy="548640"/>
           </a:xfrm>
           <a:prstGeom prst="roundRect">
             <a:avLst>
@@ -5619,7 +5765,7 @@
           <a:solidFill>
             <a:srgbClr val="F4F4F6"/>
           </a:solidFill>
-          <a:ln w="15240">
+          <a:ln w="17780">
             <a:solidFill>
               <a:srgbClr val="E6E6E6"/>
             </a:solidFill>
@@ -5641,18 +5787,27 @@
           </a:fontRef>
         </p:style>
         <p:txBody>
-          <a:bodyPr rtlCol="0" anchor="ctr" tIns="76200" bIns="76200" lIns="177800" rIns="177800" wrap="none"/>
-          <a:lstStyle/>
-          <a:p>
-            <a:pPr algn="ctr"/>
-            <a:r>
-              <a:rPr sz="1800" b="1">
+          <a:bodyPr rtlCol="0" anchor="ctr" tIns="63500" bIns="63500" lIns="152400" rIns="152400" wrap="none"/>
+          <a:lstStyle/>
+          <a:p>
+            <a:pPr algn="l"/>
+            <a:r>
+              <a:rPr sz="1700" b="1">
                 <a:solidFill>
                   <a:srgbClr val="1A1A1A"/>
                 </a:solidFill>
                 <a:latin typeface="Menlo"/>
               </a:rPr>
               <a:t>controller</a:t>
+            </a:r>
+            <a:r>
+              <a:rPr sz="1200" b="0">
+                <a:solidFill>
+                  <a:srgbClr val="6B7280"/>
+                </a:solidFill>
+                <a:latin typeface="Apple SD Gothic Neo"/>
+              </a:rPr>
+              <a:t>   요청 받기·응답</a:t>
             </a:r>
           </a:p>
         </p:txBody>
@@ -5665,7 +5820,7 @@
         </p:nvSpPr>
         <p:spPr>
           <a:xfrm>
-            <a:off x="3063240" y="2834640"/>
+            <a:off x="2148840" y="3200400"/>
             <a:ext cx="822960" cy="292608"/>
           </a:xfrm>
           <a:prstGeom prst="rect">
@@ -5700,8 +5855,8 @@
         </p:nvSpPr>
         <p:spPr>
           <a:xfrm>
-            <a:off x="1691640" y="3017520"/>
-            <a:ext cx="3566160" cy="512064"/>
+            <a:off x="777240" y="3410712"/>
+            <a:ext cx="3154680" cy="548640"/>
           </a:xfrm>
           <a:prstGeom prst="roundRect">
             <a:avLst>
@@ -5711,7 +5866,7 @@
           <a:solidFill>
             <a:srgbClr val="F4F4F6"/>
           </a:solidFill>
-          <a:ln w="15240">
+          <a:ln w="17780">
             <a:solidFill>
               <a:srgbClr val="E6E6E6"/>
             </a:solidFill>
@@ -5733,18 +5888,27 @@
           </a:fontRef>
         </p:style>
         <p:txBody>
-          <a:bodyPr rtlCol="0" anchor="ctr" tIns="76200" bIns="76200" lIns="177800" rIns="177800" wrap="none"/>
-          <a:lstStyle/>
-          <a:p>
-            <a:pPr algn="ctr"/>
-            <a:r>
-              <a:rPr sz="1800" b="1">
+          <a:bodyPr rtlCol="0" anchor="ctr" tIns="63500" bIns="63500" lIns="152400" rIns="152400" wrap="none"/>
+          <a:lstStyle/>
+          <a:p>
+            <a:pPr algn="l"/>
+            <a:r>
+              <a:rPr sz="1700" b="1">
                 <a:solidFill>
                   <a:srgbClr val="1A1A1A"/>
                 </a:solidFill>
                 <a:latin typeface="Menlo"/>
               </a:rPr>
               <a:t>service</a:t>
+            </a:r>
+            <a:r>
+              <a:rPr sz="1200" b="0">
+                <a:solidFill>
+                  <a:srgbClr val="6B7280"/>
+                </a:solidFill>
+                <a:latin typeface="Apple SD Gothic Neo"/>
+              </a:rPr>
+              <a:t>   업무 흐름·규칙</a:t>
             </a:r>
           </a:p>
         </p:txBody>
@@ -5757,7 +5921,7 @@
         </p:nvSpPr>
         <p:spPr>
           <a:xfrm>
-            <a:off x="3063240" y="3474720"/>
+            <a:off x="2148840" y="3913632"/>
             <a:ext cx="822960" cy="292608"/>
           </a:xfrm>
           <a:prstGeom prst="rect">
@@ -5792,8 +5956,8 @@
         </p:nvSpPr>
         <p:spPr>
           <a:xfrm>
-            <a:off x="1691640" y="3657600"/>
-            <a:ext cx="3566160" cy="512064"/>
+            <a:off x="777240" y="4123944"/>
+            <a:ext cx="3154680" cy="548640"/>
           </a:xfrm>
           <a:prstGeom prst="roundRect">
             <a:avLst>
@@ -5803,7 +5967,7 @@
           <a:solidFill>
             <a:srgbClr val="ECEBFB"/>
           </a:solidFill>
-          <a:ln w="15240">
+          <a:ln w="17780">
             <a:solidFill>
               <a:srgbClr val="E6E6E6"/>
             </a:solidFill>
@@ -5825,18 +5989,27 @@
           </a:fontRef>
         </p:style>
         <p:txBody>
-          <a:bodyPr rtlCol="0" anchor="ctr" tIns="76200" bIns="76200" lIns="177800" rIns="177800" wrap="none"/>
-          <a:lstStyle/>
-          <a:p>
-            <a:pPr algn="ctr"/>
-            <a:r>
-              <a:rPr sz="1800" b="1">
+          <a:bodyPr rtlCol="0" anchor="ctr" tIns="63500" bIns="63500" lIns="152400" rIns="152400" wrap="none"/>
+          <a:lstStyle/>
+          <a:p>
+            <a:pPr algn="l"/>
+            <a:r>
+              <a:rPr sz="1700" b="1">
                 <a:solidFill>
                   <a:srgbClr val="1A1A1A"/>
                 </a:solidFill>
                 <a:latin typeface="Menlo"/>
               </a:rPr>
               <a:t>domain</a:t>
+            </a:r>
+            <a:r>
+              <a:rPr sz="1200" b="0">
+                <a:solidFill>
+                  <a:srgbClr val="6B7280"/>
+                </a:solidFill>
+                <a:latin typeface="Apple SD Gothic Neo"/>
+              </a:rPr>
+              <a:t>   엔티티·도메인 규칙</a:t>
             </a:r>
           </a:p>
         </p:txBody>
@@ -5849,7 +6022,7 @@
         </p:nvSpPr>
         <p:spPr>
           <a:xfrm>
-            <a:off x="3063240" y="4114800"/>
+            <a:off x="2148840" y="4626864"/>
             <a:ext cx="822960" cy="292608"/>
           </a:xfrm>
           <a:prstGeom prst="rect">
@@ -5884,8 +6057,8 @@
         </p:nvSpPr>
         <p:spPr>
           <a:xfrm>
-            <a:off x="1691640" y="4297680"/>
-            <a:ext cx="3566160" cy="512064"/>
+            <a:off x="777240" y="4837176"/>
+            <a:ext cx="3154680" cy="548640"/>
           </a:xfrm>
           <a:prstGeom prst="roundRect">
             <a:avLst>
@@ -5895,7 +6068,7 @@
           <a:solidFill>
             <a:srgbClr val="F4F4F6"/>
           </a:solidFill>
-          <a:ln w="15240">
+          <a:ln w="17780">
             <a:solidFill>
               <a:srgbClr val="E6E6E6"/>
             </a:solidFill>
@@ -5917,18 +6090,27 @@
           </a:fontRef>
         </p:style>
         <p:txBody>
-          <a:bodyPr rtlCol="0" anchor="ctr" tIns="76200" bIns="76200" lIns="177800" rIns="177800" wrap="none"/>
-          <a:lstStyle/>
-          <a:p>
-            <a:pPr algn="ctr"/>
-            <a:r>
-              <a:rPr sz="1800" b="1">
+          <a:bodyPr rtlCol="0" anchor="ctr" tIns="63500" bIns="63500" lIns="152400" rIns="152400" wrap="none"/>
+          <a:lstStyle/>
+          <a:p>
+            <a:pPr algn="l"/>
+            <a:r>
+              <a:rPr sz="1700" b="1">
                 <a:solidFill>
                   <a:srgbClr val="1A1A1A"/>
                 </a:solidFill>
                 <a:latin typeface="Menlo"/>
               </a:rPr>
               <a:t>repository</a:t>
+            </a:r>
+            <a:r>
+              <a:rPr sz="1200" b="0">
+                <a:solidFill>
+                  <a:srgbClr val="6B7280"/>
+                </a:solidFill>
+                <a:latin typeface="Apple SD Gothic Neo"/>
+              </a:rPr>
+              <a:t>   JPA 저장·조회</a:t>
             </a:r>
           </a:p>
         </p:txBody>
@@ -5941,7 +6123,7 @@
         </p:nvSpPr>
         <p:spPr>
           <a:xfrm>
-            <a:off x="3063240" y="4754880"/>
+            <a:off x="2148840" y="5340096"/>
             <a:ext cx="822960" cy="292608"/>
           </a:xfrm>
           <a:prstGeom prst="rect">
@@ -5976,8 +6158,8 @@
         </p:nvSpPr>
         <p:spPr>
           <a:xfrm>
-            <a:off x="1691640" y="4937760"/>
-            <a:ext cx="3566160" cy="512064"/>
+            <a:off x="777240" y="5550408"/>
+            <a:ext cx="3154680" cy="548640"/>
           </a:xfrm>
           <a:prstGeom prst="roundRect">
             <a:avLst>
@@ -5987,7 +6169,7 @@
           <a:solidFill>
             <a:srgbClr val="5B5BD6"/>
           </a:solidFill>
-          <a:ln w="15240">
+          <a:ln w="17780">
             <a:solidFill>
               <a:srgbClr val="E6E6E6"/>
             </a:solidFill>
@@ -6009,12 +6191,12 @@
           </a:fontRef>
         </p:style>
         <p:txBody>
-          <a:bodyPr rtlCol="0" anchor="ctr" tIns="76200" bIns="76200" lIns="177800" rIns="177800" wrap="none"/>
+          <a:bodyPr rtlCol="0" anchor="ctr" tIns="63500" bIns="63500" lIns="152400" rIns="152400" wrap="none"/>
           <a:lstStyle/>
           <a:p>
             <a:pPr algn="ctr"/>
             <a:r>
-              <a:rPr sz="1800" b="1">
+              <a:rPr sz="1700" b="1">
                 <a:solidFill>
                   <a:srgbClr val="FFFFFF"/>
                 </a:solidFill>
@@ -6033,43 +6215,8 @@
         </p:nvSpPr>
         <p:spPr>
           <a:xfrm>
-            <a:off x="777240" y="5577840"/>
-            <a:ext cx="5394960" cy="411480"/>
-          </a:xfrm>
-          <a:prstGeom prst="rect">
-            <a:avLst/>
-          </a:prstGeom>
-          <a:noFill/>
-        </p:spPr>
-        <p:txBody>
-          <a:bodyPr wrap="none" anchor="t">
-            <a:spAutoFit/>
-          </a:bodyPr>
-          <a:lstStyle/>
-          <a:p>
-            <a:pPr algn="l"/>
-            <a:r>
-              <a:rPr sz="1400" b="0" spc="-20">
-                <a:solidFill>
-                  <a:srgbClr val="6B7280"/>
-                </a:solidFill>
-                <a:latin typeface="Menlo"/>
-              </a:rPr>
-              <a:t>dto = 요청·응답 데이터 (controller ↔ 화면)</a:t>
-            </a:r>
-          </a:p>
-        </p:txBody>
-      </p:sp>
-      <p:sp>
-        <p:nvSpPr>
-          <p:cNvPr id="15" name="TextBox 14"/>
-          <p:cNvSpPr txBox="1"/>
-          <p:nvPr/>
-        </p:nvSpPr>
-        <p:spPr>
-          <a:xfrm>
-            <a:off x="6446520" y="1828800"/>
-            <a:ext cx="5029200" cy="457200"/>
+            <a:off x="4343400" y="1828800"/>
+            <a:ext cx="3108960" cy="457200"/>
           </a:xfrm>
           <a:prstGeom prst="rect">
             <a:avLst/>
@@ -6084,27 +6231,39 @@
           <a:p>
             <a:pPr algn="l"/>
             <a:r>
-              <a:rPr sz="2200" b="1" spc="-30">
+              <a:rPr sz="2000" b="1" spc="-30">
                 <a:solidFill>
                   <a:srgbClr val="B5793A"/>
                 </a:solidFill>
                 <a:latin typeface="Apple SD Gothic Neo"/>
               </a:rPr>
-              <a:t>프론트 · React — 기능형</a:t>
-            </a:r>
-          </a:p>
-        </p:txBody>
-      </p:sp>
-      <p:sp>
-        <p:nvSpPr>
-          <p:cNvPr id="16" name="Rounded Rectangle 15"/>
+              <a:t>프론트 · React</a:t>
+            </a:r>
+          </a:p>
+          <a:p>
+            <a:pPr algn="l"/>
+            <a:r>
+              <a:rPr sz="1500" b="0" spc="-30">
+                <a:solidFill>
+                  <a:srgbClr val="6B7280"/>
+                </a:solidFill>
+                <a:latin typeface="Apple SD Gothic Neo"/>
+              </a:rPr>
+              <a:t>기능형</a:t>
+            </a:r>
+          </a:p>
+        </p:txBody>
+      </p:sp>
+      <p:sp>
+        <p:nvSpPr>
+          <p:cNvPr id="15" name="Rounded Rectangle 14"/>
           <p:cNvSpPr/>
           <p:nvPr/>
         </p:nvSpPr>
         <p:spPr>
           <a:xfrm>
-            <a:off x="6446520" y="2423160"/>
-            <a:ext cx="5029200" cy="2194560"/>
+            <a:off x="4343400" y="2697480"/>
+            <a:ext cx="3154680" cy="713232"/>
           </a:xfrm>
           <a:prstGeom prst="roundRect">
             <a:avLst>
@@ -6112,9 +6271,9 @@
             </a:avLst>
           </a:prstGeom>
           <a:solidFill>
-            <a:srgbClr val="F4F4F6"/>
+            <a:srgbClr val="F7EDE6"/>
           </a:solidFill>
-          <a:ln w="15240">
+          <a:ln w="17780">
             <a:solidFill>
               <a:srgbClr val="E6E6E6"/>
             </a:solidFill>
@@ -6136,92 +6295,243 @@
           </a:fontRef>
         </p:style>
         <p:txBody>
-          <a:bodyPr rtlCol="0" anchor="ctr" tIns="76200" bIns="76200" lIns="177800" rIns="177800" wrap="square"/>
+          <a:bodyPr rtlCol="0" anchor="ctr" tIns="63500" bIns="63500" lIns="152400" rIns="152400" wrap="none"/>
           <a:lstStyle/>
           <a:p>
             <a:pPr algn="l"/>
             <a:r>
-              <a:rPr sz="1900" b="1">
+              <a:rPr sz="1700" b="1">
                 <a:solidFill>
                   <a:srgbClr val="1A1A1A"/>
                 </a:solidFill>
                 <a:latin typeface="Menlo"/>
               </a:rPr>
-              <a:t>features/</a:t>
-            </a:r>
-          </a:p>
+              <a:t>화면   </a:t>
+            </a:r>
+            <a:r>
+              <a:rPr sz="1300" b="0">
+                <a:solidFill>
+                  <a:srgbClr val="6B7280"/>
+                </a:solidFill>
+                <a:latin typeface="Apple SD Gothic Neo"/>
+              </a:rPr>
+              <a:t>components — 보이는 UI</a:t>
+            </a:r>
+          </a:p>
+        </p:txBody>
+      </p:sp>
+      <p:sp>
+        <p:nvSpPr>
+          <p:cNvPr id="16" name="TextBox 15"/>
+          <p:cNvSpPr txBox="1"/>
+          <p:nvPr/>
+        </p:nvSpPr>
+        <p:spPr>
+          <a:xfrm>
+            <a:off x="5715000" y="3355848"/>
+            <a:ext cx="822960" cy="292608"/>
+          </a:xfrm>
+          <a:prstGeom prst="rect">
+            <a:avLst/>
+          </a:prstGeom>
+          <a:noFill/>
+        </p:spPr>
+        <p:txBody>
+          <a:bodyPr wrap="square" anchor="ctr">
+            <a:spAutoFit/>
+          </a:bodyPr>
+          <a:lstStyle/>
+          <a:p>
+            <a:pPr algn="ctr"/>
+            <a:r>
+              <a:rPr sz="1800" b="1">
+                <a:solidFill>
+                  <a:srgbClr val="6B7280"/>
+                </a:solidFill>
+                <a:latin typeface="Apple SD Gothic Neo"/>
+              </a:rPr>
+              <a:t>↓</a:t>
+            </a:r>
+          </a:p>
+        </p:txBody>
+      </p:sp>
+      <p:sp>
+        <p:nvSpPr>
+          <p:cNvPr id="17" name="Rounded Rectangle 16"/>
+          <p:cNvSpPr/>
+          <p:nvPr/>
+        </p:nvSpPr>
+        <p:spPr>
+          <a:xfrm>
+            <a:off x="4343400" y="3575304"/>
+            <a:ext cx="3154680" cy="713232"/>
+          </a:xfrm>
+          <a:prstGeom prst="roundRect">
+            <a:avLst>
+              <a:gd name="adj" fmla="val 16000"/>
+            </a:avLst>
+          </a:prstGeom>
+          <a:solidFill>
+            <a:srgbClr val="F7EDE6"/>
+          </a:solidFill>
+          <a:ln w="17780">
+            <a:solidFill>
+              <a:srgbClr val="E6E6E6"/>
+            </a:solidFill>
+          </a:ln>
+          <a:effectLst/>
+        </p:spPr>
+        <p:style>
+          <a:lnRef idx="1">
+            <a:schemeClr val="accent1"/>
+          </a:lnRef>
+          <a:fillRef idx="3">
+            <a:schemeClr val="accent1"/>
+          </a:fillRef>
+          <a:effectRef idx="2">
+            <a:schemeClr val="accent1"/>
+          </a:effectRef>
+          <a:fontRef idx="minor">
+            <a:schemeClr val="lt1"/>
+          </a:fontRef>
+        </p:style>
+        <p:txBody>
+          <a:bodyPr rtlCol="0" anchor="ctr" tIns="63500" bIns="63500" lIns="152400" rIns="152400" wrap="none"/>
+          <a:lstStyle/>
           <a:p>
             <a:pPr algn="l"/>
             <a:r>
-              <a:rPr sz="1500" b="0">
+              <a:rPr sz="1700" b="1">
+                <a:solidFill>
+                  <a:srgbClr val="1A1A1A"/>
+                </a:solidFill>
+                <a:latin typeface="Menlo"/>
+              </a:rPr>
+              <a:t>hook   </a:t>
+            </a:r>
+            <a:r>
+              <a:rPr sz="1300" b="0">
                 <a:solidFill>
                   <a:srgbClr val="6B7280"/>
                 </a:solidFill>
                 <a:latin typeface="Apple SD Gothic Neo"/>
               </a:rPr>
-              <a:t>기능 한 폴더 = 화면 + hook + api</a:t>
-            </a:r>
-          </a:p>
+              <a:t>상태 관리·호출 트리거</a:t>
+            </a:r>
+          </a:p>
+        </p:txBody>
+      </p:sp>
+      <p:sp>
+        <p:nvSpPr>
+          <p:cNvPr id="18" name="TextBox 17"/>
+          <p:cNvSpPr txBox="1"/>
+          <p:nvPr/>
+        </p:nvSpPr>
+        <p:spPr>
+          <a:xfrm>
+            <a:off x="5715000" y="4233672"/>
+            <a:ext cx="822960" cy="292608"/>
+          </a:xfrm>
+          <a:prstGeom prst="rect">
+            <a:avLst/>
+          </a:prstGeom>
+          <a:noFill/>
+        </p:spPr>
+        <p:txBody>
+          <a:bodyPr wrap="square" anchor="ctr">
+            <a:spAutoFit/>
+          </a:bodyPr>
+          <a:lstStyle/>
+          <a:p>
+            <a:pPr algn="ctr"/>
+            <a:r>
+              <a:rPr sz="1800" b="1">
+                <a:solidFill>
+                  <a:srgbClr val="6B7280"/>
+                </a:solidFill>
+                <a:latin typeface="Apple SD Gothic Neo"/>
+              </a:rPr>
+              <a:t>↓</a:t>
+            </a:r>
+          </a:p>
+        </p:txBody>
+      </p:sp>
+      <p:sp>
+        <p:nvSpPr>
+          <p:cNvPr id="19" name="Rounded Rectangle 18"/>
+          <p:cNvSpPr/>
+          <p:nvPr/>
+        </p:nvSpPr>
+        <p:spPr>
+          <a:xfrm>
+            <a:off x="4343400" y="4453128"/>
+            <a:ext cx="3154680" cy="713232"/>
+          </a:xfrm>
+          <a:prstGeom prst="roundRect">
+            <a:avLst>
+              <a:gd name="adj" fmla="val 16000"/>
+            </a:avLst>
+          </a:prstGeom>
+          <a:solidFill>
+            <a:srgbClr val="F7EDE6"/>
+          </a:solidFill>
+          <a:ln w="17780">
+            <a:solidFill>
+              <a:srgbClr val="E6E6E6"/>
+            </a:solidFill>
+          </a:ln>
+          <a:effectLst/>
+        </p:spPr>
+        <p:style>
+          <a:lnRef idx="1">
+            <a:schemeClr val="accent1"/>
+          </a:lnRef>
+          <a:fillRef idx="3">
+            <a:schemeClr val="accent1"/>
+          </a:fillRef>
+          <a:effectRef idx="2">
+            <a:schemeClr val="accent1"/>
+          </a:effectRef>
+          <a:fontRef idx="minor">
+            <a:schemeClr val="lt1"/>
+          </a:fontRef>
+        </p:style>
+        <p:txBody>
+          <a:bodyPr rtlCol="0" anchor="ctr" tIns="63500" bIns="63500" lIns="152400" rIns="152400" wrap="none"/>
+          <a:lstStyle/>
           <a:p>
             <a:pPr algn="l"/>
             <a:r>
-              <a:rPr sz="800" b="0">
+              <a:rPr sz="1700" b="1">
+                <a:solidFill>
+                  <a:srgbClr val="1A1A1A"/>
+                </a:solidFill>
+                <a:latin typeface="Menlo"/>
+              </a:rPr>
+              <a:t>api   </a:t>
+            </a:r>
+            <a:r>
+              <a:rPr sz="1300" b="0">
                 <a:solidFill>
                   <a:srgbClr val="6B7280"/>
                 </a:solidFill>
                 <a:latin typeface="Apple SD Gothic Neo"/>
               </a:rPr>
-              <a:t/>
-            </a:r>
-          </a:p>
-          <a:p>
-            <a:pPr algn="l"/>
-            <a:r>
-              <a:rPr sz="1600" b="0">
-                <a:solidFill>
-                  <a:srgbClr val="1A1A1A"/>
-                </a:solidFill>
-                <a:latin typeface="Apple SD Gothic Neo"/>
-              </a:rPr>
-              <a:t>auth · contracts · claims</a:t>
-            </a:r>
-          </a:p>
-          <a:p>
-            <a:pPr algn="l"/>
-            <a:r>
-              <a:rPr sz="1600" b="0">
-                <a:solidFill>
-                  <a:srgbClr val="1A1A1A"/>
-                </a:solidFill>
-                <a:latin typeface="Apple SD Gothic Neo"/>
-              </a:rPr>
-              <a:t>benefit-review · underwriting-review</a:t>
-            </a:r>
-          </a:p>
-          <a:p>
-            <a:pPr algn="l"/>
-            <a:r>
-              <a:rPr sz="1600" b="0">
-                <a:solidFill>
-                  <a:srgbClr val="1A1A1A"/>
-                </a:solidFill>
-                <a:latin typeface="Apple SD Gothic Neo"/>
-              </a:rPr>
-              <a:t>assignments · profile · customer-home</a:t>
-            </a:r>
-          </a:p>
-        </p:txBody>
-      </p:sp>
-      <p:sp>
-        <p:nvSpPr>
-          <p:cNvPr id="17" name="TextBox 16"/>
+              <a:t>서버에 요청 보냄</a:t>
+            </a:r>
+          </a:p>
+        </p:txBody>
+      </p:sp>
+      <p:sp>
+        <p:nvSpPr>
+          <p:cNvPr id="20" name="TextBox 19"/>
           <p:cNvSpPr txBox="1"/>
           <p:nvPr/>
         </p:nvSpPr>
         <p:spPr>
           <a:xfrm>
-            <a:off x="777240" y="6080760"/>
-            <a:ext cx="10607040" cy="640080"/>
+            <a:off x="4343400" y="5330952"/>
+            <a:ext cx="3291840" cy="822960"/>
           </a:xfrm>
           <a:prstGeom prst="rect">
             <a:avLst/>
@@ -6234,15 +6544,236 @@
           </a:bodyPr>
           <a:lstStyle/>
           <a:p>
+            <a:pPr algn="l"/>
+            <a:r>
+              <a:rPr sz="1300" b="1" spc="-20">
+                <a:solidFill>
+                  <a:srgbClr val="1A1A1A"/>
+                </a:solidFill>
+                <a:latin typeface="Apple SD Gothic Neo"/>
+              </a:rPr>
+              <a:t>한 기능 = 이 셋이 한 폴더</a:t>
+            </a:r>
+          </a:p>
+          <a:p>
+            <a:pPr algn="l"/>
+            <a:r>
+              <a:rPr sz="1200" b="0" spc="-20">
+                <a:solidFill>
+                  <a:srgbClr val="6B7280"/>
+                </a:solidFill>
+                <a:latin typeface="Menlo"/>
+              </a:rPr>
+              <a:t>features/ : auth·contracts·claims</a:t>
+            </a:r>
+          </a:p>
+          <a:p>
+            <a:pPr algn="l"/>
+            <a:r>
+              <a:rPr sz="1200" b="0" spc="-20">
+                <a:solidFill>
+                  <a:srgbClr val="6B7280"/>
+                </a:solidFill>
+                <a:latin typeface="Menlo"/>
+              </a:rPr>
+              <a:t>benefit-review·profile … </a:t>
+            </a:r>
+          </a:p>
+        </p:txBody>
+      </p:sp>
+      <p:sp>
+        <p:nvSpPr>
+          <p:cNvPr id="21" name="Rounded Rectangle 20"/>
+          <p:cNvSpPr/>
+          <p:nvPr/>
+        </p:nvSpPr>
+        <p:spPr>
+          <a:xfrm>
+            <a:off x="7909560" y="2697480"/>
+            <a:ext cx="3566160" cy="2331720"/>
+          </a:xfrm>
+          <a:prstGeom prst="roundRect">
+            <a:avLst>
+              <a:gd name="adj" fmla="val 6000"/>
+            </a:avLst>
+          </a:prstGeom>
+          <a:solidFill>
+            <a:srgbClr val="1F1D3D"/>
+          </a:solidFill>
+          <a:ln>
+            <a:noFill/>
+          </a:ln>
+          <a:effectLst/>
+        </p:spPr>
+        <p:style>
+          <a:lnRef idx="1">
+            <a:schemeClr val="accent1"/>
+          </a:lnRef>
+          <a:fillRef idx="3">
+            <a:schemeClr val="accent1"/>
+          </a:fillRef>
+          <a:effectRef idx="2">
+            <a:schemeClr val="accent1"/>
+          </a:effectRef>
+          <a:fontRef idx="minor">
+            <a:schemeClr val="lt1"/>
+          </a:fontRef>
+        </p:style>
+        <p:txBody>
+          <a:bodyPr rtlCol="0" anchor="ctr" tIns="63500" bIns="63500" lIns="152400" rIns="152400" wrap="square"/>
+          <a:lstStyle/>
+          <a:p>
+            <a:pPr algn="l"/>
+            <a:r>
+              <a:rPr sz="3000" b="1">
+                <a:solidFill>
+                  <a:srgbClr val="FFFFFF"/>
+                </a:solidFill>
+                <a:latin typeface="Menlo"/>
+              </a:rPr>
+              <a:t>DTO</a:t>
+            </a:r>
+          </a:p>
+          <a:p>
+            <a:pPr algn="l"/>
+            <a:r>
+              <a:rPr sz="1000" b="0">
+                <a:solidFill>
+                  <a:srgbClr val="FFFFFF"/>
+                </a:solidFill>
+                <a:latin typeface="Apple SD Gothic Neo"/>
+              </a:rPr>
+              <a:t/>
+            </a:r>
+          </a:p>
+          <a:p>
+            <a:pPr algn="l"/>
+            <a:r>
+              <a:rPr sz="1600" b="1">
+                <a:solidFill>
+                  <a:srgbClr val="FFFFFF"/>
+                </a:solidFill>
+                <a:latin typeface="Apple SD Gothic Neo"/>
+              </a:rPr>
+              <a:t>화면(api)과 서버(controller)가</a:t>
+            </a:r>
+          </a:p>
+          <a:p>
+            <a:pPr algn="l"/>
+            <a:r>
+              <a:rPr sz="1600" b="1">
+                <a:solidFill>
+                  <a:srgbClr val="FFFFFF"/>
+                </a:solidFill>
+                <a:latin typeface="Apple SD Gothic Neo"/>
+              </a:rPr>
+              <a:t>주고받는 데이터 형식</a:t>
+            </a:r>
+          </a:p>
+          <a:p>
+            <a:pPr algn="l"/>
+            <a:r>
+              <a:rPr sz="800" b="0">
+                <a:solidFill>
+                  <a:srgbClr val="FFFFFF"/>
+                </a:solidFill>
+                <a:latin typeface="Apple SD Gothic Neo"/>
+              </a:rPr>
+              <a:t/>
+            </a:r>
+          </a:p>
+          <a:p>
+            <a:pPr algn="l"/>
+            <a:r>
+              <a:rPr sz="1400" b="0">
+                <a:solidFill>
+                  <a:srgbClr val="CDBFF7"/>
+                </a:solidFill>
+                <a:latin typeface="Apple SD Gothic Neo"/>
+              </a:rPr>
+              <a:t>요청 DTO  →  서버로 보낼 값</a:t>
+            </a:r>
+          </a:p>
+          <a:p>
+            <a:pPr algn="l"/>
+            <a:r>
+              <a:rPr sz="1400" b="0">
+                <a:solidFill>
+                  <a:srgbClr val="CDBFF7"/>
+                </a:solidFill>
+                <a:latin typeface="Apple SD Gothic Neo"/>
+              </a:rPr>
+              <a:t>응답 DTO  ←  화면에 뿌릴 값</a:t>
+            </a:r>
+          </a:p>
+        </p:txBody>
+      </p:sp>
+      <p:sp>
+        <p:nvSpPr>
+          <p:cNvPr id="22" name="TextBox 21"/>
+          <p:cNvSpPr txBox="1"/>
+          <p:nvPr/>
+        </p:nvSpPr>
+        <p:spPr>
+          <a:xfrm>
+            <a:off x="7909560" y="5120640"/>
+            <a:ext cx="3566160" cy="457200"/>
+          </a:xfrm>
+          <a:prstGeom prst="rect">
+            <a:avLst/>
+          </a:prstGeom>
+          <a:noFill/>
+        </p:spPr>
+        <p:txBody>
+          <a:bodyPr wrap="square" anchor="t">
+            <a:spAutoFit/>
+          </a:bodyPr>
+          <a:lstStyle/>
+          <a:p>
             <a:pPr algn="ctr"/>
             <a:r>
-              <a:rPr sz="2600" b="1" spc="-40">
+              <a:rPr sz="1200" b="0" spc="-20">
+                <a:solidFill>
+                  <a:srgbClr val="6B7280"/>
+                </a:solidFill>
+                <a:latin typeface="Apple SD Gothic Neo"/>
+              </a:rPr>
+              <a:t>엔티티를 그대로 노출 안 하고 DTO로 변환</a:t>
+            </a:r>
+          </a:p>
+        </p:txBody>
+      </p:sp>
+      <p:sp>
+        <p:nvSpPr>
+          <p:cNvPr id="23" name="TextBox 22"/>
+          <p:cNvSpPr txBox="1"/>
+          <p:nvPr/>
+        </p:nvSpPr>
+        <p:spPr>
+          <a:xfrm>
+            <a:off x="777240" y="5989320"/>
+            <a:ext cx="10607040" cy="640080"/>
+          </a:xfrm>
+          <a:prstGeom prst="rect">
+            <a:avLst/>
+          </a:prstGeom>
+          <a:noFill/>
+        </p:spPr>
+        <p:txBody>
+          <a:bodyPr wrap="square" anchor="t">
+            <a:spAutoFit/>
+          </a:bodyPr>
+          <a:lstStyle/>
+          <a:p>
+            <a:pPr algn="ctr"/>
+            <a:r>
+              <a:rPr sz="2400" b="1" spc="-40">
                 <a:solidFill>
                   <a:srgbClr val="1A1A1A"/>
                 </a:solidFill>
                 <a:latin typeface="Apple SD Gothic Neo"/>
               </a:rPr>
-              <a:t>백엔드는 계층으로, 프론트는 기능 단위로 나눴다.</a:t>
+              <a:t>백엔드는 계층, 프론트는 기능 단위 — 둘 사이는 DTO로 주고받는다.</a:t>
             </a:r>
           </a:p>
         </p:txBody>
@@ -6256,7 +6787,7 @@
 </file>
 
 <file path=ppt/slides/slide19.xml><?xml version="1.0" encoding="utf-8"?>
-<p:sld xmlns:a="http://schemas.openxmlformats.org/drawingml/2006/main" xmlns:p="http://schemas.openxmlformats.org/presentationml/2006/main" xmlns:r="http://schemas.openxmlformats.org/officeDocument/2006/relationships">
+<p:sld xmlns:a="http://schemas.openxmlformats.org/drawingml/2006/main" xmlns:r="http://schemas.openxmlformats.org/officeDocument/2006/relationships" xmlns:p="http://schemas.openxmlformats.org/presentationml/2006/main">
   <p:cSld>
     <p:bg>
       <p:bgPr>
@@ -6272,7 +6803,14 @@
         <p:cNvGrpSpPr/>
         <p:nvPr/>
       </p:nvGrpSpPr>
-      <p:grpSpPr/>
+      <p:grpSpPr>
+        <a:xfrm>
+          <a:off x="0" y="0"/>
+          <a:ext cx="0" cy="0"/>
+          <a:chOff x="0" y="0"/>
+          <a:chExt cx="0" cy="0"/>
+        </a:xfrm>
+      </p:grpSpPr>
       <p:sp>
         <p:nvSpPr>
           <p:cNvPr id="2" name="TextBox 1"/>
@@ -6349,6 +6887,7 @@
           <a:lstStyle/>
           <a:p>
             <a:pPr algn="ctr"/>
+            <a:endParaRPr/>
           </a:p>
         </p:txBody>
       </p:sp>
@@ -6473,7 +7012,7 @@
 </file>
 
 <file path=ppt/slides/slide2.xml><?xml version="1.0" encoding="utf-8"?>
-<p:sld xmlns:a="http://schemas.openxmlformats.org/drawingml/2006/main" xmlns:p="http://schemas.openxmlformats.org/presentationml/2006/main" xmlns:r="http://schemas.openxmlformats.org/officeDocument/2006/relationships">
+<p:sld xmlns:a="http://schemas.openxmlformats.org/drawingml/2006/main" xmlns:r="http://schemas.openxmlformats.org/officeDocument/2006/relationships" xmlns:p="http://schemas.openxmlformats.org/presentationml/2006/main">
   <p:cSld>
     <p:bg>
       <p:bgPr>
@@ -6489,7 +7028,14 @@
         <p:cNvGrpSpPr/>
         <p:nvPr/>
       </p:nvGrpSpPr>
-      <p:grpSpPr/>
+      <p:grpSpPr>
+        <a:xfrm>
+          <a:off x="0" y="0"/>
+          <a:ext cx="0" cy="0"/>
+          <a:chOff x="0" y="0"/>
+          <a:chExt cx="0" cy="0"/>
+        </a:xfrm>
+      </p:grpSpPr>
       <p:sp>
         <p:nvSpPr>
           <p:cNvPr id="2" name="TextBox 1"/>
@@ -6566,6 +7112,7 @@
           <a:lstStyle/>
           <a:p>
             <a:pPr algn="ctr"/>
+            <a:endParaRPr/>
           </a:p>
         </p:txBody>
       </p:sp>
@@ -6606,7 +7153,7 @@
           </a:fontRef>
         </p:style>
         <p:txBody>
-          <a:bodyPr rtlCol="0" anchor="ctr" tIns="76200" bIns="76200" lIns="177800" rIns="177800" wrap="none"/>
+          <a:bodyPr wrap="none" lIns="177800" tIns="76200" rIns="177800" bIns="76200" rtlCol="0" anchor="ctr"/>
           <a:lstStyle/>
           <a:p>
             <a:pPr algn="ctr"/>
@@ -6694,7 +7241,7 @@
           </a:fontRef>
         </p:style>
         <p:txBody>
-          <a:bodyPr rtlCol="0" anchor="ctr" tIns="76200" bIns="76200" lIns="177800" rIns="177800" wrap="none"/>
+          <a:bodyPr wrap="none" lIns="177800" tIns="76200" rIns="177800" bIns="76200" rtlCol="0" anchor="ctr"/>
           <a:lstStyle/>
           <a:p>
             <a:pPr algn="ctr"/>
@@ -6782,7 +7329,7 @@
           </a:fontRef>
         </p:style>
         <p:txBody>
-          <a:bodyPr rtlCol="0" anchor="ctr" tIns="76200" bIns="76200" lIns="177800" rIns="177800" wrap="none"/>
+          <a:bodyPr wrap="none" lIns="177800" tIns="76200" rIns="177800" bIns="76200" rtlCol="0" anchor="ctr"/>
           <a:lstStyle/>
           <a:p>
             <a:pPr algn="ctr"/>
@@ -6842,7 +7389,7 @@
 </file>
 
 <file path=ppt/slides/slide20.xml><?xml version="1.0" encoding="utf-8"?>
-<p:sld xmlns:a="http://schemas.openxmlformats.org/drawingml/2006/main" xmlns:p="http://schemas.openxmlformats.org/presentationml/2006/main" xmlns:r="http://schemas.openxmlformats.org/officeDocument/2006/relationships">
+<p:sld xmlns:a="http://schemas.openxmlformats.org/drawingml/2006/main" xmlns:r="http://schemas.openxmlformats.org/officeDocument/2006/relationships" xmlns:p="http://schemas.openxmlformats.org/presentationml/2006/main">
   <p:cSld>
     <p:bg>
       <p:bgPr>
@@ -6858,7 +7405,14 @@
         <p:cNvGrpSpPr/>
         <p:nvPr/>
       </p:nvGrpSpPr>
-      <p:grpSpPr/>
+      <p:grpSpPr>
+        <a:xfrm>
+          <a:off x="0" y="0"/>
+          <a:ext cx="0" cy="0"/>
+          <a:chOff x="0" y="0"/>
+          <a:chExt cx="0" cy="0"/>
+        </a:xfrm>
+      </p:grpSpPr>
       <p:sp>
         <p:nvSpPr>
           <p:cNvPr id="2" name="TextBox 1"/>
@@ -6935,6 +7489,7 @@
           <a:lstStyle/>
           <a:p>
             <a:pPr algn="ctr"/>
+            <a:endParaRPr/>
           </a:p>
         </p:txBody>
       </p:sp>
@@ -7025,6 +7580,7 @@
           <a:lstStyle/>
           <a:p>
             <a:pPr algn="ctr"/>
+            <a:endParaRPr/>
           </a:p>
         </p:txBody>
       </p:sp>
@@ -7099,15 +7655,12 @@
           </a:p>
           <a:p>
             <a:pPr algn="l"/>
-            <a:r>
-              <a:rPr sz="1500" b="0">
-                <a:solidFill>
-                  <a:srgbClr val="FFFFFF"/>
-                </a:solidFill>
-                <a:latin typeface="Menlo"/>
-              </a:rPr>
-              <a:t/>
-            </a:r>
+            <a:endParaRPr sz="1500" b="0">
+              <a:solidFill>
+                <a:srgbClr val="FFFFFF"/>
+              </a:solidFill>
+              <a:latin typeface="Menlo"/>
+            </a:endParaRPr>
           </a:p>
           <a:p>
             <a:pPr algn="l"/>
@@ -7203,7 +7756,7 @@
 </file>
 
 <file path=ppt/slides/slide21.xml><?xml version="1.0" encoding="utf-8"?>
-<p:sld xmlns:a="http://schemas.openxmlformats.org/drawingml/2006/main" xmlns:p="http://schemas.openxmlformats.org/presentationml/2006/main" xmlns:r="http://schemas.openxmlformats.org/officeDocument/2006/relationships">
+<p:sld xmlns:a="http://schemas.openxmlformats.org/drawingml/2006/main" xmlns:r="http://schemas.openxmlformats.org/officeDocument/2006/relationships" xmlns:p="http://schemas.openxmlformats.org/presentationml/2006/main">
   <p:cSld>
     <p:bg>
       <p:bgPr>
@@ -7219,7 +7772,14 @@
         <p:cNvGrpSpPr/>
         <p:nvPr/>
       </p:nvGrpSpPr>
-      <p:grpSpPr/>
+      <p:grpSpPr>
+        <a:xfrm>
+          <a:off x="0" y="0"/>
+          <a:ext cx="0" cy="0"/>
+          <a:chOff x="0" y="0"/>
+          <a:chExt cx="0" cy="0"/>
+        </a:xfrm>
+      </p:grpSpPr>
       <p:sp>
         <p:nvSpPr>
           <p:cNvPr id="2" name="TextBox 1"/>
@@ -7296,6 +7856,7 @@
           <a:lstStyle/>
           <a:p>
             <a:pPr algn="ctr"/>
+            <a:endParaRPr/>
           </a:p>
         </p:txBody>
       </p:sp>
@@ -7386,6 +7947,7 @@
           <a:lstStyle/>
           <a:p>
             <a:pPr algn="ctr"/>
+            <a:endParaRPr/>
           </a:p>
         </p:txBody>
       </p:sp>
@@ -7460,15 +8022,12 @@
           </a:p>
           <a:p>
             <a:pPr algn="l"/>
-            <a:r>
-              <a:rPr sz="1500" b="0">
-                <a:solidFill>
-                  <a:srgbClr val="FFFFFF"/>
-                </a:solidFill>
-                <a:latin typeface="Menlo"/>
-              </a:rPr>
-              <a:t/>
-            </a:r>
+            <a:endParaRPr sz="1500" b="0">
+              <a:solidFill>
+                <a:srgbClr val="FFFFFF"/>
+              </a:solidFill>
+              <a:latin typeface="Menlo"/>
+            </a:endParaRPr>
           </a:p>
           <a:p>
             <a:pPr algn="l"/>
@@ -7552,7 +8111,7 @@
 </file>
 
 <file path=ppt/slides/slide22.xml><?xml version="1.0" encoding="utf-8"?>
-<p:sld xmlns:a="http://schemas.openxmlformats.org/drawingml/2006/main" xmlns:p="http://schemas.openxmlformats.org/presentationml/2006/main" xmlns:r="http://schemas.openxmlformats.org/officeDocument/2006/relationships">
+<p:sld xmlns:a="http://schemas.openxmlformats.org/drawingml/2006/main" xmlns:r="http://schemas.openxmlformats.org/officeDocument/2006/relationships" xmlns:p="http://schemas.openxmlformats.org/presentationml/2006/main">
   <p:cSld>
     <p:bg>
       <p:bgPr>
@@ -7568,7 +8127,14 @@
         <p:cNvGrpSpPr/>
         <p:nvPr/>
       </p:nvGrpSpPr>
-      <p:grpSpPr/>
+      <p:grpSpPr>
+        <a:xfrm>
+          <a:off x="0" y="0"/>
+          <a:ext cx="0" cy="0"/>
+          <a:chOff x="0" y="0"/>
+          <a:chExt cx="0" cy="0"/>
+        </a:xfrm>
+      </p:grpSpPr>
       <p:sp>
         <p:nvSpPr>
           <p:cNvPr id="2" name="TextBox 1"/>
@@ -7645,6 +8211,7 @@
           <a:lstStyle/>
           <a:p>
             <a:pPr algn="ctr"/>
+            <a:endParaRPr/>
           </a:p>
         </p:txBody>
       </p:sp>
@@ -7735,6 +8302,7 @@
           <a:lstStyle/>
           <a:p>
             <a:pPr algn="ctr"/>
+            <a:endParaRPr/>
           </a:p>
         </p:txBody>
       </p:sp>
@@ -7785,15 +8353,12 @@
           </a:p>
           <a:p>
             <a:pPr algn="l"/>
-            <a:r>
-              <a:rPr sz="1500" b="0">
-                <a:solidFill>
-                  <a:srgbClr val="FFFFFF"/>
-                </a:solidFill>
-                <a:latin typeface="Menlo"/>
-              </a:rPr>
-              <a:t/>
-            </a:r>
+            <a:endParaRPr sz="1500" b="0">
+              <a:solidFill>
+                <a:srgbClr val="CDBFF7"/>
+              </a:solidFill>
+              <a:latin typeface="Menlo"/>
+            </a:endParaRPr>
           </a:p>
           <a:p>
             <a:pPr algn="l"/>
@@ -7901,7 +8466,7 @@
 </file>
 
 <file path=ppt/slides/slide23.xml><?xml version="1.0" encoding="utf-8"?>
-<p:sld xmlns:a="http://schemas.openxmlformats.org/drawingml/2006/main" xmlns:p="http://schemas.openxmlformats.org/presentationml/2006/main" xmlns:r="http://schemas.openxmlformats.org/officeDocument/2006/relationships">
+<p:sld xmlns:a="http://schemas.openxmlformats.org/drawingml/2006/main" xmlns:r="http://schemas.openxmlformats.org/officeDocument/2006/relationships" xmlns:p="http://schemas.openxmlformats.org/presentationml/2006/main">
   <p:cSld>
     <p:bg>
       <p:bgPr>
@@ -7917,7 +8482,14 @@
         <p:cNvGrpSpPr/>
         <p:nvPr/>
       </p:nvGrpSpPr>
-      <p:grpSpPr/>
+      <p:grpSpPr>
+        <a:xfrm>
+          <a:off x="0" y="0"/>
+          <a:ext cx="0" cy="0"/>
+          <a:chOff x="0" y="0"/>
+          <a:chExt cx="0" cy="0"/>
+        </a:xfrm>
+      </p:grpSpPr>
       <p:sp>
         <p:nvSpPr>
           <p:cNvPr id="2" name="TextBox 1"/>
@@ -7994,6 +8566,7 @@
           <a:lstStyle/>
           <a:p>
             <a:pPr algn="ctr"/>
+            <a:endParaRPr/>
           </a:p>
         </p:txBody>
       </p:sp>
@@ -8084,6 +8657,7 @@
           <a:lstStyle/>
           <a:p>
             <a:pPr algn="ctr"/>
+            <a:endParaRPr/>
           </a:p>
         </p:txBody>
       </p:sp>
@@ -8182,15 +8756,12 @@
           </a:p>
           <a:p>
             <a:pPr algn="l"/>
-            <a:r>
-              <a:rPr sz="1500" b="0">
-                <a:solidFill>
-                  <a:srgbClr val="FFFFFF"/>
-                </a:solidFill>
-                <a:latin typeface="Menlo"/>
-              </a:rPr>
-              <a:t/>
-            </a:r>
+            <a:endParaRPr sz="1500" b="0">
+              <a:solidFill>
+                <a:srgbClr val="FFFFFF"/>
+              </a:solidFill>
+              <a:latin typeface="Menlo"/>
+            </a:endParaRPr>
           </a:p>
           <a:p>
             <a:pPr algn="l"/>
@@ -8262,7 +8833,7 @@
 </file>
 
 <file path=ppt/slides/slide24.xml><?xml version="1.0" encoding="utf-8"?>
-<p:sld xmlns:a="http://schemas.openxmlformats.org/drawingml/2006/main" xmlns:p="http://schemas.openxmlformats.org/presentationml/2006/main" xmlns:r="http://schemas.openxmlformats.org/officeDocument/2006/relationships">
+<p:sld xmlns:a="http://schemas.openxmlformats.org/drawingml/2006/main" xmlns:r="http://schemas.openxmlformats.org/officeDocument/2006/relationships" xmlns:p="http://schemas.openxmlformats.org/presentationml/2006/main">
   <p:cSld>
     <p:bg>
       <p:bgPr>
@@ -8278,7 +8849,14 @@
         <p:cNvGrpSpPr/>
         <p:nvPr/>
       </p:nvGrpSpPr>
-      <p:grpSpPr/>
+      <p:grpSpPr>
+        <a:xfrm>
+          <a:off x="0" y="0"/>
+          <a:ext cx="0" cy="0"/>
+          <a:chOff x="0" y="0"/>
+          <a:chExt cx="0" cy="0"/>
+        </a:xfrm>
+      </p:grpSpPr>
       <p:sp>
         <p:nvSpPr>
           <p:cNvPr id="2" name="TextBox 1"/>
@@ -8355,6 +8933,7 @@
           <a:lstStyle/>
           <a:p>
             <a:pPr algn="ctr"/>
+            <a:endParaRPr/>
           </a:p>
         </p:txBody>
       </p:sp>
@@ -8445,6 +9024,7 @@
           <a:lstStyle/>
           <a:p>
             <a:pPr algn="ctr"/>
+            <a:endParaRPr/>
           </a:p>
         </p:txBody>
       </p:sp>
@@ -8611,7 +9191,7 @@
 </file>
 
 <file path=ppt/slides/slide25.xml><?xml version="1.0" encoding="utf-8"?>
-<p:sld xmlns:a="http://schemas.openxmlformats.org/drawingml/2006/main" xmlns:p="http://schemas.openxmlformats.org/presentationml/2006/main" xmlns:r="http://schemas.openxmlformats.org/officeDocument/2006/relationships">
+<p:sld xmlns:a="http://schemas.openxmlformats.org/drawingml/2006/main" xmlns:r="http://schemas.openxmlformats.org/officeDocument/2006/relationships" xmlns:p="http://schemas.openxmlformats.org/presentationml/2006/main">
   <p:cSld>
     <p:bg>
       <p:bgPr>
@@ -8627,7 +9207,14 @@
         <p:cNvGrpSpPr/>
         <p:nvPr/>
       </p:nvGrpSpPr>
-      <p:grpSpPr/>
+      <p:grpSpPr>
+        <a:xfrm>
+          <a:off x="0" y="0"/>
+          <a:ext cx="0" cy="0"/>
+          <a:chOff x="0" y="0"/>
+          <a:chExt cx="0" cy="0"/>
+        </a:xfrm>
+      </p:grpSpPr>
       <p:sp>
         <p:nvSpPr>
           <p:cNvPr id="2" name="TextBox 1"/>
@@ -8704,6 +9291,7 @@
           <a:lstStyle/>
           <a:p>
             <a:pPr algn="ctr"/>
+            <a:endParaRPr/>
           </a:p>
         </p:txBody>
       </p:sp>
@@ -8750,6 +9338,7 @@
           <a:lstStyle/>
           <a:p>
             <a:pPr algn="ctr"/>
+            <a:endParaRPr/>
           </a:p>
         </p:txBody>
       </p:sp>
@@ -8963,7 +9552,7 @@
 </file>
 
 <file path=ppt/slides/slide26.xml><?xml version="1.0" encoding="utf-8"?>
-<p:sld xmlns:a="http://schemas.openxmlformats.org/drawingml/2006/main" xmlns:p="http://schemas.openxmlformats.org/presentationml/2006/main" xmlns:r="http://schemas.openxmlformats.org/officeDocument/2006/relationships">
+<p:sld xmlns:a="http://schemas.openxmlformats.org/drawingml/2006/main" xmlns:r="http://schemas.openxmlformats.org/officeDocument/2006/relationships" xmlns:p="http://schemas.openxmlformats.org/presentationml/2006/main">
   <p:cSld>
     <p:bg>
       <p:bgPr>
@@ -8979,7 +9568,14 @@
         <p:cNvGrpSpPr/>
         <p:nvPr/>
       </p:nvGrpSpPr>
-      <p:grpSpPr/>
+      <p:grpSpPr>
+        <a:xfrm>
+          <a:off x="0" y="0"/>
+          <a:ext cx="0" cy="0"/>
+          <a:chOff x="0" y="0"/>
+          <a:chExt cx="0" cy="0"/>
+        </a:xfrm>
+      </p:grpSpPr>
       <p:sp>
         <p:nvSpPr>
           <p:cNvPr id="2" name="TextBox 1"/>
@@ -9056,6 +9652,7 @@
           <a:lstStyle/>
           <a:p>
             <a:pPr algn="ctr"/>
+            <a:endParaRPr/>
           </a:p>
         </p:txBody>
       </p:sp>
@@ -9102,6 +9699,7 @@
           <a:lstStyle/>
           <a:p>
             <a:pPr algn="ctr"/>
+            <a:endParaRPr/>
           </a:p>
         </p:txBody>
       </p:sp>
@@ -9197,6 +9795,7 @@
           <a:lstStyle/>
           <a:p>
             <a:pPr algn="ctr"/>
+            <a:endParaRPr/>
           </a:p>
         </p:txBody>
       </p:sp>
@@ -9288,7 +9887,7 @@
           </a:fontRef>
         </p:style>
         <p:txBody>
-          <a:bodyPr rtlCol="0" anchor="ctr" tIns="76200" bIns="76200" lIns="177800" rIns="177800" wrap="square"/>
+          <a:bodyPr wrap="square" lIns="177800" tIns="76200" rIns="177800" bIns="76200" rtlCol="0" anchor="ctr"/>
           <a:lstStyle/>
           <a:p>
             <a:pPr algn="ctr"/>
@@ -9380,7 +9979,7 @@
           </a:fontRef>
         </p:style>
         <p:txBody>
-          <a:bodyPr rtlCol="0" anchor="ctr" tIns="76200" bIns="76200" lIns="177800" rIns="177800" wrap="square"/>
+          <a:bodyPr wrap="square" lIns="177800" tIns="76200" rIns="177800" bIns="76200" rtlCol="0" anchor="ctr"/>
           <a:lstStyle/>
           <a:p>
             <a:pPr algn="ctr"/>
@@ -9472,7 +10071,7 @@
           </a:fontRef>
         </p:style>
         <p:txBody>
-          <a:bodyPr rtlCol="0" anchor="ctr" tIns="76200" bIns="76200" lIns="177800" rIns="177800" wrap="square"/>
+          <a:bodyPr wrap="square" lIns="177800" tIns="76200" rIns="177800" bIns="76200" rtlCol="0" anchor="ctr"/>
           <a:lstStyle/>
           <a:p>
             <a:pPr algn="ctr"/>
@@ -9564,7 +10163,7 @@
           </a:fontRef>
         </p:style>
         <p:txBody>
-          <a:bodyPr rtlCol="0" anchor="ctr" tIns="76200" bIns="76200" lIns="177800" rIns="177800" wrap="square"/>
+          <a:bodyPr wrap="square" lIns="177800" tIns="76200" rIns="177800" bIns="76200" rtlCol="0" anchor="ctr"/>
           <a:lstStyle/>
           <a:p>
             <a:pPr algn="ctr"/>
@@ -9656,7 +10255,7 @@
           </a:fontRef>
         </p:style>
         <p:txBody>
-          <a:bodyPr rtlCol="0" anchor="ctr" tIns="76200" bIns="76200" lIns="177800" rIns="177800" wrap="square"/>
+          <a:bodyPr wrap="square" lIns="177800" tIns="76200" rIns="177800" bIns="76200" rtlCol="0" anchor="ctr"/>
           <a:lstStyle/>
           <a:p>
             <a:pPr algn="ctr"/>
@@ -9716,7 +10315,7 @@
 </file>
 
 <file path=ppt/slides/slide27.xml><?xml version="1.0" encoding="utf-8"?>
-<p:sld xmlns:a="http://schemas.openxmlformats.org/drawingml/2006/main" xmlns:p="http://schemas.openxmlformats.org/presentationml/2006/main" xmlns:r="http://schemas.openxmlformats.org/officeDocument/2006/relationships">
+<p:sld xmlns:a="http://schemas.openxmlformats.org/drawingml/2006/main" xmlns:r="http://schemas.openxmlformats.org/officeDocument/2006/relationships" xmlns:p="http://schemas.openxmlformats.org/presentationml/2006/main">
   <p:cSld>
     <p:bg>
       <p:bgPr>
@@ -9732,7 +10331,14 @@
         <p:cNvGrpSpPr/>
         <p:nvPr/>
       </p:nvGrpSpPr>
-      <p:grpSpPr/>
+      <p:grpSpPr>
+        <a:xfrm>
+          <a:off x="0" y="0"/>
+          <a:ext cx="0" cy="0"/>
+          <a:chOff x="0" y="0"/>
+          <a:chExt cx="0" cy="0"/>
+        </a:xfrm>
+      </p:grpSpPr>
       <p:sp>
         <p:nvSpPr>
           <p:cNvPr id="2" name="TextBox 1"/>
@@ -9809,6 +10415,7 @@
           <a:lstStyle/>
           <a:p>
             <a:pPr algn="ctr"/>
+            <a:endParaRPr/>
           </a:p>
         </p:txBody>
       </p:sp>
@@ -9857,6 +10464,7 @@
           <a:lstStyle/>
           <a:p>
             <a:pPr algn="ctr"/>
+            <a:endParaRPr/>
           </a:p>
         </p:txBody>
       </p:sp>
@@ -9901,6 +10509,7 @@
           <a:lstStyle/>
           <a:p>
             <a:pPr algn="ctr"/>
+            <a:endParaRPr/>
           </a:p>
         </p:txBody>
       </p:sp>
@@ -9996,6 +10605,7 @@
           <a:lstStyle/>
           <a:p>
             <a:pPr algn="ctr"/>
+            <a:endParaRPr/>
           </a:p>
         </p:txBody>
       </p:sp>
@@ -10040,6 +10650,7 @@
           <a:lstStyle/>
           <a:p>
             <a:pPr algn="ctr"/>
+            <a:endParaRPr/>
           </a:p>
         </p:txBody>
       </p:sp>
@@ -10135,6 +10746,7 @@
           <a:lstStyle/>
           <a:p>
             <a:pPr algn="ctr"/>
+            <a:endParaRPr/>
           </a:p>
         </p:txBody>
       </p:sp>
@@ -10179,6 +10791,7 @@
           <a:lstStyle/>
           <a:p>
             <a:pPr algn="ctr"/>
+            <a:endParaRPr/>
           </a:p>
         </p:txBody>
       </p:sp>
@@ -10274,6 +10887,7 @@
           <a:lstStyle/>
           <a:p>
             <a:pPr algn="ctr"/>
+            <a:endParaRPr/>
           </a:p>
         </p:txBody>
       </p:sp>
@@ -10318,6 +10932,7 @@
           <a:lstStyle/>
           <a:p>
             <a:pPr algn="ctr"/>
+            <a:endParaRPr/>
           </a:p>
         </p:txBody>
       </p:sp>
@@ -10412,7 +11027,7 @@
 </file>
 
 <file path=ppt/slides/slide28.xml><?xml version="1.0" encoding="utf-8"?>
-<p:sld xmlns:a="http://schemas.openxmlformats.org/drawingml/2006/main" xmlns:p="http://schemas.openxmlformats.org/presentationml/2006/main" xmlns:r="http://schemas.openxmlformats.org/officeDocument/2006/relationships">
+<p:sld xmlns:a="http://schemas.openxmlformats.org/drawingml/2006/main" xmlns:r="http://schemas.openxmlformats.org/officeDocument/2006/relationships" xmlns:p="http://schemas.openxmlformats.org/presentationml/2006/main">
   <p:cSld>
     <p:bg>
       <p:bgPr>
@@ -10428,7 +11043,14 @@
         <p:cNvGrpSpPr/>
         <p:nvPr/>
       </p:nvGrpSpPr>
-      <p:grpSpPr/>
+      <p:grpSpPr>
+        <a:xfrm>
+          <a:off x="0" y="0"/>
+          <a:ext cx="0" cy="0"/>
+          <a:chOff x="0" y="0"/>
+          <a:chExt cx="0" cy="0"/>
+        </a:xfrm>
+      </p:grpSpPr>
       <p:sp>
         <p:nvSpPr>
           <p:cNvPr id="2" name="TextBox 1"/>
@@ -10485,7 +11107,7 @@
 </file>
 
 <file path=ppt/slides/slide3.xml><?xml version="1.0" encoding="utf-8"?>
-<p:sld xmlns:a="http://schemas.openxmlformats.org/drawingml/2006/main" xmlns:p="http://schemas.openxmlformats.org/presentationml/2006/main" xmlns:r="http://schemas.openxmlformats.org/officeDocument/2006/relationships">
+<p:sld xmlns:a="http://schemas.openxmlformats.org/drawingml/2006/main" xmlns:r="http://schemas.openxmlformats.org/officeDocument/2006/relationships" xmlns:p="http://schemas.openxmlformats.org/presentationml/2006/main">
   <p:cSld>
     <p:bg>
       <p:bgPr>
@@ -10501,7 +11123,14 @@
         <p:cNvGrpSpPr/>
         <p:nvPr/>
       </p:nvGrpSpPr>
-      <p:grpSpPr/>
+      <p:grpSpPr>
+        <a:xfrm>
+          <a:off x="0" y="0"/>
+          <a:ext cx="0" cy="0"/>
+          <a:chOff x="0" y="0"/>
+          <a:chExt cx="0" cy="0"/>
+        </a:xfrm>
+      </p:grpSpPr>
       <p:sp>
         <p:nvSpPr>
           <p:cNvPr id="2" name="TextBox 1"/>
@@ -10578,6 +11207,7 @@
           <a:lstStyle/>
           <a:p>
             <a:pPr algn="ctr"/>
+            <a:endParaRPr/>
           </a:p>
         </p:txBody>
       </p:sp>
@@ -10624,6 +11254,7 @@
           <a:lstStyle/>
           <a:p>
             <a:pPr algn="ctr"/>
+            <a:endParaRPr/>
           </a:p>
         </p:txBody>
       </p:sp>
@@ -10658,41 +11289,6 @@
                 <a:latin typeface="Apple SD Gothic Neo"/>
               </a:rPr>
               <a:t>의료보험</a:t>
-            </a:r>
-          </a:p>
-        </p:txBody>
-      </p:sp>
-      <p:sp>
-        <p:nvSpPr>
-          <p:cNvPr id="6" name="TextBox 5"/>
-          <p:cNvSpPr txBox="1"/>
-          <p:nvPr/>
-        </p:nvSpPr>
-        <p:spPr>
-          <a:xfrm>
-            <a:off x="1325880" y="4251960"/>
-            <a:ext cx="4480560" cy="731520"/>
-          </a:xfrm>
-          <a:prstGeom prst="rect">
-            <a:avLst/>
-          </a:prstGeom>
-          <a:noFill/>
-        </p:spPr>
-        <p:txBody>
-          <a:bodyPr wrap="square" anchor="t">
-            <a:spAutoFit/>
-          </a:bodyPr>
-          <a:lstStyle/>
-          <a:p>
-            <a:pPr algn="ctr"/>
-            <a:r>
-              <a:rPr sz="2600" b="0" spc="-30">
-                <a:solidFill>
-                  <a:srgbClr val="6B7280"/>
-                </a:solidFill>
-                <a:latin typeface="Apple SD Gothic Neo"/>
-              </a:rPr>
-              <a:t>아플 때 — 병원비</a:t>
             </a:r>
           </a:p>
         </p:txBody>
@@ -10740,6 +11336,7 @@
           <a:lstStyle/>
           <a:p>
             <a:pPr algn="ctr"/>
+            <a:endParaRPr/>
           </a:p>
         </p:txBody>
       </p:sp>
@@ -10774,41 +11371,6 @@
                 <a:latin typeface="Apple SD Gothic Neo"/>
               </a:rPr>
               <a:t>자동차보험</a:t>
-            </a:r>
-          </a:p>
-        </p:txBody>
-      </p:sp>
-      <p:sp>
-        <p:nvSpPr>
-          <p:cNvPr id="9" name="TextBox 8"/>
-          <p:cNvSpPr txBox="1"/>
-          <p:nvPr/>
-        </p:nvSpPr>
-        <p:spPr>
-          <a:xfrm>
-            <a:off x="6400800" y="4251960"/>
-            <a:ext cx="4480560" cy="731520"/>
-          </a:xfrm>
-          <a:prstGeom prst="rect">
-            <a:avLst/>
-          </a:prstGeom>
-          <a:noFill/>
-        </p:spPr>
-        <p:txBody>
-          <a:bodyPr wrap="square" anchor="t">
-            <a:spAutoFit/>
-          </a:bodyPr>
-          <a:lstStyle/>
-          <a:p>
-            <a:pPr algn="ctr"/>
-            <a:r>
-              <a:rPr sz="2600" b="0" spc="-30">
-                <a:solidFill>
-                  <a:srgbClr val="6B7280"/>
-                </a:solidFill>
-                <a:latin typeface="Apple SD Gothic Neo"/>
-              </a:rPr>
-              <a:t>사고 났을 때 — 수리·치료비</a:t>
             </a:r>
           </a:p>
         </p:txBody>
@@ -10822,7 +11384,7 @@
 </file>
 
 <file path=ppt/slides/slide4.xml><?xml version="1.0" encoding="utf-8"?>
-<p:sld xmlns:a="http://schemas.openxmlformats.org/drawingml/2006/main" xmlns:p="http://schemas.openxmlformats.org/presentationml/2006/main" xmlns:r="http://schemas.openxmlformats.org/officeDocument/2006/relationships">
+<p:sld xmlns:a="http://schemas.openxmlformats.org/drawingml/2006/main" xmlns:r="http://schemas.openxmlformats.org/officeDocument/2006/relationships" xmlns:p="http://schemas.openxmlformats.org/presentationml/2006/main">
   <p:cSld>
     <p:bg>
       <p:bgPr>
@@ -10838,7 +11400,14 @@
         <p:cNvGrpSpPr/>
         <p:nvPr/>
       </p:nvGrpSpPr>
-      <p:grpSpPr/>
+      <p:grpSpPr>
+        <a:xfrm>
+          <a:off x="0" y="0"/>
+          <a:ext cx="0" cy="0"/>
+          <a:chOff x="0" y="0"/>
+          <a:chExt cx="0" cy="0"/>
+        </a:xfrm>
+      </p:grpSpPr>
       <p:sp>
         <p:nvSpPr>
           <p:cNvPr id="2" name="TextBox 1"/>
@@ -10915,6 +11484,7 @@
           <a:lstStyle/>
           <a:p>
             <a:pPr algn="ctr"/>
+            <a:endParaRPr/>
           </a:p>
         </p:txBody>
       </p:sp>
@@ -10957,7 +11527,7 @@
           </a:fontRef>
         </p:style>
         <p:txBody>
-          <a:bodyPr rtlCol="0" anchor="ctr" tIns="76200" bIns="76200" lIns="177800" rIns="177800" wrap="none"/>
+          <a:bodyPr wrap="none" lIns="177800" tIns="76200" rIns="177800" bIns="76200" rtlCol="0" anchor="ctr"/>
           <a:lstStyle/>
           <a:p>
             <a:pPr algn="ctr"/>
@@ -11082,7 +11652,7 @@
           </a:fontRef>
         </p:style>
         <p:txBody>
-          <a:bodyPr rtlCol="0" anchor="ctr" tIns="76200" bIns="76200" lIns="177800" rIns="177800" wrap="none"/>
+          <a:bodyPr wrap="none" lIns="177800" tIns="76200" rIns="177800" bIns="76200" rtlCol="0" anchor="ctr"/>
           <a:lstStyle/>
           <a:p>
             <a:pPr algn="ctr"/>
@@ -11137,7 +11707,7 @@
           </a:fontRef>
         </p:style>
         <p:txBody>
-          <a:bodyPr rtlCol="0" anchor="ctr" tIns="76200" bIns="76200" lIns="177800" rIns="177800" wrap="none"/>
+          <a:bodyPr wrap="none" lIns="177800" tIns="76200" rIns="177800" bIns="76200" rtlCol="0" anchor="ctr"/>
           <a:lstStyle/>
           <a:p>
             <a:pPr algn="ctr"/>
@@ -11162,7 +11732,7 @@
 </file>
 
 <file path=ppt/slides/slide5.xml><?xml version="1.0" encoding="utf-8"?>
-<p:sld xmlns:a="http://schemas.openxmlformats.org/drawingml/2006/main" xmlns:p="http://schemas.openxmlformats.org/presentationml/2006/main" xmlns:r="http://schemas.openxmlformats.org/officeDocument/2006/relationships">
+<p:sld xmlns:a="http://schemas.openxmlformats.org/drawingml/2006/main" xmlns:r="http://schemas.openxmlformats.org/officeDocument/2006/relationships" xmlns:p="http://schemas.openxmlformats.org/presentationml/2006/main">
   <p:cSld>
     <p:bg>
       <p:bgPr>
@@ -11178,7 +11748,14 @@
         <p:cNvGrpSpPr/>
         <p:nvPr/>
       </p:nvGrpSpPr>
-      <p:grpSpPr/>
+      <p:grpSpPr>
+        <a:xfrm>
+          <a:off x="0" y="0"/>
+          <a:ext cx="0" cy="0"/>
+          <a:chOff x="0" y="0"/>
+          <a:chExt cx="0" cy="0"/>
+        </a:xfrm>
+      </p:grpSpPr>
       <p:sp>
         <p:nvSpPr>
           <p:cNvPr id="2" name="TextBox 1"/>
@@ -11255,6 +11832,7 @@
           <a:lstStyle/>
           <a:p>
             <a:pPr algn="ctr"/>
+            <a:endParaRPr/>
           </a:p>
         </p:txBody>
       </p:sp>
@@ -11299,7 +11877,7 @@
           </a:fontRef>
         </p:style>
         <p:txBody>
-          <a:bodyPr rtlCol="0" anchor="ctr" tIns="76200" bIns="76200" lIns="177800" rIns="177800" wrap="none"/>
+          <a:bodyPr wrap="none" lIns="177800" tIns="76200" rIns="177800" bIns="76200" rtlCol="0" anchor="ctr"/>
           <a:lstStyle/>
           <a:p>
             <a:pPr algn="ctr"/>
@@ -11391,7 +11969,7 @@
           </a:fontRef>
         </p:style>
         <p:txBody>
-          <a:bodyPr rtlCol="0" anchor="ctr" tIns="76200" bIns="76200" lIns="177800" rIns="177800" wrap="none"/>
+          <a:bodyPr wrap="none" lIns="177800" tIns="76200" rIns="177800" bIns="76200" rtlCol="0" anchor="ctr"/>
           <a:lstStyle/>
           <a:p>
             <a:pPr algn="ctr"/>
@@ -11483,7 +12061,7 @@
           </a:fontRef>
         </p:style>
         <p:txBody>
-          <a:bodyPr rtlCol="0" anchor="ctr" tIns="76200" bIns="76200" lIns="177800" rIns="177800" wrap="none"/>
+          <a:bodyPr wrap="none" lIns="177800" tIns="76200" rIns="177800" bIns="76200" rtlCol="0" anchor="ctr"/>
           <a:lstStyle/>
           <a:p>
             <a:pPr algn="ctr"/>
@@ -11575,7 +12153,7 @@
           </a:fontRef>
         </p:style>
         <p:txBody>
-          <a:bodyPr rtlCol="0" anchor="ctr" tIns="76200" bIns="76200" lIns="177800" rIns="177800" wrap="none"/>
+          <a:bodyPr wrap="none" lIns="177800" tIns="76200" rIns="177800" bIns="76200" rtlCol="0" anchor="ctr"/>
           <a:lstStyle/>
           <a:p>
             <a:pPr algn="ctr"/>
@@ -11600,7 +12178,7 @@
 </file>
 
 <file path=ppt/slides/slide6.xml><?xml version="1.0" encoding="utf-8"?>
-<p:sld xmlns:a="http://schemas.openxmlformats.org/drawingml/2006/main" xmlns:p="http://schemas.openxmlformats.org/presentationml/2006/main" xmlns:r="http://schemas.openxmlformats.org/officeDocument/2006/relationships">
+<p:sld xmlns:a="http://schemas.openxmlformats.org/drawingml/2006/main" xmlns:r="http://schemas.openxmlformats.org/officeDocument/2006/relationships" xmlns:p="http://schemas.openxmlformats.org/presentationml/2006/main">
   <p:cSld>
     <p:bg>
       <p:bgPr>
@@ -11616,7 +12194,14 @@
         <p:cNvGrpSpPr/>
         <p:nvPr/>
       </p:nvGrpSpPr>
-      <p:grpSpPr/>
+      <p:grpSpPr>
+        <a:xfrm>
+          <a:off x="0" y="0"/>
+          <a:ext cx="0" cy="0"/>
+          <a:chOff x="0" y="0"/>
+          <a:chExt cx="0" cy="0"/>
+        </a:xfrm>
+      </p:grpSpPr>
       <p:sp>
         <p:nvSpPr>
           <p:cNvPr id="2" name="TextBox 1"/>
@@ -11693,6 +12278,7 @@
           <a:lstStyle/>
           <a:p>
             <a:pPr algn="ctr"/>
+            <a:endParaRPr/>
           </a:p>
         </p:txBody>
       </p:sp>
@@ -11733,7 +12319,7 @@
           </a:fontRef>
         </p:style>
         <p:txBody>
-          <a:bodyPr rtlCol="0" anchor="ctr" tIns="76200" bIns="76200" lIns="177800" rIns="177800" wrap="none"/>
+          <a:bodyPr wrap="none" lIns="177800" tIns="76200" rIns="177800" bIns="76200" rtlCol="0" anchor="ctr"/>
           <a:lstStyle/>
           <a:p>
             <a:pPr algn="ctr"/>
@@ -11788,7 +12374,7 @@
           </a:fontRef>
         </p:style>
         <p:txBody>
-          <a:bodyPr rtlCol="0" anchor="ctr" tIns="76200" bIns="76200" lIns="177800" rIns="177800" wrap="none"/>
+          <a:bodyPr wrap="none" lIns="177800" tIns="76200" rIns="177800" bIns="76200" rtlCol="0" anchor="ctr"/>
           <a:lstStyle/>
           <a:p>
             <a:pPr algn="ctr"/>
@@ -11876,7 +12462,7 @@
           </a:fontRef>
         </p:style>
         <p:txBody>
-          <a:bodyPr rtlCol="0" anchor="ctr" tIns="76200" bIns="76200" lIns="177800" rIns="177800" wrap="none"/>
+          <a:bodyPr wrap="none" lIns="177800" tIns="76200" rIns="177800" bIns="76200" rtlCol="0" anchor="ctr"/>
           <a:lstStyle/>
           <a:p>
             <a:pPr algn="ctr"/>
@@ -11931,7 +12517,7 @@
           </a:fontRef>
         </p:style>
         <p:txBody>
-          <a:bodyPr rtlCol="0" anchor="ctr" tIns="76200" bIns="76200" lIns="177800" rIns="177800" wrap="none"/>
+          <a:bodyPr wrap="none" lIns="177800" tIns="76200" rIns="177800" bIns="76200" rtlCol="0" anchor="ctr"/>
           <a:lstStyle/>
           <a:p>
             <a:pPr algn="ctr"/>
@@ -12019,7 +12605,7 @@
           </a:fontRef>
         </p:style>
         <p:txBody>
-          <a:bodyPr rtlCol="0" anchor="ctr" tIns="76200" bIns="76200" lIns="177800" rIns="177800" wrap="none"/>
+          <a:bodyPr wrap="none" lIns="177800" tIns="76200" rIns="177800" bIns="76200" rtlCol="0" anchor="ctr"/>
           <a:lstStyle/>
           <a:p>
             <a:pPr algn="ctr"/>
@@ -12074,7 +12660,7 @@
           </a:fontRef>
         </p:style>
         <p:txBody>
-          <a:bodyPr rtlCol="0" anchor="ctr" tIns="76200" bIns="76200" lIns="177800" rIns="177800" wrap="none"/>
+          <a:bodyPr wrap="none" lIns="177800" tIns="76200" rIns="177800" bIns="76200" rtlCol="0" anchor="ctr"/>
           <a:lstStyle/>
           <a:p>
             <a:pPr algn="ctr"/>
@@ -12162,7 +12748,7 @@
           </a:fontRef>
         </p:style>
         <p:txBody>
-          <a:bodyPr rtlCol="0" anchor="ctr" tIns="76200" bIns="76200" lIns="177800" rIns="177800" wrap="none"/>
+          <a:bodyPr wrap="none" lIns="177800" tIns="76200" rIns="177800" bIns="76200" rtlCol="0" anchor="ctr"/>
           <a:lstStyle/>
           <a:p>
             <a:pPr algn="ctr"/>
@@ -12217,7 +12803,7 @@
           </a:fontRef>
         </p:style>
         <p:txBody>
-          <a:bodyPr rtlCol="0" anchor="ctr" tIns="76200" bIns="76200" lIns="177800" rIns="177800" wrap="none"/>
+          <a:bodyPr wrap="none" lIns="177800" tIns="76200" rIns="177800" bIns="76200" rtlCol="0" anchor="ctr"/>
           <a:lstStyle/>
           <a:p>
             <a:pPr algn="ctr"/>
@@ -12277,7 +12863,7 @@
 </file>
 
 <file path=ppt/slides/slide7.xml><?xml version="1.0" encoding="utf-8"?>
-<p:sld xmlns:a="http://schemas.openxmlformats.org/drawingml/2006/main" xmlns:p="http://schemas.openxmlformats.org/presentationml/2006/main" xmlns:r="http://schemas.openxmlformats.org/officeDocument/2006/relationships">
+<p:sld xmlns:a="http://schemas.openxmlformats.org/drawingml/2006/main" xmlns:r="http://schemas.openxmlformats.org/officeDocument/2006/relationships" xmlns:p="http://schemas.openxmlformats.org/presentationml/2006/main">
   <p:cSld>
     <p:bg>
       <p:bgPr>
@@ -12293,7 +12879,14 @@
         <p:cNvGrpSpPr/>
         <p:nvPr/>
       </p:nvGrpSpPr>
-      <p:grpSpPr/>
+      <p:grpSpPr>
+        <a:xfrm>
+          <a:off x="0" y="0"/>
+          <a:ext cx="0" cy="0"/>
+          <a:chOff x="0" y="0"/>
+          <a:chExt cx="0" cy="0"/>
+        </a:xfrm>
+      </p:grpSpPr>
       <p:sp>
         <p:nvSpPr>
           <p:cNvPr id="2" name="TextBox 1"/>
@@ -12370,6 +12963,7 @@
           <a:lstStyle/>
           <a:p>
             <a:pPr algn="ctr"/>
+            <a:endParaRPr/>
           </a:p>
         </p:txBody>
       </p:sp>
@@ -12410,7 +13004,7 @@
           </a:fontRef>
         </p:style>
         <p:txBody>
-          <a:bodyPr rtlCol="0" anchor="ctr" tIns="76200" bIns="76200" lIns="177800" rIns="177800" wrap="none"/>
+          <a:bodyPr wrap="none" lIns="177800" tIns="76200" rIns="177800" bIns="76200" rtlCol="0" anchor="ctr"/>
           <a:lstStyle/>
           <a:p>
             <a:pPr algn="ctr"/>
@@ -12465,7 +13059,7 @@
           </a:fontRef>
         </p:style>
         <p:txBody>
-          <a:bodyPr rtlCol="0" anchor="ctr" tIns="76200" bIns="76200" lIns="177800" rIns="177800" wrap="none"/>
+          <a:bodyPr wrap="none" lIns="177800" tIns="76200" rIns="177800" bIns="76200" rtlCol="0" anchor="ctr"/>
           <a:lstStyle/>
           <a:p>
             <a:pPr algn="ctr"/>
@@ -12553,7 +13147,7 @@
           </a:fontRef>
         </p:style>
         <p:txBody>
-          <a:bodyPr rtlCol="0" anchor="ctr" tIns="76200" bIns="76200" lIns="177800" rIns="177800" wrap="none"/>
+          <a:bodyPr wrap="none" lIns="177800" tIns="76200" rIns="177800" bIns="76200" rtlCol="0" anchor="ctr"/>
           <a:lstStyle/>
           <a:p>
             <a:pPr algn="ctr"/>
@@ -12608,7 +13202,7 @@
           </a:fontRef>
         </p:style>
         <p:txBody>
-          <a:bodyPr rtlCol="0" anchor="ctr" tIns="76200" bIns="76200" lIns="177800" rIns="177800" wrap="none"/>
+          <a:bodyPr wrap="none" lIns="177800" tIns="76200" rIns="177800" bIns="76200" rtlCol="0" anchor="ctr"/>
           <a:lstStyle/>
           <a:p>
             <a:pPr algn="ctr"/>
@@ -12696,7 +13290,7 @@
           </a:fontRef>
         </p:style>
         <p:txBody>
-          <a:bodyPr rtlCol="0" anchor="ctr" tIns="76200" bIns="76200" lIns="177800" rIns="177800" wrap="none"/>
+          <a:bodyPr wrap="none" lIns="177800" tIns="76200" rIns="177800" bIns="76200" rtlCol="0" anchor="ctr"/>
           <a:lstStyle/>
           <a:p>
             <a:pPr algn="ctr"/>
@@ -12751,7 +13345,7 @@
           </a:fontRef>
         </p:style>
         <p:txBody>
-          <a:bodyPr rtlCol="0" anchor="ctr" tIns="76200" bIns="76200" lIns="177800" rIns="177800" wrap="none"/>
+          <a:bodyPr wrap="none" lIns="177800" tIns="76200" rIns="177800" bIns="76200" rtlCol="0" anchor="ctr"/>
           <a:lstStyle/>
           <a:p>
             <a:pPr algn="ctr"/>
@@ -12811,7 +13405,7 @@
 </file>
 
 <file path=ppt/slides/slide8.xml><?xml version="1.0" encoding="utf-8"?>
-<p:sld xmlns:a="http://schemas.openxmlformats.org/drawingml/2006/main" xmlns:p="http://schemas.openxmlformats.org/presentationml/2006/main" xmlns:r="http://schemas.openxmlformats.org/officeDocument/2006/relationships">
+<p:sld xmlns:a="http://schemas.openxmlformats.org/drawingml/2006/main" xmlns:r="http://schemas.openxmlformats.org/officeDocument/2006/relationships" xmlns:p="http://schemas.openxmlformats.org/presentationml/2006/main">
   <p:cSld>
     <p:bg>
       <p:bgPr>
@@ -12827,7 +13421,14 @@
         <p:cNvGrpSpPr/>
         <p:nvPr/>
       </p:nvGrpSpPr>
-      <p:grpSpPr/>
+      <p:grpSpPr>
+        <a:xfrm>
+          <a:off x="0" y="0"/>
+          <a:ext cx="0" cy="0"/>
+          <a:chOff x="0" y="0"/>
+          <a:chExt cx="0" cy="0"/>
+        </a:xfrm>
+      </p:grpSpPr>
       <p:sp>
         <p:nvSpPr>
           <p:cNvPr id="2" name="TextBox 1"/>
@@ -12904,6 +13505,7 @@
           <a:lstStyle/>
           <a:p>
             <a:pPr algn="ctr"/>
+            <a:endParaRPr/>
           </a:p>
         </p:txBody>
       </p:sp>
@@ -12944,7 +13546,7 @@
           </a:fontRef>
         </p:style>
         <p:txBody>
-          <a:bodyPr rtlCol="0" anchor="ctr" tIns="76200" bIns="76200" lIns="177800" rIns="177800" wrap="none"/>
+          <a:bodyPr wrap="none" lIns="177800" tIns="76200" rIns="177800" bIns="76200" rtlCol="0" anchor="ctr"/>
           <a:lstStyle/>
           <a:p>
             <a:pPr algn="ctr"/>
@@ -12999,7 +13601,7 @@
           </a:fontRef>
         </p:style>
         <p:txBody>
-          <a:bodyPr rtlCol="0" anchor="ctr" tIns="76200" bIns="76200" lIns="177800" rIns="177800" wrap="none"/>
+          <a:bodyPr wrap="none" lIns="177800" tIns="76200" rIns="177800" bIns="76200" rtlCol="0" anchor="ctr"/>
           <a:lstStyle/>
           <a:p>
             <a:pPr algn="ctr"/>
@@ -13087,7 +13689,7 @@
           </a:fontRef>
         </p:style>
         <p:txBody>
-          <a:bodyPr rtlCol="0" anchor="ctr" tIns="76200" bIns="76200" lIns="177800" rIns="177800" wrap="none"/>
+          <a:bodyPr wrap="none" lIns="177800" tIns="76200" rIns="177800" bIns="76200" rtlCol="0" anchor="ctr"/>
           <a:lstStyle/>
           <a:p>
             <a:pPr algn="ctr"/>
@@ -13142,7 +13744,7 @@
           </a:fontRef>
         </p:style>
         <p:txBody>
-          <a:bodyPr rtlCol="0" anchor="ctr" tIns="76200" bIns="76200" lIns="177800" rIns="177800" wrap="none"/>
+          <a:bodyPr wrap="none" lIns="177800" tIns="76200" rIns="177800" bIns="76200" rtlCol="0" anchor="ctr"/>
           <a:lstStyle/>
           <a:p>
             <a:pPr algn="ctr"/>
@@ -13230,7 +13832,7 @@
           </a:fontRef>
         </p:style>
         <p:txBody>
-          <a:bodyPr rtlCol="0" anchor="ctr" tIns="76200" bIns="76200" lIns="177800" rIns="177800" wrap="none"/>
+          <a:bodyPr wrap="none" lIns="177800" tIns="76200" rIns="177800" bIns="76200" rtlCol="0" anchor="ctr"/>
           <a:lstStyle/>
           <a:p>
             <a:pPr algn="ctr"/>
@@ -13285,7 +13887,7 @@
           </a:fontRef>
         </p:style>
         <p:txBody>
-          <a:bodyPr rtlCol="0" anchor="ctr" tIns="76200" bIns="76200" lIns="177800" rIns="177800" wrap="none"/>
+          <a:bodyPr wrap="none" lIns="177800" tIns="76200" rIns="177800" bIns="76200" rtlCol="0" anchor="ctr"/>
           <a:lstStyle/>
           <a:p>
             <a:pPr algn="ctr"/>
@@ -13345,7 +13947,7 @@
 </file>
 
 <file path=ppt/slides/slide9.xml><?xml version="1.0" encoding="utf-8"?>
-<p:sld xmlns:a="http://schemas.openxmlformats.org/drawingml/2006/main" xmlns:p="http://schemas.openxmlformats.org/presentationml/2006/main" xmlns:r="http://schemas.openxmlformats.org/officeDocument/2006/relationships">
+<p:sld xmlns:a="http://schemas.openxmlformats.org/drawingml/2006/main" xmlns:r="http://schemas.openxmlformats.org/officeDocument/2006/relationships" xmlns:p="http://schemas.openxmlformats.org/presentationml/2006/main">
   <p:cSld>
     <p:bg>
       <p:bgPr>
@@ -13361,7 +13963,14 @@
         <p:cNvGrpSpPr/>
         <p:nvPr/>
       </p:nvGrpSpPr>
-      <p:grpSpPr/>
+      <p:grpSpPr>
+        <a:xfrm>
+          <a:off x="0" y="0"/>
+          <a:ext cx="0" cy="0"/>
+          <a:chOff x="0" y="0"/>
+          <a:chExt cx="0" cy="0"/>
+        </a:xfrm>
+      </p:grpSpPr>
       <p:sp>
         <p:nvSpPr>
           <p:cNvPr id="2" name="TextBox 1"/>
@@ -13438,6 +14047,7 @@
           <a:lstStyle/>
           <a:p>
             <a:pPr algn="ctr"/>
+            <a:endParaRPr/>
           </a:p>
         </p:txBody>
       </p:sp>
@@ -13482,7 +14092,7 @@
           </a:fontRef>
         </p:style>
         <p:txBody>
-          <a:bodyPr rtlCol="0" anchor="ctr" tIns="76200" bIns="76200" lIns="177800" rIns="177800" wrap="none"/>
+          <a:bodyPr wrap="none" lIns="177800" tIns="76200" rIns="177800" bIns="76200" rtlCol="0" anchor="ctr"/>
           <a:lstStyle/>
           <a:p>
             <a:pPr algn="ctr"/>
@@ -13539,7 +14149,7 @@
           </a:fontRef>
         </p:style>
         <p:txBody>
-          <a:bodyPr rtlCol="0" anchor="ctr" tIns="76200" bIns="76200" lIns="177800" rIns="177800" wrap="none"/>
+          <a:bodyPr wrap="none" lIns="177800" tIns="76200" rIns="177800" bIns="76200" rtlCol="0" anchor="ctr"/>
           <a:lstStyle/>
           <a:p>
             <a:pPr algn="ctr"/>
@@ -13596,7 +14206,7 @@
           </a:fontRef>
         </p:style>
         <p:txBody>
-          <a:bodyPr rtlCol="0" anchor="ctr" tIns="76200" bIns="76200" lIns="177800" rIns="177800" wrap="none"/>
+          <a:bodyPr wrap="none" lIns="177800" tIns="76200" rIns="177800" bIns="76200" rtlCol="0" anchor="ctr"/>
           <a:lstStyle/>
           <a:p>
             <a:pPr algn="ctr"/>
@@ -13653,7 +14263,7 @@
           </a:fontRef>
         </p:style>
         <p:txBody>
-          <a:bodyPr rtlCol="0" anchor="ctr" tIns="76200" bIns="76200" lIns="177800" rIns="177800" wrap="none"/>
+          <a:bodyPr wrap="none" lIns="177800" tIns="76200" rIns="177800" bIns="76200" rtlCol="0" anchor="ctr"/>
           <a:lstStyle/>
           <a:p>
             <a:pPr algn="ctr"/>
@@ -13710,7 +14320,7 @@
           </a:fontRef>
         </p:style>
         <p:txBody>
-          <a:bodyPr rtlCol="0" anchor="ctr" tIns="76200" bIns="76200" lIns="177800" rIns="177800" wrap="none"/>
+          <a:bodyPr wrap="none" lIns="177800" tIns="76200" rIns="177800" bIns="76200" rtlCol="0" anchor="ctr"/>
           <a:lstStyle/>
           <a:p>
             <a:pPr algn="ctr"/>
@@ -13767,7 +14377,7 @@
           </a:fontRef>
         </p:style>
         <p:txBody>
-          <a:bodyPr rtlCol="0" anchor="ctr" tIns="76200" bIns="76200" lIns="177800" rIns="177800" wrap="none"/>
+          <a:bodyPr wrap="none" lIns="177800" tIns="76200" rIns="177800" bIns="76200" rtlCol="0" anchor="ctr"/>
           <a:lstStyle/>
           <a:p>
             <a:pPr algn="ctr"/>

--- a/docs/presentation/보험발표-figma.pptx
+++ b/docs/presentation/보험발표-figma.pptx
@@ -5723,25 +5723,13 @@
           <a:p>
             <a:pPr algn="l"/>
             <a:r>
-              <a:rPr sz="2000" b="1" spc="-30">
-                <a:solidFill>
-                  <a:srgbClr val="5B5BD6"/>
-                </a:solidFill>
-                <a:latin typeface="Apple SD Gothic Neo"/>
-              </a:rPr>
-              <a:t>백엔드 · Spring</a:t>
-            </a:r>
-          </a:p>
-          <a:p>
-            <a:pPr algn="l"/>
-            <a:r>
-              <a:rPr sz="1500" b="0" spc="-30">
-                <a:solidFill>
-                  <a:srgbClr val="6B7280"/>
-                </a:solidFill>
-                <a:latin typeface="Apple SD Gothic Neo"/>
-              </a:rPr>
-              <a:t>계층형</a:t>
+              <a:rPr sz="1900" b="1" spc="-30">
+                <a:solidFill>
+                  <a:srgbClr val="B5793A"/>
+                </a:solidFill>
+                <a:latin typeface="Apple SD Gothic Neo"/>
+              </a:rPr>
+              <a:t>프론트 · React</a:t>
             </a:r>
           </a:p>
         </p:txBody>
@@ -5754,8 +5742,311 @@
         </p:nvSpPr>
         <p:spPr>
           <a:xfrm>
-            <a:off x="777240" y="2697480"/>
-            <a:ext cx="3154680" cy="548640"/>
+            <a:off x="777240" y="2514600"/>
+            <a:ext cx="3017520" cy="640080"/>
+          </a:xfrm>
+          <a:prstGeom prst="roundRect">
+            <a:avLst>
+              <a:gd name="adj" fmla="val 16000"/>
+            </a:avLst>
+          </a:prstGeom>
+          <a:solidFill>
+            <a:srgbClr val="F7EDE6"/>
+          </a:solidFill>
+          <a:ln w="17780">
+            <a:solidFill>
+              <a:srgbClr val="E6E6E6"/>
+            </a:solidFill>
+          </a:ln>
+          <a:effectLst/>
+        </p:spPr>
+        <p:style>
+          <a:lnRef idx="1">
+            <a:schemeClr val="accent1"/>
+          </a:lnRef>
+          <a:fillRef idx="3">
+            <a:schemeClr val="accent1"/>
+          </a:fillRef>
+          <a:effectRef idx="2">
+            <a:schemeClr val="accent1"/>
+          </a:effectRef>
+          <a:fontRef idx="minor">
+            <a:schemeClr val="lt1"/>
+          </a:fontRef>
+        </p:style>
+        <p:txBody>
+          <a:bodyPr rtlCol="0" anchor="ctr" tIns="63500" bIns="63500" lIns="152400" rIns="152400" wrap="none"/>
+          <a:lstStyle/>
+          <a:p>
+            <a:pPr algn="l"/>
+            <a:r>
+              <a:rPr sz="1700" b="1">
+                <a:solidFill>
+                  <a:srgbClr val="1A1A1A"/>
+                </a:solidFill>
+                <a:latin typeface="Menlo"/>
+              </a:rPr>
+              <a:t>화면  </a:t>
+            </a:r>
+            <a:r>
+              <a:rPr sz="1300" b="0">
+                <a:solidFill>
+                  <a:srgbClr val="6B7280"/>
+                </a:solidFill>
+                <a:latin typeface="Apple SD Gothic Neo"/>
+              </a:rPr>
+              <a:t>보이는 UI</a:t>
+            </a:r>
+          </a:p>
+        </p:txBody>
+      </p:sp>
+      <p:sp>
+        <p:nvSpPr>
+          <p:cNvPr id="6" name="TextBox 5"/>
+          <p:cNvSpPr txBox="1"/>
+          <p:nvPr/>
+        </p:nvSpPr>
+        <p:spPr>
+          <a:xfrm>
+            <a:off x="1828800" y="3099816"/>
+            <a:ext cx="822960" cy="292608"/>
+          </a:xfrm>
+          <a:prstGeom prst="rect">
+            <a:avLst/>
+          </a:prstGeom>
+          <a:noFill/>
+        </p:spPr>
+        <p:txBody>
+          <a:bodyPr wrap="square" anchor="ctr">
+            <a:spAutoFit/>
+          </a:bodyPr>
+          <a:lstStyle/>
+          <a:p>
+            <a:pPr algn="ctr"/>
+            <a:r>
+              <a:rPr sz="1800" b="1">
+                <a:solidFill>
+                  <a:srgbClr val="6B7280"/>
+                </a:solidFill>
+                <a:latin typeface="Apple SD Gothic Neo"/>
+              </a:rPr>
+              <a:t>↓</a:t>
+            </a:r>
+          </a:p>
+        </p:txBody>
+      </p:sp>
+      <p:sp>
+        <p:nvSpPr>
+          <p:cNvPr id="7" name="Rounded Rectangle 6"/>
+          <p:cNvSpPr/>
+          <p:nvPr/>
+        </p:nvSpPr>
+        <p:spPr>
+          <a:xfrm>
+            <a:off x="777240" y="3355848"/>
+            <a:ext cx="3017520" cy="640080"/>
+          </a:xfrm>
+          <a:prstGeom prst="roundRect">
+            <a:avLst>
+              <a:gd name="adj" fmla="val 16000"/>
+            </a:avLst>
+          </a:prstGeom>
+          <a:solidFill>
+            <a:srgbClr val="F7EDE6"/>
+          </a:solidFill>
+          <a:ln w="17780">
+            <a:solidFill>
+              <a:srgbClr val="E6E6E6"/>
+            </a:solidFill>
+          </a:ln>
+          <a:effectLst/>
+        </p:spPr>
+        <p:style>
+          <a:lnRef idx="1">
+            <a:schemeClr val="accent1"/>
+          </a:lnRef>
+          <a:fillRef idx="3">
+            <a:schemeClr val="accent1"/>
+          </a:fillRef>
+          <a:effectRef idx="2">
+            <a:schemeClr val="accent1"/>
+          </a:effectRef>
+          <a:fontRef idx="minor">
+            <a:schemeClr val="lt1"/>
+          </a:fontRef>
+        </p:style>
+        <p:txBody>
+          <a:bodyPr rtlCol="0" anchor="ctr" tIns="63500" bIns="63500" lIns="152400" rIns="152400" wrap="none"/>
+          <a:lstStyle/>
+          <a:p>
+            <a:pPr algn="l"/>
+            <a:r>
+              <a:rPr sz="1700" b="1">
+                <a:solidFill>
+                  <a:srgbClr val="1A1A1A"/>
+                </a:solidFill>
+                <a:latin typeface="Menlo"/>
+              </a:rPr>
+              <a:t>hook  </a:t>
+            </a:r>
+            <a:r>
+              <a:rPr sz="1300" b="0">
+                <a:solidFill>
+                  <a:srgbClr val="6B7280"/>
+                </a:solidFill>
+                <a:latin typeface="Apple SD Gothic Neo"/>
+              </a:rPr>
+              <a:t>호출</a:t>
+            </a:r>
+          </a:p>
+        </p:txBody>
+      </p:sp>
+      <p:sp>
+        <p:nvSpPr>
+          <p:cNvPr id="8" name="TextBox 7"/>
+          <p:cNvSpPr txBox="1"/>
+          <p:nvPr/>
+        </p:nvSpPr>
+        <p:spPr>
+          <a:xfrm>
+            <a:off x="1828800" y="3941063"/>
+            <a:ext cx="822960" cy="292608"/>
+          </a:xfrm>
+          <a:prstGeom prst="rect">
+            <a:avLst/>
+          </a:prstGeom>
+          <a:noFill/>
+        </p:spPr>
+        <p:txBody>
+          <a:bodyPr wrap="square" anchor="ctr">
+            <a:spAutoFit/>
+          </a:bodyPr>
+          <a:lstStyle/>
+          <a:p>
+            <a:pPr algn="ctr"/>
+            <a:r>
+              <a:rPr sz="1800" b="1">
+                <a:solidFill>
+                  <a:srgbClr val="6B7280"/>
+                </a:solidFill>
+                <a:latin typeface="Apple SD Gothic Neo"/>
+              </a:rPr>
+              <a:t>↓</a:t>
+            </a:r>
+          </a:p>
+        </p:txBody>
+      </p:sp>
+      <p:sp>
+        <p:nvSpPr>
+          <p:cNvPr id="9" name="Rounded Rectangle 8"/>
+          <p:cNvSpPr/>
+          <p:nvPr/>
+        </p:nvSpPr>
+        <p:spPr>
+          <a:xfrm>
+            <a:off x="777240" y="4197096"/>
+            <a:ext cx="3017520" cy="640080"/>
+          </a:xfrm>
+          <a:prstGeom prst="roundRect">
+            <a:avLst>
+              <a:gd name="adj" fmla="val 16000"/>
+            </a:avLst>
+          </a:prstGeom>
+          <a:solidFill>
+            <a:srgbClr val="F7EDE6"/>
+          </a:solidFill>
+          <a:ln w="17780">
+            <a:solidFill>
+              <a:srgbClr val="E6E6E6"/>
+            </a:solidFill>
+          </a:ln>
+          <a:effectLst/>
+        </p:spPr>
+        <p:style>
+          <a:lnRef idx="1">
+            <a:schemeClr val="accent1"/>
+          </a:lnRef>
+          <a:fillRef idx="3">
+            <a:schemeClr val="accent1"/>
+          </a:fillRef>
+          <a:effectRef idx="2">
+            <a:schemeClr val="accent1"/>
+          </a:effectRef>
+          <a:fontRef idx="minor">
+            <a:schemeClr val="lt1"/>
+          </a:fontRef>
+        </p:style>
+        <p:txBody>
+          <a:bodyPr rtlCol="0" anchor="ctr" tIns="63500" bIns="63500" lIns="152400" rIns="152400" wrap="none"/>
+          <a:lstStyle/>
+          <a:p>
+            <a:pPr algn="l"/>
+            <a:r>
+              <a:rPr sz="1700" b="1">
+                <a:solidFill>
+                  <a:srgbClr val="1A1A1A"/>
+                </a:solidFill>
+                <a:latin typeface="Menlo"/>
+              </a:rPr>
+              <a:t>api  </a:t>
+            </a:r>
+            <a:r>
+              <a:rPr sz="1300" b="0">
+                <a:solidFill>
+                  <a:srgbClr val="6B7280"/>
+                </a:solidFill>
+                <a:latin typeface="Apple SD Gothic Neo"/>
+              </a:rPr>
+              <a:t>서버 요청</a:t>
+            </a:r>
+          </a:p>
+        </p:txBody>
+      </p:sp>
+      <p:sp>
+        <p:nvSpPr>
+          <p:cNvPr id="10" name="TextBox 9"/>
+          <p:cNvSpPr txBox="1"/>
+          <p:nvPr/>
+        </p:nvSpPr>
+        <p:spPr>
+          <a:xfrm>
+            <a:off x="8366760" y="1828800"/>
+            <a:ext cx="3108960" cy="457200"/>
+          </a:xfrm>
+          <a:prstGeom prst="rect">
+            <a:avLst/>
+          </a:prstGeom>
+          <a:noFill/>
+        </p:spPr>
+        <p:txBody>
+          <a:bodyPr wrap="square" anchor="t">
+            <a:spAutoFit/>
+          </a:bodyPr>
+          <a:lstStyle/>
+          <a:p>
+            <a:pPr algn="l"/>
+            <a:r>
+              <a:rPr sz="1900" b="1" spc="-30">
+                <a:solidFill>
+                  <a:srgbClr val="5B5BD6"/>
+                </a:solidFill>
+                <a:latin typeface="Apple SD Gothic Neo"/>
+              </a:rPr>
+              <a:t>백엔드 · Spring</a:t>
+            </a:r>
+          </a:p>
+        </p:txBody>
+      </p:sp>
+      <p:sp>
+        <p:nvSpPr>
+          <p:cNvPr id="11" name="Rounded Rectangle 10"/>
+          <p:cNvSpPr/>
+          <p:nvPr/>
+        </p:nvSpPr>
+        <p:spPr>
+          <a:xfrm>
+            <a:off x="8366760" y="2514600"/>
+            <a:ext cx="3017520" cy="566928"/>
           </a:xfrm>
           <a:prstGeom prst="roundRect">
             <a:avLst>
@@ -5790,9 +6081,9 @@
           <a:bodyPr rtlCol="0" anchor="ctr" tIns="63500" bIns="63500" lIns="152400" rIns="152400" wrap="none"/>
           <a:lstStyle/>
           <a:p>
-            <a:pPr algn="l"/>
-            <a:r>
-              <a:rPr sz="1700" b="1">
+            <a:pPr algn="ctr"/>
+            <a:r>
+              <a:rPr sz="1600" b="1">
                 <a:solidFill>
                   <a:srgbClr val="1A1A1A"/>
                 </a:solidFill>
@@ -5800,27 +6091,18 @@
               </a:rPr>
               <a:t>controller</a:t>
             </a:r>
-            <a:r>
-              <a:rPr sz="1200" b="0">
-                <a:solidFill>
-                  <a:srgbClr val="6B7280"/>
-                </a:solidFill>
-                <a:latin typeface="Apple SD Gothic Neo"/>
-              </a:rPr>
-              <a:t>   요청 받기·응답</a:t>
-            </a:r>
-          </a:p>
-        </p:txBody>
-      </p:sp>
-      <p:sp>
-        <p:nvSpPr>
-          <p:cNvPr id="6" name="TextBox 5"/>
+          </a:p>
+        </p:txBody>
+      </p:sp>
+      <p:sp>
+        <p:nvSpPr>
+          <p:cNvPr id="12" name="TextBox 11"/>
           <p:cNvSpPr txBox="1"/>
           <p:nvPr/>
         </p:nvSpPr>
         <p:spPr>
           <a:xfrm>
-            <a:off x="2148840" y="3200400"/>
+            <a:off x="9418320" y="3026664"/>
             <a:ext cx="822960" cy="292608"/>
           </a:xfrm>
           <a:prstGeom prst="rect">
@@ -5849,14 +6131,14 @@
       </p:sp>
       <p:sp>
         <p:nvSpPr>
-          <p:cNvPr id="7" name="Rounded Rectangle 6"/>
+          <p:cNvPr id="13" name="Rounded Rectangle 12"/>
           <p:cNvSpPr/>
           <p:nvPr/>
         </p:nvSpPr>
         <p:spPr>
           <a:xfrm>
-            <a:off x="777240" y="3410712"/>
-            <a:ext cx="3154680" cy="548640"/>
+            <a:off x="8366760" y="3191256"/>
+            <a:ext cx="3017520" cy="566928"/>
           </a:xfrm>
           <a:prstGeom prst="roundRect">
             <a:avLst>
@@ -5891,9 +6173,9 @@
           <a:bodyPr rtlCol="0" anchor="ctr" tIns="63500" bIns="63500" lIns="152400" rIns="152400" wrap="none"/>
           <a:lstStyle/>
           <a:p>
-            <a:pPr algn="l"/>
-            <a:r>
-              <a:rPr sz="1700" b="1">
+            <a:pPr algn="ctr"/>
+            <a:r>
+              <a:rPr sz="1600" b="1">
                 <a:solidFill>
                   <a:srgbClr val="1A1A1A"/>
                 </a:solidFill>
@@ -5901,27 +6183,18 @@
               </a:rPr>
               <a:t>service</a:t>
             </a:r>
-            <a:r>
-              <a:rPr sz="1200" b="0">
-                <a:solidFill>
-                  <a:srgbClr val="6B7280"/>
-                </a:solidFill>
-                <a:latin typeface="Apple SD Gothic Neo"/>
-              </a:rPr>
-              <a:t>   업무 흐름·규칙</a:t>
-            </a:r>
-          </a:p>
-        </p:txBody>
-      </p:sp>
-      <p:sp>
-        <p:nvSpPr>
-          <p:cNvPr id="8" name="TextBox 7"/>
+          </a:p>
+        </p:txBody>
+      </p:sp>
+      <p:sp>
+        <p:nvSpPr>
+          <p:cNvPr id="14" name="TextBox 13"/>
           <p:cNvSpPr txBox="1"/>
           <p:nvPr/>
         </p:nvSpPr>
         <p:spPr>
           <a:xfrm>
-            <a:off x="2148840" y="3913632"/>
+            <a:off x="9418320" y="3703320"/>
             <a:ext cx="822960" cy="292608"/>
           </a:xfrm>
           <a:prstGeom prst="rect">
@@ -5950,14 +6223,14 @@
       </p:sp>
       <p:sp>
         <p:nvSpPr>
-          <p:cNvPr id="9" name="Rounded Rectangle 8"/>
+          <p:cNvPr id="15" name="Rounded Rectangle 14"/>
           <p:cNvSpPr/>
           <p:nvPr/>
         </p:nvSpPr>
         <p:spPr>
           <a:xfrm>
-            <a:off x="777240" y="4123944"/>
-            <a:ext cx="3154680" cy="548640"/>
+            <a:off x="8366760" y="3867912"/>
+            <a:ext cx="3017520" cy="566928"/>
           </a:xfrm>
           <a:prstGeom prst="roundRect">
             <a:avLst>
@@ -5992,9 +6265,9 @@
           <a:bodyPr rtlCol="0" anchor="ctr" tIns="63500" bIns="63500" lIns="152400" rIns="152400" wrap="none"/>
           <a:lstStyle/>
           <a:p>
-            <a:pPr algn="l"/>
-            <a:r>
-              <a:rPr sz="1700" b="1">
+            <a:pPr algn="ctr"/>
+            <a:r>
+              <a:rPr sz="1600" b="1">
                 <a:solidFill>
                   <a:srgbClr val="1A1A1A"/>
                 </a:solidFill>
@@ -6002,27 +6275,18 @@
               </a:rPr>
               <a:t>domain</a:t>
             </a:r>
-            <a:r>
-              <a:rPr sz="1200" b="0">
-                <a:solidFill>
-                  <a:srgbClr val="6B7280"/>
-                </a:solidFill>
-                <a:latin typeface="Apple SD Gothic Neo"/>
-              </a:rPr>
-              <a:t>   엔티티·도메인 규칙</a:t>
-            </a:r>
-          </a:p>
-        </p:txBody>
-      </p:sp>
-      <p:sp>
-        <p:nvSpPr>
-          <p:cNvPr id="10" name="TextBox 9"/>
+          </a:p>
+        </p:txBody>
+      </p:sp>
+      <p:sp>
+        <p:nvSpPr>
+          <p:cNvPr id="16" name="TextBox 15"/>
           <p:cNvSpPr txBox="1"/>
           <p:nvPr/>
         </p:nvSpPr>
         <p:spPr>
           <a:xfrm>
-            <a:off x="2148840" y="4626864"/>
+            <a:off x="9418320" y="4379976"/>
             <a:ext cx="822960" cy="292608"/>
           </a:xfrm>
           <a:prstGeom prst="rect">
@@ -6051,14 +6315,14 @@
       </p:sp>
       <p:sp>
         <p:nvSpPr>
-          <p:cNvPr id="11" name="Rounded Rectangle 10"/>
+          <p:cNvPr id="17" name="Rounded Rectangle 16"/>
           <p:cNvSpPr/>
           <p:nvPr/>
         </p:nvSpPr>
         <p:spPr>
           <a:xfrm>
-            <a:off x="777240" y="4837176"/>
-            <a:ext cx="3154680" cy="548640"/>
+            <a:off x="8366760" y="4544568"/>
+            <a:ext cx="3017520" cy="566928"/>
           </a:xfrm>
           <a:prstGeom prst="roundRect">
             <a:avLst>
@@ -6093,9 +6357,9 @@
           <a:bodyPr rtlCol="0" anchor="ctr" tIns="63500" bIns="63500" lIns="152400" rIns="152400" wrap="none"/>
           <a:lstStyle/>
           <a:p>
-            <a:pPr algn="l"/>
-            <a:r>
-              <a:rPr sz="1700" b="1">
+            <a:pPr algn="ctr"/>
+            <a:r>
+              <a:rPr sz="1600" b="1">
                 <a:solidFill>
                   <a:srgbClr val="1A1A1A"/>
                 </a:solidFill>
@@ -6103,27 +6367,18 @@
               </a:rPr>
               <a:t>repository</a:t>
             </a:r>
-            <a:r>
-              <a:rPr sz="1200" b="0">
-                <a:solidFill>
-                  <a:srgbClr val="6B7280"/>
-                </a:solidFill>
-                <a:latin typeface="Apple SD Gothic Neo"/>
-              </a:rPr>
-              <a:t>   JPA 저장·조회</a:t>
-            </a:r>
-          </a:p>
-        </p:txBody>
-      </p:sp>
-      <p:sp>
-        <p:nvSpPr>
-          <p:cNvPr id="12" name="TextBox 11"/>
+          </a:p>
+        </p:txBody>
+      </p:sp>
+      <p:sp>
+        <p:nvSpPr>
+          <p:cNvPr id="18" name="TextBox 17"/>
           <p:cNvSpPr txBox="1"/>
           <p:nvPr/>
         </p:nvSpPr>
         <p:spPr>
           <a:xfrm>
-            <a:off x="2148840" y="5340096"/>
+            <a:off x="9418320" y="5056632"/>
             <a:ext cx="822960" cy="292608"/>
           </a:xfrm>
           <a:prstGeom prst="rect">
@@ -6152,14 +6407,14 @@
       </p:sp>
       <p:sp>
         <p:nvSpPr>
-          <p:cNvPr id="13" name="Rounded Rectangle 12"/>
+          <p:cNvPr id="19" name="Rounded Rectangle 18"/>
           <p:cNvSpPr/>
           <p:nvPr/>
         </p:nvSpPr>
         <p:spPr>
           <a:xfrm>
-            <a:off x="777240" y="5550408"/>
-            <a:ext cx="3154680" cy="548640"/>
+            <a:off x="8366760" y="5221224"/>
+            <a:ext cx="3017520" cy="566928"/>
           </a:xfrm>
           <a:prstGeom prst="roundRect">
             <a:avLst>
@@ -6196,7 +6451,7 @@
           <a:p>
             <a:pPr algn="ctr"/>
             <a:r>
-              <a:rPr sz="1700" b="1">
+              <a:rPr sz="1600" b="1">
                 <a:solidFill>
                   <a:srgbClr val="FFFFFF"/>
                 </a:solidFill>
@@ -6209,14 +6464,14 @@
       </p:sp>
       <p:sp>
         <p:nvSpPr>
-          <p:cNvPr id="14" name="TextBox 13"/>
+          <p:cNvPr id="20" name="TextBox 19"/>
           <p:cNvSpPr txBox="1"/>
           <p:nvPr/>
         </p:nvSpPr>
         <p:spPr>
           <a:xfrm>
-            <a:off x="4343400" y="1828800"/>
-            <a:ext cx="3108960" cy="457200"/>
+            <a:off x="4069080" y="2788920"/>
+            <a:ext cx="4069080" cy="457200"/>
           </a:xfrm>
           <a:prstGeom prst="rect">
             <a:avLst/>
@@ -6229,309 +6484,29 @@
           </a:bodyPr>
           <a:lstStyle/>
           <a:p>
-            <a:pPr algn="l"/>
-            <a:r>
-              <a:rPr sz="2000" b="1" spc="-30">
-                <a:solidFill>
-                  <a:srgbClr val="B5793A"/>
-                </a:solidFill>
-                <a:latin typeface="Apple SD Gothic Neo"/>
-              </a:rPr>
-              <a:t>프론트 · React</a:t>
-            </a:r>
-          </a:p>
-          <a:p>
-            <a:pPr algn="l"/>
-            <a:r>
-              <a:rPr sz="1500" b="0" spc="-30">
-                <a:solidFill>
-                  <a:srgbClr val="6B7280"/>
-                </a:solidFill>
-                <a:latin typeface="Apple SD Gothic Neo"/>
-              </a:rPr>
-              <a:t>기능형</a:t>
-            </a:r>
-          </a:p>
-        </p:txBody>
-      </p:sp>
-      <p:sp>
-        <p:nvSpPr>
-          <p:cNvPr id="15" name="Rounded Rectangle 14"/>
-          <p:cNvSpPr/>
-          <p:nvPr/>
-        </p:nvSpPr>
-        <p:spPr>
-          <a:xfrm>
-            <a:off x="4343400" y="2697480"/>
-            <a:ext cx="3154680" cy="713232"/>
-          </a:xfrm>
-          <a:prstGeom prst="roundRect">
-            <a:avLst>
-              <a:gd name="adj" fmla="val 16000"/>
-            </a:avLst>
-          </a:prstGeom>
-          <a:solidFill>
-            <a:srgbClr val="F7EDE6"/>
-          </a:solidFill>
-          <a:ln w="17780">
-            <a:solidFill>
-              <a:srgbClr val="E6E6E6"/>
-            </a:solidFill>
-          </a:ln>
-          <a:effectLst/>
-        </p:spPr>
-        <p:style>
-          <a:lnRef idx="1">
-            <a:schemeClr val="accent1"/>
-          </a:lnRef>
-          <a:fillRef idx="3">
-            <a:schemeClr val="accent1"/>
-          </a:fillRef>
-          <a:effectRef idx="2">
-            <a:schemeClr val="accent1"/>
-          </a:effectRef>
-          <a:fontRef idx="minor">
-            <a:schemeClr val="lt1"/>
-          </a:fontRef>
-        </p:style>
-        <p:txBody>
-          <a:bodyPr rtlCol="0" anchor="ctr" tIns="63500" bIns="63500" lIns="152400" rIns="152400" wrap="none"/>
-          <a:lstStyle/>
-          <a:p>
-            <a:pPr algn="l"/>
-            <a:r>
-              <a:rPr sz="1700" b="1">
-                <a:solidFill>
-                  <a:srgbClr val="1A1A1A"/>
+            <a:pPr algn="ctr"/>
+            <a:r>
+              <a:rPr sz="2000" b="1" spc="0">
+                <a:solidFill>
+                  <a:srgbClr val="5B5BD6"/>
                 </a:solidFill>
                 <a:latin typeface="Menlo"/>
               </a:rPr>
-              <a:t>화면   </a:t>
-            </a:r>
-            <a:r>
-              <a:rPr sz="1300" b="0">
-                <a:solidFill>
-                  <a:srgbClr val="6B7280"/>
-                </a:solidFill>
-                <a:latin typeface="Apple SD Gothic Neo"/>
-              </a:rPr>
-              <a:t>components — 보이는 UI</a:t>
-            </a:r>
-          </a:p>
-        </p:txBody>
-      </p:sp>
-      <p:sp>
-        <p:nvSpPr>
-          <p:cNvPr id="16" name="TextBox 15"/>
+              <a:t>DTO</a:t>
+            </a:r>
+          </a:p>
+        </p:txBody>
+      </p:sp>
+      <p:sp>
+        <p:nvSpPr>
+          <p:cNvPr id="21" name="TextBox 20"/>
           <p:cNvSpPr txBox="1"/>
           <p:nvPr/>
         </p:nvSpPr>
         <p:spPr>
           <a:xfrm>
-            <a:off x="5715000" y="3355848"/>
-            <a:ext cx="822960" cy="292608"/>
-          </a:xfrm>
-          <a:prstGeom prst="rect">
-            <a:avLst/>
-          </a:prstGeom>
-          <a:noFill/>
-        </p:spPr>
-        <p:txBody>
-          <a:bodyPr wrap="square" anchor="ctr">
-            <a:spAutoFit/>
-          </a:bodyPr>
-          <a:lstStyle/>
-          <a:p>
-            <a:pPr algn="ctr"/>
-            <a:r>
-              <a:rPr sz="1800" b="1">
-                <a:solidFill>
-                  <a:srgbClr val="6B7280"/>
-                </a:solidFill>
-                <a:latin typeface="Apple SD Gothic Neo"/>
-              </a:rPr>
-              <a:t>↓</a:t>
-            </a:r>
-          </a:p>
-        </p:txBody>
-      </p:sp>
-      <p:sp>
-        <p:nvSpPr>
-          <p:cNvPr id="17" name="Rounded Rectangle 16"/>
-          <p:cNvSpPr/>
-          <p:nvPr/>
-        </p:nvSpPr>
-        <p:spPr>
-          <a:xfrm>
-            <a:off x="4343400" y="3575304"/>
-            <a:ext cx="3154680" cy="713232"/>
-          </a:xfrm>
-          <a:prstGeom prst="roundRect">
-            <a:avLst>
-              <a:gd name="adj" fmla="val 16000"/>
-            </a:avLst>
-          </a:prstGeom>
-          <a:solidFill>
-            <a:srgbClr val="F7EDE6"/>
-          </a:solidFill>
-          <a:ln w="17780">
-            <a:solidFill>
-              <a:srgbClr val="E6E6E6"/>
-            </a:solidFill>
-          </a:ln>
-          <a:effectLst/>
-        </p:spPr>
-        <p:style>
-          <a:lnRef idx="1">
-            <a:schemeClr val="accent1"/>
-          </a:lnRef>
-          <a:fillRef idx="3">
-            <a:schemeClr val="accent1"/>
-          </a:fillRef>
-          <a:effectRef idx="2">
-            <a:schemeClr val="accent1"/>
-          </a:effectRef>
-          <a:fontRef idx="minor">
-            <a:schemeClr val="lt1"/>
-          </a:fontRef>
-        </p:style>
-        <p:txBody>
-          <a:bodyPr rtlCol="0" anchor="ctr" tIns="63500" bIns="63500" lIns="152400" rIns="152400" wrap="none"/>
-          <a:lstStyle/>
-          <a:p>
-            <a:pPr algn="l"/>
-            <a:r>
-              <a:rPr sz="1700" b="1">
-                <a:solidFill>
-                  <a:srgbClr val="1A1A1A"/>
-                </a:solidFill>
-                <a:latin typeface="Menlo"/>
-              </a:rPr>
-              <a:t>hook   </a:t>
-            </a:r>
-            <a:r>
-              <a:rPr sz="1300" b="0">
-                <a:solidFill>
-                  <a:srgbClr val="6B7280"/>
-                </a:solidFill>
-                <a:latin typeface="Apple SD Gothic Neo"/>
-              </a:rPr>
-              <a:t>상태 관리·호출 트리거</a:t>
-            </a:r>
-          </a:p>
-        </p:txBody>
-      </p:sp>
-      <p:sp>
-        <p:nvSpPr>
-          <p:cNvPr id="18" name="TextBox 17"/>
-          <p:cNvSpPr txBox="1"/>
-          <p:nvPr/>
-        </p:nvSpPr>
-        <p:spPr>
-          <a:xfrm>
-            <a:off x="5715000" y="4233672"/>
-            <a:ext cx="822960" cy="292608"/>
-          </a:xfrm>
-          <a:prstGeom prst="rect">
-            <a:avLst/>
-          </a:prstGeom>
-          <a:noFill/>
-        </p:spPr>
-        <p:txBody>
-          <a:bodyPr wrap="square" anchor="ctr">
-            <a:spAutoFit/>
-          </a:bodyPr>
-          <a:lstStyle/>
-          <a:p>
-            <a:pPr algn="ctr"/>
-            <a:r>
-              <a:rPr sz="1800" b="1">
-                <a:solidFill>
-                  <a:srgbClr val="6B7280"/>
-                </a:solidFill>
-                <a:latin typeface="Apple SD Gothic Neo"/>
-              </a:rPr>
-              <a:t>↓</a:t>
-            </a:r>
-          </a:p>
-        </p:txBody>
-      </p:sp>
-      <p:sp>
-        <p:nvSpPr>
-          <p:cNvPr id="19" name="Rounded Rectangle 18"/>
-          <p:cNvSpPr/>
-          <p:nvPr/>
-        </p:nvSpPr>
-        <p:spPr>
-          <a:xfrm>
-            <a:off x="4343400" y="4453128"/>
-            <a:ext cx="3154680" cy="713232"/>
-          </a:xfrm>
-          <a:prstGeom prst="roundRect">
-            <a:avLst>
-              <a:gd name="adj" fmla="val 16000"/>
-            </a:avLst>
-          </a:prstGeom>
-          <a:solidFill>
-            <a:srgbClr val="F7EDE6"/>
-          </a:solidFill>
-          <a:ln w="17780">
-            <a:solidFill>
-              <a:srgbClr val="E6E6E6"/>
-            </a:solidFill>
-          </a:ln>
-          <a:effectLst/>
-        </p:spPr>
-        <p:style>
-          <a:lnRef idx="1">
-            <a:schemeClr val="accent1"/>
-          </a:lnRef>
-          <a:fillRef idx="3">
-            <a:schemeClr val="accent1"/>
-          </a:fillRef>
-          <a:effectRef idx="2">
-            <a:schemeClr val="accent1"/>
-          </a:effectRef>
-          <a:fontRef idx="minor">
-            <a:schemeClr val="lt1"/>
-          </a:fontRef>
-        </p:style>
-        <p:txBody>
-          <a:bodyPr rtlCol="0" anchor="ctr" tIns="63500" bIns="63500" lIns="152400" rIns="152400" wrap="none"/>
-          <a:lstStyle/>
-          <a:p>
-            <a:pPr algn="l"/>
-            <a:r>
-              <a:rPr sz="1700" b="1">
-                <a:solidFill>
-                  <a:srgbClr val="1A1A1A"/>
-                </a:solidFill>
-                <a:latin typeface="Menlo"/>
-              </a:rPr>
-              <a:t>api   </a:t>
-            </a:r>
-            <a:r>
-              <a:rPr sz="1300" b="0">
-                <a:solidFill>
-                  <a:srgbClr val="6B7280"/>
-                </a:solidFill>
-                <a:latin typeface="Apple SD Gothic Neo"/>
-              </a:rPr>
-              <a:t>서버에 요청 보냄</a:t>
-            </a:r>
-          </a:p>
-        </p:txBody>
-      </p:sp>
-      <p:sp>
-        <p:nvSpPr>
-          <p:cNvPr id="20" name="TextBox 19"/>
-          <p:cNvSpPr txBox="1"/>
-          <p:nvPr/>
-        </p:nvSpPr>
-        <p:spPr>
-          <a:xfrm>
-            <a:off x="4343400" y="5330952"/>
-            <a:ext cx="3291840" cy="822960"/>
+            <a:off x="3886200" y="3383280"/>
+            <a:ext cx="4434840" cy="548640"/>
           </a:xfrm>
           <a:prstGeom prst="rect">
             <a:avLst/>
@@ -6544,166 +6519,15 @@
           </a:bodyPr>
           <a:lstStyle/>
           <a:p>
-            <a:pPr algn="l"/>
-            <a:r>
-              <a:rPr sz="1300" b="1" spc="-20">
+            <a:pPr algn="ctr"/>
+            <a:r>
+              <a:rPr sz="1700" b="1" spc="-20">
                 <a:solidFill>
                   <a:srgbClr val="1A1A1A"/>
                 </a:solidFill>
                 <a:latin typeface="Apple SD Gothic Neo"/>
               </a:rPr>
-              <a:t>한 기능 = 이 셋이 한 폴더</a:t>
-            </a:r>
-          </a:p>
-          <a:p>
-            <a:pPr algn="l"/>
-            <a:r>
-              <a:rPr sz="1200" b="0" spc="-20">
-                <a:solidFill>
-                  <a:srgbClr val="6B7280"/>
-                </a:solidFill>
-                <a:latin typeface="Menlo"/>
-              </a:rPr>
-              <a:t>features/ : auth·contracts·claims</a:t>
-            </a:r>
-          </a:p>
-          <a:p>
-            <a:pPr algn="l"/>
-            <a:r>
-              <a:rPr sz="1200" b="0" spc="-20">
-                <a:solidFill>
-                  <a:srgbClr val="6B7280"/>
-                </a:solidFill>
-                <a:latin typeface="Menlo"/>
-              </a:rPr>
-              <a:t>benefit-review·profile … </a:t>
-            </a:r>
-          </a:p>
-        </p:txBody>
-      </p:sp>
-      <p:sp>
-        <p:nvSpPr>
-          <p:cNvPr id="21" name="Rounded Rectangle 20"/>
-          <p:cNvSpPr/>
-          <p:nvPr/>
-        </p:nvSpPr>
-        <p:spPr>
-          <a:xfrm>
-            <a:off x="7909560" y="2697480"/>
-            <a:ext cx="3566160" cy="2331720"/>
-          </a:xfrm>
-          <a:prstGeom prst="roundRect">
-            <a:avLst>
-              <a:gd name="adj" fmla="val 6000"/>
-            </a:avLst>
-          </a:prstGeom>
-          <a:solidFill>
-            <a:srgbClr val="1F1D3D"/>
-          </a:solidFill>
-          <a:ln>
-            <a:noFill/>
-          </a:ln>
-          <a:effectLst/>
-        </p:spPr>
-        <p:style>
-          <a:lnRef idx="1">
-            <a:schemeClr val="accent1"/>
-          </a:lnRef>
-          <a:fillRef idx="3">
-            <a:schemeClr val="accent1"/>
-          </a:fillRef>
-          <a:effectRef idx="2">
-            <a:schemeClr val="accent1"/>
-          </a:effectRef>
-          <a:fontRef idx="minor">
-            <a:schemeClr val="lt1"/>
-          </a:fontRef>
-        </p:style>
-        <p:txBody>
-          <a:bodyPr rtlCol="0" anchor="ctr" tIns="63500" bIns="63500" lIns="152400" rIns="152400" wrap="square"/>
-          <a:lstStyle/>
-          <a:p>
-            <a:pPr algn="l"/>
-            <a:r>
-              <a:rPr sz="3000" b="1">
-                <a:solidFill>
-                  <a:srgbClr val="FFFFFF"/>
-                </a:solidFill>
-                <a:latin typeface="Menlo"/>
-              </a:rPr>
-              <a:t>DTO</a:t>
-            </a:r>
-          </a:p>
-          <a:p>
-            <a:pPr algn="l"/>
-            <a:r>
-              <a:rPr sz="1000" b="0">
-                <a:solidFill>
-                  <a:srgbClr val="FFFFFF"/>
-                </a:solidFill>
-                <a:latin typeface="Apple SD Gothic Neo"/>
-              </a:rPr>
-              <a:t/>
-            </a:r>
-          </a:p>
-          <a:p>
-            <a:pPr algn="l"/>
-            <a:r>
-              <a:rPr sz="1600" b="1">
-                <a:solidFill>
-                  <a:srgbClr val="FFFFFF"/>
-                </a:solidFill>
-                <a:latin typeface="Apple SD Gothic Neo"/>
-              </a:rPr>
-              <a:t>화면(api)과 서버(controller)가</a:t>
-            </a:r>
-          </a:p>
-          <a:p>
-            <a:pPr algn="l"/>
-            <a:r>
-              <a:rPr sz="1600" b="1">
-                <a:solidFill>
-                  <a:srgbClr val="FFFFFF"/>
-                </a:solidFill>
-                <a:latin typeface="Apple SD Gothic Neo"/>
-              </a:rPr>
-              <a:t>주고받는 데이터 형식</a:t>
-            </a:r>
-          </a:p>
-          <a:p>
-            <a:pPr algn="l"/>
-            <a:r>
-              <a:rPr sz="800" b="0">
-                <a:solidFill>
-                  <a:srgbClr val="FFFFFF"/>
-                </a:solidFill>
-                <a:latin typeface="Apple SD Gothic Neo"/>
-              </a:rPr>
-              <a:t/>
-            </a:r>
-          </a:p>
-          <a:p>
-            <a:pPr algn="l"/>
-            <a:r>
-              <a:rPr sz="1400" b="0">
-                <a:solidFill>
-                  <a:srgbClr val="CDBFF7"/>
-                </a:solidFill>
-                <a:latin typeface="Apple SD Gothic Neo"/>
-              </a:rPr>
-              <a:t>요청 DTO  →  서버로 보낼 값</a:t>
-            </a:r>
-          </a:p>
-          <a:p>
-            <a:pPr algn="l"/>
-            <a:r>
-              <a:rPr sz="1400" b="0">
-                <a:solidFill>
-                  <a:srgbClr val="CDBFF7"/>
-                </a:solidFill>
-                <a:latin typeface="Apple SD Gothic Neo"/>
-              </a:rPr>
-              <a:t>응답 DTO  ←  화면에 뿌릴 값</a:t>
+              <a:t>요청 DTO  ───────▶</a:t>
             </a:r>
           </a:p>
         </p:txBody>
@@ -6716,8 +6540,8 @@
         </p:nvSpPr>
         <p:spPr>
           <a:xfrm>
-            <a:off x="7909560" y="5120640"/>
-            <a:ext cx="3566160" cy="457200"/>
+            <a:off x="3886200" y="4160520"/>
+            <a:ext cx="4434840" cy="548640"/>
           </a:xfrm>
           <a:prstGeom prst="rect">
             <a:avLst/>
@@ -6732,13 +6556,13 @@
           <a:p>
             <a:pPr algn="ctr"/>
             <a:r>
-              <a:rPr sz="1200" b="0" spc="-20">
-                <a:solidFill>
-                  <a:srgbClr val="6B7280"/>
-                </a:solidFill>
-                <a:latin typeface="Apple SD Gothic Neo"/>
-              </a:rPr>
-              <a:t>엔티티를 그대로 노출 안 하고 DTO로 변환</a:t>
+              <a:rPr sz="1700" b="1" spc="-20">
+                <a:solidFill>
+                  <a:srgbClr val="1A1A1A"/>
+                </a:solidFill>
+                <a:latin typeface="Apple SD Gothic Neo"/>
+              </a:rPr>
+              <a:t>◀───────  응답 DTO</a:t>
             </a:r>
           </a:p>
         </p:txBody>
@@ -6751,8 +6575,8 @@
         </p:nvSpPr>
         <p:spPr>
           <a:xfrm>
-            <a:off x="777240" y="5989320"/>
-            <a:ext cx="10607040" cy="640080"/>
+            <a:off x="3977639" y="4754880"/>
+            <a:ext cx="4251960" cy="640080"/>
           </a:xfrm>
           <a:prstGeom prst="rect">
             <a:avLst/>
@@ -6767,13 +6591,60 @@
           <a:p>
             <a:pPr algn="ctr"/>
             <a:r>
+              <a:rPr sz="1400" b="0" spc="-20">
+                <a:solidFill>
+                  <a:srgbClr val="6B7280"/>
+                </a:solidFill>
+                <a:latin typeface="Apple SD Gothic Neo"/>
+              </a:rPr>
+              <a:t>화면과 서버가 주고받는</a:t>
+            </a:r>
+          </a:p>
+          <a:p>
+            <a:pPr algn="ctr"/>
+            <a:r>
+              <a:rPr sz="1400" b="0" spc="-20">
+                <a:solidFill>
+                  <a:srgbClr val="6B7280"/>
+                </a:solidFill>
+                <a:latin typeface="Apple SD Gothic Neo"/>
+              </a:rPr>
+              <a:t>데이터 형식</a:t>
+            </a:r>
+          </a:p>
+        </p:txBody>
+      </p:sp>
+      <p:sp>
+        <p:nvSpPr>
+          <p:cNvPr id="24" name="TextBox 23"/>
+          <p:cNvSpPr txBox="1"/>
+          <p:nvPr/>
+        </p:nvSpPr>
+        <p:spPr>
+          <a:xfrm>
+            <a:off x="777240" y="5943600"/>
+            <a:ext cx="10607040" cy="640080"/>
+          </a:xfrm>
+          <a:prstGeom prst="rect">
+            <a:avLst/>
+          </a:prstGeom>
+          <a:noFill/>
+        </p:spPr>
+        <p:txBody>
+          <a:bodyPr wrap="square" anchor="t">
+            <a:spAutoFit/>
+          </a:bodyPr>
+          <a:lstStyle/>
+          <a:p>
+            <a:pPr algn="ctr"/>
+            <a:r>
               <a:rPr sz="2400" b="1" spc="-40">
                 <a:solidFill>
                   <a:srgbClr val="1A1A1A"/>
                 </a:solidFill>
                 <a:latin typeface="Apple SD Gothic Neo"/>
               </a:rPr>
-              <a:t>백엔드는 계층, 프론트는 기능 단위 — 둘 사이는 DTO로 주고받는다.</a:t>
+              <a:t>프론트와 백엔드는 DTO로 데이터를 주고받는다.</a:t>
             </a:r>
           </a:p>
         </p:txBody>

--- a/docs/presentation/보험발표-figma.pptx
+++ b/docs/presentation/보험발표-figma.pptx
@@ -7314,7 +7314,7 @@
                 </a:solidFill>
                 <a:latin typeface="Apple SD Gothic Neo"/>
               </a:rPr>
-              <a:t>프론트 — 버튼 클릭</a:t>
+              <a:t>프론트 — 화면과 hook</a:t>
             </a:r>
           </a:p>
         </p:txBody>
@@ -7360,7 +7360,6 @@
           <a:lstStyle/>
           <a:p>
             <a:pPr algn="ctr"/>
-            <a:endParaRPr/>
           </a:p>
         </p:txBody>
       </p:sp>
@@ -7403,7 +7402,7 @@
                 </a:solidFill>
                 <a:latin typeface="Menlo"/>
               </a:rPr>
-              <a:t>features/contracts/ProductsView.tsx</a:t>
+              <a:t>ProductsView.tsx (화면)  +  useCustomerContracts.ts (hook)</a:t>
             </a:r>
           </a:p>
         </p:txBody>
@@ -7451,7 +7450,6 @@
           <a:lstStyle/>
           <a:p>
             <a:pPr algn="ctr"/>
-            <a:endParaRPr/>
           </a:p>
         </p:txBody>
       </p:sp>
@@ -7485,7 +7483,7 @@
                 </a:solidFill>
                 <a:latin typeface="Menlo"/>
               </a:rPr>
-              <a:t>// 상품 목록의 각 카드</a:t>
+              <a:t>// ProductsView.tsx — 화면: hook에서 받아와 버튼에 연결</a:t>
             </a:r>
           </a:p>
           <a:p>
@@ -7493,11 +7491,23 @@
             <a:r>
               <a:rPr sz="1500" b="0">
                 <a:solidFill>
+                  <a:srgbClr val="CDBFF7"/>
+                </a:solidFill>
+                <a:latin typeface="Menlo"/>
+              </a:rPr>
+              <a:t>const { selectProduct } = state</a:t>
+            </a:r>
+          </a:p>
+          <a:p>
+            <a:pPr algn="l"/>
+            <a:r>
+              <a:rPr sz="1500" b="0">
+                <a:solidFill>
                   <a:srgbClr val="FFFFFF"/>
                 </a:solidFill>
                 <a:latin typeface="Menlo"/>
               </a:rPr>
-              <a:t>&lt;button onClick={() =&gt; selectProduct(product.id)}&gt;</a:t>
+              <a:t>&lt;button onClick={() =&gt; selectProduct(product.id)}&gt;…&lt;/button&gt;</a:t>
             </a:r>
           </a:p>
           <a:p>
@@ -7509,7 +7519,7 @@
                 </a:solidFill>
                 <a:latin typeface="Menlo"/>
               </a:rPr>
-              <a:t>  {product.productName}</a:t>
+              <a:t/>
             </a:r>
           </a:p>
           <a:p>
@@ -7517,52 +7527,31 @@
             <a:r>
               <a:rPr sz="1500" b="0">
                 <a:solidFill>
-                  <a:srgbClr val="FFFFFF"/>
+                  <a:srgbClr val="7C83B0"/>
                 </a:solidFill>
                 <a:latin typeface="Menlo"/>
               </a:rPr>
-              <a:t>&lt;/button&gt;</a:t>
+              <a:t>// useCustomerContracts.ts — hook: 상태 보관 + 호출</a:t>
             </a:r>
           </a:p>
           <a:p>
             <a:pPr algn="l"/>
-            <a:endParaRPr sz="1500" b="0">
-              <a:solidFill>
-                <a:srgbClr val="FFFFFF"/>
-              </a:solidFill>
-              <a:latin typeface="Menlo"/>
-            </a:endParaRPr>
+            <a:r>
+              <a:rPr sz="1500" b="0">
+                <a:solidFill>
+                  <a:srgbClr val="CDBFF7"/>
+                </a:solidFill>
+                <a:latin typeface="Menlo"/>
+              </a:rPr>
+              <a:t>async function selectProduct(id) {</a:t>
+            </a:r>
           </a:p>
           <a:p>
             <a:pPr algn="l"/>
             <a:r>
               <a:rPr sz="1500" b="0">
                 <a:solidFill>
-                  <a:srgbClr val="7C83B0"/>
-                </a:solidFill>
-                <a:latin typeface="Menlo"/>
-              </a:rPr>
-              <a:t>// 클릭하면 실행되는 함수</a:t>
-            </a:r>
-          </a:p>
-          <a:p>
-            <a:pPr algn="l"/>
-            <a:r>
-              <a:rPr sz="1500" b="0">
-                <a:solidFill>
                   <a:srgbClr val="CDBFF7"/>
-                </a:solidFill>
-                <a:latin typeface="Menlo"/>
-              </a:rPr>
-              <a:t>async function selectProduct(id) {</a:t>
-            </a:r>
-          </a:p>
-          <a:p>
-            <a:pPr algn="l"/>
-            <a:r>
-              <a:rPr sz="1500" b="0">
-                <a:solidFill>
-                  <a:srgbClr val="FFFFFF"/>
                 </a:solidFill>
                 <a:latin typeface="Menlo"/>
               </a:rPr>
@@ -7613,7 +7602,7 @@
                 </a:solidFill>
                 <a:latin typeface="Apple SD Gothic Neo"/>
               </a:rPr>
-              <a:t>카드를 누르면 그 상품 id로 selectProduct가 실행된다.</a:t>
+              <a:t>화면의 버튼이 hook의 selectProduct를 호출한다.</a:t>
             </a:r>
           </a:p>
         </p:txBody>

--- a/docs/presentation/보험발표-figma.pptx
+++ b/docs/presentation/보험발표-figma.pptx
@@ -30,8 +30,19 @@
     <p:sldId id="278" r:id="rId24"/>
     <p:sldId id="279" r:id="rId25"/>
     <p:sldId id="280" r:id="rId26"/>
-    <p:sldId id="281" r:id="rId27"/>
-    <p:sldId id="282" r:id="rId28"/>
+    <p:sldId id="284" r:id="rId34"/>
+    <p:sldId id="285" r:id="rId35"/>
+    <p:sldId id="286" r:id="rId36"/>
+    <p:sldId id="287" r:id="rId37"/>
+    <p:sldId id="288" r:id="rId38"/>
+    <p:sldId id="289" r:id="rId39"/>
+    <p:sldId id="290" r:id="rId40"/>
+    <p:sldId id="291" r:id="rId41"/>
+    <p:sldId id="292" r:id="rId42"/>
+    <p:sldId id="293" r:id="rId43"/>
+    <p:sldId id="294" r:id="rId44"/>
+    <p:sldId id="295" r:id="rId45"/>
+    <p:sldId id="296" r:id="rId46"/>
     <p:sldId id="283" r:id="rId29"/>
   </p:sldIdLst>
   <p:sldSz cx="12192000" cy="6858000"/>
@@ -9411,1481 +9422,6 @@
 </p:sld>
 </file>
 
-<file path=ppt/slides/slide26.xml><?xml version="1.0" encoding="utf-8"?>
-<p:sld xmlns:a="http://schemas.openxmlformats.org/drawingml/2006/main" xmlns:r="http://schemas.openxmlformats.org/officeDocument/2006/relationships" xmlns:p="http://schemas.openxmlformats.org/presentationml/2006/main">
-  <p:cSld>
-    <p:bg>
-      <p:bgPr>
-        <a:solidFill>
-          <a:srgbClr val="FFFFFF"/>
-        </a:solidFill>
-        <a:effectLst/>
-      </p:bgPr>
-    </p:bg>
-    <p:spTree>
-      <p:nvGrpSpPr>
-        <p:cNvPr id="1" name=""/>
-        <p:cNvGrpSpPr/>
-        <p:nvPr/>
-      </p:nvGrpSpPr>
-      <p:grpSpPr>
-        <a:xfrm>
-          <a:off x="0" y="0"/>
-          <a:ext cx="0" cy="0"/>
-          <a:chOff x="0" y="0"/>
-          <a:chExt cx="0" cy="0"/>
-        </a:xfrm>
-      </p:grpSpPr>
-      <p:sp>
-        <p:nvSpPr>
-          <p:cNvPr id="2" name="TextBox 1"/>
-          <p:cNvSpPr txBox="1"/>
-          <p:nvPr/>
-        </p:nvSpPr>
-        <p:spPr>
-          <a:xfrm>
-            <a:off x="749808" y="566928"/>
-            <a:ext cx="10881360" cy="1371600"/>
-          </a:xfrm>
-          <a:prstGeom prst="rect">
-            <a:avLst/>
-          </a:prstGeom>
-          <a:noFill/>
-        </p:spPr>
-        <p:txBody>
-          <a:bodyPr wrap="square" anchor="t">
-            <a:spAutoFit/>
-          </a:bodyPr>
-          <a:lstStyle/>
-          <a:p>
-            <a:pPr algn="l"/>
-            <a:r>
-              <a:rPr sz="5200" b="1" spc="-100">
-                <a:solidFill>
-                  <a:srgbClr val="1A1A1A"/>
-                </a:solidFill>
-                <a:latin typeface="Apple SD Gothic Neo"/>
-              </a:rPr>
-              <a:t>AI를 어떻게 썼나</a:t>
-            </a:r>
-          </a:p>
-        </p:txBody>
-      </p:sp>
-      <p:sp>
-        <p:nvSpPr>
-          <p:cNvPr id="3" name="Rectangle 2"/>
-          <p:cNvSpPr/>
-          <p:nvPr/>
-        </p:nvSpPr>
-        <p:spPr>
-          <a:xfrm>
-            <a:off x="822960" y="1627632"/>
-            <a:ext cx="868680" cy="82296"/>
-          </a:xfrm>
-          <a:prstGeom prst="rect">
-            <a:avLst/>
-          </a:prstGeom>
-          <a:solidFill>
-            <a:srgbClr val="5B5BD6"/>
-          </a:solidFill>
-          <a:ln>
-            <a:noFill/>
-          </a:ln>
-          <a:effectLst/>
-        </p:spPr>
-        <p:style>
-          <a:lnRef idx="1">
-            <a:schemeClr val="accent1"/>
-          </a:lnRef>
-          <a:fillRef idx="3">
-            <a:schemeClr val="accent1"/>
-          </a:fillRef>
-          <a:effectRef idx="2">
-            <a:schemeClr val="accent1"/>
-          </a:effectRef>
-          <a:fontRef idx="minor">
-            <a:schemeClr val="lt1"/>
-          </a:fontRef>
-        </p:style>
-        <p:txBody>
-          <a:bodyPr rtlCol="0" anchor="ctr"/>
-          <a:lstStyle/>
-          <a:p>
-            <a:pPr algn="ctr"/>
-            <a:endParaRPr/>
-          </a:p>
-        </p:txBody>
-      </p:sp>
-      <p:sp>
-        <p:nvSpPr>
-          <p:cNvPr id="4" name="Rounded Rectangle 3"/>
-          <p:cNvSpPr/>
-          <p:nvPr/>
-        </p:nvSpPr>
-        <p:spPr>
-          <a:xfrm>
-            <a:off x="777240" y="2011680"/>
-            <a:ext cx="5212080" cy="1554480"/>
-          </a:xfrm>
-          <a:prstGeom prst="roundRect">
-            <a:avLst>
-              <a:gd name="adj" fmla="val 12000"/>
-            </a:avLst>
-          </a:prstGeom>
-          <a:solidFill>
-            <a:srgbClr val="ECEBFB"/>
-          </a:solidFill>
-          <a:ln>
-            <a:noFill/>
-          </a:ln>
-          <a:effectLst/>
-        </p:spPr>
-        <p:style>
-          <a:lnRef idx="1">
-            <a:schemeClr val="accent1"/>
-          </a:lnRef>
-          <a:fillRef idx="3">
-            <a:schemeClr val="accent1"/>
-          </a:fillRef>
-          <a:effectRef idx="2">
-            <a:schemeClr val="accent1"/>
-          </a:effectRef>
-          <a:fontRef idx="minor">
-            <a:schemeClr val="lt1"/>
-          </a:fontRef>
-        </p:style>
-        <p:txBody>
-          <a:bodyPr rtlCol="0" anchor="ctr"/>
-          <a:lstStyle/>
-          <a:p>
-            <a:pPr algn="ctr"/>
-            <a:endParaRPr/>
-          </a:p>
-        </p:txBody>
-      </p:sp>
-      <p:sp>
-        <p:nvSpPr>
-          <p:cNvPr id="5" name="TextBox 4"/>
-          <p:cNvSpPr txBox="1"/>
-          <p:nvPr/>
-        </p:nvSpPr>
-        <p:spPr>
-          <a:xfrm>
-            <a:off x="1097280" y="2194560"/>
-            <a:ext cx="4663440" cy="1280160"/>
-          </a:xfrm>
-          <a:prstGeom prst="rect">
-            <a:avLst/>
-          </a:prstGeom>
-          <a:noFill/>
-        </p:spPr>
-        <p:txBody>
-          <a:bodyPr wrap="square" anchor="ctr">
-            <a:spAutoFit/>
-          </a:bodyPr>
-          <a:lstStyle/>
-          <a:p>
-            <a:pPr algn="l"/>
-            <a:r>
-              <a:rPr sz="2600" b="1">
-                <a:solidFill>
-                  <a:srgbClr val="5B5BD6"/>
-                </a:solidFill>
-                <a:latin typeface="Apple SD Gothic Neo"/>
-              </a:rPr>
-              <a:t>사람</a:t>
-            </a:r>
-          </a:p>
-          <a:p>
-            <a:pPr algn="l"/>
-            <a:r>
-              <a:rPr sz="2200" b="1">
-                <a:solidFill>
-                  <a:srgbClr val="1A1A1A"/>
-                </a:solidFill>
-                <a:latin typeface="Apple SD Gothic Neo"/>
-              </a:rPr>
-              <a:t>설계 · 결정 · 검토</a:t>
-            </a:r>
-          </a:p>
-        </p:txBody>
-      </p:sp>
-      <p:sp>
-        <p:nvSpPr>
-          <p:cNvPr id="6" name="Rounded Rectangle 5"/>
-          <p:cNvSpPr/>
-          <p:nvPr/>
-        </p:nvSpPr>
-        <p:spPr>
-          <a:xfrm>
-            <a:off x="6172200" y="2011680"/>
-            <a:ext cx="5212080" cy="1554480"/>
-          </a:xfrm>
-          <a:prstGeom prst="roundRect">
-            <a:avLst>
-              <a:gd name="adj" fmla="val 12000"/>
-            </a:avLst>
-          </a:prstGeom>
-          <a:solidFill>
-            <a:srgbClr val="F4F4F6"/>
-          </a:solidFill>
-          <a:ln w="12700">
-            <a:solidFill>
-              <a:srgbClr val="E6E6E6"/>
-            </a:solidFill>
-          </a:ln>
-          <a:effectLst/>
-        </p:spPr>
-        <p:style>
-          <a:lnRef idx="1">
-            <a:schemeClr val="accent1"/>
-          </a:lnRef>
-          <a:fillRef idx="3">
-            <a:schemeClr val="accent1"/>
-          </a:fillRef>
-          <a:effectRef idx="2">
-            <a:schemeClr val="accent1"/>
-          </a:effectRef>
-          <a:fontRef idx="minor">
-            <a:schemeClr val="lt1"/>
-          </a:fontRef>
-        </p:style>
-        <p:txBody>
-          <a:bodyPr rtlCol="0" anchor="ctr"/>
-          <a:lstStyle/>
-          <a:p>
-            <a:pPr algn="ctr"/>
-            <a:endParaRPr/>
-          </a:p>
-        </p:txBody>
-      </p:sp>
-      <p:sp>
-        <p:nvSpPr>
-          <p:cNvPr id="7" name="TextBox 6"/>
-          <p:cNvSpPr txBox="1"/>
-          <p:nvPr/>
-        </p:nvSpPr>
-        <p:spPr>
-          <a:xfrm>
-            <a:off x="6492240" y="2194560"/>
-            <a:ext cx="4663440" cy="1280160"/>
-          </a:xfrm>
-          <a:prstGeom prst="rect">
-            <a:avLst/>
-          </a:prstGeom>
-          <a:noFill/>
-        </p:spPr>
-        <p:txBody>
-          <a:bodyPr wrap="square" anchor="ctr">
-            <a:spAutoFit/>
-          </a:bodyPr>
-          <a:lstStyle/>
-          <a:p>
-            <a:pPr algn="l"/>
-            <a:r>
-              <a:rPr sz="2600" b="1">
-                <a:solidFill>
-                  <a:srgbClr val="1A1A1A"/>
-                </a:solidFill>
-                <a:latin typeface="Apple SD Gothic Neo"/>
-              </a:rPr>
-              <a:t>AI</a:t>
-            </a:r>
-          </a:p>
-          <a:p>
-            <a:pPr algn="l"/>
-            <a:r>
-              <a:rPr sz="2200" b="1">
-                <a:solidFill>
-                  <a:srgbClr val="1A1A1A"/>
-                </a:solidFill>
-                <a:latin typeface="Apple SD Gothic Neo"/>
-              </a:rPr>
-              <a:t>구현 · 테스트 · 정리</a:t>
-            </a:r>
-          </a:p>
-        </p:txBody>
-      </p:sp>
-      <p:sp>
-        <p:nvSpPr>
-          <p:cNvPr id="8" name="Rounded Rectangle 7"/>
-          <p:cNvSpPr/>
-          <p:nvPr/>
-        </p:nvSpPr>
-        <p:spPr>
-          <a:xfrm>
-            <a:off x="412851" y="3977639"/>
-            <a:ext cx="1965960" cy="1097280"/>
-          </a:xfrm>
-          <a:prstGeom prst="roundRect">
-            <a:avLst>
-              <a:gd name="adj" fmla="val 16000"/>
-            </a:avLst>
-          </a:prstGeom>
-          <a:solidFill>
-            <a:srgbClr val="F4F4F6"/>
-          </a:solidFill>
-          <a:ln w="15240">
-            <a:solidFill>
-              <a:srgbClr val="E6E6E6"/>
-            </a:solidFill>
-          </a:ln>
-          <a:effectLst/>
-        </p:spPr>
-        <p:style>
-          <a:lnRef idx="1">
-            <a:schemeClr val="accent1"/>
-          </a:lnRef>
-          <a:fillRef idx="3">
-            <a:schemeClr val="accent1"/>
-          </a:fillRef>
-          <a:effectRef idx="2">
-            <a:schemeClr val="accent1"/>
-          </a:effectRef>
-          <a:fontRef idx="minor">
-            <a:schemeClr val="lt1"/>
-          </a:fontRef>
-        </p:style>
-        <p:txBody>
-          <a:bodyPr wrap="square" lIns="177800" tIns="76200" rIns="177800" bIns="76200" rtlCol="0" anchor="ctr"/>
-          <a:lstStyle/>
-          <a:p>
-            <a:pPr algn="ctr"/>
-            <a:r>
-              <a:rPr sz="2100" b="1">
-                <a:solidFill>
-                  <a:srgbClr val="1A1A1A"/>
-                </a:solidFill>
-                <a:latin typeface="Apple SD Gothic Neo"/>
-              </a:rPr>
-              <a:t>설계</a:t>
-            </a:r>
-          </a:p>
-        </p:txBody>
-      </p:sp>
-      <p:sp>
-        <p:nvSpPr>
-          <p:cNvPr id="9" name="TextBox 8"/>
-          <p:cNvSpPr txBox="1"/>
-          <p:nvPr/>
-        </p:nvSpPr>
-        <p:spPr>
-          <a:xfrm>
-            <a:off x="2378811" y="4206240"/>
-            <a:ext cx="640080" cy="640080"/>
-          </a:xfrm>
-          <a:prstGeom prst="rect">
-            <a:avLst/>
-          </a:prstGeom>
-          <a:noFill/>
-        </p:spPr>
-        <p:txBody>
-          <a:bodyPr wrap="square" anchor="ctr">
-            <a:spAutoFit/>
-          </a:bodyPr>
-          <a:lstStyle/>
-          <a:p>
-            <a:pPr algn="ctr"/>
-            <a:r>
-              <a:rPr sz="2600" b="1">
-                <a:solidFill>
-                  <a:srgbClr val="5B5BD6"/>
-                </a:solidFill>
-                <a:latin typeface="Apple SD Gothic Neo"/>
-              </a:rPr>
-              <a:t>→</a:t>
-            </a:r>
-          </a:p>
-        </p:txBody>
-      </p:sp>
-      <p:sp>
-        <p:nvSpPr>
-          <p:cNvPr id="10" name="Rounded Rectangle 9"/>
-          <p:cNvSpPr/>
-          <p:nvPr/>
-        </p:nvSpPr>
-        <p:spPr>
-          <a:xfrm>
-            <a:off x="2762859" y="3977639"/>
-            <a:ext cx="1965960" cy="1097280"/>
-          </a:xfrm>
-          <a:prstGeom prst="roundRect">
-            <a:avLst>
-              <a:gd name="adj" fmla="val 16000"/>
-            </a:avLst>
-          </a:prstGeom>
-          <a:solidFill>
-            <a:srgbClr val="F4F4F6"/>
-          </a:solidFill>
-          <a:ln w="15240">
-            <a:solidFill>
-              <a:srgbClr val="E6E6E6"/>
-            </a:solidFill>
-          </a:ln>
-          <a:effectLst/>
-        </p:spPr>
-        <p:style>
-          <a:lnRef idx="1">
-            <a:schemeClr val="accent1"/>
-          </a:lnRef>
-          <a:fillRef idx="3">
-            <a:schemeClr val="accent1"/>
-          </a:fillRef>
-          <a:effectRef idx="2">
-            <a:schemeClr val="accent1"/>
-          </a:effectRef>
-          <a:fontRef idx="minor">
-            <a:schemeClr val="lt1"/>
-          </a:fontRef>
-        </p:style>
-        <p:txBody>
-          <a:bodyPr wrap="square" lIns="177800" tIns="76200" rIns="177800" bIns="76200" rtlCol="0" anchor="ctr"/>
-          <a:lstStyle/>
-          <a:p>
-            <a:pPr algn="ctr"/>
-            <a:r>
-              <a:rPr sz="2100" b="1">
-                <a:solidFill>
-                  <a:srgbClr val="1A1A1A"/>
-                </a:solidFill>
-                <a:latin typeface="Apple SD Gothic Neo"/>
-              </a:rPr>
-              <a:t>따져묻기</a:t>
-            </a:r>
-          </a:p>
-        </p:txBody>
-      </p:sp>
-      <p:sp>
-        <p:nvSpPr>
-          <p:cNvPr id="11" name="TextBox 10"/>
-          <p:cNvSpPr txBox="1"/>
-          <p:nvPr/>
-        </p:nvSpPr>
-        <p:spPr>
-          <a:xfrm>
-            <a:off x="4728819" y="4206240"/>
-            <a:ext cx="640080" cy="640080"/>
-          </a:xfrm>
-          <a:prstGeom prst="rect">
-            <a:avLst/>
-          </a:prstGeom>
-          <a:noFill/>
-        </p:spPr>
-        <p:txBody>
-          <a:bodyPr wrap="square" anchor="ctr">
-            <a:spAutoFit/>
-          </a:bodyPr>
-          <a:lstStyle/>
-          <a:p>
-            <a:pPr algn="ctr"/>
-            <a:r>
-              <a:rPr sz="2600" b="1">
-                <a:solidFill>
-                  <a:srgbClr val="5B5BD6"/>
-                </a:solidFill>
-                <a:latin typeface="Apple SD Gothic Neo"/>
-              </a:rPr>
-              <a:t>→</a:t>
-            </a:r>
-          </a:p>
-        </p:txBody>
-      </p:sp>
-      <p:sp>
-        <p:nvSpPr>
-          <p:cNvPr id="12" name="Rounded Rectangle 11"/>
-          <p:cNvSpPr/>
-          <p:nvPr/>
-        </p:nvSpPr>
-        <p:spPr>
-          <a:xfrm>
-            <a:off x="5112867" y="3977639"/>
-            <a:ext cx="1965960" cy="1097280"/>
-          </a:xfrm>
-          <a:prstGeom prst="roundRect">
-            <a:avLst>
-              <a:gd name="adj" fmla="val 16000"/>
-            </a:avLst>
-          </a:prstGeom>
-          <a:solidFill>
-            <a:srgbClr val="F4F4F6"/>
-          </a:solidFill>
-          <a:ln w="15240">
-            <a:solidFill>
-              <a:srgbClr val="E6E6E6"/>
-            </a:solidFill>
-          </a:ln>
-          <a:effectLst/>
-        </p:spPr>
-        <p:style>
-          <a:lnRef idx="1">
-            <a:schemeClr val="accent1"/>
-          </a:lnRef>
-          <a:fillRef idx="3">
-            <a:schemeClr val="accent1"/>
-          </a:fillRef>
-          <a:effectRef idx="2">
-            <a:schemeClr val="accent1"/>
-          </a:effectRef>
-          <a:fontRef idx="minor">
-            <a:schemeClr val="lt1"/>
-          </a:fontRef>
-        </p:style>
-        <p:txBody>
-          <a:bodyPr wrap="square" lIns="177800" tIns="76200" rIns="177800" bIns="76200" rtlCol="0" anchor="ctr"/>
-          <a:lstStyle/>
-          <a:p>
-            <a:pPr algn="ctr"/>
-            <a:r>
-              <a:rPr sz="2100" b="1">
-                <a:solidFill>
-                  <a:srgbClr val="1A1A1A"/>
-                </a:solidFill>
-                <a:latin typeface="Apple SD Gothic Neo"/>
-              </a:rPr>
-              <a:t>계획</a:t>
-            </a:r>
-          </a:p>
-        </p:txBody>
-      </p:sp>
-      <p:sp>
-        <p:nvSpPr>
-          <p:cNvPr id="13" name="TextBox 12"/>
-          <p:cNvSpPr txBox="1"/>
-          <p:nvPr/>
-        </p:nvSpPr>
-        <p:spPr>
-          <a:xfrm>
-            <a:off x="7078827" y="4206240"/>
-            <a:ext cx="640080" cy="640080"/>
-          </a:xfrm>
-          <a:prstGeom prst="rect">
-            <a:avLst/>
-          </a:prstGeom>
-          <a:noFill/>
-        </p:spPr>
-        <p:txBody>
-          <a:bodyPr wrap="square" anchor="ctr">
-            <a:spAutoFit/>
-          </a:bodyPr>
-          <a:lstStyle/>
-          <a:p>
-            <a:pPr algn="ctr"/>
-            <a:r>
-              <a:rPr sz="2600" b="1">
-                <a:solidFill>
-                  <a:srgbClr val="5B5BD6"/>
-                </a:solidFill>
-                <a:latin typeface="Apple SD Gothic Neo"/>
-              </a:rPr>
-              <a:t>→</a:t>
-            </a:r>
-          </a:p>
-        </p:txBody>
-      </p:sp>
-      <p:sp>
-        <p:nvSpPr>
-          <p:cNvPr id="14" name="Rounded Rectangle 13"/>
-          <p:cNvSpPr/>
-          <p:nvPr/>
-        </p:nvSpPr>
-        <p:spPr>
-          <a:xfrm>
-            <a:off x="7462875" y="3977639"/>
-            <a:ext cx="1965960" cy="1097280"/>
-          </a:xfrm>
-          <a:prstGeom prst="roundRect">
-            <a:avLst>
-              <a:gd name="adj" fmla="val 16000"/>
-            </a:avLst>
-          </a:prstGeom>
-          <a:solidFill>
-            <a:srgbClr val="ECEBFB"/>
-          </a:solidFill>
-          <a:ln w="15240">
-            <a:solidFill>
-              <a:srgbClr val="E6E6E6"/>
-            </a:solidFill>
-          </a:ln>
-          <a:effectLst/>
-        </p:spPr>
-        <p:style>
-          <a:lnRef idx="1">
-            <a:schemeClr val="accent1"/>
-          </a:lnRef>
-          <a:fillRef idx="3">
-            <a:schemeClr val="accent1"/>
-          </a:fillRef>
-          <a:effectRef idx="2">
-            <a:schemeClr val="accent1"/>
-          </a:effectRef>
-          <a:fontRef idx="minor">
-            <a:schemeClr val="lt1"/>
-          </a:fontRef>
-        </p:style>
-        <p:txBody>
-          <a:bodyPr wrap="square" lIns="177800" tIns="76200" rIns="177800" bIns="76200" rtlCol="0" anchor="ctr"/>
-          <a:lstStyle/>
-          <a:p>
-            <a:pPr algn="ctr"/>
-            <a:r>
-              <a:rPr sz="2100" b="1">
-                <a:solidFill>
-                  <a:srgbClr val="1A1A1A"/>
-                </a:solidFill>
-                <a:latin typeface="Apple SD Gothic Neo"/>
-              </a:rPr>
-              <a:t>테스트 먼저 구현</a:t>
-            </a:r>
-          </a:p>
-        </p:txBody>
-      </p:sp>
-      <p:sp>
-        <p:nvSpPr>
-          <p:cNvPr id="15" name="TextBox 14"/>
-          <p:cNvSpPr txBox="1"/>
-          <p:nvPr/>
-        </p:nvSpPr>
-        <p:spPr>
-          <a:xfrm>
-            <a:off x="9428835" y="4206240"/>
-            <a:ext cx="640080" cy="640080"/>
-          </a:xfrm>
-          <a:prstGeom prst="rect">
-            <a:avLst/>
-          </a:prstGeom>
-          <a:noFill/>
-        </p:spPr>
-        <p:txBody>
-          <a:bodyPr wrap="square" anchor="ctr">
-            <a:spAutoFit/>
-          </a:bodyPr>
-          <a:lstStyle/>
-          <a:p>
-            <a:pPr algn="ctr"/>
-            <a:r>
-              <a:rPr sz="2600" b="1">
-                <a:solidFill>
-                  <a:srgbClr val="5B5BD6"/>
-                </a:solidFill>
-                <a:latin typeface="Apple SD Gothic Neo"/>
-              </a:rPr>
-              <a:t>→</a:t>
-            </a:r>
-          </a:p>
-        </p:txBody>
-      </p:sp>
-      <p:sp>
-        <p:nvSpPr>
-          <p:cNvPr id="16" name="Rounded Rectangle 15"/>
-          <p:cNvSpPr/>
-          <p:nvPr/>
-        </p:nvSpPr>
-        <p:spPr>
-          <a:xfrm>
-            <a:off x="9812883" y="3977639"/>
-            <a:ext cx="1965960" cy="1097280"/>
-          </a:xfrm>
-          <a:prstGeom prst="roundRect">
-            <a:avLst>
-              <a:gd name="adj" fmla="val 16000"/>
-            </a:avLst>
-          </a:prstGeom>
-          <a:solidFill>
-            <a:srgbClr val="F4F4F6"/>
-          </a:solidFill>
-          <a:ln w="15240">
-            <a:solidFill>
-              <a:srgbClr val="E6E6E6"/>
-            </a:solidFill>
-          </a:ln>
-          <a:effectLst/>
-        </p:spPr>
-        <p:style>
-          <a:lnRef idx="1">
-            <a:schemeClr val="accent1"/>
-          </a:lnRef>
-          <a:fillRef idx="3">
-            <a:schemeClr val="accent1"/>
-          </a:fillRef>
-          <a:effectRef idx="2">
-            <a:schemeClr val="accent1"/>
-          </a:effectRef>
-          <a:fontRef idx="minor">
-            <a:schemeClr val="lt1"/>
-          </a:fontRef>
-        </p:style>
-        <p:txBody>
-          <a:bodyPr wrap="square" lIns="177800" tIns="76200" rIns="177800" bIns="76200" rtlCol="0" anchor="ctr"/>
-          <a:lstStyle/>
-          <a:p>
-            <a:pPr algn="ctr"/>
-            <a:r>
-              <a:rPr sz="2100" b="1">
-                <a:solidFill>
-                  <a:srgbClr val="1A1A1A"/>
-                </a:solidFill>
-                <a:latin typeface="Apple SD Gothic Neo"/>
-              </a:rPr>
-              <a:t>검토</a:t>
-            </a:r>
-          </a:p>
-        </p:txBody>
-      </p:sp>
-      <p:sp>
-        <p:nvSpPr>
-          <p:cNvPr id="17" name="TextBox 16"/>
-          <p:cNvSpPr txBox="1"/>
-          <p:nvPr/>
-        </p:nvSpPr>
-        <p:spPr>
-          <a:xfrm>
-            <a:off x="777240" y="5440680"/>
-            <a:ext cx="10607040" cy="822960"/>
-          </a:xfrm>
-          <a:prstGeom prst="rect">
-            <a:avLst/>
-          </a:prstGeom>
-          <a:noFill/>
-        </p:spPr>
-        <p:txBody>
-          <a:bodyPr wrap="square" anchor="t">
-            <a:spAutoFit/>
-          </a:bodyPr>
-          <a:lstStyle/>
-          <a:p>
-            <a:pPr algn="ctr"/>
-            <a:r>
-              <a:rPr sz="2800" b="1" spc="-40">
-                <a:solidFill>
-                  <a:srgbClr val="1A1A1A"/>
-                </a:solidFill>
-                <a:latin typeface="Apple SD Gothic Neo"/>
-              </a:rPr>
-              <a:t>설계와 결정은 사람이, 구현은 AI가 했다.</a:t>
-            </a:r>
-          </a:p>
-        </p:txBody>
-      </p:sp>
-    </p:spTree>
-  </p:cSld>
-  <p:clrMapOvr>
-    <a:masterClrMapping/>
-  </p:clrMapOvr>
-</p:sld>
-</file>
-
-<file path=ppt/slides/slide27.xml><?xml version="1.0" encoding="utf-8"?>
-<p:sld xmlns:a="http://schemas.openxmlformats.org/drawingml/2006/main" xmlns:r="http://schemas.openxmlformats.org/officeDocument/2006/relationships" xmlns:p="http://schemas.openxmlformats.org/presentationml/2006/main">
-  <p:cSld>
-    <p:bg>
-      <p:bgPr>
-        <a:solidFill>
-          <a:srgbClr val="FFFFFF"/>
-        </a:solidFill>
-        <a:effectLst/>
-      </p:bgPr>
-    </p:bg>
-    <p:spTree>
-      <p:nvGrpSpPr>
-        <p:cNvPr id="1" name=""/>
-        <p:cNvGrpSpPr/>
-        <p:nvPr/>
-      </p:nvGrpSpPr>
-      <p:grpSpPr>
-        <a:xfrm>
-          <a:off x="0" y="0"/>
-          <a:ext cx="0" cy="0"/>
-          <a:chOff x="0" y="0"/>
-          <a:chExt cx="0" cy="0"/>
-        </a:xfrm>
-      </p:grpSpPr>
-      <p:sp>
-        <p:nvSpPr>
-          <p:cNvPr id="2" name="TextBox 1"/>
-          <p:cNvSpPr txBox="1"/>
-          <p:nvPr/>
-        </p:nvSpPr>
-        <p:spPr>
-          <a:xfrm>
-            <a:off x="749808" y="566928"/>
-            <a:ext cx="10881360" cy="1371600"/>
-          </a:xfrm>
-          <a:prstGeom prst="rect">
-            <a:avLst/>
-          </a:prstGeom>
-          <a:noFill/>
-        </p:spPr>
-        <p:txBody>
-          <a:bodyPr wrap="square" anchor="t">
-            <a:spAutoFit/>
-          </a:bodyPr>
-          <a:lstStyle/>
-          <a:p>
-            <a:pPr algn="l"/>
-            <a:r>
-              <a:rPr sz="5200" b="1" spc="-100">
-                <a:solidFill>
-                  <a:srgbClr val="1A1A1A"/>
-                </a:solidFill>
-                <a:latin typeface="Apple SD Gothic Neo"/>
-              </a:rPr>
-              <a:t>AI가 삑사리 난 곳, 어떻게 잡았나</a:t>
-            </a:r>
-          </a:p>
-        </p:txBody>
-      </p:sp>
-      <p:sp>
-        <p:nvSpPr>
-          <p:cNvPr id="3" name="Rectangle 2"/>
-          <p:cNvSpPr/>
-          <p:nvPr/>
-        </p:nvSpPr>
-        <p:spPr>
-          <a:xfrm>
-            <a:off x="822960" y="1627632"/>
-            <a:ext cx="868680" cy="82296"/>
-          </a:xfrm>
-          <a:prstGeom prst="rect">
-            <a:avLst/>
-          </a:prstGeom>
-          <a:solidFill>
-            <a:srgbClr val="5B5BD6"/>
-          </a:solidFill>
-          <a:ln>
-            <a:noFill/>
-          </a:ln>
-          <a:effectLst/>
-        </p:spPr>
-        <p:style>
-          <a:lnRef idx="1">
-            <a:schemeClr val="accent1"/>
-          </a:lnRef>
-          <a:fillRef idx="3">
-            <a:schemeClr val="accent1"/>
-          </a:fillRef>
-          <a:effectRef idx="2">
-            <a:schemeClr val="accent1"/>
-          </a:effectRef>
-          <a:fontRef idx="minor">
-            <a:schemeClr val="lt1"/>
-          </a:fontRef>
-        </p:style>
-        <p:txBody>
-          <a:bodyPr rtlCol="0" anchor="ctr"/>
-          <a:lstStyle/>
-          <a:p>
-            <a:pPr algn="ctr"/>
-            <a:endParaRPr/>
-          </a:p>
-        </p:txBody>
-      </p:sp>
-      <p:sp>
-        <p:nvSpPr>
-          <p:cNvPr id="4" name="Rounded Rectangle 3"/>
-          <p:cNvSpPr/>
-          <p:nvPr/>
-        </p:nvSpPr>
-        <p:spPr>
-          <a:xfrm>
-            <a:off x="777240" y="2057400"/>
-            <a:ext cx="5212080" cy="1554480"/>
-          </a:xfrm>
-          <a:prstGeom prst="roundRect">
-            <a:avLst>
-              <a:gd name="adj" fmla="val 10000"/>
-            </a:avLst>
-          </a:prstGeom>
-          <a:solidFill>
-            <a:srgbClr val="F4F4F6"/>
-          </a:solidFill>
-          <a:ln w="12700">
-            <a:solidFill>
-              <a:srgbClr val="E6E6E6"/>
-            </a:solidFill>
-          </a:ln>
-          <a:effectLst/>
-        </p:spPr>
-        <p:style>
-          <a:lnRef idx="1">
-            <a:schemeClr val="accent1"/>
-          </a:lnRef>
-          <a:fillRef idx="3">
-            <a:schemeClr val="accent1"/>
-          </a:fillRef>
-          <a:effectRef idx="2">
-            <a:schemeClr val="accent1"/>
-          </a:effectRef>
-          <a:fontRef idx="minor">
-            <a:schemeClr val="lt1"/>
-          </a:fontRef>
-        </p:style>
-        <p:txBody>
-          <a:bodyPr rtlCol="0" anchor="ctr"/>
-          <a:lstStyle/>
-          <a:p>
-            <a:pPr algn="ctr"/>
-            <a:endParaRPr/>
-          </a:p>
-        </p:txBody>
-      </p:sp>
-      <p:sp>
-        <p:nvSpPr>
-          <p:cNvPr id="5" name="Rectangle 4"/>
-          <p:cNvSpPr/>
-          <p:nvPr/>
-        </p:nvSpPr>
-        <p:spPr>
-          <a:xfrm>
-            <a:off x="777240" y="2286000"/>
-            <a:ext cx="109728" cy="1097280"/>
-          </a:xfrm>
-          <a:prstGeom prst="rect">
-            <a:avLst/>
-          </a:prstGeom>
-          <a:solidFill>
-            <a:srgbClr val="5B5BD6"/>
-          </a:solidFill>
-          <a:ln>
-            <a:noFill/>
-          </a:ln>
-          <a:effectLst/>
-        </p:spPr>
-        <p:style>
-          <a:lnRef idx="1">
-            <a:schemeClr val="accent1"/>
-          </a:lnRef>
-          <a:fillRef idx="3">
-            <a:schemeClr val="accent1"/>
-          </a:fillRef>
-          <a:effectRef idx="2">
-            <a:schemeClr val="accent1"/>
-          </a:effectRef>
-          <a:fontRef idx="minor">
-            <a:schemeClr val="lt1"/>
-          </a:fontRef>
-        </p:style>
-        <p:txBody>
-          <a:bodyPr rtlCol="0" anchor="ctr"/>
-          <a:lstStyle/>
-          <a:p>
-            <a:pPr algn="ctr"/>
-            <a:endParaRPr/>
-          </a:p>
-        </p:txBody>
-      </p:sp>
-      <p:sp>
-        <p:nvSpPr>
-          <p:cNvPr id="6" name="TextBox 5"/>
-          <p:cNvSpPr txBox="1"/>
-          <p:nvPr/>
-        </p:nvSpPr>
-        <p:spPr>
-          <a:xfrm>
-            <a:off x="1234440" y="2258568"/>
-            <a:ext cx="4572000" cy="1234440"/>
-          </a:xfrm>
-          <a:prstGeom prst="rect">
-            <a:avLst/>
-          </a:prstGeom>
-          <a:noFill/>
-        </p:spPr>
-        <p:txBody>
-          <a:bodyPr wrap="square" anchor="ctr">
-            <a:spAutoFit/>
-          </a:bodyPr>
-          <a:lstStyle/>
-          <a:p>
-            <a:pPr algn="l"/>
-            <a:r>
-              <a:rPr sz="2400" b="1" spc="-30">
-                <a:solidFill>
-                  <a:srgbClr val="1A1A1A"/>
-                </a:solidFill>
-                <a:latin typeface="Apple SD Gothic Neo"/>
-              </a:rPr>
-              <a:t>성급하게 쪼갬</a:t>
-            </a:r>
-          </a:p>
-          <a:p>
-            <a:pPr algn="l"/>
-            <a:r>
-              <a:rPr sz="1900" b="1" spc="-30">
-                <a:solidFill>
-                  <a:srgbClr val="6B7280"/>
-                </a:solidFill>
-                <a:latin typeface="Apple SD Gothic Neo"/>
-              </a:rPr>
-              <a:t>쓸모없는 계층 분리 → 되돌림</a:t>
-            </a:r>
-          </a:p>
-        </p:txBody>
-      </p:sp>
-      <p:sp>
-        <p:nvSpPr>
-          <p:cNvPr id="7" name="Rounded Rectangle 6"/>
-          <p:cNvSpPr/>
-          <p:nvPr/>
-        </p:nvSpPr>
-        <p:spPr>
-          <a:xfrm>
-            <a:off x="6172200" y="2057400"/>
-            <a:ext cx="5212080" cy="1554480"/>
-          </a:xfrm>
-          <a:prstGeom prst="roundRect">
-            <a:avLst>
-              <a:gd name="adj" fmla="val 10000"/>
-            </a:avLst>
-          </a:prstGeom>
-          <a:solidFill>
-            <a:srgbClr val="F4F4F6"/>
-          </a:solidFill>
-          <a:ln w="12700">
-            <a:solidFill>
-              <a:srgbClr val="E6E6E6"/>
-            </a:solidFill>
-          </a:ln>
-          <a:effectLst/>
-        </p:spPr>
-        <p:style>
-          <a:lnRef idx="1">
-            <a:schemeClr val="accent1"/>
-          </a:lnRef>
-          <a:fillRef idx="3">
-            <a:schemeClr val="accent1"/>
-          </a:fillRef>
-          <a:effectRef idx="2">
-            <a:schemeClr val="accent1"/>
-          </a:effectRef>
-          <a:fontRef idx="minor">
-            <a:schemeClr val="lt1"/>
-          </a:fontRef>
-        </p:style>
-        <p:txBody>
-          <a:bodyPr rtlCol="0" anchor="ctr"/>
-          <a:lstStyle/>
-          <a:p>
-            <a:pPr algn="ctr"/>
-            <a:endParaRPr/>
-          </a:p>
-        </p:txBody>
-      </p:sp>
-      <p:sp>
-        <p:nvSpPr>
-          <p:cNvPr id="8" name="Rectangle 7"/>
-          <p:cNvSpPr/>
-          <p:nvPr/>
-        </p:nvSpPr>
-        <p:spPr>
-          <a:xfrm>
-            <a:off x="6172200" y="2286000"/>
-            <a:ext cx="109728" cy="1097280"/>
-          </a:xfrm>
-          <a:prstGeom prst="rect">
-            <a:avLst/>
-          </a:prstGeom>
-          <a:solidFill>
-            <a:srgbClr val="5B5BD6"/>
-          </a:solidFill>
-          <a:ln>
-            <a:noFill/>
-          </a:ln>
-          <a:effectLst/>
-        </p:spPr>
-        <p:style>
-          <a:lnRef idx="1">
-            <a:schemeClr val="accent1"/>
-          </a:lnRef>
-          <a:fillRef idx="3">
-            <a:schemeClr val="accent1"/>
-          </a:fillRef>
-          <a:effectRef idx="2">
-            <a:schemeClr val="accent1"/>
-          </a:effectRef>
-          <a:fontRef idx="minor">
-            <a:schemeClr val="lt1"/>
-          </a:fontRef>
-        </p:style>
-        <p:txBody>
-          <a:bodyPr rtlCol="0" anchor="ctr"/>
-          <a:lstStyle/>
-          <a:p>
-            <a:pPr algn="ctr"/>
-            <a:endParaRPr/>
-          </a:p>
-        </p:txBody>
-      </p:sp>
-      <p:sp>
-        <p:nvSpPr>
-          <p:cNvPr id="9" name="TextBox 8"/>
-          <p:cNvSpPr txBox="1"/>
-          <p:nvPr/>
-        </p:nvSpPr>
-        <p:spPr>
-          <a:xfrm>
-            <a:off x="6629400" y="2258568"/>
-            <a:ext cx="4572000" cy="1234440"/>
-          </a:xfrm>
-          <a:prstGeom prst="rect">
-            <a:avLst/>
-          </a:prstGeom>
-          <a:noFill/>
-        </p:spPr>
-        <p:txBody>
-          <a:bodyPr wrap="square" anchor="ctr">
-            <a:spAutoFit/>
-          </a:bodyPr>
-          <a:lstStyle/>
-          <a:p>
-            <a:pPr algn="l"/>
-            <a:r>
-              <a:rPr sz="2400" b="1" spc="-30">
-                <a:solidFill>
-                  <a:srgbClr val="1A1A1A"/>
-                </a:solidFill>
-                <a:latin typeface="Apple SD Gothic Neo"/>
-              </a:rPr>
-              <a:t>시킨 것과 다름</a:t>
-            </a:r>
-          </a:p>
-          <a:p>
-            <a:pPr algn="l"/>
-            <a:r>
-              <a:rPr sz="1900" b="1" spc="-30">
-                <a:solidFill>
-                  <a:srgbClr val="6B7280"/>
-                </a:solidFill>
-                <a:latin typeface="Apple SD Gothic Neo"/>
-              </a:rPr>
-              <a:t>자동 배정 → 수동 배정으로 정정</a:t>
-            </a:r>
-          </a:p>
-        </p:txBody>
-      </p:sp>
-      <p:sp>
-        <p:nvSpPr>
-          <p:cNvPr id="10" name="Rounded Rectangle 9"/>
-          <p:cNvSpPr/>
-          <p:nvPr/>
-        </p:nvSpPr>
-        <p:spPr>
-          <a:xfrm>
-            <a:off x="777240" y="3794760"/>
-            <a:ext cx="5212080" cy="1554480"/>
-          </a:xfrm>
-          <a:prstGeom prst="roundRect">
-            <a:avLst>
-              <a:gd name="adj" fmla="val 10000"/>
-            </a:avLst>
-          </a:prstGeom>
-          <a:solidFill>
-            <a:srgbClr val="F4F4F6"/>
-          </a:solidFill>
-          <a:ln w="12700">
-            <a:solidFill>
-              <a:srgbClr val="E6E6E6"/>
-            </a:solidFill>
-          </a:ln>
-          <a:effectLst/>
-        </p:spPr>
-        <p:style>
-          <a:lnRef idx="1">
-            <a:schemeClr val="accent1"/>
-          </a:lnRef>
-          <a:fillRef idx="3">
-            <a:schemeClr val="accent1"/>
-          </a:fillRef>
-          <a:effectRef idx="2">
-            <a:schemeClr val="accent1"/>
-          </a:effectRef>
-          <a:fontRef idx="minor">
-            <a:schemeClr val="lt1"/>
-          </a:fontRef>
-        </p:style>
-        <p:txBody>
-          <a:bodyPr rtlCol="0" anchor="ctr"/>
-          <a:lstStyle/>
-          <a:p>
-            <a:pPr algn="ctr"/>
-            <a:endParaRPr/>
-          </a:p>
-        </p:txBody>
-      </p:sp>
-      <p:sp>
-        <p:nvSpPr>
-          <p:cNvPr id="11" name="Rectangle 10"/>
-          <p:cNvSpPr/>
-          <p:nvPr/>
-        </p:nvSpPr>
-        <p:spPr>
-          <a:xfrm>
-            <a:off x="777240" y="4023360"/>
-            <a:ext cx="109728" cy="1097280"/>
-          </a:xfrm>
-          <a:prstGeom prst="rect">
-            <a:avLst/>
-          </a:prstGeom>
-          <a:solidFill>
-            <a:srgbClr val="5B5BD6"/>
-          </a:solidFill>
-          <a:ln>
-            <a:noFill/>
-          </a:ln>
-          <a:effectLst/>
-        </p:spPr>
-        <p:style>
-          <a:lnRef idx="1">
-            <a:schemeClr val="accent1"/>
-          </a:lnRef>
-          <a:fillRef idx="3">
-            <a:schemeClr val="accent1"/>
-          </a:fillRef>
-          <a:effectRef idx="2">
-            <a:schemeClr val="accent1"/>
-          </a:effectRef>
-          <a:fontRef idx="minor">
-            <a:schemeClr val="lt1"/>
-          </a:fontRef>
-        </p:style>
-        <p:txBody>
-          <a:bodyPr rtlCol="0" anchor="ctr"/>
-          <a:lstStyle/>
-          <a:p>
-            <a:pPr algn="ctr"/>
-            <a:endParaRPr/>
-          </a:p>
-        </p:txBody>
-      </p:sp>
-      <p:sp>
-        <p:nvSpPr>
-          <p:cNvPr id="12" name="TextBox 11"/>
-          <p:cNvSpPr txBox="1"/>
-          <p:nvPr/>
-        </p:nvSpPr>
-        <p:spPr>
-          <a:xfrm>
-            <a:off x="1234440" y="3995928"/>
-            <a:ext cx="4572000" cy="1234440"/>
-          </a:xfrm>
-          <a:prstGeom prst="rect">
-            <a:avLst/>
-          </a:prstGeom>
-          <a:noFill/>
-        </p:spPr>
-        <p:txBody>
-          <a:bodyPr wrap="square" anchor="ctr">
-            <a:spAutoFit/>
-          </a:bodyPr>
-          <a:lstStyle/>
-          <a:p>
-            <a:pPr algn="l"/>
-            <a:r>
-              <a:rPr sz="2400" b="1" spc="-30">
-                <a:solidFill>
-                  <a:srgbClr val="1A1A1A"/>
-                </a:solidFill>
-                <a:latin typeface="Apple SD Gothic Neo"/>
-              </a:rPr>
-              <a:t>정해둔 틀에서 이탈</a:t>
-            </a:r>
-          </a:p>
-          <a:p>
-            <a:pPr algn="l"/>
-            <a:r>
-              <a:rPr sz="1900" b="1" spc="-30">
-                <a:solidFill>
-                  <a:srgbClr val="6B7280"/>
-                </a:solidFill>
-                <a:latin typeface="Apple SD Gothic Neo"/>
-              </a:rPr>
-              <a:t>점검으로 찾아내 관리</a:t>
-            </a:r>
-          </a:p>
-        </p:txBody>
-      </p:sp>
-      <p:sp>
-        <p:nvSpPr>
-          <p:cNvPr id="13" name="Rounded Rectangle 12"/>
-          <p:cNvSpPr/>
-          <p:nvPr/>
-        </p:nvSpPr>
-        <p:spPr>
-          <a:xfrm>
-            <a:off x="6172200" y="3794760"/>
-            <a:ext cx="5212080" cy="1554480"/>
-          </a:xfrm>
-          <a:prstGeom prst="roundRect">
-            <a:avLst>
-              <a:gd name="adj" fmla="val 10000"/>
-            </a:avLst>
-          </a:prstGeom>
-          <a:solidFill>
-            <a:srgbClr val="F4F4F6"/>
-          </a:solidFill>
-          <a:ln w="12700">
-            <a:solidFill>
-              <a:srgbClr val="E6E6E6"/>
-            </a:solidFill>
-          </a:ln>
-          <a:effectLst/>
-        </p:spPr>
-        <p:style>
-          <a:lnRef idx="1">
-            <a:schemeClr val="accent1"/>
-          </a:lnRef>
-          <a:fillRef idx="3">
-            <a:schemeClr val="accent1"/>
-          </a:fillRef>
-          <a:effectRef idx="2">
-            <a:schemeClr val="accent1"/>
-          </a:effectRef>
-          <a:fontRef idx="minor">
-            <a:schemeClr val="lt1"/>
-          </a:fontRef>
-        </p:style>
-        <p:txBody>
-          <a:bodyPr rtlCol="0" anchor="ctr"/>
-          <a:lstStyle/>
-          <a:p>
-            <a:pPr algn="ctr"/>
-            <a:endParaRPr/>
-          </a:p>
-        </p:txBody>
-      </p:sp>
-      <p:sp>
-        <p:nvSpPr>
-          <p:cNvPr id="14" name="Rectangle 13"/>
-          <p:cNvSpPr/>
-          <p:nvPr/>
-        </p:nvSpPr>
-        <p:spPr>
-          <a:xfrm>
-            <a:off x="6172200" y="4023360"/>
-            <a:ext cx="109728" cy="1097280"/>
-          </a:xfrm>
-          <a:prstGeom prst="rect">
-            <a:avLst/>
-          </a:prstGeom>
-          <a:solidFill>
-            <a:srgbClr val="5B5BD6"/>
-          </a:solidFill>
-          <a:ln>
-            <a:noFill/>
-          </a:ln>
-          <a:effectLst/>
-        </p:spPr>
-        <p:style>
-          <a:lnRef idx="1">
-            <a:schemeClr val="accent1"/>
-          </a:lnRef>
-          <a:fillRef idx="3">
-            <a:schemeClr val="accent1"/>
-          </a:fillRef>
-          <a:effectRef idx="2">
-            <a:schemeClr val="accent1"/>
-          </a:effectRef>
-          <a:fontRef idx="minor">
-            <a:schemeClr val="lt1"/>
-          </a:fontRef>
-        </p:style>
-        <p:txBody>
-          <a:bodyPr rtlCol="0" anchor="ctr"/>
-          <a:lstStyle/>
-          <a:p>
-            <a:pPr algn="ctr"/>
-            <a:endParaRPr/>
-          </a:p>
-        </p:txBody>
-      </p:sp>
-      <p:sp>
-        <p:nvSpPr>
-          <p:cNvPr id="15" name="TextBox 14"/>
-          <p:cNvSpPr txBox="1"/>
-          <p:nvPr/>
-        </p:nvSpPr>
-        <p:spPr>
-          <a:xfrm>
-            <a:off x="6629400" y="3995928"/>
-            <a:ext cx="4572000" cy="1234440"/>
-          </a:xfrm>
-          <a:prstGeom prst="rect">
-            <a:avLst/>
-          </a:prstGeom>
-          <a:noFill/>
-        </p:spPr>
-        <p:txBody>
-          <a:bodyPr wrap="square" anchor="ctr">
-            <a:spAutoFit/>
-          </a:bodyPr>
-          <a:lstStyle/>
-          <a:p>
-            <a:pPr algn="l"/>
-            <a:r>
-              <a:rPr sz="2400" b="1" spc="-30">
-                <a:solidFill>
-                  <a:srgbClr val="1A1A1A"/>
-                </a:solidFill>
-                <a:latin typeface="Apple SD Gothic Neo"/>
-              </a:rPr>
-              <a:t>용어를 섞어 씀</a:t>
-            </a:r>
-          </a:p>
-          <a:p>
-            <a:pPr algn="l"/>
-            <a:r>
-              <a:rPr sz="1900" b="1" spc="-30">
-                <a:solidFill>
-                  <a:srgbClr val="6B7280"/>
-                </a:solidFill>
-                <a:latin typeface="Apple SD Gothic Neo"/>
-              </a:rPr>
-              <a:t>용어집으로 미리 차단</a:t>
-            </a:r>
-          </a:p>
-        </p:txBody>
-      </p:sp>
-      <p:sp>
-        <p:nvSpPr>
-          <p:cNvPr id="16" name="TextBox 15"/>
-          <p:cNvSpPr txBox="1"/>
-          <p:nvPr/>
-        </p:nvSpPr>
-        <p:spPr>
-          <a:xfrm>
-            <a:off x="777240" y="5623560"/>
-            <a:ext cx="10607040" cy="822960"/>
-          </a:xfrm>
-          <a:prstGeom prst="rect">
-            <a:avLst/>
-          </a:prstGeom>
-          <a:noFill/>
-        </p:spPr>
-        <p:txBody>
-          <a:bodyPr wrap="square" anchor="t">
-            <a:spAutoFit/>
-          </a:bodyPr>
-          <a:lstStyle/>
-          <a:p>
-            <a:pPr algn="ctr"/>
-            <a:r>
-              <a:rPr sz="2800" b="1" spc="-40">
-                <a:solidFill>
-                  <a:srgbClr val="1A1A1A"/>
-                </a:solidFill>
-                <a:latin typeface="Apple SD Gothic Neo"/>
-              </a:rPr>
-              <a:t>AI는 빠르지만, 방향은 사람이 잡았다.</a:t>
-            </a:r>
-          </a:p>
-        </p:txBody>
-      </p:sp>
-    </p:spTree>
-  </p:cSld>
-  <p:clrMapOvr>
-    <a:masterClrMapping/>
-  </p:clrMapOvr>
-</p:sld>
-</file>
-
 <file path=ppt/slides/slide28.xml><?xml version="1.0" encoding="utf-8"?>
 <p:sld xmlns:a="http://schemas.openxmlformats.org/drawingml/2006/main" xmlns:r="http://schemas.openxmlformats.org/officeDocument/2006/relationships" xmlns:p="http://schemas.openxmlformats.org/presentationml/2006/main">
   <p:cSld>
@@ -10954,6 +9490,269 @@
                 <a:latin typeface="Apple SD Gothic Neo"/>
               </a:rPr>
               <a:t>그 과정에서 AI를 통제했다.</a:t>
+            </a:r>
+          </a:p>
+        </p:txBody>
+      </p:sp>
+    </p:spTree>
+  </p:cSld>
+  <p:clrMapOvr>
+    <a:masterClrMapping/>
+  </p:clrMapOvr>
+</p:sld>
+</file>
+
+<file path=ppt/slides/slide29.xml><?xml version="1.0" encoding="utf-8"?>
+<p:sld xmlns:a="http://schemas.openxmlformats.org/drawingml/2006/main" xmlns:p="http://schemas.openxmlformats.org/presentationml/2006/main" xmlns:r="http://schemas.openxmlformats.org/officeDocument/2006/relationships">
+  <p:cSld>
+    <p:bg>
+      <p:bgPr>
+        <a:solidFill>
+          <a:srgbClr val="FFFFFF"/>
+        </a:solidFill>
+        <a:effectLst/>
+      </p:bgPr>
+    </p:bg>
+    <p:spTree>
+      <p:nvGrpSpPr>
+        <p:cNvPr id="1" name=""/>
+        <p:cNvGrpSpPr/>
+        <p:nvPr/>
+      </p:nvGrpSpPr>
+      <p:grpSpPr/>
+      <p:sp>
+        <p:nvSpPr>
+          <p:cNvPr id="2" name="TextBox 1"/>
+          <p:cNvSpPr txBox="1"/>
+          <p:nvPr/>
+        </p:nvSpPr>
+        <p:spPr>
+          <a:xfrm>
+            <a:off x="749808" y="566928"/>
+            <a:ext cx="10881360" cy="1371600"/>
+          </a:xfrm>
+          <a:prstGeom prst="rect">
+            <a:avLst/>
+          </a:prstGeom>
+          <a:noFill/>
+        </p:spPr>
+        <p:txBody>
+          <a:bodyPr wrap="square" anchor="t">
+            <a:spAutoFit/>
+          </a:bodyPr>
+          <a:lstStyle/>
+          <a:p>
+            <a:pPr algn="l"/>
+            <a:r>
+              <a:rPr sz="4600" b="1" spc="-100">
+                <a:solidFill>
+                  <a:srgbClr val="1A1A1A"/>
+                </a:solidFill>
+                <a:latin typeface="Apple SD Gothic Neo"/>
+              </a:rPr>
+              <a:t>사람과 AI의 분업</a:t>
+            </a:r>
+          </a:p>
+        </p:txBody>
+      </p:sp>
+      <p:sp>
+        <p:nvSpPr>
+          <p:cNvPr id="3" name="Rectangle 2"/>
+          <p:cNvSpPr/>
+          <p:nvPr/>
+        </p:nvSpPr>
+        <p:spPr>
+          <a:xfrm>
+            <a:off x="822960" y="1554480"/>
+            <a:ext cx="868680" cy="82296"/>
+          </a:xfrm>
+          <a:prstGeom prst="rect">
+            <a:avLst/>
+          </a:prstGeom>
+          <a:solidFill>
+            <a:srgbClr val="5B5BD6"/>
+          </a:solidFill>
+          <a:ln>
+            <a:noFill/>
+          </a:ln>
+          <a:effectLst/>
+        </p:spPr>
+        <p:style>
+          <a:lnRef idx="1">
+            <a:schemeClr val="accent1"/>
+          </a:lnRef>
+          <a:fillRef idx="3">
+            <a:schemeClr val="accent1"/>
+          </a:fillRef>
+          <a:effectRef idx="2">
+            <a:schemeClr val="accent1"/>
+          </a:effectRef>
+          <a:fontRef idx="minor">
+            <a:schemeClr val="lt1"/>
+          </a:fontRef>
+        </p:style>
+        <p:txBody>
+          <a:bodyPr rtlCol="0" anchor="ctr"/>
+          <a:lstStyle/>
+          <a:p>
+            <a:pPr algn="ctr"/>
+          </a:p>
+        </p:txBody>
+      </p:sp>
+      <p:sp>
+        <p:nvSpPr>
+          <p:cNvPr id="4" name="Rounded Rectangle 3"/>
+          <p:cNvSpPr/>
+          <p:nvPr/>
+        </p:nvSpPr>
+        <p:spPr>
+          <a:xfrm>
+            <a:off x="777240" y="2743200"/>
+            <a:ext cx="4800600" cy="1920240"/>
+          </a:xfrm>
+          <a:prstGeom prst="roundRect">
+            <a:avLst>
+              <a:gd name="adj" fmla="val 12000"/>
+            </a:avLst>
+          </a:prstGeom>
+          <a:solidFill>
+            <a:srgbClr val="ECEBFB"/>
+          </a:solidFill>
+          <a:ln>
+            <a:noFill/>
+          </a:ln>
+          <a:effectLst/>
+        </p:spPr>
+        <p:style>
+          <a:lnRef idx="1">
+            <a:schemeClr val="accent1"/>
+          </a:lnRef>
+          <a:fillRef idx="3">
+            <a:schemeClr val="accent1"/>
+          </a:fillRef>
+          <a:effectRef idx="2">
+            <a:schemeClr val="accent1"/>
+          </a:effectRef>
+          <a:fontRef idx="minor">
+            <a:schemeClr val="lt1"/>
+          </a:fontRef>
+        </p:style>
+        <p:txBody>
+          <a:bodyPr rtlCol="0" anchor="ctr" tIns="101600" bIns="101600" lIns="203200" rIns="203200" wrap="square"/>
+          <a:lstStyle/>
+          <a:p>
+            <a:pPr algn="l"/>
+            <a:r>
+              <a:rPr sz="1800" b="1">
+                <a:solidFill>
+                  <a:srgbClr val="5B5BD6"/>
+                </a:solidFill>
+                <a:latin typeface="Apple SD Gothic Neo"/>
+              </a:rPr>
+              <a:t>사람</a:t>
+            </a:r>
+          </a:p>
+          <a:p>
+            <a:pPr algn="l"/>
+            <a:r>
+              <a:rPr sz="600" b="0">
+                <a:solidFill>
+                  <a:srgbClr val="6B7280"/>
+                </a:solidFill>
+                <a:latin typeface="Apple SD Gothic Neo"/>
+              </a:rPr>
+              <a:t/>
+            </a:r>
+          </a:p>
+          <a:p>
+            <a:pPr algn="l"/>
+            <a:r>
+              <a:rPr sz="2100" b="1">
+                <a:solidFill>
+                  <a:srgbClr val="1A1A1A"/>
+                </a:solidFill>
+                <a:latin typeface="Apple SD Gothic Neo"/>
+              </a:rPr>
+              <a:t>설계 · 결정 · 취조</a:t>
+            </a:r>
+          </a:p>
+        </p:txBody>
+      </p:sp>
+      <p:sp>
+        <p:nvSpPr>
+          <p:cNvPr id="5" name="Rounded Rectangle 4"/>
+          <p:cNvSpPr/>
+          <p:nvPr/>
+        </p:nvSpPr>
+        <p:spPr>
+          <a:xfrm>
+            <a:off x="6629400" y="2743200"/>
+            <a:ext cx="4800600" cy="1920240"/>
+          </a:xfrm>
+          <a:prstGeom prst="roundRect">
+            <a:avLst>
+              <a:gd name="adj" fmla="val 12000"/>
+            </a:avLst>
+          </a:prstGeom>
+          <a:solidFill>
+            <a:srgbClr val="F7EDE6"/>
+          </a:solidFill>
+          <a:ln>
+            <a:noFill/>
+          </a:ln>
+          <a:effectLst/>
+        </p:spPr>
+        <p:style>
+          <a:lnRef idx="1">
+            <a:schemeClr val="accent1"/>
+          </a:lnRef>
+          <a:fillRef idx="3">
+            <a:schemeClr val="accent1"/>
+          </a:fillRef>
+          <a:effectRef idx="2">
+            <a:schemeClr val="accent1"/>
+          </a:effectRef>
+          <a:fontRef idx="minor">
+            <a:schemeClr val="lt1"/>
+          </a:fontRef>
+        </p:style>
+        <p:txBody>
+          <a:bodyPr rtlCol="0" anchor="ctr" tIns="101600" bIns="101600" lIns="203200" rIns="203200" wrap="square"/>
+          <a:lstStyle/>
+          <a:p>
+            <a:pPr algn="l"/>
+            <a:r>
+              <a:rPr sz="1800" b="1">
+                <a:solidFill>
+                  <a:srgbClr val="B5793A"/>
+                </a:solidFill>
+                <a:latin typeface="Apple SD Gothic Neo"/>
+              </a:rPr>
+              <a:t>AI</a:t>
+            </a:r>
+          </a:p>
+          <a:p>
+            <a:pPr algn="l"/>
+            <a:r>
+              <a:rPr sz="600" b="0">
+                <a:solidFill>
+                  <a:srgbClr val="6B7280"/>
+                </a:solidFill>
+                <a:latin typeface="Apple SD Gothic Neo"/>
+              </a:rPr>
+              <a:t/>
+            </a:r>
+          </a:p>
+          <a:p>
+            <a:pPr algn="l"/>
+            <a:r>
+              <a:rPr sz="2100" b="1">
+                <a:solidFill>
+                  <a:srgbClr val="1A1A1A"/>
+                </a:solidFill>
+                <a:latin typeface="Apple SD Gothic Neo"/>
+              </a:rPr>
+              <a:t>구현 · 테스트 · 리팩토링</a:t>
             </a:r>
           </a:p>
         </p:txBody>
@@ -11243,6 +10042,2425 @@
 </p:sld>
 </file>
 
+<file path=ppt/slides/slide30.xml><?xml version="1.0" encoding="utf-8"?>
+<p:sld xmlns:a="http://schemas.openxmlformats.org/drawingml/2006/main" xmlns:p="http://schemas.openxmlformats.org/presentationml/2006/main" xmlns:r="http://schemas.openxmlformats.org/officeDocument/2006/relationships">
+  <p:cSld>
+    <p:bg>
+      <p:bgPr>
+        <a:solidFill>
+          <a:srgbClr val="FFFFFF"/>
+        </a:solidFill>
+        <a:effectLst/>
+      </p:bgPr>
+    </p:bg>
+    <p:spTree>
+      <p:nvGrpSpPr>
+        <p:cNvPr id="1" name=""/>
+        <p:cNvGrpSpPr/>
+        <p:nvPr/>
+      </p:nvGrpSpPr>
+      <p:grpSpPr/>
+      <p:sp>
+        <p:nvSpPr>
+          <p:cNvPr id="2" name="TextBox 1"/>
+          <p:cNvSpPr txBox="1"/>
+          <p:nvPr/>
+        </p:nvSpPr>
+        <p:spPr>
+          <a:xfrm>
+            <a:off x="749808" y="566928"/>
+            <a:ext cx="10881360" cy="1371600"/>
+          </a:xfrm>
+          <a:prstGeom prst="rect">
+            <a:avLst/>
+          </a:prstGeom>
+          <a:noFill/>
+        </p:spPr>
+        <p:txBody>
+          <a:bodyPr wrap="square" anchor="t">
+            <a:spAutoFit/>
+          </a:bodyPr>
+          <a:lstStyle/>
+          <a:p>
+            <a:pPr algn="l"/>
+            <a:r>
+              <a:rPr sz="4600" b="1" spc="-100">
+                <a:solidFill>
+                  <a:srgbClr val="1A1A1A"/>
+                </a:solidFill>
+                <a:latin typeface="Apple SD Gothic Neo"/>
+              </a:rPr>
+              <a:t>AI를 어떻게 통제했나</a:t>
+            </a:r>
+          </a:p>
+        </p:txBody>
+      </p:sp>
+      <p:sp>
+        <p:nvSpPr>
+          <p:cNvPr id="3" name="Rectangle 2"/>
+          <p:cNvSpPr/>
+          <p:nvPr/>
+        </p:nvSpPr>
+        <p:spPr>
+          <a:xfrm>
+            <a:off x="822960" y="1554480"/>
+            <a:ext cx="868680" cy="82296"/>
+          </a:xfrm>
+          <a:prstGeom prst="rect">
+            <a:avLst/>
+          </a:prstGeom>
+          <a:solidFill>
+            <a:srgbClr val="5B5BD6"/>
+          </a:solidFill>
+          <a:ln>
+            <a:noFill/>
+          </a:ln>
+          <a:effectLst/>
+        </p:spPr>
+        <p:style>
+          <a:lnRef idx="1">
+            <a:schemeClr val="accent1"/>
+          </a:lnRef>
+          <a:fillRef idx="3">
+            <a:schemeClr val="accent1"/>
+          </a:fillRef>
+          <a:effectRef idx="2">
+            <a:schemeClr val="accent1"/>
+          </a:effectRef>
+          <a:fontRef idx="minor">
+            <a:schemeClr val="lt1"/>
+          </a:fontRef>
+        </p:style>
+        <p:txBody>
+          <a:bodyPr rtlCol="0" anchor="ctr"/>
+          <a:lstStyle/>
+          <a:p>
+            <a:pPr algn="ctr"/>
+          </a:p>
+        </p:txBody>
+      </p:sp>
+      <p:sp>
+        <p:nvSpPr>
+          <p:cNvPr id="4" name="TextBox 3"/>
+          <p:cNvSpPr txBox="1"/>
+          <p:nvPr/>
+        </p:nvSpPr>
+        <p:spPr>
+          <a:xfrm>
+            <a:off x="822960" y="2651760"/>
+            <a:ext cx="10607040" cy="1554480"/>
+          </a:xfrm>
+          <a:prstGeom prst="rect">
+            <a:avLst/>
+          </a:prstGeom>
+          <a:noFill/>
+        </p:spPr>
+        <p:txBody>
+          <a:bodyPr wrap="square" anchor="ctr">
+            <a:spAutoFit/>
+          </a:bodyPr>
+          <a:lstStyle/>
+          <a:p>
+            <a:pPr algn="ctr"/>
+            <a:r>
+              <a:rPr sz="3200" b="1" spc="-60">
+                <a:solidFill>
+                  <a:srgbClr val="1A1A1A"/>
+                </a:solidFill>
+                <a:latin typeface="Apple SD Gothic Neo"/>
+              </a:rPr>
+              <a:t>AI가 짠 설계를 다이어그램·유스케이스에
+대고 한 질문씩 캐물었다.</a:t>
+            </a:r>
+          </a:p>
+        </p:txBody>
+      </p:sp>
+      <p:sp>
+        <p:nvSpPr>
+          <p:cNvPr id="5" name="TextBox 4"/>
+          <p:cNvSpPr txBox="1"/>
+          <p:nvPr/>
+        </p:nvSpPr>
+        <p:spPr>
+          <a:xfrm>
+            <a:off x="822960" y="4434840"/>
+            <a:ext cx="10607040" cy="914400"/>
+          </a:xfrm>
+          <a:prstGeom prst="rect">
+            <a:avLst/>
+          </a:prstGeom>
+          <a:noFill/>
+        </p:spPr>
+        <p:txBody>
+          <a:bodyPr wrap="square" anchor="t">
+            <a:spAutoFit/>
+          </a:bodyPr>
+          <a:lstStyle/>
+          <a:p>
+            <a:pPr algn="ctr"/>
+            <a:r>
+              <a:rPr sz="2200" b="0" spc="-30">
+                <a:solidFill>
+                  <a:srgbClr val="6B7280"/>
+                </a:solidFill>
+                <a:latin typeface="Apple SD Gothic Neo"/>
+              </a:rPr>
+              <a:t>결정은 전부 사람이 내렸다.</a:t>
+            </a:r>
+          </a:p>
+        </p:txBody>
+      </p:sp>
+    </p:spTree>
+  </p:cSld>
+  <p:clrMapOvr>
+    <a:masterClrMapping/>
+  </p:clrMapOvr>
+</p:sld>
+</file>
+
+<file path=ppt/slides/slide31.xml><?xml version="1.0" encoding="utf-8"?>
+<p:sld xmlns:a="http://schemas.openxmlformats.org/drawingml/2006/main" xmlns:p="http://schemas.openxmlformats.org/presentationml/2006/main" xmlns:r="http://schemas.openxmlformats.org/officeDocument/2006/relationships">
+  <p:cSld>
+    <p:bg>
+      <p:bgPr>
+        <a:solidFill>
+          <a:srgbClr val="FFFFFF"/>
+        </a:solidFill>
+        <a:effectLst/>
+      </p:bgPr>
+    </p:bg>
+    <p:spTree>
+      <p:nvGrpSpPr>
+        <p:cNvPr id="1" name=""/>
+        <p:cNvGrpSpPr/>
+        <p:nvPr/>
+      </p:nvGrpSpPr>
+      <p:grpSpPr/>
+      <p:sp>
+        <p:nvSpPr>
+          <p:cNvPr id="2" name="TextBox 1"/>
+          <p:cNvSpPr txBox="1"/>
+          <p:nvPr/>
+        </p:nvSpPr>
+        <p:spPr>
+          <a:xfrm>
+            <a:off x="749808" y="566928"/>
+            <a:ext cx="10881360" cy="1371600"/>
+          </a:xfrm>
+          <a:prstGeom prst="rect">
+            <a:avLst/>
+          </a:prstGeom>
+          <a:noFill/>
+        </p:spPr>
+        <p:txBody>
+          <a:bodyPr wrap="square" anchor="t">
+            <a:spAutoFit/>
+          </a:bodyPr>
+          <a:lstStyle/>
+          <a:p>
+            <a:pPr algn="l"/>
+            <a:r>
+              <a:rPr sz="4600" b="1" spc="-100">
+                <a:solidFill>
+                  <a:srgbClr val="1A1A1A"/>
+                </a:solidFill>
+                <a:latin typeface="Apple SD Gothic Neo"/>
+              </a:rPr>
+              <a:t>취조 ① — 빠뜨린 걸 잡다</a:t>
+            </a:r>
+          </a:p>
+        </p:txBody>
+      </p:sp>
+      <p:sp>
+        <p:nvSpPr>
+          <p:cNvPr id="3" name="Rectangle 2"/>
+          <p:cNvSpPr/>
+          <p:nvPr/>
+        </p:nvSpPr>
+        <p:spPr>
+          <a:xfrm>
+            <a:off x="822960" y="1554480"/>
+            <a:ext cx="868680" cy="82296"/>
+          </a:xfrm>
+          <a:prstGeom prst="rect">
+            <a:avLst/>
+          </a:prstGeom>
+          <a:solidFill>
+            <a:srgbClr val="5B5BD6"/>
+          </a:solidFill>
+          <a:ln>
+            <a:noFill/>
+          </a:ln>
+          <a:effectLst/>
+        </p:spPr>
+        <p:style>
+          <a:lnRef idx="1">
+            <a:schemeClr val="accent1"/>
+          </a:lnRef>
+          <a:fillRef idx="3">
+            <a:schemeClr val="accent1"/>
+          </a:fillRef>
+          <a:effectRef idx="2">
+            <a:schemeClr val="accent1"/>
+          </a:effectRef>
+          <a:fontRef idx="minor">
+            <a:schemeClr val="lt1"/>
+          </a:fontRef>
+        </p:style>
+        <p:txBody>
+          <a:bodyPr rtlCol="0" anchor="ctr"/>
+          <a:lstStyle/>
+          <a:p>
+            <a:pPr algn="ctr"/>
+          </a:p>
+        </p:txBody>
+      </p:sp>
+      <p:sp>
+        <p:nvSpPr>
+          <p:cNvPr id="4" name="Rounded Rectangle 3"/>
+          <p:cNvSpPr/>
+          <p:nvPr/>
+        </p:nvSpPr>
+        <p:spPr>
+          <a:xfrm>
+            <a:off x="777240" y="2743200"/>
+            <a:ext cx="4800600" cy="1920240"/>
+          </a:xfrm>
+          <a:prstGeom prst="roundRect">
+            <a:avLst>
+              <a:gd name="adj" fmla="val 12000"/>
+            </a:avLst>
+          </a:prstGeom>
+          <a:solidFill>
+            <a:srgbClr val="F4F4F6"/>
+          </a:solidFill>
+          <a:ln w="16510">
+            <a:solidFill>
+              <a:srgbClr val="E6E6E6"/>
+            </a:solidFill>
+          </a:ln>
+          <a:effectLst/>
+        </p:spPr>
+        <p:style>
+          <a:lnRef idx="1">
+            <a:schemeClr val="accent1"/>
+          </a:lnRef>
+          <a:fillRef idx="3">
+            <a:schemeClr val="accent1"/>
+          </a:fillRef>
+          <a:effectRef idx="2">
+            <a:schemeClr val="accent1"/>
+          </a:effectRef>
+          <a:fontRef idx="minor">
+            <a:schemeClr val="lt1"/>
+          </a:fontRef>
+        </p:style>
+        <p:txBody>
+          <a:bodyPr rtlCol="0" anchor="ctr" tIns="101600" bIns="101600" lIns="203200" rIns="203200" wrap="square"/>
+          <a:lstStyle/>
+          <a:p>
+            <a:pPr algn="l"/>
+            <a:r>
+              <a:rPr sz="1600" b="1">
+                <a:solidFill>
+                  <a:srgbClr val="6B7280"/>
+                </a:solidFill>
+                <a:latin typeface="Apple SD Gothic Neo"/>
+              </a:rPr>
+              <a:t>AI가 한 것</a:t>
+            </a:r>
+          </a:p>
+          <a:p>
+            <a:pPr algn="l"/>
+            <a:r>
+              <a:rPr sz="600" b="0">
+                <a:solidFill>
+                  <a:srgbClr val="6B7280"/>
+                </a:solidFill>
+                <a:latin typeface="Apple SD Gothic Neo"/>
+              </a:rPr>
+              <a:t/>
+            </a:r>
+          </a:p>
+          <a:p>
+            <a:pPr algn="l"/>
+            <a:r>
+              <a:rPr sz="2100" b="1">
+                <a:solidFill>
+                  <a:srgbClr val="1A1A1A"/>
+                </a:solidFill>
+                <a:latin typeface="Apple SD Gothic Neo"/>
+              </a:rPr>
+              <a:t>유스케이스 17개에
+'회원가입'이 없었다</a:t>
+            </a:r>
+          </a:p>
+        </p:txBody>
+      </p:sp>
+      <p:sp>
+        <p:nvSpPr>
+          <p:cNvPr id="5" name="TextBox 4"/>
+          <p:cNvSpPr txBox="1"/>
+          <p:nvPr/>
+        </p:nvSpPr>
+        <p:spPr>
+          <a:xfrm>
+            <a:off x="5733288" y="3383280"/>
+            <a:ext cx="731520" cy="640080"/>
+          </a:xfrm>
+          <a:prstGeom prst="rect">
+            <a:avLst/>
+          </a:prstGeom>
+          <a:noFill/>
+        </p:spPr>
+        <p:txBody>
+          <a:bodyPr wrap="square" anchor="ctr">
+            <a:spAutoFit/>
+          </a:bodyPr>
+          <a:lstStyle/>
+          <a:p>
+            <a:pPr algn="ctr"/>
+            <a:r>
+              <a:rPr sz="3400" b="1">
+                <a:solidFill>
+                  <a:srgbClr val="5B5BD6"/>
+                </a:solidFill>
+                <a:latin typeface="Apple SD Gothic Neo"/>
+              </a:rPr>
+              <a:t>→</a:t>
+            </a:r>
+          </a:p>
+        </p:txBody>
+      </p:sp>
+      <p:sp>
+        <p:nvSpPr>
+          <p:cNvPr id="6" name="Rounded Rectangle 5"/>
+          <p:cNvSpPr/>
+          <p:nvPr/>
+        </p:nvSpPr>
+        <p:spPr>
+          <a:xfrm>
+            <a:off x="6629400" y="2743200"/>
+            <a:ext cx="4800600" cy="1920240"/>
+          </a:xfrm>
+          <a:prstGeom prst="roundRect">
+            <a:avLst>
+              <a:gd name="adj" fmla="val 12000"/>
+            </a:avLst>
+          </a:prstGeom>
+          <a:solidFill>
+            <a:srgbClr val="ECEBFB"/>
+          </a:solidFill>
+          <a:ln>
+            <a:noFill/>
+          </a:ln>
+          <a:effectLst/>
+        </p:spPr>
+        <p:style>
+          <a:lnRef idx="1">
+            <a:schemeClr val="accent1"/>
+          </a:lnRef>
+          <a:fillRef idx="3">
+            <a:schemeClr val="accent1"/>
+          </a:fillRef>
+          <a:effectRef idx="2">
+            <a:schemeClr val="accent1"/>
+          </a:effectRef>
+          <a:fontRef idx="minor">
+            <a:schemeClr val="lt1"/>
+          </a:fontRef>
+        </p:style>
+        <p:txBody>
+          <a:bodyPr rtlCol="0" anchor="ctr" tIns="101600" bIns="101600" lIns="203200" rIns="203200" wrap="square"/>
+          <a:lstStyle/>
+          <a:p>
+            <a:pPr algn="l"/>
+            <a:r>
+              <a:rPr sz="1600" b="1">
+                <a:solidFill>
+                  <a:srgbClr val="5B5BD6"/>
+                </a:solidFill>
+                <a:latin typeface="Apple SD Gothic Neo"/>
+              </a:rPr>
+              <a:t>내가 통제</a:t>
+            </a:r>
+          </a:p>
+          <a:p>
+            <a:pPr algn="l"/>
+            <a:r>
+              <a:rPr sz="600" b="0">
+                <a:solidFill>
+                  <a:srgbClr val="6B7280"/>
+                </a:solidFill>
+                <a:latin typeface="Apple SD Gothic Neo"/>
+              </a:rPr>
+              <a:t/>
+            </a:r>
+          </a:p>
+          <a:p>
+            <a:pPr algn="l"/>
+            <a:r>
+              <a:rPr sz="2100" b="1">
+                <a:solidFill>
+                  <a:srgbClr val="1A1A1A"/>
+                </a:solidFill>
+                <a:latin typeface="Apple SD Gothic Neo"/>
+              </a:rPr>
+              <a:t>회원가입을 명시적으로
+추가하기로 결정</a:t>
+            </a:r>
+          </a:p>
+        </p:txBody>
+      </p:sp>
+    </p:spTree>
+  </p:cSld>
+  <p:clrMapOvr>
+    <a:masterClrMapping/>
+  </p:clrMapOvr>
+</p:sld>
+</file>
+
+<file path=ppt/slides/slide32.xml><?xml version="1.0" encoding="utf-8"?>
+<p:sld xmlns:a="http://schemas.openxmlformats.org/drawingml/2006/main" xmlns:p="http://schemas.openxmlformats.org/presentationml/2006/main" xmlns:r="http://schemas.openxmlformats.org/officeDocument/2006/relationships">
+  <p:cSld>
+    <p:bg>
+      <p:bgPr>
+        <a:solidFill>
+          <a:srgbClr val="FFFFFF"/>
+        </a:solidFill>
+        <a:effectLst/>
+      </p:bgPr>
+    </p:bg>
+    <p:spTree>
+      <p:nvGrpSpPr>
+        <p:cNvPr id="1" name=""/>
+        <p:cNvGrpSpPr/>
+        <p:nvPr/>
+      </p:nvGrpSpPr>
+      <p:grpSpPr/>
+      <p:sp>
+        <p:nvSpPr>
+          <p:cNvPr id="2" name="TextBox 1"/>
+          <p:cNvSpPr txBox="1"/>
+          <p:nvPr/>
+        </p:nvSpPr>
+        <p:spPr>
+          <a:xfrm>
+            <a:off x="749808" y="566928"/>
+            <a:ext cx="10881360" cy="1371600"/>
+          </a:xfrm>
+          <a:prstGeom prst="rect">
+            <a:avLst/>
+          </a:prstGeom>
+          <a:noFill/>
+        </p:spPr>
+        <p:txBody>
+          <a:bodyPr wrap="square" anchor="t">
+            <a:spAutoFit/>
+          </a:bodyPr>
+          <a:lstStyle/>
+          <a:p>
+            <a:pPr algn="l"/>
+            <a:r>
+              <a:rPr sz="4600" b="1" spc="-100">
+                <a:solidFill>
+                  <a:srgbClr val="1A1A1A"/>
+                </a:solidFill>
+                <a:latin typeface="Apple SD Gothic Neo"/>
+              </a:rPr>
+              <a:t>취조 ② — 흔들리는 용어를 잡다</a:t>
+            </a:r>
+          </a:p>
+        </p:txBody>
+      </p:sp>
+      <p:sp>
+        <p:nvSpPr>
+          <p:cNvPr id="3" name="Rectangle 2"/>
+          <p:cNvSpPr/>
+          <p:nvPr/>
+        </p:nvSpPr>
+        <p:spPr>
+          <a:xfrm>
+            <a:off x="822960" y="1554480"/>
+            <a:ext cx="868680" cy="82296"/>
+          </a:xfrm>
+          <a:prstGeom prst="rect">
+            <a:avLst/>
+          </a:prstGeom>
+          <a:solidFill>
+            <a:srgbClr val="5B5BD6"/>
+          </a:solidFill>
+          <a:ln>
+            <a:noFill/>
+          </a:ln>
+          <a:effectLst/>
+        </p:spPr>
+        <p:style>
+          <a:lnRef idx="1">
+            <a:schemeClr val="accent1"/>
+          </a:lnRef>
+          <a:fillRef idx="3">
+            <a:schemeClr val="accent1"/>
+          </a:fillRef>
+          <a:effectRef idx="2">
+            <a:schemeClr val="accent1"/>
+          </a:effectRef>
+          <a:fontRef idx="minor">
+            <a:schemeClr val="lt1"/>
+          </a:fontRef>
+        </p:style>
+        <p:txBody>
+          <a:bodyPr rtlCol="0" anchor="ctr"/>
+          <a:lstStyle/>
+          <a:p>
+            <a:pPr algn="ctr"/>
+          </a:p>
+        </p:txBody>
+      </p:sp>
+      <p:sp>
+        <p:nvSpPr>
+          <p:cNvPr id="4" name="Rounded Rectangle 3"/>
+          <p:cNvSpPr/>
+          <p:nvPr/>
+        </p:nvSpPr>
+        <p:spPr>
+          <a:xfrm>
+            <a:off x="777240" y="2743200"/>
+            <a:ext cx="4800600" cy="1920240"/>
+          </a:xfrm>
+          <a:prstGeom prst="roundRect">
+            <a:avLst>
+              <a:gd name="adj" fmla="val 12000"/>
+            </a:avLst>
+          </a:prstGeom>
+          <a:solidFill>
+            <a:srgbClr val="F4F4F6"/>
+          </a:solidFill>
+          <a:ln w="16510">
+            <a:solidFill>
+              <a:srgbClr val="E6E6E6"/>
+            </a:solidFill>
+          </a:ln>
+          <a:effectLst/>
+        </p:spPr>
+        <p:style>
+          <a:lnRef idx="1">
+            <a:schemeClr val="accent1"/>
+          </a:lnRef>
+          <a:fillRef idx="3">
+            <a:schemeClr val="accent1"/>
+          </a:fillRef>
+          <a:effectRef idx="2">
+            <a:schemeClr val="accent1"/>
+          </a:effectRef>
+          <a:fontRef idx="minor">
+            <a:schemeClr val="lt1"/>
+          </a:fontRef>
+        </p:style>
+        <p:txBody>
+          <a:bodyPr rtlCol="0" anchor="ctr" tIns="101600" bIns="101600" lIns="203200" rIns="203200" wrap="square"/>
+          <a:lstStyle/>
+          <a:p>
+            <a:pPr algn="l"/>
+            <a:r>
+              <a:rPr sz="1600" b="1">
+                <a:solidFill>
+                  <a:srgbClr val="6B7280"/>
+                </a:solidFill>
+                <a:latin typeface="Apple SD Gothic Neo"/>
+              </a:rPr>
+              <a:t>AI가 한 것</a:t>
+            </a:r>
+          </a:p>
+          <a:p>
+            <a:pPr algn="l"/>
+            <a:r>
+              <a:rPr sz="600" b="0">
+                <a:solidFill>
+                  <a:srgbClr val="6B7280"/>
+                </a:solidFill>
+                <a:latin typeface="Apple SD Gothic Neo"/>
+              </a:rPr>
+              <a:t/>
+            </a:r>
+          </a:p>
+          <a:p>
+            <a:pPr algn="l"/>
+            <a:r>
+              <a:rPr sz="2100" b="1">
+                <a:solidFill>
+                  <a:srgbClr val="1A1A1A"/>
+                </a:solidFill>
+                <a:latin typeface="Apple SD Gothic Neo"/>
+              </a:rPr>
+              <a:t>같은 사람을 Policyholder·
+account·user로 섞어 부름</a:t>
+            </a:r>
+          </a:p>
+        </p:txBody>
+      </p:sp>
+      <p:sp>
+        <p:nvSpPr>
+          <p:cNvPr id="5" name="TextBox 4"/>
+          <p:cNvSpPr txBox="1"/>
+          <p:nvPr/>
+        </p:nvSpPr>
+        <p:spPr>
+          <a:xfrm>
+            <a:off x="5733288" y="3383280"/>
+            <a:ext cx="731520" cy="640080"/>
+          </a:xfrm>
+          <a:prstGeom prst="rect">
+            <a:avLst/>
+          </a:prstGeom>
+          <a:noFill/>
+        </p:spPr>
+        <p:txBody>
+          <a:bodyPr wrap="square" anchor="ctr">
+            <a:spAutoFit/>
+          </a:bodyPr>
+          <a:lstStyle/>
+          <a:p>
+            <a:pPr algn="ctr"/>
+            <a:r>
+              <a:rPr sz="3400" b="1">
+                <a:solidFill>
+                  <a:srgbClr val="5B5BD6"/>
+                </a:solidFill>
+                <a:latin typeface="Apple SD Gothic Neo"/>
+              </a:rPr>
+              <a:t>→</a:t>
+            </a:r>
+          </a:p>
+        </p:txBody>
+      </p:sp>
+      <p:sp>
+        <p:nvSpPr>
+          <p:cNvPr id="6" name="Rounded Rectangle 5"/>
+          <p:cNvSpPr/>
+          <p:nvPr/>
+        </p:nvSpPr>
+        <p:spPr>
+          <a:xfrm>
+            <a:off x="6629400" y="2743200"/>
+            <a:ext cx="4800600" cy="1920240"/>
+          </a:xfrm>
+          <a:prstGeom prst="roundRect">
+            <a:avLst>
+              <a:gd name="adj" fmla="val 12000"/>
+            </a:avLst>
+          </a:prstGeom>
+          <a:solidFill>
+            <a:srgbClr val="ECEBFB"/>
+          </a:solidFill>
+          <a:ln>
+            <a:noFill/>
+          </a:ln>
+          <a:effectLst/>
+        </p:spPr>
+        <p:style>
+          <a:lnRef idx="1">
+            <a:schemeClr val="accent1"/>
+          </a:lnRef>
+          <a:fillRef idx="3">
+            <a:schemeClr val="accent1"/>
+          </a:fillRef>
+          <a:effectRef idx="2">
+            <a:schemeClr val="accent1"/>
+          </a:effectRef>
+          <a:fontRef idx="minor">
+            <a:schemeClr val="lt1"/>
+          </a:fontRef>
+        </p:style>
+        <p:txBody>
+          <a:bodyPr rtlCol="0" anchor="ctr" tIns="101600" bIns="101600" lIns="203200" rIns="203200" wrap="square"/>
+          <a:lstStyle/>
+          <a:p>
+            <a:pPr algn="l"/>
+            <a:r>
+              <a:rPr sz="1600" b="1">
+                <a:solidFill>
+                  <a:srgbClr val="5B5BD6"/>
+                </a:solidFill>
+                <a:latin typeface="Apple SD Gothic Neo"/>
+              </a:rPr>
+              <a:t>내가 통제</a:t>
+            </a:r>
+          </a:p>
+          <a:p>
+            <a:pPr algn="l"/>
+            <a:r>
+              <a:rPr sz="600" b="0">
+                <a:solidFill>
+                  <a:srgbClr val="6B7280"/>
+                </a:solidFill>
+                <a:latin typeface="Apple SD Gothic Neo"/>
+              </a:rPr>
+              <a:t/>
+            </a:r>
+          </a:p>
+          <a:p>
+            <a:pPr algn="l"/>
+            <a:r>
+              <a:rPr sz="2100" b="1">
+                <a:solidFill>
+                  <a:srgbClr val="1A1A1A"/>
+                </a:solidFill>
+                <a:latin typeface="Apple SD Gothic Neo"/>
+              </a:rPr>
+              <a:t>CONTEXT.md에
+표준어 하나로 못박음</a:t>
+            </a:r>
+          </a:p>
+        </p:txBody>
+      </p:sp>
+    </p:spTree>
+  </p:cSld>
+  <p:clrMapOvr>
+    <a:masterClrMapping/>
+  </p:clrMapOvr>
+</p:sld>
+</file>
+
+<file path=ppt/slides/slide33.xml><?xml version="1.0" encoding="utf-8"?>
+<p:sld xmlns:a="http://schemas.openxmlformats.org/drawingml/2006/main" xmlns:p="http://schemas.openxmlformats.org/presentationml/2006/main" xmlns:r="http://schemas.openxmlformats.org/officeDocument/2006/relationships">
+  <p:cSld>
+    <p:bg>
+      <p:bgPr>
+        <a:solidFill>
+          <a:srgbClr val="FFFFFF"/>
+        </a:solidFill>
+        <a:effectLst/>
+      </p:bgPr>
+    </p:bg>
+    <p:spTree>
+      <p:nvGrpSpPr>
+        <p:cNvPr id="1" name=""/>
+        <p:cNvGrpSpPr/>
+        <p:nvPr/>
+      </p:nvGrpSpPr>
+      <p:grpSpPr/>
+      <p:sp>
+        <p:nvSpPr>
+          <p:cNvPr id="2" name="TextBox 1"/>
+          <p:cNvSpPr txBox="1"/>
+          <p:nvPr/>
+        </p:nvSpPr>
+        <p:spPr>
+          <a:xfrm>
+            <a:off x="749808" y="566928"/>
+            <a:ext cx="10881360" cy="1371600"/>
+          </a:xfrm>
+          <a:prstGeom prst="rect">
+            <a:avLst/>
+          </a:prstGeom>
+          <a:noFill/>
+        </p:spPr>
+        <p:txBody>
+          <a:bodyPr wrap="square" anchor="t">
+            <a:spAutoFit/>
+          </a:bodyPr>
+          <a:lstStyle/>
+          <a:p>
+            <a:pPr algn="l"/>
+            <a:r>
+              <a:rPr sz="4600" b="1" spc="-100">
+                <a:solidFill>
+                  <a:srgbClr val="1A1A1A"/>
+                </a:solidFill>
+                <a:latin typeface="Apple SD Gothic Neo"/>
+              </a:rPr>
+              <a:t>취조 ③ — 과한 구현을 막다</a:t>
+            </a:r>
+          </a:p>
+        </p:txBody>
+      </p:sp>
+      <p:sp>
+        <p:nvSpPr>
+          <p:cNvPr id="3" name="Rectangle 2"/>
+          <p:cNvSpPr/>
+          <p:nvPr/>
+        </p:nvSpPr>
+        <p:spPr>
+          <a:xfrm>
+            <a:off x="822960" y="1554480"/>
+            <a:ext cx="868680" cy="82296"/>
+          </a:xfrm>
+          <a:prstGeom prst="rect">
+            <a:avLst/>
+          </a:prstGeom>
+          <a:solidFill>
+            <a:srgbClr val="5B5BD6"/>
+          </a:solidFill>
+          <a:ln>
+            <a:noFill/>
+          </a:ln>
+          <a:effectLst/>
+        </p:spPr>
+        <p:style>
+          <a:lnRef idx="1">
+            <a:schemeClr val="accent1"/>
+          </a:lnRef>
+          <a:fillRef idx="3">
+            <a:schemeClr val="accent1"/>
+          </a:fillRef>
+          <a:effectRef idx="2">
+            <a:schemeClr val="accent1"/>
+          </a:effectRef>
+          <a:fontRef idx="minor">
+            <a:schemeClr val="lt1"/>
+          </a:fontRef>
+        </p:style>
+        <p:txBody>
+          <a:bodyPr rtlCol="0" anchor="ctr"/>
+          <a:lstStyle/>
+          <a:p>
+            <a:pPr algn="ctr"/>
+          </a:p>
+        </p:txBody>
+      </p:sp>
+      <p:sp>
+        <p:nvSpPr>
+          <p:cNvPr id="4" name="Rounded Rectangle 3"/>
+          <p:cNvSpPr/>
+          <p:nvPr/>
+        </p:nvSpPr>
+        <p:spPr>
+          <a:xfrm>
+            <a:off x="777240" y="2743200"/>
+            <a:ext cx="4800600" cy="1920240"/>
+          </a:xfrm>
+          <a:prstGeom prst="roundRect">
+            <a:avLst>
+              <a:gd name="adj" fmla="val 12000"/>
+            </a:avLst>
+          </a:prstGeom>
+          <a:solidFill>
+            <a:srgbClr val="F4F4F6"/>
+          </a:solidFill>
+          <a:ln w="16510">
+            <a:solidFill>
+              <a:srgbClr val="E6E6E6"/>
+            </a:solidFill>
+          </a:ln>
+          <a:effectLst/>
+        </p:spPr>
+        <p:style>
+          <a:lnRef idx="1">
+            <a:schemeClr val="accent1"/>
+          </a:lnRef>
+          <a:fillRef idx="3">
+            <a:schemeClr val="accent1"/>
+          </a:fillRef>
+          <a:effectRef idx="2">
+            <a:schemeClr val="accent1"/>
+          </a:effectRef>
+          <a:fontRef idx="minor">
+            <a:schemeClr val="lt1"/>
+          </a:fontRef>
+        </p:style>
+        <p:txBody>
+          <a:bodyPr rtlCol="0" anchor="ctr" tIns="101600" bIns="101600" lIns="203200" rIns="203200" wrap="square"/>
+          <a:lstStyle/>
+          <a:p>
+            <a:pPr algn="l"/>
+            <a:r>
+              <a:rPr sz="1600" b="1">
+                <a:solidFill>
+                  <a:srgbClr val="6B7280"/>
+                </a:solidFill>
+                <a:latin typeface="Apple SD Gothic Neo"/>
+              </a:rPr>
+              <a:t>AI가 한 것</a:t>
+            </a:r>
+          </a:p>
+          <a:p>
+            <a:pPr algn="l"/>
+            <a:r>
+              <a:rPr sz="600" b="0">
+                <a:solidFill>
+                  <a:srgbClr val="6B7280"/>
+                </a:solidFill>
+                <a:latin typeface="Apple SD Gothic Neo"/>
+              </a:rPr>
+              <a:t/>
+            </a:r>
+          </a:p>
+          <a:p>
+            <a:pPr algn="l"/>
+            <a:r>
+              <a:rPr sz="2100" b="1">
+                <a:solidFill>
+                  <a:srgbClr val="1A1A1A"/>
+                </a:solidFill>
+                <a:latin typeface="Apple SD Gothic Neo"/>
+              </a:rPr>
+              <a:t>보험료를 '맞춤 계산'까지
+만들려 함</a:t>
+            </a:r>
+          </a:p>
+        </p:txBody>
+      </p:sp>
+      <p:sp>
+        <p:nvSpPr>
+          <p:cNvPr id="5" name="TextBox 4"/>
+          <p:cNvSpPr txBox="1"/>
+          <p:nvPr/>
+        </p:nvSpPr>
+        <p:spPr>
+          <a:xfrm>
+            <a:off x="5733288" y="3383280"/>
+            <a:ext cx="731520" cy="640080"/>
+          </a:xfrm>
+          <a:prstGeom prst="rect">
+            <a:avLst/>
+          </a:prstGeom>
+          <a:noFill/>
+        </p:spPr>
+        <p:txBody>
+          <a:bodyPr wrap="square" anchor="ctr">
+            <a:spAutoFit/>
+          </a:bodyPr>
+          <a:lstStyle/>
+          <a:p>
+            <a:pPr algn="ctr"/>
+            <a:r>
+              <a:rPr sz="3400" b="1">
+                <a:solidFill>
+                  <a:srgbClr val="5B5BD6"/>
+                </a:solidFill>
+                <a:latin typeface="Apple SD Gothic Neo"/>
+              </a:rPr>
+              <a:t>→</a:t>
+            </a:r>
+          </a:p>
+        </p:txBody>
+      </p:sp>
+      <p:sp>
+        <p:nvSpPr>
+          <p:cNvPr id="6" name="Rounded Rectangle 5"/>
+          <p:cNvSpPr/>
+          <p:nvPr/>
+        </p:nvSpPr>
+        <p:spPr>
+          <a:xfrm>
+            <a:off x="6629400" y="2743200"/>
+            <a:ext cx="4800600" cy="1920240"/>
+          </a:xfrm>
+          <a:prstGeom prst="roundRect">
+            <a:avLst>
+              <a:gd name="adj" fmla="val 12000"/>
+            </a:avLst>
+          </a:prstGeom>
+          <a:solidFill>
+            <a:srgbClr val="ECEBFB"/>
+          </a:solidFill>
+          <a:ln>
+            <a:noFill/>
+          </a:ln>
+          <a:effectLst/>
+        </p:spPr>
+        <p:style>
+          <a:lnRef idx="1">
+            <a:schemeClr val="accent1"/>
+          </a:lnRef>
+          <a:fillRef idx="3">
+            <a:schemeClr val="accent1"/>
+          </a:fillRef>
+          <a:effectRef idx="2">
+            <a:schemeClr val="accent1"/>
+          </a:effectRef>
+          <a:fontRef idx="minor">
+            <a:schemeClr val="lt1"/>
+          </a:fontRef>
+        </p:style>
+        <p:txBody>
+          <a:bodyPr rtlCol="0" anchor="ctr" tIns="101600" bIns="101600" lIns="203200" rIns="203200" wrap="square"/>
+          <a:lstStyle/>
+          <a:p>
+            <a:pPr algn="l"/>
+            <a:r>
+              <a:rPr sz="1600" b="1">
+                <a:solidFill>
+                  <a:srgbClr val="5B5BD6"/>
+                </a:solidFill>
+                <a:latin typeface="Apple SD Gothic Neo"/>
+              </a:rPr>
+              <a:t>내가 통제</a:t>
+            </a:r>
+          </a:p>
+          <a:p>
+            <a:pPr algn="l"/>
+            <a:r>
+              <a:rPr sz="600" b="0">
+                <a:solidFill>
+                  <a:srgbClr val="6B7280"/>
+                </a:solidFill>
+                <a:latin typeface="Apple SD Gothic Neo"/>
+              </a:rPr>
+              <a:t/>
+            </a:r>
+          </a:p>
+          <a:p>
+            <a:pPr algn="l"/>
+            <a:r>
+              <a:rPr sz="2100" b="1">
+                <a:solidFill>
+                  <a:srgbClr val="1A1A1A"/>
+                </a:solidFill>
+                <a:latin typeface="Apple SD Gothic Neo"/>
+              </a:rPr>
+              <a:t>유스케이스 범위(예시만)로
+되돌림</a:t>
+            </a:r>
+          </a:p>
+        </p:txBody>
+      </p:sp>
+    </p:spTree>
+  </p:cSld>
+  <p:clrMapOvr>
+    <a:masterClrMapping/>
+  </p:clrMapOvr>
+</p:sld>
+</file>
+
+<file path=ppt/slides/slide34.xml><?xml version="1.0" encoding="utf-8"?>
+<p:sld xmlns:a="http://schemas.openxmlformats.org/drawingml/2006/main" xmlns:p="http://schemas.openxmlformats.org/presentationml/2006/main" xmlns:r="http://schemas.openxmlformats.org/officeDocument/2006/relationships">
+  <p:cSld>
+    <p:bg>
+      <p:bgPr>
+        <a:solidFill>
+          <a:srgbClr val="FFFFFF"/>
+        </a:solidFill>
+        <a:effectLst/>
+      </p:bgPr>
+    </p:bg>
+    <p:spTree>
+      <p:nvGrpSpPr>
+        <p:cNvPr id="1" name=""/>
+        <p:cNvGrpSpPr/>
+        <p:nvPr/>
+      </p:nvGrpSpPr>
+      <p:grpSpPr/>
+      <p:sp>
+        <p:nvSpPr>
+          <p:cNvPr id="2" name="TextBox 1"/>
+          <p:cNvSpPr txBox="1"/>
+          <p:nvPr/>
+        </p:nvSpPr>
+        <p:spPr>
+          <a:xfrm>
+            <a:off x="749808" y="566928"/>
+            <a:ext cx="10881360" cy="1371600"/>
+          </a:xfrm>
+          <a:prstGeom prst="rect">
+            <a:avLst/>
+          </a:prstGeom>
+          <a:noFill/>
+        </p:spPr>
+        <p:txBody>
+          <a:bodyPr wrap="square" anchor="t">
+            <a:spAutoFit/>
+          </a:bodyPr>
+          <a:lstStyle/>
+          <a:p>
+            <a:pPr algn="l"/>
+            <a:r>
+              <a:rPr sz="4600" b="1" spc="-100">
+                <a:solidFill>
+                  <a:srgbClr val="1A1A1A"/>
+                </a:solidFill>
+                <a:latin typeface="Apple SD Gothic Neo"/>
+              </a:rPr>
+              <a:t>취조 ④ — 멋대로 늘린 걸 막다</a:t>
+            </a:r>
+          </a:p>
+        </p:txBody>
+      </p:sp>
+      <p:sp>
+        <p:nvSpPr>
+          <p:cNvPr id="3" name="Rectangle 2"/>
+          <p:cNvSpPr/>
+          <p:nvPr/>
+        </p:nvSpPr>
+        <p:spPr>
+          <a:xfrm>
+            <a:off x="822960" y="1554480"/>
+            <a:ext cx="868680" cy="82296"/>
+          </a:xfrm>
+          <a:prstGeom prst="rect">
+            <a:avLst/>
+          </a:prstGeom>
+          <a:solidFill>
+            <a:srgbClr val="5B5BD6"/>
+          </a:solidFill>
+          <a:ln>
+            <a:noFill/>
+          </a:ln>
+          <a:effectLst/>
+        </p:spPr>
+        <p:style>
+          <a:lnRef idx="1">
+            <a:schemeClr val="accent1"/>
+          </a:lnRef>
+          <a:fillRef idx="3">
+            <a:schemeClr val="accent1"/>
+          </a:fillRef>
+          <a:effectRef idx="2">
+            <a:schemeClr val="accent1"/>
+          </a:effectRef>
+          <a:fontRef idx="minor">
+            <a:schemeClr val="lt1"/>
+          </a:fontRef>
+        </p:style>
+        <p:txBody>
+          <a:bodyPr rtlCol="0" anchor="ctr"/>
+          <a:lstStyle/>
+          <a:p>
+            <a:pPr algn="ctr"/>
+          </a:p>
+        </p:txBody>
+      </p:sp>
+      <p:sp>
+        <p:nvSpPr>
+          <p:cNvPr id="4" name="Rounded Rectangle 3"/>
+          <p:cNvSpPr/>
+          <p:nvPr/>
+        </p:nvSpPr>
+        <p:spPr>
+          <a:xfrm>
+            <a:off x="777240" y="2743200"/>
+            <a:ext cx="4800600" cy="1920240"/>
+          </a:xfrm>
+          <a:prstGeom prst="roundRect">
+            <a:avLst>
+              <a:gd name="adj" fmla="val 12000"/>
+            </a:avLst>
+          </a:prstGeom>
+          <a:solidFill>
+            <a:srgbClr val="F4F4F6"/>
+          </a:solidFill>
+          <a:ln w="16510">
+            <a:solidFill>
+              <a:srgbClr val="E6E6E6"/>
+            </a:solidFill>
+          </a:ln>
+          <a:effectLst/>
+        </p:spPr>
+        <p:style>
+          <a:lnRef idx="1">
+            <a:schemeClr val="accent1"/>
+          </a:lnRef>
+          <a:fillRef idx="3">
+            <a:schemeClr val="accent1"/>
+          </a:fillRef>
+          <a:effectRef idx="2">
+            <a:schemeClr val="accent1"/>
+          </a:effectRef>
+          <a:fontRef idx="minor">
+            <a:schemeClr val="lt1"/>
+          </a:fontRef>
+        </p:style>
+        <p:txBody>
+          <a:bodyPr rtlCol="0" anchor="ctr" tIns="101600" bIns="101600" lIns="203200" rIns="203200" wrap="square"/>
+          <a:lstStyle/>
+          <a:p>
+            <a:pPr algn="l"/>
+            <a:r>
+              <a:rPr sz="1600" b="1">
+                <a:solidFill>
+                  <a:srgbClr val="6B7280"/>
+                </a:solidFill>
+                <a:latin typeface="Apple SD Gothic Neo"/>
+              </a:rPr>
+              <a:t>AI가 한 것</a:t>
+            </a:r>
+          </a:p>
+          <a:p>
+            <a:pPr algn="l"/>
+            <a:r>
+              <a:rPr sz="600" b="0">
+                <a:solidFill>
+                  <a:srgbClr val="6B7280"/>
+                </a:solidFill>
+                <a:latin typeface="Apple SD Gothic Neo"/>
+              </a:rPr>
+              <a:t/>
+            </a:r>
+          </a:p>
+          <a:p>
+            <a:pPr algn="l"/>
+            <a:r>
+              <a:rPr sz="2100" b="1">
+                <a:solidFill>
+                  <a:srgbClr val="1A1A1A"/>
+                </a:solidFill>
+                <a:latin typeface="Apple SD Gothic Neo"/>
+              </a:rPr>
+              <a:t>상태값에 CONDITIONAL을
+임의로 추가</a:t>
+            </a:r>
+          </a:p>
+        </p:txBody>
+      </p:sp>
+      <p:sp>
+        <p:nvSpPr>
+          <p:cNvPr id="5" name="TextBox 4"/>
+          <p:cNvSpPr txBox="1"/>
+          <p:nvPr/>
+        </p:nvSpPr>
+        <p:spPr>
+          <a:xfrm>
+            <a:off x="5733288" y="3383280"/>
+            <a:ext cx="731520" cy="640080"/>
+          </a:xfrm>
+          <a:prstGeom prst="rect">
+            <a:avLst/>
+          </a:prstGeom>
+          <a:noFill/>
+        </p:spPr>
+        <p:txBody>
+          <a:bodyPr wrap="square" anchor="ctr">
+            <a:spAutoFit/>
+          </a:bodyPr>
+          <a:lstStyle/>
+          <a:p>
+            <a:pPr algn="ctr"/>
+            <a:r>
+              <a:rPr sz="3400" b="1">
+                <a:solidFill>
+                  <a:srgbClr val="5B5BD6"/>
+                </a:solidFill>
+                <a:latin typeface="Apple SD Gothic Neo"/>
+              </a:rPr>
+              <a:t>→</a:t>
+            </a:r>
+          </a:p>
+        </p:txBody>
+      </p:sp>
+      <p:sp>
+        <p:nvSpPr>
+          <p:cNvPr id="6" name="Rounded Rectangle 5"/>
+          <p:cNvSpPr/>
+          <p:nvPr/>
+        </p:nvSpPr>
+        <p:spPr>
+          <a:xfrm>
+            <a:off x="6629400" y="2743200"/>
+            <a:ext cx="4800600" cy="1920240"/>
+          </a:xfrm>
+          <a:prstGeom prst="roundRect">
+            <a:avLst>
+              <a:gd name="adj" fmla="val 12000"/>
+            </a:avLst>
+          </a:prstGeom>
+          <a:solidFill>
+            <a:srgbClr val="ECEBFB"/>
+          </a:solidFill>
+          <a:ln>
+            <a:noFill/>
+          </a:ln>
+          <a:effectLst/>
+        </p:spPr>
+        <p:style>
+          <a:lnRef idx="1">
+            <a:schemeClr val="accent1"/>
+          </a:lnRef>
+          <a:fillRef idx="3">
+            <a:schemeClr val="accent1"/>
+          </a:fillRef>
+          <a:effectRef idx="2">
+            <a:schemeClr val="accent1"/>
+          </a:effectRef>
+          <a:fontRef idx="minor">
+            <a:schemeClr val="lt1"/>
+          </a:fontRef>
+        </p:style>
+        <p:txBody>
+          <a:bodyPr rtlCol="0" anchor="ctr" tIns="101600" bIns="101600" lIns="203200" rIns="203200" wrap="square"/>
+          <a:lstStyle/>
+          <a:p>
+            <a:pPr algn="l"/>
+            <a:r>
+              <a:rPr sz="1600" b="1">
+                <a:solidFill>
+                  <a:srgbClr val="5B5BD6"/>
+                </a:solidFill>
+                <a:latin typeface="Apple SD Gothic Neo"/>
+              </a:rPr>
+              <a:t>내가 통제</a:t>
+            </a:r>
+          </a:p>
+          <a:p>
+            <a:pPr algn="l"/>
+            <a:r>
+              <a:rPr sz="600" b="0">
+                <a:solidFill>
+                  <a:srgbClr val="6B7280"/>
+                </a:solidFill>
+                <a:latin typeface="Apple SD Gothic Neo"/>
+              </a:rPr>
+              <a:t/>
+            </a:r>
+          </a:p>
+          <a:p>
+            <a:pPr algn="l"/>
+            <a:r>
+              <a:rPr sz="2100" b="1">
+                <a:solidFill>
+                  <a:srgbClr val="1A1A1A"/>
+                </a:solidFill>
+                <a:latin typeface="Apple SD Gothic Neo"/>
+              </a:rPr>
+              <a:t>다이어그램 3값 유지,
+조건부는 심사가 책임</a:t>
+            </a:r>
+          </a:p>
+        </p:txBody>
+      </p:sp>
+    </p:spTree>
+  </p:cSld>
+  <p:clrMapOvr>
+    <a:masterClrMapping/>
+  </p:clrMapOvr>
+</p:sld>
+</file>
+
+<file path=ppt/slides/slide35.xml><?xml version="1.0" encoding="utf-8"?>
+<p:sld xmlns:a="http://schemas.openxmlformats.org/drawingml/2006/main" xmlns:p="http://schemas.openxmlformats.org/presentationml/2006/main" xmlns:r="http://schemas.openxmlformats.org/officeDocument/2006/relationships">
+  <p:cSld>
+    <p:bg>
+      <p:bgPr>
+        <a:solidFill>
+          <a:srgbClr val="FFFFFF"/>
+        </a:solidFill>
+        <a:effectLst/>
+      </p:bgPr>
+    </p:bg>
+    <p:spTree>
+      <p:nvGrpSpPr>
+        <p:cNvPr id="1" name=""/>
+        <p:cNvGrpSpPr/>
+        <p:nvPr/>
+      </p:nvGrpSpPr>
+      <p:grpSpPr/>
+      <p:sp>
+        <p:nvSpPr>
+          <p:cNvPr id="2" name="TextBox 1"/>
+          <p:cNvSpPr txBox="1"/>
+          <p:nvPr/>
+        </p:nvSpPr>
+        <p:spPr>
+          <a:xfrm>
+            <a:off x="749808" y="566928"/>
+            <a:ext cx="10881360" cy="1371600"/>
+          </a:xfrm>
+          <a:prstGeom prst="rect">
+            <a:avLst/>
+          </a:prstGeom>
+          <a:noFill/>
+        </p:spPr>
+        <p:txBody>
+          <a:bodyPr wrap="square" anchor="t">
+            <a:spAutoFit/>
+          </a:bodyPr>
+          <a:lstStyle/>
+          <a:p>
+            <a:pPr algn="l"/>
+            <a:r>
+              <a:rPr sz="4600" b="1" spc="-100">
+                <a:solidFill>
+                  <a:srgbClr val="1A1A1A"/>
+                </a:solidFill>
+                <a:latin typeface="Apple SD Gothic Neo"/>
+              </a:rPr>
+              <a:t>AI는 공짜가 아니다</a:t>
+            </a:r>
+          </a:p>
+        </p:txBody>
+      </p:sp>
+      <p:sp>
+        <p:nvSpPr>
+          <p:cNvPr id="3" name="Rectangle 2"/>
+          <p:cNvSpPr/>
+          <p:nvPr/>
+        </p:nvSpPr>
+        <p:spPr>
+          <a:xfrm>
+            <a:off x="822960" y="1554480"/>
+            <a:ext cx="868680" cy="82296"/>
+          </a:xfrm>
+          <a:prstGeom prst="rect">
+            <a:avLst/>
+          </a:prstGeom>
+          <a:solidFill>
+            <a:srgbClr val="5B5BD6"/>
+          </a:solidFill>
+          <a:ln>
+            <a:noFill/>
+          </a:ln>
+          <a:effectLst/>
+        </p:spPr>
+        <p:style>
+          <a:lnRef idx="1">
+            <a:schemeClr val="accent1"/>
+          </a:lnRef>
+          <a:fillRef idx="3">
+            <a:schemeClr val="accent1"/>
+          </a:fillRef>
+          <a:effectRef idx="2">
+            <a:schemeClr val="accent1"/>
+          </a:effectRef>
+          <a:fontRef idx="minor">
+            <a:schemeClr val="lt1"/>
+          </a:fontRef>
+        </p:style>
+        <p:txBody>
+          <a:bodyPr rtlCol="0" anchor="ctr"/>
+          <a:lstStyle/>
+          <a:p>
+            <a:pPr algn="ctr"/>
+          </a:p>
+        </p:txBody>
+      </p:sp>
+      <p:sp>
+        <p:nvSpPr>
+          <p:cNvPr id="4" name="TextBox 3"/>
+          <p:cNvSpPr txBox="1"/>
+          <p:nvPr/>
+        </p:nvSpPr>
+        <p:spPr>
+          <a:xfrm>
+            <a:off x="822960" y="2651760"/>
+            <a:ext cx="10607040" cy="1554480"/>
+          </a:xfrm>
+          <a:prstGeom prst="rect">
+            <a:avLst/>
+          </a:prstGeom>
+          <a:noFill/>
+        </p:spPr>
+        <p:txBody>
+          <a:bodyPr wrap="square" anchor="ctr">
+            <a:spAutoFit/>
+          </a:bodyPr>
+          <a:lstStyle/>
+          <a:p>
+            <a:pPr algn="ctr"/>
+            <a:r>
+              <a:rPr sz="4000" b="1" spc="-60">
+                <a:solidFill>
+                  <a:srgbClr val="1A1A1A"/>
+                </a:solidFill>
+                <a:latin typeface="Apple SD Gothic Neo"/>
+              </a:rPr>
+              <a:t>한 Epic에  $39.63  ·  토큰 5,100만</a:t>
+            </a:r>
+          </a:p>
+        </p:txBody>
+      </p:sp>
+    </p:spTree>
+  </p:cSld>
+  <p:clrMapOvr>
+    <a:masterClrMapping/>
+  </p:clrMapOvr>
+</p:sld>
+</file>
+
+<file path=ppt/slides/slide36.xml><?xml version="1.0" encoding="utf-8"?>
+<p:sld xmlns:a="http://schemas.openxmlformats.org/drawingml/2006/main" xmlns:p="http://schemas.openxmlformats.org/presentationml/2006/main" xmlns:r="http://schemas.openxmlformats.org/officeDocument/2006/relationships">
+  <p:cSld>
+    <p:bg>
+      <p:bgPr>
+        <a:solidFill>
+          <a:srgbClr val="FFFFFF"/>
+        </a:solidFill>
+        <a:effectLst/>
+      </p:bgPr>
+    </p:bg>
+    <p:spTree>
+      <p:nvGrpSpPr>
+        <p:cNvPr id="1" name=""/>
+        <p:cNvGrpSpPr/>
+        <p:nvPr/>
+      </p:nvGrpSpPr>
+      <p:grpSpPr/>
+      <p:sp>
+        <p:nvSpPr>
+          <p:cNvPr id="2" name="TextBox 1"/>
+          <p:cNvSpPr txBox="1"/>
+          <p:nvPr/>
+        </p:nvSpPr>
+        <p:spPr>
+          <a:xfrm>
+            <a:off x="749808" y="566928"/>
+            <a:ext cx="10881360" cy="1371600"/>
+          </a:xfrm>
+          <a:prstGeom prst="rect">
+            <a:avLst/>
+          </a:prstGeom>
+          <a:noFill/>
+        </p:spPr>
+        <p:txBody>
+          <a:bodyPr wrap="square" anchor="t">
+            <a:spAutoFit/>
+          </a:bodyPr>
+          <a:lstStyle/>
+          <a:p>
+            <a:pPr algn="l"/>
+            <a:r>
+              <a:rPr sz="4600" b="1" spc="-100">
+                <a:solidFill>
+                  <a:srgbClr val="1A1A1A"/>
+                </a:solidFill>
+                <a:latin typeface="Apple SD Gothic Neo"/>
+              </a:rPr>
+              <a:t>돈 먹은 범인</a:t>
+            </a:r>
+          </a:p>
+        </p:txBody>
+      </p:sp>
+      <p:sp>
+        <p:nvSpPr>
+          <p:cNvPr id="3" name="Rectangle 2"/>
+          <p:cNvSpPr/>
+          <p:nvPr/>
+        </p:nvSpPr>
+        <p:spPr>
+          <a:xfrm>
+            <a:off x="822960" y="1554480"/>
+            <a:ext cx="868680" cy="82296"/>
+          </a:xfrm>
+          <a:prstGeom prst="rect">
+            <a:avLst/>
+          </a:prstGeom>
+          <a:solidFill>
+            <a:srgbClr val="5B5BD6"/>
+          </a:solidFill>
+          <a:ln>
+            <a:noFill/>
+          </a:ln>
+          <a:effectLst/>
+        </p:spPr>
+        <p:style>
+          <a:lnRef idx="1">
+            <a:schemeClr val="accent1"/>
+          </a:lnRef>
+          <a:fillRef idx="3">
+            <a:schemeClr val="accent1"/>
+          </a:fillRef>
+          <a:effectRef idx="2">
+            <a:schemeClr val="accent1"/>
+          </a:effectRef>
+          <a:fontRef idx="minor">
+            <a:schemeClr val="lt1"/>
+          </a:fontRef>
+        </p:style>
+        <p:txBody>
+          <a:bodyPr rtlCol="0" anchor="ctr"/>
+          <a:lstStyle/>
+          <a:p>
+            <a:pPr algn="ctr"/>
+          </a:p>
+        </p:txBody>
+      </p:sp>
+      <p:sp>
+        <p:nvSpPr>
+          <p:cNvPr id="4" name="TextBox 3"/>
+          <p:cNvSpPr txBox="1"/>
+          <p:nvPr/>
+        </p:nvSpPr>
+        <p:spPr>
+          <a:xfrm>
+            <a:off x="822960" y="2651760"/>
+            <a:ext cx="10607040" cy="1554480"/>
+          </a:xfrm>
+          <a:prstGeom prst="rect">
+            <a:avLst/>
+          </a:prstGeom>
+          <a:noFill/>
+        </p:spPr>
+        <p:txBody>
+          <a:bodyPr wrap="square" anchor="ctr">
+            <a:spAutoFit/>
+          </a:bodyPr>
+          <a:lstStyle/>
+          <a:p>
+            <a:pPr algn="ctr"/>
+            <a:r>
+              <a:rPr sz="3400" b="1" spc="-60">
+                <a:solidFill>
+                  <a:srgbClr val="1A1A1A"/>
+                </a:solidFill>
+                <a:latin typeface="Apple SD Gothic Neo"/>
+              </a:rPr>
+              <a:t>코드 생성이 아니라
+'긴 컨텍스트 재읽기'</a:t>
+            </a:r>
+          </a:p>
+        </p:txBody>
+      </p:sp>
+      <p:sp>
+        <p:nvSpPr>
+          <p:cNvPr id="5" name="TextBox 4"/>
+          <p:cNvSpPr txBox="1"/>
+          <p:nvPr/>
+        </p:nvSpPr>
+        <p:spPr>
+          <a:xfrm>
+            <a:off x="822960" y="4434840"/>
+            <a:ext cx="10607040" cy="914400"/>
+          </a:xfrm>
+          <a:prstGeom prst="rect">
+            <a:avLst/>
+          </a:prstGeom>
+          <a:noFill/>
+        </p:spPr>
+        <p:txBody>
+          <a:bodyPr wrap="square" anchor="t">
+            <a:spAutoFit/>
+          </a:bodyPr>
+          <a:lstStyle/>
+          <a:p>
+            <a:pPr algn="ctr"/>
+            <a:r>
+              <a:rPr sz="2200" b="0" spc="-30">
+                <a:solidFill>
+                  <a:srgbClr val="6B7280"/>
+                </a:solidFill>
+                <a:latin typeface="Apple SD Gothic Neo"/>
+              </a:rPr>
+              <a:t>캐시 읽기만 4,580만 토큰 — 전체 비용의 90%</a:t>
+            </a:r>
+          </a:p>
+        </p:txBody>
+      </p:sp>
+    </p:spTree>
+  </p:cSld>
+  <p:clrMapOvr>
+    <a:masterClrMapping/>
+  </p:clrMapOvr>
+</p:sld>
+</file>
+
+<file path=ppt/slides/slide37.xml><?xml version="1.0" encoding="utf-8"?>
+<p:sld xmlns:a="http://schemas.openxmlformats.org/drawingml/2006/main" xmlns:p="http://schemas.openxmlformats.org/presentationml/2006/main" xmlns:r="http://schemas.openxmlformats.org/officeDocument/2006/relationships">
+  <p:cSld>
+    <p:bg>
+      <p:bgPr>
+        <a:solidFill>
+          <a:srgbClr val="FFFFFF"/>
+        </a:solidFill>
+        <a:effectLst/>
+      </p:bgPr>
+    </p:bg>
+    <p:spTree>
+      <p:nvGrpSpPr>
+        <p:cNvPr id="1" name=""/>
+        <p:cNvGrpSpPr/>
+        <p:nvPr/>
+      </p:nvGrpSpPr>
+      <p:grpSpPr/>
+      <p:sp>
+        <p:nvSpPr>
+          <p:cNvPr id="2" name="TextBox 1"/>
+          <p:cNvSpPr txBox="1"/>
+          <p:nvPr/>
+        </p:nvSpPr>
+        <p:spPr>
+          <a:xfrm>
+            <a:off x="749808" y="566928"/>
+            <a:ext cx="10881360" cy="1371600"/>
+          </a:xfrm>
+          <a:prstGeom prst="rect">
+            <a:avLst/>
+          </a:prstGeom>
+          <a:noFill/>
+        </p:spPr>
+        <p:txBody>
+          <a:bodyPr wrap="square" anchor="t">
+            <a:spAutoFit/>
+          </a:bodyPr>
+          <a:lstStyle/>
+          <a:p>
+            <a:pPr algn="l"/>
+            <a:r>
+              <a:rPr sz="4600" b="1" spc="-100">
+                <a:solidFill>
+                  <a:srgbClr val="1A1A1A"/>
+                </a:solidFill>
+                <a:latin typeface="Apple SD Gothic Neo"/>
+              </a:rPr>
+              <a:t>그래서 바꾼 것</a:t>
+            </a:r>
+          </a:p>
+        </p:txBody>
+      </p:sp>
+      <p:sp>
+        <p:nvSpPr>
+          <p:cNvPr id="3" name="Rectangle 2"/>
+          <p:cNvSpPr/>
+          <p:nvPr/>
+        </p:nvSpPr>
+        <p:spPr>
+          <a:xfrm>
+            <a:off x="822960" y="1554480"/>
+            <a:ext cx="868680" cy="82296"/>
+          </a:xfrm>
+          <a:prstGeom prst="rect">
+            <a:avLst/>
+          </a:prstGeom>
+          <a:solidFill>
+            <a:srgbClr val="5B5BD6"/>
+          </a:solidFill>
+          <a:ln>
+            <a:noFill/>
+          </a:ln>
+          <a:effectLst/>
+        </p:spPr>
+        <p:style>
+          <a:lnRef idx="1">
+            <a:schemeClr val="accent1"/>
+          </a:lnRef>
+          <a:fillRef idx="3">
+            <a:schemeClr val="accent1"/>
+          </a:fillRef>
+          <a:effectRef idx="2">
+            <a:schemeClr val="accent1"/>
+          </a:effectRef>
+          <a:fontRef idx="minor">
+            <a:schemeClr val="lt1"/>
+          </a:fontRef>
+        </p:style>
+        <p:txBody>
+          <a:bodyPr rtlCol="0" anchor="ctr"/>
+          <a:lstStyle/>
+          <a:p>
+            <a:pPr algn="ctr"/>
+          </a:p>
+        </p:txBody>
+      </p:sp>
+      <p:sp>
+        <p:nvSpPr>
+          <p:cNvPr id="4" name="TextBox 3"/>
+          <p:cNvSpPr txBox="1"/>
+          <p:nvPr/>
+        </p:nvSpPr>
+        <p:spPr>
+          <a:xfrm>
+            <a:off x="822960" y="2286000"/>
+            <a:ext cx="10607040" cy="914400"/>
+          </a:xfrm>
+          <a:prstGeom prst="rect">
+            <a:avLst/>
+          </a:prstGeom>
+          <a:noFill/>
+        </p:spPr>
+        <p:txBody>
+          <a:bodyPr wrap="square" anchor="t">
+            <a:spAutoFit/>
+          </a:bodyPr>
+          <a:lstStyle/>
+          <a:p>
+            <a:pPr algn="ctr"/>
+            <a:r>
+              <a:rPr sz="2600" b="1" spc="-40">
+                <a:solidFill>
+                  <a:srgbClr val="1A1A1A"/>
+                </a:solidFill>
+                <a:latin typeface="Apple SD Gothic Neo"/>
+              </a:rPr>
+              <a:t>비용을 줄이려고 습관을 바꿨다.</a:t>
+            </a:r>
+          </a:p>
+        </p:txBody>
+      </p:sp>
+      <p:sp>
+        <p:nvSpPr>
+          <p:cNvPr id="5" name="Rounded Rectangle 4"/>
+          <p:cNvSpPr/>
+          <p:nvPr/>
+        </p:nvSpPr>
+        <p:spPr>
+          <a:xfrm>
+            <a:off x="1066647" y="3566160"/>
+            <a:ext cx="3108960" cy="1371600"/>
+          </a:xfrm>
+          <a:prstGeom prst="roundRect">
+            <a:avLst>
+              <a:gd name="adj" fmla="val 12000"/>
+            </a:avLst>
+          </a:prstGeom>
+          <a:solidFill>
+            <a:srgbClr val="F4F4F6"/>
+          </a:solidFill>
+          <a:ln w="16510">
+            <a:solidFill>
+              <a:srgbClr val="E6E6E6"/>
+            </a:solidFill>
+          </a:ln>
+          <a:effectLst/>
+        </p:spPr>
+        <p:style>
+          <a:lnRef idx="1">
+            <a:schemeClr val="accent1"/>
+          </a:lnRef>
+          <a:fillRef idx="3">
+            <a:schemeClr val="accent1"/>
+          </a:fillRef>
+          <a:effectRef idx="2">
+            <a:schemeClr val="accent1"/>
+          </a:effectRef>
+          <a:fontRef idx="minor">
+            <a:schemeClr val="lt1"/>
+          </a:fontRef>
+        </p:style>
+        <p:txBody>
+          <a:bodyPr rtlCol="0" anchor="ctr" tIns="101600" bIns="101600" lIns="203200" rIns="203200" wrap="square"/>
+          <a:lstStyle/>
+          <a:p>
+            <a:pPr algn="ctr"/>
+            <a:r>
+              <a:rPr sz="2100" b="1">
+                <a:solidFill>
+                  <a:srgbClr val="1A1A1A"/>
+                </a:solidFill>
+                <a:latin typeface="Apple SD Gothic Neo"/>
+              </a:rPr>
+              <a:t>Epic 끝나면
+/clear</a:t>
+            </a:r>
+          </a:p>
+        </p:txBody>
+      </p:sp>
+      <p:sp>
+        <p:nvSpPr>
+          <p:cNvPr id="6" name="Rounded Rectangle 5"/>
+          <p:cNvSpPr/>
+          <p:nvPr/>
+        </p:nvSpPr>
+        <p:spPr>
+          <a:xfrm>
+            <a:off x="4541367" y="3566160"/>
+            <a:ext cx="3108960" cy="1371600"/>
+          </a:xfrm>
+          <a:prstGeom prst="roundRect">
+            <a:avLst>
+              <a:gd name="adj" fmla="val 12000"/>
+            </a:avLst>
+          </a:prstGeom>
+          <a:solidFill>
+            <a:srgbClr val="F4F4F6"/>
+          </a:solidFill>
+          <a:ln w="16510">
+            <a:solidFill>
+              <a:srgbClr val="E6E6E6"/>
+            </a:solidFill>
+          </a:ln>
+          <a:effectLst/>
+        </p:spPr>
+        <p:style>
+          <a:lnRef idx="1">
+            <a:schemeClr val="accent1"/>
+          </a:lnRef>
+          <a:fillRef idx="3">
+            <a:schemeClr val="accent1"/>
+          </a:fillRef>
+          <a:effectRef idx="2">
+            <a:schemeClr val="accent1"/>
+          </a:effectRef>
+          <a:fontRef idx="minor">
+            <a:schemeClr val="lt1"/>
+          </a:fontRef>
+        </p:style>
+        <p:txBody>
+          <a:bodyPr rtlCol="0" anchor="ctr" tIns="101600" bIns="101600" lIns="203200" rIns="203200" wrap="square"/>
+          <a:lstStyle/>
+          <a:p>
+            <a:pPr algn="ctr"/>
+            <a:r>
+              <a:rPr sz="2100" b="1">
+                <a:solidFill>
+                  <a:srgbClr val="1A1A1A"/>
+                </a:solidFill>
+                <a:latin typeface="Apple SD Gothic Neo"/>
+              </a:rPr>
+              <a:t>단순 작업은
+Sonnet</a:t>
+            </a:r>
+          </a:p>
+        </p:txBody>
+      </p:sp>
+      <p:sp>
+        <p:nvSpPr>
+          <p:cNvPr id="7" name="Rounded Rectangle 6"/>
+          <p:cNvSpPr/>
+          <p:nvPr/>
+        </p:nvSpPr>
+        <p:spPr>
+          <a:xfrm>
+            <a:off x="8016087" y="3566160"/>
+            <a:ext cx="3108960" cy="1371600"/>
+          </a:xfrm>
+          <a:prstGeom prst="roundRect">
+            <a:avLst>
+              <a:gd name="adj" fmla="val 12000"/>
+            </a:avLst>
+          </a:prstGeom>
+          <a:solidFill>
+            <a:srgbClr val="F4F4F6"/>
+          </a:solidFill>
+          <a:ln w="16510">
+            <a:solidFill>
+              <a:srgbClr val="E6E6E6"/>
+            </a:solidFill>
+          </a:ln>
+          <a:effectLst/>
+        </p:spPr>
+        <p:style>
+          <a:lnRef idx="1">
+            <a:schemeClr val="accent1"/>
+          </a:lnRef>
+          <a:fillRef idx="3">
+            <a:schemeClr val="accent1"/>
+          </a:fillRef>
+          <a:effectRef idx="2">
+            <a:schemeClr val="accent1"/>
+          </a:effectRef>
+          <a:fontRef idx="minor">
+            <a:schemeClr val="lt1"/>
+          </a:fontRef>
+        </p:style>
+        <p:txBody>
+          <a:bodyPr rtlCol="0" anchor="ctr" tIns="101600" bIns="101600" lIns="203200" rIns="203200" wrap="square"/>
+          <a:lstStyle/>
+          <a:p>
+            <a:pPr algn="ctr"/>
+            <a:r>
+              <a:rPr sz="2100" b="1">
+                <a:solidFill>
+                  <a:srgbClr val="1A1A1A"/>
+                </a:solidFill>
+                <a:latin typeface="Apple SD Gothic Neo"/>
+              </a:rPr>
+              <a:t>리뷰 횟수
+최소화</a:t>
+            </a:r>
+          </a:p>
+        </p:txBody>
+      </p:sp>
+    </p:spTree>
+  </p:cSld>
+  <p:clrMapOvr>
+    <a:masterClrMapping/>
+  </p:clrMapOvr>
+</p:sld>
+</file>
+
+<file path=ppt/slides/slide38.xml><?xml version="1.0" encoding="utf-8"?>
+<p:sld xmlns:a="http://schemas.openxmlformats.org/drawingml/2006/main" xmlns:p="http://schemas.openxmlformats.org/presentationml/2006/main" xmlns:r="http://schemas.openxmlformats.org/officeDocument/2006/relationships">
+  <p:cSld>
+    <p:bg>
+      <p:bgPr>
+        <a:solidFill>
+          <a:srgbClr val="FFFFFF"/>
+        </a:solidFill>
+        <a:effectLst/>
+      </p:bgPr>
+    </p:bg>
+    <p:spTree>
+      <p:nvGrpSpPr>
+        <p:cNvPr id="1" name=""/>
+        <p:cNvGrpSpPr/>
+        <p:nvPr/>
+      </p:nvGrpSpPr>
+      <p:grpSpPr/>
+      <p:sp>
+        <p:nvSpPr>
+          <p:cNvPr id="2" name="TextBox 1"/>
+          <p:cNvSpPr txBox="1"/>
+          <p:nvPr/>
+        </p:nvSpPr>
+        <p:spPr>
+          <a:xfrm>
+            <a:off x="749808" y="566928"/>
+            <a:ext cx="10881360" cy="1371600"/>
+          </a:xfrm>
+          <a:prstGeom prst="rect">
+            <a:avLst/>
+          </a:prstGeom>
+          <a:noFill/>
+        </p:spPr>
+        <p:txBody>
+          <a:bodyPr wrap="square" anchor="t">
+            <a:spAutoFit/>
+          </a:bodyPr>
+          <a:lstStyle/>
+          <a:p>
+            <a:pPr algn="l"/>
+            <a:r>
+              <a:rPr sz="4600" b="1" spc="-100">
+                <a:solidFill>
+                  <a:srgbClr val="1A1A1A"/>
+                </a:solidFill>
+                <a:latin typeface="Apple SD Gothic Neo"/>
+              </a:rPr>
+              <a:t>다중 리뷰의 두 얼굴</a:t>
+            </a:r>
+          </a:p>
+        </p:txBody>
+      </p:sp>
+      <p:sp>
+        <p:nvSpPr>
+          <p:cNvPr id="3" name="Rectangle 2"/>
+          <p:cNvSpPr/>
+          <p:nvPr/>
+        </p:nvSpPr>
+        <p:spPr>
+          <a:xfrm>
+            <a:off x="822960" y="1554480"/>
+            <a:ext cx="868680" cy="82296"/>
+          </a:xfrm>
+          <a:prstGeom prst="rect">
+            <a:avLst/>
+          </a:prstGeom>
+          <a:solidFill>
+            <a:srgbClr val="5B5BD6"/>
+          </a:solidFill>
+          <a:ln>
+            <a:noFill/>
+          </a:ln>
+          <a:effectLst/>
+        </p:spPr>
+        <p:style>
+          <a:lnRef idx="1">
+            <a:schemeClr val="accent1"/>
+          </a:lnRef>
+          <a:fillRef idx="3">
+            <a:schemeClr val="accent1"/>
+          </a:fillRef>
+          <a:effectRef idx="2">
+            <a:schemeClr val="accent1"/>
+          </a:effectRef>
+          <a:fontRef idx="minor">
+            <a:schemeClr val="lt1"/>
+          </a:fontRef>
+        </p:style>
+        <p:txBody>
+          <a:bodyPr rtlCol="0" anchor="ctr"/>
+          <a:lstStyle/>
+          <a:p>
+            <a:pPr algn="ctr"/>
+          </a:p>
+        </p:txBody>
+      </p:sp>
+      <p:sp>
+        <p:nvSpPr>
+          <p:cNvPr id="4" name="Rounded Rectangle 3"/>
+          <p:cNvSpPr/>
+          <p:nvPr/>
+        </p:nvSpPr>
+        <p:spPr>
+          <a:xfrm>
+            <a:off x="777240" y="2743200"/>
+            <a:ext cx="4800600" cy="1920240"/>
+          </a:xfrm>
+          <a:prstGeom prst="roundRect">
+            <a:avLst>
+              <a:gd name="adj" fmla="val 12000"/>
+            </a:avLst>
+          </a:prstGeom>
+          <a:solidFill>
+            <a:srgbClr val="ECEBFB"/>
+          </a:solidFill>
+          <a:ln>
+            <a:noFill/>
+          </a:ln>
+          <a:effectLst/>
+        </p:spPr>
+        <p:style>
+          <a:lnRef idx="1">
+            <a:schemeClr val="accent1"/>
+          </a:lnRef>
+          <a:fillRef idx="3">
+            <a:schemeClr val="accent1"/>
+          </a:fillRef>
+          <a:effectRef idx="2">
+            <a:schemeClr val="accent1"/>
+          </a:effectRef>
+          <a:fontRef idx="minor">
+            <a:schemeClr val="lt1"/>
+          </a:fontRef>
+        </p:style>
+        <p:txBody>
+          <a:bodyPr rtlCol="0" anchor="ctr" tIns="101600" bIns="101600" lIns="203200" rIns="203200" wrap="square"/>
+          <a:lstStyle/>
+          <a:p>
+            <a:pPr algn="l"/>
+            <a:r>
+              <a:rPr sz="1800" b="1">
+                <a:solidFill>
+                  <a:srgbClr val="5B5BD6"/>
+                </a:solidFill>
+                <a:latin typeface="Apple SD Gothic Neo"/>
+              </a:rPr>
+              <a:t>좋은 점</a:t>
+            </a:r>
+          </a:p>
+          <a:p>
+            <a:pPr algn="l"/>
+            <a:r>
+              <a:rPr sz="600" b="0">
+                <a:solidFill>
+                  <a:srgbClr val="6B7280"/>
+                </a:solidFill>
+                <a:latin typeface="Apple SD Gothic Neo"/>
+              </a:rPr>
+              <a:t/>
+            </a:r>
+          </a:p>
+          <a:p>
+            <a:pPr algn="l"/>
+            <a:r>
+              <a:rPr sz="2100" b="1">
+                <a:solidFill>
+                  <a:srgbClr val="1A1A1A"/>
+                </a:solidFill>
+                <a:latin typeface="Apple SD Gothic Neo"/>
+              </a:rPr>
+              <a:t>버그 6개를 미리 발견</a:t>
+            </a:r>
+          </a:p>
+        </p:txBody>
+      </p:sp>
+      <p:sp>
+        <p:nvSpPr>
+          <p:cNvPr id="5" name="Rounded Rectangle 4"/>
+          <p:cNvSpPr/>
+          <p:nvPr/>
+        </p:nvSpPr>
+        <p:spPr>
+          <a:xfrm>
+            <a:off x="6629400" y="2743200"/>
+            <a:ext cx="4800600" cy="1920240"/>
+          </a:xfrm>
+          <a:prstGeom prst="roundRect">
+            <a:avLst>
+              <a:gd name="adj" fmla="val 12000"/>
+            </a:avLst>
+          </a:prstGeom>
+          <a:solidFill>
+            <a:srgbClr val="F4F4F6"/>
+          </a:solidFill>
+          <a:ln>
+            <a:noFill/>
+          </a:ln>
+          <a:effectLst/>
+        </p:spPr>
+        <p:style>
+          <a:lnRef idx="1">
+            <a:schemeClr val="accent1"/>
+          </a:lnRef>
+          <a:fillRef idx="3">
+            <a:schemeClr val="accent1"/>
+          </a:fillRef>
+          <a:effectRef idx="2">
+            <a:schemeClr val="accent1"/>
+          </a:effectRef>
+          <a:fontRef idx="minor">
+            <a:schemeClr val="lt1"/>
+          </a:fontRef>
+        </p:style>
+        <p:txBody>
+          <a:bodyPr rtlCol="0" anchor="ctr" tIns="101600" bIns="101600" lIns="203200" rIns="203200" wrap="square"/>
+          <a:lstStyle/>
+          <a:p>
+            <a:pPr algn="l"/>
+            <a:r>
+              <a:rPr sz="1800" b="1">
+                <a:solidFill>
+                  <a:srgbClr val="6B7280"/>
+                </a:solidFill>
+                <a:latin typeface="Apple SD Gothic Neo"/>
+              </a:rPr>
+              <a:t>아쉬운 점</a:t>
+            </a:r>
+          </a:p>
+          <a:p>
+            <a:pPr algn="l"/>
+            <a:r>
+              <a:rPr sz="600" b="0">
+                <a:solidFill>
+                  <a:srgbClr val="6B7280"/>
+                </a:solidFill>
+                <a:latin typeface="Apple SD Gothic Neo"/>
+              </a:rPr>
+              <a:t/>
+            </a:r>
+          </a:p>
+          <a:p>
+            <a:pPr algn="l"/>
+            <a:r>
+              <a:rPr sz="2100" b="1">
+                <a:solidFill>
+                  <a:srgbClr val="1A1A1A"/>
+                </a:solidFill>
+                <a:latin typeface="Apple SD Gothic Neo"/>
+              </a:rPr>
+              <a:t>단순 작업까지 3중 리뷰
+→ 비용 과다</a:t>
+            </a:r>
+          </a:p>
+        </p:txBody>
+      </p:sp>
+    </p:spTree>
+  </p:cSld>
+  <p:clrMapOvr>
+    <a:masterClrMapping/>
+  </p:clrMapOvr>
+</p:sld>
+</file>
+
+<file path=ppt/slides/slide39.xml><?xml version="1.0" encoding="utf-8"?>
+<p:sld xmlns:a="http://schemas.openxmlformats.org/drawingml/2006/main" xmlns:p="http://schemas.openxmlformats.org/presentationml/2006/main" xmlns:r="http://schemas.openxmlformats.org/officeDocument/2006/relationships">
+  <p:cSld>
+    <p:bg>
+      <p:bgPr>
+        <a:solidFill>
+          <a:srgbClr val="FFFFFF"/>
+        </a:solidFill>
+        <a:effectLst/>
+      </p:bgPr>
+    </p:bg>
+    <p:spTree>
+      <p:nvGrpSpPr>
+        <p:cNvPr id="1" name=""/>
+        <p:cNvGrpSpPr/>
+        <p:nvPr/>
+      </p:nvGrpSpPr>
+      <p:grpSpPr/>
+      <p:sp>
+        <p:nvSpPr>
+          <p:cNvPr id="2" name="TextBox 1"/>
+          <p:cNvSpPr txBox="1"/>
+          <p:nvPr/>
+        </p:nvSpPr>
+        <p:spPr>
+          <a:xfrm>
+            <a:off x="749808" y="566928"/>
+            <a:ext cx="10881360" cy="1371600"/>
+          </a:xfrm>
+          <a:prstGeom prst="rect">
+            <a:avLst/>
+          </a:prstGeom>
+          <a:noFill/>
+        </p:spPr>
+        <p:txBody>
+          <a:bodyPr wrap="square" anchor="t">
+            <a:spAutoFit/>
+          </a:bodyPr>
+          <a:lstStyle/>
+          <a:p>
+            <a:pPr algn="l"/>
+            <a:r>
+              <a:rPr sz="4600" b="1" spc="-100">
+                <a:solidFill>
+                  <a:srgbClr val="1A1A1A"/>
+                </a:solidFill>
+                <a:latin typeface="Apple SD Gothic Neo"/>
+              </a:rPr>
+              <a:t>가장 큰 실수 — 발견</a:t>
+            </a:r>
+          </a:p>
+        </p:txBody>
+      </p:sp>
+      <p:sp>
+        <p:nvSpPr>
+          <p:cNvPr id="3" name="Rectangle 2"/>
+          <p:cNvSpPr/>
+          <p:nvPr/>
+        </p:nvSpPr>
+        <p:spPr>
+          <a:xfrm>
+            <a:off x="822960" y="1554480"/>
+            <a:ext cx="868680" cy="82296"/>
+          </a:xfrm>
+          <a:prstGeom prst="rect">
+            <a:avLst/>
+          </a:prstGeom>
+          <a:solidFill>
+            <a:srgbClr val="5B5BD6"/>
+          </a:solidFill>
+          <a:ln>
+            <a:noFill/>
+          </a:ln>
+          <a:effectLst/>
+        </p:spPr>
+        <p:style>
+          <a:lnRef idx="1">
+            <a:schemeClr val="accent1"/>
+          </a:lnRef>
+          <a:fillRef idx="3">
+            <a:schemeClr val="accent1"/>
+          </a:fillRef>
+          <a:effectRef idx="2">
+            <a:schemeClr val="accent1"/>
+          </a:effectRef>
+          <a:fontRef idx="minor">
+            <a:schemeClr val="lt1"/>
+          </a:fontRef>
+        </p:style>
+        <p:txBody>
+          <a:bodyPr rtlCol="0" anchor="ctr"/>
+          <a:lstStyle/>
+          <a:p>
+            <a:pPr algn="ctr"/>
+          </a:p>
+        </p:txBody>
+      </p:sp>
+      <p:sp>
+        <p:nvSpPr>
+          <p:cNvPr id="4" name="TextBox 3"/>
+          <p:cNvSpPr txBox="1"/>
+          <p:nvPr/>
+        </p:nvSpPr>
+        <p:spPr>
+          <a:xfrm>
+            <a:off x="822960" y="2651760"/>
+            <a:ext cx="10607040" cy="1554480"/>
+          </a:xfrm>
+          <a:prstGeom prst="rect">
+            <a:avLst/>
+          </a:prstGeom>
+          <a:noFill/>
+        </p:spPr>
+        <p:txBody>
+          <a:bodyPr wrap="square" anchor="ctr">
+            <a:spAutoFit/>
+          </a:bodyPr>
+          <a:lstStyle/>
+          <a:p>
+            <a:pPr algn="ctr"/>
+            <a:r>
+              <a:rPr sz="3300" b="1" spc="-60">
+                <a:solidFill>
+                  <a:srgbClr val="1A1A1A"/>
+                </a:solidFill>
+                <a:latin typeface="Apple SD Gothic Neo"/>
+              </a:rPr>
+              <a:t>자동차 사고가 직원 '심사 목록'에
+끝까지 안 떴다.</a:t>
+            </a:r>
+          </a:p>
+        </p:txBody>
+      </p:sp>
+    </p:spTree>
+  </p:cSld>
+  <p:clrMapOvr>
+    <a:masterClrMapping/>
+  </p:clrMapOvr>
+</p:sld>
+</file>
+
 <file path=ppt/slides/slide4.xml><?xml version="1.0" encoding="utf-8"?>
 <p:sld xmlns:a="http://schemas.openxmlformats.org/drawingml/2006/main" xmlns:r="http://schemas.openxmlformats.org/officeDocument/2006/relationships" xmlns:p="http://schemas.openxmlformats.org/presentationml/2006/main">
   <p:cSld>
@@ -11579,6 +12797,323 @@
                 <a:latin typeface="Apple SD Gothic Neo"/>
               </a:rPr>
               <a:t>100만 원 이상 → 직원 확인 후 입금</a:t>
+            </a:r>
+          </a:p>
+        </p:txBody>
+      </p:sp>
+    </p:spTree>
+  </p:cSld>
+  <p:clrMapOvr>
+    <a:masterClrMapping/>
+  </p:clrMapOvr>
+</p:sld>
+</file>
+
+<file path=ppt/slides/slide40.xml><?xml version="1.0" encoding="utf-8"?>
+<p:sld xmlns:a="http://schemas.openxmlformats.org/drawingml/2006/main" xmlns:p="http://schemas.openxmlformats.org/presentationml/2006/main" xmlns:r="http://schemas.openxmlformats.org/officeDocument/2006/relationships">
+  <p:cSld>
+    <p:bg>
+      <p:bgPr>
+        <a:solidFill>
+          <a:srgbClr val="FFFFFF"/>
+        </a:solidFill>
+        <a:effectLst/>
+      </p:bgPr>
+    </p:bg>
+    <p:spTree>
+      <p:nvGrpSpPr>
+        <p:cNvPr id="1" name=""/>
+        <p:cNvGrpSpPr/>
+        <p:nvPr/>
+      </p:nvGrpSpPr>
+      <p:grpSpPr/>
+      <p:sp>
+        <p:nvSpPr>
+          <p:cNvPr id="2" name="TextBox 1"/>
+          <p:cNvSpPr txBox="1"/>
+          <p:nvPr/>
+        </p:nvSpPr>
+        <p:spPr>
+          <a:xfrm>
+            <a:off x="749808" y="566928"/>
+            <a:ext cx="10881360" cy="1371600"/>
+          </a:xfrm>
+          <a:prstGeom prst="rect">
+            <a:avLst/>
+          </a:prstGeom>
+          <a:noFill/>
+        </p:spPr>
+        <p:txBody>
+          <a:bodyPr wrap="square" anchor="t">
+            <a:spAutoFit/>
+          </a:bodyPr>
+          <a:lstStyle/>
+          <a:p>
+            <a:pPr algn="l"/>
+            <a:r>
+              <a:rPr sz="4600" b="1" spc="-100">
+                <a:solidFill>
+                  <a:srgbClr val="1A1A1A"/>
+                </a:solidFill>
+                <a:latin typeface="Apple SD Gothic Neo"/>
+              </a:rPr>
+              <a:t>왜? — 설계대로였다</a:t>
+            </a:r>
+          </a:p>
+        </p:txBody>
+      </p:sp>
+      <p:sp>
+        <p:nvSpPr>
+          <p:cNvPr id="3" name="Rectangle 2"/>
+          <p:cNvSpPr/>
+          <p:nvPr/>
+        </p:nvSpPr>
+        <p:spPr>
+          <a:xfrm>
+            <a:off x="822960" y="1554480"/>
+            <a:ext cx="868680" cy="82296"/>
+          </a:xfrm>
+          <a:prstGeom prst="rect">
+            <a:avLst/>
+          </a:prstGeom>
+          <a:solidFill>
+            <a:srgbClr val="5B5BD6"/>
+          </a:solidFill>
+          <a:ln>
+            <a:noFill/>
+          </a:ln>
+          <a:effectLst/>
+        </p:spPr>
+        <p:style>
+          <a:lnRef idx="1">
+            <a:schemeClr val="accent1"/>
+          </a:lnRef>
+          <a:fillRef idx="3">
+            <a:schemeClr val="accent1"/>
+          </a:fillRef>
+          <a:effectRef idx="2">
+            <a:schemeClr val="accent1"/>
+          </a:effectRef>
+          <a:fontRef idx="minor">
+            <a:schemeClr val="lt1"/>
+          </a:fontRef>
+        </p:style>
+        <p:txBody>
+          <a:bodyPr rtlCol="0" anchor="ctr"/>
+          <a:lstStyle/>
+          <a:p>
+            <a:pPr algn="ctr"/>
+          </a:p>
+        </p:txBody>
+      </p:sp>
+      <p:sp>
+        <p:nvSpPr>
+          <p:cNvPr id="4" name="TextBox 3"/>
+          <p:cNvSpPr txBox="1"/>
+          <p:nvPr/>
+        </p:nvSpPr>
+        <p:spPr>
+          <a:xfrm>
+            <a:off x="822960" y="2651760"/>
+            <a:ext cx="10607040" cy="1554480"/>
+          </a:xfrm>
+          <a:prstGeom prst="rect">
+            <a:avLst/>
+          </a:prstGeom>
+          <a:noFill/>
+        </p:spPr>
+        <p:txBody>
+          <a:bodyPr wrap="square" anchor="ctr">
+            <a:spAutoFit/>
+          </a:bodyPr>
+          <a:lstStyle/>
+          <a:p>
+            <a:pPr algn="ctr"/>
+            <a:r>
+              <a:rPr sz="3000" b="1" spc="-60">
+                <a:solidFill>
+                  <a:srgbClr val="1A1A1A"/>
+                </a:solidFill>
+                <a:latin typeface="Apple SD Gothic Neo"/>
+              </a:rPr>
+              <a:t>유스케이스(UC09): 자동차 사고는
+'접수만', 심사 큐엔 안 들어감</a:t>
+            </a:r>
+          </a:p>
+        </p:txBody>
+      </p:sp>
+      <p:sp>
+        <p:nvSpPr>
+          <p:cNvPr id="5" name="TextBox 4"/>
+          <p:cNvSpPr txBox="1"/>
+          <p:nvPr/>
+        </p:nvSpPr>
+        <p:spPr>
+          <a:xfrm>
+            <a:off x="822960" y="4434840"/>
+            <a:ext cx="10607040" cy="914400"/>
+          </a:xfrm>
+          <a:prstGeom prst="rect">
+            <a:avLst/>
+          </a:prstGeom>
+          <a:noFill/>
+        </p:spPr>
+        <p:txBody>
+          <a:bodyPr wrap="square" anchor="t">
+            <a:spAutoFit/>
+          </a:bodyPr>
+          <a:lstStyle/>
+          <a:p>
+            <a:pPr algn="ctr"/>
+            <a:r>
+              <a:rPr sz="2200" b="0" spc="-30">
+                <a:solidFill>
+                  <a:srgbClr val="6B7280"/>
+                </a:solidFill>
+                <a:latin typeface="Apple SD Gothic Neo"/>
+              </a:rPr>
+              <a:t>버그가 아니라, 내가 그렇게 설계한 것</a:t>
+            </a:r>
+          </a:p>
+        </p:txBody>
+      </p:sp>
+    </p:spTree>
+  </p:cSld>
+  <p:clrMapOvr>
+    <a:masterClrMapping/>
+  </p:clrMapOvr>
+</p:sld>
+</file>
+
+<file path=ppt/slides/slide41.xml><?xml version="1.0" encoding="utf-8"?>
+<p:sld xmlns:a="http://schemas.openxmlformats.org/drawingml/2006/main" xmlns:p="http://schemas.openxmlformats.org/presentationml/2006/main" xmlns:r="http://schemas.openxmlformats.org/officeDocument/2006/relationships">
+  <p:cSld>
+    <p:bg>
+      <p:bgPr>
+        <a:solidFill>
+          <a:srgbClr val="FFFFFF"/>
+        </a:solidFill>
+        <a:effectLst/>
+      </p:bgPr>
+    </p:bg>
+    <p:spTree>
+      <p:nvGrpSpPr>
+        <p:cNvPr id="1" name=""/>
+        <p:cNvGrpSpPr/>
+        <p:nvPr/>
+      </p:nvGrpSpPr>
+      <p:grpSpPr/>
+      <p:sp>
+        <p:nvSpPr>
+          <p:cNvPr id="2" name="TextBox 1"/>
+          <p:cNvSpPr txBox="1"/>
+          <p:nvPr/>
+        </p:nvSpPr>
+        <p:spPr>
+          <a:xfrm>
+            <a:off x="749808" y="566928"/>
+            <a:ext cx="10881360" cy="1371600"/>
+          </a:xfrm>
+          <a:prstGeom prst="rect">
+            <a:avLst/>
+          </a:prstGeom>
+          <a:noFill/>
+        </p:spPr>
+        <p:txBody>
+          <a:bodyPr wrap="square" anchor="t">
+            <a:spAutoFit/>
+          </a:bodyPr>
+          <a:lstStyle/>
+          <a:p>
+            <a:pPr algn="l"/>
+            <a:r>
+              <a:rPr sz="4600" b="1" spc="-100">
+                <a:solidFill>
+                  <a:srgbClr val="1A1A1A"/>
+                </a:solidFill>
+                <a:latin typeface="Apple SD Gothic Neo"/>
+              </a:rPr>
+              <a:t>어떻게 데모를 살렸나</a:t>
+            </a:r>
+          </a:p>
+        </p:txBody>
+      </p:sp>
+      <p:sp>
+        <p:nvSpPr>
+          <p:cNvPr id="3" name="Rectangle 2"/>
+          <p:cNvSpPr/>
+          <p:nvPr/>
+        </p:nvSpPr>
+        <p:spPr>
+          <a:xfrm>
+            <a:off x="822960" y="1554480"/>
+            <a:ext cx="868680" cy="82296"/>
+          </a:xfrm>
+          <a:prstGeom prst="rect">
+            <a:avLst/>
+          </a:prstGeom>
+          <a:solidFill>
+            <a:srgbClr val="5B5BD6"/>
+          </a:solidFill>
+          <a:ln>
+            <a:noFill/>
+          </a:ln>
+          <a:effectLst/>
+        </p:spPr>
+        <p:style>
+          <a:lnRef idx="1">
+            <a:schemeClr val="accent1"/>
+          </a:lnRef>
+          <a:fillRef idx="3">
+            <a:schemeClr val="accent1"/>
+          </a:fillRef>
+          <a:effectRef idx="2">
+            <a:schemeClr val="accent1"/>
+          </a:effectRef>
+          <a:fontRef idx="minor">
+            <a:schemeClr val="lt1"/>
+          </a:fontRef>
+        </p:style>
+        <p:txBody>
+          <a:bodyPr rtlCol="0" anchor="ctr"/>
+          <a:lstStyle/>
+          <a:p>
+            <a:pPr algn="ctr"/>
+          </a:p>
+        </p:txBody>
+      </p:sp>
+      <p:sp>
+        <p:nvSpPr>
+          <p:cNvPr id="4" name="TextBox 3"/>
+          <p:cNvSpPr txBox="1"/>
+          <p:nvPr/>
+        </p:nvSpPr>
+        <p:spPr>
+          <a:xfrm>
+            <a:off x="822960" y="2651760"/>
+            <a:ext cx="10607040" cy="1554480"/>
+          </a:xfrm>
+          <a:prstGeom prst="rect">
+            <a:avLst/>
+          </a:prstGeom>
+          <a:noFill/>
+        </p:spPr>
+        <p:txBody>
+          <a:bodyPr wrap="square" anchor="ctr">
+            <a:spAutoFit/>
+          </a:bodyPr>
+          <a:lstStyle/>
+          <a:p>
+            <a:pPr algn="ctr"/>
+            <a:r>
+              <a:rPr sz="3000" b="1" spc="-60">
+                <a:solidFill>
+                  <a:srgbClr val="1A1A1A"/>
+                </a:solidFill>
+                <a:latin typeface="Apple SD Gothic Neo"/>
+              </a:rPr>
+              <a:t>동작하는 병원비 청구로 시연하고,
+자동차의 한계는 정직하게 설명했다.</a:t>
             </a:r>
           </a:p>
         </p:txBody>

--- a/docs/presentation/보험발표-figma.pptx
+++ b/docs/presentation/보험발표-figma.pptx
@@ -31,6 +31,9 @@
     <p:sldId id="279" r:id="rId25"/>
     <p:sldId id="280" r:id="rId26"/>
     <p:sldId id="284" r:id="rId34"/>
+    <p:sldId id="297" r:id="rId28"/>
+    <p:sldId id="298" r:id="rId27"/>
+    <p:sldId id="299" r:id="rId47"/>
     <p:sldId id="285" r:id="rId35"/>
     <p:sldId id="286" r:id="rId36"/>
     <p:sldId id="287" r:id="rId37"/>
@@ -9422,13 +9425,13 @@
 </p:sld>
 </file>
 
-<file path=ppt/slides/slide28.xml><?xml version="1.0" encoding="utf-8"?>
-<p:sld xmlns:a="http://schemas.openxmlformats.org/drawingml/2006/main" xmlns:r="http://schemas.openxmlformats.org/officeDocument/2006/relationships" xmlns:p="http://schemas.openxmlformats.org/presentationml/2006/main">
+<file path=ppt/slides/slide26.xml><?xml version="1.0" encoding="utf-8"?>
+<p:sld xmlns:a="http://schemas.openxmlformats.org/drawingml/2006/main" xmlns:p="http://schemas.openxmlformats.org/presentationml/2006/main" xmlns:r="http://schemas.openxmlformats.org/officeDocument/2006/relationships">
   <p:cSld>
     <p:bg>
       <p:bgPr>
         <a:solidFill>
-          <a:srgbClr val="1F1D3D"/>
+          <a:srgbClr val="FFFFFF"/>
         </a:solidFill>
         <a:effectLst/>
       </p:bgPr>
@@ -9439,14 +9442,7 @@
         <p:cNvGrpSpPr/>
         <p:nvPr/>
       </p:nvGrpSpPr>
-      <p:grpSpPr>
-        <a:xfrm>
-          <a:off x="0" y="0"/>
-          <a:ext cx="0" cy="0"/>
-          <a:chOff x="0" y="0"/>
-          <a:chExt cx="0" cy="0"/>
-        </a:xfrm>
-      </p:grpSpPr>
+      <p:grpSpPr/>
       <p:sp>
         <p:nvSpPr>
           <p:cNvPr id="2" name="TextBox 1"/>
@@ -9455,8 +9451,8 @@
         </p:nvSpPr>
         <p:spPr>
           <a:xfrm>
-            <a:off x="868680" y="2514600"/>
-            <a:ext cx="10607040" cy="2011680"/>
+            <a:off x="749808" y="566928"/>
+            <a:ext cx="10881360" cy="1371600"/>
           </a:xfrm>
           <a:prstGeom prst="rect">
             <a:avLst/>
@@ -9471,25 +9467,693 @@
           <a:p>
             <a:pPr algn="l"/>
             <a:r>
-              <a:rPr sz="4800" b="1" spc="-100">
-                <a:solidFill>
-                  <a:srgbClr val="FFFFFF"/>
-                </a:solidFill>
-                <a:latin typeface="Apple SD Gothic Neo"/>
-              </a:rPr>
-              <a:t>설계한 그대로 구현했고,</a:t>
-            </a:r>
-          </a:p>
+              <a:rPr sz="4600" b="1" spc="-100">
+                <a:solidFill>
+                  <a:srgbClr val="1A1A1A"/>
+                </a:solidFill>
+                <a:latin typeface="Apple SD Gothic Neo"/>
+              </a:rPr>
+              <a:t>사람과 AI의 분업</a:t>
+            </a:r>
+          </a:p>
+        </p:txBody>
+      </p:sp>
+      <p:sp>
+        <p:nvSpPr>
+          <p:cNvPr id="3" name="Rectangle 2"/>
+          <p:cNvSpPr/>
+          <p:nvPr/>
+        </p:nvSpPr>
+        <p:spPr>
+          <a:xfrm>
+            <a:off x="822960" y="1554480"/>
+            <a:ext cx="868680" cy="82296"/>
+          </a:xfrm>
+          <a:prstGeom prst="rect">
+            <a:avLst/>
+          </a:prstGeom>
+          <a:solidFill>
+            <a:srgbClr val="5B5BD6"/>
+          </a:solidFill>
+          <a:ln>
+            <a:noFill/>
+          </a:ln>
+          <a:effectLst/>
+        </p:spPr>
+        <p:style>
+          <a:lnRef idx="1">
+            <a:schemeClr val="accent1"/>
+          </a:lnRef>
+          <a:fillRef idx="3">
+            <a:schemeClr val="accent1"/>
+          </a:fillRef>
+          <a:effectRef idx="2">
+            <a:schemeClr val="accent1"/>
+          </a:effectRef>
+          <a:fontRef idx="minor">
+            <a:schemeClr val="lt1"/>
+          </a:fontRef>
+        </p:style>
+        <p:txBody>
+          <a:bodyPr rtlCol="0" anchor="ctr"/>
+          <a:lstStyle/>
+          <a:p>
+            <a:pPr algn="ctr"/>
+          </a:p>
+        </p:txBody>
+      </p:sp>
+      <p:sp>
+        <p:nvSpPr>
+          <p:cNvPr id="4" name="Rounded Rectangle 3"/>
+          <p:cNvSpPr/>
+          <p:nvPr/>
+        </p:nvSpPr>
+        <p:spPr>
+          <a:xfrm>
+            <a:off x="777240" y="2743200"/>
+            <a:ext cx="4800600" cy="1920240"/>
+          </a:xfrm>
+          <a:prstGeom prst="roundRect">
+            <a:avLst>
+              <a:gd name="adj" fmla="val 12000"/>
+            </a:avLst>
+          </a:prstGeom>
+          <a:solidFill>
+            <a:srgbClr val="ECEBFB"/>
+          </a:solidFill>
+          <a:ln>
+            <a:noFill/>
+          </a:ln>
+          <a:effectLst/>
+        </p:spPr>
+        <p:style>
+          <a:lnRef idx="1">
+            <a:schemeClr val="accent1"/>
+          </a:lnRef>
+          <a:fillRef idx="3">
+            <a:schemeClr val="accent1"/>
+          </a:fillRef>
+          <a:effectRef idx="2">
+            <a:schemeClr val="accent1"/>
+          </a:effectRef>
+          <a:fontRef idx="minor">
+            <a:schemeClr val="lt1"/>
+          </a:fontRef>
+        </p:style>
+        <p:txBody>
+          <a:bodyPr rtlCol="0" anchor="ctr" tIns="101600" bIns="101600" lIns="203200" rIns="203200" wrap="square"/>
+          <a:lstStyle/>
           <a:p>
             <a:pPr algn="l"/>
             <a:r>
-              <a:rPr sz="4800" b="1" spc="-100">
-                <a:solidFill>
-                  <a:srgbClr val="FFFFFF"/>
-                </a:solidFill>
-                <a:latin typeface="Apple SD Gothic Neo"/>
-              </a:rPr>
-              <a:t>그 과정에서 AI를 통제했다.</a:t>
+              <a:rPr sz="1800" b="1">
+                <a:solidFill>
+                  <a:srgbClr val="5B5BD6"/>
+                </a:solidFill>
+                <a:latin typeface="Apple SD Gothic Neo"/>
+              </a:rPr>
+              <a:t>사람</a:t>
+            </a:r>
+          </a:p>
+          <a:p>
+            <a:pPr algn="l"/>
+            <a:r>
+              <a:rPr sz="600" b="0">
+                <a:solidFill>
+                  <a:srgbClr val="6B7280"/>
+                </a:solidFill>
+                <a:latin typeface="Apple SD Gothic Neo"/>
+              </a:rPr>
+              <a:t/>
+            </a:r>
+          </a:p>
+          <a:p>
+            <a:pPr algn="l"/>
+            <a:r>
+              <a:rPr sz="2100" b="1">
+                <a:solidFill>
+                  <a:srgbClr val="1A1A1A"/>
+                </a:solidFill>
+                <a:latin typeface="Apple SD Gothic Neo"/>
+              </a:rPr>
+              <a:t>설계 · 결정 · 취조</a:t>
+            </a:r>
+          </a:p>
+        </p:txBody>
+      </p:sp>
+      <p:sp>
+        <p:nvSpPr>
+          <p:cNvPr id="5" name="Rounded Rectangle 4"/>
+          <p:cNvSpPr/>
+          <p:nvPr/>
+        </p:nvSpPr>
+        <p:spPr>
+          <a:xfrm>
+            <a:off x="6629400" y="2743200"/>
+            <a:ext cx="4800600" cy="1920240"/>
+          </a:xfrm>
+          <a:prstGeom prst="roundRect">
+            <a:avLst>
+              <a:gd name="adj" fmla="val 12000"/>
+            </a:avLst>
+          </a:prstGeom>
+          <a:solidFill>
+            <a:srgbClr val="F7EDE6"/>
+          </a:solidFill>
+          <a:ln>
+            <a:noFill/>
+          </a:ln>
+          <a:effectLst/>
+        </p:spPr>
+        <p:style>
+          <a:lnRef idx="1">
+            <a:schemeClr val="accent1"/>
+          </a:lnRef>
+          <a:fillRef idx="3">
+            <a:schemeClr val="accent1"/>
+          </a:fillRef>
+          <a:effectRef idx="2">
+            <a:schemeClr val="accent1"/>
+          </a:effectRef>
+          <a:fontRef idx="minor">
+            <a:schemeClr val="lt1"/>
+          </a:fontRef>
+        </p:style>
+        <p:txBody>
+          <a:bodyPr rtlCol="0" anchor="ctr" tIns="101600" bIns="101600" lIns="203200" rIns="203200" wrap="square"/>
+          <a:lstStyle/>
+          <a:p>
+            <a:pPr algn="l"/>
+            <a:r>
+              <a:rPr sz="1800" b="1">
+                <a:solidFill>
+                  <a:srgbClr val="B5793A"/>
+                </a:solidFill>
+                <a:latin typeface="Apple SD Gothic Neo"/>
+              </a:rPr>
+              <a:t>AI</a:t>
+            </a:r>
+          </a:p>
+          <a:p>
+            <a:pPr algn="l"/>
+            <a:r>
+              <a:rPr sz="600" b="0">
+                <a:solidFill>
+                  <a:srgbClr val="6B7280"/>
+                </a:solidFill>
+                <a:latin typeface="Apple SD Gothic Neo"/>
+              </a:rPr>
+              <a:t/>
+            </a:r>
+          </a:p>
+          <a:p>
+            <a:pPr algn="l"/>
+            <a:r>
+              <a:rPr sz="2100" b="1">
+                <a:solidFill>
+                  <a:srgbClr val="1A1A1A"/>
+                </a:solidFill>
+                <a:latin typeface="Apple SD Gothic Neo"/>
+              </a:rPr>
+              <a:t>구현 · 테스트 · 리팩토링</a:t>
+            </a:r>
+          </a:p>
+        </p:txBody>
+      </p:sp>
+    </p:spTree>
+  </p:cSld>
+  <p:clrMapOvr>
+    <a:masterClrMapping/>
+  </p:clrMapOvr>
+</p:sld>
+</file>
+
+<file path=ppt/slides/slide27.xml><?xml version="1.0" encoding="utf-8"?>
+<p:sld xmlns:a="http://schemas.openxmlformats.org/drawingml/2006/main" xmlns:p="http://schemas.openxmlformats.org/presentationml/2006/main" xmlns:r="http://schemas.openxmlformats.org/officeDocument/2006/relationships">
+  <p:cSld>
+    <p:bg>
+      <p:bgPr>
+        <a:solidFill>
+          <a:srgbClr val="FFFFFF"/>
+        </a:solidFill>
+        <a:effectLst/>
+      </p:bgPr>
+    </p:bg>
+    <p:spTree>
+      <p:nvGrpSpPr>
+        <p:cNvPr id="1" name=""/>
+        <p:cNvGrpSpPr/>
+        <p:nvPr/>
+      </p:nvGrpSpPr>
+      <p:grpSpPr/>
+      <p:sp>
+        <p:nvSpPr>
+          <p:cNvPr id="2" name="TextBox 1"/>
+          <p:cNvSpPr txBox="1"/>
+          <p:nvPr/>
+        </p:nvSpPr>
+        <p:spPr>
+          <a:xfrm>
+            <a:off x="749808" y="566928"/>
+            <a:ext cx="10881360" cy="1371600"/>
+          </a:xfrm>
+          <a:prstGeom prst="rect">
+            <a:avLst/>
+          </a:prstGeom>
+          <a:noFill/>
+        </p:spPr>
+        <p:txBody>
+          <a:bodyPr wrap="square" anchor="t">
+            <a:spAutoFit/>
+          </a:bodyPr>
+          <a:lstStyle/>
+          <a:p>
+            <a:pPr algn="l"/>
+            <a:r>
+              <a:rPr sz="4600" b="1" spc="-100">
+                <a:solidFill>
+                  <a:srgbClr val="1A1A1A"/>
+                </a:solidFill>
+                <a:latin typeface="Apple SD Gothic Neo"/>
+              </a:rPr>
+              <a:t>AI를 어떻게 통제했나</a:t>
+            </a:r>
+          </a:p>
+        </p:txBody>
+      </p:sp>
+      <p:sp>
+        <p:nvSpPr>
+          <p:cNvPr id="3" name="Rectangle 2"/>
+          <p:cNvSpPr/>
+          <p:nvPr/>
+        </p:nvSpPr>
+        <p:spPr>
+          <a:xfrm>
+            <a:off x="822960" y="1554480"/>
+            <a:ext cx="868680" cy="82296"/>
+          </a:xfrm>
+          <a:prstGeom prst="rect">
+            <a:avLst/>
+          </a:prstGeom>
+          <a:solidFill>
+            <a:srgbClr val="5B5BD6"/>
+          </a:solidFill>
+          <a:ln>
+            <a:noFill/>
+          </a:ln>
+          <a:effectLst/>
+        </p:spPr>
+        <p:style>
+          <a:lnRef idx="1">
+            <a:schemeClr val="accent1"/>
+          </a:lnRef>
+          <a:fillRef idx="3">
+            <a:schemeClr val="accent1"/>
+          </a:fillRef>
+          <a:effectRef idx="2">
+            <a:schemeClr val="accent1"/>
+          </a:effectRef>
+          <a:fontRef idx="minor">
+            <a:schemeClr val="lt1"/>
+          </a:fontRef>
+        </p:style>
+        <p:txBody>
+          <a:bodyPr rtlCol="0" anchor="ctr"/>
+          <a:lstStyle/>
+          <a:p>
+            <a:pPr algn="ctr"/>
+          </a:p>
+        </p:txBody>
+      </p:sp>
+      <p:sp>
+        <p:nvSpPr>
+          <p:cNvPr id="4" name="TextBox 3"/>
+          <p:cNvSpPr txBox="1"/>
+          <p:nvPr/>
+        </p:nvSpPr>
+        <p:spPr>
+          <a:xfrm>
+            <a:off x="822960" y="2651760"/>
+            <a:ext cx="10607040" cy="1554480"/>
+          </a:xfrm>
+          <a:prstGeom prst="rect">
+            <a:avLst/>
+          </a:prstGeom>
+          <a:noFill/>
+        </p:spPr>
+        <p:txBody>
+          <a:bodyPr wrap="square" anchor="ctr">
+            <a:spAutoFit/>
+          </a:bodyPr>
+          <a:lstStyle/>
+          <a:p>
+            <a:pPr algn="ctr"/>
+            <a:r>
+              <a:rPr sz="3200" b="1" spc="-60">
+                <a:solidFill>
+                  <a:srgbClr val="1A1A1A"/>
+                </a:solidFill>
+                <a:latin typeface="Apple SD Gothic Neo"/>
+              </a:rPr>
+              <a:t>AI가 짠 설계를 다이어그램·유스케이스에
+대고 한 질문씩 캐물었다.</a:t>
+            </a:r>
+          </a:p>
+        </p:txBody>
+      </p:sp>
+      <p:sp>
+        <p:nvSpPr>
+          <p:cNvPr id="5" name="TextBox 4"/>
+          <p:cNvSpPr txBox="1"/>
+          <p:nvPr/>
+        </p:nvSpPr>
+        <p:spPr>
+          <a:xfrm>
+            <a:off x="822960" y="4434840"/>
+            <a:ext cx="10607040" cy="914400"/>
+          </a:xfrm>
+          <a:prstGeom prst="rect">
+            <a:avLst/>
+          </a:prstGeom>
+          <a:noFill/>
+        </p:spPr>
+        <p:txBody>
+          <a:bodyPr wrap="square" anchor="t">
+            <a:spAutoFit/>
+          </a:bodyPr>
+          <a:lstStyle/>
+          <a:p>
+            <a:pPr algn="ctr"/>
+            <a:r>
+              <a:rPr sz="2200" b="0" spc="-30">
+                <a:solidFill>
+                  <a:srgbClr val="6B7280"/>
+                </a:solidFill>
+                <a:latin typeface="Apple SD Gothic Neo"/>
+              </a:rPr>
+              <a:t>결정은 전부 사람이 내렸다.</a:t>
+            </a:r>
+          </a:p>
+        </p:txBody>
+      </p:sp>
+    </p:spTree>
+  </p:cSld>
+  <p:clrMapOvr>
+    <a:masterClrMapping/>
+  </p:clrMapOvr>
+</p:sld>
+</file>
+
+<file path=ppt/slides/slide28.xml><?xml version="1.0" encoding="utf-8"?>
+<p:sld xmlns:a="http://schemas.openxmlformats.org/drawingml/2006/main" xmlns:p="http://schemas.openxmlformats.org/presentationml/2006/main" xmlns:r="http://schemas.openxmlformats.org/officeDocument/2006/relationships">
+  <p:cSld>
+    <p:bg>
+      <p:bgPr>
+        <a:solidFill>
+          <a:srgbClr val="FFFFFF"/>
+        </a:solidFill>
+        <a:effectLst/>
+      </p:bgPr>
+    </p:bg>
+    <p:spTree>
+      <p:nvGrpSpPr>
+        <p:cNvPr id="1" name=""/>
+        <p:cNvGrpSpPr/>
+        <p:nvPr/>
+      </p:nvGrpSpPr>
+      <p:grpSpPr/>
+      <p:sp>
+        <p:nvSpPr>
+          <p:cNvPr id="2" name="TextBox 1"/>
+          <p:cNvSpPr txBox="1"/>
+          <p:nvPr/>
+        </p:nvSpPr>
+        <p:spPr>
+          <a:xfrm>
+            <a:off x="749808" y="566928"/>
+            <a:ext cx="10881360" cy="1371600"/>
+          </a:xfrm>
+          <a:prstGeom prst="rect">
+            <a:avLst/>
+          </a:prstGeom>
+          <a:noFill/>
+        </p:spPr>
+        <p:txBody>
+          <a:bodyPr wrap="square" anchor="t">
+            <a:spAutoFit/>
+          </a:bodyPr>
+          <a:lstStyle/>
+          <a:p>
+            <a:pPr algn="l"/>
+            <a:r>
+              <a:rPr sz="4600" b="1" spc="-100">
+                <a:solidFill>
+                  <a:srgbClr val="1A1A1A"/>
+                </a:solidFill>
+                <a:latin typeface="Apple SD Gothic Neo"/>
+              </a:rPr>
+              <a:t>취조 ① — 빠뜨린 걸 잡다</a:t>
+            </a:r>
+          </a:p>
+        </p:txBody>
+      </p:sp>
+      <p:sp>
+        <p:nvSpPr>
+          <p:cNvPr id="3" name="Rectangle 2"/>
+          <p:cNvSpPr/>
+          <p:nvPr/>
+        </p:nvSpPr>
+        <p:spPr>
+          <a:xfrm>
+            <a:off x="822960" y="1554480"/>
+            <a:ext cx="868680" cy="82296"/>
+          </a:xfrm>
+          <a:prstGeom prst="rect">
+            <a:avLst/>
+          </a:prstGeom>
+          <a:solidFill>
+            <a:srgbClr val="5B5BD6"/>
+          </a:solidFill>
+          <a:ln>
+            <a:noFill/>
+          </a:ln>
+          <a:effectLst/>
+        </p:spPr>
+        <p:style>
+          <a:lnRef idx="1">
+            <a:schemeClr val="accent1"/>
+          </a:lnRef>
+          <a:fillRef idx="3">
+            <a:schemeClr val="accent1"/>
+          </a:fillRef>
+          <a:effectRef idx="2">
+            <a:schemeClr val="accent1"/>
+          </a:effectRef>
+          <a:fontRef idx="minor">
+            <a:schemeClr val="lt1"/>
+          </a:fontRef>
+        </p:style>
+        <p:txBody>
+          <a:bodyPr rtlCol="0" anchor="ctr"/>
+          <a:lstStyle/>
+          <a:p>
+            <a:pPr algn="ctr"/>
+          </a:p>
+        </p:txBody>
+      </p:sp>
+      <p:sp>
+        <p:nvSpPr>
+          <p:cNvPr id="4" name="Rounded Rectangle 3"/>
+          <p:cNvSpPr/>
+          <p:nvPr/>
+        </p:nvSpPr>
+        <p:spPr>
+          <a:xfrm>
+            <a:off x="777240" y="2743200"/>
+            <a:ext cx="4800600" cy="1920240"/>
+          </a:xfrm>
+          <a:prstGeom prst="roundRect">
+            <a:avLst>
+              <a:gd name="adj" fmla="val 12000"/>
+            </a:avLst>
+          </a:prstGeom>
+          <a:solidFill>
+            <a:srgbClr val="F4F4F6"/>
+          </a:solidFill>
+          <a:ln w="16510">
+            <a:solidFill>
+              <a:srgbClr val="E6E6E6"/>
+            </a:solidFill>
+          </a:ln>
+          <a:effectLst/>
+        </p:spPr>
+        <p:style>
+          <a:lnRef idx="1">
+            <a:schemeClr val="accent1"/>
+          </a:lnRef>
+          <a:fillRef idx="3">
+            <a:schemeClr val="accent1"/>
+          </a:fillRef>
+          <a:effectRef idx="2">
+            <a:schemeClr val="accent1"/>
+          </a:effectRef>
+          <a:fontRef idx="minor">
+            <a:schemeClr val="lt1"/>
+          </a:fontRef>
+        </p:style>
+        <p:txBody>
+          <a:bodyPr rtlCol="0" anchor="ctr" tIns="101600" bIns="101600" lIns="203200" rIns="203200" wrap="square"/>
+          <a:lstStyle/>
+          <a:p>
+            <a:pPr algn="l"/>
+            <a:r>
+              <a:rPr sz="1600" b="1">
+                <a:solidFill>
+                  <a:srgbClr val="6B7280"/>
+                </a:solidFill>
+                <a:latin typeface="Apple SD Gothic Neo"/>
+              </a:rPr>
+              <a:t>AI가 한 것</a:t>
+            </a:r>
+          </a:p>
+          <a:p>
+            <a:pPr algn="l"/>
+            <a:r>
+              <a:rPr sz="600" b="0">
+                <a:solidFill>
+                  <a:srgbClr val="6B7280"/>
+                </a:solidFill>
+                <a:latin typeface="Apple SD Gothic Neo"/>
+              </a:rPr>
+              <a:t/>
+            </a:r>
+          </a:p>
+          <a:p>
+            <a:pPr algn="l"/>
+            <a:r>
+              <a:rPr sz="2100" b="1">
+                <a:solidFill>
+                  <a:srgbClr val="1A1A1A"/>
+                </a:solidFill>
+                <a:latin typeface="Apple SD Gothic Neo"/>
+              </a:rPr>
+              <a:t>유스케이스 17개에
+'회원가입'이 없었다</a:t>
+            </a:r>
+          </a:p>
+        </p:txBody>
+      </p:sp>
+      <p:sp>
+        <p:nvSpPr>
+          <p:cNvPr id="5" name="TextBox 4"/>
+          <p:cNvSpPr txBox="1"/>
+          <p:nvPr/>
+        </p:nvSpPr>
+        <p:spPr>
+          <a:xfrm>
+            <a:off x="5733288" y="3383280"/>
+            <a:ext cx="731520" cy="640080"/>
+          </a:xfrm>
+          <a:prstGeom prst="rect">
+            <a:avLst/>
+          </a:prstGeom>
+          <a:noFill/>
+        </p:spPr>
+        <p:txBody>
+          <a:bodyPr wrap="square" anchor="ctr">
+            <a:spAutoFit/>
+          </a:bodyPr>
+          <a:lstStyle/>
+          <a:p>
+            <a:pPr algn="ctr"/>
+            <a:r>
+              <a:rPr sz="3400" b="1">
+                <a:solidFill>
+                  <a:srgbClr val="5B5BD6"/>
+                </a:solidFill>
+                <a:latin typeface="Apple SD Gothic Neo"/>
+              </a:rPr>
+              <a:t>→</a:t>
+            </a:r>
+          </a:p>
+        </p:txBody>
+      </p:sp>
+      <p:sp>
+        <p:nvSpPr>
+          <p:cNvPr id="6" name="Rounded Rectangle 5"/>
+          <p:cNvSpPr/>
+          <p:nvPr/>
+        </p:nvSpPr>
+        <p:spPr>
+          <a:xfrm>
+            <a:off x="6629400" y="2743200"/>
+            <a:ext cx="4800600" cy="1920240"/>
+          </a:xfrm>
+          <a:prstGeom prst="roundRect">
+            <a:avLst>
+              <a:gd name="adj" fmla="val 12000"/>
+            </a:avLst>
+          </a:prstGeom>
+          <a:solidFill>
+            <a:srgbClr val="ECEBFB"/>
+          </a:solidFill>
+          <a:ln>
+            <a:noFill/>
+          </a:ln>
+          <a:effectLst/>
+        </p:spPr>
+        <p:style>
+          <a:lnRef idx="1">
+            <a:schemeClr val="accent1"/>
+          </a:lnRef>
+          <a:fillRef idx="3">
+            <a:schemeClr val="accent1"/>
+          </a:fillRef>
+          <a:effectRef idx="2">
+            <a:schemeClr val="accent1"/>
+          </a:effectRef>
+          <a:fontRef idx="minor">
+            <a:schemeClr val="lt1"/>
+          </a:fontRef>
+        </p:style>
+        <p:txBody>
+          <a:bodyPr rtlCol="0" anchor="ctr" tIns="101600" bIns="101600" lIns="203200" rIns="203200" wrap="square"/>
+          <a:lstStyle/>
+          <a:p>
+            <a:pPr algn="l"/>
+            <a:r>
+              <a:rPr sz="1600" b="1">
+                <a:solidFill>
+                  <a:srgbClr val="5B5BD6"/>
+                </a:solidFill>
+                <a:latin typeface="Apple SD Gothic Neo"/>
+              </a:rPr>
+              <a:t>내가 통제</a:t>
+            </a:r>
+          </a:p>
+          <a:p>
+            <a:pPr algn="l"/>
+            <a:r>
+              <a:rPr sz="600" b="0">
+                <a:solidFill>
+                  <a:srgbClr val="6B7280"/>
+                </a:solidFill>
+                <a:latin typeface="Apple SD Gothic Neo"/>
+              </a:rPr>
+              <a:t/>
+            </a:r>
+          </a:p>
+          <a:p>
+            <a:pPr algn="l"/>
+            <a:r>
+              <a:rPr sz="2100" b="1">
+                <a:solidFill>
+                  <a:srgbClr val="1A1A1A"/>
+                </a:solidFill>
+                <a:latin typeface="Apple SD Gothic Neo"/>
+              </a:rPr>
+              <a:t>회원가입을 명시적으로
+추가하기로 결정</a:t>
             </a:r>
           </a:p>
         </p:txBody>
@@ -9550,7 +10214,7 @@
                 </a:solidFill>
                 <a:latin typeface="Apple SD Gothic Neo"/>
               </a:rPr>
-              <a:t>사람과 AI의 분업</a:t>
+              <a:t>취조 ② — 흔들리는 용어를 잡다</a:t>
             </a:r>
           </a:p>
         </p:txBody>
@@ -9616,6 +10280,123 @@
             </a:avLst>
           </a:prstGeom>
           <a:solidFill>
+            <a:srgbClr val="F4F4F6"/>
+          </a:solidFill>
+          <a:ln w="16510">
+            <a:solidFill>
+              <a:srgbClr val="E6E6E6"/>
+            </a:solidFill>
+          </a:ln>
+          <a:effectLst/>
+        </p:spPr>
+        <p:style>
+          <a:lnRef idx="1">
+            <a:schemeClr val="accent1"/>
+          </a:lnRef>
+          <a:fillRef idx="3">
+            <a:schemeClr val="accent1"/>
+          </a:fillRef>
+          <a:effectRef idx="2">
+            <a:schemeClr val="accent1"/>
+          </a:effectRef>
+          <a:fontRef idx="minor">
+            <a:schemeClr val="lt1"/>
+          </a:fontRef>
+        </p:style>
+        <p:txBody>
+          <a:bodyPr rtlCol="0" anchor="ctr" tIns="101600" bIns="101600" lIns="203200" rIns="203200" wrap="square"/>
+          <a:lstStyle/>
+          <a:p>
+            <a:pPr algn="l"/>
+            <a:r>
+              <a:rPr sz="1600" b="1">
+                <a:solidFill>
+                  <a:srgbClr val="6B7280"/>
+                </a:solidFill>
+                <a:latin typeface="Apple SD Gothic Neo"/>
+              </a:rPr>
+              <a:t>AI가 한 것</a:t>
+            </a:r>
+          </a:p>
+          <a:p>
+            <a:pPr algn="l"/>
+            <a:r>
+              <a:rPr sz="600" b="0">
+                <a:solidFill>
+                  <a:srgbClr val="6B7280"/>
+                </a:solidFill>
+                <a:latin typeface="Apple SD Gothic Neo"/>
+              </a:rPr>
+              <a:t/>
+            </a:r>
+          </a:p>
+          <a:p>
+            <a:pPr algn="l"/>
+            <a:r>
+              <a:rPr sz="2100" b="1">
+                <a:solidFill>
+                  <a:srgbClr val="1A1A1A"/>
+                </a:solidFill>
+                <a:latin typeface="Apple SD Gothic Neo"/>
+              </a:rPr>
+              <a:t>같은 사람을 Policyholder·
+account·user로 섞어 부름</a:t>
+            </a:r>
+          </a:p>
+        </p:txBody>
+      </p:sp>
+      <p:sp>
+        <p:nvSpPr>
+          <p:cNvPr id="5" name="TextBox 4"/>
+          <p:cNvSpPr txBox="1"/>
+          <p:nvPr/>
+        </p:nvSpPr>
+        <p:spPr>
+          <a:xfrm>
+            <a:off x="5733288" y="3383280"/>
+            <a:ext cx="731520" cy="640080"/>
+          </a:xfrm>
+          <a:prstGeom prst="rect">
+            <a:avLst/>
+          </a:prstGeom>
+          <a:noFill/>
+        </p:spPr>
+        <p:txBody>
+          <a:bodyPr wrap="square" anchor="ctr">
+            <a:spAutoFit/>
+          </a:bodyPr>
+          <a:lstStyle/>
+          <a:p>
+            <a:pPr algn="ctr"/>
+            <a:r>
+              <a:rPr sz="3400" b="1">
+                <a:solidFill>
+                  <a:srgbClr val="5B5BD6"/>
+                </a:solidFill>
+                <a:latin typeface="Apple SD Gothic Neo"/>
+              </a:rPr>
+              <a:t>→</a:t>
+            </a:r>
+          </a:p>
+        </p:txBody>
+      </p:sp>
+      <p:sp>
+        <p:nvSpPr>
+          <p:cNvPr id="6" name="Rounded Rectangle 5"/>
+          <p:cNvSpPr/>
+          <p:nvPr/>
+        </p:nvSpPr>
+        <p:spPr>
+          <a:xfrm>
+            <a:off x="6629400" y="2743200"/>
+            <a:ext cx="4800600" cy="1920240"/>
+          </a:xfrm>
+          <a:prstGeom prst="roundRect">
+            <a:avLst>
+              <a:gd name="adj" fmla="val 12000"/>
+            </a:avLst>
+          </a:prstGeom>
+          <a:solidFill>
             <a:srgbClr val="ECEBFB"/>
           </a:solidFill>
           <a:ln>
@@ -9643,13 +10424,13 @@
           <a:p>
             <a:pPr algn="l"/>
             <a:r>
-              <a:rPr sz="1800" b="1">
+              <a:rPr sz="1600" b="1">
                 <a:solidFill>
                   <a:srgbClr val="5B5BD6"/>
                 </a:solidFill>
                 <a:latin typeface="Apple SD Gothic Neo"/>
               </a:rPr>
-              <a:t>사람</a:t>
+              <a:t>내가 통제</a:t>
             </a:r>
           </a:p>
           <a:p>
@@ -9673,86 +10454,8 @@
                 </a:solidFill>
                 <a:latin typeface="Apple SD Gothic Neo"/>
               </a:rPr>
-              <a:t>설계 · 결정 · 취조</a:t>
-            </a:r>
-          </a:p>
-        </p:txBody>
-      </p:sp>
-      <p:sp>
-        <p:nvSpPr>
-          <p:cNvPr id="5" name="Rounded Rectangle 4"/>
-          <p:cNvSpPr/>
-          <p:nvPr/>
-        </p:nvSpPr>
-        <p:spPr>
-          <a:xfrm>
-            <a:off x="6629400" y="2743200"/>
-            <a:ext cx="4800600" cy="1920240"/>
-          </a:xfrm>
-          <a:prstGeom prst="roundRect">
-            <a:avLst>
-              <a:gd name="adj" fmla="val 12000"/>
-            </a:avLst>
-          </a:prstGeom>
-          <a:solidFill>
-            <a:srgbClr val="F7EDE6"/>
-          </a:solidFill>
-          <a:ln>
-            <a:noFill/>
-          </a:ln>
-          <a:effectLst/>
-        </p:spPr>
-        <p:style>
-          <a:lnRef idx="1">
-            <a:schemeClr val="accent1"/>
-          </a:lnRef>
-          <a:fillRef idx="3">
-            <a:schemeClr val="accent1"/>
-          </a:fillRef>
-          <a:effectRef idx="2">
-            <a:schemeClr val="accent1"/>
-          </a:effectRef>
-          <a:fontRef idx="minor">
-            <a:schemeClr val="lt1"/>
-          </a:fontRef>
-        </p:style>
-        <p:txBody>
-          <a:bodyPr rtlCol="0" anchor="ctr" tIns="101600" bIns="101600" lIns="203200" rIns="203200" wrap="square"/>
-          <a:lstStyle/>
-          <a:p>
-            <a:pPr algn="l"/>
-            <a:r>
-              <a:rPr sz="1800" b="1">
-                <a:solidFill>
-                  <a:srgbClr val="B5793A"/>
-                </a:solidFill>
-                <a:latin typeface="Apple SD Gothic Neo"/>
-              </a:rPr>
-              <a:t>AI</a:t>
-            </a:r>
-          </a:p>
-          <a:p>
-            <a:pPr algn="l"/>
-            <a:r>
-              <a:rPr sz="600" b="0">
-                <a:solidFill>
-                  <a:srgbClr val="6B7280"/>
-                </a:solidFill>
-                <a:latin typeface="Apple SD Gothic Neo"/>
-              </a:rPr>
-              <a:t/>
-            </a:r>
-          </a:p>
-          <a:p>
-            <a:pPr algn="l"/>
-            <a:r>
-              <a:rPr sz="2100" b="1">
-                <a:solidFill>
-                  <a:srgbClr val="1A1A1A"/>
-                </a:solidFill>
-                <a:latin typeface="Apple SD Gothic Neo"/>
-              </a:rPr>
-              <a:t>구현 · 테스트 · 리팩토링</a:t>
+              <a:t>CONTEXT.md에
+표준어 하나로 못박음</a:t>
             </a:r>
           </a:p>
         </p:txBody>
@@ -10090,7 +10793,7 @@
                 </a:solidFill>
                 <a:latin typeface="Apple SD Gothic Neo"/>
               </a:rPr>
-              <a:t>AI를 어떻게 통제했나</a:t>
+              <a:t>취조 ③ — 과한 구현을 막다</a:t>
             </a:r>
           </a:p>
         </p:txBody>
@@ -10141,14 +10844,96 @@
       </p:sp>
       <p:sp>
         <p:nvSpPr>
-          <p:cNvPr id="4" name="TextBox 3"/>
+          <p:cNvPr id="4" name="Rounded Rectangle 3"/>
+          <p:cNvSpPr/>
+          <p:nvPr/>
+        </p:nvSpPr>
+        <p:spPr>
+          <a:xfrm>
+            <a:off x="777240" y="2743200"/>
+            <a:ext cx="4800600" cy="1920240"/>
+          </a:xfrm>
+          <a:prstGeom prst="roundRect">
+            <a:avLst>
+              <a:gd name="adj" fmla="val 12000"/>
+            </a:avLst>
+          </a:prstGeom>
+          <a:solidFill>
+            <a:srgbClr val="F4F4F6"/>
+          </a:solidFill>
+          <a:ln w="16510">
+            <a:solidFill>
+              <a:srgbClr val="E6E6E6"/>
+            </a:solidFill>
+          </a:ln>
+          <a:effectLst/>
+        </p:spPr>
+        <p:style>
+          <a:lnRef idx="1">
+            <a:schemeClr val="accent1"/>
+          </a:lnRef>
+          <a:fillRef idx="3">
+            <a:schemeClr val="accent1"/>
+          </a:fillRef>
+          <a:effectRef idx="2">
+            <a:schemeClr val="accent1"/>
+          </a:effectRef>
+          <a:fontRef idx="minor">
+            <a:schemeClr val="lt1"/>
+          </a:fontRef>
+        </p:style>
+        <p:txBody>
+          <a:bodyPr rtlCol="0" anchor="ctr" tIns="101600" bIns="101600" lIns="203200" rIns="203200" wrap="square"/>
+          <a:lstStyle/>
+          <a:p>
+            <a:pPr algn="l"/>
+            <a:r>
+              <a:rPr sz="1600" b="1">
+                <a:solidFill>
+                  <a:srgbClr val="6B7280"/>
+                </a:solidFill>
+                <a:latin typeface="Apple SD Gothic Neo"/>
+              </a:rPr>
+              <a:t>AI가 한 것</a:t>
+            </a:r>
+          </a:p>
+          <a:p>
+            <a:pPr algn="l"/>
+            <a:r>
+              <a:rPr sz="600" b="0">
+                <a:solidFill>
+                  <a:srgbClr val="6B7280"/>
+                </a:solidFill>
+                <a:latin typeface="Apple SD Gothic Neo"/>
+              </a:rPr>
+              <a:t/>
+            </a:r>
+          </a:p>
+          <a:p>
+            <a:pPr algn="l"/>
+            <a:r>
+              <a:rPr sz="2100" b="1">
+                <a:solidFill>
+                  <a:srgbClr val="1A1A1A"/>
+                </a:solidFill>
+                <a:latin typeface="Apple SD Gothic Neo"/>
+              </a:rPr>
+              <a:t>보험료를 '맞춤 계산'까지
+만들려 함</a:t>
+            </a:r>
+          </a:p>
+        </p:txBody>
+      </p:sp>
+      <p:sp>
+        <p:nvSpPr>
+          <p:cNvPr id="5" name="TextBox 4"/>
           <p:cNvSpPr txBox="1"/>
           <p:nvPr/>
         </p:nvSpPr>
         <p:spPr>
           <a:xfrm>
-            <a:off x="822960" y="2651760"/>
-            <a:ext cx="10607040" cy="1554480"/>
+            <a:off x="5733288" y="3383280"/>
+            <a:ext cx="731520" cy="640080"/>
           </a:xfrm>
           <a:prstGeom prst="rect">
             <a:avLst/>
@@ -10163,49 +10948,93 @@
           <a:p>
             <a:pPr algn="ctr"/>
             <a:r>
-              <a:rPr sz="3200" b="1" spc="-60">
+              <a:rPr sz="3400" b="1">
+                <a:solidFill>
+                  <a:srgbClr val="5B5BD6"/>
+                </a:solidFill>
+                <a:latin typeface="Apple SD Gothic Neo"/>
+              </a:rPr>
+              <a:t>→</a:t>
+            </a:r>
+          </a:p>
+        </p:txBody>
+      </p:sp>
+      <p:sp>
+        <p:nvSpPr>
+          <p:cNvPr id="6" name="Rounded Rectangle 5"/>
+          <p:cNvSpPr/>
+          <p:nvPr/>
+        </p:nvSpPr>
+        <p:spPr>
+          <a:xfrm>
+            <a:off x="6629400" y="2743200"/>
+            <a:ext cx="4800600" cy="1920240"/>
+          </a:xfrm>
+          <a:prstGeom prst="roundRect">
+            <a:avLst>
+              <a:gd name="adj" fmla="val 12000"/>
+            </a:avLst>
+          </a:prstGeom>
+          <a:solidFill>
+            <a:srgbClr val="ECEBFB"/>
+          </a:solidFill>
+          <a:ln>
+            <a:noFill/>
+          </a:ln>
+          <a:effectLst/>
+        </p:spPr>
+        <p:style>
+          <a:lnRef idx="1">
+            <a:schemeClr val="accent1"/>
+          </a:lnRef>
+          <a:fillRef idx="3">
+            <a:schemeClr val="accent1"/>
+          </a:fillRef>
+          <a:effectRef idx="2">
+            <a:schemeClr val="accent1"/>
+          </a:effectRef>
+          <a:fontRef idx="minor">
+            <a:schemeClr val="lt1"/>
+          </a:fontRef>
+        </p:style>
+        <p:txBody>
+          <a:bodyPr rtlCol="0" anchor="ctr" tIns="101600" bIns="101600" lIns="203200" rIns="203200" wrap="square"/>
+          <a:lstStyle/>
+          <a:p>
+            <a:pPr algn="l"/>
+            <a:r>
+              <a:rPr sz="1600" b="1">
+                <a:solidFill>
+                  <a:srgbClr val="5B5BD6"/>
+                </a:solidFill>
+                <a:latin typeface="Apple SD Gothic Neo"/>
+              </a:rPr>
+              <a:t>내가 통제</a:t>
+            </a:r>
+          </a:p>
+          <a:p>
+            <a:pPr algn="l"/>
+            <a:r>
+              <a:rPr sz="600" b="0">
+                <a:solidFill>
+                  <a:srgbClr val="6B7280"/>
+                </a:solidFill>
+                <a:latin typeface="Apple SD Gothic Neo"/>
+              </a:rPr>
+              <a:t/>
+            </a:r>
+          </a:p>
+          <a:p>
+            <a:pPr algn="l"/>
+            <a:r>
+              <a:rPr sz="2100" b="1">
                 <a:solidFill>
                   <a:srgbClr val="1A1A1A"/>
                 </a:solidFill>
                 <a:latin typeface="Apple SD Gothic Neo"/>
               </a:rPr>
-              <a:t>AI가 짠 설계를 다이어그램·유스케이스에
-대고 한 질문씩 캐물었다.</a:t>
-            </a:r>
-          </a:p>
-        </p:txBody>
-      </p:sp>
-      <p:sp>
-        <p:nvSpPr>
-          <p:cNvPr id="5" name="TextBox 4"/>
-          <p:cNvSpPr txBox="1"/>
-          <p:nvPr/>
-        </p:nvSpPr>
-        <p:spPr>
-          <a:xfrm>
-            <a:off x="822960" y="4434840"/>
-            <a:ext cx="10607040" cy="914400"/>
-          </a:xfrm>
-          <a:prstGeom prst="rect">
-            <a:avLst/>
-          </a:prstGeom>
-          <a:noFill/>
-        </p:spPr>
-        <p:txBody>
-          <a:bodyPr wrap="square" anchor="t">
-            <a:spAutoFit/>
-          </a:bodyPr>
-          <a:lstStyle/>
-          <a:p>
-            <a:pPr algn="ctr"/>
-            <a:r>
-              <a:rPr sz="2200" b="0" spc="-30">
-                <a:solidFill>
-                  <a:srgbClr val="6B7280"/>
-                </a:solidFill>
-                <a:latin typeface="Apple SD Gothic Neo"/>
-              </a:rPr>
-              <a:t>결정은 전부 사람이 내렸다.</a:t>
+              <a:t>유스케이스 범위(예시만)로
+되돌림</a:t>
             </a:r>
           </a:p>
         </p:txBody>
@@ -10266,7 +11095,7 @@
                 </a:solidFill>
                 <a:latin typeface="Apple SD Gothic Neo"/>
               </a:rPr>
-              <a:t>취조 ① — 빠뜨린 걸 잡다</a:t>
+              <a:t>취조 ④ — 멋대로 늘린 걸 막다</a:t>
             </a:r>
           </a:p>
         </p:txBody>
@@ -10391,8 +11220,8 @@
                 </a:solidFill>
                 <a:latin typeface="Apple SD Gothic Neo"/>
               </a:rPr>
-              <a:t>유스케이스 17개에
-'회원가입'이 없었다</a:t>
+              <a:t>상태값에 CONDITIONAL을
+임의로 추가</a:t>
             </a:r>
           </a:p>
         </p:txBody>
@@ -10506,8 +11335,8 @@
                 </a:solidFill>
                 <a:latin typeface="Apple SD Gothic Neo"/>
               </a:rPr>
-              <a:t>회원가입을 명시적으로
-추가하기로 결정</a:t>
+              <a:t>다이어그램 3값 유지,
+조건부는 심사가 책임</a:t>
             </a:r>
           </a:p>
         </p:txBody>
@@ -10568,7 +11397,7 @@
                 </a:solidFill>
                 <a:latin typeface="Apple SD Gothic Neo"/>
               </a:rPr>
-              <a:t>취조 ② — 흔들리는 용어를 잡다</a:t>
+              <a:t>AI는 공짜가 아니다</a:t>
             </a:r>
           </a:p>
         </p:txBody>
@@ -10619,96 +11448,14 @@
       </p:sp>
       <p:sp>
         <p:nvSpPr>
-          <p:cNvPr id="4" name="Rounded Rectangle 3"/>
-          <p:cNvSpPr/>
-          <p:nvPr/>
-        </p:nvSpPr>
-        <p:spPr>
-          <a:xfrm>
-            <a:off x="777240" y="2743200"/>
-            <a:ext cx="4800600" cy="1920240"/>
-          </a:xfrm>
-          <a:prstGeom prst="roundRect">
-            <a:avLst>
-              <a:gd name="adj" fmla="val 12000"/>
-            </a:avLst>
-          </a:prstGeom>
-          <a:solidFill>
-            <a:srgbClr val="F4F4F6"/>
-          </a:solidFill>
-          <a:ln w="16510">
-            <a:solidFill>
-              <a:srgbClr val="E6E6E6"/>
-            </a:solidFill>
-          </a:ln>
-          <a:effectLst/>
-        </p:spPr>
-        <p:style>
-          <a:lnRef idx="1">
-            <a:schemeClr val="accent1"/>
-          </a:lnRef>
-          <a:fillRef idx="3">
-            <a:schemeClr val="accent1"/>
-          </a:fillRef>
-          <a:effectRef idx="2">
-            <a:schemeClr val="accent1"/>
-          </a:effectRef>
-          <a:fontRef idx="minor">
-            <a:schemeClr val="lt1"/>
-          </a:fontRef>
-        </p:style>
-        <p:txBody>
-          <a:bodyPr rtlCol="0" anchor="ctr" tIns="101600" bIns="101600" lIns="203200" rIns="203200" wrap="square"/>
-          <a:lstStyle/>
-          <a:p>
-            <a:pPr algn="l"/>
-            <a:r>
-              <a:rPr sz="1600" b="1">
-                <a:solidFill>
-                  <a:srgbClr val="6B7280"/>
-                </a:solidFill>
-                <a:latin typeface="Apple SD Gothic Neo"/>
-              </a:rPr>
-              <a:t>AI가 한 것</a:t>
-            </a:r>
-          </a:p>
-          <a:p>
-            <a:pPr algn="l"/>
-            <a:r>
-              <a:rPr sz="600" b="0">
-                <a:solidFill>
-                  <a:srgbClr val="6B7280"/>
-                </a:solidFill>
-                <a:latin typeface="Apple SD Gothic Neo"/>
-              </a:rPr>
-              <a:t/>
-            </a:r>
-          </a:p>
-          <a:p>
-            <a:pPr algn="l"/>
-            <a:r>
-              <a:rPr sz="2100" b="1">
-                <a:solidFill>
-                  <a:srgbClr val="1A1A1A"/>
-                </a:solidFill>
-                <a:latin typeface="Apple SD Gothic Neo"/>
-              </a:rPr>
-              <a:t>같은 사람을 Policyholder·
-account·user로 섞어 부름</a:t>
-            </a:r>
-          </a:p>
-        </p:txBody>
-      </p:sp>
-      <p:sp>
-        <p:nvSpPr>
-          <p:cNvPr id="5" name="TextBox 4"/>
+          <p:cNvPr id="4" name="TextBox 3"/>
           <p:cNvSpPr txBox="1"/>
           <p:nvPr/>
         </p:nvSpPr>
         <p:spPr>
           <a:xfrm>
-            <a:off x="5733288" y="3383280"/>
-            <a:ext cx="731520" cy="640080"/>
+            <a:off x="822960" y="2651760"/>
+            <a:ext cx="10607040" cy="1554480"/>
           </a:xfrm>
           <a:prstGeom prst="rect">
             <a:avLst/>
@@ -10723,93 +11470,13 @@
           <a:p>
             <a:pPr algn="ctr"/>
             <a:r>
-              <a:rPr sz="3400" b="1">
-                <a:solidFill>
-                  <a:srgbClr val="5B5BD6"/>
-                </a:solidFill>
-                <a:latin typeface="Apple SD Gothic Neo"/>
-              </a:rPr>
-              <a:t>→</a:t>
-            </a:r>
-          </a:p>
-        </p:txBody>
-      </p:sp>
-      <p:sp>
-        <p:nvSpPr>
-          <p:cNvPr id="6" name="Rounded Rectangle 5"/>
-          <p:cNvSpPr/>
-          <p:nvPr/>
-        </p:nvSpPr>
-        <p:spPr>
-          <a:xfrm>
-            <a:off x="6629400" y="2743200"/>
-            <a:ext cx="4800600" cy="1920240"/>
-          </a:xfrm>
-          <a:prstGeom prst="roundRect">
-            <a:avLst>
-              <a:gd name="adj" fmla="val 12000"/>
-            </a:avLst>
-          </a:prstGeom>
-          <a:solidFill>
-            <a:srgbClr val="ECEBFB"/>
-          </a:solidFill>
-          <a:ln>
-            <a:noFill/>
-          </a:ln>
-          <a:effectLst/>
-        </p:spPr>
-        <p:style>
-          <a:lnRef idx="1">
-            <a:schemeClr val="accent1"/>
-          </a:lnRef>
-          <a:fillRef idx="3">
-            <a:schemeClr val="accent1"/>
-          </a:fillRef>
-          <a:effectRef idx="2">
-            <a:schemeClr val="accent1"/>
-          </a:effectRef>
-          <a:fontRef idx="minor">
-            <a:schemeClr val="lt1"/>
-          </a:fontRef>
-        </p:style>
-        <p:txBody>
-          <a:bodyPr rtlCol="0" anchor="ctr" tIns="101600" bIns="101600" lIns="203200" rIns="203200" wrap="square"/>
-          <a:lstStyle/>
-          <a:p>
-            <a:pPr algn="l"/>
-            <a:r>
-              <a:rPr sz="1600" b="1">
-                <a:solidFill>
-                  <a:srgbClr val="5B5BD6"/>
-                </a:solidFill>
-                <a:latin typeface="Apple SD Gothic Neo"/>
-              </a:rPr>
-              <a:t>내가 통제</a:t>
-            </a:r>
-          </a:p>
-          <a:p>
-            <a:pPr algn="l"/>
-            <a:r>
-              <a:rPr sz="600" b="0">
-                <a:solidFill>
-                  <a:srgbClr val="6B7280"/>
-                </a:solidFill>
-                <a:latin typeface="Apple SD Gothic Neo"/>
-              </a:rPr>
-              <a:t/>
-            </a:r>
-          </a:p>
-          <a:p>
-            <a:pPr algn="l"/>
-            <a:r>
-              <a:rPr sz="2100" b="1">
+              <a:rPr sz="4000" b="1" spc="-60">
                 <a:solidFill>
                   <a:srgbClr val="1A1A1A"/>
                 </a:solidFill>
                 <a:latin typeface="Apple SD Gothic Neo"/>
               </a:rPr>
-              <a:t>CONTEXT.md에
-표준어 하나로 못박음</a:t>
+              <a:t>한 Epic에  $39.63  ·  토큰 5,100만</a:t>
             </a:r>
           </a:p>
         </p:txBody>
@@ -10870,7 +11537,7 @@
                 </a:solidFill>
                 <a:latin typeface="Apple SD Gothic Neo"/>
               </a:rPr>
-              <a:t>취조 ③ — 과한 구현을 막다</a:t>
+              <a:t>돈 먹은 범인</a:t>
             </a:r>
           </a:p>
         </p:txBody>
@@ -10921,96 +11588,14 @@
       </p:sp>
       <p:sp>
         <p:nvSpPr>
-          <p:cNvPr id="4" name="Rounded Rectangle 3"/>
-          <p:cNvSpPr/>
-          <p:nvPr/>
-        </p:nvSpPr>
-        <p:spPr>
-          <a:xfrm>
-            <a:off x="777240" y="2743200"/>
-            <a:ext cx="4800600" cy="1920240"/>
-          </a:xfrm>
-          <a:prstGeom prst="roundRect">
-            <a:avLst>
-              <a:gd name="adj" fmla="val 12000"/>
-            </a:avLst>
-          </a:prstGeom>
-          <a:solidFill>
-            <a:srgbClr val="F4F4F6"/>
-          </a:solidFill>
-          <a:ln w="16510">
-            <a:solidFill>
-              <a:srgbClr val="E6E6E6"/>
-            </a:solidFill>
-          </a:ln>
-          <a:effectLst/>
-        </p:spPr>
-        <p:style>
-          <a:lnRef idx="1">
-            <a:schemeClr val="accent1"/>
-          </a:lnRef>
-          <a:fillRef idx="3">
-            <a:schemeClr val="accent1"/>
-          </a:fillRef>
-          <a:effectRef idx="2">
-            <a:schemeClr val="accent1"/>
-          </a:effectRef>
-          <a:fontRef idx="minor">
-            <a:schemeClr val="lt1"/>
-          </a:fontRef>
-        </p:style>
-        <p:txBody>
-          <a:bodyPr rtlCol="0" anchor="ctr" tIns="101600" bIns="101600" lIns="203200" rIns="203200" wrap="square"/>
-          <a:lstStyle/>
-          <a:p>
-            <a:pPr algn="l"/>
-            <a:r>
-              <a:rPr sz="1600" b="1">
-                <a:solidFill>
-                  <a:srgbClr val="6B7280"/>
-                </a:solidFill>
-                <a:latin typeface="Apple SD Gothic Neo"/>
-              </a:rPr>
-              <a:t>AI가 한 것</a:t>
-            </a:r>
-          </a:p>
-          <a:p>
-            <a:pPr algn="l"/>
-            <a:r>
-              <a:rPr sz="600" b="0">
-                <a:solidFill>
-                  <a:srgbClr val="6B7280"/>
-                </a:solidFill>
-                <a:latin typeface="Apple SD Gothic Neo"/>
-              </a:rPr>
-              <a:t/>
-            </a:r>
-          </a:p>
-          <a:p>
-            <a:pPr algn="l"/>
-            <a:r>
-              <a:rPr sz="2100" b="1">
-                <a:solidFill>
-                  <a:srgbClr val="1A1A1A"/>
-                </a:solidFill>
-                <a:latin typeface="Apple SD Gothic Neo"/>
-              </a:rPr>
-              <a:t>보험료를 '맞춤 계산'까지
-만들려 함</a:t>
-            </a:r>
-          </a:p>
-        </p:txBody>
-      </p:sp>
-      <p:sp>
-        <p:nvSpPr>
-          <p:cNvPr id="5" name="TextBox 4"/>
+          <p:cNvPr id="4" name="TextBox 3"/>
           <p:cNvSpPr txBox="1"/>
           <p:nvPr/>
         </p:nvSpPr>
         <p:spPr>
           <a:xfrm>
-            <a:off x="5733288" y="3383280"/>
-            <a:ext cx="731520" cy="640080"/>
+            <a:off x="822960" y="2651760"/>
+            <a:ext cx="10607040" cy="1554480"/>
           </a:xfrm>
           <a:prstGeom prst="rect">
             <a:avLst/>
@@ -11025,93 +11610,49 @@
           <a:p>
             <a:pPr algn="ctr"/>
             <a:r>
-              <a:rPr sz="3400" b="1">
-                <a:solidFill>
-                  <a:srgbClr val="5B5BD6"/>
-                </a:solidFill>
-                <a:latin typeface="Apple SD Gothic Neo"/>
-              </a:rPr>
-              <a:t>→</a:t>
-            </a:r>
-          </a:p>
-        </p:txBody>
-      </p:sp>
-      <p:sp>
-        <p:nvSpPr>
-          <p:cNvPr id="6" name="Rounded Rectangle 5"/>
-          <p:cNvSpPr/>
-          <p:nvPr/>
-        </p:nvSpPr>
-        <p:spPr>
-          <a:xfrm>
-            <a:off x="6629400" y="2743200"/>
-            <a:ext cx="4800600" cy="1920240"/>
-          </a:xfrm>
-          <a:prstGeom prst="roundRect">
-            <a:avLst>
-              <a:gd name="adj" fmla="val 12000"/>
-            </a:avLst>
-          </a:prstGeom>
-          <a:solidFill>
-            <a:srgbClr val="ECEBFB"/>
-          </a:solidFill>
-          <a:ln>
-            <a:noFill/>
-          </a:ln>
-          <a:effectLst/>
-        </p:spPr>
-        <p:style>
-          <a:lnRef idx="1">
-            <a:schemeClr val="accent1"/>
-          </a:lnRef>
-          <a:fillRef idx="3">
-            <a:schemeClr val="accent1"/>
-          </a:fillRef>
-          <a:effectRef idx="2">
-            <a:schemeClr val="accent1"/>
-          </a:effectRef>
-          <a:fontRef idx="minor">
-            <a:schemeClr val="lt1"/>
-          </a:fontRef>
-        </p:style>
-        <p:txBody>
-          <a:bodyPr rtlCol="0" anchor="ctr" tIns="101600" bIns="101600" lIns="203200" rIns="203200" wrap="square"/>
-          <a:lstStyle/>
-          <a:p>
-            <a:pPr algn="l"/>
-            <a:r>
-              <a:rPr sz="1600" b="1">
-                <a:solidFill>
-                  <a:srgbClr val="5B5BD6"/>
-                </a:solidFill>
-                <a:latin typeface="Apple SD Gothic Neo"/>
-              </a:rPr>
-              <a:t>내가 통제</a:t>
-            </a:r>
-          </a:p>
-          <a:p>
-            <a:pPr algn="l"/>
-            <a:r>
-              <a:rPr sz="600" b="0">
+              <a:rPr sz="3400" b="1" spc="-60">
+                <a:solidFill>
+                  <a:srgbClr val="1A1A1A"/>
+                </a:solidFill>
+                <a:latin typeface="Apple SD Gothic Neo"/>
+              </a:rPr>
+              <a:t>코드 생성이 아니라
+'긴 컨텍스트 재읽기'</a:t>
+            </a:r>
+          </a:p>
+        </p:txBody>
+      </p:sp>
+      <p:sp>
+        <p:nvSpPr>
+          <p:cNvPr id="5" name="TextBox 4"/>
+          <p:cNvSpPr txBox="1"/>
+          <p:nvPr/>
+        </p:nvSpPr>
+        <p:spPr>
+          <a:xfrm>
+            <a:off x="822960" y="4434840"/>
+            <a:ext cx="10607040" cy="914400"/>
+          </a:xfrm>
+          <a:prstGeom prst="rect">
+            <a:avLst/>
+          </a:prstGeom>
+          <a:noFill/>
+        </p:spPr>
+        <p:txBody>
+          <a:bodyPr wrap="square" anchor="t">
+            <a:spAutoFit/>
+          </a:bodyPr>
+          <a:lstStyle/>
+          <a:p>
+            <a:pPr algn="ctr"/>
+            <a:r>
+              <a:rPr sz="2200" b="0" spc="-30">
                 <a:solidFill>
                   <a:srgbClr val="6B7280"/>
                 </a:solidFill>
                 <a:latin typeface="Apple SD Gothic Neo"/>
               </a:rPr>
-              <a:t/>
-            </a:r>
-          </a:p>
-          <a:p>
-            <a:pPr algn="l"/>
-            <a:r>
-              <a:rPr sz="2100" b="1">
-                <a:solidFill>
-                  <a:srgbClr val="1A1A1A"/>
-                </a:solidFill>
-                <a:latin typeface="Apple SD Gothic Neo"/>
-              </a:rPr>
-              <a:t>유스케이스 범위(예시만)로
-되돌림</a:t>
+              <a:t>캐시 읽기만 4,580만 토큰 — 전체 비용의 90%</a:t>
             </a:r>
           </a:p>
         </p:txBody>
@@ -11172,7 +11713,7 @@
                 </a:solidFill>
                 <a:latin typeface="Apple SD Gothic Neo"/>
               </a:rPr>
-              <a:t>취조 ④ — 멋대로 늘린 걸 막다</a:t>
+              <a:t>그래서 바꾼 것</a:t>
             </a:r>
           </a:p>
         </p:txBody>
@@ -11223,14 +11764,49 @@
       </p:sp>
       <p:sp>
         <p:nvSpPr>
-          <p:cNvPr id="4" name="Rounded Rectangle 3"/>
+          <p:cNvPr id="4" name="TextBox 3"/>
+          <p:cNvSpPr txBox="1"/>
+          <p:nvPr/>
+        </p:nvSpPr>
+        <p:spPr>
+          <a:xfrm>
+            <a:off x="822960" y="2286000"/>
+            <a:ext cx="10607040" cy="914400"/>
+          </a:xfrm>
+          <a:prstGeom prst="rect">
+            <a:avLst/>
+          </a:prstGeom>
+          <a:noFill/>
+        </p:spPr>
+        <p:txBody>
+          <a:bodyPr wrap="square" anchor="t">
+            <a:spAutoFit/>
+          </a:bodyPr>
+          <a:lstStyle/>
+          <a:p>
+            <a:pPr algn="ctr"/>
+            <a:r>
+              <a:rPr sz="2600" b="1" spc="-40">
+                <a:solidFill>
+                  <a:srgbClr val="1A1A1A"/>
+                </a:solidFill>
+                <a:latin typeface="Apple SD Gothic Neo"/>
+              </a:rPr>
+              <a:t>비용을 줄이려고 습관을 바꿨다.</a:t>
+            </a:r>
+          </a:p>
+        </p:txBody>
+      </p:sp>
+      <p:sp>
+        <p:nvSpPr>
+          <p:cNvPr id="5" name="Rounded Rectangle 4"/>
           <p:cNvSpPr/>
           <p:nvPr/>
         </p:nvSpPr>
         <p:spPr>
           <a:xfrm>
-            <a:off x="777240" y="2743200"/>
-            <a:ext cx="4800600" cy="1920240"/>
+            <a:off x="1066647" y="3566160"/>
+            <a:ext cx="3108960" cy="1371600"/>
           </a:xfrm>
           <a:prstGeom prst="roundRect">
             <a:avLst>
@@ -11265,31 +11841,7 @@
           <a:bodyPr rtlCol="0" anchor="ctr" tIns="101600" bIns="101600" lIns="203200" rIns="203200" wrap="square"/>
           <a:lstStyle/>
           <a:p>
-            <a:pPr algn="l"/>
-            <a:r>
-              <a:rPr sz="1600" b="1">
-                <a:solidFill>
-                  <a:srgbClr val="6B7280"/>
-                </a:solidFill>
-                <a:latin typeface="Apple SD Gothic Neo"/>
-              </a:rPr>
-              <a:t>AI가 한 것</a:t>
-            </a:r>
-          </a:p>
-          <a:p>
-            <a:pPr algn="l"/>
-            <a:r>
-              <a:rPr sz="600" b="0">
-                <a:solidFill>
-                  <a:srgbClr val="6B7280"/>
-                </a:solidFill>
-                <a:latin typeface="Apple SD Gothic Neo"/>
-              </a:rPr>
-              <a:t/>
-            </a:r>
-          </a:p>
-          <a:p>
-            <a:pPr algn="l"/>
+            <a:pPr algn="ctr"/>
             <a:r>
               <a:rPr sz="2100" b="1">
                 <a:solidFill>
@@ -11297,43 +11849,8 @@
                 </a:solidFill>
                 <a:latin typeface="Apple SD Gothic Neo"/>
               </a:rPr>
-              <a:t>상태값에 CONDITIONAL을
-임의로 추가</a:t>
-            </a:r>
-          </a:p>
-        </p:txBody>
-      </p:sp>
-      <p:sp>
-        <p:nvSpPr>
-          <p:cNvPr id="5" name="TextBox 4"/>
-          <p:cNvSpPr txBox="1"/>
-          <p:nvPr/>
-        </p:nvSpPr>
-        <p:spPr>
-          <a:xfrm>
-            <a:off x="5733288" y="3383280"/>
-            <a:ext cx="731520" cy="640080"/>
-          </a:xfrm>
-          <a:prstGeom prst="rect">
-            <a:avLst/>
-          </a:prstGeom>
-          <a:noFill/>
-        </p:spPr>
-        <p:txBody>
-          <a:bodyPr wrap="square" anchor="ctr">
-            <a:spAutoFit/>
-          </a:bodyPr>
-          <a:lstStyle/>
-          <a:p>
-            <a:pPr algn="ctr"/>
-            <a:r>
-              <a:rPr sz="3400" b="1">
-                <a:solidFill>
-                  <a:srgbClr val="5B5BD6"/>
-                </a:solidFill>
-                <a:latin typeface="Apple SD Gothic Neo"/>
-              </a:rPr>
-              <a:t>→</a:t>
+              <a:t>Epic 끝나면
+/clear</a:t>
             </a:r>
           </a:p>
         </p:txBody>
@@ -11346,8 +11863,8 @@
         </p:nvSpPr>
         <p:spPr>
           <a:xfrm>
-            <a:off x="6629400" y="2743200"/>
-            <a:ext cx="4800600" cy="1920240"/>
+            <a:off x="4541367" y="3566160"/>
+            <a:ext cx="3108960" cy="1371600"/>
           </a:xfrm>
           <a:prstGeom prst="roundRect">
             <a:avLst>
@@ -11355,10 +11872,12 @@
             </a:avLst>
           </a:prstGeom>
           <a:solidFill>
-            <a:srgbClr val="ECEBFB"/>
+            <a:srgbClr val="F4F4F6"/>
           </a:solidFill>
-          <a:ln>
-            <a:noFill/>
+          <a:ln w="16510">
+            <a:solidFill>
+              <a:srgbClr val="E6E6E6"/>
+            </a:solidFill>
           </a:ln>
           <a:effectLst/>
         </p:spPr>
@@ -11380,31 +11899,7 @@
           <a:bodyPr rtlCol="0" anchor="ctr" tIns="101600" bIns="101600" lIns="203200" rIns="203200" wrap="square"/>
           <a:lstStyle/>
           <a:p>
-            <a:pPr algn="l"/>
-            <a:r>
-              <a:rPr sz="1600" b="1">
-                <a:solidFill>
-                  <a:srgbClr val="5B5BD6"/>
-                </a:solidFill>
-                <a:latin typeface="Apple SD Gothic Neo"/>
-              </a:rPr>
-              <a:t>내가 통제</a:t>
-            </a:r>
-          </a:p>
-          <a:p>
-            <a:pPr algn="l"/>
-            <a:r>
-              <a:rPr sz="600" b="0">
-                <a:solidFill>
-                  <a:srgbClr val="6B7280"/>
-                </a:solidFill>
-                <a:latin typeface="Apple SD Gothic Neo"/>
-              </a:rPr>
-              <a:t/>
-            </a:r>
-          </a:p>
-          <a:p>
-            <a:pPr algn="l"/>
+            <a:pPr algn="ctr"/>
             <a:r>
               <a:rPr sz="2100" b="1">
                 <a:solidFill>
@@ -11412,8 +11907,66 @@
                 </a:solidFill>
                 <a:latin typeface="Apple SD Gothic Neo"/>
               </a:rPr>
-              <a:t>다이어그램 3값 유지,
-조건부는 심사가 책임</a:t>
+              <a:t>단순 작업은
+Sonnet</a:t>
+            </a:r>
+          </a:p>
+        </p:txBody>
+      </p:sp>
+      <p:sp>
+        <p:nvSpPr>
+          <p:cNvPr id="7" name="Rounded Rectangle 6"/>
+          <p:cNvSpPr/>
+          <p:nvPr/>
+        </p:nvSpPr>
+        <p:spPr>
+          <a:xfrm>
+            <a:off x="8016087" y="3566160"/>
+            <a:ext cx="3108960" cy="1371600"/>
+          </a:xfrm>
+          <a:prstGeom prst="roundRect">
+            <a:avLst>
+              <a:gd name="adj" fmla="val 12000"/>
+            </a:avLst>
+          </a:prstGeom>
+          <a:solidFill>
+            <a:srgbClr val="F4F4F6"/>
+          </a:solidFill>
+          <a:ln w="16510">
+            <a:solidFill>
+              <a:srgbClr val="E6E6E6"/>
+            </a:solidFill>
+          </a:ln>
+          <a:effectLst/>
+        </p:spPr>
+        <p:style>
+          <a:lnRef idx="1">
+            <a:schemeClr val="accent1"/>
+          </a:lnRef>
+          <a:fillRef idx="3">
+            <a:schemeClr val="accent1"/>
+          </a:fillRef>
+          <a:effectRef idx="2">
+            <a:schemeClr val="accent1"/>
+          </a:effectRef>
+          <a:fontRef idx="minor">
+            <a:schemeClr val="lt1"/>
+          </a:fontRef>
+        </p:style>
+        <p:txBody>
+          <a:bodyPr rtlCol="0" anchor="ctr" tIns="101600" bIns="101600" lIns="203200" rIns="203200" wrap="square"/>
+          <a:lstStyle/>
+          <a:p>
+            <a:pPr algn="ctr"/>
+            <a:r>
+              <a:rPr sz="2100" b="1">
+                <a:solidFill>
+                  <a:srgbClr val="1A1A1A"/>
+                </a:solidFill>
+                <a:latin typeface="Apple SD Gothic Neo"/>
+              </a:rPr>
+              <a:t>리뷰 횟수
+최소화</a:t>
             </a:r>
           </a:p>
         </p:txBody>
@@ -11474,7 +12027,7 @@
                 </a:solidFill>
                 <a:latin typeface="Apple SD Gothic Neo"/>
               </a:rPr>
-              <a:t>AI는 공짜가 아니다</a:t>
+              <a:t>다중 리뷰의 두 얼굴</a:t>
             </a:r>
           </a:p>
         </p:txBody>
@@ -11525,35 +12078,159 @@
       </p:sp>
       <p:sp>
         <p:nvSpPr>
-          <p:cNvPr id="4" name="TextBox 3"/>
-          <p:cNvSpPr txBox="1"/>
-          <p:nvPr/>
-        </p:nvSpPr>
-        <p:spPr>
-          <a:xfrm>
-            <a:off x="822960" y="2651760"/>
-            <a:ext cx="10607040" cy="1554480"/>
-          </a:xfrm>
-          <a:prstGeom prst="rect">
-            <a:avLst/>
-          </a:prstGeom>
-          <a:noFill/>
-        </p:spPr>
-        <p:txBody>
-          <a:bodyPr wrap="square" anchor="ctr">
-            <a:spAutoFit/>
-          </a:bodyPr>
-          <a:lstStyle/>
-          <a:p>
-            <a:pPr algn="ctr"/>
-            <a:r>
-              <a:rPr sz="4000" b="1" spc="-60">
+          <p:cNvPr id="4" name="Rounded Rectangle 3"/>
+          <p:cNvSpPr/>
+          <p:nvPr/>
+        </p:nvSpPr>
+        <p:spPr>
+          <a:xfrm>
+            <a:off x="777240" y="2743200"/>
+            <a:ext cx="4800600" cy="1920240"/>
+          </a:xfrm>
+          <a:prstGeom prst="roundRect">
+            <a:avLst>
+              <a:gd name="adj" fmla="val 12000"/>
+            </a:avLst>
+          </a:prstGeom>
+          <a:solidFill>
+            <a:srgbClr val="ECEBFB"/>
+          </a:solidFill>
+          <a:ln>
+            <a:noFill/>
+          </a:ln>
+          <a:effectLst/>
+        </p:spPr>
+        <p:style>
+          <a:lnRef idx="1">
+            <a:schemeClr val="accent1"/>
+          </a:lnRef>
+          <a:fillRef idx="3">
+            <a:schemeClr val="accent1"/>
+          </a:fillRef>
+          <a:effectRef idx="2">
+            <a:schemeClr val="accent1"/>
+          </a:effectRef>
+          <a:fontRef idx="minor">
+            <a:schemeClr val="lt1"/>
+          </a:fontRef>
+        </p:style>
+        <p:txBody>
+          <a:bodyPr rtlCol="0" anchor="ctr" tIns="101600" bIns="101600" lIns="203200" rIns="203200" wrap="square"/>
+          <a:lstStyle/>
+          <a:p>
+            <a:pPr algn="l"/>
+            <a:r>
+              <a:rPr sz="1800" b="1">
+                <a:solidFill>
+                  <a:srgbClr val="5B5BD6"/>
+                </a:solidFill>
+                <a:latin typeface="Apple SD Gothic Neo"/>
+              </a:rPr>
+              <a:t>좋은 점</a:t>
+            </a:r>
+          </a:p>
+          <a:p>
+            <a:pPr algn="l"/>
+            <a:r>
+              <a:rPr sz="600" b="0">
+                <a:solidFill>
+                  <a:srgbClr val="6B7280"/>
+                </a:solidFill>
+                <a:latin typeface="Apple SD Gothic Neo"/>
+              </a:rPr>
+              <a:t/>
+            </a:r>
+          </a:p>
+          <a:p>
+            <a:pPr algn="l"/>
+            <a:r>
+              <a:rPr sz="2100" b="1">
                 <a:solidFill>
                   <a:srgbClr val="1A1A1A"/>
                 </a:solidFill>
                 <a:latin typeface="Apple SD Gothic Neo"/>
               </a:rPr>
-              <a:t>한 Epic에  $39.63  ·  토큰 5,100만</a:t>
+              <a:t>버그 6개를 미리 발견</a:t>
+            </a:r>
+          </a:p>
+        </p:txBody>
+      </p:sp>
+      <p:sp>
+        <p:nvSpPr>
+          <p:cNvPr id="5" name="Rounded Rectangle 4"/>
+          <p:cNvSpPr/>
+          <p:nvPr/>
+        </p:nvSpPr>
+        <p:spPr>
+          <a:xfrm>
+            <a:off x="6629400" y="2743200"/>
+            <a:ext cx="4800600" cy="1920240"/>
+          </a:xfrm>
+          <a:prstGeom prst="roundRect">
+            <a:avLst>
+              <a:gd name="adj" fmla="val 12000"/>
+            </a:avLst>
+          </a:prstGeom>
+          <a:solidFill>
+            <a:srgbClr val="F4F4F6"/>
+          </a:solidFill>
+          <a:ln>
+            <a:noFill/>
+          </a:ln>
+          <a:effectLst/>
+        </p:spPr>
+        <p:style>
+          <a:lnRef idx="1">
+            <a:schemeClr val="accent1"/>
+          </a:lnRef>
+          <a:fillRef idx="3">
+            <a:schemeClr val="accent1"/>
+          </a:fillRef>
+          <a:effectRef idx="2">
+            <a:schemeClr val="accent1"/>
+          </a:effectRef>
+          <a:fontRef idx="minor">
+            <a:schemeClr val="lt1"/>
+          </a:fontRef>
+        </p:style>
+        <p:txBody>
+          <a:bodyPr rtlCol="0" anchor="ctr" tIns="101600" bIns="101600" lIns="203200" rIns="203200" wrap="square"/>
+          <a:lstStyle/>
+          <a:p>
+            <a:pPr algn="l"/>
+            <a:r>
+              <a:rPr sz="1800" b="1">
+                <a:solidFill>
+                  <a:srgbClr val="6B7280"/>
+                </a:solidFill>
+                <a:latin typeface="Apple SD Gothic Neo"/>
+              </a:rPr>
+              <a:t>아쉬운 점</a:t>
+            </a:r>
+          </a:p>
+          <a:p>
+            <a:pPr algn="l"/>
+            <a:r>
+              <a:rPr sz="600" b="0">
+                <a:solidFill>
+                  <a:srgbClr val="6B7280"/>
+                </a:solidFill>
+                <a:latin typeface="Apple SD Gothic Neo"/>
+              </a:rPr>
+              <a:t/>
+            </a:r>
+          </a:p>
+          <a:p>
+            <a:pPr algn="l"/>
+            <a:r>
+              <a:rPr sz="2100" b="1">
+                <a:solidFill>
+                  <a:srgbClr val="1A1A1A"/>
+                </a:solidFill>
+                <a:latin typeface="Apple SD Gothic Neo"/>
+              </a:rPr>
+              <a:t>단순 작업까지 3중 리뷰
+→ 비용 과다</a:t>
             </a:r>
           </a:p>
         </p:txBody>
@@ -11614,7 +12291,7 @@
                 </a:solidFill>
                 <a:latin typeface="Apple SD Gothic Neo"/>
               </a:rPr>
-              <a:t>돈 먹은 범인</a:t>
+              <a:t>가장 큰 실수 — 발견</a:t>
             </a:r>
           </a:p>
         </p:txBody>
@@ -11687,49 +12364,14 @@
           <a:p>
             <a:pPr algn="ctr"/>
             <a:r>
-              <a:rPr sz="3400" b="1" spc="-60">
+              <a:rPr sz="3300" b="1" spc="-60">
                 <a:solidFill>
                   <a:srgbClr val="1A1A1A"/>
                 </a:solidFill>
                 <a:latin typeface="Apple SD Gothic Neo"/>
               </a:rPr>
-              <a:t>코드 생성이 아니라
-'긴 컨텍스트 재읽기'</a:t>
-            </a:r>
-          </a:p>
-        </p:txBody>
-      </p:sp>
-      <p:sp>
-        <p:nvSpPr>
-          <p:cNvPr id="5" name="TextBox 4"/>
-          <p:cNvSpPr txBox="1"/>
-          <p:nvPr/>
-        </p:nvSpPr>
-        <p:spPr>
-          <a:xfrm>
-            <a:off x="822960" y="4434840"/>
-            <a:ext cx="10607040" cy="914400"/>
-          </a:xfrm>
-          <a:prstGeom prst="rect">
-            <a:avLst/>
-          </a:prstGeom>
-          <a:noFill/>
-        </p:spPr>
-        <p:txBody>
-          <a:bodyPr wrap="square" anchor="t">
-            <a:spAutoFit/>
-          </a:bodyPr>
-          <a:lstStyle/>
-          <a:p>
-            <a:pPr algn="ctr"/>
-            <a:r>
-              <a:rPr sz="2200" b="0" spc="-30">
-                <a:solidFill>
-                  <a:srgbClr val="6B7280"/>
-                </a:solidFill>
-                <a:latin typeface="Apple SD Gothic Neo"/>
-              </a:rPr>
-              <a:t>캐시 읽기만 4,580만 토큰 — 전체 비용의 90%</a:t>
+              <a:t>자동차 사고가 직원 '심사 목록'에
+끝까지 안 떴다.</a:t>
             </a:r>
           </a:p>
         </p:txBody>
@@ -11790,7 +12432,7 @@
                 </a:solidFill>
                 <a:latin typeface="Apple SD Gothic Neo"/>
               </a:rPr>
-              <a:t>그래서 바꾼 것</a:t>
+              <a:t>왜? — 설계대로였다</a:t>
             </a:r>
           </a:p>
         </p:txBody>
@@ -11847,7 +12489,43 @@
         </p:nvSpPr>
         <p:spPr>
           <a:xfrm>
-            <a:off x="822960" y="2286000"/>
+            <a:off x="822960" y="2651760"/>
+            <a:ext cx="10607040" cy="1554480"/>
+          </a:xfrm>
+          <a:prstGeom prst="rect">
+            <a:avLst/>
+          </a:prstGeom>
+          <a:noFill/>
+        </p:spPr>
+        <p:txBody>
+          <a:bodyPr wrap="square" anchor="ctr">
+            <a:spAutoFit/>
+          </a:bodyPr>
+          <a:lstStyle/>
+          <a:p>
+            <a:pPr algn="ctr"/>
+            <a:r>
+              <a:rPr sz="3000" b="1" spc="-60">
+                <a:solidFill>
+                  <a:srgbClr val="1A1A1A"/>
+                </a:solidFill>
+                <a:latin typeface="Apple SD Gothic Neo"/>
+              </a:rPr>
+              <a:t>유스케이스(UC09): 자동차 사고는
+'접수만', 심사 큐엔 안 들어감</a:t>
+            </a:r>
+          </a:p>
+        </p:txBody>
+      </p:sp>
+      <p:sp>
+        <p:nvSpPr>
+          <p:cNvPr id="5" name="TextBox 4"/>
+          <p:cNvSpPr txBox="1"/>
+          <p:nvPr/>
+        </p:nvSpPr>
+        <p:spPr>
+          <a:xfrm>
+            <a:off x="822960" y="4434840"/>
             <a:ext cx="10607040" cy="914400"/>
           </a:xfrm>
           <a:prstGeom prst="rect">
@@ -11863,187 +12541,13 @@
           <a:p>
             <a:pPr algn="ctr"/>
             <a:r>
-              <a:rPr sz="2600" b="1" spc="-40">
-                <a:solidFill>
-                  <a:srgbClr val="1A1A1A"/>
-                </a:solidFill>
-                <a:latin typeface="Apple SD Gothic Neo"/>
-              </a:rPr>
-              <a:t>비용을 줄이려고 습관을 바꿨다.</a:t>
-            </a:r>
-          </a:p>
-        </p:txBody>
-      </p:sp>
-      <p:sp>
-        <p:nvSpPr>
-          <p:cNvPr id="5" name="Rounded Rectangle 4"/>
-          <p:cNvSpPr/>
-          <p:nvPr/>
-        </p:nvSpPr>
-        <p:spPr>
-          <a:xfrm>
-            <a:off x="1066647" y="3566160"/>
-            <a:ext cx="3108960" cy="1371600"/>
-          </a:xfrm>
-          <a:prstGeom prst="roundRect">
-            <a:avLst>
-              <a:gd name="adj" fmla="val 12000"/>
-            </a:avLst>
-          </a:prstGeom>
-          <a:solidFill>
-            <a:srgbClr val="F4F4F6"/>
-          </a:solidFill>
-          <a:ln w="16510">
-            <a:solidFill>
-              <a:srgbClr val="E6E6E6"/>
-            </a:solidFill>
-          </a:ln>
-          <a:effectLst/>
-        </p:spPr>
-        <p:style>
-          <a:lnRef idx="1">
-            <a:schemeClr val="accent1"/>
-          </a:lnRef>
-          <a:fillRef idx="3">
-            <a:schemeClr val="accent1"/>
-          </a:fillRef>
-          <a:effectRef idx="2">
-            <a:schemeClr val="accent1"/>
-          </a:effectRef>
-          <a:fontRef idx="minor">
-            <a:schemeClr val="lt1"/>
-          </a:fontRef>
-        </p:style>
-        <p:txBody>
-          <a:bodyPr rtlCol="0" anchor="ctr" tIns="101600" bIns="101600" lIns="203200" rIns="203200" wrap="square"/>
-          <a:lstStyle/>
-          <a:p>
-            <a:pPr algn="ctr"/>
-            <a:r>
-              <a:rPr sz="2100" b="1">
-                <a:solidFill>
-                  <a:srgbClr val="1A1A1A"/>
-                </a:solidFill>
-                <a:latin typeface="Apple SD Gothic Neo"/>
-              </a:rPr>
-              <a:t>Epic 끝나면
-/clear</a:t>
-            </a:r>
-          </a:p>
-        </p:txBody>
-      </p:sp>
-      <p:sp>
-        <p:nvSpPr>
-          <p:cNvPr id="6" name="Rounded Rectangle 5"/>
-          <p:cNvSpPr/>
-          <p:nvPr/>
-        </p:nvSpPr>
-        <p:spPr>
-          <a:xfrm>
-            <a:off x="4541367" y="3566160"/>
-            <a:ext cx="3108960" cy="1371600"/>
-          </a:xfrm>
-          <a:prstGeom prst="roundRect">
-            <a:avLst>
-              <a:gd name="adj" fmla="val 12000"/>
-            </a:avLst>
-          </a:prstGeom>
-          <a:solidFill>
-            <a:srgbClr val="F4F4F6"/>
-          </a:solidFill>
-          <a:ln w="16510">
-            <a:solidFill>
-              <a:srgbClr val="E6E6E6"/>
-            </a:solidFill>
-          </a:ln>
-          <a:effectLst/>
-        </p:spPr>
-        <p:style>
-          <a:lnRef idx="1">
-            <a:schemeClr val="accent1"/>
-          </a:lnRef>
-          <a:fillRef idx="3">
-            <a:schemeClr val="accent1"/>
-          </a:fillRef>
-          <a:effectRef idx="2">
-            <a:schemeClr val="accent1"/>
-          </a:effectRef>
-          <a:fontRef idx="minor">
-            <a:schemeClr val="lt1"/>
-          </a:fontRef>
-        </p:style>
-        <p:txBody>
-          <a:bodyPr rtlCol="0" anchor="ctr" tIns="101600" bIns="101600" lIns="203200" rIns="203200" wrap="square"/>
-          <a:lstStyle/>
-          <a:p>
-            <a:pPr algn="ctr"/>
-            <a:r>
-              <a:rPr sz="2100" b="1">
-                <a:solidFill>
-                  <a:srgbClr val="1A1A1A"/>
-                </a:solidFill>
-                <a:latin typeface="Apple SD Gothic Neo"/>
-              </a:rPr>
-              <a:t>단순 작업은
-Sonnet</a:t>
-            </a:r>
-          </a:p>
-        </p:txBody>
-      </p:sp>
-      <p:sp>
-        <p:nvSpPr>
-          <p:cNvPr id="7" name="Rounded Rectangle 6"/>
-          <p:cNvSpPr/>
-          <p:nvPr/>
-        </p:nvSpPr>
-        <p:spPr>
-          <a:xfrm>
-            <a:off x="8016087" y="3566160"/>
-            <a:ext cx="3108960" cy="1371600"/>
-          </a:xfrm>
-          <a:prstGeom prst="roundRect">
-            <a:avLst>
-              <a:gd name="adj" fmla="val 12000"/>
-            </a:avLst>
-          </a:prstGeom>
-          <a:solidFill>
-            <a:srgbClr val="F4F4F6"/>
-          </a:solidFill>
-          <a:ln w="16510">
-            <a:solidFill>
-              <a:srgbClr val="E6E6E6"/>
-            </a:solidFill>
-          </a:ln>
-          <a:effectLst/>
-        </p:spPr>
-        <p:style>
-          <a:lnRef idx="1">
-            <a:schemeClr val="accent1"/>
-          </a:lnRef>
-          <a:fillRef idx="3">
-            <a:schemeClr val="accent1"/>
-          </a:fillRef>
-          <a:effectRef idx="2">
-            <a:schemeClr val="accent1"/>
-          </a:effectRef>
-          <a:fontRef idx="minor">
-            <a:schemeClr val="lt1"/>
-          </a:fontRef>
-        </p:style>
-        <p:txBody>
-          <a:bodyPr rtlCol="0" anchor="ctr" tIns="101600" bIns="101600" lIns="203200" rIns="203200" wrap="square"/>
-          <a:lstStyle/>
-          <a:p>
-            <a:pPr algn="ctr"/>
-            <a:r>
-              <a:rPr sz="2100" b="1">
-                <a:solidFill>
-                  <a:srgbClr val="1A1A1A"/>
-                </a:solidFill>
-                <a:latin typeface="Apple SD Gothic Neo"/>
-              </a:rPr>
-              <a:t>리뷰 횟수
-최소화</a:t>
+              <a:rPr sz="2200" b="0" spc="-30">
+                <a:solidFill>
+                  <a:srgbClr val="6B7280"/>
+                </a:solidFill>
+                <a:latin typeface="Apple SD Gothic Neo"/>
+              </a:rPr>
+              <a:t>버그가 아니라, 내가 그렇게 설계한 것</a:t>
             </a:r>
           </a:p>
         </p:txBody>
@@ -12104,7 +12608,7 @@
                 </a:solidFill>
                 <a:latin typeface="Apple SD Gothic Neo"/>
               </a:rPr>
-              <a:t>다중 리뷰의 두 얼굴</a:t>
+              <a:t>어떻게 데모를 살렸나</a:t>
             </a:r>
           </a:p>
         </p:txBody>
@@ -12155,159 +12659,36 @@
       </p:sp>
       <p:sp>
         <p:nvSpPr>
-          <p:cNvPr id="4" name="Rounded Rectangle 3"/>
-          <p:cNvSpPr/>
-          <p:nvPr/>
-        </p:nvSpPr>
-        <p:spPr>
-          <a:xfrm>
-            <a:off x="777240" y="2743200"/>
-            <a:ext cx="4800600" cy="1920240"/>
-          </a:xfrm>
-          <a:prstGeom prst="roundRect">
-            <a:avLst>
-              <a:gd name="adj" fmla="val 12000"/>
-            </a:avLst>
-          </a:prstGeom>
-          <a:solidFill>
-            <a:srgbClr val="ECEBFB"/>
-          </a:solidFill>
-          <a:ln>
-            <a:noFill/>
-          </a:ln>
-          <a:effectLst/>
-        </p:spPr>
-        <p:style>
-          <a:lnRef idx="1">
-            <a:schemeClr val="accent1"/>
-          </a:lnRef>
-          <a:fillRef idx="3">
-            <a:schemeClr val="accent1"/>
-          </a:fillRef>
-          <a:effectRef idx="2">
-            <a:schemeClr val="accent1"/>
-          </a:effectRef>
-          <a:fontRef idx="minor">
-            <a:schemeClr val="lt1"/>
-          </a:fontRef>
-        </p:style>
-        <p:txBody>
-          <a:bodyPr rtlCol="0" anchor="ctr" tIns="101600" bIns="101600" lIns="203200" rIns="203200" wrap="square"/>
-          <a:lstStyle/>
-          <a:p>
-            <a:pPr algn="l"/>
-            <a:r>
-              <a:rPr sz="1800" b="1">
-                <a:solidFill>
-                  <a:srgbClr val="5B5BD6"/>
-                </a:solidFill>
-                <a:latin typeface="Apple SD Gothic Neo"/>
-              </a:rPr>
-              <a:t>좋은 점</a:t>
-            </a:r>
-          </a:p>
-          <a:p>
-            <a:pPr algn="l"/>
-            <a:r>
-              <a:rPr sz="600" b="0">
-                <a:solidFill>
-                  <a:srgbClr val="6B7280"/>
-                </a:solidFill>
-                <a:latin typeface="Apple SD Gothic Neo"/>
-              </a:rPr>
-              <a:t/>
-            </a:r>
-          </a:p>
-          <a:p>
-            <a:pPr algn="l"/>
-            <a:r>
-              <a:rPr sz="2100" b="1">
+          <p:cNvPr id="4" name="TextBox 3"/>
+          <p:cNvSpPr txBox="1"/>
+          <p:nvPr/>
+        </p:nvSpPr>
+        <p:spPr>
+          <a:xfrm>
+            <a:off x="822960" y="2651760"/>
+            <a:ext cx="10607040" cy="1554480"/>
+          </a:xfrm>
+          <a:prstGeom prst="rect">
+            <a:avLst/>
+          </a:prstGeom>
+          <a:noFill/>
+        </p:spPr>
+        <p:txBody>
+          <a:bodyPr wrap="square" anchor="ctr">
+            <a:spAutoFit/>
+          </a:bodyPr>
+          <a:lstStyle/>
+          <a:p>
+            <a:pPr algn="ctr"/>
+            <a:r>
+              <a:rPr sz="3000" b="1" spc="-60">
                 <a:solidFill>
                   <a:srgbClr val="1A1A1A"/>
                 </a:solidFill>
                 <a:latin typeface="Apple SD Gothic Neo"/>
               </a:rPr>
-              <a:t>버그 6개를 미리 발견</a:t>
-            </a:r>
-          </a:p>
-        </p:txBody>
-      </p:sp>
-      <p:sp>
-        <p:nvSpPr>
-          <p:cNvPr id="5" name="Rounded Rectangle 4"/>
-          <p:cNvSpPr/>
-          <p:nvPr/>
-        </p:nvSpPr>
-        <p:spPr>
-          <a:xfrm>
-            <a:off x="6629400" y="2743200"/>
-            <a:ext cx="4800600" cy="1920240"/>
-          </a:xfrm>
-          <a:prstGeom prst="roundRect">
-            <a:avLst>
-              <a:gd name="adj" fmla="val 12000"/>
-            </a:avLst>
-          </a:prstGeom>
-          <a:solidFill>
-            <a:srgbClr val="F4F4F6"/>
-          </a:solidFill>
-          <a:ln>
-            <a:noFill/>
-          </a:ln>
-          <a:effectLst/>
-        </p:spPr>
-        <p:style>
-          <a:lnRef idx="1">
-            <a:schemeClr val="accent1"/>
-          </a:lnRef>
-          <a:fillRef idx="3">
-            <a:schemeClr val="accent1"/>
-          </a:fillRef>
-          <a:effectRef idx="2">
-            <a:schemeClr val="accent1"/>
-          </a:effectRef>
-          <a:fontRef idx="minor">
-            <a:schemeClr val="lt1"/>
-          </a:fontRef>
-        </p:style>
-        <p:txBody>
-          <a:bodyPr rtlCol="0" anchor="ctr" tIns="101600" bIns="101600" lIns="203200" rIns="203200" wrap="square"/>
-          <a:lstStyle/>
-          <a:p>
-            <a:pPr algn="l"/>
-            <a:r>
-              <a:rPr sz="1800" b="1">
-                <a:solidFill>
-                  <a:srgbClr val="6B7280"/>
-                </a:solidFill>
-                <a:latin typeface="Apple SD Gothic Neo"/>
-              </a:rPr>
-              <a:t>아쉬운 점</a:t>
-            </a:r>
-          </a:p>
-          <a:p>
-            <a:pPr algn="l"/>
-            <a:r>
-              <a:rPr sz="600" b="0">
-                <a:solidFill>
-                  <a:srgbClr val="6B7280"/>
-                </a:solidFill>
-                <a:latin typeface="Apple SD Gothic Neo"/>
-              </a:rPr>
-              <a:t/>
-            </a:r>
-          </a:p>
-          <a:p>
-            <a:pPr algn="l"/>
-            <a:r>
-              <a:rPr sz="2100" b="1">
-                <a:solidFill>
-                  <a:srgbClr val="1A1A1A"/>
-                </a:solidFill>
-                <a:latin typeface="Apple SD Gothic Neo"/>
-              </a:rPr>
-              <a:t>단순 작업까지 3중 리뷰
-→ 비용 과다</a:t>
+              <a:t>동작하는 병원비 청구로 시연하고,
+자동차의 한계는 정직하게 설명했다.</a:t>
             </a:r>
           </a:p>
         </p:txBody>
@@ -12321,12 +12702,12 @@
 </file>
 
 <file path=ppt/slides/slide39.xml><?xml version="1.0" encoding="utf-8"?>
-<p:sld xmlns:a="http://schemas.openxmlformats.org/drawingml/2006/main" xmlns:p="http://schemas.openxmlformats.org/presentationml/2006/main" xmlns:r="http://schemas.openxmlformats.org/officeDocument/2006/relationships">
+<p:sld xmlns:a="http://schemas.openxmlformats.org/drawingml/2006/main" xmlns:r="http://schemas.openxmlformats.org/officeDocument/2006/relationships" xmlns:p="http://schemas.openxmlformats.org/presentationml/2006/main">
   <p:cSld>
     <p:bg>
       <p:bgPr>
         <a:solidFill>
-          <a:srgbClr val="FFFFFF"/>
+          <a:srgbClr val="1F1D3D"/>
         </a:solidFill>
         <a:effectLst/>
       </p:bgPr>
@@ -12337,7 +12718,14 @@
         <p:cNvGrpSpPr/>
         <p:nvPr/>
       </p:nvGrpSpPr>
-      <p:grpSpPr/>
+      <p:grpSpPr>
+        <a:xfrm>
+          <a:off x="0" y="0"/>
+          <a:ext cx="0" cy="0"/>
+          <a:chOff x="0" y="0"/>
+          <a:chExt cx="0" cy="0"/>
+        </a:xfrm>
+      </p:grpSpPr>
       <p:sp>
         <p:nvSpPr>
           <p:cNvPr id="2" name="TextBox 1"/>
@@ -12346,8 +12734,8 @@
         </p:nvSpPr>
         <p:spPr>
           <a:xfrm>
-            <a:off x="749808" y="566928"/>
-            <a:ext cx="10881360" cy="1371600"/>
+            <a:off x="868680" y="2514600"/>
+            <a:ext cx="10607040" cy="2011680"/>
           </a:xfrm>
           <a:prstGeom prst="rect">
             <a:avLst/>
@@ -12362,93 +12750,25 @@
           <a:p>
             <a:pPr algn="l"/>
             <a:r>
-              <a:rPr sz="4600" b="1" spc="-100">
-                <a:solidFill>
-                  <a:srgbClr val="1A1A1A"/>
-                </a:solidFill>
-                <a:latin typeface="Apple SD Gothic Neo"/>
-              </a:rPr>
-              <a:t>가장 큰 실수 — 발견</a:t>
-            </a:r>
-          </a:p>
-        </p:txBody>
-      </p:sp>
-      <p:sp>
-        <p:nvSpPr>
-          <p:cNvPr id="3" name="Rectangle 2"/>
-          <p:cNvSpPr/>
-          <p:nvPr/>
-        </p:nvSpPr>
-        <p:spPr>
-          <a:xfrm>
-            <a:off x="822960" y="1554480"/>
-            <a:ext cx="868680" cy="82296"/>
-          </a:xfrm>
-          <a:prstGeom prst="rect">
-            <a:avLst/>
-          </a:prstGeom>
-          <a:solidFill>
-            <a:srgbClr val="5B5BD6"/>
-          </a:solidFill>
-          <a:ln>
-            <a:noFill/>
-          </a:ln>
-          <a:effectLst/>
-        </p:spPr>
-        <p:style>
-          <a:lnRef idx="1">
-            <a:schemeClr val="accent1"/>
-          </a:lnRef>
-          <a:fillRef idx="3">
-            <a:schemeClr val="accent1"/>
-          </a:fillRef>
-          <a:effectRef idx="2">
-            <a:schemeClr val="accent1"/>
-          </a:effectRef>
-          <a:fontRef idx="minor">
-            <a:schemeClr val="lt1"/>
-          </a:fontRef>
-        </p:style>
-        <p:txBody>
-          <a:bodyPr rtlCol="0" anchor="ctr"/>
-          <a:lstStyle/>
-          <a:p>
-            <a:pPr algn="ctr"/>
-          </a:p>
-        </p:txBody>
-      </p:sp>
-      <p:sp>
-        <p:nvSpPr>
-          <p:cNvPr id="4" name="TextBox 3"/>
-          <p:cNvSpPr txBox="1"/>
-          <p:nvPr/>
-        </p:nvSpPr>
-        <p:spPr>
-          <a:xfrm>
-            <a:off x="822960" y="2651760"/>
-            <a:ext cx="10607040" cy="1554480"/>
-          </a:xfrm>
-          <a:prstGeom prst="rect">
-            <a:avLst/>
-          </a:prstGeom>
-          <a:noFill/>
-        </p:spPr>
-        <p:txBody>
-          <a:bodyPr wrap="square" anchor="ctr">
-            <a:spAutoFit/>
-          </a:bodyPr>
-          <a:lstStyle/>
-          <a:p>
-            <a:pPr algn="ctr"/>
-            <a:r>
-              <a:rPr sz="3300" b="1" spc="-60">
-                <a:solidFill>
-                  <a:srgbClr val="1A1A1A"/>
-                </a:solidFill>
-                <a:latin typeface="Apple SD Gothic Neo"/>
-              </a:rPr>
-              <a:t>자동차 사고가 직원 '심사 목록'에
-끝까지 안 떴다.</a:t>
+              <a:rPr sz="4800" b="1" spc="-100">
+                <a:solidFill>
+                  <a:srgbClr val="FFFFFF"/>
+                </a:solidFill>
+                <a:latin typeface="Apple SD Gothic Neo"/>
+              </a:rPr>
+              <a:t>설계한 그대로 구현했고,</a:t>
+            </a:r>
+          </a:p>
+          <a:p>
+            <a:pPr algn="l"/>
+            <a:r>
+              <a:rPr sz="4800" b="1" spc="-100">
+                <a:solidFill>
+                  <a:srgbClr val="FFFFFF"/>
+                </a:solidFill>
+                <a:latin typeface="Apple SD Gothic Neo"/>
+              </a:rPr>
+              <a:t>그 과정에서 AI를 통제했다.</a:t>
             </a:r>
           </a:p>
         </p:txBody>
@@ -12857,7 +13177,7 @@
                 </a:solidFill>
                 <a:latin typeface="Apple SD Gothic Neo"/>
               </a:rPr>
-              <a:t>왜? — 설계대로였다</a:t>
+              <a:t>개발 파이프라인</a:t>
             </a:r>
           </a:p>
         </p:txBody>
@@ -12908,14 +13228,95 @@
       </p:sp>
       <p:sp>
         <p:nvSpPr>
-          <p:cNvPr id="4" name="TextBox 3"/>
+          <p:cNvPr id="4" name="Rounded Rectangle 3"/>
+          <p:cNvSpPr/>
+          <p:nvPr/>
+        </p:nvSpPr>
+        <p:spPr>
+          <a:xfrm>
+            <a:off x="824331" y="2834640"/>
+            <a:ext cx="1874519" cy="1554480"/>
+          </a:xfrm>
+          <a:prstGeom prst="roundRect">
+            <a:avLst>
+              <a:gd name="adj" fmla="val 12000"/>
+            </a:avLst>
+          </a:prstGeom>
+          <a:solidFill>
+            <a:srgbClr val="F4F4F6"/>
+          </a:solidFill>
+          <a:ln w="16510">
+            <a:solidFill>
+              <a:srgbClr val="E6E6E6"/>
+            </a:solidFill>
+          </a:ln>
+          <a:effectLst/>
+        </p:spPr>
+        <p:style>
+          <a:lnRef idx="1">
+            <a:schemeClr val="accent1"/>
+          </a:lnRef>
+          <a:fillRef idx="3">
+            <a:schemeClr val="accent1"/>
+          </a:fillRef>
+          <a:effectRef idx="2">
+            <a:schemeClr val="accent1"/>
+          </a:effectRef>
+          <a:fontRef idx="minor">
+            <a:schemeClr val="lt1"/>
+          </a:fontRef>
+        </p:style>
+        <p:txBody>
+          <a:bodyPr rtlCol="0" anchor="ctr" tIns="76200" bIns="76200" lIns="127000" rIns="127000" wrap="square"/>
+          <a:lstStyle/>
+          <a:p>
+            <a:pPr algn="ctr"/>
+            <a:r>
+              <a:rPr sz="2200" b="1">
+                <a:solidFill>
+                  <a:srgbClr val="1A1A1A"/>
+                </a:solidFill>
+                <a:latin typeface="Apple SD Gothic Neo"/>
+              </a:rPr>
+              <a:t>발산</a:t>
+            </a:r>
+          </a:p>
+          <a:p>
+            <a:pPr algn="ctr"/>
+            <a:r>
+              <a:rPr sz="600" b="0">
+                <a:solidFill>
+                  <a:srgbClr val="6B7280"/>
+                </a:solidFill>
+                <a:latin typeface="Apple SD Gothic Neo"/>
+              </a:rPr>
+              <a:t/>
+            </a:r>
+          </a:p>
+          <a:p>
+            <a:pPr algn="ctr"/>
+            <a:r>
+              <a:rPr sz="1200" b="0">
+                <a:solidFill>
+                  <a:srgbClr val="6B7280"/>
+                </a:solidFill>
+                <a:latin typeface="Menlo"/>
+              </a:rPr>
+              <a:t>brainstorming</a:t>
+            </a:r>
+          </a:p>
+        </p:txBody>
+      </p:sp>
+      <p:sp>
+        <p:nvSpPr>
+          <p:cNvPr id="5" name="TextBox 4"/>
           <p:cNvSpPr txBox="1"/>
           <p:nvPr/>
         </p:nvSpPr>
         <p:spPr>
           <a:xfrm>
-            <a:off x="822960" y="2651760"/>
-            <a:ext cx="10607040" cy="1554480"/>
+            <a:off x="2525115" y="3337560"/>
+            <a:ext cx="640080" cy="548640"/>
           </a:xfrm>
           <a:prstGeom prst="rect">
             <a:avLst/>
@@ -12930,28 +13331,456 @@
           <a:p>
             <a:pPr algn="ctr"/>
             <a:r>
-              <a:rPr sz="3000" b="1" spc="-60">
+              <a:rPr sz="2600" b="1">
+                <a:solidFill>
+                  <a:srgbClr val="6B7280"/>
+                </a:solidFill>
+                <a:latin typeface="Apple SD Gothic Neo"/>
+              </a:rPr>
+              <a:t>→</a:t>
+            </a:r>
+          </a:p>
+        </p:txBody>
+      </p:sp>
+      <p:sp>
+        <p:nvSpPr>
+          <p:cNvPr id="6" name="Rounded Rectangle 5"/>
+          <p:cNvSpPr/>
+          <p:nvPr/>
+        </p:nvSpPr>
+        <p:spPr>
+          <a:xfrm>
+            <a:off x="2991459" y="2834640"/>
+            <a:ext cx="1874519" cy="1554480"/>
+          </a:xfrm>
+          <a:prstGeom prst="roundRect">
+            <a:avLst>
+              <a:gd name="adj" fmla="val 12000"/>
+            </a:avLst>
+          </a:prstGeom>
+          <a:solidFill>
+            <a:srgbClr val="ECEBFB"/>
+          </a:solidFill>
+          <a:ln w="16510">
+            <a:solidFill>
+              <a:srgbClr val="E6E6E6"/>
+            </a:solidFill>
+          </a:ln>
+          <a:effectLst/>
+        </p:spPr>
+        <p:style>
+          <a:lnRef idx="1">
+            <a:schemeClr val="accent1"/>
+          </a:lnRef>
+          <a:fillRef idx="3">
+            <a:schemeClr val="accent1"/>
+          </a:fillRef>
+          <a:effectRef idx="2">
+            <a:schemeClr val="accent1"/>
+          </a:effectRef>
+          <a:fontRef idx="minor">
+            <a:schemeClr val="lt1"/>
+          </a:fontRef>
+        </p:style>
+        <p:txBody>
+          <a:bodyPr rtlCol="0" anchor="ctr" tIns="76200" bIns="76200" lIns="127000" rIns="127000" wrap="square"/>
+          <a:lstStyle/>
+          <a:p>
+            <a:pPr algn="ctr"/>
+            <a:r>
+              <a:rPr sz="2200" b="1">
                 <a:solidFill>
                   <a:srgbClr val="1A1A1A"/>
                 </a:solidFill>
                 <a:latin typeface="Apple SD Gothic Neo"/>
               </a:rPr>
-              <a:t>유스케이스(UC09): 자동차 사고는
-'접수만', 심사 큐엔 안 들어감</a:t>
-            </a:r>
-          </a:p>
-        </p:txBody>
-      </p:sp>
-      <p:sp>
-        <p:nvSpPr>
-          <p:cNvPr id="5" name="TextBox 4"/>
+              <a:t>취조</a:t>
+            </a:r>
+          </a:p>
+          <a:p>
+            <a:pPr algn="ctr"/>
+            <a:r>
+              <a:rPr sz="600" b="0">
+                <a:solidFill>
+                  <a:srgbClr val="6B7280"/>
+                </a:solidFill>
+                <a:latin typeface="Apple SD Gothic Neo"/>
+              </a:rPr>
+              <a:t/>
+            </a:r>
+          </a:p>
+          <a:p>
+            <a:pPr algn="ctr"/>
+            <a:r>
+              <a:rPr sz="1200" b="0">
+                <a:solidFill>
+                  <a:srgbClr val="6B7280"/>
+                </a:solidFill>
+                <a:latin typeface="Menlo"/>
+              </a:rPr>
+              <a:t>grill-with-docs</a:t>
+            </a:r>
+          </a:p>
+        </p:txBody>
+      </p:sp>
+      <p:sp>
+        <p:nvSpPr>
+          <p:cNvPr id="7" name="TextBox 6"/>
           <p:cNvSpPr txBox="1"/>
           <p:nvPr/>
         </p:nvSpPr>
         <p:spPr>
           <a:xfrm>
-            <a:off x="822960" y="4434840"/>
-            <a:ext cx="10607040" cy="914400"/>
+            <a:off x="4692243" y="3337560"/>
+            <a:ext cx="640080" cy="548640"/>
+          </a:xfrm>
+          <a:prstGeom prst="rect">
+            <a:avLst/>
+          </a:prstGeom>
+          <a:noFill/>
+        </p:spPr>
+        <p:txBody>
+          <a:bodyPr wrap="square" anchor="ctr">
+            <a:spAutoFit/>
+          </a:bodyPr>
+          <a:lstStyle/>
+          <a:p>
+            <a:pPr algn="ctr"/>
+            <a:r>
+              <a:rPr sz="2600" b="1">
+                <a:solidFill>
+                  <a:srgbClr val="6B7280"/>
+                </a:solidFill>
+                <a:latin typeface="Apple SD Gothic Neo"/>
+              </a:rPr>
+              <a:t>→</a:t>
+            </a:r>
+          </a:p>
+        </p:txBody>
+      </p:sp>
+      <p:sp>
+        <p:nvSpPr>
+          <p:cNvPr id="8" name="Rounded Rectangle 7"/>
+          <p:cNvSpPr/>
+          <p:nvPr/>
+        </p:nvSpPr>
+        <p:spPr>
+          <a:xfrm>
+            <a:off x="5158587" y="2834640"/>
+            <a:ext cx="1874519" cy="1554480"/>
+          </a:xfrm>
+          <a:prstGeom prst="roundRect">
+            <a:avLst>
+              <a:gd name="adj" fmla="val 12000"/>
+            </a:avLst>
+          </a:prstGeom>
+          <a:solidFill>
+            <a:srgbClr val="F4F4F6"/>
+          </a:solidFill>
+          <a:ln w="16510">
+            <a:solidFill>
+              <a:srgbClr val="E6E6E6"/>
+            </a:solidFill>
+          </a:ln>
+          <a:effectLst/>
+        </p:spPr>
+        <p:style>
+          <a:lnRef idx="1">
+            <a:schemeClr val="accent1"/>
+          </a:lnRef>
+          <a:fillRef idx="3">
+            <a:schemeClr val="accent1"/>
+          </a:fillRef>
+          <a:effectRef idx="2">
+            <a:schemeClr val="accent1"/>
+          </a:effectRef>
+          <a:fontRef idx="minor">
+            <a:schemeClr val="lt1"/>
+          </a:fontRef>
+        </p:style>
+        <p:txBody>
+          <a:bodyPr rtlCol="0" anchor="ctr" tIns="76200" bIns="76200" lIns="127000" rIns="127000" wrap="square"/>
+          <a:lstStyle/>
+          <a:p>
+            <a:pPr algn="ctr"/>
+            <a:r>
+              <a:rPr sz="2200" b="1">
+                <a:solidFill>
+                  <a:srgbClr val="1A1A1A"/>
+                </a:solidFill>
+                <a:latin typeface="Apple SD Gothic Neo"/>
+              </a:rPr>
+              <a:t>계획</a:t>
+            </a:r>
+          </a:p>
+          <a:p>
+            <a:pPr algn="ctr"/>
+            <a:r>
+              <a:rPr sz="600" b="0">
+                <a:solidFill>
+                  <a:srgbClr val="6B7280"/>
+                </a:solidFill>
+                <a:latin typeface="Apple SD Gothic Neo"/>
+              </a:rPr>
+              <a:t/>
+            </a:r>
+          </a:p>
+          <a:p>
+            <a:pPr algn="ctr"/>
+            <a:r>
+              <a:rPr sz="1200" b="0">
+                <a:solidFill>
+                  <a:srgbClr val="6B7280"/>
+                </a:solidFill>
+                <a:latin typeface="Menlo"/>
+              </a:rPr>
+              <a:t>writing-plans</a:t>
+            </a:r>
+          </a:p>
+        </p:txBody>
+      </p:sp>
+      <p:sp>
+        <p:nvSpPr>
+          <p:cNvPr id="9" name="TextBox 8"/>
+          <p:cNvSpPr txBox="1"/>
+          <p:nvPr/>
+        </p:nvSpPr>
+        <p:spPr>
+          <a:xfrm>
+            <a:off x="6859371" y="3337560"/>
+            <a:ext cx="640080" cy="548640"/>
+          </a:xfrm>
+          <a:prstGeom prst="rect">
+            <a:avLst/>
+          </a:prstGeom>
+          <a:noFill/>
+        </p:spPr>
+        <p:txBody>
+          <a:bodyPr wrap="square" anchor="ctr">
+            <a:spAutoFit/>
+          </a:bodyPr>
+          <a:lstStyle/>
+          <a:p>
+            <a:pPr algn="ctr"/>
+            <a:r>
+              <a:rPr sz="2600" b="1">
+                <a:solidFill>
+                  <a:srgbClr val="6B7280"/>
+                </a:solidFill>
+                <a:latin typeface="Apple SD Gothic Neo"/>
+              </a:rPr>
+              <a:t>→</a:t>
+            </a:r>
+          </a:p>
+        </p:txBody>
+      </p:sp>
+      <p:sp>
+        <p:nvSpPr>
+          <p:cNvPr id="10" name="Rounded Rectangle 9"/>
+          <p:cNvSpPr/>
+          <p:nvPr/>
+        </p:nvSpPr>
+        <p:spPr>
+          <a:xfrm>
+            <a:off x="7325715" y="2834640"/>
+            <a:ext cx="1874519" cy="1554480"/>
+          </a:xfrm>
+          <a:prstGeom prst="roundRect">
+            <a:avLst>
+              <a:gd name="adj" fmla="val 12000"/>
+            </a:avLst>
+          </a:prstGeom>
+          <a:solidFill>
+            <a:srgbClr val="ECEBFB"/>
+          </a:solidFill>
+          <a:ln w="16510">
+            <a:solidFill>
+              <a:srgbClr val="E6E6E6"/>
+            </a:solidFill>
+          </a:ln>
+          <a:effectLst/>
+        </p:spPr>
+        <p:style>
+          <a:lnRef idx="1">
+            <a:schemeClr val="accent1"/>
+          </a:lnRef>
+          <a:fillRef idx="3">
+            <a:schemeClr val="accent1"/>
+          </a:fillRef>
+          <a:effectRef idx="2">
+            <a:schemeClr val="accent1"/>
+          </a:effectRef>
+          <a:fontRef idx="minor">
+            <a:schemeClr val="lt1"/>
+          </a:fontRef>
+        </p:style>
+        <p:txBody>
+          <a:bodyPr rtlCol="0" anchor="ctr" tIns="76200" bIns="76200" lIns="127000" rIns="127000" wrap="square"/>
+          <a:lstStyle/>
+          <a:p>
+            <a:pPr algn="ctr"/>
+            <a:r>
+              <a:rPr sz="2200" b="1">
+                <a:solidFill>
+                  <a:srgbClr val="1A1A1A"/>
+                </a:solidFill>
+                <a:latin typeface="Apple SD Gothic Neo"/>
+              </a:rPr>
+              <a:t>구현</a:t>
+            </a:r>
+          </a:p>
+          <a:p>
+            <a:pPr algn="ctr"/>
+            <a:r>
+              <a:rPr sz="600" b="0">
+                <a:solidFill>
+                  <a:srgbClr val="6B7280"/>
+                </a:solidFill>
+                <a:latin typeface="Apple SD Gothic Neo"/>
+              </a:rPr>
+              <a:t/>
+            </a:r>
+          </a:p>
+          <a:p>
+            <a:pPr algn="ctr"/>
+            <a:r>
+              <a:rPr sz="1200" b="0">
+                <a:solidFill>
+                  <a:srgbClr val="6B7280"/>
+                </a:solidFill>
+                <a:latin typeface="Menlo"/>
+              </a:rPr>
+              <a:t>executing-plans</a:t>
+            </a:r>
+          </a:p>
+        </p:txBody>
+      </p:sp>
+      <p:sp>
+        <p:nvSpPr>
+          <p:cNvPr id="11" name="TextBox 10"/>
+          <p:cNvSpPr txBox="1"/>
+          <p:nvPr/>
+        </p:nvSpPr>
+        <p:spPr>
+          <a:xfrm>
+            <a:off x="9026499" y="3337560"/>
+            <a:ext cx="640080" cy="548640"/>
+          </a:xfrm>
+          <a:prstGeom prst="rect">
+            <a:avLst/>
+          </a:prstGeom>
+          <a:noFill/>
+        </p:spPr>
+        <p:txBody>
+          <a:bodyPr wrap="square" anchor="ctr">
+            <a:spAutoFit/>
+          </a:bodyPr>
+          <a:lstStyle/>
+          <a:p>
+            <a:pPr algn="ctr"/>
+            <a:r>
+              <a:rPr sz="2600" b="1">
+                <a:solidFill>
+                  <a:srgbClr val="6B7280"/>
+                </a:solidFill>
+                <a:latin typeface="Apple SD Gothic Neo"/>
+              </a:rPr>
+              <a:t>→</a:t>
+            </a:r>
+          </a:p>
+        </p:txBody>
+      </p:sp>
+      <p:sp>
+        <p:nvSpPr>
+          <p:cNvPr id="12" name="Rounded Rectangle 11"/>
+          <p:cNvSpPr/>
+          <p:nvPr/>
+        </p:nvSpPr>
+        <p:spPr>
+          <a:xfrm>
+            <a:off x="9492843" y="2834640"/>
+            <a:ext cx="1874519" cy="1554480"/>
+          </a:xfrm>
+          <a:prstGeom prst="roundRect">
+            <a:avLst>
+              <a:gd name="adj" fmla="val 12000"/>
+            </a:avLst>
+          </a:prstGeom>
+          <a:solidFill>
+            <a:srgbClr val="F4F4F6"/>
+          </a:solidFill>
+          <a:ln w="16510">
+            <a:solidFill>
+              <a:srgbClr val="E6E6E6"/>
+            </a:solidFill>
+          </a:ln>
+          <a:effectLst/>
+        </p:spPr>
+        <p:style>
+          <a:lnRef idx="1">
+            <a:schemeClr val="accent1"/>
+          </a:lnRef>
+          <a:fillRef idx="3">
+            <a:schemeClr val="accent1"/>
+          </a:fillRef>
+          <a:effectRef idx="2">
+            <a:schemeClr val="accent1"/>
+          </a:effectRef>
+          <a:fontRef idx="minor">
+            <a:schemeClr val="lt1"/>
+          </a:fontRef>
+        </p:style>
+        <p:txBody>
+          <a:bodyPr rtlCol="0" anchor="ctr" tIns="76200" bIns="76200" lIns="127000" rIns="127000" wrap="square"/>
+          <a:lstStyle/>
+          <a:p>
+            <a:pPr algn="ctr"/>
+            <a:r>
+              <a:rPr sz="2200" b="1">
+                <a:solidFill>
+                  <a:srgbClr val="1A1A1A"/>
+                </a:solidFill>
+                <a:latin typeface="Apple SD Gothic Neo"/>
+              </a:rPr>
+              <a:t>검증</a:t>
+            </a:r>
+          </a:p>
+          <a:p>
+            <a:pPr algn="ctr"/>
+            <a:r>
+              <a:rPr sz="600" b="0">
+                <a:solidFill>
+                  <a:srgbClr val="6B7280"/>
+                </a:solidFill>
+                <a:latin typeface="Apple SD Gothic Neo"/>
+              </a:rPr>
+              <a:t/>
+            </a:r>
+          </a:p>
+          <a:p>
+            <a:pPr algn="ctr"/>
+            <a:r>
+              <a:rPr sz="1200" b="0">
+                <a:solidFill>
+                  <a:srgbClr val="6B7280"/>
+                </a:solidFill>
+                <a:latin typeface="Menlo"/>
+              </a:rPr>
+              <a:t>Codex 리뷰</a:t>
+            </a:r>
+          </a:p>
+        </p:txBody>
+      </p:sp>
+      <p:sp>
+        <p:nvSpPr>
+          <p:cNvPr id="13" name="TextBox 12"/>
+          <p:cNvSpPr txBox="1"/>
+          <p:nvPr/>
+        </p:nvSpPr>
+        <p:spPr>
+          <a:xfrm>
+            <a:off x="822960" y="5029200"/>
+            <a:ext cx="10607040" cy="822960"/>
           </a:xfrm>
           <a:prstGeom prst="rect">
             <a:avLst/>
@@ -12966,13 +13795,13 @@
           <a:p>
             <a:pPr algn="ctr"/>
             <a:r>
-              <a:rPr sz="2200" b="0" spc="-30">
-                <a:solidFill>
-                  <a:srgbClr val="6B7280"/>
-                </a:solidFill>
-                <a:latin typeface="Apple SD Gothic Neo"/>
-              </a:rPr>
-              <a:t>버그가 아니라, 내가 그렇게 설계한 것</a:t>
+              <a:rPr sz="2400" b="1" spc="-40">
+                <a:solidFill>
+                  <a:srgbClr val="1A1A1A"/>
+                </a:solidFill>
+                <a:latin typeface="Apple SD Gothic Neo"/>
+              </a:rPr>
+              <a:t>각 단계가 산출물을 남긴다 — 설계 · 용어 · 계획 · 코드 · 리뷰.</a:t>
             </a:r>
           </a:p>
         </p:txBody>
@@ -13033,7 +13862,7 @@
                 </a:solidFill>
                 <a:latin typeface="Apple SD Gothic Neo"/>
               </a:rPr>
-              <a:t>어떻게 데모를 살렸나</a:t>
+              <a:t>테스트 주도 개발 (TDD)</a:t>
             </a:r>
           </a:p>
         </p:txBody>
@@ -13106,14 +13935,543 @@
           <a:p>
             <a:pPr algn="ctr"/>
             <a:r>
-              <a:rPr sz="3000" b="1" spc="-60">
+              <a:rPr sz="3600" b="1" spc="-60">
                 <a:solidFill>
                   <a:srgbClr val="1A1A1A"/>
                 </a:solidFill>
                 <a:latin typeface="Apple SD Gothic Neo"/>
               </a:rPr>
-              <a:t>동작하는 병원비 청구로 시연하고,
-자동차의 한계는 정직하게 설명했다.</a:t>
+              <a:t>실패하는 테스트 없이는</a:t>
+            </a:r>
+          </a:p>
+          <a:p>
+            <a:pPr algn="ctr"/>
+            <a:r>
+              <a:rPr sz="3600" b="1" spc="-60">
+                <a:solidFill>
+                  <a:srgbClr val="5B5BD6"/>
+                </a:solidFill>
+                <a:latin typeface="Apple SD Gothic Neo"/>
+              </a:rPr>
+              <a:t>프로덕션 코드를 쓰지 않는다.</a:t>
+            </a:r>
+          </a:p>
+        </p:txBody>
+      </p:sp>
+      <p:sp>
+        <p:nvSpPr>
+          <p:cNvPr id="5" name="TextBox 4"/>
+          <p:cNvSpPr txBox="1"/>
+          <p:nvPr/>
+        </p:nvSpPr>
+        <p:spPr>
+          <a:xfrm>
+            <a:off x="822960" y="4572000"/>
+            <a:ext cx="10607040" cy="914400"/>
+          </a:xfrm>
+          <a:prstGeom prst="rect">
+            <a:avLst/>
+          </a:prstGeom>
+          <a:noFill/>
+        </p:spPr>
+        <p:txBody>
+          <a:bodyPr wrap="square" anchor="t">
+            <a:spAutoFit/>
+          </a:bodyPr>
+          <a:lstStyle/>
+          <a:p>
+            <a:pPr algn="ctr"/>
+            <a:r>
+              <a:rPr sz="2200" b="0" spc="-30">
+                <a:solidFill>
+                  <a:srgbClr val="6B7280"/>
+                </a:solidFill>
+                <a:latin typeface="Apple SD Gothic Neo"/>
+              </a:rPr>
+              <a:t>AI가 쏟아내는 코드를 검증 없이 통과시키지 않는 장치.</a:t>
+            </a:r>
+          </a:p>
+        </p:txBody>
+      </p:sp>
+    </p:spTree>
+  </p:cSld>
+  <p:clrMapOvr>
+    <a:masterClrMapping/>
+  </p:clrMapOvr>
+</p:sld>
+</file>
+
+<file path=ppt/slides/slide42.xml><?xml version="1.0" encoding="utf-8"?>
+<p:sld xmlns:a="http://schemas.openxmlformats.org/drawingml/2006/main" xmlns:p="http://schemas.openxmlformats.org/presentationml/2006/main" xmlns:r="http://schemas.openxmlformats.org/officeDocument/2006/relationships">
+  <p:cSld>
+    <p:bg>
+      <p:bgPr>
+        <a:solidFill>
+          <a:srgbClr val="FFFFFF"/>
+        </a:solidFill>
+        <a:effectLst/>
+      </p:bgPr>
+    </p:bg>
+    <p:spTree>
+      <p:nvGrpSpPr>
+        <p:cNvPr id="1" name=""/>
+        <p:cNvGrpSpPr/>
+        <p:nvPr/>
+      </p:nvGrpSpPr>
+      <p:grpSpPr/>
+      <p:sp>
+        <p:nvSpPr>
+          <p:cNvPr id="2" name="TextBox 1"/>
+          <p:cNvSpPr txBox="1"/>
+          <p:nvPr/>
+        </p:nvSpPr>
+        <p:spPr>
+          <a:xfrm>
+            <a:off x="749808" y="566928"/>
+            <a:ext cx="10881360" cy="1371600"/>
+          </a:xfrm>
+          <a:prstGeom prst="rect">
+            <a:avLst/>
+          </a:prstGeom>
+          <a:noFill/>
+        </p:spPr>
+        <p:txBody>
+          <a:bodyPr wrap="square" anchor="t">
+            <a:spAutoFit/>
+          </a:bodyPr>
+          <a:lstStyle/>
+          <a:p>
+            <a:pPr algn="l"/>
+            <a:r>
+              <a:rPr sz="4600" b="1" spc="-100">
+                <a:solidFill>
+                  <a:srgbClr val="1A1A1A"/>
+                </a:solidFill>
+                <a:latin typeface="Apple SD Gothic Neo"/>
+              </a:rPr>
+              <a:t>Red → Green → Refactor</a:t>
+            </a:r>
+          </a:p>
+        </p:txBody>
+      </p:sp>
+      <p:sp>
+        <p:nvSpPr>
+          <p:cNvPr id="3" name="Rectangle 2"/>
+          <p:cNvSpPr/>
+          <p:nvPr/>
+        </p:nvSpPr>
+        <p:spPr>
+          <a:xfrm>
+            <a:off x="822960" y="1554480"/>
+            <a:ext cx="868680" cy="82296"/>
+          </a:xfrm>
+          <a:prstGeom prst="rect">
+            <a:avLst/>
+          </a:prstGeom>
+          <a:solidFill>
+            <a:srgbClr val="5B5BD6"/>
+          </a:solidFill>
+          <a:ln>
+            <a:noFill/>
+          </a:ln>
+          <a:effectLst/>
+        </p:spPr>
+        <p:style>
+          <a:lnRef idx="1">
+            <a:schemeClr val="accent1"/>
+          </a:lnRef>
+          <a:fillRef idx="3">
+            <a:schemeClr val="accent1"/>
+          </a:fillRef>
+          <a:effectRef idx="2">
+            <a:schemeClr val="accent1"/>
+          </a:effectRef>
+          <a:fontRef idx="minor">
+            <a:schemeClr val="lt1"/>
+          </a:fontRef>
+        </p:style>
+        <p:txBody>
+          <a:bodyPr rtlCol="0" anchor="ctr"/>
+          <a:lstStyle/>
+          <a:p>
+            <a:pPr algn="ctr"/>
+          </a:p>
+        </p:txBody>
+      </p:sp>
+      <p:sp>
+        <p:nvSpPr>
+          <p:cNvPr id="4" name="Rounded Rectangle 3"/>
+          <p:cNvSpPr/>
+          <p:nvPr/>
+        </p:nvSpPr>
+        <p:spPr>
+          <a:xfrm>
+            <a:off x="1295247" y="2743200"/>
+            <a:ext cx="2834640" cy="1737360"/>
+          </a:xfrm>
+          <a:prstGeom prst="roundRect">
+            <a:avLst>
+              <a:gd name="adj" fmla="val 12000"/>
+            </a:avLst>
+          </a:prstGeom>
+          <a:solidFill>
+            <a:srgbClr val="D8392B"/>
+          </a:solidFill>
+          <a:ln>
+            <a:noFill/>
+          </a:ln>
+          <a:effectLst/>
+        </p:spPr>
+        <p:style>
+          <a:lnRef idx="1">
+            <a:schemeClr val="accent1"/>
+          </a:lnRef>
+          <a:fillRef idx="3">
+            <a:schemeClr val="accent1"/>
+          </a:fillRef>
+          <a:effectRef idx="2">
+            <a:schemeClr val="accent1"/>
+          </a:effectRef>
+          <a:fontRef idx="minor">
+            <a:schemeClr val="lt1"/>
+          </a:fontRef>
+        </p:style>
+        <p:txBody>
+          <a:bodyPr rtlCol="0" anchor="ctr" tIns="76200" bIns="76200" lIns="127000" rIns="127000" wrap="square"/>
+          <a:lstStyle/>
+          <a:p>
+            <a:pPr algn="ctr"/>
+            <a:r>
+              <a:rPr sz="2200" b="1">
+                <a:solidFill>
+                  <a:srgbClr val="FFFFFF"/>
+                </a:solidFill>
+                <a:latin typeface="Menlo"/>
+              </a:rPr>
+              <a:t>RED</a:t>
+            </a:r>
+          </a:p>
+          <a:p>
+            <a:pPr algn="ctr"/>
+            <a:r>
+              <a:rPr sz="600" b="0">
+                <a:solidFill>
+                  <a:srgbClr val="FFFFFF"/>
+                </a:solidFill>
+                <a:latin typeface="Apple SD Gothic Neo"/>
+              </a:rPr>
+              <a:t/>
+            </a:r>
+          </a:p>
+          <a:p>
+            <a:pPr algn="ctr"/>
+            <a:r>
+              <a:rPr sz="1700" b="1">
+                <a:solidFill>
+                  <a:srgbClr val="FFFFFF"/>
+                </a:solidFill>
+                <a:latin typeface="Apple SD Gothic Neo"/>
+              </a:rPr>
+              <a:t>실패 테스트를</a:t>
+            </a:r>
+          </a:p>
+          <a:p>
+            <a:pPr algn="ctr"/>
+            <a:r>
+              <a:rPr sz="1700" b="1">
+                <a:solidFill>
+                  <a:srgbClr val="FFFFFF"/>
+                </a:solidFill>
+                <a:latin typeface="Apple SD Gothic Neo"/>
+              </a:rPr>
+              <a:t>먼저 작성</a:t>
+            </a:r>
+          </a:p>
+        </p:txBody>
+      </p:sp>
+      <p:sp>
+        <p:nvSpPr>
+          <p:cNvPr id="5" name="TextBox 4"/>
+          <p:cNvSpPr txBox="1"/>
+          <p:nvPr/>
+        </p:nvSpPr>
+        <p:spPr>
+          <a:xfrm>
+            <a:off x="4084167" y="3383280"/>
+            <a:ext cx="640080" cy="548640"/>
+          </a:xfrm>
+          <a:prstGeom prst="rect">
+            <a:avLst/>
+          </a:prstGeom>
+          <a:noFill/>
+        </p:spPr>
+        <p:txBody>
+          <a:bodyPr wrap="square" anchor="ctr">
+            <a:spAutoFit/>
+          </a:bodyPr>
+          <a:lstStyle/>
+          <a:p>
+            <a:pPr algn="ctr"/>
+            <a:r>
+              <a:rPr sz="2800" b="1">
+                <a:solidFill>
+                  <a:srgbClr val="5B5BD6"/>
+                </a:solidFill>
+                <a:latin typeface="Apple SD Gothic Neo"/>
+              </a:rPr>
+              <a:t>→</a:t>
+            </a:r>
+          </a:p>
+        </p:txBody>
+      </p:sp>
+      <p:sp>
+        <p:nvSpPr>
+          <p:cNvPr id="6" name="Rounded Rectangle 5"/>
+          <p:cNvSpPr/>
+          <p:nvPr/>
+        </p:nvSpPr>
+        <p:spPr>
+          <a:xfrm>
+            <a:off x="4678527" y="2743200"/>
+            <a:ext cx="2834640" cy="1737360"/>
+          </a:xfrm>
+          <a:prstGeom prst="roundRect">
+            <a:avLst>
+              <a:gd name="adj" fmla="val 12000"/>
+            </a:avLst>
+          </a:prstGeom>
+          <a:solidFill>
+            <a:srgbClr val="2E9E5B"/>
+          </a:solidFill>
+          <a:ln>
+            <a:noFill/>
+          </a:ln>
+          <a:effectLst/>
+        </p:spPr>
+        <p:style>
+          <a:lnRef idx="1">
+            <a:schemeClr val="accent1"/>
+          </a:lnRef>
+          <a:fillRef idx="3">
+            <a:schemeClr val="accent1"/>
+          </a:fillRef>
+          <a:effectRef idx="2">
+            <a:schemeClr val="accent1"/>
+          </a:effectRef>
+          <a:fontRef idx="minor">
+            <a:schemeClr val="lt1"/>
+          </a:fontRef>
+        </p:style>
+        <p:txBody>
+          <a:bodyPr rtlCol="0" anchor="ctr" tIns="76200" bIns="76200" lIns="127000" rIns="127000" wrap="square"/>
+          <a:lstStyle/>
+          <a:p>
+            <a:pPr algn="ctr"/>
+            <a:r>
+              <a:rPr sz="2200" b="1">
+                <a:solidFill>
+                  <a:srgbClr val="FFFFFF"/>
+                </a:solidFill>
+                <a:latin typeface="Menlo"/>
+              </a:rPr>
+              <a:t>GREEN</a:t>
+            </a:r>
+          </a:p>
+          <a:p>
+            <a:pPr algn="ctr"/>
+            <a:r>
+              <a:rPr sz="600" b="0">
+                <a:solidFill>
+                  <a:srgbClr val="FFFFFF"/>
+                </a:solidFill>
+                <a:latin typeface="Apple SD Gothic Neo"/>
+              </a:rPr>
+              <a:t/>
+            </a:r>
+          </a:p>
+          <a:p>
+            <a:pPr algn="ctr"/>
+            <a:r>
+              <a:rPr sz="1700" b="1">
+                <a:solidFill>
+                  <a:srgbClr val="FFFFFF"/>
+                </a:solidFill>
+                <a:latin typeface="Apple SD Gothic Neo"/>
+              </a:rPr>
+              <a:t>통과시킬</a:t>
+            </a:r>
+          </a:p>
+          <a:p>
+            <a:pPr algn="ctr"/>
+            <a:r>
+              <a:rPr sz="1700" b="1">
+                <a:solidFill>
+                  <a:srgbClr val="FFFFFF"/>
+                </a:solidFill>
+                <a:latin typeface="Apple SD Gothic Neo"/>
+              </a:rPr>
+              <a:t>최소한만 구현</a:t>
+            </a:r>
+          </a:p>
+        </p:txBody>
+      </p:sp>
+      <p:sp>
+        <p:nvSpPr>
+          <p:cNvPr id="7" name="TextBox 6"/>
+          <p:cNvSpPr txBox="1"/>
+          <p:nvPr/>
+        </p:nvSpPr>
+        <p:spPr>
+          <a:xfrm>
+            <a:off x="7467447" y="3383280"/>
+            <a:ext cx="640080" cy="548640"/>
+          </a:xfrm>
+          <a:prstGeom prst="rect">
+            <a:avLst/>
+          </a:prstGeom>
+          <a:noFill/>
+        </p:spPr>
+        <p:txBody>
+          <a:bodyPr wrap="square" anchor="ctr">
+            <a:spAutoFit/>
+          </a:bodyPr>
+          <a:lstStyle/>
+          <a:p>
+            <a:pPr algn="ctr"/>
+            <a:r>
+              <a:rPr sz="2800" b="1">
+                <a:solidFill>
+                  <a:srgbClr val="5B5BD6"/>
+                </a:solidFill>
+                <a:latin typeface="Apple SD Gothic Neo"/>
+              </a:rPr>
+              <a:t>→</a:t>
+            </a:r>
+          </a:p>
+        </p:txBody>
+      </p:sp>
+      <p:sp>
+        <p:nvSpPr>
+          <p:cNvPr id="8" name="Rounded Rectangle 7"/>
+          <p:cNvSpPr/>
+          <p:nvPr/>
+        </p:nvSpPr>
+        <p:spPr>
+          <a:xfrm>
+            <a:off x="8061807" y="2743200"/>
+            <a:ext cx="2834640" cy="1737360"/>
+          </a:xfrm>
+          <a:prstGeom prst="roundRect">
+            <a:avLst>
+              <a:gd name="adj" fmla="val 12000"/>
+            </a:avLst>
+          </a:prstGeom>
+          <a:solidFill>
+            <a:srgbClr val="2F6FD8"/>
+          </a:solidFill>
+          <a:ln>
+            <a:noFill/>
+          </a:ln>
+          <a:effectLst/>
+        </p:spPr>
+        <p:style>
+          <a:lnRef idx="1">
+            <a:schemeClr val="accent1"/>
+          </a:lnRef>
+          <a:fillRef idx="3">
+            <a:schemeClr val="accent1"/>
+          </a:fillRef>
+          <a:effectRef idx="2">
+            <a:schemeClr val="accent1"/>
+          </a:effectRef>
+          <a:fontRef idx="minor">
+            <a:schemeClr val="lt1"/>
+          </a:fontRef>
+        </p:style>
+        <p:txBody>
+          <a:bodyPr rtlCol="0" anchor="ctr" tIns="76200" bIns="76200" lIns="127000" rIns="127000" wrap="square"/>
+          <a:lstStyle/>
+          <a:p>
+            <a:pPr algn="ctr"/>
+            <a:r>
+              <a:rPr sz="2200" b="1">
+                <a:solidFill>
+                  <a:srgbClr val="FFFFFF"/>
+                </a:solidFill>
+                <a:latin typeface="Menlo"/>
+              </a:rPr>
+              <a:t>REFACTOR</a:t>
+            </a:r>
+          </a:p>
+          <a:p>
+            <a:pPr algn="ctr"/>
+            <a:r>
+              <a:rPr sz="600" b="0">
+                <a:solidFill>
+                  <a:srgbClr val="FFFFFF"/>
+                </a:solidFill>
+                <a:latin typeface="Apple SD Gothic Neo"/>
+              </a:rPr>
+              <a:t/>
+            </a:r>
+          </a:p>
+          <a:p>
+            <a:pPr algn="ctr"/>
+            <a:r>
+              <a:rPr sz="1700" b="1">
+                <a:solidFill>
+                  <a:srgbClr val="FFFFFF"/>
+                </a:solidFill>
+                <a:latin typeface="Apple SD Gothic Neo"/>
+              </a:rPr>
+              <a:t>녹색 유지한 채</a:t>
+            </a:r>
+          </a:p>
+          <a:p>
+            <a:pPr algn="ctr"/>
+            <a:r>
+              <a:rPr sz="1700" b="1">
+                <a:solidFill>
+                  <a:srgbClr val="FFFFFF"/>
+                </a:solidFill>
+                <a:latin typeface="Apple SD Gothic Neo"/>
+              </a:rPr>
+              <a:t>정리·중복 제거</a:t>
+            </a:r>
+          </a:p>
+        </p:txBody>
+      </p:sp>
+      <p:sp>
+        <p:nvSpPr>
+          <p:cNvPr id="9" name="TextBox 8"/>
+          <p:cNvSpPr txBox="1"/>
+          <p:nvPr/>
+        </p:nvSpPr>
+        <p:spPr>
+          <a:xfrm>
+            <a:off x="822960" y="5029200"/>
+            <a:ext cx="10607040" cy="822960"/>
+          </a:xfrm>
+          <a:prstGeom prst="rect">
+            <a:avLst/>
+          </a:prstGeom>
+          <a:noFill/>
+        </p:spPr>
+        <p:txBody>
+          <a:bodyPr wrap="square" anchor="t">
+            <a:spAutoFit/>
+          </a:bodyPr>
+          <a:lstStyle/>
+          <a:p>
+            <a:pPr algn="ctr"/>
+            <a:r>
+              <a:rPr sz="2400" b="1" spc="-40">
+                <a:solidFill>
+                  <a:srgbClr val="1A1A1A"/>
+                </a:solidFill>
+                <a:latin typeface="Apple SD Gothic Neo"/>
+              </a:rPr>
+              <a:t>AI가 짠 코드도 이 사이클을 강제했다.</a:t>
             </a:r>
           </a:p>
         </p:txBody>

--- a/docs/presentation/보험발표-figma.pptx
+++ b/docs/presentation/보험발표-figma.pptx
@@ -31,6 +31,8 @@
     <p:sldId id="279" r:id="rId25"/>
     <p:sldId id="280" r:id="rId26"/>
     <p:sldId id="284" r:id="rId34"/>
+    <p:sldId id="300" r:id="rId48"/>
+    <p:sldId id="301" r:id="rId49"/>
     <p:sldId id="297" r:id="rId28"/>
     <p:sldId id="298" r:id="rId27"/>
     <p:sldId id="299" r:id="rId47"/>
@@ -43,6 +45,7 @@
     <p:sldId id="291" r:id="rId41"/>
     <p:sldId id="292" r:id="rId42"/>
     <p:sldId id="293" r:id="rId43"/>
+    <p:sldId id="302" r:id="rId50"/>
     <p:sldId id="294" r:id="rId44"/>
     <p:sldId id="295" r:id="rId45"/>
     <p:sldId id="296" r:id="rId46"/>
@@ -9736,7 +9739,7 @@
                 </a:solidFill>
                 <a:latin typeface="Apple SD Gothic Neo"/>
               </a:rPr>
-              <a:t>AI를 어떻게 통제했나</a:t>
+              <a:t>개발 파이프라인</a:t>
             </a:r>
           </a:p>
         </p:txBody>
@@ -9787,14 +9790,95 @@
       </p:sp>
       <p:sp>
         <p:nvSpPr>
-          <p:cNvPr id="4" name="TextBox 3"/>
+          <p:cNvPr id="4" name="Rounded Rectangle 3"/>
+          <p:cNvSpPr/>
+          <p:nvPr/>
+        </p:nvSpPr>
+        <p:spPr>
+          <a:xfrm>
+            <a:off x="824331" y="2834640"/>
+            <a:ext cx="1874519" cy="1554480"/>
+          </a:xfrm>
+          <a:prstGeom prst="roundRect">
+            <a:avLst>
+              <a:gd name="adj" fmla="val 12000"/>
+            </a:avLst>
+          </a:prstGeom>
+          <a:solidFill>
+            <a:srgbClr val="F4F4F6"/>
+          </a:solidFill>
+          <a:ln w="16510">
+            <a:solidFill>
+              <a:srgbClr val="E6E6E6"/>
+            </a:solidFill>
+          </a:ln>
+          <a:effectLst/>
+        </p:spPr>
+        <p:style>
+          <a:lnRef idx="1">
+            <a:schemeClr val="accent1"/>
+          </a:lnRef>
+          <a:fillRef idx="3">
+            <a:schemeClr val="accent1"/>
+          </a:fillRef>
+          <a:effectRef idx="2">
+            <a:schemeClr val="accent1"/>
+          </a:effectRef>
+          <a:fontRef idx="minor">
+            <a:schemeClr val="lt1"/>
+          </a:fontRef>
+        </p:style>
+        <p:txBody>
+          <a:bodyPr rtlCol="0" anchor="ctr" tIns="76200" bIns="76200" lIns="127000" rIns="127000" wrap="square"/>
+          <a:lstStyle/>
+          <a:p>
+            <a:pPr algn="ctr"/>
+            <a:r>
+              <a:rPr sz="2200" b="1">
+                <a:solidFill>
+                  <a:srgbClr val="1A1A1A"/>
+                </a:solidFill>
+                <a:latin typeface="Apple SD Gothic Neo"/>
+              </a:rPr>
+              <a:t>발산</a:t>
+            </a:r>
+          </a:p>
+          <a:p>
+            <a:pPr algn="ctr"/>
+            <a:r>
+              <a:rPr sz="600" b="0">
+                <a:solidFill>
+                  <a:srgbClr val="6B7280"/>
+                </a:solidFill>
+                <a:latin typeface="Apple SD Gothic Neo"/>
+              </a:rPr>
+              <a:t/>
+            </a:r>
+          </a:p>
+          <a:p>
+            <a:pPr algn="ctr"/>
+            <a:r>
+              <a:rPr sz="1200" b="0">
+                <a:solidFill>
+                  <a:srgbClr val="6B7280"/>
+                </a:solidFill>
+                <a:latin typeface="Menlo"/>
+              </a:rPr>
+              <a:t>brainstorming</a:t>
+            </a:r>
+          </a:p>
+        </p:txBody>
+      </p:sp>
+      <p:sp>
+        <p:nvSpPr>
+          <p:cNvPr id="5" name="TextBox 4"/>
           <p:cNvSpPr txBox="1"/>
           <p:nvPr/>
         </p:nvSpPr>
         <p:spPr>
           <a:xfrm>
-            <a:off x="822960" y="2651760"/>
-            <a:ext cx="10607040" cy="1554480"/>
+            <a:off x="2525115" y="3337560"/>
+            <a:ext cx="640080" cy="548640"/>
           </a:xfrm>
           <a:prstGeom prst="rect">
             <a:avLst/>
@@ -9809,28 +9893,456 @@
           <a:p>
             <a:pPr algn="ctr"/>
             <a:r>
-              <a:rPr sz="3200" b="1" spc="-60">
+              <a:rPr sz="2600" b="1">
+                <a:solidFill>
+                  <a:srgbClr val="6B7280"/>
+                </a:solidFill>
+                <a:latin typeface="Apple SD Gothic Neo"/>
+              </a:rPr>
+              <a:t>→</a:t>
+            </a:r>
+          </a:p>
+        </p:txBody>
+      </p:sp>
+      <p:sp>
+        <p:nvSpPr>
+          <p:cNvPr id="6" name="Rounded Rectangle 5"/>
+          <p:cNvSpPr/>
+          <p:nvPr/>
+        </p:nvSpPr>
+        <p:spPr>
+          <a:xfrm>
+            <a:off x="2991459" y="2834640"/>
+            <a:ext cx="1874519" cy="1554480"/>
+          </a:xfrm>
+          <a:prstGeom prst="roundRect">
+            <a:avLst>
+              <a:gd name="adj" fmla="val 12000"/>
+            </a:avLst>
+          </a:prstGeom>
+          <a:solidFill>
+            <a:srgbClr val="ECEBFB"/>
+          </a:solidFill>
+          <a:ln w="16510">
+            <a:solidFill>
+              <a:srgbClr val="E6E6E6"/>
+            </a:solidFill>
+          </a:ln>
+          <a:effectLst/>
+        </p:spPr>
+        <p:style>
+          <a:lnRef idx="1">
+            <a:schemeClr val="accent1"/>
+          </a:lnRef>
+          <a:fillRef idx="3">
+            <a:schemeClr val="accent1"/>
+          </a:fillRef>
+          <a:effectRef idx="2">
+            <a:schemeClr val="accent1"/>
+          </a:effectRef>
+          <a:fontRef idx="minor">
+            <a:schemeClr val="lt1"/>
+          </a:fontRef>
+        </p:style>
+        <p:txBody>
+          <a:bodyPr rtlCol="0" anchor="ctr" tIns="76200" bIns="76200" lIns="127000" rIns="127000" wrap="square"/>
+          <a:lstStyle/>
+          <a:p>
+            <a:pPr algn="ctr"/>
+            <a:r>
+              <a:rPr sz="2200" b="1">
                 <a:solidFill>
                   <a:srgbClr val="1A1A1A"/>
                 </a:solidFill>
                 <a:latin typeface="Apple SD Gothic Neo"/>
               </a:rPr>
-              <a:t>AI가 짠 설계를 다이어그램·유스케이스에
-대고 한 질문씩 캐물었다.</a:t>
-            </a:r>
-          </a:p>
-        </p:txBody>
-      </p:sp>
-      <p:sp>
-        <p:nvSpPr>
-          <p:cNvPr id="5" name="TextBox 4"/>
+              <a:t>취조</a:t>
+            </a:r>
+          </a:p>
+          <a:p>
+            <a:pPr algn="ctr"/>
+            <a:r>
+              <a:rPr sz="600" b="0">
+                <a:solidFill>
+                  <a:srgbClr val="6B7280"/>
+                </a:solidFill>
+                <a:latin typeface="Apple SD Gothic Neo"/>
+              </a:rPr>
+              <a:t/>
+            </a:r>
+          </a:p>
+          <a:p>
+            <a:pPr algn="ctr"/>
+            <a:r>
+              <a:rPr sz="1200" b="0">
+                <a:solidFill>
+                  <a:srgbClr val="6B7280"/>
+                </a:solidFill>
+                <a:latin typeface="Menlo"/>
+              </a:rPr>
+              <a:t>grill-with-docs</a:t>
+            </a:r>
+          </a:p>
+        </p:txBody>
+      </p:sp>
+      <p:sp>
+        <p:nvSpPr>
+          <p:cNvPr id="7" name="TextBox 6"/>
           <p:cNvSpPr txBox="1"/>
           <p:nvPr/>
         </p:nvSpPr>
         <p:spPr>
           <a:xfrm>
-            <a:off x="822960" y="4434840"/>
-            <a:ext cx="10607040" cy="914400"/>
+            <a:off x="4692243" y="3337560"/>
+            <a:ext cx="640080" cy="548640"/>
+          </a:xfrm>
+          <a:prstGeom prst="rect">
+            <a:avLst/>
+          </a:prstGeom>
+          <a:noFill/>
+        </p:spPr>
+        <p:txBody>
+          <a:bodyPr wrap="square" anchor="ctr">
+            <a:spAutoFit/>
+          </a:bodyPr>
+          <a:lstStyle/>
+          <a:p>
+            <a:pPr algn="ctr"/>
+            <a:r>
+              <a:rPr sz="2600" b="1">
+                <a:solidFill>
+                  <a:srgbClr val="6B7280"/>
+                </a:solidFill>
+                <a:latin typeface="Apple SD Gothic Neo"/>
+              </a:rPr>
+              <a:t>→</a:t>
+            </a:r>
+          </a:p>
+        </p:txBody>
+      </p:sp>
+      <p:sp>
+        <p:nvSpPr>
+          <p:cNvPr id="8" name="Rounded Rectangle 7"/>
+          <p:cNvSpPr/>
+          <p:nvPr/>
+        </p:nvSpPr>
+        <p:spPr>
+          <a:xfrm>
+            <a:off x="5158587" y="2834640"/>
+            <a:ext cx="1874519" cy="1554480"/>
+          </a:xfrm>
+          <a:prstGeom prst="roundRect">
+            <a:avLst>
+              <a:gd name="adj" fmla="val 12000"/>
+            </a:avLst>
+          </a:prstGeom>
+          <a:solidFill>
+            <a:srgbClr val="F4F4F6"/>
+          </a:solidFill>
+          <a:ln w="16510">
+            <a:solidFill>
+              <a:srgbClr val="E6E6E6"/>
+            </a:solidFill>
+          </a:ln>
+          <a:effectLst/>
+        </p:spPr>
+        <p:style>
+          <a:lnRef idx="1">
+            <a:schemeClr val="accent1"/>
+          </a:lnRef>
+          <a:fillRef idx="3">
+            <a:schemeClr val="accent1"/>
+          </a:fillRef>
+          <a:effectRef idx="2">
+            <a:schemeClr val="accent1"/>
+          </a:effectRef>
+          <a:fontRef idx="minor">
+            <a:schemeClr val="lt1"/>
+          </a:fontRef>
+        </p:style>
+        <p:txBody>
+          <a:bodyPr rtlCol="0" anchor="ctr" tIns="76200" bIns="76200" lIns="127000" rIns="127000" wrap="square"/>
+          <a:lstStyle/>
+          <a:p>
+            <a:pPr algn="ctr"/>
+            <a:r>
+              <a:rPr sz="2200" b="1">
+                <a:solidFill>
+                  <a:srgbClr val="1A1A1A"/>
+                </a:solidFill>
+                <a:latin typeface="Apple SD Gothic Neo"/>
+              </a:rPr>
+              <a:t>계획</a:t>
+            </a:r>
+          </a:p>
+          <a:p>
+            <a:pPr algn="ctr"/>
+            <a:r>
+              <a:rPr sz="600" b="0">
+                <a:solidFill>
+                  <a:srgbClr val="6B7280"/>
+                </a:solidFill>
+                <a:latin typeface="Apple SD Gothic Neo"/>
+              </a:rPr>
+              <a:t/>
+            </a:r>
+          </a:p>
+          <a:p>
+            <a:pPr algn="ctr"/>
+            <a:r>
+              <a:rPr sz="1200" b="0">
+                <a:solidFill>
+                  <a:srgbClr val="6B7280"/>
+                </a:solidFill>
+                <a:latin typeface="Menlo"/>
+              </a:rPr>
+              <a:t>writing-plans</a:t>
+            </a:r>
+          </a:p>
+        </p:txBody>
+      </p:sp>
+      <p:sp>
+        <p:nvSpPr>
+          <p:cNvPr id="9" name="TextBox 8"/>
+          <p:cNvSpPr txBox="1"/>
+          <p:nvPr/>
+        </p:nvSpPr>
+        <p:spPr>
+          <a:xfrm>
+            <a:off x="6859371" y="3337560"/>
+            <a:ext cx="640080" cy="548640"/>
+          </a:xfrm>
+          <a:prstGeom prst="rect">
+            <a:avLst/>
+          </a:prstGeom>
+          <a:noFill/>
+        </p:spPr>
+        <p:txBody>
+          <a:bodyPr wrap="square" anchor="ctr">
+            <a:spAutoFit/>
+          </a:bodyPr>
+          <a:lstStyle/>
+          <a:p>
+            <a:pPr algn="ctr"/>
+            <a:r>
+              <a:rPr sz="2600" b="1">
+                <a:solidFill>
+                  <a:srgbClr val="6B7280"/>
+                </a:solidFill>
+                <a:latin typeface="Apple SD Gothic Neo"/>
+              </a:rPr>
+              <a:t>→</a:t>
+            </a:r>
+          </a:p>
+        </p:txBody>
+      </p:sp>
+      <p:sp>
+        <p:nvSpPr>
+          <p:cNvPr id="10" name="Rounded Rectangle 9"/>
+          <p:cNvSpPr/>
+          <p:nvPr/>
+        </p:nvSpPr>
+        <p:spPr>
+          <a:xfrm>
+            <a:off x="7325715" y="2834640"/>
+            <a:ext cx="1874519" cy="1554480"/>
+          </a:xfrm>
+          <a:prstGeom prst="roundRect">
+            <a:avLst>
+              <a:gd name="adj" fmla="val 12000"/>
+            </a:avLst>
+          </a:prstGeom>
+          <a:solidFill>
+            <a:srgbClr val="ECEBFB"/>
+          </a:solidFill>
+          <a:ln w="16510">
+            <a:solidFill>
+              <a:srgbClr val="E6E6E6"/>
+            </a:solidFill>
+          </a:ln>
+          <a:effectLst/>
+        </p:spPr>
+        <p:style>
+          <a:lnRef idx="1">
+            <a:schemeClr val="accent1"/>
+          </a:lnRef>
+          <a:fillRef idx="3">
+            <a:schemeClr val="accent1"/>
+          </a:fillRef>
+          <a:effectRef idx="2">
+            <a:schemeClr val="accent1"/>
+          </a:effectRef>
+          <a:fontRef idx="minor">
+            <a:schemeClr val="lt1"/>
+          </a:fontRef>
+        </p:style>
+        <p:txBody>
+          <a:bodyPr rtlCol="0" anchor="ctr" tIns="76200" bIns="76200" lIns="127000" rIns="127000" wrap="square"/>
+          <a:lstStyle/>
+          <a:p>
+            <a:pPr algn="ctr"/>
+            <a:r>
+              <a:rPr sz="2200" b="1">
+                <a:solidFill>
+                  <a:srgbClr val="1A1A1A"/>
+                </a:solidFill>
+                <a:latin typeface="Apple SD Gothic Neo"/>
+              </a:rPr>
+              <a:t>구현</a:t>
+            </a:r>
+          </a:p>
+          <a:p>
+            <a:pPr algn="ctr"/>
+            <a:r>
+              <a:rPr sz="600" b="0">
+                <a:solidFill>
+                  <a:srgbClr val="6B7280"/>
+                </a:solidFill>
+                <a:latin typeface="Apple SD Gothic Neo"/>
+              </a:rPr>
+              <a:t/>
+            </a:r>
+          </a:p>
+          <a:p>
+            <a:pPr algn="ctr"/>
+            <a:r>
+              <a:rPr sz="1200" b="0">
+                <a:solidFill>
+                  <a:srgbClr val="6B7280"/>
+                </a:solidFill>
+                <a:latin typeface="Menlo"/>
+              </a:rPr>
+              <a:t>executing-plans</a:t>
+            </a:r>
+          </a:p>
+        </p:txBody>
+      </p:sp>
+      <p:sp>
+        <p:nvSpPr>
+          <p:cNvPr id="11" name="TextBox 10"/>
+          <p:cNvSpPr txBox="1"/>
+          <p:nvPr/>
+        </p:nvSpPr>
+        <p:spPr>
+          <a:xfrm>
+            <a:off x="9026499" y="3337560"/>
+            <a:ext cx="640080" cy="548640"/>
+          </a:xfrm>
+          <a:prstGeom prst="rect">
+            <a:avLst/>
+          </a:prstGeom>
+          <a:noFill/>
+        </p:spPr>
+        <p:txBody>
+          <a:bodyPr wrap="square" anchor="ctr">
+            <a:spAutoFit/>
+          </a:bodyPr>
+          <a:lstStyle/>
+          <a:p>
+            <a:pPr algn="ctr"/>
+            <a:r>
+              <a:rPr sz="2600" b="1">
+                <a:solidFill>
+                  <a:srgbClr val="6B7280"/>
+                </a:solidFill>
+                <a:latin typeface="Apple SD Gothic Neo"/>
+              </a:rPr>
+              <a:t>→</a:t>
+            </a:r>
+          </a:p>
+        </p:txBody>
+      </p:sp>
+      <p:sp>
+        <p:nvSpPr>
+          <p:cNvPr id="12" name="Rounded Rectangle 11"/>
+          <p:cNvSpPr/>
+          <p:nvPr/>
+        </p:nvSpPr>
+        <p:spPr>
+          <a:xfrm>
+            <a:off x="9492843" y="2834640"/>
+            <a:ext cx="1874519" cy="1554480"/>
+          </a:xfrm>
+          <a:prstGeom prst="roundRect">
+            <a:avLst>
+              <a:gd name="adj" fmla="val 12000"/>
+            </a:avLst>
+          </a:prstGeom>
+          <a:solidFill>
+            <a:srgbClr val="F4F4F6"/>
+          </a:solidFill>
+          <a:ln w="16510">
+            <a:solidFill>
+              <a:srgbClr val="E6E6E6"/>
+            </a:solidFill>
+          </a:ln>
+          <a:effectLst/>
+        </p:spPr>
+        <p:style>
+          <a:lnRef idx="1">
+            <a:schemeClr val="accent1"/>
+          </a:lnRef>
+          <a:fillRef idx="3">
+            <a:schemeClr val="accent1"/>
+          </a:fillRef>
+          <a:effectRef idx="2">
+            <a:schemeClr val="accent1"/>
+          </a:effectRef>
+          <a:fontRef idx="minor">
+            <a:schemeClr val="lt1"/>
+          </a:fontRef>
+        </p:style>
+        <p:txBody>
+          <a:bodyPr rtlCol="0" anchor="ctr" tIns="76200" bIns="76200" lIns="127000" rIns="127000" wrap="square"/>
+          <a:lstStyle/>
+          <a:p>
+            <a:pPr algn="ctr"/>
+            <a:r>
+              <a:rPr sz="2200" b="1">
+                <a:solidFill>
+                  <a:srgbClr val="1A1A1A"/>
+                </a:solidFill>
+                <a:latin typeface="Apple SD Gothic Neo"/>
+              </a:rPr>
+              <a:t>검증</a:t>
+            </a:r>
+          </a:p>
+          <a:p>
+            <a:pPr algn="ctr"/>
+            <a:r>
+              <a:rPr sz="600" b="0">
+                <a:solidFill>
+                  <a:srgbClr val="6B7280"/>
+                </a:solidFill>
+                <a:latin typeface="Apple SD Gothic Neo"/>
+              </a:rPr>
+              <a:t/>
+            </a:r>
+          </a:p>
+          <a:p>
+            <a:pPr algn="ctr"/>
+            <a:r>
+              <a:rPr sz="1200" b="0">
+                <a:solidFill>
+                  <a:srgbClr val="6B7280"/>
+                </a:solidFill>
+                <a:latin typeface="Menlo"/>
+              </a:rPr>
+              <a:t>Codex 리뷰</a:t>
+            </a:r>
+          </a:p>
+        </p:txBody>
+      </p:sp>
+      <p:sp>
+        <p:nvSpPr>
+          <p:cNvPr id="13" name="TextBox 12"/>
+          <p:cNvSpPr txBox="1"/>
+          <p:nvPr/>
+        </p:nvSpPr>
+        <p:spPr>
+          <a:xfrm>
+            <a:off x="822960" y="5029200"/>
+            <a:ext cx="10607040" cy="822960"/>
           </a:xfrm>
           <a:prstGeom prst="rect">
             <a:avLst/>
@@ -9845,13 +10357,13 @@
           <a:p>
             <a:pPr algn="ctr"/>
             <a:r>
-              <a:rPr sz="2200" b="0" spc="-30">
-                <a:solidFill>
-                  <a:srgbClr val="6B7280"/>
-                </a:solidFill>
-                <a:latin typeface="Apple SD Gothic Neo"/>
-              </a:rPr>
-              <a:t>결정은 전부 사람이 내렸다.</a:t>
+              <a:rPr sz="2400" b="1" spc="-40">
+                <a:solidFill>
+                  <a:srgbClr val="1A1A1A"/>
+                </a:solidFill>
+                <a:latin typeface="Apple SD Gothic Neo"/>
+              </a:rPr>
+              <a:t>각 단계가 산출물을 남긴다 — 설계 · 용어 · 계획 · 코드 · 리뷰.</a:t>
             </a:r>
           </a:p>
         </p:txBody>
@@ -9912,7 +10424,7 @@
                 </a:solidFill>
                 <a:latin typeface="Apple SD Gothic Neo"/>
               </a:rPr>
-              <a:t>취조 ① — 빠뜨린 걸 잡다</a:t>
+              <a:t>테스트 주도 개발 (TDD)</a:t>
             </a:r>
           </a:p>
         </p:txBody>
@@ -9963,96 +10475,14 @@
       </p:sp>
       <p:sp>
         <p:nvSpPr>
-          <p:cNvPr id="4" name="Rounded Rectangle 3"/>
-          <p:cNvSpPr/>
-          <p:nvPr/>
-        </p:nvSpPr>
-        <p:spPr>
-          <a:xfrm>
-            <a:off x="777240" y="2743200"/>
-            <a:ext cx="4800600" cy="1920240"/>
-          </a:xfrm>
-          <a:prstGeom prst="roundRect">
-            <a:avLst>
-              <a:gd name="adj" fmla="val 12000"/>
-            </a:avLst>
-          </a:prstGeom>
-          <a:solidFill>
-            <a:srgbClr val="F4F4F6"/>
-          </a:solidFill>
-          <a:ln w="16510">
-            <a:solidFill>
-              <a:srgbClr val="E6E6E6"/>
-            </a:solidFill>
-          </a:ln>
-          <a:effectLst/>
-        </p:spPr>
-        <p:style>
-          <a:lnRef idx="1">
-            <a:schemeClr val="accent1"/>
-          </a:lnRef>
-          <a:fillRef idx="3">
-            <a:schemeClr val="accent1"/>
-          </a:fillRef>
-          <a:effectRef idx="2">
-            <a:schemeClr val="accent1"/>
-          </a:effectRef>
-          <a:fontRef idx="minor">
-            <a:schemeClr val="lt1"/>
-          </a:fontRef>
-        </p:style>
-        <p:txBody>
-          <a:bodyPr rtlCol="0" anchor="ctr" tIns="101600" bIns="101600" lIns="203200" rIns="203200" wrap="square"/>
-          <a:lstStyle/>
-          <a:p>
-            <a:pPr algn="l"/>
-            <a:r>
-              <a:rPr sz="1600" b="1">
-                <a:solidFill>
-                  <a:srgbClr val="6B7280"/>
-                </a:solidFill>
-                <a:latin typeface="Apple SD Gothic Neo"/>
-              </a:rPr>
-              <a:t>AI가 한 것</a:t>
-            </a:r>
-          </a:p>
-          <a:p>
-            <a:pPr algn="l"/>
-            <a:r>
-              <a:rPr sz="600" b="0">
-                <a:solidFill>
-                  <a:srgbClr val="6B7280"/>
-                </a:solidFill>
-                <a:latin typeface="Apple SD Gothic Neo"/>
-              </a:rPr>
-              <a:t/>
-            </a:r>
-          </a:p>
-          <a:p>
-            <a:pPr algn="l"/>
-            <a:r>
-              <a:rPr sz="2100" b="1">
-                <a:solidFill>
-                  <a:srgbClr val="1A1A1A"/>
-                </a:solidFill>
-                <a:latin typeface="Apple SD Gothic Neo"/>
-              </a:rPr>
-              <a:t>유스케이스 17개에
-'회원가입'이 없었다</a:t>
-            </a:r>
-          </a:p>
-        </p:txBody>
-      </p:sp>
-      <p:sp>
-        <p:nvSpPr>
-          <p:cNvPr id="5" name="TextBox 4"/>
+          <p:cNvPr id="4" name="TextBox 3"/>
           <p:cNvSpPr txBox="1"/>
           <p:nvPr/>
         </p:nvSpPr>
         <p:spPr>
           <a:xfrm>
-            <a:off x="5733288" y="3383280"/>
-            <a:ext cx="731520" cy="640080"/>
+            <a:off x="822960" y="2651760"/>
+            <a:ext cx="10607040" cy="1554480"/>
           </a:xfrm>
           <a:prstGeom prst="rect">
             <a:avLst/>
@@ -10067,93 +10497,60 @@
           <a:p>
             <a:pPr algn="ctr"/>
             <a:r>
-              <a:rPr sz="3400" b="1">
+              <a:rPr sz="3600" b="1" spc="-60">
+                <a:solidFill>
+                  <a:srgbClr val="1A1A1A"/>
+                </a:solidFill>
+                <a:latin typeface="Apple SD Gothic Neo"/>
+              </a:rPr>
+              <a:t>실패하는 테스트 없이는</a:t>
+            </a:r>
+          </a:p>
+          <a:p>
+            <a:pPr algn="ctr"/>
+            <a:r>
+              <a:rPr sz="3600" b="1" spc="-60">
                 <a:solidFill>
                   <a:srgbClr val="5B5BD6"/>
                 </a:solidFill>
                 <a:latin typeface="Apple SD Gothic Neo"/>
               </a:rPr>
-              <a:t>→</a:t>
-            </a:r>
-          </a:p>
-        </p:txBody>
-      </p:sp>
-      <p:sp>
-        <p:nvSpPr>
-          <p:cNvPr id="6" name="Rounded Rectangle 5"/>
-          <p:cNvSpPr/>
-          <p:nvPr/>
-        </p:nvSpPr>
-        <p:spPr>
-          <a:xfrm>
-            <a:off x="6629400" y="2743200"/>
-            <a:ext cx="4800600" cy="1920240"/>
-          </a:xfrm>
-          <a:prstGeom prst="roundRect">
-            <a:avLst>
-              <a:gd name="adj" fmla="val 12000"/>
-            </a:avLst>
-          </a:prstGeom>
-          <a:solidFill>
-            <a:srgbClr val="ECEBFB"/>
-          </a:solidFill>
-          <a:ln>
-            <a:noFill/>
-          </a:ln>
-          <a:effectLst/>
-        </p:spPr>
-        <p:style>
-          <a:lnRef idx="1">
-            <a:schemeClr val="accent1"/>
-          </a:lnRef>
-          <a:fillRef idx="3">
-            <a:schemeClr val="accent1"/>
-          </a:fillRef>
-          <a:effectRef idx="2">
-            <a:schemeClr val="accent1"/>
-          </a:effectRef>
-          <a:fontRef idx="minor">
-            <a:schemeClr val="lt1"/>
-          </a:fontRef>
-        </p:style>
-        <p:txBody>
-          <a:bodyPr rtlCol="0" anchor="ctr" tIns="101600" bIns="101600" lIns="203200" rIns="203200" wrap="square"/>
-          <a:lstStyle/>
-          <a:p>
-            <a:pPr algn="l"/>
-            <a:r>
-              <a:rPr sz="1600" b="1">
-                <a:solidFill>
-                  <a:srgbClr val="5B5BD6"/>
-                </a:solidFill>
-                <a:latin typeface="Apple SD Gothic Neo"/>
-              </a:rPr>
-              <a:t>내가 통제</a:t>
-            </a:r>
-          </a:p>
-          <a:p>
-            <a:pPr algn="l"/>
-            <a:r>
-              <a:rPr sz="600" b="0">
+              <a:t>프로덕션 코드를 쓰지 않는다.</a:t>
+            </a:r>
+          </a:p>
+        </p:txBody>
+      </p:sp>
+      <p:sp>
+        <p:nvSpPr>
+          <p:cNvPr id="5" name="TextBox 4"/>
+          <p:cNvSpPr txBox="1"/>
+          <p:nvPr/>
+        </p:nvSpPr>
+        <p:spPr>
+          <a:xfrm>
+            <a:off x="822960" y="4572000"/>
+            <a:ext cx="10607040" cy="914400"/>
+          </a:xfrm>
+          <a:prstGeom prst="rect">
+            <a:avLst/>
+          </a:prstGeom>
+          <a:noFill/>
+        </p:spPr>
+        <p:txBody>
+          <a:bodyPr wrap="square" anchor="t">
+            <a:spAutoFit/>
+          </a:bodyPr>
+          <a:lstStyle/>
+          <a:p>
+            <a:pPr algn="ctr"/>
+            <a:r>
+              <a:rPr sz="2200" b="0" spc="-30">
                 <a:solidFill>
                   <a:srgbClr val="6B7280"/>
                 </a:solidFill>
                 <a:latin typeface="Apple SD Gothic Neo"/>
               </a:rPr>
-              <a:t/>
-            </a:r>
-          </a:p>
-          <a:p>
-            <a:pPr algn="l"/>
-            <a:r>
-              <a:rPr sz="2100" b="1">
-                <a:solidFill>
-                  <a:srgbClr val="1A1A1A"/>
-                </a:solidFill>
-                <a:latin typeface="Apple SD Gothic Neo"/>
-              </a:rPr>
-              <a:t>회원가입을 명시적으로
-추가하기로 결정</a:t>
+              <a:t>AI가 쏟아내는 코드를 검증 없이 통과시키지 않는 장치.</a:t>
             </a:r>
           </a:p>
         </p:txBody>
@@ -10214,7 +10611,7 @@
                 </a:solidFill>
                 <a:latin typeface="Apple SD Gothic Neo"/>
               </a:rPr>
-              <a:t>취조 ② — 흔들리는 용어를 잡다</a:t>
+              <a:t>Red → Green → Refactor</a:t>
             </a:r>
           </a:p>
         </p:txBody>
@@ -10271,8 +10668,8 @@
         </p:nvSpPr>
         <p:spPr>
           <a:xfrm>
-            <a:off x="777240" y="2743200"/>
-            <a:ext cx="4800600" cy="1920240"/>
+            <a:off x="1295247" y="2743200"/>
+            <a:ext cx="2834640" cy="1737360"/>
           </a:xfrm>
           <a:prstGeom prst="roundRect">
             <a:avLst>
@@ -10280,12 +10677,10 @@
             </a:avLst>
           </a:prstGeom>
           <a:solidFill>
-            <a:srgbClr val="F4F4F6"/>
+            <a:srgbClr val="D8392B"/>
           </a:solidFill>
-          <a:ln w="16510">
-            <a:solidFill>
-              <a:srgbClr val="E6E6E6"/>
-            </a:solidFill>
+          <a:ln>
+            <a:noFill/>
           </a:ln>
           <a:effectLst/>
         </p:spPr>
@@ -10304,26 +10699,26 @@
           </a:fontRef>
         </p:style>
         <p:txBody>
-          <a:bodyPr rtlCol="0" anchor="ctr" tIns="101600" bIns="101600" lIns="203200" rIns="203200" wrap="square"/>
-          <a:lstStyle/>
-          <a:p>
-            <a:pPr algn="l"/>
-            <a:r>
-              <a:rPr sz="1600" b="1">
-                <a:solidFill>
-                  <a:srgbClr val="6B7280"/>
-                </a:solidFill>
-                <a:latin typeface="Apple SD Gothic Neo"/>
-              </a:rPr>
-              <a:t>AI가 한 것</a:t>
-            </a:r>
-          </a:p>
-          <a:p>
-            <a:pPr algn="l"/>
+          <a:bodyPr rtlCol="0" anchor="ctr" tIns="76200" bIns="76200" lIns="127000" rIns="127000" wrap="square"/>
+          <a:lstStyle/>
+          <a:p>
+            <a:pPr algn="ctr"/>
+            <a:r>
+              <a:rPr sz="2200" b="1">
+                <a:solidFill>
+                  <a:srgbClr val="FFFFFF"/>
+                </a:solidFill>
+                <a:latin typeface="Menlo"/>
+              </a:rPr>
+              <a:t>RED</a:t>
+            </a:r>
+          </a:p>
+          <a:p>
+            <a:pPr algn="ctr"/>
             <a:r>
               <a:rPr sz="600" b="0">
                 <a:solidFill>
-                  <a:srgbClr val="6B7280"/>
+                  <a:srgbClr val="FFFFFF"/>
                 </a:solidFill>
                 <a:latin typeface="Apple SD Gothic Neo"/>
               </a:rPr>
@@ -10331,16 +10726,27 @@
             </a:r>
           </a:p>
           <a:p>
-            <a:pPr algn="l"/>
-            <a:r>
-              <a:rPr sz="2100" b="1">
-                <a:solidFill>
-                  <a:srgbClr val="1A1A1A"/>
-                </a:solidFill>
-                <a:latin typeface="Apple SD Gothic Neo"/>
-              </a:rPr>
-              <a:t>같은 사람을 Policyholder·
-account·user로 섞어 부름</a:t>
+            <a:pPr algn="ctr"/>
+            <a:r>
+              <a:rPr sz="1700" b="1">
+                <a:solidFill>
+                  <a:srgbClr val="FFFFFF"/>
+                </a:solidFill>
+                <a:latin typeface="Apple SD Gothic Neo"/>
+              </a:rPr>
+              <a:t>실패 테스트를</a:t>
+            </a:r>
+          </a:p>
+          <a:p>
+            <a:pPr algn="ctr"/>
+            <a:r>
+              <a:rPr sz="1700" b="1">
+                <a:solidFill>
+                  <a:srgbClr val="FFFFFF"/>
+                </a:solidFill>
+                <a:latin typeface="Apple SD Gothic Neo"/>
+              </a:rPr>
+              <a:t>먼저 작성</a:t>
             </a:r>
           </a:p>
         </p:txBody>
@@ -10353,8 +10759,8 @@
         </p:nvSpPr>
         <p:spPr>
           <a:xfrm>
-            <a:off x="5733288" y="3383280"/>
-            <a:ext cx="731520" cy="640080"/>
+            <a:off x="4084167" y="3383280"/>
+            <a:ext cx="640080" cy="548640"/>
           </a:xfrm>
           <a:prstGeom prst="rect">
             <a:avLst/>
@@ -10369,7 +10775,7 @@
           <a:p>
             <a:pPr algn="ctr"/>
             <a:r>
-              <a:rPr sz="3400" b="1">
+              <a:rPr sz="2800" b="1">
                 <a:solidFill>
                   <a:srgbClr val="5B5BD6"/>
                 </a:solidFill>
@@ -10388,8 +10794,8 @@
         </p:nvSpPr>
         <p:spPr>
           <a:xfrm>
-            <a:off x="6629400" y="2743200"/>
-            <a:ext cx="4800600" cy="1920240"/>
+            <a:off x="4678527" y="2743200"/>
+            <a:ext cx="2834640" cy="1737360"/>
           </a:xfrm>
           <a:prstGeom prst="roundRect">
             <a:avLst>
@@ -10397,7 +10803,7 @@
             </a:avLst>
           </a:prstGeom>
           <a:solidFill>
-            <a:srgbClr val="ECEBFB"/>
+            <a:srgbClr val="2E9E5B"/>
           </a:solidFill>
           <a:ln>
             <a:noFill/>
@@ -10419,26 +10825,152 @@
           </a:fontRef>
         </p:style>
         <p:txBody>
-          <a:bodyPr rtlCol="0" anchor="ctr" tIns="101600" bIns="101600" lIns="203200" rIns="203200" wrap="square"/>
-          <a:lstStyle/>
-          <a:p>
-            <a:pPr algn="l"/>
-            <a:r>
-              <a:rPr sz="1600" b="1">
+          <a:bodyPr rtlCol="0" anchor="ctr" tIns="76200" bIns="76200" lIns="127000" rIns="127000" wrap="square"/>
+          <a:lstStyle/>
+          <a:p>
+            <a:pPr algn="ctr"/>
+            <a:r>
+              <a:rPr sz="2200" b="1">
+                <a:solidFill>
+                  <a:srgbClr val="FFFFFF"/>
+                </a:solidFill>
+                <a:latin typeface="Menlo"/>
+              </a:rPr>
+              <a:t>GREEN</a:t>
+            </a:r>
+          </a:p>
+          <a:p>
+            <a:pPr algn="ctr"/>
+            <a:r>
+              <a:rPr sz="600" b="0">
+                <a:solidFill>
+                  <a:srgbClr val="FFFFFF"/>
+                </a:solidFill>
+                <a:latin typeface="Apple SD Gothic Neo"/>
+              </a:rPr>
+              <a:t/>
+            </a:r>
+          </a:p>
+          <a:p>
+            <a:pPr algn="ctr"/>
+            <a:r>
+              <a:rPr sz="1700" b="1">
+                <a:solidFill>
+                  <a:srgbClr val="FFFFFF"/>
+                </a:solidFill>
+                <a:latin typeface="Apple SD Gothic Neo"/>
+              </a:rPr>
+              <a:t>통과시킬</a:t>
+            </a:r>
+          </a:p>
+          <a:p>
+            <a:pPr algn="ctr"/>
+            <a:r>
+              <a:rPr sz="1700" b="1">
+                <a:solidFill>
+                  <a:srgbClr val="FFFFFF"/>
+                </a:solidFill>
+                <a:latin typeface="Apple SD Gothic Neo"/>
+              </a:rPr>
+              <a:t>최소한만 구현</a:t>
+            </a:r>
+          </a:p>
+        </p:txBody>
+      </p:sp>
+      <p:sp>
+        <p:nvSpPr>
+          <p:cNvPr id="7" name="TextBox 6"/>
+          <p:cNvSpPr txBox="1"/>
+          <p:nvPr/>
+        </p:nvSpPr>
+        <p:spPr>
+          <a:xfrm>
+            <a:off x="7467447" y="3383280"/>
+            <a:ext cx="640080" cy="548640"/>
+          </a:xfrm>
+          <a:prstGeom prst="rect">
+            <a:avLst/>
+          </a:prstGeom>
+          <a:noFill/>
+        </p:spPr>
+        <p:txBody>
+          <a:bodyPr wrap="square" anchor="ctr">
+            <a:spAutoFit/>
+          </a:bodyPr>
+          <a:lstStyle/>
+          <a:p>
+            <a:pPr algn="ctr"/>
+            <a:r>
+              <a:rPr sz="2800" b="1">
                 <a:solidFill>
                   <a:srgbClr val="5B5BD6"/>
                 </a:solidFill>
                 <a:latin typeface="Apple SD Gothic Neo"/>
               </a:rPr>
-              <a:t>내가 통제</a:t>
-            </a:r>
-          </a:p>
-          <a:p>
-            <a:pPr algn="l"/>
+              <a:t>→</a:t>
+            </a:r>
+          </a:p>
+        </p:txBody>
+      </p:sp>
+      <p:sp>
+        <p:nvSpPr>
+          <p:cNvPr id="8" name="Rounded Rectangle 7"/>
+          <p:cNvSpPr/>
+          <p:nvPr/>
+        </p:nvSpPr>
+        <p:spPr>
+          <a:xfrm>
+            <a:off x="8061807" y="2743200"/>
+            <a:ext cx="2834640" cy="1737360"/>
+          </a:xfrm>
+          <a:prstGeom prst="roundRect">
+            <a:avLst>
+              <a:gd name="adj" fmla="val 12000"/>
+            </a:avLst>
+          </a:prstGeom>
+          <a:solidFill>
+            <a:srgbClr val="2F6FD8"/>
+          </a:solidFill>
+          <a:ln>
+            <a:noFill/>
+          </a:ln>
+          <a:effectLst/>
+        </p:spPr>
+        <p:style>
+          <a:lnRef idx="1">
+            <a:schemeClr val="accent1"/>
+          </a:lnRef>
+          <a:fillRef idx="3">
+            <a:schemeClr val="accent1"/>
+          </a:fillRef>
+          <a:effectRef idx="2">
+            <a:schemeClr val="accent1"/>
+          </a:effectRef>
+          <a:fontRef idx="minor">
+            <a:schemeClr val="lt1"/>
+          </a:fontRef>
+        </p:style>
+        <p:txBody>
+          <a:bodyPr rtlCol="0" anchor="ctr" tIns="76200" bIns="76200" lIns="127000" rIns="127000" wrap="square"/>
+          <a:lstStyle/>
+          <a:p>
+            <a:pPr algn="ctr"/>
+            <a:r>
+              <a:rPr sz="2200" b="1">
+                <a:solidFill>
+                  <a:srgbClr val="FFFFFF"/>
+                </a:solidFill>
+                <a:latin typeface="Menlo"/>
+              </a:rPr>
+              <a:t>REFACTOR</a:t>
+            </a:r>
+          </a:p>
+          <a:p>
+            <a:pPr algn="ctr"/>
             <a:r>
               <a:rPr sz="600" b="0">
                 <a:solidFill>
-                  <a:srgbClr val="6B7280"/>
+                  <a:srgbClr val="FFFFFF"/>
                 </a:solidFill>
                 <a:latin typeface="Apple SD Gothic Neo"/>
               </a:rPr>
@@ -10446,16 +10978,62 @@
             </a:r>
           </a:p>
           <a:p>
-            <a:pPr algn="l"/>
-            <a:r>
-              <a:rPr sz="2100" b="1">
+            <a:pPr algn="ctr"/>
+            <a:r>
+              <a:rPr sz="1700" b="1">
+                <a:solidFill>
+                  <a:srgbClr val="FFFFFF"/>
+                </a:solidFill>
+                <a:latin typeface="Apple SD Gothic Neo"/>
+              </a:rPr>
+              <a:t>녹색 유지한 채</a:t>
+            </a:r>
+          </a:p>
+          <a:p>
+            <a:pPr algn="ctr"/>
+            <a:r>
+              <a:rPr sz="1700" b="1">
+                <a:solidFill>
+                  <a:srgbClr val="FFFFFF"/>
+                </a:solidFill>
+                <a:latin typeface="Apple SD Gothic Neo"/>
+              </a:rPr>
+              <a:t>정리·중복 제거</a:t>
+            </a:r>
+          </a:p>
+        </p:txBody>
+      </p:sp>
+      <p:sp>
+        <p:nvSpPr>
+          <p:cNvPr id="9" name="TextBox 8"/>
+          <p:cNvSpPr txBox="1"/>
+          <p:nvPr/>
+        </p:nvSpPr>
+        <p:spPr>
+          <a:xfrm>
+            <a:off x="822960" y="5029200"/>
+            <a:ext cx="10607040" cy="822960"/>
+          </a:xfrm>
+          <a:prstGeom prst="rect">
+            <a:avLst/>
+          </a:prstGeom>
+          <a:noFill/>
+        </p:spPr>
+        <p:txBody>
+          <a:bodyPr wrap="square" anchor="t">
+            <a:spAutoFit/>
+          </a:bodyPr>
+          <a:lstStyle/>
+          <a:p>
+            <a:pPr algn="ctr"/>
+            <a:r>
+              <a:rPr sz="2400" b="1" spc="-40">
                 <a:solidFill>
                   <a:srgbClr val="1A1A1A"/>
                 </a:solidFill>
                 <a:latin typeface="Apple SD Gothic Neo"/>
               </a:rPr>
-              <a:t>CONTEXT.md에
-표준어 하나로 못박음</a:t>
+              <a:t>AI가 짠 코드도 이 사이클을 강제했다.</a:t>
             </a:r>
           </a:p>
         </p:txBody>
@@ -10793,7 +11371,7 @@
                 </a:solidFill>
                 <a:latin typeface="Apple SD Gothic Neo"/>
               </a:rPr>
-              <a:t>취조 ③ — 과한 구현을 막다</a:t>
+              <a:t>AI를 어떻게 통제했나</a:t>
             </a:r>
           </a:p>
         </p:txBody>
@@ -10844,96 +11422,14 @@
       </p:sp>
       <p:sp>
         <p:nvSpPr>
-          <p:cNvPr id="4" name="Rounded Rectangle 3"/>
-          <p:cNvSpPr/>
-          <p:nvPr/>
-        </p:nvSpPr>
-        <p:spPr>
-          <a:xfrm>
-            <a:off x="777240" y="2743200"/>
-            <a:ext cx="4800600" cy="1920240"/>
-          </a:xfrm>
-          <a:prstGeom prst="roundRect">
-            <a:avLst>
-              <a:gd name="adj" fmla="val 12000"/>
-            </a:avLst>
-          </a:prstGeom>
-          <a:solidFill>
-            <a:srgbClr val="F4F4F6"/>
-          </a:solidFill>
-          <a:ln w="16510">
-            <a:solidFill>
-              <a:srgbClr val="E6E6E6"/>
-            </a:solidFill>
-          </a:ln>
-          <a:effectLst/>
-        </p:spPr>
-        <p:style>
-          <a:lnRef idx="1">
-            <a:schemeClr val="accent1"/>
-          </a:lnRef>
-          <a:fillRef idx="3">
-            <a:schemeClr val="accent1"/>
-          </a:fillRef>
-          <a:effectRef idx="2">
-            <a:schemeClr val="accent1"/>
-          </a:effectRef>
-          <a:fontRef idx="minor">
-            <a:schemeClr val="lt1"/>
-          </a:fontRef>
-        </p:style>
-        <p:txBody>
-          <a:bodyPr rtlCol="0" anchor="ctr" tIns="101600" bIns="101600" lIns="203200" rIns="203200" wrap="square"/>
-          <a:lstStyle/>
-          <a:p>
-            <a:pPr algn="l"/>
-            <a:r>
-              <a:rPr sz="1600" b="1">
-                <a:solidFill>
-                  <a:srgbClr val="6B7280"/>
-                </a:solidFill>
-                <a:latin typeface="Apple SD Gothic Neo"/>
-              </a:rPr>
-              <a:t>AI가 한 것</a:t>
-            </a:r>
-          </a:p>
-          <a:p>
-            <a:pPr algn="l"/>
-            <a:r>
-              <a:rPr sz="600" b="0">
-                <a:solidFill>
-                  <a:srgbClr val="6B7280"/>
-                </a:solidFill>
-                <a:latin typeface="Apple SD Gothic Neo"/>
-              </a:rPr>
-              <a:t/>
-            </a:r>
-          </a:p>
-          <a:p>
-            <a:pPr algn="l"/>
-            <a:r>
-              <a:rPr sz="2100" b="1">
-                <a:solidFill>
-                  <a:srgbClr val="1A1A1A"/>
-                </a:solidFill>
-                <a:latin typeface="Apple SD Gothic Neo"/>
-              </a:rPr>
-              <a:t>보험료를 '맞춤 계산'까지
-만들려 함</a:t>
-            </a:r>
-          </a:p>
-        </p:txBody>
-      </p:sp>
-      <p:sp>
-        <p:nvSpPr>
-          <p:cNvPr id="5" name="TextBox 4"/>
+          <p:cNvPr id="4" name="TextBox 3"/>
           <p:cNvSpPr txBox="1"/>
           <p:nvPr/>
         </p:nvSpPr>
         <p:spPr>
           <a:xfrm>
-            <a:off x="5733288" y="3383280"/>
-            <a:ext cx="731520" cy="640080"/>
+            <a:off x="822960" y="2651760"/>
+            <a:ext cx="10607040" cy="1554480"/>
           </a:xfrm>
           <a:prstGeom prst="rect">
             <a:avLst/>
@@ -10948,93 +11444,49 @@
           <a:p>
             <a:pPr algn="ctr"/>
             <a:r>
-              <a:rPr sz="3400" b="1">
-                <a:solidFill>
-                  <a:srgbClr val="5B5BD6"/>
-                </a:solidFill>
-                <a:latin typeface="Apple SD Gothic Neo"/>
-              </a:rPr>
-              <a:t>→</a:t>
-            </a:r>
-          </a:p>
-        </p:txBody>
-      </p:sp>
-      <p:sp>
-        <p:nvSpPr>
-          <p:cNvPr id="6" name="Rounded Rectangle 5"/>
-          <p:cNvSpPr/>
-          <p:nvPr/>
-        </p:nvSpPr>
-        <p:spPr>
-          <a:xfrm>
-            <a:off x="6629400" y="2743200"/>
-            <a:ext cx="4800600" cy="1920240"/>
-          </a:xfrm>
-          <a:prstGeom prst="roundRect">
-            <a:avLst>
-              <a:gd name="adj" fmla="val 12000"/>
-            </a:avLst>
-          </a:prstGeom>
-          <a:solidFill>
-            <a:srgbClr val="ECEBFB"/>
-          </a:solidFill>
-          <a:ln>
-            <a:noFill/>
-          </a:ln>
-          <a:effectLst/>
-        </p:spPr>
-        <p:style>
-          <a:lnRef idx="1">
-            <a:schemeClr val="accent1"/>
-          </a:lnRef>
-          <a:fillRef idx="3">
-            <a:schemeClr val="accent1"/>
-          </a:fillRef>
-          <a:effectRef idx="2">
-            <a:schemeClr val="accent1"/>
-          </a:effectRef>
-          <a:fontRef idx="minor">
-            <a:schemeClr val="lt1"/>
-          </a:fontRef>
-        </p:style>
-        <p:txBody>
-          <a:bodyPr rtlCol="0" anchor="ctr" tIns="101600" bIns="101600" lIns="203200" rIns="203200" wrap="square"/>
-          <a:lstStyle/>
-          <a:p>
-            <a:pPr algn="l"/>
-            <a:r>
-              <a:rPr sz="1600" b="1">
-                <a:solidFill>
-                  <a:srgbClr val="5B5BD6"/>
-                </a:solidFill>
-                <a:latin typeface="Apple SD Gothic Neo"/>
-              </a:rPr>
-              <a:t>내가 통제</a:t>
-            </a:r>
-          </a:p>
-          <a:p>
-            <a:pPr algn="l"/>
-            <a:r>
-              <a:rPr sz="600" b="0">
+              <a:rPr sz="3200" b="1" spc="-60">
+                <a:solidFill>
+                  <a:srgbClr val="1A1A1A"/>
+                </a:solidFill>
+                <a:latin typeface="Apple SD Gothic Neo"/>
+              </a:rPr>
+              <a:t>AI가 짠 설계를 다이어그램·유스케이스에
+대고 한 질문씩 캐물었다.</a:t>
+            </a:r>
+          </a:p>
+        </p:txBody>
+      </p:sp>
+      <p:sp>
+        <p:nvSpPr>
+          <p:cNvPr id="5" name="TextBox 4"/>
+          <p:cNvSpPr txBox="1"/>
+          <p:nvPr/>
+        </p:nvSpPr>
+        <p:spPr>
+          <a:xfrm>
+            <a:off x="822960" y="4434840"/>
+            <a:ext cx="10607040" cy="914400"/>
+          </a:xfrm>
+          <a:prstGeom prst="rect">
+            <a:avLst/>
+          </a:prstGeom>
+          <a:noFill/>
+        </p:spPr>
+        <p:txBody>
+          <a:bodyPr wrap="square" anchor="t">
+            <a:spAutoFit/>
+          </a:bodyPr>
+          <a:lstStyle/>
+          <a:p>
+            <a:pPr algn="ctr"/>
+            <a:r>
+              <a:rPr sz="2200" b="0" spc="-30">
                 <a:solidFill>
                   <a:srgbClr val="6B7280"/>
                 </a:solidFill>
                 <a:latin typeface="Apple SD Gothic Neo"/>
               </a:rPr>
-              <a:t/>
-            </a:r>
-          </a:p>
-          <a:p>
-            <a:pPr algn="l"/>
-            <a:r>
-              <a:rPr sz="2100" b="1">
-                <a:solidFill>
-                  <a:srgbClr val="1A1A1A"/>
-                </a:solidFill>
-                <a:latin typeface="Apple SD Gothic Neo"/>
-              </a:rPr>
-              <a:t>유스케이스 범위(예시만)로
-되돌림</a:t>
+              <a:t>결정은 전부 사람이 내렸다.</a:t>
             </a:r>
           </a:p>
         </p:txBody>
@@ -11095,7 +11547,7 @@
                 </a:solidFill>
                 <a:latin typeface="Apple SD Gothic Neo"/>
               </a:rPr>
-              <a:t>취조 ④ — 멋대로 늘린 걸 막다</a:t>
+              <a:t>취조 ① — 빠뜨린 걸 잡다</a:t>
             </a:r>
           </a:p>
         </p:txBody>
@@ -11220,8 +11672,8 @@
                 </a:solidFill>
                 <a:latin typeface="Apple SD Gothic Neo"/>
               </a:rPr>
-              <a:t>상태값에 CONDITIONAL을
-임의로 추가</a:t>
+              <a:t>유스케이스 17개에
+'회원가입'이 없었다</a:t>
             </a:r>
           </a:p>
         </p:txBody>
@@ -11335,8 +11787,8 @@
                 </a:solidFill>
                 <a:latin typeface="Apple SD Gothic Neo"/>
               </a:rPr>
-              <a:t>다이어그램 3값 유지,
-조건부는 심사가 책임</a:t>
+              <a:t>회원가입을 명시적으로
+추가하기로 결정</a:t>
             </a:r>
           </a:p>
         </p:txBody>
@@ -11397,7 +11849,7 @@
                 </a:solidFill>
                 <a:latin typeface="Apple SD Gothic Neo"/>
               </a:rPr>
-              <a:t>AI는 공짜가 아니다</a:t>
+              <a:t>취조 ② — 흔들리는 용어를 잡다</a:t>
             </a:r>
           </a:p>
         </p:txBody>
@@ -11448,14 +11900,96 @@
       </p:sp>
       <p:sp>
         <p:nvSpPr>
-          <p:cNvPr id="4" name="TextBox 3"/>
+          <p:cNvPr id="4" name="Rounded Rectangle 3"/>
+          <p:cNvSpPr/>
+          <p:nvPr/>
+        </p:nvSpPr>
+        <p:spPr>
+          <a:xfrm>
+            <a:off x="777240" y="2743200"/>
+            <a:ext cx="4800600" cy="1920240"/>
+          </a:xfrm>
+          <a:prstGeom prst="roundRect">
+            <a:avLst>
+              <a:gd name="adj" fmla="val 12000"/>
+            </a:avLst>
+          </a:prstGeom>
+          <a:solidFill>
+            <a:srgbClr val="F4F4F6"/>
+          </a:solidFill>
+          <a:ln w="16510">
+            <a:solidFill>
+              <a:srgbClr val="E6E6E6"/>
+            </a:solidFill>
+          </a:ln>
+          <a:effectLst/>
+        </p:spPr>
+        <p:style>
+          <a:lnRef idx="1">
+            <a:schemeClr val="accent1"/>
+          </a:lnRef>
+          <a:fillRef idx="3">
+            <a:schemeClr val="accent1"/>
+          </a:fillRef>
+          <a:effectRef idx="2">
+            <a:schemeClr val="accent1"/>
+          </a:effectRef>
+          <a:fontRef idx="minor">
+            <a:schemeClr val="lt1"/>
+          </a:fontRef>
+        </p:style>
+        <p:txBody>
+          <a:bodyPr rtlCol="0" anchor="ctr" tIns="101600" bIns="101600" lIns="203200" rIns="203200" wrap="square"/>
+          <a:lstStyle/>
+          <a:p>
+            <a:pPr algn="l"/>
+            <a:r>
+              <a:rPr sz="1600" b="1">
+                <a:solidFill>
+                  <a:srgbClr val="6B7280"/>
+                </a:solidFill>
+                <a:latin typeface="Apple SD Gothic Neo"/>
+              </a:rPr>
+              <a:t>AI가 한 것</a:t>
+            </a:r>
+          </a:p>
+          <a:p>
+            <a:pPr algn="l"/>
+            <a:r>
+              <a:rPr sz="600" b="0">
+                <a:solidFill>
+                  <a:srgbClr val="6B7280"/>
+                </a:solidFill>
+                <a:latin typeface="Apple SD Gothic Neo"/>
+              </a:rPr>
+              <a:t/>
+            </a:r>
+          </a:p>
+          <a:p>
+            <a:pPr algn="l"/>
+            <a:r>
+              <a:rPr sz="2100" b="1">
+                <a:solidFill>
+                  <a:srgbClr val="1A1A1A"/>
+                </a:solidFill>
+                <a:latin typeface="Apple SD Gothic Neo"/>
+              </a:rPr>
+              <a:t>같은 사람을 Policyholder·
+account·user로 섞어 부름</a:t>
+            </a:r>
+          </a:p>
+        </p:txBody>
+      </p:sp>
+      <p:sp>
+        <p:nvSpPr>
+          <p:cNvPr id="5" name="TextBox 4"/>
           <p:cNvSpPr txBox="1"/>
           <p:nvPr/>
         </p:nvSpPr>
         <p:spPr>
           <a:xfrm>
-            <a:off x="822960" y="2651760"/>
-            <a:ext cx="10607040" cy="1554480"/>
+            <a:off x="5733288" y="3383280"/>
+            <a:ext cx="731520" cy="640080"/>
           </a:xfrm>
           <a:prstGeom prst="rect">
             <a:avLst/>
@@ -11470,13 +12004,93 @@
           <a:p>
             <a:pPr algn="ctr"/>
             <a:r>
-              <a:rPr sz="4000" b="1" spc="-60">
+              <a:rPr sz="3400" b="1">
+                <a:solidFill>
+                  <a:srgbClr val="5B5BD6"/>
+                </a:solidFill>
+                <a:latin typeface="Apple SD Gothic Neo"/>
+              </a:rPr>
+              <a:t>→</a:t>
+            </a:r>
+          </a:p>
+        </p:txBody>
+      </p:sp>
+      <p:sp>
+        <p:nvSpPr>
+          <p:cNvPr id="6" name="Rounded Rectangle 5"/>
+          <p:cNvSpPr/>
+          <p:nvPr/>
+        </p:nvSpPr>
+        <p:spPr>
+          <a:xfrm>
+            <a:off x="6629400" y="2743200"/>
+            <a:ext cx="4800600" cy="1920240"/>
+          </a:xfrm>
+          <a:prstGeom prst="roundRect">
+            <a:avLst>
+              <a:gd name="adj" fmla="val 12000"/>
+            </a:avLst>
+          </a:prstGeom>
+          <a:solidFill>
+            <a:srgbClr val="ECEBFB"/>
+          </a:solidFill>
+          <a:ln>
+            <a:noFill/>
+          </a:ln>
+          <a:effectLst/>
+        </p:spPr>
+        <p:style>
+          <a:lnRef idx="1">
+            <a:schemeClr val="accent1"/>
+          </a:lnRef>
+          <a:fillRef idx="3">
+            <a:schemeClr val="accent1"/>
+          </a:fillRef>
+          <a:effectRef idx="2">
+            <a:schemeClr val="accent1"/>
+          </a:effectRef>
+          <a:fontRef idx="minor">
+            <a:schemeClr val="lt1"/>
+          </a:fontRef>
+        </p:style>
+        <p:txBody>
+          <a:bodyPr rtlCol="0" anchor="ctr" tIns="101600" bIns="101600" lIns="203200" rIns="203200" wrap="square"/>
+          <a:lstStyle/>
+          <a:p>
+            <a:pPr algn="l"/>
+            <a:r>
+              <a:rPr sz="1600" b="1">
+                <a:solidFill>
+                  <a:srgbClr val="5B5BD6"/>
+                </a:solidFill>
+                <a:latin typeface="Apple SD Gothic Neo"/>
+              </a:rPr>
+              <a:t>내가 통제</a:t>
+            </a:r>
+          </a:p>
+          <a:p>
+            <a:pPr algn="l"/>
+            <a:r>
+              <a:rPr sz="600" b="0">
+                <a:solidFill>
+                  <a:srgbClr val="6B7280"/>
+                </a:solidFill>
+                <a:latin typeface="Apple SD Gothic Neo"/>
+              </a:rPr>
+              <a:t/>
+            </a:r>
+          </a:p>
+          <a:p>
+            <a:pPr algn="l"/>
+            <a:r>
+              <a:rPr sz="2100" b="1">
                 <a:solidFill>
                   <a:srgbClr val="1A1A1A"/>
                 </a:solidFill>
                 <a:latin typeface="Apple SD Gothic Neo"/>
               </a:rPr>
-              <a:t>한 Epic에  $39.63  ·  토큰 5,100만</a:t>
+              <a:t>CONTEXT.md에
+표준어 하나로 못박음</a:t>
             </a:r>
           </a:p>
         </p:txBody>
@@ -11537,7 +12151,7 @@
                 </a:solidFill>
                 <a:latin typeface="Apple SD Gothic Neo"/>
               </a:rPr>
-              <a:t>돈 먹은 범인</a:t>
+              <a:t>취조 ③ — 과한 구현을 막다</a:t>
             </a:r>
           </a:p>
         </p:txBody>
@@ -11588,14 +12202,96 @@
       </p:sp>
       <p:sp>
         <p:nvSpPr>
-          <p:cNvPr id="4" name="TextBox 3"/>
+          <p:cNvPr id="4" name="Rounded Rectangle 3"/>
+          <p:cNvSpPr/>
+          <p:nvPr/>
+        </p:nvSpPr>
+        <p:spPr>
+          <a:xfrm>
+            <a:off x="777240" y="2743200"/>
+            <a:ext cx="4800600" cy="1920240"/>
+          </a:xfrm>
+          <a:prstGeom prst="roundRect">
+            <a:avLst>
+              <a:gd name="adj" fmla="val 12000"/>
+            </a:avLst>
+          </a:prstGeom>
+          <a:solidFill>
+            <a:srgbClr val="F4F4F6"/>
+          </a:solidFill>
+          <a:ln w="16510">
+            <a:solidFill>
+              <a:srgbClr val="E6E6E6"/>
+            </a:solidFill>
+          </a:ln>
+          <a:effectLst/>
+        </p:spPr>
+        <p:style>
+          <a:lnRef idx="1">
+            <a:schemeClr val="accent1"/>
+          </a:lnRef>
+          <a:fillRef idx="3">
+            <a:schemeClr val="accent1"/>
+          </a:fillRef>
+          <a:effectRef idx="2">
+            <a:schemeClr val="accent1"/>
+          </a:effectRef>
+          <a:fontRef idx="minor">
+            <a:schemeClr val="lt1"/>
+          </a:fontRef>
+        </p:style>
+        <p:txBody>
+          <a:bodyPr rtlCol="0" anchor="ctr" tIns="101600" bIns="101600" lIns="203200" rIns="203200" wrap="square"/>
+          <a:lstStyle/>
+          <a:p>
+            <a:pPr algn="l"/>
+            <a:r>
+              <a:rPr sz="1600" b="1">
+                <a:solidFill>
+                  <a:srgbClr val="6B7280"/>
+                </a:solidFill>
+                <a:latin typeface="Apple SD Gothic Neo"/>
+              </a:rPr>
+              <a:t>AI가 한 것</a:t>
+            </a:r>
+          </a:p>
+          <a:p>
+            <a:pPr algn="l"/>
+            <a:r>
+              <a:rPr sz="600" b="0">
+                <a:solidFill>
+                  <a:srgbClr val="6B7280"/>
+                </a:solidFill>
+                <a:latin typeface="Apple SD Gothic Neo"/>
+              </a:rPr>
+              <a:t/>
+            </a:r>
+          </a:p>
+          <a:p>
+            <a:pPr algn="l"/>
+            <a:r>
+              <a:rPr sz="2100" b="1">
+                <a:solidFill>
+                  <a:srgbClr val="1A1A1A"/>
+                </a:solidFill>
+                <a:latin typeface="Apple SD Gothic Neo"/>
+              </a:rPr>
+              <a:t>보험료를 '맞춤 계산'까지
+만들려 함</a:t>
+            </a:r>
+          </a:p>
+        </p:txBody>
+      </p:sp>
+      <p:sp>
+        <p:nvSpPr>
+          <p:cNvPr id="5" name="TextBox 4"/>
           <p:cNvSpPr txBox="1"/>
           <p:nvPr/>
         </p:nvSpPr>
         <p:spPr>
           <a:xfrm>
-            <a:off x="822960" y="2651760"/>
-            <a:ext cx="10607040" cy="1554480"/>
+            <a:off x="5733288" y="3383280"/>
+            <a:ext cx="731520" cy="640080"/>
           </a:xfrm>
           <a:prstGeom prst="rect">
             <a:avLst/>
@@ -11610,49 +12306,93 @@
           <a:p>
             <a:pPr algn="ctr"/>
             <a:r>
-              <a:rPr sz="3400" b="1" spc="-60">
+              <a:rPr sz="3400" b="1">
+                <a:solidFill>
+                  <a:srgbClr val="5B5BD6"/>
+                </a:solidFill>
+                <a:latin typeface="Apple SD Gothic Neo"/>
+              </a:rPr>
+              <a:t>→</a:t>
+            </a:r>
+          </a:p>
+        </p:txBody>
+      </p:sp>
+      <p:sp>
+        <p:nvSpPr>
+          <p:cNvPr id="6" name="Rounded Rectangle 5"/>
+          <p:cNvSpPr/>
+          <p:nvPr/>
+        </p:nvSpPr>
+        <p:spPr>
+          <a:xfrm>
+            <a:off x="6629400" y="2743200"/>
+            <a:ext cx="4800600" cy="1920240"/>
+          </a:xfrm>
+          <a:prstGeom prst="roundRect">
+            <a:avLst>
+              <a:gd name="adj" fmla="val 12000"/>
+            </a:avLst>
+          </a:prstGeom>
+          <a:solidFill>
+            <a:srgbClr val="ECEBFB"/>
+          </a:solidFill>
+          <a:ln>
+            <a:noFill/>
+          </a:ln>
+          <a:effectLst/>
+        </p:spPr>
+        <p:style>
+          <a:lnRef idx="1">
+            <a:schemeClr val="accent1"/>
+          </a:lnRef>
+          <a:fillRef idx="3">
+            <a:schemeClr val="accent1"/>
+          </a:fillRef>
+          <a:effectRef idx="2">
+            <a:schemeClr val="accent1"/>
+          </a:effectRef>
+          <a:fontRef idx="minor">
+            <a:schemeClr val="lt1"/>
+          </a:fontRef>
+        </p:style>
+        <p:txBody>
+          <a:bodyPr rtlCol="0" anchor="ctr" tIns="101600" bIns="101600" lIns="203200" rIns="203200" wrap="square"/>
+          <a:lstStyle/>
+          <a:p>
+            <a:pPr algn="l"/>
+            <a:r>
+              <a:rPr sz="1600" b="1">
+                <a:solidFill>
+                  <a:srgbClr val="5B5BD6"/>
+                </a:solidFill>
+                <a:latin typeface="Apple SD Gothic Neo"/>
+              </a:rPr>
+              <a:t>내가 통제</a:t>
+            </a:r>
+          </a:p>
+          <a:p>
+            <a:pPr algn="l"/>
+            <a:r>
+              <a:rPr sz="600" b="0">
+                <a:solidFill>
+                  <a:srgbClr val="6B7280"/>
+                </a:solidFill>
+                <a:latin typeface="Apple SD Gothic Neo"/>
+              </a:rPr>
+              <a:t/>
+            </a:r>
+          </a:p>
+          <a:p>
+            <a:pPr algn="l"/>
+            <a:r>
+              <a:rPr sz="2100" b="1">
                 <a:solidFill>
                   <a:srgbClr val="1A1A1A"/>
                 </a:solidFill>
                 <a:latin typeface="Apple SD Gothic Neo"/>
               </a:rPr>
-              <a:t>코드 생성이 아니라
-'긴 컨텍스트 재읽기'</a:t>
-            </a:r>
-          </a:p>
-        </p:txBody>
-      </p:sp>
-      <p:sp>
-        <p:nvSpPr>
-          <p:cNvPr id="5" name="TextBox 4"/>
-          <p:cNvSpPr txBox="1"/>
-          <p:nvPr/>
-        </p:nvSpPr>
-        <p:spPr>
-          <a:xfrm>
-            <a:off x="822960" y="4434840"/>
-            <a:ext cx="10607040" cy="914400"/>
-          </a:xfrm>
-          <a:prstGeom prst="rect">
-            <a:avLst/>
-          </a:prstGeom>
-          <a:noFill/>
-        </p:spPr>
-        <p:txBody>
-          <a:bodyPr wrap="square" anchor="t">
-            <a:spAutoFit/>
-          </a:bodyPr>
-          <a:lstStyle/>
-          <a:p>
-            <a:pPr algn="ctr"/>
-            <a:r>
-              <a:rPr sz="2200" b="0" spc="-30">
-                <a:solidFill>
-                  <a:srgbClr val="6B7280"/>
-                </a:solidFill>
-                <a:latin typeface="Apple SD Gothic Neo"/>
-              </a:rPr>
-              <a:t>캐시 읽기만 4,580만 토큰 — 전체 비용의 90%</a:t>
+              <a:t>유스케이스 범위(예시만)로
+되돌림</a:t>
             </a:r>
           </a:p>
         </p:txBody>
@@ -11713,7 +12453,7 @@
                 </a:solidFill>
                 <a:latin typeface="Apple SD Gothic Neo"/>
               </a:rPr>
-              <a:t>그래서 바꾼 것</a:t>
+              <a:t>취조 ④ — 멋대로 늘린 걸 막다</a:t>
             </a:r>
           </a:p>
         </p:txBody>
@@ -11764,49 +12504,14 @@
       </p:sp>
       <p:sp>
         <p:nvSpPr>
-          <p:cNvPr id="4" name="TextBox 3"/>
-          <p:cNvSpPr txBox="1"/>
-          <p:nvPr/>
-        </p:nvSpPr>
-        <p:spPr>
-          <a:xfrm>
-            <a:off x="822960" y="2286000"/>
-            <a:ext cx="10607040" cy="914400"/>
-          </a:xfrm>
-          <a:prstGeom prst="rect">
-            <a:avLst/>
-          </a:prstGeom>
-          <a:noFill/>
-        </p:spPr>
-        <p:txBody>
-          <a:bodyPr wrap="square" anchor="t">
-            <a:spAutoFit/>
-          </a:bodyPr>
-          <a:lstStyle/>
-          <a:p>
-            <a:pPr algn="ctr"/>
-            <a:r>
-              <a:rPr sz="2600" b="1" spc="-40">
-                <a:solidFill>
-                  <a:srgbClr val="1A1A1A"/>
-                </a:solidFill>
-                <a:latin typeface="Apple SD Gothic Neo"/>
-              </a:rPr>
-              <a:t>비용을 줄이려고 습관을 바꿨다.</a:t>
-            </a:r>
-          </a:p>
-        </p:txBody>
-      </p:sp>
-      <p:sp>
-        <p:nvSpPr>
-          <p:cNvPr id="5" name="Rounded Rectangle 4"/>
+          <p:cNvPr id="4" name="Rounded Rectangle 3"/>
           <p:cNvSpPr/>
           <p:nvPr/>
         </p:nvSpPr>
         <p:spPr>
           <a:xfrm>
-            <a:off x="1066647" y="3566160"/>
-            <a:ext cx="3108960" cy="1371600"/>
+            <a:off x="777240" y="2743200"/>
+            <a:ext cx="4800600" cy="1920240"/>
           </a:xfrm>
           <a:prstGeom prst="roundRect">
             <a:avLst>
@@ -11841,7 +12546,31 @@
           <a:bodyPr rtlCol="0" anchor="ctr" tIns="101600" bIns="101600" lIns="203200" rIns="203200" wrap="square"/>
           <a:lstStyle/>
           <a:p>
-            <a:pPr algn="ctr"/>
+            <a:pPr algn="l"/>
+            <a:r>
+              <a:rPr sz="1600" b="1">
+                <a:solidFill>
+                  <a:srgbClr val="6B7280"/>
+                </a:solidFill>
+                <a:latin typeface="Apple SD Gothic Neo"/>
+              </a:rPr>
+              <a:t>AI가 한 것</a:t>
+            </a:r>
+          </a:p>
+          <a:p>
+            <a:pPr algn="l"/>
+            <a:r>
+              <a:rPr sz="600" b="0">
+                <a:solidFill>
+                  <a:srgbClr val="6B7280"/>
+                </a:solidFill>
+                <a:latin typeface="Apple SD Gothic Neo"/>
+              </a:rPr>
+              <a:t/>
+            </a:r>
+          </a:p>
+          <a:p>
+            <a:pPr algn="l"/>
             <a:r>
               <a:rPr sz="2100" b="1">
                 <a:solidFill>
@@ -11849,8 +12578,43 @@
                 </a:solidFill>
                 <a:latin typeface="Apple SD Gothic Neo"/>
               </a:rPr>
-              <a:t>Epic 끝나면
-/clear</a:t>
+              <a:t>상태값에 CONDITIONAL을
+임의로 추가</a:t>
+            </a:r>
+          </a:p>
+        </p:txBody>
+      </p:sp>
+      <p:sp>
+        <p:nvSpPr>
+          <p:cNvPr id="5" name="TextBox 4"/>
+          <p:cNvSpPr txBox="1"/>
+          <p:nvPr/>
+        </p:nvSpPr>
+        <p:spPr>
+          <a:xfrm>
+            <a:off x="5733288" y="3383280"/>
+            <a:ext cx="731520" cy="640080"/>
+          </a:xfrm>
+          <a:prstGeom prst="rect">
+            <a:avLst/>
+          </a:prstGeom>
+          <a:noFill/>
+        </p:spPr>
+        <p:txBody>
+          <a:bodyPr wrap="square" anchor="ctr">
+            <a:spAutoFit/>
+          </a:bodyPr>
+          <a:lstStyle/>
+          <a:p>
+            <a:pPr algn="ctr"/>
+            <a:r>
+              <a:rPr sz="3400" b="1">
+                <a:solidFill>
+                  <a:srgbClr val="5B5BD6"/>
+                </a:solidFill>
+                <a:latin typeface="Apple SD Gothic Neo"/>
+              </a:rPr>
+              <a:t>→</a:t>
             </a:r>
           </a:p>
         </p:txBody>
@@ -11863,8 +12627,8 @@
         </p:nvSpPr>
         <p:spPr>
           <a:xfrm>
-            <a:off x="4541367" y="3566160"/>
-            <a:ext cx="3108960" cy="1371600"/>
+            <a:off x="6629400" y="2743200"/>
+            <a:ext cx="4800600" cy="1920240"/>
           </a:xfrm>
           <a:prstGeom prst="roundRect">
             <a:avLst>
@@ -11872,12 +12636,10 @@
             </a:avLst>
           </a:prstGeom>
           <a:solidFill>
-            <a:srgbClr val="F4F4F6"/>
+            <a:srgbClr val="ECEBFB"/>
           </a:solidFill>
-          <a:ln w="16510">
-            <a:solidFill>
-              <a:srgbClr val="E6E6E6"/>
-            </a:solidFill>
+          <a:ln>
+            <a:noFill/>
           </a:ln>
           <a:effectLst/>
         </p:spPr>
@@ -11899,7 +12661,31 @@
           <a:bodyPr rtlCol="0" anchor="ctr" tIns="101600" bIns="101600" lIns="203200" rIns="203200" wrap="square"/>
           <a:lstStyle/>
           <a:p>
-            <a:pPr algn="ctr"/>
+            <a:pPr algn="l"/>
+            <a:r>
+              <a:rPr sz="1600" b="1">
+                <a:solidFill>
+                  <a:srgbClr val="5B5BD6"/>
+                </a:solidFill>
+                <a:latin typeface="Apple SD Gothic Neo"/>
+              </a:rPr>
+              <a:t>내가 통제</a:t>
+            </a:r>
+          </a:p>
+          <a:p>
+            <a:pPr algn="l"/>
+            <a:r>
+              <a:rPr sz="600" b="0">
+                <a:solidFill>
+                  <a:srgbClr val="6B7280"/>
+                </a:solidFill>
+                <a:latin typeface="Apple SD Gothic Neo"/>
+              </a:rPr>
+              <a:t/>
+            </a:r>
+          </a:p>
+          <a:p>
+            <a:pPr algn="l"/>
             <a:r>
               <a:rPr sz="2100" b="1">
                 <a:solidFill>
@@ -11907,66 +12693,8 @@
                 </a:solidFill>
                 <a:latin typeface="Apple SD Gothic Neo"/>
               </a:rPr>
-              <a:t>단순 작업은
-Sonnet</a:t>
-            </a:r>
-          </a:p>
-        </p:txBody>
-      </p:sp>
-      <p:sp>
-        <p:nvSpPr>
-          <p:cNvPr id="7" name="Rounded Rectangle 6"/>
-          <p:cNvSpPr/>
-          <p:nvPr/>
-        </p:nvSpPr>
-        <p:spPr>
-          <a:xfrm>
-            <a:off x="8016087" y="3566160"/>
-            <a:ext cx="3108960" cy="1371600"/>
-          </a:xfrm>
-          <a:prstGeom prst="roundRect">
-            <a:avLst>
-              <a:gd name="adj" fmla="val 12000"/>
-            </a:avLst>
-          </a:prstGeom>
-          <a:solidFill>
-            <a:srgbClr val="F4F4F6"/>
-          </a:solidFill>
-          <a:ln w="16510">
-            <a:solidFill>
-              <a:srgbClr val="E6E6E6"/>
-            </a:solidFill>
-          </a:ln>
-          <a:effectLst/>
-        </p:spPr>
-        <p:style>
-          <a:lnRef idx="1">
-            <a:schemeClr val="accent1"/>
-          </a:lnRef>
-          <a:fillRef idx="3">
-            <a:schemeClr val="accent1"/>
-          </a:fillRef>
-          <a:effectRef idx="2">
-            <a:schemeClr val="accent1"/>
-          </a:effectRef>
-          <a:fontRef idx="minor">
-            <a:schemeClr val="lt1"/>
-          </a:fontRef>
-        </p:style>
-        <p:txBody>
-          <a:bodyPr rtlCol="0" anchor="ctr" tIns="101600" bIns="101600" lIns="203200" rIns="203200" wrap="square"/>
-          <a:lstStyle/>
-          <a:p>
-            <a:pPr algn="ctr"/>
-            <a:r>
-              <a:rPr sz="2100" b="1">
-                <a:solidFill>
-                  <a:srgbClr val="1A1A1A"/>
-                </a:solidFill>
-                <a:latin typeface="Apple SD Gothic Neo"/>
-              </a:rPr>
-              <a:t>리뷰 횟수
-최소화</a:t>
+              <a:t>다이어그램 3값 유지,
+조건부는 심사가 책임</a:t>
             </a:r>
           </a:p>
         </p:txBody>
@@ -12027,7 +12755,7 @@
                 </a:solidFill>
                 <a:latin typeface="Apple SD Gothic Neo"/>
               </a:rPr>
-              <a:t>다중 리뷰의 두 얼굴</a:t>
+              <a:t>AI는 공짜가 아니다</a:t>
             </a:r>
           </a:p>
         </p:txBody>
@@ -12078,159 +12806,35 @@
       </p:sp>
       <p:sp>
         <p:nvSpPr>
-          <p:cNvPr id="4" name="Rounded Rectangle 3"/>
-          <p:cNvSpPr/>
-          <p:nvPr/>
-        </p:nvSpPr>
-        <p:spPr>
-          <a:xfrm>
-            <a:off x="777240" y="2743200"/>
-            <a:ext cx="4800600" cy="1920240"/>
-          </a:xfrm>
-          <a:prstGeom prst="roundRect">
-            <a:avLst>
-              <a:gd name="adj" fmla="val 12000"/>
-            </a:avLst>
-          </a:prstGeom>
-          <a:solidFill>
-            <a:srgbClr val="ECEBFB"/>
-          </a:solidFill>
-          <a:ln>
-            <a:noFill/>
-          </a:ln>
-          <a:effectLst/>
-        </p:spPr>
-        <p:style>
-          <a:lnRef idx="1">
-            <a:schemeClr val="accent1"/>
-          </a:lnRef>
-          <a:fillRef idx="3">
-            <a:schemeClr val="accent1"/>
-          </a:fillRef>
-          <a:effectRef idx="2">
-            <a:schemeClr val="accent1"/>
-          </a:effectRef>
-          <a:fontRef idx="minor">
-            <a:schemeClr val="lt1"/>
-          </a:fontRef>
-        </p:style>
-        <p:txBody>
-          <a:bodyPr rtlCol="0" anchor="ctr" tIns="101600" bIns="101600" lIns="203200" rIns="203200" wrap="square"/>
-          <a:lstStyle/>
-          <a:p>
-            <a:pPr algn="l"/>
-            <a:r>
-              <a:rPr sz="1800" b="1">
-                <a:solidFill>
-                  <a:srgbClr val="5B5BD6"/>
-                </a:solidFill>
-                <a:latin typeface="Apple SD Gothic Neo"/>
-              </a:rPr>
-              <a:t>좋은 점</a:t>
-            </a:r>
-          </a:p>
-          <a:p>
-            <a:pPr algn="l"/>
-            <a:r>
-              <a:rPr sz="600" b="0">
-                <a:solidFill>
-                  <a:srgbClr val="6B7280"/>
-                </a:solidFill>
-                <a:latin typeface="Apple SD Gothic Neo"/>
-              </a:rPr>
-              <a:t/>
-            </a:r>
-          </a:p>
-          <a:p>
-            <a:pPr algn="l"/>
-            <a:r>
-              <a:rPr sz="2100" b="1">
+          <p:cNvPr id="4" name="TextBox 3"/>
+          <p:cNvSpPr txBox="1"/>
+          <p:nvPr/>
+        </p:nvSpPr>
+        <p:spPr>
+          <a:xfrm>
+            <a:off x="822960" y="2651760"/>
+            <a:ext cx="10607040" cy="1554480"/>
+          </a:xfrm>
+          <a:prstGeom prst="rect">
+            <a:avLst/>
+          </a:prstGeom>
+          <a:noFill/>
+        </p:spPr>
+        <p:txBody>
+          <a:bodyPr wrap="square" anchor="ctr">
+            <a:spAutoFit/>
+          </a:bodyPr>
+          <a:lstStyle/>
+          <a:p>
+            <a:pPr algn="ctr"/>
+            <a:r>
+              <a:rPr sz="4000" b="1" spc="-60">
                 <a:solidFill>
                   <a:srgbClr val="1A1A1A"/>
                 </a:solidFill>
                 <a:latin typeface="Apple SD Gothic Neo"/>
               </a:rPr>
-              <a:t>버그 6개를 미리 발견</a:t>
-            </a:r>
-          </a:p>
-        </p:txBody>
-      </p:sp>
-      <p:sp>
-        <p:nvSpPr>
-          <p:cNvPr id="5" name="Rounded Rectangle 4"/>
-          <p:cNvSpPr/>
-          <p:nvPr/>
-        </p:nvSpPr>
-        <p:spPr>
-          <a:xfrm>
-            <a:off x="6629400" y="2743200"/>
-            <a:ext cx="4800600" cy="1920240"/>
-          </a:xfrm>
-          <a:prstGeom prst="roundRect">
-            <a:avLst>
-              <a:gd name="adj" fmla="val 12000"/>
-            </a:avLst>
-          </a:prstGeom>
-          <a:solidFill>
-            <a:srgbClr val="F4F4F6"/>
-          </a:solidFill>
-          <a:ln>
-            <a:noFill/>
-          </a:ln>
-          <a:effectLst/>
-        </p:spPr>
-        <p:style>
-          <a:lnRef idx="1">
-            <a:schemeClr val="accent1"/>
-          </a:lnRef>
-          <a:fillRef idx="3">
-            <a:schemeClr val="accent1"/>
-          </a:fillRef>
-          <a:effectRef idx="2">
-            <a:schemeClr val="accent1"/>
-          </a:effectRef>
-          <a:fontRef idx="minor">
-            <a:schemeClr val="lt1"/>
-          </a:fontRef>
-        </p:style>
-        <p:txBody>
-          <a:bodyPr rtlCol="0" anchor="ctr" tIns="101600" bIns="101600" lIns="203200" rIns="203200" wrap="square"/>
-          <a:lstStyle/>
-          <a:p>
-            <a:pPr algn="l"/>
-            <a:r>
-              <a:rPr sz="1800" b="1">
-                <a:solidFill>
-                  <a:srgbClr val="6B7280"/>
-                </a:solidFill>
-                <a:latin typeface="Apple SD Gothic Neo"/>
-              </a:rPr>
-              <a:t>아쉬운 점</a:t>
-            </a:r>
-          </a:p>
-          <a:p>
-            <a:pPr algn="l"/>
-            <a:r>
-              <a:rPr sz="600" b="0">
-                <a:solidFill>
-                  <a:srgbClr val="6B7280"/>
-                </a:solidFill>
-                <a:latin typeface="Apple SD Gothic Neo"/>
-              </a:rPr>
-              <a:t/>
-            </a:r>
-          </a:p>
-          <a:p>
-            <a:pPr algn="l"/>
-            <a:r>
-              <a:rPr sz="2100" b="1">
-                <a:solidFill>
-                  <a:srgbClr val="1A1A1A"/>
-                </a:solidFill>
-                <a:latin typeface="Apple SD Gothic Neo"/>
-              </a:rPr>
-              <a:t>단순 작업까지 3중 리뷰
-→ 비용 과다</a:t>
+              <a:t>한 Epic에  $39.63  ·  토큰 5,100만</a:t>
             </a:r>
           </a:p>
         </p:txBody>
@@ -12291,7 +12895,7 @@
                 </a:solidFill>
                 <a:latin typeface="Apple SD Gothic Neo"/>
               </a:rPr>
-              <a:t>가장 큰 실수 — 발견</a:t>
+              <a:t>돈 먹은 범인</a:t>
             </a:r>
           </a:p>
         </p:txBody>
@@ -12364,14 +12968,49 @@
           <a:p>
             <a:pPr algn="ctr"/>
             <a:r>
-              <a:rPr sz="3300" b="1" spc="-60">
+              <a:rPr sz="3400" b="1" spc="-60">
                 <a:solidFill>
                   <a:srgbClr val="1A1A1A"/>
                 </a:solidFill>
                 <a:latin typeface="Apple SD Gothic Neo"/>
               </a:rPr>
-              <a:t>자동차 사고가 직원 '심사 목록'에
-끝까지 안 떴다.</a:t>
+              <a:t>코드 생성이 아니라
+'긴 컨텍스트 재읽기'</a:t>
+            </a:r>
+          </a:p>
+        </p:txBody>
+      </p:sp>
+      <p:sp>
+        <p:nvSpPr>
+          <p:cNvPr id="5" name="TextBox 4"/>
+          <p:cNvSpPr txBox="1"/>
+          <p:nvPr/>
+        </p:nvSpPr>
+        <p:spPr>
+          <a:xfrm>
+            <a:off x="822960" y="4434840"/>
+            <a:ext cx="10607040" cy="914400"/>
+          </a:xfrm>
+          <a:prstGeom prst="rect">
+            <a:avLst/>
+          </a:prstGeom>
+          <a:noFill/>
+        </p:spPr>
+        <p:txBody>
+          <a:bodyPr wrap="square" anchor="t">
+            <a:spAutoFit/>
+          </a:bodyPr>
+          <a:lstStyle/>
+          <a:p>
+            <a:pPr algn="ctr"/>
+            <a:r>
+              <a:rPr sz="2200" b="0" spc="-30">
+                <a:solidFill>
+                  <a:srgbClr val="6B7280"/>
+                </a:solidFill>
+                <a:latin typeface="Apple SD Gothic Neo"/>
+              </a:rPr>
+              <a:t>캐시 읽기만 4,580만 토큰 — 전체 비용의 90%</a:t>
             </a:r>
           </a:p>
         </p:txBody>
@@ -12432,7 +13071,7 @@
                 </a:solidFill>
                 <a:latin typeface="Apple SD Gothic Neo"/>
               </a:rPr>
-              <a:t>왜? — 설계대로였다</a:t>
+              <a:t>그래서 바꾼 것</a:t>
             </a:r>
           </a:p>
         </p:txBody>
@@ -12489,43 +13128,7 @@
         </p:nvSpPr>
         <p:spPr>
           <a:xfrm>
-            <a:off x="822960" y="2651760"/>
-            <a:ext cx="10607040" cy="1554480"/>
-          </a:xfrm>
-          <a:prstGeom prst="rect">
-            <a:avLst/>
-          </a:prstGeom>
-          <a:noFill/>
-        </p:spPr>
-        <p:txBody>
-          <a:bodyPr wrap="square" anchor="ctr">
-            <a:spAutoFit/>
-          </a:bodyPr>
-          <a:lstStyle/>
-          <a:p>
-            <a:pPr algn="ctr"/>
-            <a:r>
-              <a:rPr sz="3000" b="1" spc="-60">
-                <a:solidFill>
-                  <a:srgbClr val="1A1A1A"/>
-                </a:solidFill>
-                <a:latin typeface="Apple SD Gothic Neo"/>
-              </a:rPr>
-              <a:t>유스케이스(UC09): 자동차 사고는
-'접수만', 심사 큐엔 안 들어감</a:t>
-            </a:r>
-          </a:p>
-        </p:txBody>
-      </p:sp>
-      <p:sp>
-        <p:nvSpPr>
-          <p:cNvPr id="5" name="TextBox 4"/>
-          <p:cNvSpPr txBox="1"/>
-          <p:nvPr/>
-        </p:nvSpPr>
-        <p:spPr>
-          <a:xfrm>
-            <a:off x="822960" y="4434840"/>
+            <a:off x="822960" y="2286000"/>
             <a:ext cx="10607040" cy="914400"/>
           </a:xfrm>
           <a:prstGeom prst="rect">
@@ -12541,13 +13144,187 @@
           <a:p>
             <a:pPr algn="ctr"/>
             <a:r>
-              <a:rPr sz="2200" b="0" spc="-30">
-                <a:solidFill>
-                  <a:srgbClr val="6B7280"/>
-                </a:solidFill>
-                <a:latin typeface="Apple SD Gothic Neo"/>
-              </a:rPr>
-              <a:t>버그가 아니라, 내가 그렇게 설계한 것</a:t>
+              <a:rPr sz="2600" b="1" spc="-40">
+                <a:solidFill>
+                  <a:srgbClr val="1A1A1A"/>
+                </a:solidFill>
+                <a:latin typeface="Apple SD Gothic Neo"/>
+              </a:rPr>
+              <a:t>비용을 줄이려고 습관을 바꿨다.</a:t>
+            </a:r>
+          </a:p>
+        </p:txBody>
+      </p:sp>
+      <p:sp>
+        <p:nvSpPr>
+          <p:cNvPr id="5" name="Rounded Rectangle 4"/>
+          <p:cNvSpPr/>
+          <p:nvPr/>
+        </p:nvSpPr>
+        <p:spPr>
+          <a:xfrm>
+            <a:off x="1066647" y="3566160"/>
+            <a:ext cx="3108960" cy="1371600"/>
+          </a:xfrm>
+          <a:prstGeom prst="roundRect">
+            <a:avLst>
+              <a:gd name="adj" fmla="val 12000"/>
+            </a:avLst>
+          </a:prstGeom>
+          <a:solidFill>
+            <a:srgbClr val="F4F4F6"/>
+          </a:solidFill>
+          <a:ln w="16510">
+            <a:solidFill>
+              <a:srgbClr val="E6E6E6"/>
+            </a:solidFill>
+          </a:ln>
+          <a:effectLst/>
+        </p:spPr>
+        <p:style>
+          <a:lnRef idx="1">
+            <a:schemeClr val="accent1"/>
+          </a:lnRef>
+          <a:fillRef idx="3">
+            <a:schemeClr val="accent1"/>
+          </a:fillRef>
+          <a:effectRef idx="2">
+            <a:schemeClr val="accent1"/>
+          </a:effectRef>
+          <a:fontRef idx="minor">
+            <a:schemeClr val="lt1"/>
+          </a:fontRef>
+        </p:style>
+        <p:txBody>
+          <a:bodyPr rtlCol="0" anchor="ctr" tIns="101600" bIns="101600" lIns="203200" rIns="203200" wrap="square"/>
+          <a:lstStyle/>
+          <a:p>
+            <a:pPr algn="ctr"/>
+            <a:r>
+              <a:rPr sz="2100" b="1">
+                <a:solidFill>
+                  <a:srgbClr val="1A1A1A"/>
+                </a:solidFill>
+                <a:latin typeface="Apple SD Gothic Neo"/>
+              </a:rPr>
+              <a:t>Epic 끝나면
+/clear</a:t>
+            </a:r>
+          </a:p>
+        </p:txBody>
+      </p:sp>
+      <p:sp>
+        <p:nvSpPr>
+          <p:cNvPr id="6" name="Rounded Rectangle 5"/>
+          <p:cNvSpPr/>
+          <p:nvPr/>
+        </p:nvSpPr>
+        <p:spPr>
+          <a:xfrm>
+            <a:off x="4541367" y="3566160"/>
+            <a:ext cx="3108960" cy="1371600"/>
+          </a:xfrm>
+          <a:prstGeom prst="roundRect">
+            <a:avLst>
+              <a:gd name="adj" fmla="val 12000"/>
+            </a:avLst>
+          </a:prstGeom>
+          <a:solidFill>
+            <a:srgbClr val="F4F4F6"/>
+          </a:solidFill>
+          <a:ln w="16510">
+            <a:solidFill>
+              <a:srgbClr val="E6E6E6"/>
+            </a:solidFill>
+          </a:ln>
+          <a:effectLst/>
+        </p:spPr>
+        <p:style>
+          <a:lnRef idx="1">
+            <a:schemeClr val="accent1"/>
+          </a:lnRef>
+          <a:fillRef idx="3">
+            <a:schemeClr val="accent1"/>
+          </a:fillRef>
+          <a:effectRef idx="2">
+            <a:schemeClr val="accent1"/>
+          </a:effectRef>
+          <a:fontRef idx="minor">
+            <a:schemeClr val="lt1"/>
+          </a:fontRef>
+        </p:style>
+        <p:txBody>
+          <a:bodyPr rtlCol="0" anchor="ctr" tIns="101600" bIns="101600" lIns="203200" rIns="203200" wrap="square"/>
+          <a:lstStyle/>
+          <a:p>
+            <a:pPr algn="ctr"/>
+            <a:r>
+              <a:rPr sz="2100" b="1">
+                <a:solidFill>
+                  <a:srgbClr val="1A1A1A"/>
+                </a:solidFill>
+                <a:latin typeface="Apple SD Gothic Neo"/>
+              </a:rPr>
+              <a:t>단순 작업은
+Sonnet</a:t>
+            </a:r>
+          </a:p>
+        </p:txBody>
+      </p:sp>
+      <p:sp>
+        <p:nvSpPr>
+          <p:cNvPr id="7" name="Rounded Rectangle 6"/>
+          <p:cNvSpPr/>
+          <p:nvPr/>
+        </p:nvSpPr>
+        <p:spPr>
+          <a:xfrm>
+            <a:off x="8016087" y="3566160"/>
+            <a:ext cx="3108960" cy="1371600"/>
+          </a:xfrm>
+          <a:prstGeom prst="roundRect">
+            <a:avLst>
+              <a:gd name="adj" fmla="val 12000"/>
+            </a:avLst>
+          </a:prstGeom>
+          <a:solidFill>
+            <a:srgbClr val="F4F4F6"/>
+          </a:solidFill>
+          <a:ln w="16510">
+            <a:solidFill>
+              <a:srgbClr val="E6E6E6"/>
+            </a:solidFill>
+          </a:ln>
+          <a:effectLst/>
+        </p:spPr>
+        <p:style>
+          <a:lnRef idx="1">
+            <a:schemeClr val="accent1"/>
+          </a:lnRef>
+          <a:fillRef idx="3">
+            <a:schemeClr val="accent1"/>
+          </a:fillRef>
+          <a:effectRef idx="2">
+            <a:schemeClr val="accent1"/>
+          </a:effectRef>
+          <a:fontRef idx="minor">
+            <a:schemeClr val="lt1"/>
+          </a:fontRef>
+        </p:style>
+        <p:txBody>
+          <a:bodyPr rtlCol="0" anchor="ctr" tIns="101600" bIns="101600" lIns="203200" rIns="203200" wrap="square"/>
+          <a:lstStyle/>
+          <a:p>
+            <a:pPr algn="ctr"/>
+            <a:r>
+              <a:rPr sz="2100" b="1">
+                <a:solidFill>
+                  <a:srgbClr val="1A1A1A"/>
+                </a:solidFill>
+                <a:latin typeface="Apple SD Gothic Neo"/>
+              </a:rPr>
+              <a:t>리뷰 횟수
+최소화</a:t>
             </a:r>
           </a:p>
         </p:txBody>
@@ -12608,7 +13385,7 @@
                 </a:solidFill>
                 <a:latin typeface="Apple SD Gothic Neo"/>
               </a:rPr>
-              <a:t>어떻게 데모를 살렸나</a:t>
+              <a:t>다중 리뷰의 두 얼굴</a:t>
             </a:r>
           </a:p>
         </p:txBody>
@@ -12659,36 +13436,159 @@
       </p:sp>
       <p:sp>
         <p:nvSpPr>
-          <p:cNvPr id="4" name="TextBox 3"/>
-          <p:cNvSpPr txBox="1"/>
-          <p:nvPr/>
-        </p:nvSpPr>
-        <p:spPr>
-          <a:xfrm>
-            <a:off x="822960" y="2651760"/>
-            <a:ext cx="10607040" cy="1554480"/>
-          </a:xfrm>
-          <a:prstGeom prst="rect">
-            <a:avLst/>
-          </a:prstGeom>
-          <a:noFill/>
-        </p:spPr>
-        <p:txBody>
-          <a:bodyPr wrap="square" anchor="ctr">
-            <a:spAutoFit/>
-          </a:bodyPr>
-          <a:lstStyle/>
-          <a:p>
-            <a:pPr algn="ctr"/>
-            <a:r>
-              <a:rPr sz="3000" b="1" spc="-60">
+          <p:cNvPr id="4" name="Rounded Rectangle 3"/>
+          <p:cNvSpPr/>
+          <p:nvPr/>
+        </p:nvSpPr>
+        <p:spPr>
+          <a:xfrm>
+            <a:off x="777240" y="2743200"/>
+            <a:ext cx="4800600" cy="1920240"/>
+          </a:xfrm>
+          <a:prstGeom prst="roundRect">
+            <a:avLst>
+              <a:gd name="adj" fmla="val 12000"/>
+            </a:avLst>
+          </a:prstGeom>
+          <a:solidFill>
+            <a:srgbClr val="ECEBFB"/>
+          </a:solidFill>
+          <a:ln>
+            <a:noFill/>
+          </a:ln>
+          <a:effectLst/>
+        </p:spPr>
+        <p:style>
+          <a:lnRef idx="1">
+            <a:schemeClr val="accent1"/>
+          </a:lnRef>
+          <a:fillRef idx="3">
+            <a:schemeClr val="accent1"/>
+          </a:fillRef>
+          <a:effectRef idx="2">
+            <a:schemeClr val="accent1"/>
+          </a:effectRef>
+          <a:fontRef idx="minor">
+            <a:schemeClr val="lt1"/>
+          </a:fontRef>
+        </p:style>
+        <p:txBody>
+          <a:bodyPr rtlCol="0" anchor="ctr" tIns="101600" bIns="101600" lIns="203200" rIns="203200" wrap="square"/>
+          <a:lstStyle/>
+          <a:p>
+            <a:pPr algn="l"/>
+            <a:r>
+              <a:rPr sz="1800" b="1">
+                <a:solidFill>
+                  <a:srgbClr val="5B5BD6"/>
+                </a:solidFill>
+                <a:latin typeface="Apple SD Gothic Neo"/>
+              </a:rPr>
+              <a:t>좋은 점</a:t>
+            </a:r>
+          </a:p>
+          <a:p>
+            <a:pPr algn="l"/>
+            <a:r>
+              <a:rPr sz="600" b="0">
+                <a:solidFill>
+                  <a:srgbClr val="6B7280"/>
+                </a:solidFill>
+                <a:latin typeface="Apple SD Gothic Neo"/>
+              </a:rPr>
+              <a:t/>
+            </a:r>
+          </a:p>
+          <a:p>
+            <a:pPr algn="l"/>
+            <a:r>
+              <a:rPr sz="2100" b="1">
                 <a:solidFill>
                   <a:srgbClr val="1A1A1A"/>
                 </a:solidFill>
                 <a:latin typeface="Apple SD Gothic Neo"/>
               </a:rPr>
-              <a:t>동작하는 병원비 청구로 시연하고,
-자동차의 한계는 정직하게 설명했다.</a:t>
+              <a:t>버그 6개를 미리 발견</a:t>
+            </a:r>
+          </a:p>
+        </p:txBody>
+      </p:sp>
+      <p:sp>
+        <p:nvSpPr>
+          <p:cNvPr id="5" name="Rounded Rectangle 4"/>
+          <p:cNvSpPr/>
+          <p:nvPr/>
+        </p:nvSpPr>
+        <p:spPr>
+          <a:xfrm>
+            <a:off x="6629400" y="2743200"/>
+            <a:ext cx="4800600" cy="1920240"/>
+          </a:xfrm>
+          <a:prstGeom prst="roundRect">
+            <a:avLst>
+              <a:gd name="adj" fmla="val 12000"/>
+            </a:avLst>
+          </a:prstGeom>
+          <a:solidFill>
+            <a:srgbClr val="F4F4F6"/>
+          </a:solidFill>
+          <a:ln>
+            <a:noFill/>
+          </a:ln>
+          <a:effectLst/>
+        </p:spPr>
+        <p:style>
+          <a:lnRef idx="1">
+            <a:schemeClr val="accent1"/>
+          </a:lnRef>
+          <a:fillRef idx="3">
+            <a:schemeClr val="accent1"/>
+          </a:fillRef>
+          <a:effectRef idx="2">
+            <a:schemeClr val="accent1"/>
+          </a:effectRef>
+          <a:fontRef idx="minor">
+            <a:schemeClr val="lt1"/>
+          </a:fontRef>
+        </p:style>
+        <p:txBody>
+          <a:bodyPr rtlCol="0" anchor="ctr" tIns="101600" bIns="101600" lIns="203200" rIns="203200" wrap="square"/>
+          <a:lstStyle/>
+          <a:p>
+            <a:pPr algn="l"/>
+            <a:r>
+              <a:rPr sz="1800" b="1">
+                <a:solidFill>
+                  <a:srgbClr val="6B7280"/>
+                </a:solidFill>
+                <a:latin typeface="Apple SD Gothic Neo"/>
+              </a:rPr>
+              <a:t>아쉬운 점</a:t>
+            </a:r>
+          </a:p>
+          <a:p>
+            <a:pPr algn="l"/>
+            <a:r>
+              <a:rPr sz="600" b="0">
+                <a:solidFill>
+                  <a:srgbClr val="6B7280"/>
+                </a:solidFill>
+                <a:latin typeface="Apple SD Gothic Neo"/>
+              </a:rPr>
+              <a:t/>
+            </a:r>
+          </a:p>
+          <a:p>
+            <a:pPr algn="l"/>
+            <a:r>
+              <a:rPr sz="2100" b="1">
+                <a:solidFill>
+                  <a:srgbClr val="1A1A1A"/>
+                </a:solidFill>
+                <a:latin typeface="Apple SD Gothic Neo"/>
+              </a:rPr>
+              <a:t>단순 작업까지 3중 리뷰
+→ 비용 과다</a:t>
             </a:r>
           </a:p>
         </p:txBody>
@@ -12702,12 +13602,12 @@
 </file>
 
 <file path=ppt/slides/slide39.xml><?xml version="1.0" encoding="utf-8"?>
-<p:sld xmlns:a="http://schemas.openxmlformats.org/drawingml/2006/main" xmlns:r="http://schemas.openxmlformats.org/officeDocument/2006/relationships" xmlns:p="http://schemas.openxmlformats.org/presentationml/2006/main">
+<p:sld xmlns:a="http://schemas.openxmlformats.org/drawingml/2006/main" xmlns:p="http://schemas.openxmlformats.org/presentationml/2006/main" xmlns:r="http://schemas.openxmlformats.org/officeDocument/2006/relationships">
   <p:cSld>
     <p:bg>
       <p:bgPr>
         <a:solidFill>
-          <a:srgbClr val="1F1D3D"/>
+          <a:srgbClr val="FFFFFF"/>
         </a:solidFill>
         <a:effectLst/>
       </p:bgPr>
@@ -12718,14 +13618,7 @@
         <p:cNvGrpSpPr/>
         <p:nvPr/>
       </p:nvGrpSpPr>
-      <p:grpSpPr>
-        <a:xfrm>
-          <a:off x="0" y="0"/>
-          <a:ext cx="0" cy="0"/>
-          <a:chOff x="0" y="0"/>
-          <a:chExt cx="0" cy="0"/>
-        </a:xfrm>
-      </p:grpSpPr>
+      <p:grpSpPr/>
       <p:sp>
         <p:nvSpPr>
           <p:cNvPr id="2" name="TextBox 1"/>
@@ -12734,8 +13627,8 @@
         </p:nvSpPr>
         <p:spPr>
           <a:xfrm>
-            <a:off x="868680" y="2514600"/>
-            <a:ext cx="10607040" cy="2011680"/>
+            <a:off x="749808" y="566928"/>
+            <a:ext cx="10881360" cy="1371600"/>
           </a:xfrm>
           <a:prstGeom prst="rect">
             <a:avLst/>
@@ -12750,25 +13643,93 @@
           <a:p>
             <a:pPr algn="l"/>
             <a:r>
-              <a:rPr sz="4800" b="1" spc="-100">
-                <a:solidFill>
-                  <a:srgbClr val="FFFFFF"/>
-                </a:solidFill>
-                <a:latin typeface="Apple SD Gothic Neo"/>
-              </a:rPr>
-              <a:t>설계한 그대로 구현했고,</a:t>
-            </a:r>
-          </a:p>
-          <a:p>
-            <a:pPr algn="l"/>
-            <a:r>
-              <a:rPr sz="4800" b="1" spc="-100">
-                <a:solidFill>
-                  <a:srgbClr val="FFFFFF"/>
-                </a:solidFill>
-                <a:latin typeface="Apple SD Gothic Neo"/>
-              </a:rPr>
-              <a:t>그 과정에서 AI를 통제했다.</a:t>
+              <a:rPr sz="4600" b="1" spc="-100">
+                <a:solidFill>
+                  <a:srgbClr val="1A1A1A"/>
+                </a:solidFill>
+                <a:latin typeface="Apple SD Gothic Neo"/>
+              </a:rPr>
+              <a:t>가장 큰 실수 — 발견</a:t>
+            </a:r>
+          </a:p>
+        </p:txBody>
+      </p:sp>
+      <p:sp>
+        <p:nvSpPr>
+          <p:cNvPr id="3" name="Rectangle 2"/>
+          <p:cNvSpPr/>
+          <p:nvPr/>
+        </p:nvSpPr>
+        <p:spPr>
+          <a:xfrm>
+            <a:off x="822960" y="1554480"/>
+            <a:ext cx="868680" cy="82296"/>
+          </a:xfrm>
+          <a:prstGeom prst="rect">
+            <a:avLst/>
+          </a:prstGeom>
+          <a:solidFill>
+            <a:srgbClr val="5B5BD6"/>
+          </a:solidFill>
+          <a:ln>
+            <a:noFill/>
+          </a:ln>
+          <a:effectLst/>
+        </p:spPr>
+        <p:style>
+          <a:lnRef idx="1">
+            <a:schemeClr val="accent1"/>
+          </a:lnRef>
+          <a:fillRef idx="3">
+            <a:schemeClr val="accent1"/>
+          </a:fillRef>
+          <a:effectRef idx="2">
+            <a:schemeClr val="accent1"/>
+          </a:effectRef>
+          <a:fontRef idx="minor">
+            <a:schemeClr val="lt1"/>
+          </a:fontRef>
+        </p:style>
+        <p:txBody>
+          <a:bodyPr rtlCol="0" anchor="ctr"/>
+          <a:lstStyle/>
+          <a:p>
+            <a:pPr algn="ctr"/>
+          </a:p>
+        </p:txBody>
+      </p:sp>
+      <p:sp>
+        <p:nvSpPr>
+          <p:cNvPr id="4" name="TextBox 3"/>
+          <p:cNvSpPr txBox="1"/>
+          <p:nvPr/>
+        </p:nvSpPr>
+        <p:spPr>
+          <a:xfrm>
+            <a:off x="822960" y="2651760"/>
+            <a:ext cx="10607040" cy="1554480"/>
+          </a:xfrm>
+          <a:prstGeom prst="rect">
+            <a:avLst/>
+          </a:prstGeom>
+          <a:noFill/>
+        </p:spPr>
+        <p:txBody>
+          <a:bodyPr wrap="square" anchor="ctr">
+            <a:spAutoFit/>
+          </a:bodyPr>
+          <a:lstStyle/>
+          <a:p>
+            <a:pPr algn="ctr"/>
+            <a:r>
+              <a:rPr sz="3300" b="1" spc="-60">
+                <a:solidFill>
+                  <a:srgbClr val="1A1A1A"/>
+                </a:solidFill>
+                <a:latin typeface="Apple SD Gothic Neo"/>
+              </a:rPr>
+              <a:t>자동차 사고가 직원 '심사 목록'에
+끝까지 안 떴다.</a:t>
             </a:r>
           </a:p>
         </p:txBody>
@@ -13177,7 +14138,7 @@
                 </a:solidFill>
                 <a:latin typeface="Apple SD Gothic Neo"/>
               </a:rPr>
-              <a:t>개발 파이프라인</a:t>
+              <a:t>왜? — 설계대로였다</a:t>
             </a:r>
           </a:p>
         </p:txBody>
@@ -13228,95 +14189,14 @@
       </p:sp>
       <p:sp>
         <p:nvSpPr>
-          <p:cNvPr id="4" name="Rounded Rectangle 3"/>
-          <p:cNvSpPr/>
-          <p:nvPr/>
-        </p:nvSpPr>
-        <p:spPr>
-          <a:xfrm>
-            <a:off x="824331" y="2834640"/>
-            <a:ext cx="1874519" cy="1554480"/>
-          </a:xfrm>
-          <a:prstGeom prst="roundRect">
-            <a:avLst>
-              <a:gd name="adj" fmla="val 12000"/>
-            </a:avLst>
-          </a:prstGeom>
-          <a:solidFill>
-            <a:srgbClr val="F4F4F6"/>
-          </a:solidFill>
-          <a:ln w="16510">
-            <a:solidFill>
-              <a:srgbClr val="E6E6E6"/>
-            </a:solidFill>
-          </a:ln>
-          <a:effectLst/>
-        </p:spPr>
-        <p:style>
-          <a:lnRef idx="1">
-            <a:schemeClr val="accent1"/>
-          </a:lnRef>
-          <a:fillRef idx="3">
-            <a:schemeClr val="accent1"/>
-          </a:fillRef>
-          <a:effectRef idx="2">
-            <a:schemeClr val="accent1"/>
-          </a:effectRef>
-          <a:fontRef idx="minor">
-            <a:schemeClr val="lt1"/>
-          </a:fontRef>
-        </p:style>
-        <p:txBody>
-          <a:bodyPr rtlCol="0" anchor="ctr" tIns="76200" bIns="76200" lIns="127000" rIns="127000" wrap="square"/>
-          <a:lstStyle/>
-          <a:p>
-            <a:pPr algn="ctr"/>
-            <a:r>
-              <a:rPr sz="2200" b="1">
-                <a:solidFill>
-                  <a:srgbClr val="1A1A1A"/>
-                </a:solidFill>
-                <a:latin typeface="Apple SD Gothic Neo"/>
-              </a:rPr>
-              <a:t>발산</a:t>
-            </a:r>
-          </a:p>
-          <a:p>
-            <a:pPr algn="ctr"/>
-            <a:r>
-              <a:rPr sz="600" b="0">
-                <a:solidFill>
-                  <a:srgbClr val="6B7280"/>
-                </a:solidFill>
-                <a:latin typeface="Apple SD Gothic Neo"/>
-              </a:rPr>
-              <a:t/>
-            </a:r>
-          </a:p>
-          <a:p>
-            <a:pPr algn="ctr"/>
-            <a:r>
-              <a:rPr sz="1200" b="0">
-                <a:solidFill>
-                  <a:srgbClr val="6B7280"/>
-                </a:solidFill>
-                <a:latin typeface="Menlo"/>
-              </a:rPr>
-              <a:t>brainstorming</a:t>
-            </a:r>
-          </a:p>
-        </p:txBody>
-      </p:sp>
-      <p:sp>
-        <p:nvSpPr>
-          <p:cNvPr id="5" name="TextBox 4"/>
+          <p:cNvPr id="4" name="TextBox 3"/>
           <p:cNvSpPr txBox="1"/>
           <p:nvPr/>
         </p:nvSpPr>
         <p:spPr>
           <a:xfrm>
-            <a:off x="2525115" y="3337560"/>
-            <a:ext cx="640080" cy="548640"/>
+            <a:off x="822960" y="2651760"/>
+            <a:ext cx="10607040" cy="1554480"/>
           </a:xfrm>
           <a:prstGeom prst="rect">
             <a:avLst/>
@@ -13331,456 +14211,28 @@
           <a:p>
             <a:pPr algn="ctr"/>
             <a:r>
-              <a:rPr sz="2600" b="1">
-                <a:solidFill>
-                  <a:srgbClr val="6B7280"/>
-                </a:solidFill>
-                <a:latin typeface="Apple SD Gothic Neo"/>
-              </a:rPr>
-              <a:t>→</a:t>
-            </a:r>
-          </a:p>
-        </p:txBody>
-      </p:sp>
-      <p:sp>
-        <p:nvSpPr>
-          <p:cNvPr id="6" name="Rounded Rectangle 5"/>
-          <p:cNvSpPr/>
-          <p:nvPr/>
-        </p:nvSpPr>
-        <p:spPr>
-          <a:xfrm>
-            <a:off x="2991459" y="2834640"/>
-            <a:ext cx="1874519" cy="1554480"/>
-          </a:xfrm>
-          <a:prstGeom prst="roundRect">
-            <a:avLst>
-              <a:gd name="adj" fmla="val 12000"/>
-            </a:avLst>
-          </a:prstGeom>
-          <a:solidFill>
-            <a:srgbClr val="ECEBFB"/>
-          </a:solidFill>
-          <a:ln w="16510">
-            <a:solidFill>
-              <a:srgbClr val="E6E6E6"/>
-            </a:solidFill>
-          </a:ln>
-          <a:effectLst/>
-        </p:spPr>
-        <p:style>
-          <a:lnRef idx="1">
-            <a:schemeClr val="accent1"/>
-          </a:lnRef>
-          <a:fillRef idx="3">
-            <a:schemeClr val="accent1"/>
-          </a:fillRef>
-          <a:effectRef idx="2">
-            <a:schemeClr val="accent1"/>
-          </a:effectRef>
-          <a:fontRef idx="minor">
-            <a:schemeClr val="lt1"/>
-          </a:fontRef>
-        </p:style>
-        <p:txBody>
-          <a:bodyPr rtlCol="0" anchor="ctr" tIns="76200" bIns="76200" lIns="127000" rIns="127000" wrap="square"/>
-          <a:lstStyle/>
-          <a:p>
-            <a:pPr algn="ctr"/>
-            <a:r>
-              <a:rPr sz="2200" b="1">
+              <a:rPr sz="3000" b="1" spc="-60">
                 <a:solidFill>
                   <a:srgbClr val="1A1A1A"/>
                 </a:solidFill>
                 <a:latin typeface="Apple SD Gothic Neo"/>
               </a:rPr>
-              <a:t>취조</a:t>
-            </a:r>
-          </a:p>
-          <a:p>
-            <a:pPr algn="ctr"/>
-            <a:r>
-              <a:rPr sz="600" b="0">
-                <a:solidFill>
-                  <a:srgbClr val="6B7280"/>
-                </a:solidFill>
-                <a:latin typeface="Apple SD Gothic Neo"/>
-              </a:rPr>
-              <a:t/>
-            </a:r>
-          </a:p>
-          <a:p>
-            <a:pPr algn="ctr"/>
-            <a:r>
-              <a:rPr sz="1200" b="0">
-                <a:solidFill>
-                  <a:srgbClr val="6B7280"/>
-                </a:solidFill>
-                <a:latin typeface="Menlo"/>
-              </a:rPr>
-              <a:t>grill-with-docs</a:t>
-            </a:r>
-          </a:p>
-        </p:txBody>
-      </p:sp>
-      <p:sp>
-        <p:nvSpPr>
-          <p:cNvPr id="7" name="TextBox 6"/>
+              <a:t>유스케이스(UC09): 자동차 사고는
+'접수만', 심사 큐엔 안 들어감</a:t>
+            </a:r>
+          </a:p>
+        </p:txBody>
+      </p:sp>
+      <p:sp>
+        <p:nvSpPr>
+          <p:cNvPr id="5" name="TextBox 4"/>
           <p:cNvSpPr txBox="1"/>
           <p:nvPr/>
         </p:nvSpPr>
         <p:spPr>
           <a:xfrm>
-            <a:off x="4692243" y="3337560"/>
-            <a:ext cx="640080" cy="548640"/>
-          </a:xfrm>
-          <a:prstGeom prst="rect">
-            <a:avLst/>
-          </a:prstGeom>
-          <a:noFill/>
-        </p:spPr>
-        <p:txBody>
-          <a:bodyPr wrap="square" anchor="ctr">
-            <a:spAutoFit/>
-          </a:bodyPr>
-          <a:lstStyle/>
-          <a:p>
-            <a:pPr algn="ctr"/>
-            <a:r>
-              <a:rPr sz="2600" b="1">
-                <a:solidFill>
-                  <a:srgbClr val="6B7280"/>
-                </a:solidFill>
-                <a:latin typeface="Apple SD Gothic Neo"/>
-              </a:rPr>
-              <a:t>→</a:t>
-            </a:r>
-          </a:p>
-        </p:txBody>
-      </p:sp>
-      <p:sp>
-        <p:nvSpPr>
-          <p:cNvPr id="8" name="Rounded Rectangle 7"/>
-          <p:cNvSpPr/>
-          <p:nvPr/>
-        </p:nvSpPr>
-        <p:spPr>
-          <a:xfrm>
-            <a:off x="5158587" y="2834640"/>
-            <a:ext cx="1874519" cy="1554480"/>
-          </a:xfrm>
-          <a:prstGeom prst="roundRect">
-            <a:avLst>
-              <a:gd name="adj" fmla="val 12000"/>
-            </a:avLst>
-          </a:prstGeom>
-          <a:solidFill>
-            <a:srgbClr val="F4F4F6"/>
-          </a:solidFill>
-          <a:ln w="16510">
-            <a:solidFill>
-              <a:srgbClr val="E6E6E6"/>
-            </a:solidFill>
-          </a:ln>
-          <a:effectLst/>
-        </p:spPr>
-        <p:style>
-          <a:lnRef idx="1">
-            <a:schemeClr val="accent1"/>
-          </a:lnRef>
-          <a:fillRef idx="3">
-            <a:schemeClr val="accent1"/>
-          </a:fillRef>
-          <a:effectRef idx="2">
-            <a:schemeClr val="accent1"/>
-          </a:effectRef>
-          <a:fontRef idx="minor">
-            <a:schemeClr val="lt1"/>
-          </a:fontRef>
-        </p:style>
-        <p:txBody>
-          <a:bodyPr rtlCol="0" anchor="ctr" tIns="76200" bIns="76200" lIns="127000" rIns="127000" wrap="square"/>
-          <a:lstStyle/>
-          <a:p>
-            <a:pPr algn="ctr"/>
-            <a:r>
-              <a:rPr sz="2200" b="1">
-                <a:solidFill>
-                  <a:srgbClr val="1A1A1A"/>
-                </a:solidFill>
-                <a:latin typeface="Apple SD Gothic Neo"/>
-              </a:rPr>
-              <a:t>계획</a:t>
-            </a:r>
-          </a:p>
-          <a:p>
-            <a:pPr algn="ctr"/>
-            <a:r>
-              <a:rPr sz="600" b="0">
-                <a:solidFill>
-                  <a:srgbClr val="6B7280"/>
-                </a:solidFill>
-                <a:latin typeface="Apple SD Gothic Neo"/>
-              </a:rPr>
-              <a:t/>
-            </a:r>
-          </a:p>
-          <a:p>
-            <a:pPr algn="ctr"/>
-            <a:r>
-              <a:rPr sz="1200" b="0">
-                <a:solidFill>
-                  <a:srgbClr val="6B7280"/>
-                </a:solidFill>
-                <a:latin typeface="Menlo"/>
-              </a:rPr>
-              <a:t>writing-plans</a:t>
-            </a:r>
-          </a:p>
-        </p:txBody>
-      </p:sp>
-      <p:sp>
-        <p:nvSpPr>
-          <p:cNvPr id="9" name="TextBox 8"/>
-          <p:cNvSpPr txBox="1"/>
-          <p:nvPr/>
-        </p:nvSpPr>
-        <p:spPr>
-          <a:xfrm>
-            <a:off x="6859371" y="3337560"/>
-            <a:ext cx="640080" cy="548640"/>
-          </a:xfrm>
-          <a:prstGeom prst="rect">
-            <a:avLst/>
-          </a:prstGeom>
-          <a:noFill/>
-        </p:spPr>
-        <p:txBody>
-          <a:bodyPr wrap="square" anchor="ctr">
-            <a:spAutoFit/>
-          </a:bodyPr>
-          <a:lstStyle/>
-          <a:p>
-            <a:pPr algn="ctr"/>
-            <a:r>
-              <a:rPr sz="2600" b="1">
-                <a:solidFill>
-                  <a:srgbClr val="6B7280"/>
-                </a:solidFill>
-                <a:latin typeface="Apple SD Gothic Neo"/>
-              </a:rPr>
-              <a:t>→</a:t>
-            </a:r>
-          </a:p>
-        </p:txBody>
-      </p:sp>
-      <p:sp>
-        <p:nvSpPr>
-          <p:cNvPr id="10" name="Rounded Rectangle 9"/>
-          <p:cNvSpPr/>
-          <p:nvPr/>
-        </p:nvSpPr>
-        <p:spPr>
-          <a:xfrm>
-            <a:off x="7325715" y="2834640"/>
-            <a:ext cx="1874519" cy="1554480"/>
-          </a:xfrm>
-          <a:prstGeom prst="roundRect">
-            <a:avLst>
-              <a:gd name="adj" fmla="val 12000"/>
-            </a:avLst>
-          </a:prstGeom>
-          <a:solidFill>
-            <a:srgbClr val="ECEBFB"/>
-          </a:solidFill>
-          <a:ln w="16510">
-            <a:solidFill>
-              <a:srgbClr val="E6E6E6"/>
-            </a:solidFill>
-          </a:ln>
-          <a:effectLst/>
-        </p:spPr>
-        <p:style>
-          <a:lnRef idx="1">
-            <a:schemeClr val="accent1"/>
-          </a:lnRef>
-          <a:fillRef idx="3">
-            <a:schemeClr val="accent1"/>
-          </a:fillRef>
-          <a:effectRef idx="2">
-            <a:schemeClr val="accent1"/>
-          </a:effectRef>
-          <a:fontRef idx="minor">
-            <a:schemeClr val="lt1"/>
-          </a:fontRef>
-        </p:style>
-        <p:txBody>
-          <a:bodyPr rtlCol="0" anchor="ctr" tIns="76200" bIns="76200" lIns="127000" rIns="127000" wrap="square"/>
-          <a:lstStyle/>
-          <a:p>
-            <a:pPr algn="ctr"/>
-            <a:r>
-              <a:rPr sz="2200" b="1">
-                <a:solidFill>
-                  <a:srgbClr val="1A1A1A"/>
-                </a:solidFill>
-                <a:latin typeface="Apple SD Gothic Neo"/>
-              </a:rPr>
-              <a:t>구현</a:t>
-            </a:r>
-          </a:p>
-          <a:p>
-            <a:pPr algn="ctr"/>
-            <a:r>
-              <a:rPr sz="600" b="0">
-                <a:solidFill>
-                  <a:srgbClr val="6B7280"/>
-                </a:solidFill>
-                <a:latin typeface="Apple SD Gothic Neo"/>
-              </a:rPr>
-              <a:t/>
-            </a:r>
-          </a:p>
-          <a:p>
-            <a:pPr algn="ctr"/>
-            <a:r>
-              <a:rPr sz="1200" b="0">
-                <a:solidFill>
-                  <a:srgbClr val="6B7280"/>
-                </a:solidFill>
-                <a:latin typeface="Menlo"/>
-              </a:rPr>
-              <a:t>executing-plans</a:t>
-            </a:r>
-          </a:p>
-        </p:txBody>
-      </p:sp>
-      <p:sp>
-        <p:nvSpPr>
-          <p:cNvPr id="11" name="TextBox 10"/>
-          <p:cNvSpPr txBox="1"/>
-          <p:nvPr/>
-        </p:nvSpPr>
-        <p:spPr>
-          <a:xfrm>
-            <a:off x="9026499" y="3337560"/>
-            <a:ext cx="640080" cy="548640"/>
-          </a:xfrm>
-          <a:prstGeom prst="rect">
-            <a:avLst/>
-          </a:prstGeom>
-          <a:noFill/>
-        </p:spPr>
-        <p:txBody>
-          <a:bodyPr wrap="square" anchor="ctr">
-            <a:spAutoFit/>
-          </a:bodyPr>
-          <a:lstStyle/>
-          <a:p>
-            <a:pPr algn="ctr"/>
-            <a:r>
-              <a:rPr sz="2600" b="1">
-                <a:solidFill>
-                  <a:srgbClr val="6B7280"/>
-                </a:solidFill>
-                <a:latin typeface="Apple SD Gothic Neo"/>
-              </a:rPr>
-              <a:t>→</a:t>
-            </a:r>
-          </a:p>
-        </p:txBody>
-      </p:sp>
-      <p:sp>
-        <p:nvSpPr>
-          <p:cNvPr id="12" name="Rounded Rectangle 11"/>
-          <p:cNvSpPr/>
-          <p:nvPr/>
-        </p:nvSpPr>
-        <p:spPr>
-          <a:xfrm>
-            <a:off x="9492843" y="2834640"/>
-            <a:ext cx="1874519" cy="1554480"/>
-          </a:xfrm>
-          <a:prstGeom prst="roundRect">
-            <a:avLst>
-              <a:gd name="adj" fmla="val 12000"/>
-            </a:avLst>
-          </a:prstGeom>
-          <a:solidFill>
-            <a:srgbClr val="F4F4F6"/>
-          </a:solidFill>
-          <a:ln w="16510">
-            <a:solidFill>
-              <a:srgbClr val="E6E6E6"/>
-            </a:solidFill>
-          </a:ln>
-          <a:effectLst/>
-        </p:spPr>
-        <p:style>
-          <a:lnRef idx="1">
-            <a:schemeClr val="accent1"/>
-          </a:lnRef>
-          <a:fillRef idx="3">
-            <a:schemeClr val="accent1"/>
-          </a:fillRef>
-          <a:effectRef idx="2">
-            <a:schemeClr val="accent1"/>
-          </a:effectRef>
-          <a:fontRef idx="minor">
-            <a:schemeClr val="lt1"/>
-          </a:fontRef>
-        </p:style>
-        <p:txBody>
-          <a:bodyPr rtlCol="0" anchor="ctr" tIns="76200" bIns="76200" lIns="127000" rIns="127000" wrap="square"/>
-          <a:lstStyle/>
-          <a:p>
-            <a:pPr algn="ctr"/>
-            <a:r>
-              <a:rPr sz="2200" b="1">
-                <a:solidFill>
-                  <a:srgbClr val="1A1A1A"/>
-                </a:solidFill>
-                <a:latin typeface="Apple SD Gothic Neo"/>
-              </a:rPr>
-              <a:t>검증</a:t>
-            </a:r>
-          </a:p>
-          <a:p>
-            <a:pPr algn="ctr"/>
-            <a:r>
-              <a:rPr sz="600" b="0">
-                <a:solidFill>
-                  <a:srgbClr val="6B7280"/>
-                </a:solidFill>
-                <a:latin typeface="Apple SD Gothic Neo"/>
-              </a:rPr>
-              <a:t/>
-            </a:r>
-          </a:p>
-          <a:p>
-            <a:pPr algn="ctr"/>
-            <a:r>
-              <a:rPr sz="1200" b="0">
-                <a:solidFill>
-                  <a:srgbClr val="6B7280"/>
-                </a:solidFill>
-                <a:latin typeface="Menlo"/>
-              </a:rPr>
-              <a:t>Codex 리뷰</a:t>
-            </a:r>
-          </a:p>
-        </p:txBody>
-      </p:sp>
-      <p:sp>
-        <p:nvSpPr>
-          <p:cNvPr id="13" name="TextBox 12"/>
-          <p:cNvSpPr txBox="1"/>
-          <p:nvPr/>
-        </p:nvSpPr>
-        <p:spPr>
-          <a:xfrm>
-            <a:off x="822960" y="5029200"/>
-            <a:ext cx="10607040" cy="822960"/>
+            <a:off x="822960" y="4434840"/>
+            <a:ext cx="10607040" cy="914400"/>
           </a:xfrm>
           <a:prstGeom prst="rect">
             <a:avLst/>
@@ -13795,13 +14247,13 @@
           <a:p>
             <a:pPr algn="ctr"/>
             <a:r>
-              <a:rPr sz="2400" b="1" spc="-40">
-                <a:solidFill>
-                  <a:srgbClr val="1A1A1A"/>
-                </a:solidFill>
-                <a:latin typeface="Apple SD Gothic Neo"/>
-              </a:rPr>
-              <a:t>각 단계가 산출물을 남긴다 — 설계 · 용어 · 계획 · 코드 · 리뷰.</a:t>
+              <a:rPr sz="2200" b="0" spc="-30">
+                <a:solidFill>
+                  <a:srgbClr val="6B7280"/>
+                </a:solidFill>
+                <a:latin typeface="Apple SD Gothic Neo"/>
+              </a:rPr>
+              <a:t>버그가 아니라, 내가 그렇게 설계한 것</a:t>
             </a:r>
           </a:p>
         </p:txBody>
@@ -13862,7 +14314,7 @@
                 </a:solidFill>
                 <a:latin typeface="Apple SD Gothic Neo"/>
               </a:rPr>
-              <a:t>테스트 주도 개발 (TDD)</a:t>
+              <a:t>어떻게 데모를 살렸나</a:t>
             </a:r>
           </a:p>
         </p:txBody>
@@ -13935,60 +14387,14 @@
           <a:p>
             <a:pPr algn="ctr"/>
             <a:r>
-              <a:rPr sz="3600" b="1" spc="-60">
+              <a:rPr sz="3000" b="1" spc="-60">
                 <a:solidFill>
                   <a:srgbClr val="1A1A1A"/>
                 </a:solidFill>
                 <a:latin typeface="Apple SD Gothic Neo"/>
               </a:rPr>
-              <a:t>실패하는 테스트 없이는</a:t>
-            </a:r>
-          </a:p>
-          <a:p>
-            <a:pPr algn="ctr"/>
-            <a:r>
-              <a:rPr sz="3600" b="1" spc="-60">
-                <a:solidFill>
-                  <a:srgbClr val="5B5BD6"/>
-                </a:solidFill>
-                <a:latin typeface="Apple SD Gothic Neo"/>
-              </a:rPr>
-              <a:t>프로덕션 코드를 쓰지 않는다.</a:t>
-            </a:r>
-          </a:p>
-        </p:txBody>
-      </p:sp>
-      <p:sp>
-        <p:nvSpPr>
-          <p:cNvPr id="5" name="TextBox 4"/>
-          <p:cNvSpPr txBox="1"/>
-          <p:nvPr/>
-        </p:nvSpPr>
-        <p:spPr>
-          <a:xfrm>
-            <a:off x="822960" y="4572000"/>
-            <a:ext cx="10607040" cy="914400"/>
-          </a:xfrm>
-          <a:prstGeom prst="rect">
-            <a:avLst/>
-          </a:prstGeom>
-          <a:noFill/>
-        </p:spPr>
-        <p:txBody>
-          <a:bodyPr wrap="square" anchor="t">
-            <a:spAutoFit/>
-          </a:bodyPr>
-          <a:lstStyle/>
-          <a:p>
-            <a:pPr algn="ctr"/>
-            <a:r>
-              <a:rPr sz="2200" b="0" spc="-30">
-                <a:solidFill>
-                  <a:srgbClr val="6B7280"/>
-                </a:solidFill>
-                <a:latin typeface="Apple SD Gothic Neo"/>
-              </a:rPr>
-              <a:t>AI가 쏟아내는 코드를 검증 없이 통과시키지 않는 장치.</a:t>
+              <a:t>동작하는 병원비 청구로 시연하고,
+자동차의 한계는 정직하게 설명했다.</a:t>
             </a:r>
           </a:p>
         </p:txBody>
@@ -14002,6 +14408,86 @@
 </file>
 
 <file path=ppt/slides/slide42.xml><?xml version="1.0" encoding="utf-8"?>
+<p:sld xmlns:a="http://schemas.openxmlformats.org/drawingml/2006/main" xmlns:r="http://schemas.openxmlformats.org/officeDocument/2006/relationships" xmlns:p="http://schemas.openxmlformats.org/presentationml/2006/main">
+  <p:cSld>
+    <p:bg>
+      <p:bgPr>
+        <a:solidFill>
+          <a:srgbClr val="1F1D3D"/>
+        </a:solidFill>
+        <a:effectLst/>
+      </p:bgPr>
+    </p:bg>
+    <p:spTree>
+      <p:nvGrpSpPr>
+        <p:cNvPr id="1" name=""/>
+        <p:cNvGrpSpPr/>
+        <p:nvPr/>
+      </p:nvGrpSpPr>
+      <p:grpSpPr>
+        <a:xfrm>
+          <a:off x="0" y="0"/>
+          <a:ext cx="0" cy="0"/>
+          <a:chOff x="0" y="0"/>
+          <a:chExt cx="0" cy="0"/>
+        </a:xfrm>
+      </p:grpSpPr>
+      <p:sp>
+        <p:nvSpPr>
+          <p:cNvPr id="2" name="TextBox 1"/>
+          <p:cNvSpPr txBox="1"/>
+          <p:nvPr/>
+        </p:nvSpPr>
+        <p:spPr>
+          <a:xfrm>
+            <a:off x="868680" y="2514600"/>
+            <a:ext cx="10607040" cy="2011680"/>
+          </a:xfrm>
+          <a:prstGeom prst="rect">
+            <a:avLst/>
+          </a:prstGeom>
+          <a:noFill/>
+        </p:spPr>
+        <p:txBody>
+          <a:bodyPr wrap="square" anchor="t">
+            <a:spAutoFit/>
+          </a:bodyPr>
+          <a:lstStyle/>
+          <a:p>
+            <a:pPr algn="l"/>
+            <a:r>
+              <a:rPr sz="4800" b="1" spc="-100">
+                <a:solidFill>
+                  <a:srgbClr val="FFFFFF"/>
+                </a:solidFill>
+                <a:latin typeface="Apple SD Gothic Neo"/>
+              </a:rPr>
+              <a:t>설계한 그대로 구현했고,</a:t>
+            </a:r>
+          </a:p>
+          <a:p>
+            <a:pPr algn="l"/>
+            <a:r>
+              <a:rPr sz="4800" b="1" spc="-100">
+                <a:solidFill>
+                  <a:srgbClr val="FFFFFF"/>
+                </a:solidFill>
+                <a:latin typeface="Apple SD Gothic Neo"/>
+              </a:rPr>
+              <a:t>그 과정에서 AI를 통제했다.</a:t>
+            </a:r>
+          </a:p>
+        </p:txBody>
+      </p:sp>
+    </p:spTree>
+  </p:cSld>
+  <p:clrMapOvr>
+    <a:masterClrMapping/>
+  </p:clrMapOvr>
+</p:sld>
+</file>
+
+<file path=ppt/slides/slide43.xml><?xml version="1.0" encoding="utf-8"?>
 <p:sld xmlns:a="http://schemas.openxmlformats.org/drawingml/2006/main" xmlns:p="http://schemas.openxmlformats.org/presentationml/2006/main" xmlns:r="http://schemas.openxmlformats.org/officeDocument/2006/relationships">
   <p:cSld>
     <p:bg>
@@ -14049,7 +14535,7 @@
                 </a:solidFill>
                 <a:latin typeface="Apple SD Gothic Neo"/>
               </a:rPr>
-              <a:t>Red → Green → Refactor</a:t>
+              <a:t>내가 쓴 AI 도구</a:t>
             </a:r>
           </a:p>
         </p:txBody>
@@ -14106,8 +14592,8 @@
         </p:nvSpPr>
         <p:spPr>
           <a:xfrm>
-            <a:off x="1295247" y="2743200"/>
-            <a:ext cx="2834640" cy="1737360"/>
+            <a:off x="822960" y="2103120"/>
+            <a:ext cx="10561320" cy="868680"/>
           </a:xfrm>
           <a:prstGeom prst="roundRect">
             <a:avLst>
@@ -14115,7 +14601,330 @@
             </a:avLst>
           </a:prstGeom>
           <a:solidFill>
-            <a:srgbClr val="D8392B"/>
+            <a:srgbClr val="F4F4F6"/>
+          </a:solidFill>
+          <a:ln w="16510">
+            <a:solidFill>
+              <a:srgbClr val="E6E6E6"/>
+            </a:solidFill>
+          </a:ln>
+          <a:effectLst/>
+        </p:spPr>
+        <p:style>
+          <a:lnRef idx="1">
+            <a:schemeClr val="accent1"/>
+          </a:lnRef>
+          <a:fillRef idx="3">
+            <a:schemeClr val="accent1"/>
+          </a:fillRef>
+          <a:effectRef idx="2">
+            <a:schemeClr val="accent1"/>
+          </a:effectRef>
+          <a:fontRef idx="minor">
+            <a:schemeClr val="lt1"/>
+          </a:fontRef>
+        </p:style>
+        <p:txBody>
+          <a:bodyPr rtlCol="0" anchor="ctr" tIns="76200" bIns="76200" lIns="203200" rIns="177800" wrap="none"/>
+          <a:lstStyle/>
+          <a:p>
+            <a:pPr algn="l"/>
+            <a:r>
+              <a:rPr sz="1900" b="1">
+                <a:solidFill>
+                  <a:srgbClr val="5B5BD6"/>
+                </a:solidFill>
+                <a:latin typeface="Menlo"/>
+              </a:rPr>
+              <a:t>Claude Code     </a:t>
+            </a:r>
+            <a:r>
+              <a:rPr sz="1800" b="0">
+                <a:solidFill>
+                  <a:srgbClr val="1A1A1A"/>
+                </a:solidFill>
+                <a:latin typeface="Apple SD Gothic Neo"/>
+              </a:rPr>
+              <a:t>설계·조율은 Opus, 구현은 Sonnet 서브에이전트</a:t>
+            </a:r>
+          </a:p>
+        </p:txBody>
+      </p:sp>
+      <p:sp>
+        <p:nvSpPr>
+          <p:cNvPr id="5" name="Rounded Rectangle 4"/>
+          <p:cNvSpPr/>
+          <p:nvPr/>
+        </p:nvSpPr>
+        <p:spPr>
+          <a:xfrm>
+            <a:off x="822960" y="3127248"/>
+            <a:ext cx="10561320" cy="868680"/>
+          </a:xfrm>
+          <a:prstGeom prst="roundRect">
+            <a:avLst>
+              <a:gd name="adj" fmla="val 12000"/>
+            </a:avLst>
+          </a:prstGeom>
+          <a:solidFill>
+            <a:srgbClr val="F4F4F6"/>
+          </a:solidFill>
+          <a:ln w="16510">
+            <a:solidFill>
+              <a:srgbClr val="E6E6E6"/>
+            </a:solidFill>
+          </a:ln>
+          <a:effectLst/>
+        </p:spPr>
+        <p:style>
+          <a:lnRef idx="1">
+            <a:schemeClr val="accent1"/>
+          </a:lnRef>
+          <a:fillRef idx="3">
+            <a:schemeClr val="accent1"/>
+          </a:fillRef>
+          <a:effectRef idx="2">
+            <a:schemeClr val="accent1"/>
+          </a:effectRef>
+          <a:fontRef idx="minor">
+            <a:schemeClr val="lt1"/>
+          </a:fontRef>
+        </p:style>
+        <p:txBody>
+          <a:bodyPr rtlCol="0" anchor="ctr" tIns="76200" bIns="76200" lIns="203200" rIns="177800" wrap="none"/>
+          <a:lstStyle/>
+          <a:p>
+            <a:pPr algn="l"/>
+            <a:r>
+              <a:rPr sz="1900" b="1">
+                <a:solidFill>
+                  <a:srgbClr val="5B5BD6"/>
+                </a:solidFill>
+                <a:latin typeface="Menlo"/>
+              </a:rPr>
+              <a:t>Superpowers 스킬     </a:t>
+            </a:r>
+            <a:r>
+              <a:rPr sz="1800" b="0">
+                <a:solidFill>
+                  <a:srgbClr val="1A1A1A"/>
+                </a:solidFill>
+                <a:latin typeface="Apple SD Gothic Neo"/>
+              </a:rPr>
+              <a:t>brainstorming · grill-with-docs · writing/executing-plans</a:t>
+            </a:r>
+          </a:p>
+        </p:txBody>
+      </p:sp>
+      <p:sp>
+        <p:nvSpPr>
+          <p:cNvPr id="6" name="Rounded Rectangle 5"/>
+          <p:cNvSpPr/>
+          <p:nvPr/>
+        </p:nvSpPr>
+        <p:spPr>
+          <a:xfrm>
+            <a:off x="822960" y="4151376"/>
+            <a:ext cx="10561320" cy="868680"/>
+          </a:xfrm>
+          <a:prstGeom prst="roundRect">
+            <a:avLst>
+              <a:gd name="adj" fmla="val 12000"/>
+            </a:avLst>
+          </a:prstGeom>
+          <a:solidFill>
+            <a:srgbClr val="F4F4F6"/>
+          </a:solidFill>
+          <a:ln w="16510">
+            <a:solidFill>
+              <a:srgbClr val="E6E6E6"/>
+            </a:solidFill>
+          </a:ln>
+          <a:effectLst/>
+        </p:spPr>
+        <p:style>
+          <a:lnRef idx="1">
+            <a:schemeClr val="accent1"/>
+          </a:lnRef>
+          <a:fillRef idx="3">
+            <a:schemeClr val="accent1"/>
+          </a:fillRef>
+          <a:effectRef idx="2">
+            <a:schemeClr val="accent1"/>
+          </a:effectRef>
+          <a:fontRef idx="minor">
+            <a:schemeClr val="lt1"/>
+          </a:fontRef>
+        </p:style>
+        <p:txBody>
+          <a:bodyPr rtlCol="0" anchor="ctr" tIns="76200" bIns="76200" lIns="203200" rIns="177800" wrap="none"/>
+          <a:lstStyle/>
+          <a:p>
+            <a:pPr algn="l"/>
+            <a:r>
+              <a:rPr sz="1900" b="1">
+                <a:solidFill>
+                  <a:srgbClr val="5B5BD6"/>
+                </a:solidFill>
+                <a:latin typeface="Menlo"/>
+              </a:rPr>
+              <a:t>Codex     </a:t>
+            </a:r>
+            <a:r>
+              <a:rPr sz="1800" b="0">
+                <a:solidFill>
+                  <a:srgbClr val="1A1A1A"/>
+                </a:solidFill>
+                <a:latin typeface="Apple SD Gothic Neo"/>
+              </a:rPr>
+              <a:t>다른 모델로 교차 리뷰</a:t>
+            </a:r>
+          </a:p>
+        </p:txBody>
+      </p:sp>
+      <p:sp>
+        <p:nvSpPr>
+          <p:cNvPr id="7" name="Rounded Rectangle 6"/>
+          <p:cNvSpPr/>
+          <p:nvPr/>
+        </p:nvSpPr>
+        <p:spPr>
+          <a:xfrm>
+            <a:off x="822960" y="5175504"/>
+            <a:ext cx="10561320" cy="868680"/>
+          </a:xfrm>
+          <a:prstGeom prst="roundRect">
+            <a:avLst>
+              <a:gd name="adj" fmla="val 12000"/>
+            </a:avLst>
+          </a:prstGeom>
+          <a:solidFill>
+            <a:srgbClr val="F4F4F6"/>
+          </a:solidFill>
+          <a:ln w="16510">
+            <a:solidFill>
+              <a:srgbClr val="E6E6E6"/>
+            </a:solidFill>
+          </a:ln>
+          <a:effectLst/>
+        </p:spPr>
+        <p:style>
+          <a:lnRef idx="1">
+            <a:schemeClr val="accent1"/>
+          </a:lnRef>
+          <a:fillRef idx="3">
+            <a:schemeClr val="accent1"/>
+          </a:fillRef>
+          <a:effectRef idx="2">
+            <a:schemeClr val="accent1"/>
+          </a:effectRef>
+          <a:fontRef idx="minor">
+            <a:schemeClr val="lt1"/>
+          </a:fontRef>
+        </p:style>
+        <p:txBody>
+          <a:bodyPr rtlCol="0" anchor="ctr" tIns="76200" bIns="76200" lIns="203200" rIns="177800" wrap="none"/>
+          <a:lstStyle/>
+          <a:p>
+            <a:pPr algn="l"/>
+            <a:r>
+              <a:rPr sz="1900" b="1">
+                <a:solidFill>
+                  <a:srgbClr val="5B5BD6"/>
+                </a:solidFill>
+                <a:latin typeface="Menlo"/>
+              </a:rPr>
+              <a:t>cmux     </a:t>
+            </a:r>
+            <a:r>
+              <a:rPr sz="1800" b="0">
+                <a:solidFill>
+                  <a:srgbClr val="1A1A1A"/>
+                </a:solidFill>
+                <a:latin typeface="Apple SD Gothic Neo"/>
+              </a:rPr>
+              <a:t>프론트·백엔드 Claude를 메시지로 연결</a:t>
+            </a:r>
+          </a:p>
+        </p:txBody>
+      </p:sp>
+    </p:spTree>
+  </p:cSld>
+  <p:clrMapOvr>
+    <a:masterClrMapping/>
+  </p:clrMapOvr>
+</p:sld>
+</file>
+
+<file path=ppt/slides/slide44.xml><?xml version="1.0" encoding="utf-8"?>
+<p:sld xmlns:a="http://schemas.openxmlformats.org/drawingml/2006/main" xmlns:p="http://schemas.openxmlformats.org/presentationml/2006/main" xmlns:r="http://schemas.openxmlformats.org/officeDocument/2006/relationships">
+  <p:cSld>
+    <p:bg>
+      <p:bgPr>
+        <a:solidFill>
+          <a:srgbClr val="FFFFFF"/>
+        </a:solidFill>
+        <a:effectLst/>
+      </p:bgPr>
+    </p:bg>
+    <p:spTree>
+      <p:nvGrpSpPr>
+        <p:cNvPr id="1" name=""/>
+        <p:cNvGrpSpPr/>
+        <p:nvPr/>
+      </p:nvGrpSpPr>
+      <p:grpSpPr/>
+      <p:sp>
+        <p:nvSpPr>
+          <p:cNvPr id="2" name="TextBox 1"/>
+          <p:cNvSpPr txBox="1"/>
+          <p:nvPr/>
+        </p:nvSpPr>
+        <p:spPr>
+          <a:xfrm>
+            <a:off x="749808" y="566928"/>
+            <a:ext cx="10881360" cy="1371600"/>
+          </a:xfrm>
+          <a:prstGeom prst="rect">
+            <a:avLst/>
+          </a:prstGeom>
+          <a:noFill/>
+        </p:spPr>
+        <p:txBody>
+          <a:bodyPr wrap="square" anchor="t">
+            <a:spAutoFit/>
+          </a:bodyPr>
+          <a:lstStyle/>
+          <a:p>
+            <a:pPr algn="l"/>
+            <a:r>
+              <a:rPr sz="4600" b="1" spc="-100">
+                <a:solidFill>
+                  <a:srgbClr val="1A1A1A"/>
+                </a:solidFill>
+                <a:latin typeface="Apple SD Gothic Neo"/>
+              </a:rPr>
+              <a:t>cmux — 두 Claude를 붙이다</a:t>
+            </a:r>
+          </a:p>
+        </p:txBody>
+      </p:sp>
+      <p:sp>
+        <p:nvSpPr>
+          <p:cNvPr id="3" name="Rectangle 2"/>
+          <p:cNvSpPr/>
+          <p:nvPr/>
+        </p:nvSpPr>
+        <p:spPr>
+          <a:xfrm>
+            <a:off x="822960" y="1554480"/>
+            <a:ext cx="868680" cy="82296"/>
+          </a:xfrm>
+          <a:prstGeom prst="rect">
+            <a:avLst/>
+          </a:prstGeom>
+          <a:solidFill>
+            <a:srgbClr val="5B5BD6"/>
           </a:solidFill>
           <a:ln>
             <a:noFill/>
@@ -14137,103 +14946,23 @@
           </a:fontRef>
         </p:style>
         <p:txBody>
-          <a:bodyPr rtlCol="0" anchor="ctr" tIns="76200" bIns="76200" lIns="127000" rIns="127000" wrap="square"/>
-          <a:lstStyle/>
-          <a:p>
-            <a:pPr algn="ctr"/>
-            <a:r>
-              <a:rPr sz="2200" b="1">
-                <a:solidFill>
-                  <a:srgbClr val="FFFFFF"/>
-                </a:solidFill>
-                <a:latin typeface="Menlo"/>
-              </a:rPr>
-              <a:t>RED</a:t>
-            </a:r>
-          </a:p>
-          <a:p>
-            <a:pPr algn="ctr"/>
-            <a:r>
-              <a:rPr sz="600" b="0">
-                <a:solidFill>
-                  <a:srgbClr val="FFFFFF"/>
-                </a:solidFill>
-                <a:latin typeface="Apple SD Gothic Neo"/>
-              </a:rPr>
-              <a:t/>
-            </a:r>
-          </a:p>
-          <a:p>
-            <a:pPr algn="ctr"/>
-            <a:r>
-              <a:rPr sz="1700" b="1">
-                <a:solidFill>
-                  <a:srgbClr val="FFFFFF"/>
-                </a:solidFill>
-                <a:latin typeface="Apple SD Gothic Neo"/>
-              </a:rPr>
-              <a:t>실패 테스트를</a:t>
-            </a:r>
-          </a:p>
-          <a:p>
-            <a:pPr algn="ctr"/>
-            <a:r>
-              <a:rPr sz="1700" b="1">
-                <a:solidFill>
-                  <a:srgbClr val="FFFFFF"/>
-                </a:solidFill>
-                <a:latin typeface="Apple SD Gothic Neo"/>
-              </a:rPr>
-              <a:t>먼저 작성</a:t>
-            </a:r>
-          </a:p>
-        </p:txBody>
-      </p:sp>
-      <p:sp>
-        <p:nvSpPr>
-          <p:cNvPr id="5" name="TextBox 4"/>
-          <p:cNvSpPr txBox="1"/>
-          <p:nvPr/>
-        </p:nvSpPr>
-        <p:spPr>
-          <a:xfrm>
-            <a:off x="4084167" y="3383280"/>
-            <a:ext cx="640080" cy="548640"/>
-          </a:xfrm>
-          <a:prstGeom prst="rect">
-            <a:avLst/>
-          </a:prstGeom>
-          <a:noFill/>
-        </p:spPr>
-        <p:txBody>
-          <a:bodyPr wrap="square" anchor="ctr">
-            <a:spAutoFit/>
-          </a:bodyPr>
-          <a:lstStyle/>
-          <a:p>
-            <a:pPr algn="ctr"/>
-            <a:r>
-              <a:rPr sz="2800" b="1">
-                <a:solidFill>
-                  <a:srgbClr val="5B5BD6"/>
-                </a:solidFill>
-                <a:latin typeface="Apple SD Gothic Neo"/>
-              </a:rPr>
-              <a:t>→</a:t>
-            </a:r>
-          </a:p>
-        </p:txBody>
-      </p:sp>
-      <p:sp>
-        <p:nvSpPr>
-          <p:cNvPr id="6" name="Rounded Rectangle 5"/>
+          <a:bodyPr rtlCol="0" anchor="ctr"/>
+          <a:lstStyle/>
+          <a:p>
+            <a:pPr algn="ctr"/>
+          </a:p>
+        </p:txBody>
+      </p:sp>
+      <p:sp>
+        <p:nvSpPr>
+          <p:cNvPr id="4" name="Rounded Rectangle 3"/>
           <p:cNvSpPr/>
           <p:nvPr/>
         </p:nvSpPr>
         <p:spPr>
           <a:xfrm>
-            <a:off x="4678527" y="2743200"/>
-            <a:ext cx="2834640" cy="1737360"/>
+            <a:off x="1280160" y="2697480"/>
+            <a:ext cx="4023360" cy="1371600"/>
           </a:xfrm>
           <a:prstGeom prst="roundRect">
             <a:avLst>
@@ -14241,7 +14970,7 @@
             </a:avLst>
           </a:prstGeom>
           <a:solidFill>
-            <a:srgbClr val="2E9E5B"/>
+            <a:srgbClr val="ECEBFB"/>
           </a:solidFill>
           <a:ln>
             <a:noFill/>
@@ -14263,103 +14992,44 @@
           </a:fontRef>
         </p:style>
         <p:txBody>
-          <a:bodyPr rtlCol="0" anchor="ctr" tIns="76200" bIns="76200" lIns="127000" rIns="127000" wrap="square"/>
-          <a:lstStyle/>
-          <a:p>
-            <a:pPr algn="ctr"/>
-            <a:r>
-              <a:rPr sz="2200" b="1">
-                <a:solidFill>
-                  <a:srgbClr val="FFFFFF"/>
-                </a:solidFill>
-                <a:latin typeface="Menlo"/>
-              </a:rPr>
-              <a:t>GREEN</a:t>
-            </a:r>
-          </a:p>
-          <a:p>
-            <a:pPr algn="ctr"/>
-            <a:r>
-              <a:rPr sz="600" b="0">
-                <a:solidFill>
-                  <a:srgbClr val="FFFFFF"/>
-                </a:solidFill>
-                <a:latin typeface="Apple SD Gothic Neo"/>
-              </a:rPr>
-              <a:t/>
-            </a:r>
-          </a:p>
-          <a:p>
-            <a:pPr algn="ctr"/>
-            <a:r>
-              <a:rPr sz="1700" b="1">
-                <a:solidFill>
-                  <a:srgbClr val="FFFFFF"/>
-                </a:solidFill>
-                <a:latin typeface="Apple SD Gothic Neo"/>
-              </a:rPr>
-              <a:t>통과시킬</a:t>
-            </a:r>
-          </a:p>
-          <a:p>
-            <a:pPr algn="ctr"/>
-            <a:r>
-              <a:rPr sz="1700" b="1">
-                <a:solidFill>
-                  <a:srgbClr val="FFFFFF"/>
-                </a:solidFill>
-                <a:latin typeface="Apple SD Gothic Neo"/>
-              </a:rPr>
-              <a:t>최소한만 구현</a:t>
-            </a:r>
-          </a:p>
-        </p:txBody>
-      </p:sp>
-      <p:sp>
-        <p:nvSpPr>
-          <p:cNvPr id="7" name="TextBox 6"/>
-          <p:cNvSpPr txBox="1"/>
-          <p:nvPr/>
-        </p:nvSpPr>
-        <p:spPr>
-          <a:xfrm>
-            <a:off x="7467447" y="3383280"/>
-            <a:ext cx="640080" cy="548640"/>
-          </a:xfrm>
-          <a:prstGeom prst="rect">
-            <a:avLst/>
-          </a:prstGeom>
-          <a:noFill/>
-        </p:spPr>
-        <p:txBody>
-          <a:bodyPr wrap="square" anchor="ctr">
-            <a:spAutoFit/>
-          </a:bodyPr>
-          <a:lstStyle/>
-          <a:p>
-            <a:pPr algn="ctr"/>
-            <a:r>
-              <a:rPr sz="2800" b="1">
+          <a:bodyPr rtlCol="0" anchor="ctr" tIns="76200" bIns="76200" lIns="203200" rIns="177800" wrap="square"/>
+          <a:lstStyle/>
+          <a:p>
+            <a:pPr algn="ctr"/>
+            <a:r>
+              <a:rPr sz="2000" b="1">
                 <a:solidFill>
                   <a:srgbClr val="5B5BD6"/>
                 </a:solidFill>
                 <a:latin typeface="Apple SD Gothic Neo"/>
               </a:rPr>
-              <a:t>→</a:t>
-            </a:r>
-          </a:p>
-        </p:txBody>
-      </p:sp>
-      <p:sp>
-        <p:nvSpPr>
-          <p:cNvPr id="8" name="Rounded Rectangle 7"/>
+              <a:t>프론트 Claude</a:t>
+            </a:r>
+          </a:p>
+          <a:p>
+            <a:pPr algn="ctr"/>
+            <a:r>
+              <a:rPr sz="1600" b="0">
+                <a:solidFill>
+                  <a:srgbClr val="6B7280"/>
+                </a:solidFill>
+                <a:latin typeface="Apple SD Gothic Neo"/>
+              </a:rPr>
+              <a:t>React 화면</a:t>
+            </a:r>
+          </a:p>
+        </p:txBody>
+      </p:sp>
+      <p:sp>
+        <p:nvSpPr>
+          <p:cNvPr id="5" name="Rounded Rectangle 4"/>
           <p:cNvSpPr/>
           <p:nvPr/>
         </p:nvSpPr>
         <p:spPr>
           <a:xfrm>
-            <a:off x="8061807" y="2743200"/>
-            <a:ext cx="2834640" cy="1737360"/>
+            <a:off x="6903720" y="2697480"/>
+            <a:ext cx="4023360" cy="1371600"/>
           </a:xfrm>
           <a:prstGeom prst="roundRect">
             <a:avLst>
@@ -14367,7 +15037,7 @@
             </a:avLst>
           </a:prstGeom>
           <a:solidFill>
-            <a:srgbClr val="2F6FD8"/>
+            <a:srgbClr val="ECEBFB"/>
           </a:solidFill>
           <a:ln>
             <a:noFill/>
@@ -14389,68 +15059,79 @@
           </a:fontRef>
         </p:style>
         <p:txBody>
-          <a:bodyPr rtlCol="0" anchor="ctr" tIns="76200" bIns="76200" lIns="127000" rIns="127000" wrap="square"/>
-          <a:lstStyle/>
-          <a:p>
-            <a:pPr algn="ctr"/>
-            <a:r>
-              <a:rPr sz="2200" b="1">
-                <a:solidFill>
-                  <a:srgbClr val="FFFFFF"/>
-                </a:solidFill>
-                <a:latin typeface="Menlo"/>
-              </a:rPr>
-              <a:t>REFACTOR</a:t>
-            </a:r>
-          </a:p>
-          <a:p>
-            <a:pPr algn="ctr"/>
-            <a:r>
-              <a:rPr sz="600" b="0">
-                <a:solidFill>
-                  <a:srgbClr val="FFFFFF"/>
-                </a:solidFill>
-                <a:latin typeface="Apple SD Gothic Neo"/>
-              </a:rPr>
-              <a:t/>
-            </a:r>
-          </a:p>
-          <a:p>
-            <a:pPr algn="ctr"/>
-            <a:r>
-              <a:rPr sz="1700" b="1">
-                <a:solidFill>
-                  <a:srgbClr val="FFFFFF"/>
-                </a:solidFill>
-                <a:latin typeface="Apple SD Gothic Neo"/>
-              </a:rPr>
-              <a:t>녹색 유지한 채</a:t>
-            </a:r>
-          </a:p>
-          <a:p>
-            <a:pPr algn="ctr"/>
-            <a:r>
-              <a:rPr sz="1700" b="1">
-                <a:solidFill>
-                  <a:srgbClr val="FFFFFF"/>
-                </a:solidFill>
-                <a:latin typeface="Apple SD Gothic Neo"/>
-              </a:rPr>
-              <a:t>정리·중복 제거</a:t>
-            </a:r>
-          </a:p>
-        </p:txBody>
-      </p:sp>
-      <p:sp>
-        <p:nvSpPr>
-          <p:cNvPr id="9" name="TextBox 8"/>
+          <a:bodyPr rtlCol="0" anchor="ctr" tIns="76200" bIns="76200" lIns="203200" rIns="177800" wrap="square"/>
+          <a:lstStyle/>
+          <a:p>
+            <a:pPr algn="ctr"/>
+            <a:r>
+              <a:rPr sz="2000" b="1">
+                <a:solidFill>
+                  <a:srgbClr val="5B5BD6"/>
+                </a:solidFill>
+                <a:latin typeface="Apple SD Gothic Neo"/>
+              </a:rPr>
+              <a:t>백엔드 Claude</a:t>
+            </a:r>
+          </a:p>
+          <a:p>
+            <a:pPr algn="ctr"/>
+            <a:r>
+              <a:rPr sz="1600" b="0">
+                <a:solidFill>
+                  <a:srgbClr val="6B7280"/>
+                </a:solidFill>
+                <a:latin typeface="Apple SD Gothic Neo"/>
+              </a:rPr>
+              <a:t>Spring API</a:t>
+            </a:r>
+          </a:p>
+        </p:txBody>
+      </p:sp>
+      <p:sp>
+        <p:nvSpPr>
+          <p:cNvPr id="6" name="TextBox 5"/>
           <p:cNvSpPr txBox="1"/>
           <p:nvPr/>
         </p:nvSpPr>
         <p:spPr>
           <a:xfrm>
-            <a:off x="822960" y="5029200"/>
-            <a:ext cx="10607040" cy="822960"/>
+            <a:off x="5257800" y="2606040"/>
+            <a:ext cx="1691640" cy="731520"/>
+          </a:xfrm>
+          <a:prstGeom prst="rect">
+            <a:avLst/>
+          </a:prstGeom>
+          <a:noFill/>
+        </p:spPr>
+        <p:txBody>
+          <a:bodyPr wrap="square" anchor="ctr">
+            <a:spAutoFit/>
+          </a:bodyPr>
+          <a:lstStyle/>
+          <a:p>
+            <a:pPr algn="ctr"/>
+            <a:r>
+              <a:rPr sz="3000" b="1">
+                <a:solidFill>
+                  <a:srgbClr val="5B5BD6"/>
+                </a:solidFill>
+                <a:latin typeface="Apple SD Gothic Neo"/>
+              </a:rPr>
+              <a:t>⇄</a:t>
+            </a:r>
+          </a:p>
+        </p:txBody>
+      </p:sp>
+      <p:sp>
+        <p:nvSpPr>
+          <p:cNvPr id="7" name="TextBox 6"/>
+          <p:cNvSpPr txBox="1"/>
+          <p:nvPr/>
+        </p:nvSpPr>
+        <p:spPr>
+          <a:xfrm>
+            <a:off x="1280160" y="3246120"/>
+            <a:ext cx="9601200" cy="457200"/>
           </a:xfrm>
           <a:prstGeom prst="rect">
             <a:avLst/>
@@ -14465,13 +15146,395 @@
           <a:p>
             <a:pPr algn="ctr"/>
             <a:r>
+              <a:rPr sz="1400" b="1" spc="40">
+                <a:solidFill>
+                  <a:srgbClr val="6B7280"/>
+                </a:solidFill>
+                <a:latin typeface="Menlo"/>
+              </a:rPr>
+              <a:t>cmux</a:t>
+            </a:r>
+          </a:p>
+        </p:txBody>
+      </p:sp>
+      <p:sp>
+        <p:nvSpPr>
+          <p:cNvPr id="8" name="TextBox 7"/>
+          <p:cNvSpPr txBox="1"/>
+          <p:nvPr/>
+        </p:nvSpPr>
+        <p:spPr>
+          <a:xfrm>
+            <a:off x="822960" y="4572000"/>
+            <a:ext cx="10607040" cy="1097280"/>
+          </a:xfrm>
+          <a:prstGeom prst="rect">
+            <a:avLst/>
+          </a:prstGeom>
+          <a:noFill/>
+        </p:spPr>
+        <p:txBody>
+          <a:bodyPr wrap="square" anchor="ctr">
+            <a:spAutoFit/>
+          </a:bodyPr>
+          <a:lstStyle/>
+          <a:p>
+            <a:pPr algn="ctr"/>
+            <a:r>
               <a:rPr sz="2400" b="1" spc="-40">
                 <a:solidFill>
                   <a:srgbClr val="1A1A1A"/>
                 </a:solidFill>
                 <a:latin typeface="Apple SD Gothic Neo"/>
               </a:rPr>
-              <a:t>AI가 짠 코드도 이 사이클을 강제했다.</a:t>
+              <a:t>두 Claude 세션을 cmux로 메시지 교환시켜</a:t>
+            </a:r>
+          </a:p>
+          <a:p>
+            <a:pPr algn="ctr"/>
+            <a:r>
+              <a:rPr sz="2400" b="1" spc="-40">
+                <a:solidFill>
+                  <a:srgbClr val="1A1A1A"/>
+                </a:solidFill>
+                <a:latin typeface="Apple SD Gothic Neo"/>
+              </a:rPr>
+              <a:t>한쪽이 API를 바꾸면 다른 쪽이 받아서 맞췄다.</a:t>
+            </a:r>
+          </a:p>
+        </p:txBody>
+      </p:sp>
+    </p:spTree>
+  </p:cSld>
+  <p:clrMapOvr>
+    <a:masterClrMapping/>
+  </p:clrMapOvr>
+</p:sld>
+</file>
+
+<file path=ppt/slides/slide45.xml><?xml version="1.0" encoding="utf-8"?>
+<p:sld xmlns:a="http://schemas.openxmlformats.org/drawingml/2006/main" xmlns:p="http://schemas.openxmlformats.org/presentationml/2006/main" xmlns:r="http://schemas.openxmlformats.org/officeDocument/2006/relationships">
+  <p:cSld>
+    <p:bg>
+      <p:bgPr>
+        <a:solidFill>
+          <a:srgbClr val="FFFFFF"/>
+        </a:solidFill>
+        <a:effectLst/>
+      </p:bgPr>
+    </p:bg>
+    <p:spTree>
+      <p:nvGrpSpPr>
+        <p:cNvPr id="1" name=""/>
+        <p:cNvGrpSpPr/>
+        <p:nvPr/>
+      </p:nvGrpSpPr>
+      <p:grpSpPr/>
+      <p:sp>
+        <p:nvSpPr>
+          <p:cNvPr id="2" name="TextBox 1"/>
+          <p:cNvSpPr txBox="1"/>
+          <p:nvPr/>
+        </p:nvSpPr>
+        <p:spPr>
+          <a:xfrm>
+            <a:off x="749808" y="566928"/>
+            <a:ext cx="10881360" cy="1371600"/>
+          </a:xfrm>
+          <a:prstGeom prst="rect">
+            <a:avLst/>
+          </a:prstGeom>
+          <a:noFill/>
+        </p:spPr>
+        <p:txBody>
+          <a:bodyPr wrap="square" anchor="t">
+            <a:spAutoFit/>
+          </a:bodyPr>
+          <a:lstStyle/>
+          <a:p>
+            <a:pPr algn="l"/>
+            <a:r>
+              <a:rPr sz="4600" b="1" spc="-100">
+                <a:solidFill>
+                  <a:srgbClr val="1A1A1A"/>
+                </a:solidFill>
+                <a:latin typeface="Apple SD Gothic Neo"/>
+              </a:rPr>
+              <a:t>왜 Codex로 교차 리뷰했나</a:t>
+            </a:r>
+          </a:p>
+        </p:txBody>
+      </p:sp>
+      <p:sp>
+        <p:nvSpPr>
+          <p:cNvPr id="3" name="Rectangle 2"/>
+          <p:cNvSpPr/>
+          <p:nvPr/>
+        </p:nvSpPr>
+        <p:spPr>
+          <a:xfrm>
+            <a:off x="822960" y="1554480"/>
+            <a:ext cx="868680" cy="82296"/>
+          </a:xfrm>
+          <a:prstGeom prst="rect">
+            <a:avLst/>
+          </a:prstGeom>
+          <a:solidFill>
+            <a:srgbClr val="5B5BD6"/>
+          </a:solidFill>
+          <a:ln>
+            <a:noFill/>
+          </a:ln>
+          <a:effectLst/>
+        </p:spPr>
+        <p:style>
+          <a:lnRef idx="1">
+            <a:schemeClr val="accent1"/>
+          </a:lnRef>
+          <a:fillRef idx="3">
+            <a:schemeClr val="accent1"/>
+          </a:fillRef>
+          <a:effectRef idx="2">
+            <a:schemeClr val="accent1"/>
+          </a:effectRef>
+          <a:fontRef idx="minor">
+            <a:schemeClr val="lt1"/>
+          </a:fontRef>
+        </p:style>
+        <p:txBody>
+          <a:bodyPr rtlCol="0" anchor="ctr"/>
+          <a:lstStyle/>
+          <a:p>
+            <a:pPr algn="ctr"/>
+          </a:p>
+        </p:txBody>
+      </p:sp>
+      <p:sp>
+        <p:nvSpPr>
+          <p:cNvPr id="4" name="Rounded Rectangle 3"/>
+          <p:cNvSpPr/>
+          <p:nvPr/>
+        </p:nvSpPr>
+        <p:spPr>
+          <a:xfrm>
+            <a:off x="777240" y="2743200"/>
+            <a:ext cx="4800600" cy="1920240"/>
+          </a:xfrm>
+          <a:prstGeom prst="roundRect">
+            <a:avLst>
+              <a:gd name="adj" fmla="val 12000"/>
+            </a:avLst>
+          </a:prstGeom>
+          <a:solidFill>
+            <a:srgbClr val="F4F4F6"/>
+          </a:solidFill>
+          <a:ln w="16510">
+            <a:solidFill>
+              <a:srgbClr val="E6E6E6"/>
+            </a:solidFill>
+          </a:ln>
+          <a:effectLst/>
+        </p:spPr>
+        <p:style>
+          <a:lnRef idx="1">
+            <a:schemeClr val="accent1"/>
+          </a:lnRef>
+          <a:fillRef idx="3">
+            <a:schemeClr val="accent1"/>
+          </a:fillRef>
+          <a:effectRef idx="2">
+            <a:schemeClr val="accent1"/>
+          </a:effectRef>
+          <a:fontRef idx="minor">
+            <a:schemeClr val="lt1"/>
+          </a:fontRef>
+        </p:style>
+        <p:txBody>
+          <a:bodyPr rtlCol="0" anchor="ctr" tIns="76200" bIns="76200" lIns="203200" rIns="177800" wrap="square"/>
+          <a:lstStyle/>
+          <a:p>
+            <a:pPr algn="l"/>
+            <a:r>
+              <a:rPr sz="1800" b="1">
+                <a:solidFill>
+                  <a:srgbClr val="6B7280"/>
+                </a:solidFill>
+                <a:latin typeface="Apple SD Gothic Neo"/>
+              </a:rPr>
+              <a:t>같은 모델끼리 리뷰하면</a:t>
+            </a:r>
+          </a:p>
+          <a:p>
+            <a:pPr algn="l"/>
+            <a:r>
+              <a:rPr sz="600" b="0">
+                <a:solidFill>
+                  <a:srgbClr val="6B7280"/>
+                </a:solidFill>
+                <a:latin typeface="Apple SD Gothic Neo"/>
+              </a:rPr>
+              <a:t/>
+            </a:r>
+          </a:p>
+          <a:p>
+            <a:pPr algn="l"/>
+            <a:r>
+              <a:rPr sz="2100" b="1">
+                <a:solidFill>
+                  <a:srgbClr val="1A1A1A"/>
+                </a:solidFill>
+                <a:latin typeface="Apple SD Gothic Neo"/>
+              </a:rPr>
+              <a:t>같은 맹점을 똑같이 놓친다</a:t>
+            </a:r>
+          </a:p>
+        </p:txBody>
+      </p:sp>
+      <p:sp>
+        <p:nvSpPr>
+          <p:cNvPr id="5" name="TextBox 4"/>
+          <p:cNvSpPr txBox="1"/>
+          <p:nvPr/>
+        </p:nvSpPr>
+        <p:spPr>
+          <a:xfrm>
+            <a:off x="5733288" y="3383280"/>
+            <a:ext cx="731520" cy="640080"/>
+          </a:xfrm>
+          <a:prstGeom prst="rect">
+            <a:avLst/>
+          </a:prstGeom>
+          <a:noFill/>
+        </p:spPr>
+        <p:txBody>
+          <a:bodyPr wrap="square" anchor="ctr">
+            <a:spAutoFit/>
+          </a:bodyPr>
+          <a:lstStyle/>
+          <a:p>
+            <a:pPr algn="ctr"/>
+            <a:r>
+              <a:rPr sz="3400" b="1">
+                <a:solidFill>
+                  <a:srgbClr val="5B5BD6"/>
+                </a:solidFill>
+                <a:latin typeface="Apple SD Gothic Neo"/>
+              </a:rPr>
+              <a:t>→</a:t>
+            </a:r>
+          </a:p>
+        </p:txBody>
+      </p:sp>
+      <p:sp>
+        <p:nvSpPr>
+          <p:cNvPr id="6" name="Rounded Rectangle 5"/>
+          <p:cNvSpPr/>
+          <p:nvPr/>
+        </p:nvSpPr>
+        <p:spPr>
+          <a:xfrm>
+            <a:off x="6629400" y="2743200"/>
+            <a:ext cx="4800600" cy="1920240"/>
+          </a:xfrm>
+          <a:prstGeom prst="roundRect">
+            <a:avLst>
+              <a:gd name="adj" fmla="val 12000"/>
+            </a:avLst>
+          </a:prstGeom>
+          <a:solidFill>
+            <a:srgbClr val="ECEBFB"/>
+          </a:solidFill>
+          <a:ln>
+            <a:noFill/>
+          </a:ln>
+          <a:effectLst/>
+        </p:spPr>
+        <p:style>
+          <a:lnRef idx="1">
+            <a:schemeClr val="accent1"/>
+          </a:lnRef>
+          <a:fillRef idx="3">
+            <a:schemeClr val="accent1"/>
+          </a:fillRef>
+          <a:effectRef idx="2">
+            <a:schemeClr val="accent1"/>
+          </a:effectRef>
+          <a:fontRef idx="minor">
+            <a:schemeClr val="lt1"/>
+          </a:fontRef>
+        </p:style>
+        <p:txBody>
+          <a:bodyPr rtlCol="0" anchor="ctr" tIns="76200" bIns="76200" lIns="203200" rIns="177800" wrap="square"/>
+          <a:lstStyle/>
+          <a:p>
+            <a:pPr algn="l"/>
+            <a:r>
+              <a:rPr sz="1800" b="1">
+                <a:solidFill>
+                  <a:srgbClr val="5B5BD6"/>
+                </a:solidFill>
+                <a:latin typeface="Apple SD Gothic Neo"/>
+              </a:rPr>
+              <a:t>그래서</a:t>
+            </a:r>
+          </a:p>
+          <a:p>
+            <a:pPr algn="l"/>
+            <a:r>
+              <a:rPr sz="600" b="0">
+                <a:solidFill>
+                  <a:srgbClr val="6B7280"/>
+                </a:solidFill>
+                <a:latin typeface="Apple SD Gothic Neo"/>
+              </a:rPr>
+              <a:t/>
+            </a:r>
+          </a:p>
+          <a:p>
+            <a:pPr algn="l"/>
+            <a:r>
+              <a:rPr sz="2100" b="1">
+                <a:solidFill>
+                  <a:srgbClr val="1A1A1A"/>
+                </a:solidFill>
+                <a:latin typeface="Apple SD Gothic Neo"/>
+              </a:rPr>
+              <a:t>다른 모델(Codex)로 교차 검증</a:t>
+            </a:r>
+          </a:p>
+        </p:txBody>
+      </p:sp>
+      <p:sp>
+        <p:nvSpPr>
+          <p:cNvPr id="7" name="TextBox 6"/>
+          <p:cNvSpPr txBox="1"/>
+          <p:nvPr/>
+        </p:nvSpPr>
+        <p:spPr>
+          <a:xfrm>
+            <a:off x="822960" y="5120640"/>
+            <a:ext cx="10607040" cy="731520"/>
+          </a:xfrm>
+          <a:prstGeom prst="rect">
+            <a:avLst/>
+          </a:prstGeom>
+          <a:noFill/>
+        </p:spPr>
+        <p:txBody>
+          <a:bodyPr wrap="square" anchor="t">
+            <a:spAutoFit/>
+          </a:bodyPr>
+          <a:lstStyle/>
+          <a:p>
+            <a:pPr algn="ctr"/>
+            <a:r>
+              <a:rPr sz="2200" b="0" spc="-30">
+                <a:solidFill>
+                  <a:srgbClr val="6B7280"/>
+                </a:solidFill>
+                <a:latin typeface="Apple SD Gothic Neo"/>
+              </a:rPr>
+              <a:t>마지막에 Codex로 한 번 더 봐서 Claude가 놓친 것을 잡았다.</a:t>
             </a:r>
           </a:p>
         </p:txBody>

--- a/docs/presentation/보험발표-figma.pptx
+++ b/docs/presentation/보험발표-figma.pptx
@@ -46,6 +46,7 @@
     <p:sldId id="292" r:id="rId42"/>
     <p:sldId id="293" r:id="rId43"/>
     <p:sldId id="302" r:id="rId50"/>
+    <p:sldId id="303" r:id="rId51"/>
     <p:sldId id="294" r:id="rId44"/>
     <p:sldId id="295" r:id="rId45"/>
     <p:sldId id="296" r:id="rId46"/>
@@ -9739,7 +9740,7 @@
                 </a:solidFill>
                 <a:latin typeface="Apple SD Gothic Neo"/>
               </a:rPr>
-              <a:t>개발 파이프라인</a:t>
+              <a:t>내가 쓴 AI 도구</a:t>
             </a:r>
           </a:p>
         </p:txBody>
@@ -9796,8 +9797,8 @@
         </p:nvSpPr>
         <p:spPr>
           <a:xfrm>
-            <a:off x="824331" y="2834640"/>
-            <a:ext cx="1874519" cy="1554480"/>
+            <a:off x="822960" y="2103120"/>
+            <a:ext cx="10561320" cy="868680"/>
           </a:xfrm>
           <a:prstGeom prst="roundRect">
             <a:avLst>
@@ -9829,207 +9830,41 @@
           </a:fontRef>
         </p:style>
         <p:txBody>
-          <a:bodyPr rtlCol="0" anchor="ctr" tIns="76200" bIns="76200" lIns="127000" rIns="127000" wrap="square"/>
-          <a:lstStyle/>
-          <a:p>
-            <a:pPr algn="ctr"/>
-            <a:r>
-              <a:rPr sz="2200" b="1">
+          <a:bodyPr rtlCol="0" anchor="ctr" tIns="76200" bIns="76200" lIns="203200" rIns="177800" wrap="none"/>
+          <a:lstStyle/>
+          <a:p>
+            <a:pPr algn="l"/>
+            <a:r>
+              <a:rPr sz="1900" b="1">
+                <a:solidFill>
+                  <a:srgbClr val="5B5BD6"/>
+                </a:solidFill>
+                <a:latin typeface="Menlo"/>
+              </a:rPr>
+              <a:t>Claude Code     </a:t>
+            </a:r>
+            <a:r>
+              <a:rPr sz="1800" b="0">
                 <a:solidFill>
                   <a:srgbClr val="1A1A1A"/>
                 </a:solidFill>
                 <a:latin typeface="Apple SD Gothic Neo"/>
               </a:rPr>
-              <a:t>발산</a:t>
-            </a:r>
-          </a:p>
-          <a:p>
-            <a:pPr algn="ctr"/>
-            <a:r>
-              <a:rPr sz="600" b="0">
-                <a:solidFill>
-                  <a:srgbClr val="6B7280"/>
-                </a:solidFill>
-                <a:latin typeface="Apple SD Gothic Neo"/>
-              </a:rPr>
-              <a:t/>
-            </a:r>
-          </a:p>
-          <a:p>
-            <a:pPr algn="ctr"/>
-            <a:r>
-              <a:rPr sz="1200" b="0">
-                <a:solidFill>
-                  <a:srgbClr val="6B7280"/>
-                </a:solidFill>
-                <a:latin typeface="Menlo"/>
-              </a:rPr>
-              <a:t>brainstorming</a:t>
-            </a:r>
-          </a:p>
-        </p:txBody>
-      </p:sp>
-      <p:sp>
-        <p:nvSpPr>
-          <p:cNvPr id="5" name="TextBox 4"/>
-          <p:cNvSpPr txBox="1"/>
-          <p:nvPr/>
-        </p:nvSpPr>
-        <p:spPr>
-          <a:xfrm>
-            <a:off x="2525115" y="3337560"/>
-            <a:ext cx="640080" cy="548640"/>
-          </a:xfrm>
-          <a:prstGeom prst="rect">
-            <a:avLst/>
-          </a:prstGeom>
-          <a:noFill/>
-        </p:spPr>
-        <p:txBody>
-          <a:bodyPr wrap="square" anchor="ctr">
-            <a:spAutoFit/>
-          </a:bodyPr>
-          <a:lstStyle/>
-          <a:p>
-            <a:pPr algn="ctr"/>
-            <a:r>
-              <a:rPr sz="2600" b="1">
-                <a:solidFill>
-                  <a:srgbClr val="6B7280"/>
-                </a:solidFill>
-                <a:latin typeface="Apple SD Gothic Neo"/>
-              </a:rPr>
-              <a:t>→</a:t>
-            </a:r>
-          </a:p>
-        </p:txBody>
-      </p:sp>
-      <p:sp>
-        <p:nvSpPr>
-          <p:cNvPr id="6" name="Rounded Rectangle 5"/>
+              <a:t>설계·조율은 Opus, 구현은 Sonnet 서브에이전트</a:t>
+            </a:r>
+          </a:p>
+        </p:txBody>
+      </p:sp>
+      <p:sp>
+        <p:nvSpPr>
+          <p:cNvPr id="5" name="Rounded Rectangle 4"/>
           <p:cNvSpPr/>
           <p:nvPr/>
         </p:nvSpPr>
         <p:spPr>
           <a:xfrm>
-            <a:off x="2991459" y="2834640"/>
-            <a:ext cx="1874519" cy="1554480"/>
-          </a:xfrm>
-          <a:prstGeom prst="roundRect">
-            <a:avLst>
-              <a:gd name="adj" fmla="val 12000"/>
-            </a:avLst>
-          </a:prstGeom>
-          <a:solidFill>
-            <a:srgbClr val="ECEBFB"/>
-          </a:solidFill>
-          <a:ln w="16510">
-            <a:solidFill>
-              <a:srgbClr val="E6E6E6"/>
-            </a:solidFill>
-          </a:ln>
-          <a:effectLst/>
-        </p:spPr>
-        <p:style>
-          <a:lnRef idx="1">
-            <a:schemeClr val="accent1"/>
-          </a:lnRef>
-          <a:fillRef idx="3">
-            <a:schemeClr val="accent1"/>
-          </a:fillRef>
-          <a:effectRef idx="2">
-            <a:schemeClr val="accent1"/>
-          </a:effectRef>
-          <a:fontRef idx="minor">
-            <a:schemeClr val="lt1"/>
-          </a:fontRef>
-        </p:style>
-        <p:txBody>
-          <a:bodyPr rtlCol="0" anchor="ctr" tIns="76200" bIns="76200" lIns="127000" rIns="127000" wrap="square"/>
-          <a:lstStyle/>
-          <a:p>
-            <a:pPr algn="ctr"/>
-            <a:r>
-              <a:rPr sz="2200" b="1">
-                <a:solidFill>
-                  <a:srgbClr val="1A1A1A"/>
-                </a:solidFill>
-                <a:latin typeface="Apple SD Gothic Neo"/>
-              </a:rPr>
-              <a:t>취조</a:t>
-            </a:r>
-          </a:p>
-          <a:p>
-            <a:pPr algn="ctr"/>
-            <a:r>
-              <a:rPr sz="600" b="0">
-                <a:solidFill>
-                  <a:srgbClr val="6B7280"/>
-                </a:solidFill>
-                <a:latin typeface="Apple SD Gothic Neo"/>
-              </a:rPr>
-              <a:t/>
-            </a:r>
-          </a:p>
-          <a:p>
-            <a:pPr algn="ctr"/>
-            <a:r>
-              <a:rPr sz="1200" b="0">
-                <a:solidFill>
-                  <a:srgbClr val="6B7280"/>
-                </a:solidFill>
-                <a:latin typeface="Menlo"/>
-              </a:rPr>
-              <a:t>grill-with-docs</a:t>
-            </a:r>
-          </a:p>
-        </p:txBody>
-      </p:sp>
-      <p:sp>
-        <p:nvSpPr>
-          <p:cNvPr id="7" name="TextBox 6"/>
-          <p:cNvSpPr txBox="1"/>
-          <p:nvPr/>
-        </p:nvSpPr>
-        <p:spPr>
-          <a:xfrm>
-            <a:off x="4692243" y="3337560"/>
-            <a:ext cx="640080" cy="548640"/>
-          </a:xfrm>
-          <a:prstGeom prst="rect">
-            <a:avLst/>
-          </a:prstGeom>
-          <a:noFill/>
-        </p:spPr>
-        <p:txBody>
-          <a:bodyPr wrap="square" anchor="ctr">
-            <a:spAutoFit/>
-          </a:bodyPr>
-          <a:lstStyle/>
-          <a:p>
-            <a:pPr algn="ctr"/>
-            <a:r>
-              <a:rPr sz="2600" b="1">
-                <a:solidFill>
-                  <a:srgbClr val="6B7280"/>
-                </a:solidFill>
-                <a:latin typeface="Apple SD Gothic Neo"/>
-              </a:rPr>
-              <a:t>→</a:t>
-            </a:r>
-          </a:p>
-        </p:txBody>
-      </p:sp>
-      <p:sp>
-        <p:nvSpPr>
-          <p:cNvPr id="8" name="Rounded Rectangle 7"/>
-          <p:cNvSpPr/>
-          <p:nvPr/>
-        </p:nvSpPr>
-        <p:spPr>
-          <a:xfrm>
-            <a:off x="5158587" y="2834640"/>
-            <a:ext cx="1874519" cy="1554480"/>
+            <a:off x="822960" y="3127248"/>
+            <a:ext cx="10561320" cy="868680"/>
           </a:xfrm>
           <a:prstGeom prst="roundRect">
             <a:avLst>
@@ -10061,207 +9896,41 @@
           </a:fontRef>
         </p:style>
         <p:txBody>
-          <a:bodyPr rtlCol="0" anchor="ctr" tIns="76200" bIns="76200" lIns="127000" rIns="127000" wrap="square"/>
-          <a:lstStyle/>
-          <a:p>
-            <a:pPr algn="ctr"/>
-            <a:r>
-              <a:rPr sz="2200" b="1">
+          <a:bodyPr rtlCol="0" anchor="ctr" tIns="76200" bIns="76200" lIns="203200" rIns="177800" wrap="none"/>
+          <a:lstStyle/>
+          <a:p>
+            <a:pPr algn="l"/>
+            <a:r>
+              <a:rPr sz="1900" b="1">
+                <a:solidFill>
+                  <a:srgbClr val="5B5BD6"/>
+                </a:solidFill>
+                <a:latin typeface="Menlo"/>
+              </a:rPr>
+              <a:t>Superpowers 스킬     </a:t>
+            </a:r>
+            <a:r>
+              <a:rPr sz="1800" b="0">
                 <a:solidFill>
                   <a:srgbClr val="1A1A1A"/>
                 </a:solidFill>
                 <a:latin typeface="Apple SD Gothic Neo"/>
               </a:rPr>
-              <a:t>계획</a:t>
-            </a:r>
-          </a:p>
-          <a:p>
-            <a:pPr algn="ctr"/>
-            <a:r>
-              <a:rPr sz="600" b="0">
-                <a:solidFill>
-                  <a:srgbClr val="6B7280"/>
-                </a:solidFill>
-                <a:latin typeface="Apple SD Gothic Neo"/>
-              </a:rPr>
-              <a:t/>
-            </a:r>
-          </a:p>
-          <a:p>
-            <a:pPr algn="ctr"/>
-            <a:r>
-              <a:rPr sz="1200" b="0">
-                <a:solidFill>
-                  <a:srgbClr val="6B7280"/>
-                </a:solidFill>
-                <a:latin typeface="Menlo"/>
-              </a:rPr>
-              <a:t>writing-plans</a:t>
-            </a:r>
-          </a:p>
-        </p:txBody>
-      </p:sp>
-      <p:sp>
-        <p:nvSpPr>
-          <p:cNvPr id="9" name="TextBox 8"/>
-          <p:cNvSpPr txBox="1"/>
-          <p:nvPr/>
-        </p:nvSpPr>
-        <p:spPr>
-          <a:xfrm>
-            <a:off x="6859371" y="3337560"/>
-            <a:ext cx="640080" cy="548640"/>
-          </a:xfrm>
-          <a:prstGeom prst="rect">
-            <a:avLst/>
-          </a:prstGeom>
-          <a:noFill/>
-        </p:spPr>
-        <p:txBody>
-          <a:bodyPr wrap="square" anchor="ctr">
-            <a:spAutoFit/>
-          </a:bodyPr>
-          <a:lstStyle/>
-          <a:p>
-            <a:pPr algn="ctr"/>
-            <a:r>
-              <a:rPr sz="2600" b="1">
-                <a:solidFill>
-                  <a:srgbClr val="6B7280"/>
-                </a:solidFill>
-                <a:latin typeface="Apple SD Gothic Neo"/>
-              </a:rPr>
-              <a:t>→</a:t>
-            </a:r>
-          </a:p>
-        </p:txBody>
-      </p:sp>
-      <p:sp>
-        <p:nvSpPr>
-          <p:cNvPr id="10" name="Rounded Rectangle 9"/>
+              <a:t>brainstorming · grill-with-docs · writing/executing-plans</a:t>
+            </a:r>
+          </a:p>
+        </p:txBody>
+      </p:sp>
+      <p:sp>
+        <p:nvSpPr>
+          <p:cNvPr id="6" name="Rounded Rectangle 5"/>
           <p:cNvSpPr/>
           <p:nvPr/>
         </p:nvSpPr>
         <p:spPr>
           <a:xfrm>
-            <a:off x="7325715" y="2834640"/>
-            <a:ext cx="1874519" cy="1554480"/>
-          </a:xfrm>
-          <a:prstGeom prst="roundRect">
-            <a:avLst>
-              <a:gd name="adj" fmla="val 12000"/>
-            </a:avLst>
-          </a:prstGeom>
-          <a:solidFill>
-            <a:srgbClr val="ECEBFB"/>
-          </a:solidFill>
-          <a:ln w="16510">
-            <a:solidFill>
-              <a:srgbClr val="E6E6E6"/>
-            </a:solidFill>
-          </a:ln>
-          <a:effectLst/>
-        </p:spPr>
-        <p:style>
-          <a:lnRef idx="1">
-            <a:schemeClr val="accent1"/>
-          </a:lnRef>
-          <a:fillRef idx="3">
-            <a:schemeClr val="accent1"/>
-          </a:fillRef>
-          <a:effectRef idx="2">
-            <a:schemeClr val="accent1"/>
-          </a:effectRef>
-          <a:fontRef idx="minor">
-            <a:schemeClr val="lt1"/>
-          </a:fontRef>
-        </p:style>
-        <p:txBody>
-          <a:bodyPr rtlCol="0" anchor="ctr" tIns="76200" bIns="76200" lIns="127000" rIns="127000" wrap="square"/>
-          <a:lstStyle/>
-          <a:p>
-            <a:pPr algn="ctr"/>
-            <a:r>
-              <a:rPr sz="2200" b="1">
-                <a:solidFill>
-                  <a:srgbClr val="1A1A1A"/>
-                </a:solidFill>
-                <a:latin typeface="Apple SD Gothic Neo"/>
-              </a:rPr>
-              <a:t>구현</a:t>
-            </a:r>
-          </a:p>
-          <a:p>
-            <a:pPr algn="ctr"/>
-            <a:r>
-              <a:rPr sz="600" b="0">
-                <a:solidFill>
-                  <a:srgbClr val="6B7280"/>
-                </a:solidFill>
-                <a:latin typeface="Apple SD Gothic Neo"/>
-              </a:rPr>
-              <a:t/>
-            </a:r>
-          </a:p>
-          <a:p>
-            <a:pPr algn="ctr"/>
-            <a:r>
-              <a:rPr sz="1200" b="0">
-                <a:solidFill>
-                  <a:srgbClr val="6B7280"/>
-                </a:solidFill>
-                <a:latin typeface="Menlo"/>
-              </a:rPr>
-              <a:t>executing-plans</a:t>
-            </a:r>
-          </a:p>
-        </p:txBody>
-      </p:sp>
-      <p:sp>
-        <p:nvSpPr>
-          <p:cNvPr id="11" name="TextBox 10"/>
-          <p:cNvSpPr txBox="1"/>
-          <p:nvPr/>
-        </p:nvSpPr>
-        <p:spPr>
-          <a:xfrm>
-            <a:off x="9026499" y="3337560"/>
-            <a:ext cx="640080" cy="548640"/>
-          </a:xfrm>
-          <a:prstGeom prst="rect">
-            <a:avLst/>
-          </a:prstGeom>
-          <a:noFill/>
-        </p:spPr>
-        <p:txBody>
-          <a:bodyPr wrap="square" anchor="ctr">
-            <a:spAutoFit/>
-          </a:bodyPr>
-          <a:lstStyle/>
-          <a:p>
-            <a:pPr algn="ctr"/>
-            <a:r>
-              <a:rPr sz="2600" b="1">
-                <a:solidFill>
-                  <a:srgbClr val="6B7280"/>
-                </a:solidFill>
-                <a:latin typeface="Apple SD Gothic Neo"/>
-              </a:rPr>
-              <a:t>→</a:t>
-            </a:r>
-          </a:p>
-        </p:txBody>
-      </p:sp>
-      <p:sp>
-        <p:nvSpPr>
-          <p:cNvPr id="12" name="Rounded Rectangle 11"/>
-          <p:cNvSpPr/>
-          <p:nvPr/>
-        </p:nvSpPr>
-        <p:spPr>
-          <a:xfrm>
-            <a:off x="9492843" y="2834640"/>
-            <a:ext cx="1874519" cy="1554480"/>
+            <a:off x="822960" y="4151376"/>
+            <a:ext cx="10561320" cy="868680"/>
           </a:xfrm>
           <a:prstGeom prst="roundRect">
             <a:avLst>
@@ -10293,77 +9962,93 @@
           </a:fontRef>
         </p:style>
         <p:txBody>
-          <a:bodyPr rtlCol="0" anchor="ctr" tIns="76200" bIns="76200" lIns="127000" rIns="127000" wrap="square"/>
-          <a:lstStyle/>
-          <a:p>
-            <a:pPr algn="ctr"/>
-            <a:r>
-              <a:rPr sz="2200" b="1">
+          <a:bodyPr rtlCol="0" anchor="ctr" tIns="76200" bIns="76200" lIns="203200" rIns="177800" wrap="none"/>
+          <a:lstStyle/>
+          <a:p>
+            <a:pPr algn="l"/>
+            <a:r>
+              <a:rPr sz="1900" b="1">
+                <a:solidFill>
+                  <a:srgbClr val="5B5BD6"/>
+                </a:solidFill>
+                <a:latin typeface="Menlo"/>
+              </a:rPr>
+              <a:t>Codex     </a:t>
+            </a:r>
+            <a:r>
+              <a:rPr sz="1800" b="0">
                 <a:solidFill>
                   <a:srgbClr val="1A1A1A"/>
                 </a:solidFill>
                 <a:latin typeface="Apple SD Gothic Neo"/>
               </a:rPr>
-              <a:t>검증</a:t>
-            </a:r>
-          </a:p>
-          <a:p>
-            <a:pPr algn="ctr"/>
-            <a:r>
-              <a:rPr sz="600" b="0">
-                <a:solidFill>
-                  <a:srgbClr val="6B7280"/>
-                </a:solidFill>
-                <a:latin typeface="Apple SD Gothic Neo"/>
-              </a:rPr>
-              <a:t/>
-            </a:r>
-          </a:p>
-          <a:p>
-            <a:pPr algn="ctr"/>
-            <a:r>
-              <a:rPr sz="1200" b="0">
-                <a:solidFill>
-                  <a:srgbClr val="6B7280"/>
+              <a:t>다른 모델로 교차 리뷰</a:t>
+            </a:r>
+          </a:p>
+        </p:txBody>
+      </p:sp>
+      <p:sp>
+        <p:nvSpPr>
+          <p:cNvPr id="7" name="Rounded Rectangle 6"/>
+          <p:cNvSpPr/>
+          <p:nvPr/>
+        </p:nvSpPr>
+        <p:spPr>
+          <a:xfrm>
+            <a:off x="822960" y="5175504"/>
+            <a:ext cx="10561320" cy="868680"/>
+          </a:xfrm>
+          <a:prstGeom prst="roundRect">
+            <a:avLst>
+              <a:gd name="adj" fmla="val 12000"/>
+            </a:avLst>
+          </a:prstGeom>
+          <a:solidFill>
+            <a:srgbClr val="F4F4F6"/>
+          </a:solidFill>
+          <a:ln w="16510">
+            <a:solidFill>
+              <a:srgbClr val="E6E6E6"/>
+            </a:solidFill>
+          </a:ln>
+          <a:effectLst/>
+        </p:spPr>
+        <p:style>
+          <a:lnRef idx="1">
+            <a:schemeClr val="accent1"/>
+          </a:lnRef>
+          <a:fillRef idx="3">
+            <a:schemeClr val="accent1"/>
+          </a:fillRef>
+          <a:effectRef idx="2">
+            <a:schemeClr val="accent1"/>
+          </a:effectRef>
+          <a:fontRef idx="minor">
+            <a:schemeClr val="lt1"/>
+          </a:fontRef>
+        </p:style>
+        <p:txBody>
+          <a:bodyPr rtlCol="0" anchor="ctr" tIns="76200" bIns="76200" lIns="203200" rIns="177800" wrap="none"/>
+          <a:lstStyle/>
+          <a:p>
+            <a:pPr algn="l"/>
+            <a:r>
+              <a:rPr sz="1900" b="1">
+                <a:solidFill>
+                  <a:srgbClr val="5B5BD6"/>
                 </a:solidFill>
                 <a:latin typeface="Menlo"/>
               </a:rPr>
-              <a:t>Codex 리뷰</a:t>
-            </a:r>
-          </a:p>
-        </p:txBody>
-      </p:sp>
-      <p:sp>
-        <p:nvSpPr>
-          <p:cNvPr id="13" name="TextBox 12"/>
-          <p:cNvSpPr txBox="1"/>
-          <p:nvPr/>
-        </p:nvSpPr>
-        <p:spPr>
-          <a:xfrm>
-            <a:off x="822960" y="5029200"/>
-            <a:ext cx="10607040" cy="822960"/>
-          </a:xfrm>
-          <a:prstGeom prst="rect">
-            <a:avLst/>
-          </a:prstGeom>
-          <a:noFill/>
-        </p:spPr>
-        <p:txBody>
-          <a:bodyPr wrap="square" anchor="t">
-            <a:spAutoFit/>
-          </a:bodyPr>
-          <a:lstStyle/>
-          <a:p>
-            <a:pPr algn="ctr"/>
-            <a:r>
-              <a:rPr sz="2400" b="1" spc="-40">
+              <a:t>cmux     </a:t>
+            </a:r>
+            <a:r>
+              <a:rPr sz="1800" b="0">
                 <a:solidFill>
                   <a:srgbClr val="1A1A1A"/>
                 </a:solidFill>
                 <a:latin typeface="Apple SD Gothic Neo"/>
               </a:rPr>
-              <a:t>각 단계가 산출물을 남긴다 — 설계 · 용어 · 계획 · 코드 · 리뷰.</a:t>
+              <a:t>프론트·백엔드 Claude를 메시지로 연결</a:t>
             </a:r>
           </a:p>
         </p:txBody>
@@ -10402,8 +10087,8 @@
         </p:nvSpPr>
         <p:spPr>
           <a:xfrm>
-            <a:off x="749808" y="566928"/>
-            <a:ext cx="10881360" cy="1371600"/>
+            <a:off x="749808" y="457200"/>
+            <a:ext cx="10881360" cy="1188720"/>
           </a:xfrm>
           <a:prstGeom prst="rect">
             <a:avLst/>
@@ -10418,13 +10103,13 @@
           <a:p>
             <a:pPr algn="l"/>
             <a:r>
-              <a:rPr sz="4600" b="1" spc="-100">
+              <a:rPr sz="4400" b="1" spc="-100">
                 <a:solidFill>
                   <a:srgbClr val="1A1A1A"/>
                 </a:solidFill>
                 <a:latin typeface="Apple SD Gothic Neo"/>
               </a:rPr>
-              <a:t>테스트 주도 개발 (TDD)</a:t>
+              <a:t>cmux — 두 Claude를 붙이다</a:t>
             </a:r>
           </a:p>
         </p:txBody>
@@ -10437,7 +10122,7 @@
         </p:nvSpPr>
         <p:spPr>
           <a:xfrm>
-            <a:off x="822960" y="1554480"/>
+            <a:off x="822960" y="1417320"/>
             <a:ext cx="868680" cy="82296"/>
           </a:xfrm>
           <a:prstGeom prst="rect">
@@ -10473,16 +10158,40 @@
           </a:p>
         </p:txBody>
       </p:sp>
-      <p:sp>
-        <p:nvSpPr>
-          <p:cNvPr id="4" name="TextBox 3"/>
+      <p:pic>
+        <p:nvPicPr>
+          <p:cNvPr id="4" name="Picture 3" descr="p5_0.png"/>
+          <p:cNvPicPr>
+            <a:picLocks noChangeAspect="1"/>
+          </p:cNvPicPr>
+          <p:nvPr/>
+        </p:nvPicPr>
+        <p:blipFill>
+          <a:blip r:embed="rId2"/>
+          <a:stretch>
+            <a:fillRect/>
+          </a:stretch>
+        </p:blipFill>
+        <p:spPr>
+          <a:xfrm>
+            <a:off x="3338994" y="1691640"/>
+            <a:ext cx="5483530" cy="3566160"/>
+          </a:xfrm>
+          <a:prstGeom prst="rect">
+            <a:avLst/>
+          </a:prstGeom>
+        </p:spPr>
+      </p:pic>
+      <p:sp>
+        <p:nvSpPr>
+          <p:cNvPr id="5" name="TextBox 4"/>
           <p:cNvSpPr txBox="1"/>
           <p:nvPr/>
         </p:nvSpPr>
         <p:spPr>
           <a:xfrm>
-            <a:off x="822960" y="2651760"/>
-            <a:ext cx="10607040" cy="1554480"/>
+            <a:off x="822960" y="5486400"/>
+            <a:ext cx="10607040" cy="1005840"/>
           </a:xfrm>
           <a:prstGeom prst="rect">
             <a:avLst/>
@@ -10497,60 +10206,25 @@
           <a:p>
             <a:pPr algn="ctr"/>
             <a:r>
-              <a:rPr sz="3600" b="1" spc="-60">
+              <a:rPr sz="2300" b="1" spc="-40">
                 <a:solidFill>
                   <a:srgbClr val="1A1A1A"/>
                 </a:solidFill>
                 <a:latin typeface="Apple SD Gothic Neo"/>
               </a:rPr>
-              <a:t>실패하는 테스트 없이는</a:t>
-            </a:r>
-          </a:p>
-          <a:p>
-            <a:pPr algn="ctr"/>
-            <a:r>
-              <a:rPr sz="3600" b="1" spc="-60">
-                <a:solidFill>
-                  <a:srgbClr val="5B5BD6"/>
-                </a:solidFill>
-                <a:latin typeface="Apple SD Gothic Neo"/>
-              </a:rPr>
-              <a:t>프로덕션 코드를 쓰지 않는다.</a:t>
-            </a:r>
-          </a:p>
-        </p:txBody>
-      </p:sp>
-      <p:sp>
-        <p:nvSpPr>
-          <p:cNvPr id="5" name="TextBox 4"/>
-          <p:cNvSpPr txBox="1"/>
-          <p:nvPr/>
-        </p:nvSpPr>
-        <p:spPr>
-          <a:xfrm>
-            <a:off x="822960" y="4572000"/>
-            <a:ext cx="10607040" cy="914400"/>
-          </a:xfrm>
-          <a:prstGeom prst="rect">
-            <a:avLst/>
-          </a:prstGeom>
-          <a:noFill/>
-        </p:spPr>
-        <p:txBody>
-          <a:bodyPr wrap="square" anchor="t">
-            <a:spAutoFit/>
-          </a:bodyPr>
-          <a:lstStyle/>
-          <a:p>
-            <a:pPr algn="ctr"/>
-            <a:r>
-              <a:rPr sz="2200" b="0" spc="-30">
-                <a:solidFill>
-                  <a:srgbClr val="6B7280"/>
-                </a:solidFill>
-                <a:latin typeface="Apple SD Gothic Neo"/>
-              </a:rPr>
-              <a:t>AI가 쏟아내는 코드를 검증 없이 통과시키지 않는 장치.</a:t>
+              <a:t>프론트·백엔드 Claude를 한 화면에 띄우고, cmux로 서로</a:t>
+            </a:r>
+          </a:p>
+          <a:p>
+            <a:pPr algn="ctr"/>
+            <a:r>
+              <a:rPr sz="2300" b="1" spc="-40">
+                <a:solidFill>
+                  <a:srgbClr val="1A1A1A"/>
+                </a:solidFill>
+                <a:latin typeface="Apple SD Gothic Neo"/>
+              </a:rPr>
+              <a:t>메시지를 주고받게 했다 — 한쪽이 API를 바꾸면 다른 쪽이 맞췄다.</a:t>
             </a:r>
           </a:p>
         </p:txBody>
@@ -10611,7 +10285,7 @@
                 </a:solidFill>
                 <a:latin typeface="Apple SD Gothic Neo"/>
               </a:rPr>
-              <a:t>Red → Green → Refactor</a:t>
+              <a:t>개발 파이프라인</a:t>
             </a:r>
           </a:p>
         </p:txBody>
@@ -10668,8 +10342,8 @@
         </p:nvSpPr>
         <p:spPr>
           <a:xfrm>
-            <a:off x="1295247" y="2743200"/>
-            <a:ext cx="2834640" cy="1737360"/>
+            <a:off x="824331" y="2834640"/>
+            <a:ext cx="1874519" cy="1554480"/>
           </a:xfrm>
           <a:prstGeom prst="roundRect">
             <a:avLst>
@@ -10677,10 +10351,12 @@
             </a:avLst>
           </a:prstGeom>
           <a:solidFill>
-            <a:srgbClr val="D8392B"/>
+            <a:srgbClr val="F4F4F6"/>
           </a:solidFill>
-          <a:ln>
-            <a:noFill/>
+          <a:ln w="16510">
+            <a:solidFill>
+              <a:srgbClr val="E6E6E6"/>
+            </a:solidFill>
           </a:ln>
           <a:effectLst/>
         </p:spPr>
@@ -10706,47 +10382,35 @@
             <a:r>
               <a:rPr sz="2200" b="1">
                 <a:solidFill>
-                  <a:srgbClr val="FFFFFF"/>
+                  <a:srgbClr val="1A1A1A"/>
+                </a:solidFill>
+                <a:latin typeface="Apple SD Gothic Neo"/>
+              </a:rPr>
+              <a:t>발산</a:t>
+            </a:r>
+          </a:p>
+          <a:p>
+            <a:pPr algn="ctr"/>
+            <a:r>
+              <a:rPr sz="600" b="0">
+                <a:solidFill>
+                  <a:srgbClr val="6B7280"/>
+                </a:solidFill>
+                <a:latin typeface="Apple SD Gothic Neo"/>
+              </a:rPr>
+              <a:t/>
+            </a:r>
+          </a:p>
+          <a:p>
+            <a:pPr algn="ctr"/>
+            <a:r>
+              <a:rPr sz="1200" b="0">
+                <a:solidFill>
+                  <a:srgbClr val="6B7280"/>
                 </a:solidFill>
                 <a:latin typeface="Menlo"/>
               </a:rPr>
-              <a:t>RED</a:t>
-            </a:r>
-          </a:p>
-          <a:p>
-            <a:pPr algn="ctr"/>
-            <a:r>
-              <a:rPr sz="600" b="0">
-                <a:solidFill>
-                  <a:srgbClr val="FFFFFF"/>
-                </a:solidFill>
-                <a:latin typeface="Apple SD Gothic Neo"/>
-              </a:rPr>
-              <a:t/>
-            </a:r>
-          </a:p>
-          <a:p>
-            <a:pPr algn="ctr"/>
-            <a:r>
-              <a:rPr sz="1700" b="1">
-                <a:solidFill>
-                  <a:srgbClr val="FFFFFF"/>
-                </a:solidFill>
-                <a:latin typeface="Apple SD Gothic Neo"/>
-              </a:rPr>
-              <a:t>실패 테스트를</a:t>
-            </a:r>
-          </a:p>
-          <a:p>
-            <a:pPr algn="ctr"/>
-            <a:r>
-              <a:rPr sz="1700" b="1">
-                <a:solidFill>
-                  <a:srgbClr val="FFFFFF"/>
-                </a:solidFill>
-                <a:latin typeface="Apple SD Gothic Neo"/>
-              </a:rPr>
-              <a:t>먼저 작성</a:t>
+              <a:t>brainstorming</a:t>
             </a:r>
           </a:p>
         </p:txBody>
@@ -10759,7 +10423,7 @@
         </p:nvSpPr>
         <p:spPr>
           <a:xfrm>
-            <a:off x="4084167" y="3383280"/>
+            <a:off x="2525115" y="3337560"/>
             <a:ext cx="640080" cy="548640"/>
           </a:xfrm>
           <a:prstGeom prst="rect">
@@ -10775,9 +10439,9 @@
           <a:p>
             <a:pPr algn="ctr"/>
             <a:r>
-              <a:rPr sz="2800" b="1">
-                <a:solidFill>
-                  <a:srgbClr val="5B5BD6"/>
+              <a:rPr sz="2600" b="1">
+                <a:solidFill>
+                  <a:srgbClr val="6B7280"/>
                 </a:solidFill>
                 <a:latin typeface="Apple SD Gothic Neo"/>
               </a:rPr>
@@ -10794,8 +10458,8 @@
         </p:nvSpPr>
         <p:spPr>
           <a:xfrm>
-            <a:off x="4678527" y="2743200"/>
-            <a:ext cx="2834640" cy="1737360"/>
+            <a:off x="2991459" y="2834640"/>
+            <a:ext cx="1874519" cy="1554480"/>
           </a:xfrm>
           <a:prstGeom prst="roundRect">
             <a:avLst>
@@ -10803,10 +10467,12 @@
             </a:avLst>
           </a:prstGeom>
           <a:solidFill>
-            <a:srgbClr val="2E9E5B"/>
+            <a:srgbClr val="ECEBFB"/>
           </a:solidFill>
-          <a:ln>
-            <a:noFill/>
+          <a:ln w="16510">
+            <a:solidFill>
+              <a:srgbClr val="E6E6E6"/>
+            </a:solidFill>
           </a:ln>
           <a:effectLst/>
         </p:spPr>
@@ -10832,47 +10498,35 @@
             <a:r>
               <a:rPr sz="2200" b="1">
                 <a:solidFill>
-                  <a:srgbClr val="FFFFFF"/>
+                  <a:srgbClr val="1A1A1A"/>
+                </a:solidFill>
+                <a:latin typeface="Apple SD Gothic Neo"/>
+              </a:rPr>
+              <a:t>취조</a:t>
+            </a:r>
+          </a:p>
+          <a:p>
+            <a:pPr algn="ctr"/>
+            <a:r>
+              <a:rPr sz="600" b="0">
+                <a:solidFill>
+                  <a:srgbClr val="6B7280"/>
+                </a:solidFill>
+                <a:latin typeface="Apple SD Gothic Neo"/>
+              </a:rPr>
+              <a:t/>
+            </a:r>
+          </a:p>
+          <a:p>
+            <a:pPr algn="ctr"/>
+            <a:r>
+              <a:rPr sz="1200" b="0">
+                <a:solidFill>
+                  <a:srgbClr val="6B7280"/>
                 </a:solidFill>
                 <a:latin typeface="Menlo"/>
               </a:rPr>
-              <a:t>GREEN</a:t>
-            </a:r>
-          </a:p>
-          <a:p>
-            <a:pPr algn="ctr"/>
-            <a:r>
-              <a:rPr sz="600" b="0">
-                <a:solidFill>
-                  <a:srgbClr val="FFFFFF"/>
-                </a:solidFill>
-                <a:latin typeface="Apple SD Gothic Neo"/>
-              </a:rPr>
-              <a:t/>
-            </a:r>
-          </a:p>
-          <a:p>
-            <a:pPr algn="ctr"/>
-            <a:r>
-              <a:rPr sz="1700" b="1">
-                <a:solidFill>
-                  <a:srgbClr val="FFFFFF"/>
-                </a:solidFill>
-                <a:latin typeface="Apple SD Gothic Neo"/>
-              </a:rPr>
-              <a:t>통과시킬</a:t>
-            </a:r>
-          </a:p>
-          <a:p>
-            <a:pPr algn="ctr"/>
-            <a:r>
-              <a:rPr sz="1700" b="1">
-                <a:solidFill>
-                  <a:srgbClr val="FFFFFF"/>
-                </a:solidFill>
-                <a:latin typeface="Apple SD Gothic Neo"/>
-              </a:rPr>
-              <a:t>최소한만 구현</a:t>
+              <a:t>grill-with-docs</a:t>
             </a:r>
           </a:p>
         </p:txBody>
@@ -10885,7 +10539,7 @@
         </p:nvSpPr>
         <p:spPr>
           <a:xfrm>
-            <a:off x="7467447" y="3383280"/>
+            <a:off x="4692243" y="3337560"/>
             <a:ext cx="640080" cy="548640"/>
           </a:xfrm>
           <a:prstGeom prst="rect">
@@ -10901,9 +10555,9 @@
           <a:p>
             <a:pPr algn="ctr"/>
             <a:r>
-              <a:rPr sz="2800" b="1">
-                <a:solidFill>
-                  <a:srgbClr val="5B5BD6"/>
+              <a:rPr sz="2600" b="1">
+                <a:solidFill>
+                  <a:srgbClr val="6B7280"/>
                 </a:solidFill>
                 <a:latin typeface="Apple SD Gothic Neo"/>
               </a:rPr>
@@ -10920,8 +10574,8 @@
         </p:nvSpPr>
         <p:spPr>
           <a:xfrm>
-            <a:off x="8061807" y="2743200"/>
-            <a:ext cx="2834640" cy="1737360"/>
+            <a:off x="5158587" y="2834640"/>
+            <a:ext cx="1874519" cy="1554480"/>
           </a:xfrm>
           <a:prstGeom prst="roundRect">
             <a:avLst>
@@ -10929,10 +10583,12 @@
             </a:avLst>
           </a:prstGeom>
           <a:solidFill>
-            <a:srgbClr val="2F6FD8"/>
+            <a:srgbClr val="F4F4F6"/>
           </a:solidFill>
-          <a:ln>
-            <a:noFill/>
+          <a:ln w="16510">
+            <a:solidFill>
+              <a:srgbClr val="E6E6E6"/>
+            </a:solidFill>
           </a:ln>
           <a:effectLst/>
         </p:spPr>
@@ -10958,11 +10614,127 @@
             <a:r>
               <a:rPr sz="2200" b="1">
                 <a:solidFill>
-                  <a:srgbClr val="FFFFFF"/>
+                  <a:srgbClr val="1A1A1A"/>
+                </a:solidFill>
+                <a:latin typeface="Apple SD Gothic Neo"/>
+              </a:rPr>
+              <a:t>계획</a:t>
+            </a:r>
+          </a:p>
+          <a:p>
+            <a:pPr algn="ctr"/>
+            <a:r>
+              <a:rPr sz="600" b="0">
+                <a:solidFill>
+                  <a:srgbClr val="6B7280"/>
+                </a:solidFill>
+                <a:latin typeface="Apple SD Gothic Neo"/>
+              </a:rPr>
+              <a:t/>
+            </a:r>
+          </a:p>
+          <a:p>
+            <a:pPr algn="ctr"/>
+            <a:r>
+              <a:rPr sz="1200" b="0">
+                <a:solidFill>
+                  <a:srgbClr val="6B7280"/>
                 </a:solidFill>
                 <a:latin typeface="Menlo"/>
               </a:rPr>
-              <a:t>REFACTOR</a:t>
+              <a:t>writing-plans</a:t>
+            </a:r>
+          </a:p>
+        </p:txBody>
+      </p:sp>
+      <p:sp>
+        <p:nvSpPr>
+          <p:cNvPr id="9" name="TextBox 8"/>
+          <p:cNvSpPr txBox="1"/>
+          <p:nvPr/>
+        </p:nvSpPr>
+        <p:spPr>
+          <a:xfrm>
+            <a:off x="6859371" y="3337560"/>
+            <a:ext cx="640080" cy="548640"/>
+          </a:xfrm>
+          <a:prstGeom prst="rect">
+            <a:avLst/>
+          </a:prstGeom>
+          <a:noFill/>
+        </p:spPr>
+        <p:txBody>
+          <a:bodyPr wrap="square" anchor="ctr">
+            <a:spAutoFit/>
+          </a:bodyPr>
+          <a:lstStyle/>
+          <a:p>
+            <a:pPr algn="ctr"/>
+            <a:r>
+              <a:rPr sz="2600" b="1">
+                <a:solidFill>
+                  <a:srgbClr val="6B7280"/>
+                </a:solidFill>
+                <a:latin typeface="Apple SD Gothic Neo"/>
+              </a:rPr>
+              <a:t>→</a:t>
+            </a:r>
+          </a:p>
+        </p:txBody>
+      </p:sp>
+      <p:sp>
+        <p:nvSpPr>
+          <p:cNvPr id="10" name="Rounded Rectangle 9"/>
+          <p:cNvSpPr/>
+          <p:nvPr/>
+        </p:nvSpPr>
+        <p:spPr>
+          <a:xfrm>
+            <a:off x="7325715" y="2834640"/>
+            <a:ext cx="1874519" cy="1554480"/>
+          </a:xfrm>
+          <a:prstGeom prst="roundRect">
+            <a:avLst>
+              <a:gd name="adj" fmla="val 12000"/>
+            </a:avLst>
+          </a:prstGeom>
+          <a:solidFill>
+            <a:srgbClr val="ECEBFB"/>
+          </a:solidFill>
+          <a:ln w="16510">
+            <a:solidFill>
+              <a:srgbClr val="E6E6E6"/>
+            </a:solidFill>
+          </a:ln>
+          <a:effectLst/>
+        </p:spPr>
+        <p:style>
+          <a:lnRef idx="1">
+            <a:schemeClr val="accent1"/>
+          </a:lnRef>
+          <a:fillRef idx="3">
+            <a:schemeClr val="accent1"/>
+          </a:fillRef>
+          <a:effectRef idx="2">
+            <a:schemeClr val="accent1"/>
+          </a:effectRef>
+          <a:fontRef idx="minor">
+            <a:schemeClr val="lt1"/>
+          </a:fontRef>
+        </p:style>
+        <p:txBody>
+          <a:bodyPr rtlCol="0" anchor="ctr" tIns="76200" bIns="76200" lIns="127000" rIns="127000" wrap="square"/>
+          <a:lstStyle/>
+          <a:p>
+            <a:pPr algn="ctr"/>
+            <a:r>
+              <a:rPr sz="2200" b="1">
+                <a:solidFill>
+                  <a:srgbClr val="1A1A1A"/>
+                </a:solidFill>
+                <a:latin typeface="Apple SD Gothic Neo"/>
+              </a:rPr>
+              <a:t>구현</a:t>
             </a:r>
           </a:p>
           <a:p>
@@ -10970,7 +10742,7 @@
             <a:r>
               <a:rPr sz="600" b="0">
                 <a:solidFill>
-                  <a:srgbClr val="FFFFFF"/>
+                  <a:srgbClr val="6B7280"/>
                 </a:solidFill>
                 <a:latin typeface="Apple SD Gothic Neo"/>
               </a:rPr>
@@ -10980,32 +10752,136 @@
           <a:p>
             <a:pPr algn="ctr"/>
             <a:r>
-              <a:rPr sz="1700" b="1">
-                <a:solidFill>
-                  <a:srgbClr val="FFFFFF"/>
-                </a:solidFill>
-                <a:latin typeface="Apple SD Gothic Neo"/>
-              </a:rPr>
-              <a:t>녹색 유지한 채</a:t>
-            </a:r>
-          </a:p>
-          <a:p>
-            <a:pPr algn="ctr"/>
-            <a:r>
-              <a:rPr sz="1700" b="1">
-                <a:solidFill>
-                  <a:srgbClr val="FFFFFF"/>
-                </a:solidFill>
-                <a:latin typeface="Apple SD Gothic Neo"/>
-              </a:rPr>
-              <a:t>정리·중복 제거</a:t>
-            </a:r>
-          </a:p>
-        </p:txBody>
-      </p:sp>
-      <p:sp>
-        <p:nvSpPr>
-          <p:cNvPr id="9" name="TextBox 8"/>
+              <a:rPr sz="1200" b="0">
+                <a:solidFill>
+                  <a:srgbClr val="6B7280"/>
+                </a:solidFill>
+                <a:latin typeface="Menlo"/>
+              </a:rPr>
+              <a:t>executing-plans</a:t>
+            </a:r>
+          </a:p>
+        </p:txBody>
+      </p:sp>
+      <p:sp>
+        <p:nvSpPr>
+          <p:cNvPr id="11" name="TextBox 10"/>
+          <p:cNvSpPr txBox="1"/>
+          <p:nvPr/>
+        </p:nvSpPr>
+        <p:spPr>
+          <a:xfrm>
+            <a:off x="9026499" y="3337560"/>
+            <a:ext cx="640080" cy="548640"/>
+          </a:xfrm>
+          <a:prstGeom prst="rect">
+            <a:avLst/>
+          </a:prstGeom>
+          <a:noFill/>
+        </p:spPr>
+        <p:txBody>
+          <a:bodyPr wrap="square" anchor="ctr">
+            <a:spAutoFit/>
+          </a:bodyPr>
+          <a:lstStyle/>
+          <a:p>
+            <a:pPr algn="ctr"/>
+            <a:r>
+              <a:rPr sz="2600" b="1">
+                <a:solidFill>
+                  <a:srgbClr val="6B7280"/>
+                </a:solidFill>
+                <a:latin typeface="Apple SD Gothic Neo"/>
+              </a:rPr>
+              <a:t>→</a:t>
+            </a:r>
+          </a:p>
+        </p:txBody>
+      </p:sp>
+      <p:sp>
+        <p:nvSpPr>
+          <p:cNvPr id="12" name="Rounded Rectangle 11"/>
+          <p:cNvSpPr/>
+          <p:nvPr/>
+        </p:nvSpPr>
+        <p:spPr>
+          <a:xfrm>
+            <a:off x="9492843" y="2834640"/>
+            <a:ext cx="1874519" cy="1554480"/>
+          </a:xfrm>
+          <a:prstGeom prst="roundRect">
+            <a:avLst>
+              <a:gd name="adj" fmla="val 12000"/>
+            </a:avLst>
+          </a:prstGeom>
+          <a:solidFill>
+            <a:srgbClr val="F4F4F6"/>
+          </a:solidFill>
+          <a:ln w="16510">
+            <a:solidFill>
+              <a:srgbClr val="E6E6E6"/>
+            </a:solidFill>
+          </a:ln>
+          <a:effectLst/>
+        </p:spPr>
+        <p:style>
+          <a:lnRef idx="1">
+            <a:schemeClr val="accent1"/>
+          </a:lnRef>
+          <a:fillRef idx="3">
+            <a:schemeClr val="accent1"/>
+          </a:fillRef>
+          <a:effectRef idx="2">
+            <a:schemeClr val="accent1"/>
+          </a:effectRef>
+          <a:fontRef idx="minor">
+            <a:schemeClr val="lt1"/>
+          </a:fontRef>
+        </p:style>
+        <p:txBody>
+          <a:bodyPr rtlCol="0" anchor="ctr" tIns="76200" bIns="76200" lIns="127000" rIns="127000" wrap="square"/>
+          <a:lstStyle/>
+          <a:p>
+            <a:pPr algn="ctr"/>
+            <a:r>
+              <a:rPr sz="2200" b="1">
+                <a:solidFill>
+                  <a:srgbClr val="1A1A1A"/>
+                </a:solidFill>
+                <a:latin typeface="Apple SD Gothic Neo"/>
+              </a:rPr>
+              <a:t>검증</a:t>
+            </a:r>
+          </a:p>
+          <a:p>
+            <a:pPr algn="ctr"/>
+            <a:r>
+              <a:rPr sz="600" b="0">
+                <a:solidFill>
+                  <a:srgbClr val="6B7280"/>
+                </a:solidFill>
+                <a:latin typeface="Apple SD Gothic Neo"/>
+              </a:rPr>
+              <a:t/>
+            </a:r>
+          </a:p>
+          <a:p>
+            <a:pPr algn="ctr"/>
+            <a:r>
+              <a:rPr sz="1200" b="0">
+                <a:solidFill>
+                  <a:srgbClr val="6B7280"/>
+                </a:solidFill>
+                <a:latin typeface="Menlo"/>
+              </a:rPr>
+              <a:t>Codex 리뷰</a:t>
+            </a:r>
+          </a:p>
+        </p:txBody>
+      </p:sp>
+      <p:sp>
+        <p:nvSpPr>
+          <p:cNvPr id="13" name="TextBox 12"/>
           <p:cNvSpPr txBox="1"/>
           <p:nvPr/>
         </p:nvSpPr>
@@ -11033,7 +10909,7 @@
                 </a:solidFill>
                 <a:latin typeface="Apple SD Gothic Neo"/>
               </a:rPr>
-              <a:t>AI가 짠 코드도 이 사이클을 강제했다.</a:t>
+              <a:t>각 단계가 산출물을 남긴다 — 설계 · 용어 · 계획 · 코드 · 리뷰.</a:t>
             </a:r>
           </a:p>
         </p:txBody>
@@ -11371,7 +11247,7 @@
                 </a:solidFill>
                 <a:latin typeface="Apple SD Gothic Neo"/>
               </a:rPr>
-              <a:t>AI를 어떻게 통제했나</a:t>
+              <a:t>테스트 주도 개발 (TDD)</a:t>
             </a:r>
           </a:p>
         </p:txBody>
@@ -11444,14 +11320,25 @@
           <a:p>
             <a:pPr algn="ctr"/>
             <a:r>
-              <a:rPr sz="3200" b="1" spc="-60">
+              <a:rPr sz="3600" b="1" spc="-60">
                 <a:solidFill>
                   <a:srgbClr val="1A1A1A"/>
                 </a:solidFill>
                 <a:latin typeface="Apple SD Gothic Neo"/>
               </a:rPr>
-              <a:t>AI가 짠 설계를 다이어그램·유스케이스에
-대고 한 질문씩 캐물었다.</a:t>
+              <a:t>실패하는 테스트 없이는</a:t>
+            </a:r>
+          </a:p>
+          <a:p>
+            <a:pPr algn="ctr"/>
+            <a:r>
+              <a:rPr sz="3600" b="1" spc="-60">
+                <a:solidFill>
+                  <a:srgbClr val="5B5BD6"/>
+                </a:solidFill>
+                <a:latin typeface="Apple SD Gothic Neo"/>
+              </a:rPr>
+              <a:t>프로덕션 코드를 쓰지 않는다.</a:t>
             </a:r>
           </a:p>
         </p:txBody>
@@ -11464,7 +11351,7 @@
         </p:nvSpPr>
         <p:spPr>
           <a:xfrm>
-            <a:off x="822960" y="4434840"/>
+            <a:off x="822960" y="4572000"/>
             <a:ext cx="10607040" cy="914400"/>
           </a:xfrm>
           <a:prstGeom prst="rect">
@@ -11486,7 +11373,7 @@
                 </a:solidFill>
                 <a:latin typeface="Apple SD Gothic Neo"/>
               </a:rPr>
-              <a:t>결정은 전부 사람이 내렸다.</a:t>
+              <a:t>AI가 쏟아내는 코드를 검증 없이 통과시키지 않는 장치.</a:t>
             </a:r>
           </a:p>
         </p:txBody>
@@ -11547,7 +11434,7 @@
                 </a:solidFill>
                 <a:latin typeface="Apple SD Gothic Neo"/>
               </a:rPr>
-              <a:t>취조 ① — 빠뜨린 걸 잡다</a:t>
+              <a:t>Red → Green → Refactor</a:t>
             </a:r>
           </a:p>
         </p:txBody>
@@ -11604,8 +11491,8 @@
         </p:nvSpPr>
         <p:spPr>
           <a:xfrm>
-            <a:off x="777240" y="2743200"/>
-            <a:ext cx="4800600" cy="1920240"/>
+            <a:off x="1295247" y="2743200"/>
+            <a:ext cx="2834640" cy="1737360"/>
           </a:xfrm>
           <a:prstGeom prst="roundRect">
             <a:avLst>
@@ -11613,12 +11500,10 @@
             </a:avLst>
           </a:prstGeom>
           <a:solidFill>
-            <a:srgbClr val="F4F4F6"/>
+            <a:srgbClr val="D8392B"/>
           </a:solidFill>
-          <a:ln w="16510">
-            <a:solidFill>
-              <a:srgbClr val="E6E6E6"/>
-            </a:solidFill>
+          <a:ln>
+            <a:noFill/>
           </a:ln>
           <a:effectLst/>
         </p:spPr>
@@ -11637,26 +11522,26 @@
           </a:fontRef>
         </p:style>
         <p:txBody>
-          <a:bodyPr rtlCol="0" anchor="ctr" tIns="101600" bIns="101600" lIns="203200" rIns="203200" wrap="square"/>
-          <a:lstStyle/>
-          <a:p>
-            <a:pPr algn="l"/>
-            <a:r>
-              <a:rPr sz="1600" b="1">
-                <a:solidFill>
-                  <a:srgbClr val="6B7280"/>
-                </a:solidFill>
-                <a:latin typeface="Apple SD Gothic Neo"/>
-              </a:rPr>
-              <a:t>AI가 한 것</a:t>
-            </a:r>
-          </a:p>
-          <a:p>
-            <a:pPr algn="l"/>
+          <a:bodyPr rtlCol="0" anchor="ctr" tIns="76200" bIns="76200" lIns="127000" rIns="127000" wrap="square"/>
+          <a:lstStyle/>
+          <a:p>
+            <a:pPr algn="ctr"/>
+            <a:r>
+              <a:rPr sz="2200" b="1">
+                <a:solidFill>
+                  <a:srgbClr val="FFFFFF"/>
+                </a:solidFill>
+                <a:latin typeface="Menlo"/>
+              </a:rPr>
+              <a:t>RED</a:t>
+            </a:r>
+          </a:p>
+          <a:p>
+            <a:pPr algn="ctr"/>
             <a:r>
               <a:rPr sz="600" b="0">
                 <a:solidFill>
-                  <a:srgbClr val="6B7280"/>
+                  <a:srgbClr val="FFFFFF"/>
                 </a:solidFill>
                 <a:latin typeface="Apple SD Gothic Neo"/>
               </a:rPr>
@@ -11664,16 +11549,27 @@
             </a:r>
           </a:p>
           <a:p>
-            <a:pPr algn="l"/>
-            <a:r>
-              <a:rPr sz="2100" b="1">
-                <a:solidFill>
-                  <a:srgbClr val="1A1A1A"/>
-                </a:solidFill>
-                <a:latin typeface="Apple SD Gothic Neo"/>
-              </a:rPr>
-              <a:t>유스케이스 17개에
-'회원가입'이 없었다</a:t>
+            <a:pPr algn="ctr"/>
+            <a:r>
+              <a:rPr sz="1700" b="1">
+                <a:solidFill>
+                  <a:srgbClr val="FFFFFF"/>
+                </a:solidFill>
+                <a:latin typeface="Apple SD Gothic Neo"/>
+              </a:rPr>
+              <a:t>실패 테스트를</a:t>
+            </a:r>
+          </a:p>
+          <a:p>
+            <a:pPr algn="ctr"/>
+            <a:r>
+              <a:rPr sz="1700" b="1">
+                <a:solidFill>
+                  <a:srgbClr val="FFFFFF"/>
+                </a:solidFill>
+                <a:latin typeface="Apple SD Gothic Neo"/>
+              </a:rPr>
+              <a:t>먼저 작성</a:t>
             </a:r>
           </a:p>
         </p:txBody>
@@ -11686,8 +11582,8 @@
         </p:nvSpPr>
         <p:spPr>
           <a:xfrm>
-            <a:off x="5733288" y="3383280"/>
-            <a:ext cx="731520" cy="640080"/>
+            <a:off x="4084167" y="3383280"/>
+            <a:ext cx="640080" cy="548640"/>
           </a:xfrm>
           <a:prstGeom prst="rect">
             <a:avLst/>
@@ -11702,7 +11598,7 @@
           <a:p>
             <a:pPr algn="ctr"/>
             <a:r>
-              <a:rPr sz="3400" b="1">
+              <a:rPr sz="2800" b="1">
                 <a:solidFill>
                   <a:srgbClr val="5B5BD6"/>
                 </a:solidFill>
@@ -11721,8 +11617,8 @@
         </p:nvSpPr>
         <p:spPr>
           <a:xfrm>
-            <a:off x="6629400" y="2743200"/>
-            <a:ext cx="4800600" cy="1920240"/>
+            <a:off x="4678527" y="2743200"/>
+            <a:ext cx="2834640" cy="1737360"/>
           </a:xfrm>
           <a:prstGeom prst="roundRect">
             <a:avLst>
@@ -11730,7 +11626,7 @@
             </a:avLst>
           </a:prstGeom>
           <a:solidFill>
-            <a:srgbClr val="ECEBFB"/>
+            <a:srgbClr val="2E9E5B"/>
           </a:solidFill>
           <a:ln>
             <a:noFill/>
@@ -11752,26 +11648,152 @@
           </a:fontRef>
         </p:style>
         <p:txBody>
-          <a:bodyPr rtlCol="0" anchor="ctr" tIns="101600" bIns="101600" lIns="203200" rIns="203200" wrap="square"/>
-          <a:lstStyle/>
-          <a:p>
-            <a:pPr algn="l"/>
-            <a:r>
-              <a:rPr sz="1600" b="1">
+          <a:bodyPr rtlCol="0" anchor="ctr" tIns="76200" bIns="76200" lIns="127000" rIns="127000" wrap="square"/>
+          <a:lstStyle/>
+          <a:p>
+            <a:pPr algn="ctr"/>
+            <a:r>
+              <a:rPr sz="2200" b="1">
+                <a:solidFill>
+                  <a:srgbClr val="FFFFFF"/>
+                </a:solidFill>
+                <a:latin typeface="Menlo"/>
+              </a:rPr>
+              <a:t>GREEN</a:t>
+            </a:r>
+          </a:p>
+          <a:p>
+            <a:pPr algn="ctr"/>
+            <a:r>
+              <a:rPr sz="600" b="0">
+                <a:solidFill>
+                  <a:srgbClr val="FFFFFF"/>
+                </a:solidFill>
+                <a:latin typeface="Apple SD Gothic Neo"/>
+              </a:rPr>
+              <a:t/>
+            </a:r>
+          </a:p>
+          <a:p>
+            <a:pPr algn="ctr"/>
+            <a:r>
+              <a:rPr sz="1700" b="1">
+                <a:solidFill>
+                  <a:srgbClr val="FFFFFF"/>
+                </a:solidFill>
+                <a:latin typeface="Apple SD Gothic Neo"/>
+              </a:rPr>
+              <a:t>통과시킬</a:t>
+            </a:r>
+          </a:p>
+          <a:p>
+            <a:pPr algn="ctr"/>
+            <a:r>
+              <a:rPr sz="1700" b="1">
+                <a:solidFill>
+                  <a:srgbClr val="FFFFFF"/>
+                </a:solidFill>
+                <a:latin typeface="Apple SD Gothic Neo"/>
+              </a:rPr>
+              <a:t>최소한만 구현</a:t>
+            </a:r>
+          </a:p>
+        </p:txBody>
+      </p:sp>
+      <p:sp>
+        <p:nvSpPr>
+          <p:cNvPr id="7" name="TextBox 6"/>
+          <p:cNvSpPr txBox="1"/>
+          <p:nvPr/>
+        </p:nvSpPr>
+        <p:spPr>
+          <a:xfrm>
+            <a:off x="7467447" y="3383280"/>
+            <a:ext cx="640080" cy="548640"/>
+          </a:xfrm>
+          <a:prstGeom prst="rect">
+            <a:avLst/>
+          </a:prstGeom>
+          <a:noFill/>
+        </p:spPr>
+        <p:txBody>
+          <a:bodyPr wrap="square" anchor="ctr">
+            <a:spAutoFit/>
+          </a:bodyPr>
+          <a:lstStyle/>
+          <a:p>
+            <a:pPr algn="ctr"/>
+            <a:r>
+              <a:rPr sz="2800" b="1">
                 <a:solidFill>
                   <a:srgbClr val="5B5BD6"/>
                 </a:solidFill>
                 <a:latin typeface="Apple SD Gothic Neo"/>
               </a:rPr>
-              <a:t>내가 통제</a:t>
-            </a:r>
-          </a:p>
-          <a:p>
-            <a:pPr algn="l"/>
+              <a:t>→</a:t>
+            </a:r>
+          </a:p>
+        </p:txBody>
+      </p:sp>
+      <p:sp>
+        <p:nvSpPr>
+          <p:cNvPr id="8" name="Rounded Rectangle 7"/>
+          <p:cNvSpPr/>
+          <p:nvPr/>
+        </p:nvSpPr>
+        <p:spPr>
+          <a:xfrm>
+            <a:off x="8061807" y="2743200"/>
+            <a:ext cx="2834640" cy="1737360"/>
+          </a:xfrm>
+          <a:prstGeom prst="roundRect">
+            <a:avLst>
+              <a:gd name="adj" fmla="val 12000"/>
+            </a:avLst>
+          </a:prstGeom>
+          <a:solidFill>
+            <a:srgbClr val="2F6FD8"/>
+          </a:solidFill>
+          <a:ln>
+            <a:noFill/>
+          </a:ln>
+          <a:effectLst/>
+        </p:spPr>
+        <p:style>
+          <a:lnRef idx="1">
+            <a:schemeClr val="accent1"/>
+          </a:lnRef>
+          <a:fillRef idx="3">
+            <a:schemeClr val="accent1"/>
+          </a:fillRef>
+          <a:effectRef idx="2">
+            <a:schemeClr val="accent1"/>
+          </a:effectRef>
+          <a:fontRef idx="minor">
+            <a:schemeClr val="lt1"/>
+          </a:fontRef>
+        </p:style>
+        <p:txBody>
+          <a:bodyPr rtlCol="0" anchor="ctr" tIns="76200" bIns="76200" lIns="127000" rIns="127000" wrap="square"/>
+          <a:lstStyle/>
+          <a:p>
+            <a:pPr algn="ctr"/>
+            <a:r>
+              <a:rPr sz="2200" b="1">
+                <a:solidFill>
+                  <a:srgbClr val="FFFFFF"/>
+                </a:solidFill>
+                <a:latin typeface="Menlo"/>
+              </a:rPr>
+              <a:t>REFACTOR</a:t>
+            </a:r>
+          </a:p>
+          <a:p>
+            <a:pPr algn="ctr"/>
             <a:r>
               <a:rPr sz="600" b="0">
                 <a:solidFill>
-                  <a:srgbClr val="6B7280"/>
+                  <a:srgbClr val="FFFFFF"/>
                 </a:solidFill>
                 <a:latin typeface="Apple SD Gothic Neo"/>
               </a:rPr>
@@ -11779,16 +11801,62 @@
             </a:r>
           </a:p>
           <a:p>
-            <a:pPr algn="l"/>
-            <a:r>
-              <a:rPr sz="2100" b="1">
+            <a:pPr algn="ctr"/>
+            <a:r>
+              <a:rPr sz="1700" b="1">
+                <a:solidFill>
+                  <a:srgbClr val="FFFFFF"/>
+                </a:solidFill>
+                <a:latin typeface="Apple SD Gothic Neo"/>
+              </a:rPr>
+              <a:t>녹색 유지한 채</a:t>
+            </a:r>
+          </a:p>
+          <a:p>
+            <a:pPr algn="ctr"/>
+            <a:r>
+              <a:rPr sz="1700" b="1">
+                <a:solidFill>
+                  <a:srgbClr val="FFFFFF"/>
+                </a:solidFill>
+                <a:latin typeface="Apple SD Gothic Neo"/>
+              </a:rPr>
+              <a:t>정리·중복 제거</a:t>
+            </a:r>
+          </a:p>
+        </p:txBody>
+      </p:sp>
+      <p:sp>
+        <p:nvSpPr>
+          <p:cNvPr id="9" name="TextBox 8"/>
+          <p:cNvSpPr txBox="1"/>
+          <p:nvPr/>
+        </p:nvSpPr>
+        <p:spPr>
+          <a:xfrm>
+            <a:off x="822960" y="5029200"/>
+            <a:ext cx="10607040" cy="822960"/>
+          </a:xfrm>
+          <a:prstGeom prst="rect">
+            <a:avLst/>
+          </a:prstGeom>
+          <a:noFill/>
+        </p:spPr>
+        <p:txBody>
+          <a:bodyPr wrap="square" anchor="t">
+            <a:spAutoFit/>
+          </a:bodyPr>
+          <a:lstStyle/>
+          <a:p>
+            <a:pPr algn="ctr"/>
+            <a:r>
+              <a:rPr sz="2400" b="1" spc="-40">
                 <a:solidFill>
                   <a:srgbClr val="1A1A1A"/>
                 </a:solidFill>
                 <a:latin typeface="Apple SD Gothic Neo"/>
               </a:rPr>
-              <a:t>회원가입을 명시적으로
-추가하기로 결정</a:t>
+              <a:t>AI가 짠 코드도 이 사이클을 강제했다.</a:t>
             </a:r>
           </a:p>
         </p:txBody>
@@ -11849,7 +11917,7 @@
                 </a:solidFill>
                 <a:latin typeface="Apple SD Gothic Neo"/>
               </a:rPr>
-              <a:t>취조 ② — 흔들리는 용어를 잡다</a:t>
+              <a:t>AI를 어떻게 통제했나</a:t>
             </a:r>
           </a:p>
         </p:txBody>
@@ -11900,96 +11968,14 @@
       </p:sp>
       <p:sp>
         <p:nvSpPr>
-          <p:cNvPr id="4" name="Rounded Rectangle 3"/>
-          <p:cNvSpPr/>
-          <p:nvPr/>
-        </p:nvSpPr>
-        <p:spPr>
-          <a:xfrm>
-            <a:off x="777240" y="2743200"/>
-            <a:ext cx="4800600" cy="1920240"/>
-          </a:xfrm>
-          <a:prstGeom prst="roundRect">
-            <a:avLst>
-              <a:gd name="adj" fmla="val 12000"/>
-            </a:avLst>
-          </a:prstGeom>
-          <a:solidFill>
-            <a:srgbClr val="F4F4F6"/>
-          </a:solidFill>
-          <a:ln w="16510">
-            <a:solidFill>
-              <a:srgbClr val="E6E6E6"/>
-            </a:solidFill>
-          </a:ln>
-          <a:effectLst/>
-        </p:spPr>
-        <p:style>
-          <a:lnRef idx="1">
-            <a:schemeClr val="accent1"/>
-          </a:lnRef>
-          <a:fillRef idx="3">
-            <a:schemeClr val="accent1"/>
-          </a:fillRef>
-          <a:effectRef idx="2">
-            <a:schemeClr val="accent1"/>
-          </a:effectRef>
-          <a:fontRef idx="minor">
-            <a:schemeClr val="lt1"/>
-          </a:fontRef>
-        </p:style>
-        <p:txBody>
-          <a:bodyPr rtlCol="0" anchor="ctr" tIns="101600" bIns="101600" lIns="203200" rIns="203200" wrap="square"/>
-          <a:lstStyle/>
-          <a:p>
-            <a:pPr algn="l"/>
-            <a:r>
-              <a:rPr sz="1600" b="1">
-                <a:solidFill>
-                  <a:srgbClr val="6B7280"/>
-                </a:solidFill>
-                <a:latin typeface="Apple SD Gothic Neo"/>
-              </a:rPr>
-              <a:t>AI가 한 것</a:t>
-            </a:r>
-          </a:p>
-          <a:p>
-            <a:pPr algn="l"/>
-            <a:r>
-              <a:rPr sz="600" b="0">
-                <a:solidFill>
-                  <a:srgbClr val="6B7280"/>
-                </a:solidFill>
-                <a:latin typeface="Apple SD Gothic Neo"/>
-              </a:rPr>
-              <a:t/>
-            </a:r>
-          </a:p>
-          <a:p>
-            <a:pPr algn="l"/>
-            <a:r>
-              <a:rPr sz="2100" b="1">
-                <a:solidFill>
-                  <a:srgbClr val="1A1A1A"/>
-                </a:solidFill>
-                <a:latin typeface="Apple SD Gothic Neo"/>
-              </a:rPr>
-              <a:t>같은 사람을 Policyholder·
-account·user로 섞어 부름</a:t>
-            </a:r>
-          </a:p>
-        </p:txBody>
-      </p:sp>
-      <p:sp>
-        <p:nvSpPr>
-          <p:cNvPr id="5" name="TextBox 4"/>
+          <p:cNvPr id="4" name="TextBox 3"/>
           <p:cNvSpPr txBox="1"/>
           <p:nvPr/>
         </p:nvSpPr>
         <p:spPr>
           <a:xfrm>
-            <a:off x="5733288" y="3383280"/>
-            <a:ext cx="731520" cy="640080"/>
+            <a:off x="822960" y="2651760"/>
+            <a:ext cx="10607040" cy="1554480"/>
           </a:xfrm>
           <a:prstGeom prst="rect">
             <a:avLst/>
@@ -12004,93 +11990,49 @@
           <a:p>
             <a:pPr algn="ctr"/>
             <a:r>
-              <a:rPr sz="3400" b="1">
-                <a:solidFill>
-                  <a:srgbClr val="5B5BD6"/>
-                </a:solidFill>
-                <a:latin typeface="Apple SD Gothic Neo"/>
-              </a:rPr>
-              <a:t>→</a:t>
-            </a:r>
-          </a:p>
-        </p:txBody>
-      </p:sp>
-      <p:sp>
-        <p:nvSpPr>
-          <p:cNvPr id="6" name="Rounded Rectangle 5"/>
-          <p:cNvSpPr/>
-          <p:nvPr/>
-        </p:nvSpPr>
-        <p:spPr>
-          <a:xfrm>
-            <a:off x="6629400" y="2743200"/>
-            <a:ext cx="4800600" cy="1920240"/>
-          </a:xfrm>
-          <a:prstGeom prst="roundRect">
-            <a:avLst>
-              <a:gd name="adj" fmla="val 12000"/>
-            </a:avLst>
-          </a:prstGeom>
-          <a:solidFill>
-            <a:srgbClr val="ECEBFB"/>
-          </a:solidFill>
-          <a:ln>
-            <a:noFill/>
-          </a:ln>
-          <a:effectLst/>
-        </p:spPr>
-        <p:style>
-          <a:lnRef idx="1">
-            <a:schemeClr val="accent1"/>
-          </a:lnRef>
-          <a:fillRef idx="3">
-            <a:schemeClr val="accent1"/>
-          </a:fillRef>
-          <a:effectRef idx="2">
-            <a:schemeClr val="accent1"/>
-          </a:effectRef>
-          <a:fontRef idx="minor">
-            <a:schemeClr val="lt1"/>
-          </a:fontRef>
-        </p:style>
-        <p:txBody>
-          <a:bodyPr rtlCol="0" anchor="ctr" tIns="101600" bIns="101600" lIns="203200" rIns="203200" wrap="square"/>
-          <a:lstStyle/>
-          <a:p>
-            <a:pPr algn="l"/>
-            <a:r>
-              <a:rPr sz="1600" b="1">
-                <a:solidFill>
-                  <a:srgbClr val="5B5BD6"/>
-                </a:solidFill>
-                <a:latin typeface="Apple SD Gothic Neo"/>
-              </a:rPr>
-              <a:t>내가 통제</a:t>
-            </a:r>
-          </a:p>
-          <a:p>
-            <a:pPr algn="l"/>
-            <a:r>
-              <a:rPr sz="600" b="0">
+              <a:rPr sz="3200" b="1" spc="-60">
+                <a:solidFill>
+                  <a:srgbClr val="1A1A1A"/>
+                </a:solidFill>
+                <a:latin typeface="Apple SD Gothic Neo"/>
+              </a:rPr>
+              <a:t>AI가 짠 설계를 다이어그램·유스케이스에
+대고 한 질문씩 캐물었다.</a:t>
+            </a:r>
+          </a:p>
+        </p:txBody>
+      </p:sp>
+      <p:sp>
+        <p:nvSpPr>
+          <p:cNvPr id="5" name="TextBox 4"/>
+          <p:cNvSpPr txBox="1"/>
+          <p:nvPr/>
+        </p:nvSpPr>
+        <p:spPr>
+          <a:xfrm>
+            <a:off x="822960" y="4434840"/>
+            <a:ext cx="10607040" cy="914400"/>
+          </a:xfrm>
+          <a:prstGeom prst="rect">
+            <a:avLst/>
+          </a:prstGeom>
+          <a:noFill/>
+        </p:spPr>
+        <p:txBody>
+          <a:bodyPr wrap="square" anchor="t">
+            <a:spAutoFit/>
+          </a:bodyPr>
+          <a:lstStyle/>
+          <a:p>
+            <a:pPr algn="ctr"/>
+            <a:r>
+              <a:rPr sz="2200" b="0" spc="-30">
                 <a:solidFill>
                   <a:srgbClr val="6B7280"/>
                 </a:solidFill>
                 <a:latin typeface="Apple SD Gothic Neo"/>
               </a:rPr>
-              <a:t/>
-            </a:r>
-          </a:p>
-          <a:p>
-            <a:pPr algn="l"/>
-            <a:r>
-              <a:rPr sz="2100" b="1">
-                <a:solidFill>
-                  <a:srgbClr val="1A1A1A"/>
-                </a:solidFill>
-                <a:latin typeface="Apple SD Gothic Neo"/>
-              </a:rPr>
-              <a:t>CONTEXT.md에
-표준어 하나로 못박음</a:t>
+              <a:t>결정은 전부 사람이 내렸다.</a:t>
             </a:r>
           </a:p>
         </p:txBody>
@@ -12151,7 +12093,7 @@
                 </a:solidFill>
                 <a:latin typeface="Apple SD Gothic Neo"/>
               </a:rPr>
-              <a:t>취조 ③ — 과한 구현을 막다</a:t>
+              <a:t>취조 ① — 빠뜨린 걸 잡다</a:t>
             </a:r>
           </a:p>
         </p:txBody>
@@ -12276,8 +12218,8 @@
                 </a:solidFill>
                 <a:latin typeface="Apple SD Gothic Neo"/>
               </a:rPr>
-              <a:t>보험료를 '맞춤 계산'까지
-만들려 함</a:t>
+              <a:t>유스케이스 17개에
+'회원가입'이 없었다</a:t>
             </a:r>
           </a:p>
         </p:txBody>
@@ -12391,8 +12333,8 @@
                 </a:solidFill>
                 <a:latin typeface="Apple SD Gothic Neo"/>
               </a:rPr>
-              <a:t>유스케이스 범위(예시만)로
-되돌림</a:t>
+              <a:t>회원가입을 명시적으로
+추가하기로 결정</a:t>
             </a:r>
           </a:p>
         </p:txBody>
@@ -12453,7 +12395,7 @@
                 </a:solidFill>
                 <a:latin typeface="Apple SD Gothic Neo"/>
               </a:rPr>
-              <a:t>취조 ④ — 멋대로 늘린 걸 막다</a:t>
+              <a:t>취조 ② — 흔들리는 용어를 잡다</a:t>
             </a:r>
           </a:p>
         </p:txBody>
@@ -12578,8 +12520,8 @@
                 </a:solidFill>
                 <a:latin typeface="Apple SD Gothic Neo"/>
               </a:rPr>
-              <a:t>상태값에 CONDITIONAL을
-임의로 추가</a:t>
+              <a:t>같은 사람을 Policyholder·
+account·user로 섞어 부름</a:t>
             </a:r>
           </a:p>
         </p:txBody>
@@ -12693,8 +12635,8 @@
                 </a:solidFill>
                 <a:latin typeface="Apple SD Gothic Neo"/>
               </a:rPr>
-              <a:t>다이어그램 3값 유지,
-조건부는 심사가 책임</a:t>
+              <a:t>CONTEXT.md에
+표준어 하나로 못박음</a:t>
             </a:r>
           </a:p>
         </p:txBody>
@@ -12755,7 +12697,7 @@
                 </a:solidFill>
                 <a:latin typeface="Apple SD Gothic Neo"/>
               </a:rPr>
-              <a:t>AI는 공짜가 아니다</a:t>
+              <a:t>취조 ③ — 과한 구현을 막다</a:t>
             </a:r>
           </a:p>
         </p:txBody>
@@ -12806,14 +12748,96 @@
       </p:sp>
       <p:sp>
         <p:nvSpPr>
-          <p:cNvPr id="4" name="TextBox 3"/>
+          <p:cNvPr id="4" name="Rounded Rectangle 3"/>
+          <p:cNvSpPr/>
+          <p:nvPr/>
+        </p:nvSpPr>
+        <p:spPr>
+          <a:xfrm>
+            <a:off x="777240" y="2743200"/>
+            <a:ext cx="4800600" cy="1920240"/>
+          </a:xfrm>
+          <a:prstGeom prst="roundRect">
+            <a:avLst>
+              <a:gd name="adj" fmla="val 12000"/>
+            </a:avLst>
+          </a:prstGeom>
+          <a:solidFill>
+            <a:srgbClr val="F4F4F6"/>
+          </a:solidFill>
+          <a:ln w="16510">
+            <a:solidFill>
+              <a:srgbClr val="E6E6E6"/>
+            </a:solidFill>
+          </a:ln>
+          <a:effectLst/>
+        </p:spPr>
+        <p:style>
+          <a:lnRef idx="1">
+            <a:schemeClr val="accent1"/>
+          </a:lnRef>
+          <a:fillRef idx="3">
+            <a:schemeClr val="accent1"/>
+          </a:fillRef>
+          <a:effectRef idx="2">
+            <a:schemeClr val="accent1"/>
+          </a:effectRef>
+          <a:fontRef idx="minor">
+            <a:schemeClr val="lt1"/>
+          </a:fontRef>
+        </p:style>
+        <p:txBody>
+          <a:bodyPr rtlCol="0" anchor="ctr" tIns="101600" bIns="101600" lIns="203200" rIns="203200" wrap="square"/>
+          <a:lstStyle/>
+          <a:p>
+            <a:pPr algn="l"/>
+            <a:r>
+              <a:rPr sz="1600" b="1">
+                <a:solidFill>
+                  <a:srgbClr val="6B7280"/>
+                </a:solidFill>
+                <a:latin typeface="Apple SD Gothic Neo"/>
+              </a:rPr>
+              <a:t>AI가 한 것</a:t>
+            </a:r>
+          </a:p>
+          <a:p>
+            <a:pPr algn="l"/>
+            <a:r>
+              <a:rPr sz="600" b="0">
+                <a:solidFill>
+                  <a:srgbClr val="6B7280"/>
+                </a:solidFill>
+                <a:latin typeface="Apple SD Gothic Neo"/>
+              </a:rPr>
+              <a:t/>
+            </a:r>
+          </a:p>
+          <a:p>
+            <a:pPr algn="l"/>
+            <a:r>
+              <a:rPr sz="2100" b="1">
+                <a:solidFill>
+                  <a:srgbClr val="1A1A1A"/>
+                </a:solidFill>
+                <a:latin typeface="Apple SD Gothic Neo"/>
+              </a:rPr>
+              <a:t>보험료를 '맞춤 계산'까지
+만들려 함</a:t>
+            </a:r>
+          </a:p>
+        </p:txBody>
+      </p:sp>
+      <p:sp>
+        <p:nvSpPr>
+          <p:cNvPr id="5" name="TextBox 4"/>
           <p:cNvSpPr txBox="1"/>
           <p:nvPr/>
         </p:nvSpPr>
         <p:spPr>
           <a:xfrm>
-            <a:off x="822960" y="2651760"/>
-            <a:ext cx="10607040" cy="1554480"/>
+            <a:off x="5733288" y="3383280"/>
+            <a:ext cx="731520" cy="640080"/>
           </a:xfrm>
           <a:prstGeom prst="rect">
             <a:avLst/>
@@ -12828,13 +12852,93 @@
           <a:p>
             <a:pPr algn="ctr"/>
             <a:r>
-              <a:rPr sz="4000" b="1" spc="-60">
+              <a:rPr sz="3400" b="1">
+                <a:solidFill>
+                  <a:srgbClr val="5B5BD6"/>
+                </a:solidFill>
+                <a:latin typeface="Apple SD Gothic Neo"/>
+              </a:rPr>
+              <a:t>→</a:t>
+            </a:r>
+          </a:p>
+        </p:txBody>
+      </p:sp>
+      <p:sp>
+        <p:nvSpPr>
+          <p:cNvPr id="6" name="Rounded Rectangle 5"/>
+          <p:cNvSpPr/>
+          <p:nvPr/>
+        </p:nvSpPr>
+        <p:spPr>
+          <a:xfrm>
+            <a:off x="6629400" y="2743200"/>
+            <a:ext cx="4800600" cy="1920240"/>
+          </a:xfrm>
+          <a:prstGeom prst="roundRect">
+            <a:avLst>
+              <a:gd name="adj" fmla="val 12000"/>
+            </a:avLst>
+          </a:prstGeom>
+          <a:solidFill>
+            <a:srgbClr val="ECEBFB"/>
+          </a:solidFill>
+          <a:ln>
+            <a:noFill/>
+          </a:ln>
+          <a:effectLst/>
+        </p:spPr>
+        <p:style>
+          <a:lnRef idx="1">
+            <a:schemeClr val="accent1"/>
+          </a:lnRef>
+          <a:fillRef idx="3">
+            <a:schemeClr val="accent1"/>
+          </a:fillRef>
+          <a:effectRef idx="2">
+            <a:schemeClr val="accent1"/>
+          </a:effectRef>
+          <a:fontRef idx="minor">
+            <a:schemeClr val="lt1"/>
+          </a:fontRef>
+        </p:style>
+        <p:txBody>
+          <a:bodyPr rtlCol="0" anchor="ctr" tIns="101600" bIns="101600" lIns="203200" rIns="203200" wrap="square"/>
+          <a:lstStyle/>
+          <a:p>
+            <a:pPr algn="l"/>
+            <a:r>
+              <a:rPr sz="1600" b="1">
+                <a:solidFill>
+                  <a:srgbClr val="5B5BD6"/>
+                </a:solidFill>
+                <a:latin typeface="Apple SD Gothic Neo"/>
+              </a:rPr>
+              <a:t>내가 통제</a:t>
+            </a:r>
+          </a:p>
+          <a:p>
+            <a:pPr algn="l"/>
+            <a:r>
+              <a:rPr sz="600" b="0">
+                <a:solidFill>
+                  <a:srgbClr val="6B7280"/>
+                </a:solidFill>
+                <a:latin typeface="Apple SD Gothic Neo"/>
+              </a:rPr>
+              <a:t/>
+            </a:r>
+          </a:p>
+          <a:p>
+            <a:pPr algn="l"/>
+            <a:r>
+              <a:rPr sz="2100" b="1">
                 <a:solidFill>
                   <a:srgbClr val="1A1A1A"/>
                 </a:solidFill>
                 <a:latin typeface="Apple SD Gothic Neo"/>
               </a:rPr>
-              <a:t>한 Epic에  $39.63  ·  토큰 5,100만</a:t>
+              <a:t>유스케이스 범위(예시만)로
+되돌림</a:t>
             </a:r>
           </a:p>
         </p:txBody>
@@ -12895,7 +12999,7 @@
                 </a:solidFill>
                 <a:latin typeface="Apple SD Gothic Neo"/>
               </a:rPr>
-              <a:t>돈 먹은 범인</a:t>
+              <a:t>취조 ④ — 멋대로 늘린 걸 막다</a:t>
             </a:r>
           </a:p>
         </p:txBody>
@@ -12946,14 +13050,96 @@
       </p:sp>
       <p:sp>
         <p:nvSpPr>
-          <p:cNvPr id="4" name="TextBox 3"/>
+          <p:cNvPr id="4" name="Rounded Rectangle 3"/>
+          <p:cNvSpPr/>
+          <p:nvPr/>
+        </p:nvSpPr>
+        <p:spPr>
+          <a:xfrm>
+            <a:off x="777240" y="2743200"/>
+            <a:ext cx="4800600" cy="1920240"/>
+          </a:xfrm>
+          <a:prstGeom prst="roundRect">
+            <a:avLst>
+              <a:gd name="adj" fmla="val 12000"/>
+            </a:avLst>
+          </a:prstGeom>
+          <a:solidFill>
+            <a:srgbClr val="F4F4F6"/>
+          </a:solidFill>
+          <a:ln w="16510">
+            <a:solidFill>
+              <a:srgbClr val="E6E6E6"/>
+            </a:solidFill>
+          </a:ln>
+          <a:effectLst/>
+        </p:spPr>
+        <p:style>
+          <a:lnRef idx="1">
+            <a:schemeClr val="accent1"/>
+          </a:lnRef>
+          <a:fillRef idx="3">
+            <a:schemeClr val="accent1"/>
+          </a:fillRef>
+          <a:effectRef idx="2">
+            <a:schemeClr val="accent1"/>
+          </a:effectRef>
+          <a:fontRef idx="minor">
+            <a:schemeClr val="lt1"/>
+          </a:fontRef>
+        </p:style>
+        <p:txBody>
+          <a:bodyPr rtlCol="0" anchor="ctr" tIns="101600" bIns="101600" lIns="203200" rIns="203200" wrap="square"/>
+          <a:lstStyle/>
+          <a:p>
+            <a:pPr algn="l"/>
+            <a:r>
+              <a:rPr sz="1600" b="1">
+                <a:solidFill>
+                  <a:srgbClr val="6B7280"/>
+                </a:solidFill>
+                <a:latin typeface="Apple SD Gothic Neo"/>
+              </a:rPr>
+              <a:t>AI가 한 것</a:t>
+            </a:r>
+          </a:p>
+          <a:p>
+            <a:pPr algn="l"/>
+            <a:r>
+              <a:rPr sz="600" b="0">
+                <a:solidFill>
+                  <a:srgbClr val="6B7280"/>
+                </a:solidFill>
+                <a:latin typeface="Apple SD Gothic Neo"/>
+              </a:rPr>
+              <a:t/>
+            </a:r>
+          </a:p>
+          <a:p>
+            <a:pPr algn="l"/>
+            <a:r>
+              <a:rPr sz="2100" b="1">
+                <a:solidFill>
+                  <a:srgbClr val="1A1A1A"/>
+                </a:solidFill>
+                <a:latin typeface="Apple SD Gothic Neo"/>
+              </a:rPr>
+              <a:t>상태값에 CONDITIONAL을
+임의로 추가</a:t>
+            </a:r>
+          </a:p>
+        </p:txBody>
+      </p:sp>
+      <p:sp>
+        <p:nvSpPr>
+          <p:cNvPr id="5" name="TextBox 4"/>
           <p:cNvSpPr txBox="1"/>
           <p:nvPr/>
         </p:nvSpPr>
         <p:spPr>
           <a:xfrm>
-            <a:off x="822960" y="2651760"/>
-            <a:ext cx="10607040" cy="1554480"/>
+            <a:off x="5733288" y="3383280"/>
+            <a:ext cx="731520" cy="640080"/>
           </a:xfrm>
           <a:prstGeom prst="rect">
             <a:avLst/>
@@ -12968,49 +13154,93 @@
           <a:p>
             <a:pPr algn="ctr"/>
             <a:r>
-              <a:rPr sz="3400" b="1" spc="-60">
+              <a:rPr sz="3400" b="1">
+                <a:solidFill>
+                  <a:srgbClr val="5B5BD6"/>
+                </a:solidFill>
+                <a:latin typeface="Apple SD Gothic Neo"/>
+              </a:rPr>
+              <a:t>→</a:t>
+            </a:r>
+          </a:p>
+        </p:txBody>
+      </p:sp>
+      <p:sp>
+        <p:nvSpPr>
+          <p:cNvPr id="6" name="Rounded Rectangle 5"/>
+          <p:cNvSpPr/>
+          <p:nvPr/>
+        </p:nvSpPr>
+        <p:spPr>
+          <a:xfrm>
+            <a:off x="6629400" y="2743200"/>
+            <a:ext cx="4800600" cy="1920240"/>
+          </a:xfrm>
+          <a:prstGeom prst="roundRect">
+            <a:avLst>
+              <a:gd name="adj" fmla="val 12000"/>
+            </a:avLst>
+          </a:prstGeom>
+          <a:solidFill>
+            <a:srgbClr val="ECEBFB"/>
+          </a:solidFill>
+          <a:ln>
+            <a:noFill/>
+          </a:ln>
+          <a:effectLst/>
+        </p:spPr>
+        <p:style>
+          <a:lnRef idx="1">
+            <a:schemeClr val="accent1"/>
+          </a:lnRef>
+          <a:fillRef idx="3">
+            <a:schemeClr val="accent1"/>
+          </a:fillRef>
+          <a:effectRef idx="2">
+            <a:schemeClr val="accent1"/>
+          </a:effectRef>
+          <a:fontRef idx="minor">
+            <a:schemeClr val="lt1"/>
+          </a:fontRef>
+        </p:style>
+        <p:txBody>
+          <a:bodyPr rtlCol="0" anchor="ctr" tIns="101600" bIns="101600" lIns="203200" rIns="203200" wrap="square"/>
+          <a:lstStyle/>
+          <a:p>
+            <a:pPr algn="l"/>
+            <a:r>
+              <a:rPr sz="1600" b="1">
+                <a:solidFill>
+                  <a:srgbClr val="5B5BD6"/>
+                </a:solidFill>
+                <a:latin typeface="Apple SD Gothic Neo"/>
+              </a:rPr>
+              <a:t>내가 통제</a:t>
+            </a:r>
+          </a:p>
+          <a:p>
+            <a:pPr algn="l"/>
+            <a:r>
+              <a:rPr sz="600" b="0">
+                <a:solidFill>
+                  <a:srgbClr val="6B7280"/>
+                </a:solidFill>
+                <a:latin typeface="Apple SD Gothic Neo"/>
+              </a:rPr>
+              <a:t/>
+            </a:r>
+          </a:p>
+          <a:p>
+            <a:pPr algn="l"/>
+            <a:r>
+              <a:rPr sz="2100" b="1">
                 <a:solidFill>
                   <a:srgbClr val="1A1A1A"/>
                 </a:solidFill>
                 <a:latin typeface="Apple SD Gothic Neo"/>
               </a:rPr>
-              <a:t>코드 생성이 아니라
-'긴 컨텍스트 재읽기'</a:t>
-            </a:r>
-          </a:p>
-        </p:txBody>
-      </p:sp>
-      <p:sp>
-        <p:nvSpPr>
-          <p:cNvPr id="5" name="TextBox 4"/>
-          <p:cNvSpPr txBox="1"/>
-          <p:nvPr/>
-        </p:nvSpPr>
-        <p:spPr>
-          <a:xfrm>
-            <a:off x="822960" y="4434840"/>
-            <a:ext cx="10607040" cy="914400"/>
-          </a:xfrm>
-          <a:prstGeom prst="rect">
-            <a:avLst/>
-          </a:prstGeom>
-          <a:noFill/>
-        </p:spPr>
-        <p:txBody>
-          <a:bodyPr wrap="square" anchor="t">
-            <a:spAutoFit/>
-          </a:bodyPr>
-          <a:lstStyle/>
-          <a:p>
-            <a:pPr algn="ctr"/>
-            <a:r>
-              <a:rPr sz="2200" b="0" spc="-30">
-                <a:solidFill>
-                  <a:srgbClr val="6B7280"/>
-                </a:solidFill>
-                <a:latin typeface="Apple SD Gothic Neo"/>
-              </a:rPr>
-              <a:t>캐시 읽기만 4,580만 토큰 — 전체 비용의 90%</a:t>
+              <a:t>다이어그램 3값 유지,
+조건부는 심사가 책임</a:t>
             </a:r>
           </a:p>
         </p:txBody>
@@ -13049,8 +13279,8 @@
         </p:nvSpPr>
         <p:spPr>
           <a:xfrm>
-            <a:off x="749808" y="566928"/>
-            <a:ext cx="10881360" cy="1371600"/>
+            <a:off x="749808" y="457200"/>
+            <a:ext cx="10881360" cy="1188720"/>
           </a:xfrm>
           <a:prstGeom prst="rect">
             <a:avLst/>
@@ -13065,13 +13295,13 @@
           <a:p>
             <a:pPr algn="l"/>
             <a:r>
-              <a:rPr sz="4600" b="1" spc="-100">
+              <a:rPr sz="4400" b="1" spc="-100">
                 <a:solidFill>
                   <a:srgbClr val="1A1A1A"/>
                 </a:solidFill>
                 <a:latin typeface="Apple SD Gothic Neo"/>
               </a:rPr>
-              <a:t>그래서 바꾼 것</a:t>
+              <a:t>AI는 공짜가 아니다</a:t>
             </a:r>
           </a:p>
         </p:txBody>
@@ -13084,7 +13314,7 @@
         </p:nvSpPr>
         <p:spPr>
           <a:xfrm>
-            <a:off x="822960" y="1554480"/>
+            <a:off x="822960" y="1417320"/>
             <a:ext cx="868680" cy="82296"/>
           </a:xfrm>
           <a:prstGeom prst="rect">
@@ -13129,7 +13359,7 @@
         <p:spPr>
           <a:xfrm>
             <a:off x="822960" y="2286000"/>
-            <a:ext cx="10607040" cy="914400"/>
+            <a:ext cx="10607040" cy="1097280"/>
           </a:xfrm>
           <a:prstGeom prst="rect">
             <a:avLst/>
@@ -13137,20 +13367,20 @@
           <a:noFill/>
         </p:spPr>
         <p:txBody>
-          <a:bodyPr wrap="square" anchor="t">
+          <a:bodyPr wrap="square" anchor="ctr">
             <a:spAutoFit/>
           </a:bodyPr>
           <a:lstStyle/>
           <a:p>
             <a:pPr algn="ctr"/>
             <a:r>
-              <a:rPr sz="2600" b="1" spc="-40">
+              <a:rPr sz="4000" b="1" spc="-60">
                 <a:solidFill>
                   <a:srgbClr val="1A1A1A"/>
                 </a:solidFill>
                 <a:latin typeface="Apple SD Gothic Neo"/>
               </a:rPr>
-              <a:t>비용을 줄이려고 습관을 바꿨다.</a:t>
+              <a:t>한 Epic에  $39.63  ·  토큰 5,100만</a:t>
             </a:r>
           </a:p>
         </p:txBody>
@@ -13163,8 +13393,8 @@
         </p:nvSpPr>
         <p:spPr>
           <a:xfrm>
-            <a:off x="1066647" y="3566160"/>
-            <a:ext cx="3108960" cy="1371600"/>
+            <a:off x="2194560" y="3931920"/>
+            <a:ext cx="3566160" cy="1280160"/>
           </a:xfrm>
           <a:prstGeom prst="roundRect">
             <a:avLst>
@@ -13172,12 +13402,10 @@
             </a:avLst>
           </a:prstGeom>
           <a:solidFill>
-            <a:srgbClr val="F4F4F6"/>
+            <a:srgbClr val="5B5BD6"/>
           </a:solidFill>
-          <a:ln w="16510">
-            <a:solidFill>
-              <a:srgbClr val="E6E6E6"/>
-            </a:solidFill>
+          <a:ln>
+            <a:noFill/>
           </a:ln>
           <a:effectLst/>
         </p:spPr>
@@ -13196,19 +13424,30 @@
           </a:fontRef>
         </p:style>
         <p:txBody>
-          <a:bodyPr rtlCol="0" anchor="ctr" tIns="101600" bIns="101600" lIns="203200" rIns="203200" wrap="square"/>
-          <a:lstStyle/>
-          <a:p>
-            <a:pPr algn="ctr"/>
-            <a:r>
-              <a:rPr sz="2100" b="1">
-                <a:solidFill>
-                  <a:srgbClr val="1A1A1A"/>
-                </a:solidFill>
-                <a:latin typeface="Apple SD Gothic Neo"/>
-              </a:rPr>
-              <a:t>Epic 끝나면
-/clear</a:t>
+          <a:bodyPr rtlCol="0" anchor="ctr" tIns="76200" bIns="76200" lIns="203200" rIns="177800" wrap="square"/>
+          <a:lstStyle/>
+          <a:p>
+            <a:pPr algn="ctr"/>
+            <a:r>
+              <a:rPr sz="1600" b="1">
+                <a:solidFill>
+                  <a:srgbClr val="FFFFFF"/>
+                </a:solidFill>
+                <a:latin typeface="Apple SD Gothic Neo"/>
+              </a:rPr>
+              <a:t>5시간 한도</a:t>
+            </a:r>
+          </a:p>
+          <a:p>
+            <a:pPr algn="ctr"/>
+            <a:r>
+              <a:rPr sz="3000" b="1">
+                <a:solidFill>
+                  <a:srgbClr val="FFFFFF"/>
+                </a:solidFill>
+                <a:latin typeface="Apple SD Gothic Neo"/>
+              </a:rPr>
+              <a:t>96% 소진</a:t>
             </a:r>
           </a:p>
         </p:txBody>
@@ -13221,8 +13460,8 @@
         </p:nvSpPr>
         <p:spPr>
           <a:xfrm>
-            <a:off x="4541367" y="3566160"/>
-            <a:ext cx="3108960" cy="1371600"/>
+            <a:off x="6400800" y="3931920"/>
+            <a:ext cx="3566160" cy="1280160"/>
           </a:xfrm>
           <a:prstGeom prst="roundRect">
             <a:avLst>
@@ -13230,12 +13469,10 @@
             </a:avLst>
           </a:prstGeom>
           <a:solidFill>
-            <a:srgbClr val="F4F4F6"/>
+            <a:srgbClr val="ECEBFB"/>
           </a:solidFill>
-          <a:ln w="16510">
-            <a:solidFill>
-              <a:srgbClr val="E6E6E6"/>
-            </a:solidFill>
+          <a:ln>
+            <a:noFill/>
           </a:ln>
           <a:effectLst/>
         </p:spPr>
@@ -13254,77 +13491,65 @@
           </a:fontRef>
         </p:style>
         <p:txBody>
-          <a:bodyPr rtlCol="0" anchor="ctr" tIns="101600" bIns="101600" lIns="203200" rIns="203200" wrap="square"/>
-          <a:lstStyle/>
-          <a:p>
-            <a:pPr algn="ctr"/>
-            <a:r>
-              <a:rPr sz="2100" b="1">
+          <a:bodyPr rtlCol="0" anchor="ctr" tIns="76200" bIns="76200" lIns="203200" rIns="177800" wrap="square"/>
+          <a:lstStyle/>
+          <a:p>
+            <a:pPr algn="ctr"/>
+            <a:r>
+              <a:rPr sz="1600" b="1">
+                <a:solidFill>
+                  <a:srgbClr val="5B5BD6"/>
+                </a:solidFill>
+                <a:latin typeface="Apple SD Gothic Neo"/>
+              </a:rPr>
+              <a:t>주간 한도</a:t>
+            </a:r>
+          </a:p>
+          <a:p>
+            <a:pPr algn="ctr"/>
+            <a:r>
+              <a:rPr sz="3000" b="1">
                 <a:solidFill>
                   <a:srgbClr val="1A1A1A"/>
                 </a:solidFill>
                 <a:latin typeface="Apple SD Gothic Neo"/>
               </a:rPr>
-              <a:t>단순 작업은
-Sonnet</a:t>
-            </a:r>
-          </a:p>
-        </p:txBody>
-      </p:sp>
-      <p:sp>
-        <p:nvSpPr>
-          <p:cNvPr id="7" name="Rounded Rectangle 6"/>
-          <p:cNvSpPr/>
-          <p:nvPr/>
-        </p:nvSpPr>
-        <p:spPr>
-          <a:xfrm>
-            <a:off x="8016087" y="3566160"/>
-            <a:ext cx="3108960" cy="1371600"/>
-          </a:xfrm>
-          <a:prstGeom prst="roundRect">
-            <a:avLst>
-              <a:gd name="adj" fmla="val 12000"/>
-            </a:avLst>
-          </a:prstGeom>
-          <a:solidFill>
-            <a:srgbClr val="F4F4F6"/>
-          </a:solidFill>
-          <a:ln w="16510">
-            <a:solidFill>
-              <a:srgbClr val="E6E6E6"/>
-            </a:solidFill>
-          </a:ln>
-          <a:effectLst/>
-        </p:spPr>
-        <p:style>
-          <a:lnRef idx="1">
-            <a:schemeClr val="accent1"/>
-          </a:lnRef>
-          <a:fillRef idx="3">
-            <a:schemeClr val="accent1"/>
-          </a:fillRef>
-          <a:effectRef idx="2">
-            <a:schemeClr val="accent1"/>
-          </a:effectRef>
-          <a:fontRef idx="minor">
-            <a:schemeClr val="lt1"/>
-          </a:fontRef>
-        </p:style>
-        <p:txBody>
-          <a:bodyPr rtlCol="0" anchor="ctr" tIns="101600" bIns="101600" lIns="203200" rIns="203200" wrap="square"/>
-          <a:lstStyle/>
-          <a:p>
-            <a:pPr algn="ctr"/>
-            <a:r>
-              <a:rPr sz="2100" b="1">
-                <a:solidFill>
-                  <a:srgbClr val="1A1A1A"/>
-                </a:solidFill>
-                <a:latin typeface="Apple SD Gothic Neo"/>
-              </a:rPr>
-              <a:t>리뷰 횟수
-최소화</a:t>
+              <a:t>27% 소진</a:t>
+            </a:r>
+          </a:p>
+        </p:txBody>
+      </p:sp>
+      <p:sp>
+        <p:nvSpPr>
+          <p:cNvPr id="7" name="TextBox 6"/>
+          <p:cNvSpPr txBox="1"/>
+          <p:nvPr/>
+        </p:nvSpPr>
+        <p:spPr>
+          <a:xfrm>
+            <a:off x="822960" y="5486400"/>
+            <a:ext cx="10607040" cy="640080"/>
+          </a:xfrm>
+          <a:prstGeom prst="rect">
+            <a:avLst/>
+          </a:prstGeom>
+          <a:noFill/>
+        </p:spPr>
+        <p:txBody>
+          <a:bodyPr wrap="square" anchor="t">
+            <a:spAutoFit/>
+          </a:bodyPr>
+          <a:lstStyle/>
+          <a:p>
+            <a:pPr algn="ctr"/>
+            <a:r>
+              <a:rPr sz="2200" b="0" spc="-30">
+                <a:solidFill>
+                  <a:srgbClr val="6B7280"/>
+                </a:solidFill>
+                <a:latin typeface="Apple SD Gothic Neo"/>
+              </a:rPr>
+              <a:t>Claude Code 한 세션이 5시간 토큰 한도를 거의 다 먹었다.</a:t>
             </a:r>
           </a:p>
         </p:txBody>
@@ -13385,7 +13610,7 @@
                 </a:solidFill>
                 <a:latin typeface="Apple SD Gothic Neo"/>
               </a:rPr>
-              <a:t>다중 리뷰의 두 얼굴</a:t>
+              <a:t>돈 먹은 범인</a:t>
             </a:r>
           </a:p>
         </p:txBody>
@@ -13436,159 +13661,71 @@
       </p:sp>
       <p:sp>
         <p:nvSpPr>
-          <p:cNvPr id="4" name="Rounded Rectangle 3"/>
-          <p:cNvSpPr/>
-          <p:nvPr/>
-        </p:nvSpPr>
-        <p:spPr>
-          <a:xfrm>
-            <a:off x="777240" y="2743200"/>
-            <a:ext cx="4800600" cy="1920240"/>
-          </a:xfrm>
-          <a:prstGeom prst="roundRect">
-            <a:avLst>
-              <a:gd name="adj" fmla="val 12000"/>
-            </a:avLst>
-          </a:prstGeom>
-          <a:solidFill>
-            <a:srgbClr val="ECEBFB"/>
-          </a:solidFill>
-          <a:ln>
-            <a:noFill/>
-          </a:ln>
-          <a:effectLst/>
-        </p:spPr>
-        <p:style>
-          <a:lnRef idx="1">
-            <a:schemeClr val="accent1"/>
-          </a:lnRef>
-          <a:fillRef idx="3">
-            <a:schemeClr val="accent1"/>
-          </a:fillRef>
-          <a:effectRef idx="2">
-            <a:schemeClr val="accent1"/>
-          </a:effectRef>
-          <a:fontRef idx="minor">
-            <a:schemeClr val="lt1"/>
-          </a:fontRef>
-        </p:style>
-        <p:txBody>
-          <a:bodyPr rtlCol="0" anchor="ctr" tIns="101600" bIns="101600" lIns="203200" rIns="203200" wrap="square"/>
-          <a:lstStyle/>
-          <a:p>
-            <a:pPr algn="l"/>
-            <a:r>
-              <a:rPr sz="1800" b="1">
-                <a:solidFill>
-                  <a:srgbClr val="5B5BD6"/>
-                </a:solidFill>
-                <a:latin typeface="Apple SD Gothic Neo"/>
-              </a:rPr>
-              <a:t>좋은 점</a:t>
-            </a:r>
-          </a:p>
-          <a:p>
-            <a:pPr algn="l"/>
-            <a:r>
-              <a:rPr sz="600" b="0">
+          <p:cNvPr id="4" name="TextBox 3"/>
+          <p:cNvSpPr txBox="1"/>
+          <p:nvPr/>
+        </p:nvSpPr>
+        <p:spPr>
+          <a:xfrm>
+            <a:off x="822960" y="2651760"/>
+            <a:ext cx="10607040" cy="1554480"/>
+          </a:xfrm>
+          <a:prstGeom prst="rect">
+            <a:avLst/>
+          </a:prstGeom>
+          <a:noFill/>
+        </p:spPr>
+        <p:txBody>
+          <a:bodyPr wrap="square" anchor="ctr">
+            <a:spAutoFit/>
+          </a:bodyPr>
+          <a:lstStyle/>
+          <a:p>
+            <a:pPr algn="ctr"/>
+            <a:r>
+              <a:rPr sz="3400" b="1" spc="-60">
+                <a:solidFill>
+                  <a:srgbClr val="1A1A1A"/>
+                </a:solidFill>
+                <a:latin typeface="Apple SD Gothic Neo"/>
+              </a:rPr>
+              <a:t>코드 생성이 아니라
+'긴 컨텍스트 재읽기'</a:t>
+            </a:r>
+          </a:p>
+        </p:txBody>
+      </p:sp>
+      <p:sp>
+        <p:nvSpPr>
+          <p:cNvPr id="5" name="TextBox 4"/>
+          <p:cNvSpPr txBox="1"/>
+          <p:nvPr/>
+        </p:nvSpPr>
+        <p:spPr>
+          <a:xfrm>
+            <a:off x="822960" y="4434840"/>
+            <a:ext cx="10607040" cy="914400"/>
+          </a:xfrm>
+          <a:prstGeom prst="rect">
+            <a:avLst/>
+          </a:prstGeom>
+          <a:noFill/>
+        </p:spPr>
+        <p:txBody>
+          <a:bodyPr wrap="square" anchor="t">
+            <a:spAutoFit/>
+          </a:bodyPr>
+          <a:lstStyle/>
+          <a:p>
+            <a:pPr algn="ctr"/>
+            <a:r>
+              <a:rPr sz="2200" b="0" spc="-30">
                 <a:solidFill>
                   <a:srgbClr val="6B7280"/>
                 </a:solidFill>
                 <a:latin typeface="Apple SD Gothic Neo"/>
               </a:rPr>
-              <a:t/>
-            </a:r>
-          </a:p>
-          <a:p>
-            <a:pPr algn="l"/>
-            <a:r>
-              <a:rPr sz="2100" b="1">
-                <a:solidFill>
-                  <a:srgbClr val="1A1A1A"/>
-                </a:solidFill>
-                <a:latin typeface="Apple SD Gothic Neo"/>
-              </a:rPr>
-              <a:t>버그 6개를 미리 발견</a:t>
-            </a:r>
-          </a:p>
-        </p:txBody>
-      </p:sp>
-      <p:sp>
-        <p:nvSpPr>
-          <p:cNvPr id="5" name="Rounded Rectangle 4"/>
-          <p:cNvSpPr/>
-          <p:nvPr/>
-        </p:nvSpPr>
-        <p:spPr>
-          <a:xfrm>
-            <a:off x="6629400" y="2743200"/>
-            <a:ext cx="4800600" cy="1920240"/>
-          </a:xfrm>
-          <a:prstGeom prst="roundRect">
-            <a:avLst>
-              <a:gd name="adj" fmla="val 12000"/>
-            </a:avLst>
-          </a:prstGeom>
-          <a:solidFill>
-            <a:srgbClr val="F4F4F6"/>
-          </a:solidFill>
-          <a:ln>
-            <a:noFill/>
-          </a:ln>
-          <a:effectLst/>
-        </p:spPr>
-        <p:style>
-          <a:lnRef idx="1">
-            <a:schemeClr val="accent1"/>
-          </a:lnRef>
-          <a:fillRef idx="3">
-            <a:schemeClr val="accent1"/>
-          </a:fillRef>
-          <a:effectRef idx="2">
-            <a:schemeClr val="accent1"/>
-          </a:effectRef>
-          <a:fontRef idx="minor">
-            <a:schemeClr val="lt1"/>
-          </a:fontRef>
-        </p:style>
-        <p:txBody>
-          <a:bodyPr rtlCol="0" anchor="ctr" tIns="101600" bIns="101600" lIns="203200" rIns="203200" wrap="square"/>
-          <a:lstStyle/>
-          <a:p>
-            <a:pPr algn="l"/>
-            <a:r>
-              <a:rPr sz="1800" b="1">
-                <a:solidFill>
-                  <a:srgbClr val="6B7280"/>
-                </a:solidFill>
-                <a:latin typeface="Apple SD Gothic Neo"/>
-              </a:rPr>
-              <a:t>아쉬운 점</a:t>
-            </a:r>
-          </a:p>
-          <a:p>
-            <a:pPr algn="l"/>
-            <a:r>
-              <a:rPr sz="600" b="0">
-                <a:solidFill>
-                  <a:srgbClr val="6B7280"/>
-                </a:solidFill>
-                <a:latin typeface="Apple SD Gothic Neo"/>
-              </a:rPr>
-              <a:t/>
-            </a:r>
-          </a:p>
-          <a:p>
-            <a:pPr algn="l"/>
-            <a:r>
-              <a:rPr sz="2100" b="1">
-                <a:solidFill>
-                  <a:srgbClr val="1A1A1A"/>
-                </a:solidFill>
-                <a:latin typeface="Apple SD Gothic Neo"/>
-              </a:rPr>
-              <a:t>단순 작업까지 3중 리뷰
-→ 비용 과다</a:t>
+              <a:t>캐시 읽기만 4,580만 토큰 — 전체 비용의 90%</a:t>
             </a:r>
           </a:p>
         </p:txBody>
@@ -13649,7 +13786,7 @@
                 </a:solidFill>
                 <a:latin typeface="Apple SD Gothic Neo"/>
               </a:rPr>
-              <a:t>가장 큰 실수 — 발견</a:t>
+              <a:t>그래서 바꾼 것</a:t>
             </a:r>
           </a:p>
         </p:txBody>
@@ -13706,8 +13843,8 @@
         </p:nvSpPr>
         <p:spPr>
           <a:xfrm>
-            <a:off x="822960" y="2651760"/>
-            <a:ext cx="10607040" cy="1554480"/>
+            <a:off x="822960" y="2286000"/>
+            <a:ext cx="10607040" cy="914400"/>
           </a:xfrm>
           <a:prstGeom prst="rect">
             <a:avLst/>
@@ -13715,21 +13852,194 @@
           <a:noFill/>
         </p:spPr>
         <p:txBody>
-          <a:bodyPr wrap="square" anchor="ctr">
+          <a:bodyPr wrap="square" anchor="t">
             <a:spAutoFit/>
           </a:bodyPr>
           <a:lstStyle/>
           <a:p>
             <a:pPr algn="ctr"/>
             <a:r>
-              <a:rPr sz="3300" b="1" spc="-60">
+              <a:rPr sz="2600" b="1" spc="-40">
                 <a:solidFill>
                   <a:srgbClr val="1A1A1A"/>
                 </a:solidFill>
                 <a:latin typeface="Apple SD Gothic Neo"/>
               </a:rPr>
-              <a:t>자동차 사고가 직원 '심사 목록'에
-끝까지 안 떴다.</a:t>
+              <a:t>비용을 줄이려고 습관을 바꿨다.</a:t>
+            </a:r>
+          </a:p>
+        </p:txBody>
+      </p:sp>
+      <p:sp>
+        <p:nvSpPr>
+          <p:cNvPr id="5" name="Rounded Rectangle 4"/>
+          <p:cNvSpPr/>
+          <p:nvPr/>
+        </p:nvSpPr>
+        <p:spPr>
+          <a:xfrm>
+            <a:off x="1066647" y="3566160"/>
+            <a:ext cx="3108960" cy="1371600"/>
+          </a:xfrm>
+          <a:prstGeom prst="roundRect">
+            <a:avLst>
+              <a:gd name="adj" fmla="val 12000"/>
+            </a:avLst>
+          </a:prstGeom>
+          <a:solidFill>
+            <a:srgbClr val="F4F4F6"/>
+          </a:solidFill>
+          <a:ln w="16510">
+            <a:solidFill>
+              <a:srgbClr val="E6E6E6"/>
+            </a:solidFill>
+          </a:ln>
+          <a:effectLst/>
+        </p:spPr>
+        <p:style>
+          <a:lnRef idx="1">
+            <a:schemeClr val="accent1"/>
+          </a:lnRef>
+          <a:fillRef idx="3">
+            <a:schemeClr val="accent1"/>
+          </a:fillRef>
+          <a:effectRef idx="2">
+            <a:schemeClr val="accent1"/>
+          </a:effectRef>
+          <a:fontRef idx="minor">
+            <a:schemeClr val="lt1"/>
+          </a:fontRef>
+        </p:style>
+        <p:txBody>
+          <a:bodyPr rtlCol="0" anchor="ctr" tIns="101600" bIns="101600" lIns="203200" rIns="203200" wrap="square"/>
+          <a:lstStyle/>
+          <a:p>
+            <a:pPr algn="ctr"/>
+            <a:r>
+              <a:rPr sz="2100" b="1">
+                <a:solidFill>
+                  <a:srgbClr val="1A1A1A"/>
+                </a:solidFill>
+                <a:latin typeface="Apple SD Gothic Neo"/>
+              </a:rPr>
+              <a:t>Epic 끝나면
+/clear</a:t>
+            </a:r>
+          </a:p>
+        </p:txBody>
+      </p:sp>
+      <p:sp>
+        <p:nvSpPr>
+          <p:cNvPr id="6" name="Rounded Rectangle 5"/>
+          <p:cNvSpPr/>
+          <p:nvPr/>
+        </p:nvSpPr>
+        <p:spPr>
+          <a:xfrm>
+            <a:off x="4541367" y="3566160"/>
+            <a:ext cx="3108960" cy="1371600"/>
+          </a:xfrm>
+          <a:prstGeom prst="roundRect">
+            <a:avLst>
+              <a:gd name="adj" fmla="val 12000"/>
+            </a:avLst>
+          </a:prstGeom>
+          <a:solidFill>
+            <a:srgbClr val="F4F4F6"/>
+          </a:solidFill>
+          <a:ln w="16510">
+            <a:solidFill>
+              <a:srgbClr val="E6E6E6"/>
+            </a:solidFill>
+          </a:ln>
+          <a:effectLst/>
+        </p:spPr>
+        <p:style>
+          <a:lnRef idx="1">
+            <a:schemeClr val="accent1"/>
+          </a:lnRef>
+          <a:fillRef idx="3">
+            <a:schemeClr val="accent1"/>
+          </a:fillRef>
+          <a:effectRef idx="2">
+            <a:schemeClr val="accent1"/>
+          </a:effectRef>
+          <a:fontRef idx="minor">
+            <a:schemeClr val="lt1"/>
+          </a:fontRef>
+        </p:style>
+        <p:txBody>
+          <a:bodyPr rtlCol="0" anchor="ctr" tIns="101600" bIns="101600" lIns="203200" rIns="203200" wrap="square"/>
+          <a:lstStyle/>
+          <a:p>
+            <a:pPr algn="ctr"/>
+            <a:r>
+              <a:rPr sz="2100" b="1">
+                <a:solidFill>
+                  <a:srgbClr val="1A1A1A"/>
+                </a:solidFill>
+                <a:latin typeface="Apple SD Gothic Neo"/>
+              </a:rPr>
+              <a:t>단순 작업은
+Sonnet</a:t>
+            </a:r>
+          </a:p>
+        </p:txBody>
+      </p:sp>
+      <p:sp>
+        <p:nvSpPr>
+          <p:cNvPr id="7" name="Rounded Rectangle 6"/>
+          <p:cNvSpPr/>
+          <p:nvPr/>
+        </p:nvSpPr>
+        <p:spPr>
+          <a:xfrm>
+            <a:off x="8016087" y="3566160"/>
+            <a:ext cx="3108960" cy="1371600"/>
+          </a:xfrm>
+          <a:prstGeom prst="roundRect">
+            <a:avLst>
+              <a:gd name="adj" fmla="val 12000"/>
+            </a:avLst>
+          </a:prstGeom>
+          <a:solidFill>
+            <a:srgbClr val="F4F4F6"/>
+          </a:solidFill>
+          <a:ln w="16510">
+            <a:solidFill>
+              <a:srgbClr val="E6E6E6"/>
+            </a:solidFill>
+          </a:ln>
+          <a:effectLst/>
+        </p:spPr>
+        <p:style>
+          <a:lnRef idx="1">
+            <a:schemeClr val="accent1"/>
+          </a:lnRef>
+          <a:fillRef idx="3">
+            <a:schemeClr val="accent1"/>
+          </a:fillRef>
+          <a:effectRef idx="2">
+            <a:schemeClr val="accent1"/>
+          </a:effectRef>
+          <a:fontRef idx="minor">
+            <a:schemeClr val="lt1"/>
+          </a:fontRef>
+        </p:style>
+        <p:txBody>
+          <a:bodyPr rtlCol="0" anchor="ctr" tIns="101600" bIns="101600" lIns="203200" rIns="203200" wrap="square"/>
+          <a:lstStyle/>
+          <a:p>
+            <a:pPr algn="ctr"/>
+            <a:r>
+              <a:rPr sz="2100" b="1">
+                <a:solidFill>
+                  <a:srgbClr val="1A1A1A"/>
+                </a:solidFill>
+                <a:latin typeface="Apple SD Gothic Neo"/>
+              </a:rPr>
+              <a:t>리뷰 횟수
+최소화</a:t>
             </a:r>
           </a:p>
         </p:txBody>
@@ -14138,7 +14448,7 @@
                 </a:solidFill>
                 <a:latin typeface="Apple SD Gothic Neo"/>
               </a:rPr>
-              <a:t>왜? — 설계대로였다</a:t>
+              <a:t>다중 리뷰의 두 얼굴</a:t>
             </a:r>
           </a:p>
         </p:txBody>
@@ -14189,71 +14499,159 @@
       </p:sp>
       <p:sp>
         <p:nvSpPr>
-          <p:cNvPr id="4" name="TextBox 3"/>
-          <p:cNvSpPr txBox="1"/>
-          <p:nvPr/>
-        </p:nvSpPr>
-        <p:spPr>
-          <a:xfrm>
-            <a:off x="822960" y="2651760"/>
-            <a:ext cx="10607040" cy="1554480"/>
-          </a:xfrm>
-          <a:prstGeom prst="rect">
-            <a:avLst/>
-          </a:prstGeom>
-          <a:noFill/>
-        </p:spPr>
-        <p:txBody>
-          <a:bodyPr wrap="square" anchor="ctr">
-            <a:spAutoFit/>
-          </a:bodyPr>
-          <a:lstStyle/>
-          <a:p>
-            <a:pPr algn="ctr"/>
-            <a:r>
-              <a:rPr sz="3000" b="1" spc="-60">
+          <p:cNvPr id="4" name="Rounded Rectangle 3"/>
+          <p:cNvSpPr/>
+          <p:nvPr/>
+        </p:nvSpPr>
+        <p:spPr>
+          <a:xfrm>
+            <a:off x="777240" y="2743200"/>
+            <a:ext cx="4800600" cy="1920240"/>
+          </a:xfrm>
+          <a:prstGeom prst="roundRect">
+            <a:avLst>
+              <a:gd name="adj" fmla="val 12000"/>
+            </a:avLst>
+          </a:prstGeom>
+          <a:solidFill>
+            <a:srgbClr val="ECEBFB"/>
+          </a:solidFill>
+          <a:ln>
+            <a:noFill/>
+          </a:ln>
+          <a:effectLst/>
+        </p:spPr>
+        <p:style>
+          <a:lnRef idx="1">
+            <a:schemeClr val="accent1"/>
+          </a:lnRef>
+          <a:fillRef idx="3">
+            <a:schemeClr val="accent1"/>
+          </a:fillRef>
+          <a:effectRef idx="2">
+            <a:schemeClr val="accent1"/>
+          </a:effectRef>
+          <a:fontRef idx="minor">
+            <a:schemeClr val="lt1"/>
+          </a:fontRef>
+        </p:style>
+        <p:txBody>
+          <a:bodyPr rtlCol="0" anchor="ctr" tIns="101600" bIns="101600" lIns="203200" rIns="203200" wrap="square"/>
+          <a:lstStyle/>
+          <a:p>
+            <a:pPr algn="l"/>
+            <a:r>
+              <a:rPr sz="1800" b="1">
+                <a:solidFill>
+                  <a:srgbClr val="5B5BD6"/>
+                </a:solidFill>
+                <a:latin typeface="Apple SD Gothic Neo"/>
+              </a:rPr>
+              <a:t>좋은 점</a:t>
+            </a:r>
+          </a:p>
+          <a:p>
+            <a:pPr algn="l"/>
+            <a:r>
+              <a:rPr sz="600" b="0">
+                <a:solidFill>
+                  <a:srgbClr val="6B7280"/>
+                </a:solidFill>
+                <a:latin typeface="Apple SD Gothic Neo"/>
+              </a:rPr>
+              <a:t/>
+            </a:r>
+          </a:p>
+          <a:p>
+            <a:pPr algn="l"/>
+            <a:r>
+              <a:rPr sz="2100" b="1">
                 <a:solidFill>
                   <a:srgbClr val="1A1A1A"/>
                 </a:solidFill>
                 <a:latin typeface="Apple SD Gothic Neo"/>
               </a:rPr>
-              <a:t>유스케이스(UC09): 자동차 사고는
-'접수만', 심사 큐엔 안 들어감</a:t>
-            </a:r>
-          </a:p>
-        </p:txBody>
-      </p:sp>
-      <p:sp>
-        <p:nvSpPr>
-          <p:cNvPr id="5" name="TextBox 4"/>
-          <p:cNvSpPr txBox="1"/>
-          <p:nvPr/>
-        </p:nvSpPr>
-        <p:spPr>
-          <a:xfrm>
-            <a:off x="822960" y="4434840"/>
-            <a:ext cx="10607040" cy="914400"/>
-          </a:xfrm>
-          <a:prstGeom prst="rect">
-            <a:avLst/>
-          </a:prstGeom>
-          <a:noFill/>
-        </p:spPr>
-        <p:txBody>
-          <a:bodyPr wrap="square" anchor="t">
-            <a:spAutoFit/>
-          </a:bodyPr>
-          <a:lstStyle/>
-          <a:p>
-            <a:pPr algn="ctr"/>
-            <a:r>
-              <a:rPr sz="2200" b="0" spc="-30">
+              <a:t>버그 6개를 미리 발견</a:t>
+            </a:r>
+          </a:p>
+        </p:txBody>
+      </p:sp>
+      <p:sp>
+        <p:nvSpPr>
+          <p:cNvPr id="5" name="Rounded Rectangle 4"/>
+          <p:cNvSpPr/>
+          <p:nvPr/>
+        </p:nvSpPr>
+        <p:spPr>
+          <a:xfrm>
+            <a:off x="6629400" y="2743200"/>
+            <a:ext cx="4800600" cy="1920240"/>
+          </a:xfrm>
+          <a:prstGeom prst="roundRect">
+            <a:avLst>
+              <a:gd name="adj" fmla="val 12000"/>
+            </a:avLst>
+          </a:prstGeom>
+          <a:solidFill>
+            <a:srgbClr val="F4F4F6"/>
+          </a:solidFill>
+          <a:ln>
+            <a:noFill/>
+          </a:ln>
+          <a:effectLst/>
+        </p:spPr>
+        <p:style>
+          <a:lnRef idx="1">
+            <a:schemeClr val="accent1"/>
+          </a:lnRef>
+          <a:fillRef idx="3">
+            <a:schemeClr val="accent1"/>
+          </a:fillRef>
+          <a:effectRef idx="2">
+            <a:schemeClr val="accent1"/>
+          </a:effectRef>
+          <a:fontRef idx="minor">
+            <a:schemeClr val="lt1"/>
+          </a:fontRef>
+        </p:style>
+        <p:txBody>
+          <a:bodyPr rtlCol="0" anchor="ctr" tIns="101600" bIns="101600" lIns="203200" rIns="203200" wrap="square"/>
+          <a:lstStyle/>
+          <a:p>
+            <a:pPr algn="l"/>
+            <a:r>
+              <a:rPr sz="1800" b="1">
                 <a:solidFill>
                   <a:srgbClr val="6B7280"/>
                 </a:solidFill>
                 <a:latin typeface="Apple SD Gothic Neo"/>
               </a:rPr>
-              <a:t>버그가 아니라, 내가 그렇게 설계한 것</a:t>
+              <a:t>아쉬운 점</a:t>
+            </a:r>
+          </a:p>
+          <a:p>
+            <a:pPr algn="l"/>
+            <a:r>
+              <a:rPr sz="600" b="0">
+                <a:solidFill>
+                  <a:srgbClr val="6B7280"/>
+                </a:solidFill>
+                <a:latin typeface="Apple SD Gothic Neo"/>
+              </a:rPr>
+              <a:t/>
+            </a:r>
+          </a:p>
+          <a:p>
+            <a:pPr algn="l"/>
+            <a:r>
+              <a:rPr sz="2100" b="1">
+                <a:solidFill>
+                  <a:srgbClr val="1A1A1A"/>
+                </a:solidFill>
+                <a:latin typeface="Apple SD Gothic Neo"/>
+              </a:rPr>
+              <a:t>단순 작업까지 3중 리뷰
+→ 비용 과다</a:t>
             </a:r>
           </a:p>
         </p:txBody>
@@ -14314,7 +14712,7 @@
                 </a:solidFill>
                 <a:latin typeface="Apple SD Gothic Neo"/>
               </a:rPr>
-              <a:t>어떻게 데모를 살렸나</a:t>
+              <a:t>왜 Codex로 교차 리뷰했나</a:t>
             </a:r>
           </a:p>
         </p:txBody>
@@ -14365,14 +14763,95 @@
       </p:sp>
       <p:sp>
         <p:nvSpPr>
-          <p:cNvPr id="4" name="TextBox 3"/>
+          <p:cNvPr id="4" name="Rounded Rectangle 3"/>
+          <p:cNvSpPr/>
+          <p:nvPr/>
+        </p:nvSpPr>
+        <p:spPr>
+          <a:xfrm>
+            <a:off x="777240" y="2743200"/>
+            <a:ext cx="4800600" cy="1920240"/>
+          </a:xfrm>
+          <a:prstGeom prst="roundRect">
+            <a:avLst>
+              <a:gd name="adj" fmla="val 12000"/>
+            </a:avLst>
+          </a:prstGeom>
+          <a:solidFill>
+            <a:srgbClr val="F4F4F6"/>
+          </a:solidFill>
+          <a:ln w="16510">
+            <a:solidFill>
+              <a:srgbClr val="E6E6E6"/>
+            </a:solidFill>
+          </a:ln>
+          <a:effectLst/>
+        </p:spPr>
+        <p:style>
+          <a:lnRef idx="1">
+            <a:schemeClr val="accent1"/>
+          </a:lnRef>
+          <a:fillRef idx="3">
+            <a:schemeClr val="accent1"/>
+          </a:fillRef>
+          <a:effectRef idx="2">
+            <a:schemeClr val="accent1"/>
+          </a:effectRef>
+          <a:fontRef idx="minor">
+            <a:schemeClr val="lt1"/>
+          </a:fontRef>
+        </p:style>
+        <p:txBody>
+          <a:bodyPr rtlCol="0" anchor="ctr" tIns="76200" bIns="76200" lIns="203200" rIns="177800" wrap="square"/>
+          <a:lstStyle/>
+          <a:p>
+            <a:pPr algn="l"/>
+            <a:r>
+              <a:rPr sz="1800" b="1">
+                <a:solidFill>
+                  <a:srgbClr val="6B7280"/>
+                </a:solidFill>
+                <a:latin typeface="Apple SD Gothic Neo"/>
+              </a:rPr>
+              <a:t>같은 모델끼리 리뷰하면</a:t>
+            </a:r>
+          </a:p>
+          <a:p>
+            <a:pPr algn="l"/>
+            <a:r>
+              <a:rPr sz="600" b="0">
+                <a:solidFill>
+                  <a:srgbClr val="6B7280"/>
+                </a:solidFill>
+                <a:latin typeface="Apple SD Gothic Neo"/>
+              </a:rPr>
+              <a:t/>
+            </a:r>
+          </a:p>
+          <a:p>
+            <a:pPr algn="l"/>
+            <a:r>
+              <a:rPr sz="2100" b="1">
+                <a:solidFill>
+                  <a:srgbClr val="1A1A1A"/>
+                </a:solidFill>
+                <a:latin typeface="Apple SD Gothic Neo"/>
+              </a:rPr>
+              <a:t>같은 맹점을 똑같이 놓친다</a:t>
+            </a:r>
+          </a:p>
+        </p:txBody>
+      </p:sp>
+      <p:sp>
+        <p:nvSpPr>
+          <p:cNvPr id="5" name="TextBox 4"/>
           <p:cNvSpPr txBox="1"/>
           <p:nvPr/>
         </p:nvSpPr>
         <p:spPr>
           <a:xfrm>
-            <a:off x="822960" y="2651760"/>
-            <a:ext cx="10607040" cy="1554480"/>
+            <a:off x="5733288" y="3383280"/>
+            <a:ext cx="731520" cy="640080"/>
           </a:xfrm>
           <a:prstGeom prst="rect">
             <a:avLst/>
@@ -14387,14 +14866,127 @@
           <a:p>
             <a:pPr algn="ctr"/>
             <a:r>
-              <a:rPr sz="3000" b="1" spc="-60">
+              <a:rPr sz="3400" b="1">
+                <a:solidFill>
+                  <a:srgbClr val="5B5BD6"/>
+                </a:solidFill>
+                <a:latin typeface="Apple SD Gothic Neo"/>
+              </a:rPr>
+              <a:t>→</a:t>
+            </a:r>
+          </a:p>
+        </p:txBody>
+      </p:sp>
+      <p:sp>
+        <p:nvSpPr>
+          <p:cNvPr id="6" name="Rounded Rectangle 5"/>
+          <p:cNvSpPr/>
+          <p:nvPr/>
+        </p:nvSpPr>
+        <p:spPr>
+          <a:xfrm>
+            <a:off x="6629400" y="2743200"/>
+            <a:ext cx="4800600" cy="1920240"/>
+          </a:xfrm>
+          <a:prstGeom prst="roundRect">
+            <a:avLst>
+              <a:gd name="adj" fmla="val 12000"/>
+            </a:avLst>
+          </a:prstGeom>
+          <a:solidFill>
+            <a:srgbClr val="ECEBFB"/>
+          </a:solidFill>
+          <a:ln>
+            <a:noFill/>
+          </a:ln>
+          <a:effectLst/>
+        </p:spPr>
+        <p:style>
+          <a:lnRef idx="1">
+            <a:schemeClr val="accent1"/>
+          </a:lnRef>
+          <a:fillRef idx="3">
+            <a:schemeClr val="accent1"/>
+          </a:fillRef>
+          <a:effectRef idx="2">
+            <a:schemeClr val="accent1"/>
+          </a:effectRef>
+          <a:fontRef idx="minor">
+            <a:schemeClr val="lt1"/>
+          </a:fontRef>
+        </p:style>
+        <p:txBody>
+          <a:bodyPr rtlCol="0" anchor="ctr" tIns="76200" bIns="76200" lIns="203200" rIns="177800" wrap="square"/>
+          <a:lstStyle/>
+          <a:p>
+            <a:pPr algn="l"/>
+            <a:r>
+              <a:rPr sz="1800" b="1">
+                <a:solidFill>
+                  <a:srgbClr val="5B5BD6"/>
+                </a:solidFill>
+                <a:latin typeface="Apple SD Gothic Neo"/>
+              </a:rPr>
+              <a:t>그래서</a:t>
+            </a:r>
+          </a:p>
+          <a:p>
+            <a:pPr algn="l"/>
+            <a:r>
+              <a:rPr sz="600" b="0">
+                <a:solidFill>
+                  <a:srgbClr val="6B7280"/>
+                </a:solidFill>
+                <a:latin typeface="Apple SD Gothic Neo"/>
+              </a:rPr>
+              <a:t/>
+            </a:r>
+          </a:p>
+          <a:p>
+            <a:pPr algn="l"/>
+            <a:r>
+              <a:rPr sz="2100" b="1">
                 <a:solidFill>
                   <a:srgbClr val="1A1A1A"/>
                 </a:solidFill>
                 <a:latin typeface="Apple SD Gothic Neo"/>
               </a:rPr>
-              <a:t>동작하는 병원비 청구로 시연하고,
-자동차의 한계는 정직하게 설명했다.</a:t>
+              <a:t>다른 모델(Codex)로 교차 검증</a:t>
+            </a:r>
+          </a:p>
+        </p:txBody>
+      </p:sp>
+      <p:sp>
+        <p:nvSpPr>
+          <p:cNvPr id="7" name="TextBox 6"/>
+          <p:cNvSpPr txBox="1"/>
+          <p:nvPr/>
+        </p:nvSpPr>
+        <p:spPr>
+          <a:xfrm>
+            <a:off x="822960" y="5120640"/>
+            <a:ext cx="10607040" cy="731520"/>
+          </a:xfrm>
+          <a:prstGeom prst="rect">
+            <a:avLst/>
+          </a:prstGeom>
+          <a:noFill/>
+        </p:spPr>
+        <p:txBody>
+          <a:bodyPr wrap="square" anchor="t">
+            <a:spAutoFit/>
+          </a:bodyPr>
+          <a:lstStyle/>
+          <a:p>
+            <a:pPr algn="ctr"/>
+            <a:r>
+              <a:rPr sz="2200" b="0" spc="-30">
+                <a:solidFill>
+                  <a:srgbClr val="6B7280"/>
+                </a:solidFill>
+                <a:latin typeface="Apple SD Gothic Neo"/>
+              </a:rPr>
+              <a:t>마지막에 Codex로 한 번 더 봐서 Claude가 놓친 것을 잡았다.</a:t>
             </a:r>
           </a:p>
         </p:txBody>
@@ -14408,12 +15000,12 @@
 </file>
 
 <file path=ppt/slides/slide42.xml><?xml version="1.0" encoding="utf-8"?>
-<p:sld xmlns:a="http://schemas.openxmlformats.org/drawingml/2006/main" xmlns:r="http://schemas.openxmlformats.org/officeDocument/2006/relationships" xmlns:p="http://schemas.openxmlformats.org/presentationml/2006/main">
+<p:sld xmlns:a="http://schemas.openxmlformats.org/drawingml/2006/main" xmlns:p="http://schemas.openxmlformats.org/presentationml/2006/main" xmlns:r="http://schemas.openxmlformats.org/officeDocument/2006/relationships">
   <p:cSld>
     <p:bg>
       <p:bgPr>
         <a:solidFill>
-          <a:srgbClr val="1F1D3D"/>
+          <a:srgbClr val="FFFFFF"/>
         </a:solidFill>
         <a:effectLst/>
       </p:bgPr>
@@ -14424,14 +15016,7 @@
         <p:cNvGrpSpPr/>
         <p:nvPr/>
       </p:nvGrpSpPr>
-      <p:grpSpPr>
-        <a:xfrm>
-          <a:off x="0" y="0"/>
-          <a:ext cx="0" cy="0"/>
-          <a:chOff x="0" y="0"/>
-          <a:chExt cx="0" cy="0"/>
-        </a:xfrm>
-      </p:grpSpPr>
+      <p:grpSpPr/>
       <p:sp>
         <p:nvSpPr>
           <p:cNvPr id="2" name="TextBox 1"/>
@@ -14440,8 +15025,8 @@
         </p:nvSpPr>
         <p:spPr>
           <a:xfrm>
-            <a:off x="868680" y="2514600"/>
-            <a:ext cx="10607040" cy="2011680"/>
+            <a:off x="749808" y="566928"/>
+            <a:ext cx="10881360" cy="1371600"/>
           </a:xfrm>
           <a:prstGeom prst="rect">
             <a:avLst/>
@@ -14456,25 +15041,93 @@
           <a:p>
             <a:pPr algn="l"/>
             <a:r>
-              <a:rPr sz="4800" b="1" spc="-100">
-                <a:solidFill>
-                  <a:srgbClr val="FFFFFF"/>
-                </a:solidFill>
-                <a:latin typeface="Apple SD Gothic Neo"/>
-              </a:rPr>
-              <a:t>설계한 그대로 구현했고,</a:t>
-            </a:r>
-          </a:p>
-          <a:p>
-            <a:pPr algn="l"/>
-            <a:r>
-              <a:rPr sz="4800" b="1" spc="-100">
-                <a:solidFill>
-                  <a:srgbClr val="FFFFFF"/>
-                </a:solidFill>
-                <a:latin typeface="Apple SD Gothic Neo"/>
-              </a:rPr>
-              <a:t>그 과정에서 AI를 통제했다.</a:t>
+              <a:rPr sz="4600" b="1" spc="-100">
+                <a:solidFill>
+                  <a:srgbClr val="1A1A1A"/>
+                </a:solidFill>
+                <a:latin typeface="Apple SD Gothic Neo"/>
+              </a:rPr>
+              <a:t>가장 큰 실수 — 발견</a:t>
+            </a:r>
+          </a:p>
+        </p:txBody>
+      </p:sp>
+      <p:sp>
+        <p:nvSpPr>
+          <p:cNvPr id="3" name="Rectangle 2"/>
+          <p:cNvSpPr/>
+          <p:nvPr/>
+        </p:nvSpPr>
+        <p:spPr>
+          <a:xfrm>
+            <a:off x="822960" y="1554480"/>
+            <a:ext cx="868680" cy="82296"/>
+          </a:xfrm>
+          <a:prstGeom prst="rect">
+            <a:avLst/>
+          </a:prstGeom>
+          <a:solidFill>
+            <a:srgbClr val="5B5BD6"/>
+          </a:solidFill>
+          <a:ln>
+            <a:noFill/>
+          </a:ln>
+          <a:effectLst/>
+        </p:spPr>
+        <p:style>
+          <a:lnRef idx="1">
+            <a:schemeClr val="accent1"/>
+          </a:lnRef>
+          <a:fillRef idx="3">
+            <a:schemeClr val="accent1"/>
+          </a:fillRef>
+          <a:effectRef idx="2">
+            <a:schemeClr val="accent1"/>
+          </a:effectRef>
+          <a:fontRef idx="minor">
+            <a:schemeClr val="lt1"/>
+          </a:fontRef>
+        </p:style>
+        <p:txBody>
+          <a:bodyPr rtlCol="0" anchor="ctr"/>
+          <a:lstStyle/>
+          <a:p>
+            <a:pPr algn="ctr"/>
+          </a:p>
+        </p:txBody>
+      </p:sp>
+      <p:sp>
+        <p:nvSpPr>
+          <p:cNvPr id="4" name="TextBox 3"/>
+          <p:cNvSpPr txBox="1"/>
+          <p:nvPr/>
+        </p:nvSpPr>
+        <p:spPr>
+          <a:xfrm>
+            <a:off x="822960" y="2651760"/>
+            <a:ext cx="10607040" cy="1554480"/>
+          </a:xfrm>
+          <a:prstGeom prst="rect">
+            <a:avLst/>
+          </a:prstGeom>
+          <a:noFill/>
+        </p:spPr>
+        <p:txBody>
+          <a:bodyPr wrap="square" anchor="ctr">
+            <a:spAutoFit/>
+          </a:bodyPr>
+          <a:lstStyle/>
+          <a:p>
+            <a:pPr algn="ctr"/>
+            <a:r>
+              <a:rPr sz="3300" b="1" spc="-60">
+                <a:solidFill>
+                  <a:srgbClr val="1A1A1A"/>
+                </a:solidFill>
+                <a:latin typeface="Apple SD Gothic Neo"/>
+              </a:rPr>
+              <a:t>자동차 사고가 직원 '심사 목록'에
+끝까지 안 떴다.</a:t>
             </a:r>
           </a:p>
         </p:txBody>
@@ -14535,7 +15188,7 @@
                 </a:solidFill>
                 <a:latin typeface="Apple SD Gothic Neo"/>
               </a:rPr>
-              <a:t>내가 쓴 AI 도구</a:t>
+              <a:t>왜? — 설계대로였다</a:t>
             </a:r>
           </a:p>
         </p:txBody>
@@ -14586,264 +15239,71 @@
       </p:sp>
       <p:sp>
         <p:nvSpPr>
-          <p:cNvPr id="4" name="Rounded Rectangle 3"/>
-          <p:cNvSpPr/>
-          <p:nvPr/>
-        </p:nvSpPr>
-        <p:spPr>
-          <a:xfrm>
-            <a:off x="822960" y="2103120"/>
-            <a:ext cx="10561320" cy="868680"/>
-          </a:xfrm>
-          <a:prstGeom prst="roundRect">
-            <a:avLst>
-              <a:gd name="adj" fmla="val 12000"/>
-            </a:avLst>
-          </a:prstGeom>
-          <a:solidFill>
-            <a:srgbClr val="F4F4F6"/>
-          </a:solidFill>
-          <a:ln w="16510">
-            <a:solidFill>
-              <a:srgbClr val="E6E6E6"/>
-            </a:solidFill>
-          </a:ln>
-          <a:effectLst/>
-        </p:spPr>
-        <p:style>
-          <a:lnRef idx="1">
-            <a:schemeClr val="accent1"/>
-          </a:lnRef>
-          <a:fillRef idx="3">
-            <a:schemeClr val="accent1"/>
-          </a:fillRef>
-          <a:effectRef idx="2">
-            <a:schemeClr val="accent1"/>
-          </a:effectRef>
-          <a:fontRef idx="minor">
-            <a:schemeClr val="lt1"/>
-          </a:fontRef>
-        </p:style>
-        <p:txBody>
-          <a:bodyPr rtlCol="0" anchor="ctr" tIns="76200" bIns="76200" lIns="203200" rIns="177800" wrap="none"/>
-          <a:lstStyle/>
-          <a:p>
-            <a:pPr algn="l"/>
-            <a:r>
-              <a:rPr sz="1900" b="1">
-                <a:solidFill>
-                  <a:srgbClr val="5B5BD6"/>
-                </a:solidFill>
-                <a:latin typeface="Menlo"/>
-              </a:rPr>
-              <a:t>Claude Code     </a:t>
-            </a:r>
-            <a:r>
-              <a:rPr sz="1800" b="0">
+          <p:cNvPr id="4" name="TextBox 3"/>
+          <p:cNvSpPr txBox="1"/>
+          <p:nvPr/>
+        </p:nvSpPr>
+        <p:spPr>
+          <a:xfrm>
+            <a:off x="822960" y="2651760"/>
+            <a:ext cx="10607040" cy="1554480"/>
+          </a:xfrm>
+          <a:prstGeom prst="rect">
+            <a:avLst/>
+          </a:prstGeom>
+          <a:noFill/>
+        </p:spPr>
+        <p:txBody>
+          <a:bodyPr wrap="square" anchor="ctr">
+            <a:spAutoFit/>
+          </a:bodyPr>
+          <a:lstStyle/>
+          <a:p>
+            <a:pPr algn="ctr"/>
+            <a:r>
+              <a:rPr sz="3000" b="1" spc="-60">
                 <a:solidFill>
                   <a:srgbClr val="1A1A1A"/>
                 </a:solidFill>
                 <a:latin typeface="Apple SD Gothic Neo"/>
               </a:rPr>
-              <a:t>설계·조율은 Opus, 구현은 Sonnet 서브에이전트</a:t>
-            </a:r>
-          </a:p>
-        </p:txBody>
-      </p:sp>
-      <p:sp>
-        <p:nvSpPr>
-          <p:cNvPr id="5" name="Rounded Rectangle 4"/>
-          <p:cNvSpPr/>
-          <p:nvPr/>
-        </p:nvSpPr>
-        <p:spPr>
-          <a:xfrm>
-            <a:off x="822960" y="3127248"/>
-            <a:ext cx="10561320" cy="868680"/>
-          </a:xfrm>
-          <a:prstGeom prst="roundRect">
-            <a:avLst>
-              <a:gd name="adj" fmla="val 12000"/>
-            </a:avLst>
-          </a:prstGeom>
-          <a:solidFill>
-            <a:srgbClr val="F4F4F6"/>
-          </a:solidFill>
-          <a:ln w="16510">
-            <a:solidFill>
-              <a:srgbClr val="E6E6E6"/>
-            </a:solidFill>
-          </a:ln>
-          <a:effectLst/>
-        </p:spPr>
-        <p:style>
-          <a:lnRef idx="1">
-            <a:schemeClr val="accent1"/>
-          </a:lnRef>
-          <a:fillRef idx="3">
-            <a:schemeClr val="accent1"/>
-          </a:fillRef>
-          <a:effectRef idx="2">
-            <a:schemeClr val="accent1"/>
-          </a:effectRef>
-          <a:fontRef idx="minor">
-            <a:schemeClr val="lt1"/>
-          </a:fontRef>
-        </p:style>
-        <p:txBody>
-          <a:bodyPr rtlCol="0" anchor="ctr" tIns="76200" bIns="76200" lIns="203200" rIns="177800" wrap="none"/>
-          <a:lstStyle/>
-          <a:p>
-            <a:pPr algn="l"/>
-            <a:r>
-              <a:rPr sz="1900" b="1">
-                <a:solidFill>
-                  <a:srgbClr val="5B5BD6"/>
-                </a:solidFill>
-                <a:latin typeface="Menlo"/>
-              </a:rPr>
-              <a:t>Superpowers 스킬     </a:t>
-            </a:r>
-            <a:r>
-              <a:rPr sz="1800" b="0">
-                <a:solidFill>
-                  <a:srgbClr val="1A1A1A"/>
-                </a:solidFill>
-                <a:latin typeface="Apple SD Gothic Neo"/>
-              </a:rPr>
-              <a:t>brainstorming · grill-with-docs · writing/executing-plans</a:t>
-            </a:r>
-          </a:p>
-        </p:txBody>
-      </p:sp>
-      <p:sp>
-        <p:nvSpPr>
-          <p:cNvPr id="6" name="Rounded Rectangle 5"/>
-          <p:cNvSpPr/>
-          <p:nvPr/>
-        </p:nvSpPr>
-        <p:spPr>
-          <a:xfrm>
-            <a:off x="822960" y="4151376"/>
-            <a:ext cx="10561320" cy="868680"/>
-          </a:xfrm>
-          <a:prstGeom prst="roundRect">
-            <a:avLst>
-              <a:gd name="adj" fmla="val 12000"/>
-            </a:avLst>
-          </a:prstGeom>
-          <a:solidFill>
-            <a:srgbClr val="F4F4F6"/>
-          </a:solidFill>
-          <a:ln w="16510">
-            <a:solidFill>
-              <a:srgbClr val="E6E6E6"/>
-            </a:solidFill>
-          </a:ln>
-          <a:effectLst/>
-        </p:spPr>
-        <p:style>
-          <a:lnRef idx="1">
-            <a:schemeClr val="accent1"/>
-          </a:lnRef>
-          <a:fillRef idx="3">
-            <a:schemeClr val="accent1"/>
-          </a:fillRef>
-          <a:effectRef idx="2">
-            <a:schemeClr val="accent1"/>
-          </a:effectRef>
-          <a:fontRef idx="minor">
-            <a:schemeClr val="lt1"/>
-          </a:fontRef>
-        </p:style>
-        <p:txBody>
-          <a:bodyPr rtlCol="0" anchor="ctr" tIns="76200" bIns="76200" lIns="203200" rIns="177800" wrap="none"/>
-          <a:lstStyle/>
-          <a:p>
-            <a:pPr algn="l"/>
-            <a:r>
-              <a:rPr sz="1900" b="1">
-                <a:solidFill>
-                  <a:srgbClr val="5B5BD6"/>
-                </a:solidFill>
-                <a:latin typeface="Menlo"/>
-              </a:rPr>
-              <a:t>Codex     </a:t>
-            </a:r>
-            <a:r>
-              <a:rPr sz="1800" b="0">
-                <a:solidFill>
-                  <a:srgbClr val="1A1A1A"/>
-                </a:solidFill>
-                <a:latin typeface="Apple SD Gothic Neo"/>
-              </a:rPr>
-              <a:t>다른 모델로 교차 리뷰</a:t>
-            </a:r>
-          </a:p>
-        </p:txBody>
-      </p:sp>
-      <p:sp>
-        <p:nvSpPr>
-          <p:cNvPr id="7" name="Rounded Rectangle 6"/>
-          <p:cNvSpPr/>
-          <p:nvPr/>
-        </p:nvSpPr>
-        <p:spPr>
-          <a:xfrm>
-            <a:off x="822960" y="5175504"/>
-            <a:ext cx="10561320" cy="868680"/>
-          </a:xfrm>
-          <a:prstGeom prst="roundRect">
-            <a:avLst>
-              <a:gd name="adj" fmla="val 12000"/>
-            </a:avLst>
-          </a:prstGeom>
-          <a:solidFill>
-            <a:srgbClr val="F4F4F6"/>
-          </a:solidFill>
-          <a:ln w="16510">
-            <a:solidFill>
-              <a:srgbClr val="E6E6E6"/>
-            </a:solidFill>
-          </a:ln>
-          <a:effectLst/>
-        </p:spPr>
-        <p:style>
-          <a:lnRef idx="1">
-            <a:schemeClr val="accent1"/>
-          </a:lnRef>
-          <a:fillRef idx="3">
-            <a:schemeClr val="accent1"/>
-          </a:fillRef>
-          <a:effectRef idx="2">
-            <a:schemeClr val="accent1"/>
-          </a:effectRef>
-          <a:fontRef idx="minor">
-            <a:schemeClr val="lt1"/>
-          </a:fontRef>
-        </p:style>
-        <p:txBody>
-          <a:bodyPr rtlCol="0" anchor="ctr" tIns="76200" bIns="76200" lIns="203200" rIns="177800" wrap="none"/>
-          <a:lstStyle/>
-          <a:p>
-            <a:pPr algn="l"/>
-            <a:r>
-              <a:rPr sz="1900" b="1">
-                <a:solidFill>
-                  <a:srgbClr val="5B5BD6"/>
-                </a:solidFill>
-                <a:latin typeface="Menlo"/>
-              </a:rPr>
-              <a:t>cmux     </a:t>
-            </a:r>
-            <a:r>
-              <a:rPr sz="1800" b="0">
-                <a:solidFill>
-                  <a:srgbClr val="1A1A1A"/>
-                </a:solidFill>
-                <a:latin typeface="Apple SD Gothic Neo"/>
-              </a:rPr>
-              <a:t>프론트·백엔드 Claude를 메시지로 연결</a:t>
+              <a:t>유스케이스(UC09): 자동차 사고는
+'접수만', 심사 큐엔 안 들어감</a:t>
+            </a:r>
+          </a:p>
+        </p:txBody>
+      </p:sp>
+      <p:sp>
+        <p:nvSpPr>
+          <p:cNvPr id="5" name="TextBox 4"/>
+          <p:cNvSpPr txBox="1"/>
+          <p:nvPr/>
+        </p:nvSpPr>
+        <p:spPr>
+          <a:xfrm>
+            <a:off x="822960" y="4434840"/>
+            <a:ext cx="10607040" cy="914400"/>
+          </a:xfrm>
+          <a:prstGeom prst="rect">
+            <a:avLst/>
+          </a:prstGeom>
+          <a:noFill/>
+        </p:spPr>
+        <p:txBody>
+          <a:bodyPr wrap="square" anchor="t">
+            <a:spAutoFit/>
+          </a:bodyPr>
+          <a:lstStyle/>
+          <a:p>
+            <a:pPr algn="ctr"/>
+            <a:r>
+              <a:rPr sz="2200" b="0" spc="-30">
+                <a:solidFill>
+                  <a:srgbClr val="6B7280"/>
+                </a:solidFill>
+                <a:latin typeface="Apple SD Gothic Neo"/>
+              </a:rPr>
+              <a:t>버그가 아니라, 내가 그렇게 설계한 것</a:t>
             </a:r>
           </a:p>
         </p:txBody>
@@ -14904,7 +15364,7 @@
                 </a:solidFill>
                 <a:latin typeface="Apple SD Gothic Neo"/>
               </a:rPr>
-              <a:t>cmux — 두 Claude를 붙이다</a:t>
+              <a:t>어떻게 데모를 살렸나</a:t>
             </a:r>
           </a:p>
         </p:txBody>
@@ -14955,148 +15415,14 @@
       </p:sp>
       <p:sp>
         <p:nvSpPr>
-          <p:cNvPr id="4" name="Rounded Rectangle 3"/>
-          <p:cNvSpPr/>
-          <p:nvPr/>
-        </p:nvSpPr>
-        <p:spPr>
-          <a:xfrm>
-            <a:off x="1280160" y="2697480"/>
-            <a:ext cx="4023360" cy="1371600"/>
-          </a:xfrm>
-          <a:prstGeom prst="roundRect">
-            <a:avLst>
-              <a:gd name="adj" fmla="val 12000"/>
-            </a:avLst>
-          </a:prstGeom>
-          <a:solidFill>
-            <a:srgbClr val="ECEBFB"/>
-          </a:solidFill>
-          <a:ln>
-            <a:noFill/>
-          </a:ln>
-          <a:effectLst/>
-        </p:spPr>
-        <p:style>
-          <a:lnRef idx="1">
-            <a:schemeClr val="accent1"/>
-          </a:lnRef>
-          <a:fillRef idx="3">
-            <a:schemeClr val="accent1"/>
-          </a:fillRef>
-          <a:effectRef idx="2">
-            <a:schemeClr val="accent1"/>
-          </a:effectRef>
-          <a:fontRef idx="minor">
-            <a:schemeClr val="lt1"/>
-          </a:fontRef>
-        </p:style>
-        <p:txBody>
-          <a:bodyPr rtlCol="0" anchor="ctr" tIns="76200" bIns="76200" lIns="203200" rIns="177800" wrap="square"/>
-          <a:lstStyle/>
-          <a:p>
-            <a:pPr algn="ctr"/>
-            <a:r>
-              <a:rPr sz="2000" b="1">
-                <a:solidFill>
-                  <a:srgbClr val="5B5BD6"/>
-                </a:solidFill>
-                <a:latin typeface="Apple SD Gothic Neo"/>
-              </a:rPr>
-              <a:t>프론트 Claude</a:t>
-            </a:r>
-          </a:p>
-          <a:p>
-            <a:pPr algn="ctr"/>
-            <a:r>
-              <a:rPr sz="1600" b="0">
-                <a:solidFill>
-                  <a:srgbClr val="6B7280"/>
-                </a:solidFill>
-                <a:latin typeface="Apple SD Gothic Neo"/>
-              </a:rPr>
-              <a:t>React 화면</a:t>
-            </a:r>
-          </a:p>
-        </p:txBody>
-      </p:sp>
-      <p:sp>
-        <p:nvSpPr>
-          <p:cNvPr id="5" name="Rounded Rectangle 4"/>
-          <p:cNvSpPr/>
-          <p:nvPr/>
-        </p:nvSpPr>
-        <p:spPr>
-          <a:xfrm>
-            <a:off x="6903720" y="2697480"/>
-            <a:ext cx="4023360" cy="1371600"/>
-          </a:xfrm>
-          <a:prstGeom prst="roundRect">
-            <a:avLst>
-              <a:gd name="adj" fmla="val 12000"/>
-            </a:avLst>
-          </a:prstGeom>
-          <a:solidFill>
-            <a:srgbClr val="ECEBFB"/>
-          </a:solidFill>
-          <a:ln>
-            <a:noFill/>
-          </a:ln>
-          <a:effectLst/>
-        </p:spPr>
-        <p:style>
-          <a:lnRef idx="1">
-            <a:schemeClr val="accent1"/>
-          </a:lnRef>
-          <a:fillRef idx="3">
-            <a:schemeClr val="accent1"/>
-          </a:fillRef>
-          <a:effectRef idx="2">
-            <a:schemeClr val="accent1"/>
-          </a:effectRef>
-          <a:fontRef idx="minor">
-            <a:schemeClr val="lt1"/>
-          </a:fontRef>
-        </p:style>
-        <p:txBody>
-          <a:bodyPr rtlCol="0" anchor="ctr" tIns="76200" bIns="76200" lIns="203200" rIns="177800" wrap="square"/>
-          <a:lstStyle/>
-          <a:p>
-            <a:pPr algn="ctr"/>
-            <a:r>
-              <a:rPr sz="2000" b="1">
-                <a:solidFill>
-                  <a:srgbClr val="5B5BD6"/>
-                </a:solidFill>
-                <a:latin typeface="Apple SD Gothic Neo"/>
-              </a:rPr>
-              <a:t>백엔드 Claude</a:t>
-            </a:r>
-          </a:p>
-          <a:p>
-            <a:pPr algn="ctr"/>
-            <a:r>
-              <a:rPr sz="1600" b="0">
-                <a:solidFill>
-                  <a:srgbClr val="6B7280"/>
-                </a:solidFill>
-                <a:latin typeface="Apple SD Gothic Neo"/>
-              </a:rPr>
-              <a:t>Spring API</a:t>
-            </a:r>
-          </a:p>
-        </p:txBody>
-      </p:sp>
-      <p:sp>
-        <p:nvSpPr>
-          <p:cNvPr id="6" name="TextBox 5"/>
+          <p:cNvPr id="4" name="TextBox 3"/>
           <p:cNvSpPr txBox="1"/>
           <p:nvPr/>
         </p:nvSpPr>
         <p:spPr>
           <a:xfrm>
-            <a:off x="5257800" y="2606040"/>
-            <a:ext cx="1691640" cy="731520"/>
+            <a:off x="822960" y="2651760"/>
+            <a:ext cx="10607040" cy="1554480"/>
           </a:xfrm>
           <a:prstGeom prst="rect">
             <a:avLst/>
@@ -15111,95 +15437,14 @@
           <a:p>
             <a:pPr algn="ctr"/>
             <a:r>
-              <a:rPr sz="3000" b="1">
-                <a:solidFill>
-                  <a:srgbClr val="5B5BD6"/>
-                </a:solidFill>
-                <a:latin typeface="Apple SD Gothic Neo"/>
-              </a:rPr>
-              <a:t>⇄</a:t>
-            </a:r>
-          </a:p>
-        </p:txBody>
-      </p:sp>
-      <p:sp>
-        <p:nvSpPr>
-          <p:cNvPr id="7" name="TextBox 6"/>
-          <p:cNvSpPr txBox="1"/>
-          <p:nvPr/>
-        </p:nvSpPr>
-        <p:spPr>
-          <a:xfrm>
-            <a:off x="1280160" y="3246120"/>
-            <a:ext cx="9601200" cy="457200"/>
-          </a:xfrm>
-          <a:prstGeom prst="rect">
-            <a:avLst/>
-          </a:prstGeom>
-          <a:noFill/>
-        </p:spPr>
-        <p:txBody>
-          <a:bodyPr wrap="square" anchor="t">
-            <a:spAutoFit/>
-          </a:bodyPr>
-          <a:lstStyle/>
-          <a:p>
-            <a:pPr algn="ctr"/>
-            <a:r>
-              <a:rPr sz="1400" b="1" spc="40">
-                <a:solidFill>
-                  <a:srgbClr val="6B7280"/>
-                </a:solidFill>
-                <a:latin typeface="Menlo"/>
-              </a:rPr>
-              <a:t>cmux</a:t>
-            </a:r>
-          </a:p>
-        </p:txBody>
-      </p:sp>
-      <p:sp>
-        <p:nvSpPr>
-          <p:cNvPr id="8" name="TextBox 7"/>
-          <p:cNvSpPr txBox="1"/>
-          <p:nvPr/>
-        </p:nvSpPr>
-        <p:spPr>
-          <a:xfrm>
-            <a:off x="822960" y="4572000"/>
-            <a:ext cx="10607040" cy="1097280"/>
-          </a:xfrm>
-          <a:prstGeom prst="rect">
-            <a:avLst/>
-          </a:prstGeom>
-          <a:noFill/>
-        </p:spPr>
-        <p:txBody>
-          <a:bodyPr wrap="square" anchor="ctr">
-            <a:spAutoFit/>
-          </a:bodyPr>
-          <a:lstStyle/>
-          <a:p>
-            <a:pPr algn="ctr"/>
-            <a:r>
-              <a:rPr sz="2400" b="1" spc="-40">
+              <a:rPr sz="3000" b="1" spc="-60">
                 <a:solidFill>
                   <a:srgbClr val="1A1A1A"/>
                 </a:solidFill>
                 <a:latin typeface="Apple SD Gothic Neo"/>
               </a:rPr>
-              <a:t>두 Claude 세션을 cmux로 메시지 교환시켜</a:t>
-            </a:r>
-          </a:p>
-          <a:p>
-            <a:pPr algn="ctr"/>
-            <a:r>
-              <a:rPr sz="2400" b="1" spc="-40">
-                <a:solidFill>
-                  <a:srgbClr val="1A1A1A"/>
-                </a:solidFill>
-                <a:latin typeface="Apple SD Gothic Neo"/>
-              </a:rPr>
-              <a:t>한쪽이 API를 바꾸면 다른 쪽이 받아서 맞췄다.</a:t>
+              <a:t>동작하는 병원비 청구로 시연하고,
+자동차의 한계는 정직하게 설명했다.</a:t>
             </a:r>
           </a:p>
         </p:txBody>
@@ -15213,6 +15458,86 @@
 </file>
 
 <file path=ppt/slides/slide45.xml><?xml version="1.0" encoding="utf-8"?>
+<p:sld xmlns:a="http://schemas.openxmlformats.org/drawingml/2006/main" xmlns:r="http://schemas.openxmlformats.org/officeDocument/2006/relationships" xmlns:p="http://schemas.openxmlformats.org/presentationml/2006/main">
+  <p:cSld>
+    <p:bg>
+      <p:bgPr>
+        <a:solidFill>
+          <a:srgbClr val="1F1D3D"/>
+        </a:solidFill>
+        <a:effectLst/>
+      </p:bgPr>
+    </p:bg>
+    <p:spTree>
+      <p:nvGrpSpPr>
+        <p:cNvPr id="1" name=""/>
+        <p:cNvGrpSpPr/>
+        <p:nvPr/>
+      </p:nvGrpSpPr>
+      <p:grpSpPr>
+        <a:xfrm>
+          <a:off x="0" y="0"/>
+          <a:ext cx="0" cy="0"/>
+          <a:chOff x="0" y="0"/>
+          <a:chExt cx="0" cy="0"/>
+        </a:xfrm>
+      </p:grpSpPr>
+      <p:sp>
+        <p:nvSpPr>
+          <p:cNvPr id="2" name="TextBox 1"/>
+          <p:cNvSpPr txBox="1"/>
+          <p:nvPr/>
+        </p:nvSpPr>
+        <p:spPr>
+          <a:xfrm>
+            <a:off x="868680" y="2514600"/>
+            <a:ext cx="10607040" cy="2011680"/>
+          </a:xfrm>
+          <a:prstGeom prst="rect">
+            <a:avLst/>
+          </a:prstGeom>
+          <a:noFill/>
+        </p:spPr>
+        <p:txBody>
+          <a:bodyPr wrap="square" anchor="t">
+            <a:spAutoFit/>
+          </a:bodyPr>
+          <a:lstStyle/>
+          <a:p>
+            <a:pPr algn="l"/>
+            <a:r>
+              <a:rPr sz="4800" b="1" spc="-100">
+                <a:solidFill>
+                  <a:srgbClr val="FFFFFF"/>
+                </a:solidFill>
+                <a:latin typeface="Apple SD Gothic Neo"/>
+              </a:rPr>
+              <a:t>설계한 그대로 구현했고,</a:t>
+            </a:r>
+          </a:p>
+          <a:p>
+            <a:pPr algn="l"/>
+            <a:r>
+              <a:rPr sz="4800" b="1" spc="-100">
+                <a:solidFill>
+                  <a:srgbClr val="FFFFFF"/>
+                </a:solidFill>
+                <a:latin typeface="Apple SD Gothic Neo"/>
+              </a:rPr>
+              <a:t>그 과정에서 AI를 통제했다.</a:t>
+            </a:r>
+          </a:p>
+        </p:txBody>
+      </p:sp>
+    </p:spTree>
+  </p:cSld>
+  <p:clrMapOvr>
+    <a:masterClrMapping/>
+  </p:clrMapOvr>
+</p:sld>
+</file>
+
+<file path=ppt/slides/slide46.xml><?xml version="1.0" encoding="utf-8"?>
 <p:sld xmlns:a="http://schemas.openxmlformats.org/drawingml/2006/main" xmlns:p="http://schemas.openxmlformats.org/presentationml/2006/main" xmlns:r="http://schemas.openxmlformats.org/officeDocument/2006/relationships">
   <p:cSld>
     <p:bg>
@@ -15238,8 +15563,8 @@
         </p:nvSpPr>
         <p:spPr>
           <a:xfrm>
-            <a:off x="749808" y="566928"/>
-            <a:ext cx="10881360" cy="1371600"/>
+            <a:off x="749808" y="457200"/>
+            <a:ext cx="10881360" cy="1188720"/>
           </a:xfrm>
           <a:prstGeom prst="rect">
             <a:avLst/>
@@ -15254,13 +15579,13 @@
           <a:p>
             <a:pPr algn="l"/>
             <a:r>
-              <a:rPr sz="4600" b="1" spc="-100">
+              <a:rPr sz="4400" b="1" spc="-100">
                 <a:solidFill>
                   <a:srgbClr val="1A1A1A"/>
                 </a:solidFill>
                 <a:latin typeface="Apple SD Gothic Neo"/>
               </a:rPr>
-              <a:t>왜 Codex로 교차 리뷰했나</a:t>
+              <a:t>AI가 선을 넘다</a:t>
             </a:r>
           </a:p>
         </p:txBody>
@@ -15273,7 +15598,7 @@
         </p:nvSpPr>
         <p:spPr>
           <a:xfrm>
-            <a:off x="822960" y="1554480"/>
+            <a:off x="822960" y="1417320"/>
             <a:ext cx="868680" cy="82296"/>
           </a:xfrm>
           <a:prstGeom prst="rect">
@@ -15317,8 +15642,8 @@
         </p:nvSpPr>
         <p:spPr>
           <a:xfrm>
-            <a:off x="777240" y="2743200"/>
-            <a:ext cx="4800600" cy="1920240"/>
+            <a:off x="777240" y="2651760"/>
+            <a:ext cx="4800600" cy="2011680"/>
           </a:xfrm>
           <a:prstGeom prst="roundRect">
             <a:avLst>
@@ -15355,13 +15680,13 @@
           <a:p>
             <a:pPr algn="l"/>
             <a:r>
-              <a:rPr sz="1800" b="1">
+              <a:rPr sz="1600" b="1">
                 <a:solidFill>
                   <a:srgbClr val="6B7280"/>
                 </a:solidFill>
                 <a:latin typeface="Apple SD Gothic Neo"/>
               </a:rPr>
-              <a:t>같은 모델끼리 리뷰하면</a:t>
+              <a:t>AI가 한 것</a:t>
             </a:r>
           </a:p>
           <a:p>
@@ -15379,13 +15704,25 @@
           <a:p>
             <a:pPr algn="l"/>
             <a:r>
-              <a:rPr sz="2100" b="1">
+              <a:rPr sz="1900" b="1">
                 <a:solidFill>
                   <a:srgbClr val="1A1A1A"/>
                 </a:solidFill>
                 <a:latin typeface="Apple SD Gothic Neo"/>
               </a:rPr>
-              <a:t>같은 맹점을 똑같이 놓친다</a:t>
+              <a:t>git add를 넓게 잡아 frontend 전체를</a:t>
+            </a:r>
+          </a:p>
+          <a:p>
+            <a:pPr algn="l"/>
+            <a:r>
+              <a:rPr sz="1900" b="1">
+                <a:solidFill>
+                  <a:srgbClr val="1A1A1A"/>
+                </a:solidFill>
+                <a:latin typeface="Apple SD Gothic Neo"/>
+              </a:rPr>
+              <a:t>엉뚱한 PR에 섞어 커밋했다</a:t>
             </a:r>
           </a:p>
         </p:txBody>
@@ -15433,8 +15770,8 @@
         </p:nvSpPr>
         <p:spPr>
           <a:xfrm>
-            <a:off x="6629400" y="2743200"/>
-            <a:ext cx="4800600" cy="1920240"/>
+            <a:off x="6629400" y="2651760"/>
+            <a:ext cx="4800600" cy="2011680"/>
           </a:xfrm>
           <a:prstGeom prst="roundRect">
             <a:avLst>
@@ -15469,13 +15806,13 @@
           <a:p>
             <a:pPr algn="l"/>
             <a:r>
-              <a:rPr sz="1800" b="1">
+              <a:rPr sz="1600" b="1">
                 <a:solidFill>
                   <a:srgbClr val="5B5BD6"/>
                 </a:solidFill>
                 <a:latin typeface="Apple SD Gothic Neo"/>
               </a:rPr>
-              <a:t>그래서</a:t>
+              <a:t>내가 통제</a:t>
             </a:r>
           </a:p>
           <a:p>
@@ -15493,13 +15830,25 @@
           <a:p>
             <a:pPr algn="l"/>
             <a:r>
-              <a:rPr sz="2100" b="1">
+              <a:rPr sz="1900" b="1">
                 <a:solidFill>
                   <a:srgbClr val="1A1A1A"/>
                 </a:solidFill>
                 <a:latin typeface="Apple SD Gothic Neo"/>
               </a:rPr>
-              <a:t>다른 모델(Codex)로 교차 검증</a:t>
+              <a:t>점검으로 발견 + '커밋은 사용자',</a:t>
+            </a:r>
+          </a:p>
+          <a:p>
+            <a:pPr algn="l"/>
+            <a:r>
+              <a:rPr sz="1900" b="1">
+                <a:solidFill>
+                  <a:srgbClr val="1A1A1A"/>
+                </a:solidFill>
+                <a:latin typeface="Apple SD Gothic Neo"/>
+              </a:rPr>
+              <a:t>요청 시에만' 규칙으로 경계 관리</a:t>
             </a:r>
           </a:p>
         </p:txBody>
@@ -15512,7 +15861,7 @@
         </p:nvSpPr>
         <p:spPr>
           <a:xfrm>
-            <a:off x="822960" y="5120640"/>
+            <a:off x="822960" y="5029200"/>
             <a:ext cx="10607040" cy="731520"/>
           </a:xfrm>
           <a:prstGeom prst="rect">
@@ -15534,7 +15883,7 @@
                 </a:solidFill>
                 <a:latin typeface="Apple SD Gothic Neo"/>
               </a:rPr>
-              <a:t>마지막에 Codex로 한 번 더 봐서 Claude가 놓친 것을 잡았다.</a:t>
+              <a:t>AI는 시키지 않은 범위까지 건드린다 — 권한 경계를 사람이 정해야 한다.</a:t>
             </a:r>
           </a:p>
         </p:txBody>

--- a/docs/presentation/보험발표-figma.pptx
+++ b/docs/presentation/보험발표-figma.pptx
@@ -30,27 +30,22 @@
     <p:sldId id="278" r:id="rId24"/>
     <p:sldId id="279" r:id="rId25"/>
     <p:sldId id="280" r:id="rId26"/>
-    <p:sldId id="284" r:id="rId34"/>
-    <p:sldId id="300" r:id="rId48"/>
-    <p:sldId id="301" r:id="rId49"/>
-    <p:sldId id="297" r:id="rId28"/>
-    <p:sldId id="298" r:id="rId27"/>
-    <p:sldId id="299" r:id="rId47"/>
-    <p:sldId id="285" r:id="rId35"/>
-    <p:sldId id="286" r:id="rId36"/>
-    <p:sldId id="287" r:id="rId37"/>
-    <p:sldId id="288" r:id="rId38"/>
-    <p:sldId id="289" r:id="rId39"/>
-    <p:sldId id="290" r:id="rId40"/>
-    <p:sldId id="291" r:id="rId41"/>
-    <p:sldId id="292" r:id="rId42"/>
-    <p:sldId id="293" r:id="rId43"/>
-    <p:sldId id="302" r:id="rId50"/>
-    <p:sldId id="303" r:id="rId51"/>
-    <p:sldId id="294" r:id="rId44"/>
-    <p:sldId id="295" r:id="rId45"/>
-    <p:sldId id="296" r:id="rId46"/>
-    <p:sldId id="283" r:id="rId29"/>
+    <p:sldId id="284" r:id="rId27"/>
+    <p:sldId id="300" r:id="rId28"/>
+    <p:sldId id="301" r:id="rId29"/>
+    <p:sldId id="297" r:id="rId30"/>
+    <p:sldId id="304" r:id="rId46"/>
+    <p:sldId id="298" r:id="rId31"/>
+    <p:sldId id="299" r:id="rId32"/>
+    <p:sldId id="285" r:id="rId33"/>
+    <p:sldId id="287" r:id="rId34"/>
+    <p:sldId id="288" r:id="rId35"/>
+    <p:sldId id="289" r:id="rId36"/>
+    <p:sldId id="290" r:id="rId37"/>
+    <p:sldId id="291" r:id="rId38"/>
+    <p:sldId id="292" r:id="rId39"/>
+    <p:sldId id="303" r:id="rId40"/>
+    <p:sldId id="283" r:id="rId41"/>
   </p:sldIdLst>
   <p:sldSz cx="12192000" cy="6858000"/>
   <p:notesSz cx="6858000" cy="9144000"/>
@@ -5714,6 +5709,7 @@
           <a:lstStyle/>
           <a:p>
             <a:pPr algn="ctr"/>
+            <a:endParaRPr/>
           </a:p>
         </p:txBody>
       </p:sp>
@@ -5793,7 +5789,7 @@
           </a:fontRef>
         </p:style>
         <p:txBody>
-          <a:bodyPr rtlCol="0" anchor="ctr" tIns="63500" bIns="63500" lIns="152400" rIns="152400" wrap="none"/>
+          <a:bodyPr wrap="none" lIns="152400" tIns="63500" rIns="152400" bIns="63500" rtlCol="0" anchor="ctr"/>
           <a:lstStyle/>
           <a:p>
             <a:pPr algn="l"/>
@@ -5894,7 +5890,7 @@
           </a:fontRef>
         </p:style>
         <p:txBody>
-          <a:bodyPr rtlCol="0" anchor="ctr" tIns="63500" bIns="63500" lIns="152400" rIns="152400" wrap="none"/>
+          <a:bodyPr wrap="none" lIns="152400" tIns="63500" rIns="152400" bIns="63500" rtlCol="0" anchor="ctr"/>
           <a:lstStyle/>
           <a:p>
             <a:pPr algn="l"/>
@@ -5995,7 +5991,7 @@
           </a:fontRef>
         </p:style>
         <p:txBody>
-          <a:bodyPr rtlCol="0" anchor="ctr" tIns="63500" bIns="63500" lIns="152400" rIns="152400" wrap="none"/>
+          <a:bodyPr wrap="none" lIns="152400" tIns="63500" rIns="152400" bIns="63500" rtlCol="0" anchor="ctr"/>
           <a:lstStyle/>
           <a:p>
             <a:pPr algn="l"/>
@@ -6096,7 +6092,7 @@
           </a:fontRef>
         </p:style>
         <p:txBody>
-          <a:bodyPr rtlCol="0" anchor="ctr" tIns="63500" bIns="63500" lIns="152400" rIns="152400" wrap="none"/>
+          <a:bodyPr wrap="none" lIns="152400" tIns="63500" rIns="152400" bIns="63500" rtlCol="0" anchor="ctr"/>
           <a:lstStyle/>
           <a:p>
             <a:pPr algn="ctr"/>
@@ -6188,7 +6184,7 @@
           </a:fontRef>
         </p:style>
         <p:txBody>
-          <a:bodyPr rtlCol="0" anchor="ctr" tIns="63500" bIns="63500" lIns="152400" rIns="152400" wrap="none"/>
+          <a:bodyPr wrap="none" lIns="152400" tIns="63500" rIns="152400" bIns="63500" rtlCol="0" anchor="ctr"/>
           <a:lstStyle/>
           <a:p>
             <a:pPr algn="ctr"/>
@@ -6280,7 +6276,7 @@
           </a:fontRef>
         </p:style>
         <p:txBody>
-          <a:bodyPr rtlCol="0" anchor="ctr" tIns="63500" bIns="63500" lIns="152400" rIns="152400" wrap="none"/>
+          <a:bodyPr wrap="none" lIns="152400" tIns="63500" rIns="152400" bIns="63500" rtlCol="0" anchor="ctr"/>
           <a:lstStyle/>
           <a:p>
             <a:pPr algn="ctr"/>
@@ -6372,7 +6368,7 @@
           </a:fontRef>
         </p:style>
         <p:txBody>
-          <a:bodyPr rtlCol="0" anchor="ctr" tIns="63500" bIns="63500" lIns="152400" rIns="152400" wrap="none"/>
+          <a:bodyPr wrap="none" lIns="152400" tIns="63500" rIns="152400" bIns="63500" rtlCol="0" anchor="ctr"/>
           <a:lstStyle/>
           <a:p>
             <a:pPr algn="ctr"/>
@@ -6464,7 +6460,7 @@
           </a:fontRef>
         </p:style>
         <p:txBody>
-          <a:bodyPr rtlCol="0" anchor="ctr" tIns="63500" bIns="63500" lIns="152400" rIns="152400" wrap="none"/>
+          <a:bodyPr wrap="none" lIns="152400" tIns="63500" rIns="152400" bIns="63500" rtlCol="0" anchor="ctr"/>
           <a:lstStyle/>
           <a:p>
             <a:pPr algn="ctr"/>
@@ -7378,6 +7374,7 @@
           <a:lstStyle/>
           <a:p>
             <a:pPr algn="ctr"/>
+            <a:endParaRPr/>
           </a:p>
         </p:txBody>
       </p:sp>
@@ -7468,6 +7465,7 @@
           <a:lstStyle/>
           <a:p>
             <a:pPr algn="ctr"/>
+            <a:endParaRPr/>
           </a:p>
         </p:txBody>
       </p:sp>
@@ -7530,15 +7528,12 @@
           </a:p>
           <a:p>
             <a:pPr algn="l"/>
-            <a:r>
-              <a:rPr sz="1500" b="0">
-                <a:solidFill>
-                  <a:srgbClr val="FFFFFF"/>
-                </a:solidFill>
-                <a:latin typeface="Menlo"/>
-              </a:rPr>
-              <a:t/>
-            </a:r>
+            <a:endParaRPr sz="1500" b="0">
+              <a:solidFill>
+                <a:srgbClr val="FFFFFF"/>
+              </a:solidFill>
+              <a:latin typeface="Menlo"/>
+            </a:endParaRPr>
           </a:p>
           <a:p>
             <a:pPr algn="l"/>
@@ -9430,7 +9425,7 @@
 </file>
 
 <file path=ppt/slides/slide26.xml><?xml version="1.0" encoding="utf-8"?>
-<p:sld xmlns:a="http://schemas.openxmlformats.org/drawingml/2006/main" xmlns:p="http://schemas.openxmlformats.org/presentationml/2006/main" xmlns:r="http://schemas.openxmlformats.org/officeDocument/2006/relationships">
+<p:sld xmlns:a="http://schemas.openxmlformats.org/drawingml/2006/main" xmlns:r="http://schemas.openxmlformats.org/officeDocument/2006/relationships" xmlns:p="http://schemas.openxmlformats.org/presentationml/2006/main">
   <p:cSld>
     <p:bg>
       <p:bgPr>
@@ -9446,7 +9441,14 @@
         <p:cNvGrpSpPr/>
         <p:nvPr/>
       </p:nvGrpSpPr>
-      <p:grpSpPr/>
+      <p:grpSpPr>
+        <a:xfrm>
+          <a:off x="0" y="0"/>
+          <a:ext cx="0" cy="0"/>
+          <a:chOff x="0" y="0"/>
+          <a:chExt cx="0" cy="0"/>
+        </a:xfrm>
+      </p:grpSpPr>
       <p:sp>
         <p:nvSpPr>
           <p:cNvPr id="2" name="TextBox 1"/>
@@ -9523,6 +9525,7 @@
           <a:lstStyle/>
           <a:p>
             <a:pPr algn="ctr"/>
+            <a:endParaRPr/>
           </a:p>
         </p:txBody>
       </p:sp>
@@ -9565,7 +9568,7 @@
           </a:fontRef>
         </p:style>
         <p:txBody>
-          <a:bodyPr rtlCol="0" anchor="ctr" tIns="101600" bIns="101600" lIns="203200" rIns="203200" wrap="square"/>
+          <a:bodyPr wrap="square" lIns="203200" tIns="101600" rIns="203200" bIns="101600" rtlCol="0" anchor="ctr"/>
           <a:lstStyle/>
           <a:p>
             <a:pPr algn="l"/>
@@ -9581,15 +9584,12 @@
           </a:p>
           <a:p>
             <a:pPr algn="l"/>
-            <a:r>
-              <a:rPr sz="600" b="0">
-                <a:solidFill>
-                  <a:srgbClr val="6B7280"/>
-                </a:solidFill>
-                <a:latin typeface="Apple SD Gothic Neo"/>
-              </a:rPr>
-              <a:t/>
-            </a:r>
+            <a:endParaRPr sz="1800" b="1">
+              <a:solidFill>
+                <a:srgbClr val="5B5BD6"/>
+              </a:solidFill>
+              <a:latin typeface="Apple SD Gothic Neo"/>
+            </a:endParaRPr>
           </a:p>
           <a:p>
             <a:pPr algn="l"/>
@@ -9644,7 +9644,7 @@
           </a:fontRef>
         </p:style>
         <p:txBody>
-          <a:bodyPr rtlCol="0" anchor="ctr" tIns="101600" bIns="101600" lIns="203200" rIns="203200" wrap="square"/>
+          <a:bodyPr wrap="square" lIns="203200" tIns="101600" rIns="203200" bIns="101600" rtlCol="0" anchor="ctr"/>
           <a:lstStyle/>
           <a:p>
             <a:pPr algn="l"/>
@@ -9660,15 +9660,12 @@
           </a:p>
           <a:p>
             <a:pPr algn="l"/>
-            <a:r>
-              <a:rPr sz="600" b="0">
-                <a:solidFill>
-                  <a:srgbClr val="6B7280"/>
-                </a:solidFill>
-                <a:latin typeface="Apple SD Gothic Neo"/>
-              </a:rPr>
-              <a:t/>
-            </a:r>
+            <a:endParaRPr sz="1800" b="1">
+              <a:solidFill>
+                <a:srgbClr val="B5793A"/>
+              </a:solidFill>
+              <a:latin typeface="Apple SD Gothic Neo"/>
+            </a:endParaRPr>
           </a:p>
           <a:p>
             <a:pPr algn="l"/>
@@ -9693,7 +9690,7 @@
 </file>
 
 <file path=ppt/slides/slide27.xml><?xml version="1.0" encoding="utf-8"?>
-<p:sld xmlns:a="http://schemas.openxmlformats.org/drawingml/2006/main" xmlns:p="http://schemas.openxmlformats.org/presentationml/2006/main" xmlns:r="http://schemas.openxmlformats.org/officeDocument/2006/relationships">
+<p:sld xmlns:a="http://schemas.openxmlformats.org/drawingml/2006/main" xmlns:r="http://schemas.openxmlformats.org/officeDocument/2006/relationships" xmlns:p="http://schemas.openxmlformats.org/presentationml/2006/main">
   <p:cSld>
     <p:bg>
       <p:bgPr>
@@ -9709,7 +9706,14 @@
         <p:cNvGrpSpPr/>
         <p:nvPr/>
       </p:nvGrpSpPr>
-      <p:grpSpPr/>
+      <p:grpSpPr>
+        <a:xfrm>
+          <a:off x="0" y="0"/>
+          <a:ext cx="0" cy="0"/>
+          <a:chOff x="0" y="0"/>
+          <a:chExt cx="0" cy="0"/>
+        </a:xfrm>
+      </p:grpSpPr>
       <p:sp>
         <p:nvSpPr>
           <p:cNvPr id="2" name="TextBox 1"/>
@@ -9740,8 +9744,41 @@
                 </a:solidFill>
                 <a:latin typeface="Apple SD Gothic Neo"/>
               </a:rPr>
-              <a:t>내가 쓴 AI 도구</a:t>
-            </a:r>
+              <a:t>내가 </a:t>
+            </a:r>
+            <a:r>
+              <a:rPr sz="4600" b="1" spc="-100" dirty="0" err="1">
+                <a:solidFill>
+                  <a:srgbClr val="1A1A1A"/>
+                </a:solidFill>
+                <a:latin typeface="Apple SD Gothic Neo"/>
+              </a:rPr>
+              <a:t>쓴</a:t>
+            </a:r>
+            <a:r>
+              <a:rPr sz="4600" b="1" spc="-100" dirty="0">
+                <a:solidFill>
+                  <a:srgbClr val="1A1A1A"/>
+                </a:solidFill>
+                <a:latin typeface="Apple SD Gothic Neo"/>
+              </a:rPr>
+              <a:t> AI </a:t>
+            </a:r>
+            <a:r>
+              <a:rPr sz="4600" b="1" spc="-100" dirty="0" err="1">
+                <a:solidFill>
+                  <a:srgbClr val="1A1A1A"/>
+                </a:solidFill>
+                <a:latin typeface="Apple SD Gothic Neo"/>
+              </a:rPr>
+              <a:t>도구</a:t>
+            </a:r>
+            <a:endParaRPr sz="4600" b="1" spc="-100" dirty="0">
+              <a:solidFill>
+                <a:srgbClr val="1A1A1A"/>
+              </a:solidFill>
+              <a:latin typeface="Apple SD Gothic Neo"/>
+            </a:endParaRPr>
           </a:p>
         </p:txBody>
       </p:sp>
@@ -9786,6 +9823,7 @@
           <a:lstStyle/>
           <a:p>
             <a:pPr algn="ctr"/>
+            <a:endParaRPr/>
           </a:p>
         </p:txBody>
       </p:sp>
@@ -9830,7 +9868,7 @@
           </a:fontRef>
         </p:style>
         <p:txBody>
-          <a:bodyPr rtlCol="0" anchor="ctr" tIns="76200" bIns="76200" lIns="203200" rIns="177800" wrap="none"/>
+          <a:bodyPr wrap="none" lIns="203200" tIns="76200" rIns="177800" bIns="76200" rtlCol="0" anchor="ctr"/>
           <a:lstStyle/>
           <a:p>
             <a:pPr algn="l"/>
@@ -9896,21 +9934,30 @@
           </a:fontRef>
         </p:style>
         <p:txBody>
-          <a:bodyPr rtlCol="0" anchor="ctr" tIns="76200" bIns="76200" lIns="203200" rIns="177800" wrap="none"/>
+          <a:bodyPr wrap="none" lIns="203200" tIns="76200" rIns="177800" bIns="76200" rtlCol="0" anchor="ctr"/>
           <a:lstStyle/>
           <a:p>
             <a:pPr algn="l"/>
             <a:r>
-              <a:rPr sz="1900" b="1">
+              <a:rPr sz="1900" b="1" dirty="0" err="1">
                 <a:solidFill>
                   <a:srgbClr val="5B5BD6"/>
                 </a:solidFill>
                 <a:latin typeface="Menlo"/>
               </a:rPr>
-              <a:t>Superpowers 스킬     </a:t>
-            </a:r>
-            <a:r>
-              <a:rPr sz="1800" b="0">
+              <a:t>스킬</a:t>
+            </a:r>
+            <a:r>
+              <a:rPr sz="1900" b="1" dirty="0">
+                <a:solidFill>
+                  <a:srgbClr val="5B5BD6"/>
+                </a:solidFill>
+                <a:latin typeface="Menlo"/>
+              </a:rPr>
+              <a:t>     </a:t>
+            </a:r>
+            <a:r>
+              <a:rPr sz="1800" b="0" dirty="0">
                 <a:solidFill>
                   <a:srgbClr val="1A1A1A"/>
                 </a:solidFill>
@@ -9962,7 +10009,7 @@
           </a:fontRef>
         </p:style>
         <p:txBody>
-          <a:bodyPr rtlCol="0" anchor="ctr" tIns="76200" bIns="76200" lIns="203200" rIns="177800" wrap="none"/>
+          <a:bodyPr wrap="none" lIns="203200" tIns="76200" rIns="177800" bIns="76200" rtlCol="0" anchor="ctr"/>
           <a:lstStyle/>
           <a:p>
             <a:pPr algn="l"/>
@@ -10028,7 +10075,7 @@
           </a:fontRef>
         </p:style>
         <p:txBody>
-          <a:bodyPr rtlCol="0" anchor="ctr" tIns="76200" bIns="76200" lIns="203200" rIns="177800" wrap="none"/>
+          <a:bodyPr wrap="none" lIns="203200" tIns="76200" rIns="177800" bIns="76200" rtlCol="0" anchor="ctr"/>
           <a:lstStyle/>
           <a:p>
             <a:pPr algn="l"/>
@@ -10062,7 +10109,7 @@
 </file>
 
 <file path=ppt/slides/slide28.xml><?xml version="1.0" encoding="utf-8"?>
-<p:sld xmlns:a="http://schemas.openxmlformats.org/drawingml/2006/main" xmlns:p="http://schemas.openxmlformats.org/presentationml/2006/main" xmlns:r="http://schemas.openxmlformats.org/officeDocument/2006/relationships">
+<p:sld xmlns:a="http://schemas.openxmlformats.org/drawingml/2006/main" xmlns:r="http://schemas.openxmlformats.org/officeDocument/2006/relationships" xmlns:p="http://schemas.openxmlformats.org/presentationml/2006/main">
   <p:cSld>
     <p:bg>
       <p:bgPr>
@@ -10078,7 +10125,14 @@
         <p:cNvGrpSpPr/>
         <p:nvPr/>
       </p:nvGrpSpPr>
-      <p:grpSpPr/>
+      <p:grpSpPr>
+        <a:xfrm>
+          <a:off x="0" y="0"/>
+          <a:ext cx="0" cy="0"/>
+          <a:chOff x="0" y="0"/>
+          <a:chExt cx="0" cy="0"/>
+        </a:xfrm>
+      </p:grpSpPr>
       <p:sp>
         <p:nvSpPr>
           <p:cNvPr id="2" name="TextBox 1"/>
@@ -10155,6 +10209,7 @@
           <a:lstStyle/>
           <a:p>
             <a:pPr algn="ctr"/>
+            <a:endParaRPr/>
           </a:p>
         </p:txBody>
       </p:sp>
@@ -10238,7 +10293,7 @@
 </file>
 
 <file path=ppt/slides/slide29.xml><?xml version="1.0" encoding="utf-8"?>
-<p:sld xmlns:a="http://schemas.openxmlformats.org/drawingml/2006/main" xmlns:p="http://schemas.openxmlformats.org/presentationml/2006/main" xmlns:r="http://schemas.openxmlformats.org/officeDocument/2006/relationships">
+<p:sld xmlns:a="http://schemas.openxmlformats.org/drawingml/2006/main" xmlns:r="http://schemas.openxmlformats.org/officeDocument/2006/relationships" xmlns:p="http://schemas.openxmlformats.org/presentationml/2006/main">
   <p:cSld>
     <p:bg>
       <p:bgPr>
@@ -10254,7 +10309,14 @@
         <p:cNvGrpSpPr/>
         <p:nvPr/>
       </p:nvGrpSpPr>
-      <p:grpSpPr/>
+      <p:grpSpPr>
+        <a:xfrm>
+          <a:off x="0" y="0"/>
+          <a:ext cx="0" cy="0"/>
+          <a:chOff x="0" y="0"/>
+          <a:chExt cx="0" cy="0"/>
+        </a:xfrm>
+      </p:grpSpPr>
       <p:sp>
         <p:nvSpPr>
           <p:cNvPr id="2" name="TextBox 1"/>
@@ -10331,6 +10393,7 @@
           <a:lstStyle/>
           <a:p>
             <a:pPr algn="ctr"/>
+            <a:endParaRPr/>
           </a:p>
         </p:txBody>
       </p:sp>
@@ -10375,7 +10438,7 @@
           </a:fontRef>
         </p:style>
         <p:txBody>
-          <a:bodyPr rtlCol="0" anchor="ctr" tIns="76200" bIns="76200" lIns="127000" rIns="127000" wrap="square"/>
+          <a:bodyPr wrap="square" lIns="127000" tIns="76200" rIns="127000" bIns="76200" rtlCol="0" anchor="ctr"/>
           <a:lstStyle/>
           <a:p>
             <a:pPr algn="ctr"/>
@@ -10391,15 +10454,12 @@
           </a:p>
           <a:p>
             <a:pPr algn="ctr"/>
-            <a:r>
-              <a:rPr sz="600" b="0">
-                <a:solidFill>
-                  <a:srgbClr val="6B7280"/>
-                </a:solidFill>
-                <a:latin typeface="Apple SD Gothic Neo"/>
-              </a:rPr>
-              <a:t/>
-            </a:r>
+            <a:endParaRPr sz="2200" b="1">
+              <a:solidFill>
+                <a:srgbClr val="1A1A1A"/>
+              </a:solidFill>
+              <a:latin typeface="Apple SD Gothic Neo"/>
+            </a:endParaRPr>
           </a:p>
           <a:p>
             <a:pPr algn="ctr"/>
@@ -10491,7 +10551,7 @@
           </a:fontRef>
         </p:style>
         <p:txBody>
-          <a:bodyPr rtlCol="0" anchor="ctr" tIns="76200" bIns="76200" lIns="127000" rIns="127000" wrap="square"/>
+          <a:bodyPr wrap="square" lIns="127000" tIns="76200" rIns="127000" bIns="76200" rtlCol="0" anchor="ctr"/>
           <a:lstStyle/>
           <a:p>
             <a:pPr algn="ctr"/>
@@ -10507,15 +10567,12 @@
           </a:p>
           <a:p>
             <a:pPr algn="ctr"/>
-            <a:r>
-              <a:rPr sz="600" b="0">
-                <a:solidFill>
-                  <a:srgbClr val="6B7280"/>
-                </a:solidFill>
-                <a:latin typeface="Apple SD Gothic Neo"/>
-              </a:rPr>
-              <a:t/>
-            </a:r>
+            <a:endParaRPr sz="2200" b="1">
+              <a:solidFill>
+                <a:srgbClr val="1A1A1A"/>
+              </a:solidFill>
+              <a:latin typeface="Apple SD Gothic Neo"/>
+            </a:endParaRPr>
           </a:p>
           <a:p>
             <a:pPr algn="ctr"/>
@@ -10607,7 +10664,7 @@
           </a:fontRef>
         </p:style>
         <p:txBody>
-          <a:bodyPr rtlCol="0" anchor="ctr" tIns="76200" bIns="76200" lIns="127000" rIns="127000" wrap="square"/>
+          <a:bodyPr wrap="square" lIns="127000" tIns="76200" rIns="127000" bIns="76200" rtlCol="0" anchor="ctr"/>
           <a:lstStyle/>
           <a:p>
             <a:pPr algn="ctr"/>
@@ -10623,15 +10680,12 @@
           </a:p>
           <a:p>
             <a:pPr algn="ctr"/>
-            <a:r>
-              <a:rPr sz="600" b="0">
-                <a:solidFill>
-                  <a:srgbClr val="6B7280"/>
-                </a:solidFill>
-                <a:latin typeface="Apple SD Gothic Neo"/>
-              </a:rPr>
-              <a:t/>
-            </a:r>
+            <a:endParaRPr sz="2200" b="1">
+              <a:solidFill>
+                <a:srgbClr val="1A1A1A"/>
+              </a:solidFill>
+              <a:latin typeface="Apple SD Gothic Neo"/>
+            </a:endParaRPr>
           </a:p>
           <a:p>
             <a:pPr algn="ctr"/>
@@ -10723,7 +10777,7 @@
           </a:fontRef>
         </p:style>
         <p:txBody>
-          <a:bodyPr rtlCol="0" anchor="ctr" tIns="76200" bIns="76200" lIns="127000" rIns="127000" wrap="square"/>
+          <a:bodyPr wrap="square" lIns="127000" tIns="76200" rIns="127000" bIns="76200" rtlCol="0" anchor="ctr"/>
           <a:lstStyle/>
           <a:p>
             <a:pPr algn="ctr"/>
@@ -10739,15 +10793,12 @@
           </a:p>
           <a:p>
             <a:pPr algn="ctr"/>
-            <a:r>
-              <a:rPr sz="600" b="0">
-                <a:solidFill>
-                  <a:srgbClr val="6B7280"/>
-                </a:solidFill>
-                <a:latin typeface="Apple SD Gothic Neo"/>
-              </a:rPr>
-              <a:t/>
-            </a:r>
+            <a:endParaRPr sz="2200" b="1">
+              <a:solidFill>
+                <a:srgbClr val="1A1A1A"/>
+              </a:solidFill>
+              <a:latin typeface="Apple SD Gothic Neo"/>
+            </a:endParaRPr>
           </a:p>
           <a:p>
             <a:pPr algn="ctr"/>
@@ -10839,7 +10890,7 @@
           </a:fontRef>
         </p:style>
         <p:txBody>
-          <a:bodyPr rtlCol="0" anchor="ctr" tIns="76200" bIns="76200" lIns="127000" rIns="127000" wrap="square"/>
+          <a:bodyPr wrap="square" lIns="127000" tIns="76200" rIns="127000" bIns="76200" rtlCol="0" anchor="ctr"/>
           <a:lstStyle/>
           <a:p>
             <a:pPr algn="ctr"/>
@@ -10855,15 +10906,12 @@
           </a:p>
           <a:p>
             <a:pPr algn="ctr"/>
-            <a:r>
-              <a:rPr sz="600" b="0">
-                <a:solidFill>
-                  <a:srgbClr val="6B7280"/>
-                </a:solidFill>
-                <a:latin typeface="Apple SD Gothic Neo"/>
-              </a:rPr>
-              <a:t/>
-            </a:r>
+            <a:endParaRPr sz="2200" b="1">
+              <a:solidFill>
+                <a:srgbClr val="1A1A1A"/>
+              </a:solidFill>
+              <a:latin typeface="Apple SD Gothic Neo"/>
+            </a:endParaRPr>
           </a:p>
           <a:p>
             <a:pPr algn="ctr"/>
@@ -11200,7 +11248,7 @@
 </file>
 
 <file path=ppt/slides/slide30.xml><?xml version="1.0" encoding="utf-8"?>
-<p:sld xmlns:a="http://schemas.openxmlformats.org/drawingml/2006/main" xmlns:p="http://schemas.openxmlformats.org/presentationml/2006/main" xmlns:r="http://schemas.openxmlformats.org/officeDocument/2006/relationships">
+<p:sld xmlns:a="http://schemas.openxmlformats.org/drawingml/2006/main" xmlns:r="http://schemas.openxmlformats.org/officeDocument/2006/relationships" xmlns:p="http://schemas.openxmlformats.org/presentationml/2006/main">
   <p:cSld>
     <p:bg>
       <p:bgPr>
@@ -11216,7 +11264,14 @@
         <p:cNvGrpSpPr/>
         <p:nvPr/>
       </p:nvGrpSpPr>
-      <p:grpSpPr/>
+      <p:grpSpPr>
+        <a:xfrm>
+          <a:off x="0" y="0"/>
+          <a:ext cx="0" cy="0"/>
+          <a:chOff x="0" y="0"/>
+          <a:chExt cx="0" cy="0"/>
+        </a:xfrm>
+      </p:grpSpPr>
       <p:sp>
         <p:nvSpPr>
           <p:cNvPr id="2" name="TextBox 1"/>
@@ -11293,6 +11348,7 @@
           <a:lstStyle/>
           <a:p>
             <a:pPr algn="ctr"/>
+            <a:endParaRPr/>
           </a:p>
         </p:txBody>
       </p:sp>
@@ -11387,7 +11443,7 @@
 </file>
 
 <file path=ppt/slides/slide31.xml><?xml version="1.0" encoding="utf-8"?>
-<p:sld xmlns:a="http://schemas.openxmlformats.org/drawingml/2006/main" xmlns:p="http://schemas.openxmlformats.org/presentationml/2006/main" xmlns:r="http://schemas.openxmlformats.org/officeDocument/2006/relationships">
+<p:sld xmlns:a="http://schemas.openxmlformats.org/drawingml/2006/main" xmlns:r="http://schemas.openxmlformats.org/officeDocument/2006/relationships" xmlns:p="http://schemas.openxmlformats.org/presentationml/2006/main">
   <p:cSld>
     <p:bg>
       <p:bgPr>
@@ -11403,7 +11459,14 @@
         <p:cNvGrpSpPr/>
         <p:nvPr/>
       </p:nvGrpSpPr>
-      <p:grpSpPr/>
+      <p:grpSpPr>
+        <a:xfrm>
+          <a:off x="0" y="0"/>
+          <a:ext cx="0" cy="0"/>
+          <a:chOff x="0" y="0"/>
+          <a:chExt cx="0" cy="0"/>
+        </a:xfrm>
+      </p:grpSpPr>
       <p:sp>
         <p:nvSpPr>
           <p:cNvPr id="2" name="TextBox 1"/>
@@ -11480,6 +11543,7 @@
           <a:lstStyle/>
           <a:p>
             <a:pPr algn="ctr"/>
+            <a:endParaRPr/>
           </a:p>
         </p:txBody>
       </p:sp>
@@ -11522,7 +11586,7 @@
           </a:fontRef>
         </p:style>
         <p:txBody>
-          <a:bodyPr rtlCol="0" anchor="ctr" tIns="76200" bIns="76200" lIns="127000" rIns="127000" wrap="square"/>
+          <a:bodyPr wrap="square" lIns="127000" tIns="76200" rIns="127000" bIns="76200" rtlCol="0" anchor="ctr"/>
           <a:lstStyle/>
           <a:p>
             <a:pPr algn="ctr"/>
@@ -11538,15 +11602,12 @@
           </a:p>
           <a:p>
             <a:pPr algn="ctr"/>
-            <a:r>
-              <a:rPr sz="600" b="0">
-                <a:solidFill>
-                  <a:srgbClr val="FFFFFF"/>
-                </a:solidFill>
-                <a:latin typeface="Apple SD Gothic Neo"/>
-              </a:rPr>
-              <a:t/>
-            </a:r>
+            <a:endParaRPr sz="2200" b="1">
+              <a:solidFill>
+                <a:srgbClr val="FFFFFF"/>
+              </a:solidFill>
+              <a:latin typeface="Menlo"/>
+            </a:endParaRPr>
           </a:p>
           <a:p>
             <a:pPr algn="ctr"/>
@@ -11648,7 +11709,7 @@
           </a:fontRef>
         </p:style>
         <p:txBody>
-          <a:bodyPr rtlCol="0" anchor="ctr" tIns="76200" bIns="76200" lIns="127000" rIns="127000" wrap="square"/>
+          <a:bodyPr wrap="square" lIns="127000" tIns="76200" rIns="127000" bIns="76200" rtlCol="0" anchor="ctr"/>
           <a:lstStyle/>
           <a:p>
             <a:pPr algn="ctr"/>
@@ -11664,15 +11725,12 @@
           </a:p>
           <a:p>
             <a:pPr algn="ctr"/>
-            <a:r>
-              <a:rPr sz="600" b="0">
-                <a:solidFill>
-                  <a:srgbClr val="FFFFFF"/>
-                </a:solidFill>
-                <a:latin typeface="Apple SD Gothic Neo"/>
-              </a:rPr>
-              <a:t/>
-            </a:r>
+            <a:endParaRPr sz="2200" b="1">
+              <a:solidFill>
+                <a:srgbClr val="FFFFFF"/>
+              </a:solidFill>
+              <a:latin typeface="Menlo"/>
+            </a:endParaRPr>
           </a:p>
           <a:p>
             <a:pPr algn="ctr"/>
@@ -11774,7 +11832,7 @@
           </a:fontRef>
         </p:style>
         <p:txBody>
-          <a:bodyPr rtlCol="0" anchor="ctr" tIns="76200" bIns="76200" lIns="127000" rIns="127000" wrap="square"/>
+          <a:bodyPr wrap="square" lIns="127000" tIns="76200" rIns="127000" bIns="76200" rtlCol="0" anchor="ctr"/>
           <a:lstStyle/>
           <a:p>
             <a:pPr algn="ctr"/>
@@ -11790,15 +11848,12 @@
           </a:p>
           <a:p>
             <a:pPr algn="ctr"/>
-            <a:r>
-              <a:rPr sz="600" b="0">
-                <a:solidFill>
-                  <a:srgbClr val="FFFFFF"/>
-                </a:solidFill>
-                <a:latin typeface="Apple SD Gothic Neo"/>
-              </a:rPr>
-              <a:t/>
-            </a:r>
+            <a:endParaRPr sz="2200" b="1">
+              <a:solidFill>
+                <a:srgbClr val="FFFFFF"/>
+              </a:solidFill>
+              <a:latin typeface="Menlo"/>
+            </a:endParaRPr>
           </a:p>
           <a:p>
             <a:pPr algn="ctr"/>
@@ -11870,7 +11925,7 @@
 </file>
 
 <file path=ppt/slides/slide32.xml><?xml version="1.0" encoding="utf-8"?>
-<p:sld xmlns:a="http://schemas.openxmlformats.org/drawingml/2006/main" xmlns:p="http://schemas.openxmlformats.org/presentationml/2006/main" xmlns:r="http://schemas.openxmlformats.org/officeDocument/2006/relationships">
+<p:sld xmlns:a="http://schemas.openxmlformats.org/drawingml/2006/main" xmlns:r="http://schemas.openxmlformats.org/officeDocument/2006/relationships" xmlns:p="http://schemas.openxmlformats.org/presentationml/2006/main">
   <p:cSld>
     <p:bg>
       <p:bgPr>
@@ -11886,7 +11941,14 @@
         <p:cNvGrpSpPr/>
         <p:nvPr/>
       </p:nvGrpSpPr>
-      <p:grpSpPr/>
+      <p:grpSpPr>
+        <a:xfrm>
+          <a:off x="0" y="0"/>
+          <a:ext cx="0" cy="0"/>
+          <a:chOff x="0" y="0"/>
+          <a:chExt cx="0" cy="0"/>
+        </a:xfrm>
+      </p:grpSpPr>
       <p:sp>
         <p:nvSpPr>
           <p:cNvPr id="2" name="TextBox 1"/>
@@ -11963,6 +12025,7 @@
           <a:lstStyle/>
           <a:p>
             <a:pPr algn="ctr"/>
+            <a:endParaRPr/>
           </a:p>
         </p:txBody>
       </p:sp>
@@ -12046,7 +12109,7 @@
 </file>
 
 <file path=ppt/slides/slide33.xml><?xml version="1.0" encoding="utf-8"?>
-<p:sld xmlns:a="http://schemas.openxmlformats.org/drawingml/2006/main" xmlns:p="http://schemas.openxmlformats.org/presentationml/2006/main" xmlns:r="http://schemas.openxmlformats.org/officeDocument/2006/relationships">
+<p:sld xmlns:a="http://schemas.openxmlformats.org/drawingml/2006/main" xmlns:r="http://schemas.openxmlformats.org/officeDocument/2006/relationships" xmlns:p="http://schemas.openxmlformats.org/presentationml/2006/main">
   <p:cSld>
     <p:bg>
       <p:bgPr>
@@ -12062,7 +12125,14 @@
         <p:cNvGrpSpPr/>
         <p:nvPr/>
       </p:nvGrpSpPr>
-      <p:grpSpPr/>
+      <p:grpSpPr>
+        <a:xfrm>
+          <a:off x="0" y="0"/>
+          <a:ext cx="0" cy="0"/>
+          <a:chOff x="0" y="0"/>
+          <a:chExt cx="0" cy="0"/>
+        </a:xfrm>
+      </p:grpSpPr>
       <p:sp>
         <p:nvSpPr>
           <p:cNvPr id="2" name="TextBox 1"/>
@@ -12072,7 +12142,7 @@
         <p:spPr>
           <a:xfrm>
             <a:off x="749808" y="566928"/>
-            <a:ext cx="10881360" cy="1371600"/>
+            <a:ext cx="10881360" cy="800219"/>
           </a:xfrm>
           <a:prstGeom prst="rect">
             <a:avLst/>
@@ -12087,14 +12157,92 @@
           <a:p>
             <a:pPr algn="l"/>
             <a:r>
-              <a:rPr sz="4600" b="1" spc="-100">
+              <a:rPr sz="4600" b="1" spc="-100" dirty="0" err="1">
                 <a:solidFill>
                   <a:srgbClr val="1A1A1A"/>
                 </a:solidFill>
                 <a:latin typeface="Apple SD Gothic Neo"/>
               </a:rPr>
-              <a:t>취조 ① — 빠뜨린 걸 잡다</a:t>
-            </a:r>
+              <a:t>취조</a:t>
+            </a:r>
+            <a:r>
+              <a:rPr sz="4600" b="1" spc="-100" dirty="0">
+                <a:solidFill>
+                  <a:srgbClr val="1A1A1A"/>
+                </a:solidFill>
+                <a:latin typeface="Apple SD Gothic Neo"/>
+              </a:rPr>
+              <a:t> </a:t>
+            </a:r>
+            <a:r>
+              <a:rPr lang="en-US" altLang="ko-Kore-KR" sz="4600" b="1" spc="-100" dirty="0">
+                <a:solidFill>
+                  <a:srgbClr val="1A1A1A"/>
+                </a:solidFill>
+                <a:latin typeface="Apple SD Gothic Neo"/>
+              </a:rPr>
+              <a:t>—</a:t>
+            </a:r>
+            <a:r>
+              <a:rPr lang="ko-Kore-KR" altLang="en-US" sz="4600" b="1" spc="-100" dirty="0">
+                <a:solidFill>
+                  <a:srgbClr val="1A1A1A"/>
+                </a:solidFill>
+                <a:latin typeface="Apple SD Gothic Neo"/>
+              </a:rPr>
+              <a:t> </a:t>
+            </a:r>
+            <a:r>
+              <a:rPr sz="4600" b="1" spc="-100" dirty="0" err="1">
+                <a:solidFill>
+                  <a:srgbClr val="1A1A1A"/>
+                </a:solidFill>
+                <a:latin typeface="Apple SD Gothic Neo"/>
+              </a:rPr>
+              <a:t>흔들리는</a:t>
+            </a:r>
+            <a:r>
+              <a:rPr sz="4600" b="1" spc="-100" dirty="0">
+                <a:solidFill>
+                  <a:srgbClr val="1A1A1A"/>
+                </a:solidFill>
+                <a:latin typeface="Apple SD Gothic Neo"/>
+              </a:rPr>
+              <a:t> </a:t>
+            </a:r>
+            <a:r>
+              <a:rPr sz="4600" b="1" spc="-100" dirty="0" err="1">
+                <a:solidFill>
+                  <a:srgbClr val="1A1A1A"/>
+                </a:solidFill>
+                <a:latin typeface="Apple SD Gothic Neo"/>
+              </a:rPr>
+              <a:t>용어를</a:t>
+            </a:r>
+            <a:r>
+              <a:rPr sz="4600" b="1" spc="-100" dirty="0">
+                <a:solidFill>
+                  <a:srgbClr val="1A1A1A"/>
+                </a:solidFill>
+                <a:latin typeface="Apple SD Gothic Neo"/>
+              </a:rPr>
+              <a:t> </a:t>
+            </a:r>
+            <a:r>
+              <a:rPr sz="4600" b="1" spc="-100" dirty="0" err="1">
+                <a:solidFill>
+                  <a:srgbClr val="1A1A1A"/>
+                </a:solidFill>
+                <a:latin typeface="Apple SD Gothic Neo"/>
+              </a:rPr>
+              <a:t>잡다</a:t>
+            </a:r>
+            <a:endParaRPr sz="4600" b="1" spc="-100" dirty="0">
+              <a:solidFill>
+                <a:srgbClr val="1A1A1A"/>
+              </a:solidFill>
+              <a:latin typeface="Apple SD Gothic Neo"/>
+            </a:endParaRPr>
           </a:p>
         </p:txBody>
       </p:sp>
@@ -12139,6 +12287,7 @@
           <a:lstStyle/>
           <a:p>
             <a:pPr algn="ctr"/>
+            <a:endParaRPr/>
           </a:p>
         </p:txBody>
       </p:sp>
@@ -12183,7 +12332,7 @@
           </a:fontRef>
         </p:style>
         <p:txBody>
-          <a:bodyPr rtlCol="0" anchor="ctr" tIns="101600" bIns="101600" lIns="203200" rIns="203200" wrap="square"/>
+          <a:bodyPr wrap="square" lIns="203200" tIns="101600" rIns="203200" bIns="101600" rtlCol="0" anchor="ctr"/>
           <a:lstStyle/>
           <a:p>
             <a:pPr algn="l"/>
@@ -12199,15 +12348,12 @@
           </a:p>
           <a:p>
             <a:pPr algn="l"/>
-            <a:r>
-              <a:rPr sz="600" b="0">
-                <a:solidFill>
-                  <a:srgbClr val="6B7280"/>
-                </a:solidFill>
-                <a:latin typeface="Apple SD Gothic Neo"/>
-              </a:rPr>
-              <a:t/>
-            </a:r>
+            <a:endParaRPr sz="1600" b="1">
+              <a:solidFill>
+                <a:srgbClr val="6B7280"/>
+              </a:solidFill>
+              <a:latin typeface="Apple SD Gothic Neo"/>
+            </a:endParaRPr>
           </a:p>
           <a:p>
             <a:pPr algn="l"/>
@@ -12218,8 +12364,8 @@
                 </a:solidFill>
                 <a:latin typeface="Apple SD Gothic Neo"/>
               </a:rPr>
-              <a:t>유스케이스 17개에
-'회원가입'이 없었다</a:t>
+              <a:t>같은 사람을 Policyholder·
+account·user로 섞어 부름</a:t>
             </a:r>
           </a:p>
         </p:txBody>
@@ -12298,7 +12444,7 @@
           </a:fontRef>
         </p:style>
         <p:txBody>
-          <a:bodyPr rtlCol="0" anchor="ctr" tIns="101600" bIns="101600" lIns="203200" rIns="203200" wrap="square"/>
+          <a:bodyPr wrap="square" lIns="203200" tIns="101600" rIns="203200" bIns="101600" rtlCol="0" anchor="ctr"/>
           <a:lstStyle/>
           <a:p>
             <a:pPr algn="l"/>
@@ -12314,15 +12460,12 @@
           </a:p>
           <a:p>
             <a:pPr algn="l"/>
-            <a:r>
-              <a:rPr sz="600" b="0">
-                <a:solidFill>
-                  <a:srgbClr val="6B7280"/>
-                </a:solidFill>
-                <a:latin typeface="Apple SD Gothic Neo"/>
-              </a:rPr>
-              <a:t/>
-            </a:r>
+            <a:endParaRPr sz="1600" b="1">
+              <a:solidFill>
+                <a:srgbClr val="5B5BD6"/>
+              </a:solidFill>
+              <a:latin typeface="Apple SD Gothic Neo"/>
+            </a:endParaRPr>
           </a:p>
           <a:p>
             <a:pPr algn="l"/>
@@ -12333,8 +12476,8 @@
                 </a:solidFill>
                 <a:latin typeface="Apple SD Gothic Neo"/>
               </a:rPr>
-              <a:t>회원가입을 명시적으로
-추가하기로 결정</a:t>
+              <a:t>CONTEXT.md에
+표준어 하나로 못박음</a:t>
             </a:r>
           </a:p>
         </p:txBody>
@@ -12348,7 +12491,7 @@
 </file>
 
 <file path=ppt/slides/slide34.xml><?xml version="1.0" encoding="utf-8"?>
-<p:sld xmlns:a="http://schemas.openxmlformats.org/drawingml/2006/main" xmlns:p="http://schemas.openxmlformats.org/presentationml/2006/main" xmlns:r="http://schemas.openxmlformats.org/officeDocument/2006/relationships">
+<p:sld xmlns:a="http://schemas.openxmlformats.org/drawingml/2006/main" xmlns:r="http://schemas.openxmlformats.org/officeDocument/2006/relationships" xmlns:p="http://schemas.openxmlformats.org/presentationml/2006/main">
   <p:cSld>
     <p:bg>
       <p:bgPr>
@@ -12364,7 +12507,14 @@
         <p:cNvGrpSpPr/>
         <p:nvPr/>
       </p:nvGrpSpPr>
-      <p:grpSpPr/>
+      <p:grpSpPr>
+        <a:xfrm>
+          <a:off x="0" y="0"/>
+          <a:ext cx="0" cy="0"/>
+          <a:chOff x="0" y="0"/>
+          <a:chExt cx="0" cy="0"/>
+        </a:xfrm>
+      </p:grpSpPr>
       <p:sp>
         <p:nvSpPr>
           <p:cNvPr id="2" name="TextBox 1"/>
@@ -12374,7 +12524,7 @@
         <p:spPr>
           <a:xfrm>
             <a:off x="749808" y="566928"/>
-            <a:ext cx="10881360" cy="1371600"/>
+            <a:ext cx="10881360" cy="800219"/>
           </a:xfrm>
           <a:prstGeom prst="rect">
             <a:avLst/>
@@ -12389,14 +12539,74 @@
           <a:p>
             <a:pPr algn="l"/>
             <a:r>
-              <a:rPr sz="4600" b="1" spc="-100">
+              <a:rPr sz="4600" b="1" spc="-100" dirty="0" err="1">
                 <a:solidFill>
                   <a:srgbClr val="1A1A1A"/>
                 </a:solidFill>
                 <a:latin typeface="Apple SD Gothic Neo"/>
               </a:rPr>
-              <a:t>취조 ② — 흔들리는 용어를 잡다</a:t>
-            </a:r>
+              <a:t>취조</a:t>
+            </a:r>
+            <a:r>
+              <a:rPr sz="4600" b="1" spc="-100" dirty="0">
+                <a:solidFill>
+                  <a:srgbClr val="1A1A1A"/>
+                </a:solidFill>
+                <a:latin typeface="Apple SD Gothic Neo"/>
+              </a:rPr>
+              <a:t> — </a:t>
+            </a:r>
+            <a:r>
+              <a:rPr sz="4600" b="1" spc="-100" dirty="0" err="1">
+                <a:solidFill>
+                  <a:srgbClr val="1A1A1A"/>
+                </a:solidFill>
+                <a:latin typeface="Apple SD Gothic Neo"/>
+              </a:rPr>
+              <a:t>과한</a:t>
+            </a:r>
+            <a:r>
+              <a:rPr sz="4600" b="1" spc="-100" dirty="0">
+                <a:solidFill>
+                  <a:srgbClr val="1A1A1A"/>
+                </a:solidFill>
+                <a:latin typeface="Apple SD Gothic Neo"/>
+              </a:rPr>
+              <a:t> </a:t>
+            </a:r>
+            <a:r>
+              <a:rPr sz="4600" b="1" spc="-100" dirty="0" err="1">
+                <a:solidFill>
+                  <a:srgbClr val="1A1A1A"/>
+                </a:solidFill>
+                <a:latin typeface="Apple SD Gothic Neo"/>
+              </a:rPr>
+              <a:t>구현을</a:t>
+            </a:r>
+            <a:r>
+              <a:rPr sz="4600" b="1" spc="-100" dirty="0">
+                <a:solidFill>
+                  <a:srgbClr val="1A1A1A"/>
+                </a:solidFill>
+                <a:latin typeface="Apple SD Gothic Neo"/>
+              </a:rPr>
+              <a:t> </a:t>
+            </a:r>
+            <a:r>
+              <a:rPr sz="4600" b="1" spc="-100" dirty="0" err="1">
+                <a:solidFill>
+                  <a:srgbClr val="1A1A1A"/>
+                </a:solidFill>
+                <a:latin typeface="Apple SD Gothic Neo"/>
+              </a:rPr>
+              <a:t>막다</a:t>
+            </a:r>
+            <a:endParaRPr sz="4600" b="1" spc="-100" dirty="0">
+              <a:solidFill>
+                <a:srgbClr val="1A1A1A"/>
+              </a:solidFill>
+              <a:latin typeface="Apple SD Gothic Neo"/>
+            </a:endParaRPr>
           </a:p>
         </p:txBody>
       </p:sp>
@@ -12441,6 +12651,7 @@
           <a:lstStyle/>
           <a:p>
             <a:pPr algn="ctr"/>
+            <a:endParaRPr/>
           </a:p>
         </p:txBody>
       </p:sp>
@@ -12485,7 +12696,7 @@
           </a:fontRef>
         </p:style>
         <p:txBody>
-          <a:bodyPr rtlCol="0" anchor="ctr" tIns="101600" bIns="101600" lIns="203200" rIns="203200" wrap="square"/>
+          <a:bodyPr wrap="square" lIns="203200" tIns="101600" rIns="203200" bIns="101600" rtlCol="0" anchor="ctr"/>
           <a:lstStyle/>
           <a:p>
             <a:pPr algn="l"/>
@@ -12501,15 +12712,12 @@
           </a:p>
           <a:p>
             <a:pPr algn="l"/>
-            <a:r>
-              <a:rPr sz="600" b="0">
-                <a:solidFill>
-                  <a:srgbClr val="6B7280"/>
-                </a:solidFill>
-                <a:latin typeface="Apple SD Gothic Neo"/>
-              </a:rPr>
-              <a:t/>
-            </a:r>
+            <a:endParaRPr sz="1600" b="1">
+              <a:solidFill>
+                <a:srgbClr val="6B7280"/>
+              </a:solidFill>
+              <a:latin typeface="Apple SD Gothic Neo"/>
+            </a:endParaRPr>
           </a:p>
           <a:p>
             <a:pPr algn="l"/>
@@ -12520,8 +12728,8 @@
                 </a:solidFill>
                 <a:latin typeface="Apple SD Gothic Neo"/>
               </a:rPr>
-              <a:t>같은 사람을 Policyholder·
-account·user로 섞어 부름</a:t>
+              <a:t>보험료를 '맞춤 계산'까지
+만들려 함</a:t>
             </a:r>
           </a:p>
         </p:txBody>
@@ -12600,7 +12808,7 @@
           </a:fontRef>
         </p:style>
         <p:txBody>
-          <a:bodyPr rtlCol="0" anchor="ctr" tIns="101600" bIns="101600" lIns="203200" rIns="203200" wrap="square"/>
+          <a:bodyPr wrap="square" lIns="203200" tIns="101600" rIns="203200" bIns="101600" rtlCol="0" anchor="ctr"/>
           <a:lstStyle/>
           <a:p>
             <a:pPr algn="l"/>
@@ -12616,15 +12824,12 @@
           </a:p>
           <a:p>
             <a:pPr algn="l"/>
-            <a:r>
-              <a:rPr sz="600" b="0">
-                <a:solidFill>
-                  <a:srgbClr val="6B7280"/>
-                </a:solidFill>
-                <a:latin typeface="Apple SD Gothic Neo"/>
-              </a:rPr>
-              <a:t/>
-            </a:r>
+            <a:endParaRPr sz="1600" b="1">
+              <a:solidFill>
+                <a:srgbClr val="5B5BD6"/>
+              </a:solidFill>
+              <a:latin typeface="Apple SD Gothic Neo"/>
+            </a:endParaRPr>
           </a:p>
           <a:p>
             <a:pPr algn="l"/>
@@ -12635,8 +12840,8 @@
                 </a:solidFill>
                 <a:latin typeface="Apple SD Gothic Neo"/>
               </a:rPr>
-              <a:t>CONTEXT.md에
-표준어 하나로 못박음</a:t>
+              <a:t>유스케이스 범위(예시만)로
+되돌림</a:t>
             </a:r>
           </a:p>
         </p:txBody>
@@ -12650,7 +12855,7 @@
 </file>
 
 <file path=ppt/slides/slide35.xml><?xml version="1.0" encoding="utf-8"?>
-<p:sld xmlns:a="http://schemas.openxmlformats.org/drawingml/2006/main" xmlns:p="http://schemas.openxmlformats.org/presentationml/2006/main" xmlns:r="http://schemas.openxmlformats.org/officeDocument/2006/relationships">
+<p:sld xmlns:a="http://schemas.openxmlformats.org/drawingml/2006/main" xmlns:r="http://schemas.openxmlformats.org/officeDocument/2006/relationships" xmlns:p="http://schemas.openxmlformats.org/presentationml/2006/main">
   <p:cSld>
     <p:bg>
       <p:bgPr>
@@ -12666,7 +12871,14 @@
         <p:cNvGrpSpPr/>
         <p:nvPr/>
       </p:nvGrpSpPr>
-      <p:grpSpPr/>
+      <p:grpSpPr>
+        <a:xfrm>
+          <a:off x="0" y="0"/>
+          <a:ext cx="0" cy="0"/>
+          <a:chOff x="0" y="0"/>
+          <a:chExt cx="0" cy="0"/>
+        </a:xfrm>
+      </p:grpSpPr>
       <p:sp>
         <p:nvSpPr>
           <p:cNvPr id="2" name="TextBox 1"/>
@@ -12676,7 +12888,7 @@
         <p:spPr>
           <a:xfrm>
             <a:off x="749808" y="566928"/>
-            <a:ext cx="10881360" cy="1371600"/>
+            <a:ext cx="10881360" cy="800219"/>
           </a:xfrm>
           <a:prstGeom prst="rect">
             <a:avLst/>
@@ -12691,14 +12903,92 @@
           <a:p>
             <a:pPr algn="l"/>
             <a:r>
-              <a:rPr sz="4600" b="1" spc="-100">
+              <a:rPr sz="4600" b="1" spc="-100" dirty="0" err="1">
                 <a:solidFill>
                   <a:srgbClr val="1A1A1A"/>
                 </a:solidFill>
                 <a:latin typeface="Apple SD Gothic Neo"/>
               </a:rPr>
-              <a:t>취조 ③ — 과한 구현을 막다</a:t>
-            </a:r>
+              <a:t>취조</a:t>
+            </a:r>
+            <a:r>
+              <a:rPr sz="4600" b="1" spc="-100" dirty="0">
+                <a:solidFill>
+                  <a:srgbClr val="1A1A1A"/>
+                </a:solidFill>
+                <a:latin typeface="Apple SD Gothic Neo"/>
+              </a:rPr>
+              <a:t> — </a:t>
+            </a:r>
+            <a:r>
+              <a:rPr sz="4600" b="1" spc="-100" dirty="0" err="1">
+                <a:solidFill>
+                  <a:srgbClr val="1A1A1A"/>
+                </a:solidFill>
+                <a:latin typeface="Apple SD Gothic Neo"/>
+              </a:rPr>
+              <a:t>멋대로</a:t>
+            </a:r>
+            <a:r>
+              <a:rPr sz="4600" b="1" spc="-100" dirty="0">
+                <a:solidFill>
+                  <a:srgbClr val="1A1A1A"/>
+                </a:solidFill>
+                <a:latin typeface="Apple SD Gothic Neo"/>
+              </a:rPr>
+              <a:t> </a:t>
+            </a:r>
+            <a:r>
+              <a:rPr sz="4600" b="1" spc="-100" dirty="0" err="1">
+                <a:solidFill>
+                  <a:srgbClr val="1A1A1A"/>
+                </a:solidFill>
+                <a:latin typeface="Apple SD Gothic Neo"/>
+              </a:rPr>
+              <a:t>늘린</a:t>
+            </a:r>
+            <a:r>
+              <a:rPr sz="4600" b="1" spc="-100" dirty="0">
+                <a:solidFill>
+                  <a:srgbClr val="1A1A1A"/>
+                </a:solidFill>
+                <a:latin typeface="Apple SD Gothic Neo"/>
+              </a:rPr>
+              <a:t> </a:t>
+            </a:r>
+            <a:r>
+              <a:rPr sz="4600" b="1" spc="-100" dirty="0" err="1">
+                <a:solidFill>
+                  <a:srgbClr val="1A1A1A"/>
+                </a:solidFill>
+                <a:latin typeface="Apple SD Gothic Neo"/>
+              </a:rPr>
+              <a:t>걸</a:t>
+            </a:r>
+            <a:r>
+              <a:rPr sz="4600" b="1" spc="-100" dirty="0">
+                <a:solidFill>
+                  <a:srgbClr val="1A1A1A"/>
+                </a:solidFill>
+                <a:latin typeface="Apple SD Gothic Neo"/>
+              </a:rPr>
+              <a:t> </a:t>
+            </a:r>
+            <a:r>
+              <a:rPr sz="4600" b="1" spc="-100" dirty="0" err="1">
+                <a:solidFill>
+                  <a:srgbClr val="1A1A1A"/>
+                </a:solidFill>
+                <a:latin typeface="Apple SD Gothic Neo"/>
+              </a:rPr>
+              <a:t>막다</a:t>
+            </a:r>
+            <a:endParaRPr sz="4600" b="1" spc="-100" dirty="0">
+              <a:solidFill>
+                <a:srgbClr val="1A1A1A"/>
+              </a:solidFill>
+              <a:latin typeface="Apple SD Gothic Neo"/>
+            </a:endParaRPr>
           </a:p>
         </p:txBody>
       </p:sp>
@@ -12743,6 +13033,7 @@
           <a:lstStyle/>
           <a:p>
             <a:pPr algn="ctr"/>
+            <a:endParaRPr/>
           </a:p>
         </p:txBody>
       </p:sp>
@@ -12787,7 +13078,7 @@
           </a:fontRef>
         </p:style>
         <p:txBody>
-          <a:bodyPr rtlCol="0" anchor="ctr" tIns="101600" bIns="101600" lIns="203200" rIns="203200" wrap="square"/>
+          <a:bodyPr wrap="square" lIns="203200" tIns="101600" rIns="203200" bIns="101600" rtlCol="0" anchor="ctr"/>
           <a:lstStyle/>
           <a:p>
             <a:pPr algn="l"/>
@@ -12803,15 +13094,12 @@
           </a:p>
           <a:p>
             <a:pPr algn="l"/>
-            <a:r>
-              <a:rPr sz="600" b="0">
-                <a:solidFill>
-                  <a:srgbClr val="6B7280"/>
-                </a:solidFill>
-                <a:latin typeface="Apple SD Gothic Neo"/>
-              </a:rPr>
-              <a:t/>
-            </a:r>
+            <a:endParaRPr sz="1600" b="1">
+              <a:solidFill>
+                <a:srgbClr val="6B7280"/>
+              </a:solidFill>
+              <a:latin typeface="Apple SD Gothic Neo"/>
+            </a:endParaRPr>
           </a:p>
           <a:p>
             <a:pPr algn="l"/>
@@ -12822,8 +13110,8 @@
                 </a:solidFill>
                 <a:latin typeface="Apple SD Gothic Neo"/>
               </a:rPr>
-              <a:t>보험료를 '맞춤 계산'까지
-만들려 함</a:t>
+              <a:t>상태값에 CONDITIONAL을
+임의로 추가</a:t>
             </a:r>
           </a:p>
         </p:txBody>
@@ -12902,7 +13190,7 @@
           </a:fontRef>
         </p:style>
         <p:txBody>
-          <a:bodyPr rtlCol="0" anchor="ctr" tIns="101600" bIns="101600" lIns="203200" rIns="203200" wrap="square"/>
+          <a:bodyPr wrap="square" lIns="203200" tIns="101600" rIns="203200" bIns="101600" rtlCol="0" anchor="ctr"/>
           <a:lstStyle/>
           <a:p>
             <a:pPr algn="l"/>
@@ -12918,15 +13206,12 @@
           </a:p>
           <a:p>
             <a:pPr algn="l"/>
-            <a:r>
-              <a:rPr sz="600" b="0">
-                <a:solidFill>
-                  <a:srgbClr val="6B7280"/>
-                </a:solidFill>
-                <a:latin typeface="Apple SD Gothic Neo"/>
-              </a:rPr>
-              <a:t/>
-            </a:r>
+            <a:endParaRPr sz="1600" b="1">
+              <a:solidFill>
+                <a:srgbClr val="5B5BD6"/>
+              </a:solidFill>
+              <a:latin typeface="Apple SD Gothic Neo"/>
+            </a:endParaRPr>
           </a:p>
           <a:p>
             <a:pPr algn="l"/>
@@ -12937,8 +13222,8 @@
                 </a:solidFill>
                 <a:latin typeface="Apple SD Gothic Neo"/>
               </a:rPr>
-              <a:t>유스케이스 범위(예시만)로
-되돌림</a:t>
+              <a:t>다이어그램 3값 유지,
+조건부는 심사가 책임</a:t>
             </a:r>
           </a:p>
         </p:txBody>
@@ -12952,7 +13237,7 @@
 </file>
 
 <file path=ppt/slides/slide36.xml><?xml version="1.0" encoding="utf-8"?>
-<p:sld xmlns:a="http://schemas.openxmlformats.org/drawingml/2006/main" xmlns:p="http://schemas.openxmlformats.org/presentationml/2006/main" xmlns:r="http://schemas.openxmlformats.org/officeDocument/2006/relationships">
+<p:sld xmlns:a="http://schemas.openxmlformats.org/drawingml/2006/main" xmlns:r="http://schemas.openxmlformats.org/officeDocument/2006/relationships" xmlns:p="http://schemas.openxmlformats.org/presentationml/2006/main">
   <p:cSld>
     <p:bg>
       <p:bgPr>
@@ -12968,7 +13253,14 @@
         <p:cNvGrpSpPr/>
         <p:nvPr/>
       </p:nvGrpSpPr>
-      <p:grpSpPr/>
+      <p:grpSpPr>
+        <a:xfrm>
+          <a:off x="0" y="0"/>
+          <a:ext cx="0" cy="0"/>
+          <a:chOff x="0" y="0"/>
+          <a:chExt cx="0" cy="0"/>
+        </a:xfrm>
+      </p:grpSpPr>
       <p:sp>
         <p:nvSpPr>
           <p:cNvPr id="2" name="TextBox 1"/>
@@ -12977,8 +13269,8 @@
         </p:nvSpPr>
         <p:spPr>
           <a:xfrm>
-            <a:off x="749808" y="566928"/>
-            <a:ext cx="10881360" cy="1371600"/>
+            <a:off x="749808" y="457200"/>
+            <a:ext cx="10881360" cy="1188720"/>
           </a:xfrm>
           <a:prstGeom prst="rect">
             <a:avLst/>
@@ -12993,13 +13285,13 @@
           <a:p>
             <a:pPr algn="l"/>
             <a:r>
-              <a:rPr sz="4600" b="1" spc="-100">
+              <a:rPr sz="4400" b="1" spc="-100">
                 <a:solidFill>
                   <a:srgbClr val="1A1A1A"/>
                 </a:solidFill>
                 <a:latin typeface="Apple SD Gothic Neo"/>
               </a:rPr>
-              <a:t>취조 ④ — 멋대로 늘린 걸 막다</a:t>
+              <a:t>AI는 공짜가 아니다</a:t>
             </a:r>
           </a:p>
         </p:txBody>
@@ -13012,7 +13304,7 @@
         </p:nvSpPr>
         <p:spPr>
           <a:xfrm>
-            <a:off x="822960" y="1554480"/>
+            <a:off x="822960" y="1417320"/>
             <a:ext cx="868680" cy="82296"/>
           </a:xfrm>
           <a:prstGeom prst="rect">
@@ -13045,19 +13337,55 @@
           <a:lstStyle/>
           <a:p>
             <a:pPr algn="ctr"/>
-          </a:p>
-        </p:txBody>
-      </p:sp>
-      <p:sp>
-        <p:nvSpPr>
-          <p:cNvPr id="4" name="Rounded Rectangle 3"/>
+            <a:endParaRPr/>
+          </a:p>
+        </p:txBody>
+      </p:sp>
+      <p:sp>
+        <p:nvSpPr>
+          <p:cNvPr id="4" name="TextBox 3"/>
+          <p:cNvSpPr txBox="1"/>
+          <p:nvPr/>
+        </p:nvSpPr>
+        <p:spPr>
+          <a:xfrm>
+            <a:off x="822960" y="2286000"/>
+            <a:ext cx="10607040" cy="1097280"/>
+          </a:xfrm>
+          <a:prstGeom prst="rect">
+            <a:avLst/>
+          </a:prstGeom>
+          <a:noFill/>
+        </p:spPr>
+        <p:txBody>
+          <a:bodyPr wrap="square" anchor="ctr">
+            <a:spAutoFit/>
+          </a:bodyPr>
+          <a:lstStyle/>
+          <a:p>
+            <a:pPr algn="ctr"/>
+            <a:r>
+              <a:rPr sz="4000" b="1" spc="-60">
+                <a:solidFill>
+                  <a:srgbClr val="1A1A1A"/>
+                </a:solidFill>
+                <a:latin typeface="Apple SD Gothic Neo"/>
+              </a:rPr>
+              <a:t>한 Epic에  $39.63  ·  토큰 5,100만</a:t>
+            </a:r>
+          </a:p>
+        </p:txBody>
+      </p:sp>
+      <p:sp>
+        <p:nvSpPr>
+          <p:cNvPr id="5" name="Rounded Rectangle 4"/>
           <p:cNvSpPr/>
           <p:nvPr/>
         </p:nvSpPr>
         <p:spPr>
           <a:xfrm>
-            <a:off x="777240" y="2743200"/>
-            <a:ext cx="4800600" cy="1920240"/>
+            <a:off x="2194560" y="3931920"/>
+            <a:ext cx="3566160" cy="1280160"/>
           </a:xfrm>
           <a:prstGeom prst="roundRect">
             <a:avLst>
@@ -13065,12 +13393,10 @@
             </a:avLst>
           </a:prstGeom>
           <a:solidFill>
-            <a:srgbClr val="F4F4F6"/>
+            <a:srgbClr val="5B5BD6"/>
           </a:solidFill>
-          <a:ln w="16510">
-            <a:solidFill>
-              <a:srgbClr val="E6E6E6"/>
-            </a:solidFill>
+          <a:ln>
+            <a:noFill/>
           </a:ln>
           <a:effectLst/>
         </p:spPr>
@@ -13089,78 +13415,30 @@
           </a:fontRef>
         </p:style>
         <p:txBody>
-          <a:bodyPr rtlCol="0" anchor="ctr" tIns="101600" bIns="101600" lIns="203200" rIns="203200" wrap="square"/>
-          <a:lstStyle/>
-          <a:p>
-            <a:pPr algn="l"/>
+          <a:bodyPr wrap="square" lIns="203200" tIns="76200" rIns="177800" bIns="76200" rtlCol="0" anchor="ctr"/>
+          <a:lstStyle/>
+          <a:p>
+            <a:pPr algn="ctr"/>
             <a:r>
               <a:rPr sz="1600" b="1">
                 <a:solidFill>
-                  <a:srgbClr val="6B7280"/>
-                </a:solidFill>
-                <a:latin typeface="Apple SD Gothic Neo"/>
-              </a:rPr>
-              <a:t>AI가 한 것</a:t>
-            </a:r>
-          </a:p>
-          <a:p>
-            <a:pPr algn="l"/>
-            <a:r>
-              <a:rPr sz="600" b="0">
-                <a:solidFill>
-                  <a:srgbClr val="6B7280"/>
-                </a:solidFill>
-                <a:latin typeface="Apple SD Gothic Neo"/>
-              </a:rPr>
-              <a:t/>
-            </a:r>
-          </a:p>
-          <a:p>
-            <a:pPr algn="l"/>
-            <a:r>
-              <a:rPr sz="2100" b="1">
-                <a:solidFill>
-                  <a:srgbClr val="1A1A1A"/>
-                </a:solidFill>
-                <a:latin typeface="Apple SD Gothic Neo"/>
-              </a:rPr>
-              <a:t>상태값에 CONDITIONAL을
-임의로 추가</a:t>
-            </a:r>
-          </a:p>
-        </p:txBody>
-      </p:sp>
-      <p:sp>
-        <p:nvSpPr>
-          <p:cNvPr id="5" name="TextBox 4"/>
-          <p:cNvSpPr txBox="1"/>
-          <p:nvPr/>
-        </p:nvSpPr>
-        <p:spPr>
-          <a:xfrm>
-            <a:off x="5733288" y="3383280"/>
-            <a:ext cx="731520" cy="640080"/>
-          </a:xfrm>
-          <a:prstGeom prst="rect">
-            <a:avLst/>
-          </a:prstGeom>
-          <a:noFill/>
-        </p:spPr>
-        <p:txBody>
-          <a:bodyPr wrap="square" anchor="ctr">
-            <a:spAutoFit/>
-          </a:bodyPr>
-          <a:lstStyle/>
-          <a:p>
-            <a:pPr algn="ctr"/>
-            <a:r>
-              <a:rPr sz="3400" b="1">
-                <a:solidFill>
-                  <a:srgbClr val="5B5BD6"/>
-                </a:solidFill>
-                <a:latin typeface="Apple SD Gothic Neo"/>
-              </a:rPr>
-              <a:t>→</a:t>
+                  <a:srgbClr val="FFFFFF"/>
+                </a:solidFill>
+                <a:latin typeface="Apple SD Gothic Neo"/>
+              </a:rPr>
+              <a:t>5시간 한도</a:t>
+            </a:r>
+          </a:p>
+          <a:p>
+            <a:pPr algn="ctr"/>
+            <a:r>
+              <a:rPr sz="3000" b="1">
+                <a:solidFill>
+                  <a:srgbClr val="FFFFFF"/>
+                </a:solidFill>
+                <a:latin typeface="Apple SD Gothic Neo"/>
+              </a:rPr>
+              <a:t>96% 소진</a:t>
             </a:r>
           </a:p>
         </p:txBody>
@@ -13173,8 +13451,8 @@
         </p:nvSpPr>
         <p:spPr>
           <a:xfrm>
-            <a:off x="6629400" y="2743200"/>
-            <a:ext cx="4800600" cy="1920240"/>
+            <a:off x="6400800" y="3931920"/>
+            <a:ext cx="3566160" cy="1280160"/>
           </a:xfrm>
           <a:prstGeom prst="roundRect">
             <a:avLst>
@@ -13204,10 +13482,10 @@
           </a:fontRef>
         </p:style>
         <p:txBody>
-          <a:bodyPr rtlCol="0" anchor="ctr" tIns="101600" bIns="101600" lIns="203200" rIns="203200" wrap="square"/>
-          <a:lstStyle/>
-          <a:p>
-            <a:pPr algn="l"/>
+          <a:bodyPr wrap="square" lIns="203200" tIns="76200" rIns="177800" bIns="76200" rtlCol="0" anchor="ctr"/>
+          <a:lstStyle/>
+          <a:p>
+            <a:pPr algn="ctr"/>
             <a:r>
               <a:rPr sz="1600" b="1">
                 <a:solidFill>
@@ -13215,32 +13493,54 @@
                 </a:solidFill>
                 <a:latin typeface="Apple SD Gothic Neo"/>
               </a:rPr>
-              <a:t>내가 통제</a:t>
-            </a:r>
-          </a:p>
-          <a:p>
-            <a:pPr algn="l"/>
-            <a:r>
-              <a:rPr sz="600" b="0">
+              <a:t>주간 한도</a:t>
+            </a:r>
+          </a:p>
+          <a:p>
+            <a:pPr algn="ctr"/>
+            <a:r>
+              <a:rPr sz="3000" b="1">
+                <a:solidFill>
+                  <a:srgbClr val="1A1A1A"/>
+                </a:solidFill>
+                <a:latin typeface="Apple SD Gothic Neo"/>
+              </a:rPr>
+              <a:t>27% 소진</a:t>
+            </a:r>
+          </a:p>
+        </p:txBody>
+      </p:sp>
+      <p:sp>
+        <p:nvSpPr>
+          <p:cNvPr id="7" name="TextBox 6"/>
+          <p:cNvSpPr txBox="1"/>
+          <p:nvPr/>
+        </p:nvSpPr>
+        <p:spPr>
+          <a:xfrm>
+            <a:off x="822960" y="5486400"/>
+            <a:ext cx="10607040" cy="640080"/>
+          </a:xfrm>
+          <a:prstGeom prst="rect">
+            <a:avLst/>
+          </a:prstGeom>
+          <a:noFill/>
+        </p:spPr>
+        <p:txBody>
+          <a:bodyPr wrap="square" anchor="t">
+            <a:spAutoFit/>
+          </a:bodyPr>
+          <a:lstStyle/>
+          <a:p>
+            <a:pPr algn="ctr"/>
+            <a:r>
+              <a:rPr sz="2200" b="0" spc="-30">
                 <a:solidFill>
                   <a:srgbClr val="6B7280"/>
                 </a:solidFill>
                 <a:latin typeface="Apple SD Gothic Neo"/>
               </a:rPr>
-              <a:t/>
-            </a:r>
-          </a:p>
-          <a:p>
-            <a:pPr algn="l"/>
-            <a:r>
-              <a:rPr sz="2100" b="1">
-                <a:solidFill>
-                  <a:srgbClr val="1A1A1A"/>
-                </a:solidFill>
-                <a:latin typeface="Apple SD Gothic Neo"/>
-              </a:rPr>
-              <a:t>다이어그램 3값 유지,
-조건부는 심사가 책임</a:t>
+              <a:t>Claude Code 한 세션이 5시간 토큰 한도를 거의 다 먹었다.</a:t>
             </a:r>
           </a:p>
         </p:txBody>
@@ -13254,7 +13554,7 @@
 </file>
 
 <file path=ppt/slides/slide37.xml><?xml version="1.0" encoding="utf-8"?>
-<p:sld xmlns:a="http://schemas.openxmlformats.org/drawingml/2006/main" xmlns:p="http://schemas.openxmlformats.org/presentationml/2006/main" xmlns:r="http://schemas.openxmlformats.org/officeDocument/2006/relationships">
+<p:sld xmlns:a="http://schemas.openxmlformats.org/drawingml/2006/main" xmlns:r="http://schemas.openxmlformats.org/officeDocument/2006/relationships" xmlns:p="http://schemas.openxmlformats.org/presentationml/2006/main">
   <p:cSld>
     <p:bg>
       <p:bgPr>
@@ -13270,7 +13570,14 @@
         <p:cNvGrpSpPr/>
         <p:nvPr/>
       </p:nvGrpSpPr>
-      <p:grpSpPr/>
+      <p:grpSpPr>
+        <a:xfrm>
+          <a:off x="0" y="0"/>
+          <a:ext cx="0" cy="0"/>
+          <a:chOff x="0" y="0"/>
+          <a:chExt cx="0" cy="0"/>
+        </a:xfrm>
+      </p:grpSpPr>
       <p:sp>
         <p:nvSpPr>
           <p:cNvPr id="2" name="TextBox 1"/>
@@ -13279,8 +13586,8 @@
         </p:nvSpPr>
         <p:spPr>
           <a:xfrm>
-            <a:off x="749808" y="457200"/>
-            <a:ext cx="10881360" cy="1188720"/>
+            <a:off x="749808" y="566928"/>
+            <a:ext cx="10881360" cy="1371600"/>
           </a:xfrm>
           <a:prstGeom prst="rect">
             <a:avLst/>
@@ -13295,13 +13602,13 @@
           <a:p>
             <a:pPr algn="l"/>
             <a:r>
-              <a:rPr sz="4400" b="1" spc="-100">
+              <a:rPr sz="4600" b="1" spc="-100">
                 <a:solidFill>
                   <a:srgbClr val="1A1A1A"/>
                 </a:solidFill>
                 <a:latin typeface="Apple SD Gothic Neo"/>
               </a:rPr>
-              <a:t>AI는 공짜가 아니다</a:t>
+              <a:t>돈 먹은 범인</a:t>
             </a:r>
           </a:p>
         </p:txBody>
@@ -13314,7 +13621,7 @@
         </p:nvSpPr>
         <p:spPr>
           <a:xfrm>
-            <a:off x="822960" y="1417320"/>
+            <a:off x="822960" y="1554480"/>
             <a:ext cx="868680" cy="82296"/>
           </a:xfrm>
           <a:prstGeom prst="rect">
@@ -13347,6 +13654,7 @@
           <a:lstStyle/>
           <a:p>
             <a:pPr algn="ctr"/>
+            <a:endParaRPr/>
           </a:p>
         </p:txBody>
       </p:sp>
@@ -13358,8 +13666,8 @@
         </p:nvSpPr>
         <p:spPr>
           <a:xfrm>
-            <a:off x="822960" y="2286000"/>
-            <a:ext cx="10607040" cy="1097280"/>
+            <a:off x="822960" y="2651760"/>
+            <a:ext cx="10607040" cy="1554480"/>
           </a:xfrm>
           <a:prstGeom prst="rect">
             <a:avLst/>
@@ -13374,161 +13682,28 @@
           <a:p>
             <a:pPr algn="ctr"/>
             <a:r>
-              <a:rPr sz="4000" b="1" spc="-60">
+              <a:rPr sz="3400" b="1" spc="-60">
                 <a:solidFill>
                   <a:srgbClr val="1A1A1A"/>
                 </a:solidFill>
                 <a:latin typeface="Apple SD Gothic Neo"/>
               </a:rPr>
-              <a:t>한 Epic에  $39.63  ·  토큰 5,100만</a:t>
-            </a:r>
-          </a:p>
-        </p:txBody>
-      </p:sp>
-      <p:sp>
-        <p:nvSpPr>
-          <p:cNvPr id="5" name="Rounded Rectangle 4"/>
-          <p:cNvSpPr/>
-          <p:nvPr/>
-        </p:nvSpPr>
-        <p:spPr>
-          <a:xfrm>
-            <a:off x="2194560" y="3931920"/>
-            <a:ext cx="3566160" cy="1280160"/>
-          </a:xfrm>
-          <a:prstGeom prst="roundRect">
-            <a:avLst>
-              <a:gd name="adj" fmla="val 12000"/>
-            </a:avLst>
-          </a:prstGeom>
-          <a:solidFill>
-            <a:srgbClr val="5B5BD6"/>
-          </a:solidFill>
-          <a:ln>
-            <a:noFill/>
-          </a:ln>
-          <a:effectLst/>
-        </p:spPr>
-        <p:style>
-          <a:lnRef idx="1">
-            <a:schemeClr val="accent1"/>
-          </a:lnRef>
-          <a:fillRef idx="3">
-            <a:schemeClr val="accent1"/>
-          </a:fillRef>
-          <a:effectRef idx="2">
-            <a:schemeClr val="accent1"/>
-          </a:effectRef>
-          <a:fontRef idx="minor">
-            <a:schemeClr val="lt1"/>
-          </a:fontRef>
-        </p:style>
-        <p:txBody>
-          <a:bodyPr rtlCol="0" anchor="ctr" tIns="76200" bIns="76200" lIns="203200" rIns="177800" wrap="square"/>
-          <a:lstStyle/>
-          <a:p>
-            <a:pPr algn="ctr"/>
-            <a:r>
-              <a:rPr sz="1600" b="1">
-                <a:solidFill>
-                  <a:srgbClr val="FFFFFF"/>
-                </a:solidFill>
-                <a:latin typeface="Apple SD Gothic Neo"/>
-              </a:rPr>
-              <a:t>5시간 한도</a:t>
-            </a:r>
-          </a:p>
-          <a:p>
-            <a:pPr algn="ctr"/>
-            <a:r>
-              <a:rPr sz="3000" b="1">
-                <a:solidFill>
-                  <a:srgbClr val="FFFFFF"/>
-                </a:solidFill>
-                <a:latin typeface="Apple SD Gothic Neo"/>
-              </a:rPr>
-              <a:t>96% 소진</a:t>
-            </a:r>
-          </a:p>
-        </p:txBody>
-      </p:sp>
-      <p:sp>
-        <p:nvSpPr>
-          <p:cNvPr id="6" name="Rounded Rectangle 5"/>
-          <p:cNvSpPr/>
-          <p:nvPr/>
-        </p:nvSpPr>
-        <p:spPr>
-          <a:xfrm>
-            <a:off x="6400800" y="3931920"/>
-            <a:ext cx="3566160" cy="1280160"/>
-          </a:xfrm>
-          <a:prstGeom prst="roundRect">
-            <a:avLst>
-              <a:gd name="adj" fmla="val 12000"/>
-            </a:avLst>
-          </a:prstGeom>
-          <a:solidFill>
-            <a:srgbClr val="ECEBFB"/>
-          </a:solidFill>
-          <a:ln>
-            <a:noFill/>
-          </a:ln>
-          <a:effectLst/>
-        </p:spPr>
-        <p:style>
-          <a:lnRef idx="1">
-            <a:schemeClr val="accent1"/>
-          </a:lnRef>
-          <a:fillRef idx="3">
-            <a:schemeClr val="accent1"/>
-          </a:fillRef>
-          <a:effectRef idx="2">
-            <a:schemeClr val="accent1"/>
-          </a:effectRef>
-          <a:fontRef idx="minor">
-            <a:schemeClr val="lt1"/>
-          </a:fontRef>
-        </p:style>
-        <p:txBody>
-          <a:bodyPr rtlCol="0" anchor="ctr" tIns="76200" bIns="76200" lIns="203200" rIns="177800" wrap="square"/>
-          <a:lstStyle/>
-          <a:p>
-            <a:pPr algn="ctr"/>
-            <a:r>
-              <a:rPr sz="1600" b="1">
-                <a:solidFill>
-                  <a:srgbClr val="5B5BD6"/>
-                </a:solidFill>
-                <a:latin typeface="Apple SD Gothic Neo"/>
-              </a:rPr>
-              <a:t>주간 한도</a:t>
-            </a:r>
-          </a:p>
-          <a:p>
-            <a:pPr algn="ctr"/>
-            <a:r>
-              <a:rPr sz="3000" b="1">
-                <a:solidFill>
-                  <a:srgbClr val="1A1A1A"/>
-                </a:solidFill>
-                <a:latin typeface="Apple SD Gothic Neo"/>
-              </a:rPr>
-              <a:t>27% 소진</a:t>
-            </a:r>
-          </a:p>
-        </p:txBody>
-      </p:sp>
-      <p:sp>
-        <p:nvSpPr>
-          <p:cNvPr id="7" name="TextBox 6"/>
+              <a:t>코드 생성이 아니라
+'긴 컨텍스트 재읽기'</a:t>
+            </a:r>
+          </a:p>
+        </p:txBody>
+      </p:sp>
+      <p:sp>
+        <p:nvSpPr>
+          <p:cNvPr id="5" name="TextBox 4"/>
           <p:cNvSpPr txBox="1"/>
           <p:nvPr/>
         </p:nvSpPr>
         <p:spPr>
           <a:xfrm>
-            <a:off x="822960" y="5486400"/>
-            <a:ext cx="10607040" cy="640080"/>
+            <a:off x="822960" y="4434840"/>
+            <a:ext cx="10607040" cy="914400"/>
           </a:xfrm>
           <a:prstGeom prst="rect">
             <a:avLst/>
@@ -13549,7 +13724,7 @@
                 </a:solidFill>
                 <a:latin typeface="Apple SD Gothic Neo"/>
               </a:rPr>
-              <a:t>Claude Code 한 세션이 5시간 토큰 한도를 거의 다 먹었다.</a:t>
+              <a:t>캐시 읽기만 4,580만 토큰 — 전체 비용의 90%</a:t>
             </a:r>
           </a:p>
         </p:txBody>
@@ -13563,7 +13738,7 @@
 </file>
 
 <file path=ppt/slides/slide38.xml><?xml version="1.0" encoding="utf-8"?>
-<p:sld xmlns:a="http://schemas.openxmlformats.org/drawingml/2006/main" xmlns:p="http://schemas.openxmlformats.org/presentationml/2006/main" xmlns:r="http://schemas.openxmlformats.org/officeDocument/2006/relationships">
+<p:sld xmlns:a="http://schemas.openxmlformats.org/drawingml/2006/main" xmlns:r="http://schemas.openxmlformats.org/officeDocument/2006/relationships" xmlns:p="http://schemas.openxmlformats.org/presentationml/2006/main">
   <p:cSld>
     <p:bg>
       <p:bgPr>
@@ -13579,7 +13754,14 @@
         <p:cNvGrpSpPr/>
         <p:nvPr/>
       </p:nvGrpSpPr>
-      <p:grpSpPr/>
+      <p:grpSpPr>
+        <a:xfrm>
+          <a:off x="0" y="0"/>
+          <a:ext cx="0" cy="0"/>
+          <a:chOff x="0" y="0"/>
+          <a:chExt cx="0" cy="0"/>
+        </a:xfrm>
+      </p:grpSpPr>
       <p:sp>
         <p:nvSpPr>
           <p:cNvPr id="2" name="TextBox 1"/>
@@ -13610,7 +13792,7 @@
                 </a:solidFill>
                 <a:latin typeface="Apple SD Gothic Neo"/>
               </a:rPr>
-              <a:t>돈 먹은 범인</a:t>
+              <a:t>그래서 바꾼 것</a:t>
             </a:r>
           </a:p>
         </p:txBody>
@@ -13656,6 +13838,7 @@
           <a:lstStyle/>
           <a:p>
             <a:pPr algn="ctr"/>
+            <a:endParaRPr/>
           </a:p>
         </p:txBody>
       </p:sp>
@@ -13667,43 +13850,7 @@
         </p:nvSpPr>
         <p:spPr>
           <a:xfrm>
-            <a:off x="822960" y="2651760"/>
-            <a:ext cx="10607040" cy="1554480"/>
-          </a:xfrm>
-          <a:prstGeom prst="rect">
-            <a:avLst/>
-          </a:prstGeom>
-          <a:noFill/>
-        </p:spPr>
-        <p:txBody>
-          <a:bodyPr wrap="square" anchor="ctr">
-            <a:spAutoFit/>
-          </a:bodyPr>
-          <a:lstStyle/>
-          <a:p>
-            <a:pPr algn="ctr"/>
-            <a:r>
-              <a:rPr sz="3400" b="1" spc="-60">
-                <a:solidFill>
-                  <a:srgbClr val="1A1A1A"/>
-                </a:solidFill>
-                <a:latin typeface="Apple SD Gothic Neo"/>
-              </a:rPr>
-              <a:t>코드 생성이 아니라
-'긴 컨텍스트 재읽기'</a:t>
-            </a:r>
-          </a:p>
-        </p:txBody>
-      </p:sp>
-      <p:sp>
-        <p:nvSpPr>
-          <p:cNvPr id="5" name="TextBox 4"/>
-          <p:cNvSpPr txBox="1"/>
-          <p:nvPr/>
-        </p:nvSpPr>
-        <p:spPr>
-          <a:xfrm>
-            <a:off x="822960" y="4434840"/>
+            <a:off x="822960" y="2286000"/>
             <a:ext cx="10607040" cy="914400"/>
           </a:xfrm>
           <a:prstGeom prst="rect">
@@ -13719,13 +13866,187 @@
           <a:p>
             <a:pPr algn="ctr"/>
             <a:r>
-              <a:rPr sz="2200" b="0" spc="-30">
-                <a:solidFill>
-                  <a:srgbClr val="6B7280"/>
-                </a:solidFill>
-                <a:latin typeface="Apple SD Gothic Neo"/>
-              </a:rPr>
-              <a:t>캐시 읽기만 4,580만 토큰 — 전체 비용의 90%</a:t>
+              <a:rPr sz="2600" b="1" spc="-40">
+                <a:solidFill>
+                  <a:srgbClr val="1A1A1A"/>
+                </a:solidFill>
+                <a:latin typeface="Apple SD Gothic Neo"/>
+              </a:rPr>
+              <a:t>비용을 줄이려고 습관을 바꿨다.</a:t>
+            </a:r>
+          </a:p>
+        </p:txBody>
+      </p:sp>
+      <p:sp>
+        <p:nvSpPr>
+          <p:cNvPr id="5" name="Rounded Rectangle 4"/>
+          <p:cNvSpPr/>
+          <p:nvPr/>
+        </p:nvSpPr>
+        <p:spPr>
+          <a:xfrm>
+            <a:off x="1066647" y="3566160"/>
+            <a:ext cx="3108960" cy="1371600"/>
+          </a:xfrm>
+          <a:prstGeom prst="roundRect">
+            <a:avLst>
+              <a:gd name="adj" fmla="val 12000"/>
+            </a:avLst>
+          </a:prstGeom>
+          <a:solidFill>
+            <a:srgbClr val="F4F4F6"/>
+          </a:solidFill>
+          <a:ln w="16510">
+            <a:solidFill>
+              <a:srgbClr val="E6E6E6"/>
+            </a:solidFill>
+          </a:ln>
+          <a:effectLst/>
+        </p:spPr>
+        <p:style>
+          <a:lnRef idx="1">
+            <a:schemeClr val="accent1"/>
+          </a:lnRef>
+          <a:fillRef idx="3">
+            <a:schemeClr val="accent1"/>
+          </a:fillRef>
+          <a:effectRef idx="2">
+            <a:schemeClr val="accent1"/>
+          </a:effectRef>
+          <a:fontRef idx="minor">
+            <a:schemeClr val="lt1"/>
+          </a:fontRef>
+        </p:style>
+        <p:txBody>
+          <a:bodyPr wrap="square" lIns="203200" tIns="101600" rIns="203200" bIns="101600" rtlCol="0" anchor="ctr"/>
+          <a:lstStyle/>
+          <a:p>
+            <a:pPr algn="ctr"/>
+            <a:r>
+              <a:rPr sz="2100" b="1">
+                <a:solidFill>
+                  <a:srgbClr val="1A1A1A"/>
+                </a:solidFill>
+                <a:latin typeface="Apple SD Gothic Neo"/>
+              </a:rPr>
+              <a:t>Epic 끝나면
+/clear</a:t>
+            </a:r>
+          </a:p>
+        </p:txBody>
+      </p:sp>
+      <p:sp>
+        <p:nvSpPr>
+          <p:cNvPr id="6" name="Rounded Rectangle 5"/>
+          <p:cNvSpPr/>
+          <p:nvPr/>
+        </p:nvSpPr>
+        <p:spPr>
+          <a:xfrm>
+            <a:off x="4541367" y="3566160"/>
+            <a:ext cx="3108960" cy="1371600"/>
+          </a:xfrm>
+          <a:prstGeom prst="roundRect">
+            <a:avLst>
+              <a:gd name="adj" fmla="val 12000"/>
+            </a:avLst>
+          </a:prstGeom>
+          <a:solidFill>
+            <a:srgbClr val="F4F4F6"/>
+          </a:solidFill>
+          <a:ln w="16510">
+            <a:solidFill>
+              <a:srgbClr val="E6E6E6"/>
+            </a:solidFill>
+          </a:ln>
+          <a:effectLst/>
+        </p:spPr>
+        <p:style>
+          <a:lnRef idx="1">
+            <a:schemeClr val="accent1"/>
+          </a:lnRef>
+          <a:fillRef idx="3">
+            <a:schemeClr val="accent1"/>
+          </a:fillRef>
+          <a:effectRef idx="2">
+            <a:schemeClr val="accent1"/>
+          </a:effectRef>
+          <a:fontRef idx="minor">
+            <a:schemeClr val="lt1"/>
+          </a:fontRef>
+        </p:style>
+        <p:txBody>
+          <a:bodyPr wrap="square" lIns="203200" tIns="101600" rIns="203200" bIns="101600" rtlCol="0" anchor="ctr"/>
+          <a:lstStyle/>
+          <a:p>
+            <a:pPr algn="ctr"/>
+            <a:r>
+              <a:rPr sz="2100" b="1">
+                <a:solidFill>
+                  <a:srgbClr val="1A1A1A"/>
+                </a:solidFill>
+                <a:latin typeface="Apple SD Gothic Neo"/>
+              </a:rPr>
+              <a:t>단순 작업은
+Sonnet</a:t>
+            </a:r>
+          </a:p>
+        </p:txBody>
+      </p:sp>
+      <p:sp>
+        <p:nvSpPr>
+          <p:cNvPr id="7" name="Rounded Rectangle 6"/>
+          <p:cNvSpPr/>
+          <p:nvPr/>
+        </p:nvSpPr>
+        <p:spPr>
+          <a:xfrm>
+            <a:off x="8016087" y="3566160"/>
+            <a:ext cx="3108960" cy="1371600"/>
+          </a:xfrm>
+          <a:prstGeom prst="roundRect">
+            <a:avLst>
+              <a:gd name="adj" fmla="val 12000"/>
+            </a:avLst>
+          </a:prstGeom>
+          <a:solidFill>
+            <a:srgbClr val="F4F4F6"/>
+          </a:solidFill>
+          <a:ln w="16510">
+            <a:solidFill>
+              <a:srgbClr val="E6E6E6"/>
+            </a:solidFill>
+          </a:ln>
+          <a:effectLst/>
+        </p:spPr>
+        <p:style>
+          <a:lnRef idx="1">
+            <a:schemeClr val="accent1"/>
+          </a:lnRef>
+          <a:fillRef idx="3">
+            <a:schemeClr val="accent1"/>
+          </a:fillRef>
+          <a:effectRef idx="2">
+            <a:schemeClr val="accent1"/>
+          </a:effectRef>
+          <a:fontRef idx="minor">
+            <a:schemeClr val="lt1"/>
+          </a:fontRef>
+        </p:style>
+        <p:txBody>
+          <a:bodyPr wrap="square" lIns="203200" tIns="101600" rIns="203200" bIns="101600" rtlCol="0" anchor="ctr"/>
+          <a:lstStyle/>
+          <a:p>
+            <a:pPr algn="ctr"/>
+            <a:r>
+              <a:rPr sz="2100" b="1">
+                <a:solidFill>
+                  <a:srgbClr val="1A1A1A"/>
+                </a:solidFill>
+                <a:latin typeface="Apple SD Gothic Neo"/>
+              </a:rPr>
+              <a:t>리뷰 횟수
+최소화</a:t>
             </a:r>
           </a:p>
         </p:txBody>
@@ -13739,7 +14060,7 @@
 </file>
 
 <file path=ppt/slides/slide39.xml><?xml version="1.0" encoding="utf-8"?>
-<p:sld xmlns:a="http://schemas.openxmlformats.org/drawingml/2006/main" xmlns:p="http://schemas.openxmlformats.org/presentationml/2006/main" xmlns:r="http://schemas.openxmlformats.org/officeDocument/2006/relationships">
+<p:sld xmlns:a="http://schemas.openxmlformats.org/drawingml/2006/main" xmlns:r="http://schemas.openxmlformats.org/officeDocument/2006/relationships" xmlns:p="http://schemas.openxmlformats.org/presentationml/2006/main">
   <p:cSld>
     <p:bg>
       <p:bgPr>
@@ -13755,7 +14076,14 @@
         <p:cNvGrpSpPr/>
         <p:nvPr/>
       </p:nvGrpSpPr>
-      <p:grpSpPr/>
+      <p:grpSpPr>
+        <a:xfrm>
+          <a:off x="0" y="0"/>
+          <a:ext cx="0" cy="0"/>
+          <a:chOff x="0" y="0"/>
+          <a:chExt cx="0" cy="0"/>
+        </a:xfrm>
+      </p:grpSpPr>
       <p:sp>
         <p:nvSpPr>
           <p:cNvPr id="2" name="TextBox 1"/>
@@ -13764,8 +14092,8 @@
         </p:nvSpPr>
         <p:spPr>
           <a:xfrm>
-            <a:off x="749808" y="566928"/>
-            <a:ext cx="10881360" cy="1371600"/>
+            <a:off x="749808" y="457200"/>
+            <a:ext cx="10881360" cy="1188720"/>
           </a:xfrm>
           <a:prstGeom prst="rect">
             <a:avLst/>
@@ -13780,13 +14108,13 @@
           <a:p>
             <a:pPr algn="l"/>
             <a:r>
-              <a:rPr sz="4600" b="1" spc="-100">
+              <a:rPr sz="4400" b="1" spc="-100">
                 <a:solidFill>
                   <a:srgbClr val="1A1A1A"/>
                 </a:solidFill>
                 <a:latin typeface="Apple SD Gothic Neo"/>
               </a:rPr>
-              <a:t>그래서 바꾼 것</a:t>
+              <a:t>AI가 선을 넘다</a:t>
             </a:r>
           </a:p>
         </p:txBody>
@@ -13799,7 +14127,7 @@
         </p:nvSpPr>
         <p:spPr>
           <a:xfrm>
-            <a:off x="822960" y="1554480"/>
+            <a:off x="822960" y="1417320"/>
             <a:ext cx="868680" cy="82296"/>
           </a:xfrm>
           <a:prstGeom prst="rect">
@@ -13832,54 +14160,20 @@
           <a:lstStyle/>
           <a:p>
             <a:pPr algn="ctr"/>
-          </a:p>
-        </p:txBody>
-      </p:sp>
-      <p:sp>
-        <p:nvSpPr>
-          <p:cNvPr id="4" name="TextBox 3"/>
-          <p:cNvSpPr txBox="1"/>
-          <p:nvPr/>
-        </p:nvSpPr>
-        <p:spPr>
-          <a:xfrm>
-            <a:off x="822960" y="2286000"/>
-            <a:ext cx="10607040" cy="914400"/>
-          </a:xfrm>
-          <a:prstGeom prst="rect">
-            <a:avLst/>
-          </a:prstGeom>
-          <a:noFill/>
-        </p:spPr>
-        <p:txBody>
-          <a:bodyPr wrap="square" anchor="t">
-            <a:spAutoFit/>
-          </a:bodyPr>
-          <a:lstStyle/>
-          <a:p>
-            <a:pPr algn="ctr"/>
-            <a:r>
-              <a:rPr sz="2600" b="1" spc="-40">
-                <a:solidFill>
-                  <a:srgbClr val="1A1A1A"/>
-                </a:solidFill>
-                <a:latin typeface="Apple SD Gothic Neo"/>
-              </a:rPr>
-              <a:t>비용을 줄이려고 습관을 바꿨다.</a:t>
-            </a:r>
-          </a:p>
-        </p:txBody>
-      </p:sp>
-      <p:sp>
-        <p:nvSpPr>
-          <p:cNvPr id="5" name="Rounded Rectangle 4"/>
+            <a:endParaRPr/>
+          </a:p>
+        </p:txBody>
+      </p:sp>
+      <p:sp>
+        <p:nvSpPr>
+          <p:cNvPr id="4" name="Rounded Rectangle 3"/>
           <p:cNvSpPr/>
           <p:nvPr/>
         </p:nvSpPr>
         <p:spPr>
           <a:xfrm>
-            <a:off x="1066647" y="3566160"/>
-            <a:ext cx="3108960" cy="1371600"/>
+            <a:off x="777240" y="2651760"/>
+            <a:ext cx="4800600" cy="2011680"/>
           </a:xfrm>
           <a:prstGeom prst="roundRect">
             <a:avLst>
@@ -13911,19 +14205,86 @@
           </a:fontRef>
         </p:style>
         <p:txBody>
-          <a:bodyPr rtlCol="0" anchor="ctr" tIns="101600" bIns="101600" lIns="203200" rIns="203200" wrap="square"/>
-          <a:lstStyle/>
-          <a:p>
-            <a:pPr algn="ctr"/>
-            <a:r>
-              <a:rPr sz="2100" b="1">
+          <a:bodyPr wrap="square" lIns="203200" tIns="76200" rIns="177800" bIns="76200" rtlCol="0" anchor="ctr"/>
+          <a:lstStyle/>
+          <a:p>
+            <a:pPr algn="l"/>
+            <a:r>
+              <a:rPr sz="1600" b="1">
+                <a:solidFill>
+                  <a:srgbClr val="6B7280"/>
+                </a:solidFill>
+                <a:latin typeface="Apple SD Gothic Neo"/>
+              </a:rPr>
+              <a:t>AI가 한 것</a:t>
+            </a:r>
+          </a:p>
+          <a:p>
+            <a:pPr algn="l"/>
+            <a:endParaRPr sz="1600" b="1">
+              <a:solidFill>
+                <a:srgbClr val="6B7280"/>
+              </a:solidFill>
+              <a:latin typeface="Apple SD Gothic Neo"/>
+            </a:endParaRPr>
+          </a:p>
+          <a:p>
+            <a:pPr algn="l"/>
+            <a:r>
+              <a:rPr sz="1900" b="1">
                 <a:solidFill>
                   <a:srgbClr val="1A1A1A"/>
                 </a:solidFill>
                 <a:latin typeface="Apple SD Gothic Neo"/>
               </a:rPr>
-              <a:t>Epic 끝나면
-/clear</a:t>
+              <a:t>git add를 넓게 잡아 frontend 전체를</a:t>
+            </a:r>
+          </a:p>
+          <a:p>
+            <a:pPr algn="l"/>
+            <a:r>
+              <a:rPr sz="1900" b="1">
+                <a:solidFill>
+                  <a:srgbClr val="1A1A1A"/>
+                </a:solidFill>
+                <a:latin typeface="Apple SD Gothic Neo"/>
+              </a:rPr>
+              <a:t>엉뚱한 PR에 섞어 커밋했다</a:t>
+            </a:r>
+          </a:p>
+        </p:txBody>
+      </p:sp>
+      <p:sp>
+        <p:nvSpPr>
+          <p:cNvPr id="5" name="TextBox 4"/>
+          <p:cNvSpPr txBox="1"/>
+          <p:nvPr/>
+        </p:nvSpPr>
+        <p:spPr>
+          <a:xfrm>
+            <a:off x="5733288" y="3383280"/>
+            <a:ext cx="731520" cy="640080"/>
+          </a:xfrm>
+          <a:prstGeom prst="rect">
+            <a:avLst/>
+          </a:prstGeom>
+          <a:noFill/>
+        </p:spPr>
+        <p:txBody>
+          <a:bodyPr wrap="square" anchor="ctr">
+            <a:spAutoFit/>
+          </a:bodyPr>
+          <a:lstStyle/>
+          <a:p>
+            <a:pPr algn="ctr"/>
+            <a:r>
+              <a:rPr sz="3400" b="1">
+                <a:solidFill>
+                  <a:srgbClr val="5B5BD6"/>
+                </a:solidFill>
+                <a:latin typeface="Apple SD Gothic Neo"/>
+              </a:rPr>
+              <a:t>→</a:t>
             </a:r>
           </a:p>
         </p:txBody>
@@ -13936,8 +14297,8 @@
         </p:nvSpPr>
         <p:spPr>
           <a:xfrm>
-            <a:off x="4541367" y="3566160"/>
-            <a:ext cx="3108960" cy="1371600"/>
+            <a:off x="6629400" y="2651760"/>
+            <a:ext cx="4800600" cy="2011680"/>
           </a:xfrm>
           <a:prstGeom prst="roundRect">
             <a:avLst>
@@ -13945,12 +14306,10 @@
             </a:avLst>
           </a:prstGeom>
           <a:solidFill>
-            <a:srgbClr val="F4F4F6"/>
+            <a:srgbClr val="ECEBFB"/>
           </a:solidFill>
-          <a:ln w="16510">
-            <a:solidFill>
-              <a:srgbClr val="E6E6E6"/>
-            </a:solidFill>
+          <a:ln>
+            <a:noFill/>
           </a:ln>
           <a:effectLst/>
         </p:spPr>
@@ -13969,77 +14328,86 @@
           </a:fontRef>
         </p:style>
         <p:txBody>
-          <a:bodyPr rtlCol="0" anchor="ctr" tIns="101600" bIns="101600" lIns="203200" rIns="203200" wrap="square"/>
-          <a:lstStyle/>
-          <a:p>
-            <a:pPr algn="ctr"/>
-            <a:r>
-              <a:rPr sz="2100" b="1">
+          <a:bodyPr wrap="square" lIns="203200" tIns="76200" rIns="177800" bIns="76200" rtlCol="0" anchor="ctr"/>
+          <a:lstStyle/>
+          <a:p>
+            <a:pPr algn="l"/>
+            <a:r>
+              <a:rPr sz="1600" b="1">
+                <a:solidFill>
+                  <a:srgbClr val="5B5BD6"/>
+                </a:solidFill>
+                <a:latin typeface="Apple SD Gothic Neo"/>
+              </a:rPr>
+              <a:t>내가 통제</a:t>
+            </a:r>
+          </a:p>
+          <a:p>
+            <a:pPr algn="l"/>
+            <a:endParaRPr sz="1600" b="1">
+              <a:solidFill>
+                <a:srgbClr val="5B5BD6"/>
+              </a:solidFill>
+              <a:latin typeface="Apple SD Gothic Neo"/>
+            </a:endParaRPr>
+          </a:p>
+          <a:p>
+            <a:pPr algn="l"/>
+            <a:r>
+              <a:rPr sz="1900" b="1">
                 <a:solidFill>
                   <a:srgbClr val="1A1A1A"/>
                 </a:solidFill>
                 <a:latin typeface="Apple SD Gothic Neo"/>
               </a:rPr>
-              <a:t>단순 작업은
-Sonnet</a:t>
-            </a:r>
-          </a:p>
-        </p:txBody>
-      </p:sp>
-      <p:sp>
-        <p:nvSpPr>
-          <p:cNvPr id="7" name="Rounded Rectangle 6"/>
-          <p:cNvSpPr/>
-          <p:nvPr/>
-        </p:nvSpPr>
-        <p:spPr>
-          <a:xfrm>
-            <a:off x="8016087" y="3566160"/>
-            <a:ext cx="3108960" cy="1371600"/>
-          </a:xfrm>
-          <a:prstGeom prst="roundRect">
-            <a:avLst>
-              <a:gd name="adj" fmla="val 12000"/>
-            </a:avLst>
-          </a:prstGeom>
-          <a:solidFill>
-            <a:srgbClr val="F4F4F6"/>
-          </a:solidFill>
-          <a:ln w="16510">
-            <a:solidFill>
-              <a:srgbClr val="E6E6E6"/>
-            </a:solidFill>
-          </a:ln>
-          <a:effectLst/>
-        </p:spPr>
-        <p:style>
-          <a:lnRef idx="1">
-            <a:schemeClr val="accent1"/>
-          </a:lnRef>
-          <a:fillRef idx="3">
-            <a:schemeClr val="accent1"/>
-          </a:fillRef>
-          <a:effectRef idx="2">
-            <a:schemeClr val="accent1"/>
-          </a:effectRef>
-          <a:fontRef idx="minor">
-            <a:schemeClr val="lt1"/>
-          </a:fontRef>
-        </p:style>
-        <p:txBody>
-          <a:bodyPr rtlCol="0" anchor="ctr" tIns="101600" bIns="101600" lIns="203200" rIns="203200" wrap="square"/>
-          <a:lstStyle/>
-          <a:p>
-            <a:pPr algn="ctr"/>
-            <a:r>
-              <a:rPr sz="2100" b="1">
+              <a:t>점검으로 발견 + '커밋은 사용자',</a:t>
+            </a:r>
+          </a:p>
+          <a:p>
+            <a:pPr algn="l"/>
+            <a:r>
+              <a:rPr sz="1900" b="1">
                 <a:solidFill>
                   <a:srgbClr val="1A1A1A"/>
                 </a:solidFill>
                 <a:latin typeface="Apple SD Gothic Neo"/>
               </a:rPr>
-              <a:t>리뷰 횟수
-최소화</a:t>
+              <a:t>요청 시에만' 규칙으로 경계 관리</a:t>
+            </a:r>
+          </a:p>
+        </p:txBody>
+      </p:sp>
+      <p:sp>
+        <p:nvSpPr>
+          <p:cNvPr id="7" name="TextBox 6"/>
+          <p:cNvSpPr txBox="1"/>
+          <p:nvPr/>
+        </p:nvSpPr>
+        <p:spPr>
+          <a:xfrm>
+            <a:off x="822960" y="5029200"/>
+            <a:ext cx="10607040" cy="731520"/>
+          </a:xfrm>
+          <a:prstGeom prst="rect">
+            <a:avLst/>
+          </a:prstGeom>
+          <a:noFill/>
+        </p:spPr>
+        <p:txBody>
+          <a:bodyPr wrap="square" anchor="t">
+            <a:spAutoFit/>
+          </a:bodyPr>
+          <a:lstStyle/>
+          <a:p>
+            <a:pPr algn="ctr"/>
+            <a:r>
+              <a:rPr sz="2200" b="0" spc="-30">
+                <a:solidFill>
+                  <a:srgbClr val="6B7280"/>
+                </a:solidFill>
+                <a:latin typeface="Apple SD Gothic Neo"/>
+              </a:rPr>
+              <a:t>AI는 시키지 않은 범위까지 건드린다 — 권한 경계를 사람이 정해야 한다.</a:t>
             </a:r>
           </a:p>
         </p:txBody>
@@ -14401,12 +14769,12 @@
 </file>
 
 <file path=ppt/slides/slide40.xml><?xml version="1.0" encoding="utf-8"?>
-<p:sld xmlns:a="http://schemas.openxmlformats.org/drawingml/2006/main" xmlns:p="http://schemas.openxmlformats.org/presentationml/2006/main" xmlns:r="http://schemas.openxmlformats.org/officeDocument/2006/relationships">
+<p:sld xmlns:a="http://schemas.openxmlformats.org/drawingml/2006/main" xmlns:r="http://schemas.openxmlformats.org/officeDocument/2006/relationships" xmlns:p="http://schemas.openxmlformats.org/presentationml/2006/main">
   <p:cSld>
     <p:bg>
       <p:bgPr>
         <a:solidFill>
-          <a:srgbClr val="FFFFFF"/>
+          <a:srgbClr val="1F1D3D"/>
         </a:solidFill>
         <a:effectLst/>
       </p:bgPr>
@@ -14417,7 +14785,14 @@
         <p:cNvGrpSpPr/>
         <p:nvPr/>
       </p:nvGrpSpPr>
-      <p:grpSpPr/>
+      <p:grpSpPr>
+        <a:xfrm>
+          <a:off x="0" y="0"/>
+          <a:ext cx="0" cy="0"/>
+          <a:chOff x="0" y="0"/>
+          <a:chExt cx="0" cy="0"/>
+        </a:xfrm>
+      </p:grpSpPr>
       <p:sp>
         <p:nvSpPr>
           <p:cNvPr id="2" name="TextBox 1"/>
@@ -14426,8 +14801,8 @@
         </p:nvSpPr>
         <p:spPr>
           <a:xfrm>
-            <a:off x="749808" y="566928"/>
-            <a:ext cx="10881360" cy="1371600"/>
+            <a:off x="868680" y="2514600"/>
+            <a:ext cx="10607040" cy="830997"/>
           </a:xfrm>
           <a:prstGeom prst="rect">
             <a:avLst/>
@@ -14442,217 +14817,29 @@
           <a:p>
             <a:pPr algn="l"/>
             <a:r>
-              <a:rPr sz="4600" b="1" spc="-100">
-                <a:solidFill>
-                  <a:srgbClr val="1A1A1A"/>
-                </a:solidFill>
-                <a:latin typeface="Apple SD Gothic Neo"/>
-              </a:rPr>
-              <a:t>다중 리뷰의 두 얼굴</a:t>
-            </a:r>
-          </a:p>
-        </p:txBody>
-      </p:sp>
-      <p:sp>
-        <p:nvSpPr>
-          <p:cNvPr id="3" name="Rectangle 2"/>
-          <p:cNvSpPr/>
-          <p:nvPr/>
-        </p:nvSpPr>
-        <p:spPr>
-          <a:xfrm>
-            <a:off x="822960" y="1554480"/>
-            <a:ext cx="868680" cy="82296"/>
-          </a:xfrm>
-          <a:prstGeom prst="rect">
-            <a:avLst/>
-          </a:prstGeom>
-          <a:solidFill>
-            <a:srgbClr val="5B5BD6"/>
-          </a:solidFill>
-          <a:ln>
-            <a:noFill/>
-          </a:ln>
-          <a:effectLst/>
-        </p:spPr>
-        <p:style>
-          <a:lnRef idx="1">
-            <a:schemeClr val="accent1"/>
-          </a:lnRef>
-          <a:fillRef idx="3">
-            <a:schemeClr val="accent1"/>
-          </a:fillRef>
-          <a:effectRef idx="2">
-            <a:schemeClr val="accent1"/>
-          </a:effectRef>
-          <a:fontRef idx="minor">
-            <a:schemeClr val="lt1"/>
-          </a:fontRef>
-        </p:style>
-        <p:txBody>
-          <a:bodyPr rtlCol="0" anchor="ctr"/>
-          <a:lstStyle/>
-          <a:p>
-            <a:pPr algn="ctr"/>
-          </a:p>
-        </p:txBody>
-      </p:sp>
-      <p:sp>
-        <p:nvSpPr>
-          <p:cNvPr id="4" name="Rounded Rectangle 3"/>
-          <p:cNvSpPr/>
-          <p:nvPr/>
-        </p:nvSpPr>
-        <p:spPr>
-          <a:xfrm>
-            <a:off x="777240" y="2743200"/>
-            <a:ext cx="4800600" cy="1920240"/>
-          </a:xfrm>
-          <a:prstGeom prst="roundRect">
-            <a:avLst>
-              <a:gd name="adj" fmla="val 12000"/>
-            </a:avLst>
-          </a:prstGeom>
-          <a:solidFill>
-            <a:srgbClr val="ECEBFB"/>
-          </a:solidFill>
-          <a:ln>
-            <a:noFill/>
-          </a:ln>
-          <a:effectLst/>
-        </p:spPr>
-        <p:style>
-          <a:lnRef idx="1">
-            <a:schemeClr val="accent1"/>
-          </a:lnRef>
-          <a:fillRef idx="3">
-            <a:schemeClr val="accent1"/>
-          </a:fillRef>
-          <a:effectRef idx="2">
-            <a:schemeClr val="accent1"/>
-          </a:effectRef>
-          <a:fontRef idx="minor">
-            <a:schemeClr val="lt1"/>
-          </a:fontRef>
-        </p:style>
-        <p:txBody>
-          <a:bodyPr rtlCol="0" anchor="ctr" tIns="101600" bIns="101600" lIns="203200" rIns="203200" wrap="square"/>
-          <a:lstStyle/>
-          <a:p>
-            <a:pPr algn="l"/>
-            <a:r>
-              <a:rPr sz="1800" b="1">
-                <a:solidFill>
-                  <a:srgbClr val="5B5BD6"/>
-                </a:solidFill>
-                <a:latin typeface="Apple SD Gothic Neo"/>
-              </a:rPr>
-              <a:t>좋은 점</a:t>
-            </a:r>
-          </a:p>
-          <a:p>
-            <a:pPr algn="l"/>
-            <a:r>
-              <a:rPr sz="600" b="0">
-                <a:solidFill>
-                  <a:srgbClr val="6B7280"/>
-                </a:solidFill>
-                <a:latin typeface="Apple SD Gothic Neo"/>
-              </a:rPr>
-              <a:t/>
-            </a:r>
-          </a:p>
-          <a:p>
-            <a:pPr algn="l"/>
-            <a:r>
-              <a:rPr sz="2100" b="1">
-                <a:solidFill>
-                  <a:srgbClr val="1A1A1A"/>
-                </a:solidFill>
-                <a:latin typeface="Apple SD Gothic Neo"/>
-              </a:rPr>
-              <a:t>버그 6개를 미리 발견</a:t>
-            </a:r>
-          </a:p>
-        </p:txBody>
-      </p:sp>
-      <p:sp>
-        <p:nvSpPr>
-          <p:cNvPr id="5" name="Rounded Rectangle 4"/>
-          <p:cNvSpPr/>
-          <p:nvPr/>
-        </p:nvSpPr>
-        <p:spPr>
-          <a:xfrm>
-            <a:off x="6629400" y="2743200"/>
-            <a:ext cx="4800600" cy="1920240"/>
-          </a:xfrm>
-          <a:prstGeom prst="roundRect">
-            <a:avLst>
-              <a:gd name="adj" fmla="val 12000"/>
-            </a:avLst>
-          </a:prstGeom>
-          <a:solidFill>
-            <a:srgbClr val="F4F4F6"/>
-          </a:solidFill>
-          <a:ln>
-            <a:noFill/>
-          </a:ln>
-          <a:effectLst/>
-        </p:spPr>
-        <p:style>
-          <a:lnRef idx="1">
-            <a:schemeClr val="accent1"/>
-          </a:lnRef>
-          <a:fillRef idx="3">
-            <a:schemeClr val="accent1"/>
-          </a:fillRef>
-          <a:effectRef idx="2">
-            <a:schemeClr val="accent1"/>
-          </a:effectRef>
-          <a:fontRef idx="minor">
-            <a:schemeClr val="lt1"/>
-          </a:fontRef>
-        </p:style>
-        <p:txBody>
-          <a:bodyPr rtlCol="0" anchor="ctr" tIns="101600" bIns="101600" lIns="203200" rIns="203200" wrap="square"/>
-          <a:lstStyle/>
-          <a:p>
-            <a:pPr algn="l"/>
-            <a:r>
-              <a:rPr sz="1800" b="1">
-                <a:solidFill>
-                  <a:srgbClr val="6B7280"/>
-                </a:solidFill>
-                <a:latin typeface="Apple SD Gothic Neo"/>
-              </a:rPr>
-              <a:t>아쉬운 점</a:t>
-            </a:r>
-          </a:p>
-          <a:p>
-            <a:pPr algn="l"/>
-            <a:r>
-              <a:rPr sz="600" b="0">
-                <a:solidFill>
-                  <a:srgbClr val="6B7280"/>
-                </a:solidFill>
-                <a:latin typeface="Apple SD Gothic Neo"/>
-              </a:rPr>
-              <a:t/>
-            </a:r>
-          </a:p>
-          <a:p>
-            <a:pPr algn="l"/>
-            <a:r>
-              <a:rPr sz="2100" b="1">
-                <a:solidFill>
-                  <a:srgbClr val="1A1A1A"/>
-                </a:solidFill>
-                <a:latin typeface="Apple SD Gothic Neo"/>
-              </a:rPr>
-              <a:t>단순 작업까지 3중 리뷰
-→ 비용 과다</a:t>
-            </a:r>
+              <a:rPr lang="ko-KR" altLang="en-US" sz="4800" b="1" spc="-100" dirty="0">
+                <a:solidFill>
+                  <a:srgbClr val="FFFFFF"/>
+                </a:solidFill>
+                <a:latin typeface="Apple SD Gothic Neo"/>
+              </a:rPr>
+              <a:t>감사합니다</a:t>
+            </a:r>
+            <a:r>
+              <a:rPr lang="en-US" altLang="ko-KR" sz="4800" b="1" spc="-100" dirty="0">
+                <a:solidFill>
+                  <a:srgbClr val="FFFFFF"/>
+                </a:solidFill>
+                <a:latin typeface="Apple SD Gothic Neo"/>
+              </a:rPr>
+              <a:t>.</a:t>
+            </a:r>
+            <a:endParaRPr sz="4800" b="1" spc="-100" dirty="0">
+              <a:solidFill>
+                <a:srgbClr val="FFFFFF"/>
+              </a:solidFill>
+              <a:latin typeface="Apple SD Gothic Neo"/>
+            </a:endParaRPr>
           </a:p>
         </p:txBody>
       </p:sp>
@@ -14706,13 +14893,13 @@
           <a:p>
             <a:pPr algn="l"/>
             <a:r>
-              <a:rPr sz="4600" b="1" spc="-100">
+              <a:rPr sz="4400" b="1" spc="-100">
                 <a:solidFill>
                   <a:srgbClr val="1A1A1A"/>
                 </a:solidFill>
                 <a:latin typeface="Apple SD Gothic Neo"/>
               </a:rPr>
-              <a:t>왜 Codex로 교차 리뷰했나</a:t>
+              <a:t>훅 — 방법론을 매번 자동 주입</a:t>
             </a:r>
           </a:p>
         </p:txBody>
@@ -14769,21 +14956,19 @@
         </p:nvSpPr>
         <p:spPr>
           <a:xfrm>
-            <a:off x="777240" y="2743200"/>
-            <a:ext cx="4800600" cy="1920240"/>
+            <a:off x="822960" y="2194560"/>
+            <a:ext cx="10561320" cy="2286000"/>
           </a:xfrm>
           <a:prstGeom prst="roundRect">
             <a:avLst>
-              <a:gd name="adj" fmla="val 12000"/>
+              <a:gd name="adj" fmla="val 4000"/>
             </a:avLst>
           </a:prstGeom>
           <a:solidFill>
-            <a:srgbClr val="F4F4F6"/>
+            <a:srgbClr val="1F1D3D"/>
           </a:solidFill>
-          <a:ln w="16510">
-            <a:solidFill>
-              <a:srgbClr val="E6E6E6"/>
-            </a:solidFill>
+          <a:ln>
+            <a:noFill/>
           </a:ln>
           <a:effectLst/>
         </p:spPr>
@@ -14802,43 +14987,10 @@
           </a:fontRef>
         </p:style>
         <p:txBody>
-          <a:bodyPr rtlCol="0" anchor="ctr" tIns="76200" bIns="76200" lIns="203200" rIns="177800" wrap="square"/>
-          <a:lstStyle/>
-          <a:p>
-            <a:pPr algn="l"/>
-            <a:r>
-              <a:rPr sz="1800" b="1">
-                <a:solidFill>
-                  <a:srgbClr val="6B7280"/>
-                </a:solidFill>
-                <a:latin typeface="Apple SD Gothic Neo"/>
-              </a:rPr>
-              <a:t>같은 모델끼리 리뷰하면</a:t>
-            </a:r>
-          </a:p>
-          <a:p>
-            <a:pPr algn="l"/>
-            <a:r>
-              <a:rPr sz="600" b="0">
-                <a:solidFill>
-                  <a:srgbClr val="6B7280"/>
-                </a:solidFill>
-                <a:latin typeface="Apple SD Gothic Neo"/>
-              </a:rPr>
-              <a:t/>
-            </a:r>
-          </a:p>
-          <a:p>
-            <a:pPr algn="l"/>
-            <a:r>
-              <a:rPr sz="2100" b="1">
-                <a:solidFill>
-                  <a:srgbClr val="1A1A1A"/>
-                </a:solidFill>
-                <a:latin typeface="Apple SD Gothic Neo"/>
-              </a:rPr>
-              <a:t>같은 맹점을 똑같이 놓친다</a:t>
-            </a:r>
+          <a:bodyPr rtlCol="0" anchor="ctr"/>
+          <a:lstStyle/>
+          <a:p>
+            <a:pPr algn="ctr"/>
           </a:p>
         </p:txBody>
       </p:sp>
@@ -14850,8 +15002,8 @@
         </p:nvSpPr>
         <p:spPr>
           <a:xfrm>
-            <a:off x="5733288" y="3383280"/>
-            <a:ext cx="731520" cy="640080"/>
+            <a:off x="1188720" y="2423160"/>
+            <a:ext cx="9966960" cy="1874519"/>
           </a:xfrm>
           <a:prstGeom prst="rect">
             <a:avLst/>
@@ -14864,80 +15016,49 @@
           </a:bodyPr>
           <a:lstStyle/>
           <a:p>
-            <a:pPr algn="ctr"/>
-            <a:r>
-              <a:rPr sz="3400" b="1">
-                <a:solidFill>
-                  <a:srgbClr val="5B5BD6"/>
-                </a:solidFill>
-                <a:latin typeface="Apple SD Gothic Neo"/>
-              </a:rPr>
-              <a:t>→</a:t>
-            </a:r>
-          </a:p>
-        </p:txBody>
-      </p:sp>
-      <p:sp>
-        <p:nvSpPr>
-          <p:cNvPr id="6" name="Rounded Rectangle 5"/>
-          <p:cNvSpPr/>
-          <p:nvPr/>
-        </p:nvSpPr>
-        <p:spPr>
-          <a:xfrm>
-            <a:off x="6629400" y="2743200"/>
-            <a:ext cx="4800600" cy="1920240"/>
-          </a:xfrm>
-          <a:prstGeom prst="roundRect">
-            <a:avLst>
-              <a:gd name="adj" fmla="val 12000"/>
-            </a:avLst>
-          </a:prstGeom>
-          <a:solidFill>
-            <a:srgbClr val="ECEBFB"/>
-          </a:solidFill>
-          <a:ln>
-            <a:noFill/>
-          </a:ln>
-          <a:effectLst/>
-        </p:spPr>
-        <p:style>
-          <a:lnRef idx="1">
-            <a:schemeClr val="accent1"/>
-          </a:lnRef>
-          <a:fillRef idx="3">
-            <a:schemeClr val="accent1"/>
-          </a:fillRef>
-          <a:effectRef idx="2">
-            <a:schemeClr val="accent1"/>
-          </a:effectRef>
-          <a:fontRef idx="minor">
-            <a:schemeClr val="lt1"/>
-          </a:fontRef>
-        </p:style>
-        <p:txBody>
-          <a:bodyPr rtlCol="0" anchor="ctr" tIns="76200" bIns="76200" lIns="203200" rIns="177800" wrap="square"/>
-          <a:lstStyle/>
-          <a:p>
             <a:pPr algn="l"/>
             <a:r>
-              <a:rPr sz="1800" b="1">
-                <a:solidFill>
-                  <a:srgbClr val="5B5BD6"/>
-                </a:solidFill>
-                <a:latin typeface="Apple SD Gothic Neo"/>
-              </a:rPr>
-              <a:t>그래서</a:t>
+              <a:rPr sz="1600" b="0">
+                <a:solidFill>
+                  <a:srgbClr val="7C83B0"/>
+                </a:solidFill>
+                <a:latin typeface="Menlo"/>
+              </a:rPr>
+              <a:t>// .claude 훅 설정 (SessionStart)</a:t>
             </a:r>
           </a:p>
           <a:p>
             <a:pPr algn="l"/>
             <a:r>
-              <a:rPr sz="600" b="0">
-                <a:solidFill>
-                  <a:srgbClr val="6B7280"/>
-                </a:solidFill>
-                <a:latin typeface="Apple SD Gothic Neo"/>
+              <a:rPr sz="1600" b="0">
+                <a:solidFill>
+                  <a:srgbClr val="FFFFFF"/>
+                </a:solidFill>
+                <a:latin typeface="Menlo"/>
+              </a:rPr>
+              <a:t>"SessionStart": startup | clear | compact</a:t>
+            </a:r>
+          </a:p>
+          <a:p>
+            <a:pPr algn="l"/>
+            <a:r>
+              <a:rPr sz="1600" b="0">
+                <a:solidFill>
+                  <a:srgbClr val="CDBFF7"/>
+                </a:solidFill>
+                <a:latin typeface="Menlo"/>
+              </a:rPr>
+              <a:t>    → using-superpowers 스킬 규칙 자동 주입</a:t>
+            </a:r>
+          </a:p>
+          <a:p>
+            <a:pPr algn="l"/>
+            <a:r>
+              <a:rPr sz="1600" b="0">
+                <a:solidFill>
+                  <a:srgbClr val="FFFFFF"/>
+                </a:solidFill>
+                <a:latin typeface="Menlo"/>
               </a:rPr>
               <a:t/>
             </a:r>
@@ -14945,167 +15066,39 @@
           <a:p>
             <a:pPr algn="l"/>
             <a:r>
-              <a:rPr sz="2100" b="1">
-                <a:solidFill>
-                  <a:srgbClr val="1A1A1A"/>
-                </a:solidFill>
-                <a:latin typeface="Apple SD Gothic Neo"/>
-              </a:rPr>
-              <a:t>다른 모델(Codex)로 교차 검증</a:t>
-            </a:r>
-          </a:p>
-        </p:txBody>
-      </p:sp>
-      <p:sp>
-        <p:nvSpPr>
-          <p:cNvPr id="7" name="TextBox 6"/>
+              <a:rPr sz="1600" b="0">
+                <a:solidFill>
+                  <a:srgbClr val="7C83B0"/>
+                </a:solidFill>
+                <a:latin typeface="Menlo"/>
+              </a:rPr>
+              <a:t># 브레인스토밍 · 취조 · 계획 · TDD 규칙을</a:t>
+            </a:r>
+          </a:p>
+          <a:p>
+            <a:pPr algn="l"/>
+            <a:r>
+              <a:rPr sz="1600" b="0">
+                <a:solidFill>
+                  <a:srgbClr val="7C83B0"/>
+                </a:solidFill>
+                <a:latin typeface="Menlo"/>
+              </a:rPr>
+              <a:t># 세션이 열릴 때마다 자동으로 불러온다</a:t>
+            </a:r>
+          </a:p>
+        </p:txBody>
+      </p:sp>
+      <p:sp>
+        <p:nvSpPr>
+          <p:cNvPr id="6" name="TextBox 5"/>
           <p:cNvSpPr txBox="1"/>
           <p:nvPr/>
         </p:nvSpPr>
         <p:spPr>
           <a:xfrm>
-            <a:off x="822960" y="5120640"/>
-            <a:ext cx="10607040" cy="731520"/>
-          </a:xfrm>
-          <a:prstGeom prst="rect">
-            <a:avLst/>
-          </a:prstGeom>
-          <a:noFill/>
-        </p:spPr>
-        <p:txBody>
-          <a:bodyPr wrap="square" anchor="t">
-            <a:spAutoFit/>
-          </a:bodyPr>
-          <a:lstStyle/>
-          <a:p>
-            <a:pPr algn="ctr"/>
-            <a:r>
-              <a:rPr sz="2200" b="0" spc="-30">
-                <a:solidFill>
-                  <a:srgbClr val="6B7280"/>
-                </a:solidFill>
-                <a:latin typeface="Apple SD Gothic Neo"/>
-              </a:rPr>
-              <a:t>마지막에 Codex로 한 번 더 봐서 Claude가 놓친 것을 잡았다.</a:t>
-            </a:r>
-          </a:p>
-        </p:txBody>
-      </p:sp>
-    </p:spTree>
-  </p:cSld>
-  <p:clrMapOvr>
-    <a:masterClrMapping/>
-  </p:clrMapOvr>
-</p:sld>
-</file>
-
-<file path=ppt/slides/slide42.xml><?xml version="1.0" encoding="utf-8"?>
-<p:sld xmlns:a="http://schemas.openxmlformats.org/drawingml/2006/main" xmlns:p="http://schemas.openxmlformats.org/presentationml/2006/main" xmlns:r="http://schemas.openxmlformats.org/officeDocument/2006/relationships">
-  <p:cSld>
-    <p:bg>
-      <p:bgPr>
-        <a:solidFill>
-          <a:srgbClr val="FFFFFF"/>
-        </a:solidFill>
-        <a:effectLst/>
-      </p:bgPr>
-    </p:bg>
-    <p:spTree>
-      <p:nvGrpSpPr>
-        <p:cNvPr id="1" name=""/>
-        <p:cNvGrpSpPr/>
-        <p:nvPr/>
-      </p:nvGrpSpPr>
-      <p:grpSpPr/>
-      <p:sp>
-        <p:nvSpPr>
-          <p:cNvPr id="2" name="TextBox 1"/>
-          <p:cNvSpPr txBox="1"/>
-          <p:nvPr/>
-        </p:nvSpPr>
-        <p:spPr>
-          <a:xfrm>
-            <a:off x="749808" y="566928"/>
-            <a:ext cx="10881360" cy="1371600"/>
-          </a:xfrm>
-          <a:prstGeom prst="rect">
-            <a:avLst/>
-          </a:prstGeom>
-          <a:noFill/>
-        </p:spPr>
-        <p:txBody>
-          <a:bodyPr wrap="square" anchor="t">
-            <a:spAutoFit/>
-          </a:bodyPr>
-          <a:lstStyle/>
-          <a:p>
-            <a:pPr algn="l"/>
-            <a:r>
-              <a:rPr sz="4600" b="1" spc="-100">
-                <a:solidFill>
-                  <a:srgbClr val="1A1A1A"/>
-                </a:solidFill>
-                <a:latin typeface="Apple SD Gothic Neo"/>
-              </a:rPr>
-              <a:t>가장 큰 실수 — 발견</a:t>
-            </a:r>
-          </a:p>
-        </p:txBody>
-      </p:sp>
-      <p:sp>
-        <p:nvSpPr>
-          <p:cNvPr id="3" name="Rectangle 2"/>
-          <p:cNvSpPr/>
-          <p:nvPr/>
-        </p:nvSpPr>
-        <p:spPr>
-          <a:xfrm>
-            <a:off x="822960" y="1554480"/>
-            <a:ext cx="868680" cy="82296"/>
-          </a:xfrm>
-          <a:prstGeom prst="rect">
-            <a:avLst/>
-          </a:prstGeom>
-          <a:solidFill>
-            <a:srgbClr val="5B5BD6"/>
-          </a:solidFill>
-          <a:ln>
-            <a:noFill/>
-          </a:ln>
-          <a:effectLst/>
-        </p:spPr>
-        <p:style>
-          <a:lnRef idx="1">
-            <a:schemeClr val="accent1"/>
-          </a:lnRef>
-          <a:fillRef idx="3">
-            <a:schemeClr val="accent1"/>
-          </a:fillRef>
-          <a:effectRef idx="2">
-            <a:schemeClr val="accent1"/>
-          </a:effectRef>
-          <a:fontRef idx="minor">
-            <a:schemeClr val="lt1"/>
-          </a:fontRef>
-        </p:style>
-        <p:txBody>
-          <a:bodyPr rtlCol="0" anchor="ctr"/>
-          <a:lstStyle/>
-          <a:p>
-            <a:pPr algn="ctr"/>
-          </a:p>
-        </p:txBody>
-      </p:sp>
-      <p:sp>
-        <p:nvSpPr>
-          <p:cNvPr id="4" name="TextBox 3"/>
-          <p:cNvSpPr txBox="1"/>
-          <p:nvPr/>
-        </p:nvSpPr>
-        <p:spPr>
-          <a:xfrm>
-            <a:off x="822960" y="2651760"/>
-            <a:ext cx="10607040" cy="1554480"/>
+            <a:off x="822960" y="4754880"/>
+            <a:ext cx="10607040" cy="914400"/>
           </a:xfrm>
           <a:prstGeom prst="rect">
             <a:avLst/>
@@ -15120,770 +15113,25 @@
           <a:p>
             <a:pPr algn="ctr"/>
             <a:r>
-              <a:rPr sz="3300" b="1" spc="-60">
+              <a:rPr sz="2400" b="1" spc="-40">
                 <a:solidFill>
                   <a:srgbClr val="1A1A1A"/>
                 </a:solidFill>
                 <a:latin typeface="Apple SD Gothic Neo"/>
               </a:rPr>
-              <a:t>자동차 사고가 직원 '심사 목록'에
-끝까지 안 떴다.</a:t>
-            </a:r>
-          </a:p>
-        </p:txBody>
-      </p:sp>
-    </p:spTree>
-  </p:cSld>
-  <p:clrMapOvr>
-    <a:masterClrMapping/>
-  </p:clrMapOvr>
-</p:sld>
-</file>
-
-<file path=ppt/slides/slide43.xml><?xml version="1.0" encoding="utf-8"?>
-<p:sld xmlns:a="http://schemas.openxmlformats.org/drawingml/2006/main" xmlns:p="http://schemas.openxmlformats.org/presentationml/2006/main" xmlns:r="http://schemas.openxmlformats.org/officeDocument/2006/relationships">
-  <p:cSld>
-    <p:bg>
-      <p:bgPr>
-        <a:solidFill>
-          <a:srgbClr val="FFFFFF"/>
-        </a:solidFill>
-        <a:effectLst/>
-      </p:bgPr>
-    </p:bg>
-    <p:spTree>
-      <p:nvGrpSpPr>
-        <p:cNvPr id="1" name=""/>
-        <p:cNvGrpSpPr/>
-        <p:nvPr/>
-      </p:nvGrpSpPr>
-      <p:grpSpPr/>
-      <p:sp>
-        <p:nvSpPr>
-          <p:cNvPr id="2" name="TextBox 1"/>
-          <p:cNvSpPr txBox="1"/>
-          <p:nvPr/>
-        </p:nvSpPr>
-        <p:spPr>
-          <a:xfrm>
-            <a:off x="749808" y="566928"/>
-            <a:ext cx="10881360" cy="1371600"/>
-          </a:xfrm>
-          <a:prstGeom prst="rect">
-            <a:avLst/>
-          </a:prstGeom>
-          <a:noFill/>
-        </p:spPr>
-        <p:txBody>
-          <a:bodyPr wrap="square" anchor="t">
-            <a:spAutoFit/>
-          </a:bodyPr>
-          <a:lstStyle/>
-          <a:p>
-            <a:pPr algn="l"/>
-            <a:r>
-              <a:rPr sz="4600" b="1" spc="-100">
+              <a:t>매번 '이렇게 일해'라고 시키지 않아도,</a:t>
+            </a:r>
+          </a:p>
+          <a:p>
+            <a:pPr algn="ctr"/>
+            <a:r>
+              <a:rPr sz="2400" b="1" spc="-40">
                 <a:solidFill>
                   <a:srgbClr val="1A1A1A"/>
                 </a:solidFill>
                 <a:latin typeface="Apple SD Gothic Neo"/>
               </a:rPr>
-              <a:t>왜? — 설계대로였다</a:t>
-            </a:r>
-          </a:p>
-        </p:txBody>
-      </p:sp>
-      <p:sp>
-        <p:nvSpPr>
-          <p:cNvPr id="3" name="Rectangle 2"/>
-          <p:cNvSpPr/>
-          <p:nvPr/>
-        </p:nvSpPr>
-        <p:spPr>
-          <a:xfrm>
-            <a:off x="822960" y="1554480"/>
-            <a:ext cx="868680" cy="82296"/>
-          </a:xfrm>
-          <a:prstGeom prst="rect">
-            <a:avLst/>
-          </a:prstGeom>
-          <a:solidFill>
-            <a:srgbClr val="5B5BD6"/>
-          </a:solidFill>
-          <a:ln>
-            <a:noFill/>
-          </a:ln>
-          <a:effectLst/>
-        </p:spPr>
-        <p:style>
-          <a:lnRef idx="1">
-            <a:schemeClr val="accent1"/>
-          </a:lnRef>
-          <a:fillRef idx="3">
-            <a:schemeClr val="accent1"/>
-          </a:fillRef>
-          <a:effectRef idx="2">
-            <a:schemeClr val="accent1"/>
-          </a:effectRef>
-          <a:fontRef idx="minor">
-            <a:schemeClr val="lt1"/>
-          </a:fontRef>
-        </p:style>
-        <p:txBody>
-          <a:bodyPr rtlCol="0" anchor="ctr"/>
-          <a:lstStyle/>
-          <a:p>
-            <a:pPr algn="ctr"/>
-          </a:p>
-        </p:txBody>
-      </p:sp>
-      <p:sp>
-        <p:nvSpPr>
-          <p:cNvPr id="4" name="TextBox 3"/>
-          <p:cNvSpPr txBox="1"/>
-          <p:nvPr/>
-        </p:nvSpPr>
-        <p:spPr>
-          <a:xfrm>
-            <a:off x="822960" y="2651760"/>
-            <a:ext cx="10607040" cy="1554480"/>
-          </a:xfrm>
-          <a:prstGeom prst="rect">
-            <a:avLst/>
-          </a:prstGeom>
-          <a:noFill/>
-        </p:spPr>
-        <p:txBody>
-          <a:bodyPr wrap="square" anchor="ctr">
-            <a:spAutoFit/>
-          </a:bodyPr>
-          <a:lstStyle/>
-          <a:p>
-            <a:pPr algn="ctr"/>
-            <a:r>
-              <a:rPr sz="3000" b="1" spc="-60">
-                <a:solidFill>
-                  <a:srgbClr val="1A1A1A"/>
-                </a:solidFill>
-                <a:latin typeface="Apple SD Gothic Neo"/>
-              </a:rPr>
-              <a:t>유스케이스(UC09): 자동차 사고는
-'접수만', 심사 큐엔 안 들어감</a:t>
-            </a:r>
-          </a:p>
-        </p:txBody>
-      </p:sp>
-      <p:sp>
-        <p:nvSpPr>
-          <p:cNvPr id="5" name="TextBox 4"/>
-          <p:cNvSpPr txBox="1"/>
-          <p:nvPr/>
-        </p:nvSpPr>
-        <p:spPr>
-          <a:xfrm>
-            <a:off x="822960" y="4434840"/>
-            <a:ext cx="10607040" cy="914400"/>
-          </a:xfrm>
-          <a:prstGeom prst="rect">
-            <a:avLst/>
-          </a:prstGeom>
-          <a:noFill/>
-        </p:spPr>
-        <p:txBody>
-          <a:bodyPr wrap="square" anchor="t">
-            <a:spAutoFit/>
-          </a:bodyPr>
-          <a:lstStyle/>
-          <a:p>
-            <a:pPr algn="ctr"/>
-            <a:r>
-              <a:rPr sz="2200" b="0" spc="-30">
-                <a:solidFill>
-                  <a:srgbClr val="6B7280"/>
-                </a:solidFill>
-                <a:latin typeface="Apple SD Gothic Neo"/>
-              </a:rPr>
-              <a:t>버그가 아니라, 내가 그렇게 설계한 것</a:t>
-            </a:r>
-          </a:p>
-        </p:txBody>
-      </p:sp>
-    </p:spTree>
-  </p:cSld>
-  <p:clrMapOvr>
-    <a:masterClrMapping/>
-  </p:clrMapOvr>
-</p:sld>
-</file>
-
-<file path=ppt/slides/slide44.xml><?xml version="1.0" encoding="utf-8"?>
-<p:sld xmlns:a="http://schemas.openxmlformats.org/drawingml/2006/main" xmlns:p="http://schemas.openxmlformats.org/presentationml/2006/main" xmlns:r="http://schemas.openxmlformats.org/officeDocument/2006/relationships">
-  <p:cSld>
-    <p:bg>
-      <p:bgPr>
-        <a:solidFill>
-          <a:srgbClr val="FFFFFF"/>
-        </a:solidFill>
-        <a:effectLst/>
-      </p:bgPr>
-    </p:bg>
-    <p:spTree>
-      <p:nvGrpSpPr>
-        <p:cNvPr id="1" name=""/>
-        <p:cNvGrpSpPr/>
-        <p:nvPr/>
-      </p:nvGrpSpPr>
-      <p:grpSpPr/>
-      <p:sp>
-        <p:nvSpPr>
-          <p:cNvPr id="2" name="TextBox 1"/>
-          <p:cNvSpPr txBox="1"/>
-          <p:nvPr/>
-        </p:nvSpPr>
-        <p:spPr>
-          <a:xfrm>
-            <a:off x="749808" y="566928"/>
-            <a:ext cx="10881360" cy="1371600"/>
-          </a:xfrm>
-          <a:prstGeom prst="rect">
-            <a:avLst/>
-          </a:prstGeom>
-          <a:noFill/>
-        </p:spPr>
-        <p:txBody>
-          <a:bodyPr wrap="square" anchor="t">
-            <a:spAutoFit/>
-          </a:bodyPr>
-          <a:lstStyle/>
-          <a:p>
-            <a:pPr algn="l"/>
-            <a:r>
-              <a:rPr sz="4600" b="1" spc="-100">
-                <a:solidFill>
-                  <a:srgbClr val="1A1A1A"/>
-                </a:solidFill>
-                <a:latin typeface="Apple SD Gothic Neo"/>
-              </a:rPr>
-              <a:t>어떻게 데모를 살렸나</a:t>
-            </a:r>
-          </a:p>
-        </p:txBody>
-      </p:sp>
-      <p:sp>
-        <p:nvSpPr>
-          <p:cNvPr id="3" name="Rectangle 2"/>
-          <p:cNvSpPr/>
-          <p:nvPr/>
-        </p:nvSpPr>
-        <p:spPr>
-          <a:xfrm>
-            <a:off x="822960" y="1554480"/>
-            <a:ext cx="868680" cy="82296"/>
-          </a:xfrm>
-          <a:prstGeom prst="rect">
-            <a:avLst/>
-          </a:prstGeom>
-          <a:solidFill>
-            <a:srgbClr val="5B5BD6"/>
-          </a:solidFill>
-          <a:ln>
-            <a:noFill/>
-          </a:ln>
-          <a:effectLst/>
-        </p:spPr>
-        <p:style>
-          <a:lnRef idx="1">
-            <a:schemeClr val="accent1"/>
-          </a:lnRef>
-          <a:fillRef idx="3">
-            <a:schemeClr val="accent1"/>
-          </a:fillRef>
-          <a:effectRef idx="2">
-            <a:schemeClr val="accent1"/>
-          </a:effectRef>
-          <a:fontRef idx="minor">
-            <a:schemeClr val="lt1"/>
-          </a:fontRef>
-        </p:style>
-        <p:txBody>
-          <a:bodyPr rtlCol="0" anchor="ctr"/>
-          <a:lstStyle/>
-          <a:p>
-            <a:pPr algn="ctr"/>
-          </a:p>
-        </p:txBody>
-      </p:sp>
-      <p:sp>
-        <p:nvSpPr>
-          <p:cNvPr id="4" name="TextBox 3"/>
-          <p:cNvSpPr txBox="1"/>
-          <p:nvPr/>
-        </p:nvSpPr>
-        <p:spPr>
-          <a:xfrm>
-            <a:off x="822960" y="2651760"/>
-            <a:ext cx="10607040" cy="1554480"/>
-          </a:xfrm>
-          <a:prstGeom prst="rect">
-            <a:avLst/>
-          </a:prstGeom>
-          <a:noFill/>
-        </p:spPr>
-        <p:txBody>
-          <a:bodyPr wrap="square" anchor="ctr">
-            <a:spAutoFit/>
-          </a:bodyPr>
-          <a:lstStyle/>
-          <a:p>
-            <a:pPr algn="ctr"/>
-            <a:r>
-              <a:rPr sz="3000" b="1" spc="-60">
-                <a:solidFill>
-                  <a:srgbClr val="1A1A1A"/>
-                </a:solidFill>
-                <a:latin typeface="Apple SD Gothic Neo"/>
-              </a:rPr>
-              <a:t>동작하는 병원비 청구로 시연하고,
-자동차의 한계는 정직하게 설명했다.</a:t>
-            </a:r>
-          </a:p>
-        </p:txBody>
-      </p:sp>
-    </p:spTree>
-  </p:cSld>
-  <p:clrMapOvr>
-    <a:masterClrMapping/>
-  </p:clrMapOvr>
-</p:sld>
-</file>
-
-<file path=ppt/slides/slide45.xml><?xml version="1.0" encoding="utf-8"?>
-<p:sld xmlns:a="http://schemas.openxmlformats.org/drawingml/2006/main" xmlns:r="http://schemas.openxmlformats.org/officeDocument/2006/relationships" xmlns:p="http://schemas.openxmlformats.org/presentationml/2006/main">
-  <p:cSld>
-    <p:bg>
-      <p:bgPr>
-        <a:solidFill>
-          <a:srgbClr val="1F1D3D"/>
-        </a:solidFill>
-        <a:effectLst/>
-      </p:bgPr>
-    </p:bg>
-    <p:spTree>
-      <p:nvGrpSpPr>
-        <p:cNvPr id="1" name=""/>
-        <p:cNvGrpSpPr/>
-        <p:nvPr/>
-      </p:nvGrpSpPr>
-      <p:grpSpPr>
-        <a:xfrm>
-          <a:off x="0" y="0"/>
-          <a:ext cx="0" cy="0"/>
-          <a:chOff x="0" y="0"/>
-          <a:chExt cx="0" cy="0"/>
-        </a:xfrm>
-      </p:grpSpPr>
-      <p:sp>
-        <p:nvSpPr>
-          <p:cNvPr id="2" name="TextBox 1"/>
-          <p:cNvSpPr txBox="1"/>
-          <p:nvPr/>
-        </p:nvSpPr>
-        <p:spPr>
-          <a:xfrm>
-            <a:off x="868680" y="2514600"/>
-            <a:ext cx="10607040" cy="2011680"/>
-          </a:xfrm>
-          <a:prstGeom prst="rect">
-            <a:avLst/>
-          </a:prstGeom>
-          <a:noFill/>
-        </p:spPr>
-        <p:txBody>
-          <a:bodyPr wrap="square" anchor="t">
-            <a:spAutoFit/>
-          </a:bodyPr>
-          <a:lstStyle/>
-          <a:p>
-            <a:pPr algn="l"/>
-            <a:r>
-              <a:rPr sz="4800" b="1" spc="-100">
-                <a:solidFill>
-                  <a:srgbClr val="FFFFFF"/>
-                </a:solidFill>
-                <a:latin typeface="Apple SD Gothic Neo"/>
-              </a:rPr>
-              <a:t>설계한 그대로 구현했고,</a:t>
-            </a:r>
-          </a:p>
-          <a:p>
-            <a:pPr algn="l"/>
-            <a:r>
-              <a:rPr sz="4800" b="1" spc="-100">
-                <a:solidFill>
-                  <a:srgbClr val="FFFFFF"/>
-                </a:solidFill>
-                <a:latin typeface="Apple SD Gothic Neo"/>
-              </a:rPr>
-              <a:t>그 과정에서 AI를 통제했다.</a:t>
-            </a:r>
-          </a:p>
-        </p:txBody>
-      </p:sp>
-    </p:spTree>
-  </p:cSld>
-  <p:clrMapOvr>
-    <a:masterClrMapping/>
-  </p:clrMapOvr>
-</p:sld>
-</file>
-
-<file path=ppt/slides/slide46.xml><?xml version="1.0" encoding="utf-8"?>
-<p:sld xmlns:a="http://schemas.openxmlformats.org/drawingml/2006/main" xmlns:p="http://schemas.openxmlformats.org/presentationml/2006/main" xmlns:r="http://schemas.openxmlformats.org/officeDocument/2006/relationships">
-  <p:cSld>
-    <p:bg>
-      <p:bgPr>
-        <a:solidFill>
-          <a:srgbClr val="FFFFFF"/>
-        </a:solidFill>
-        <a:effectLst/>
-      </p:bgPr>
-    </p:bg>
-    <p:spTree>
-      <p:nvGrpSpPr>
-        <p:cNvPr id="1" name=""/>
-        <p:cNvGrpSpPr/>
-        <p:nvPr/>
-      </p:nvGrpSpPr>
-      <p:grpSpPr/>
-      <p:sp>
-        <p:nvSpPr>
-          <p:cNvPr id="2" name="TextBox 1"/>
-          <p:cNvSpPr txBox="1"/>
-          <p:nvPr/>
-        </p:nvSpPr>
-        <p:spPr>
-          <a:xfrm>
-            <a:off x="749808" y="457200"/>
-            <a:ext cx="10881360" cy="1188720"/>
-          </a:xfrm>
-          <a:prstGeom prst="rect">
-            <a:avLst/>
-          </a:prstGeom>
-          <a:noFill/>
-        </p:spPr>
-        <p:txBody>
-          <a:bodyPr wrap="square" anchor="t">
-            <a:spAutoFit/>
-          </a:bodyPr>
-          <a:lstStyle/>
-          <a:p>
-            <a:pPr algn="l"/>
-            <a:r>
-              <a:rPr sz="4400" b="1" spc="-100">
-                <a:solidFill>
-                  <a:srgbClr val="1A1A1A"/>
-                </a:solidFill>
-                <a:latin typeface="Apple SD Gothic Neo"/>
-              </a:rPr>
-              <a:t>AI가 선을 넘다</a:t>
-            </a:r>
-          </a:p>
-        </p:txBody>
-      </p:sp>
-      <p:sp>
-        <p:nvSpPr>
-          <p:cNvPr id="3" name="Rectangle 2"/>
-          <p:cNvSpPr/>
-          <p:nvPr/>
-        </p:nvSpPr>
-        <p:spPr>
-          <a:xfrm>
-            <a:off x="822960" y="1417320"/>
-            <a:ext cx="868680" cy="82296"/>
-          </a:xfrm>
-          <a:prstGeom prst="rect">
-            <a:avLst/>
-          </a:prstGeom>
-          <a:solidFill>
-            <a:srgbClr val="5B5BD6"/>
-          </a:solidFill>
-          <a:ln>
-            <a:noFill/>
-          </a:ln>
-          <a:effectLst/>
-        </p:spPr>
-        <p:style>
-          <a:lnRef idx="1">
-            <a:schemeClr val="accent1"/>
-          </a:lnRef>
-          <a:fillRef idx="3">
-            <a:schemeClr val="accent1"/>
-          </a:fillRef>
-          <a:effectRef idx="2">
-            <a:schemeClr val="accent1"/>
-          </a:effectRef>
-          <a:fontRef idx="minor">
-            <a:schemeClr val="lt1"/>
-          </a:fontRef>
-        </p:style>
-        <p:txBody>
-          <a:bodyPr rtlCol="0" anchor="ctr"/>
-          <a:lstStyle/>
-          <a:p>
-            <a:pPr algn="ctr"/>
-          </a:p>
-        </p:txBody>
-      </p:sp>
-      <p:sp>
-        <p:nvSpPr>
-          <p:cNvPr id="4" name="Rounded Rectangle 3"/>
-          <p:cNvSpPr/>
-          <p:nvPr/>
-        </p:nvSpPr>
-        <p:spPr>
-          <a:xfrm>
-            <a:off x="777240" y="2651760"/>
-            <a:ext cx="4800600" cy="2011680"/>
-          </a:xfrm>
-          <a:prstGeom prst="roundRect">
-            <a:avLst>
-              <a:gd name="adj" fmla="val 12000"/>
-            </a:avLst>
-          </a:prstGeom>
-          <a:solidFill>
-            <a:srgbClr val="F4F4F6"/>
-          </a:solidFill>
-          <a:ln w="16510">
-            <a:solidFill>
-              <a:srgbClr val="E6E6E6"/>
-            </a:solidFill>
-          </a:ln>
-          <a:effectLst/>
-        </p:spPr>
-        <p:style>
-          <a:lnRef idx="1">
-            <a:schemeClr val="accent1"/>
-          </a:lnRef>
-          <a:fillRef idx="3">
-            <a:schemeClr val="accent1"/>
-          </a:fillRef>
-          <a:effectRef idx="2">
-            <a:schemeClr val="accent1"/>
-          </a:effectRef>
-          <a:fontRef idx="minor">
-            <a:schemeClr val="lt1"/>
-          </a:fontRef>
-        </p:style>
-        <p:txBody>
-          <a:bodyPr rtlCol="0" anchor="ctr" tIns="76200" bIns="76200" lIns="203200" rIns="177800" wrap="square"/>
-          <a:lstStyle/>
-          <a:p>
-            <a:pPr algn="l"/>
-            <a:r>
-              <a:rPr sz="1600" b="1">
-                <a:solidFill>
-                  <a:srgbClr val="6B7280"/>
-                </a:solidFill>
-                <a:latin typeface="Apple SD Gothic Neo"/>
-              </a:rPr>
-              <a:t>AI가 한 것</a:t>
-            </a:r>
-          </a:p>
-          <a:p>
-            <a:pPr algn="l"/>
-            <a:r>
-              <a:rPr sz="600" b="0">
-                <a:solidFill>
-                  <a:srgbClr val="6B7280"/>
-                </a:solidFill>
-                <a:latin typeface="Apple SD Gothic Neo"/>
-              </a:rPr>
-              <a:t/>
-            </a:r>
-          </a:p>
-          <a:p>
-            <a:pPr algn="l"/>
-            <a:r>
-              <a:rPr sz="1900" b="1">
-                <a:solidFill>
-                  <a:srgbClr val="1A1A1A"/>
-                </a:solidFill>
-                <a:latin typeface="Apple SD Gothic Neo"/>
-              </a:rPr>
-              <a:t>git add를 넓게 잡아 frontend 전체를</a:t>
-            </a:r>
-          </a:p>
-          <a:p>
-            <a:pPr algn="l"/>
-            <a:r>
-              <a:rPr sz="1900" b="1">
-                <a:solidFill>
-                  <a:srgbClr val="1A1A1A"/>
-                </a:solidFill>
-                <a:latin typeface="Apple SD Gothic Neo"/>
-              </a:rPr>
-              <a:t>엉뚱한 PR에 섞어 커밋했다</a:t>
-            </a:r>
-          </a:p>
-        </p:txBody>
-      </p:sp>
-      <p:sp>
-        <p:nvSpPr>
-          <p:cNvPr id="5" name="TextBox 4"/>
-          <p:cNvSpPr txBox="1"/>
-          <p:nvPr/>
-        </p:nvSpPr>
-        <p:spPr>
-          <a:xfrm>
-            <a:off x="5733288" y="3383280"/>
-            <a:ext cx="731520" cy="640080"/>
-          </a:xfrm>
-          <a:prstGeom prst="rect">
-            <a:avLst/>
-          </a:prstGeom>
-          <a:noFill/>
-        </p:spPr>
-        <p:txBody>
-          <a:bodyPr wrap="square" anchor="ctr">
-            <a:spAutoFit/>
-          </a:bodyPr>
-          <a:lstStyle/>
-          <a:p>
-            <a:pPr algn="ctr"/>
-            <a:r>
-              <a:rPr sz="3400" b="1">
-                <a:solidFill>
-                  <a:srgbClr val="5B5BD6"/>
-                </a:solidFill>
-                <a:latin typeface="Apple SD Gothic Neo"/>
-              </a:rPr>
-              <a:t>→</a:t>
-            </a:r>
-          </a:p>
-        </p:txBody>
-      </p:sp>
-      <p:sp>
-        <p:nvSpPr>
-          <p:cNvPr id="6" name="Rounded Rectangle 5"/>
-          <p:cNvSpPr/>
-          <p:nvPr/>
-        </p:nvSpPr>
-        <p:spPr>
-          <a:xfrm>
-            <a:off x="6629400" y="2651760"/>
-            <a:ext cx="4800600" cy="2011680"/>
-          </a:xfrm>
-          <a:prstGeom prst="roundRect">
-            <a:avLst>
-              <a:gd name="adj" fmla="val 12000"/>
-            </a:avLst>
-          </a:prstGeom>
-          <a:solidFill>
-            <a:srgbClr val="ECEBFB"/>
-          </a:solidFill>
-          <a:ln>
-            <a:noFill/>
-          </a:ln>
-          <a:effectLst/>
-        </p:spPr>
-        <p:style>
-          <a:lnRef idx="1">
-            <a:schemeClr val="accent1"/>
-          </a:lnRef>
-          <a:fillRef idx="3">
-            <a:schemeClr val="accent1"/>
-          </a:fillRef>
-          <a:effectRef idx="2">
-            <a:schemeClr val="accent1"/>
-          </a:effectRef>
-          <a:fontRef idx="minor">
-            <a:schemeClr val="lt1"/>
-          </a:fontRef>
-        </p:style>
-        <p:txBody>
-          <a:bodyPr rtlCol="0" anchor="ctr" tIns="76200" bIns="76200" lIns="203200" rIns="177800" wrap="square"/>
-          <a:lstStyle/>
-          <a:p>
-            <a:pPr algn="l"/>
-            <a:r>
-              <a:rPr sz="1600" b="1">
-                <a:solidFill>
-                  <a:srgbClr val="5B5BD6"/>
-                </a:solidFill>
-                <a:latin typeface="Apple SD Gothic Neo"/>
-              </a:rPr>
-              <a:t>내가 통제</a:t>
-            </a:r>
-          </a:p>
-          <a:p>
-            <a:pPr algn="l"/>
-            <a:r>
-              <a:rPr sz="600" b="0">
-                <a:solidFill>
-                  <a:srgbClr val="6B7280"/>
-                </a:solidFill>
-                <a:latin typeface="Apple SD Gothic Neo"/>
-              </a:rPr>
-              <a:t/>
-            </a:r>
-          </a:p>
-          <a:p>
-            <a:pPr algn="l"/>
-            <a:r>
-              <a:rPr sz="1900" b="1">
-                <a:solidFill>
-                  <a:srgbClr val="1A1A1A"/>
-                </a:solidFill>
-                <a:latin typeface="Apple SD Gothic Neo"/>
-              </a:rPr>
-              <a:t>점검으로 발견 + '커밋은 사용자',</a:t>
-            </a:r>
-          </a:p>
-          <a:p>
-            <a:pPr algn="l"/>
-            <a:r>
-              <a:rPr sz="1900" b="1">
-                <a:solidFill>
-                  <a:srgbClr val="1A1A1A"/>
-                </a:solidFill>
-                <a:latin typeface="Apple SD Gothic Neo"/>
-              </a:rPr>
-              <a:t>요청 시에만' 규칙으로 경계 관리</a:t>
-            </a:r>
-          </a:p>
-        </p:txBody>
-      </p:sp>
-      <p:sp>
-        <p:nvSpPr>
-          <p:cNvPr id="7" name="TextBox 6"/>
-          <p:cNvSpPr txBox="1"/>
-          <p:nvPr/>
-        </p:nvSpPr>
-        <p:spPr>
-          <a:xfrm>
-            <a:off x="822960" y="5029200"/>
-            <a:ext cx="10607040" cy="731520"/>
-          </a:xfrm>
-          <a:prstGeom prst="rect">
-            <a:avLst/>
-          </a:prstGeom>
-          <a:noFill/>
-        </p:spPr>
-        <p:txBody>
-          <a:bodyPr wrap="square" anchor="t">
-            <a:spAutoFit/>
-          </a:bodyPr>
-          <a:lstStyle/>
-          <a:p>
-            <a:pPr algn="ctr"/>
-            <a:r>
-              <a:rPr sz="2200" b="0" spc="-30">
-                <a:solidFill>
-                  <a:srgbClr val="6B7280"/>
-                </a:solidFill>
-                <a:latin typeface="Apple SD Gothic Neo"/>
-              </a:rPr>
-              <a:t>AI는 시키지 않은 범위까지 건드린다 — 권한 경계를 사람이 정해야 한다.</a:t>
+              <a:t>세션이 열릴 때마다 일하는 방식이 강제됐다.</a:t>
             </a:r>
           </a:p>
         </p:txBody>
